--- a/examples/gallery/pattern_gallery.pptx
+++ b/examples/gallery/pattern_gallery.pptx
@@ -3919,7 +3919,7 @@
             <a:avLst/>
           </a:prstGeom>
           <a:solidFill>
-            <a:srgbClr val="16324F"/>
+            <a:srgbClr val="182C43"/>
           </a:solidFill>
           <a:ln>
             <a:noFill/>
@@ -3981,8 +3981,8 @@
         </p:nvSpPr>
         <p:spPr>
           <a:xfrm>
-            <a:off x="8942832" y="621792"/>
-            <a:ext cx="2395728" cy="274320"/>
+            <a:off x="822960" y="1572768"/>
+            <a:ext cx="7360920" cy="1243584"/>
           </a:xfrm>
           <a:prstGeom prst="rect">
             <a:avLst/>
@@ -3995,15 +3995,200 @@
           </a:bodyPr>
           <a:lstStyle/>
           <a:p>
-            <a:pPr algn="r">
+            <a:pPr algn="l">
+              <a:lnSpc>
+                <a:spcPct val="108000"/>
+              </a:lnSpc>
+            </a:pPr>
+            <a:r>
+              <a:rPr sz="4200" b="1" lang="ja-JP">
+                <a:solidFill>
+                  <a:srgbClr val="FFFFFC"/>
+                </a:solidFill>
+                <a:latin typeface="Yu Gothic"/>
+                <a:ea typeface="Yu Gothic"/>
+                <a:cs typeface="Yu Gothic"/>
+              </a:rPr>
+              <a:t>社内スライド</a:t>
+            </a:r>
+          </a:p>
+          <a:p>
+            <a:pPr algn="l">
+              <a:lnSpc>
+                <a:spcPct val="108000"/>
+              </a:lnSpc>
+            </a:pPr>
+            <a:r>
+              <a:rPr sz="4200" b="1" lang="ja-JP">
+                <a:solidFill>
+                  <a:srgbClr val="FFFFFC"/>
+                </a:solidFill>
+                <a:latin typeface="Yu Gothic"/>
+                <a:ea typeface="Yu Gothic"/>
+                <a:cs typeface="Yu Gothic"/>
+              </a:rPr>
+              <a:t>パターンライブラリ</a:t>
+            </a:r>
+          </a:p>
+        </p:txBody>
+      </p:sp>
+      <p:sp>
+        <p:nvSpPr>
+          <p:cNvPr id="5" name="TextBox 4"/>
+          <p:cNvSpPr txBox="1"/>
+          <p:nvPr/>
+        </p:nvSpPr>
+        <p:spPr>
+          <a:xfrm>
+            <a:off x="859536" y="3163824"/>
+            <a:ext cx="7315200" cy="731520"/>
+          </a:xfrm>
+          <a:prstGeom prst="rect">
+            <a:avLst/>
+          </a:prstGeom>
+          <a:noFill/>
+        </p:spPr>
+        <p:txBody>
+          <a:bodyPr wrap="square" anchor="t" lIns="0" rIns="0" tIns="0" bIns="0">
+            <a:spAutoFit/>
+          </a:bodyPr>
+          <a:lstStyle/>
+          <a:p>
+            <a:pPr algn="l">
+              <a:lnSpc>
+                <a:spcPct val="120000"/>
+              </a:lnSpc>
+            </a:pPr>
+            <a:r>
+              <a:rPr sz="1750" b="0" lang="ja-JP">
+                <a:solidFill>
+                  <a:srgbClr val="DFEBE8"/>
+                </a:solidFill>
+                <a:latin typeface="Yu Gothic"/>
+                <a:ea typeface="Yu Gothic"/>
+                <a:cs typeface="Yu Gothic"/>
+              </a:rPr>
+              <a:t>意思決定からシステム構成まで、21の標準レイアウトを検証</a:t>
+            </a:r>
+          </a:p>
+        </p:txBody>
+      </p:sp>
+      <p:sp>
+        <p:nvSpPr>
+          <p:cNvPr id="6" name="Rectangle 5"/>
+          <p:cNvSpPr/>
+          <p:nvPr/>
+        </p:nvSpPr>
+        <p:spPr>
+          <a:xfrm>
+            <a:off x="8641080" y="1536192"/>
+            <a:ext cx="10972" cy="3186684"/>
+          </a:xfrm>
+          <a:prstGeom prst="rect">
+            <a:avLst/>
+          </a:prstGeom>
+          <a:solidFill>
+            <a:srgbClr val="DFEBE8"/>
+          </a:solidFill>
+          <a:ln>
+            <a:noFill/>
+          </a:ln>
+          <a:effectLst/>
+        </p:spPr>
+        <p:style>
+          <a:lnRef idx="1">
+            <a:schemeClr val="accent1"/>
+          </a:lnRef>
+          <a:fillRef idx="3">
+            <a:schemeClr val="accent1"/>
+          </a:fillRef>
+          <a:effectRef idx="2">
+            <a:schemeClr val="accent1"/>
+          </a:effectRef>
+          <a:fontRef idx="minor">
+            <a:schemeClr val="lt1"/>
+          </a:fontRef>
+        </p:style>
+        <p:txBody>
+          <a:bodyPr rtlCol="0" anchor="ctr"/>
+          <a:lstStyle/>
+          <a:p>
+            <a:pPr algn="ctr"/>
+          </a:p>
+        </p:txBody>
+      </p:sp>
+      <p:sp>
+        <p:nvSpPr>
+          <p:cNvPr id="7" name="TextBox 6"/>
+          <p:cNvSpPr txBox="1"/>
+          <p:nvPr/>
+        </p:nvSpPr>
+        <p:spPr>
+          <a:xfrm>
+            <a:off x="8979408" y="1664208"/>
+            <a:ext cx="2057400" cy="228600"/>
+          </a:xfrm>
+          <a:prstGeom prst="rect">
+            <a:avLst/>
+          </a:prstGeom>
+          <a:noFill/>
+        </p:spPr>
+        <p:txBody>
+          <a:bodyPr wrap="none" anchor="t" lIns="0" rIns="0" tIns="0" bIns="0">
+            <a:spAutoFit/>
+          </a:bodyPr>
+          <a:lstStyle/>
+          <a:p>
+            <a:pPr algn="l">
               <a:lnSpc>
                 <a:spcPct val="130000"/>
               </a:lnSpc>
             </a:pPr>
             <a:r>
-              <a:rPr sz="1000" b="0" lang="ja-JP">
-                <a:solidFill>
-                  <a:srgbClr val="BFD7D2"/>
+              <a:rPr sz="880" b="1" lang="ja-JP">
+                <a:solidFill>
+                  <a:srgbClr val="DFEBE8"/>
+                </a:solidFill>
+                <a:latin typeface="Yu Gothic"/>
+                <a:ea typeface="Yu Gothic"/>
+                <a:cs typeface="Yu Gothic"/>
+              </a:rPr>
+              <a:t>DATE</a:t>
+            </a:r>
+          </a:p>
+        </p:txBody>
+      </p:sp>
+      <p:sp>
+        <p:nvSpPr>
+          <p:cNvPr id="8" name="TextBox 7"/>
+          <p:cNvSpPr txBox="1"/>
+          <p:nvPr/>
+        </p:nvSpPr>
+        <p:spPr>
+          <a:xfrm>
+            <a:off x="8979408" y="1975104"/>
+            <a:ext cx="2148840" cy="274320"/>
+          </a:xfrm>
+          <a:prstGeom prst="rect">
+            <a:avLst/>
+          </a:prstGeom>
+          <a:noFill/>
+        </p:spPr>
+        <p:txBody>
+          <a:bodyPr wrap="none" anchor="t" lIns="0" rIns="0" tIns="0" bIns="0">
+            <a:spAutoFit/>
+          </a:bodyPr>
+          <a:lstStyle/>
+          <a:p>
+            <a:pPr algn="l">
+              <a:lnSpc>
+                <a:spcPct val="108000"/>
+              </a:lnSpc>
+            </a:pPr>
+            <a:r>
+              <a:rPr sz="1350" b="1" lang="ja-JP">
+                <a:solidFill>
+                  <a:srgbClr val="FFFFFC"/>
                 </a:solidFill>
                 <a:latin typeface="Yu Gothic"/>
                 <a:ea typeface="Yu Gothic"/>
@@ -4016,14 +4201,14 @@
       </p:sp>
       <p:sp>
         <p:nvSpPr>
-          <p:cNvPr id="5" name="TextBox 4"/>
-          <p:cNvSpPr txBox="1"/>
-          <p:nvPr/>
-        </p:nvSpPr>
-        <p:spPr>
-          <a:xfrm>
-            <a:off x="822960" y="1572768"/>
-            <a:ext cx="10469880" cy="1243584"/>
+          <p:cNvPr id="9" name="TextBox 8"/>
+          <p:cNvSpPr txBox="1"/>
+          <p:nvPr/>
+        </p:nvSpPr>
+        <p:spPr>
+          <a:xfrm>
+            <a:off x="8979408" y="2752344"/>
+            <a:ext cx="2057400" cy="228600"/>
           </a:xfrm>
           <a:prstGeom prst="rect">
             <a:avLst/>
@@ -4031,26 +4216,67 @@
           <a:noFill/>
         </p:spPr>
         <p:txBody>
-          <a:bodyPr wrap="square" anchor="t" lIns="0" rIns="0" tIns="0" bIns="0">
+          <a:bodyPr wrap="none" anchor="t" lIns="0" rIns="0" tIns="0" bIns="0">
             <a:spAutoFit/>
           </a:bodyPr>
           <a:lstStyle/>
           <a:p>
             <a:pPr algn="l">
               <a:lnSpc>
+                <a:spcPct val="130000"/>
+              </a:lnSpc>
+            </a:pPr>
+            <a:r>
+              <a:rPr sz="880" b="1" lang="ja-JP">
+                <a:solidFill>
+                  <a:srgbClr val="DFEBE8"/>
+                </a:solidFill>
+                <a:latin typeface="Yu Gothic"/>
+                <a:ea typeface="Yu Gothic"/>
+                <a:cs typeface="Yu Gothic"/>
+              </a:rPr>
+              <a:t>ORGANIZATION</a:t>
+            </a:r>
+          </a:p>
+        </p:txBody>
+      </p:sp>
+      <p:sp>
+        <p:nvSpPr>
+          <p:cNvPr id="10" name="TextBox 9"/>
+          <p:cNvSpPr txBox="1"/>
+          <p:nvPr/>
+        </p:nvSpPr>
+        <p:spPr>
+          <a:xfrm>
+            <a:off x="8979408" y="3063239"/>
+            <a:ext cx="2148840" cy="406908"/>
+          </a:xfrm>
+          <a:prstGeom prst="rect">
+            <a:avLst/>
+          </a:prstGeom>
+          <a:noFill/>
+        </p:spPr>
+        <p:txBody>
+          <a:bodyPr wrap="none" anchor="t" lIns="0" rIns="0" tIns="0" bIns="0">
+            <a:spAutoFit/>
+          </a:bodyPr>
+          <a:lstStyle/>
+          <a:p>
+            <a:pPr algn="l">
+              <a:lnSpc>
                 <a:spcPct val="108000"/>
               </a:lnSpc>
             </a:pPr>
             <a:r>
-              <a:rPr sz="4200" b="1" lang="ja-JP">
-                <a:solidFill>
-                  <a:srgbClr val="FFFDF7"/>
-                </a:solidFill>
-                <a:latin typeface="Yu Gothic"/>
-                <a:ea typeface="Yu Gothic"/>
-                <a:cs typeface="Yu Gothic"/>
-              </a:rPr>
-              <a:t>社内スライド</a:t>
+              <a:rPr sz="1350" b="1" lang="ja-JP">
+                <a:solidFill>
+                  <a:srgbClr val="FFFFFC"/>
+                </a:solidFill>
+                <a:latin typeface="Yu Gothic"/>
+                <a:ea typeface="Yu Gothic"/>
+                <a:cs typeface="Yu Gothic"/>
+              </a:rPr>
+              <a:t>業務企画本部</a:t>
             </a:r>
           </a:p>
           <a:p>
@@ -4060,29 +4286,29 @@
               </a:lnSpc>
             </a:pPr>
             <a:r>
-              <a:rPr sz="4200" b="1" lang="ja-JP">
-                <a:solidFill>
-                  <a:srgbClr val="FFFDF7"/>
-                </a:solidFill>
-                <a:latin typeface="Yu Gothic"/>
-                <a:ea typeface="Yu Gothic"/>
-                <a:cs typeface="Yu Gothic"/>
-              </a:rPr>
-              <a:t>パターンライブラリ</a:t>
-            </a:r>
-          </a:p>
-        </p:txBody>
-      </p:sp>
-      <p:sp>
-        <p:nvSpPr>
-          <p:cNvPr id="6" name="TextBox 5"/>
-          <p:cNvSpPr txBox="1"/>
-          <p:nvPr/>
-        </p:nvSpPr>
-        <p:spPr>
-          <a:xfrm>
-            <a:off x="859536" y="3163824"/>
-            <a:ext cx="10378440" cy="731520"/>
+              <a:rPr sz="1350" b="1" lang="ja-JP">
+                <a:solidFill>
+                  <a:srgbClr val="FFFFFC"/>
+                </a:solidFill>
+                <a:latin typeface="Yu Gothic"/>
+                <a:ea typeface="Yu Gothic"/>
+                <a:cs typeface="Yu Gothic"/>
+              </a:rPr>
+              <a:t>業務改善推進部</a:t>
+            </a:r>
+          </a:p>
+        </p:txBody>
+      </p:sp>
+      <p:sp>
+        <p:nvSpPr>
+          <p:cNvPr id="11" name="TextBox 10"/>
+          <p:cNvSpPr txBox="1"/>
+          <p:nvPr/>
+        </p:nvSpPr>
+        <p:spPr>
+          <a:xfrm>
+            <a:off x="8979408" y="3973068"/>
+            <a:ext cx="2057400" cy="228600"/>
           </a:xfrm>
           <a:prstGeom prst="rect">
             <a:avLst/>
@@ -4090,40 +4316,40 @@
           <a:noFill/>
         </p:spPr>
         <p:txBody>
-          <a:bodyPr wrap="square" anchor="t" lIns="0" rIns="0" tIns="0" bIns="0">
+          <a:bodyPr wrap="none" anchor="t" lIns="0" rIns="0" tIns="0" bIns="0">
             <a:spAutoFit/>
           </a:bodyPr>
           <a:lstStyle/>
           <a:p>
             <a:pPr algn="l">
               <a:lnSpc>
-                <a:spcPct val="120000"/>
-              </a:lnSpc>
-            </a:pPr>
-            <a:r>
-              <a:rPr sz="1750" b="0" lang="ja-JP">
-                <a:solidFill>
-                  <a:srgbClr val="BFD7D2"/>
-                </a:solidFill>
-                <a:latin typeface="Yu Gothic"/>
-                <a:ea typeface="Yu Gothic"/>
-                <a:cs typeface="Yu Gothic"/>
-              </a:rPr>
-              <a:t>意思決定からシステム構成まで、21の標準レイアウトを検証</a:t>
-            </a:r>
-          </a:p>
-        </p:txBody>
-      </p:sp>
-      <p:sp>
-        <p:nvSpPr>
-          <p:cNvPr id="7" name="TextBox 6"/>
-          <p:cNvSpPr txBox="1"/>
-          <p:nvPr/>
-        </p:nvSpPr>
-        <p:spPr>
-          <a:xfrm>
-            <a:off x="822960" y="5943600"/>
-            <a:ext cx="4389120" cy="274320"/>
+                <a:spcPct val="130000"/>
+              </a:lnSpc>
+            </a:pPr>
+            <a:r>
+              <a:rPr sz="880" b="1" lang="ja-JP">
+                <a:solidFill>
+                  <a:srgbClr val="DFEBE8"/>
+                </a:solidFill>
+                <a:latin typeface="Yu Gothic"/>
+                <a:ea typeface="Yu Gothic"/>
+                <a:cs typeface="Yu Gothic"/>
+              </a:rPr>
+              <a:t>AUTHOR</a:t>
+            </a:r>
+          </a:p>
+        </p:txBody>
+      </p:sp>
+      <p:sp>
+        <p:nvSpPr>
+          <p:cNvPr id="12" name="TextBox 11"/>
+          <p:cNvSpPr txBox="1"/>
+          <p:nvPr/>
+        </p:nvSpPr>
+        <p:spPr>
+          <a:xfrm>
+            <a:off x="8979408" y="4283964"/>
+            <a:ext cx="2148840" cy="274320"/>
           </a:xfrm>
           <a:prstGeom prst="rect">
             <a:avLst/>
@@ -4131,20 +4357,20 @@
           <a:noFill/>
         </p:spPr>
         <p:txBody>
-          <a:bodyPr wrap="square" anchor="t" lIns="0" rIns="0" tIns="0" bIns="0">
+          <a:bodyPr wrap="none" anchor="t" lIns="0" rIns="0" tIns="0" bIns="0">
             <a:spAutoFit/>
           </a:bodyPr>
           <a:lstStyle/>
           <a:p>
             <a:pPr algn="l">
               <a:lnSpc>
-                <a:spcPct val="130000"/>
-              </a:lnSpc>
-            </a:pPr>
-            <a:r>
-              <a:rPr sz="1050" b="1" lang="ja-JP">
-                <a:solidFill>
-                  <a:srgbClr val="FFFDF7"/>
+                <a:spcPct val="108000"/>
+              </a:lnSpc>
+            </a:pPr>
+            <a:r>
+              <a:rPr sz="1350" b="1" lang="ja-JP">
+                <a:solidFill>
+                  <a:srgbClr val="FFFFFC"/>
                 </a:solidFill>
                 <a:latin typeface="Yu Gothic"/>
                 <a:ea typeface="Yu Gothic"/>
@@ -4346,7 +4572,7 @@
             <a:avLst/>
           </a:prstGeom>
           <a:solidFill>
-            <a:srgbClr val="C9D4D1"/>
+            <a:srgbClr val="D1CFC8"/>
           </a:solidFill>
           <a:ln>
             <a:noFill/>
@@ -4405,7 +4631,7 @@
             <a:r>
               <a:rPr sz="819" b="0" lang="ja-JP">
                 <a:solidFill>
-                  <a:srgbClr val="667478"/>
+                  <a:srgbClr val="666E70"/>
                 </a:solidFill>
                 <a:latin typeface="Yu Gothic"/>
                 <a:ea typeface="Yu Gothic"/>
@@ -4446,7 +4672,7 @@
             <a:r>
               <a:rPr sz="1100" b="1" lang="ja-JP">
                 <a:solidFill>
-                  <a:srgbClr val="16324F"/>
+                  <a:srgbClr val="182C43"/>
                 </a:solidFill>
                 <a:latin typeface="Yu Gothic"/>
                 <a:ea typeface="Yu Gothic"/>
@@ -4487,7 +4713,7 @@
             <a:r>
               <a:rPr sz="819" b="0" lang="ja-JP">
                 <a:solidFill>
-                  <a:srgbClr val="667478"/>
+                  <a:srgbClr val="666E70"/>
                 </a:solidFill>
                 <a:latin typeface="Yu Gothic"/>
                 <a:ea typeface="Yu Gothic"/>
@@ -5946,7 +6172,7 @@
             <a:avLst/>
           </a:prstGeom>
           <a:solidFill>
-            <a:srgbClr val="C9D4D1"/>
+            <a:srgbClr val="D1CFC8"/>
           </a:solidFill>
           <a:ln>
             <a:noFill/>
@@ -6005,7 +6231,7 @@
             <a:r>
               <a:rPr sz="819" b="0" lang="ja-JP">
                 <a:solidFill>
-                  <a:srgbClr val="667478"/>
+                  <a:srgbClr val="666E70"/>
                 </a:solidFill>
                 <a:latin typeface="Yu Gothic"/>
                 <a:ea typeface="Yu Gothic"/>
@@ -6046,7 +6272,7 @@
             <a:r>
               <a:rPr sz="1100" b="1" lang="ja-JP">
                 <a:solidFill>
-                  <a:srgbClr val="16324F"/>
+                  <a:srgbClr val="182C43"/>
                 </a:solidFill>
                 <a:latin typeface="Yu Gothic"/>
                 <a:ea typeface="Yu Gothic"/>
@@ -6087,7 +6313,7 @@
             <a:r>
               <a:rPr sz="819" b="0" lang="ja-JP">
                 <a:solidFill>
-                  <a:srgbClr val="667478"/>
+                  <a:srgbClr val="666E70"/>
                 </a:solidFill>
                 <a:latin typeface="Yu Gothic"/>
                 <a:ea typeface="Yu Gothic"/>
@@ -7563,7 +7789,7 @@
             <a:avLst/>
           </a:prstGeom>
           <a:solidFill>
-            <a:srgbClr val="C9D4D1"/>
+            <a:srgbClr val="D1CFC8"/>
           </a:solidFill>
           <a:ln>
             <a:noFill/>
@@ -7622,7 +7848,7 @@
             <a:r>
               <a:rPr sz="819" b="0" lang="ja-JP">
                 <a:solidFill>
-                  <a:srgbClr val="667478"/>
+                  <a:srgbClr val="666E70"/>
                 </a:solidFill>
                 <a:latin typeface="Yu Gothic"/>
                 <a:ea typeface="Yu Gothic"/>
@@ -7663,7 +7889,7 @@
             <a:r>
               <a:rPr sz="1100" b="1" lang="ja-JP">
                 <a:solidFill>
-                  <a:srgbClr val="16324F"/>
+                  <a:srgbClr val="182C43"/>
                 </a:solidFill>
                 <a:latin typeface="Yu Gothic"/>
                 <a:ea typeface="Yu Gothic"/>
@@ -7704,7 +7930,7 @@
             <a:r>
               <a:rPr sz="819" b="0" lang="ja-JP">
                 <a:solidFill>
-                  <a:srgbClr val="667478"/>
+                  <a:srgbClr val="666E70"/>
                 </a:solidFill>
                 <a:latin typeface="Yu Gothic"/>
                 <a:ea typeface="Yu Gothic"/>
@@ -11184,7 +11410,7 @@
             <a:avLst/>
           </a:prstGeom>
           <a:solidFill>
-            <a:srgbClr val="C9D4D1"/>
+            <a:srgbClr val="D1CFC8"/>
           </a:solidFill>
           <a:ln>
             <a:noFill/>
@@ -11243,7 +11469,7 @@
             <a:r>
               <a:rPr sz="819" b="0" lang="ja-JP">
                 <a:solidFill>
-                  <a:srgbClr val="667478"/>
+                  <a:srgbClr val="666E70"/>
                 </a:solidFill>
                 <a:latin typeface="Yu Gothic"/>
                 <a:ea typeface="Yu Gothic"/>
@@ -11284,7 +11510,7 @@
             <a:r>
               <a:rPr sz="1100" b="1" lang="ja-JP">
                 <a:solidFill>
-                  <a:srgbClr val="16324F"/>
+                  <a:srgbClr val="182C43"/>
                 </a:solidFill>
                 <a:latin typeface="Yu Gothic"/>
                 <a:ea typeface="Yu Gothic"/>
@@ -11325,7 +11551,7 @@
             <a:r>
               <a:rPr sz="819" b="0" lang="ja-JP">
                 <a:solidFill>
-                  <a:srgbClr val="667478"/>
+                  <a:srgbClr val="666E70"/>
                 </a:solidFill>
                 <a:latin typeface="Yu Gothic"/>
                 <a:ea typeface="Yu Gothic"/>
@@ -14893,7 +15119,7 @@
             <a:avLst/>
           </a:prstGeom>
           <a:solidFill>
-            <a:srgbClr val="C9D4D1"/>
+            <a:srgbClr val="D1CFC8"/>
           </a:solidFill>
           <a:ln>
             <a:noFill/>
@@ -14952,7 +15178,7 @@
             <a:r>
               <a:rPr sz="819" b="0" lang="ja-JP">
                 <a:solidFill>
-                  <a:srgbClr val="667478"/>
+                  <a:srgbClr val="666E70"/>
                 </a:solidFill>
                 <a:latin typeface="Yu Gothic"/>
                 <a:ea typeface="Yu Gothic"/>
@@ -14993,7 +15219,7 @@
             <a:r>
               <a:rPr sz="1100" b="1" lang="ja-JP">
                 <a:solidFill>
-                  <a:srgbClr val="16324F"/>
+                  <a:srgbClr val="182C43"/>
                 </a:solidFill>
                 <a:latin typeface="Yu Gothic"/>
                 <a:ea typeface="Yu Gothic"/>
@@ -15034,7 +15260,7 @@
             <a:r>
               <a:rPr sz="819" b="0" lang="ja-JP">
                 <a:solidFill>
-                  <a:srgbClr val="667478"/>
+                  <a:srgbClr val="666E70"/>
                 </a:solidFill>
                 <a:latin typeface="Yu Gothic"/>
                 <a:ea typeface="Yu Gothic"/>
@@ -16177,7 +16403,7 @@
             <a:avLst/>
           </a:prstGeom>
           <a:solidFill>
-            <a:srgbClr val="C9D4D1"/>
+            <a:srgbClr val="D1CFC8"/>
           </a:solidFill>
           <a:ln>
             <a:noFill/>
@@ -16236,7 +16462,7 @@
             <a:r>
               <a:rPr sz="819" b="0" lang="ja-JP">
                 <a:solidFill>
-                  <a:srgbClr val="667478"/>
+                  <a:srgbClr val="666E70"/>
                 </a:solidFill>
                 <a:latin typeface="Yu Gothic"/>
                 <a:ea typeface="Yu Gothic"/>
@@ -16277,7 +16503,7 @@
             <a:r>
               <a:rPr sz="1100" b="1" lang="ja-JP">
                 <a:solidFill>
-                  <a:srgbClr val="16324F"/>
+                  <a:srgbClr val="182C43"/>
                 </a:solidFill>
                 <a:latin typeface="Yu Gothic"/>
                 <a:ea typeface="Yu Gothic"/>
@@ -16318,7 +16544,7 @@
             <a:r>
               <a:rPr sz="819" b="0" lang="ja-JP">
                 <a:solidFill>
-                  <a:srgbClr val="667478"/>
+                  <a:srgbClr val="666E70"/>
                 </a:solidFill>
                 <a:latin typeface="Yu Gothic"/>
                 <a:ea typeface="Yu Gothic"/>
@@ -16910,7 +17136,7 @@
         </p:nvSpPr>
         <p:spPr>
           <a:xfrm>
-            <a:off x="5821870" y="2652648"/>
+            <a:off x="5821870" y="2619756"/>
             <a:ext cx="554355" cy="190246"/>
           </a:xfrm>
           <a:prstGeom prst="rect">
@@ -16953,7 +17179,7 @@
         </p:nvSpPr>
         <p:spPr>
           <a:xfrm>
-            <a:off x="5806440" y="2913507"/>
+            <a:off x="5806440" y="2875788"/>
             <a:ext cx="585216" cy="162306"/>
           </a:xfrm>
           <a:prstGeom prst="rect">
@@ -17020,7 +17246,7 @@
         </p:nvSpPr>
         <p:spPr>
           <a:xfrm>
-            <a:off x="9555999" y="3739404"/>
+            <a:off x="9555999" y="3706511"/>
             <a:ext cx="1017270" cy="190246"/>
           </a:xfrm>
           <a:prstGeom prst="rect">
@@ -17063,7 +17289,7 @@
         </p:nvSpPr>
         <p:spPr>
           <a:xfrm>
-            <a:off x="9772026" y="4000262"/>
+            <a:off x="9772026" y="3962543"/>
             <a:ext cx="585216" cy="162306"/>
           </a:xfrm>
           <a:prstGeom prst="rect">
@@ -17130,7 +17356,7 @@
         </p:nvSpPr>
         <p:spPr>
           <a:xfrm>
-            <a:off x="8195585" y="4327381"/>
+            <a:off x="8195585" y="4360274"/>
             <a:ext cx="708660" cy="190246"/>
           </a:xfrm>
           <a:prstGeom prst="rect">
@@ -17173,7 +17399,7 @@
         </p:nvSpPr>
         <p:spPr>
           <a:xfrm>
-            <a:off x="8319029" y="4588239"/>
+            <a:off x="8319029" y="4625958"/>
             <a:ext cx="461772" cy="162306"/>
           </a:xfrm>
           <a:prstGeom prst="rect">
@@ -17240,7 +17466,7 @@
         </p:nvSpPr>
         <p:spPr>
           <a:xfrm>
-            <a:off x="3448155" y="4327381"/>
+            <a:off x="3448155" y="4360274"/>
             <a:ext cx="400050" cy="190246"/>
           </a:xfrm>
           <a:prstGeom prst="rect">
@@ -17283,7 +17509,7 @@
         </p:nvSpPr>
         <p:spPr>
           <a:xfrm>
-            <a:off x="3355572" y="4588239"/>
+            <a:off x="3355572" y="4625958"/>
             <a:ext cx="585216" cy="162306"/>
           </a:xfrm>
           <a:prstGeom prst="rect">
@@ -17350,7 +17576,7 @@
         </p:nvSpPr>
         <p:spPr>
           <a:xfrm>
-            <a:off x="1933436" y="3739404"/>
+            <a:off x="1933436" y="3706511"/>
             <a:ext cx="400050" cy="190246"/>
           </a:xfrm>
           <a:prstGeom prst="rect">
@@ -17393,7 +17619,7 @@
         </p:nvSpPr>
         <p:spPr>
           <a:xfrm>
-            <a:off x="1840853" y="4000262"/>
+            <a:off x="1840853" y="3962543"/>
             <a:ext cx="585216" cy="162306"/>
           </a:xfrm>
           <a:prstGeom prst="rect">
@@ -17546,7 +17772,7 @@
             <a:avLst/>
           </a:prstGeom>
           <a:solidFill>
-            <a:srgbClr val="C9D4D1"/>
+            <a:srgbClr val="D1CFC8"/>
           </a:solidFill>
           <a:ln>
             <a:noFill/>
@@ -17605,7 +17831,7 @@
             <a:r>
               <a:rPr sz="819" b="0" lang="ja-JP">
                 <a:solidFill>
-                  <a:srgbClr val="667478"/>
+                  <a:srgbClr val="666E70"/>
                 </a:solidFill>
                 <a:latin typeface="Yu Gothic"/>
                 <a:ea typeface="Yu Gothic"/>
@@ -17646,7 +17872,7 @@
             <a:r>
               <a:rPr sz="1100" b="1" lang="ja-JP">
                 <a:solidFill>
-                  <a:srgbClr val="16324F"/>
+                  <a:srgbClr val="182C43"/>
                 </a:solidFill>
                 <a:latin typeface="Yu Gothic"/>
                 <a:ea typeface="Yu Gothic"/>
@@ -17687,7 +17913,7 @@
             <a:r>
               <a:rPr sz="819" b="0" lang="ja-JP">
                 <a:solidFill>
-                  <a:srgbClr val="667478"/>
+                  <a:srgbClr val="666E70"/>
                 </a:solidFill>
                 <a:latin typeface="Yu Gothic"/>
                 <a:ea typeface="Yu Gothic"/>
@@ -19118,7 +19344,7 @@
             <a:avLst/>
           </a:prstGeom>
           <a:solidFill>
-            <a:srgbClr val="C9D4D1"/>
+            <a:srgbClr val="D1CFC8"/>
           </a:solidFill>
           <a:ln>
             <a:noFill/>
@@ -19177,7 +19403,7 @@
             <a:r>
               <a:rPr sz="819" b="0" lang="ja-JP">
                 <a:solidFill>
-                  <a:srgbClr val="667478"/>
+                  <a:srgbClr val="666E70"/>
                 </a:solidFill>
                 <a:latin typeface="Yu Gothic"/>
                 <a:ea typeface="Yu Gothic"/>
@@ -19218,7 +19444,7 @@
             <a:r>
               <a:rPr sz="1100" b="1" lang="ja-JP">
                 <a:solidFill>
-                  <a:srgbClr val="16324F"/>
+                  <a:srgbClr val="182C43"/>
                 </a:solidFill>
                 <a:latin typeface="Yu Gothic"/>
                 <a:ea typeface="Yu Gothic"/>
@@ -19259,7 +19485,7 @@
             <a:r>
               <a:rPr sz="819" b="0" lang="ja-JP">
                 <a:solidFill>
-                  <a:srgbClr val="667478"/>
+                  <a:srgbClr val="666E70"/>
                 </a:solidFill>
                 <a:latin typeface="Yu Gothic"/>
                 <a:ea typeface="Yu Gothic"/>
@@ -19983,7 +20209,7 @@
         </p:nvSpPr>
         <p:spPr>
           <a:xfrm>
-            <a:off x="1091565" y="3977614"/>
+            <a:off x="1091565" y="3944721"/>
             <a:ext cx="1017270" cy="190246"/>
           </a:xfrm>
           <a:prstGeom prst="rect">
@@ -20026,7 +20252,7 @@
         </p:nvSpPr>
         <p:spPr>
           <a:xfrm>
-            <a:off x="1307592" y="4238472"/>
+            <a:off x="1307592" y="4200753"/>
             <a:ext cx="585216" cy="162306"/>
           </a:xfrm>
           <a:prstGeom prst="rect">
@@ -20093,7 +20319,7 @@
         </p:nvSpPr>
         <p:spPr>
           <a:xfrm>
-            <a:off x="3647998" y="3977614"/>
+            <a:off x="3647998" y="3944721"/>
             <a:ext cx="400050" cy="190246"/>
           </a:xfrm>
           <a:prstGeom prst="rect">
@@ -20136,7 +20362,7 @@
         </p:nvSpPr>
         <p:spPr>
           <a:xfrm>
-            <a:off x="3601707" y="4238472"/>
+            <a:off x="3601707" y="4200753"/>
             <a:ext cx="492633" cy="162306"/>
           </a:xfrm>
           <a:prstGeom prst="rect">
@@ -20203,7 +20429,7 @@
         </p:nvSpPr>
         <p:spPr>
           <a:xfrm>
-            <a:off x="5571782" y="3977614"/>
+            <a:off x="5571782" y="3944721"/>
             <a:ext cx="1048131" cy="190246"/>
           </a:xfrm>
           <a:prstGeom prst="rect">
@@ -20246,7 +20472,7 @@
         </p:nvSpPr>
         <p:spPr>
           <a:xfrm>
-            <a:off x="5412333" y="4238472"/>
+            <a:off x="5412333" y="4200753"/>
             <a:ext cx="1367028" cy="162306"/>
           </a:xfrm>
           <a:prstGeom prst="rect">
@@ -20313,7 +20539,7 @@
         </p:nvSpPr>
         <p:spPr>
           <a:xfrm>
-            <a:off x="7665300" y="2734030"/>
+            <a:off x="7665300" y="2701137"/>
             <a:ext cx="1356741" cy="190246"/>
           </a:xfrm>
           <a:prstGeom prst="rect">
@@ -20356,7 +20582,7 @@
         </p:nvSpPr>
         <p:spPr>
           <a:xfrm>
-            <a:off x="7624152" y="2994888"/>
+            <a:off x="7624152" y="2957169"/>
             <a:ext cx="1439037" cy="162306"/>
           </a:xfrm>
           <a:prstGeom prst="rect">
@@ -20423,7 +20649,7 @@
         </p:nvSpPr>
         <p:spPr>
           <a:xfrm>
-            <a:off x="7881327" y="3977614"/>
+            <a:off x="7881327" y="3944721"/>
             <a:ext cx="924687" cy="190246"/>
           </a:xfrm>
           <a:prstGeom prst="rect">
@@ -20466,7 +20692,7 @@
         </p:nvSpPr>
         <p:spPr>
           <a:xfrm>
-            <a:off x="7711592" y="4238472"/>
+            <a:off x="7711592" y="4200753"/>
             <a:ext cx="1264158" cy="162306"/>
           </a:xfrm>
           <a:prstGeom prst="rect">
@@ -20533,7 +20759,7 @@
         </p:nvSpPr>
         <p:spPr>
           <a:xfrm>
-            <a:off x="7845323" y="5221198"/>
+            <a:off x="7845323" y="5188305"/>
             <a:ext cx="996696" cy="190246"/>
           </a:xfrm>
           <a:prstGeom prst="rect">
@@ -20576,7 +20802,7 @@
         </p:nvSpPr>
         <p:spPr>
           <a:xfrm>
-            <a:off x="7865897" y="5482056"/>
+            <a:off x="7865897" y="5444337"/>
             <a:ext cx="955547" cy="162306"/>
           </a:xfrm>
           <a:prstGeom prst="rect">
@@ -20643,7 +20869,7 @@
         </p:nvSpPr>
         <p:spPr>
           <a:xfrm>
-            <a:off x="10237165" y="3977614"/>
+            <a:off x="10237165" y="3944721"/>
             <a:ext cx="708660" cy="190246"/>
           </a:xfrm>
           <a:prstGeom prst="rect">
@@ -20686,7 +20912,7 @@
         </p:nvSpPr>
         <p:spPr>
           <a:xfrm>
-            <a:off x="10175443" y="4238472"/>
+            <a:off x="10175443" y="4200753"/>
             <a:ext cx="832104" cy="162306"/>
           </a:xfrm>
           <a:prstGeom prst="rect">
@@ -20949,7 +21175,7 @@
             <a:avLst/>
           </a:prstGeom>
           <a:solidFill>
-            <a:srgbClr val="C9D4D1"/>
+            <a:srgbClr val="D1CFC8"/>
           </a:solidFill>
           <a:ln>
             <a:noFill/>
@@ -21008,7 +21234,7 @@
             <a:r>
               <a:rPr sz="819" b="0" lang="ja-JP">
                 <a:solidFill>
-                  <a:srgbClr val="667478"/>
+                  <a:srgbClr val="666E70"/>
                 </a:solidFill>
                 <a:latin typeface="Yu Gothic"/>
                 <a:ea typeface="Yu Gothic"/>
@@ -21049,7 +21275,7 @@
             <a:r>
               <a:rPr sz="1100" b="1" lang="ja-JP">
                 <a:solidFill>
-                  <a:srgbClr val="16324F"/>
+                  <a:srgbClr val="182C43"/>
                 </a:solidFill>
                 <a:latin typeface="Yu Gothic"/>
                 <a:ea typeface="Yu Gothic"/>
@@ -21090,7 +21316,7 @@
             <a:r>
               <a:rPr sz="819" b="0" lang="ja-JP">
                 <a:solidFill>
-                  <a:srgbClr val="667478"/>
+                  <a:srgbClr val="666E70"/>
                 </a:solidFill>
                 <a:latin typeface="Yu Gothic"/>
                 <a:ea typeface="Yu Gothic"/>
@@ -22389,7 +22615,7 @@
         </p:nvSpPr>
         <p:spPr>
           <a:xfrm>
-            <a:off x="1091565" y="3341283"/>
+            <a:off x="1091565" y="3308390"/>
             <a:ext cx="1017270" cy="190246"/>
           </a:xfrm>
           <a:prstGeom prst="rect">
@@ -22456,7 +22682,7 @@
         </p:nvSpPr>
         <p:spPr>
           <a:xfrm>
-            <a:off x="3018411" y="2335443"/>
+            <a:off x="3018411" y="2302550"/>
             <a:ext cx="760095" cy="190246"/>
           </a:xfrm>
           <a:prstGeom prst="rect">
@@ -22523,7 +22749,7 @@
         </p:nvSpPr>
         <p:spPr>
           <a:xfrm>
-            <a:off x="2930972" y="3341283"/>
+            <a:off x="2930972" y="3308390"/>
             <a:ext cx="934974" cy="190246"/>
           </a:xfrm>
           <a:prstGeom prst="rect">
@@ -22590,7 +22816,7 @@
         </p:nvSpPr>
         <p:spPr>
           <a:xfrm>
-            <a:off x="6794952" y="3341283"/>
+            <a:off x="6794952" y="3308390"/>
             <a:ext cx="400050" cy="190246"/>
           </a:xfrm>
           <a:prstGeom prst="rect">
@@ -22657,7 +22883,7 @@
         </p:nvSpPr>
         <p:spPr>
           <a:xfrm>
-            <a:off x="4852675" y="4584867"/>
+            <a:off x="4852675" y="4551974"/>
             <a:ext cx="688086" cy="190246"/>
           </a:xfrm>
           <a:prstGeom prst="rect">
@@ -22724,7 +22950,7 @@
         </p:nvSpPr>
         <p:spPr>
           <a:xfrm>
-            <a:off x="8449193" y="4584867"/>
+            <a:off x="8449193" y="4551974"/>
             <a:ext cx="688086" cy="190246"/>
           </a:xfrm>
           <a:prstGeom prst="rect">
@@ -22791,7 +23017,7 @@
         </p:nvSpPr>
         <p:spPr>
           <a:xfrm>
-            <a:off x="4616074" y="5590707"/>
+            <a:off x="4616074" y="5557814"/>
             <a:ext cx="1161288" cy="190246"/>
           </a:xfrm>
           <a:prstGeom prst="rect">
@@ -22858,7 +23084,7 @@
         </p:nvSpPr>
         <p:spPr>
           <a:xfrm>
-            <a:off x="8202305" y="5590707"/>
+            <a:off x="8202305" y="5557814"/>
             <a:ext cx="1181862" cy="190246"/>
           </a:xfrm>
           <a:prstGeom prst="rect">
@@ -22925,7 +23151,7 @@
         </p:nvSpPr>
         <p:spPr>
           <a:xfrm>
-            <a:off x="10129151" y="3341283"/>
+            <a:off x="10129151" y="3308390"/>
             <a:ext cx="924687" cy="190246"/>
           </a:xfrm>
           <a:prstGeom prst="rect">
@@ -22968,7 +23194,7 @@
         </p:nvSpPr>
         <p:spPr>
           <a:xfrm>
-            <a:off x="10082860" y="3602141"/>
+            <a:off x="10082860" y="3564422"/>
             <a:ext cx="1017270" cy="162306"/>
           </a:xfrm>
           <a:prstGeom prst="rect">
@@ -23035,7 +23261,7 @@
         </p:nvSpPr>
         <p:spPr>
           <a:xfrm>
-            <a:off x="10093147" y="5590707"/>
+            <a:off x="10093147" y="5557814"/>
             <a:ext cx="996696" cy="190246"/>
           </a:xfrm>
           <a:prstGeom prst="rect">
@@ -23078,7 +23304,7 @@
         </p:nvSpPr>
         <p:spPr>
           <a:xfrm>
-            <a:off x="10237165" y="5851565"/>
+            <a:off x="10237165" y="5813846"/>
             <a:ext cx="708660" cy="162306"/>
           </a:xfrm>
           <a:prstGeom prst="rect">
@@ -23300,7 +23526,7 @@
             <a:avLst/>
           </a:prstGeom>
           <a:solidFill>
-            <a:srgbClr val="C9D4D1"/>
+            <a:srgbClr val="D1CFC8"/>
           </a:solidFill>
           <a:ln>
             <a:noFill/>
@@ -23359,7 +23585,7 @@
             <a:r>
               <a:rPr sz="819" b="0" lang="ja-JP">
                 <a:solidFill>
-                  <a:srgbClr val="667478"/>
+                  <a:srgbClr val="666E70"/>
                 </a:solidFill>
                 <a:latin typeface="Yu Gothic"/>
                 <a:ea typeface="Yu Gothic"/>
@@ -23400,7 +23626,7 @@
             <a:r>
               <a:rPr sz="1100" b="1" lang="ja-JP">
                 <a:solidFill>
-                  <a:srgbClr val="16324F"/>
+                  <a:srgbClr val="182C43"/>
                 </a:solidFill>
                 <a:latin typeface="Yu Gothic"/>
                 <a:ea typeface="Yu Gothic"/>
@@ -23441,7 +23667,7 @@
             <a:r>
               <a:rPr sz="819" b="0" lang="ja-JP">
                 <a:solidFill>
-                  <a:srgbClr val="667478"/>
+                  <a:srgbClr val="666E70"/>
                 </a:solidFill>
                 <a:latin typeface="Yu Gothic"/>
                 <a:ea typeface="Yu Gothic"/>
@@ -23945,7 +24171,7 @@
             <a:avLst/>
           </a:prstGeom>
           <a:solidFill>
-            <a:srgbClr val="C9D4D1"/>
+            <a:srgbClr val="D1CFC8"/>
           </a:solidFill>
           <a:ln>
             <a:noFill/>
@@ -24004,7 +24230,7 @@
             <a:r>
               <a:rPr sz="819" b="0" lang="ja-JP">
                 <a:solidFill>
-                  <a:srgbClr val="667478"/>
+                  <a:srgbClr val="666E70"/>
                 </a:solidFill>
                 <a:latin typeface="Yu Gothic"/>
                 <a:ea typeface="Yu Gothic"/>
@@ -24045,7 +24271,7 @@
             <a:r>
               <a:rPr sz="1100" b="1" lang="ja-JP">
                 <a:solidFill>
-                  <a:srgbClr val="16324F"/>
+                  <a:srgbClr val="182C43"/>
                 </a:solidFill>
                 <a:latin typeface="Yu Gothic"/>
                 <a:ea typeface="Yu Gothic"/>
@@ -24086,7 +24312,7 @@
             <a:r>
               <a:rPr sz="819" b="0" lang="ja-JP">
                 <a:solidFill>
-                  <a:srgbClr val="667478"/>
+                  <a:srgbClr val="666E70"/>
                 </a:solidFill>
                 <a:latin typeface="Yu Gothic"/>
                 <a:ea typeface="Yu Gothic"/>
@@ -24767,7 +24993,7 @@
         </p:nvSpPr>
         <p:spPr>
           <a:xfrm>
-            <a:off x="1168717" y="3846855"/>
+            <a:off x="1168717" y="3813962"/>
             <a:ext cx="862965" cy="190246"/>
           </a:xfrm>
           <a:prstGeom prst="rect">
@@ -24810,7 +25036,7 @@
         </p:nvSpPr>
         <p:spPr>
           <a:xfrm>
-            <a:off x="1307592" y="4107713"/>
+            <a:off x="1307592" y="4069994"/>
             <a:ext cx="585216" cy="162306"/>
           </a:xfrm>
           <a:prstGeom prst="rect">
@@ -24877,7 +25103,7 @@
         </p:nvSpPr>
         <p:spPr>
           <a:xfrm>
-            <a:off x="7306932" y="2292375"/>
+            <a:off x="7306932" y="2259482"/>
             <a:ext cx="574929" cy="190246"/>
           </a:xfrm>
           <a:prstGeom prst="rect">
@@ -24944,7 +25170,7 @@
         </p:nvSpPr>
         <p:spPr>
           <a:xfrm>
-            <a:off x="3934358" y="3846855"/>
+            <a:off x="3934358" y="3813962"/>
             <a:ext cx="1325880" cy="190246"/>
           </a:xfrm>
           <a:prstGeom prst="rect">
@@ -25011,7 +25237,7 @@
         </p:nvSpPr>
         <p:spPr>
           <a:xfrm>
-            <a:off x="6998322" y="3846855"/>
+            <a:off x="6998322" y="3813962"/>
             <a:ext cx="1192149" cy="190246"/>
           </a:xfrm>
           <a:prstGeom prst="rect">
@@ -25054,7 +25280,7 @@
         </p:nvSpPr>
         <p:spPr>
           <a:xfrm>
-            <a:off x="7240066" y="4107713"/>
+            <a:off x="7240066" y="4069994"/>
             <a:ext cx="708660" cy="162306"/>
           </a:xfrm>
           <a:prstGeom prst="rect">
@@ -25121,7 +25347,7 @@
         </p:nvSpPr>
         <p:spPr>
           <a:xfrm>
-            <a:off x="10196017" y="3846855"/>
+            <a:off x="10196017" y="3813962"/>
             <a:ext cx="790956" cy="190246"/>
           </a:xfrm>
           <a:prstGeom prst="rect">
@@ -25188,7 +25414,7 @@
         </p:nvSpPr>
         <p:spPr>
           <a:xfrm>
-            <a:off x="7240066" y="5090439"/>
+            <a:off x="7240066" y="5057546"/>
             <a:ext cx="708660" cy="190246"/>
           </a:xfrm>
           <a:prstGeom prst="rect">
@@ -25231,7 +25457,7 @@
         </p:nvSpPr>
         <p:spPr>
           <a:xfrm>
-            <a:off x="7363510" y="5351297"/>
+            <a:off x="7363510" y="5313578"/>
             <a:ext cx="461772" cy="162306"/>
           </a:xfrm>
           <a:prstGeom prst="rect">
@@ -25298,7 +25524,7 @@
         </p:nvSpPr>
         <p:spPr>
           <a:xfrm>
-            <a:off x="10082860" y="5090439"/>
+            <a:off x="10082860" y="5057546"/>
             <a:ext cx="1017270" cy="190246"/>
           </a:xfrm>
           <a:prstGeom prst="rect">
@@ -25341,7 +25567,7 @@
         </p:nvSpPr>
         <p:spPr>
           <a:xfrm>
-            <a:off x="10298887" y="5351297"/>
+            <a:off x="10298887" y="5313578"/>
             <a:ext cx="585216" cy="162306"/>
           </a:xfrm>
           <a:prstGeom prst="rect">
@@ -25647,7 +25873,7 @@
             <a:avLst/>
           </a:prstGeom>
           <a:solidFill>
-            <a:srgbClr val="C9D4D1"/>
+            <a:srgbClr val="D1CFC8"/>
           </a:solidFill>
           <a:ln>
             <a:noFill/>
@@ -25706,7 +25932,7 @@
             <a:r>
               <a:rPr sz="819" b="0" lang="ja-JP">
                 <a:solidFill>
-                  <a:srgbClr val="667478"/>
+                  <a:srgbClr val="666E70"/>
                 </a:solidFill>
                 <a:latin typeface="Yu Gothic"/>
                 <a:ea typeface="Yu Gothic"/>
@@ -25747,7 +25973,7 @@
             <a:r>
               <a:rPr sz="1100" b="1" lang="ja-JP">
                 <a:solidFill>
-                  <a:srgbClr val="16324F"/>
+                  <a:srgbClr val="182C43"/>
                 </a:solidFill>
                 <a:latin typeface="Yu Gothic"/>
                 <a:ea typeface="Yu Gothic"/>
@@ -25788,7 +26014,7 @@
             <a:r>
               <a:rPr sz="819" b="0" lang="ja-JP">
                 <a:solidFill>
-                  <a:srgbClr val="667478"/>
+                  <a:srgbClr val="666E70"/>
                 </a:solidFill>
                 <a:latin typeface="Yu Gothic"/>
                 <a:ea typeface="Yu Gothic"/>
@@ -26512,7 +26738,7 @@
         </p:nvSpPr>
         <p:spPr>
           <a:xfrm>
-            <a:off x="1091565" y="4026992"/>
+            <a:off x="1091565" y="3994099"/>
             <a:ext cx="1017270" cy="190246"/>
           </a:xfrm>
           <a:prstGeom prst="rect">
@@ -26555,7 +26781,7 @@
         </p:nvSpPr>
         <p:spPr>
           <a:xfrm>
-            <a:off x="1122426" y="4287850"/>
+            <a:off x="1122426" y="4250131"/>
             <a:ext cx="955547" cy="162306"/>
           </a:xfrm>
           <a:prstGeom prst="rect">
@@ -26622,7 +26848,7 @@
         </p:nvSpPr>
         <p:spPr>
           <a:xfrm>
-            <a:off x="3519411" y="4026992"/>
+            <a:off x="3519411" y="3994099"/>
             <a:ext cx="657225" cy="190246"/>
           </a:xfrm>
           <a:prstGeom prst="rect">
@@ -26665,7 +26891,7 @@
         </p:nvSpPr>
         <p:spPr>
           <a:xfrm>
-            <a:off x="3493693" y="4287850"/>
+            <a:off x="3493693" y="4250131"/>
             <a:ext cx="708660" cy="162306"/>
           </a:xfrm>
           <a:prstGeom prst="rect">
@@ -26732,7 +26958,7 @@
         </p:nvSpPr>
         <p:spPr>
           <a:xfrm>
-            <a:off x="5571782" y="4026992"/>
+            <a:off x="5571782" y="3994099"/>
             <a:ext cx="1048131" cy="190246"/>
           </a:xfrm>
           <a:prstGeom prst="rect">
@@ -26775,7 +27001,7 @@
         </p:nvSpPr>
         <p:spPr>
           <a:xfrm>
-            <a:off x="5618073" y="4287850"/>
+            <a:off x="5618073" y="4250131"/>
             <a:ext cx="955547" cy="162306"/>
           </a:xfrm>
           <a:prstGeom prst="rect">
@@ -26842,7 +27068,7 @@
         </p:nvSpPr>
         <p:spPr>
           <a:xfrm>
-            <a:off x="7757883" y="4026992"/>
+            <a:off x="7757883" y="3994099"/>
             <a:ext cx="1171575" cy="190246"/>
           </a:xfrm>
           <a:prstGeom prst="rect">
@@ -26885,7 +27111,7 @@
         </p:nvSpPr>
         <p:spPr>
           <a:xfrm>
-            <a:off x="7989341" y="4287850"/>
+            <a:off x="7989341" y="4250131"/>
             <a:ext cx="708660" cy="162306"/>
           </a:xfrm>
           <a:prstGeom prst="rect">
@@ -26952,7 +27178,7 @@
         </p:nvSpPr>
         <p:spPr>
           <a:xfrm>
-            <a:off x="10113721" y="2783408"/>
+            <a:off x="10113721" y="2750515"/>
             <a:ext cx="955547" cy="190246"/>
           </a:xfrm>
           <a:prstGeom prst="rect">
@@ -26995,7 +27221,7 @@
         </p:nvSpPr>
         <p:spPr>
           <a:xfrm>
-            <a:off x="10298887" y="3044266"/>
+            <a:off x="10298887" y="3006547"/>
             <a:ext cx="585216" cy="162306"/>
           </a:xfrm>
           <a:prstGeom prst="rect">
@@ -27062,7 +27288,7 @@
         </p:nvSpPr>
         <p:spPr>
           <a:xfrm>
-            <a:off x="10129151" y="5270576"/>
+            <a:off x="10129151" y="5237683"/>
             <a:ext cx="924687" cy="190246"/>
           </a:xfrm>
           <a:prstGeom prst="rect">
@@ -27105,7 +27331,7 @@
         </p:nvSpPr>
         <p:spPr>
           <a:xfrm>
-            <a:off x="10360609" y="5531434"/>
+            <a:off x="10360609" y="5493715"/>
             <a:ext cx="461772" cy="162306"/>
           </a:xfrm>
           <a:prstGeom prst="rect">
@@ -27172,7 +27398,7 @@
         </p:nvSpPr>
         <p:spPr>
           <a:xfrm>
-            <a:off x="7845323" y="5270576"/>
+            <a:off x="7845323" y="5237683"/>
             <a:ext cx="996696" cy="190246"/>
           </a:xfrm>
           <a:prstGeom prst="rect">
@@ -27215,7 +27441,7 @@
         </p:nvSpPr>
         <p:spPr>
           <a:xfrm>
-            <a:off x="7989341" y="5531434"/>
+            <a:off x="7989341" y="5493715"/>
             <a:ext cx="708660" cy="162306"/>
           </a:xfrm>
           <a:prstGeom prst="rect">
@@ -27480,7 +27706,7 @@
             <a:avLst/>
           </a:prstGeom>
           <a:solidFill>
-            <a:srgbClr val="C9D4D1"/>
+            <a:srgbClr val="D1CFC8"/>
           </a:solidFill>
           <a:ln>
             <a:noFill/>
@@ -27539,7 +27765,7 @@
             <a:r>
               <a:rPr sz="819" b="0" lang="ja-JP">
                 <a:solidFill>
-                  <a:srgbClr val="667478"/>
+                  <a:srgbClr val="666E70"/>
                 </a:solidFill>
                 <a:latin typeface="Yu Gothic"/>
                 <a:ea typeface="Yu Gothic"/>
@@ -27580,7 +27806,7 @@
             <a:r>
               <a:rPr sz="1100" b="1" lang="ja-JP">
                 <a:solidFill>
-                  <a:srgbClr val="16324F"/>
+                  <a:srgbClr val="182C43"/>
                 </a:solidFill>
                 <a:latin typeface="Yu Gothic"/>
                 <a:ea typeface="Yu Gothic"/>
@@ -27621,7 +27847,7 @@
             <a:r>
               <a:rPr sz="819" b="0" lang="ja-JP">
                 <a:solidFill>
-                  <a:srgbClr val="667478"/>
+                  <a:srgbClr val="666E70"/>
                 </a:solidFill>
                 <a:latin typeface="Yu Gothic"/>
                 <a:ea typeface="Yu Gothic"/>
@@ -28389,7 +28615,7 @@
             <a:avLst/>
           </a:prstGeom>
           <a:solidFill>
-            <a:srgbClr val="C9D4D1"/>
+            <a:srgbClr val="D1CFC8"/>
           </a:solidFill>
           <a:ln>
             <a:noFill/>
@@ -28448,7 +28674,7 @@
             <a:r>
               <a:rPr sz="819" b="0" lang="ja-JP">
                 <a:solidFill>
-                  <a:srgbClr val="667478"/>
+                  <a:srgbClr val="666E70"/>
                 </a:solidFill>
                 <a:latin typeface="Yu Gothic"/>
                 <a:ea typeface="Yu Gothic"/>
@@ -28489,7 +28715,7 @@
             <a:r>
               <a:rPr sz="1100" b="1" lang="ja-JP">
                 <a:solidFill>
-                  <a:srgbClr val="16324F"/>
+                  <a:srgbClr val="182C43"/>
                 </a:solidFill>
                 <a:latin typeface="Yu Gothic"/>
                 <a:ea typeface="Yu Gothic"/>
@@ -28530,7 +28756,7 @@
             <a:r>
               <a:rPr sz="819" b="0" lang="ja-JP">
                 <a:solidFill>
-                  <a:srgbClr val="667478"/>
+                  <a:srgbClr val="666E70"/>
                 </a:solidFill>
                 <a:latin typeface="Yu Gothic"/>
                 <a:ea typeface="Yu Gothic"/>
@@ -29157,7 +29383,7 @@
             <a:avLst/>
           </a:prstGeom>
           <a:solidFill>
-            <a:srgbClr val="C9D4D1"/>
+            <a:srgbClr val="D1CFC8"/>
           </a:solidFill>
           <a:ln>
             <a:noFill/>
@@ -29216,7 +29442,7 @@
             <a:r>
               <a:rPr sz="819" b="0" lang="ja-JP">
                 <a:solidFill>
-                  <a:srgbClr val="667478"/>
+                  <a:srgbClr val="666E70"/>
                 </a:solidFill>
                 <a:latin typeface="Yu Gothic"/>
                 <a:ea typeface="Yu Gothic"/>
@@ -29257,7 +29483,7 @@
             <a:r>
               <a:rPr sz="1100" b="1" lang="ja-JP">
                 <a:solidFill>
-                  <a:srgbClr val="16324F"/>
+                  <a:srgbClr val="182C43"/>
                 </a:solidFill>
                 <a:latin typeface="Yu Gothic"/>
                 <a:ea typeface="Yu Gothic"/>
@@ -29298,7 +29524,7 @@
             <a:r>
               <a:rPr sz="819" b="0" lang="ja-JP">
                 <a:solidFill>
-                  <a:srgbClr val="667478"/>
+                  <a:srgbClr val="666E70"/>
                 </a:solidFill>
                 <a:latin typeface="Yu Gothic"/>
                 <a:ea typeface="Yu Gothic"/>
@@ -30476,7 +30702,7 @@
             <a:avLst/>
           </a:prstGeom>
           <a:solidFill>
-            <a:srgbClr val="C9D4D1"/>
+            <a:srgbClr val="D1CFC8"/>
           </a:solidFill>
           <a:ln>
             <a:noFill/>
@@ -30535,7 +30761,7 @@
             <a:r>
               <a:rPr sz="819" b="0" lang="ja-JP">
                 <a:solidFill>
-                  <a:srgbClr val="667478"/>
+                  <a:srgbClr val="666E70"/>
                 </a:solidFill>
                 <a:latin typeface="Yu Gothic"/>
                 <a:ea typeface="Yu Gothic"/>
@@ -30576,7 +30802,7 @@
             <a:r>
               <a:rPr sz="1100" b="1" lang="ja-JP">
                 <a:solidFill>
-                  <a:srgbClr val="16324F"/>
+                  <a:srgbClr val="182C43"/>
                 </a:solidFill>
                 <a:latin typeface="Yu Gothic"/>
                 <a:ea typeface="Yu Gothic"/>
@@ -30617,7 +30843,7 @@
             <a:r>
               <a:rPr sz="819" b="0" lang="ja-JP">
                 <a:solidFill>
-                  <a:srgbClr val="667478"/>
+                  <a:srgbClr val="666E70"/>
                 </a:solidFill>
                 <a:latin typeface="Yu Gothic"/>
                 <a:ea typeface="Yu Gothic"/>
@@ -31287,7 +31513,7 @@
             <a:avLst/>
           </a:prstGeom>
           <a:solidFill>
-            <a:srgbClr val="C9D4D1"/>
+            <a:srgbClr val="D1CFC8"/>
           </a:solidFill>
           <a:ln>
             <a:noFill/>
@@ -31346,7 +31572,7 @@
             <a:r>
               <a:rPr sz="819" b="0" lang="ja-JP">
                 <a:solidFill>
-                  <a:srgbClr val="667478"/>
+                  <a:srgbClr val="666E70"/>
                 </a:solidFill>
                 <a:latin typeface="Yu Gothic"/>
                 <a:ea typeface="Yu Gothic"/>
@@ -31387,7 +31613,7 @@
             <a:r>
               <a:rPr sz="1100" b="1" lang="ja-JP">
                 <a:solidFill>
-                  <a:srgbClr val="16324F"/>
+                  <a:srgbClr val="182C43"/>
                 </a:solidFill>
                 <a:latin typeface="Yu Gothic"/>
                 <a:ea typeface="Yu Gothic"/>
@@ -31428,7 +31654,7 @@
             <a:r>
               <a:rPr sz="819" b="0" lang="ja-JP">
                 <a:solidFill>
-                  <a:srgbClr val="667478"/>
+                  <a:srgbClr val="666E70"/>
                 </a:solidFill>
                 <a:latin typeface="Yu Gothic"/>
                 <a:ea typeface="Yu Gothic"/>
@@ -31657,7 +31883,7 @@
             <a:avLst/>
           </a:prstGeom>
           <a:solidFill>
-            <a:srgbClr val="C9D4D1"/>
+            <a:srgbClr val="D1CFC8"/>
           </a:solidFill>
           <a:ln>
             <a:noFill/>
@@ -31716,7 +31942,7 @@
             <a:r>
               <a:rPr sz="819" b="0" lang="ja-JP">
                 <a:solidFill>
-                  <a:srgbClr val="667478"/>
+                  <a:srgbClr val="666E70"/>
                 </a:solidFill>
                 <a:latin typeface="Yu Gothic"/>
                 <a:ea typeface="Yu Gothic"/>
@@ -31757,7 +31983,7 @@
             <a:r>
               <a:rPr sz="1100" b="1" lang="ja-JP">
                 <a:solidFill>
-                  <a:srgbClr val="16324F"/>
+                  <a:srgbClr val="182C43"/>
                 </a:solidFill>
                 <a:latin typeface="Yu Gothic"/>
                 <a:ea typeface="Yu Gothic"/>
@@ -31798,7 +32024,7 @@
             <a:r>
               <a:rPr sz="819" b="0" lang="ja-JP">
                 <a:solidFill>
-                  <a:srgbClr val="667478"/>
+                  <a:srgbClr val="666E70"/>
                 </a:solidFill>
                 <a:latin typeface="Yu Gothic"/>
                 <a:ea typeface="Yu Gothic"/>
@@ -32027,7 +32253,7 @@
             <a:avLst/>
           </a:prstGeom>
           <a:solidFill>
-            <a:srgbClr val="C9D4D1"/>
+            <a:srgbClr val="D1CFC8"/>
           </a:solidFill>
           <a:ln>
             <a:noFill/>
@@ -32086,7 +32312,7 @@
             <a:r>
               <a:rPr sz="819" b="0" lang="ja-JP">
                 <a:solidFill>
-                  <a:srgbClr val="667478"/>
+                  <a:srgbClr val="666E70"/>
                 </a:solidFill>
                 <a:latin typeface="Yu Gothic"/>
                 <a:ea typeface="Yu Gothic"/>
@@ -32127,7 +32353,7 @@
             <a:r>
               <a:rPr sz="1100" b="1" lang="ja-JP">
                 <a:solidFill>
-                  <a:srgbClr val="16324F"/>
+                  <a:srgbClr val="182C43"/>
                 </a:solidFill>
                 <a:latin typeface="Yu Gothic"/>
                 <a:ea typeface="Yu Gothic"/>
@@ -32168,7 +32394,7 @@
             <a:r>
               <a:rPr sz="819" b="0" lang="ja-JP">
                 <a:solidFill>
-                  <a:srgbClr val="667478"/>
+                  <a:srgbClr val="666E70"/>
                 </a:solidFill>
                 <a:latin typeface="Yu Gothic"/>
                 <a:ea typeface="Yu Gothic"/>
@@ -32397,7 +32623,7 @@
             <a:avLst/>
           </a:prstGeom>
           <a:solidFill>
-            <a:srgbClr val="C9D4D1"/>
+            <a:srgbClr val="D1CFC8"/>
           </a:solidFill>
           <a:ln>
             <a:noFill/>
@@ -32456,7 +32682,7 @@
             <a:r>
               <a:rPr sz="819" b="0" lang="ja-JP">
                 <a:solidFill>
-                  <a:srgbClr val="667478"/>
+                  <a:srgbClr val="666E70"/>
                 </a:solidFill>
                 <a:latin typeface="Yu Gothic"/>
                 <a:ea typeface="Yu Gothic"/>
@@ -32497,7 +32723,7 @@
             <a:r>
               <a:rPr sz="1100" b="1" lang="ja-JP">
                 <a:solidFill>
-                  <a:srgbClr val="16324F"/>
+                  <a:srgbClr val="182C43"/>
                 </a:solidFill>
                 <a:latin typeface="Yu Gothic"/>
                 <a:ea typeface="Yu Gothic"/>
@@ -32538,7 +32764,7 @@
             <a:r>
               <a:rPr sz="819" b="0" lang="ja-JP">
                 <a:solidFill>
-                  <a:srgbClr val="667478"/>
+                  <a:srgbClr val="666E70"/>
                 </a:solidFill>
                 <a:latin typeface="Yu Gothic"/>
                 <a:ea typeface="Yu Gothic"/>

--- a/examples/gallery/pattern_gallery.pptx
+++ b/examples/gallery/pattern_gallery.pptx
@@ -23470,50 +23470,7 @@
       </p:sp>
       <p:sp>
         <p:nvSpPr>
-          <p:cNvPr id="59" name="TextBox 58"/>
-          <p:cNvSpPr txBox="1"/>
-          <p:nvPr/>
-        </p:nvSpPr>
-        <p:spPr>
-          <a:xfrm>
-            <a:off x="9720209" y="3519845"/>
-            <a:ext cx="461772" cy="162306"/>
-          </a:xfrm>
-          <a:prstGeom prst="rect">
-            <a:avLst/>
-          </a:prstGeom>
-          <a:solidFill>
-            <a:srgbClr val="F7F5EF"/>
-          </a:solidFill>
-        </p:spPr>
-        <p:txBody>
-          <a:bodyPr wrap="square" anchor="ctr" lIns="0" rIns="0" tIns="0" bIns="0">
-            <a:spAutoFit/>
-          </a:bodyPr>
-          <a:lstStyle/>
-          <a:p>
-            <a:pPr algn="ctr">
-              <a:lnSpc>
-                <a:spcPct val="130000"/>
-              </a:lnSpc>
-            </a:pPr>
-            <a:r>
-              <a:rPr sz="900" b="0" lang="ja-JP">
-                <a:solidFill>
-                  <a:srgbClr val="202729"/>
-                </a:solidFill>
-                <a:latin typeface="Yu Gothic"/>
-                <a:ea typeface="Yu Gothic"/>
-                <a:cs typeface="Yu Gothic"/>
-              </a:rPr>
-              <a:t>成果物</a:t>
-            </a:r>
-          </a:p>
-        </p:txBody>
-      </p:sp>
-      <p:sp>
-        <p:nvSpPr>
-          <p:cNvPr id="60" name="Rectangle 59"/>
+          <p:cNvPr id="59" name="Rectangle 58"/>
           <p:cNvSpPr/>
           <p:nvPr/>
         </p:nvSpPr>
@@ -23557,7 +23514,7 @@
       </p:sp>
       <p:sp>
         <p:nvSpPr>
-          <p:cNvPr id="61" name="TextBox 60"/>
+          <p:cNvPr id="60" name="TextBox 59"/>
           <p:cNvSpPr txBox="1"/>
           <p:nvPr/>
         </p:nvSpPr>
@@ -23598,7 +23555,7 @@
       </p:sp>
       <p:sp>
         <p:nvSpPr>
-          <p:cNvPr id="62" name="TextBox 61"/>
+          <p:cNvPr id="61" name="TextBox 60"/>
           <p:cNvSpPr txBox="1"/>
           <p:nvPr/>
         </p:nvSpPr>
@@ -23639,7 +23596,7 @@
       </p:sp>
       <p:sp>
         <p:nvSpPr>
-          <p:cNvPr id="63" name="TextBox 62"/>
+          <p:cNvPr id="62" name="TextBox 61"/>
           <p:cNvSpPr txBox="1"/>
           <p:nvPr/>
         </p:nvSpPr>

--- a/examples/gallery/pattern_gallery.pptx
+++ b/examples/gallery/pattern_gallery.pptx
@@ -26,6 +26,9 @@
     <p:sldId id="274" r:id="rId25"/>
     <p:sldId id="275" r:id="rId26"/>
     <p:sldId id="276" r:id="rId27"/>
+    <p:sldId id="277" r:id="rId28"/>
+    <p:sldId id="278" r:id="rId29"/>
+    <p:sldId id="279" r:id="rId30"/>
   </p:sldIdLst>
   <p:sldSz cx="12191695" cy="6858000" type="screen4x3"/>
   <p:notesSz cx="6858000" cy="9144000"/>
@@ -923,6 +926,166 @@
 </c:chartSpace>
 </file>
 
+<file path=ppt/charts/chart4.xml><?xml version="1.0" encoding="utf-8"?>
+<c:chartSpace xmlns:c="http://schemas.openxmlformats.org/drawingml/2006/chart" xmlns:a="http://schemas.openxmlformats.org/drawingml/2006/main" xmlns:r="http://schemas.openxmlformats.org/officeDocument/2006/relationships">
+  <c:date1904 val="0"/>
+  <c:chart>
+    <c:autoTitleDeleted val="1"/>
+    <c:plotArea>
+      <c:lineChart>
+        <c:grouping val="standard"/>
+        <c:varyColors val="0"/>
+        <c:ser>
+          <c:idx val="0"/>
+          <c:order val="0"/>
+          <c:tx>
+            <c:strRef>
+              <c:f>Sheet1!$B$1</c:f>
+              <c:strCache>
+                <c:ptCount val="1"/>
+                <c:pt idx="0">
+                  <c:v>実績</c:v>
+                </c:pt>
+              </c:strCache>
+            </c:strRef>
+          </c:tx>
+          <c:spPr>
+            <a:ln w="20320">
+              <a:solidFill>
+                <a:srgbClr val="666E70"/>
+              </a:solidFill>
+            </a:ln>
+          </c:spPr>
+          <c:marker>
+            <c:spPr>
+              <a:solidFill>
+                <a:srgbClr val="666E70"/>
+              </a:solidFill>
+              <a:ln>
+                <a:solidFill>
+                  <a:srgbClr val="666E70"/>
+                </a:solidFill>
+              </a:ln>
+            </c:spPr>
+          </c:marker>
+          <c:cat>
+            <c:strRef>
+              <c:f>Sheet1!$A$2:$A$5</c:f>
+              <c:strCache>
+                <c:ptCount val="4"/>
+                <c:pt idx="0">
+                  <c:v>4月</c:v>
+                </c:pt>
+                <c:pt idx="1">
+                  <c:v>5月</c:v>
+                </c:pt>
+                <c:pt idx="2">
+                  <c:v>6月</c:v>
+                </c:pt>
+                <c:pt idx="3">
+                  <c:v>7月</c:v>
+                </c:pt>
+              </c:strCache>
+            </c:strRef>
+          </c:cat>
+          <c:val>
+            <c:numRef>
+              <c:f>Sheet1!$B$2:$B$5</c:f>
+              <c:numCache>
+                <c:formatCode>General</c:formatCode>
+                <c:ptCount val="4"/>
+                <c:pt idx="0">
+                  <c:v>12</c:v>
+                </c:pt>
+                <c:pt idx="1">
+                  <c:v>18</c:v>
+                </c:pt>
+                <c:pt idx="2">
+                  <c:v>27</c:v>
+                </c:pt>
+                <c:pt idx="3">
+                  <c:v>35</c:v>
+                </c:pt>
+              </c:numCache>
+            </c:numRef>
+          </c:val>
+          <c:smooth val="0"/>
+        </c:ser>
+        <c:marker val="1"/>
+        <c:smooth val="0"/>
+        <c:axId val="2118791784"/>
+        <c:axId val="2140495176"/>
+      </c:lineChart>
+      <c:catAx>
+        <c:axId val="2118791784"/>
+        <c:scaling>
+          <c:orientation val="minMax"/>
+        </c:scaling>
+        <c:delete val="0"/>
+        <c:axPos val="b"/>
+        <c:majorTickMark val="out"/>
+        <c:minorTickMark val="none"/>
+        <c:tickLblPos val="nextTo"/>
+        <c:spPr>
+          <a:ln>
+            <a:noFill/>
+          </a:ln>
+        </c:spPr>
+        <c:crossAx val="2140495176"/>
+        <c:crosses val="autoZero"/>
+        <c:auto val="1"/>
+        <c:lblAlgn val="ctr"/>
+        <c:lblOffset val="100"/>
+        <c:noMultiLvlLbl val="0"/>
+      </c:catAx>
+      <c:valAx>
+        <c:axId val="2140495176"/>
+        <c:scaling/>
+        <c:delete val="0"/>
+        <c:axPos val="l"/>
+        <c:majorGridlines>
+          <c:spPr>
+            <a:ln w="6350">
+              <a:solidFill>
+                <a:srgbClr val="D1CFC8"/>
+              </a:solidFill>
+            </a:ln>
+          </c:spPr>
+        </c:majorGridlines>
+        <c:majorTickMark val="out"/>
+        <c:minorTickMark val="none"/>
+        <c:tickLblPos val="nextTo"/>
+        <c:spPr>
+          <a:ln>
+            <a:noFill/>
+          </a:ln>
+        </c:spPr>
+        <c:crossAx val="2118791784"/>
+        <c:crosses val="autoZero"/>
+      </c:valAx>
+    </c:plotArea>
+    <c:plotVisOnly val="1"/>
+    <c:dispBlanksAs val="gap"/>
+    <c:showDLblsOverMax val="0"/>
+  </c:chart>
+  <c:txPr>
+    <a:bodyPr/>
+    <a:lstStyle/>
+    <a:p>
+      <a:pPr>
+        <a:defRPr sz="850">
+          <a:latin typeface="Yu Gothic"/>
+        </a:defRPr>
+      </a:pPr>
+      <a:endParaRPr lang="en-US"/>
+    </a:p>
+  </c:txPr>
+  <c:externalData r:id="rId1">
+    <c:autoUpdate val="0"/>
+  </c:externalData>
+</c:chartSpace>
+</file>
+
 <file path=ppt/slideLayouts/slideLayout1.xml><?xml version="1.0" encoding="utf-8"?>
 <p:sldLayout xmlns:a="http://schemas.openxmlformats.org/drawingml/2006/main" xmlns:r="http://schemas.openxmlformats.org/officeDocument/2006/relationships" xmlns:p="http://schemas.openxmlformats.org/presentationml/2006/main" type="title" preserve="1">
   <p:cSld name="Title Slide">
@@ -3919,7 +4082,7 @@
             <a:avLst/>
           </a:prstGeom>
           <a:solidFill>
-            <a:srgbClr val="16324F"/>
+            <a:srgbClr val="182C43"/>
           </a:solidFill>
           <a:ln>
             <a:noFill/>
@@ -3981,8 +4144,8 @@
         </p:nvSpPr>
         <p:spPr>
           <a:xfrm>
-            <a:off x="8942832" y="621792"/>
-            <a:ext cx="2395728" cy="274320"/>
+            <a:off x="822960" y="1572768"/>
+            <a:ext cx="7360920" cy="1243584"/>
           </a:xfrm>
           <a:prstGeom prst="rect">
             <a:avLst/>
@@ -3995,15 +4158,200 @@
           </a:bodyPr>
           <a:lstStyle/>
           <a:p>
-            <a:pPr algn="r">
+            <a:pPr algn="l">
+              <a:lnSpc>
+                <a:spcPct val="108000"/>
+              </a:lnSpc>
+            </a:pPr>
+            <a:r>
+              <a:rPr sz="4200" b="1" lang="ja-JP">
+                <a:solidFill>
+                  <a:srgbClr val="FFFFFC"/>
+                </a:solidFill>
+                <a:latin typeface="Yu Gothic"/>
+                <a:ea typeface="Yu Gothic"/>
+                <a:cs typeface="Yu Gothic"/>
+              </a:rPr>
+              <a:t>社内スライド</a:t>
+            </a:r>
+          </a:p>
+          <a:p>
+            <a:pPr algn="l">
+              <a:lnSpc>
+                <a:spcPct val="108000"/>
+              </a:lnSpc>
+            </a:pPr>
+            <a:r>
+              <a:rPr sz="4200" b="1" lang="ja-JP">
+                <a:solidFill>
+                  <a:srgbClr val="FFFFFC"/>
+                </a:solidFill>
+                <a:latin typeface="Yu Gothic"/>
+                <a:ea typeface="Yu Gothic"/>
+                <a:cs typeface="Yu Gothic"/>
+              </a:rPr>
+              <a:t>パターンライブラリ</a:t>
+            </a:r>
+          </a:p>
+        </p:txBody>
+      </p:sp>
+      <p:sp>
+        <p:nvSpPr>
+          <p:cNvPr id="5" name="TextBox 4"/>
+          <p:cNvSpPr txBox="1"/>
+          <p:nvPr/>
+        </p:nvSpPr>
+        <p:spPr>
+          <a:xfrm>
+            <a:off x="859536" y="3163824"/>
+            <a:ext cx="7315200" cy="731520"/>
+          </a:xfrm>
+          <a:prstGeom prst="rect">
+            <a:avLst/>
+          </a:prstGeom>
+          <a:noFill/>
+        </p:spPr>
+        <p:txBody>
+          <a:bodyPr wrap="square" anchor="t" lIns="0" rIns="0" tIns="0" bIns="0">
+            <a:spAutoFit/>
+          </a:bodyPr>
+          <a:lstStyle/>
+          <a:p>
+            <a:pPr algn="l">
+              <a:lnSpc>
+                <a:spcPct val="120000"/>
+              </a:lnSpc>
+            </a:pPr>
+            <a:r>
+              <a:rPr sz="1750" b="0" lang="ja-JP">
+                <a:solidFill>
+                  <a:srgbClr val="DFEBE8"/>
+                </a:solidFill>
+                <a:latin typeface="Yu Gothic"/>
+                <a:ea typeface="Yu Gothic"/>
+                <a:cs typeface="Yu Gothic"/>
+              </a:rPr>
+              <a:t>意思決定からシステム構成まで、21の標準レイアウトを検証</a:t>
+            </a:r>
+          </a:p>
+        </p:txBody>
+      </p:sp>
+      <p:sp>
+        <p:nvSpPr>
+          <p:cNvPr id="6" name="Rectangle 5"/>
+          <p:cNvSpPr/>
+          <p:nvPr/>
+        </p:nvSpPr>
+        <p:spPr>
+          <a:xfrm>
+            <a:off x="8641080" y="1536192"/>
+            <a:ext cx="10972" cy="3186684"/>
+          </a:xfrm>
+          <a:prstGeom prst="rect">
+            <a:avLst/>
+          </a:prstGeom>
+          <a:solidFill>
+            <a:srgbClr val="DFEBE8"/>
+          </a:solidFill>
+          <a:ln>
+            <a:noFill/>
+          </a:ln>
+          <a:effectLst/>
+        </p:spPr>
+        <p:style>
+          <a:lnRef idx="1">
+            <a:schemeClr val="accent1"/>
+          </a:lnRef>
+          <a:fillRef idx="3">
+            <a:schemeClr val="accent1"/>
+          </a:fillRef>
+          <a:effectRef idx="2">
+            <a:schemeClr val="accent1"/>
+          </a:effectRef>
+          <a:fontRef idx="minor">
+            <a:schemeClr val="lt1"/>
+          </a:fontRef>
+        </p:style>
+        <p:txBody>
+          <a:bodyPr rtlCol="0" anchor="ctr"/>
+          <a:lstStyle/>
+          <a:p>
+            <a:pPr algn="ctr"/>
+          </a:p>
+        </p:txBody>
+      </p:sp>
+      <p:sp>
+        <p:nvSpPr>
+          <p:cNvPr id="7" name="TextBox 6"/>
+          <p:cNvSpPr txBox="1"/>
+          <p:nvPr/>
+        </p:nvSpPr>
+        <p:spPr>
+          <a:xfrm>
+            <a:off x="8979408" y="1664208"/>
+            <a:ext cx="2057400" cy="228600"/>
+          </a:xfrm>
+          <a:prstGeom prst="rect">
+            <a:avLst/>
+          </a:prstGeom>
+          <a:noFill/>
+        </p:spPr>
+        <p:txBody>
+          <a:bodyPr wrap="none" anchor="t" lIns="0" rIns="0" tIns="0" bIns="0">
+            <a:spAutoFit/>
+          </a:bodyPr>
+          <a:lstStyle/>
+          <a:p>
+            <a:pPr algn="l">
               <a:lnSpc>
                 <a:spcPct val="130000"/>
               </a:lnSpc>
             </a:pPr>
             <a:r>
-              <a:rPr sz="1000" b="0" lang="ja-JP">
-                <a:solidFill>
-                  <a:srgbClr val="BFD7D2"/>
+              <a:rPr sz="880" b="1" lang="ja-JP">
+                <a:solidFill>
+                  <a:srgbClr val="DFEBE8"/>
+                </a:solidFill>
+                <a:latin typeface="Yu Gothic"/>
+                <a:ea typeface="Yu Gothic"/>
+                <a:cs typeface="Yu Gothic"/>
+              </a:rPr>
+              <a:t>DATE</a:t>
+            </a:r>
+          </a:p>
+        </p:txBody>
+      </p:sp>
+      <p:sp>
+        <p:nvSpPr>
+          <p:cNvPr id="8" name="TextBox 7"/>
+          <p:cNvSpPr txBox="1"/>
+          <p:nvPr/>
+        </p:nvSpPr>
+        <p:spPr>
+          <a:xfrm>
+            <a:off x="8979408" y="1975104"/>
+            <a:ext cx="2148840" cy="274320"/>
+          </a:xfrm>
+          <a:prstGeom prst="rect">
+            <a:avLst/>
+          </a:prstGeom>
+          <a:noFill/>
+        </p:spPr>
+        <p:txBody>
+          <a:bodyPr wrap="none" anchor="t" lIns="0" rIns="0" tIns="0" bIns="0">
+            <a:spAutoFit/>
+          </a:bodyPr>
+          <a:lstStyle/>
+          <a:p>
+            <a:pPr algn="l">
+              <a:lnSpc>
+                <a:spcPct val="108000"/>
+              </a:lnSpc>
+            </a:pPr>
+            <a:r>
+              <a:rPr sz="1350" b="1" lang="ja-JP">
+                <a:solidFill>
+                  <a:srgbClr val="FFFFFC"/>
                 </a:solidFill>
                 <a:latin typeface="Yu Gothic"/>
                 <a:ea typeface="Yu Gothic"/>
@@ -4016,14 +4364,14 @@
       </p:sp>
       <p:sp>
         <p:nvSpPr>
-          <p:cNvPr id="5" name="TextBox 4"/>
-          <p:cNvSpPr txBox="1"/>
-          <p:nvPr/>
-        </p:nvSpPr>
-        <p:spPr>
-          <a:xfrm>
-            <a:off x="822960" y="1572768"/>
-            <a:ext cx="10469880" cy="1243584"/>
+          <p:cNvPr id="9" name="TextBox 8"/>
+          <p:cNvSpPr txBox="1"/>
+          <p:nvPr/>
+        </p:nvSpPr>
+        <p:spPr>
+          <a:xfrm>
+            <a:off x="8979408" y="2752344"/>
+            <a:ext cx="2057400" cy="228600"/>
           </a:xfrm>
           <a:prstGeom prst="rect">
             <a:avLst/>
@@ -4031,26 +4379,67 @@
           <a:noFill/>
         </p:spPr>
         <p:txBody>
-          <a:bodyPr wrap="square" anchor="t" lIns="0" rIns="0" tIns="0" bIns="0">
+          <a:bodyPr wrap="none" anchor="t" lIns="0" rIns="0" tIns="0" bIns="0">
             <a:spAutoFit/>
           </a:bodyPr>
           <a:lstStyle/>
           <a:p>
             <a:pPr algn="l">
               <a:lnSpc>
+                <a:spcPct val="130000"/>
+              </a:lnSpc>
+            </a:pPr>
+            <a:r>
+              <a:rPr sz="880" b="1" lang="ja-JP">
+                <a:solidFill>
+                  <a:srgbClr val="DFEBE8"/>
+                </a:solidFill>
+                <a:latin typeface="Yu Gothic"/>
+                <a:ea typeface="Yu Gothic"/>
+                <a:cs typeface="Yu Gothic"/>
+              </a:rPr>
+              <a:t>ORGANIZATION</a:t>
+            </a:r>
+          </a:p>
+        </p:txBody>
+      </p:sp>
+      <p:sp>
+        <p:nvSpPr>
+          <p:cNvPr id="10" name="TextBox 9"/>
+          <p:cNvSpPr txBox="1"/>
+          <p:nvPr/>
+        </p:nvSpPr>
+        <p:spPr>
+          <a:xfrm>
+            <a:off x="8979408" y="3063239"/>
+            <a:ext cx="2148840" cy="406908"/>
+          </a:xfrm>
+          <a:prstGeom prst="rect">
+            <a:avLst/>
+          </a:prstGeom>
+          <a:noFill/>
+        </p:spPr>
+        <p:txBody>
+          <a:bodyPr wrap="none" anchor="t" lIns="0" rIns="0" tIns="0" bIns="0">
+            <a:spAutoFit/>
+          </a:bodyPr>
+          <a:lstStyle/>
+          <a:p>
+            <a:pPr algn="l">
+              <a:lnSpc>
                 <a:spcPct val="108000"/>
               </a:lnSpc>
             </a:pPr>
             <a:r>
-              <a:rPr sz="4200" b="1" lang="ja-JP">
-                <a:solidFill>
-                  <a:srgbClr val="FFFDF7"/>
-                </a:solidFill>
-                <a:latin typeface="Yu Gothic"/>
-                <a:ea typeface="Yu Gothic"/>
-                <a:cs typeface="Yu Gothic"/>
-              </a:rPr>
-              <a:t>社内スライド</a:t>
+              <a:rPr sz="1350" b="1" lang="ja-JP">
+                <a:solidFill>
+                  <a:srgbClr val="FFFFFC"/>
+                </a:solidFill>
+                <a:latin typeface="Yu Gothic"/>
+                <a:ea typeface="Yu Gothic"/>
+                <a:cs typeface="Yu Gothic"/>
+              </a:rPr>
+              <a:t>業務企画本部</a:t>
             </a:r>
           </a:p>
           <a:p>
@@ -4060,29 +4449,29 @@
               </a:lnSpc>
             </a:pPr>
             <a:r>
-              <a:rPr sz="4200" b="1" lang="ja-JP">
-                <a:solidFill>
-                  <a:srgbClr val="FFFDF7"/>
-                </a:solidFill>
-                <a:latin typeface="Yu Gothic"/>
-                <a:ea typeface="Yu Gothic"/>
-                <a:cs typeface="Yu Gothic"/>
-              </a:rPr>
-              <a:t>パターンライブラリ</a:t>
-            </a:r>
-          </a:p>
-        </p:txBody>
-      </p:sp>
-      <p:sp>
-        <p:nvSpPr>
-          <p:cNvPr id="6" name="TextBox 5"/>
-          <p:cNvSpPr txBox="1"/>
-          <p:nvPr/>
-        </p:nvSpPr>
-        <p:spPr>
-          <a:xfrm>
-            <a:off x="859536" y="3163824"/>
-            <a:ext cx="10378440" cy="731520"/>
+              <a:rPr sz="1350" b="1" lang="ja-JP">
+                <a:solidFill>
+                  <a:srgbClr val="FFFFFC"/>
+                </a:solidFill>
+                <a:latin typeface="Yu Gothic"/>
+                <a:ea typeface="Yu Gothic"/>
+                <a:cs typeface="Yu Gothic"/>
+              </a:rPr>
+              <a:t>業務改善推進部</a:t>
+            </a:r>
+          </a:p>
+        </p:txBody>
+      </p:sp>
+      <p:sp>
+        <p:nvSpPr>
+          <p:cNvPr id="11" name="TextBox 10"/>
+          <p:cNvSpPr txBox="1"/>
+          <p:nvPr/>
+        </p:nvSpPr>
+        <p:spPr>
+          <a:xfrm>
+            <a:off x="8979408" y="3973068"/>
+            <a:ext cx="2057400" cy="228600"/>
           </a:xfrm>
           <a:prstGeom prst="rect">
             <a:avLst/>
@@ -4090,40 +4479,40 @@
           <a:noFill/>
         </p:spPr>
         <p:txBody>
-          <a:bodyPr wrap="square" anchor="t" lIns="0" rIns="0" tIns="0" bIns="0">
+          <a:bodyPr wrap="none" anchor="t" lIns="0" rIns="0" tIns="0" bIns="0">
             <a:spAutoFit/>
           </a:bodyPr>
           <a:lstStyle/>
           <a:p>
             <a:pPr algn="l">
               <a:lnSpc>
-                <a:spcPct val="120000"/>
-              </a:lnSpc>
-            </a:pPr>
-            <a:r>
-              <a:rPr sz="1750" b="0" lang="ja-JP">
-                <a:solidFill>
-                  <a:srgbClr val="BFD7D2"/>
-                </a:solidFill>
-                <a:latin typeface="Yu Gothic"/>
-                <a:ea typeface="Yu Gothic"/>
-                <a:cs typeface="Yu Gothic"/>
-              </a:rPr>
-              <a:t>意思決定からシステム構成まで、21の標準レイアウトを検証</a:t>
-            </a:r>
-          </a:p>
-        </p:txBody>
-      </p:sp>
-      <p:sp>
-        <p:nvSpPr>
-          <p:cNvPr id="7" name="TextBox 6"/>
-          <p:cNvSpPr txBox="1"/>
-          <p:nvPr/>
-        </p:nvSpPr>
-        <p:spPr>
-          <a:xfrm>
-            <a:off x="822960" y="5943600"/>
-            <a:ext cx="4389120" cy="274320"/>
+                <a:spcPct val="130000"/>
+              </a:lnSpc>
+            </a:pPr>
+            <a:r>
+              <a:rPr sz="880" b="1" lang="ja-JP">
+                <a:solidFill>
+                  <a:srgbClr val="DFEBE8"/>
+                </a:solidFill>
+                <a:latin typeface="Yu Gothic"/>
+                <a:ea typeface="Yu Gothic"/>
+                <a:cs typeface="Yu Gothic"/>
+              </a:rPr>
+              <a:t>AUTHOR</a:t>
+            </a:r>
+          </a:p>
+        </p:txBody>
+      </p:sp>
+      <p:sp>
+        <p:nvSpPr>
+          <p:cNvPr id="12" name="TextBox 11"/>
+          <p:cNvSpPr txBox="1"/>
+          <p:nvPr/>
+        </p:nvSpPr>
+        <p:spPr>
+          <a:xfrm>
+            <a:off x="8979408" y="4283964"/>
+            <a:ext cx="2148840" cy="274320"/>
           </a:xfrm>
           <a:prstGeom prst="rect">
             <a:avLst/>
@@ -4131,20 +4520,20 @@
           <a:noFill/>
         </p:spPr>
         <p:txBody>
-          <a:bodyPr wrap="square" anchor="t" lIns="0" rIns="0" tIns="0" bIns="0">
+          <a:bodyPr wrap="none" anchor="t" lIns="0" rIns="0" tIns="0" bIns="0">
             <a:spAutoFit/>
           </a:bodyPr>
           <a:lstStyle/>
           <a:p>
             <a:pPr algn="l">
               <a:lnSpc>
-                <a:spcPct val="130000"/>
-              </a:lnSpc>
-            </a:pPr>
-            <a:r>
-              <a:rPr sz="1050" b="1" lang="ja-JP">
-                <a:solidFill>
-                  <a:srgbClr val="FFFDF7"/>
+                <a:spcPct val="108000"/>
+              </a:lnSpc>
+            </a:pPr>
+            <a:r>
+              <a:rPr sz="1350" b="1" lang="ja-JP">
+                <a:solidFill>
+                  <a:srgbClr val="FFFFFC"/>
                 </a:solidFill>
                 <a:latin typeface="Yu Gothic"/>
                 <a:ea typeface="Yu Gothic"/>
@@ -4346,7 +4735,7 @@
             <a:avLst/>
           </a:prstGeom>
           <a:solidFill>
-            <a:srgbClr val="C9D4D1"/>
+            <a:srgbClr val="D1CFC8"/>
           </a:solidFill>
           <a:ln>
             <a:noFill/>
@@ -4405,7 +4794,7 @@
             <a:r>
               <a:rPr sz="819" b="0" lang="ja-JP">
                 <a:solidFill>
-                  <a:srgbClr val="667478"/>
+                  <a:srgbClr val="666E70"/>
                 </a:solidFill>
                 <a:latin typeface="Yu Gothic"/>
                 <a:ea typeface="Yu Gothic"/>
@@ -4446,7 +4835,7 @@
             <a:r>
               <a:rPr sz="1100" b="1" lang="ja-JP">
                 <a:solidFill>
-                  <a:srgbClr val="16324F"/>
+                  <a:srgbClr val="182C43"/>
                 </a:solidFill>
                 <a:latin typeface="Yu Gothic"/>
                 <a:ea typeface="Yu Gothic"/>
@@ -4487,13 +4876,13 @@
             <a:r>
               <a:rPr sz="819" b="0" lang="ja-JP">
                 <a:solidFill>
-                  <a:srgbClr val="667478"/>
-                </a:solidFill>
-                <a:latin typeface="Yu Gothic"/>
-                <a:ea typeface="Yu Gothic"/>
-                <a:cs typeface="Yu Gothic"/>
-              </a:rPr>
-              <a:t>/ 21</a:t>
+                  <a:srgbClr val="666E70"/>
+                </a:solidFill>
+                <a:latin typeface="Yu Gothic"/>
+                <a:ea typeface="Yu Gothic"/>
+                <a:cs typeface="Yu Gothic"/>
+              </a:rPr>
+              <a:t>/ 24</a:t>
             </a:r>
           </a:p>
         </p:txBody>
@@ -5946,7 +6335,7 @@
             <a:avLst/>
           </a:prstGeom>
           <a:solidFill>
-            <a:srgbClr val="C9D4D1"/>
+            <a:srgbClr val="D1CFC8"/>
           </a:solidFill>
           <a:ln>
             <a:noFill/>
@@ -6005,7 +6394,7 @@
             <a:r>
               <a:rPr sz="819" b="0" lang="ja-JP">
                 <a:solidFill>
-                  <a:srgbClr val="667478"/>
+                  <a:srgbClr val="666E70"/>
                 </a:solidFill>
                 <a:latin typeface="Yu Gothic"/>
                 <a:ea typeface="Yu Gothic"/>
@@ -6046,7 +6435,7 @@
             <a:r>
               <a:rPr sz="1100" b="1" lang="ja-JP">
                 <a:solidFill>
-                  <a:srgbClr val="16324F"/>
+                  <a:srgbClr val="182C43"/>
                 </a:solidFill>
                 <a:latin typeface="Yu Gothic"/>
                 <a:ea typeface="Yu Gothic"/>
@@ -6087,13 +6476,13 @@
             <a:r>
               <a:rPr sz="819" b="0" lang="ja-JP">
                 <a:solidFill>
-                  <a:srgbClr val="667478"/>
-                </a:solidFill>
-                <a:latin typeface="Yu Gothic"/>
-                <a:ea typeface="Yu Gothic"/>
-                <a:cs typeface="Yu Gothic"/>
-              </a:rPr>
-              <a:t>/ 21</a:t>
+                  <a:srgbClr val="666E70"/>
+                </a:solidFill>
+                <a:latin typeface="Yu Gothic"/>
+                <a:ea typeface="Yu Gothic"/>
+                <a:cs typeface="Yu Gothic"/>
+              </a:rPr>
+              <a:t>/ 24</a:t>
             </a:r>
           </a:p>
         </p:txBody>
@@ -7563,7 +7952,7 @@
             <a:avLst/>
           </a:prstGeom>
           <a:solidFill>
-            <a:srgbClr val="C9D4D1"/>
+            <a:srgbClr val="D1CFC8"/>
           </a:solidFill>
           <a:ln>
             <a:noFill/>
@@ -7622,7 +8011,7 @@
             <a:r>
               <a:rPr sz="819" b="0" lang="ja-JP">
                 <a:solidFill>
-                  <a:srgbClr val="667478"/>
+                  <a:srgbClr val="666E70"/>
                 </a:solidFill>
                 <a:latin typeface="Yu Gothic"/>
                 <a:ea typeface="Yu Gothic"/>
@@ -7663,7 +8052,7 @@
             <a:r>
               <a:rPr sz="1100" b="1" lang="ja-JP">
                 <a:solidFill>
-                  <a:srgbClr val="16324F"/>
+                  <a:srgbClr val="182C43"/>
                 </a:solidFill>
                 <a:latin typeface="Yu Gothic"/>
                 <a:ea typeface="Yu Gothic"/>
@@ -7704,13 +8093,13 @@
             <a:r>
               <a:rPr sz="819" b="0" lang="ja-JP">
                 <a:solidFill>
-                  <a:srgbClr val="667478"/>
-                </a:solidFill>
-                <a:latin typeface="Yu Gothic"/>
-                <a:ea typeface="Yu Gothic"/>
-                <a:cs typeface="Yu Gothic"/>
-              </a:rPr>
-              <a:t>/ 21</a:t>
+                  <a:srgbClr val="666E70"/>
+                </a:solidFill>
+                <a:latin typeface="Yu Gothic"/>
+                <a:ea typeface="Yu Gothic"/>
+                <a:cs typeface="Yu Gothic"/>
+              </a:rPr>
+              <a:t>/ 24</a:t>
             </a:r>
           </a:p>
         </p:txBody>
@@ -11184,7 +11573,7 @@
             <a:avLst/>
           </a:prstGeom>
           <a:solidFill>
-            <a:srgbClr val="C9D4D1"/>
+            <a:srgbClr val="D1CFC8"/>
           </a:solidFill>
           <a:ln>
             <a:noFill/>
@@ -11243,7 +11632,7 @@
             <a:r>
               <a:rPr sz="819" b="0" lang="ja-JP">
                 <a:solidFill>
-                  <a:srgbClr val="667478"/>
+                  <a:srgbClr val="666E70"/>
                 </a:solidFill>
                 <a:latin typeface="Yu Gothic"/>
                 <a:ea typeface="Yu Gothic"/>
@@ -11284,7 +11673,7 @@
             <a:r>
               <a:rPr sz="1100" b="1" lang="ja-JP">
                 <a:solidFill>
-                  <a:srgbClr val="16324F"/>
+                  <a:srgbClr val="182C43"/>
                 </a:solidFill>
                 <a:latin typeface="Yu Gothic"/>
                 <a:ea typeface="Yu Gothic"/>
@@ -11325,13 +11714,13 @@
             <a:r>
               <a:rPr sz="819" b="0" lang="ja-JP">
                 <a:solidFill>
-                  <a:srgbClr val="667478"/>
-                </a:solidFill>
-                <a:latin typeface="Yu Gothic"/>
-                <a:ea typeface="Yu Gothic"/>
-                <a:cs typeface="Yu Gothic"/>
-              </a:rPr>
-              <a:t>/ 21</a:t>
+                  <a:srgbClr val="666E70"/>
+                </a:solidFill>
+                <a:latin typeface="Yu Gothic"/>
+                <a:ea typeface="Yu Gothic"/>
+                <a:cs typeface="Yu Gothic"/>
+              </a:rPr>
+              <a:t>/ 24</a:t>
             </a:r>
           </a:p>
         </p:txBody>
@@ -14893,7 +15282,7 @@
             <a:avLst/>
           </a:prstGeom>
           <a:solidFill>
-            <a:srgbClr val="C9D4D1"/>
+            <a:srgbClr val="D1CFC8"/>
           </a:solidFill>
           <a:ln>
             <a:noFill/>
@@ -14952,7 +15341,7 @@
             <a:r>
               <a:rPr sz="819" b="0" lang="ja-JP">
                 <a:solidFill>
-                  <a:srgbClr val="667478"/>
+                  <a:srgbClr val="666E70"/>
                 </a:solidFill>
                 <a:latin typeface="Yu Gothic"/>
                 <a:ea typeface="Yu Gothic"/>
@@ -14993,7 +15382,7 @@
             <a:r>
               <a:rPr sz="1100" b="1" lang="ja-JP">
                 <a:solidFill>
-                  <a:srgbClr val="16324F"/>
+                  <a:srgbClr val="182C43"/>
                 </a:solidFill>
                 <a:latin typeface="Yu Gothic"/>
                 <a:ea typeface="Yu Gothic"/>
@@ -15034,13 +15423,13 @@
             <a:r>
               <a:rPr sz="819" b="0" lang="ja-JP">
                 <a:solidFill>
-                  <a:srgbClr val="667478"/>
-                </a:solidFill>
-                <a:latin typeface="Yu Gothic"/>
-                <a:ea typeface="Yu Gothic"/>
-                <a:cs typeface="Yu Gothic"/>
-              </a:rPr>
-              <a:t>/ 21</a:t>
+                  <a:srgbClr val="666E70"/>
+                </a:solidFill>
+                <a:latin typeface="Yu Gothic"/>
+                <a:ea typeface="Yu Gothic"/>
+                <a:cs typeface="Yu Gothic"/>
+              </a:rPr>
+              <a:t>/ 24</a:t>
             </a:r>
           </a:p>
         </p:txBody>
@@ -16177,7 +16566,7 @@
             <a:avLst/>
           </a:prstGeom>
           <a:solidFill>
-            <a:srgbClr val="C9D4D1"/>
+            <a:srgbClr val="D1CFC8"/>
           </a:solidFill>
           <a:ln>
             <a:noFill/>
@@ -16236,7 +16625,7 @@
             <a:r>
               <a:rPr sz="819" b="0" lang="ja-JP">
                 <a:solidFill>
-                  <a:srgbClr val="667478"/>
+                  <a:srgbClr val="666E70"/>
                 </a:solidFill>
                 <a:latin typeface="Yu Gothic"/>
                 <a:ea typeface="Yu Gothic"/>
@@ -16277,7 +16666,7 @@
             <a:r>
               <a:rPr sz="1100" b="1" lang="ja-JP">
                 <a:solidFill>
-                  <a:srgbClr val="16324F"/>
+                  <a:srgbClr val="182C43"/>
                 </a:solidFill>
                 <a:latin typeface="Yu Gothic"/>
                 <a:ea typeface="Yu Gothic"/>
@@ -16318,13 +16707,13 @@
             <a:r>
               <a:rPr sz="819" b="0" lang="ja-JP">
                 <a:solidFill>
-                  <a:srgbClr val="667478"/>
-                </a:solidFill>
-                <a:latin typeface="Yu Gothic"/>
-                <a:ea typeface="Yu Gothic"/>
-                <a:cs typeface="Yu Gothic"/>
-              </a:rPr>
-              <a:t>/ 21</a:t>
+                  <a:srgbClr val="666E70"/>
+                </a:solidFill>
+                <a:latin typeface="Yu Gothic"/>
+                <a:ea typeface="Yu Gothic"/>
+                <a:cs typeface="Yu Gothic"/>
+              </a:rPr>
+              <a:t>/ 24</a:t>
             </a:r>
           </a:p>
         </p:txBody>
@@ -16910,7 +17299,7 @@
         </p:nvSpPr>
         <p:spPr>
           <a:xfrm>
-            <a:off x="5821870" y="2652648"/>
+            <a:off x="5821870" y="2619756"/>
             <a:ext cx="554355" cy="190246"/>
           </a:xfrm>
           <a:prstGeom prst="rect">
@@ -16953,7 +17342,7 @@
         </p:nvSpPr>
         <p:spPr>
           <a:xfrm>
-            <a:off x="5806440" y="2913507"/>
+            <a:off x="5806440" y="2875788"/>
             <a:ext cx="585216" cy="162306"/>
           </a:xfrm>
           <a:prstGeom prst="rect">
@@ -17020,7 +17409,7 @@
         </p:nvSpPr>
         <p:spPr>
           <a:xfrm>
-            <a:off x="9555999" y="3739404"/>
+            <a:off x="9555999" y="3706511"/>
             <a:ext cx="1017270" cy="190246"/>
           </a:xfrm>
           <a:prstGeom prst="rect">
@@ -17063,7 +17452,7 @@
         </p:nvSpPr>
         <p:spPr>
           <a:xfrm>
-            <a:off x="9772026" y="4000262"/>
+            <a:off x="9772026" y="3962543"/>
             <a:ext cx="585216" cy="162306"/>
           </a:xfrm>
           <a:prstGeom prst="rect">
@@ -17130,7 +17519,7 @@
         </p:nvSpPr>
         <p:spPr>
           <a:xfrm>
-            <a:off x="8195585" y="4327381"/>
+            <a:off x="8195585" y="4360274"/>
             <a:ext cx="708660" cy="190246"/>
           </a:xfrm>
           <a:prstGeom prst="rect">
@@ -17173,7 +17562,7 @@
         </p:nvSpPr>
         <p:spPr>
           <a:xfrm>
-            <a:off x="8319029" y="4588239"/>
+            <a:off x="8319029" y="4625958"/>
             <a:ext cx="461772" cy="162306"/>
           </a:xfrm>
           <a:prstGeom prst="rect">
@@ -17240,7 +17629,7 @@
         </p:nvSpPr>
         <p:spPr>
           <a:xfrm>
-            <a:off x="3448155" y="4327381"/>
+            <a:off x="3448155" y="4360274"/>
             <a:ext cx="400050" cy="190246"/>
           </a:xfrm>
           <a:prstGeom prst="rect">
@@ -17283,7 +17672,7 @@
         </p:nvSpPr>
         <p:spPr>
           <a:xfrm>
-            <a:off x="3355572" y="4588239"/>
+            <a:off x="3355572" y="4625958"/>
             <a:ext cx="585216" cy="162306"/>
           </a:xfrm>
           <a:prstGeom prst="rect">
@@ -17350,7 +17739,7 @@
         </p:nvSpPr>
         <p:spPr>
           <a:xfrm>
-            <a:off x="1933436" y="3739404"/>
+            <a:off x="1933436" y="3706511"/>
             <a:ext cx="400050" cy="190246"/>
           </a:xfrm>
           <a:prstGeom prst="rect">
@@ -17393,7 +17782,7 @@
         </p:nvSpPr>
         <p:spPr>
           <a:xfrm>
-            <a:off x="1840853" y="4000262"/>
+            <a:off x="1840853" y="3962543"/>
             <a:ext cx="585216" cy="162306"/>
           </a:xfrm>
           <a:prstGeom prst="rect">
@@ -17546,7 +17935,7 @@
             <a:avLst/>
           </a:prstGeom>
           <a:solidFill>
-            <a:srgbClr val="C9D4D1"/>
+            <a:srgbClr val="D1CFC8"/>
           </a:solidFill>
           <a:ln>
             <a:noFill/>
@@ -17605,7 +17994,7 @@
             <a:r>
               <a:rPr sz="819" b="0" lang="ja-JP">
                 <a:solidFill>
-                  <a:srgbClr val="667478"/>
+                  <a:srgbClr val="666E70"/>
                 </a:solidFill>
                 <a:latin typeface="Yu Gothic"/>
                 <a:ea typeface="Yu Gothic"/>
@@ -17646,7 +18035,7 @@
             <a:r>
               <a:rPr sz="1100" b="1" lang="ja-JP">
                 <a:solidFill>
-                  <a:srgbClr val="16324F"/>
+                  <a:srgbClr val="182C43"/>
                 </a:solidFill>
                 <a:latin typeface="Yu Gothic"/>
                 <a:ea typeface="Yu Gothic"/>
@@ -17687,13 +18076,13 @@
             <a:r>
               <a:rPr sz="819" b="0" lang="ja-JP">
                 <a:solidFill>
-                  <a:srgbClr val="667478"/>
-                </a:solidFill>
-                <a:latin typeface="Yu Gothic"/>
-                <a:ea typeface="Yu Gothic"/>
-                <a:cs typeface="Yu Gothic"/>
-              </a:rPr>
-              <a:t>/ 21</a:t>
+                  <a:srgbClr val="666E70"/>
+                </a:solidFill>
+                <a:latin typeface="Yu Gothic"/>
+                <a:ea typeface="Yu Gothic"/>
+                <a:cs typeface="Yu Gothic"/>
+              </a:rPr>
+              <a:t>/ 24</a:t>
             </a:r>
           </a:p>
         </p:txBody>
@@ -19118,7 +19507,7 @@
             <a:avLst/>
           </a:prstGeom>
           <a:solidFill>
-            <a:srgbClr val="C9D4D1"/>
+            <a:srgbClr val="D1CFC8"/>
           </a:solidFill>
           <a:ln>
             <a:noFill/>
@@ -19177,7 +19566,7 @@
             <a:r>
               <a:rPr sz="819" b="0" lang="ja-JP">
                 <a:solidFill>
-                  <a:srgbClr val="667478"/>
+                  <a:srgbClr val="666E70"/>
                 </a:solidFill>
                 <a:latin typeface="Yu Gothic"/>
                 <a:ea typeface="Yu Gothic"/>
@@ -19218,7 +19607,7 @@
             <a:r>
               <a:rPr sz="1100" b="1" lang="ja-JP">
                 <a:solidFill>
-                  <a:srgbClr val="16324F"/>
+                  <a:srgbClr val="182C43"/>
                 </a:solidFill>
                 <a:latin typeface="Yu Gothic"/>
                 <a:ea typeface="Yu Gothic"/>
@@ -19259,13 +19648,13 @@
             <a:r>
               <a:rPr sz="819" b="0" lang="ja-JP">
                 <a:solidFill>
-                  <a:srgbClr val="667478"/>
-                </a:solidFill>
-                <a:latin typeface="Yu Gothic"/>
-                <a:ea typeface="Yu Gothic"/>
-                <a:cs typeface="Yu Gothic"/>
-              </a:rPr>
-              <a:t>/ 21</a:t>
+                  <a:srgbClr val="666E70"/>
+                </a:solidFill>
+                <a:latin typeface="Yu Gothic"/>
+                <a:ea typeface="Yu Gothic"/>
+                <a:cs typeface="Yu Gothic"/>
+              </a:rPr>
+              <a:t>/ 24</a:t>
             </a:r>
           </a:p>
         </p:txBody>
@@ -19983,7 +20372,7 @@
         </p:nvSpPr>
         <p:spPr>
           <a:xfrm>
-            <a:off x="1091565" y="3977614"/>
+            <a:off x="1091565" y="3944721"/>
             <a:ext cx="1017270" cy="190246"/>
           </a:xfrm>
           <a:prstGeom prst="rect">
@@ -20026,7 +20415,7 @@
         </p:nvSpPr>
         <p:spPr>
           <a:xfrm>
-            <a:off x="1307592" y="4238472"/>
+            <a:off x="1307592" y="4200753"/>
             <a:ext cx="585216" cy="162306"/>
           </a:xfrm>
           <a:prstGeom prst="rect">
@@ -20093,7 +20482,7 @@
         </p:nvSpPr>
         <p:spPr>
           <a:xfrm>
-            <a:off x="3647998" y="3977614"/>
+            <a:off x="3647998" y="3944721"/>
             <a:ext cx="400050" cy="190246"/>
           </a:xfrm>
           <a:prstGeom prst="rect">
@@ -20136,7 +20525,7 @@
         </p:nvSpPr>
         <p:spPr>
           <a:xfrm>
-            <a:off x="3601707" y="4238472"/>
+            <a:off x="3601707" y="4200753"/>
             <a:ext cx="492633" cy="162306"/>
           </a:xfrm>
           <a:prstGeom prst="rect">
@@ -20203,7 +20592,7 @@
         </p:nvSpPr>
         <p:spPr>
           <a:xfrm>
-            <a:off x="5571782" y="3977614"/>
+            <a:off x="5571782" y="3944721"/>
             <a:ext cx="1048131" cy="190246"/>
           </a:xfrm>
           <a:prstGeom prst="rect">
@@ -20246,7 +20635,7 @@
         </p:nvSpPr>
         <p:spPr>
           <a:xfrm>
-            <a:off x="5412333" y="4238472"/>
+            <a:off x="5412333" y="4200753"/>
             <a:ext cx="1367028" cy="162306"/>
           </a:xfrm>
           <a:prstGeom prst="rect">
@@ -20313,7 +20702,7 @@
         </p:nvSpPr>
         <p:spPr>
           <a:xfrm>
-            <a:off x="7665300" y="2734030"/>
+            <a:off x="7665300" y="2701137"/>
             <a:ext cx="1356741" cy="190246"/>
           </a:xfrm>
           <a:prstGeom prst="rect">
@@ -20356,7 +20745,7 @@
         </p:nvSpPr>
         <p:spPr>
           <a:xfrm>
-            <a:off x="7624152" y="2994888"/>
+            <a:off x="7624152" y="2957169"/>
             <a:ext cx="1439037" cy="162306"/>
           </a:xfrm>
           <a:prstGeom prst="rect">
@@ -20423,7 +20812,7 @@
         </p:nvSpPr>
         <p:spPr>
           <a:xfrm>
-            <a:off x="7881327" y="3977614"/>
+            <a:off x="7881327" y="3944721"/>
             <a:ext cx="924687" cy="190246"/>
           </a:xfrm>
           <a:prstGeom prst="rect">
@@ -20466,7 +20855,7 @@
         </p:nvSpPr>
         <p:spPr>
           <a:xfrm>
-            <a:off x="7711592" y="4238472"/>
+            <a:off x="7711592" y="4200753"/>
             <a:ext cx="1264158" cy="162306"/>
           </a:xfrm>
           <a:prstGeom prst="rect">
@@ -20533,7 +20922,7 @@
         </p:nvSpPr>
         <p:spPr>
           <a:xfrm>
-            <a:off x="7845323" y="5221198"/>
+            <a:off x="7845323" y="5188305"/>
             <a:ext cx="996696" cy="190246"/>
           </a:xfrm>
           <a:prstGeom prst="rect">
@@ -20576,7 +20965,7 @@
         </p:nvSpPr>
         <p:spPr>
           <a:xfrm>
-            <a:off x="7865897" y="5482056"/>
+            <a:off x="7865897" y="5444337"/>
             <a:ext cx="955547" cy="162306"/>
           </a:xfrm>
           <a:prstGeom prst="rect">
@@ -20643,7 +21032,7 @@
         </p:nvSpPr>
         <p:spPr>
           <a:xfrm>
-            <a:off x="10237165" y="3977614"/>
+            <a:off x="10237165" y="3944721"/>
             <a:ext cx="708660" cy="190246"/>
           </a:xfrm>
           <a:prstGeom prst="rect">
@@ -20686,7 +21075,7 @@
         </p:nvSpPr>
         <p:spPr>
           <a:xfrm>
-            <a:off x="10175443" y="4238472"/>
+            <a:off x="10175443" y="4200753"/>
             <a:ext cx="832104" cy="162306"/>
           </a:xfrm>
           <a:prstGeom prst="rect">
@@ -20949,7 +21338,7 @@
             <a:avLst/>
           </a:prstGeom>
           <a:solidFill>
-            <a:srgbClr val="C9D4D1"/>
+            <a:srgbClr val="D1CFC8"/>
           </a:solidFill>
           <a:ln>
             <a:noFill/>
@@ -21008,7 +21397,7 @@
             <a:r>
               <a:rPr sz="819" b="0" lang="ja-JP">
                 <a:solidFill>
-                  <a:srgbClr val="667478"/>
+                  <a:srgbClr val="666E70"/>
                 </a:solidFill>
                 <a:latin typeface="Yu Gothic"/>
                 <a:ea typeface="Yu Gothic"/>
@@ -21049,7 +21438,7 @@
             <a:r>
               <a:rPr sz="1100" b="1" lang="ja-JP">
                 <a:solidFill>
-                  <a:srgbClr val="16324F"/>
+                  <a:srgbClr val="182C43"/>
                 </a:solidFill>
                 <a:latin typeface="Yu Gothic"/>
                 <a:ea typeface="Yu Gothic"/>
@@ -21090,13 +21479,13 @@
             <a:r>
               <a:rPr sz="819" b="0" lang="ja-JP">
                 <a:solidFill>
-                  <a:srgbClr val="667478"/>
-                </a:solidFill>
-                <a:latin typeface="Yu Gothic"/>
-                <a:ea typeface="Yu Gothic"/>
-                <a:cs typeface="Yu Gothic"/>
-              </a:rPr>
-              <a:t>/ 21</a:t>
+                  <a:srgbClr val="666E70"/>
+                </a:solidFill>
+                <a:latin typeface="Yu Gothic"/>
+                <a:ea typeface="Yu Gothic"/>
+                <a:cs typeface="Yu Gothic"/>
+              </a:rPr>
+              <a:t>/ 24</a:t>
             </a:r>
           </a:p>
         </p:txBody>
@@ -22389,7 +22778,7 @@
         </p:nvSpPr>
         <p:spPr>
           <a:xfrm>
-            <a:off x="1091565" y="3341283"/>
+            <a:off x="1091565" y="3308390"/>
             <a:ext cx="1017270" cy="190246"/>
           </a:xfrm>
           <a:prstGeom prst="rect">
@@ -22456,7 +22845,7 @@
         </p:nvSpPr>
         <p:spPr>
           <a:xfrm>
-            <a:off x="3018411" y="2335443"/>
+            <a:off x="3018411" y="2302550"/>
             <a:ext cx="760095" cy="190246"/>
           </a:xfrm>
           <a:prstGeom prst="rect">
@@ -22523,7 +22912,7 @@
         </p:nvSpPr>
         <p:spPr>
           <a:xfrm>
-            <a:off x="2930972" y="3341283"/>
+            <a:off x="2930972" y="3308390"/>
             <a:ext cx="934974" cy="190246"/>
           </a:xfrm>
           <a:prstGeom prst="rect">
@@ -22590,7 +22979,7 @@
         </p:nvSpPr>
         <p:spPr>
           <a:xfrm>
-            <a:off x="6794952" y="3341283"/>
+            <a:off x="6794952" y="3308390"/>
             <a:ext cx="400050" cy="190246"/>
           </a:xfrm>
           <a:prstGeom prst="rect">
@@ -22657,7 +23046,7 @@
         </p:nvSpPr>
         <p:spPr>
           <a:xfrm>
-            <a:off x="4852675" y="4584867"/>
+            <a:off x="4852675" y="4551974"/>
             <a:ext cx="688086" cy="190246"/>
           </a:xfrm>
           <a:prstGeom prst="rect">
@@ -22724,7 +23113,7 @@
         </p:nvSpPr>
         <p:spPr>
           <a:xfrm>
-            <a:off x="8449193" y="4584867"/>
+            <a:off x="8449193" y="4551974"/>
             <a:ext cx="688086" cy="190246"/>
           </a:xfrm>
           <a:prstGeom prst="rect">
@@ -22791,7 +23180,7 @@
         </p:nvSpPr>
         <p:spPr>
           <a:xfrm>
-            <a:off x="4616074" y="5590707"/>
+            <a:off x="4616074" y="5557814"/>
             <a:ext cx="1161288" cy="190246"/>
           </a:xfrm>
           <a:prstGeom prst="rect">
@@ -22858,7 +23247,7 @@
         </p:nvSpPr>
         <p:spPr>
           <a:xfrm>
-            <a:off x="8202305" y="5590707"/>
+            <a:off x="8202305" y="5557814"/>
             <a:ext cx="1181862" cy="190246"/>
           </a:xfrm>
           <a:prstGeom prst="rect">
@@ -22925,7 +23314,7 @@
         </p:nvSpPr>
         <p:spPr>
           <a:xfrm>
-            <a:off x="10129151" y="3341283"/>
+            <a:off x="10129151" y="3308390"/>
             <a:ext cx="924687" cy="190246"/>
           </a:xfrm>
           <a:prstGeom prst="rect">
@@ -22968,7 +23357,7 @@
         </p:nvSpPr>
         <p:spPr>
           <a:xfrm>
-            <a:off x="10082860" y="3602141"/>
+            <a:off x="10082860" y="3564422"/>
             <a:ext cx="1017270" cy="162306"/>
           </a:xfrm>
           <a:prstGeom prst="rect">
@@ -23035,7 +23424,7 @@
         </p:nvSpPr>
         <p:spPr>
           <a:xfrm>
-            <a:off x="10093147" y="5590707"/>
+            <a:off x="10093147" y="5557814"/>
             <a:ext cx="996696" cy="190246"/>
           </a:xfrm>
           <a:prstGeom prst="rect">
@@ -23078,7 +23467,7 @@
         </p:nvSpPr>
         <p:spPr>
           <a:xfrm>
-            <a:off x="10237165" y="5851565"/>
+            <a:off x="10237165" y="5813846"/>
             <a:ext cx="708660" cy="162306"/>
           </a:xfrm>
           <a:prstGeom prst="rect">
@@ -23300,7 +23689,7 @@
             <a:avLst/>
           </a:prstGeom>
           <a:solidFill>
-            <a:srgbClr val="C9D4D1"/>
+            <a:srgbClr val="D1CFC8"/>
           </a:solidFill>
           <a:ln>
             <a:noFill/>
@@ -23359,7 +23748,7 @@
             <a:r>
               <a:rPr sz="819" b="0" lang="ja-JP">
                 <a:solidFill>
-                  <a:srgbClr val="667478"/>
+                  <a:srgbClr val="666E70"/>
                 </a:solidFill>
                 <a:latin typeface="Yu Gothic"/>
                 <a:ea typeface="Yu Gothic"/>
@@ -23400,7 +23789,7 @@
             <a:r>
               <a:rPr sz="1100" b="1" lang="ja-JP">
                 <a:solidFill>
-                  <a:srgbClr val="16324F"/>
+                  <a:srgbClr val="182C43"/>
                 </a:solidFill>
                 <a:latin typeface="Yu Gothic"/>
                 <a:ea typeface="Yu Gothic"/>
@@ -23441,13 +23830,13 @@
             <a:r>
               <a:rPr sz="819" b="0" lang="ja-JP">
                 <a:solidFill>
-                  <a:srgbClr val="667478"/>
-                </a:solidFill>
-                <a:latin typeface="Yu Gothic"/>
-                <a:ea typeface="Yu Gothic"/>
-                <a:cs typeface="Yu Gothic"/>
-              </a:rPr>
-              <a:t>/ 21</a:t>
+                  <a:srgbClr val="666E70"/>
+                </a:solidFill>
+                <a:latin typeface="Yu Gothic"/>
+                <a:ea typeface="Yu Gothic"/>
+                <a:cs typeface="Yu Gothic"/>
+              </a:rPr>
+              <a:t>/ 24</a:t>
             </a:r>
           </a:p>
         </p:txBody>
@@ -23945,7 +24334,7 @@
             <a:avLst/>
           </a:prstGeom>
           <a:solidFill>
-            <a:srgbClr val="C9D4D1"/>
+            <a:srgbClr val="D1CFC8"/>
           </a:solidFill>
           <a:ln>
             <a:noFill/>
@@ -24004,7 +24393,7 @@
             <a:r>
               <a:rPr sz="819" b="0" lang="ja-JP">
                 <a:solidFill>
-                  <a:srgbClr val="667478"/>
+                  <a:srgbClr val="666E70"/>
                 </a:solidFill>
                 <a:latin typeface="Yu Gothic"/>
                 <a:ea typeface="Yu Gothic"/>
@@ -24045,7 +24434,7 @@
             <a:r>
               <a:rPr sz="1100" b="1" lang="ja-JP">
                 <a:solidFill>
-                  <a:srgbClr val="16324F"/>
+                  <a:srgbClr val="182C43"/>
                 </a:solidFill>
                 <a:latin typeface="Yu Gothic"/>
                 <a:ea typeface="Yu Gothic"/>
@@ -24086,13 +24475,13 @@
             <a:r>
               <a:rPr sz="819" b="0" lang="ja-JP">
                 <a:solidFill>
-                  <a:srgbClr val="667478"/>
-                </a:solidFill>
-                <a:latin typeface="Yu Gothic"/>
-                <a:ea typeface="Yu Gothic"/>
-                <a:cs typeface="Yu Gothic"/>
-              </a:rPr>
-              <a:t>/ 21</a:t>
+                  <a:srgbClr val="666E70"/>
+                </a:solidFill>
+                <a:latin typeface="Yu Gothic"/>
+                <a:ea typeface="Yu Gothic"/>
+                <a:cs typeface="Yu Gothic"/>
+              </a:rPr>
+              <a:t>/ 24</a:t>
             </a:r>
           </a:p>
         </p:txBody>
@@ -24767,7 +25156,7 @@
         </p:nvSpPr>
         <p:spPr>
           <a:xfrm>
-            <a:off x="1168717" y="3846855"/>
+            <a:off x="1168717" y="3813962"/>
             <a:ext cx="862965" cy="190246"/>
           </a:xfrm>
           <a:prstGeom prst="rect">
@@ -24810,7 +25199,7 @@
         </p:nvSpPr>
         <p:spPr>
           <a:xfrm>
-            <a:off x="1307592" y="4107713"/>
+            <a:off x="1307592" y="4069994"/>
             <a:ext cx="585216" cy="162306"/>
           </a:xfrm>
           <a:prstGeom prst="rect">
@@ -24877,7 +25266,7 @@
         </p:nvSpPr>
         <p:spPr>
           <a:xfrm>
-            <a:off x="7306932" y="2292375"/>
+            <a:off x="7306932" y="2259482"/>
             <a:ext cx="574929" cy="190246"/>
           </a:xfrm>
           <a:prstGeom prst="rect">
@@ -24944,7 +25333,7 @@
         </p:nvSpPr>
         <p:spPr>
           <a:xfrm>
-            <a:off x="3934358" y="3846855"/>
+            <a:off x="3934358" y="3813962"/>
             <a:ext cx="1325880" cy="190246"/>
           </a:xfrm>
           <a:prstGeom prst="rect">
@@ -25011,7 +25400,7 @@
         </p:nvSpPr>
         <p:spPr>
           <a:xfrm>
-            <a:off x="6998322" y="3846855"/>
+            <a:off x="6998322" y="3813962"/>
             <a:ext cx="1192149" cy="190246"/>
           </a:xfrm>
           <a:prstGeom prst="rect">
@@ -25054,7 +25443,7 @@
         </p:nvSpPr>
         <p:spPr>
           <a:xfrm>
-            <a:off x="7240066" y="4107713"/>
+            <a:off x="7240066" y="4069994"/>
             <a:ext cx="708660" cy="162306"/>
           </a:xfrm>
           <a:prstGeom prst="rect">
@@ -25121,7 +25510,7 @@
         </p:nvSpPr>
         <p:spPr>
           <a:xfrm>
-            <a:off x="10196017" y="3846855"/>
+            <a:off x="10196017" y="3813962"/>
             <a:ext cx="790956" cy="190246"/>
           </a:xfrm>
           <a:prstGeom prst="rect">
@@ -25188,7 +25577,7 @@
         </p:nvSpPr>
         <p:spPr>
           <a:xfrm>
-            <a:off x="7240066" y="5090439"/>
+            <a:off x="7240066" y="5057546"/>
             <a:ext cx="708660" cy="190246"/>
           </a:xfrm>
           <a:prstGeom prst="rect">
@@ -25231,7 +25620,7 @@
         </p:nvSpPr>
         <p:spPr>
           <a:xfrm>
-            <a:off x="7363510" y="5351297"/>
+            <a:off x="7363510" y="5313578"/>
             <a:ext cx="461772" cy="162306"/>
           </a:xfrm>
           <a:prstGeom prst="rect">
@@ -25298,7 +25687,7 @@
         </p:nvSpPr>
         <p:spPr>
           <a:xfrm>
-            <a:off x="10082860" y="5090439"/>
+            <a:off x="10082860" y="5057546"/>
             <a:ext cx="1017270" cy="190246"/>
           </a:xfrm>
           <a:prstGeom prst="rect">
@@ -25341,7 +25730,7 @@
         </p:nvSpPr>
         <p:spPr>
           <a:xfrm>
-            <a:off x="10298887" y="5351297"/>
+            <a:off x="10298887" y="5313578"/>
             <a:ext cx="585216" cy="162306"/>
           </a:xfrm>
           <a:prstGeom prst="rect">
@@ -25647,7 +26036,7 @@
             <a:avLst/>
           </a:prstGeom>
           <a:solidFill>
-            <a:srgbClr val="C9D4D1"/>
+            <a:srgbClr val="D1CFC8"/>
           </a:solidFill>
           <a:ln>
             <a:noFill/>
@@ -25706,7 +26095,7 @@
             <a:r>
               <a:rPr sz="819" b="0" lang="ja-JP">
                 <a:solidFill>
-                  <a:srgbClr val="667478"/>
+                  <a:srgbClr val="666E70"/>
                 </a:solidFill>
                 <a:latin typeface="Yu Gothic"/>
                 <a:ea typeface="Yu Gothic"/>
@@ -25747,7 +26136,7 @@
             <a:r>
               <a:rPr sz="1100" b="1" lang="ja-JP">
                 <a:solidFill>
-                  <a:srgbClr val="16324F"/>
+                  <a:srgbClr val="182C43"/>
                 </a:solidFill>
                 <a:latin typeface="Yu Gothic"/>
                 <a:ea typeface="Yu Gothic"/>
@@ -25788,13 +26177,13 @@
             <a:r>
               <a:rPr sz="819" b="0" lang="ja-JP">
                 <a:solidFill>
-                  <a:srgbClr val="667478"/>
-                </a:solidFill>
-                <a:latin typeface="Yu Gothic"/>
-                <a:ea typeface="Yu Gothic"/>
-                <a:cs typeface="Yu Gothic"/>
-              </a:rPr>
-              <a:t>/ 21</a:t>
+                  <a:srgbClr val="666E70"/>
+                </a:solidFill>
+                <a:latin typeface="Yu Gothic"/>
+                <a:ea typeface="Yu Gothic"/>
+                <a:cs typeface="Yu Gothic"/>
+              </a:rPr>
+              <a:t>/ 24</a:t>
             </a:r>
           </a:p>
         </p:txBody>
@@ -26512,7 +26901,7 @@
         </p:nvSpPr>
         <p:spPr>
           <a:xfrm>
-            <a:off x="1091565" y="4026992"/>
+            <a:off x="1091565" y="3994099"/>
             <a:ext cx="1017270" cy="190246"/>
           </a:xfrm>
           <a:prstGeom prst="rect">
@@ -26555,7 +26944,7 @@
         </p:nvSpPr>
         <p:spPr>
           <a:xfrm>
-            <a:off x="1122426" y="4287850"/>
+            <a:off x="1122426" y="4250131"/>
             <a:ext cx="955547" cy="162306"/>
           </a:xfrm>
           <a:prstGeom prst="rect">
@@ -26622,7 +27011,7 @@
         </p:nvSpPr>
         <p:spPr>
           <a:xfrm>
-            <a:off x="3519411" y="4026992"/>
+            <a:off x="3519411" y="3994099"/>
             <a:ext cx="657225" cy="190246"/>
           </a:xfrm>
           <a:prstGeom prst="rect">
@@ -26665,7 +27054,7 @@
         </p:nvSpPr>
         <p:spPr>
           <a:xfrm>
-            <a:off x="3493693" y="4287850"/>
+            <a:off x="3493693" y="4250131"/>
             <a:ext cx="708660" cy="162306"/>
           </a:xfrm>
           <a:prstGeom prst="rect">
@@ -26732,7 +27121,7 @@
         </p:nvSpPr>
         <p:spPr>
           <a:xfrm>
-            <a:off x="5571782" y="4026992"/>
+            <a:off x="5571782" y="3994099"/>
             <a:ext cx="1048131" cy="190246"/>
           </a:xfrm>
           <a:prstGeom prst="rect">
@@ -26775,7 +27164,7 @@
         </p:nvSpPr>
         <p:spPr>
           <a:xfrm>
-            <a:off x="5618073" y="4287850"/>
+            <a:off x="5618073" y="4250131"/>
             <a:ext cx="955547" cy="162306"/>
           </a:xfrm>
           <a:prstGeom prst="rect">
@@ -26842,7 +27231,7 @@
         </p:nvSpPr>
         <p:spPr>
           <a:xfrm>
-            <a:off x="7757883" y="4026992"/>
+            <a:off x="7757883" y="3994099"/>
             <a:ext cx="1171575" cy="190246"/>
           </a:xfrm>
           <a:prstGeom prst="rect">
@@ -26885,7 +27274,7 @@
         </p:nvSpPr>
         <p:spPr>
           <a:xfrm>
-            <a:off x="7989341" y="4287850"/>
+            <a:off x="7989341" y="4250131"/>
             <a:ext cx="708660" cy="162306"/>
           </a:xfrm>
           <a:prstGeom prst="rect">
@@ -26952,7 +27341,7 @@
         </p:nvSpPr>
         <p:spPr>
           <a:xfrm>
-            <a:off x="10113721" y="2783408"/>
+            <a:off x="10113721" y="2750515"/>
             <a:ext cx="955547" cy="190246"/>
           </a:xfrm>
           <a:prstGeom prst="rect">
@@ -26995,7 +27384,7 @@
         </p:nvSpPr>
         <p:spPr>
           <a:xfrm>
-            <a:off x="10298887" y="3044266"/>
+            <a:off x="10298887" y="3006547"/>
             <a:ext cx="585216" cy="162306"/>
           </a:xfrm>
           <a:prstGeom prst="rect">
@@ -27062,7 +27451,7 @@
         </p:nvSpPr>
         <p:spPr>
           <a:xfrm>
-            <a:off x="10129151" y="5270576"/>
+            <a:off x="10129151" y="5237683"/>
             <a:ext cx="924687" cy="190246"/>
           </a:xfrm>
           <a:prstGeom prst="rect">
@@ -27105,7 +27494,7 @@
         </p:nvSpPr>
         <p:spPr>
           <a:xfrm>
-            <a:off x="10360609" y="5531434"/>
+            <a:off x="10360609" y="5493715"/>
             <a:ext cx="461772" cy="162306"/>
           </a:xfrm>
           <a:prstGeom prst="rect">
@@ -27172,7 +27561,7 @@
         </p:nvSpPr>
         <p:spPr>
           <a:xfrm>
-            <a:off x="7845323" y="5270576"/>
+            <a:off x="7845323" y="5237683"/>
             <a:ext cx="996696" cy="190246"/>
           </a:xfrm>
           <a:prstGeom prst="rect">
@@ -27215,7 +27604,7 @@
         </p:nvSpPr>
         <p:spPr>
           <a:xfrm>
-            <a:off x="7989341" y="5531434"/>
+            <a:off x="7989341" y="5493715"/>
             <a:ext cx="708660" cy="162306"/>
           </a:xfrm>
           <a:prstGeom prst="rect">
@@ -27480,7 +27869,7 @@
             <a:avLst/>
           </a:prstGeom>
           <a:solidFill>
-            <a:srgbClr val="C9D4D1"/>
+            <a:srgbClr val="D1CFC8"/>
           </a:solidFill>
           <a:ln>
             <a:noFill/>
@@ -27539,7 +27928,7 @@
             <a:r>
               <a:rPr sz="819" b="0" lang="ja-JP">
                 <a:solidFill>
-                  <a:srgbClr val="667478"/>
+                  <a:srgbClr val="666E70"/>
                 </a:solidFill>
                 <a:latin typeface="Yu Gothic"/>
                 <a:ea typeface="Yu Gothic"/>
@@ -27580,7 +27969,7 @@
             <a:r>
               <a:rPr sz="1100" b="1" lang="ja-JP">
                 <a:solidFill>
-                  <a:srgbClr val="16324F"/>
+                  <a:srgbClr val="182C43"/>
                 </a:solidFill>
                 <a:latin typeface="Yu Gothic"/>
                 <a:ea typeface="Yu Gothic"/>
@@ -27621,13 +28010,2696 @@
             <a:r>
               <a:rPr sz="819" b="0" lang="ja-JP">
                 <a:solidFill>
-                  <a:srgbClr val="667478"/>
-                </a:solidFill>
-                <a:latin typeface="Yu Gothic"/>
-                <a:ea typeface="Yu Gothic"/>
-                <a:cs typeface="Yu Gothic"/>
-              </a:rPr>
-              <a:t>/ 21</a:t>
+                  <a:srgbClr val="666E70"/>
+                </a:solidFill>
+                <a:latin typeface="Yu Gothic"/>
+                <a:ea typeface="Yu Gothic"/>
+                <a:cs typeface="Yu Gothic"/>
+              </a:rPr>
+              <a:t>/ 24</a:t>
+            </a:r>
+          </a:p>
+        </p:txBody>
+      </p:sp>
+    </p:spTree>
+  </p:cSld>
+  <p:clrMapOvr>
+    <a:masterClrMapping/>
+  </p:clrMapOvr>
+</p:sld>
+</file>
+
+<file path=ppt/slides/slide22.xml><?xml version="1.0" encoding="utf-8"?>
+<p:sld xmlns:a="http://schemas.openxmlformats.org/drawingml/2006/main" xmlns:p="http://schemas.openxmlformats.org/presentationml/2006/main" xmlns:r="http://schemas.openxmlformats.org/officeDocument/2006/relationships">
+  <p:cSld>
+    <p:spTree>
+      <p:nvGrpSpPr>
+        <p:cNvPr id="1" name=""/>
+        <p:cNvGrpSpPr/>
+        <p:nvPr/>
+      </p:nvGrpSpPr>
+      <p:grpSpPr/>
+      <p:sp>
+        <p:nvSpPr>
+          <p:cNvPr id="2" name="Rectangle 1"/>
+          <p:cNvSpPr/>
+          <p:nvPr/>
+        </p:nvSpPr>
+        <p:spPr>
+          <a:xfrm>
+            <a:off x="0" y="0"/>
+            <a:ext cx="12191695" cy="6858000"/>
+          </a:xfrm>
+          <a:prstGeom prst="rect">
+            <a:avLst/>
+          </a:prstGeom>
+          <a:solidFill>
+            <a:srgbClr val="F7F5EF"/>
+          </a:solidFill>
+          <a:ln>
+            <a:noFill/>
+          </a:ln>
+          <a:effectLst/>
+        </p:spPr>
+        <p:style>
+          <a:lnRef idx="1">
+            <a:schemeClr val="accent1"/>
+          </a:lnRef>
+          <a:fillRef idx="3">
+            <a:schemeClr val="accent1"/>
+          </a:fillRef>
+          <a:effectRef idx="2">
+            <a:schemeClr val="accent1"/>
+          </a:effectRef>
+          <a:fontRef idx="minor">
+            <a:schemeClr val="lt1"/>
+          </a:fontRef>
+        </p:style>
+        <p:txBody>
+          <a:bodyPr rtlCol="0" anchor="ctr"/>
+          <a:lstStyle/>
+          <a:p>
+            <a:pPr algn="ctr"/>
+          </a:p>
+        </p:txBody>
+      </p:sp>
+      <p:sp>
+        <p:nvSpPr>
+          <p:cNvPr id="3" name="TextBox 2"/>
+          <p:cNvSpPr txBox="1"/>
+          <p:nvPr/>
+        </p:nvSpPr>
+        <p:spPr>
+          <a:xfrm>
+            <a:off x="658368" y="246888"/>
+            <a:ext cx="4389120" cy="292608"/>
+          </a:xfrm>
+          <a:prstGeom prst="rect">
+            <a:avLst/>
+          </a:prstGeom>
+          <a:noFill/>
+        </p:spPr>
+        <p:txBody>
+          <a:bodyPr wrap="square" anchor="t" lIns="0" rIns="0" tIns="0" bIns="0">
+            <a:spAutoFit/>
+          </a:bodyPr>
+          <a:lstStyle/>
+          <a:p>
+            <a:pPr algn="l">
+              <a:lnSpc>
+                <a:spcPct val="130000"/>
+              </a:lnSpc>
+            </a:pPr>
+            <a:r>
+              <a:rPr sz="1150" b="1" lang="ja-JP">
+                <a:solidFill>
+                  <a:srgbClr val="0D7870"/>
+                </a:solidFill>
+                <a:latin typeface="Yu Gothic"/>
+                <a:ea typeface="Yu Gothic"/>
+                <a:cs typeface="Yu Gothic"/>
+              </a:rPr>
+              <a:t>複合レイアウト</a:t>
+            </a:r>
+          </a:p>
+        </p:txBody>
+      </p:sp>
+      <p:sp>
+        <p:nvSpPr>
+          <p:cNvPr id="4" name="TextBox 3"/>
+          <p:cNvSpPr txBox="1"/>
+          <p:nvPr/>
+        </p:nvSpPr>
+        <p:spPr>
+          <a:xfrm>
+            <a:off x="658368" y="612648"/>
+            <a:ext cx="10881360" cy="786384"/>
+          </a:xfrm>
+          <a:prstGeom prst="rect">
+            <a:avLst/>
+          </a:prstGeom>
+          <a:noFill/>
+        </p:spPr>
+        <p:txBody>
+          <a:bodyPr wrap="square" anchor="t" lIns="0" rIns="0" tIns="0" bIns="0">
+            <a:spAutoFit/>
+          </a:bodyPr>
+          <a:lstStyle/>
+          <a:p>
+            <a:pPr algn="l">
+              <a:lnSpc>
+                <a:spcPct val="112000"/>
+              </a:lnSpc>
+            </a:pPr>
+            <a:r>
+              <a:rPr sz="2700" b="1" lang="ja-JP">
+                <a:solidFill>
+                  <a:srgbClr val="182C43"/>
+                </a:solidFill>
+                <a:latin typeface="Yu Gothic"/>
+                <a:ea typeface="Yu Gothic"/>
+                <a:cs typeface="Yu Gothic"/>
+              </a:rPr>
+              <a:t>処理経路と設計上の要点を、同じ視野で対応付ける</a:t>
+            </a:r>
+          </a:p>
+        </p:txBody>
+      </p:sp>
+      <p:sp>
+        <p:nvSpPr>
+          <p:cNvPr id="5" name="Rectangle 4"/>
+          <p:cNvSpPr/>
+          <p:nvPr/>
+        </p:nvSpPr>
+        <p:spPr>
+          <a:xfrm>
+            <a:off x="6094475" y="1499616"/>
+            <a:ext cx="7315" cy="4727448"/>
+          </a:xfrm>
+          <a:prstGeom prst="rect">
+            <a:avLst/>
+          </a:prstGeom>
+          <a:solidFill>
+            <a:srgbClr val="D1CFC8"/>
+          </a:solidFill>
+          <a:ln>
+            <a:noFill/>
+          </a:ln>
+          <a:effectLst/>
+        </p:spPr>
+        <p:style>
+          <a:lnRef idx="1">
+            <a:schemeClr val="accent1"/>
+          </a:lnRef>
+          <a:fillRef idx="3">
+            <a:schemeClr val="accent1"/>
+          </a:fillRef>
+          <a:effectRef idx="2">
+            <a:schemeClr val="accent1"/>
+          </a:effectRef>
+          <a:fontRef idx="minor">
+            <a:schemeClr val="lt1"/>
+          </a:fontRef>
+        </p:style>
+        <p:txBody>
+          <a:bodyPr rtlCol="0" anchor="ctr"/>
+          <a:lstStyle/>
+          <a:p>
+            <a:pPr algn="ctr"/>
+          </a:p>
+        </p:txBody>
+      </p:sp>
+      <p:sp>
+        <p:nvSpPr>
+          <p:cNvPr id="6" name="TextBox 5"/>
+          <p:cNvSpPr txBox="1"/>
+          <p:nvPr/>
+        </p:nvSpPr>
+        <p:spPr>
+          <a:xfrm>
+            <a:off x="658368" y="1463040"/>
+            <a:ext cx="5225795" cy="347472"/>
+          </a:xfrm>
+          <a:prstGeom prst="rect">
+            <a:avLst/>
+          </a:prstGeom>
+          <a:noFill/>
+        </p:spPr>
+        <p:txBody>
+          <a:bodyPr wrap="square" anchor="t" lIns="0" rIns="0" tIns="0" bIns="0">
+            <a:spAutoFit/>
+          </a:bodyPr>
+          <a:lstStyle/>
+          <a:p>
+            <a:pPr algn="l">
+              <a:lnSpc>
+                <a:spcPct val="108000"/>
+              </a:lnSpc>
+            </a:pPr>
+            <a:r>
+              <a:rPr sz="1650" b="1" lang="ja-JP">
+                <a:solidFill>
+                  <a:srgbClr val="182C43"/>
+                </a:solidFill>
+                <a:latin typeface="Yu Gothic"/>
+                <a:ea typeface="Yu Gothic"/>
+                <a:cs typeface="Yu Gothic"/>
+              </a:rPr>
+              <a:t>処理経路</a:t>
+            </a:r>
+          </a:p>
+        </p:txBody>
+      </p:sp>
+      <p:cxnSp>
+        <p:nvCxnSpPr>
+          <p:cNvPr id="7" name="Connector 6"/>
+          <p:cNvCxnSpPr/>
+          <p:nvPr/>
+        </p:nvCxnSpPr>
+        <p:spPr>
+          <a:xfrm>
+            <a:off x="2093976" y="3755440"/>
+            <a:ext cx="838961" cy="0"/>
+          </a:xfrm>
+          <a:prstGeom prst="line">
+            <a:avLst/>
+          </a:prstGeom>
+          <a:ln w="15875">
+            <a:solidFill>
+              <a:srgbClr val="6C7372"/>
+            </a:solidFill>
+            <a:tailEnd type="triangle" w="med" len="med"/>
+          </a:ln>
+          <a:effectLst/>
+        </p:spPr>
+        <p:style>
+          <a:lnRef idx="2">
+            <a:schemeClr val="accent1"/>
+          </a:lnRef>
+          <a:fillRef idx="0">
+            <a:schemeClr val="accent1"/>
+          </a:fillRef>
+          <a:effectRef idx="1">
+            <a:schemeClr val="accent1"/>
+          </a:effectRef>
+          <a:fontRef idx="minor">
+            <a:schemeClr val="tx1"/>
+          </a:fontRef>
+        </p:style>
+      </p:cxnSp>
+      <p:cxnSp>
+        <p:nvCxnSpPr>
+          <p:cNvPr id="8" name="Connector 7"/>
+          <p:cNvCxnSpPr/>
+          <p:nvPr/>
+        </p:nvCxnSpPr>
+        <p:spPr>
+          <a:xfrm>
+            <a:off x="3609593" y="3755440"/>
+            <a:ext cx="838962" cy="0"/>
+          </a:xfrm>
+          <a:prstGeom prst="line">
+            <a:avLst/>
+          </a:prstGeom>
+          <a:ln w="15875">
+            <a:solidFill>
+              <a:srgbClr val="6C7372"/>
+            </a:solidFill>
+            <a:tailEnd type="triangle" w="med" len="med"/>
+          </a:ln>
+          <a:effectLst/>
+        </p:spPr>
+        <p:style>
+          <a:lnRef idx="2">
+            <a:schemeClr val="accent1"/>
+          </a:lnRef>
+          <a:fillRef idx="0">
+            <a:schemeClr val="accent1"/>
+          </a:fillRef>
+          <a:effectRef idx="1">
+            <a:schemeClr val="accent1"/>
+          </a:effectRef>
+          <a:fontRef idx="minor">
+            <a:schemeClr val="tx1"/>
+          </a:fontRef>
+        </p:style>
+      </p:cxnSp>
+      <p:pic>
+        <p:nvPicPr>
+          <p:cNvPr id="9" name="Picture 8" descr="person.png"/>
+          <p:cNvPicPr>
+            <a:picLocks noChangeAspect="1"/>
+          </p:cNvPicPr>
+          <p:nvPr/>
+        </p:nvPicPr>
+        <p:blipFill>
+          <a:blip r:embed="rId2"/>
+          <a:stretch>
+            <a:fillRect/>
+          </a:stretch>
+        </p:blipFill>
+        <p:spPr>
+          <a:xfrm>
+            <a:off x="1472184" y="3471976"/>
+            <a:ext cx="566928" cy="566928"/>
+          </a:xfrm>
+          <a:prstGeom prst="rect">
+            <a:avLst/>
+          </a:prstGeom>
+        </p:spPr>
+      </p:pic>
+      <p:sp>
+        <p:nvSpPr>
+          <p:cNvPr id="10" name="TextBox 9"/>
+          <p:cNvSpPr txBox="1"/>
+          <p:nvPr/>
+        </p:nvSpPr>
+        <p:spPr>
+          <a:xfrm>
+            <a:off x="1478470" y="4084624"/>
+            <a:ext cx="554355" cy="190246"/>
+          </a:xfrm>
+          <a:prstGeom prst="rect">
+            <a:avLst/>
+          </a:prstGeom>
+          <a:solidFill>
+            <a:srgbClr val="F7F5EF"/>
+          </a:solidFill>
+        </p:spPr>
+        <p:txBody>
+          <a:bodyPr wrap="square" anchor="ctr" lIns="0" rIns="0" tIns="0" bIns="0">
+            <a:spAutoFit/>
+          </a:bodyPr>
+          <a:lstStyle/>
+          <a:p>
+            <a:pPr algn="ctr">
+              <a:lnSpc>
+                <a:spcPct val="110000"/>
+              </a:lnSpc>
+            </a:pPr>
+            <a:r>
+              <a:rPr sz="1100" b="1" lang="ja-JP">
+                <a:solidFill>
+                  <a:srgbClr val="182C43"/>
+                </a:solidFill>
+                <a:latin typeface="Yu Gothic"/>
+                <a:ea typeface="Yu Gothic"/>
+                <a:cs typeface="Yu Gothic"/>
+              </a:rPr>
+              <a:t>利用者</a:t>
+            </a:r>
+          </a:p>
+        </p:txBody>
+      </p:sp>
+      <p:pic>
+        <p:nvPicPr>
+          <p:cNvPr id="11" name="Picture 10" descr="globe.png"/>
+          <p:cNvPicPr>
+            <a:picLocks noChangeAspect="1"/>
+          </p:cNvPicPr>
+          <p:nvPr/>
+        </p:nvPicPr>
+        <p:blipFill>
+          <a:blip r:embed="rId3"/>
+          <a:stretch>
+            <a:fillRect/>
+          </a:stretch>
+        </p:blipFill>
+        <p:spPr>
+          <a:xfrm>
+            <a:off x="2987801" y="3471976"/>
+            <a:ext cx="566928" cy="566928"/>
+          </a:xfrm>
+          <a:prstGeom prst="rect">
+            <a:avLst/>
+          </a:prstGeom>
+        </p:spPr>
+      </p:pic>
+      <p:sp>
+        <p:nvSpPr>
+          <p:cNvPr id="12" name="TextBox 11"/>
+          <p:cNvSpPr txBox="1"/>
+          <p:nvPr/>
+        </p:nvSpPr>
+        <p:spPr>
+          <a:xfrm>
+            <a:off x="2942653" y="4084624"/>
+            <a:ext cx="657225" cy="190246"/>
+          </a:xfrm>
+          <a:prstGeom prst="rect">
+            <a:avLst/>
+          </a:prstGeom>
+          <a:solidFill>
+            <a:srgbClr val="F7F5EF"/>
+          </a:solidFill>
+        </p:spPr>
+        <p:txBody>
+          <a:bodyPr wrap="square" anchor="ctr" lIns="0" rIns="0" tIns="0" bIns="0">
+            <a:spAutoFit/>
+          </a:bodyPr>
+          <a:lstStyle/>
+          <a:p>
+            <a:pPr algn="ctr">
+              <a:lnSpc>
+                <a:spcPct val="110000"/>
+              </a:lnSpc>
+            </a:pPr>
+            <a:r>
+              <a:rPr sz="1100" b="1" lang="ja-JP">
+                <a:solidFill>
+                  <a:srgbClr val="182C43"/>
+                </a:solidFill>
+                <a:latin typeface="Yu Gothic"/>
+                <a:ea typeface="Yu Gothic"/>
+                <a:cs typeface="Yu Gothic"/>
+              </a:rPr>
+              <a:t>業務API</a:t>
+            </a:r>
+          </a:p>
+        </p:txBody>
+      </p:sp>
+      <p:pic>
+        <p:nvPicPr>
+          <p:cNvPr id="13" name="Picture 12" descr="database.png"/>
+          <p:cNvPicPr>
+            <a:picLocks noChangeAspect="1"/>
+          </p:cNvPicPr>
+          <p:nvPr/>
+        </p:nvPicPr>
+        <p:blipFill>
+          <a:blip r:embed="rId4"/>
+          <a:stretch>
+            <a:fillRect/>
+          </a:stretch>
+        </p:blipFill>
+        <p:spPr>
+          <a:xfrm>
+            <a:off x="4503419" y="3471976"/>
+            <a:ext cx="566928" cy="566928"/>
+          </a:xfrm>
+          <a:prstGeom prst="rect">
+            <a:avLst/>
+          </a:prstGeom>
+        </p:spPr>
+      </p:pic>
+      <p:sp>
+        <p:nvSpPr>
+          <p:cNvPr id="14" name="TextBox 13"/>
+          <p:cNvSpPr txBox="1"/>
+          <p:nvPr/>
+        </p:nvSpPr>
+        <p:spPr>
+          <a:xfrm>
+            <a:off x="4278248" y="4084624"/>
+            <a:ext cx="1017270" cy="190246"/>
+          </a:xfrm>
+          <a:prstGeom prst="rect">
+            <a:avLst/>
+          </a:prstGeom>
+          <a:solidFill>
+            <a:srgbClr val="F7F5EF"/>
+          </a:solidFill>
+        </p:spPr>
+        <p:txBody>
+          <a:bodyPr wrap="square" anchor="ctr" lIns="0" rIns="0" tIns="0" bIns="0">
+            <a:spAutoFit/>
+          </a:bodyPr>
+          <a:lstStyle/>
+          <a:p>
+            <a:pPr algn="ctr">
+              <a:lnSpc>
+                <a:spcPct val="110000"/>
+              </a:lnSpc>
+            </a:pPr>
+            <a:r>
+              <a:rPr sz="1100" b="1" lang="ja-JP">
+                <a:solidFill>
+                  <a:srgbClr val="182C43"/>
+                </a:solidFill>
+                <a:latin typeface="Yu Gothic"/>
+                <a:ea typeface="Yu Gothic"/>
+                <a:cs typeface="Yu Gothic"/>
+              </a:rPr>
+              <a:t>データベース</a:t>
+            </a:r>
+          </a:p>
+        </p:txBody>
+      </p:sp>
+      <p:sp>
+        <p:nvSpPr>
+          <p:cNvPr id="15" name="TextBox 14"/>
+          <p:cNvSpPr txBox="1"/>
+          <p:nvPr/>
+        </p:nvSpPr>
+        <p:spPr>
+          <a:xfrm>
+            <a:off x="2256853" y="3518839"/>
+            <a:ext cx="513207" cy="162306"/>
+          </a:xfrm>
+          <a:prstGeom prst="rect">
+            <a:avLst/>
+          </a:prstGeom>
+          <a:solidFill>
+            <a:srgbClr val="F7F5EF"/>
+          </a:solidFill>
+        </p:spPr>
+        <p:txBody>
+          <a:bodyPr wrap="square" anchor="ctr" lIns="0" rIns="0" tIns="0" bIns="0">
+            <a:spAutoFit/>
+          </a:bodyPr>
+          <a:lstStyle/>
+          <a:p>
+            <a:pPr algn="ctr">
+              <a:lnSpc>
+                <a:spcPct val="130000"/>
+              </a:lnSpc>
+            </a:pPr>
+            <a:r>
+              <a:rPr sz="900" b="0" lang="ja-JP">
+                <a:solidFill>
+                  <a:srgbClr val="202729"/>
+                </a:solidFill>
+                <a:latin typeface="Yu Gothic"/>
+                <a:ea typeface="Yu Gothic"/>
+                <a:cs typeface="Yu Gothic"/>
+              </a:rPr>
+              <a:t>HTTPS</a:t>
+            </a:r>
+          </a:p>
+        </p:txBody>
+      </p:sp>
+      <p:sp>
+        <p:nvSpPr>
+          <p:cNvPr id="16" name="TextBox 15"/>
+          <p:cNvSpPr txBox="1"/>
+          <p:nvPr/>
+        </p:nvSpPr>
+        <p:spPr>
+          <a:xfrm>
+            <a:off x="3859910" y="3518839"/>
+            <a:ext cx="338328" cy="162306"/>
+          </a:xfrm>
+          <a:prstGeom prst="rect">
+            <a:avLst/>
+          </a:prstGeom>
+          <a:solidFill>
+            <a:srgbClr val="F7F5EF"/>
+          </a:solidFill>
+        </p:spPr>
+        <p:txBody>
+          <a:bodyPr wrap="square" anchor="ctr" lIns="0" rIns="0" tIns="0" bIns="0">
+            <a:spAutoFit/>
+          </a:bodyPr>
+          <a:lstStyle/>
+          <a:p>
+            <a:pPr algn="ctr">
+              <a:lnSpc>
+                <a:spcPct val="130000"/>
+              </a:lnSpc>
+            </a:pPr>
+            <a:r>
+              <a:rPr sz="900" b="0" lang="ja-JP">
+                <a:solidFill>
+                  <a:srgbClr val="202729"/>
+                </a:solidFill>
+                <a:latin typeface="Yu Gothic"/>
+                <a:ea typeface="Yu Gothic"/>
+                <a:cs typeface="Yu Gothic"/>
+              </a:rPr>
+              <a:t>SQL</a:t>
+            </a:r>
+          </a:p>
+        </p:txBody>
+      </p:sp>
+      <p:sp>
+        <p:nvSpPr>
+          <p:cNvPr id="17" name="TextBox 16"/>
+          <p:cNvSpPr txBox="1"/>
+          <p:nvPr/>
+        </p:nvSpPr>
+        <p:spPr>
+          <a:xfrm>
+            <a:off x="6304787" y="1463040"/>
+            <a:ext cx="5225796" cy="347472"/>
+          </a:xfrm>
+          <a:prstGeom prst="rect">
+            <a:avLst/>
+          </a:prstGeom>
+          <a:noFill/>
+        </p:spPr>
+        <p:txBody>
+          <a:bodyPr wrap="square" anchor="t" lIns="0" rIns="0" tIns="0" bIns="0">
+            <a:spAutoFit/>
+          </a:bodyPr>
+          <a:lstStyle/>
+          <a:p>
+            <a:pPr algn="l">
+              <a:lnSpc>
+                <a:spcPct val="108000"/>
+              </a:lnSpc>
+            </a:pPr>
+            <a:r>
+              <a:rPr sz="1650" b="1" lang="ja-JP">
+                <a:solidFill>
+                  <a:srgbClr val="182C43"/>
+                </a:solidFill>
+                <a:latin typeface="Yu Gothic"/>
+                <a:ea typeface="Yu Gothic"/>
+                <a:cs typeface="Yu Gothic"/>
+              </a:rPr>
+              <a:t>設計上の要点</a:t>
+            </a:r>
+          </a:p>
+        </p:txBody>
+      </p:sp>
+      <p:sp>
+        <p:nvSpPr>
+          <p:cNvPr id="18" name="TextBox 17"/>
+          <p:cNvSpPr txBox="1"/>
+          <p:nvPr/>
+        </p:nvSpPr>
+        <p:spPr>
+          <a:xfrm>
+            <a:off x="6304787" y="2168377"/>
+            <a:ext cx="329184" cy="256032"/>
+          </a:xfrm>
+          <a:prstGeom prst="rect">
+            <a:avLst/>
+          </a:prstGeom>
+          <a:noFill/>
+        </p:spPr>
+        <p:txBody>
+          <a:bodyPr wrap="square" anchor="t" lIns="0" rIns="0" tIns="0" bIns="0">
+            <a:spAutoFit/>
+          </a:bodyPr>
+          <a:lstStyle/>
+          <a:p>
+            <a:pPr algn="r">
+              <a:lnSpc>
+                <a:spcPct val="130000"/>
+              </a:lnSpc>
+            </a:pPr>
+            <a:r>
+              <a:rPr sz="1000" b="1" lang="ja-JP">
+                <a:solidFill>
+                  <a:srgbClr val="0D7870"/>
+                </a:solidFill>
+                <a:latin typeface="Yu Gothic"/>
+                <a:ea typeface="Yu Gothic"/>
+                <a:cs typeface="Yu Gothic"/>
+              </a:rPr>
+              <a:t>01</a:t>
+            </a:r>
+          </a:p>
+        </p:txBody>
+      </p:sp>
+      <p:sp>
+        <p:nvSpPr>
+          <p:cNvPr id="19" name="TextBox 18"/>
+          <p:cNvSpPr txBox="1"/>
+          <p:nvPr/>
+        </p:nvSpPr>
+        <p:spPr>
+          <a:xfrm>
+            <a:off x="6761987" y="2159233"/>
+            <a:ext cx="4658868" cy="219456"/>
+          </a:xfrm>
+          <a:prstGeom prst="rect">
+            <a:avLst/>
+          </a:prstGeom>
+          <a:noFill/>
+        </p:spPr>
+        <p:txBody>
+          <a:bodyPr wrap="square" anchor="t" lIns="0" rIns="0" tIns="0" bIns="0">
+            <a:spAutoFit/>
+          </a:bodyPr>
+          <a:lstStyle/>
+          <a:p>
+            <a:pPr algn="l">
+              <a:lnSpc>
+                <a:spcPct val="108000"/>
+              </a:lnSpc>
+            </a:pPr>
+            <a:r>
+              <a:rPr sz="1400" b="1" lang="ja-JP">
+                <a:solidFill>
+                  <a:srgbClr val="182C43"/>
+                </a:solidFill>
+                <a:latin typeface="Yu Gothic"/>
+                <a:ea typeface="Yu Gothic"/>
+                <a:cs typeface="Yu Gothic"/>
+              </a:rPr>
+              <a:t>境界</a:t>
+            </a:r>
+          </a:p>
+        </p:txBody>
+      </p:sp>
+      <p:sp>
+        <p:nvSpPr>
+          <p:cNvPr id="20" name="TextBox 19"/>
+          <p:cNvSpPr txBox="1"/>
+          <p:nvPr/>
+        </p:nvSpPr>
+        <p:spPr>
+          <a:xfrm>
+            <a:off x="6761987" y="2442697"/>
+            <a:ext cx="4658868" cy="263016"/>
+          </a:xfrm>
+          <a:prstGeom prst="rect">
+            <a:avLst/>
+          </a:prstGeom>
+          <a:noFill/>
+        </p:spPr>
+        <p:txBody>
+          <a:bodyPr wrap="square" anchor="t" lIns="0" rIns="0" tIns="0" bIns="0">
+            <a:spAutoFit/>
+          </a:bodyPr>
+          <a:lstStyle/>
+          <a:p>
+            <a:pPr algn="l">
+              <a:lnSpc>
+                <a:spcPct val="115000"/>
+              </a:lnSpc>
+            </a:pPr>
+            <a:r>
+              <a:rPr sz="1300" b="0" lang="ja-JP">
+                <a:solidFill>
+                  <a:srgbClr val="202729"/>
+                </a:solidFill>
+                <a:latin typeface="Yu Gothic"/>
+                <a:ea typeface="Yu Gothic"/>
+                <a:cs typeface="Yu Gothic"/>
+              </a:rPr>
+              <a:t>公開領域とデータ領域を分離する。</a:t>
+            </a:r>
+          </a:p>
+        </p:txBody>
+      </p:sp>
+      <p:sp>
+        <p:nvSpPr>
+          <p:cNvPr id="21" name="Rectangle 20"/>
+          <p:cNvSpPr/>
+          <p:nvPr/>
+        </p:nvSpPr>
+        <p:spPr>
+          <a:xfrm>
+            <a:off x="6761987" y="2806298"/>
+            <a:ext cx="4658868" cy="7315"/>
+          </a:xfrm>
+          <a:prstGeom prst="rect">
+            <a:avLst/>
+          </a:prstGeom>
+          <a:solidFill>
+            <a:srgbClr val="D1CFC8"/>
+          </a:solidFill>
+          <a:ln>
+            <a:noFill/>
+          </a:ln>
+          <a:effectLst/>
+        </p:spPr>
+        <p:style>
+          <a:lnRef idx="1">
+            <a:schemeClr val="accent1"/>
+          </a:lnRef>
+          <a:fillRef idx="3">
+            <a:schemeClr val="accent1"/>
+          </a:fillRef>
+          <a:effectRef idx="2">
+            <a:schemeClr val="accent1"/>
+          </a:effectRef>
+          <a:fontRef idx="minor">
+            <a:schemeClr val="lt1"/>
+          </a:fontRef>
+        </p:style>
+        <p:txBody>
+          <a:bodyPr rtlCol="0" anchor="ctr"/>
+          <a:lstStyle/>
+          <a:p>
+            <a:pPr algn="ctr"/>
+          </a:p>
+        </p:txBody>
+      </p:sp>
+      <p:sp>
+        <p:nvSpPr>
+          <p:cNvPr id="22" name="TextBox 21"/>
+          <p:cNvSpPr txBox="1"/>
+          <p:nvPr/>
+        </p:nvSpPr>
+        <p:spPr>
+          <a:xfrm>
+            <a:off x="6304787" y="2916026"/>
+            <a:ext cx="329184" cy="256032"/>
+          </a:xfrm>
+          <a:prstGeom prst="rect">
+            <a:avLst/>
+          </a:prstGeom>
+          <a:noFill/>
+        </p:spPr>
+        <p:txBody>
+          <a:bodyPr wrap="square" anchor="t" lIns="0" rIns="0" tIns="0" bIns="0">
+            <a:spAutoFit/>
+          </a:bodyPr>
+          <a:lstStyle/>
+          <a:p>
+            <a:pPr algn="r">
+              <a:lnSpc>
+                <a:spcPct val="130000"/>
+              </a:lnSpc>
+            </a:pPr>
+            <a:r>
+              <a:rPr sz="1000" b="1" lang="ja-JP">
+                <a:solidFill>
+                  <a:srgbClr val="0D7870"/>
+                </a:solidFill>
+                <a:latin typeface="Yu Gothic"/>
+                <a:ea typeface="Yu Gothic"/>
+                <a:cs typeface="Yu Gothic"/>
+              </a:rPr>
+              <a:t>02</a:t>
+            </a:r>
+          </a:p>
+        </p:txBody>
+      </p:sp>
+      <p:sp>
+        <p:nvSpPr>
+          <p:cNvPr id="23" name="TextBox 22"/>
+          <p:cNvSpPr txBox="1"/>
+          <p:nvPr/>
+        </p:nvSpPr>
+        <p:spPr>
+          <a:xfrm>
+            <a:off x="6761987" y="2906882"/>
+            <a:ext cx="4658868" cy="219456"/>
+          </a:xfrm>
+          <a:prstGeom prst="rect">
+            <a:avLst/>
+          </a:prstGeom>
+          <a:noFill/>
+        </p:spPr>
+        <p:txBody>
+          <a:bodyPr wrap="square" anchor="t" lIns="0" rIns="0" tIns="0" bIns="0">
+            <a:spAutoFit/>
+          </a:bodyPr>
+          <a:lstStyle/>
+          <a:p>
+            <a:pPr algn="l">
+              <a:lnSpc>
+                <a:spcPct val="108000"/>
+              </a:lnSpc>
+            </a:pPr>
+            <a:r>
+              <a:rPr sz="1400" b="1" lang="ja-JP">
+                <a:solidFill>
+                  <a:srgbClr val="182C43"/>
+                </a:solidFill>
+                <a:latin typeface="Yu Gothic"/>
+                <a:ea typeface="Yu Gothic"/>
+                <a:cs typeface="Yu Gothic"/>
+              </a:rPr>
+              <a:t>監視</a:t>
+            </a:r>
+          </a:p>
+        </p:txBody>
+      </p:sp>
+      <p:sp>
+        <p:nvSpPr>
+          <p:cNvPr id="24" name="TextBox 23"/>
+          <p:cNvSpPr txBox="1"/>
+          <p:nvPr/>
+        </p:nvSpPr>
+        <p:spPr>
+          <a:xfrm>
+            <a:off x="6761987" y="3190346"/>
+            <a:ext cx="4658868" cy="263016"/>
+          </a:xfrm>
+          <a:prstGeom prst="rect">
+            <a:avLst/>
+          </a:prstGeom>
+          <a:noFill/>
+        </p:spPr>
+        <p:txBody>
+          <a:bodyPr wrap="square" anchor="t" lIns="0" rIns="0" tIns="0" bIns="0">
+            <a:spAutoFit/>
+          </a:bodyPr>
+          <a:lstStyle/>
+          <a:p>
+            <a:pPr algn="l">
+              <a:lnSpc>
+                <a:spcPct val="115000"/>
+              </a:lnSpc>
+            </a:pPr>
+            <a:r>
+              <a:rPr sz="1300" b="0" lang="ja-JP">
+                <a:solidFill>
+                  <a:srgbClr val="202729"/>
+                </a:solidFill>
+                <a:latin typeface="Yu Gothic"/>
+                <a:ea typeface="Yu Gothic"/>
+                <a:cs typeface="Yu Gothic"/>
+              </a:rPr>
+              <a:t>主要な接続点で状態を確認する。</a:t>
+            </a:r>
+          </a:p>
+        </p:txBody>
+      </p:sp>
+      <p:sp>
+        <p:nvSpPr>
+          <p:cNvPr id="25" name="Rectangle 24"/>
+          <p:cNvSpPr/>
+          <p:nvPr/>
+        </p:nvSpPr>
+        <p:spPr>
+          <a:xfrm>
+            <a:off x="6761987" y="3553947"/>
+            <a:ext cx="4658868" cy="7315"/>
+          </a:xfrm>
+          <a:prstGeom prst="rect">
+            <a:avLst/>
+          </a:prstGeom>
+          <a:solidFill>
+            <a:srgbClr val="D1CFC8"/>
+          </a:solidFill>
+          <a:ln>
+            <a:noFill/>
+          </a:ln>
+          <a:effectLst/>
+        </p:spPr>
+        <p:style>
+          <a:lnRef idx="1">
+            <a:schemeClr val="accent1"/>
+          </a:lnRef>
+          <a:fillRef idx="3">
+            <a:schemeClr val="accent1"/>
+          </a:fillRef>
+          <a:effectRef idx="2">
+            <a:schemeClr val="accent1"/>
+          </a:effectRef>
+          <a:fontRef idx="minor">
+            <a:schemeClr val="lt1"/>
+          </a:fontRef>
+        </p:style>
+        <p:txBody>
+          <a:bodyPr rtlCol="0" anchor="ctr"/>
+          <a:lstStyle/>
+          <a:p>
+            <a:pPr algn="ctr"/>
+          </a:p>
+        </p:txBody>
+      </p:sp>
+      <p:sp>
+        <p:nvSpPr>
+          <p:cNvPr id="26" name="TextBox 25"/>
+          <p:cNvSpPr txBox="1"/>
+          <p:nvPr/>
+        </p:nvSpPr>
+        <p:spPr>
+          <a:xfrm>
+            <a:off x="6304787" y="3663675"/>
+            <a:ext cx="329184" cy="256032"/>
+          </a:xfrm>
+          <a:prstGeom prst="rect">
+            <a:avLst/>
+          </a:prstGeom>
+          <a:noFill/>
+        </p:spPr>
+        <p:txBody>
+          <a:bodyPr wrap="square" anchor="t" lIns="0" rIns="0" tIns="0" bIns="0">
+            <a:spAutoFit/>
+          </a:bodyPr>
+          <a:lstStyle/>
+          <a:p>
+            <a:pPr algn="r">
+              <a:lnSpc>
+                <a:spcPct val="130000"/>
+              </a:lnSpc>
+            </a:pPr>
+            <a:r>
+              <a:rPr sz="1000" b="1" lang="ja-JP">
+                <a:solidFill>
+                  <a:srgbClr val="0D7870"/>
+                </a:solidFill>
+                <a:latin typeface="Yu Gothic"/>
+                <a:ea typeface="Yu Gothic"/>
+                <a:cs typeface="Yu Gothic"/>
+              </a:rPr>
+              <a:t>03</a:t>
+            </a:r>
+          </a:p>
+        </p:txBody>
+      </p:sp>
+      <p:sp>
+        <p:nvSpPr>
+          <p:cNvPr id="27" name="TextBox 26"/>
+          <p:cNvSpPr txBox="1"/>
+          <p:nvPr/>
+        </p:nvSpPr>
+        <p:spPr>
+          <a:xfrm>
+            <a:off x="6761987" y="3654531"/>
+            <a:ext cx="4658868" cy="219456"/>
+          </a:xfrm>
+          <a:prstGeom prst="rect">
+            <a:avLst/>
+          </a:prstGeom>
+          <a:noFill/>
+        </p:spPr>
+        <p:txBody>
+          <a:bodyPr wrap="square" anchor="t" lIns="0" rIns="0" tIns="0" bIns="0">
+            <a:spAutoFit/>
+          </a:bodyPr>
+          <a:lstStyle/>
+          <a:p>
+            <a:pPr algn="l">
+              <a:lnSpc>
+                <a:spcPct val="108000"/>
+              </a:lnSpc>
+            </a:pPr>
+            <a:r>
+              <a:rPr sz="1400" b="1" lang="ja-JP">
+                <a:solidFill>
+                  <a:srgbClr val="182C43"/>
+                </a:solidFill>
+                <a:latin typeface="Yu Gothic"/>
+                <a:ea typeface="Yu Gothic"/>
+                <a:cs typeface="Yu Gothic"/>
+              </a:rPr>
+              <a:t>復旧</a:t>
+            </a:r>
+          </a:p>
+        </p:txBody>
+      </p:sp>
+      <p:sp>
+        <p:nvSpPr>
+          <p:cNvPr id="28" name="TextBox 27"/>
+          <p:cNvSpPr txBox="1"/>
+          <p:nvPr/>
+        </p:nvSpPr>
+        <p:spPr>
+          <a:xfrm>
+            <a:off x="6761987" y="3937995"/>
+            <a:ext cx="4658868" cy="263016"/>
+          </a:xfrm>
+          <a:prstGeom prst="rect">
+            <a:avLst/>
+          </a:prstGeom>
+          <a:noFill/>
+        </p:spPr>
+        <p:txBody>
+          <a:bodyPr wrap="square" anchor="t" lIns="0" rIns="0" tIns="0" bIns="0">
+            <a:spAutoFit/>
+          </a:bodyPr>
+          <a:lstStyle/>
+          <a:p>
+            <a:pPr algn="l">
+              <a:lnSpc>
+                <a:spcPct val="115000"/>
+              </a:lnSpc>
+            </a:pPr>
+            <a:r>
+              <a:rPr sz="1300" b="0" lang="ja-JP">
+                <a:solidFill>
+                  <a:srgbClr val="202729"/>
+                </a:solidFill>
+                <a:latin typeface="Yu Gothic"/>
+                <a:ea typeface="Yu Gothic"/>
+                <a:cs typeface="Yu Gothic"/>
+              </a:rPr>
+              <a:t>障害時の切替手順を事前に定める。</a:t>
+            </a:r>
+          </a:p>
+        </p:txBody>
+      </p:sp>
+      <p:sp>
+        <p:nvSpPr>
+          <p:cNvPr id="29" name="Rectangle 28"/>
+          <p:cNvSpPr/>
+          <p:nvPr/>
+        </p:nvSpPr>
+        <p:spPr>
+          <a:xfrm>
+            <a:off x="658368" y="6327648"/>
+            <a:ext cx="10881360" cy="9144"/>
+          </a:xfrm>
+          <a:prstGeom prst="rect">
+            <a:avLst/>
+          </a:prstGeom>
+          <a:solidFill>
+            <a:srgbClr val="D1CFC8"/>
+          </a:solidFill>
+          <a:ln>
+            <a:noFill/>
+          </a:ln>
+          <a:effectLst/>
+        </p:spPr>
+        <p:style>
+          <a:lnRef idx="1">
+            <a:schemeClr val="accent1"/>
+          </a:lnRef>
+          <a:fillRef idx="3">
+            <a:schemeClr val="accent1"/>
+          </a:fillRef>
+          <a:effectRef idx="2">
+            <a:schemeClr val="accent1"/>
+          </a:effectRef>
+          <a:fontRef idx="minor">
+            <a:schemeClr val="lt1"/>
+          </a:fontRef>
+        </p:style>
+        <p:txBody>
+          <a:bodyPr rtlCol="0" anchor="ctr"/>
+          <a:lstStyle/>
+          <a:p>
+            <a:pPr algn="ctr"/>
+          </a:p>
+        </p:txBody>
+      </p:sp>
+      <p:sp>
+        <p:nvSpPr>
+          <p:cNvPr id="30" name="TextBox 29"/>
+          <p:cNvSpPr txBox="1"/>
+          <p:nvPr/>
+        </p:nvSpPr>
+        <p:spPr>
+          <a:xfrm>
+            <a:off x="658368" y="6409944"/>
+            <a:ext cx="7132320" cy="228600"/>
+          </a:xfrm>
+          <a:prstGeom prst="rect">
+            <a:avLst/>
+          </a:prstGeom>
+          <a:noFill/>
+        </p:spPr>
+        <p:txBody>
+          <a:bodyPr wrap="square" anchor="ctr" lIns="0" rIns="0" tIns="0" bIns="0">
+            <a:spAutoFit/>
+          </a:bodyPr>
+          <a:lstStyle/>
+          <a:p>
+            <a:pPr algn="l">
+              <a:lnSpc>
+                <a:spcPct val="130000"/>
+              </a:lnSpc>
+            </a:pPr>
+            <a:r>
+              <a:rPr sz="819" b="0" lang="ja-JP">
+                <a:solidFill>
+                  <a:srgbClr val="666E70"/>
+                </a:solidFill>
+                <a:latin typeface="Yu Gothic"/>
+                <a:ea typeface="Yu Gothic"/>
+                <a:cs typeface="Yu Gothic"/>
+              </a:rPr>
+              <a:t>社内スライドパターン検証ギャラリー</a:t>
+            </a:r>
+          </a:p>
+        </p:txBody>
+      </p:sp>
+      <p:sp>
+        <p:nvSpPr>
+          <p:cNvPr id="31" name="TextBox 30"/>
+          <p:cNvSpPr txBox="1"/>
+          <p:nvPr/>
+        </p:nvSpPr>
+        <p:spPr>
+          <a:xfrm>
+            <a:off x="10405872" y="6382512"/>
+            <a:ext cx="585216" cy="256032"/>
+          </a:xfrm>
+          <a:prstGeom prst="rect">
+            <a:avLst/>
+          </a:prstGeom>
+          <a:noFill/>
+        </p:spPr>
+        <p:txBody>
+          <a:bodyPr wrap="square" anchor="t" lIns="0" rIns="0" tIns="0" bIns="0">
+            <a:spAutoFit/>
+          </a:bodyPr>
+          <a:lstStyle/>
+          <a:p>
+            <a:pPr algn="r">
+              <a:lnSpc>
+                <a:spcPct val="130000"/>
+              </a:lnSpc>
+            </a:pPr>
+            <a:r>
+              <a:rPr sz="1100" b="1" lang="ja-JP">
+                <a:solidFill>
+                  <a:srgbClr val="182C43"/>
+                </a:solidFill>
+                <a:latin typeface="Yu Gothic"/>
+                <a:ea typeface="Yu Gothic"/>
+                <a:cs typeface="Yu Gothic"/>
+              </a:rPr>
+              <a:t>22</a:t>
+            </a:r>
+          </a:p>
+        </p:txBody>
+      </p:sp>
+      <p:sp>
+        <p:nvSpPr>
+          <p:cNvPr id="32" name="TextBox 31"/>
+          <p:cNvSpPr txBox="1"/>
+          <p:nvPr/>
+        </p:nvSpPr>
+        <p:spPr>
+          <a:xfrm>
+            <a:off x="11009376" y="6391656"/>
+            <a:ext cx="530352" cy="237744"/>
+          </a:xfrm>
+          <a:prstGeom prst="rect">
+            <a:avLst/>
+          </a:prstGeom>
+          <a:noFill/>
+        </p:spPr>
+        <p:txBody>
+          <a:bodyPr wrap="square" anchor="t" lIns="0" rIns="0" tIns="0" bIns="0">
+            <a:spAutoFit/>
+          </a:bodyPr>
+          <a:lstStyle/>
+          <a:p>
+            <a:pPr algn="r">
+              <a:lnSpc>
+                <a:spcPct val="130000"/>
+              </a:lnSpc>
+            </a:pPr>
+            <a:r>
+              <a:rPr sz="819" b="0" lang="ja-JP">
+                <a:solidFill>
+                  <a:srgbClr val="666E70"/>
+                </a:solidFill>
+                <a:latin typeface="Yu Gothic"/>
+                <a:ea typeface="Yu Gothic"/>
+                <a:cs typeface="Yu Gothic"/>
+              </a:rPr>
+              <a:t>/ 24</a:t>
+            </a:r>
+          </a:p>
+        </p:txBody>
+      </p:sp>
+    </p:spTree>
+  </p:cSld>
+  <p:clrMapOvr>
+    <a:masterClrMapping/>
+  </p:clrMapOvr>
+</p:sld>
+</file>
+
+<file path=ppt/slides/slide23.xml><?xml version="1.0" encoding="utf-8"?>
+<p:sld xmlns:a="http://schemas.openxmlformats.org/drawingml/2006/main" xmlns:p="http://schemas.openxmlformats.org/presentationml/2006/main" xmlns:r="http://schemas.openxmlformats.org/officeDocument/2006/relationships">
+  <p:cSld>
+    <p:spTree>
+      <p:nvGrpSpPr>
+        <p:cNvPr id="1" name=""/>
+        <p:cNvGrpSpPr/>
+        <p:nvPr/>
+      </p:nvGrpSpPr>
+      <p:grpSpPr/>
+      <p:sp>
+        <p:nvSpPr>
+          <p:cNvPr id="2" name="Rectangle 1"/>
+          <p:cNvSpPr/>
+          <p:nvPr/>
+        </p:nvSpPr>
+        <p:spPr>
+          <a:xfrm>
+            <a:off x="0" y="0"/>
+            <a:ext cx="12191695" cy="6858000"/>
+          </a:xfrm>
+          <a:prstGeom prst="rect">
+            <a:avLst/>
+          </a:prstGeom>
+          <a:solidFill>
+            <a:srgbClr val="F7F5EF"/>
+          </a:solidFill>
+          <a:ln>
+            <a:noFill/>
+          </a:ln>
+          <a:effectLst/>
+        </p:spPr>
+        <p:style>
+          <a:lnRef idx="1">
+            <a:schemeClr val="accent1"/>
+          </a:lnRef>
+          <a:fillRef idx="3">
+            <a:schemeClr val="accent1"/>
+          </a:fillRef>
+          <a:effectRef idx="2">
+            <a:schemeClr val="accent1"/>
+          </a:effectRef>
+          <a:fontRef idx="minor">
+            <a:schemeClr val="lt1"/>
+          </a:fontRef>
+        </p:style>
+        <p:txBody>
+          <a:bodyPr rtlCol="0" anchor="ctr"/>
+          <a:lstStyle/>
+          <a:p>
+            <a:pPr algn="ctr"/>
+          </a:p>
+        </p:txBody>
+      </p:sp>
+      <p:sp>
+        <p:nvSpPr>
+          <p:cNvPr id="3" name="TextBox 2"/>
+          <p:cNvSpPr txBox="1"/>
+          <p:nvPr/>
+        </p:nvSpPr>
+        <p:spPr>
+          <a:xfrm>
+            <a:off x="658368" y="246888"/>
+            <a:ext cx="4389120" cy="292608"/>
+          </a:xfrm>
+          <a:prstGeom prst="rect">
+            <a:avLst/>
+          </a:prstGeom>
+          <a:noFill/>
+        </p:spPr>
+        <p:txBody>
+          <a:bodyPr wrap="square" anchor="t" lIns="0" rIns="0" tIns="0" bIns="0">
+            <a:spAutoFit/>
+          </a:bodyPr>
+          <a:lstStyle/>
+          <a:p>
+            <a:pPr algn="l">
+              <a:lnSpc>
+                <a:spcPct val="130000"/>
+              </a:lnSpc>
+            </a:pPr>
+            <a:r>
+              <a:rPr sz="1150" b="1" lang="ja-JP">
+                <a:solidFill>
+                  <a:srgbClr val="0D7870"/>
+                </a:solidFill>
+                <a:latin typeface="Yu Gothic"/>
+                <a:ea typeface="Yu Gothic"/>
+                <a:cs typeface="Yu Gothic"/>
+              </a:rPr>
+              <a:t>画面レビュー</a:t>
+            </a:r>
+          </a:p>
+        </p:txBody>
+      </p:sp>
+      <p:sp>
+        <p:nvSpPr>
+          <p:cNvPr id="4" name="TextBox 3"/>
+          <p:cNvSpPr txBox="1"/>
+          <p:nvPr/>
+        </p:nvSpPr>
+        <p:spPr>
+          <a:xfrm>
+            <a:off x="658368" y="612648"/>
+            <a:ext cx="10881360" cy="786384"/>
+          </a:xfrm>
+          <a:prstGeom prst="rect">
+            <a:avLst/>
+          </a:prstGeom>
+          <a:noFill/>
+        </p:spPr>
+        <p:txBody>
+          <a:bodyPr wrap="square" anchor="t" lIns="0" rIns="0" tIns="0" bIns="0">
+            <a:spAutoFit/>
+          </a:bodyPr>
+          <a:lstStyle/>
+          <a:p>
+            <a:pPr algn="l">
+              <a:lnSpc>
+                <a:spcPct val="112000"/>
+              </a:lnSpc>
+            </a:pPr>
+            <a:r>
+              <a:rPr sz="2700" b="1" lang="ja-JP">
+                <a:solidFill>
+                  <a:srgbClr val="182C43"/>
+                </a:solidFill>
+                <a:latin typeface="Yu Gothic"/>
+                <a:ea typeface="Yu Gothic"/>
+                <a:cs typeface="Yu Gothic"/>
+              </a:rPr>
+              <a:t>対象画面と確認事項を並べ、指摘の根拠を明確にする</a:t>
+            </a:r>
+          </a:p>
+        </p:txBody>
+      </p:sp>
+      <p:sp>
+        <p:nvSpPr>
+          <p:cNvPr id="5" name="Rectangle 4"/>
+          <p:cNvSpPr/>
+          <p:nvPr/>
+        </p:nvSpPr>
+        <p:spPr>
+          <a:xfrm>
+            <a:off x="6094475" y="1499616"/>
+            <a:ext cx="7315" cy="4727448"/>
+          </a:xfrm>
+          <a:prstGeom prst="rect">
+            <a:avLst/>
+          </a:prstGeom>
+          <a:solidFill>
+            <a:srgbClr val="D1CFC8"/>
+          </a:solidFill>
+          <a:ln>
+            <a:noFill/>
+          </a:ln>
+          <a:effectLst/>
+        </p:spPr>
+        <p:style>
+          <a:lnRef idx="1">
+            <a:schemeClr val="accent1"/>
+          </a:lnRef>
+          <a:fillRef idx="3">
+            <a:schemeClr val="accent1"/>
+          </a:fillRef>
+          <a:effectRef idx="2">
+            <a:schemeClr val="accent1"/>
+          </a:effectRef>
+          <a:fontRef idx="minor">
+            <a:schemeClr val="lt1"/>
+          </a:fontRef>
+        </p:style>
+        <p:txBody>
+          <a:bodyPr rtlCol="0" anchor="ctr"/>
+          <a:lstStyle/>
+          <a:p>
+            <a:pPr algn="ctr"/>
+          </a:p>
+        </p:txBody>
+      </p:sp>
+      <p:sp>
+        <p:nvSpPr>
+          <p:cNvPr id="6" name="TextBox 5"/>
+          <p:cNvSpPr txBox="1"/>
+          <p:nvPr/>
+        </p:nvSpPr>
+        <p:spPr>
+          <a:xfrm>
+            <a:off x="658368" y="1463040"/>
+            <a:ext cx="5225795" cy="347472"/>
+          </a:xfrm>
+          <a:prstGeom prst="rect">
+            <a:avLst/>
+          </a:prstGeom>
+          <a:noFill/>
+        </p:spPr>
+        <p:txBody>
+          <a:bodyPr wrap="square" anchor="t" lIns="0" rIns="0" tIns="0" bIns="0">
+            <a:spAutoFit/>
+          </a:bodyPr>
+          <a:lstStyle/>
+          <a:p>
+            <a:pPr algn="l">
+              <a:lnSpc>
+                <a:spcPct val="108000"/>
+              </a:lnSpc>
+            </a:pPr>
+            <a:r>
+              <a:rPr sz="1650" b="1" lang="ja-JP">
+                <a:solidFill>
+                  <a:srgbClr val="182C43"/>
+                </a:solidFill>
+                <a:latin typeface="Yu Gothic"/>
+                <a:ea typeface="Yu Gothic"/>
+                <a:cs typeface="Yu Gothic"/>
+              </a:rPr>
+              <a:t>対象画面</a:t>
+            </a:r>
+          </a:p>
+        </p:txBody>
+      </p:sp>
+      <p:pic>
+        <p:nvPicPr>
+          <p:cNvPr id="7" name="ContentImage" descr="pptxdsl-repository.png"/>
+          <p:cNvPicPr>
+            <a:picLocks noChangeAspect="1"/>
+          </p:cNvPicPr>
+          <p:nvPr/>
+        </p:nvPicPr>
+        <p:blipFill>
+          <a:blip r:embed="rId2"/>
+          <a:stretch>
+            <a:fillRect/>
+          </a:stretch>
+        </p:blipFill>
+        <p:spPr>
+          <a:xfrm>
+            <a:off x="658368" y="2743294"/>
+            <a:ext cx="5225795" cy="2697291"/>
+          </a:xfrm>
+          <a:prstGeom prst="rect">
+            <a:avLst/>
+          </a:prstGeom>
+        </p:spPr>
+      </p:pic>
+      <p:sp>
+        <p:nvSpPr>
+          <p:cNvPr id="8" name="TextBox 7"/>
+          <p:cNvSpPr txBox="1"/>
+          <p:nvPr/>
+        </p:nvSpPr>
+        <p:spPr>
+          <a:xfrm>
+            <a:off x="6304787" y="1463040"/>
+            <a:ext cx="5225796" cy="347472"/>
+          </a:xfrm>
+          <a:prstGeom prst="rect">
+            <a:avLst/>
+          </a:prstGeom>
+          <a:noFill/>
+        </p:spPr>
+        <p:txBody>
+          <a:bodyPr wrap="square" anchor="t" lIns="0" rIns="0" tIns="0" bIns="0">
+            <a:spAutoFit/>
+          </a:bodyPr>
+          <a:lstStyle/>
+          <a:p>
+            <a:pPr algn="l">
+              <a:lnSpc>
+                <a:spcPct val="108000"/>
+              </a:lnSpc>
+            </a:pPr>
+            <a:r>
+              <a:rPr sz="1650" b="1" lang="ja-JP">
+                <a:solidFill>
+                  <a:srgbClr val="182C43"/>
+                </a:solidFill>
+                <a:latin typeface="Yu Gothic"/>
+                <a:ea typeface="Yu Gothic"/>
+                <a:cs typeface="Yu Gothic"/>
+              </a:rPr>
+              <a:t>確認事項</a:t>
+            </a:r>
+          </a:p>
+        </p:txBody>
+      </p:sp>
+      <p:sp>
+        <p:nvSpPr>
+          <p:cNvPr id="9" name="TextBox 8"/>
+          <p:cNvSpPr txBox="1"/>
+          <p:nvPr/>
+        </p:nvSpPr>
+        <p:spPr>
+          <a:xfrm>
+            <a:off x="6304787" y="2287143"/>
+            <a:ext cx="310896" cy="237744"/>
+          </a:xfrm>
+          <a:prstGeom prst="rect">
+            <a:avLst/>
+          </a:prstGeom>
+          <a:noFill/>
+        </p:spPr>
+        <p:txBody>
+          <a:bodyPr wrap="square" anchor="t" lIns="0" rIns="0" tIns="0" bIns="0">
+            <a:spAutoFit/>
+          </a:bodyPr>
+          <a:lstStyle/>
+          <a:p>
+            <a:pPr algn="r">
+              <a:lnSpc>
+                <a:spcPct val="130000"/>
+              </a:lnSpc>
+            </a:pPr>
+            <a:r>
+              <a:rPr sz="1000" b="1" lang="ja-JP">
+                <a:solidFill>
+                  <a:srgbClr val="0D7870"/>
+                </a:solidFill>
+                <a:latin typeface="Yu Gothic"/>
+                <a:ea typeface="Yu Gothic"/>
+                <a:cs typeface="Yu Gothic"/>
+              </a:rPr>
+              <a:t>01</a:t>
+            </a:r>
+          </a:p>
+        </p:txBody>
+      </p:sp>
+      <p:sp>
+        <p:nvSpPr>
+          <p:cNvPr id="10" name="TextBox 9"/>
+          <p:cNvSpPr txBox="1"/>
+          <p:nvPr/>
+        </p:nvSpPr>
+        <p:spPr>
+          <a:xfrm>
+            <a:off x="6725411" y="2305431"/>
+            <a:ext cx="4750308" cy="270510"/>
+          </a:xfrm>
+          <a:prstGeom prst="rect">
+            <a:avLst/>
+          </a:prstGeom>
+          <a:noFill/>
+        </p:spPr>
+        <p:txBody>
+          <a:bodyPr wrap="square" anchor="t" lIns="0" rIns="0" tIns="0" bIns="0">
+            <a:spAutoFit/>
+          </a:bodyPr>
+          <a:lstStyle/>
+          <a:p>
+            <a:pPr algn="l">
+              <a:lnSpc>
+                <a:spcPct val="118000"/>
+              </a:lnSpc>
+            </a:pPr>
+            <a:r>
+              <a:rPr sz="1500" b="0" lang="ja-JP">
+                <a:solidFill>
+                  <a:srgbClr val="202729"/>
+                </a:solidFill>
+                <a:latin typeface="Yu Gothic"/>
+                <a:ea typeface="Yu Gothic"/>
+                <a:cs typeface="Yu Gothic"/>
+              </a:rPr>
+              <a:t>操作の起点が迷わず見つかるか</a:t>
+            </a:r>
+          </a:p>
+        </p:txBody>
+      </p:sp>
+      <p:sp>
+        <p:nvSpPr>
+          <p:cNvPr id="11" name="TextBox 10"/>
+          <p:cNvSpPr txBox="1"/>
+          <p:nvPr/>
+        </p:nvSpPr>
+        <p:spPr>
+          <a:xfrm>
+            <a:off x="6304787" y="2786253"/>
+            <a:ext cx="310896" cy="237744"/>
+          </a:xfrm>
+          <a:prstGeom prst="rect">
+            <a:avLst/>
+          </a:prstGeom>
+          <a:noFill/>
+        </p:spPr>
+        <p:txBody>
+          <a:bodyPr wrap="square" anchor="t" lIns="0" rIns="0" tIns="0" bIns="0">
+            <a:spAutoFit/>
+          </a:bodyPr>
+          <a:lstStyle/>
+          <a:p>
+            <a:pPr algn="r">
+              <a:lnSpc>
+                <a:spcPct val="130000"/>
+              </a:lnSpc>
+            </a:pPr>
+            <a:r>
+              <a:rPr sz="1000" b="1" lang="ja-JP">
+                <a:solidFill>
+                  <a:srgbClr val="0D7870"/>
+                </a:solidFill>
+                <a:latin typeface="Yu Gothic"/>
+                <a:ea typeface="Yu Gothic"/>
+                <a:cs typeface="Yu Gothic"/>
+              </a:rPr>
+              <a:t>02</a:t>
+            </a:r>
+          </a:p>
+        </p:txBody>
+      </p:sp>
+      <p:sp>
+        <p:nvSpPr>
+          <p:cNvPr id="12" name="TextBox 11"/>
+          <p:cNvSpPr txBox="1"/>
+          <p:nvPr/>
+        </p:nvSpPr>
+        <p:spPr>
+          <a:xfrm>
+            <a:off x="6725411" y="2804541"/>
+            <a:ext cx="4750308" cy="270510"/>
+          </a:xfrm>
+          <a:prstGeom prst="rect">
+            <a:avLst/>
+          </a:prstGeom>
+          <a:noFill/>
+        </p:spPr>
+        <p:txBody>
+          <a:bodyPr wrap="square" anchor="t" lIns="0" rIns="0" tIns="0" bIns="0">
+            <a:spAutoFit/>
+          </a:bodyPr>
+          <a:lstStyle/>
+          <a:p>
+            <a:pPr algn="l">
+              <a:lnSpc>
+                <a:spcPct val="118000"/>
+              </a:lnSpc>
+            </a:pPr>
+            <a:r>
+              <a:rPr sz="1500" b="0" lang="ja-JP">
+                <a:solidFill>
+                  <a:srgbClr val="202729"/>
+                </a:solidFill>
+                <a:latin typeface="Yu Gothic"/>
+                <a:ea typeface="Yu Gothic"/>
+                <a:cs typeface="Yu Gothic"/>
+              </a:rPr>
+              <a:t>主要な導線を少ない手順で追えるか</a:t>
+            </a:r>
+          </a:p>
+        </p:txBody>
+      </p:sp>
+      <p:sp>
+        <p:nvSpPr>
+          <p:cNvPr id="13" name="TextBox 12"/>
+          <p:cNvSpPr txBox="1"/>
+          <p:nvPr/>
+        </p:nvSpPr>
+        <p:spPr>
+          <a:xfrm>
+            <a:off x="6304787" y="3285363"/>
+            <a:ext cx="310896" cy="237744"/>
+          </a:xfrm>
+          <a:prstGeom prst="rect">
+            <a:avLst/>
+          </a:prstGeom>
+          <a:noFill/>
+        </p:spPr>
+        <p:txBody>
+          <a:bodyPr wrap="square" anchor="t" lIns="0" rIns="0" tIns="0" bIns="0">
+            <a:spAutoFit/>
+          </a:bodyPr>
+          <a:lstStyle/>
+          <a:p>
+            <a:pPr algn="r">
+              <a:lnSpc>
+                <a:spcPct val="130000"/>
+              </a:lnSpc>
+            </a:pPr>
+            <a:r>
+              <a:rPr sz="1000" b="1" lang="ja-JP">
+                <a:solidFill>
+                  <a:srgbClr val="0D7870"/>
+                </a:solidFill>
+                <a:latin typeface="Yu Gothic"/>
+                <a:ea typeface="Yu Gothic"/>
+                <a:cs typeface="Yu Gothic"/>
+              </a:rPr>
+              <a:t>03</a:t>
+            </a:r>
+          </a:p>
+        </p:txBody>
+      </p:sp>
+      <p:sp>
+        <p:nvSpPr>
+          <p:cNvPr id="14" name="TextBox 13"/>
+          <p:cNvSpPr txBox="1"/>
+          <p:nvPr/>
+        </p:nvSpPr>
+        <p:spPr>
+          <a:xfrm>
+            <a:off x="6725411" y="3303651"/>
+            <a:ext cx="4750308" cy="270510"/>
+          </a:xfrm>
+          <a:prstGeom prst="rect">
+            <a:avLst/>
+          </a:prstGeom>
+          <a:noFill/>
+        </p:spPr>
+        <p:txBody>
+          <a:bodyPr wrap="square" anchor="t" lIns="0" rIns="0" tIns="0" bIns="0">
+            <a:spAutoFit/>
+          </a:bodyPr>
+          <a:lstStyle/>
+          <a:p>
+            <a:pPr algn="l">
+              <a:lnSpc>
+                <a:spcPct val="118000"/>
+              </a:lnSpc>
+            </a:pPr>
+            <a:r>
+              <a:rPr sz="1500" b="0" lang="ja-JP">
+                <a:solidFill>
+                  <a:srgbClr val="202729"/>
+                </a:solidFill>
+                <a:latin typeface="Yu Gothic"/>
+                <a:ea typeface="Yu Gothic"/>
+                <a:cs typeface="Yu Gothic"/>
+              </a:rPr>
+              <a:t>権限境界と実行結果を確認できるか</a:t>
+            </a:r>
+          </a:p>
+        </p:txBody>
+      </p:sp>
+      <p:sp>
+        <p:nvSpPr>
+          <p:cNvPr id="15" name="Rectangle 14"/>
+          <p:cNvSpPr/>
+          <p:nvPr/>
+        </p:nvSpPr>
+        <p:spPr>
+          <a:xfrm>
+            <a:off x="658368" y="6327648"/>
+            <a:ext cx="10881360" cy="9144"/>
+          </a:xfrm>
+          <a:prstGeom prst="rect">
+            <a:avLst/>
+          </a:prstGeom>
+          <a:solidFill>
+            <a:srgbClr val="D1CFC8"/>
+          </a:solidFill>
+          <a:ln>
+            <a:noFill/>
+          </a:ln>
+          <a:effectLst/>
+        </p:spPr>
+        <p:style>
+          <a:lnRef idx="1">
+            <a:schemeClr val="accent1"/>
+          </a:lnRef>
+          <a:fillRef idx="3">
+            <a:schemeClr val="accent1"/>
+          </a:fillRef>
+          <a:effectRef idx="2">
+            <a:schemeClr val="accent1"/>
+          </a:effectRef>
+          <a:fontRef idx="minor">
+            <a:schemeClr val="lt1"/>
+          </a:fontRef>
+        </p:style>
+        <p:txBody>
+          <a:bodyPr rtlCol="0" anchor="ctr"/>
+          <a:lstStyle/>
+          <a:p>
+            <a:pPr algn="ctr"/>
+          </a:p>
+        </p:txBody>
+      </p:sp>
+      <p:sp>
+        <p:nvSpPr>
+          <p:cNvPr id="16" name="TextBox 15"/>
+          <p:cNvSpPr txBox="1"/>
+          <p:nvPr/>
+        </p:nvSpPr>
+        <p:spPr>
+          <a:xfrm>
+            <a:off x="658368" y="6409944"/>
+            <a:ext cx="7132320" cy="228600"/>
+          </a:xfrm>
+          <a:prstGeom prst="rect">
+            <a:avLst/>
+          </a:prstGeom>
+          <a:noFill/>
+        </p:spPr>
+        <p:txBody>
+          <a:bodyPr wrap="square" anchor="ctr" lIns="0" rIns="0" tIns="0" bIns="0">
+            <a:spAutoFit/>
+          </a:bodyPr>
+          <a:lstStyle/>
+          <a:p>
+            <a:pPr algn="l">
+              <a:lnSpc>
+                <a:spcPct val="130000"/>
+              </a:lnSpc>
+            </a:pPr>
+            <a:r>
+              <a:rPr sz="819" b="0" lang="ja-JP">
+                <a:solidFill>
+                  <a:srgbClr val="666E70"/>
+                </a:solidFill>
+                <a:latin typeface="Yu Gothic"/>
+                <a:ea typeface="Yu Gothic"/>
+                <a:cs typeface="Yu Gothic"/>
+              </a:rPr>
+              <a:t>社内スライドパターン検証ギャラリー</a:t>
+            </a:r>
+          </a:p>
+        </p:txBody>
+      </p:sp>
+      <p:sp>
+        <p:nvSpPr>
+          <p:cNvPr id="17" name="TextBox 16"/>
+          <p:cNvSpPr txBox="1"/>
+          <p:nvPr/>
+        </p:nvSpPr>
+        <p:spPr>
+          <a:xfrm>
+            <a:off x="10405872" y="6382512"/>
+            <a:ext cx="585216" cy="256032"/>
+          </a:xfrm>
+          <a:prstGeom prst="rect">
+            <a:avLst/>
+          </a:prstGeom>
+          <a:noFill/>
+        </p:spPr>
+        <p:txBody>
+          <a:bodyPr wrap="square" anchor="t" lIns="0" rIns="0" tIns="0" bIns="0">
+            <a:spAutoFit/>
+          </a:bodyPr>
+          <a:lstStyle/>
+          <a:p>
+            <a:pPr algn="r">
+              <a:lnSpc>
+                <a:spcPct val="130000"/>
+              </a:lnSpc>
+            </a:pPr>
+            <a:r>
+              <a:rPr sz="1100" b="1" lang="ja-JP">
+                <a:solidFill>
+                  <a:srgbClr val="182C43"/>
+                </a:solidFill>
+                <a:latin typeface="Yu Gothic"/>
+                <a:ea typeface="Yu Gothic"/>
+                <a:cs typeface="Yu Gothic"/>
+              </a:rPr>
+              <a:t>23</a:t>
+            </a:r>
+          </a:p>
+        </p:txBody>
+      </p:sp>
+      <p:sp>
+        <p:nvSpPr>
+          <p:cNvPr id="18" name="TextBox 17"/>
+          <p:cNvSpPr txBox="1"/>
+          <p:nvPr/>
+        </p:nvSpPr>
+        <p:spPr>
+          <a:xfrm>
+            <a:off x="11009376" y="6391656"/>
+            <a:ext cx="530352" cy="237744"/>
+          </a:xfrm>
+          <a:prstGeom prst="rect">
+            <a:avLst/>
+          </a:prstGeom>
+          <a:noFill/>
+        </p:spPr>
+        <p:txBody>
+          <a:bodyPr wrap="square" anchor="t" lIns="0" rIns="0" tIns="0" bIns="0">
+            <a:spAutoFit/>
+          </a:bodyPr>
+          <a:lstStyle/>
+          <a:p>
+            <a:pPr algn="r">
+              <a:lnSpc>
+                <a:spcPct val="130000"/>
+              </a:lnSpc>
+            </a:pPr>
+            <a:r>
+              <a:rPr sz="819" b="0" lang="ja-JP">
+                <a:solidFill>
+                  <a:srgbClr val="666E70"/>
+                </a:solidFill>
+                <a:latin typeface="Yu Gothic"/>
+                <a:ea typeface="Yu Gothic"/>
+                <a:cs typeface="Yu Gothic"/>
+              </a:rPr>
+              <a:t>/ 24</a:t>
+            </a:r>
+          </a:p>
+        </p:txBody>
+      </p:sp>
+    </p:spTree>
+  </p:cSld>
+  <p:clrMapOvr>
+    <a:masterClrMapping/>
+  </p:clrMapOvr>
+</p:sld>
+</file>
+
+<file path=ppt/slides/slide24.xml><?xml version="1.0" encoding="utf-8"?>
+<p:sld xmlns:a="http://schemas.openxmlformats.org/drawingml/2006/main" xmlns:p="http://schemas.openxmlformats.org/presentationml/2006/main" xmlns:r="http://schemas.openxmlformats.org/officeDocument/2006/relationships">
+  <p:cSld>
+    <p:spTree>
+      <p:nvGrpSpPr>
+        <p:cNvPr id="1" name=""/>
+        <p:cNvGrpSpPr/>
+        <p:nvPr/>
+      </p:nvGrpSpPr>
+      <p:grpSpPr/>
+      <p:sp>
+        <p:nvSpPr>
+          <p:cNvPr id="2" name="Rectangle 1"/>
+          <p:cNvSpPr/>
+          <p:nvPr/>
+        </p:nvSpPr>
+        <p:spPr>
+          <a:xfrm>
+            <a:off x="0" y="0"/>
+            <a:ext cx="12191695" cy="6858000"/>
+          </a:xfrm>
+          <a:prstGeom prst="rect">
+            <a:avLst/>
+          </a:prstGeom>
+          <a:solidFill>
+            <a:srgbClr val="F7F5EF"/>
+          </a:solidFill>
+          <a:ln>
+            <a:noFill/>
+          </a:ln>
+          <a:effectLst/>
+        </p:spPr>
+        <p:style>
+          <a:lnRef idx="1">
+            <a:schemeClr val="accent1"/>
+          </a:lnRef>
+          <a:fillRef idx="3">
+            <a:schemeClr val="accent1"/>
+          </a:fillRef>
+          <a:effectRef idx="2">
+            <a:schemeClr val="accent1"/>
+          </a:effectRef>
+          <a:fontRef idx="minor">
+            <a:schemeClr val="lt1"/>
+          </a:fontRef>
+        </p:style>
+        <p:txBody>
+          <a:bodyPr rtlCol="0" anchor="ctr"/>
+          <a:lstStyle/>
+          <a:p>
+            <a:pPr algn="ctr"/>
+          </a:p>
+        </p:txBody>
+      </p:sp>
+      <p:sp>
+        <p:nvSpPr>
+          <p:cNvPr id="3" name="TextBox 2"/>
+          <p:cNvSpPr txBox="1"/>
+          <p:nvPr/>
+        </p:nvSpPr>
+        <p:spPr>
+          <a:xfrm>
+            <a:off x="658368" y="246888"/>
+            <a:ext cx="4389120" cy="292608"/>
+          </a:xfrm>
+          <a:prstGeom prst="rect">
+            <a:avLst/>
+          </a:prstGeom>
+          <a:noFill/>
+        </p:spPr>
+        <p:txBody>
+          <a:bodyPr wrap="square" anchor="t" lIns="0" rIns="0" tIns="0" bIns="0">
+            <a:spAutoFit/>
+          </a:bodyPr>
+          <a:lstStyle/>
+          <a:p>
+            <a:pPr algn="l">
+              <a:lnSpc>
+                <a:spcPct val="130000"/>
+              </a:lnSpc>
+            </a:pPr>
+            <a:r>
+              <a:rPr sz="1150" b="1" lang="ja-JP">
+                <a:solidFill>
+                  <a:srgbClr val="0D7870"/>
+                </a:solidFill>
+                <a:latin typeface="Yu Gothic"/>
+                <a:ea typeface="Yu Gothic"/>
+                <a:cs typeface="Yu Gothic"/>
+              </a:rPr>
+              <a:t>実績レビュー</a:t>
+            </a:r>
+          </a:p>
+        </p:txBody>
+      </p:sp>
+      <p:sp>
+        <p:nvSpPr>
+          <p:cNvPr id="4" name="TextBox 3"/>
+          <p:cNvSpPr txBox="1"/>
+          <p:nvPr/>
+        </p:nvSpPr>
+        <p:spPr>
+          <a:xfrm>
+            <a:off x="658368" y="612648"/>
+            <a:ext cx="10881360" cy="786384"/>
+          </a:xfrm>
+          <a:prstGeom prst="rect">
+            <a:avLst/>
+          </a:prstGeom>
+          <a:noFill/>
+        </p:spPr>
+        <p:txBody>
+          <a:bodyPr wrap="square" anchor="t" lIns="0" rIns="0" tIns="0" bIns="0">
+            <a:spAutoFit/>
+          </a:bodyPr>
+          <a:lstStyle/>
+          <a:p>
+            <a:pPr algn="l">
+              <a:lnSpc>
+                <a:spcPct val="112000"/>
+              </a:lnSpc>
+            </a:pPr>
+            <a:r>
+              <a:rPr sz="2700" b="1" lang="ja-JP">
+                <a:solidFill>
+                  <a:srgbClr val="182C43"/>
+                </a:solidFill>
+                <a:latin typeface="Yu Gothic"/>
+                <a:ea typeface="Yu Gothic"/>
+                <a:cs typeface="Yu Gothic"/>
+              </a:rPr>
+              <a:t>推移と判断基準を並べ、数値の意味まで読み取れるようにする</a:t>
+            </a:r>
+          </a:p>
+        </p:txBody>
+      </p:sp>
+      <p:sp>
+        <p:nvSpPr>
+          <p:cNvPr id="5" name="Rectangle 4"/>
+          <p:cNvSpPr/>
+          <p:nvPr/>
+        </p:nvSpPr>
+        <p:spPr>
+          <a:xfrm>
+            <a:off x="6094475" y="1499616"/>
+            <a:ext cx="7315" cy="4727448"/>
+          </a:xfrm>
+          <a:prstGeom prst="rect">
+            <a:avLst/>
+          </a:prstGeom>
+          <a:solidFill>
+            <a:srgbClr val="D1CFC8"/>
+          </a:solidFill>
+          <a:ln>
+            <a:noFill/>
+          </a:ln>
+          <a:effectLst/>
+        </p:spPr>
+        <p:style>
+          <a:lnRef idx="1">
+            <a:schemeClr val="accent1"/>
+          </a:lnRef>
+          <a:fillRef idx="3">
+            <a:schemeClr val="accent1"/>
+          </a:fillRef>
+          <a:effectRef idx="2">
+            <a:schemeClr val="accent1"/>
+          </a:effectRef>
+          <a:fontRef idx="minor">
+            <a:schemeClr val="lt1"/>
+          </a:fontRef>
+        </p:style>
+        <p:txBody>
+          <a:bodyPr rtlCol="0" anchor="ctr"/>
+          <a:lstStyle/>
+          <a:p>
+            <a:pPr algn="ctr"/>
+          </a:p>
+        </p:txBody>
+      </p:sp>
+      <p:sp>
+        <p:nvSpPr>
+          <p:cNvPr id="6" name="TextBox 5"/>
+          <p:cNvSpPr txBox="1"/>
+          <p:nvPr/>
+        </p:nvSpPr>
+        <p:spPr>
+          <a:xfrm>
+            <a:off x="658368" y="1463040"/>
+            <a:ext cx="5225795" cy="347472"/>
+          </a:xfrm>
+          <a:prstGeom prst="rect">
+            <a:avLst/>
+          </a:prstGeom>
+          <a:noFill/>
+        </p:spPr>
+        <p:txBody>
+          <a:bodyPr wrap="square" anchor="t" lIns="0" rIns="0" tIns="0" bIns="0">
+            <a:spAutoFit/>
+          </a:bodyPr>
+          <a:lstStyle/>
+          <a:p>
+            <a:pPr algn="l">
+              <a:lnSpc>
+                <a:spcPct val="108000"/>
+              </a:lnSpc>
+            </a:pPr>
+            <a:r>
+              <a:rPr sz="1650" b="1" lang="ja-JP">
+                <a:solidFill>
+                  <a:srgbClr val="182C43"/>
+                </a:solidFill>
+                <a:latin typeface="Yu Gothic"/>
+                <a:ea typeface="Yu Gothic"/>
+                <a:cs typeface="Yu Gothic"/>
+              </a:rPr>
+              <a:t>月別推移</a:t>
+            </a:r>
+          </a:p>
+        </p:txBody>
+      </p:sp>
+      <p:graphicFrame>
+        <p:nvGraphicFramePr>
+          <p:cNvPr id="7" name="Chart 6"/>
+          <p:cNvGraphicFramePr>
+            <a:graphicFrameLocks noGrp="1"/>
+          </p:cNvGraphicFramePr>
+          <p:nvPr/>
+        </p:nvGraphicFramePr>
+        <p:xfrm>
+          <a:off x="658368" y="1938528"/>
+          <a:ext cx="5225795" cy="4270248"/>
+        </p:xfrm>
+        <a:graphic>
+          <a:graphicData uri="http://schemas.openxmlformats.org/drawingml/2006/chart">
+            <c:chart xmlns:c="http://schemas.openxmlformats.org/drawingml/2006/chart" r:id="rId2"/>
+          </a:graphicData>
+        </a:graphic>
+      </p:graphicFrame>
+      <p:sp>
+        <p:nvSpPr>
+          <p:cNvPr id="8" name="TextBox 7"/>
+          <p:cNvSpPr txBox="1"/>
+          <p:nvPr/>
+        </p:nvSpPr>
+        <p:spPr>
+          <a:xfrm>
+            <a:off x="6304787" y="1463040"/>
+            <a:ext cx="5225796" cy="347472"/>
+          </a:xfrm>
+          <a:prstGeom prst="rect">
+            <a:avLst/>
+          </a:prstGeom>
+          <a:noFill/>
+        </p:spPr>
+        <p:txBody>
+          <a:bodyPr wrap="square" anchor="t" lIns="0" rIns="0" tIns="0" bIns="0">
+            <a:spAutoFit/>
+          </a:bodyPr>
+          <a:lstStyle/>
+          <a:p>
+            <a:pPr algn="l">
+              <a:lnSpc>
+                <a:spcPct val="108000"/>
+              </a:lnSpc>
+            </a:pPr>
+            <a:r>
+              <a:rPr sz="1650" b="1" lang="ja-JP">
+                <a:solidFill>
+                  <a:srgbClr val="182C43"/>
+                </a:solidFill>
+                <a:latin typeface="Yu Gothic"/>
+                <a:ea typeface="Yu Gothic"/>
+                <a:cs typeface="Yu Gothic"/>
+              </a:rPr>
+              <a:t>判断基準</a:t>
+            </a:r>
+          </a:p>
+        </p:txBody>
+      </p:sp>
+      <p:graphicFrame>
+        <p:nvGraphicFramePr>
+          <p:cNvPr id="9" name="Table 8"/>
+          <p:cNvGraphicFramePr>
+            <a:graphicFrameLocks noGrp="1"/>
+          </p:cNvGraphicFramePr>
+          <p:nvPr/>
+        </p:nvGraphicFramePr>
+        <p:xfrm>
+          <a:off x="6304787" y="1956816"/>
+          <a:ext cx="5225796" cy="1755648"/>
+        </p:xfrm>
+        <a:graphic>
+          <a:graphicData uri="http://schemas.openxmlformats.org/drawingml/2006/table">
+            <a:tbl>
+              <a:tblPr firstRow="1" bandRow="1">
+                <a:tableStyleId>{5C22544A-7EE6-4342-B048-85BDC9FD1C3A}</a:tableStyleId>
+              </a:tblPr>
+              <a:tblGrid>
+                <a:gridCol w="2612898"/>
+                <a:gridCol w="2612898"/>
+              </a:tblGrid>
+              <a:tr h="493776">
+                <a:tc>
+                  <a:txBody>
+                    <a:bodyPr wrap="square"/>
+                    <a:lstStyle/>
+                    <a:p>
+                      <a:pPr algn="l">
+                        <a:lnSpc>
+                          <a:spcPct val="115000"/>
+                        </a:lnSpc>
+                      </a:pPr>
+                      <a:r>
+                        <a:rPr sz="1050" b="1" lang="ja-JP">
+                          <a:solidFill>
+                            <a:srgbClr val="FFFFFC"/>
+                          </a:solidFill>
+                          <a:latin typeface="Yu Gothic"/>
+                          <a:ea typeface="Yu Gothic"/>
+                          <a:cs typeface="Yu Gothic"/>
+                        </a:rPr>
+                        <a:t>指標</a:t>
+                      </a:r>
+                    </a:p>
+                  </a:txBody>
+                  <a:tcPr anchor="ctr" marL="82296" marR="82296" marT="36576" marB="36576">
+                    <a:solidFill>
+                      <a:srgbClr val="182C43"/>
+                    </a:solidFill>
+                  </a:tcPr>
+                </a:tc>
+                <a:tc>
+                  <a:txBody>
+                    <a:bodyPr wrap="square"/>
+                    <a:lstStyle/>
+                    <a:p>
+                      <a:pPr algn="ctr">
+                        <a:lnSpc>
+                          <a:spcPct val="115000"/>
+                        </a:lnSpc>
+                      </a:pPr>
+                      <a:r>
+                        <a:rPr sz="1050" b="1" lang="ja-JP">
+                          <a:solidFill>
+                            <a:srgbClr val="FFFFFC"/>
+                          </a:solidFill>
+                          <a:latin typeface="Yu Gothic"/>
+                          <a:ea typeface="Yu Gothic"/>
+                          <a:cs typeface="Yu Gothic"/>
+                        </a:rPr>
+                        <a:t>基準</a:t>
+                      </a:r>
+                    </a:p>
+                  </a:txBody>
+                  <a:tcPr anchor="ctr" marL="82296" marR="82296" marT="36576" marB="36576">
+                    <a:solidFill>
+                      <a:srgbClr val="182C43"/>
+                    </a:solidFill>
+                  </a:tcPr>
+                </a:tc>
+              </a:tr>
+              <a:tr h="420624">
+                <a:tc>
+                  <a:txBody>
+                    <a:bodyPr wrap="square"/>
+                    <a:lstStyle/>
+                    <a:p>
+                      <a:pPr algn="l">
+                        <a:lnSpc>
+                          <a:spcPct val="115000"/>
+                        </a:lnSpc>
+                      </a:pPr>
+                      <a:r>
+                        <a:rPr sz="1050" b="1" lang="ja-JP">
+                          <a:solidFill>
+                            <a:srgbClr val="182C43"/>
+                          </a:solidFill>
+                          <a:latin typeface="Yu Gothic"/>
+                          <a:ea typeface="Yu Gothic"/>
+                          <a:cs typeface="Yu Gothic"/>
+                        </a:rPr>
+                        <a:t>品質</a:t>
+                      </a:r>
+                    </a:p>
+                  </a:txBody>
+                  <a:tcPr anchor="ctr" marL="91440" marR="91440" marT="36576" marB="36576">
+                    <a:solidFill>
+                      <a:srgbClr val="ECEAE4"/>
+                    </a:solidFill>
+                  </a:tcPr>
+                </a:tc>
+                <a:tc>
+                  <a:txBody>
+                    <a:bodyPr wrap="square"/>
+                    <a:lstStyle/>
+                    <a:p>
+                      <a:pPr algn="l">
+                        <a:lnSpc>
+                          <a:spcPct val="115000"/>
+                        </a:lnSpc>
+                      </a:pPr>
+                      <a:r>
+                        <a:rPr sz="1050" b="0" lang="ja-JP">
+                          <a:solidFill>
+                            <a:srgbClr val="202729"/>
+                          </a:solidFill>
+                          <a:latin typeface="Yu Gothic"/>
+                          <a:ea typeface="Yu Gothic"/>
+                          <a:cs typeface="Yu Gothic"/>
+                        </a:rPr>
+                        <a:t>95%以上</a:t>
+                      </a:r>
+                    </a:p>
+                  </a:txBody>
+                  <a:tcPr anchor="ctr" marL="91440" marR="91440" marT="36576" marB="36576">
+                    <a:solidFill>
+                      <a:srgbClr val="ECEAE4"/>
+                    </a:solidFill>
+                  </a:tcPr>
+                </a:tc>
+              </a:tr>
+              <a:tr h="420624">
+                <a:tc>
+                  <a:txBody>
+                    <a:bodyPr wrap="square"/>
+                    <a:lstStyle/>
+                    <a:p>
+                      <a:pPr algn="l">
+                        <a:lnSpc>
+                          <a:spcPct val="115000"/>
+                        </a:lnSpc>
+                      </a:pPr>
+                      <a:r>
+                        <a:rPr sz="1050" b="1" lang="ja-JP">
+                          <a:solidFill>
+                            <a:srgbClr val="182C43"/>
+                          </a:solidFill>
+                          <a:latin typeface="Yu Gothic"/>
+                          <a:ea typeface="Yu Gothic"/>
+                          <a:cs typeface="Yu Gothic"/>
+                        </a:rPr>
+                        <a:t>処理時間</a:t>
+                      </a:r>
+                    </a:p>
+                  </a:txBody>
+                  <a:tcPr anchor="ctr" marL="91440" marR="91440" marT="36576" marB="36576">
+                    <a:solidFill>
+                      <a:srgbClr val="FFFFFC"/>
+                    </a:solidFill>
+                  </a:tcPr>
+                </a:tc>
+                <a:tc>
+                  <a:txBody>
+                    <a:bodyPr wrap="square"/>
+                    <a:lstStyle/>
+                    <a:p>
+                      <a:pPr algn="l">
+                        <a:lnSpc>
+                          <a:spcPct val="115000"/>
+                        </a:lnSpc>
+                      </a:pPr>
+                      <a:r>
+                        <a:rPr sz="1050" b="0" lang="ja-JP">
+                          <a:solidFill>
+                            <a:srgbClr val="202729"/>
+                          </a:solidFill>
+                          <a:latin typeface="Yu Gothic"/>
+                          <a:ea typeface="Yu Gothic"/>
+                          <a:cs typeface="Yu Gothic"/>
+                        </a:rPr>
+                        <a:t>8時間以内</a:t>
+                      </a:r>
+                    </a:p>
+                  </a:txBody>
+                  <a:tcPr anchor="ctr" marL="91440" marR="91440" marT="36576" marB="36576">
+                    <a:solidFill>
+                      <a:srgbClr val="FFFFFC"/>
+                    </a:solidFill>
+                  </a:tcPr>
+                </a:tc>
+              </a:tr>
+              <a:tr h="420624">
+                <a:tc>
+                  <a:txBody>
+                    <a:bodyPr wrap="square"/>
+                    <a:lstStyle/>
+                    <a:p>
+                      <a:pPr algn="l">
+                        <a:lnSpc>
+                          <a:spcPct val="115000"/>
+                        </a:lnSpc>
+                      </a:pPr>
+                      <a:r>
+                        <a:rPr sz="1050" b="1" lang="ja-JP">
+                          <a:solidFill>
+                            <a:srgbClr val="182C43"/>
+                          </a:solidFill>
+                          <a:latin typeface="Yu Gothic"/>
+                          <a:ea typeface="Yu Gothic"/>
+                          <a:cs typeface="Yu Gothic"/>
+                        </a:rPr>
+                        <a:t>継続条件</a:t>
+                      </a:r>
+                    </a:p>
+                  </a:txBody>
+                  <a:tcPr anchor="ctr" marL="91440" marR="91440" marT="36576" marB="36576">
+                    <a:solidFill>
+                      <a:srgbClr val="ECEAE4"/>
+                    </a:solidFill>
+                  </a:tcPr>
+                </a:tc>
+                <a:tc>
+                  <a:txBody>
+                    <a:bodyPr wrap="square"/>
+                    <a:lstStyle/>
+                    <a:p>
+                      <a:pPr algn="l">
+                        <a:lnSpc>
+                          <a:spcPct val="115000"/>
+                        </a:lnSpc>
+                      </a:pPr>
+                      <a:r>
+                        <a:rPr sz="1050" b="0" lang="ja-JP">
+                          <a:solidFill>
+                            <a:srgbClr val="202729"/>
+                          </a:solidFill>
+                          <a:latin typeface="Yu Gothic"/>
+                          <a:ea typeface="Yu Gothic"/>
+                          <a:cs typeface="Yu Gothic"/>
+                        </a:rPr>
+                        <a:t>重大障害なし</a:t>
+                      </a:r>
+                    </a:p>
+                  </a:txBody>
+                  <a:tcPr anchor="ctr" marL="91440" marR="91440" marT="36576" marB="36576">
+                    <a:solidFill>
+                      <a:srgbClr val="ECEAE4"/>
+                    </a:solidFill>
+                  </a:tcPr>
+                </a:tc>
+              </a:tr>
+            </a:tbl>
+          </a:graphicData>
+        </a:graphic>
+      </p:graphicFrame>
+      <p:sp>
+        <p:nvSpPr>
+          <p:cNvPr id="10" name="Rectangle 9"/>
+          <p:cNvSpPr/>
+          <p:nvPr/>
+        </p:nvSpPr>
+        <p:spPr>
+          <a:xfrm>
+            <a:off x="658368" y="6327648"/>
+            <a:ext cx="10881360" cy="9144"/>
+          </a:xfrm>
+          <a:prstGeom prst="rect">
+            <a:avLst/>
+          </a:prstGeom>
+          <a:solidFill>
+            <a:srgbClr val="D1CFC8"/>
+          </a:solidFill>
+          <a:ln>
+            <a:noFill/>
+          </a:ln>
+          <a:effectLst/>
+        </p:spPr>
+        <p:style>
+          <a:lnRef idx="1">
+            <a:schemeClr val="accent1"/>
+          </a:lnRef>
+          <a:fillRef idx="3">
+            <a:schemeClr val="accent1"/>
+          </a:fillRef>
+          <a:effectRef idx="2">
+            <a:schemeClr val="accent1"/>
+          </a:effectRef>
+          <a:fontRef idx="minor">
+            <a:schemeClr val="lt1"/>
+          </a:fontRef>
+        </p:style>
+        <p:txBody>
+          <a:bodyPr rtlCol="0" anchor="ctr"/>
+          <a:lstStyle/>
+          <a:p>
+            <a:pPr algn="ctr"/>
+          </a:p>
+        </p:txBody>
+      </p:sp>
+      <p:sp>
+        <p:nvSpPr>
+          <p:cNvPr id="11" name="TextBox 10"/>
+          <p:cNvSpPr txBox="1"/>
+          <p:nvPr/>
+        </p:nvSpPr>
+        <p:spPr>
+          <a:xfrm>
+            <a:off x="658368" y="6409944"/>
+            <a:ext cx="7132320" cy="228600"/>
+          </a:xfrm>
+          <a:prstGeom prst="rect">
+            <a:avLst/>
+          </a:prstGeom>
+          <a:noFill/>
+        </p:spPr>
+        <p:txBody>
+          <a:bodyPr wrap="square" anchor="ctr" lIns="0" rIns="0" tIns="0" bIns="0">
+            <a:spAutoFit/>
+          </a:bodyPr>
+          <a:lstStyle/>
+          <a:p>
+            <a:pPr algn="l">
+              <a:lnSpc>
+                <a:spcPct val="130000"/>
+              </a:lnSpc>
+            </a:pPr>
+            <a:r>
+              <a:rPr sz="819" b="0" lang="ja-JP">
+                <a:solidFill>
+                  <a:srgbClr val="666E70"/>
+                </a:solidFill>
+                <a:latin typeface="Yu Gothic"/>
+                <a:ea typeface="Yu Gothic"/>
+                <a:cs typeface="Yu Gothic"/>
+              </a:rPr>
+              <a:t>社内スライドパターン検証ギャラリー</a:t>
+            </a:r>
+          </a:p>
+        </p:txBody>
+      </p:sp>
+      <p:sp>
+        <p:nvSpPr>
+          <p:cNvPr id="12" name="TextBox 11"/>
+          <p:cNvSpPr txBox="1"/>
+          <p:nvPr/>
+        </p:nvSpPr>
+        <p:spPr>
+          <a:xfrm>
+            <a:off x="10405872" y="6382512"/>
+            <a:ext cx="585216" cy="256032"/>
+          </a:xfrm>
+          <a:prstGeom prst="rect">
+            <a:avLst/>
+          </a:prstGeom>
+          <a:noFill/>
+        </p:spPr>
+        <p:txBody>
+          <a:bodyPr wrap="square" anchor="t" lIns="0" rIns="0" tIns="0" bIns="0">
+            <a:spAutoFit/>
+          </a:bodyPr>
+          <a:lstStyle/>
+          <a:p>
+            <a:pPr algn="r">
+              <a:lnSpc>
+                <a:spcPct val="130000"/>
+              </a:lnSpc>
+            </a:pPr>
+            <a:r>
+              <a:rPr sz="1100" b="1" lang="ja-JP">
+                <a:solidFill>
+                  <a:srgbClr val="182C43"/>
+                </a:solidFill>
+                <a:latin typeface="Yu Gothic"/>
+                <a:ea typeface="Yu Gothic"/>
+                <a:cs typeface="Yu Gothic"/>
+              </a:rPr>
+              <a:t>24</a:t>
+            </a:r>
+          </a:p>
+        </p:txBody>
+      </p:sp>
+      <p:sp>
+        <p:nvSpPr>
+          <p:cNvPr id="13" name="TextBox 12"/>
+          <p:cNvSpPr txBox="1"/>
+          <p:nvPr/>
+        </p:nvSpPr>
+        <p:spPr>
+          <a:xfrm>
+            <a:off x="11009376" y="6391656"/>
+            <a:ext cx="530352" cy="237744"/>
+          </a:xfrm>
+          <a:prstGeom prst="rect">
+            <a:avLst/>
+          </a:prstGeom>
+          <a:noFill/>
+        </p:spPr>
+        <p:txBody>
+          <a:bodyPr wrap="square" anchor="t" lIns="0" rIns="0" tIns="0" bIns="0">
+            <a:spAutoFit/>
+          </a:bodyPr>
+          <a:lstStyle/>
+          <a:p>
+            <a:pPr algn="r">
+              <a:lnSpc>
+                <a:spcPct val="130000"/>
+              </a:lnSpc>
+            </a:pPr>
+            <a:r>
+              <a:rPr sz="819" b="0" lang="ja-JP">
+                <a:solidFill>
+                  <a:srgbClr val="666E70"/>
+                </a:solidFill>
+                <a:latin typeface="Yu Gothic"/>
+                <a:ea typeface="Yu Gothic"/>
+                <a:cs typeface="Yu Gothic"/>
+              </a:rPr>
+              <a:t>/ 24</a:t>
             </a:r>
           </a:p>
         </p:txBody>
@@ -28389,7 +31461,7 @@
             <a:avLst/>
           </a:prstGeom>
           <a:solidFill>
-            <a:srgbClr val="C9D4D1"/>
+            <a:srgbClr val="D1CFC8"/>
           </a:solidFill>
           <a:ln>
             <a:noFill/>
@@ -28448,7 +31520,7 @@
             <a:r>
               <a:rPr sz="819" b="0" lang="ja-JP">
                 <a:solidFill>
-                  <a:srgbClr val="667478"/>
+                  <a:srgbClr val="666E70"/>
                 </a:solidFill>
                 <a:latin typeface="Yu Gothic"/>
                 <a:ea typeface="Yu Gothic"/>
@@ -28489,7 +31561,7 @@
             <a:r>
               <a:rPr sz="1100" b="1" lang="ja-JP">
                 <a:solidFill>
-                  <a:srgbClr val="16324F"/>
+                  <a:srgbClr val="182C43"/>
                 </a:solidFill>
                 <a:latin typeface="Yu Gothic"/>
                 <a:ea typeface="Yu Gothic"/>
@@ -28530,13 +31602,13 @@
             <a:r>
               <a:rPr sz="819" b="0" lang="ja-JP">
                 <a:solidFill>
-                  <a:srgbClr val="667478"/>
-                </a:solidFill>
-                <a:latin typeface="Yu Gothic"/>
-                <a:ea typeface="Yu Gothic"/>
-                <a:cs typeface="Yu Gothic"/>
-              </a:rPr>
-              <a:t>/ 21</a:t>
+                  <a:srgbClr val="666E70"/>
+                </a:solidFill>
+                <a:latin typeface="Yu Gothic"/>
+                <a:ea typeface="Yu Gothic"/>
+                <a:cs typeface="Yu Gothic"/>
+              </a:rPr>
+              <a:t>/ 24</a:t>
             </a:r>
           </a:p>
         </p:txBody>
@@ -29157,7 +32229,7 @@
             <a:avLst/>
           </a:prstGeom>
           <a:solidFill>
-            <a:srgbClr val="C9D4D1"/>
+            <a:srgbClr val="D1CFC8"/>
           </a:solidFill>
           <a:ln>
             <a:noFill/>
@@ -29216,7 +32288,7 @@
             <a:r>
               <a:rPr sz="819" b="0" lang="ja-JP">
                 <a:solidFill>
-                  <a:srgbClr val="667478"/>
+                  <a:srgbClr val="666E70"/>
                 </a:solidFill>
                 <a:latin typeface="Yu Gothic"/>
                 <a:ea typeface="Yu Gothic"/>
@@ -29257,7 +32329,7 @@
             <a:r>
               <a:rPr sz="1100" b="1" lang="ja-JP">
                 <a:solidFill>
-                  <a:srgbClr val="16324F"/>
+                  <a:srgbClr val="182C43"/>
                 </a:solidFill>
                 <a:latin typeface="Yu Gothic"/>
                 <a:ea typeface="Yu Gothic"/>
@@ -29298,13 +32370,13 @@
             <a:r>
               <a:rPr sz="819" b="0" lang="ja-JP">
                 <a:solidFill>
-                  <a:srgbClr val="667478"/>
-                </a:solidFill>
-                <a:latin typeface="Yu Gothic"/>
-                <a:ea typeface="Yu Gothic"/>
-                <a:cs typeface="Yu Gothic"/>
-              </a:rPr>
-              <a:t>/ 21</a:t>
+                  <a:srgbClr val="666E70"/>
+                </a:solidFill>
+                <a:latin typeface="Yu Gothic"/>
+                <a:ea typeface="Yu Gothic"/>
+                <a:cs typeface="Yu Gothic"/>
+              </a:rPr>
+              <a:t>/ 24</a:t>
             </a:r>
           </a:p>
         </p:txBody>
@@ -30476,7 +33548,7 @@
             <a:avLst/>
           </a:prstGeom>
           <a:solidFill>
-            <a:srgbClr val="C9D4D1"/>
+            <a:srgbClr val="D1CFC8"/>
           </a:solidFill>
           <a:ln>
             <a:noFill/>
@@ -30535,7 +33607,7 @@
             <a:r>
               <a:rPr sz="819" b="0" lang="ja-JP">
                 <a:solidFill>
-                  <a:srgbClr val="667478"/>
+                  <a:srgbClr val="666E70"/>
                 </a:solidFill>
                 <a:latin typeface="Yu Gothic"/>
                 <a:ea typeface="Yu Gothic"/>
@@ -30576,7 +33648,7 @@
             <a:r>
               <a:rPr sz="1100" b="1" lang="ja-JP">
                 <a:solidFill>
-                  <a:srgbClr val="16324F"/>
+                  <a:srgbClr val="182C43"/>
                 </a:solidFill>
                 <a:latin typeface="Yu Gothic"/>
                 <a:ea typeface="Yu Gothic"/>
@@ -30617,13 +33689,13 @@
             <a:r>
               <a:rPr sz="819" b="0" lang="ja-JP">
                 <a:solidFill>
-                  <a:srgbClr val="667478"/>
-                </a:solidFill>
-                <a:latin typeface="Yu Gothic"/>
-                <a:ea typeface="Yu Gothic"/>
-                <a:cs typeface="Yu Gothic"/>
-              </a:rPr>
-              <a:t>/ 21</a:t>
+                  <a:srgbClr val="666E70"/>
+                </a:solidFill>
+                <a:latin typeface="Yu Gothic"/>
+                <a:ea typeface="Yu Gothic"/>
+                <a:cs typeface="Yu Gothic"/>
+              </a:rPr>
+              <a:t>/ 24</a:t>
             </a:r>
           </a:p>
         </p:txBody>
@@ -31287,7 +34359,7 @@
             <a:avLst/>
           </a:prstGeom>
           <a:solidFill>
-            <a:srgbClr val="C9D4D1"/>
+            <a:srgbClr val="D1CFC8"/>
           </a:solidFill>
           <a:ln>
             <a:noFill/>
@@ -31346,7 +34418,7 @@
             <a:r>
               <a:rPr sz="819" b="0" lang="ja-JP">
                 <a:solidFill>
-                  <a:srgbClr val="667478"/>
+                  <a:srgbClr val="666E70"/>
                 </a:solidFill>
                 <a:latin typeface="Yu Gothic"/>
                 <a:ea typeface="Yu Gothic"/>
@@ -31387,7 +34459,7 @@
             <a:r>
               <a:rPr sz="1100" b="1" lang="ja-JP">
                 <a:solidFill>
-                  <a:srgbClr val="16324F"/>
+                  <a:srgbClr val="182C43"/>
                 </a:solidFill>
                 <a:latin typeface="Yu Gothic"/>
                 <a:ea typeface="Yu Gothic"/>
@@ -31428,13 +34500,13 @@
             <a:r>
               <a:rPr sz="819" b="0" lang="ja-JP">
                 <a:solidFill>
-                  <a:srgbClr val="667478"/>
-                </a:solidFill>
-                <a:latin typeface="Yu Gothic"/>
-                <a:ea typeface="Yu Gothic"/>
-                <a:cs typeface="Yu Gothic"/>
-              </a:rPr>
-              <a:t>/ 21</a:t>
+                  <a:srgbClr val="666E70"/>
+                </a:solidFill>
+                <a:latin typeface="Yu Gothic"/>
+                <a:ea typeface="Yu Gothic"/>
+                <a:cs typeface="Yu Gothic"/>
+              </a:rPr>
+              <a:t>/ 24</a:t>
             </a:r>
           </a:p>
         </p:txBody>
@@ -31657,7 +34729,7 @@
             <a:avLst/>
           </a:prstGeom>
           <a:solidFill>
-            <a:srgbClr val="C9D4D1"/>
+            <a:srgbClr val="D1CFC8"/>
           </a:solidFill>
           <a:ln>
             <a:noFill/>
@@ -31716,7 +34788,7 @@
             <a:r>
               <a:rPr sz="819" b="0" lang="ja-JP">
                 <a:solidFill>
-                  <a:srgbClr val="667478"/>
+                  <a:srgbClr val="666E70"/>
                 </a:solidFill>
                 <a:latin typeface="Yu Gothic"/>
                 <a:ea typeface="Yu Gothic"/>
@@ -31757,7 +34829,7 @@
             <a:r>
               <a:rPr sz="1100" b="1" lang="ja-JP">
                 <a:solidFill>
-                  <a:srgbClr val="16324F"/>
+                  <a:srgbClr val="182C43"/>
                 </a:solidFill>
                 <a:latin typeface="Yu Gothic"/>
                 <a:ea typeface="Yu Gothic"/>
@@ -31798,13 +34870,13 @@
             <a:r>
               <a:rPr sz="819" b="0" lang="ja-JP">
                 <a:solidFill>
-                  <a:srgbClr val="667478"/>
-                </a:solidFill>
-                <a:latin typeface="Yu Gothic"/>
-                <a:ea typeface="Yu Gothic"/>
-                <a:cs typeface="Yu Gothic"/>
-              </a:rPr>
-              <a:t>/ 21</a:t>
+                  <a:srgbClr val="666E70"/>
+                </a:solidFill>
+                <a:latin typeface="Yu Gothic"/>
+                <a:ea typeface="Yu Gothic"/>
+                <a:cs typeface="Yu Gothic"/>
+              </a:rPr>
+              <a:t>/ 24</a:t>
             </a:r>
           </a:p>
         </p:txBody>
@@ -32027,7 +35099,7 @@
             <a:avLst/>
           </a:prstGeom>
           <a:solidFill>
-            <a:srgbClr val="C9D4D1"/>
+            <a:srgbClr val="D1CFC8"/>
           </a:solidFill>
           <a:ln>
             <a:noFill/>
@@ -32086,7 +35158,7 @@
             <a:r>
               <a:rPr sz="819" b="0" lang="ja-JP">
                 <a:solidFill>
-                  <a:srgbClr val="667478"/>
+                  <a:srgbClr val="666E70"/>
                 </a:solidFill>
                 <a:latin typeface="Yu Gothic"/>
                 <a:ea typeface="Yu Gothic"/>
@@ -32127,7 +35199,7 @@
             <a:r>
               <a:rPr sz="1100" b="1" lang="ja-JP">
                 <a:solidFill>
-                  <a:srgbClr val="16324F"/>
+                  <a:srgbClr val="182C43"/>
                 </a:solidFill>
                 <a:latin typeface="Yu Gothic"/>
                 <a:ea typeface="Yu Gothic"/>
@@ -32168,13 +35240,13 @@
             <a:r>
               <a:rPr sz="819" b="0" lang="ja-JP">
                 <a:solidFill>
-                  <a:srgbClr val="667478"/>
-                </a:solidFill>
-                <a:latin typeface="Yu Gothic"/>
-                <a:ea typeface="Yu Gothic"/>
-                <a:cs typeface="Yu Gothic"/>
-              </a:rPr>
-              <a:t>/ 21</a:t>
+                  <a:srgbClr val="666E70"/>
+                </a:solidFill>
+                <a:latin typeface="Yu Gothic"/>
+                <a:ea typeface="Yu Gothic"/>
+                <a:cs typeface="Yu Gothic"/>
+              </a:rPr>
+              <a:t>/ 24</a:t>
             </a:r>
           </a:p>
         </p:txBody>
@@ -32397,7 +35469,7 @@
             <a:avLst/>
           </a:prstGeom>
           <a:solidFill>
-            <a:srgbClr val="C9D4D1"/>
+            <a:srgbClr val="D1CFC8"/>
           </a:solidFill>
           <a:ln>
             <a:noFill/>
@@ -32456,7 +35528,7 @@
             <a:r>
               <a:rPr sz="819" b="0" lang="ja-JP">
                 <a:solidFill>
-                  <a:srgbClr val="667478"/>
+                  <a:srgbClr val="666E70"/>
                 </a:solidFill>
                 <a:latin typeface="Yu Gothic"/>
                 <a:ea typeface="Yu Gothic"/>
@@ -32497,7 +35569,7 @@
             <a:r>
               <a:rPr sz="1100" b="1" lang="ja-JP">
                 <a:solidFill>
-                  <a:srgbClr val="16324F"/>
+                  <a:srgbClr val="182C43"/>
                 </a:solidFill>
                 <a:latin typeface="Yu Gothic"/>
                 <a:ea typeface="Yu Gothic"/>
@@ -32538,13 +35610,13 @@
             <a:r>
               <a:rPr sz="819" b="0" lang="ja-JP">
                 <a:solidFill>
-                  <a:srgbClr val="667478"/>
-                </a:solidFill>
-                <a:latin typeface="Yu Gothic"/>
-                <a:ea typeface="Yu Gothic"/>
-                <a:cs typeface="Yu Gothic"/>
-              </a:rPr>
-              <a:t>/ 21</a:t>
+                  <a:srgbClr val="666E70"/>
+                </a:solidFill>
+                <a:latin typeface="Yu Gothic"/>
+                <a:ea typeface="Yu Gothic"/>
+                <a:cs typeface="Yu Gothic"/>
+              </a:rPr>
+              <a:t>/ 24</a:t>
             </a:r>
           </a:p>
         </p:txBody>

--- a/examples/gallery/pattern_gallery.pptx
+++ b/examples/gallery/pattern_gallery.pptx
@@ -3919,7 +3919,7 @@
             <a:avLst/>
           </a:prstGeom>
           <a:solidFill>
-            <a:srgbClr val="16324F"/>
+            <a:srgbClr val="182C43"/>
           </a:solidFill>
           <a:ln>
             <a:noFill/>
@@ -3981,8 +3981,8 @@
         </p:nvSpPr>
         <p:spPr>
           <a:xfrm>
-            <a:off x="8942832" y="621792"/>
-            <a:ext cx="2395728" cy="274320"/>
+            <a:off x="822960" y="1572768"/>
+            <a:ext cx="7360920" cy="1243584"/>
           </a:xfrm>
           <a:prstGeom prst="rect">
             <a:avLst/>
@@ -3995,15 +3995,200 @@
           </a:bodyPr>
           <a:lstStyle/>
           <a:p>
-            <a:pPr algn="r">
+            <a:pPr algn="l">
+              <a:lnSpc>
+                <a:spcPct val="108000"/>
+              </a:lnSpc>
+            </a:pPr>
+            <a:r>
+              <a:rPr sz="4200" b="1" lang="ja-JP">
+                <a:solidFill>
+                  <a:srgbClr val="FFFFFC"/>
+                </a:solidFill>
+                <a:latin typeface="Yu Gothic"/>
+                <a:ea typeface="Yu Gothic"/>
+                <a:cs typeface="Yu Gothic"/>
+              </a:rPr>
+              <a:t>社内スライド</a:t>
+            </a:r>
+          </a:p>
+          <a:p>
+            <a:pPr algn="l">
+              <a:lnSpc>
+                <a:spcPct val="108000"/>
+              </a:lnSpc>
+            </a:pPr>
+            <a:r>
+              <a:rPr sz="4200" b="1" lang="ja-JP">
+                <a:solidFill>
+                  <a:srgbClr val="FFFFFC"/>
+                </a:solidFill>
+                <a:latin typeface="Yu Gothic"/>
+                <a:ea typeface="Yu Gothic"/>
+                <a:cs typeface="Yu Gothic"/>
+              </a:rPr>
+              <a:t>パターンライブラリ</a:t>
+            </a:r>
+          </a:p>
+        </p:txBody>
+      </p:sp>
+      <p:sp>
+        <p:nvSpPr>
+          <p:cNvPr id="5" name="TextBox 4"/>
+          <p:cNvSpPr txBox="1"/>
+          <p:nvPr/>
+        </p:nvSpPr>
+        <p:spPr>
+          <a:xfrm>
+            <a:off x="859536" y="3163824"/>
+            <a:ext cx="7315200" cy="731520"/>
+          </a:xfrm>
+          <a:prstGeom prst="rect">
+            <a:avLst/>
+          </a:prstGeom>
+          <a:noFill/>
+        </p:spPr>
+        <p:txBody>
+          <a:bodyPr wrap="square" anchor="t" lIns="0" rIns="0" tIns="0" bIns="0">
+            <a:spAutoFit/>
+          </a:bodyPr>
+          <a:lstStyle/>
+          <a:p>
+            <a:pPr algn="l">
+              <a:lnSpc>
+                <a:spcPct val="120000"/>
+              </a:lnSpc>
+            </a:pPr>
+            <a:r>
+              <a:rPr sz="1750" b="0" lang="ja-JP">
+                <a:solidFill>
+                  <a:srgbClr val="DFEBE8"/>
+                </a:solidFill>
+                <a:latin typeface="Yu Gothic"/>
+                <a:ea typeface="Yu Gothic"/>
+                <a:cs typeface="Yu Gothic"/>
+              </a:rPr>
+              <a:t>意思決定からシステム構成まで、21の標準レイアウトを検証</a:t>
+            </a:r>
+          </a:p>
+        </p:txBody>
+      </p:sp>
+      <p:sp>
+        <p:nvSpPr>
+          <p:cNvPr id="6" name="Rectangle 5"/>
+          <p:cNvSpPr/>
+          <p:nvPr/>
+        </p:nvSpPr>
+        <p:spPr>
+          <a:xfrm>
+            <a:off x="8641080" y="1536192"/>
+            <a:ext cx="10972" cy="3186684"/>
+          </a:xfrm>
+          <a:prstGeom prst="rect">
+            <a:avLst/>
+          </a:prstGeom>
+          <a:solidFill>
+            <a:srgbClr val="DFEBE8"/>
+          </a:solidFill>
+          <a:ln>
+            <a:noFill/>
+          </a:ln>
+          <a:effectLst/>
+        </p:spPr>
+        <p:style>
+          <a:lnRef idx="1">
+            <a:schemeClr val="accent1"/>
+          </a:lnRef>
+          <a:fillRef idx="3">
+            <a:schemeClr val="accent1"/>
+          </a:fillRef>
+          <a:effectRef idx="2">
+            <a:schemeClr val="accent1"/>
+          </a:effectRef>
+          <a:fontRef idx="minor">
+            <a:schemeClr val="lt1"/>
+          </a:fontRef>
+        </p:style>
+        <p:txBody>
+          <a:bodyPr rtlCol="0" anchor="ctr"/>
+          <a:lstStyle/>
+          <a:p>
+            <a:pPr algn="ctr"/>
+          </a:p>
+        </p:txBody>
+      </p:sp>
+      <p:sp>
+        <p:nvSpPr>
+          <p:cNvPr id="7" name="TextBox 6"/>
+          <p:cNvSpPr txBox="1"/>
+          <p:nvPr/>
+        </p:nvSpPr>
+        <p:spPr>
+          <a:xfrm>
+            <a:off x="8979408" y="1664208"/>
+            <a:ext cx="2057400" cy="228600"/>
+          </a:xfrm>
+          <a:prstGeom prst="rect">
+            <a:avLst/>
+          </a:prstGeom>
+          <a:noFill/>
+        </p:spPr>
+        <p:txBody>
+          <a:bodyPr wrap="none" anchor="t" lIns="0" rIns="0" tIns="0" bIns="0">
+            <a:spAutoFit/>
+          </a:bodyPr>
+          <a:lstStyle/>
+          <a:p>
+            <a:pPr algn="l">
               <a:lnSpc>
                 <a:spcPct val="130000"/>
               </a:lnSpc>
             </a:pPr>
             <a:r>
-              <a:rPr sz="1000" b="0" lang="ja-JP">
-                <a:solidFill>
-                  <a:srgbClr val="BFD7D2"/>
+              <a:rPr sz="880" b="1" lang="ja-JP">
+                <a:solidFill>
+                  <a:srgbClr val="DFEBE8"/>
+                </a:solidFill>
+                <a:latin typeface="Yu Gothic"/>
+                <a:ea typeface="Yu Gothic"/>
+                <a:cs typeface="Yu Gothic"/>
+              </a:rPr>
+              <a:t>DATE</a:t>
+            </a:r>
+          </a:p>
+        </p:txBody>
+      </p:sp>
+      <p:sp>
+        <p:nvSpPr>
+          <p:cNvPr id="8" name="TextBox 7"/>
+          <p:cNvSpPr txBox="1"/>
+          <p:nvPr/>
+        </p:nvSpPr>
+        <p:spPr>
+          <a:xfrm>
+            <a:off x="8979408" y="1975104"/>
+            <a:ext cx="2148840" cy="274320"/>
+          </a:xfrm>
+          <a:prstGeom prst="rect">
+            <a:avLst/>
+          </a:prstGeom>
+          <a:noFill/>
+        </p:spPr>
+        <p:txBody>
+          <a:bodyPr wrap="none" anchor="t" lIns="0" rIns="0" tIns="0" bIns="0">
+            <a:spAutoFit/>
+          </a:bodyPr>
+          <a:lstStyle/>
+          <a:p>
+            <a:pPr algn="l">
+              <a:lnSpc>
+                <a:spcPct val="108000"/>
+              </a:lnSpc>
+            </a:pPr>
+            <a:r>
+              <a:rPr sz="1350" b="1" lang="ja-JP">
+                <a:solidFill>
+                  <a:srgbClr val="FFFFFC"/>
                 </a:solidFill>
                 <a:latin typeface="Yu Gothic"/>
                 <a:ea typeface="Yu Gothic"/>
@@ -4016,14 +4201,14 @@
       </p:sp>
       <p:sp>
         <p:nvSpPr>
-          <p:cNvPr id="5" name="TextBox 4"/>
-          <p:cNvSpPr txBox="1"/>
-          <p:nvPr/>
-        </p:nvSpPr>
-        <p:spPr>
-          <a:xfrm>
-            <a:off x="822960" y="1572768"/>
-            <a:ext cx="10469880" cy="1243584"/>
+          <p:cNvPr id="9" name="TextBox 8"/>
+          <p:cNvSpPr txBox="1"/>
+          <p:nvPr/>
+        </p:nvSpPr>
+        <p:spPr>
+          <a:xfrm>
+            <a:off x="8979408" y="2752344"/>
+            <a:ext cx="2057400" cy="228600"/>
           </a:xfrm>
           <a:prstGeom prst="rect">
             <a:avLst/>
@@ -4031,26 +4216,67 @@
           <a:noFill/>
         </p:spPr>
         <p:txBody>
-          <a:bodyPr wrap="square" anchor="t" lIns="0" rIns="0" tIns="0" bIns="0">
+          <a:bodyPr wrap="none" anchor="t" lIns="0" rIns="0" tIns="0" bIns="0">
             <a:spAutoFit/>
           </a:bodyPr>
           <a:lstStyle/>
           <a:p>
             <a:pPr algn="l">
               <a:lnSpc>
+                <a:spcPct val="130000"/>
+              </a:lnSpc>
+            </a:pPr>
+            <a:r>
+              <a:rPr sz="880" b="1" lang="ja-JP">
+                <a:solidFill>
+                  <a:srgbClr val="DFEBE8"/>
+                </a:solidFill>
+                <a:latin typeface="Yu Gothic"/>
+                <a:ea typeface="Yu Gothic"/>
+                <a:cs typeface="Yu Gothic"/>
+              </a:rPr>
+              <a:t>ORGANIZATION</a:t>
+            </a:r>
+          </a:p>
+        </p:txBody>
+      </p:sp>
+      <p:sp>
+        <p:nvSpPr>
+          <p:cNvPr id="10" name="TextBox 9"/>
+          <p:cNvSpPr txBox="1"/>
+          <p:nvPr/>
+        </p:nvSpPr>
+        <p:spPr>
+          <a:xfrm>
+            <a:off x="8979408" y="3063239"/>
+            <a:ext cx="2148840" cy="406908"/>
+          </a:xfrm>
+          <a:prstGeom prst="rect">
+            <a:avLst/>
+          </a:prstGeom>
+          <a:noFill/>
+        </p:spPr>
+        <p:txBody>
+          <a:bodyPr wrap="none" anchor="t" lIns="0" rIns="0" tIns="0" bIns="0">
+            <a:spAutoFit/>
+          </a:bodyPr>
+          <a:lstStyle/>
+          <a:p>
+            <a:pPr algn="l">
+              <a:lnSpc>
                 <a:spcPct val="108000"/>
               </a:lnSpc>
             </a:pPr>
             <a:r>
-              <a:rPr sz="4200" b="1" lang="ja-JP">
-                <a:solidFill>
-                  <a:srgbClr val="FFFDF7"/>
-                </a:solidFill>
-                <a:latin typeface="Yu Gothic"/>
-                <a:ea typeface="Yu Gothic"/>
-                <a:cs typeface="Yu Gothic"/>
-              </a:rPr>
-              <a:t>社内スライド</a:t>
+              <a:rPr sz="1350" b="1" lang="ja-JP">
+                <a:solidFill>
+                  <a:srgbClr val="FFFFFC"/>
+                </a:solidFill>
+                <a:latin typeface="Yu Gothic"/>
+                <a:ea typeface="Yu Gothic"/>
+                <a:cs typeface="Yu Gothic"/>
+              </a:rPr>
+              <a:t>業務企画本部</a:t>
             </a:r>
           </a:p>
           <a:p>
@@ -4060,29 +4286,29 @@
               </a:lnSpc>
             </a:pPr>
             <a:r>
-              <a:rPr sz="4200" b="1" lang="ja-JP">
-                <a:solidFill>
-                  <a:srgbClr val="FFFDF7"/>
-                </a:solidFill>
-                <a:latin typeface="Yu Gothic"/>
-                <a:ea typeface="Yu Gothic"/>
-                <a:cs typeface="Yu Gothic"/>
-              </a:rPr>
-              <a:t>パターンライブラリ</a:t>
-            </a:r>
-          </a:p>
-        </p:txBody>
-      </p:sp>
-      <p:sp>
-        <p:nvSpPr>
-          <p:cNvPr id="6" name="TextBox 5"/>
-          <p:cNvSpPr txBox="1"/>
-          <p:nvPr/>
-        </p:nvSpPr>
-        <p:spPr>
-          <a:xfrm>
-            <a:off x="859536" y="3163824"/>
-            <a:ext cx="10378440" cy="731520"/>
+              <a:rPr sz="1350" b="1" lang="ja-JP">
+                <a:solidFill>
+                  <a:srgbClr val="FFFFFC"/>
+                </a:solidFill>
+                <a:latin typeface="Yu Gothic"/>
+                <a:ea typeface="Yu Gothic"/>
+                <a:cs typeface="Yu Gothic"/>
+              </a:rPr>
+              <a:t>業務改善推進部</a:t>
+            </a:r>
+          </a:p>
+        </p:txBody>
+      </p:sp>
+      <p:sp>
+        <p:nvSpPr>
+          <p:cNvPr id="11" name="TextBox 10"/>
+          <p:cNvSpPr txBox="1"/>
+          <p:nvPr/>
+        </p:nvSpPr>
+        <p:spPr>
+          <a:xfrm>
+            <a:off x="8979408" y="3973068"/>
+            <a:ext cx="2057400" cy="228600"/>
           </a:xfrm>
           <a:prstGeom prst="rect">
             <a:avLst/>
@@ -4090,40 +4316,40 @@
           <a:noFill/>
         </p:spPr>
         <p:txBody>
-          <a:bodyPr wrap="square" anchor="t" lIns="0" rIns="0" tIns="0" bIns="0">
+          <a:bodyPr wrap="none" anchor="t" lIns="0" rIns="0" tIns="0" bIns="0">
             <a:spAutoFit/>
           </a:bodyPr>
           <a:lstStyle/>
           <a:p>
             <a:pPr algn="l">
               <a:lnSpc>
-                <a:spcPct val="120000"/>
-              </a:lnSpc>
-            </a:pPr>
-            <a:r>
-              <a:rPr sz="1750" b="0" lang="ja-JP">
-                <a:solidFill>
-                  <a:srgbClr val="BFD7D2"/>
-                </a:solidFill>
-                <a:latin typeface="Yu Gothic"/>
-                <a:ea typeface="Yu Gothic"/>
-                <a:cs typeface="Yu Gothic"/>
-              </a:rPr>
-              <a:t>意思決定からシステム構成まで、21の標準レイアウトを検証</a:t>
-            </a:r>
-          </a:p>
-        </p:txBody>
-      </p:sp>
-      <p:sp>
-        <p:nvSpPr>
-          <p:cNvPr id="7" name="TextBox 6"/>
-          <p:cNvSpPr txBox="1"/>
-          <p:nvPr/>
-        </p:nvSpPr>
-        <p:spPr>
-          <a:xfrm>
-            <a:off x="822960" y="5943600"/>
-            <a:ext cx="4389120" cy="274320"/>
+                <a:spcPct val="130000"/>
+              </a:lnSpc>
+            </a:pPr>
+            <a:r>
+              <a:rPr sz="880" b="1" lang="ja-JP">
+                <a:solidFill>
+                  <a:srgbClr val="DFEBE8"/>
+                </a:solidFill>
+                <a:latin typeface="Yu Gothic"/>
+                <a:ea typeface="Yu Gothic"/>
+                <a:cs typeface="Yu Gothic"/>
+              </a:rPr>
+              <a:t>AUTHOR</a:t>
+            </a:r>
+          </a:p>
+        </p:txBody>
+      </p:sp>
+      <p:sp>
+        <p:nvSpPr>
+          <p:cNvPr id="12" name="TextBox 11"/>
+          <p:cNvSpPr txBox="1"/>
+          <p:nvPr/>
+        </p:nvSpPr>
+        <p:spPr>
+          <a:xfrm>
+            <a:off x="8979408" y="4283964"/>
+            <a:ext cx="2148840" cy="274320"/>
           </a:xfrm>
           <a:prstGeom prst="rect">
             <a:avLst/>
@@ -4131,20 +4357,20 @@
           <a:noFill/>
         </p:spPr>
         <p:txBody>
-          <a:bodyPr wrap="square" anchor="t" lIns="0" rIns="0" tIns="0" bIns="0">
+          <a:bodyPr wrap="none" anchor="t" lIns="0" rIns="0" tIns="0" bIns="0">
             <a:spAutoFit/>
           </a:bodyPr>
           <a:lstStyle/>
           <a:p>
             <a:pPr algn="l">
               <a:lnSpc>
-                <a:spcPct val="130000"/>
-              </a:lnSpc>
-            </a:pPr>
-            <a:r>
-              <a:rPr sz="1050" b="1" lang="ja-JP">
-                <a:solidFill>
-                  <a:srgbClr val="FFFDF7"/>
+                <a:spcPct val="108000"/>
+              </a:lnSpc>
+            </a:pPr>
+            <a:r>
+              <a:rPr sz="1350" b="1" lang="ja-JP">
+                <a:solidFill>
+                  <a:srgbClr val="FFFFFC"/>
                 </a:solidFill>
                 <a:latin typeface="Yu Gothic"/>
                 <a:ea typeface="Yu Gothic"/>
@@ -4346,7 +4572,7 @@
             <a:avLst/>
           </a:prstGeom>
           <a:solidFill>
-            <a:srgbClr val="C9D4D1"/>
+            <a:srgbClr val="D1CFC8"/>
           </a:solidFill>
           <a:ln>
             <a:noFill/>
@@ -4405,7 +4631,7 @@
             <a:r>
               <a:rPr sz="819" b="0" lang="ja-JP">
                 <a:solidFill>
-                  <a:srgbClr val="667478"/>
+                  <a:srgbClr val="666E70"/>
                 </a:solidFill>
                 <a:latin typeface="Yu Gothic"/>
                 <a:ea typeface="Yu Gothic"/>
@@ -4446,7 +4672,7 @@
             <a:r>
               <a:rPr sz="1100" b="1" lang="ja-JP">
                 <a:solidFill>
-                  <a:srgbClr val="16324F"/>
+                  <a:srgbClr val="182C43"/>
                 </a:solidFill>
                 <a:latin typeface="Yu Gothic"/>
                 <a:ea typeface="Yu Gothic"/>
@@ -4487,7 +4713,7 @@
             <a:r>
               <a:rPr sz="819" b="0" lang="ja-JP">
                 <a:solidFill>
-                  <a:srgbClr val="667478"/>
+                  <a:srgbClr val="666E70"/>
                 </a:solidFill>
                 <a:latin typeface="Yu Gothic"/>
                 <a:ea typeface="Yu Gothic"/>
@@ -5946,7 +6172,7 @@
             <a:avLst/>
           </a:prstGeom>
           <a:solidFill>
-            <a:srgbClr val="C9D4D1"/>
+            <a:srgbClr val="D1CFC8"/>
           </a:solidFill>
           <a:ln>
             <a:noFill/>
@@ -6005,7 +6231,7 @@
             <a:r>
               <a:rPr sz="819" b="0" lang="ja-JP">
                 <a:solidFill>
-                  <a:srgbClr val="667478"/>
+                  <a:srgbClr val="666E70"/>
                 </a:solidFill>
                 <a:latin typeface="Yu Gothic"/>
                 <a:ea typeface="Yu Gothic"/>
@@ -6046,7 +6272,7 @@
             <a:r>
               <a:rPr sz="1100" b="1" lang="ja-JP">
                 <a:solidFill>
-                  <a:srgbClr val="16324F"/>
+                  <a:srgbClr val="182C43"/>
                 </a:solidFill>
                 <a:latin typeface="Yu Gothic"/>
                 <a:ea typeface="Yu Gothic"/>
@@ -6087,7 +6313,7 @@
             <a:r>
               <a:rPr sz="819" b="0" lang="ja-JP">
                 <a:solidFill>
-                  <a:srgbClr val="667478"/>
+                  <a:srgbClr val="666E70"/>
                 </a:solidFill>
                 <a:latin typeface="Yu Gothic"/>
                 <a:ea typeface="Yu Gothic"/>
@@ -7563,7 +7789,7 @@
             <a:avLst/>
           </a:prstGeom>
           <a:solidFill>
-            <a:srgbClr val="C9D4D1"/>
+            <a:srgbClr val="D1CFC8"/>
           </a:solidFill>
           <a:ln>
             <a:noFill/>
@@ -7622,7 +7848,7 @@
             <a:r>
               <a:rPr sz="819" b="0" lang="ja-JP">
                 <a:solidFill>
-                  <a:srgbClr val="667478"/>
+                  <a:srgbClr val="666E70"/>
                 </a:solidFill>
                 <a:latin typeface="Yu Gothic"/>
                 <a:ea typeface="Yu Gothic"/>
@@ -7663,7 +7889,7 @@
             <a:r>
               <a:rPr sz="1100" b="1" lang="ja-JP">
                 <a:solidFill>
-                  <a:srgbClr val="16324F"/>
+                  <a:srgbClr val="182C43"/>
                 </a:solidFill>
                 <a:latin typeface="Yu Gothic"/>
                 <a:ea typeface="Yu Gothic"/>
@@ -7704,7 +7930,7 @@
             <a:r>
               <a:rPr sz="819" b="0" lang="ja-JP">
                 <a:solidFill>
-                  <a:srgbClr val="667478"/>
+                  <a:srgbClr val="666E70"/>
                 </a:solidFill>
                 <a:latin typeface="Yu Gothic"/>
                 <a:ea typeface="Yu Gothic"/>
@@ -7868,7 +8094,7 @@
         <p:spPr>
           <a:xfrm>
             <a:off x="658368" y="1664208"/>
-            <a:ext cx="2423160" cy="438912"/>
+            <a:ext cx="10872216" cy="438912"/>
           </a:xfrm>
           <a:prstGeom prst="rect">
             <a:avLst/>
@@ -7911,8 +8137,8 @@
         </p:nvSpPr>
         <p:spPr>
           <a:xfrm>
-            <a:off x="822959" y="1737360"/>
-            <a:ext cx="2093976" cy="256032"/>
+            <a:off x="658368" y="1737360"/>
+            <a:ext cx="906018" cy="274320"/>
           </a:xfrm>
           <a:prstGeom prst="rect">
             <a:avLst/>
@@ -7925,7 +8151,7 @@
           </a:bodyPr>
           <a:lstStyle/>
           <a:p>
-            <a:pPr algn="l">
+            <a:pPr algn="ctr">
               <a:lnSpc>
                 <a:spcPct val="130000"/>
               </a:lnSpc>
@@ -7939,146 +8165,61 @@
                 <a:ea typeface="Yu Gothic"/>
                 <a:cs typeface="Yu Gothic"/>
               </a:rPr>
-              <a:t>フェーズ</a:t>
-            </a:r>
-          </a:p>
-        </p:txBody>
-      </p:sp>
-      <p:sp>
-        <p:nvSpPr>
-          <p:cNvPr id="7" name="Rectangle 6"/>
+              <a:t>4月</a:t>
+            </a:r>
+          </a:p>
+        </p:txBody>
+      </p:sp>
+      <p:sp>
+        <p:nvSpPr>
+          <p:cNvPr id="7" name="TextBox 6"/>
+          <p:cNvSpPr txBox="1"/>
+          <p:nvPr/>
+        </p:nvSpPr>
+        <p:spPr>
+          <a:xfrm>
+            <a:off x="1564386" y="1737360"/>
+            <a:ext cx="906018" cy="274320"/>
+          </a:xfrm>
+          <a:prstGeom prst="rect">
+            <a:avLst/>
+          </a:prstGeom>
+          <a:noFill/>
+        </p:spPr>
+        <p:txBody>
+          <a:bodyPr wrap="square" anchor="t" lIns="0" rIns="0" tIns="0" bIns="0">
+            <a:spAutoFit/>
+          </a:bodyPr>
+          <a:lstStyle/>
+          <a:p>
+            <a:pPr algn="ctr">
+              <a:lnSpc>
+                <a:spcPct val="130000"/>
+              </a:lnSpc>
+            </a:pPr>
+            <a:r>
+              <a:rPr sz="1050" b="1" lang="ja-JP">
+                <a:solidFill>
+                  <a:srgbClr val="FFFFFC"/>
+                </a:solidFill>
+                <a:latin typeface="Yu Gothic"/>
+                <a:ea typeface="Yu Gothic"/>
+                <a:cs typeface="Yu Gothic"/>
+              </a:rPr>
+              <a:t>5月</a:t>
+            </a:r>
+          </a:p>
+        </p:txBody>
+      </p:sp>
+      <p:sp>
+        <p:nvSpPr>
+          <p:cNvPr id="8" name="Rectangle 7"/>
           <p:cNvSpPr/>
           <p:nvPr/>
         </p:nvSpPr>
         <p:spPr>
           <a:xfrm>
-            <a:off x="3081528" y="1664208"/>
-            <a:ext cx="8430768" cy="438912"/>
-          </a:xfrm>
-          <a:prstGeom prst="rect">
-            <a:avLst/>
-          </a:prstGeom>
-          <a:solidFill>
-            <a:srgbClr val="182C43"/>
-          </a:solidFill>
-          <a:ln>
-            <a:noFill/>
-          </a:ln>
-          <a:effectLst/>
-        </p:spPr>
-        <p:style>
-          <a:lnRef idx="1">
-            <a:schemeClr val="accent1"/>
-          </a:lnRef>
-          <a:fillRef idx="3">
-            <a:schemeClr val="accent1"/>
-          </a:fillRef>
-          <a:effectRef idx="2">
-            <a:schemeClr val="accent1"/>
-          </a:effectRef>
-          <a:fontRef idx="minor">
-            <a:schemeClr val="lt1"/>
-          </a:fontRef>
-        </p:style>
-        <p:txBody>
-          <a:bodyPr rtlCol="0" anchor="ctr"/>
-          <a:lstStyle/>
-          <a:p>
-            <a:pPr algn="ctr"/>
-          </a:p>
-        </p:txBody>
-      </p:sp>
-      <p:sp>
-        <p:nvSpPr>
-          <p:cNvPr id="8" name="TextBox 7"/>
-          <p:cNvSpPr txBox="1"/>
-          <p:nvPr/>
-        </p:nvSpPr>
-        <p:spPr>
-          <a:xfrm>
-            <a:off x="3081528" y="1737360"/>
-            <a:ext cx="702564" cy="274320"/>
-          </a:xfrm>
-          <a:prstGeom prst="rect">
-            <a:avLst/>
-          </a:prstGeom>
-          <a:noFill/>
-        </p:spPr>
-        <p:txBody>
-          <a:bodyPr wrap="square" anchor="t" lIns="0" rIns="0" tIns="0" bIns="0">
-            <a:spAutoFit/>
-          </a:bodyPr>
-          <a:lstStyle/>
-          <a:p>
-            <a:pPr algn="ctr">
-              <a:lnSpc>
-                <a:spcPct val="130000"/>
-              </a:lnSpc>
-            </a:pPr>
-            <a:r>
-              <a:rPr sz="1050" b="1" lang="ja-JP">
-                <a:solidFill>
-                  <a:srgbClr val="FFFFFC"/>
-                </a:solidFill>
-                <a:latin typeface="Yu Gothic"/>
-                <a:ea typeface="Yu Gothic"/>
-                <a:cs typeface="Yu Gothic"/>
-              </a:rPr>
-              <a:t>4月</a:t>
-            </a:r>
-          </a:p>
-        </p:txBody>
-      </p:sp>
-      <p:sp>
-        <p:nvSpPr>
-          <p:cNvPr id="9" name="TextBox 8"/>
-          <p:cNvSpPr txBox="1"/>
-          <p:nvPr/>
-        </p:nvSpPr>
-        <p:spPr>
-          <a:xfrm>
-            <a:off x="3784092" y="1737360"/>
-            <a:ext cx="702564" cy="274320"/>
-          </a:xfrm>
-          <a:prstGeom prst="rect">
-            <a:avLst/>
-          </a:prstGeom>
-          <a:noFill/>
-        </p:spPr>
-        <p:txBody>
-          <a:bodyPr wrap="square" anchor="t" lIns="0" rIns="0" tIns="0" bIns="0">
-            <a:spAutoFit/>
-          </a:bodyPr>
-          <a:lstStyle/>
-          <a:p>
-            <a:pPr algn="ctr">
-              <a:lnSpc>
-                <a:spcPct val="130000"/>
-              </a:lnSpc>
-            </a:pPr>
-            <a:r>
-              <a:rPr sz="1050" b="1" lang="ja-JP">
-                <a:solidFill>
-                  <a:srgbClr val="FFFFFC"/>
-                </a:solidFill>
-                <a:latin typeface="Yu Gothic"/>
-                <a:ea typeface="Yu Gothic"/>
-                <a:cs typeface="Yu Gothic"/>
-              </a:rPr>
-              <a:t>5月</a:t>
-            </a:r>
-          </a:p>
-        </p:txBody>
-      </p:sp>
-      <p:sp>
-        <p:nvSpPr>
-          <p:cNvPr id="10" name="Rectangle 9"/>
-          <p:cNvSpPr/>
-          <p:nvPr/>
-        </p:nvSpPr>
-        <p:spPr>
-          <a:xfrm>
-            <a:off x="3784092" y="1737360"/>
+            <a:off x="1564386" y="1737360"/>
             <a:ext cx="9144" cy="292607"/>
           </a:xfrm>
           <a:prstGeom prst="rect">
@@ -8116,14 +8257,14 @@
       </p:sp>
       <p:sp>
         <p:nvSpPr>
-          <p:cNvPr id="11" name="TextBox 10"/>
-          <p:cNvSpPr txBox="1"/>
-          <p:nvPr/>
-        </p:nvSpPr>
-        <p:spPr>
-          <a:xfrm>
-            <a:off x="4486656" y="1737360"/>
-            <a:ext cx="702564" cy="274320"/>
+          <p:cNvPr id="9" name="TextBox 8"/>
+          <p:cNvSpPr txBox="1"/>
+          <p:nvPr/>
+        </p:nvSpPr>
+        <p:spPr>
+          <a:xfrm>
+            <a:off x="2470404" y="1737360"/>
+            <a:ext cx="906018" cy="274320"/>
           </a:xfrm>
           <a:prstGeom prst="rect">
             <a:avLst/>
@@ -8157,13 +8298,13 @@
       </p:sp>
       <p:sp>
         <p:nvSpPr>
-          <p:cNvPr id="12" name="Rectangle 11"/>
+          <p:cNvPr id="10" name="Rectangle 9"/>
           <p:cNvSpPr/>
           <p:nvPr/>
         </p:nvSpPr>
         <p:spPr>
           <a:xfrm>
-            <a:off x="4486656" y="1737360"/>
+            <a:off x="2470404" y="1737360"/>
             <a:ext cx="9144" cy="292607"/>
           </a:xfrm>
           <a:prstGeom prst="rect">
@@ -8201,14 +8342,14 @@
       </p:sp>
       <p:sp>
         <p:nvSpPr>
-          <p:cNvPr id="13" name="TextBox 12"/>
-          <p:cNvSpPr txBox="1"/>
-          <p:nvPr/>
-        </p:nvSpPr>
-        <p:spPr>
-          <a:xfrm>
-            <a:off x="5189220" y="1737360"/>
-            <a:ext cx="702564" cy="274320"/>
+          <p:cNvPr id="11" name="TextBox 10"/>
+          <p:cNvSpPr txBox="1"/>
+          <p:nvPr/>
+        </p:nvSpPr>
+        <p:spPr>
+          <a:xfrm>
+            <a:off x="3376422" y="1737360"/>
+            <a:ext cx="906018" cy="274320"/>
           </a:xfrm>
           <a:prstGeom prst="rect">
             <a:avLst/>
@@ -8242,13 +8383,13 @@
       </p:sp>
       <p:sp>
         <p:nvSpPr>
-          <p:cNvPr id="14" name="Rectangle 13"/>
+          <p:cNvPr id="12" name="Rectangle 11"/>
           <p:cNvSpPr/>
           <p:nvPr/>
         </p:nvSpPr>
         <p:spPr>
           <a:xfrm>
-            <a:off x="5189220" y="1737360"/>
+            <a:off x="3376422" y="1737360"/>
             <a:ext cx="9144" cy="292607"/>
           </a:xfrm>
           <a:prstGeom prst="rect">
@@ -8286,14 +8427,14 @@
       </p:sp>
       <p:sp>
         <p:nvSpPr>
-          <p:cNvPr id="15" name="TextBox 14"/>
-          <p:cNvSpPr txBox="1"/>
-          <p:nvPr/>
-        </p:nvSpPr>
-        <p:spPr>
-          <a:xfrm>
-            <a:off x="5891784" y="1737360"/>
-            <a:ext cx="702564" cy="274320"/>
+          <p:cNvPr id="13" name="TextBox 12"/>
+          <p:cNvSpPr txBox="1"/>
+          <p:nvPr/>
+        </p:nvSpPr>
+        <p:spPr>
+          <a:xfrm>
+            <a:off x="4282440" y="1737360"/>
+            <a:ext cx="906018" cy="274320"/>
           </a:xfrm>
           <a:prstGeom prst="rect">
             <a:avLst/>
@@ -8327,13 +8468,13 @@
       </p:sp>
       <p:sp>
         <p:nvSpPr>
-          <p:cNvPr id="16" name="Rectangle 15"/>
+          <p:cNvPr id="14" name="Rectangle 13"/>
           <p:cNvSpPr/>
           <p:nvPr/>
         </p:nvSpPr>
         <p:spPr>
           <a:xfrm>
-            <a:off x="5891784" y="1737360"/>
+            <a:off x="4282440" y="1737360"/>
             <a:ext cx="9144" cy="292607"/>
           </a:xfrm>
           <a:prstGeom prst="rect">
@@ -8371,14 +8512,14 @@
       </p:sp>
       <p:sp>
         <p:nvSpPr>
-          <p:cNvPr id="17" name="TextBox 16"/>
-          <p:cNvSpPr txBox="1"/>
-          <p:nvPr/>
-        </p:nvSpPr>
-        <p:spPr>
-          <a:xfrm>
-            <a:off x="6594348" y="1737360"/>
-            <a:ext cx="702564" cy="274320"/>
+          <p:cNvPr id="15" name="TextBox 14"/>
+          <p:cNvSpPr txBox="1"/>
+          <p:nvPr/>
+        </p:nvSpPr>
+        <p:spPr>
+          <a:xfrm>
+            <a:off x="5188458" y="1737360"/>
+            <a:ext cx="906018" cy="274320"/>
           </a:xfrm>
           <a:prstGeom prst="rect">
             <a:avLst/>
@@ -8412,13 +8553,13 @@
       </p:sp>
       <p:sp>
         <p:nvSpPr>
-          <p:cNvPr id="18" name="Rectangle 17"/>
+          <p:cNvPr id="16" name="Rectangle 15"/>
           <p:cNvSpPr/>
           <p:nvPr/>
         </p:nvSpPr>
         <p:spPr>
           <a:xfrm>
-            <a:off x="6594348" y="1737360"/>
+            <a:off x="5188458" y="1737360"/>
             <a:ext cx="9144" cy="292607"/>
           </a:xfrm>
           <a:prstGeom prst="rect">
@@ -8456,14 +8597,14 @@
       </p:sp>
       <p:sp>
         <p:nvSpPr>
-          <p:cNvPr id="19" name="TextBox 18"/>
-          <p:cNvSpPr txBox="1"/>
-          <p:nvPr/>
-        </p:nvSpPr>
-        <p:spPr>
-          <a:xfrm>
-            <a:off x="7296912" y="1737360"/>
-            <a:ext cx="702564" cy="274320"/>
+          <p:cNvPr id="17" name="TextBox 16"/>
+          <p:cNvSpPr txBox="1"/>
+          <p:nvPr/>
+        </p:nvSpPr>
+        <p:spPr>
+          <a:xfrm>
+            <a:off x="6094476" y="1737360"/>
+            <a:ext cx="906018" cy="274320"/>
           </a:xfrm>
           <a:prstGeom prst="rect">
             <a:avLst/>
@@ -8497,13 +8638,13 @@
       </p:sp>
       <p:sp>
         <p:nvSpPr>
-          <p:cNvPr id="20" name="Rectangle 19"/>
+          <p:cNvPr id="18" name="Rectangle 17"/>
           <p:cNvSpPr/>
           <p:nvPr/>
         </p:nvSpPr>
         <p:spPr>
           <a:xfrm>
-            <a:off x="7296912" y="1737360"/>
+            <a:off x="6094476" y="1737360"/>
             <a:ext cx="9144" cy="292607"/>
           </a:xfrm>
           <a:prstGeom prst="rect">
@@ -8541,14 +8682,14 @@
       </p:sp>
       <p:sp>
         <p:nvSpPr>
-          <p:cNvPr id="21" name="TextBox 20"/>
-          <p:cNvSpPr txBox="1"/>
-          <p:nvPr/>
-        </p:nvSpPr>
-        <p:spPr>
-          <a:xfrm>
-            <a:off x="7999476" y="1737360"/>
-            <a:ext cx="702564" cy="274320"/>
+          <p:cNvPr id="19" name="TextBox 18"/>
+          <p:cNvSpPr txBox="1"/>
+          <p:nvPr/>
+        </p:nvSpPr>
+        <p:spPr>
+          <a:xfrm>
+            <a:off x="7000494" y="1737360"/>
+            <a:ext cx="906018" cy="274320"/>
           </a:xfrm>
           <a:prstGeom prst="rect">
             <a:avLst/>
@@ -8582,13 +8723,13 @@
       </p:sp>
       <p:sp>
         <p:nvSpPr>
-          <p:cNvPr id="22" name="Rectangle 21"/>
+          <p:cNvPr id="20" name="Rectangle 19"/>
           <p:cNvSpPr/>
           <p:nvPr/>
         </p:nvSpPr>
         <p:spPr>
           <a:xfrm>
-            <a:off x="7999476" y="1737360"/>
+            <a:off x="7000494" y="1737360"/>
             <a:ext cx="9144" cy="292607"/>
           </a:xfrm>
           <a:prstGeom prst="rect">
@@ -8626,14 +8767,14 @@
       </p:sp>
       <p:sp>
         <p:nvSpPr>
-          <p:cNvPr id="23" name="TextBox 22"/>
-          <p:cNvSpPr txBox="1"/>
-          <p:nvPr/>
-        </p:nvSpPr>
-        <p:spPr>
-          <a:xfrm>
-            <a:off x="8702040" y="1737360"/>
-            <a:ext cx="702564" cy="274320"/>
+          <p:cNvPr id="21" name="TextBox 20"/>
+          <p:cNvSpPr txBox="1"/>
+          <p:nvPr/>
+        </p:nvSpPr>
+        <p:spPr>
+          <a:xfrm>
+            <a:off x="7906512" y="1737360"/>
+            <a:ext cx="906018" cy="274320"/>
           </a:xfrm>
           <a:prstGeom prst="rect">
             <a:avLst/>
@@ -8667,13 +8808,13 @@
       </p:sp>
       <p:sp>
         <p:nvSpPr>
-          <p:cNvPr id="24" name="Rectangle 23"/>
+          <p:cNvPr id="22" name="Rectangle 21"/>
           <p:cNvSpPr/>
           <p:nvPr/>
         </p:nvSpPr>
         <p:spPr>
           <a:xfrm>
-            <a:off x="8702040" y="1737360"/>
+            <a:off x="7906512" y="1737360"/>
             <a:ext cx="9144" cy="292607"/>
           </a:xfrm>
           <a:prstGeom prst="rect">
@@ -8711,14 +8852,14 @@
       </p:sp>
       <p:sp>
         <p:nvSpPr>
-          <p:cNvPr id="25" name="TextBox 24"/>
-          <p:cNvSpPr txBox="1"/>
-          <p:nvPr/>
-        </p:nvSpPr>
-        <p:spPr>
-          <a:xfrm>
-            <a:off x="9404604" y="1737360"/>
-            <a:ext cx="702564" cy="274320"/>
+          <p:cNvPr id="23" name="TextBox 22"/>
+          <p:cNvSpPr txBox="1"/>
+          <p:nvPr/>
+        </p:nvSpPr>
+        <p:spPr>
+          <a:xfrm>
+            <a:off x="8812530" y="1737360"/>
+            <a:ext cx="906018" cy="274320"/>
           </a:xfrm>
           <a:prstGeom prst="rect">
             <a:avLst/>
@@ -8752,13 +8893,13 @@
       </p:sp>
       <p:sp>
         <p:nvSpPr>
-          <p:cNvPr id="26" name="Rectangle 25"/>
+          <p:cNvPr id="24" name="Rectangle 23"/>
           <p:cNvSpPr/>
           <p:nvPr/>
         </p:nvSpPr>
         <p:spPr>
           <a:xfrm>
-            <a:off x="9404604" y="1737360"/>
+            <a:off x="8812530" y="1737360"/>
             <a:ext cx="9144" cy="292607"/>
           </a:xfrm>
           <a:prstGeom prst="rect">
@@ -8796,14 +8937,14 @@
       </p:sp>
       <p:sp>
         <p:nvSpPr>
-          <p:cNvPr id="27" name="TextBox 26"/>
-          <p:cNvSpPr txBox="1"/>
-          <p:nvPr/>
-        </p:nvSpPr>
-        <p:spPr>
-          <a:xfrm>
-            <a:off x="10107168" y="1737360"/>
-            <a:ext cx="702564" cy="274320"/>
+          <p:cNvPr id="25" name="TextBox 24"/>
+          <p:cNvSpPr txBox="1"/>
+          <p:nvPr/>
+        </p:nvSpPr>
+        <p:spPr>
+          <a:xfrm>
+            <a:off x="9718548" y="1737360"/>
+            <a:ext cx="906018" cy="274320"/>
           </a:xfrm>
           <a:prstGeom prst="rect">
             <a:avLst/>
@@ -8837,13 +8978,13 @@
       </p:sp>
       <p:sp>
         <p:nvSpPr>
-          <p:cNvPr id="28" name="Rectangle 27"/>
+          <p:cNvPr id="26" name="Rectangle 25"/>
           <p:cNvSpPr/>
           <p:nvPr/>
         </p:nvSpPr>
         <p:spPr>
           <a:xfrm>
-            <a:off x="10107168" y="1737360"/>
+            <a:off x="9718548" y="1737360"/>
             <a:ext cx="9144" cy="292607"/>
           </a:xfrm>
           <a:prstGeom prst="rect">
@@ -8881,14 +9022,14 @@
       </p:sp>
       <p:sp>
         <p:nvSpPr>
-          <p:cNvPr id="29" name="TextBox 28"/>
-          <p:cNvSpPr txBox="1"/>
-          <p:nvPr/>
-        </p:nvSpPr>
-        <p:spPr>
-          <a:xfrm>
-            <a:off x="10809732" y="1737360"/>
-            <a:ext cx="702564" cy="274320"/>
+          <p:cNvPr id="27" name="TextBox 26"/>
+          <p:cNvSpPr txBox="1"/>
+          <p:nvPr/>
+        </p:nvSpPr>
+        <p:spPr>
+          <a:xfrm>
+            <a:off x="10624566" y="1737360"/>
+            <a:ext cx="906018" cy="274320"/>
           </a:xfrm>
           <a:prstGeom prst="rect">
             <a:avLst/>
@@ -8922,13 +9063,13 @@
       </p:sp>
       <p:sp>
         <p:nvSpPr>
-          <p:cNvPr id="30" name="Rectangle 29"/>
+          <p:cNvPr id="28" name="Rectangle 27"/>
           <p:cNvSpPr/>
           <p:nvPr/>
         </p:nvSpPr>
         <p:spPr>
           <a:xfrm>
-            <a:off x="10809732" y="1737360"/>
+            <a:off x="10624566" y="1737360"/>
             <a:ext cx="9144" cy="292607"/>
           </a:xfrm>
           <a:prstGeom prst="rect">
@@ -8966,14 +9107,14 @@
       </p:sp>
       <p:sp>
         <p:nvSpPr>
-          <p:cNvPr id="31" name="Rectangle 30"/>
+          <p:cNvPr id="29" name="Rectangle 28"/>
           <p:cNvSpPr/>
           <p:nvPr/>
         </p:nvSpPr>
         <p:spPr>
           <a:xfrm>
             <a:off x="658368" y="2103120"/>
-            <a:ext cx="10853928" cy="713232"/>
+            <a:ext cx="10872216" cy="713232"/>
           </a:xfrm>
           <a:prstGeom prst="rect">
             <a:avLst/>
@@ -9010,14 +9151,14 @@
       </p:sp>
       <p:sp>
         <p:nvSpPr>
-          <p:cNvPr id="32" name="Rectangle 31"/>
+          <p:cNvPr id="30" name="Rectangle 29"/>
           <p:cNvSpPr/>
           <p:nvPr/>
         </p:nvSpPr>
         <p:spPr>
           <a:xfrm>
             <a:off x="658368" y="2816352"/>
-            <a:ext cx="10853928" cy="713232"/>
+            <a:ext cx="10872216" cy="713232"/>
           </a:xfrm>
           <a:prstGeom prst="rect">
             <a:avLst/>
@@ -9054,14 +9195,14 @@
       </p:sp>
       <p:sp>
         <p:nvSpPr>
-          <p:cNvPr id="33" name="Rectangle 32"/>
+          <p:cNvPr id="31" name="Rectangle 30"/>
           <p:cNvSpPr/>
           <p:nvPr/>
         </p:nvSpPr>
         <p:spPr>
           <a:xfrm>
             <a:off x="658368" y="3529584"/>
-            <a:ext cx="10853928" cy="713232"/>
+            <a:ext cx="10872216" cy="713232"/>
           </a:xfrm>
           <a:prstGeom prst="rect">
             <a:avLst/>
@@ -9098,14 +9239,14 @@
       </p:sp>
       <p:sp>
         <p:nvSpPr>
-          <p:cNvPr id="34" name="Rectangle 33"/>
+          <p:cNvPr id="32" name="Rectangle 31"/>
           <p:cNvSpPr/>
           <p:nvPr/>
         </p:nvSpPr>
         <p:spPr>
           <a:xfrm>
             <a:off x="658368" y="4242816"/>
-            <a:ext cx="10853928" cy="713232"/>
+            <a:ext cx="10872216" cy="713232"/>
           </a:xfrm>
           <a:prstGeom prst="rect">
             <a:avLst/>
@@ -9142,14 +9283,14 @@
       </p:sp>
       <p:sp>
         <p:nvSpPr>
-          <p:cNvPr id="35" name="Rectangle 34"/>
+          <p:cNvPr id="33" name="Rectangle 32"/>
           <p:cNvSpPr/>
           <p:nvPr/>
         </p:nvSpPr>
         <p:spPr>
           <a:xfrm>
             <a:off x="658368" y="4956048"/>
-            <a:ext cx="10853928" cy="713232"/>
+            <a:ext cx="10872216" cy="713232"/>
           </a:xfrm>
           <a:prstGeom prst="rect">
             <a:avLst/>
@@ -9186,14 +9327,86 @@
       </p:sp>
       <p:cxnSp>
         <p:nvCxnSpPr>
+          <p:cNvPr id="34" name="Connector 33"/>
+          <p:cNvCxnSpPr/>
+          <p:nvPr/>
+        </p:nvCxnSpPr>
+        <p:spPr>
+          <a:xfrm>
+            <a:off x="658368" y="2103120"/>
+            <a:ext cx="10872216" cy="0"/>
+          </a:xfrm>
+          <a:prstGeom prst="line">
+            <a:avLst/>
+          </a:prstGeom>
+          <a:ln w="7620">
+            <a:solidFill>
+              <a:srgbClr val="D1CFC8"/>
+            </a:solidFill>
+          </a:ln>
+          <a:effectLst/>
+        </p:spPr>
+        <p:style>
+          <a:lnRef idx="2">
+            <a:schemeClr val="accent1"/>
+          </a:lnRef>
+          <a:fillRef idx="0">
+            <a:schemeClr val="accent1"/>
+          </a:fillRef>
+          <a:effectRef idx="1">
+            <a:schemeClr val="accent1"/>
+          </a:effectRef>
+          <a:fontRef idx="minor">
+            <a:schemeClr val="tx1"/>
+          </a:fontRef>
+        </p:style>
+      </p:cxnSp>
+      <p:cxnSp>
+        <p:nvCxnSpPr>
+          <p:cNvPr id="35" name="Connector 34"/>
+          <p:cNvCxnSpPr/>
+          <p:nvPr/>
+        </p:nvCxnSpPr>
+        <p:spPr>
+          <a:xfrm>
+            <a:off x="658368" y="2816352"/>
+            <a:ext cx="10872216" cy="0"/>
+          </a:xfrm>
+          <a:prstGeom prst="line">
+            <a:avLst/>
+          </a:prstGeom>
+          <a:ln w="7620">
+            <a:solidFill>
+              <a:srgbClr val="D1CFC8"/>
+            </a:solidFill>
+          </a:ln>
+          <a:effectLst/>
+        </p:spPr>
+        <p:style>
+          <a:lnRef idx="2">
+            <a:schemeClr val="accent1"/>
+          </a:lnRef>
+          <a:fillRef idx="0">
+            <a:schemeClr val="accent1"/>
+          </a:fillRef>
+          <a:effectRef idx="1">
+            <a:schemeClr val="accent1"/>
+          </a:effectRef>
+          <a:fontRef idx="minor">
+            <a:schemeClr val="tx1"/>
+          </a:fontRef>
+        </p:style>
+      </p:cxnSp>
+      <p:cxnSp>
+        <p:nvCxnSpPr>
           <p:cNvPr id="36" name="Connector 35"/>
           <p:cNvCxnSpPr/>
           <p:nvPr/>
         </p:nvCxnSpPr>
         <p:spPr>
           <a:xfrm>
-            <a:off x="3081528" y="2103120"/>
-            <a:ext cx="0" cy="3566160"/>
+            <a:off x="658368" y="3529584"/>
+            <a:ext cx="10872216" cy="0"/>
           </a:xfrm>
           <a:prstGeom prst="line">
             <a:avLst/>
@@ -9228,8 +9441,8 @@
         </p:nvCxnSpPr>
         <p:spPr>
           <a:xfrm>
-            <a:off x="3784092" y="2103120"/>
-            <a:ext cx="0" cy="3566160"/>
+            <a:off x="658368" y="4242816"/>
+            <a:ext cx="10872216" cy="0"/>
           </a:xfrm>
           <a:prstGeom prst="line">
             <a:avLst/>
@@ -9264,8 +9477,8 @@
         </p:nvCxnSpPr>
         <p:spPr>
           <a:xfrm>
-            <a:off x="4486656" y="2103120"/>
-            <a:ext cx="0" cy="3566160"/>
+            <a:off x="658368" y="4956048"/>
+            <a:ext cx="10872216" cy="0"/>
           </a:xfrm>
           <a:prstGeom prst="line">
             <a:avLst/>
@@ -9300,8 +9513,8 @@
         </p:nvCxnSpPr>
         <p:spPr>
           <a:xfrm>
-            <a:off x="5189220" y="2103120"/>
-            <a:ext cx="0" cy="3566160"/>
+            <a:off x="658368" y="5669280"/>
+            <a:ext cx="10872216" cy="0"/>
           </a:xfrm>
           <a:prstGeom prst="line">
             <a:avLst/>
@@ -9328,556 +9541,16 @@
           </a:fontRef>
         </p:style>
       </p:cxnSp>
-      <p:cxnSp>
-        <p:nvCxnSpPr>
-          <p:cNvPr id="40" name="Connector 39"/>
-          <p:cNvCxnSpPr/>
-          <p:nvPr/>
-        </p:nvCxnSpPr>
-        <p:spPr>
-          <a:xfrm>
-            <a:off x="5891784" y="2103120"/>
-            <a:ext cx="0" cy="3566160"/>
-          </a:xfrm>
-          <a:prstGeom prst="line">
-            <a:avLst/>
-          </a:prstGeom>
-          <a:ln w="7620">
-            <a:solidFill>
-              <a:srgbClr val="D1CFC8"/>
-            </a:solidFill>
-          </a:ln>
-          <a:effectLst/>
-        </p:spPr>
-        <p:style>
-          <a:lnRef idx="2">
-            <a:schemeClr val="accent1"/>
-          </a:lnRef>
-          <a:fillRef idx="0">
-            <a:schemeClr val="accent1"/>
-          </a:fillRef>
-          <a:effectRef idx="1">
-            <a:schemeClr val="accent1"/>
-          </a:effectRef>
-          <a:fontRef idx="minor">
-            <a:schemeClr val="tx1"/>
-          </a:fontRef>
-        </p:style>
-      </p:cxnSp>
-      <p:cxnSp>
-        <p:nvCxnSpPr>
-          <p:cNvPr id="41" name="Connector 40"/>
-          <p:cNvCxnSpPr/>
-          <p:nvPr/>
-        </p:nvCxnSpPr>
-        <p:spPr>
-          <a:xfrm>
-            <a:off x="6594348" y="2103120"/>
-            <a:ext cx="0" cy="3566160"/>
-          </a:xfrm>
-          <a:prstGeom prst="line">
-            <a:avLst/>
-          </a:prstGeom>
-          <a:ln w="7620">
-            <a:solidFill>
-              <a:srgbClr val="D1CFC8"/>
-            </a:solidFill>
-          </a:ln>
-          <a:effectLst/>
-        </p:spPr>
-        <p:style>
-          <a:lnRef idx="2">
-            <a:schemeClr val="accent1"/>
-          </a:lnRef>
-          <a:fillRef idx="0">
-            <a:schemeClr val="accent1"/>
-          </a:fillRef>
-          <a:effectRef idx="1">
-            <a:schemeClr val="accent1"/>
-          </a:effectRef>
-          <a:fontRef idx="minor">
-            <a:schemeClr val="tx1"/>
-          </a:fontRef>
-        </p:style>
-      </p:cxnSp>
-      <p:cxnSp>
-        <p:nvCxnSpPr>
-          <p:cNvPr id="42" name="Connector 41"/>
-          <p:cNvCxnSpPr/>
-          <p:nvPr/>
-        </p:nvCxnSpPr>
-        <p:spPr>
-          <a:xfrm>
-            <a:off x="7296912" y="2103120"/>
-            <a:ext cx="0" cy="3566160"/>
-          </a:xfrm>
-          <a:prstGeom prst="line">
-            <a:avLst/>
-          </a:prstGeom>
-          <a:ln w="7620">
-            <a:solidFill>
-              <a:srgbClr val="D1CFC8"/>
-            </a:solidFill>
-          </a:ln>
-          <a:effectLst/>
-        </p:spPr>
-        <p:style>
-          <a:lnRef idx="2">
-            <a:schemeClr val="accent1"/>
-          </a:lnRef>
-          <a:fillRef idx="0">
-            <a:schemeClr val="accent1"/>
-          </a:fillRef>
-          <a:effectRef idx="1">
-            <a:schemeClr val="accent1"/>
-          </a:effectRef>
-          <a:fontRef idx="minor">
-            <a:schemeClr val="tx1"/>
-          </a:fontRef>
-        </p:style>
-      </p:cxnSp>
-      <p:cxnSp>
-        <p:nvCxnSpPr>
-          <p:cNvPr id="43" name="Connector 42"/>
-          <p:cNvCxnSpPr/>
-          <p:nvPr/>
-        </p:nvCxnSpPr>
-        <p:spPr>
-          <a:xfrm>
-            <a:off x="7999476" y="2103120"/>
-            <a:ext cx="0" cy="3566160"/>
-          </a:xfrm>
-          <a:prstGeom prst="line">
-            <a:avLst/>
-          </a:prstGeom>
-          <a:ln w="7620">
-            <a:solidFill>
-              <a:srgbClr val="D1CFC8"/>
-            </a:solidFill>
-          </a:ln>
-          <a:effectLst/>
-        </p:spPr>
-        <p:style>
-          <a:lnRef idx="2">
-            <a:schemeClr val="accent1"/>
-          </a:lnRef>
-          <a:fillRef idx="0">
-            <a:schemeClr val="accent1"/>
-          </a:fillRef>
-          <a:effectRef idx="1">
-            <a:schemeClr val="accent1"/>
-          </a:effectRef>
-          <a:fontRef idx="minor">
-            <a:schemeClr val="tx1"/>
-          </a:fontRef>
-        </p:style>
-      </p:cxnSp>
-      <p:cxnSp>
-        <p:nvCxnSpPr>
-          <p:cNvPr id="44" name="Connector 43"/>
-          <p:cNvCxnSpPr/>
-          <p:nvPr/>
-        </p:nvCxnSpPr>
-        <p:spPr>
-          <a:xfrm>
-            <a:off x="8702040" y="2103120"/>
-            <a:ext cx="0" cy="3566160"/>
-          </a:xfrm>
-          <a:prstGeom prst="line">
-            <a:avLst/>
-          </a:prstGeom>
-          <a:ln w="7620">
-            <a:solidFill>
-              <a:srgbClr val="D1CFC8"/>
-            </a:solidFill>
-          </a:ln>
-          <a:effectLst/>
-        </p:spPr>
-        <p:style>
-          <a:lnRef idx="2">
-            <a:schemeClr val="accent1"/>
-          </a:lnRef>
-          <a:fillRef idx="0">
-            <a:schemeClr val="accent1"/>
-          </a:fillRef>
-          <a:effectRef idx="1">
-            <a:schemeClr val="accent1"/>
-          </a:effectRef>
-          <a:fontRef idx="minor">
-            <a:schemeClr val="tx1"/>
-          </a:fontRef>
-        </p:style>
-      </p:cxnSp>
-      <p:cxnSp>
-        <p:nvCxnSpPr>
-          <p:cNvPr id="45" name="Connector 44"/>
-          <p:cNvCxnSpPr/>
-          <p:nvPr/>
-        </p:nvCxnSpPr>
-        <p:spPr>
-          <a:xfrm>
-            <a:off x="9404604" y="2103120"/>
-            <a:ext cx="0" cy="3566160"/>
-          </a:xfrm>
-          <a:prstGeom prst="line">
-            <a:avLst/>
-          </a:prstGeom>
-          <a:ln w="7620">
-            <a:solidFill>
-              <a:srgbClr val="D1CFC8"/>
-            </a:solidFill>
-          </a:ln>
-          <a:effectLst/>
-        </p:spPr>
-        <p:style>
-          <a:lnRef idx="2">
-            <a:schemeClr val="accent1"/>
-          </a:lnRef>
-          <a:fillRef idx="0">
-            <a:schemeClr val="accent1"/>
-          </a:fillRef>
-          <a:effectRef idx="1">
-            <a:schemeClr val="accent1"/>
-          </a:effectRef>
-          <a:fontRef idx="minor">
-            <a:schemeClr val="tx1"/>
-          </a:fontRef>
-        </p:style>
-      </p:cxnSp>
-      <p:cxnSp>
-        <p:nvCxnSpPr>
-          <p:cNvPr id="46" name="Connector 45"/>
-          <p:cNvCxnSpPr/>
-          <p:nvPr/>
-        </p:nvCxnSpPr>
-        <p:spPr>
-          <a:xfrm>
-            <a:off x="10107168" y="2103120"/>
-            <a:ext cx="0" cy="3566160"/>
-          </a:xfrm>
-          <a:prstGeom prst="line">
-            <a:avLst/>
-          </a:prstGeom>
-          <a:ln w="7620">
-            <a:solidFill>
-              <a:srgbClr val="D1CFC8"/>
-            </a:solidFill>
-          </a:ln>
-          <a:effectLst/>
-        </p:spPr>
-        <p:style>
-          <a:lnRef idx="2">
-            <a:schemeClr val="accent1"/>
-          </a:lnRef>
-          <a:fillRef idx="0">
-            <a:schemeClr val="accent1"/>
-          </a:fillRef>
-          <a:effectRef idx="1">
-            <a:schemeClr val="accent1"/>
-          </a:effectRef>
-          <a:fontRef idx="minor">
-            <a:schemeClr val="tx1"/>
-          </a:fontRef>
-        </p:style>
-      </p:cxnSp>
-      <p:cxnSp>
-        <p:nvCxnSpPr>
-          <p:cNvPr id="47" name="Connector 46"/>
-          <p:cNvCxnSpPr/>
-          <p:nvPr/>
-        </p:nvCxnSpPr>
-        <p:spPr>
-          <a:xfrm>
-            <a:off x="10809732" y="2103120"/>
-            <a:ext cx="0" cy="3566160"/>
-          </a:xfrm>
-          <a:prstGeom prst="line">
-            <a:avLst/>
-          </a:prstGeom>
-          <a:ln w="7620">
-            <a:solidFill>
-              <a:srgbClr val="D1CFC8"/>
-            </a:solidFill>
-          </a:ln>
-          <a:effectLst/>
-        </p:spPr>
-        <p:style>
-          <a:lnRef idx="2">
-            <a:schemeClr val="accent1"/>
-          </a:lnRef>
-          <a:fillRef idx="0">
-            <a:schemeClr val="accent1"/>
-          </a:fillRef>
-          <a:effectRef idx="1">
-            <a:schemeClr val="accent1"/>
-          </a:effectRef>
-          <a:fontRef idx="minor">
-            <a:schemeClr val="tx1"/>
-          </a:fontRef>
-        </p:style>
-      </p:cxnSp>
-      <p:cxnSp>
-        <p:nvCxnSpPr>
-          <p:cNvPr id="48" name="Connector 47"/>
-          <p:cNvCxnSpPr/>
-          <p:nvPr/>
-        </p:nvCxnSpPr>
-        <p:spPr>
-          <a:xfrm>
-            <a:off x="11512296" y="2103120"/>
-            <a:ext cx="0" cy="3566160"/>
-          </a:xfrm>
-          <a:prstGeom prst="line">
-            <a:avLst/>
-          </a:prstGeom>
-          <a:ln w="7620">
-            <a:solidFill>
-              <a:srgbClr val="D1CFC8"/>
-            </a:solidFill>
-          </a:ln>
-          <a:effectLst/>
-        </p:spPr>
-        <p:style>
-          <a:lnRef idx="2">
-            <a:schemeClr val="accent1"/>
-          </a:lnRef>
-          <a:fillRef idx="0">
-            <a:schemeClr val="accent1"/>
-          </a:fillRef>
-          <a:effectRef idx="1">
-            <a:schemeClr val="accent1"/>
-          </a:effectRef>
-          <a:fontRef idx="minor">
-            <a:schemeClr val="tx1"/>
-          </a:fontRef>
-        </p:style>
-      </p:cxnSp>
-      <p:cxnSp>
-        <p:nvCxnSpPr>
-          <p:cNvPr id="49" name="Connector 48"/>
-          <p:cNvCxnSpPr/>
-          <p:nvPr/>
-        </p:nvCxnSpPr>
-        <p:spPr>
-          <a:xfrm>
-            <a:off x="658368" y="2103120"/>
-            <a:ext cx="10853928" cy="0"/>
-          </a:xfrm>
-          <a:prstGeom prst="line">
-            <a:avLst/>
-          </a:prstGeom>
-          <a:ln w="7620">
-            <a:solidFill>
-              <a:srgbClr val="D1CFC8"/>
-            </a:solidFill>
-          </a:ln>
-          <a:effectLst/>
-        </p:spPr>
-        <p:style>
-          <a:lnRef idx="2">
-            <a:schemeClr val="accent1"/>
-          </a:lnRef>
-          <a:fillRef idx="0">
-            <a:schemeClr val="accent1"/>
-          </a:fillRef>
-          <a:effectRef idx="1">
-            <a:schemeClr val="accent1"/>
-          </a:effectRef>
-          <a:fontRef idx="minor">
-            <a:schemeClr val="tx1"/>
-          </a:fontRef>
-        </p:style>
-      </p:cxnSp>
-      <p:cxnSp>
-        <p:nvCxnSpPr>
-          <p:cNvPr id="50" name="Connector 49"/>
-          <p:cNvCxnSpPr/>
-          <p:nvPr/>
-        </p:nvCxnSpPr>
-        <p:spPr>
-          <a:xfrm>
-            <a:off x="658368" y="2816352"/>
-            <a:ext cx="10853928" cy="0"/>
-          </a:xfrm>
-          <a:prstGeom prst="line">
-            <a:avLst/>
-          </a:prstGeom>
-          <a:ln w="7620">
-            <a:solidFill>
-              <a:srgbClr val="D1CFC8"/>
-            </a:solidFill>
-          </a:ln>
-          <a:effectLst/>
-        </p:spPr>
-        <p:style>
-          <a:lnRef idx="2">
-            <a:schemeClr val="accent1"/>
-          </a:lnRef>
-          <a:fillRef idx="0">
-            <a:schemeClr val="accent1"/>
-          </a:fillRef>
-          <a:effectRef idx="1">
-            <a:schemeClr val="accent1"/>
-          </a:effectRef>
-          <a:fontRef idx="minor">
-            <a:schemeClr val="tx1"/>
-          </a:fontRef>
-        </p:style>
-      </p:cxnSp>
-      <p:cxnSp>
-        <p:nvCxnSpPr>
-          <p:cNvPr id="51" name="Connector 50"/>
-          <p:cNvCxnSpPr/>
-          <p:nvPr/>
-        </p:nvCxnSpPr>
-        <p:spPr>
-          <a:xfrm>
-            <a:off x="658368" y="3529584"/>
-            <a:ext cx="10853928" cy="0"/>
-          </a:xfrm>
-          <a:prstGeom prst="line">
-            <a:avLst/>
-          </a:prstGeom>
-          <a:ln w="7620">
-            <a:solidFill>
-              <a:srgbClr val="D1CFC8"/>
-            </a:solidFill>
-          </a:ln>
-          <a:effectLst/>
-        </p:spPr>
-        <p:style>
-          <a:lnRef idx="2">
-            <a:schemeClr val="accent1"/>
-          </a:lnRef>
-          <a:fillRef idx="0">
-            <a:schemeClr val="accent1"/>
-          </a:fillRef>
-          <a:effectRef idx="1">
-            <a:schemeClr val="accent1"/>
-          </a:effectRef>
-          <a:fontRef idx="minor">
-            <a:schemeClr val="tx1"/>
-          </a:fontRef>
-        </p:style>
-      </p:cxnSp>
-      <p:cxnSp>
-        <p:nvCxnSpPr>
-          <p:cNvPr id="52" name="Connector 51"/>
-          <p:cNvCxnSpPr/>
-          <p:nvPr/>
-        </p:nvCxnSpPr>
-        <p:spPr>
-          <a:xfrm>
-            <a:off x="658368" y="4242816"/>
-            <a:ext cx="10853928" cy="0"/>
-          </a:xfrm>
-          <a:prstGeom prst="line">
-            <a:avLst/>
-          </a:prstGeom>
-          <a:ln w="7620">
-            <a:solidFill>
-              <a:srgbClr val="D1CFC8"/>
-            </a:solidFill>
-          </a:ln>
-          <a:effectLst/>
-        </p:spPr>
-        <p:style>
-          <a:lnRef idx="2">
-            <a:schemeClr val="accent1"/>
-          </a:lnRef>
-          <a:fillRef idx="0">
-            <a:schemeClr val="accent1"/>
-          </a:fillRef>
-          <a:effectRef idx="1">
-            <a:schemeClr val="accent1"/>
-          </a:effectRef>
-          <a:fontRef idx="minor">
-            <a:schemeClr val="tx1"/>
-          </a:fontRef>
-        </p:style>
-      </p:cxnSp>
-      <p:cxnSp>
-        <p:nvCxnSpPr>
-          <p:cNvPr id="53" name="Connector 52"/>
-          <p:cNvCxnSpPr/>
-          <p:nvPr/>
-        </p:nvCxnSpPr>
-        <p:spPr>
-          <a:xfrm>
-            <a:off x="658368" y="4956048"/>
-            <a:ext cx="10853928" cy="0"/>
-          </a:xfrm>
-          <a:prstGeom prst="line">
-            <a:avLst/>
-          </a:prstGeom>
-          <a:ln w="7620">
-            <a:solidFill>
-              <a:srgbClr val="D1CFC8"/>
-            </a:solidFill>
-          </a:ln>
-          <a:effectLst/>
-        </p:spPr>
-        <p:style>
-          <a:lnRef idx="2">
-            <a:schemeClr val="accent1"/>
-          </a:lnRef>
-          <a:fillRef idx="0">
-            <a:schemeClr val="accent1"/>
-          </a:fillRef>
-          <a:effectRef idx="1">
-            <a:schemeClr val="accent1"/>
-          </a:effectRef>
-          <a:fontRef idx="minor">
-            <a:schemeClr val="tx1"/>
-          </a:fontRef>
-        </p:style>
-      </p:cxnSp>
-      <p:cxnSp>
-        <p:nvCxnSpPr>
-          <p:cNvPr id="54" name="Connector 53"/>
-          <p:cNvCxnSpPr/>
-          <p:nvPr/>
-        </p:nvCxnSpPr>
-        <p:spPr>
-          <a:xfrm>
-            <a:off x="658368" y="5669280"/>
-            <a:ext cx="10853928" cy="0"/>
-          </a:xfrm>
-          <a:prstGeom prst="line">
-            <a:avLst/>
-          </a:prstGeom>
-          <a:ln w="7620">
-            <a:solidFill>
-              <a:srgbClr val="D1CFC8"/>
-            </a:solidFill>
-          </a:ln>
-          <a:effectLst/>
-        </p:spPr>
-        <p:style>
-          <a:lnRef idx="2">
-            <a:schemeClr val="accent1"/>
-          </a:lnRef>
-          <a:fillRef idx="0">
-            <a:schemeClr val="accent1"/>
-          </a:fillRef>
-          <a:effectRef idx="1">
-            <a:schemeClr val="accent1"/>
-          </a:effectRef>
-          <a:fontRef idx="minor">
-            <a:schemeClr val="tx1"/>
-          </a:fontRef>
-        </p:style>
-      </p:cxnSp>
-      <p:sp>
-        <p:nvSpPr>
-          <p:cNvPr id="55" name="TextBox 54"/>
-          <p:cNvSpPr txBox="1"/>
-          <p:nvPr/>
-        </p:nvSpPr>
-        <p:spPr>
-          <a:xfrm>
-            <a:off x="768096" y="2231501"/>
-            <a:ext cx="310896" cy="246888"/>
+      <p:sp>
+        <p:nvSpPr>
+          <p:cNvPr id="40" name="TextBox 39"/>
+          <p:cNvSpPr txBox="1"/>
+          <p:nvPr/>
+        </p:nvSpPr>
+        <p:spPr>
+          <a:xfrm>
+            <a:off x="704088" y="2160178"/>
+            <a:ext cx="256032" cy="219456"/>
           </a:xfrm>
           <a:prstGeom prst="rect">
             <a:avLst/>
@@ -9896,29 +9569,70 @@
               </a:lnSpc>
             </a:pPr>
             <a:r>
+              <a:rPr sz="1050" b="1" lang="ja-JP">
+                <a:solidFill>
+                  <a:srgbClr val="0D7870"/>
+                </a:solidFill>
+                <a:latin typeface="Yu Gothic"/>
+                <a:ea typeface="Yu Gothic"/>
+                <a:cs typeface="Yu Gothic"/>
+              </a:rPr>
+              <a:t>01</a:t>
+            </a:r>
+          </a:p>
+        </p:txBody>
+      </p:sp>
+      <p:sp>
+        <p:nvSpPr>
+          <p:cNvPr id="41" name="TextBox 40"/>
+          <p:cNvSpPr txBox="1"/>
+          <p:nvPr/>
+        </p:nvSpPr>
+        <p:spPr>
+          <a:xfrm>
+            <a:off x="1014984" y="2145913"/>
+            <a:ext cx="10442448" cy="219456"/>
+          </a:xfrm>
+          <a:prstGeom prst="rect">
+            <a:avLst/>
+          </a:prstGeom>
+          <a:noFill/>
+        </p:spPr>
+        <p:txBody>
+          <a:bodyPr wrap="square" anchor="t" lIns="0" rIns="0" tIns="0" bIns="0">
+            <a:spAutoFit/>
+          </a:bodyPr>
+          <a:lstStyle/>
+          <a:p>
+            <a:pPr algn="l">
+              <a:lnSpc>
+                <a:spcPct val="130000"/>
+              </a:lnSpc>
+            </a:pPr>
+            <a:r>
               <a:rPr sz="1250" b="1" lang="ja-JP">
                 <a:solidFill>
-                  <a:srgbClr val="0D7870"/>
-                </a:solidFill>
-                <a:latin typeface="Yu Gothic"/>
-                <a:ea typeface="Yu Gothic"/>
-                <a:cs typeface="Yu Gothic"/>
-              </a:rPr>
-              <a:t>01</a:t>
-            </a:r>
-          </a:p>
-        </p:txBody>
-      </p:sp>
-      <p:sp>
-        <p:nvSpPr>
-          <p:cNvPr id="56" name="TextBox 55"/>
-          <p:cNvSpPr txBox="1"/>
-          <p:nvPr/>
-        </p:nvSpPr>
-        <p:spPr>
-          <a:xfrm>
-            <a:off x="1133856" y="2188707"/>
-            <a:ext cx="1837943" cy="246888"/>
+                  <a:srgbClr val="182C43"/>
+                </a:solidFill>
+                <a:latin typeface="Yu Gothic"/>
+                <a:ea typeface="Yu Gothic"/>
+                <a:cs typeface="Yu Gothic"/>
+              </a:rPr>
+              <a:t>型の定義</a:t>
+            </a:r>
+          </a:p>
+        </p:txBody>
+      </p:sp>
+      <p:sp>
+        <p:nvSpPr>
+          <p:cNvPr id="42" name="TextBox 41"/>
+          <p:cNvSpPr txBox="1"/>
+          <p:nvPr/>
+        </p:nvSpPr>
+        <p:spPr>
+          <a:xfrm>
+            <a:off x="1014984" y="2352751"/>
+            <a:ext cx="1002410" cy="182880"/>
           </a:xfrm>
           <a:prstGeom prst="rect">
             <a:avLst/>
@@ -9937,29 +9651,29 @@
               </a:lnSpc>
             </a:pPr>
             <a:r>
-              <a:rPr sz="1250" b="1" lang="ja-JP">
-                <a:solidFill>
-                  <a:srgbClr val="182C43"/>
-                </a:solidFill>
-                <a:latin typeface="Yu Gothic"/>
-                <a:ea typeface="Yu Gothic"/>
-                <a:cs typeface="Yu Gothic"/>
-              </a:rPr>
-              <a:t>型の定義</a:t>
-            </a:r>
-          </a:p>
-        </p:txBody>
-      </p:sp>
-      <p:sp>
-        <p:nvSpPr>
-          <p:cNvPr id="57" name="TextBox 56"/>
-          <p:cNvSpPr txBox="1"/>
-          <p:nvPr/>
-        </p:nvSpPr>
-        <p:spPr>
-          <a:xfrm>
-            <a:off x="1133856" y="2502529"/>
-            <a:ext cx="1837943" cy="182880"/>
+              <a:rPr sz="750" b="0" lang="ja-JP">
+                <a:solidFill>
+                  <a:srgbClr val="666E70"/>
+                </a:solidFill>
+                <a:latin typeface="Yu Gothic"/>
+                <a:ea typeface="Yu Gothic"/>
+                <a:cs typeface="Yu Gothic"/>
+              </a:rPr>
+              <a:t>主要パターンを選定</a:t>
+            </a:r>
+          </a:p>
+        </p:txBody>
+      </p:sp>
+      <p:sp>
+        <p:nvSpPr>
+          <p:cNvPr id="43" name="TextBox 42"/>
+          <p:cNvSpPr txBox="1"/>
+          <p:nvPr/>
+        </p:nvSpPr>
+        <p:spPr>
+          <a:xfrm>
+            <a:off x="2108835" y="2345618"/>
+            <a:ext cx="730377" cy="182880"/>
           </a:xfrm>
           <a:prstGeom prst="rect">
             <a:avLst/>
@@ -9972,35 +9686,35 @@
           </a:bodyPr>
           <a:lstStyle/>
           <a:p>
-            <a:pPr algn="l">
-              <a:lnSpc>
-                <a:spcPct val="130000"/>
-              </a:lnSpc>
-            </a:pPr>
-            <a:r>
-              <a:rPr sz="950" b="0" lang="ja-JP">
-                <a:solidFill>
-                  <a:srgbClr val="666E70"/>
-                </a:solidFill>
-                <a:latin typeface="Yu Gothic"/>
-                <a:ea typeface="Yu Gothic"/>
-                <a:cs typeface="Yu Gothic"/>
-              </a:rPr>
-              <a:t>主要パターンを選定</a:t>
-            </a:r>
-          </a:p>
-        </p:txBody>
-      </p:sp>
-      <p:sp>
-        <p:nvSpPr>
-          <p:cNvPr id="58" name="Rectangle 57"/>
+            <a:pPr algn="ctr">
+              <a:lnSpc>
+                <a:spcPct val="100000"/>
+              </a:lnSpc>
+            </a:pPr>
+            <a:r>
+              <a:rPr sz="850" b="1" lang="ja-JP">
+                <a:solidFill>
+                  <a:srgbClr val="C7583E"/>
+                </a:solidFill>
+                <a:latin typeface="Yu Gothic"/>
+                <a:ea typeface="Yu Gothic"/>
+                <a:cs typeface="Yu Gothic"/>
+              </a:rPr>
+              <a:t>型レビュー</a:t>
+            </a:r>
+          </a:p>
+        </p:txBody>
+      </p:sp>
+      <p:sp>
+        <p:nvSpPr>
+          <p:cNvPr id="44" name="Rectangle 43"/>
           <p:cNvSpPr/>
           <p:nvPr/>
         </p:nvSpPr>
         <p:spPr>
           <a:xfrm>
-            <a:off x="3127248" y="2274295"/>
-            <a:ext cx="1313688" cy="274320"/>
+            <a:off x="704088" y="2659440"/>
+            <a:ext cx="1720596" cy="32004"/>
           </a:xfrm>
           <a:prstGeom prst="rect">
             <a:avLst/>
@@ -10037,14 +9751,14 @@
       </p:sp>
       <p:sp>
         <p:nvSpPr>
-          <p:cNvPr id="59" name="TextBox 58"/>
-          <p:cNvSpPr txBox="1"/>
-          <p:nvPr/>
-        </p:nvSpPr>
-        <p:spPr>
-          <a:xfrm>
-            <a:off x="3209544" y="2306299"/>
-            <a:ext cx="1149096" cy="237744"/>
+          <p:cNvPr id="45" name="TextBox 44"/>
+          <p:cNvSpPr txBox="1"/>
+          <p:nvPr/>
+        </p:nvSpPr>
+        <p:spPr>
+          <a:xfrm>
+            <a:off x="1610106" y="2873410"/>
+            <a:ext cx="256032" cy="219456"/>
           </a:xfrm>
           <a:prstGeom prst="rect">
             <a:avLst/>
@@ -10063,29 +9777,29 @@
               </a:lnSpc>
             </a:pPr>
             <a:r>
-              <a:rPr sz="850" b="1" lang="ja-JP">
-                <a:solidFill>
-                  <a:srgbClr val="FFFFFC"/>
-                </a:solidFill>
-                <a:latin typeface="Yu Gothic"/>
-                <a:ea typeface="Yu Gothic"/>
-                <a:cs typeface="Yu Gothic"/>
-              </a:rPr>
-              <a:t>標準レイアウトを定義</a:t>
-            </a:r>
-          </a:p>
-        </p:txBody>
-      </p:sp>
-      <p:sp>
-        <p:nvSpPr>
-          <p:cNvPr id="60" name="TextBox 59"/>
-          <p:cNvSpPr txBox="1"/>
-          <p:nvPr/>
-        </p:nvSpPr>
-        <p:spPr>
-          <a:xfrm>
-            <a:off x="768096" y="2944733"/>
-            <a:ext cx="310896" cy="246888"/>
+              <a:rPr sz="1050" b="1" lang="ja-JP">
+                <a:solidFill>
+                  <a:srgbClr val="0D7870"/>
+                </a:solidFill>
+                <a:latin typeface="Yu Gothic"/>
+                <a:ea typeface="Yu Gothic"/>
+                <a:cs typeface="Yu Gothic"/>
+              </a:rPr>
+              <a:t>02</a:t>
+            </a:r>
+          </a:p>
+        </p:txBody>
+      </p:sp>
+      <p:sp>
+        <p:nvSpPr>
+          <p:cNvPr id="46" name="TextBox 45"/>
+          <p:cNvSpPr txBox="1"/>
+          <p:nvPr/>
+        </p:nvSpPr>
+        <p:spPr>
+          <a:xfrm>
+            <a:off x="1921002" y="2859145"/>
+            <a:ext cx="9536430" cy="219456"/>
           </a:xfrm>
           <a:prstGeom prst="rect">
             <a:avLst/>
@@ -10106,27 +9820,27 @@
             <a:r>
               <a:rPr sz="1250" b="1" lang="ja-JP">
                 <a:solidFill>
-                  <a:srgbClr val="0D7870"/>
-                </a:solidFill>
-                <a:latin typeface="Yu Gothic"/>
-                <a:ea typeface="Yu Gothic"/>
-                <a:cs typeface="Yu Gothic"/>
-              </a:rPr>
-              <a:t>02</a:t>
-            </a:r>
-          </a:p>
-        </p:txBody>
-      </p:sp>
-      <p:sp>
-        <p:nvSpPr>
-          <p:cNvPr id="61" name="TextBox 60"/>
-          <p:cNvSpPr txBox="1"/>
-          <p:nvPr/>
-        </p:nvSpPr>
-        <p:spPr>
-          <a:xfrm>
-            <a:off x="1133856" y="2901939"/>
-            <a:ext cx="1837943" cy="246888"/>
+                  <a:srgbClr val="182C43"/>
+                </a:solidFill>
+                <a:latin typeface="Yu Gothic"/>
+                <a:ea typeface="Yu Gothic"/>
+                <a:cs typeface="Yu Gothic"/>
+              </a:rPr>
+              <a:t>実装</a:t>
+            </a:r>
+          </a:p>
+        </p:txBody>
+      </p:sp>
+      <p:sp>
+        <p:nvSpPr>
+          <p:cNvPr id="47" name="TextBox 46"/>
+          <p:cNvSpPr txBox="1"/>
+          <p:nvPr/>
+        </p:nvSpPr>
+        <p:spPr>
+          <a:xfrm>
+            <a:off x="1921002" y="3065983"/>
+            <a:ext cx="9536430" cy="182880"/>
           </a:xfrm>
           <a:prstGeom prst="rect">
             <a:avLst/>
@@ -10145,47 +9859,6 @@
               </a:lnSpc>
             </a:pPr>
             <a:r>
-              <a:rPr sz="1250" b="1" lang="ja-JP">
-                <a:solidFill>
-                  <a:srgbClr val="182C43"/>
-                </a:solidFill>
-                <a:latin typeface="Yu Gothic"/>
-                <a:ea typeface="Yu Gothic"/>
-                <a:cs typeface="Yu Gothic"/>
-              </a:rPr>
-              <a:t>実装</a:t>
-            </a:r>
-          </a:p>
-        </p:txBody>
-      </p:sp>
-      <p:sp>
-        <p:nvSpPr>
-          <p:cNvPr id="62" name="TextBox 61"/>
-          <p:cNvSpPr txBox="1"/>
-          <p:nvPr/>
-        </p:nvSpPr>
-        <p:spPr>
-          <a:xfrm>
-            <a:off x="1133856" y="3215761"/>
-            <a:ext cx="1837943" cy="182880"/>
-          </a:xfrm>
-          <a:prstGeom prst="rect">
-            <a:avLst/>
-          </a:prstGeom>
-          <a:noFill/>
-        </p:spPr>
-        <p:txBody>
-          <a:bodyPr wrap="square" anchor="t" lIns="0" rIns="0" tIns="0" bIns="0">
-            <a:spAutoFit/>
-          </a:bodyPr>
-          <a:lstStyle/>
-          <a:p>
-            <a:pPr algn="l">
-              <a:lnSpc>
-                <a:spcPct val="130000"/>
-              </a:lnSpc>
-            </a:pPr>
-            <a:r>
               <a:rPr sz="950" b="0" lang="ja-JP">
                 <a:solidFill>
                   <a:srgbClr val="666E70"/>
@@ -10194,21 +9867,21 @@
                 <a:ea typeface="Yu Gothic"/>
                 <a:cs typeface="Yu Gothic"/>
               </a:rPr>
-              <a:t>rendererを整備</a:t>
-            </a:r>
-          </a:p>
-        </p:txBody>
-      </p:sp>
-      <p:sp>
-        <p:nvSpPr>
-          <p:cNvPr id="63" name="Rectangle 62"/>
+              <a:t>生成・検証機能を整備</a:t>
+            </a:r>
+          </a:p>
+        </p:txBody>
+      </p:sp>
+      <p:sp>
+        <p:nvSpPr>
+          <p:cNvPr id="48" name="Rectangle 47"/>
           <p:cNvSpPr/>
           <p:nvPr/>
         </p:nvSpPr>
         <p:spPr>
           <a:xfrm>
-            <a:off x="3829812" y="2987527"/>
-            <a:ext cx="2016252" cy="274320"/>
+            <a:off x="1610106" y="3372672"/>
+            <a:ext cx="2626614" cy="32004"/>
           </a:xfrm>
           <a:prstGeom prst="rect">
             <a:avLst/>
@@ -10245,14 +9918,14 @@
       </p:sp>
       <p:sp>
         <p:nvSpPr>
-          <p:cNvPr id="64" name="TextBox 63"/>
-          <p:cNvSpPr txBox="1"/>
-          <p:nvPr/>
-        </p:nvSpPr>
-        <p:spPr>
-          <a:xfrm>
-            <a:off x="3912108" y="3019531"/>
-            <a:ext cx="1851660" cy="237744"/>
+          <p:cNvPr id="49" name="TextBox 48"/>
+          <p:cNvSpPr txBox="1"/>
+          <p:nvPr/>
+        </p:nvSpPr>
+        <p:spPr>
+          <a:xfrm>
+            <a:off x="3422141" y="3586642"/>
+            <a:ext cx="256032" cy="219456"/>
           </a:xfrm>
           <a:prstGeom prst="rect">
             <a:avLst/>
@@ -10271,29 +9944,29 @@
               </a:lnSpc>
             </a:pPr>
             <a:r>
-              <a:rPr sz="1000" b="1" lang="ja-JP">
-                <a:solidFill>
-                  <a:srgbClr val="FFFFFC"/>
-                </a:solidFill>
-                <a:latin typeface="Yu Gothic"/>
-                <a:ea typeface="Yu Gothic"/>
-                <a:cs typeface="Yu Gothic"/>
-              </a:rPr>
-              <a:t>生成・検証機能を実装</a:t>
-            </a:r>
-          </a:p>
-        </p:txBody>
-      </p:sp>
-      <p:sp>
-        <p:nvSpPr>
-          <p:cNvPr id="65" name="TextBox 64"/>
-          <p:cNvSpPr txBox="1"/>
-          <p:nvPr/>
-        </p:nvSpPr>
-        <p:spPr>
-          <a:xfrm>
-            <a:off x="768096" y="3657965"/>
-            <a:ext cx="310896" cy="246888"/>
+              <a:rPr sz="1050" b="1" lang="ja-JP">
+                <a:solidFill>
+                  <a:srgbClr val="0D7870"/>
+                </a:solidFill>
+                <a:latin typeface="Yu Gothic"/>
+                <a:ea typeface="Yu Gothic"/>
+                <a:cs typeface="Yu Gothic"/>
+              </a:rPr>
+              <a:t>03</a:t>
+            </a:r>
+          </a:p>
+        </p:txBody>
+      </p:sp>
+      <p:sp>
+        <p:nvSpPr>
+          <p:cNvPr id="50" name="TextBox 49"/>
+          <p:cNvSpPr txBox="1"/>
+          <p:nvPr/>
+        </p:nvSpPr>
+        <p:spPr>
+          <a:xfrm>
+            <a:off x="3733037" y="3572377"/>
+            <a:ext cx="7724394" cy="219456"/>
           </a:xfrm>
           <a:prstGeom prst="rect">
             <a:avLst/>
@@ -10314,27 +9987,27 @@
             <a:r>
               <a:rPr sz="1250" b="1" lang="ja-JP">
                 <a:solidFill>
-                  <a:srgbClr val="0D7870"/>
-                </a:solidFill>
-                <a:latin typeface="Yu Gothic"/>
-                <a:ea typeface="Yu Gothic"/>
-                <a:cs typeface="Yu Gothic"/>
-              </a:rPr>
-              <a:t>03</a:t>
-            </a:r>
-          </a:p>
-        </p:txBody>
-      </p:sp>
-      <p:sp>
-        <p:nvSpPr>
-          <p:cNvPr id="66" name="TextBox 65"/>
-          <p:cNvSpPr txBox="1"/>
-          <p:nvPr/>
-        </p:nvSpPr>
-        <p:spPr>
-          <a:xfrm>
-            <a:off x="1133856" y="3615171"/>
-            <a:ext cx="1837943" cy="246888"/>
+                  <a:srgbClr val="182C43"/>
+                </a:solidFill>
+                <a:latin typeface="Yu Gothic"/>
+                <a:ea typeface="Yu Gothic"/>
+                <a:cs typeface="Yu Gothic"/>
+              </a:rPr>
+              <a:t>現場検証</a:t>
+            </a:r>
+          </a:p>
+        </p:txBody>
+      </p:sp>
+      <p:sp>
+        <p:nvSpPr>
+          <p:cNvPr id="51" name="TextBox 50"/>
+          <p:cNvSpPr txBox="1"/>
+          <p:nvPr/>
+        </p:nvSpPr>
+        <p:spPr>
+          <a:xfrm>
+            <a:off x="3733037" y="3779215"/>
+            <a:ext cx="2814447" cy="182880"/>
           </a:xfrm>
           <a:prstGeom prst="rect">
             <a:avLst/>
@@ -10353,29 +10026,29 @@
               </a:lnSpc>
             </a:pPr>
             <a:r>
-              <a:rPr sz="1250" b="1" lang="ja-JP">
-                <a:solidFill>
-                  <a:srgbClr val="182C43"/>
-                </a:solidFill>
-                <a:latin typeface="Yu Gothic"/>
-                <a:ea typeface="Yu Gothic"/>
-                <a:cs typeface="Yu Gothic"/>
-              </a:rPr>
-              <a:t>現場検証</a:t>
-            </a:r>
-          </a:p>
-        </p:txBody>
-      </p:sp>
-      <p:sp>
-        <p:nvSpPr>
-          <p:cNvPr id="67" name="TextBox 66"/>
-          <p:cNvSpPr txBox="1"/>
-          <p:nvPr/>
-        </p:nvSpPr>
-        <p:spPr>
-          <a:xfrm>
-            <a:off x="1133856" y="3928993"/>
-            <a:ext cx="1837943" cy="182880"/>
+              <a:rPr sz="950" b="0" lang="ja-JP">
+                <a:solidFill>
+                  <a:srgbClr val="666E70"/>
+                </a:solidFill>
+                <a:latin typeface="Yu Gothic"/>
+                <a:ea typeface="Yu Gothic"/>
+                <a:cs typeface="Yu Gothic"/>
+              </a:rPr>
+              <a:t>複数部門でパイロット</a:t>
+            </a:r>
+          </a:p>
+        </p:txBody>
+      </p:sp>
+      <p:sp>
+        <p:nvSpPr>
+          <p:cNvPr id="52" name="TextBox 51"/>
+          <p:cNvSpPr txBox="1"/>
+          <p:nvPr/>
+        </p:nvSpPr>
+        <p:spPr>
+          <a:xfrm>
+            <a:off x="6638924" y="3772082"/>
+            <a:ext cx="658368" cy="182880"/>
           </a:xfrm>
           <a:prstGeom prst="rect">
             <a:avLst/>
@@ -10388,35 +10061,35 @@
           </a:bodyPr>
           <a:lstStyle/>
           <a:p>
-            <a:pPr algn="l">
-              <a:lnSpc>
-                <a:spcPct val="130000"/>
-              </a:lnSpc>
-            </a:pPr>
-            <a:r>
-              <a:rPr sz="950" b="0" lang="ja-JP">
-                <a:solidFill>
-                  <a:srgbClr val="666E70"/>
-                </a:solidFill>
-                <a:latin typeface="Yu Gothic"/>
-                <a:ea typeface="Yu Gothic"/>
-                <a:cs typeface="Yu Gothic"/>
-              </a:rPr>
-              <a:t>複数部門で試行</a:t>
-            </a:r>
-          </a:p>
-        </p:txBody>
-      </p:sp>
-      <p:sp>
-        <p:nvSpPr>
-          <p:cNvPr id="68" name="Rectangle 67"/>
+            <a:pPr algn="ctr">
+              <a:lnSpc>
+                <a:spcPct val="100000"/>
+              </a:lnSpc>
+            </a:pPr>
+            <a:r>
+              <a:rPr sz="850" b="1" lang="ja-JP">
+                <a:solidFill>
+                  <a:srgbClr val="C7583E"/>
+                </a:solidFill>
+                <a:latin typeface="Yu Gothic"/>
+                <a:ea typeface="Yu Gothic"/>
+                <a:cs typeface="Yu Gothic"/>
+              </a:rPr>
+              <a:t>展開判断</a:t>
+            </a:r>
+          </a:p>
+        </p:txBody>
+      </p:sp>
+      <p:sp>
+        <p:nvSpPr>
+          <p:cNvPr id="53" name="Rectangle 52"/>
           <p:cNvSpPr/>
           <p:nvPr/>
         </p:nvSpPr>
         <p:spPr>
           <a:xfrm>
-            <a:off x="5234940" y="3700759"/>
-            <a:ext cx="2718816" cy="274320"/>
+            <a:off x="3422141" y="4085904"/>
+            <a:ext cx="3532632" cy="32004"/>
           </a:xfrm>
           <a:prstGeom prst="rect">
             <a:avLst/>
@@ -10453,14 +10126,14 @@
       </p:sp>
       <p:sp>
         <p:nvSpPr>
-          <p:cNvPr id="69" name="TextBox 68"/>
-          <p:cNvSpPr txBox="1"/>
-          <p:nvPr/>
-        </p:nvSpPr>
-        <p:spPr>
-          <a:xfrm>
-            <a:off x="5317236" y="3732763"/>
-            <a:ext cx="2554224" cy="237744"/>
+          <p:cNvPr id="54" name="TextBox 53"/>
+          <p:cNvSpPr txBox="1"/>
+          <p:nvPr/>
+        </p:nvSpPr>
+        <p:spPr>
+          <a:xfrm>
+            <a:off x="6140196" y="4299874"/>
+            <a:ext cx="256032" cy="219456"/>
           </a:xfrm>
           <a:prstGeom prst="rect">
             <a:avLst/>
@@ -10479,29 +10152,29 @@
               </a:lnSpc>
             </a:pPr>
             <a:r>
-              <a:rPr sz="1000" b="1" lang="ja-JP">
-                <a:solidFill>
-                  <a:srgbClr val="FFFFFC"/>
-                </a:solidFill>
-                <a:latin typeface="Yu Gothic"/>
-                <a:ea typeface="Yu Gothic"/>
-                <a:cs typeface="Yu Gothic"/>
-              </a:rPr>
-              <a:t>パイロット運用</a:t>
-            </a:r>
-          </a:p>
-        </p:txBody>
-      </p:sp>
-      <p:sp>
-        <p:nvSpPr>
-          <p:cNvPr id="70" name="TextBox 69"/>
-          <p:cNvSpPr txBox="1"/>
-          <p:nvPr/>
-        </p:nvSpPr>
-        <p:spPr>
-          <a:xfrm>
-            <a:off x="768096" y="4371197"/>
-            <a:ext cx="310896" cy="246888"/>
+              <a:rPr sz="1050" b="1" lang="ja-JP">
+                <a:solidFill>
+                  <a:srgbClr val="0D7870"/>
+                </a:solidFill>
+                <a:latin typeface="Yu Gothic"/>
+                <a:ea typeface="Yu Gothic"/>
+                <a:cs typeface="Yu Gothic"/>
+              </a:rPr>
+              <a:t>04</a:t>
+            </a:r>
+          </a:p>
+        </p:txBody>
+      </p:sp>
+      <p:sp>
+        <p:nvSpPr>
+          <p:cNvPr id="55" name="TextBox 54"/>
+          <p:cNvSpPr txBox="1"/>
+          <p:nvPr/>
+        </p:nvSpPr>
+        <p:spPr>
+          <a:xfrm>
+            <a:off x="6451092" y="4285609"/>
+            <a:ext cx="5006340" cy="219456"/>
           </a:xfrm>
           <a:prstGeom prst="rect">
             <a:avLst/>
@@ -10522,27 +10195,27 @@
             <a:r>
               <a:rPr sz="1250" b="1" lang="ja-JP">
                 <a:solidFill>
-                  <a:srgbClr val="0D7870"/>
-                </a:solidFill>
-                <a:latin typeface="Yu Gothic"/>
-                <a:ea typeface="Yu Gothic"/>
-                <a:cs typeface="Yu Gothic"/>
-              </a:rPr>
-              <a:t>04</a:t>
-            </a:r>
-          </a:p>
-        </p:txBody>
-      </p:sp>
-      <p:sp>
-        <p:nvSpPr>
-          <p:cNvPr id="71" name="TextBox 70"/>
-          <p:cNvSpPr txBox="1"/>
-          <p:nvPr/>
-        </p:nvSpPr>
-        <p:spPr>
-          <a:xfrm>
-            <a:off x="1133856" y="4328403"/>
-            <a:ext cx="1837943" cy="246888"/>
+                  <a:srgbClr val="182C43"/>
+                </a:solidFill>
+                <a:latin typeface="Yu Gothic"/>
+                <a:ea typeface="Yu Gothic"/>
+                <a:cs typeface="Yu Gothic"/>
+              </a:rPr>
+              <a:t>改善</a:t>
+            </a:r>
+          </a:p>
+        </p:txBody>
+      </p:sp>
+      <p:sp>
+        <p:nvSpPr>
+          <p:cNvPr id="56" name="TextBox 55"/>
+          <p:cNvSpPr txBox="1"/>
+          <p:nvPr/>
+        </p:nvSpPr>
+        <p:spPr>
+          <a:xfrm>
+            <a:off x="6451092" y="4492447"/>
+            <a:ext cx="5006340" cy="182880"/>
           </a:xfrm>
           <a:prstGeom prst="rect">
             <a:avLst/>
@@ -10561,47 +10234,6 @@
               </a:lnSpc>
             </a:pPr>
             <a:r>
-              <a:rPr sz="1250" b="1" lang="ja-JP">
-                <a:solidFill>
-                  <a:srgbClr val="182C43"/>
-                </a:solidFill>
-                <a:latin typeface="Yu Gothic"/>
-                <a:ea typeface="Yu Gothic"/>
-                <a:cs typeface="Yu Gothic"/>
-              </a:rPr>
-              <a:t>改善</a:t>
-            </a:r>
-          </a:p>
-        </p:txBody>
-      </p:sp>
-      <p:sp>
-        <p:nvSpPr>
-          <p:cNvPr id="72" name="TextBox 71"/>
-          <p:cNvSpPr txBox="1"/>
-          <p:nvPr/>
-        </p:nvSpPr>
-        <p:spPr>
-          <a:xfrm>
-            <a:off x="1133856" y="4642225"/>
-            <a:ext cx="1837943" cy="182880"/>
-          </a:xfrm>
-          <a:prstGeom prst="rect">
-            <a:avLst/>
-          </a:prstGeom>
-          <a:noFill/>
-        </p:spPr>
-        <p:txBody>
-          <a:bodyPr wrap="square" anchor="t" lIns="0" rIns="0" tIns="0" bIns="0">
-            <a:spAutoFit/>
-          </a:bodyPr>
-          <a:lstStyle/>
-          <a:p>
-            <a:pPr algn="l">
-              <a:lnSpc>
-                <a:spcPct val="130000"/>
-              </a:lnSpc>
-            </a:pPr>
-            <a:r>
               <a:rPr sz="950" b="0" lang="ja-JP">
                 <a:solidFill>
                   <a:srgbClr val="666E70"/>
@@ -10617,14 +10249,14 @@
       </p:sp>
       <p:sp>
         <p:nvSpPr>
-          <p:cNvPr id="73" name="Rectangle 72"/>
+          <p:cNvPr id="57" name="Rectangle 56"/>
           <p:cNvSpPr/>
           <p:nvPr/>
         </p:nvSpPr>
         <p:spPr>
           <a:xfrm>
-            <a:off x="7342632" y="4413991"/>
-            <a:ext cx="2016251" cy="274320"/>
+            <a:off x="6140196" y="4799136"/>
+            <a:ext cx="2626614" cy="32004"/>
           </a:xfrm>
           <a:prstGeom prst="rect">
             <a:avLst/>
@@ -10661,14 +10293,14 @@
       </p:sp>
       <p:sp>
         <p:nvSpPr>
-          <p:cNvPr id="74" name="TextBox 73"/>
-          <p:cNvSpPr txBox="1"/>
-          <p:nvPr/>
-        </p:nvSpPr>
-        <p:spPr>
-          <a:xfrm>
-            <a:off x="7424928" y="4445995"/>
-            <a:ext cx="1851659" cy="237744"/>
+          <p:cNvPr id="58" name="TextBox 57"/>
+          <p:cNvSpPr txBox="1"/>
+          <p:nvPr/>
+        </p:nvSpPr>
+        <p:spPr>
+          <a:xfrm>
+            <a:off x="8858250" y="5013106"/>
+            <a:ext cx="256032" cy="219456"/>
           </a:xfrm>
           <a:prstGeom prst="rect">
             <a:avLst/>
@@ -10687,29 +10319,29 @@
               </a:lnSpc>
             </a:pPr>
             <a:r>
-              <a:rPr sz="1000" b="1" lang="ja-JP">
-                <a:solidFill>
-                  <a:srgbClr val="FFFFFC"/>
-                </a:solidFill>
-                <a:latin typeface="Yu Gothic"/>
-                <a:ea typeface="Yu Gothic"/>
-                <a:cs typeface="Yu Gothic"/>
-              </a:rPr>
-              <a:t>品質・操作性を改善</a:t>
-            </a:r>
-          </a:p>
-        </p:txBody>
-      </p:sp>
-      <p:sp>
-        <p:nvSpPr>
-          <p:cNvPr id="75" name="TextBox 74"/>
-          <p:cNvSpPr txBox="1"/>
-          <p:nvPr/>
-        </p:nvSpPr>
-        <p:spPr>
-          <a:xfrm>
-            <a:off x="768096" y="5084429"/>
-            <a:ext cx="310896" cy="246888"/>
+              <a:rPr sz="1050" b="1" lang="ja-JP">
+                <a:solidFill>
+                  <a:srgbClr val="0D7870"/>
+                </a:solidFill>
+                <a:latin typeface="Yu Gothic"/>
+                <a:ea typeface="Yu Gothic"/>
+                <a:cs typeface="Yu Gothic"/>
+              </a:rPr>
+              <a:t>05</a:t>
+            </a:r>
+          </a:p>
+        </p:txBody>
+      </p:sp>
+      <p:sp>
+        <p:nvSpPr>
+          <p:cNvPr id="59" name="TextBox 58"/>
+          <p:cNvSpPr txBox="1"/>
+          <p:nvPr/>
+        </p:nvSpPr>
+        <p:spPr>
+          <a:xfrm>
+            <a:off x="9169146" y="4998841"/>
+            <a:ext cx="2288285" cy="219456"/>
           </a:xfrm>
           <a:prstGeom prst="rect">
             <a:avLst/>
@@ -10730,27 +10362,27 @@
             <a:r>
               <a:rPr sz="1250" b="1" lang="ja-JP">
                 <a:solidFill>
-                  <a:srgbClr val="0D7870"/>
-                </a:solidFill>
-                <a:latin typeface="Yu Gothic"/>
-                <a:ea typeface="Yu Gothic"/>
-                <a:cs typeface="Yu Gothic"/>
-              </a:rPr>
-              <a:t>05</a:t>
-            </a:r>
-          </a:p>
-        </p:txBody>
-      </p:sp>
-      <p:sp>
-        <p:nvSpPr>
-          <p:cNvPr id="76" name="TextBox 75"/>
-          <p:cNvSpPr txBox="1"/>
-          <p:nvPr/>
-        </p:nvSpPr>
-        <p:spPr>
-          <a:xfrm>
-            <a:off x="1133856" y="5041635"/>
-            <a:ext cx="1837943" cy="246888"/>
+                  <a:srgbClr val="182C43"/>
+                </a:solidFill>
+                <a:latin typeface="Yu Gothic"/>
+                <a:ea typeface="Yu Gothic"/>
+                <a:cs typeface="Yu Gothic"/>
+              </a:rPr>
+              <a:t>標準化</a:t>
+            </a:r>
+          </a:p>
+        </p:txBody>
+      </p:sp>
+      <p:sp>
+        <p:nvSpPr>
+          <p:cNvPr id="60" name="TextBox 59"/>
+          <p:cNvSpPr txBox="1"/>
+          <p:nvPr/>
+        </p:nvSpPr>
+        <p:spPr>
+          <a:xfrm>
+            <a:off x="9169146" y="5205679"/>
+            <a:ext cx="1067180" cy="182880"/>
           </a:xfrm>
           <a:prstGeom prst="rect">
             <a:avLst/>
@@ -10769,9 +10401,50 @@
               </a:lnSpc>
             </a:pPr>
             <a:r>
-              <a:rPr sz="1250" b="1" lang="ja-JP">
-                <a:solidFill>
-                  <a:srgbClr val="182C43"/>
+              <a:rPr sz="950" b="0" lang="ja-JP">
+                <a:solidFill>
+                  <a:srgbClr val="666E70"/>
+                </a:solidFill>
+                <a:latin typeface="Yu Gothic"/>
+                <a:ea typeface="Yu Gothic"/>
+                <a:cs typeface="Yu Gothic"/>
+              </a:rPr>
+              <a:t>全社手順へ組込</a:t>
+            </a:r>
+          </a:p>
+        </p:txBody>
+      </p:sp>
+      <p:sp>
+        <p:nvSpPr>
+          <p:cNvPr id="61" name="TextBox 60"/>
+          <p:cNvSpPr txBox="1"/>
+          <p:nvPr/>
+        </p:nvSpPr>
+        <p:spPr>
+          <a:xfrm>
+            <a:off x="10327767" y="5198546"/>
+            <a:ext cx="658368" cy="182880"/>
+          </a:xfrm>
+          <a:prstGeom prst="rect">
+            <a:avLst/>
+          </a:prstGeom>
+          <a:noFill/>
+        </p:spPr>
+        <p:txBody>
+          <a:bodyPr wrap="square" anchor="t" lIns="0" rIns="0" tIns="0" bIns="0">
+            <a:spAutoFit/>
+          </a:bodyPr>
+          <a:lstStyle/>
+          <a:p>
+            <a:pPr algn="ctr">
+              <a:lnSpc>
+                <a:spcPct val="100000"/>
+              </a:lnSpc>
+            </a:pPr>
+            <a:r>
+              <a:rPr sz="850" b="1" lang="ja-JP">
+                <a:solidFill>
+                  <a:srgbClr val="C7583E"/>
                 </a:solidFill>
                 <a:latin typeface="Yu Gothic"/>
                 <a:ea typeface="Yu Gothic"/>
@@ -10784,55 +10457,14 @@
       </p:sp>
       <p:sp>
         <p:nvSpPr>
-          <p:cNvPr id="77" name="TextBox 76"/>
-          <p:cNvSpPr txBox="1"/>
-          <p:nvPr/>
-        </p:nvSpPr>
-        <p:spPr>
-          <a:xfrm>
-            <a:off x="1133856" y="5355457"/>
-            <a:ext cx="1837943" cy="182880"/>
-          </a:xfrm>
-          <a:prstGeom prst="rect">
-            <a:avLst/>
-          </a:prstGeom>
-          <a:noFill/>
-        </p:spPr>
-        <p:txBody>
-          <a:bodyPr wrap="square" anchor="t" lIns="0" rIns="0" tIns="0" bIns="0">
-            <a:spAutoFit/>
-          </a:bodyPr>
-          <a:lstStyle/>
-          <a:p>
-            <a:pPr algn="l">
-              <a:lnSpc>
-                <a:spcPct val="130000"/>
-              </a:lnSpc>
-            </a:pPr>
-            <a:r>
-              <a:rPr sz="950" b="0" lang="ja-JP">
-                <a:solidFill>
-                  <a:srgbClr val="666E70"/>
-                </a:solidFill>
-                <a:latin typeface="Yu Gothic"/>
-                <a:ea typeface="Yu Gothic"/>
-                <a:cs typeface="Yu Gothic"/>
-              </a:rPr>
-              <a:t>全社手順へ組込</a:t>
-            </a:r>
-          </a:p>
-        </p:txBody>
-      </p:sp>
-      <p:sp>
-        <p:nvSpPr>
-          <p:cNvPr id="78" name="Rectangle 77"/>
+          <p:cNvPr id="62" name="Rectangle 61"/>
           <p:cNvSpPr/>
           <p:nvPr/>
         </p:nvSpPr>
         <p:spPr>
           <a:xfrm>
-            <a:off x="9450324" y="5127223"/>
-            <a:ext cx="2016251" cy="274320"/>
+            <a:off x="8858250" y="5512368"/>
+            <a:ext cx="2626613" cy="32004"/>
           </a:xfrm>
           <a:prstGeom prst="rect">
             <a:avLst/>
@@ -10869,55 +10501,14 @@
       </p:sp>
       <p:sp>
         <p:nvSpPr>
-          <p:cNvPr id="79" name="TextBox 78"/>
-          <p:cNvSpPr txBox="1"/>
-          <p:nvPr/>
-        </p:nvSpPr>
-        <p:spPr>
-          <a:xfrm>
-            <a:off x="9532620" y="5159227"/>
-            <a:ext cx="1851659" cy="237744"/>
-          </a:xfrm>
-          <a:prstGeom prst="rect">
-            <a:avLst/>
-          </a:prstGeom>
-          <a:noFill/>
-        </p:spPr>
-        <p:txBody>
-          <a:bodyPr wrap="square" anchor="t" lIns="0" rIns="0" tIns="0" bIns="0">
-            <a:spAutoFit/>
-          </a:bodyPr>
-          <a:lstStyle/>
-          <a:p>
-            <a:pPr algn="l">
-              <a:lnSpc>
-                <a:spcPct val="130000"/>
-              </a:lnSpc>
-            </a:pPr>
-            <a:r>
-              <a:rPr sz="1000" b="1" lang="ja-JP">
-                <a:solidFill>
-                  <a:srgbClr val="FFFFFC"/>
-                </a:solidFill>
-                <a:latin typeface="Yu Gothic"/>
-                <a:ea typeface="Yu Gothic"/>
-                <a:cs typeface="Yu Gothic"/>
-              </a:rPr>
-              <a:t>標準運用へ移行</a:t>
-            </a:r>
-          </a:p>
-        </p:txBody>
-      </p:sp>
-      <p:sp>
-        <p:nvSpPr>
-          <p:cNvPr id="80" name="Diamond 79"/>
+          <p:cNvPr id="63" name="Diamond 62"/>
           <p:cNvSpPr/>
           <p:nvPr/>
         </p:nvSpPr>
         <p:spPr>
           <a:xfrm>
-            <a:off x="4066794" y="2116835"/>
-            <a:ext cx="137160" cy="137160"/>
+            <a:off x="1962530" y="2620578"/>
+            <a:ext cx="109728" cy="109728"/>
           </a:xfrm>
           <a:prstGeom prst="diamond">
             <a:avLst/>
@@ -10954,57 +10545,14 @@
       </p:sp>
       <p:sp>
         <p:nvSpPr>
-          <p:cNvPr id="81" name="TextBox 80"/>
-          <p:cNvSpPr txBox="1"/>
-          <p:nvPr/>
-        </p:nvSpPr>
-        <p:spPr>
-          <a:xfrm>
-            <a:off x="3573322" y="2588117"/>
-            <a:ext cx="1124102" cy="164592"/>
-          </a:xfrm>
-          <a:prstGeom prst="rect">
-            <a:avLst/>
-          </a:prstGeom>
-          <a:solidFill>
-            <a:srgbClr val="FFFFFC"/>
-          </a:solidFill>
-        </p:spPr>
-        <p:txBody>
-          <a:bodyPr wrap="square" anchor="t" lIns="0" rIns="0" tIns="0" bIns="0">
-            <a:spAutoFit/>
-          </a:bodyPr>
-          <a:lstStyle/>
-          <a:p>
-            <a:pPr algn="ctr">
-              <a:lnSpc>
-                <a:spcPct val="100000"/>
-              </a:lnSpc>
-            </a:pPr>
-            <a:r>
-              <a:rPr sz="850" b="0" lang="ja-JP">
-                <a:solidFill>
-                  <a:srgbClr val="202729"/>
-                </a:solidFill>
-                <a:latin typeface="Yu Gothic"/>
-                <a:ea typeface="Yu Gothic"/>
-                <a:cs typeface="Yu Gothic"/>
-              </a:rPr>
-              <a:t>型レビュー</a:t>
-            </a:r>
-          </a:p>
-        </p:txBody>
-      </p:sp>
-      <p:sp>
-        <p:nvSpPr>
-          <p:cNvPr id="82" name="Diamond 81"/>
+          <p:cNvPr id="64" name="Diamond 63"/>
           <p:cNvSpPr/>
           <p:nvPr/>
         </p:nvSpPr>
         <p:spPr>
           <a:xfrm>
-            <a:off x="7579614" y="3543299"/>
-            <a:ext cx="137160" cy="137160"/>
+            <a:off x="6492621" y="4047042"/>
+            <a:ext cx="109728" cy="109728"/>
           </a:xfrm>
           <a:prstGeom prst="diamond">
             <a:avLst/>
@@ -11041,57 +10589,14 @@
       </p:sp>
       <p:sp>
         <p:nvSpPr>
-          <p:cNvPr id="83" name="TextBox 82"/>
-          <p:cNvSpPr txBox="1"/>
-          <p:nvPr/>
-        </p:nvSpPr>
-        <p:spPr>
-          <a:xfrm>
-            <a:off x="7086142" y="4014581"/>
-            <a:ext cx="1124102" cy="164592"/>
-          </a:xfrm>
-          <a:prstGeom prst="rect">
-            <a:avLst/>
-          </a:prstGeom>
-          <a:solidFill>
-            <a:srgbClr val="FFFFFC"/>
-          </a:solidFill>
-        </p:spPr>
-        <p:txBody>
-          <a:bodyPr wrap="square" anchor="t" lIns="0" rIns="0" tIns="0" bIns="0">
-            <a:spAutoFit/>
-          </a:bodyPr>
-          <a:lstStyle/>
-          <a:p>
-            <a:pPr algn="ctr">
-              <a:lnSpc>
-                <a:spcPct val="100000"/>
-              </a:lnSpc>
-            </a:pPr>
-            <a:r>
-              <a:rPr sz="850" b="0" lang="ja-JP">
-                <a:solidFill>
-                  <a:srgbClr val="202729"/>
-                </a:solidFill>
-                <a:latin typeface="Yu Gothic"/>
-                <a:ea typeface="Yu Gothic"/>
-                <a:cs typeface="Yu Gothic"/>
-              </a:rPr>
-              <a:t>展開判断</a:t>
-            </a:r>
-          </a:p>
-        </p:txBody>
-      </p:sp>
-      <p:sp>
-        <p:nvSpPr>
-          <p:cNvPr id="84" name="Diamond 83"/>
+          <p:cNvPr id="65" name="Diamond 64"/>
           <p:cNvSpPr/>
           <p:nvPr/>
         </p:nvSpPr>
         <p:spPr>
           <a:xfrm>
-            <a:off x="11092434" y="4969764"/>
-            <a:ext cx="137160" cy="137160"/>
+            <a:off x="11022711" y="5473506"/>
+            <a:ext cx="109728" cy="109728"/>
           </a:xfrm>
           <a:prstGeom prst="diamond">
             <a:avLst/>
@@ -11128,50 +10633,7 @@
       </p:sp>
       <p:sp>
         <p:nvSpPr>
-          <p:cNvPr id="85" name="TextBox 84"/>
-          <p:cNvSpPr txBox="1"/>
-          <p:nvPr/>
-        </p:nvSpPr>
-        <p:spPr>
-          <a:xfrm>
-            <a:off x="10388193" y="5441045"/>
-            <a:ext cx="1124102" cy="164592"/>
-          </a:xfrm>
-          <a:prstGeom prst="rect">
-            <a:avLst/>
-          </a:prstGeom>
-          <a:solidFill>
-            <a:srgbClr val="FFFFFC"/>
-          </a:solidFill>
-        </p:spPr>
-        <p:txBody>
-          <a:bodyPr wrap="square" anchor="t" lIns="0" rIns="0" tIns="0" bIns="0">
-            <a:spAutoFit/>
-          </a:bodyPr>
-          <a:lstStyle/>
-          <a:p>
-            <a:pPr algn="ctr">
-              <a:lnSpc>
-                <a:spcPct val="100000"/>
-              </a:lnSpc>
-            </a:pPr>
-            <a:r>
-              <a:rPr sz="850" b="0" lang="ja-JP">
-                <a:solidFill>
-                  <a:srgbClr val="202729"/>
-                </a:solidFill>
-                <a:latin typeface="Yu Gothic"/>
-                <a:ea typeface="Yu Gothic"/>
-                <a:cs typeface="Yu Gothic"/>
-              </a:rPr>
-              <a:t>標準化</a:t>
-            </a:r>
-          </a:p>
-        </p:txBody>
-      </p:sp>
-      <p:sp>
-        <p:nvSpPr>
-          <p:cNvPr id="86" name="Rectangle 85"/>
+          <p:cNvPr id="66" name="Rectangle 65"/>
           <p:cNvSpPr/>
           <p:nvPr/>
         </p:nvSpPr>
@@ -11184,7 +10646,7 @@
             <a:avLst/>
           </a:prstGeom>
           <a:solidFill>
-            <a:srgbClr val="C9D4D1"/>
+            <a:srgbClr val="D1CFC8"/>
           </a:solidFill>
           <a:ln>
             <a:noFill/>
@@ -11215,7 +10677,7 @@
       </p:sp>
       <p:sp>
         <p:nvSpPr>
-          <p:cNvPr id="87" name="TextBox 86"/>
+          <p:cNvPr id="67" name="TextBox 66"/>
           <p:cNvSpPr txBox="1"/>
           <p:nvPr/>
         </p:nvSpPr>
@@ -11243,7 +10705,7 @@
             <a:r>
               <a:rPr sz="819" b="0" lang="ja-JP">
                 <a:solidFill>
-                  <a:srgbClr val="667478"/>
+                  <a:srgbClr val="666E70"/>
                 </a:solidFill>
                 <a:latin typeface="Yu Gothic"/>
                 <a:ea typeface="Yu Gothic"/>
@@ -11256,7 +10718,7 @@
       </p:sp>
       <p:sp>
         <p:nvSpPr>
-          <p:cNvPr id="88" name="TextBox 87"/>
+          <p:cNvPr id="68" name="TextBox 67"/>
           <p:cNvSpPr txBox="1"/>
           <p:nvPr/>
         </p:nvSpPr>
@@ -11284,7 +10746,7 @@
             <a:r>
               <a:rPr sz="1100" b="1" lang="ja-JP">
                 <a:solidFill>
-                  <a:srgbClr val="16324F"/>
+                  <a:srgbClr val="182C43"/>
                 </a:solidFill>
                 <a:latin typeface="Yu Gothic"/>
                 <a:ea typeface="Yu Gothic"/>
@@ -11297,7 +10759,7 @@
       </p:sp>
       <p:sp>
         <p:nvSpPr>
-          <p:cNvPr id="89" name="TextBox 88"/>
+          <p:cNvPr id="69" name="TextBox 68"/>
           <p:cNvSpPr txBox="1"/>
           <p:nvPr/>
         </p:nvSpPr>
@@ -11325,7 +10787,7 @@
             <a:r>
               <a:rPr sz="819" b="0" lang="ja-JP">
                 <a:solidFill>
-                  <a:srgbClr val="667478"/>
+                  <a:srgbClr val="666E70"/>
                 </a:solidFill>
                 <a:latin typeface="Yu Gothic"/>
                 <a:ea typeface="Yu Gothic"/>
@@ -14893,7 +14355,7 @@
             <a:avLst/>
           </a:prstGeom>
           <a:solidFill>
-            <a:srgbClr val="C9D4D1"/>
+            <a:srgbClr val="D1CFC8"/>
           </a:solidFill>
           <a:ln>
             <a:noFill/>
@@ -14952,7 +14414,7 @@
             <a:r>
               <a:rPr sz="819" b="0" lang="ja-JP">
                 <a:solidFill>
-                  <a:srgbClr val="667478"/>
+                  <a:srgbClr val="666E70"/>
                 </a:solidFill>
                 <a:latin typeface="Yu Gothic"/>
                 <a:ea typeface="Yu Gothic"/>
@@ -14993,7 +14455,7 @@
             <a:r>
               <a:rPr sz="1100" b="1" lang="ja-JP">
                 <a:solidFill>
-                  <a:srgbClr val="16324F"/>
+                  <a:srgbClr val="182C43"/>
                 </a:solidFill>
                 <a:latin typeface="Yu Gothic"/>
                 <a:ea typeface="Yu Gothic"/>
@@ -15034,7 +14496,7 @@
             <a:r>
               <a:rPr sz="819" b="0" lang="ja-JP">
                 <a:solidFill>
-                  <a:srgbClr val="667478"/>
+                  <a:srgbClr val="666E70"/>
                 </a:solidFill>
                 <a:latin typeface="Yu Gothic"/>
                 <a:ea typeface="Yu Gothic"/>
@@ -16177,7 +15639,7 @@
             <a:avLst/>
           </a:prstGeom>
           <a:solidFill>
-            <a:srgbClr val="C9D4D1"/>
+            <a:srgbClr val="D1CFC8"/>
           </a:solidFill>
           <a:ln>
             <a:noFill/>
@@ -16236,7 +15698,7 @@
             <a:r>
               <a:rPr sz="819" b="0" lang="ja-JP">
                 <a:solidFill>
-                  <a:srgbClr val="667478"/>
+                  <a:srgbClr val="666E70"/>
                 </a:solidFill>
                 <a:latin typeface="Yu Gothic"/>
                 <a:ea typeface="Yu Gothic"/>
@@ -16277,7 +15739,7 @@
             <a:r>
               <a:rPr sz="1100" b="1" lang="ja-JP">
                 <a:solidFill>
-                  <a:srgbClr val="16324F"/>
+                  <a:srgbClr val="182C43"/>
                 </a:solidFill>
                 <a:latin typeface="Yu Gothic"/>
                 <a:ea typeface="Yu Gothic"/>
@@ -16318,7 +15780,7 @@
             <a:r>
               <a:rPr sz="819" b="0" lang="ja-JP">
                 <a:solidFill>
-                  <a:srgbClr val="667478"/>
+                  <a:srgbClr val="666E70"/>
                 </a:solidFill>
                 <a:latin typeface="Yu Gothic"/>
                 <a:ea typeface="Yu Gothic"/>
@@ -16910,7 +16372,7 @@
         </p:nvSpPr>
         <p:spPr>
           <a:xfrm>
-            <a:off x="5821870" y="2652648"/>
+            <a:off x="5821870" y="2619756"/>
             <a:ext cx="554355" cy="190246"/>
           </a:xfrm>
           <a:prstGeom prst="rect">
@@ -16953,7 +16415,7 @@
         </p:nvSpPr>
         <p:spPr>
           <a:xfrm>
-            <a:off x="5806440" y="2913507"/>
+            <a:off x="5806440" y="2875788"/>
             <a:ext cx="585216" cy="162306"/>
           </a:xfrm>
           <a:prstGeom prst="rect">
@@ -17020,7 +16482,7 @@
         </p:nvSpPr>
         <p:spPr>
           <a:xfrm>
-            <a:off x="9555999" y="3739404"/>
+            <a:off x="9555999" y="3706511"/>
             <a:ext cx="1017270" cy="190246"/>
           </a:xfrm>
           <a:prstGeom prst="rect">
@@ -17063,7 +16525,7 @@
         </p:nvSpPr>
         <p:spPr>
           <a:xfrm>
-            <a:off x="9772026" y="4000262"/>
+            <a:off x="9772026" y="3962543"/>
             <a:ext cx="585216" cy="162306"/>
           </a:xfrm>
           <a:prstGeom prst="rect">
@@ -17130,7 +16592,7 @@
         </p:nvSpPr>
         <p:spPr>
           <a:xfrm>
-            <a:off x="8195585" y="4327381"/>
+            <a:off x="8195585" y="4360274"/>
             <a:ext cx="708660" cy="190246"/>
           </a:xfrm>
           <a:prstGeom prst="rect">
@@ -17173,7 +16635,7 @@
         </p:nvSpPr>
         <p:spPr>
           <a:xfrm>
-            <a:off x="8319029" y="4588239"/>
+            <a:off x="8319029" y="4625958"/>
             <a:ext cx="461772" cy="162306"/>
           </a:xfrm>
           <a:prstGeom prst="rect">
@@ -17240,7 +16702,7 @@
         </p:nvSpPr>
         <p:spPr>
           <a:xfrm>
-            <a:off x="3448155" y="4327381"/>
+            <a:off x="3448155" y="4360274"/>
             <a:ext cx="400050" cy="190246"/>
           </a:xfrm>
           <a:prstGeom prst="rect">
@@ -17283,7 +16745,7 @@
         </p:nvSpPr>
         <p:spPr>
           <a:xfrm>
-            <a:off x="3355572" y="4588239"/>
+            <a:off x="3355572" y="4625958"/>
             <a:ext cx="585216" cy="162306"/>
           </a:xfrm>
           <a:prstGeom prst="rect">
@@ -17350,7 +16812,7 @@
         </p:nvSpPr>
         <p:spPr>
           <a:xfrm>
-            <a:off x="1933436" y="3739404"/>
+            <a:off x="1933436" y="3706511"/>
             <a:ext cx="400050" cy="190246"/>
           </a:xfrm>
           <a:prstGeom prst="rect">
@@ -17393,7 +16855,7 @@
         </p:nvSpPr>
         <p:spPr>
           <a:xfrm>
-            <a:off x="1840853" y="4000262"/>
+            <a:off x="1840853" y="3962543"/>
             <a:ext cx="585216" cy="162306"/>
           </a:xfrm>
           <a:prstGeom prst="rect">
@@ -17546,7 +17008,7 @@
             <a:avLst/>
           </a:prstGeom>
           <a:solidFill>
-            <a:srgbClr val="C9D4D1"/>
+            <a:srgbClr val="D1CFC8"/>
           </a:solidFill>
           <a:ln>
             <a:noFill/>
@@ -17605,7 +17067,7 @@
             <a:r>
               <a:rPr sz="819" b="0" lang="ja-JP">
                 <a:solidFill>
-                  <a:srgbClr val="667478"/>
+                  <a:srgbClr val="666E70"/>
                 </a:solidFill>
                 <a:latin typeface="Yu Gothic"/>
                 <a:ea typeface="Yu Gothic"/>
@@ -17646,7 +17108,7 @@
             <a:r>
               <a:rPr sz="1100" b="1" lang="ja-JP">
                 <a:solidFill>
-                  <a:srgbClr val="16324F"/>
+                  <a:srgbClr val="182C43"/>
                 </a:solidFill>
                 <a:latin typeface="Yu Gothic"/>
                 <a:ea typeface="Yu Gothic"/>
@@ -17687,7 +17149,7 @@
             <a:r>
               <a:rPr sz="819" b="0" lang="ja-JP">
                 <a:solidFill>
-                  <a:srgbClr val="667478"/>
+                  <a:srgbClr val="666E70"/>
                 </a:solidFill>
                 <a:latin typeface="Yu Gothic"/>
                 <a:ea typeface="Yu Gothic"/>
@@ -19118,7 +18580,7 @@
             <a:avLst/>
           </a:prstGeom>
           <a:solidFill>
-            <a:srgbClr val="C9D4D1"/>
+            <a:srgbClr val="D1CFC8"/>
           </a:solidFill>
           <a:ln>
             <a:noFill/>
@@ -19177,7 +18639,7 @@
             <a:r>
               <a:rPr sz="819" b="0" lang="ja-JP">
                 <a:solidFill>
-                  <a:srgbClr val="667478"/>
+                  <a:srgbClr val="666E70"/>
                 </a:solidFill>
                 <a:latin typeface="Yu Gothic"/>
                 <a:ea typeface="Yu Gothic"/>
@@ -19218,7 +18680,7 @@
             <a:r>
               <a:rPr sz="1100" b="1" lang="ja-JP">
                 <a:solidFill>
-                  <a:srgbClr val="16324F"/>
+                  <a:srgbClr val="182C43"/>
                 </a:solidFill>
                 <a:latin typeface="Yu Gothic"/>
                 <a:ea typeface="Yu Gothic"/>
@@ -19259,7 +18721,7 @@
             <a:r>
               <a:rPr sz="819" b="0" lang="ja-JP">
                 <a:solidFill>
-                  <a:srgbClr val="667478"/>
+                  <a:srgbClr val="666E70"/>
                 </a:solidFill>
                 <a:latin typeface="Yu Gothic"/>
                 <a:ea typeface="Yu Gothic"/>
@@ -19983,7 +19445,7 @@
         </p:nvSpPr>
         <p:spPr>
           <a:xfrm>
-            <a:off x="1091565" y="3977614"/>
+            <a:off x="1091565" y="3944721"/>
             <a:ext cx="1017270" cy="190246"/>
           </a:xfrm>
           <a:prstGeom prst="rect">
@@ -20026,7 +19488,7 @@
         </p:nvSpPr>
         <p:spPr>
           <a:xfrm>
-            <a:off x="1307592" y="4238472"/>
+            <a:off x="1307592" y="4200753"/>
             <a:ext cx="585216" cy="162306"/>
           </a:xfrm>
           <a:prstGeom prst="rect">
@@ -20093,7 +19555,7 @@
         </p:nvSpPr>
         <p:spPr>
           <a:xfrm>
-            <a:off x="3647998" y="3977614"/>
+            <a:off x="3647998" y="3944721"/>
             <a:ext cx="400050" cy="190246"/>
           </a:xfrm>
           <a:prstGeom prst="rect">
@@ -20136,7 +19598,7 @@
         </p:nvSpPr>
         <p:spPr>
           <a:xfrm>
-            <a:off x="3601707" y="4238472"/>
+            <a:off x="3601707" y="4200753"/>
             <a:ext cx="492633" cy="162306"/>
           </a:xfrm>
           <a:prstGeom prst="rect">
@@ -20203,7 +19665,7 @@
         </p:nvSpPr>
         <p:spPr>
           <a:xfrm>
-            <a:off x="5571782" y="3977614"/>
+            <a:off x="5571782" y="3944721"/>
             <a:ext cx="1048131" cy="190246"/>
           </a:xfrm>
           <a:prstGeom prst="rect">
@@ -20246,7 +19708,7 @@
         </p:nvSpPr>
         <p:spPr>
           <a:xfrm>
-            <a:off x="5412333" y="4238472"/>
+            <a:off x="5412333" y="4200753"/>
             <a:ext cx="1367028" cy="162306"/>
           </a:xfrm>
           <a:prstGeom prst="rect">
@@ -20313,7 +19775,7 @@
         </p:nvSpPr>
         <p:spPr>
           <a:xfrm>
-            <a:off x="7665300" y="2734030"/>
+            <a:off x="7665300" y="2701137"/>
             <a:ext cx="1356741" cy="190246"/>
           </a:xfrm>
           <a:prstGeom prst="rect">
@@ -20356,7 +19818,7 @@
         </p:nvSpPr>
         <p:spPr>
           <a:xfrm>
-            <a:off x="7624152" y="2994888"/>
+            <a:off x="7624152" y="2957169"/>
             <a:ext cx="1439037" cy="162306"/>
           </a:xfrm>
           <a:prstGeom prst="rect">
@@ -20423,7 +19885,7 @@
         </p:nvSpPr>
         <p:spPr>
           <a:xfrm>
-            <a:off x="7881327" y="3977614"/>
+            <a:off x="7881327" y="3944721"/>
             <a:ext cx="924687" cy="190246"/>
           </a:xfrm>
           <a:prstGeom prst="rect">
@@ -20466,7 +19928,7 @@
         </p:nvSpPr>
         <p:spPr>
           <a:xfrm>
-            <a:off x="7711592" y="4238472"/>
+            <a:off x="7711592" y="4200753"/>
             <a:ext cx="1264158" cy="162306"/>
           </a:xfrm>
           <a:prstGeom prst="rect">
@@ -20533,7 +19995,7 @@
         </p:nvSpPr>
         <p:spPr>
           <a:xfrm>
-            <a:off x="7845323" y="5221198"/>
+            <a:off x="7845323" y="5188305"/>
             <a:ext cx="996696" cy="190246"/>
           </a:xfrm>
           <a:prstGeom prst="rect">
@@ -20576,7 +20038,7 @@
         </p:nvSpPr>
         <p:spPr>
           <a:xfrm>
-            <a:off x="7865897" y="5482056"/>
+            <a:off x="7865897" y="5444337"/>
             <a:ext cx="955547" cy="162306"/>
           </a:xfrm>
           <a:prstGeom prst="rect">
@@ -20643,7 +20105,7 @@
         </p:nvSpPr>
         <p:spPr>
           <a:xfrm>
-            <a:off x="10237165" y="3977614"/>
+            <a:off x="10237165" y="3944721"/>
             <a:ext cx="708660" cy="190246"/>
           </a:xfrm>
           <a:prstGeom prst="rect">
@@ -20686,7 +20148,7 @@
         </p:nvSpPr>
         <p:spPr>
           <a:xfrm>
-            <a:off x="10175443" y="4238472"/>
+            <a:off x="10175443" y="4200753"/>
             <a:ext cx="832104" cy="162306"/>
           </a:xfrm>
           <a:prstGeom prst="rect">
@@ -20949,7 +20411,7 @@
             <a:avLst/>
           </a:prstGeom>
           <a:solidFill>
-            <a:srgbClr val="C9D4D1"/>
+            <a:srgbClr val="D1CFC8"/>
           </a:solidFill>
           <a:ln>
             <a:noFill/>
@@ -21008,7 +20470,7 @@
             <a:r>
               <a:rPr sz="819" b="0" lang="ja-JP">
                 <a:solidFill>
-                  <a:srgbClr val="667478"/>
+                  <a:srgbClr val="666E70"/>
                 </a:solidFill>
                 <a:latin typeface="Yu Gothic"/>
                 <a:ea typeface="Yu Gothic"/>
@@ -21049,7 +20511,7 @@
             <a:r>
               <a:rPr sz="1100" b="1" lang="ja-JP">
                 <a:solidFill>
-                  <a:srgbClr val="16324F"/>
+                  <a:srgbClr val="182C43"/>
                 </a:solidFill>
                 <a:latin typeface="Yu Gothic"/>
                 <a:ea typeface="Yu Gothic"/>
@@ -21090,7 +20552,7 @@
             <a:r>
               <a:rPr sz="819" b="0" lang="ja-JP">
                 <a:solidFill>
-                  <a:srgbClr val="667478"/>
+                  <a:srgbClr val="666E70"/>
                 </a:solidFill>
                 <a:latin typeface="Yu Gothic"/>
                 <a:ea typeface="Yu Gothic"/>
@@ -22389,7 +21851,7 @@
         </p:nvSpPr>
         <p:spPr>
           <a:xfrm>
-            <a:off x="1091565" y="3341283"/>
+            <a:off x="1091565" y="3308390"/>
             <a:ext cx="1017270" cy="190246"/>
           </a:xfrm>
           <a:prstGeom prst="rect">
@@ -22456,7 +21918,7 @@
         </p:nvSpPr>
         <p:spPr>
           <a:xfrm>
-            <a:off x="3018411" y="2335443"/>
+            <a:off x="3018411" y="2302550"/>
             <a:ext cx="760095" cy="190246"/>
           </a:xfrm>
           <a:prstGeom prst="rect">
@@ -22523,7 +21985,7 @@
         </p:nvSpPr>
         <p:spPr>
           <a:xfrm>
-            <a:off x="2930972" y="3341283"/>
+            <a:off x="2930972" y="3308390"/>
             <a:ext cx="934974" cy="190246"/>
           </a:xfrm>
           <a:prstGeom prst="rect">
@@ -22590,7 +22052,7 @@
         </p:nvSpPr>
         <p:spPr>
           <a:xfrm>
-            <a:off x="6794952" y="3341283"/>
+            <a:off x="6794952" y="3308390"/>
             <a:ext cx="400050" cy="190246"/>
           </a:xfrm>
           <a:prstGeom prst="rect">
@@ -22657,7 +22119,7 @@
         </p:nvSpPr>
         <p:spPr>
           <a:xfrm>
-            <a:off x="4852675" y="4584867"/>
+            <a:off x="4852675" y="4551974"/>
             <a:ext cx="688086" cy="190246"/>
           </a:xfrm>
           <a:prstGeom prst="rect">
@@ -22724,7 +22186,7 @@
         </p:nvSpPr>
         <p:spPr>
           <a:xfrm>
-            <a:off x="8449193" y="4584867"/>
+            <a:off x="8449193" y="4551974"/>
             <a:ext cx="688086" cy="190246"/>
           </a:xfrm>
           <a:prstGeom prst="rect">
@@ -22791,7 +22253,7 @@
         </p:nvSpPr>
         <p:spPr>
           <a:xfrm>
-            <a:off x="4616074" y="5590707"/>
+            <a:off x="4616074" y="5557814"/>
             <a:ext cx="1161288" cy="190246"/>
           </a:xfrm>
           <a:prstGeom prst="rect">
@@ -22858,7 +22320,7 @@
         </p:nvSpPr>
         <p:spPr>
           <a:xfrm>
-            <a:off x="8202305" y="5590707"/>
+            <a:off x="8202305" y="5557814"/>
             <a:ext cx="1181862" cy="190246"/>
           </a:xfrm>
           <a:prstGeom prst="rect">
@@ -22925,7 +22387,7 @@
         </p:nvSpPr>
         <p:spPr>
           <a:xfrm>
-            <a:off x="10129151" y="3341283"/>
+            <a:off x="10129151" y="3308390"/>
             <a:ext cx="924687" cy="190246"/>
           </a:xfrm>
           <a:prstGeom prst="rect">
@@ -22968,7 +22430,7 @@
         </p:nvSpPr>
         <p:spPr>
           <a:xfrm>
-            <a:off x="10082860" y="3602141"/>
+            <a:off x="10082860" y="3564422"/>
             <a:ext cx="1017270" cy="162306"/>
           </a:xfrm>
           <a:prstGeom prst="rect">
@@ -23035,7 +22497,7 @@
         </p:nvSpPr>
         <p:spPr>
           <a:xfrm>
-            <a:off x="10093147" y="5590707"/>
+            <a:off x="10093147" y="5557814"/>
             <a:ext cx="996696" cy="190246"/>
           </a:xfrm>
           <a:prstGeom prst="rect">
@@ -23078,7 +22540,7 @@
         </p:nvSpPr>
         <p:spPr>
           <a:xfrm>
-            <a:off x="10237165" y="5851565"/>
+            <a:off x="10237165" y="5813846"/>
             <a:ext cx="708660" cy="162306"/>
           </a:xfrm>
           <a:prstGeom prst="rect">
@@ -23300,7 +22762,7 @@
             <a:avLst/>
           </a:prstGeom>
           <a:solidFill>
-            <a:srgbClr val="C9D4D1"/>
+            <a:srgbClr val="D1CFC8"/>
           </a:solidFill>
           <a:ln>
             <a:noFill/>
@@ -23359,7 +22821,7 @@
             <a:r>
               <a:rPr sz="819" b="0" lang="ja-JP">
                 <a:solidFill>
-                  <a:srgbClr val="667478"/>
+                  <a:srgbClr val="666E70"/>
                 </a:solidFill>
                 <a:latin typeface="Yu Gothic"/>
                 <a:ea typeface="Yu Gothic"/>
@@ -23400,7 +22862,7 @@
             <a:r>
               <a:rPr sz="1100" b="1" lang="ja-JP">
                 <a:solidFill>
-                  <a:srgbClr val="16324F"/>
+                  <a:srgbClr val="182C43"/>
                 </a:solidFill>
                 <a:latin typeface="Yu Gothic"/>
                 <a:ea typeface="Yu Gothic"/>
@@ -23441,7 +22903,7 @@
             <a:r>
               <a:rPr sz="819" b="0" lang="ja-JP">
                 <a:solidFill>
-                  <a:srgbClr val="667478"/>
+                  <a:srgbClr val="666E70"/>
                 </a:solidFill>
                 <a:latin typeface="Yu Gothic"/>
                 <a:ea typeface="Yu Gothic"/>
@@ -23945,7 +23407,7 @@
             <a:avLst/>
           </a:prstGeom>
           <a:solidFill>
-            <a:srgbClr val="C9D4D1"/>
+            <a:srgbClr val="D1CFC8"/>
           </a:solidFill>
           <a:ln>
             <a:noFill/>
@@ -24004,7 +23466,7 @@
             <a:r>
               <a:rPr sz="819" b="0" lang="ja-JP">
                 <a:solidFill>
-                  <a:srgbClr val="667478"/>
+                  <a:srgbClr val="666E70"/>
                 </a:solidFill>
                 <a:latin typeface="Yu Gothic"/>
                 <a:ea typeface="Yu Gothic"/>
@@ -24045,7 +23507,7 @@
             <a:r>
               <a:rPr sz="1100" b="1" lang="ja-JP">
                 <a:solidFill>
-                  <a:srgbClr val="16324F"/>
+                  <a:srgbClr val="182C43"/>
                 </a:solidFill>
                 <a:latin typeface="Yu Gothic"/>
                 <a:ea typeface="Yu Gothic"/>
@@ -24086,7 +23548,7 @@
             <a:r>
               <a:rPr sz="819" b="0" lang="ja-JP">
                 <a:solidFill>
-                  <a:srgbClr val="667478"/>
+                  <a:srgbClr val="666E70"/>
                 </a:solidFill>
                 <a:latin typeface="Yu Gothic"/>
                 <a:ea typeface="Yu Gothic"/>
@@ -24767,7 +24229,7 @@
         </p:nvSpPr>
         <p:spPr>
           <a:xfrm>
-            <a:off x="1168717" y="3846855"/>
+            <a:off x="1168717" y="3813962"/>
             <a:ext cx="862965" cy="190246"/>
           </a:xfrm>
           <a:prstGeom prst="rect">
@@ -24810,7 +24272,7 @@
         </p:nvSpPr>
         <p:spPr>
           <a:xfrm>
-            <a:off x="1307592" y="4107713"/>
+            <a:off x="1307592" y="4069994"/>
             <a:ext cx="585216" cy="162306"/>
           </a:xfrm>
           <a:prstGeom prst="rect">
@@ -24877,7 +24339,7 @@
         </p:nvSpPr>
         <p:spPr>
           <a:xfrm>
-            <a:off x="7306932" y="2292375"/>
+            <a:off x="7306932" y="2259482"/>
             <a:ext cx="574929" cy="190246"/>
           </a:xfrm>
           <a:prstGeom prst="rect">
@@ -24944,7 +24406,7 @@
         </p:nvSpPr>
         <p:spPr>
           <a:xfrm>
-            <a:off x="3934358" y="3846855"/>
+            <a:off x="3934358" y="3813962"/>
             <a:ext cx="1325880" cy="190246"/>
           </a:xfrm>
           <a:prstGeom prst="rect">
@@ -25011,7 +24473,7 @@
         </p:nvSpPr>
         <p:spPr>
           <a:xfrm>
-            <a:off x="6998322" y="3846855"/>
+            <a:off x="6998322" y="3813962"/>
             <a:ext cx="1192149" cy="190246"/>
           </a:xfrm>
           <a:prstGeom prst="rect">
@@ -25054,7 +24516,7 @@
         </p:nvSpPr>
         <p:spPr>
           <a:xfrm>
-            <a:off x="7240066" y="4107713"/>
+            <a:off x="7240066" y="4069994"/>
             <a:ext cx="708660" cy="162306"/>
           </a:xfrm>
           <a:prstGeom prst="rect">
@@ -25121,7 +24583,7 @@
         </p:nvSpPr>
         <p:spPr>
           <a:xfrm>
-            <a:off x="10196017" y="3846855"/>
+            <a:off x="10196017" y="3813962"/>
             <a:ext cx="790956" cy="190246"/>
           </a:xfrm>
           <a:prstGeom prst="rect">
@@ -25188,7 +24650,7 @@
         </p:nvSpPr>
         <p:spPr>
           <a:xfrm>
-            <a:off x="7240066" y="5090439"/>
+            <a:off x="7240066" y="5057546"/>
             <a:ext cx="708660" cy="190246"/>
           </a:xfrm>
           <a:prstGeom prst="rect">
@@ -25231,7 +24693,7 @@
         </p:nvSpPr>
         <p:spPr>
           <a:xfrm>
-            <a:off x="7363510" y="5351297"/>
+            <a:off x="7363510" y="5313578"/>
             <a:ext cx="461772" cy="162306"/>
           </a:xfrm>
           <a:prstGeom prst="rect">
@@ -25298,7 +24760,7 @@
         </p:nvSpPr>
         <p:spPr>
           <a:xfrm>
-            <a:off x="10082860" y="5090439"/>
+            <a:off x="10082860" y="5057546"/>
             <a:ext cx="1017270" cy="190246"/>
           </a:xfrm>
           <a:prstGeom prst="rect">
@@ -25341,7 +24803,7 @@
         </p:nvSpPr>
         <p:spPr>
           <a:xfrm>
-            <a:off x="10298887" y="5351297"/>
+            <a:off x="10298887" y="5313578"/>
             <a:ext cx="585216" cy="162306"/>
           </a:xfrm>
           <a:prstGeom prst="rect">
@@ -25647,7 +25109,7 @@
             <a:avLst/>
           </a:prstGeom>
           <a:solidFill>
-            <a:srgbClr val="C9D4D1"/>
+            <a:srgbClr val="D1CFC8"/>
           </a:solidFill>
           <a:ln>
             <a:noFill/>
@@ -25706,7 +25168,7 @@
             <a:r>
               <a:rPr sz="819" b="0" lang="ja-JP">
                 <a:solidFill>
-                  <a:srgbClr val="667478"/>
+                  <a:srgbClr val="666E70"/>
                 </a:solidFill>
                 <a:latin typeface="Yu Gothic"/>
                 <a:ea typeface="Yu Gothic"/>
@@ -25747,7 +25209,7 @@
             <a:r>
               <a:rPr sz="1100" b="1" lang="ja-JP">
                 <a:solidFill>
-                  <a:srgbClr val="16324F"/>
+                  <a:srgbClr val="182C43"/>
                 </a:solidFill>
                 <a:latin typeface="Yu Gothic"/>
                 <a:ea typeface="Yu Gothic"/>
@@ -25788,7 +25250,7 @@
             <a:r>
               <a:rPr sz="819" b="0" lang="ja-JP">
                 <a:solidFill>
-                  <a:srgbClr val="667478"/>
+                  <a:srgbClr val="666E70"/>
                 </a:solidFill>
                 <a:latin typeface="Yu Gothic"/>
                 <a:ea typeface="Yu Gothic"/>
@@ -26512,7 +25974,7 @@
         </p:nvSpPr>
         <p:spPr>
           <a:xfrm>
-            <a:off x="1091565" y="4026992"/>
+            <a:off x="1091565" y="3994099"/>
             <a:ext cx="1017270" cy="190246"/>
           </a:xfrm>
           <a:prstGeom prst="rect">
@@ -26555,7 +26017,7 @@
         </p:nvSpPr>
         <p:spPr>
           <a:xfrm>
-            <a:off x="1122426" y="4287850"/>
+            <a:off x="1122426" y="4250131"/>
             <a:ext cx="955547" cy="162306"/>
           </a:xfrm>
           <a:prstGeom prst="rect">
@@ -26622,7 +26084,7 @@
         </p:nvSpPr>
         <p:spPr>
           <a:xfrm>
-            <a:off x="3519411" y="4026992"/>
+            <a:off x="3519411" y="3994099"/>
             <a:ext cx="657225" cy="190246"/>
           </a:xfrm>
           <a:prstGeom prst="rect">
@@ -26665,7 +26127,7 @@
         </p:nvSpPr>
         <p:spPr>
           <a:xfrm>
-            <a:off x="3493693" y="4287850"/>
+            <a:off x="3493693" y="4250131"/>
             <a:ext cx="708660" cy="162306"/>
           </a:xfrm>
           <a:prstGeom prst="rect">
@@ -26732,7 +26194,7 @@
         </p:nvSpPr>
         <p:spPr>
           <a:xfrm>
-            <a:off x="5571782" y="4026992"/>
+            <a:off x="5571782" y="3994099"/>
             <a:ext cx="1048131" cy="190246"/>
           </a:xfrm>
           <a:prstGeom prst="rect">
@@ -26775,7 +26237,7 @@
         </p:nvSpPr>
         <p:spPr>
           <a:xfrm>
-            <a:off x="5618073" y="4287850"/>
+            <a:off x="5618073" y="4250131"/>
             <a:ext cx="955547" cy="162306"/>
           </a:xfrm>
           <a:prstGeom prst="rect">
@@ -26842,7 +26304,7 @@
         </p:nvSpPr>
         <p:spPr>
           <a:xfrm>
-            <a:off x="7757883" y="4026992"/>
+            <a:off x="7757883" y="3994099"/>
             <a:ext cx="1171575" cy="190246"/>
           </a:xfrm>
           <a:prstGeom prst="rect">
@@ -26885,7 +26347,7 @@
         </p:nvSpPr>
         <p:spPr>
           <a:xfrm>
-            <a:off x="7989341" y="4287850"/>
+            <a:off x="7989341" y="4250131"/>
             <a:ext cx="708660" cy="162306"/>
           </a:xfrm>
           <a:prstGeom prst="rect">
@@ -26952,7 +26414,7 @@
         </p:nvSpPr>
         <p:spPr>
           <a:xfrm>
-            <a:off x="10113721" y="2783408"/>
+            <a:off x="10113721" y="2750515"/>
             <a:ext cx="955547" cy="190246"/>
           </a:xfrm>
           <a:prstGeom prst="rect">
@@ -26995,7 +26457,7 @@
         </p:nvSpPr>
         <p:spPr>
           <a:xfrm>
-            <a:off x="10298887" y="3044266"/>
+            <a:off x="10298887" y="3006547"/>
             <a:ext cx="585216" cy="162306"/>
           </a:xfrm>
           <a:prstGeom prst="rect">
@@ -27062,7 +26524,7 @@
         </p:nvSpPr>
         <p:spPr>
           <a:xfrm>
-            <a:off x="10129151" y="5270576"/>
+            <a:off x="10129151" y="5237683"/>
             <a:ext cx="924687" cy="190246"/>
           </a:xfrm>
           <a:prstGeom prst="rect">
@@ -27105,7 +26567,7 @@
         </p:nvSpPr>
         <p:spPr>
           <a:xfrm>
-            <a:off x="10360609" y="5531434"/>
+            <a:off x="10360609" y="5493715"/>
             <a:ext cx="461772" cy="162306"/>
           </a:xfrm>
           <a:prstGeom prst="rect">
@@ -27172,7 +26634,7 @@
         </p:nvSpPr>
         <p:spPr>
           <a:xfrm>
-            <a:off x="7845323" y="5270576"/>
+            <a:off x="7845323" y="5237683"/>
             <a:ext cx="996696" cy="190246"/>
           </a:xfrm>
           <a:prstGeom prst="rect">
@@ -27215,7 +26677,7 @@
         </p:nvSpPr>
         <p:spPr>
           <a:xfrm>
-            <a:off x="7989341" y="5531434"/>
+            <a:off x="7989341" y="5493715"/>
             <a:ext cx="708660" cy="162306"/>
           </a:xfrm>
           <a:prstGeom prst="rect">
@@ -27480,7 +26942,7 @@
             <a:avLst/>
           </a:prstGeom>
           <a:solidFill>
-            <a:srgbClr val="C9D4D1"/>
+            <a:srgbClr val="D1CFC8"/>
           </a:solidFill>
           <a:ln>
             <a:noFill/>
@@ -27539,7 +27001,7 @@
             <a:r>
               <a:rPr sz="819" b="0" lang="ja-JP">
                 <a:solidFill>
-                  <a:srgbClr val="667478"/>
+                  <a:srgbClr val="666E70"/>
                 </a:solidFill>
                 <a:latin typeface="Yu Gothic"/>
                 <a:ea typeface="Yu Gothic"/>
@@ -27580,7 +27042,7 @@
             <a:r>
               <a:rPr sz="1100" b="1" lang="ja-JP">
                 <a:solidFill>
-                  <a:srgbClr val="16324F"/>
+                  <a:srgbClr val="182C43"/>
                 </a:solidFill>
                 <a:latin typeface="Yu Gothic"/>
                 <a:ea typeface="Yu Gothic"/>
@@ -27621,7 +27083,7 @@
             <a:r>
               <a:rPr sz="819" b="0" lang="ja-JP">
                 <a:solidFill>
-                  <a:srgbClr val="667478"/>
+                  <a:srgbClr val="666E70"/>
                 </a:solidFill>
                 <a:latin typeface="Yu Gothic"/>
                 <a:ea typeface="Yu Gothic"/>
@@ -28389,7 +27851,7 @@
             <a:avLst/>
           </a:prstGeom>
           <a:solidFill>
-            <a:srgbClr val="C9D4D1"/>
+            <a:srgbClr val="D1CFC8"/>
           </a:solidFill>
           <a:ln>
             <a:noFill/>
@@ -28448,7 +27910,7 @@
             <a:r>
               <a:rPr sz="819" b="0" lang="ja-JP">
                 <a:solidFill>
-                  <a:srgbClr val="667478"/>
+                  <a:srgbClr val="666E70"/>
                 </a:solidFill>
                 <a:latin typeface="Yu Gothic"/>
                 <a:ea typeface="Yu Gothic"/>
@@ -28489,7 +27951,7 @@
             <a:r>
               <a:rPr sz="1100" b="1" lang="ja-JP">
                 <a:solidFill>
-                  <a:srgbClr val="16324F"/>
+                  <a:srgbClr val="182C43"/>
                 </a:solidFill>
                 <a:latin typeface="Yu Gothic"/>
                 <a:ea typeface="Yu Gothic"/>
@@ -28530,7 +27992,7 @@
             <a:r>
               <a:rPr sz="819" b="0" lang="ja-JP">
                 <a:solidFill>
-                  <a:srgbClr val="667478"/>
+                  <a:srgbClr val="666E70"/>
                 </a:solidFill>
                 <a:latin typeface="Yu Gothic"/>
                 <a:ea typeface="Yu Gothic"/>
@@ -29157,7 +28619,7 @@
             <a:avLst/>
           </a:prstGeom>
           <a:solidFill>
-            <a:srgbClr val="C9D4D1"/>
+            <a:srgbClr val="D1CFC8"/>
           </a:solidFill>
           <a:ln>
             <a:noFill/>
@@ -29216,7 +28678,7 @@
             <a:r>
               <a:rPr sz="819" b="0" lang="ja-JP">
                 <a:solidFill>
-                  <a:srgbClr val="667478"/>
+                  <a:srgbClr val="666E70"/>
                 </a:solidFill>
                 <a:latin typeface="Yu Gothic"/>
                 <a:ea typeface="Yu Gothic"/>
@@ -29257,7 +28719,7 @@
             <a:r>
               <a:rPr sz="1100" b="1" lang="ja-JP">
                 <a:solidFill>
-                  <a:srgbClr val="16324F"/>
+                  <a:srgbClr val="182C43"/>
                 </a:solidFill>
                 <a:latin typeface="Yu Gothic"/>
                 <a:ea typeface="Yu Gothic"/>
@@ -29298,7 +28760,7 @@
             <a:r>
               <a:rPr sz="819" b="0" lang="ja-JP">
                 <a:solidFill>
-                  <a:srgbClr val="667478"/>
+                  <a:srgbClr val="666E70"/>
                 </a:solidFill>
                 <a:latin typeface="Yu Gothic"/>
                 <a:ea typeface="Yu Gothic"/>
@@ -30476,7 +29938,7 @@
             <a:avLst/>
           </a:prstGeom>
           <a:solidFill>
-            <a:srgbClr val="C9D4D1"/>
+            <a:srgbClr val="D1CFC8"/>
           </a:solidFill>
           <a:ln>
             <a:noFill/>
@@ -30535,7 +29997,7 @@
             <a:r>
               <a:rPr sz="819" b="0" lang="ja-JP">
                 <a:solidFill>
-                  <a:srgbClr val="667478"/>
+                  <a:srgbClr val="666E70"/>
                 </a:solidFill>
                 <a:latin typeface="Yu Gothic"/>
                 <a:ea typeface="Yu Gothic"/>
@@ -30576,7 +30038,7 @@
             <a:r>
               <a:rPr sz="1100" b="1" lang="ja-JP">
                 <a:solidFill>
-                  <a:srgbClr val="16324F"/>
+                  <a:srgbClr val="182C43"/>
                 </a:solidFill>
                 <a:latin typeface="Yu Gothic"/>
                 <a:ea typeface="Yu Gothic"/>
@@ -30617,7 +30079,7 @@
             <a:r>
               <a:rPr sz="819" b="0" lang="ja-JP">
                 <a:solidFill>
-                  <a:srgbClr val="667478"/>
+                  <a:srgbClr val="666E70"/>
                 </a:solidFill>
                 <a:latin typeface="Yu Gothic"/>
                 <a:ea typeface="Yu Gothic"/>
@@ -31287,7 +30749,7 @@
             <a:avLst/>
           </a:prstGeom>
           <a:solidFill>
-            <a:srgbClr val="C9D4D1"/>
+            <a:srgbClr val="D1CFC8"/>
           </a:solidFill>
           <a:ln>
             <a:noFill/>
@@ -31346,7 +30808,7 @@
             <a:r>
               <a:rPr sz="819" b="0" lang="ja-JP">
                 <a:solidFill>
-                  <a:srgbClr val="667478"/>
+                  <a:srgbClr val="666E70"/>
                 </a:solidFill>
                 <a:latin typeface="Yu Gothic"/>
                 <a:ea typeface="Yu Gothic"/>
@@ -31387,7 +30849,7 @@
             <a:r>
               <a:rPr sz="1100" b="1" lang="ja-JP">
                 <a:solidFill>
-                  <a:srgbClr val="16324F"/>
+                  <a:srgbClr val="182C43"/>
                 </a:solidFill>
                 <a:latin typeface="Yu Gothic"/>
                 <a:ea typeface="Yu Gothic"/>
@@ -31428,7 +30890,7 @@
             <a:r>
               <a:rPr sz="819" b="0" lang="ja-JP">
                 <a:solidFill>
-                  <a:srgbClr val="667478"/>
+                  <a:srgbClr val="666E70"/>
                 </a:solidFill>
                 <a:latin typeface="Yu Gothic"/>
                 <a:ea typeface="Yu Gothic"/>
@@ -31657,7 +31119,7 @@
             <a:avLst/>
           </a:prstGeom>
           <a:solidFill>
-            <a:srgbClr val="C9D4D1"/>
+            <a:srgbClr val="D1CFC8"/>
           </a:solidFill>
           <a:ln>
             <a:noFill/>
@@ -31716,7 +31178,7 @@
             <a:r>
               <a:rPr sz="819" b="0" lang="ja-JP">
                 <a:solidFill>
-                  <a:srgbClr val="667478"/>
+                  <a:srgbClr val="666E70"/>
                 </a:solidFill>
                 <a:latin typeface="Yu Gothic"/>
                 <a:ea typeface="Yu Gothic"/>
@@ -31757,7 +31219,7 @@
             <a:r>
               <a:rPr sz="1100" b="1" lang="ja-JP">
                 <a:solidFill>
-                  <a:srgbClr val="16324F"/>
+                  <a:srgbClr val="182C43"/>
                 </a:solidFill>
                 <a:latin typeface="Yu Gothic"/>
                 <a:ea typeface="Yu Gothic"/>
@@ -31798,7 +31260,7 @@
             <a:r>
               <a:rPr sz="819" b="0" lang="ja-JP">
                 <a:solidFill>
-                  <a:srgbClr val="667478"/>
+                  <a:srgbClr val="666E70"/>
                 </a:solidFill>
                 <a:latin typeface="Yu Gothic"/>
                 <a:ea typeface="Yu Gothic"/>
@@ -32027,7 +31489,7 @@
             <a:avLst/>
           </a:prstGeom>
           <a:solidFill>
-            <a:srgbClr val="C9D4D1"/>
+            <a:srgbClr val="D1CFC8"/>
           </a:solidFill>
           <a:ln>
             <a:noFill/>
@@ -32086,7 +31548,7 @@
             <a:r>
               <a:rPr sz="819" b="0" lang="ja-JP">
                 <a:solidFill>
-                  <a:srgbClr val="667478"/>
+                  <a:srgbClr val="666E70"/>
                 </a:solidFill>
                 <a:latin typeface="Yu Gothic"/>
                 <a:ea typeface="Yu Gothic"/>
@@ -32127,7 +31589,7 @@
             <a:r>
               <a:rPr sz="1100" b="1" lang="ja-JP">
                 <a:solidFill>
-                  <a:srgbClr val="16324F"/>
+                  <a:srgbClr val="182C43"/>
                 </a:solidFill>
                 <a:latin typeface="Yu Gothic"/>
                 <a:ea typeface="Yu Gothic"/>
@@ -32168,7 +31630,7 @@
             <a:r>
               <a:rPr sz="819" b="0" lang="ja-JP">
                 <a:solidFill>
-                  <a:srgbClr val="667478"/>
+                  <a:srgbClr val="666E70"/>
                 </a:solidFill>
                 <a:latin typeface="Yu Gothic"/>
                 <a:ea typeface="Yu Gothic"/>
@@ -32397,7 +31859,7 @@
             <a:avLst/>
           </a:prstGeom>
           <a:solidFill>
-            <a:srgbClr val="C9D4D1"/>
+            <a:srgbClr val="D1CFC8"/>
           </a:solidFill>
           <a:ln>
             <a:noFill/>
@@ -32456,7 +31918,7 @@
             <a:r>
               <a:rPr sz="819" b="0" lang="ja-JP">
                 <a:solidFill>
-                  <a:srgbClr val="667478"/>
+                  <a:srgbClr val="666E70"/>
                 </a:solidFill>
                 <a:latin typeface="Yu Gothic"/>
                 <a:ea typeface="Yu Gothic"/>
@@ -32497,7 +31959,7 @@
             <a:r>
               <a:rPr sz="1100" b="1" lang="ja-JP">
                 <a:solidFill>
-                  <a:srgbClr val="16324F"/>
+                  <a:srgbClr val="182C43"/>
                 </a:solidFill>
                 <a:latin typeface="Yu Gothic"/>
                 <a:ea typeface="Yu Gothic"/>
@@ -32538,7 +32000,7 @@
             <a:r>
               <a:rPr sz="819" b="0" lang="ja-JP">
                 <a:solidFill>
-                  <a:srgbClr val="667478"/>
+                  <a:srgbClr val="666E70"/>
                 </a:solidFill>
                 <a:latin typeface="Yu Gothic"/>
                 <a:ea typeface="Yu Gothic"/>

--- a/examples/gallery/pattern_gallery.pptx
+++ b/examples/gallery/pattern_gallery.pptx
@@ -28173,14 +28173,14 @@
         </p:nvSpPr>
         <p:spPr>
           <a:xfrm>
-            <a:off x="6094475" y="1499616"/>
-            <a:ext cx="7315" cy="4727448"/>
+            <a:off x="6423659" y="1426464"/>
+            <a:ext cx="5106924" cy="4800600"/>
           </a:xfrm>
           <a:prstGeom prst="rect">
             <a:avLst/>
           </a:prstGeom>
           <a:solidFill>
-            <a:srgbClr val="D1CFC8"/>
+            <a:srgbClr val="ECEAE4"/>
           </a:solidFill>
           <a:ln>
             <a:noFill/>
@@ -28217,8 +28217,49 @@
         </p:nvSpPr>
         <p:spPr>
           <a:xfrm>
-            <a:off x="658368" y="1463040"/>
-            <a:ext cx="5225795" cy="347472"/>
+            <a:off x="694944" y="1481328"/>
+            <a:ext cx="310896" cy="219456"/>
+          </a:xfrm>
+          <a:prstGeom prst="rect">
+            <a:avLst/>
+          </a:prstGeom>
+          <a:noFill/>
+        </p:spPr>
+        <p:txBody>
+          <a:bodyPr wrap="square" anchor="t" lIns="0" rIns="0" tIns="0" bIns="0">
+            <a:spAutoFit/>
+          </a:bodyPr>
+          <a:lstStyle/>
+          <a:p>
+            <a:pPr algn="l">
+              <a:lnSpc>
+                <a:spcPct val="130000"/>
+              </a:lnSpc>
+            </a:pPr>
+            <a:r>
+              <a:rPr sz="950" b="1" lang="ja-JP">
+                <a:solidFill>
+                  <a:srgbClr val="0D7870"/>
+                </a:solidFill>
+                <a:latin typeface="Yu Gothic"/>
+                <a:ea typeface="Yu Gothic"/>
+                <a:cs typeface="Yu Gothic"/>
+              </a:rPr>
+              <a:t>01</a:t>
+            </a:r>
+          </a:p>
+        </p:txBody>
+      </p:sp>
+      <p:sp>
+        <p:nvSpPr>
+          <p:cNvPr id="7" name="TextBox 6"/>
+          <p:cNvSpPr txBox="1"/>
+          <p:nvPr/>
+        </p:nvSpPr>
+        <p:spPr>
+          <a:xfrm>
+            <a:off x="1097280" y="1453896"/>
+            <a:ext cx="4631435" cy="347472"/>
           </a:xfrm>
           <a:prstGeom prst="rect">
             <a:avLst/>
@@ -28252,14 +28293,14 @@
       </p:sp>
       <p:cxnSp>
         <p:nvCxnSpPr>
-          <p:cNvPr id="7" name="Connector 6"/>
+          <p:cNvPr id="8" name="Connector 7"/>
           <p:cNvCxnSpPr/>
           <p:nvPr/>
         </p:nvCxnSpPr>
         <p:spPr>
           <a:xfrm>
-            <a:off x="2093976" y="3755440"/>
-            <a:ext cx="838961" cy="0"/>
+            <a:off x="2130552" y="2922422"/>
+            <a:ext cx="742949" cy="0"/>
           </a:xfrm>
           <a:prstGeom prst="line">
             <a:avLst/>
@@ -28289,14 +28330,14 @@
       </p:cxnSp>
       <p:cxnSp>
         <p:nvCxnSpPr>
-          <p:cNvPr id="8" name="Connector 7"/>
+          <p:cNvPr id="9" name="Connector 8"/>
           <p:cNvCxnSpPr/>
           <p:nvPr/>
         </p:nvCxnSpPr>
         <p:spPr>
           <a:xfrm>
-            <a:off x="3609593" y="3755440"/>
-            <a:ext cx="838962" cy="0"/>
+            <a:off x="3550157" y="2922422"/>
+            <a:ext cx="742950" cy="0"/>
           </a:xfrm>
           <a:prstGeom prst="line">
             <a:avLst/>
@@ -28326,7 +28367,7 @@
       </p:cxnSp>
       <p:pic>
         <p:nvPicPr>
-          <p:cNvPr id="9" name="Picture 8" descr="person.png"/>
+          <p:cNvPr id="10" name="Picture 9" descr="person.png"/>
           <p:cNvPicPr>
             <a:picLocks noChangeAspect="1"/>
           </p:cNvPicPr>
@@ -28340,7 +28381,7 @@
         </p:blipFill>
         <p:spPr>
           <a:xfrm>
-            <a:off x="1472184" y="3471976"/>
+            <a:off x="1508760" y="2638958"/>
             <a:ext cx="566928" cy="566928"/>
           </a:xfrm>
           <a:prstGeom prst="rect">
@@ -28350,13 +28391,13 @@
       </p:pic>
       <p:sp>
         <p:nvSpPr>
-          <p:cNvPr id="10" name="TextBox 9"/>
-          <p:cNvSpPr txBox="1"/>
-          <p:nvPr/>
-        </p:nvSpPr>
-        <p:spPr>
-          <a:xfrm>
-            <a:off x="1478470" y="4084624"/>
+          <p:cNvPr id="11" name="TextBox 10"/>
+          <p:cNvSpPr txBox="1"/>
+          <p:nvPr/>
+        </p:nvSpPr>
+        <p:spPr>
+          <a:xfrm>
+            <a:off x="1515046" y="3251606"/>
             <a:ext cx="554355" cy="190246"/>
           </a:xfrm>
           <a:prstGeom prst="rect">
@@ -28393,7 +28434,7 @@
       </p:sp>
       <p:pic>
         <p:nvPicPr>
-          <p:cNvPr id="11" name="Picture 10" descr="globe.png"/>
+          <p:cNvPr id="12" name="Picture 11" descr="globe.png"/>
           <p:cNvPicPr>
             <a:picLocks noChangeAspect="1"/>
           </p:cNvPicPr>
@@ -28407,7 +28448,7 @@
         </p:blipFill>
         <p:spPr>
           <a:xfrm>
-            <a:off x="2987801" y="3471976"/>
+            <a:off x="2928365" y="2638958"/>
             <a:ext cx="566928" cy="566928"/>
           </a:xfrm>
           <a:prstGeom prst="rect">
@@ -28417,13 +28458,13 @@
       </p:pic>
       <p:sp>
         <p:nvSpPr>
-          <p:cNvPr id="12" name="TextBox 11"/>
-          <p:cNvSpPr txBox="1"/>
-          <p:nvPr/>
-        </p:nvSpPr>
-        <p:spPr>
-          <a:xfrm>
-            <a:off x="2942653" y="4084624"/>
+          <p:cNvPr id="13" name="TextBox 12"/>
+          <p:cNvSpPr txBox="1"/>
+          <p:nvPr/>
+        </p:nvSpPr>
+        <p:spPr>
+          <a:xfrm>
+            <a:off x="2883217" y="3251606"/>
             <a:ext cx="657225" cy="190246"/>
           </a:xfrm>
           <a:prstGeom prst="rect">
@@ -28460,7 +28501,7 @@
       </p:sp>
       <p:pic>
         <p:nvPicPr>
-          <p:cNvPr id="13" name="Picture 12" descr="database.png"/>
+          <p:cNvPr id="14" name="Picture 13" descr="database.png"/>
           <p:cNvPicPr>
             <a:picLocks noChangeAspect="1"/>
           </p:cNvPicPr>
@@ -28474,7 +28515,7 @@
         </p:blipFill>
         <p:spPr>
           <a:xfrm>
-            <a:off x="4503419" y="3471976"/>
+            <a:off x="4347971" y="2638958"/>
             <a:ext cx="566928" cy="566928"/>
           </a:xfrm>
           <a:prstGeom prst="rect">
@@ -28484,13 +28525,13 @@
       </p:pic>
       <p:sp>
         <p:nvSpPr>
-          <p:cNvPr id="14" name="TextBox 13"/>
-          <p:cNvSpPr txBox="1"/>
-          <p:nvPr/>
-        </p:nvSpPr>
-        <p:spPr>
-          <a:xfrm>
-            <a:off x="4278248" y="4084624"/>
+          <p:cNvPr id="15" name="TextBox 14"/>
+          <p:cNvSpPr txBox="1"/>
+          <p:nvPr/>
+        </p:nvSpPr>
+        <p:spPr>
+          <a:xfrm>
+            <a:off x="4122800" y="3251606"/>
             <a:ext cx="1017270" cy="190246"/>
           </a:xfrm>
           <a:prstGeom prst="rect">
@@ -28527,13 +28568,13 @@
       </p:sp>
       <p:sp>
         <p:nvSpPr>
-          <p:cNvPr id="15" name="TextBox 14"/>
-          <p:cNvSpPr txBox="1"/>
-          <p:nvPr/>
-        </p:nvSpPr>
-        <p:spPr>
-          <a:xfrm>
-            <a:off x="2256853" y="3518839"/>
+          <p:cNvPr id="16" name="TextBox 15"/>
+          <p:cNvSpPr txBox="1"/>
+          <p:nvPr/>
+        </p:nvSpPr>
+        <p:spPr>
+          <a:xfrm>
+            <a:off x="2245423" y="2685821"/>
             <a:ext cx="513207" cy="162306"/>
           </a:xfrm>
           <a:prstGeom prst="rect">
@@ -28570,13 +28611,13 @@
       </p:sp>
       <p:sp>
         <p:nvSpPr>
-          <p:cNvPr id="16" name="TextBox 15"/>
-          <p:cNvSpPr txBox="1"/>
-          <p:nvPr/>
-        </p:nvSpPr>
-        <p:spPr>
-          <a:xfrm>
-            <a:off x="3859910" y="3518839"/>
+          <p:cNvPr id="17" name="TextBox 16"/>
+          <p:cNvSpPr txBox="1"/>
+          <p:nvPr/>
+        </p:nvSpPr>
+        <p:spPr>
+          <a:xfrm>
+            <a:off x="3752469" y="2685821"/>
             <a:ext cx="338328" cy="162306"/>
           </a:xfrm>
           <a:prstGeom prst="rect">
@@ -28613,14 +28654,14 @@
       </p:sp>
       <p:sp>
         <p:nvSpPr>
-          <p:cNvPr id="17" name="TextBox 16"/>
-          <p:cNvSpPr txBox="1"/>
-          <p:nvPr/>
-        </p:nvSpPr>
-        <p:spPr>
-          <a:xfrm>
-            <a:off x="6304787" y="1463040"/>
-            <a:ext cx="5225796" cy="347472"/>
+          <p:cNvPr id="18" name="TextBox 17"/>
+          <p:cNvSpPr txBox="1"/>
+          <p:nvPr/>
+        </p:nvSpPr>
+        <p:spPr>
+          <a:xfrm>
+            <a:off x="6679691" y="1481328"/>
+            <a:ext cx="310896" cy="219456"/>
           </a:xfrm>
           <a:prstGeom prst="rect">
             <a:avLst/>
@@ -28635,6 +28676,47 @@
           <a:p>
             <a:pPr algn="l">
               <a:lnSpc>
+                <a:spcPct val="130000"/>
+              </a:lnSpc>
+            </a:pPr>
+            <a:r>
+              <a:rPr sz="950" b="1" lang="ja-JP">
+                <a:solidFill>
+                  <a:srgbClr val="0D7870"/>
+                </a:solidFill>
+                <a:latin typeface="Yu Gothic"/>
+                <a:ea typeface="Yu Gothic"/>
+                <a:cs typeface="Yu Gothic"/>
+              </a:rPr>
+              <a:t>02</a:t>
+            </a:r>
+          </a:p>
+        </p:txBody>
+      </p:sp>
+      <p:sp>
+        <p:nvSpPr>
+          <p:cNvPr id="19" name="TextBox 18"/>
+          <p:cNvSpPr txBox="1"/>
+          <p:nvPr/>
+        </p:nvSpPr>
+        <p:spPr>
+          <a:xfrm>
+            <a:off x="7082027" y="1453896"/>
+            <a:ext cx="4192524" cy="347472"/>
+          </a:xfrm>
+          <a:prstGeom prst="rect">
+            <a:avLst/>
+          </a:prstGeom>
+          <a:noFill/>
+        </p:spPr>
+        <p:txBody>
+          <a:bodyPr wrap="square" anchor="t" lIns="0" rIns="0" tIns="0" bIns="0">
+            <a:spAutoFit/>
+          </a:bodyPr>
+          <a:lstStyle/>
+          <a:p>
+            <a:pPr algn="l">
+              <a:lnSpc>
                 <a:spcPct val="108000"/>
               </a:lnSpc>
             </a:pPr>
@@ -28654,13 +28736,13 @@
       </p:sp>
       <p:sp>
         <p:nvSpPr>
-          <p:cNvPr id="18" name="TextBox 17"/>
-          <p:cNvSpPr txBox="1"/>
-          <p:nvPr/>
-        </p:nvSpPr>
-        <p:spPr>
-          <a:xfrm>
-            <a:off x="6304787" y="2168377"/>
+          <p:cNvPr id="20" name="TextBox 19"/>
+          <p:cNvSpPr txBox="1"/>
+          <p:nvPr/>
+        </p:nvSpPr>
+        <p:spPr>
+          <a:xfrm>
+            <a:off x="6679691" y="2130552"/>
             <a:ext cx="329184" cy="256032"/>
           </a:xfrm>
           <a:prstGeom prst="rect">
@@ -28695,14 +28777,14 @@
       </p:sp>
       <p:sp>
         <p:nvSpPr>
-          <p:cNvPr id="19" name="TextBox 18"/>
-          <p:cNvSpPr txBox="1"/>
-          <p:nvPr/>
-        </p:nvSpPr>
-        <p:spPr>
-          <a:xfrm>
-            <a:off x="6761987" y="2159233"/>
-            <a:ext cx="4658868" cy="219456"/>
+          <p:cNvPr id="21" name="TextBox 20"/>
+          <p:cNvSpPr txBox="1"/>
+          <p:nvPr/>
+        </p:nvSpPr>
+        <p:spPr>
+          <a:xfrm>
+            <a:off x="7136891" y="2121408"/>
+            <a:ext cx="4027932" cy="219456"/>
           </a:xfrm>
           <a:prstGeom prst="rect">
             <a:avLst/>
@@ -28736,14 +28818,14 @@
       </p:sp>
       <p:sp>
         <p:nvSpPr>
-          <p:cNvPr id="20" name="TextBox 19"/>
-          <p:cNvSpPr txBox="1"/>
-          <p:nvPr/>
-        </p:nvSpPr>
-        <p:spPr>
-          <a:xfrm>
-            <a:off x="6761987" y="2442697"/>
-            <a:ext cx="4658868" cy="263016"/>
+          <p:cNvPr id="22" name="TextBox 21"/>
+          <p:cNvSpPr txBox="1"/>
+          <p:nvPr/>
+        </p:nvSpPr>
+        <p:spPr>
+          <a:xfrm>
+            <a:off x="7136891" y="2404872"/>
+            <a:ext cx="4027932" cy="263016"/>
           </a:xfrm>
           <a:prstGeom prst="rect">
             <a:avLst/>
@@ -28777,14 +28859,14 @@
       </p:sp>
       <p:sp>
         <p:nvSpPr>
-          <p:cNvPr id="21" name="Rectangle 20"/>
+          <p:cNvPr id="23" name="Rectangle 22"/>
           <p:cNvSpPr/>
           <p:nvPr/>
         </p:nvSpPr>
         <p:spPr>
           <a:xfrm>
-            <a:off x="6761987" y="2806298"/>
-            <a:ext cx="4658868" cy="7315"/>
+            <a:off x="7136891" y="2768473"/>
+            <a:ext cx="4027932" cy="7315"/>
           </a:xfrm>
           <a:prstGeom prst="rect">
             <a:avLst/>
@@ -28821,13 +28903,13 @@
       </p:sp>
       <p:sp>
         <p:nvSpPr>
-          <p:cNvPr id="22" name="TextBox 21"/>
-          <p:cNvSpPr txBox="1"/>
-          <p:nvPr/>
-        </p:nvSpPr>
-        <p:spPr>
-          <a:xfrm>
-            <a:off x="6304787" y="2916026"/>
+          <p:cNvPr id="24" name="TextBox 23"/>
+          <p:cNvSpPr txBox="1"/>
+          <p:nvPr/>
+        </p:nvSpPr>
+        <p:spPr>
+          <a:xfrm>
+            <a:off x="6679691" y="2878201"/>
             <a:ext cx="329184" cy="256032"/>
           </a:xfrm>
           <a:prstGeom prst="rect">
@@ -28862,14 +28944,14 @@
       </p:sp>
       <p:sp>
         <p:nvSpPr>
-          <p:cNvPr id="23" name="TextBox 22"/>
-          <p:cNvSpPr txBox="1"/>
-          <p:nvPr/>
-        </p:nvSpPr>
-        <p:spPr>
-          <a:xfrm>
-            <a:off x="6761987" y="2906882"/>
-            <a:ext cx="4658868" cy="219456"/>
+          <p:cNvPr id="25" name="TextBox 24"/>
+          <p:cNvSpPr txBox="1"/>
+          <p:nvPr/>
+        </p:nvSpPr>
+        <p:spPr>
+          <a:xfrm>
+            <a:off x="7136891" y="2869057"/>
+            <a:ext cx="4027932" cy="219456"/>
           </a:xfrm>
           <a:prstGeom prst="rect">
             <a:avLst/>
@@ -28903,14 +28985,14 @@
       </p:sp>
       <p:sp>
         <p:nvSpPr>
-          <p:cNvPr id="24" name="TextBox 23"/>
-          <p:cNvSpPr txBox="1"/>
-          <p:nvPr/>
-        </p:nvSpPr>
-        <p:spPr>
-          <a:xfrm>
-            <a:off x="6761987" y="3190346"/>
-            <a:ext cx="4658868" cy="263016"/>
+          <p:cNvPr id="26" name="TextBox 25"/>
+          <p:cNvSpPr txBox="1"/>
+          <p:nvPr/>
+        </p:nvSpPr>
+        <p:spPr>
+          <a:xfrm>
+            <a:off x="7136891" y="3152521"/>
+            <a:ext cx="4027932" cy="263016"/>
           </a:xfrm>
           <a:prstGeom prst="rect">
             <a:avLst/>
@@ -28944,14 +29026,14 @@
       </p:sp>
       <p:sp>
         <p:nvSpPr>
-          <p:cNvPr id="25" name="Rectangle 24"/>
+          <p:cNvPr id="27" name="Rectangle 26"/>
           <p:cNvSpPr/>
           <p:nvPr/>
         </p:nvSpPr>
         <p:spPr>
           <a:xfrm>
-            <a:off x="6761987" y="3553947"/>
-            <a:ext cx="4658868" cy="7315"/>
+            <a:off x="7136891" y="3516122"/>
+            <a:ext cx="4027932" cy="7315"/>
           </a:xfrm>
           <a:prstGeom prst="rect">
             <a:avLst/>
@@ -28988,13 +29070,13 @@
       </p:sp>
       <p:sp>
         <p:nvSpPr>
-          <p:cNvPr id="26" name="TextBox 25"/>
-          <p:cNvSpPr txBox="1"/>
-          <p:nvPr/>
-        </p:nvSpPr>
-        <p:spPr>
-          <a:xfrm>
-            <a:off x="6304787" y="3663675"/>
+          <p:cNvPr id="28" name="TextBox 27"/>
+          <p:cNvSpPr txBox="1"/>
+          <p:nvPr/>
+        </p:nvSpPr>
+        <p:spPr>
+          <a:xfrm>
+            <a:off x="6679691" y="3625850"/>
             <a:ext cx="329184" cy="256032"/>
           </a:xfrm>
           <a:prstGeom prst="rect">
@@ -29029,14 +29111,14 @@
       </p:sp>
       <p:sp>
         <p:nvSpPr>
-          <p:cNvPr id="27" name="TextBox 26"/>
-          <p:cNvSpPr txBox="1"/>
-          <p:nvPr/>
-        </p:nvSpPr>
-        <p:spPr>
-          <a:xfrm>
-            <a:off x="6761987" y="3654531"/>
-            <a:ext cx="4658868" cy="219456"/>
+          <p:cNvPr id="29" name="TextBox 28"/>
+          <p:cNvSpPr txBox="1"/>
+          <p:nvPr/>
+        </p:nvSpPr>
+        <p:spPr>
+          <a:xfrm>
+            <a:off x="7136891" y="3616706"/>
+            <a:ext cx="4027932" cy="219456"/>
           </a:xfrm>
           <a:prstGeom prst="rect">
             <a:avLst/>
@@ -29070,14 +29152,14 @@
       </p:sp>
       <p:sp>
         <p:nvSpPr>
-          <p:cNvPr id="28" name="TextBox 27"/>
-          <p:cNvSpPr txBox="1"/>
-          <p:nvPr/>
-        </p:nvSpPr>
-        <p:spPr>
-          <a:xfrm>
-            <a:off x="6761987" y="3937995"/>
-            <a:ext cx="4658868" cy="263016"/>
+          <p:cNvPr id="30" name="TextBox 29"/>
+          <p:cNvSpPr txBox="1"/>
+          <p:nvPr/>
+        </p:nvSpPr>
+        <p:spPr>
+          <a:xfrm>
+            <a:off x="7136891" y="3900169"/>
+            <a:ext cx="4027932" cy="263016"/>
           </a:xfrm>
           <a:prstGeom prst="rect">
             <a:avLst/>
@@ -29111,7 +29193,7 @@
       </p:sp>
       <p:sp>
         <p:nvSpPr>
-          <p:cNvPr id="29" name="Rectangle 28"/>
+          <p:cNvPr id="31" name="Rectangle 30"/>
           <p:cNvSpPr/>
           <p:nvPr/>
         </p:nvSpPr>
@@ -29155,7 +29237,7 @@
       </p:sp>
       <p:sp>
         <p:nvSpPr>
-          <p:cNvPr id="30" name="TextBox 29"/>
+          <p:cNvPr id="32" name="TextBox 31"/>
           <p:cNvSpPr txBox="1"/>
           <p:nvPr/>
         </p:nvSpPr>
@@ -29196,7 +29278,7 @@
       </p:sp>
       <p:sp>
         <p:nvSpPr>
-          <p:cNvPr id="31" name="TextBox 30"/>
+          <p:cNvPr id="33" name="TextBox 32"/>
           <p:cNvSpPr txBox="1"/>
           <p:nvPr/>
         </p:nvSpPr>
@@ -29237,7 +29319,7 @@
       </p:sp>
       <p:sp>
         <p:nvSpPr>
-          <p:cNvPr id="32" name="TextBox 31"/>
+          <p:cNvPr id="34" name="TextBox 33"/>
           <p:cNvSpPr txBox="1"/>
           <p:nvPr/>
         </p:nvSpPr>
@@ -29428,8 +29510,486 @@
         </p:nvSpPr>
         <p:spPr>
           <a:xfrm>
-            <a:off x="6094475" y="1499616"/>
-            <a:ext cx="7315" cy="4727448"/>
+            <a:off x="6423659" y="1426464"/>
+            <a:ext cx="5106924" cy="4800600"/>
+          </a:xfrm>
+          <a:prstGeom prst="rect">
+            <a:avLst/>
+          </a:prstGeom>
+          <a:solidFill>
+            <a:srgbClr val="ECEAE4"/>
+          </a:solidFill>
+          <a:ln>
+            <a:noFill/>
+          </a:ln>
+          <a:effectLst/>
+        </p:spPr>
+        <p:style>
+          <a:lnRef idx="1">
+            <a:schemeClr val="accent1"/>
+          </a:lnRef>
+          <a:fillRef idx="3">
+            <a:schemeClr val="accent1"/>
+          </a:fillRef>
+          <a:effectRef idx="2">
+            <a:schemeClr val="accent1"/>
+          </a:effectRef>
+          <a:fontRef idx="minor">
+            <a:schemeClr val="lt1"/>
+          </a:fontRef>
+        </p:style>
+        <p:txBody>
+          <a:bodyPr rtlCol="0" anchor="ctr"/>
+          <a:lstStyle/>
+          <a:p>
+            <a:pPr algn="ctr"/>
+          </a:p>
+        </p:txBody>
+      </p:sp>
+      <p:sp>
+        <p:nvSpPr>
+          <p:cNvPr id="6" name="TextBox 5"/>
+          <p:cNvSpPr txBox="1"/>
+          <p:nvPr/>
+        </p:nvSpPr>
+        <p:spPr>
+          <a:xfrm>
+            <a:off x="694944" y="1481328"/>
+            <a:ext cx="310896" cy="219456"/>
+          </a:xfrm>
+          <a:prstGeom prst="rect">
+            <a:avLst/>
+          </a:prstGeom>
+          <a:noFill/>
+        </p:spPr>
+        <p:txBody>
+          <a:bodyPr wrap="square" anchor="t" lIns="0" rIns="0" tIns="0" bIns="0">
+            <a:spAutoFit/>
+          </a:bodyPr>
+          <a:lstStyle/>
+          <a:p>
+            <a:pPr algn="l">
+              <a:lnSpc>
+                <a:spcPct val="130000"/>
+              </a:lnSpc>
+            </a:pPr>
+            <a:r>
+              <a:rPr sz="950" b="1" lang="ja-JP">
+                <a:solidFill>
+                  <a:srgbClr val="0D7870"/>
+                </a:solidFill>
+                <a:latin typeface="Yu Gothic"/>
+                <a:ea typeface="Yu Gothic"/>
+                <a:cs typeface="Yu Gothic"/>
+              </a:rPr>
+              <a:t>01</a:t>
+            </a:r>
+          </a:p>
+        </p:txBody>
+      </p:sp>
+      <p:sp>
+        <p:nvSpPr>
+          <p:cNvPr id="7" name="TextBox 6"/>
+          <p:cNvSpPr txBox="1"/>
+          <p:nvPr/>
+        </p:nvSpPr>
+        <p:spPr>
+          <a:xfrm>
+            <a:off x="1097280" y="1453896"/>
+            <a:ext cx="4631435" cy="347472"/>
+          </a:xfrm>
+          <a:prstGeom prst="rect">
+            <a:avLst/>
+          </a:prstGeom>
+          <a:noFill/>
+        </p:spPr>
+        <p:txBody>
+          <a:bodyPr wrap="square" anchor="t" lIns="0" rIns="0" tIns="0" bIns="0">
+            <a:spAutoFit/>
+          </a:bodyPr>
+          <a:lstStyle/>
+          <a:p>
+            <a:pPr algn="l">
+              <a:lnSpc>
+                <a:spcPct val="108000"/>
+              </a:lnSpc>
+            </a:pPr>
+            <a:r>
+              <a:rPr sz="1650" b="1" lang="ja-JP">
+                <a:solidFill>
+                  <a:srgbClr val="182C43"/>
+                </a:solidFill>
+                <a:latin typeface="Yu Gothic"/>
+                <a:ea typeface="Yu Gothic"/>
+                <a:cs typeface="Yu Gothic"/>
+              </a:rPr>
+              <a:t>対象画面</a:t>
+            </a:r>
+          </a:p>
+        </p:txBody>
+      </p:sp>
+      <p:pic>
+        <p:nvPicPr>
+          <p:cNvPr id="8" name="ContentImage" descr="pptxdsl-repository.png"/>
+          <p:cNvPicPr>
+            <a:picLocks noChangeAspect="1"/>
+          </p:cNvPicPr>
+          <p:nvPr/>
+        </p:nvPicPr>
+        <p:blipFill>
+          <a:blip r:embed="rId2"/>
+          <a:stretch>
+            <a:fillRect/>
+          </a:stretch>
+        </p:blipFill>
+        <p:spPr>
+          <a:xfrm>
+            <a:off x="694944" y="2112264"/>
+            <a:ext cx="5033771" cy="2598178"/>
+          </a:xfrm>
+          <a:prstGeom prst="rect">
+            <a:avLst/>
+          </a:prstGeom>
+        </p:spPr>
+      </p:pic>
+      <p:sp>
+        <p:nvSpPr>
+          <p:cNvPr id="9" name="TextBox 8"/>
+          <p:cNvSpPr txBox="1"/>
+          <p:nvPr/>
+        </p:nvSpPr>
+        <p:spPr>
+          <a:xfrm>
+            <a:off x="6679691" y="1481328"/>
+            <a:ext cx="310896" cy="219456"/>
+          </a:xfrm>
+          <a:prstGeom prst="rect">
+            <a:avLst/>
+          </a:prstGeom>
+          <a:noFill/>
+        </p:spPr>
+        <p:txBody>
+          <a:bodyPr wrap="square" anchor="t" lIns="0" rIns="0" tIns="0" bIns="0">
+            <a:spAutoFit/>
+          </a:bodyPr>
+          <a:lstStyle/>
+          <a:p>
+            <a:pPr algn="l">
+              <a:lnSpc>
+                <a:spcPct val="130000"/>
+              </a:lnSpc>
+            </a:pPr>
+            <a:r>
+              <a:rPr sz="950" b="1" lang="ja-JP">
+                <a:solidFill>
+                  <a:srgbClr val="0D7870"/>
+                </a:solidFill>
+                <a:latin typeface="Yu Gothic"/>
+                <a:ea typeface="Yu Gothic"/>
+                <a:cs typeface="Yu Gothic"/>
+              </a:rPr>
+              <a:t>02</a:t>
+            </a:r>
+          </a:p>
+        </p:txBody>
+      </p:sp>
+      <p:sp>
+        <p:nvSpPr>
+          <p:cNvPr id="10" name="TextBox 9"/>
+          <p:cNvSpPr txBox="1"/>
+          <p:nvPr/>
+        </p:nvSpPr>
+        <p:spPr>
+          <a:xfrm>
+            <a:off x="7082027" y="1453896"/>
+            <a:ext cx="4192524" cy="347472"/>
+          </a:xfrm>
+          <a:prstGeom prst="rect">
+            <a:avLst/>
+          </a:prstGeom>
+          <a:noFill/>
+        </p:spPr>
+        <p:txBody>
+          <a:bodyPr wrap="square" anchor="t" lIns="0" rIns="0" tIns="0" bIns="0">
+            <a:spAutoFit/>
+          </a:bodyPr>
+          <a:lstStyle/>
+          <a:p>
+            <a:pPr algn="l">
+              <a:lnSpc>
+                <a:spcPct val="108000"/>
+              </a:lnSpc>
+            </a:pPr>
+            <a:r>
+              <a:rPr sz="1650" b="1" lang="ja-JP">
+                <a:solidFill>
+                  <a:srgbClr val="182C43"/>
+                </a:solidFill>
+                <a:latin typeface="Yu Gothic"/>
+                <a:ea typeface="Yu Gothic"/>
+                <a:cs typeface="Yu Gothic"/>
+              </a:rPr>
+              <a:t>確認事項</a:t>
+            </a:r>
+          </a:p>
+        </p:txBody>
+      </p:sp>
+      <p:sp>
+        <p:nvSpPr>
+          <p:cNvPr id="11" name="TextBox 10"/>
+          <p:cNvSpPr txBox="1"/>
+          <p:nvPr/>
+        </p:nvSpPr>
+        <p:spPr>
+          <a:xfrm>
+            <a:off x="6679691" y="2121408"/>
+            <a:ext cx="310896" cy="237744"/>
+          </a:xfrm>
+          <a:prstGeom prst="rect">
+            <a:avLst/>
+          </a:prstGeom>
+          <a:noFill/>
+        </p:spPr>
+        <p:txBody>
+          <a:bodyPr wrap="square" anchor="t" lIns="0" rIns="0" tIns="0" bIns="0">
+            <a:spAutoFit/>
+          </a:bodyPr>
+          <a:lstStyle/>
+          <a:p>
+            <a:pPr algn="r">
+              <a:lnSpc>
+                <a:spcPct val="130000"/>
+              </a:lnSpc>
+            </a:pPr>
+            <a:r>
+              <a:rPr sz="1000" b="1" lang="ja-JP">
+                <a:solidFill>
+                  <a:srgbClr val="0D7870"/>
+                </a:solidFill>
+                <a:latin typeface="Yu Gothic"/>
+                <a:ea typeface="Yu Gothic"/>
+                <a:cs typeface="Yu Gothic"/>
+              </a:rPr>
+              <a:t>01</a:t>
+            </a:r>
+          </a:p>
+        </p:txBody>
+      </p:sp>
+      <p:sp>
+        <p:nvSpPr>
+          <p:cNvPr id="12" name="TextBox 11"/>
+          <p:cNvSpPr txBox="1"/>
+          <p:nvPr/>
+        </p:nvSpPr>
+        <p:spPr>
+          <a:xfrm>
+            <a:off x="7100315" y="2139696"/>
+            <a:ext cx="4119372" cy="270510"/>
+          </a:xfrm>
+          <a:prstGeom prst="rect">
+            <a:avLst/>
+          </a:prstGeom>
+          <a:noFill/>
+        </p:spPr>
+        <p:txBody>
+          <a:bodyPr wrap="square" anchor="t" lIns="0" rIns="0" tIns="0" bIns="0">
+            <a:spAutoFit/>
+          </a:bodyPr>
+          <a:lstStyle/>
+          <a:p>
+            <a:pPr algn="l">
+              <a:lnSpc>
+                <a:spcPct val="118000"/>
+              </a:lnSpc>
+            </a:pPr>
+            <a:r>
+              <a:rPr sz="1500" b="0" lang="ja-JP">
+                <a:solidFill>
+                  <a:srgbClr val="202729"/>
+                </a:solidFill>
+                <a:latin typeface="Yu Gothic"/>
+                <a:ea typeface="Yu Gothic"/>
+                <a:cs typeface="Yu Gothic"/>
+              </a:rPr>
+              <a:t>操作の起点が迷わず見つかるか</a:t>
+            </a:r>
+          </a:p>
+        </p:txBody>
+      </p:sp>
+      <p:sp>
+        <p:nvSpPr>
+          <p:cNvPr id="13" name="TextBox 12"/>
+          <p:cNvSpPr txBox="1"/>
+          <p:nvPr/>
+        </p:nvSpPr>
+        <p:spPr>
+          <a:xfrm>
+            <a:off x="6679691" y="2620518"/>
+            <a:ext cx="310896" cy="237744"/>
+          </a:xfrm>
+          <a:prstGeom prst="rect">
+            <a:avLst/>
+          </a:prstGeom>
+          <a:noFill/>
+        </p:spPr>
+        <p:txBody>
+          <a:bodyPr wrap="square" anchor="t" lIns="0" rIns="0" tIns="0" bIns="0">
+            <a:spAutoFit/>
+          </a:bodyPr>
+          <a:lstStyle/>
+          <a:p>
+            <a:pPr algn="r">
+              <a:lnSpc>
+                <a:spcPct val="130000"/>
+              </a:lnSpc>
+            </a:pPr>
+            <a:r>
+              <a:rPr sz="1000" b="1" lang="ja-JP">
+                <a:solidFill>
+                  <a:srgbClr val="0D7870"/>
+                </a:solidFill>
+                <a:latin typeface="Yu Gothic"/>
+                <a:ea typeface="Yu Gothic"/>
+                <a:cs typeface="Yu Gothic"/>
+              </a:rPr>
+              <a:t>02</a:t>
+            </a:r>
+          </a:p>
+        </p:txBody>
+      </p:sp>
+      <p:sp>
+        <p:nvSpPr>
+          <p:cNvPr id="14" name="TextBox 13"/>
+          <p:cNvSpPr txBox="1"/>
+          <p:nvPr/>
+        </p:nvSpPr>
+        <p:spPr>
+          <a:xfrm>
+            <a:off x="7100315" y="2638806"/>
+            <a:ext cx="4119372" cy="270510"/>
+          </a:xfrm>
+          <a:prstGeom prst="rect">
+            <a:avLst/>
+          </a:prstGeom>
+          <a:noFill/>
+        </p:spPr>
+        <p:txBody>
+          <a:bodyPr wrap="square" anchor="t" lIns="0" rIns="0" tIns="0" bIns="0">
+            <a:spAutoFit/>
+          </a:bodyPr>
+          <a:lstStyle/>
+          <a:p>
+            <a:pPr algn="l">
+              <a:lnSpc>
+                <a:spcPct val="118000"/>
+              </a:lnSpc>
+            </a:pPr>
+            <a:r>
+              <a:rPr sz="1500" b="0" lang="ja-JP">
+                <a:solidFill>
+                  <a:srgbClr val="202729"/>
+                </a:solidFill>
+                <a:latin typeface="Yu Gothic"/>
+                <a:ea typeface="Yu Gothic"/>
+                <a:cs typeface="Yu Gothic"/>
+              </a:rPr>
+              <a:t>主要な導線を少ない手順で追えるか</a:t>
+            </a:r>
+          </a:p>
+        </p:txBody>
+      </p:sp>
+      <p:sp>
+        <p:nvSpPr>
+          <p:cNvPr id="15" name="TextBox 14"/>
+          <p:cNvSpPr txBox="1"/>
+          <p:nvPr/>
+        </p:nvSpPr>
+        <p:spPr>
+          <a:xfrm>
+            <a:off x="6679691" y="3119628"/>
+            <a:ext cx="310896" cy="237744"/>
+          </a:xfrm>
+          <a:prstGeom prst="rect">
+            <a:avLst/>
+          </a:prstGeom>
+          <a:noFill/>
+        </p:spPr>
+        <p:txBody>
+          <a:bodyPr wrap="square" anchor="t" lIns="0" rIns="0" tIns="0" bIns="0">
+            <a:spAutoFit/>
+          </a:bodyPr>
+          <a:lstStyle/>
+          <a:p>
+            <a:pPr algn="r">
+              <a:lnSpc>
+                <a:spcPct val="130000"/>
+              </a:lnSpc>
+            </a:pPr>
+            <a:r>
+              <a:rPr sz="1000" b="1" lang="ja-JP">
+                <a:solidFill>
+                  <a:srgbClr val="0D7870"/>
+                </a:solidFill>
+                <a:latin typeface="Yu Gothic"/>
+                <a:ea typeface="Yu Gothic"/>
+                <a:cs typeface="Yu Gothic"/>
+              </a:rPr>
+              <a:t>03</a:t>
+            </a:r>
+          </a:p>
+        </p:txBody>
+      </p:sp>
+      <p:sp>
+        <p:nvSpPr>
+          <p:cNvPr id="16" name="TextBox 15"/>
+          <p:cNvSpPr txBox="1"/>
+          <p:nvPr/>
+        </p:nvSpPr>
+        <p:spPr>
+          <a:xfrm>
+            <a:off x="7100315" y="3137916"/>
+            <a:ext cx="4119372" cy="270510"/>
+          </a:xfrm>
+          <a:prstGeom prst="rect">
+            <a:avLst/>
+          </a:prstGeom>
+          <a:noFill/>
+        </p:spPr>
+        <p:txBody>
+          <a:bodyPr wrap="square" anchor="t" lIns="0" rIns="0" tIns="0" bIns="0">
+            <a:spAutoFit/>
+          </a:bodyPr>
+          <a:lstStyle/>
+          <a:p>
+            <a:pPr algn="l">
+              <a:lnSpc>
+                <a:spcPct val="118000"/>
+              </a:lnSpc>
+            </a:pPr>
+            <a:r>
+              <a:rPr sz="1500" b="0" lang="ja-JP">
+                <a:solidFill>
+                  <a:srgbClr val="202729"/>
+                </a:solidFill>
+                <a:latin typeface="Yu Gothic"/>
+                <a:ea typeface="Yu Gothic"/>
+                <a:cs typeface="Yu Gothic"/>
+              </a:rPr>
+              <a:t>権限境界と実行結果を確認できるか</a:t>
+            </a:r>
+          </a:p>
+        </p:txBody>
+      </p:sp>
+      <p:sp>
+        <p:nvSpPr>
+          <p:cNvPr id="17" name="Rectangle 16"/>
+          <p:cNvSpPr/>
+          <p:nvPr/>
+        </p:nvSpPr>
+        <p:spPr>
+          <a:xfrm>
+            <a:off x="658368" y="6327648"/>
+            <a:ext cx="10881360" cy="9144"/>
           </a:xfrm>
           <a:prstGeom prst="rect">
             <a:avLst/>
@@ -29466,403 +30026,7 @@
       </p:sp>
       <p:sp>
         <p:nvSpPr>
-          <p:cNvPr id="6" name="TextBox 5"/>
-          <p:cNvSpPr txBox="1"/>
-          <p:nvPr/>
-        </p:nvSpPr>
-        <p:spPr>
-          <a:xfrm>
-            <a:off x="658368" y="1463040"/>
-            <a:ext cx="5225795" cy="347472"/>
-          </a:xfrm>
-          <a:prstGeom prst="rect">
-            <a:avLst/>
-          </a:prstGeom>
-          <a:noFill/>
-        </p:spPr>
-        <p:txBody>
-          <a:bodyPr wrap="square" anchor="t" lIns="0" rIns="0" tIns="0" bIns="0">
-            <a:spAutoFit/>
-          </a:bodyPr>
-          <a:lstStyle/>
-          <a:p>
-            <a:pPr algn="l">
-              <a:lnSpc>
-                <a:spcPct val="108000"/>
-              </a:lnSpc>
-            </a:pPr>
-            <a:r>
-              <a:rPr sz="1650" b="1" lang="ja-JP">
-                <a:solidFill>
-                  <a:srgbClr val="182C43"/>
-                </a:solidFill>
-                <a:latin typeface="Yu Gothic"/>
-                <a:ea typeface="Yu Gothic"/>
-                <a:cs typeface="Yu Gothic"/>
-              </a:rPr>
-              <a:t>対象画面</a:t>
-            </a:r>
-          </a:p>
-        </p:txBody>
-      </p:sp>
-      <p:pic>
-        <p:nvPicPr>
-          <p:cNvPr id="7" name="ContentImage" descr="pptxdsl-repository.png"/>
-          <p:cNvPicPr>
-            <a:picLocks noChangeAspect="1"/>
-          </p:cNvPicPr>
-          <p:nvPr/>
-        </p:nvPicPr>
-        <p:blipFill>
-          <a:blip r:embed="rId2"/>
-          <a:stretch>
-            <a:fillRect/>
-          </a:stretch>
-        </p:blipFill>
-        <p:spPr>
-          <a:xfrm>
-            <a:off x="658368" y="2743294"/>
-            <a:ext cx="5225795" cy="2697291"/>
-          </a:xfrm>
-          <a:prstGeom prst="rect">
-            <a:avLst/>
-          </a:prstGeom>
-        </p:spPr>
-      </p:pic>
-      <p:sp>
-        <p:nvSpPr>
-          <p:cNvPr id="8" name="TextBox 7"/>
-          <p:cNvSpPr txBox="1"/>
-          <p:nvPr/>
-        </p:nvSpPr>
-        <p:spPr>
-          <a:xfrm>
-            <a:off x="6304787" y="1463040"/>
-            <a:ext cx="5225796" cy="347472"/>
-          </a:xfrm>
-          <a:prstGeom prst="rect">
-            <a:avLst/>
-          </a:prstGeom>
-          <a:noFill/>
-        </p:spPr>
-        <p:txBody>
-          <a:bodyPr wrap="square" anchor="t" lIns="0" rIns="0" tIns="0" bIns="0">
-            <a:spAutoFit/>
-          </a:bodyPr>
-          <a:lstStyle/>
-          <a:p>
-            <a:pPr algn="l">
-              <a:lnSpc>
-                <a:spcPct val="108000"/>
-              </a:lnSpc>
-            </a:pPr>
-            <a:r>
-              <a:rPr sz="1650" b="1" lang="ja-JP">
-                <a:solidFill>
-                  <a:srgbClr val="182C43"/>
-                </a:solidFill>
-                <a:latin typeface="Yu Gothic"/>
-                <a:ea typeface="Yu Gothic"/>
-                <a:cs typeface="Yu Gothic"/>
-              </a:rPr>
-              <a:t>確認事項</a:t>
-            </a:r>
-          </a:p>
-        </p:txBody>
-      </p:sp>
-      <p:sp>
-        <p:nvSpPr>
-          <p:cNvPr id="9" name="TextBox 8"/>
-          <p:cNvSpPr txBox="1"/>
-          <p:nvPr/>
-        </p:nvSpPr>
-        <p:spPr>
-          <a:xfrm>
-            <a:off x="6304787" y="2287143"/>
-            <a:ext cx="310896" cy="237744"/>
-          </a:xfrm>
-          <a:prstGeom prst="rect">
-            <a:avLst/>
-          </a:prstGeom>
-          <a:noFill/>
-        </p:spPr>
-        <p:txBody>
-          <a:bodyPr wrap="square" anchor="t" lIns="0" rIns="0" tIns="0" bIns="0">
-            <a:spAutoFit/>
-          </a:bodyPr>
-          <a:lstStyle/>
-          <a:p>
-            <a:pPr algn="r">
-              <a:lnSpc>
-                <a:spcPct val="130000"/>
-              </a:lnSpc>
-            </a:pPr>
-            <a:r>
-              <a:rPr sz="1000" b="1" lang="ja-JP">
-                <a:solidFill>
-                  <a:srgbClr val="0D7870"/>
-                </a:solidFill>
-                <a:latin typeface="Yu Gothic"/>
-                <a:ea typeface="Yu Gothic"/>
-                <a:cs typeface="Yu Gothic"/>
-              </a:rPr>
-              <a:t>01</a:t>
-            </a:r>
-          </a:p>
-        </p:txBody>
-      </p:sp>
-      <p:sp>
-        <p:nvSpPr>
-          <p:cNvPr id="10" name="TextBox 9"/>
-          <p:cNvSpPr txBox="1"/>
-          <p:nvPr/>
-        </p:nvSpPr>
-        <p:spPr>
-          <a:xfrm>
-            <a:off x="6725411" y="2305431"/>
-            <a:ext cx="4750308" cy="270510"/>
-          </a:xfrm>
-          <a:prstGeom prst="rect">
-            <a:avLst/>
-          </a:prstGeom>
-          <a:noFill/>
-        </p:spPr>
-        <p:txBody>
-          <a:bodyPr wrap="square" anchor="t" lIns="0" rIns="0" tIns="0" bIns="0">
-            <a:spAutoFit/>
-          </a:bodyPr>
-          <a:lstStyle/>
-          <a:p>
-            <a:pPr algn="l">
-              <a:lnSpc>
-                <a:spcPct val="118000"/>
-              </a:lnSpc>
-            </a:pPr>
-            <a:r>
-              <a:rPr sz="1500" b="0" lang="ja-JP">
-                <a:solidFill>
-                  <a:srgbClr val="202729"/>
-                </a:solidFill>
-                <a:latin typeface="Yu Gothic"/>
-                <a:ea typeface="Yu Gothic"/>
-                <a:cs typeface="Yu Gothic"/>
-              </a:rPr>
-              <a:t>操作の起点が迷わず見つかるか</a:t>
-            </a:r>
-          </a:p>
-        </p:txBody>
-      </p:sp>
-      <p:sp>
-        <p:nvSpPr>
-          <p:cNvPr id="11" name="TextBox 10"/>
-          <p:cNvSpPr txBox="1"/>
-          <p:nvPr/>
-        </p:nvSpPr>
-        <p:spPr>
-          <a:xfrm>
-            <a:off x="6304787" y="2786253"/>
-            <a:ext cx="310896" cy="237744"/>
-          </a:xfrm>
-          <a:prstGeom prst="rect">
-            <a:avLst/>
-          </a:prstGeom>
-          <a:noFill/>
-        </p:spPr>
-        <p:txBody>
-          <a:bodyPr wrap="square" anchor="t" lIns="0" rIns="0" tIns="0" bIns="0">
-            <a:spAutoFit/>
-          </a:bodyPr>
-          <a:lstStyle/>
-          <a:p>
-            <a:pPr algn="r">
-              <a:lnSpc>
-                <a:spcPct val="130000"/>
-              </a:lnSpc>
-            </a:pPr>
-            <a:r>
-              <a:rPr sz="1000" b="1" lang="ja-JP">
-                <a:solidFill>
-                  <a:srgbClr val="0D7870"/>
-                </a:solidFill>
-                <a:latin typeface="Yu Gothic"/>
-                <a:ea typeface="Yu Gothic"/>
-                <a:cs typeface="Yu Gothic"/>
-              </a:rPr>
-              <a:t>02</a:t>
-            </a:r>
-          </a:p>
-        </p:txBody>
-      </p:sp>
-      <p:sp>
-        <p:nvSpPr>
-          <p:cNvPr id="12" name="TextBox 11"/>
-          <p:cNvSpPr txBox="1"/>
-          <p:nvPr/>
-        </p:nvSpPr>
-        <p:spPr>
-          <a:xfrm>
-            <a:off x="6725411" y="2804541"/>
-            <a:ext cx="4750308" cy="270510"/>
-          </a:xfrm>
-          <a:prstGeom prst="rect">
-            <a:avLst/>
-          </a:prstGeom>
-          <a:noFill/>
-        </p:spPr>
-        <p:txBody>
-          <a:bodyPr wrap="square" anchor="t" lIns="0" rIns="0" tIns="0" bIns="0">
-            <a:spAutoFit/>
-          </a:bodyPr>
-          <a:lstStyle/>
-          <a:p>
-            <a:pPr algn="l">
-              <a:lnSpc>
-                <a:spcPct val="118000"/>
-              </a:lnSpc>
-            </a:pPr>
-            <a:r>
-              <a:rPr sz="1500" b="0" lang="ja-JP">
-                <a:solidFill>
-                  <a:srgbClr val="202729"/>
-                </a:solidFill>
-                <a:latin typeface="Yu Gothic"/>
-                <a:ea typeface="Yu Gothic"/>
-                <a:cs typeface="Yu Gothic"/>
-              </a:rPr>
-              <a:t>主要な導線を少ない手順で追えるか</a:t>
-            </a:r>
-          </a:p>
-        </p:txBody>
-      </p:sp>
-      <p:sp>
-        <p:nvSpPr>
-          <p:cNvPr id="13" name="TextBox 12"/>
-          <p:cNvSpPr txBox="1"/>
-          <p:nvPr/>
-        </p:nvSpPr>
-        <p:spPr>
-          <a:xfrm>
-            <a:off x="6304787" y="3285363"/>
-            <a:ext cx="310896" cy="237744"/>
-          </a:xfrm>
-          <a:prstGeom prst="rect">
-            <a:avLst/>
-          </a:prstGeom>
-          <a:noFill/>
-        </p:spPr>
-        <p:txBody>
-          <a:bodyPr wrap="square" anchor="t" lIns="0" rIns="0" tIns="0" bIns="0">
-            <a:spAutoFit/>
-          </a:bodyPr>
-          <a:lstStyle/>
-          <a:p>
-            <a:pPr algn="r">
-              <a:lnSpc>
-                <a:spcPct val="130000"/>
-              </a:lnSpc>
-            </a:pPr>
-            <a:r>
-              <a:rPr sz="1000" b="1" lang="ja-JP">
-                <a:solidFill>
-                  <a:srgbClr val="0D7870"/>
-                </a:solidFill>
-                <a:latin typeface="Yu Gothic"/>
-                <a:ea typeface="Yu Gothic"/>
-                <a:cs typeface="Yu Gothic"/>
-              </a:rPr>
-              <a:t>03</a:t>
-            </a:r>
-          </a:p>
-        </p:txBody>
-      </p:sp>
-      <p:sp>
-        <p:nvSpPr>
-          <p:cNvPr id="14" name="TextBox 13"/>
-          <p:cNvSpPr txBox="1"/>
-          <p:nvPr/>
-        </p:nvSpPr>
-        <p:spPr>
-          <a:xfrm>
-            <a:off x="6725411" y="3303651"/>
-            <a:ext cx="4750308" cy="270510"/>
-          </a:xfrm>
-          <a:prstGeom prst="rect">
-            <a:avLst/>
-          </a:prstGeom>
-          <a:noFill/>
-        </p:spPr>
-        <p:txBody>
-          <a:bodyPr wrap="square" anchor="t" lIns="0" rIns="0" tIns="0" bIns="0">
-            <a:spAutoFit/>
-          </a:bodyPr>
-          <a:lstStyle/>
-          <a:p>
-            <a:pPr algn="l">
-              <a:lnSpc>
-                <a:spcPct val="118000"/>
-              </a:lnSpc>
-            </a:pPr>
-            <a:r>
-              <a:rPr sz="1500" b="0" lang="ja-JP">
-                <a:solidFill>
-                  <a:srgbClr val="202729"/>
-                </a:solidFill>
-                <a:latin typeface="Yu Gothic"/>
-                <a:ea typeface="Yu Gothic"/>
-                <a:cs typeface="Yu Gothic"/>
-              </a:rPr>
-              <a:t>権限境界と実行結果を確認できるか</a:t>
-            </a:r>
-          </a:p>
-        </p:txBody>
-      </p:sp>
-      <p:sp>
-        <p:nvSpPr>
-          <p:cNvPr id="15" name="Rectangle 14"/>
-          <p:cNvSpPr/>
-          <p:nvPr/>
-        </p:nvSpPr>
-        <p:spPr>
-          <a:xfrm>
-            <a:off x="658368" y="6327648"/>
-            <a:ext cx="10881360" cy="9144"/>
-          </a:xfrm>
-          <a:prstGeom prst="rect">
-            <a:avLst/>
-          </a:prstGeom>
-          <a:solidFill>
-            <a:srgbClr val="D1CFC8"/>
-          </a:solidFill>
-          <a:ln>
-            <a:noFill/>
-          </a:ln>
-          <a:effectLst/>
-        </p:spPr>
-        <p:style>
-          <a:lnRef idx="1">
-            <a:schemeClr val="accent1"/>
-          </a:lnRef>
-          <a:fillRef idx="3">
-            <a:schemeClr val="accent1"/>
-          </a:fillRef>
-          <a:effectRef idx="2">
-            <a:schemeClr val="accent1"/>
-          </a:effectRef>
-          <a:fontRef idx="minor">
-            <a:schemeClr val="lt1"/>
-          </a:fontRef>
-        </p:style>
-        <p:txBody>
-          <a:bodyPr rtlCol="0" anchor="ctr"/>
-          <a:lstStyle/>
-          <a:p>
-            <a:pPr algn="ctr"/>
-          </a:p>
-        </p:txBody>
-      </p:sp>
-      <p:sp>
-        <p:nvSpPr>
-          <p:cNvPr id="16" name="TextBox 15"/>
+          <p:cNvPr id="18" name="TextBox 17"/>
           <p:cNvSpPr txBox="1"/>
           <p:nvPr/>
         </p:nvSpPr>
@@ -29903,7 +30067,7 @@
       </p:sp>
       <p:sp>
         <p:nvSpPr>
-          <p:cNvPr id="17" name="TextBox 16"/>
+          <p:cNvPr id="19" name="TextBox 18"/>
           <p:cNvSpPr txBox="1"/>
           <p:nvPr/>
         </p:nvSpPr>
@@ -29944,7 +30108,7 @@
       </p:sp>
       <p:sp>
         <p:nvSpPr>
-          <p:cNvPr id="18" name="TextBox 17"/>
+          <p:cNvPr id="20" name="TextBox 19"/>
           <p:cNvSpPr txBox="1"/>
           <p:nvPr/>
         </p:nvSpPr>
@@ -30135,14 +30299,14 @@
         </p:nvSpPr>
         <p:spPr>
           <a:xfrm>
-            <a:off x="6094475" y="1499616"/>
-            <a:ext cx="7315" cy="4727448"/>
+            <a:off x="6423659" y="1426464"/>
+            <a:ext cx="5106924" cy="4800600"/>
           </a:xfrm>
           <a:prstGeom prst="rect">
             <a:avLst/>
           </a:prstGeom>
           <a:solidFill>
-            <a:srgbClr val="D1CFC8"/>
+            <a:srgbClr val="ECEAE4"/>
           </a:solidFill>
           <a:ln>
             <a:noFill/>
@@ -30179,8 +30343,49 @@
         </p:nvSpPr>
         <p:spPr>
           <a:xfrm>
-            <a:off x="658368" y="1463040"/>
-            <a:ext cx="5225795" cy="347472"/>
+            <a:off x="694944" y="1481328"/>
+            <a:ext cx="310896" cy="219456"/>
+          </a:xfrm>
+          <a:prstGeom prst="rect">
+            <a:avLst/>
+          </a:prstGeom>
+          <a:noFill/>
+        </p:spPr>
+        <p:txBody>
+          <a:bodyPr wrap="square" anchor="t" lIns="0" rIns="0" tIns="0" bIns="0">
+            <a:spAutoFit/>
+          </a:bodyPr>
+          <a:lstStyle/>
+          <a:p>
+            <a:pPr algn="l">
+              <a:lnSpc>
+                <a:spcPct val="130000"/>
+              </a:lnSpc>
+            </a:pPr>
+            <a:r>
+              <a:rPr sz="950" b="1" lang="ja-JP">
+                <a:solidFill>
+                  <a:srgbClr val="0D7870"/>
+                </a:solidFill>
+                <a:latin typeface="Yu Gothic"/>
+                <a:ea typeface="Yu Gothic"/>
+                <a:cs typeface="Yu Gothic"/>
+              </a:rPr>
+              <a:t>01</a:t>
+            </a:r>
+          </a:p>
+        </p:txBody>
+      </p:sp>
+      <p:sp>
+        <p:nvSpPr>
+          <p:cNvPr id="7" name="TextBox 6"/>
+          <p:cNvSpPr txBox="1"/>
+          <p:nvPr/>
+        </p:nvSpPr>
+        <p:spPr>
+          <a:xfrm>
+            <a:off x="1097280" y="1453896"/>
+            <a:ext cx="4631435" cy="347472"/>
           </a:xfrm>
           <a:prstGeom prst="rect">
             <a:avLst/>
@@ -30214,15 +30419,15 @@
       </p:sp>
       <p:graphicFrame>
         <p:nvGraphicFramePr>
-          <p:cNvPr id="7" name="Chart 6"/>
+          <p:cNvPr id="8" name="Chart 7"/>
           <p:cNvGraphicFramePr>
             <a:graphicFrameLocks noGrp="1"/>
           </p:cNvGraphicFramePr>
           <p:nvPr/>
         </p:nvGraphicFramePr>
         <p:xfrm>
-          <a:off x="658368" y="1938528"/>
-          <a:ext cx="5225795" cy="4270248"/>
+          <a:off x="694944" y="2084832"/>
+          <a:ext cx="5033771" cy="4014215"/>
         </p:xfrm>
         <a:graphic>
           <a:graphicData uri="http://schemas.openxmlformats.org/drawingml/2006/chart">
@@ -30232,14 +30437,55 @@
       </p:graphicFrame>
       <p:sp>
         <p:nvSpPr>
-          <p:cNvPr id="8" name="TextBox 7"/>
-          <p:cNvSpPr txBox="1"/>
-          <p:nvPr/>
-        </p:nvSpPr>
-        <p:spPr>
-          <a:xfrm>
-            <a:off x="6304787" y="1463040"/>
-            <a:ext cx="5225796" cy="347472"/>
+          <p:cNvPr id="9" name="TextBox 8"/>
+          <p:cNvSpPr txBox="1"/>
+          <p:nvPr/>
+        </p:nvSpPr>
+        <p:spPr>
+          <a:xfrm>
+            <a:off x="6679691" y="1481328"/>
+            <a:ext cx="310896" cy="219456"/>
+          </a:xfrm>
+          <a:prstGeom prst="rect">
+            <a:avLst/>
+          </a:prstGeom>
+          <a:noFill/>
+        </p:spPr>
+        <p:txBody>
+          <a:bodyPr wrap="square" anchor="t" lIns="0" rIns="0" tIns="0" bIns="0">
+            <a:spAutoFit/>
+          </a:bodyPr>
+          <a:lstStyle/>
+          <a:p>
+            <a:pPr algn="l">
+              <a:lnSpc>
+                <a:spcPct val="130000"/>
+              </a:lnSpc>
+            </a:pPr>
+            <a:r>
+              <a:rPr sz="950" b="1" lang="ja-JP">
+                <a:solidFill>
+                  <a:srgbClr val="0D7870"/>
+                </a:solidFill>
+                <a:latin typeface="Yu Gothic"/>
+                <a:ea typeface="Yu Gothic"/>
+                <a:cs typeface="Yu Gothic"/>
+              </a:rPr>
+              <a:t>02</a:t>
+            </a:r>
+          </a:p>
+        </p:txBody>
+      </p:sp>
+      <p:sp>
+        <p:nvSpPr>
+          <p:cNvPr id="10" name="TextBox 9"/>
+          <p:cNvSpPr txBox="1"/>
+          <p:nvPr/>
+        </p:nvSpPr>
+        <p:spPr>
+          <a:xfrm>
+            <a:off x="7082027" y="1453896"/>
+            <a:ext cx="4192524" cy="347472"/>
           </a:xfrm>
           <a:prstGeom prst="rect">
             <a:avLst/>
@@ -30273,15 +30519,15 @@
       </p:sp>
       <p:graphicFrame>
         <p:nvGraphicFramePr>
-          <p:cNvPr id="9" name="Table 8"/>
+          <p:cNvPr id="11" name="Table 10"/>
           <p:cNvGraphicFramePr>
             <a:graphicFrameLocks noGrp="1"/>
           </p:cNvGraphicFramePr>
           <p:nvPr/>
         </p:nvGraphicFramePr>
         <p:xfrm>
-          <a:off x="6304787" y="1956816"/>
-          <a:ext cx="5225796" cy="1755648"/>
+          <a:off x="6679691" y="2103120"/>
+          <a:ext cx="4594860" cy="1755648"/>
         </p:xfrm>
         <a:graphic>
           <a:graphicData uri="http://schemas.openxmlformats.org/drawingml/2006/table">
@@ -30290,8 +30536,8 @@
                 <a:tableStyleId>{5C22544A-7EE6-4342-B048-85BDC9FD1C3A}</a:tableStyleId>
               </a:tblPr>
               <a:tblGrid>
-                <a:gridCol w="2612898"/>
-                <a:gridCol w="2612898"/>
+                <a:gridCol w="2297430"/>
+                <a:gridCol w="2297430"/>
               </a:tblGrid>
               <a:tr h="493776">
                 <a:tc>
@@ -30539,7 +30785,7 @@
       </p:graphicFrame>
       <p:sp>
         <p:nvSpPr>
-          <p:cNvPr id="10" name="Rectangle 9"/>
+          <p:cNvPr id="12" name="Rectangle 11"/>
           <p:cNvSpPr/>
           <p:nvPr/>
         </p:nvSpPr>
@@ -30583,7 +30829,7 @@
       </p:sp>
       <p:sp>
         <p:nvSpPr>
-          <p:cNvPr id="11" name="TextBox 10"/>
+          <p:cNvPr id="13" name="TextBox 12"/>
           <p:cNvSpPr txBox="1"/>
           <p:nvPr/>
         </p:nvSpPr>
@@ -30624,7 +30870,7 @@
       </p:sp>
       <p:sp>
         <p:nvSpPr>
-          <p:cNvPr id="12" name="TextBox 11"/>
+          <p:cNvPr id="14" name="TextBox 13"/>
           <p:cNvSpPr txBox="1"/>
           <p:nvPr/>
         </p:nvSpPr>
@@ -30665,7 +30911,7 @@
       </p:sp>
       <p:sp>
         <p:nvSpPr>
-          <p:cNvPr id="13" name="TextBox 12"/>
+          <p:cNvPr id="15" name="TextBox 14"/>
           <p:cNvSpPr txBox="1"/>
           <p:nvPr/>
         </p:nvSpPr>

--- a/examples/gallery/pattern_gallery.pptx
+++ b/examples/gallery/pattern_gallery.pptx
@@ -8094,7 +8094,7 @@
         <p:spPr>
           <a:xfrm>
             <a:off x="658368" y="1664208"/>
-            <a:ext cx="10872216" cy="438912"/>
+            <a:ext cx="2423160" cy="438912"/>
           </a:xfrm>
           <a:prstGeom prst="rect">
             <a:avLst/>
@@ -8137,8 +8137,8 @@
         </p:nvSpPr>
         <p:spPr>
           <a:xfrm>
-            <a:off x="658368" y="1737360"/>
-            <a:ext cx="906018" cy="274320"/>
+            <a:off x="822959" y="1737360"/>
+            <a:ext cx="2093976" cy="256032"/>
           </a:xfrm>
           <a:prstGeom prst="rect">
             <a:avLst/>
@@ -8151,6 +8151,91 @@
           </a:bodyPr>
           <a:lstStyle/>
           <a:p>
+            <a:pPr algn="l">
+              <a:lnSpc>
+                <a:spcPct val="130000"/>
+              </a:lnSpc>
+            </a:pPr>
+            <a:r>
+              <a:rPr sz="1050" b="1" lang="ja-JP">
+                <a:solidFill>
+                  <a:srgbClr val="FFFFFC"/>
+                </a:solidFill>
+                <a:latin typeface="Yu Gothic"/>
+                <a:ea typeface="Yu Gothic"/>
+                <a:cs typeface="Yu Gothic"/>
+              </a:rPr>
+              <a:t>フェーズ</a:t>
+            </a:r>
+          </a:p>
+        </p:txBody>
+      </p:sp>
+      <p:sp>
+        <p:nvSpPr>
+          <p:cNvPr id="7" name="Rectangle 6"/>
+          <p:cNvSpPr/>
+          <p:nvPr/>
+        </p:nvSpPr>
+        <p:spPr>
+          <a:xfrm>
+            <a:off x="3081528" y="1664208"/>
+            <a:ext cx="8430768" cy="438912"/>
+          </a:xfrm>
+          <a:prstGeom prst="rect">
+            <a:avLst/>
+          </a:prstGeom>
+          <a:solidFill>
+            <a:srgbClr val="182C43"/>
+          </a:solidFill>
+          <a:ln>
+            <a:noFill/>
+          </a:ln>
+          <a:effectLst/>
+        </p:spPr>
+        <p:style>
+          <a:lnRef idx="1">
+            <a:schemeClr val="accent1"/>
+          </a:lnRef>
+          <a:fillRef idx="3">
+            <a:schemeClr val="accent1"/>
+          </a:fillRef>
+          <a:effectRef idx="2">
+            <a:schemeClr val="accent1"/>
+          </a:effectRef>
+          <a:fontRef idx="minor">
+            <a:schemeClr val="lt1"/>
+          </a:fontRef>
+        </p:style>
+        <p:txBody>
+          <a:bodyPr rtlCol="0" anchor="ctr"/>
+          <a:lstStyle/>
+          <a:p>
+            <a:pPr algn="ctr"/>
+          </a:p>
+        </p:txBody>
+      </p:sp>
+      <p:sp>
+        <p:nvSpPr>
+          <p:cNvPr id="8" name="TextBox 7"/>
+          <p:cNvSpPr txBox="1"/>
+          <p:nvPr/>
+        </p:nvSpPr>
+        <p:spPr>
+          <a:xfrm>
+            <a:off x="3081528" y="1737360"/>
+            <a:ext cx="702564" cy="274320"/>
+          </a:xfrm>
+          <a:prstGeom prst="rect">
+            <a:avLst/>
+          </a:prstGeom>
+          <a:noFill/>
+        </p:spPr>
+        <p:txBody>
+          <a:bodyPr wrap="square" anchor="t" lIns="0" rIns="0" tIns="0" bIns="0">
+            <a:spAutoFit/>
+          </a:bodyPr>
+          <a:lstStyle/>
+          <a:p>
             <a:pPr algn="ctr">
               <a:lnSpc>
                 <a:spcPct val="130000"/>
@@ -8172,14 +8257,14 @@
       </p:sp>
       <p:sp>
         <p:nvSpPr>
-          <p:cNvPr id="7" name="TextBox 6"/>
-          <p:cNvSpPr txBox="1"/>
-          <p:nvPr/>
-        </p:nvSpPr>
-        <p:spPr>
-          <a:xfrm>
-            <a:off x="1564386" y="1737360"/>
-            <a:ext cx="906018" cy="274320"/>
+          <p:cNvPr id="9" name="TextBox 8"/>
+          <p:cNvSpPr txBox="1"/>
+          <p:nvPr/>
+        </p:nvSpPr>
+        <p:spPr>
+          <a:xfrm>
+            <a:off x="3784092" y="1737360"/>
+            <a:ext cx="702564" cy="274320"/>
           </a:xfrm>
           <a:prstGeom prst="rect">
             <a:avLst/>
@@ -8213,13 +8298,13 @@
       </p:sp>
       <p:sp>
         <p:nvSpPr>
-          <p:cNvPr id="8" name="Rectangle 7"/>
+          <p:cNvPr id="10" name="Rectangle 9"/>
           <p:cNvSpPr/>
           <p:nvPr/>
         </p:nvSpPr>
         <p:spPr>
           <a:xfrm>
-            <a:off x="1564386" y="1737360"/>
+            <a:off x="3784092" y="1737360"/>
             <a:ext cx="9144" cy="292607"/>
           </a:xfrm>
           <a:prstGeom prst="rect">
@@ -8257,14 +8342,14 @@
       </p:sp>
       <p:sp>
         <p:nvSpPr>
-          <p:cNvPr id="9" name="TextBox 8"/>
-          <p:cNvSpPr txBox="1"/>
-          <p:nvPr/>
-        </p:nvSpPr>
-        <p:spPr>
-          <a:xfrm>
-            <a:off x="2470404" y="1737360"/>
-            <a:ext cx="906018" cy="274320"/>
+          <p:cNvPr id="11" name="TextBox 10"/>
+          <p:cNvSpPr txBox="1"/>
+          <p:nvPr/>
+        </p:nvSpPr>
+        <p:spPr>
+          <a:xfrm>
+            <a:off x="4486656" y="1737360"/>
+            <a:ext cx="702564" cy="274320"/>
           </a:xfrm>
           <a:prstGeom prst="rect">
             <a:avLst/>
@@ -8298,13 +8383,13 @@
       </p:sp>
       <p:sp>
         <p:nvSpPr>
-          <p:cNvPr id="10" name="Rectangle 9"/>
+          <p:cNvPr id="12" name="Rectangle 11"/>
           <p:cNvSpPr/>
           <p:nvPr/>
         </p:nvSpPr>
         <p:spPr>
           <a:xfrm>
-            <a:off x="2470404" y="1737360"/>
+            <a:off x="4486656" y="1737360"/>
             <a:ext cx="9144" cy="292607"/>
           </a:xfrm>
           <a:prstGeom prst="rect">
@@ -8342,14 +8427,14 @@
       </p:sp>
       <p:sp>
         <p:nvSpPr>
-          <p:cNvPr id="11" name="TextBox 10"/>
-          <p:cNvSpPr txBox="1"/>
-          <p:nvPr/>
-        </p:nvSpPr>
-        <p:spPr>
-          <a:xfrm>
-            <a:off x="3376422" y="1737360"/>
-            <a:ext cx="906018" cy="274320"/>
+          <p:cNvPr id="13" name="TextBox 12"/>
+          <p:cNvSpPr txBox="1"/>
+          <p:nvPr/>
+        </p:nvSpPr>
+        <p:spPr>
+          <a:xfrm>
+            <a:off x="5189220" y="1737360"/>
+            <a:ext cx="702564" cy="274320"/>
           </a:xfrm>
           <a:prstGeom prst="rect">
             <a:avLst/>
@@ -8383,13 +8468,13 @@
       </p:sp>
       <p:sp>
         <p:nvSpPr>
-          <p:cNvPr id="12" name="Rectangle 11"/>
+          <p:cNvPr id="14" name="Rectangle 13"/>
           <p:cNvSpPr/>
           <p:nvPr/>
         </p:nvSpPr>
         <p:spPr>
           <a:xfrm>
-            <a:off x="3376422" y="1737360"/>
+            <a:off x="5189220" y="1737360"/>
             <a:ext cx="9144" cy="292607"/>
           </a:xfrm>
           <a:prstGeom prst="rect">
@@ -8427,14 +8512,14 @@
       </p:sp>
       <p:sp>
         <p:nvSpPr>
-          <p:cNvPr id="13" name="TextBox 12"/>
-          <p:cNvSpPr txBox="1"/>
-          <p:nvPr/>
-        </p:nvSpPr>
-        <p:spPr>
-          <a:xfrm>
-            <a:off x="4282440" y="1737360"/>
-            <a:ext cx="906018" cy="274320"/>
+          <p:cNvPr id="15" name="TextBox 14"/>
+          <p:cNvSpPr txBox="1"/>
+          <p:nvPr/>
+        </p:nvSpPr>
+        <p:spPr>
+          <a:xfrm>
+            <a:off x="5891784" y="1737360"/>
+            <a:ext cx="702564" cy="274320"/>
           </a:xfrm>
           <a:prstGeom prst="rect">
             <a:avLst/>
@@ -8468,13 +8553,13 @@
       </p:sp>
       <p:sp>
         <p:nvSpPr>
-          <p:cNvPr id="14" name="Rectangle 13"/>
+          <p:cNvPr id="16" name="Rectangle 15"/>
           <p:cNvSpPr/>
           <p:nvPr/>
         </p:nvSpPr>
         <p:spPr>
           <a:xfrm>
-            <a:off x="4282440" y="1737360"/>
+            <a:off x="5891784" y="1737360"/>
             <a:ext cx="9144" cy="292607"/>
           </a:xfrm>
           <a:prstGeom prst="rect">
@@ -8512,14 +8597,14 @@
       </p:sp>
       <p:sp>
         <p:nvSpPr>
-          <p:cNvPr id="15" name="TextBox 14"/>
-          <p:cNvSpPr txBox="1"/>
-          <p:nvPr/>
-        </p:nvSpPr>
-        <p:spPr>
-          <a:xfrm>
-            <a:off x="5188458" y="1737360"/>
-            <a:ext cx="906018" cy="274320"/>
+          <p:cNvPr id="17" name="TextBox 16"/>
+          <p:cNvSpPr txBox="1"/>
+          <p:nvPr/>
+        </p:nvSpPr>
+        <p:spPr>
+          <a:xfrm>
+            <a:off x="6594348" y="1737360"/>
+            <a:ext cx="702564" cy="274320"/>
           </a:xfrm>
           <a:prstGeom prst="rect">
             <a:avLst/>
@@ -8553,13 +8638,13 @@
       </p:sp>
       <p:sp>
         <p:nvSpPr>
-          <p:cNvPr id="16" name="Rectangle 15"/>
+          <p:cNvPr id="18" name="Rectangle 17"/>
           <p:cNvSpPr/>
           <p:nvPr/>
         </p:nvSpPr>
         <p:spPr>
           <a:xfrm>
-            <a:off x="5188458" y="1737360"/>
+            <a:off x="6594348" y="1737360"/>
             <a:ext cx="9144" cy="292607"/>
           </a:xfrm>
           <a:prstGeom prst="rect">
@@ -8597,14 +8682,14 @@
       </p:sp>
       <p:sp>
         <p:nvSpPr>
-          <p:cNvPr id="17" name="TextBox 16"/>
-          <p:cNvSpPr txBox="1"/>
-          <p:nvPr/>
-        </p:nvSpPr>
-        <p:spPr>
-          <a:xfrm>
-            <a:off x="6094476" y="1737360"/>
-            <a:ext cx="906018" cy="274320"/>
+          <p:cNvPr id="19" name="TextBox 18"/>
+          <p:cNvSpPr txBox="1"/>
+          <p:nvPr/>
+        </p:nvSpPr>
+        <p:spPr>
+          <a:xfrm>
+            <a:off x="7296912" y="1737360"/>
+            <a:ext cx="702564" cy="274320"/>
           </a:xfrm>
           <a:prstGeom prst="rect">
             <a:avLst/>
@@ -8638,13 +8723,13 @@
       </p:sp>
       <p:sp>
         <p:nvSpPr>
-          <p:cNvPr id="18" name="Rectangle 17"/>
+          <p:cNvPr id="20" name="Rectangle 19"/>
           <p:cNvSpPr/>
           <p:nvPr/>
         </p:nvSpPr>
         <p:spPr>
           <a:xfrm>
-            <a:off x="6094476" y="1737360"/>
+            <a:off x="7296912" y="1737360"/>
             <a:ext cx="9144" cy="292607"/>
           </a:xfrm>
           <a:prstGeom prst="rect">
@@ -8682,14 +8767,14 @@
       </p:sp>
       <p:sp>
         <p:nvSpPr>
-          <p:cNvPr id="19" name="TextBox 18"/>
-          <p:cNvSpPr txBox="1"/>
-          <p:nvPr/>
-        </p:nvSpPr>
-        <p:spPr>
-          <a:xfrm>
-            <a:off x="7000494" y="1737360"/>
-            <a:ext cx="906018" cy="274320"/>
+          <p:cNvPr id="21" name="TextBox 20"/>
+          <p:cNvSpPr txBox="1"/>
+          <p:nvPr/>
+        </p:nvSpPr>
+        <p:spPr>
+          <a:xfrm>
+            <a:off x="7999476" y="1737360"/>
+            <a:ext cx="702564" cy="274320"/>
           </a:xfrm>
           <a:prstGeom prst="rect">
             <a:avLst/>
@@ -8723,13 +8808,13 @@
       </p:sp>
       <p:sp>
         <p:nvSpPr>
-          <p:cNvPr id="20" name="Rectangle 19"/>
+          <p:cNvPr id="22" name="Rectangle 21"/>
           <p:cNvSpPr/>
           <p:nvPr/>
         </p:nvSpPr>
         <p:spPr>
           <a:xfrm>
-            <a:off x="7000494" y="1737360"/>
+            <a:off x="7999476" y="1737360"/>
             <a:ext cx="9144" cy="292607"/>
           </a:xfrm>
           <a:prstGeom prst="rect">
@@ -8767,14 +8852,14 @@
       </p:sp>
       <p:sp>
         <p:nvSpPr>
-          <p:cNvPr id="21" name="TextBox 20"/>
-          <p:cNvSpPr txBox="1"/>
-          <p:nvPr/>
-        </p:nvSpPr>
-        <p:spPr>
-          <a:xfrm>
-            <a:off x="7906512" y="1737360"/>
-            <a:ext cx="906018" cy="274320"/>
+          <p:cNvPr id="23" name="TextBox 22"/>
+          <p:cNvSpPr txBox="1"/>
+          <p:nvPr/>
+        </p:nvSpPr>
+        <p:spPr>
+          <a:xfrm>
+            <a:off x="8702040" y="1737360"/>
+            <a:ext cx="702564" cy="274320"/>
           </a:xfrm>
           <a:prstGeom prst="rect">
             <a:avLst/>
@@ -8808,13 +8893,13 @@
       </p:sp>
       <p:sp>
         <p:nvSpPr>
-          <p:cNvPr id="22" name="Rectangle 21"/>
+          <p:cNvPr id="24" name="Rectangle 23"/>
           <p:cNvSpPr/>
           <p:nvPr/>
         </p:nvSpPr>
         <p:spPr>
           <a:xfrm>
-            <a:off x="7906512" y="1737360"/>
+            <a:off x="8702040" y="1737360"/>
             <a:ext cx="9144" cy="292607"/>
           </a:xfrm>
           <a:prstGeom prst="rect">
@@ -8852,14 +8937,14 @@
       </p:sp>
       <p:sp>
         <p:nvSpPr>
-          <p:cNvPr id="23" name="TextBox 22"/>
-          <p:cNvSpPr txBox="1"/>
-          <p:nvPr/>
-        </p:nvSpPr>
-        <p:spPr>
-          <a:xfrm>
-            <a:off x="8812530" y="1737360"/>
-            <a:ext cx="906018" cy="274320"/>
+          <p:cNvPr id="25" name="TextBox 24"/>
+          <p:cNvSpPr txBox="1"/>
+          <p:nvPr/>
+        </p:nvSpPr>
+        <p:spPr>
+          <a:xfrm>
+            <a:off x="9404604" y="1737360"/>
+            <a:ext cx="702564" cy="274320"/>
           </a:xfrm>
           <a:prstGeom prst="rect">
             <a:avLst/>
@@ -8893,13 +8978,13 @@
       </p:sp>
       <p:sp>
         <p:nvSpPr>
-          <p:cNvPr id="24" name="Rectangle 23"/>
+          <p:cNvPr id="26" name="Rectangle 25"/>
           <p:cNvSpPr/>
           <p:nvPr/>
         </p:nvSpPr>
         <p:spPr>
           <a:xfrm>
-            <a:off x="8812530" y="1737360"/>
+            <a:off x="9404604" y="1737360"/>
             <a:ext cx="9144" cy="292607"/>
           </a:xfrm>
           <a:prstGeom prst="rect">
@@ -8937,14 +9022,14 @@
       </p:sp>
       <p:sp>
         <p:nvSpPr>
-          <p:cNvPr id="25" name="TextBox 24"/>
-          <p:cNvSpPr txBox="1"/>
-          <p:nvPr/>
-        </p:nvSpPr>
-        <p:spPr>
-          <a:xfrm>
-            <a:off x="9718548" y="1737360"/>
-            <a:ext cx="906018" cy="274320"/>
+          <p:cNvPr id="27" name="TextBox 26"/>
+          <p:cNvSpPr txBox="1"/>
+          <p:nvPr/>
+        </p:nvSpPr>
+        <p:spPr>
+          <a:xfrm>
+            <a:off x="10107168" y="1737360"/>
+            <a:ext cx="702564" cy="274320"/>
           </a:xfrm>
           <a:prstGeom prst="rect">
             <a:avLst/>
@@ -8978,13 +9063,13 @@
       </p:sp>
       <p:sp>
         <p:nvSpPr>
-          <p:cNvPr id="26" name="Rectangle 25"/>
+          <p:cNvPr id="28" name="Rectangle 27"/>
           <p:cNvSpPr/>
           <p:nvPr/>
         </p:nvSpPr>
         <p:spPr>
           <a:xfrm>
-            <a:off x="9718548" y="1737360"/>
+            <a:off x="10107168" y="1737360"/>
             <a:ext cx="9144" cy="292607"/>
           </a:xfrm>
           <a:prstGeom prst="rect">
@@ -9022,14 +9107,14 @@
       </p:sp>
       <p:sp>
         <p:nvSpPr>
-          <p:cNvPr id="27" name="TextBox 26"/>
-          <p:cNvSpPr txBox="1"/>
-          <p:nvPr/>
-        </p:nvSpPr>
-        <p:spPr>
-          <a:xfrm>
-            <a:off x="10624566" y="1737360"/>
-            <a:ext cx="906018" cy="274320"/>
+          <p:cNvPr id="29" name="TextBox 28"/>
+          <p:cNvSpPr txBox="1"/>
+          <p:nvPr/>
+        </p:nvSpPr>
+        <p:spPr>
+          <a:xfrm>
+            <a:off x="10809732" y="1737360"/>
+            <a:ext cx="702564" cy="274320"/>
           </a:xfrm>
           <a:prstGeom prst="rect">
             <a:avLst/>
@@ -9063,13 +9148,13 @@
       </p:sp>
       <p:sp>
         <p:nvSpPr>
-          <p:cNvPr id="28" name="Rectangle 27"/>
+          <p:cNvPr id="30" name="Rectangle 29"/>
           <p:cNvSpPr/>
           <p:nvPr/>
         </p:nvSpPr>
         <p:spPr>
           <a:xfrm>
-            <a:off x="10624566" y="1737360"/>
+            <a:off x="10809732" y="1737360"/>
             <a:ext cx="9144" cy="292607"/>
           </a:xfrm>
           <a:prstGeom prst="rect">
@@ -9107,14 +9192,14 @@
       </p:sp>
       <p:sp>
         <p:nvSpPr>
-          <p:cNvPr id="29" name="Rectangle 28"/>
+          <p:cNvPr id="31" name="Rectangle 30"/>
           <p:cNvSpPr/>
           <p:nvPr/>
         </p:nvSpPr>
         <p:spPr>
           <a:xfrm>
             <a:off x="658368" y="2103120"/>
-            <a:ext cx="10872216" cy="713232"/>
+            <a:ext cx="10853928" cy="713232"/>
           </a:xfrm>
           <a:prstGeom prst="rect">
             <a:avLst/>
@@ -9151,14 +9236,14 @@
       </p:sp>
       <p:sp>
         <p:nvSpPr>
-          <p:cNvPr id="30" name="Rectangle 29"/>
+          <p:cNvPr id="32" name="Rectangle 31"/>
           <p:cNvSpPr/>
           <p:nvPr/>
         </p:nvSpPr>
         <p:spPr>
           <a:xfrm>
             <a:off x="658368" y="2816352"/>
-            <a:ext cx="10872216" cy="713232"/>
+            <a:ext cx="10853928" cy="713232"/>
           </a:xfrm>
           <a:prstGeom prst="rect">
             <a:avLst/>
@@ -9195,14 +9280,14 @@
       </p:sp>
       <p:sp>
         <p:nvSpPr>
-          <p:cNvPr id="31" name="Rectangle 30"/>
+          <p:cNvPr id="33" name="Rectangle 32"/>
           <p:cNvSpPr/>
           <p:nvPr/>
         </p:nvSpPr>
         <p:spPr>
           <a:xfrm>
             <a:off x="658368" y="3529584"/>
-            <a:ext cx="10872216" cy="713232"/>
+            <a:ext cx="10853928" cy="713232"/>
           </a:xfrm>
           <a:prstGeom prst="rect">
             <a:avLst/>
@@ -9239,14 +9324,14 @@
       </p:sp>
       <p:sp>
         <p:nvSpPr>
-          <p:cNvPr id="32" name="Rectangle 31"/>
+          <p:cNvPr id="34" name="Rectangle 33"/>
           <p:cNvSpPr/>
           <p:nvPr/>
         </p:nvSpPr>
         <p:spPr>
           <a:xfrm>
             <a:off x="658368" y="4242816"/>
-            <a:ext cx="10872216" cy="713232"/>
+            <a:ext cx="10853928" cy="713232"/>
           </a:xfrm>
           <a:prstGeom prst="rect">
             <a:avLst/>
@@ -9283,14 +9368,14 @@
       </p:sp>
       <p:sp>
         <p:nvSpPr>
-          <p:cNvPr id="33" name="Rectangle 32"/>
+          <p:cNvPr id="35" name="Rectangle 34"/>
           <p:cNvSpPr/>
           <p:nvPr/>
         </p:nvSpPr>
         <p:spPr>
           <a:xfrm>
             <a:off x="658368" y="4956048"/>
-            <a:ext cx="10872216" cy="713232"/>
+            <a:ext cx="10853928" cy="713232"/>
           </a:xfrm>
           <a:prstGeom prst="rect">
             <a:avLst/>
@@ -9327,86 +9412,14 @@
       </p:sp>
       <p:cxnSp>
         <p:nvCxnSpPr>
-          <p:cNvPr id="34" name="Connector 33"/>
-          <p:cNvCxnSpPr/>
-          <p:nvPr/>
-        </p:nvCxnSpPr>
-        <p:spPr>
-          <a:xfrm>
-            <a:off x="658368" y="2103120"/>
-            <a:ext cx="10872216" cy="0"/>
-          </a:xfrm>
-          <a:prstGeom prst="line">
-            <a:avLst/>
-          </a:prstGeom>
-          <a:ln w="7620">
-            <a:solidFill>
-              <a:srgbClr val="D1CFC8"/>
-            </a:solidFill>
-          </a:ln>
-          <a:effectLst/>
-        </p:spPr>
-        <p:style>
-          <a:lnRef idx="2">
-            <a:schemeClr val="accent1"/>
-          </a:lnRef>
-          <a:fillRef idx="0">
-            <a:schemeClr val="accent1"/>
-          </a:fillRef>
-          <a:effectRef idx="1">
-            <a:schemeClr val="accent1"/>
-          </a:effectRef>
-          <a:fontRef idx="minor">
-            <a:schemeClr val="tx1"/>
-          </a:fontRef>
-        </p:style>
-      </p:cxnSp>
-      <p:cxnSp>
-        <p:nvCxnSpPr>
-          <p:cNvPr id="35" name="Connector 34"/>
-          <p:cNvCxnSpPr/>
-          <p:nvPr/>
-        </p:nvCxnSpPr>
-        <p:spPr>
-          <a:xfrm>
-            <a:off x="658368" y="2816352"/>
-            <a:ext cx="10872216" cy="0"/>
-          </a:xfrm>
-          <a:prstGeom prst="line">
-            <a:avLst/>
-          </a:prstGeom>
-          <a:ln w="7620">
-            <a:solidFill>
-              <a:srgbClr val="D1CFC8"/>
-            </a:solidFill>
-          </a:ln>
-          <a:effectLst/>
-        </p:spPr>
-        <p:style>
-          <a:lnRef idx="2">
-            <a:schemeClr val="accent1"/>
-          </a:lnRef>
-          <a:fillRef idx="0">
-            <a:schemeClr val="accent1"/>
-          </a:fillRef>
-          <a:effectRef idx="1">
-            <a:schemeClr val="accent1"/>
-          </a:effectRef>
-          <a:fontRef idx="minor">
-            <a:schemeClr val="tx1"/>
-          </a:fontRef>
-        </p:style>
-      </p:cxnSp>
-      <p:cxnSp>
-        <p:nvCxnSpPr>
           <p:cNvPr id="36" name="Connector 35"/>
           <p:cNvCxnSpPr/>
           <p:nvPr/>
         </p:nvCxnSpPr>
         <p:spPr>
           <a:xfrm>
-            <a:off x="658368" y="3529584"/>
-            <a:ext cx="10872216" cy="0"/>
+            <a:off x="3081528" y="2103120"/>
+            <a:ext cx="0" cy="3566160"/>
           </a:xfrm>
           <a:prstGeom prst="line">
             <a:avLst/>
@@ -9441,8 +9454,8 @@
         </p:nvCxnSpPr>
         <p:spPr>
           <a:xfrm>
-            <a:off x="658368" y="4242816"/>
-            <a:ext cx="10872216" cy="0"/>
+            <a:off x="3784092" y="2103120"/>
+            <a:ext cx="0" cy="3566160"/>
           </a:xfrm>
           <a:prstGeom prst="line">
             <a:avLst/>
@@ -9477,8 +9490,8 @@
         </p:nvCxnSpPr>
         <p:spPr>
           <a:xfrm>
-            <a:off x="658368" y="4956048"/>
-            <a:ext cx="10872216" cy="0"/>
+            <a:off x="4486656" y="2103120"/>
+            <a:ext cx="0" cy="3566160"/>
           </a:xfrm>
           <a:prstGeom prst="line">
             <a:avLst/>
@@ -9513,8 +9526,8 @@
         </p:nvCxnSpPr>
         <p:spPr>
           <a:xfrm>
-            <a:off x="658368" y="5669280"/>
-            <a:ext cx="10872216" cy="0"/>
+            <a:off x="5189220" y="2103120"/>
+            <a:ext cx="0" cy="3566160"/>
           </a:xfrm>
           <a:prstGeom prst="line">
             <a:avLst/>
@@ -9541,16 +9554,556 @@
           </a:fontRef>
         </p:style>
       </p:cxnSp>
-      <p:sp>
-        <p:nvSpPr>
-          <p:cNvPr id="40" name="TextBox 39"/>
-          <p:cNvSpPr txBox="1"/>
-          <p:nvPr/>
-        </p:nvSpPr>
-        <p:spPr>
-          <a:xfrm>
-            <a:off x="704088" y="2160178"/>
-            <a:ext cx="256032" cy="219456"/>
+      <p:cxnSp>
+        <p:nvCxnSpPr>
+          <p:cNvPr id="40" name="Connector 39"/>
+          <p:cNvCxnSpPr/>
+          <p:nvPr/>
+        </p:nvCxnSpPr>
+        <p:spPr>
+          <a:xfrm>
+            <a:off x="5891784" y="2103120"/>
+            <a:ext cx="0" cy="3566160"/>
+          </a:xfrm>
+          <a:prstGeom prst="line">
+            <a:avLst/>
+          </a:prstGeom>
+          <a:ln w="7620">
+            <a:solidFill>
+              <a:srgbClr val="D1CFC8"/>
+            </a:solidFill>
+          </a:ln>
+          <a:effectLst/>
+        </p:spPr>
+        <p:style>
+          <a:lnRef idx="2">
+            <a:schemeClr val="accent1"/>
+          </a:lnRef>
+          <a:fillRef idx="0">
+            <a:schemeClr val="accent1"/>
+          </a:fillRef>
+          <a:effectRef idx="1">
+            <a:schemeClr val="accent1"/>
+          </a:effectRef>
+          <a:fontRef idx="minor">
+            <a:schemeClr val="tx1"/>
+          </a:fontRef>
+        </p:style>
+      </p:cxnSp>
+      <p:cxnSp>
+        <p:nvCxnSpPr>
+          <p:cNvPr id="41" name="Connector 40"/>
+          <p:cNvCxnSpPr/>
+          <p:nvPr/>
+        </p:nvCxnSpPr>
+        <p:spPr>
+          <a:xfrm>
+            <a:off x="6594348" y="2103120"/>
+            <a:ext cx="0" cy="3566160"/>
+          </a:xfrm>
+          <a:prstGeom prst="line">
+            <a:avLst/>
+          </a:prstGeom>
+          <a:ln w="7620">
+            <a:solidFill>
+              <a:srgbClr val="D1CFC8"/>
+            </a:solidFill>
+          </a:ln>
+          <a:effectLst/>
+        </p:spPr>
+        <p:style>
+          <a:lnRef idx="2">
+            <a:schemeClr val="accent1"/>
+          </a:lnRef>
+          <a:fillRef idx="0">
+            <a:schemeClr val="accent1"/>
+          </a:fillRef>
+          <a:effectRef idx="1">
+            <a:schemeClr val="accent1"/>
+          </a:effectRef>
+          <a:fontRef idx="minor">
+            <a:schemeClr val="tx1"/>
+          </a:fontRef>
+        </p:style>
+      </p:cxnSp>
+      <p:cxnSp>
+        <p:nvCxnSpPr>
+          <p:cNvPr id="42" name="Connector 41"/>
+          <p:cNvCxnSpPr/>
+          <p:nvPr/>
+        </p:nvCxnSpPr>
+        <p:spPr>
+          <a:xfrm>
+            <a:off x="7296912" y="2103120"/>
+            <a:ext cx="0" cy="3566160"/>
+          </a:xfrm>
+          <a:prstGeom prst="line">
+            <a:avLst/>
+          </a:prstGeom>
+          <a:ln w="7620">
+            <a:solidFill>
+              <a:srgbClr val="D1CFC8"/>
+            </a:solidFill>
+          </a:ln>
+          <a:effectLst/>
+        </p:spPr>
+        <p:style>
+          <a:lnRef idx="2">
+            <a:schemeClr val="accent1"/>
+          </a:lnRef>
+          <a:fillRef idx="0">
+            <a:schemeClr val="accent1"/>
+          </a:fillRef>
+          <a:effectRef idx="1">
+            <a:schemeClr val="accent1"/>
+          </a:effectRef>
+          <a:fontRef idx="minor">
+            <a:schemeClr val="tx1"/>
+          </a:fontRef>
+        </p:style>
+      </p:cxnSp>
+      <p:cxnSp>
+        <p:nvCxnSpPr>
+          <p:cNvPr id="43" name="Connector 42"/>
+          <p:cNvCxnSpPr/>
+          <p:nvPr/>
+        </p:nvCxnSpPr>
+        <p:spPr>
+          <a:xfrm>
+            <a:off x="7999476" y="2103120"/>
+            <a:ext cx="0" cy="3566160"/>
+          </a:xfrm>
+          <a:prstGeom prst="line">
+            <a:avLst/>
+          </a:prstGeom>
+          <a:ln w="7620">
+            <a:solidFill>
+              <a:srgbClr val="D1CFC8"/>
+            </a:solidFill>
+          </a:ln>
+          <a:effectLst/>
+        </p:spPr>
+        <p:style>
+          <a:lnRef idx="2">
+            <a:schemeClr val="accent1"/>
+          </a:lnRef>
+          <a:fillRef idx="0">
+            <a:schemeClr val="accent1"/>
+          </a:fillRef>
+          <a:effectRef idx="1">
+            <a:schemeClr val="accent1"/>
+          </a:effectRef>
+          <a:fontRef idx="minor">
+            <a:schemeClr val="tx1"/>
+          </a:fontRef>
+        </p:style>
+      </p:cxnSp>
+      <p:cxnSp>
+        <p:nvCxnSpPr>
+          <p:cNvPr id="44" name="Connector 43"/>
+          <p:cNvCxnSpPr/>
+          <p:nvPr/>
+        </p:nvCxnSpPr>
+        <p:spPr>
+          <a:xfrm>
+            <a:off x="8702040" y="2103120"/>
+            <a:ext cx="0" cy="3566160"/>
+          </a:xfrm>
+          <a:prstGeom prst="line">
+            <a:avLst/>
+          </a:prstGeom>
+          <a:ln w="7620">
+            <a:solidFill>
+              <a:srgbClr val="D1CFC8"/>
+            </a:solidFill>
+          </a:ln>
+          <a:effectLst/>
+        </p:spPr>
+        <p:style>
+          <a:lnRef idx="2">
+            <a:schemeClr val="accent1"/>
+          </a:lnRef>
+          <a:fillRef idx="0">
+            <a:schemeClr val="accent1"/>
+          </a:fillRef>
+          <a:effectRef idx="1">
+            <a:schemeClr val="accent1"/>
+          </a:effectRef>
+          <a:fontRef idx="minor">
+            <a:schemeClr val="tx1"/>
+          </a:fontRef>
+        </p:style>
+      </p:cxnSp>
+      <p:cxnSp>
+        <p:nvCxnSpPr>
+          <p:cNvPr id="45" name="Connector 44"/>
+          <p:cNvCxnSpPr/>
+          <p:nvPr/>
+        </p:nvCxnSpPr>
+        <p:spPr>
+          <a:xfrm>
+            <a:off x="9404604" y="2103120"/>
+            <a:ext cx="0" cy="3566160"/>
+          </a:xfrm>
+          <a:prstGeom prst="line">
+            <a:avLst/>
+          </a:prstGeom>
+          <a:ln w="7620">
+            <a:solidFill>
+              <a:srgbClr val="D1CFC8"/>
+            </a:solidFill>
+          </a:ln>
+          <a:effectLst/>
+        </p:spPr>
+        <p:style>
+          <a:lnRef idx="2">
+            <a:schemeClr val="accent1"/>
+          </a:lnRef>
+          <a:fillRef idx="0">
+            <a:schemeClr val="accent1"/>
+          </a:fillRef>
+          <a:effectRef idx="1">
+            <a:schemeClr val="accent1"/>
+          </a:effectRef>
+          <a:fontRef idx="minor">
+            <a:schemeClr val="tx1"/>
+          </a:fontRef>
+        </p:style>
+      </p:cxnSp>
+      <p:cxnSp>
+        <p:nvCxnSpPr>
+          <p:cNvPr id="46" name="Connector 45"/>
+          <p:cNvCxnSpPr/>
+          <p:nvPr/>
+        </p:nvCxnSpPr>
+        <p:spPr>
+          <a:xfrm>
+            <a:off x="10107168" y="2103120"/>
+            <a:ext cx="0" cy="3566160"/>
+          </a:xfrm>
+          <a:prstGeom prst="line">
+            <a:avLst/>
+          </a:prstGeom>
+          <a:ln w="7620">
+            <a:solidFill>
+              <a:srgbClr val="D1CFC8"/>
+            </a:solidFill>
+          </a:ln>
+          <a:effectLst/>
+        </p:spPr>
+        <p:style>
+          <a:lnRef idx="2">
+            <a:schemeClr val="accent1"/>
+          </a:lnRef>
+          <a:fillRef idx="0">
+            <a:schemeClr val="accent1"/>
+          </a:fillRef>
+          <a:effectRef idx="1">
+            <a:schemeClr val="accent1"/>
+          </a:effectRef>
+          <a:fontRef idx="minor">
+            <a:schemeClr val="tx1"/>
+          </a:fontRef>
+        </p:style>
+      </p:cxnSp>
+      <p:cxnSp>
+        <p:nvCxnSpPr>
+          <p:cNvPr id="47" name="Connector 46"/>
+          <p:cNvCxnSpPr/>
+          <p:nvPr/>
+        </p:nvCxnSpPr>
+        <p:spPr>
+          <a:xfrm>
+            <a:off x="10809732" y="2103120"/>
+            <a:ext cx="0" cy="3566160"/>
+          </a:xfrm>
+          <a:prstGeom prst="line">
+            <a:avLst/>
+          </a:prstGeom>
+          <a:ln w="7620">
+            <a:solidFill>
+              <a:srgbClr val="D1CFC8"/>
+            </a:solidFill>
+          </a:ln>
+          <a:effectLst/>
+        </p:spPr>
+        <p:style>
+          <a:lnRef idx="2">
+            <a:schemeClr val="accent1"/>
+          </a:lnRef>
+          <a:fillRef idx="0">
+            <a:schemeClr val="accent1"/>
+          </a:fillRef>
+          <a:effectRef idx="1">
+            <a:schemeClr val="accent1"/>
+          </a:effectRef>
+          <a:fontRef idx="minor">
+            <a:schemeClr val="tx1"/>
+          </a:fontRef>
+        </p:style>
+      </p:cxnSp>
+      <p:cxnSp>
+        <p:nvCxnSpPr>
+          <p:cNvPr id="48" name="Connector 47"/>
+          <p:cNvCxnSpPr/>
+          <p:nvPr/>
+        </p:nvCxnSpPr>
+        <p:spPr>
+          <a:xfrm>
+            <a:off x="11512296" y="2103120"/>
+            <a:ext cx="0" cy="3566160"/>
+          </a:xfrm>
+          <a:prstGeom prst="line">
+            <a:avLst/>
+          </a:prstGeom>
+          <a:ln w="7620">
+            <a:solidFill>
+              <a:srgbClr val="D1CFC8"/>
+            </a:solidFill>
+          </a:ln>
+          <a:effectLst/>
+        </p:spPr>
+        <p:style>
+          <a:lnRef idx="2">
+            <a:schemeClr val="accent1"/>
+          </a:lnRef>
+          <a:fillRef idx="0">
+            <a:schemeClr val="accent1"/>
+          </a:fillRef>
+          <a:effectRef idx="1">
+            <a:schemeClr val="accent1"/>
+          </a:effectRef>
+          <a:fontRef idx="minor">
+            <a:schemeClr val="tx1"/>
+          </a:fontRef>
+        </p:style>
+      </p:cxnSp>
+      <p:cxnSp>
+        <p:nvCxnSpPr>
+          <p:cNvPr id="49" name="Connector 48"/>
+          <p:cNvCxnSpPr/>
+          <p:nvPr/>
+        </p:nvCxnSpPr>
+        <p:spPr>
+          <a:xfrm>
+            <a:off x="658368" y="2103120"/>
+            <a:ext cx="10853928" cy="0"/>
+          </a:xfrm>
+          <a:prstGeom prst="line">
+            <a:avLst/>
+          </a:prstGeom>
+          <a:ln w="7620">
+            <a:solidFill>
+              <a:srgbClr val="D1CFC8"/>
+            </a:solidFill>
+          </a:ln>
+          <a:effectLst/>
+        </p:spPr>
+        <p:style>
+          <a:lnRef idx="2">
+            <a:schemeClr val="accent1"/>
+          </a:lnRef>
+          <a:fillRef idx="0">
+            <a:schemeClr val="accent1"/>
+          </a:fillRef>
+          <a:effectRef idx="1">
+            <a:schemeClr val="accent1"/>
+          </a:effectRef>
+          <a:fontRef idx="minor">
+            <a:schemeClr val="tx1"/>
+          </a:fontRef>
+        </p:style>
+      </p:cxnSp>
+      <p:cxnSp>
+        <p:nvCxnSpPr>
+          <p:cNvPr id="50" name="Connector 49"/>
+          <p:cNvCxnSpPr/>
+          <p:nvPr/>
+        </p:nvCxnSpPr>
+        <p:spPr>
+          <a:xfrm>
+            <a:off x="658368" y="2816352"/>
+            <a:ext cx="10853928" cy="0"/>
+          </a:xfrm>
+          <a:prstGeom prst="line">
+            <a:avLst/>
+          </a:prstGeom>
+          <a:ln w="7620">
+            <a:solidFill>
+              <a:srgbClr val="D1CFC8"/>
+            </a:solidFill>
+          </a:ln>
+          <a:effectLst/>
+        </p:spPr>
+        <p:style>
+          <a:lnRef idx="2">
+            <a:schemeClr val="accent1"/>
+          </a:lnRef>
+          <a:fillRef idx="0">
+            <a:schemeClr val="accent1"/>
+          </a:fillRef>
+          <a:effectRef idx="1">
+            <a:schemeClr val="accent1"/>
+          </a:effectRef>
+          <a:fontRef idx="minor">
+            <a:schemeClr val="tx1"/>
+          </a:fontRef>
+        </p:style>
+      </p:cxnSp>
+      <p:cxnSp>
+        <p:nvCxnSpPr>
+          <p:cNvPr id="51" name="Connector 50"/>
+          <p:cNvCxnSpPr/>
+          <p:nvPr/>
+        </p:nvCxnSpPr>
+        <p:spPr>
+          <a:xfrm>
+            <a:off x="658368" y="3529584"/>
+            <a:ext cx="10853928" cy="0"/>
+          </a:xfrm>
+          <a:prstGeom prst="line">
+            <a:avLst/>
+          </a:prstGeom>
+          <a:ln w="7620">
+            <a:solidFill>
+              <a:srgbClr val="D1CFC8"/>
+            </a:solidFill>
+          </a:ln>
+          <a:effectLst/>
+        </p:spPr>
+        <p:style>
+          <a:lnRef idx="2">
+            <a:schemeClr val="accent1"/>
+          </a:lnRef>
+          <a:fillRef idx="0">
+            <a:schemeClr val="accent1"/>
+          </a:fillRef>
+          <a:effectRef idx="1">
+            <a:schemeClr val="accent1"/>
+          </a:effectRef>
+          <a:fontRef idx="minor">
+            <a:schemeClr val="tx1"/>
+          </a:fontRef>
+        </p:style>
+      </p:cxnSp>
+      <p:cxnSp>
+        <p:nvCxnSpPr>
+          <p:cNvPr id="52" name="Connector 51"/>
+          <p:cNvCxnSpPr/>
+          <p:nvPr/>
+        </p:nvCxnSpPr>
+        <p:spPr>
+          <a:xfrm>
+            <a:off x="658368" y="4242816"/>
+            <a:ext cx="10853928" cy="0"/>
+          </a:xfrm>
+          <a:prstGeom prst="line">
+            <a:avLst/>
+          </a:prstGeom>
+          <a:ln w="7620">
+            <a:solidFill>
+              <a:srgbClr val="D1CFC8"/>
+            </a:solidFill>
+          </a:ln>
+          <a:effectLst/>
+        </p:spPr>
+        <p:style>
+          <a:lnRef idx="2">
+            <a:schemeClr val="accent1"/>
+          </a:lnRef>
+          <a:fillRef idx="0">
+            <a:schemeClr val="accent1"/>
+          </a:fillRef>
+          <a:effectRef idx="1">
+            <a:schemeClr val="accent1"/>
+          </a:effectRef>
+          <a:fontRef idx="minor">
+            <a:schemeClr val="tx1"/>
+          </a:fontRef>
+        </p:style>
+      </p:cxnSp>
+      <p:cxnSp>
+        <p:nvCxnSpPr>
+          <p:cNvPr id="53" name="Connector 52"/>
+          <p:cNvCxnSpPr/>
+          <p:nvPr/>
+        </p:nvCxnSpPr>
+        <p:spPr>
+          <a:xfrm>
+            <a:off x="658368" y="4956048"/>
+            <a:ext cx="10853928" cy="0"/>
+          </a:xfrm>
+          <a:prstGeom prst="line">
+            <a:avLst/>
+          </a:prstGeom>
+          <a:ln w="7620">
+            <a:solidFill>
+              <a:srgbClr val="D1CFC8"/>
+            </a:solidFill>
+          </a:ln>
+          <a:effectLst/>
+        </p:spPr>
+        <p:style>
+          <a:lnRef idx="2">
+            <a:schemeClr val="accent1"/>
+          </a:lnRef>
+          <a:fillRef idx="0">
+            <a:schemeClr val="accent1"/>
+          </a:fillRef>
+          <a:effectRef idx="1">
+            <a:schemeClr val="accent1"/>
+          </a:effectRef>
+          <a:fontRef idx="minor">
+            <a:schemeClr val="tx1"/>
+          </a:fontRef>
+        </p:style>
+      </p:cxnSp>
+      <p:cxnSp>
+        <p:nvCxnSpPr>
+          <p:cNvPr id="54" name="Connector 53"/>
+          <p:cNvCxnSpPr/>
+          <p:nvPr/>
+        </p:nvCxnSpPr>
+        <p:spPr>
+          <a:xfrm>
+            <a:off x="658368" y="5669280"/>
+            <a:ext cx="10853928" cy="0"/>
+          </a:xfrm>
+          <a:prstGeom prst="line">
+            <a:avLst/>
+          </a:prstGeom>
+          <a:ln w="7620">
+            <a:solidFill>
+              <a:srgbClr val="D1CFC8"/>
+            </a:solidFill>
+          </a:ln>
+          <a:effectLst/>
+        </p:spPr>
+        <p:style>
+          <a:lnRef idx="2">
+            <a:schemeClr val="accent1"/>
+          </a:lnRef>
+          <a:fillRef idx="0">
+            <a:schemeClr val="accent1"/>
+          </a:fillRef>
+          <a:effectRef idx="1">
+            <a:schemeClr val="accent1"/>
+          </a:effectRef>
+          <a:fontRef idx="minor">
+            <a:schemeClr val="tx1"/>
+          </a:fontRef>
+        </p:style>
+      </p:cxnSp>
+      <p:sp>
+        <p:nvSpPr>
+          <p:cNvPr id="55" name="TextBox 54"/>
+          <p:cNvSpPr txBox="1"/>
+          <p:nvPr/>
+        </p:nvSpPr>
+        <p:spPr>
+          <a:xfrm>
+            <a:off x="768096" y="2231501"/>
+            <a:ext cx="310896" cy="246888"/>
           </a:xfrm>
           <a:prstGeom prst="rect">
             <a:avLst/>
@@ -9569,7 +10122,7 @@
               </a:lnSpc>
             </a:pPr>
             <a:r>
-              <a:rPr sz="1050" b="1" lang="ja-JP">
+              <a:rPr sz="1250" b="1" lang="ja-JP">
                 <a:solidFill>
                   <a:srgbClr val="0D7870"/>
                 </a:solidFill>
@@ -9584,14 +10137,14 @@
       </p:sp>
       <p:sp>
         <p:nvSpPr>
-          <p:cNvPr id="41" name="TextBox 40"/>
-          <p:cNvSpPr txBox="1"/>
-          <p:nvPr/>
-        </p:nvSpPr>
-        <p:spPr>
-          <a:xfrm>
-            <a:off x="1014984" y="2145913"/>
-            <a:ext cx="10442448" cy="219456"/>
+          <p:cNvPr id="56" name="TextBox 55"/>
+          <p:cNvSpPr txBox="1"/>
+          <p:nvPr/>
+        </p:nvSpPr>
+        <p:spPr>
+          <a:xfrm>
+            <a:off x="1133856" y="2188707"/>
+            <a:ext cx="1837943" cy="246888"/>
           </a:xfrm>
           <a:prstGeom prst="rect">
             <a:avLst/>
@@ -9625,14 +10178,14 @@
       </p:sp>
       <p:sp>
         <p:nvSpPr>
-          <p:cNvPr id="42" name="TextBox 41"/>
-          <p:cNvSpPr txBox="1"/>
-          <p:nvPr/>
-        </p:nvSpPr>
-        <p:spPr>
-          <a:xfrm>
-            <a:off x="1014984" y="2352751"/>
-            <a:ext cx="1002410" cy="182880"/>
+          <p:cNvPr id="57" name="TextBox 56"/>
+          <p:cNvSpPr txBox="1"/>
+          <p:nvPr/>
+        </p:nvSpPr>
+        <p:spPr>
+          <a:xfrm>
+            <a:off x="1133856" y="2502529"/>
+            <a:ext cx="1837943" cy="182880"/>
           </a:xfrm>
           <a:prstGeom prst="rect">
             <a:avLst/>
@@ -9651,7 +10204,7 @@
               </a:lnSpc>
             </a:pPr>
             <a:r>
-              <a:rPr sz="750" b="0" lang="ja-JP">
+              <a:rPr sz="950" b="0" lang="ja-JP">
                 <a:solidFill>
                   <a:srgbClr val="666E70"/>
                 </a:solidFill>
@@ -9666,55 +10219,14 @@
       </p:sp>
       <p:sp>
         <p:nvSpPr>
-          <p:cNvPr id="43" name="TextBox 42"/>
-          <p:cNvSpPr txBox="1"/>
-          <p:nvPr/>
-        </p:nvSpPr>
-        <p:spPr>
-          <a:xfrm>
-            <a:off x="2108835" y="2345618"/>
-            <a:ext cx="730377" cy="182880"/>
-          </a:xfrm>
-          <a:prstGeom prst="rect">
-            <a:avLst/>
-          </a:prstGeom>
-          <a:noFill/>
-        </p:spPr>
-        <p:txBody>
-          <a:bodyPr wrap="square" anchor="t" lIns="0" rIns="0" tIns="0" bIns="0">
-            <a:spAutoFit/>
-          </a:bodyPr>
-          <a:lstStyle/>
-          <a:p>
-            <a:pPr algn="ctr">
-              <a:lnSpc>
-                <a:spcPct val="100000"/>
-              </a:lnSpc>
-            </a:pPr>
-            <a:r>
-              <a:rPr sz="850" b="1" lang="ja-JP">
-                <a:solidFill>
-                  <a:srgbClr val="C7583E"/>
-                </a:solidFill>
-                <a:latin typeface="Yu Gothic"/>
-                <a:ea typeface="Yu Gothic"/>
-                <a:cs typeface="Yu Gothic"/>
-              </a:rPr>
-              <a:t>型レビュー</a:t>
-            </a:r>
-          </a:p>
-        </p:txBody>
-      </p:sp>
-      <p:sp>
-        <p:nvSpPr>
-          <p:cNvPr id="44" name="Rectangle 43"/>
+          <p:cNvPr id="58" name="Rectangle 57"/>
           <p:cNvSpPr/>
           <p:nvPr/>
         </p:nvSpPr>
         <p:spPr>
           <a:xfrm>
-            <a:off x="704088" y="2659440"/>
-            <a:ext cx="1720596" cy="32004"/>
+            <a:off x="3127248" y="2274295"/>
+            <a:ext cx="1313688" cy="274320"/>
           </a:xfrm>
           <a:prstGeom prst="rect">
             <a:avLst/>
@@ -9751,14 +10263,14 @@
       </p:sp>
       <p:sp>
         <p:nvSpPr>
-          <p:cNvPr id="45" name="TextBox 44"/>
-          <p:cNvSpPr txBox="1"/>
-          <p:nvPr/>
-        </p:nvSpPr>
-        <p:spPr>
-          <a:xfrm>
-            <a:off x="1610106" y="2873410"/>
-            <a:ext cx="256032" cy="219456"/>
+          <p:cNvPr id="59" name="TextBox 58"/>
+          <p:cNvSpPr txBox="1"/>
+          <p:nvPr/>
+        </p:nvSpPr>
+        <p:spPr>
+          <a:xfrm>
+            <a:off x="3209544" y="2306299"/>
+            <a:ext cx="1149096" cy="237744"/>
           </a:xfrm>
           <a:prstGeom prst="rect">
             <a:avLst/>
@@ -9777,7 +10289,48 @@
               </a:lnSpc>
             </a:pPr>
             <a:r>
-              <a:rPr sz="1050" b="1" lang="ja-JP">
+              <a:rPr sz="850" b="1" lang="ja-JP">
+                <a:solidFill>
+                  <a:srgbClr val="FFFFFC"/>
+                </a:solidFill>
+                <a:latin typeface="Yu Gothic"/>
+                <a:ea typeface="Yu Gothic"/>
+                <a:cs typeface="Yu Gothic"/>
+              </a:rPr>
+              <a:t>標準レイアウトを定義</a:t>
+            </a:r>
+          </a:p>
+        </p:txBody>
+      </p:sp>
+      <p:sp>
+        <p:nvSpPr>
+          <p:cNvPr id="60" name="TextBox 59"/>
+          <p:cNvSpPr txBox="1"/>
+          <p:nvPr/>
+        </p:nvSpPr>
+        <p:spPr>
+          <a:xfrm>
+            <a:off x="768096" y="2944733"/>
+            <a:ext cx="310896" cy="246888"/>
+          </a:xfrm>
+          <a:prstGeom prst="rect">
+            <a:avLst/>
+          </a:prstGeom>
+          <a:noFill/>
+        </p:spPr>
+        <p:txBody>
+          <a:bodyPr wrap="square" anchor="t" lIns="0" rIns="0" tIns="0" bIns="0">
+            <a:spAutoFit/>
+          </a:bodyPr>
+          <a:lstStyle/>
+          <a:p>
+            <a:pPr algn="l">
+              <a:lnSpc>
+                <a:spcPct val="130000"/>
+              </a:lnSpc>
+            </a:pPr>
+            <a:r>
+              <a:rPr sz="1250" b="1" lang="ja-JP">
                 <a:solidFill>
                   <a:srgbClr val="0D7870"/>
                 </a:solidFill>
@@ -9792,14 +10345,14 @@
       </p:sp>
       <p:sp>
         <p:nvSpPr>
-          <p:cNvPr id="46" name="TextBox 45"/>
-          <p:cNvSpPr txBox="1"/>
-          <p:nvPr/>
-        </p:nvSpPr>
-        <p:spPr>
-          <a:xfrm>
-            <a:off x="1921002" y="2859145"/>
-            <a:ext cx="9536430" cy="219456"/>
+          <p:cNvPr id="61" name="TextBox 60"/>
+          <p:cNvSpPr txBox="1"/>
+          <p:nvPr/>
+        </p:nvSpPr>
+        <p:spPr>
+          <a:xfrm>
+            <a:off x="1133856" y="2901939"/>
+            <a:ext cx="1837943" cy="246888"/>
           </a:xfrm>
           <a:prstGeom prst="rect">
             <a:avLst/>
@@ -9833,14 +10386,14 @@
       </p:sp>
       <p:sp>
         <p:nvSpPr>
-          <p:cNvPr id="47" name="TextBox 46"/>
-          <p:cNvSpPr txBox="1"/>
-          <p:nvPr/>
-        </p:nvSpPr>
-        <p:spPr>
-          <a:xfrm>
-            <a:off x="1921002" y="3065983"/>
-            <a:ext cx="9536430" cy="182880"/>
+          <p:cNvPr id="62" name="TextBox 61"/>
+          <p:cNvSpPr txBox="1"/>
+          <p:nvPr/>
+        </p:nvSpPr>
+        <p:spPr>
+          <a:xfrm>
+            <a:off x="1133856" y="3215761"/>
+            <a:ext cx="1837943" cy="182880"/>
           </a:xfrm>
           <a:prstGeom prst="rect">
             <a:avLst/>
@@ -9867,21 +10420,21 @@
                 <a:ea typeface="Yu Gothic"/>
                 <a:cs typeface="Yu Gothic"/>
               </a:rPr>
-              <a:t>生成・検証機能を整備</a:t>
-            </a:r>
-          </a:p>
-        </p:txBody>
-      </p:sp>
-      <p:sp>
-        <p:nvSpPr>
-          <p:cNvPr id="48" name="Rectangle 47"/>
+              <a:t>rendererを整備</a:t>
+            </a:r>
+          </a:p>
+        </p:txBody>
+      </p:sp>
+      <p:sp>
+        <p:nvSpPr>
+          <p:cNvPr id="63" name="Rectangle 62"/>
           <p:cNvSpPr/>
           <p:nvPr/>
         </p:nvSpPr>
         <p:spPr>
           <a:xfrm>
-            <a:off x="1610106" y="3372672"/>
-            <a:ext cx="2626614" cy="32004"/>
+            <a:off x="3829812" y="2987527"/>
+            <a:ext cx="2016252" cy="274320"/>
           </a:xfrm>
           <a:prstGeom prst="rect">
             <a:avLst/>
@@ -9918,14 +10471,14 @@
       </p:sp>
       <p:sp>
         <p:nvSpPr>
-          <p:cNvPr id="49" name="TextBox 48"/>
-          <p:cNvSpPr txBox="1"/>
-          <p:nvPr/>
-        </p:nvSpPr>
-        <p:spPr>
-          <a:xfrm>
-            <a:off x="3422141" y="3586642"/>
-            <a:ext cx="256032" cy="219456"/>
+          <p:cNvPr id="64" name="TextBox 63"/>
+          <p:cNvSpPr txBox="1"/>
+          <p:nvPr/>
+        </p:nvSpPr>
+        <p:spPr>
+          <a:xfrm>
+            <a:off x="3912108" y="3019531"/>
+            <a:ext cx="1851660" cy="237744"/>
           </a:xfrm>
           <a:prstGeom prst="rect">
             <a:avLst/>
@@ -9944,7 +10497,48 @@
               </a:lnSpc>
             </a:pPr>
             <a:r>
-              <a:rPr sz="1050" b="1" lang="ja-JP">
+              <a:rPr sz="1000" b="1" lang="ja-JP">
+                <a:solidFill>
+                  <a:srgbClr val="FFFFFC"/>
+                </a:solidFill>
+                <a:latin typeface="Yu Gothic"/>
+                <a:ea typeface="Yu Gothic"/>
+                <a:cs typeface="Yu Gothic"/>
+              </a:rPr>
+              <a:t>生成・検証機能を実装</a:t>
+            </a:r>
+          </a:p>
+        </p:txBody>
+      </p:sp>
+      <p:sp>
+        <p:nvSpPr>
+          <p:cNvPr id="65" name="TextBox 64"/>
+          <p:cNvSpPr txBox="1"/>
+          <p:nvPr/>
+        </p:nvSpPr>
+        <p:spPr>
+          <a:xfrm>
+            <a:off x="768096" y="3657965"/>
+            <a:ext cx="310896" cy="246888"/>
+          </a:xfrm>
+          <a:prstGeom prst="rect">
+            <a:avLst/>
+          </a:prstGeom>
+          <a:noFill/>
+        </p:spPr>
+        <p:txBody>
+          <a:bodyPr wrap="square" anchor="t" lIns="0" rIns="0" tIns="0" bIns="0">
+            <a:spAutoFit/>
+          </a:bodyPr>
+          <a:lstStyle/>
+          <a:p>
+            <a:pPr algn="l">
+              <a:lnSpc>
+                <a:spcPct val="130000"/>
+              </a:lnSpc>
+            </a:pPr>
+            <a:r>
+              <a:rPr sz="1250" b="1" lang="ja-JP">
                 <a:solidFill>
                   <a:srgbClr val="0D7870"/>
                 </a:solidFill>
@@ -9959,14 +10553,14 @@
       </p:sp>
       <p:sp>
         <p:nvSpPr>
-          <p:cNvPr id="50" name="TextBox 49"/>
-          <p:cNvSpPr txBox="1"/>
-          <p:nvPr/>
-        </p:nvSpPr>
-        <p:spPr>
-          <a:xfrm>
-            <a:off x="3733037" y="3572377"/>
-            <a:ext cx="7724394" cy="219456"/>
+          <p:cNvPr id="66" name="TextBox 65"/>
+          <p:cNvSpPr txBox="1"/>
+          <p:nvPr/>
+        </p:nvSpPr>
+        <p:spPr>
+          <a:xfrm>
+            <a:off x="1133856" y="3615171"/>
+            <a:ext cx="1837943" cy="246888"/>
           </a:xfrm>
           <a:prstGeom prst="rect">
             <a:avLst/>
@@ -10000,14 +10594,14 @@
       </p:sp>
       <p:sp>
         <p:nvSpPr>
-          <p:cNvPr id="51" name="TextBox 50"/>
-          <p:cNvSpPr txBox="1"/>
-          <p:nvPr/>
-        </p:nvSpPr>
-        <p:spPr>
-          <a:xfrm>
-            <a:off x="3733037" y="3779215"/>
-            <a:ext cx="2814447" cy="182880"/>
+          <p:cNvPr id="67" name="TextBox 66"/>
+          <p:cNvSpPr txBox="1"/>
+          <p:nvPr/>
+        </p:nvSpPr>
+        <p:spPr>
+          <a:xfrm>
+            <a:off x="1133856" y="3928993"/>
+            <a:ext cx="1837943" cy="182880"/>
           </a:xfrm>
           <a:prstGeom prst="rect">
             <a:avLst/>
@@ -10034,62 +10628,21 @@
                 <a:ea typeface="Yu Gothic"/>
                 <a:cs typeface="Yu Gothic"/>
               </a:rPr>
-              <a:t>複数部門でパイロット</a:t>
-            </a:r>
-          </a:p>
-        </p:txBody>
-      </p:sp>
-      <p:sp>
-        <p:nvSpPr>
-          <p:cNvPr id="52" name="TextBox 51"/>
-          <p:cNvSpPr txBox="1"/>
-          <p:nvPr/>
-        </p:nvSpPr>
-        <p:spPr>
-          <a:xfrm>
-            <a:off x="6638924" y="3772082"/>
-            <a:ext cx="658368" cy="182880"/>
-          </a:xfrm>
-          <a:prstGeom prst="rect">
-            <a:avLst/>
-          </a:prstGeom>
-          <a:noFill/>
-        </p:spPr>
-        <p:txBody>
-          <a:bodyPr wrap="square" anchor="t" lIns="0" rIns="0" tIns="0" bIns="0">
-            <a:spAutoFit/>
-          </a:bodyPr>
-          <a:lstStyle/>
-          <a:p>
-            <a:pPr algn="ctr">
-              <a:lnSpc>
-                <a:spcPct val="100000"/>
-              </a:lnSpc>
-            </a:pPr>
-            <a:r>
-              <a:rPr sz="850" b="1" lang="ja-JP">
-                <a:solidFill>
-                  <a:srgbClr val="C7583E"/>
-                </a:solidFill>
-                <a:latin typeface="Yu Gothic"/>
-                <a:ea typeface="Yu Gothic"/>
-                <a:cs typeface="Yu Gothic"/>
-              </a:rPr>
-              <a:t>展開判断</a:t>
-            </a:r>
-          </a:p>
-        </p:txBody>
-      </p:sp>
-      <p:sp>
-        <p:nvSpPr>
-          <p:cNvPr id="53" name="Rectangle 52"/>
+              <a:t>複数部門で試行</a:t>
+            </a:r>
+          </a:p>
+        </p:txBody>
+      </p:sp>
+      <p:sp>
+        <p:nvSpPr>
+          <p:cNvPr id="68" name="Rectangle 67"/>
           <p:cNvSpPr/>
           <p:nvPr/>
         </p:nvSpPr>
         <p:spPr>
           <a:xfrm>
-            <a:off x="3422141" y="4085904"/>
-            <a:ext cx="3532632" cy="32004"/>
+            <a:off x="5234940" y="3700759"/>
+            <a:ext cx="2718816" cy="274320"/>
           </a:xfrm>
           <a:prstGeom prst="rect">
             <a:avLst/>
@@ -10126,14 +10679,14 @@
       </p:sp>
       <p:sp>
         <p:nvSpPr>
-          <p:cNvPr id="54" name="TextBox 53"/>
-          <p:cNvSpPr txBox="1"/>
-          <p:nvPr/>
-        </p:nvSpPr>
-        <p:spPr>
-          <a:xfrm>
-            <a:off x="6140196" y="4299874"/>
-            <a:ext cx="256032" cy="219456"/>
+          <p:cNvPr id="69" name="TextBox 68"/>
+          <p:cNvSpPr txBox="1"/>
+          <p:nvPr/>
+        </p:nvSpPr>
+        <p:spPr>
+          <a:xfrm>
+            <a:off x="5317236" y="3732763"/>
+            <a:ext cx="2554224" cy="237744"/>
           </a:xfrm>
           <a:prstGeom prst="rect">
             <a:avLst/>
@@ -10152,7 +10705,48 @@
               </a:lnSpc>
             </a:pPr>
             <a:r>
-              <a:rPr sz="1050" b="1" lang="ja-JP">
+              <a:rPr sz="1000" b="1" lang="ja-JP">
+                <a:solidFill>
+                  <a:srgbClr val="FFFFFC"/>
+                </a:solidFill>
+                <a:latin typeface="Yu Gothic"/>
+                <a:ea typeface="Yu Gothic"/>
+                <a:cs typeface="Yu Gothic"/>
+              </a:rPr>
+              <a:t>パイロット運用</a:t>
+            </a:r>
+          </a:p>
+        </p:txBody>
+      </p:sp>
+      <p:sp>
+        <p:nvSpPr>
+          <p:cNvPr id="70" name="TextBox 69"/>
+          <p:cNvSpPr txBox="1"/>
+          <p:nvPr/>
+        </p:nvSpPr>
+        <p:spPr>
+          <a:xfrm>
+            <a:off x="768096" y="4371197"/>
+            <a:ext cx="310896" cy="246888"/>
+          </a:xfrm>
+          <a:prstGeom prst="rect">
+            <a:avLst/>
+          </a:prstGeom>
+          <a:noFill/>
+        </p:spPr>
+        <p:txBody>
+          <a:bodyPr wrap="square" anchor="t" lIns="0" rIns="0" tIns="0" bIns="0">
+            <a:spAutoFit/>
+          </a:bodyPr>
+          <a:lstStyle/>
+          <a:p>
+            <a:pPr algn="l">
+              <a:lnSpc>
+                <a:spcPct val="130000"/>
+              </a:lnSpc>
+            </a:pPr>
+            <a:r>
+              <a:rPr sz="1250" b="1" lang="ja-JP">
                 <a:solidFill>
                   <a:srgbClr val="0D7870"/>
                 </a:solidFill>
@@ -10167,14 +10761,14 @@
       </p:sp>
       <p:sp>
         <p:nvSpPr>
-          <p:cNvPr id="55" name="TextBox 54"/>
-          <p:cNvSpPr txBox="1"/>
-          <p:nvPr/>
-        </p:nvSpPr>
-        <p:spPr>
-          <a:xfrm>
-            <a:off x="6451092" y="4285609"/>
-            <a:ext cx="5006340" cy="219456"/>
+          <p:cNvPr id="71" name="TextBox 70"/>
+          <p:cNvSpPr txBox="1"/>
+          <p:nvPr/>
+        </p:nvSpPr>
+        <p:spPr>
+          <a:xfrm>
+            <a:off x="1133856" y="4328403"/>
+            <a:ext cx="1837943" cy="246888"/>
           </a:xfrm>
           <a:prstGeom prst="rect">
             <a:avLst/>
@@ -10208,14 +10802,14 @@
       </p:sp>
       <p:sp>
         <p:nvSpPr>
-          <p:cNvPr id="56" name="TextBox 55"/>
-          <p:cNvSpPr txBox="1"/>
-          <p:nvPr/>
-        </p:nvSpPr>
-        <p:spPr>
-          <a:xfrm>
-            <a:off x="6451092" y="4492447"/>
-            <a:ext cx="5006340" cy="182880"/>
+          <p:cNvPr id="72" name="TextBox 71"/>
+          <p:cNvSpPr txBox="1"/>
+          <p:nvPr/>
+        </p:nvSpPr>
+        <p:spPr>
+          <a:xfrm>
+            <a:off x="1133856" y="4642225"/>
+            <a:ext cx="1837943" cy="182880"/>
           </a:xfrm>
           <a:prstGeom prst="rect">
             <a:avLst/>
@@ -10249,14 +10843,14 @@
       </p:sp>
       <p:sp>
         <p:nvSpPr>
-          <p:cNvPr id="57" name="Rectangle 56"/>
+          <p:cNvPr id="73" name="Rectangle 72"/>
           <p:cNvSpPr/>
           <p:nvPr/>
         </p:nvSpPr>
         <p:spPr>
           <a:xfrm>
-            <a:off x="6140196" y="4799136"/>
-            <a:ext cx="2626614" cy="32004"/>
+            <a:off x="7342632" y="4413991"/>
+            <a:ext cx="2016251" cy="274320"/>
           </a:xfrm>
           <a:prstGeom prst="rect">
             <a:avLst/>
@@ -10293,14 +10887,14 @@
       </p:sp>
       <p:sp>
         <p:nvSpPr>
-          <p:cNvPr id="58" name="TextBox 57"/>
-          <p:cNvSpPr txBox="1"/>
-          <p:nvPr/>
-        </p:nvSpPr>
-        <p:spPr>
-          <a:xfrm>
-            <a:off x="8858250" y="5013106"/>
-            <a:ext cx="256032" cy="219456"/>
+          <p:cNvPr id="74" name="TextBox 73"/>
+          <p:cNvSpPr txBox="1"/>
+          <p:nvPr/>
+        </p:nvSpPr>
+        <p:spPr>
+          <a:xfrm>
+            <a:off x="7424928" y="4445995"/>
+            <a:ext cx="1851659" cy="237744"/>
           </a:xfrm>
           <a:prstGeom prst="rect">
             <a:avLst/>
@@ -10319,7 +10913,48 @@
               </a:lnSpc>
             </a:pPr>
             <a:r>
-              <a:rPr sz="1050" b="1" lang="ja-JP">
+              <a:rPr sz="1000" b="1" lang="ja-JP">
+                <a:solidFill>
+                  <a:srgbClr val="FFFFFC"/>
+                </a:solidFill>
+                <a:latin typeface="Yu Gothic"/>
+                <a:ea typeface="Yu Gothic"/>
+                <a:cs typeface="Yu Gothic"/>
+              </a:rPr>
+              <a:t>品質・操作性を改善</a:t>
+            </a:r>
+          </a:p>
+        </p:txBody>
+      </p:sp>
+      <p:sp>
+        <p:nvSpPr>
+          <p:cNvPr id="75" name="TextBox 74"/>
+          <p:cNvSpPr txBox="1"/>
+          <p:nvPr/>
+        </p:nvSpPr>
+        <p:spPr>
+          <a:xfrm>
+            <a:off x="768096" y="5084429"/>
+            <a:ext cx="310896" cy="246888"/>
+          </a:xfrm>
+          <a:prstGeom prst="rect">
+            <a:avLst/>
+          </a:prstGeom>
+          <a:noFill/>
+        </p:spPr>
+        <p:txBody>
+          <a:bodyPr wrap="square" anchor="t" lIns="0" rIns="0" tIns="0" bIns="0">
+            <a:spAutoFit/>
+          </a:bodyPr>
+          <a:lstStyle/>
+          <a:p>
+            <a:pPr algn="l">
+              <a:lnSpc>
+                <a:spcPct val="130000"/>
+              </a:lnSpc>
+            </a:pPr>
+            <a:r>
+              <a:rPr sz="1250" b="1" lang="ja-JP">
                 <a:solidFill>
                   <a:srgbClr val="0D7870"/>
                 </a:solidFill>
@@ -10334,14 +10969,14 @@
       </p:sp>
       <p:sp>
         <p:nvSpPr>
-          <p:cNvPr id="59" name="TextBox 58"/>
-          <p:cNvSpPr txBox="1"/>
-          <p:nvPr/>
-        </p:nvSpPr>
-        <p:spPr>
-          <a:xfrm>
-            <a:off x="9169146" y="4998841"/>
-            <a:ext cx="2288285" cy="219456"/>
+          <p:cNvPr id="76" name="TextBox 75"/>
+          <p:cNvSpPr txBox="1"/>
+          <p:nvPr/>
+        </p:nvSpPr>
+        <p:spPr>
+          <a:xfrm>
+            <a:off x="1133856" y="5041635"/>
+            <a:ext cx="1837943" cy="246888"/>
           </a:xfrm>
           <a:prstGeom prst="rect">
             <a:avLst/>
@@ -10375,14 +11010,14 @@
       </p:sp>
       <p:sp>
         <p:nvSpPr>
-          <p:cNvPr id="60" name="TextBox 59"/>
-          <p:cNvSpPr txBox="1"/>
-          <p:nvPr/>
-        </p:nvSpPr>
-        <p:spPr>
-          <a:xfrm>
-            <a:off x="9169146" y="5205679"/>
-            <a:ext cx="1067180" cy="182880"/>
+          <p:cNvPr id="77" name="TextBox 76"/>
+          <p:cNvSpPr txBox="1"/>
+          <p:nvPr/>
+        </p:nvSpPr>
+        <p:spPr>
+          <a:xfrm>
+            <a:off x="1133856" y="5355457"/>
+            <a:ext cx="1837943" cy="182880"/>
           </a:xfrm>
           <a:prstGeom prst="rect">
             <a:avLst/>
@@ -10416,55 +11051,14 @@
       </p:sp>
       <p:sp>
         <p:nvSpPr>
-          <p:cNvPr id="61" name="TextBox 60"/>
-          <p:cNvSpPr txBox="1"/>
-          <p:nvPr/>
-        </p:nvSpPr>
-        <p:spPr>
-          <a:xfrm>
-            <a:off x="10327767" y="5198546"/>
-            <a:ext cx="658368" cy="182880"/>
-          </a:xfrm>
-          <a:prstGeom prst="rect">
-            <a:avLst/>
-          </a:prstGeom>
-          <a:noFill/>
-        </p:spPr>
-        <p:txBody>
-          <a:bodyPr wrap="square" anchor="t" lIns="0" rIns="0" tIns="0" bIns="0">
-            <a:spAutoFit/>
-          </a:bodyPr>
-          <a:lstStyle/>
-          <a:p>
-            <a:pPr algn="ctr">
-              <a:lnSpc>
-                <a:spcPct val="100000"/>
-              </a:lnSpc>
-            </a:pPr>
-            <a:r>
-              <a:rPr sz="850" b="1" lang="ja-JP">
-                <a:solidFill>
-                  <a:srgbClr val="C7583E"/>
-                </a:solidFill>
-                <a:latin typeface="Yu Gothic"/>
-                <a:ea typeface="Yu Gothic"/>
-                <a:cs typeface="Yu Gothic"/>
-              </a:rPr>
-              <a:t>標準化</a:t>
-            </a:r>
-          </a:p>
-        </p:txBody>
-      </p:sp>
-      <p:sp>
-        <p:nvSpPr>
-          <p:cNvPr id="62" name="Rectangle 61"/>
+          <p:cNvPr id="78" name="Rectangle 77"/>
           <p:cNvSpPr/>
           <p:nvPr/>
         </p:nvSpPr>
         <p:spPr>
           <a:xfrm>
-            <a:off x="8858250" y="5512368"/>
-            <a:ext cx="2626613" cy="32004"/>
+            <a:off x="9450324" y="5127223"/>
+            <a:ext cx="2016251" cy="274320"/>
           </a:xfrm>
           <a:prstGeom prst="rect">
             <a:avLst/>
@@ -10501,14 +11095,55 @@
       </p:sp>
       <p:sp>
         <p:nvSpPr>
-          <p:cNvPr id="63" name="Diamond 62"/>
+          <p:cNvPr id="79" name="TextBox 78"/>
+          <p:cNvSpPr txBox="1"/>
+          <p:nvPr/>
+        </p:nvSpPr>
+        <p:spPr>
+          <a:xfrm>
+            <a:off x="9532620" y="5159227"/>
+            <a:ext cx="1851659" cy="237744"/>
+          </a:xfrm>
+          <a:prstGeom prst="rect">
+            <a:avLst/>
+          </a:prstGeom>
+          <a:noFill/>
+        </p:spPr>
+        <p:txBody>
+          <a:bodyPr wrap="square" anchor="t" lIns="0" rIns="0" tIns="0" bIns="0">
+            <a:spAutoFit/>
+          </a:bodyPr>
+          <a:lstStyle/>
+          <a:p>
+            <a:pPr algn="l">
+              <a:lnSpc>
+                <a:spcPct val="130000"/>
+              </a:lnSpc>
+            </a:pPr>
+            <a:r>
+              <a:rPr sz="1000" b="1" lang="ja-JP">
+                <a:solidFill>
+                  <a:srgbClr val="FFFFFC"/>
+                </a:solidFill>
+                <a:latin typeface="Yu Gothic"/>
+                <a:ea typeface="Yu Gothic"/>
+                <a:cs typeface="Yu Gothic"/>
+              </a:rPr>
+              <a:t>標準運用へ移行</a:t>
+            </a:r>
+          </a:p>
+        </p:txBody>
+      </p:sp>
+      <p:sp>
+        <p:nvSpPr>
+          <p:cNvPr id="80" name="Diamond 79"/>
           <p:cNvSpPr/>
           <p:nvPr/>
         </p:nvSpPr>
         <p:spPr>
           <a:xfrm>
-            <a:off x="1962530" y="2620578"/>
-            <a:ext cx="109728" cy="109728"/>
+            <a:off x="4066794" y="2116835"/>
+            <a:ext cx="137160" cy="137160"/>
           </a:xfrm>
           <a:prstGeom prst="diamond">
             <a:avLst/>
@@ -10545,14 +11180,57 @@
       </p:sp>
       <p:sp>
         <p:nvSpPr>
-          <p:cNvPr id="64" name="Diamond 63"/>
+          <p:cNvPr id="81" name="TextBox 80"/>
+          <p:cNvSpPr txBox="1"/>
+          <p:nvPr/>
+        </p:nvSpPr>
+        <p:spPr>
+          <a:xfrm>
+            <a:off x="3573322" y="2588117"/>
+            <a:ext cx="1124102" cy="164592"/>
+          </a:xfrm>
+          <a:prstGeom prst="rect">
+            <a:avLst/>
+          </a:prstGeom>
+          <a:solidFill>
+            <a:srgbClr val="FFFFFC"/>
+          </a:solidFill>
+        </p:spPr>
+        <p:txBody>
+          <a:bodyPr wrap="square" anchor="t" lIns="0" rIns="0" tIns="0" bIns="0">
+            <a:spAutoFit/>
+          </a:bodyPr>
+          <a:lstStyle/>
+          <a:p>
+            <a:pPr algn="ctr">
+              <a:lnSpc>
+                <a:spcPct val="100000"/>
+              </a:lnSpc>
+            </a:pPr>
+            <a:r>
+              <a:rPr sz="850" b="0" lang="ja-JP">
+                <a:solidFill>
+                  <a:srgbClr val="202729"/>
+                </a:solidFill>
+                <a:latin typeface="Yu Gothic"/>
+                <a:ea typeface="Yu Gothic"/>
+                <a:cs typeface="Yu Gothic"/>
+              </a:rPr>
+              <a:t>型レビュー</a:t>
+            </a:r>
+          </a:p>
+        </p:txBody>
+      </p:sp>
+      <p:sp>
+        <p:nvSpPr>
+          <p:cNvPr id="82" name="Diamond 81"/>
           <p:cNvSpPr/>
           <p:nvPr/>
         </p:nvSpPr>
         <p:spPr>
           <a:xfrm>
-            <a:off x="6492621" y="4047042"/>
-            <a:ext cx="109728" cy="109728"/>
+            <a:off x="7579614" y="3543299"/>
+            <a:ext cx="137160" cy="137160"/>
           </a:xfrm>
           <a:prstGeom prst="diamond">
             <a:avLst/>
@@ -10589,14 +11267,57 @@
       </p:sp>
       <p:sp>
         <p:nvSpPr>
-          <p:cNvPr id="65" name="Diamond 64"/>
+          <p:cNvPr id="83" name="TextBox 82"/>
+          <p:cNvSpPr txBox="1"/>
+          <p:nvPr/>
+        </p:nvSpPr>
+        <p:spPr>
+          <a:xfrm>
+            <a:off x="7086142" y="4014581"/>
+            <a:ext cx="1124102" cy="164592"/>
+          </a:xfrm>
+          <a:prstGeom prst="rect">
+            <a:avLst/>
+          </a:prstGeom>
+          <a:solidFill>
+            <a:srgbClr val="FFFFFC"/>
+          </a:solidFill>
+        </p:spPr>
+        <p:txBody>
+          <a:bodyPr wrap="square" anchor="t" lIns="0" rIns="0" tIns="0" bIns="0">
+            <a:spAutoFit/>
+          </a:bodyPr>
+          <a:lstStyle/>
+          <a:p>
+            <a:pPr algn="ctr">
+              <a:lnSpc>
+                <a:spcPct val="100000"/>
+              </a:lnSpc>
+            </a:pPr>
+            <a:r>
+              <a:rPr sz="850" b="0" lang="ja-JP">
+                <a:solidFill>
+                  <a:srgbClr val="202729"/>
+                </a:solidFill>
+                <a:latin typeface="Yu Gothic"/>
+                <a:ea typeface="Yu Gothic"/>
+                <a:cs typeface="Yu Gothic"/>
+              </a:rPr>
+              <a:t>展開判断</a:t>
+            </a:r>
+          </a:p>
+        </p:txBody>
+      </p:sp>
+      <p:sp>
+        <p:nvSpPr>
+          <p:cNvPr id="84" name="Diamond 83"/>
           <p:cNvSpPr/>
           <p:nvPr/>
         </p:nvSpPr>
         <p:spPr>
           <a:xfrm>
-            <a:off x="11022711" y="5473506"/>
-            <a:ext cx="109728" cy="109728"/>
+            <a:off x="11092434" y="4969764"/>
+            <a:ext cx="137160" cy="137160"/>
           </a:xfrm>
           <a:prstGeom prst="diamond">
             <a:avLst/>
@@ -10633,7 +11354,50 @@
       </p:sp>
       <p:sp>
         <p:nvSpPr>
-          <p:cNvPr id="66" name="Rectangle 65"/>
+          <p:cNvPr id="85" name="TextBox 84"/>
+          <p:cNvSpPr txBox="1"/>
+          <p:nvPr/>
+        </p:nvSpPr>
+        <p:spPr>
+          <a:xfrm>
+            <a:off x="10388193" y="5441045"/>
+            <a:ext cx="1124102" cy="164592"/>
+          </a:xfrm>
+          <a:prstGeom prst="rect">
+            <a:avLst/>
+          </a:prstGeom>
+          <a:solidFill>
+            <a:srgbClr val="FFFFFC"/>
+          </a:solidFill>
+        </p:spPr>
+        <p:txBody>
+          <a:bodyPr wrap="square" anchor="t" lIns="0" rIns="0" tIns="0" bIns="0">
+            <a:spAutoFit/>
+          </a:bodyPr>
+          <a:lstStyle/>
+          <a:p>
+            <a:pPr algn="ctr">
+              <a:lnSpc>
+                <a:spcPct val="100000"/>
+              </a:lnSpc>
+            </a:pPr>
+            <a:r>
+              <a:rPr sz="850" b="0" lang="ja-JP">
+                <a:solidFill>
+                  <a:srgbClr val="202729"/>
+                </a:solidFill>
+                <a:latin typeface="Yu Gothic"/>
+                <a:ea typeface="Yu Gothic"/>
+                <a:cs typeface="Yu Gothic"/>
+              </a:rPr>
+              <a:t>標準化</a:t>
+            </a:r>
+          </a:p>
+        </p:txBody>
+      </p:sp>
+      <p:sp>
+        <p:nvSpPr>
+          <p:cNvPr id="86" name="Rectangle 85"/>
           <p:cNvSpPr/>
           <p:nvPr/>
         </p:nvSpPr>
@@ -10677,7 +11441,7 @@
       </p:sp>
       <p:sp>
         <p:nvSpPr>
-          <p:cNvPr id="67" name="TextBox 66"/>
+          <p:cNvPr id="87" name="TextBox 86"/>
           <p:cNvSpPr txBox="1"/>
           <p:nvPr/>
         </p:nvSpPr>
@@ -10718,7 +11482,7 @@
       </p:sp>
       <p:sp>
         <p:nvSpPr>
-          <p:cNvPr id="68" name="TextBox 67"/>
+          <p:cNvPr id="88" name="TextBox 87"/>
           <p:cNvSpPr txBox="1"/>
           <p:nvPr/>
         </p:nvSpPr>
@@ -10759,7 +11523,7 @@
       </p:sp>
       <p:sp>
         <p:nvSpPr>
-          <p:cNvPr id="69" name="TextBox 68"/>
+          <p:cNvPr id="89" name="TextBox 88"/>
           <p:cNvSpPr txBox="1"/>
           <p:nvPr/>
         </p:nvSpPr>

--- a/examples/gallery/pattern_gallery.pptx
+++ b/examples/gallery/pattern_gallery.pptx
@@ -8093,8 +8093,8 @@
         </p:nvSpPr>
         <p:spPr>
           <a:xfrm>
-            <a:off x="658368" y="1664208"/>
-            <a:ext cx="2423160" cy="438912"/>
+            <a:off x="658368" y="1591056"/>
+            <a:ext cx="2542032" cy="402336"/>
           </a:xfrm>
           <a:prstGeom prst="rect">
             <a:avLst/>
@@ -8137,8 +8137,8 @@
         </p:nvSpPr>
         <p:spPr>
           <a:xfrm>
-            <a:off x="822959" y="1737360"/>
-            <a:ext cx="2093976" cy="256032"/>
+            <a:off x="822959" y="1655064"/>
+            <a:ext cx="2212848" cy="256032"/>
           </a:xfrm>
           <a:prstGeom prst="rect">
             <a:avLst/>
@@ -8157,7 +8157,7 @@
               </a:lnSpc>
             </a:pPr>
             <a:r>
-              <a:rPr sz="1050" b="1" lang="ja-JP">
+              <a:rPr sz="1000" b="1" lang="ja-JP">
                 <a:solidFill>
                   <a:srgbClr val="FFFFFC"/>
                 </a:solidFill>
@@ -8165,7 +8165,7 @@
                 <a:ea typeface="Yu Gothic"/>
                 <a:cs typeface="Yu Gothic"/>
               </a:rPr>
-              <a:t>フェーズ</a:t>
+              <a:t>テーマ</a:t>
             </a:r>
           </a:p>
         </p:txBody>
@@ -8178,8 +8178,8 @@
         </p:nvSpPr>
         <p:spPr>
           <a:xfrm>
-            <a:off x="3081528" y="1664208"/>
-            <a:ext cx="8430768" cy="438912"/>
+            <a:off x="3200400" y="1591056"/>
+            <a:ext cx="8311896" cy="402336"/>
           </a:xfrm>
           <a:prstGeom prst="rect">
             <a:avLst/>
@@ -8222,8 +8222,8 @@
         </p:nvSpPr>
         <p:spPr>
           <a:xfrm>
-            <a:off x="3081528" y="1737360"/>
-            <a:ext cx="702564" cy="274320"/>
+            <a:off x="3200400" y="1655064"/>
+            <a:ext cx="692658" cy="256032"/>
           </a:xfrm>
           <a:prstGeom prst="rect">
             <a:avLst/>
@@ -8238,11 +8238,11 @@
           <a:p>
             <a:pPr algn="ctr">
               <a:lnSpc>
-                <a:spcPct val="130000"/>
-              </a:lnSpc>
-            </a:pPr>
-            <a:r>
-              <a:rPr sz="1050" b="1" lang="ja-JP">
+                <a:spcPct val="100000"/>
+              </a:lnSpc>
+            </a:pPr>
+            <a:r>
+              <a:rPr sz="1000" b="1" lang="ja-JP">
                 <a:solidFill>
                   <a:srgbClr val="FFFFFC"/>
                 </a:solidFill>
@@ -8263,8 +8263,8 @@
         </p:nvSpPr>
         <p:spPr>
           <a:xfrm>
-            <a:off x="3784092" y="1737360"/>
-            <a:ext cx="702564" cy="274320"/>
+            <a:off x="3893058" y="1655064"/>
+            <a:ext cx="692658" cy="256032"/>
           </a:xfrm>
           <a:prstGeom prst="rect">
             <a:avLst/>
@@ -8279,11 +8279,11 @@
           <a:p>
             <a:pPr algn="ctr">
               <a:lnSpc>
-                <a:spcPct val="130000"/>
-              </a:lnSpc>
-            </a:pPr>
-            <a:r>
-              <a:rPr sz="1050" b="1" lang="ja-JP">
+                <a:spcPct val="100000"/>
+              </a:lnSpc>
+            </a:pPr>
+            <a:r>
+              <a:rPr sz="1000" b="1" lang="ja-JP">
                 <a:solidFill>
                   <a:srgbClr val="FFFFFC"/>
                 </a:solidFill>
@@ -8298,45 +8298,42 @@
       </p:sp>
       <p:sp>
         <p:nvSpPr>
-          <p:cNvPr id="10" name="Rectangle 9"/>
-          <p:cNvSpPr/>
-          <p:nvPr/>
-        </p:nvSpPr>
-        <p:spPr>
-          <a:xfrm>
-            <a:off x="3784092" y="1737360"/>
-            <a:ext cx="9144" cy="292607"/>
-          </a:xfrm>
-          <a:prstGeom prst="rect">
-            <a:avLst/>
-          </a:prstGeom>
-          <a:solidFill>
-            <a:srgbClr val="666E70"/>
-          </a:solidFill>
-          <a:ln>
-            <a:noFill/>
-          </a:ln>
-          <a:effectLst/>
-        </p:spPr>
-        <p:style>
-          <a:lnRef idx="1">
-            <a:schemeClr val="accent1"/>
-          </a:lnRef>
-          <a:fillRef idx="3">
-            <a:schemeClr val="accent1"/>
-          </a:fillRef>
-          <a:effectRef idx="2">
-            <a:schemeClr val="accent1"/>
-          </a:effectRef>
-          <a:fontRef idx="minor">
-            <a:schemeClr val="lt1"/>
-          </a:fontRef>
-        </p:style>
-        <p:txBody>
-          <a:bodyPr rtlCol="0" anchor="ctr"/>
-          <a:lstStyle/>
-          <a:p>
-            <a:pPr algn="ctr"/>
+          <p:cNvPr id="10" name="TextBox 9"/>
+          <p:cNvSpPr txBox="1"/>
+          <p:nvPr/>
+        </p:nvSpPr>
+        <p:spPr>
+          <a:xfrm>
+            <a:off x="4585716" y="1655064"/>
+            <a:ext cx="692658" cy="256032"/>
+          </a:xfrm>
+          <a:prstGeom prst="rect">
+            <a:avLst/>
+          </a:prstGeom>
+          <a:noFill/>
+        </p:spPr>
+        <p:txBody>
+          <a:bodyPr wrap="square" anchor="t" lIns="0" rIns="0" tIns="0" bIns="0">
+            <a:spAutoFit/>
+          </a:bodyPr>
+          <a:lstStyle/>
+          <a:p>
+            <a:pPr algn="ctr">
+              <a:lnSpc>
+                <a:spcPct val="100000"/>
+              </a:lnSpc>
+            </a:pPr>
+            <a:r>
+              <a:rPr sz="1000" b="1" lang="ja-JP">
+                <a:solidFill>
+                  <a:srgbClr val="FFFFFC"/>
+                </a:solidFill>
+                <a:latin typeface="Yu Gothic"/>
+                <a:ea typeface="Yu Gothic"/>
+                <a:cs typeface="Yu Gothic"/>
+              </a:rPr>
+              <a:t>6月</a:t>
+            </a:r>
           </a:p>
         </p:txBody>
       </p:sp>
@@ -8348,8 +8345,8 @@
         </p:nvSpPr>
         <p:spPr>
           <a:xfrm>
-            <a:off x="4486656" y="1737360"/>
-            <a:ext cx="702564" cy="274320"/>
+            <a:off x="5278374" y="1655064"/>
+            <a:ext cx="692658" cy="256032"/>
           </a:xfrm>
           <a:prstGeom prst="rect">
             <a:avLst/>
@@ -8364,11 +8361,11 @@
           <a:p>
             <a:pPr algn="ctr">
               <a:lnSpc>
-                <a:spcPct val="130000"/>
-              </a:lnSpc>
-            </a:pPr>
-            <a:r>
-              <a:rPr sz="1050" b="1" lang="ja-JP">
+                <a:spcPct val="100000"/>
+              </a:lnSpc>
+            </a:pPr>
+            <a:r>
+              <a:rPr sz="1000" b="1" lang="ja-JP">
                 <a:solidFill>
                   <a:srgbClr val="FFFFFC"/>
                 </a:solidFill>
@@ -8376,52 +8373,49 @@
                 <a:ea typeface="Yu Gothic"/>
                 <a:cs typeface="Yu Gothic"/>
               </a:rPr>
-              <a:t>6月</a:t>
-            </a:r>
-          </a:p>
-        </p:txBody>
-      </p:sp>
-      <p:sp>
-        <p:nvSpPr>
-          <p:cNvPr id="12" name="Rectangle 11"/>
-          <p:cNvSpPr/>
-          <p:nvPr/>
-        </p:nvSpPr>
-        <p:spPr>
-          <a:xfrm>
-            <a:off x="4486656" y="1737360"/>
-            <a:ext cx="9144" cy="292607"/>
-          </a:xfrm>
-          <a:prstGeom prst="rect">
-            <a:avLst/>
-          </a:prstGeom>
-          <a:solidFill>
-            <a:srgbClr val="666E70"/>
-          </a:solidFill>
-          <a:ln>
-            <a:noFill/>
-          </a:ln>
-          <a:effectLst/>
-        </p:spPr>
-        <p:style>
-          <a:lnRef idx="1">
-            <a:schemeClr val="accent1"/>
-          </a:lnRef>
-          <a:fillRef idx="3">
-            <a:schemeClr val="accent1"/>
-          </a:fillRef>
-          <a:effectRef idx="2">
-            <a:schemeClr val="accent1"/>
-          </a:effectRef>
-          <a:fontRef idx="minor">
-            <a:schemeClr val="lt1"/>
-          </a:fontRef>
-        </p:style>
-        <p:txBody>
-          <a:bodyPr rtlCol="0" anchor="ctr"/>
-          <a:lstStyle/>
-          <a:p>
-            <a:pPr algn="ctr"/>
+              <a:t>7月</a:t>
+            </a:r>
+          </a:p>
+        </p:txBody>
+      </p:sp>
+      <p:sp>
+        <p:nvSpPr>
+          <p:cNvPr id="12" name="TextBox 11"/>
+          <p:cNvSpPr txBox="1"/>
+          <p:nvPr/>
+        </p:nvSpPr>
+        <p:spPr>
+          <a:xfrm>
+            <a:off x="5971031" y="1655064"/>
+            <a:ext cx="692658" cy="256032"/>
+          </a:xfrm>
+          <a:prstGeom prst="rect">
+            <a:avLst/>
+          </a:prstGeom>
+          <a:noFill/>
+        </p:spPr>
+        <p:txBody>
+          <a:bodyPr wrap="square" anchor="t" lIns="0" rIns="0" tIns="0" bIns="0">
+            <a:spAutoFit/>
+          </a:bodyPr>
+          <a:lstStyle/>
+          <a:p>
+            <a:pPr algn="ctr">
+              <a:lnSpc>
+                <a:spcPct val="100000"/>
+              </a:lnSpc>
+            </a:pPr>
+            <a:r>
+              <a:rPr sz="1000" b="1" lang="ja-JP">
+                <a:solidFill>
+                  <a:srgbClr val="FFFFFC"/>
+                </a:solidFill>
+                <a:latin typeface="Yu Gothic"/>
+                <a:ea typeface="Yu Gothic"/>
+                <a:cs typeface="Yu Gothic"/>
+              </a:rPr>
+              <a:t>8月</a:t>
+            </a:r>
           </a:p>
         </p:txBody>
       </p:sp>
@@ -8433,8 +8427,8 @@
         </p:nvSpPr>
         <p:spPr>
           <a:xfrm>
-            <a:off x="5189220" y="1737360"/>
-            <a:ext cx="702564" cy="274320"/>
+            <a:off x="6663690" y="1655064"/>
+            <a:ext cx="692658" cy="256032"/>
           </a:xfrm>
           <a:prstGeom prst="rect">
             <a:avLst/>
@@ -8449,11 +8443,11 @@
           <a:p>
             <a:pPr algn="ctr">
               <a:lnSpc>
-                <a:spcPct val="130000"/>
-              </a:lnSpc>
-            </a:pPr>
-            <a:r>
-              <a:rPr sz="1050" b="1" lang="ja-JP">
+                <a:spcPct val="100000"/>
+              </a:lnSpc>
+            </a:pPr>
+            <a:r>
+              <a:rPr sz="1000" b="1" lang="ja-JP">
                 <a:solidFill>
                   <a:srgbClr val="FFFFFC"/>
                 </a:solidFill>
@@ -8461,52 +8455,49 @@
                 <a:ea typeface="Yu Gothic"/>
                 <a:cs typeface="Yu Gothic"/>
               </a:rPr>
-              <a:t>7月</a:t>
-            </a:r>
-          </a:p>
-        </p:txBody>
-      </p:sp>
-      <p:sp>
-        <p:nvSpPr>
-          <p:cNvPr id="14" name="Rectangle 13"/>
-          <p:cNvSpPr/>
-          <p:nvPr/>
-        </p:nvSpPr>
-        <p:spPr>
-          <a:xfrm>
-            <a:off x="5189220" y="1737360"/>
-            <a:ext cx="9144" cy="292607"/>
-          </a:xfrm>
-          <a:prstGeom prst="rect">
-            <a:avLst/>
-          </a:prstGeom>
-          <a:solidFill>
-            <a:srgbClr val="666E70"/>
-          </a:solidFill>
-          <a:ln>
-            <a:noFill/>
-          </a:ln>
-          <a:effectLst/>
-        </p:spPr>
-        <p:style>
-          <a:lnRef idx="1">
-            <a:schemeClr val="accent1"/>
-          </a:lnRef>
-          <a:fillRef idx="3">
-            <a:schemeClr val="accent1"/>
-          </a:fillRef>
-          <a:effectRef idx="2">
-            <a:schemeClr val="accent1"/>
-          </a:effectRef>
-          <a:fontRef idx="minor">
-            <a:schemeClr val="lt1"/>
-          </a:fontRef>
-        </p:style>
-        <p:txBody>
-          <a:bodyPr rtlCol="0" anchor="ctr"/>
-          <a:lstStyle/>
-          <a:p>
-            <a:pPr algn="ctr"/>
+              <a:t>9月</a:t>
+            </a:r>
+          </a:p>
+        </p:txBody>
+      </p:sp>
+      <p:sp>
+        <p:nvSpPr>
+          <p:cNvPr id="14" name="TextBox 13"/>
+          <p:cNvSpPr txBox="1"/>
+          <p:nvPr/>
+        </p:nvSpPr>
+        <p:spPr>
+          <a:xfrm>
+            <a:off x="7356348" y="1655064"/>
+            <a:ext cx="692658" cy="256032"/>
+          </a:xfrm>
+          <a:prstGeom prst="rect">
+            <a:avLst/>
+          </a:prstGeom>
+          <a:noFill/>
+        </p:spPr>
+        <p:txBody>
+          <a:bodyPr wrap="square" anchor="t" lIns="0" rIns="0" tIns="0" bIns="0">
+            <a:spAutoFit/>
+          </a:bodyPr>
+          <a:lstStyle/>
+          <a:p>
+            <a:pPr algn="ctr">
+              <a:lnSpc>
+                <a:spcPct val="100000"/>
+              </a:lnSpc>
+            </a:pPr>
+            <a:r>
+              <a:rPr sz="1000" b="1" lang="ja-JP">
+                <a:solidFill>
+                  <a:srgbClr val="FFFFFC"/>
+                </a:solidFill>
+                <a:latin typeface="Yu Gothic"/>
+                <a:ea typeface="Yu Gothic"/>
+                <a:cs typeface="Yu Gothic"/>
+              </a:rPr>
+              <a:t>10月</a:t>
+            </a:r>
           </a:p>
         </p:txBody>
       </p:sp>
@@ -8518,8 +8509,8 @@
         </p:nvSpPr>
         <p:spPr>
           <a:xfrm>
-            <a:off x="5891784" y="1737360"/>
-            <a:ext cx="702564" cy="274320"/>
+            <a:off x="8049005" y="1655064"/>
+            <a:ext cx="692658" cy="256032"/>
           </a:xfrm>
           <a:prstGeom prst="rect">
             <a:avLst/>
@@ -8534,11 +8525,11 @@
           <a:p>
             <a:pPr algn="ctr">
               <a:lnSpc>
-                <a:spcPct val="130000"/>
-              </a:lnSpc>
-            </a:pPr>
-            <a:r>
-              <a:rPr sz="1050" b="1" lang="ja-JP">
+                <a:spcPct val="100000"/>
+              </a:lnSpc>
+            </a:pPr>
+            <a:r>
+              <a:rPr sz="1000" b="1" lang="ja-JP">
                 <a:solidFill>
                   <a:srgbClr val="FFFFFC"/>
                 </a:solidFill>
@@ -8546,52 +8537,49 @@
                 <a:ea typeface="Yu Gothic"/>
                 <a:cs typeface="Yu Gothic"/>
               </a:rPr>
-              <a:t>8月</a:t>
-            </a:r>
-          </a:p>
-        </p:txBody>
-      </p:sp>
-      <p:sp>
-        <p:nvSpPr>
-          <p:cNvPr id="16" name="Rectangle 15"/>
-          <p:cNvSpPr/>
-          <p:nvPr/>
-        </p:nvSpPr>
-        <p:spPr>
-          <a:xfrm>
-            <a:off x="5891784" y="1737360"/>
-            <a:ext cx="9144" cy="292607"/>
-          </a:xfrm>
-          <a:prstGeom prst="rect">
-            <a:avLst/>
-          </a:prstGeom>
-          <a:solidFill>
-            <a:srgbClr val="666E70"/>
-          </a:solidFill>
-          <a:ln>
-            <a:noFill/>
-          </a:ln>
-          <a:effectLst/>
-        </p:spPr>
-        <p:style>
-          <a:lnRef idx="1">
-            <a:schemeClr val="accent1"/>
-          </a:lnRef>
-          <a:fillRef idx="3">
-            <a:schemeClr val="accent1"/>
-          </a:fillRef>
-          <a:effectRef idx="2">
-            <a:schemeClr val="accent1"/>
-          </a:effectRef>
-          <a:fontRef idx="minor">
-            <a:schemeClr val="lt1"/>
-          </a:fontRef>
-        </p:style>
-        <p:txBody>
-          <a:bodyPr rtlCol="0" anchor="ctr"/>
-          <a:lstStyle/>
-          <a:p>
-            <a:pPr algn="ctr"/>
+              <a:t>11月</a:t>
+            </a:r>
+          </a:p>
+        </p:txBody>
+      </p:sp>
+      <p:sp>
+        <p:nvSpPr>
+          <p:cNvPr id="16" name="TextBox 15"/>
+          <p:cNvSpPr txBox="1"/>
+          <p:nvPr/>
+        </p:nvSpPr>
+        <p:spPr>
+          <a:xfrm>
+            <a:off x="8741663" y="1655064"/>
+            <a:ext cx="692658" cy="256032"/>
+          </a:xfrm>
+          <a:prstGeom prst="rect">
+            <a:avLst/>
+          </a:prstGeom>
+          <a:noFill/>
+        </p:spPr>
+        <p:txBody>
+          <a:bodyPr wrap="square" anchor="t" lIns="0" rIns="0" tIns="0" bIns="0">
+            <a:spAutoFit/>
+          </a:bodyPr>
+          <a:lstStyle/>
+          <a:p>
+            <a:pPr algn="ctr">
+              <a:lnSpc>
+                <a:spcPct val="100000"/>
+              </a:lnSpc>
+            </a:pPr>
+            <a:r>
+              <a:rPr sz="1000" b="1" lang="ja-JP">
+                <a:solidFill>
+                  <a:srgbClr val="FFFFFC"/>
+                </a:solidFill>
+                <a:latin typeface="Yu Gothic"/>
+                <a:ea typeface="Yu Gothic"/>
+                <a:cs typeface="Yu Gothic"/>
+              </a:rPr>
+              <a:t>12月</a:t>
+            </a:r>
           </a:p>
         </p:txBody>
       </p:sp>
@@ -8603,8 +8591,8 @@
         </p:nvSpPr>
         <p:spPr>
           <a:xfrm>
-            <a:off x="6594348" y="1737360"/>
-            <a:ext cx="702564" cy="274320"/>
+            <a:off x="9434322" y="1655064"/>
+            <a:ext cx="692658" cy="256032"/>
           </a:xfrm>
           <a:prstGeom prst="rect">
             <a:avLst/>
@@ -8619,11 +8607,11 @@
           <a:p>
             <a:pPr algn="ctr">
               <a:lnSpc>
-                <a:spcPct val="130000"/>
-              </a:lnSpc>
-            </a:pPr>
-            <a:r>
-              <a:rPr sz="1050" b="1" lang="ja-JP">
+                <a:spcPct val="100000"/>
+              </a:lnSpc>
+            </a:pPr>
+            <a:r>
+              <a:rPr sz="1000" b="1" lang="ja-JP">
                 <a:solidFill>
                   <a:srgbClr val="FFFFFC"/>
                 </a:solidFill>
@@ -8631,52 +8619,49 @@
                 <a:ea typeface="Yu Gothic"/>
                 <a:cs typeface="Yu Gothic"/>
               </a:rPr>
-              <a:t>9月</a:t>
-            </a:r>
-          </a:p>
-        </p:txBody>
-      </p:sp>
-      <p:sp>
-        <p:nvSpPr>
-          <p:cNvPr id="18" name="Rectangle 17"/>
-          <p:cNvSpPr/>
-          <p:nvPr/>
-        </p:nvSpPr>
-        <p:spPr>
-          <a:xfrm>
-            <a:off x="6594348" y="1737360"/>
-            <a:ext cx="9144" cy="292607"/>
-          </a:xfrm>
-          <a:prstGeom prst="rect">
-            <a:avLst/>
-          </a:prstGeom>
-          <a:solidFill>
-            <a:srgbClr val="666E70"/>
-          </a:solidFill>
-          <a:ln>
-            <a:noFill/>
-          </a:ln>
-          <a:effectLst/>
-        </p:spPr>
-        <p:style>
-          <a:lnRef idx="1">
-            <a:schemeClr val="accent1"/>
-          </a:lnRef>
-          <a:fillRef idx="3">
-            <a:schemeClr val="accent1"/>
-          </a:fillRef>
-          <a:effectRef idx="2">
-            <a:schemeClr val="accent1"/>
-          </a:effectRef>
-          <a:fontRef idx="minor">
-            <a:schemeClr val="lt1"/>
-          </a:fontRef>
-        </p:style>
-        <p:txBody>
-          <a:bodyPr rtlCol="0" anchor="ctr"/>
-          <a:lstStyle/>
-          <a:p>
-            <a:pPr algn="ctr"/>
+              <a:t>1月</a:t>
+            </a:r>
+          </a:p>
+        </p:txBody>
+      </p:sp>
+      <p:sp>
+        <p:nvSpPr>
+          <p:cNvPr id="18" name="TextBox 17"/>
+          <p:cNvSpPr txBox="1"/>
+          <p:nvPr/>
+        </p:nvSpPr>
+        <p:spPr>
+          <a:xfrm>
+            <a:off x="10126980" y="1655064"/>
+            <a:ext cx="692658" cy="256032"/>
+          </a:xfrm>
+          <a:prstGeom prst="rect">
+            <a:avLst/>
+          </a:prstGeom>
+          <a:noFill/>
+        </p:spPr>
+        <p:txBody>
+          <a:bodyPr wrap="square" anchor="t" lIns="0" rIns="0" tIns="0" bIns="0">
+            <a:spAutoFit/>
+          </a:bodyPr>
+          <a:lstStyle/>
+          <a:p>
+            <a:pPr algn="ctr">
+              <a:lnSpc>
+                <a:spcPct val="100000"/>
+              </a:lnSpc>
+            </a:pPr>
+            <a:r>
+              <a:rPr sz="1000" b="1" lang="ja-JP">
+                <a:solidFill>
+                  <a:srgbClr val="FFFFFC"/>
+                </a:solidFill>
+                <a:latin typeface="Yu Gothic"/>
+                <a:ea typeface="Yu Gothic"/>
+                <a:cs typeface="Yu Gothic"/>
+              </a:rPr>
+              <a:t>2月</a:t>
+            </a:r>
           </a:p>
         </p:txBody>
       </p:sp>
@@ -8688,8 +8673,8 @@
         </p:nvSpPr>
         <p:spPr>
           <a:xfrm>
-            <a:off x="7296912" y="1737360"/>
-            <a:ext cx="702564" cy="274320"/>
+            <a:off x="10819638" y="1655064"/>
+            <a:ext cx="692658" cy="256032"/>
           </a:xfrm>
           <a:prstGeom prst="rect">
             <a:avLst/>
@@ -8704,11 +8689,11 @@
           <a:p>
             <a:pPr algn="ctr">
               <a:lnSpc>
-                <a:spcPct val="130000"/>
-              </a:lnSpc>
-            </a:pPr>
-            <a:r>
-              <a:rPr sz="1050" b="1" lang="ja-JP">
+                <a:spcPct val="100000"/>
+              </a:lnSpc>
+            </a:pPr>
+            <a:r>
+              <a:rPr sz="1000" b="1" lang="ja-JP">
                 <a:solidFill>
                   <a:srgbClr val="FFFFFC"/>
                 </a:solidFill>
@@ -8716,7 +8701,7 @@
                 <a:ea typeface="Yu Gothic"/>
                 <a:cs typeface="Yu Gothic"/>
               </a:rPr>
-              <a:t>10月</a:t>
+              <a:t>3月</a:t>
             </a:r>
           </a:p>
         </p:txBody>
@@ -8729,477 +8714,8 @@
         </p:nvSpPr>
         <p:spPr>
           <a:xfrm>
-            <a:off x="7296912" y="1737360"/>
-            <a:ext cx="9144" cy="292607"/>
-          </a:xfrm>
-          <a:prstGeom prst="rect">
-            <a:avLst/>
-          </a:prstGeom>
-          <a:solidFill>
-            <a:srgbClr val="666E70"/>
-          </a:solidFill>
-          <a:ln>
-            <a:noFill/>
-          </a:ln>
-          <a:effectLst/>
-        </p:spPr>
-        <p:style>
-          <a:lnRef idx="1">
-            <a:schemeClr val="accent1"/>
-          </a:lnRef>
-          <a:fillRef idx="3">
-            <a:schemeClr val="accent1"/>
-          </a:fillRef>
-          <a:effectRef idx="2">
-            <a:schemeClr val="accent1"/>
-          </a:effectRef>
-          <a:fontRef idx="minor">
-            <a:schemeClr val="lt1"/>
-          </a:fontRef>
-        </p:style>
-        <p:txBody>
-          <a:bodyPr rtlCol="0" anchor="ctr"/>
-          <a:lstStyle/>
-          <a:p>
-            <a:pPr algn="ctr"/>
-          </a:p>
-        </p:txBody>
-      </p:sp>
-      <p:sp>
-        <p:nvSpPr>
-          <p:cNvPr id="21" name="TextBox 20"/>
-          <p:cNvSpPr txBox="1"/>
-          <p:nvPr/>
-        </p:nvSpPr>
-        <p:spPr>
-          <a:xfrm>
-            <a:off x="7999476" y="1737360"/>
-            <a:ext cx="702564" cy="274320"/>
-          </a:xfrm>
-          <a:prstGeom prst="rect">
-            <a:avLst/>
-          </a:prstGeom>
-          <a:noFill/>
-        </p:spPr>
-        <p:txBody>
-          <a:bodyPr wrap="square" anchor="t" lIns="0" rIns="0" tIns="0" bIns="0">
-            <a:spAutoFit/>
-          </a:bodyPr>
-          <a:lstStyle/>
-          <a:p>
-            <a:pPr algn="ctr">
-              <a:lnSpc>
-                <a:spcPct val="130000"/>
-              </a:lnSpc>
-            </a:pPr>
-            <a:r>
-              <a:rPr sz="1050" b="1" lang="ja-JP">
-                <a:solidFill>
-                  <a:srgbClr val="FFFFFC"/>
-                </a:solidFill>
-                <a:latin typeface="Yu Gothic"/>
-                <a:ea typeface="Yu Gothic"/>
-                <a:cs typeface="Yu Gothic"/>
-              </a:rPr>
-              <a:t>11月</a:t>
-            </a:r>
-          </a:p>
-        </p:txBody>
-      </p:sp>
-      <p:sp>
-        <p:nvSpPr>
-          <p:cNvPr id="22" name="Rectangle 21"/>
-          <p:cNvSpPr/>
-          <p:nvPr/>
-        </p:nvSpPr>
-        <p:spPr>
-          <a:xfrm>
-            <a:off x="7999476" y="1737360"/>
-            <a:ext cx="9144" cy="292607"/>
-          </a:xfrm>
-          <a:prstGeom prst="rect">
-            <a:avLst/>
-          </a:prstGeom>
-          <a:solidFill>
-            <a:srgbClr val="666E70"/>
-          </a:solidFill>
-          <a:ln>
-            <a:noFill/>
-          </a:ln>
-          <a:effectLst/>
-        </p:spPr>
-        <p:style>
-          <a:lnRef idx="1">
-            <a:schemeClr val="accent1"/>
-          </a:lnRef>
-          <a:fillRef idx="3">
-            <a:schemeClr val="accent1"/>
-          </a:fillRef>
-          <a:effectRef idx="2">
-            <a:schemeClr val="accent1"/>
-          </a:effectRef>
-          <a:fontRef idx="minor">
-            <a:schemeClr val="lt1"/>
-          </a:fontRef>
-        </p:style>
-        <p:txBody>
-          <a:bodyPr rtlCol="0" anchor="ctr"/>
-          <a:lstStyle/>
-          <a:p>
-            <a:pPr algn="ctr"/>
-          </a:p>
-        </p:txBody>
-      </p:sp>
-      <p:sp>
-        <p:nvSpPr>
-          <p:cNvPr id="23" name="TextBox 22"/>
-          <p:cNvSpPr txBox="1"/>
-          <p:nvPr/>
-        </p:nvSpPr>
-        <p:spPr>
-          <a:xfrm>
-            <a:off x="8702040" y="1737360"/>
-            <a:ext cx="702564" cy="274320"/>
-          </a:xfrm>
-          <a:prstGeom prst="rect">
-            <a:avLst/>
-          </a:prstGeom>
-          <a:noFill/>
-        </p:spPr>
-        <p:txBody>
-          <a:bodyPr wrap="square" anchor="t" lIns="0" rIns="0" tIns="0" bIns="0">
-            <a:spAutoFit/>
-          </a:bodyPr>
-          <a:lstStyle/>
-          <a:p>
-            <a:pPr algn="ctr">
-              <a:lnSpc>
-                <a:spcPct val="130000"/>
-              </a:lnSpc>
-            </a:pPr>
-            <a:r>
-              <a:rPr sz="1050" b="1" lang="ja-JP">
-                <a:solidFill>
-                  <a:srgbClr val="FFFFFC"/>
-                </a:solidFill>
-                <a:latin typeface="Yu Gothic"/>
-                <a:ea typeface="Yu Gothic"/>
-                <a:cs typeface="Yu Gothic"/>
-              </a:rPr>
-              <a:t>12月</a:t>
-            </a:r>
-          </a:p>
-        </p:txBody>
-      </p:sp>
-      <p:sp>
-        <p:nvSpPr>
-          <p:cNvPr id="24" name="Rectangle 23"/>
-          <p:cNvSpPr/>
-          <p:nvPr/>
-        </p:nvSpPr>
-        <p:spPr>
-          <a:xfrm>
-            <a:off x="8702040" y="1737360"/>
-            <a:ext cx="9144" cy="292607"/>
-          </a:xfrm>
-          <a:prstGeom prst="rect">
-            <a:avLst/>
-          </a:prstGeom>
-          <a:solidFill>
-            <a:srgbClr val="666E70"/>
-          </a:solidFill>
-          <a:ln>
-            <a:noFill/>
-          </a:ln>
-          <a:effectLst/>
-        </p:spPr>
-        <p:style>
-          <a:lnRef idx="1">
-            <a:schemeClr val="accent1"/>
-          </a:lnRef>
-          <a:fillRef idx="3">
-            <a:schemeClr val="accent1"/>
-          </a:fillRef>
-          <a:effectRef idx="2">
-            <a:schemeClr val="accent1"/>
-          </a:effectRef>
-          <a:fontRef idx="minor">
-            <a:schemeClr val="lt1"/>
-          </a:fontRef>
-        </p:style>
-        <p:txBody>
-          <a:bodyPr rtlCol="0" anchor="ctr"/>
-          <a:lstStyle/>
-          <a:p>
-            <a:pPr algn="ctr"/>
-          </a:p>
-        </p:txBody>
-      </p:sp>
-      <p:sp>
-        <p:nvSpPr>
-          <p:cNvPr id="25" name="TextBox 24"/>
-          <p:cNvSpPr txBox="1"/>
-          <p:nvPr/>
-        </p:nvSpPr>
-        <p:spPr>
-          <a:xfrm>
-            <a:off x="9404604" y="1737360"/>
-            <a:ext cx="702564" cy="274320"/>
-          </a:xfrm>
-          <a:prstGeom prst="rect">
-            <a:avLst/>
-          </a:prstGeom>
-          <a:noFill/>
-        </p:spPr>
-        <p:txBody>
-          <a:bodyPr wrap="square" anchor="t" lIns="0" rIns="0" tIns="0" bIns="0">
-            <a:spAutoFit/>
-          </a:bodyPr>
-          <a:lstStyle/>
-          <a:p>
-            <a:pPr algn="ctr">
-              <a:lnSpc>
-                <a:spcPct val="130000"/>
-              </a:lnSpc>
-            </a:pPr>
-            <a:r>
-              <a:rPr sz="1050" b="1" lang="ja-JP">
-                <a:solidFill>
-                  <a:srgbClr val="FFFFFC"/>
-                </a:solidFill>
-                <a:latin typeface="Yu Gothic"/>
-                <a:ea typeface="Yu Gothic"/>
-                <a:cs typeface="Yu Gothic"/>
-              </a:rPr>
-              <a:t>1月</a:t>
-            </a:r>
-          </a:p>
-        </p:txBody>
-      </p:sp>
-      <p:sp>
-        <p:nvSpPr>
-          <p:cNvPr id="26" name="Rectangle 25"/>
-          <p:cNvSpPr/>
-          <p:nvPr/>
-        </p:nvSpPr>
-        <p:spPr>
-          <a:xfrm>
-            <a:off x="9404604" y="1737360"/>
-            <a:ext cx="9144" cy="292607"/>
-          </a:xfrm>
-          <a:prstGeom prst="rect">
-            <a:avLst/>
-          </a:prstGeom>
-          <a:solidFill>
-            <a:srgbClr val="666E70"/>
-          </a:solidFill>
-          <a:ln>
-            <a:noFill/>
-          </a:ln>
-          <a:effectLst/>
-        </p:spPr>
-        <p:style>
-          <a:lnRef idx="1">
-            <a:schemeClr val="accent1"/>
-          </a:lnRef>
-          <a:fillRef idx="3">
-            <a:schemeClr val="accent1"/>
-          </a:fillRef>
-          <a:effectRef idx="2">
-            <a:schemeClr val="accent1"/>
-          </a:effectRef>
-          <a:fontRef idx="minor">
-            <a:schemeClr val="lt1"/>
-          </a:fontRef>
-        </p:style>
-        <p:txBody>
-          <a:bodyPr rtlCol="0" anchor="ctr"/>
-          <a:lstStyle/>
-          <a:p>
-            <a:pPr algn="ctr"/>
-          </a:p>
-        </p:txBody>
-      </p:sp>
-      <p:sp>
-        <p:nvSpPr>
-          <p:cNvPr id="27" name="TextBox 26"/>
-          <p:cNvSpPr txBox="1"/>
-          <p:nvPr/>
-        </p:nvSpPr>
-        <p:spPr>
-          <a:xfrm>
-            <a:off x="10107168" y="1737360"/>
-            <a:ext cx="702564" cy="274320"/>
-          </a:xfrm>
-          <a:prstGeom prst="rect">
-            <a:avLst/>
-          </a:prstGeom>
-          <a:noFill/>
-        </p:spPr>
-        <p:txBody>
-          <a:bodyPr wrap="square" anchor="t" lIns="0" rIns="0" tIns="0" bIns="0">
-            <a:spAutoFit/>
-          </a:bodyPr>
-          <a:lstStyle/>
-          <a:p>
-            <a:pPr algn="ctr">
-              <a:lnSpc>
-                <a:spcPct val="130000"/>
-              </a:lnSpc>
-            </a:pPr>
-            <a:r>
-              <a:rPr sz="1050" b="1" lang="ja-JP">
-                <a:solidFill>
-                  <a:srgbClr val="FFFFFC"/>
-                </a:solidFill>
-                <a:latin typeface="Yu Gothic"/>
-                <a:ea typeface="Yu Gothic"/>
-                <a:cs typeface="Yu Gothic"/>
-              </a:rPr>
-              <a:t>2月</a:t>
-            </a:r>
-          </a:p>
-        </p:txBody>
-      </p:sp>
-      <p:sp>
-        <p:nvSpPr>
-          <p:cNvPr id="28" name="Rectangle 27"/>
-          <p:cNvSpPr/>
-          <p:nvPr/>
-        </p:nvSpPr>
-        <p:spPr>
-          <a:xfrm>
-            <a:off x="10107168" y="1737360"/>
-            <a:ext cx="9144" cy="292607"/>
-          </a:xfrm>
-          <a:prstGeom prst="rect">
-            <a:avLst/>
-          </a:prstGeom>
-          <a:solidFill>
-            <a:srgbClr val="666E70"/>
-          </a:solidFill>
-          <a:ln>
-            <a:noFill/>
-          </a:ln>
-          <a:effectLst/>
-        </p:spPr>
-        <p:style>
-          <a:lnRef idx="1">
-            <a:schemeClr val="accent1"/>
-          </a:lnRef>
-          <a:fillRef idx="3">
-            <a:schemeClr val="accent1"/>
-          </a:fillRef>
-          <a:effectRef idx="2">
-            <a:schemeClr val="accent1"/>
-          </a:effectRef>
-          <a:fontRef idx="minor">
-            <a:schemeClr val="lt1"/>
-          </a:fontRef>
-        </p:style>
-        <p:txBody>
-          <a:bodyPr rtlCol="0" anchor="ctr"/>
-          <a:lstStyle/>
-          <a:p>
-            <a:pPr algn="ctr"/>
-          </a:p>
-        </p:txBody>
-      </p:sp>
-      <p:sp>
-        <p:nvSpPr>
-          <p:cNvPr id="29" name="TextBox 28"/>
-          <p:cNvSpPr txBox="1"/>
-          <p:nvPr/>
-        </p:nvSpPr>
-        <p:spPr>
-          <a:xfrm>
-            <a:off x="10809732" y="1737360"/>
-            <a:ext cx="702564" cy="274320"/>
-          </a:xfrm>
-          <a:prstGeom prst="rect">
-            <a:avLst/>
-          </a:prstGeom>
-          <a:noFill/>
-        </p:spPr>
-        <p:txBody>
-          <a:bodyPr wrap="square" anchor="t" lIns="0" rIns="0" tIns="0" bIns="0">
-            <a:spAutoFit/>
-          </a:bodyPr>
-          <a:lstStyle/>
-          <a:p>
-            <a:pPr algn="ctr">
-              <a:lnSpc>
-                <a:spcPct val="130000"/>
-              </a:lnSpc>
-            </a:pPr>
-            <a:r>
-              <a:rPr sz="1050" b="1" lang="ja-JP">
-                <a:solidFill>
-                  <a:srgbClr val="FFFFFC"/>
-                </a:solidFill>
-                <a:latin typeface="Yu Gothic"/>
-                <a:ea typeface="Yu Gothic"/>
-                <a:cs typeface="Yu Gothic"/>
-              </a:rPr>
-              <a:t>3月</a:t>
-            </a:r>
-          </a:p>
-        </p:txBody>
-      </p:sp>
-      <p:sp>
-        <p:nvSpPr>
-          <p:cNvPr id="30" name="Rectangle 29"/>
-          <p:cNvSpPr/>
-          <p:nvPr/>
-        </p:nvSpPr>
-        <p:spPr>
-          <a:xfrm>
-            <a:off x="10809732" y="1737360"/>
-            <a:ext cx="9144" cy="292607"/>
-          </a:xfrm>
-          <a:prstGeom prst="rect">
-            <a:avLst/>
-          </a:prstGeom>
-          <a:solidFill>
-            <a:srgbClr val="666E70"/>
-          </a:solidFill>
-          <a:ln>
-            <a:noFill/>
-          </a:ln>
-          <a:effectLst/>
-        </p:spPr>
-        <p:style>
-          <a:lnRef idx="1">
-            <a:schemeClr val="accent1"/>
-          </a:lnRef>
-          <a:fillRef idx="3">
-            <a:schemeClr val="accent1"/>
-          </a:fillRef>
-          <a:effectRef idx="2">
-            <a:schemeClr val="accent1"/>
-          </a:effectRef>
-          <a:fontRef idx="minor">
-            <a:schemeClr val="lt1"/>
-          </a:fontRef>
-        </p:style>
-        <p:txBody>
-          <a:bodyPr rtlCol="0" anchor="ctr"/>
-          <a:lstStyle/>
-          <a:p>
-            <a:pPr algn="ctr"/>
-          </a:p>
-        </p:txBody>
-      </p:sp>
-      <p:sp>
-        <p:nvSpPr>
-          <p:cNvPr id="31" name="Rectangle 30"/>
-          <p:cNvSpPr/>
-          <p:nvPr/>
-        </p:nvSpPr>
-        <p:spPr>
-          <a:xfrm>
-            <a:off x="658368" y="2103120"/>
-            <a:ext cx="10853928" cy="713232"/>
+            <a:off x="658368" y="1993392"/>
+            <a:ext cx="10853928" cy="768096"/>
           </a:xfrm>
           <a:prstGeom prst="rect">
             <a:avLst/>
@@ -9236,14 +8752,14 @@
       </p:sp>
       <p:sp>
         <p:nvSpPr>
-          <p:cNvPr id="32" name="Rectangle 31"/>
+          <p:cNvPr id="21" name="Rectangle 20"/>
           <p:cNvSpPr/>
           <p:nvPr/>
         </p:nvSpPr>
         <p:spPr>
           <a:xfrm>
-            <a:off x="658368" y="2816352"/>
-            <a:ext cx="10853928" cy="713232"/>
+            <a:off x="658368" y="2788920"/>
+            <a:ext cx="10853928" cy="457200"/>
           </a:xfrm>
           <a:prstGeom prst="rect">
             <a:avLst/>
@@ -9280,14 +8796,14 @@
       </p:sp>
       <p:sp>
         <p:nvSpPr>
-          <p:cNvPr id="33" name="Rectangle 32"/>
+          <p:cNvPr id="22" name="Rectangle 21"/>
           <p:cNvSpPr/>
           <p:nvPr/>
         </p:nvSpPr>
         <p:spPr>
           <a:xfrm>
-            <a:off x="658368" y="3529584"/>
-            <a:ext cx="10853928" cy="713232"/>
+            <a:off x="658368" y="3273552"/>
+            <a:ext cx="10853928" cy="768096"/>
           </a:xfrm>
           <a:prstGeom prst="rect">
             <a:avLst/>
@@ -9324,14 +8840,14 @@
       </p:sp>
       <p:sp>
         <p:nvSpPr>
-          <p:cNvPr id="34" name="Rectangle 33"/>
+          <p:cNvPr id="23" name="Rectangle 22"/>
           <p:cNvSpPr/>
           <p:nvPr/>
         </p:nvSpPr>
         <p:spPr>
           <a:xfrm>
-            <a:off x="658368" y="4242816"/>
-            <a:ext cx="10853928" cy="713232"/>
+            <a:off x="658368" y="4069080"/>
+            <a:ext cx="10853928" cy="457200"/>
           </a:xfrm>
           <a:prstGeom prst="rect">
             <a:avLst/>
@@ -9368,14 +8884,14 @@
       </p:sp>
       <p:sp>
         <p:nvSpPr>
-          <p:cNvPr id="35" name="Rectangle 34"/>
+          <p:cNvPr id="24" name="Rectangle 23"/>
           <p:cNvSpPr/>
           <p:nvPr/>
         </p:nvSpPr>
         <p:spPr>
           <a:xfrm>
-            <a:off x="658368" y="4956048"/>
-            <a:ext cx="10853928" cy="713232"/>
+            <a:off x="658368" y="4553712"/>
+            <a:ext cx="10853928" cy="768096"/>
           </a:xfrm>
           <a:prstGeom prst="rect">
             <a:avLst/>
@@ -9412,14 +8928,410 @@
       </p:sp>
       <p:cxnSp>
         <p:nvCxnSpPr>
+          <p:cNvPr id="25" name="Connector 24"/>
+          <p:cNvCxnSpPr/>
+          <p:nvPr/>
+        </p:nvCxnSpPr>
+        <p:spPr>
+          <a:xfrm>
+            <a:off x="3200400" y="1993392"/>
+            <a:ext cx="0" cy="3328416"/>
+          </a:xfrm>
+          <a:prstGeom prst="line">
+            <a:avLst/>
+          </a:prstGeom>
+          <a:ln w="7620">
+            <a:solidFill>
+              <a:srgbClr val="D1CFC8"/>
+            </a:solidFill>
+          </a:ln>
+          <a:effectLst/>
+        </p:spPr>
+        <p:style>
+          <a:lnRef idx="2">
+            <a:schemeClr val="accent1"/>
+          </a:lnRef>
+          <a:fillRef idx="0">
+            <a:schemeClr val="accent1"/>
+          </a:fillRef>
+          <a:effectRef idx="1">
+            <a:schemeClr val="accent1"/>
+          </a:effectRef>
+          <a:fontRef idx="minor">
+            <a:schemeClr val="tx1"/>
+          </a:fontRef>
+        </p:style>
+      </p:cxnSp>
+      <p:cxnSp>
+        <p:nvCxnSpPr>
+          <p:cNvPr id="26" name="Connector 25"/>
+          <p:cNvCxnSpPr/>
+          <p:nvPr/>
+        </p:nvCxnSpPr>
+        <p:spPr>
+          <a:xfrm>
+            <a:off x="3893058" y="1993392"/>
+            <a:ext cx="0" cy="3328416"/>
+          </a:xfrm>
+          <a:prstGeom prst="line">
+            <a:avLst/>
+          </a:prstGeom>
+          <a:ln w="7620">
+            <a:solidFill>
+              <a:srgbClr val="D1CFC8"/>
+            </a:solidFill>
+          </a:ln>
+          <a:effectLst/>
+        </p:spPr>
+        <p:style>
+          <a:lnRef idx="2">
+            <a:schemeClr val="accent1"/>
+          </a:lnRef>
+          <a:fillRef idx="0">
+            <a:schemeClr val="accent1"/>
+          </a:fillRef>
+          <a:effectRef idx="1">
+            <a:schemeClr val="accent1"/>
+          </a:effectRef>
+          <a:fontRef idx="minor">
+            <a:schemeClr val="tx1"/>
+          </a:fontRef>
+        </p:style>
+      </p:cxnSp>
+      <p:cxnSp>
+        <p:nvCxnSpPr>
+          <p:cNvPr id="27" name="Connector 26"/>
+          <p:cNvCxnSpPr/>
+          <p:nvPr/>
+        </p:nvCxnSpPr>
+        <p:spPr>
+          <a:xfrm>
+            <a:off x="4585716" y="1993392"/>
+            <a:ext cx="0" cy="3328416"/>
+          </a:xfrm>
+          <a:prstGeom prst="line">
+            <a:avLst/>
+          </a:prstGeom>
+          <a:ln w="7620">
+            <a:solidFill>
+              <a:srgbClr val="D1CFC8"/>
+            </a:solidFill>
+          </a:ln>
+          <a:effectLst/>
+        </p:spPr>
+        <p:style>
+          <a:lnRef idx="2">
+            <a:schemeClr val="accent1"/>
+          </a:lnRef>
+          <a:fillRef idx="0">
+            <a:schemeClr val="accent1"/>
+          </a:fillRef>
+          <a:effectRef idx="1">
+            <a:schemeClr val="accent1"/>
+          </a:effectRef>
+          <a:fontRef idx="minor">
+            <a:schemeClr val="tx1"/>
+          </a:fontRef>
+        </p:style>
+      </p:cxnSp>
+      <p:cxnSp>
+        <p:nvCxnSpPr>
+          <p:cNvPr id="28" name="Connector 27"/>
+          <p:cNvCxnSpPr/>
+          <p:nvPr/>
+        </p:nvCxnSpPr>
+        <p:spPr>
+          <a:xfrm>
+            <a:off x="5278374" y="1993392"/>
+            <a:ext cx="0" cy="3328416"/>
+          </a:xfrm>
+          <a:prstGeom prst="line">
+            <a:avLst/>
+          </a:prstGeom>
+          <a:ln w="7620">
+            <a:solidFill>
+              <a:srgbClr val="D1CFC8"/>
+            </a:solidFill>
+          </a:ln>
+          <a:effectLst/>
+        </p:spPr>
+        <p:style>
+          <a:lnRef idx="2">
+            <a:schemeClr val="accent1"/>
+          </a:lnRef>
+          <a:fillRef idx="0">
+            <a:schemeClr val="accent1"/>
+          </a:fillRef>
+          <a:effectRef idx="1">
+            <a:schemeClr val="accent1"/>
+          </a:effectRef>
+          <a:fontRef idx="minor">
+            <a:schemeClr val="tx1"/>
+          </a:fontRef>
+        </p:style>
+      </p:cxnSp>
+      <p:cxnSp>
+        <p:nvCxnSpPr>
+          <p:cNvPr id="29" name="Connector 28"/>
+          <p:cNvCxnSpPr/>
+          <p:nvPr/>
+        </p:nvCxnSpPr>
+        <p:spPr>
+          <a:xfrm>
+            <a:off x="5971031" y="1993392"/>
+            <a:ext cx="0" cy="3328416"/>
+          </a:xfrm>
+          <a:prstGeom prst="line">
+            <a:avLst/>
+          </a:prstGeom>
+          <a:ln w="7620">
+            <a:solidFill>
+              <a:srgbClr val="D1CFC8"/>
+            </a:solidFill>
+          </a:ln>
+          <a:effectLst/>
+        </p:spPr>
+        <p:style>
+          <a:lnRef idx="2">
+            <a:schemeClr val="accent1"/>
+          </a:lnRef>
+          <a:fillRef idx="0">
+            <a:schemeClr val="accent1"/>
+          </a:fillRef>
+          <a:effectRef idx="1">
+            <a:schemeClr val="accent1"/>
+          </a:effectRef>
+          <a:fontRef idx="minor">
+            <a:schemeClr val="tx1"/>
+          </a:fontRef>
+        </p:style>
+      </p:cxnSp>
+      <p:cxnSp>
+        <p:nvCxnSpPr>
+          <p:cNvPr id="30" name="Connector 29"/>
+          <p:cNvCxnSpPr/>
+          <p:nvPr/>
+        </p:nvCxnSpPr>
+        <p:spPr>
+          <a:xfrm>
+            <a:off x="6663690" y="1993392"/>
+            <a:ext cx="0" cy="3328416"/>
+          </a:xfrm>
+          <a:prstGeom prst="line">
+            <a:avLst/>
+          </a:prstGeom>
+          <a:ln w="7620">
+            <a:solidFill>
+              <a:srgbClr val="D1CFC8"/>
+            </a:solidFill>
+          </a:ln>
+          <a:effectLst/>
+        </p:spPr>
+        <p:style>
+          <a:lnRef idx="2">
+            <a:schemeClr val="accent1"/>
+          </a:lnRef>
+          <a:fillRef idx="0">
+            <a:schemeClr val="accent1"/>
+          </a:fillRef>
+          <a:effectRef idx="1">
+            <a:schemeClr val="accent1"/>
+          </a:effectRef>
+          <a:fontRef idx="minor">
+            <a:schemeClr val="tx1"/>
+          </a:fontRef>
+        </p:style>
+      </p:cxnSp>
+      <p:cxnSp>
+        <p:nvCxnSpPr>
+          <p:cNvPr id="31" name="Connector 30"/>
+          <p:cNvCxnSpPr/>
+          <p:nvPr/>
+        </p:nvCxnSpPr>
+        <p:spPr>
+          <a:xfrm>
+            <a:off x="7356348" y="1993392"/>
+            <a:ext cx="0" cy="3328416"/>
+          </a:xfrm>
+          <a:prstGeom prst="line">
+            <a:avLst/>
+          </a:prstGeom>
+          <a:ln w="7620">
+            <a:solidFill>
+              <a:srgbClr val="D1CFC8"/>
+            </a:solidFill>
+          </a:ln>
+          <a:effectLst/>
+        </p:spPr>
+        <p:style>
+          <a:lnRef idx="2">
+            <a:schemeClr val="accent1"/>
+          </a:lnRef>
+          <a:fillRef idx="0">
+            <a:schemeClr val="accent1"/>
+          </a:fillRef>
+          <a:effectRef idx="1">
+            <a:schemeClr val="accent1"/>
+          </a:effectRef>
+          <a:fontRef idx="minor">
+            <a:schemeClr val="tx1"/>
+          </a:fontRef>
+        </p:style>
+      </p:cxnSp>
+      <p:cxnSp>
+        <p:nvCxnSpPr>
+          <p:cNvPr id="32" name="Connector 31"/>
+          <p:cNvCxnSpPr/>
+          <p:nvPr/>
+        </p:nvCxnSpPr>
+        <p:spPr>
+          <a:xfrm>
+            <a:off x="8049005" y="1993392"/>
+            <a:ext cx="0" cy="3328416"/>
+          </a:xfrm>
+          <a:prstGeom prst="line">
+            <a:avLst/>
+          </a:prstGeom>
+          <a:ln w="7620">
+            <a:solidFill>
+              <a:srgbClr val="D1CFC8"/>
+            </a:solidFill>
+          </a:ln>
+          <a:effectLst/>
+        </p:spPr>
+        <p:style>
+          <a:lnRef idx="2">
+            <a:schemeClr val="accent1"/>
+          </a:lnRef>
+          <a:fillRef idx="0">
+            <a:schemeClr val="accent1"/>
+          </a:fillRef>
+          <a:effectRef idx="1">
+            <a:schemeClr val="accent1"/>
+          </a:effectRef>
+          <a:fontRef idx="minor">
+            <a:schemeClr val="tx1"/>
+          </a:fontRef>
+        </p:style>
+      </p:cxnSp>
+      <p:cxnSp>
+        <p:nvCxnSpPr>
+          <p:cNvPr id="33" name="Connector 32"/>
+          <p:cNvCxnSpPr/>
+          <p:nvPr/>
+        </p:nvCxnSpPr>
+        <p:spPr>
+          <a:xfrm>
+            <a:off x="8741663" y="1993392"/>
+            <a:ext cx="0" cy="3328416"/>
+          </a:xfrm>
+          <a:prstGeom prst="line">
+            <a:avLst/>
+          </a:prstGeom>
+          <a:ln w="7620">
+            <a:solidFill>
+              <a:srgbClr val="D1CFC8"/>
+            </a:solidFill>
+          </a:ln>
+          <a:effectLst/>
+        </p:spPr>
+        <p:style>
+          <a:lnRef idx="2">
+            <a:schemeClr val="accent1"/>
+          </a:lnRef>
+          <a:fillRef idx="0">
+            <a:schemeClr val="accent1"/>
+          </a:fillRef>
+          <a:effectRef idx="1">
+            <a:schemeClr val="accent1"/>
+          </a:effectRef>
+          <a:fontRef idx="minor">
+            <a:schemeClr val="tx1"/>
+          </a:fontRef>
+        </p:style>
+      </p:cxnSp>
+      <p:cxnSp>
+        <p:nvCxnSpPr>
+          <p:cNvPr id="34" name="Connector 33"/>
+          <p:cNvCxnSpPr/>
+          <p:nvPr/>
+        </p:nvCxnSpPr>
+        <p:spPr>
+          <a:xfrm>
+            <a:off x="9434322" y="1993392"/>
+            <a:ext cx="0" cy="3328416"/>
+          </a:xfrm>
+          <a:prstGeom prst="line">
+            <a:avLst/>
+          </a:prstGeom>
+          <a:ln w="7620">
+            <a:solidFill>
+              <a:srgbClr val="D1CFC8"/>
+            </a:solidFill>
+          </a:ln>
+          <a:effectLst/>
+        </p:spPr>
+        <p:style>
+          <a:lnRef idx="2">
+            <a:schemeClr val="accent1"/>
+          </a:lnRef>
+          <a:fillRef idx="0">
+            <a:schemeClr val="accent1"/>
+          </a:fillRef>
+          <a:effectRef idx="1">
+            <a:schemeClr val="accent1"/>
+          </a:effectRef>
+          <a:fontRef idx="minor">
+            <a:schemeClr val="tx1"/>
+          </a:fontRef>
+        </p:style>
+      </p:cxnSp>
+      <p:cxnSp>
+        <p:nvCxnSpPr>
+          <p:cNvPr id="35" name="Connector 34"/>
+          <p:cNvCxnSpPr/>
+          <p:nvPr/>
+        </p:nvCxnSpPr>
+        <p:spPr>
+          <a:xfrm>
+            <a:off x="10126980" y="1993392"/>
+            <a:ext cx="0" cy="3328416"/>
+          </a:xfrm>
+          <a:prstGeom prst="line">
+            <a:avLst/>
+          </a:prstGeom>
+          <a:ln w="7620">
+            <a:solidFill>
+              <a:srgbClr val="D1CFC8"/>
+            </a:solidFill>
+          </a:ln>
+          <a:effectLst/>
+        </p:spPr>
+        <p:style>
+          <a:lnRef idx="2">
+            <a:schemeClr val="accent1"/>
+          </a:lnRef>
+          <a:fillRef idx="0">
+            <a:schemeClr val="accent1"/>
+          </a:fillRef>
+          <a:effectRef idx="1">
+            <a:schemeClr val="accent1"/>
+          </a:effectRef>
+          <a:fontRef idx="minor">
+            <a:schemeClr val="tx1"/>
+          </a:fontRef>
+        </p:style>
+      </p:cxnSp>
+      <p:cxnSp>
+        <p:nvCxnSpPr>
           <p:cNvPr id="36" name="Connector 35"/>
           <p:cNvCxnSpPr/>
           <p:nvPr/>
         </p:nvCxnSpPr>
         <p:spPr>
           <a:xfrm>
-            <a:off x="3081528" y="2103120"/>
-            <a:ext cx="0" cy="3566160"/>
+            <a:off x="10819638" y="1993392"/>
+            <a:ext cx="0" cy="3328416"/>
           </a:xfrm>
           <a:prstGeom prst="line">
             <a:avLst/>
@@ -9454,8 +9366,8 @@
         </p:nvCxnSpPr>
         <p:spPr>
           <a:xfrm>
-            <a:off x="3784092" y="2103120"/>
-            <a:ext cx="0" cy="3566160"/>
+            <a:off x="11512296" y="1993392"/>
+            <a:ext cx="0" cy="3328416"/>
           </a:xfrm>
           <a:prstGeom prst="line">
             <a:avLst/>
@@ -9490,8 +9402,8 @@
         </p:nvCxnSpPr>
         <p:spPr>
           <a:xfrm>
-            <a:off x="4486656" y="2103120"/>
-            <a:ext cx="0" cy="3566160"/>
+            <a:off x="658368" y="1993392"/>
+            <a:ext cx="10853928" cy="0"/>
           </a:xfrm>
           <a:prstGeom prst="line">
             <a:avLst/>
@@ -9518,23 +9430,146 @@
           </a:fontRef>
         </p:style>
       </p:cxnSp>
+      <p:sp>
+        <p:nvSpPr>
+          <p:cNvPr id="39" name="TextBox 38"/>
+          <p:cNvSpPr txBox="1"/>
+          <p:nvPr/>
+        </p:nvSpPr>
+        <p:spPr>
+          <a:xfrm>
+            <a:off x="768096" y="2057400"/>
+            <a:ext cx="347472" cy="228600"/>
+          </a:xfrm>
+          <a:prstGeom prst="rect">
+            <a:avLst/>
+          </a:prstGeom>
+          <a:noFill/>
+        </p:spPr>
+        <p:txBody>
+          <a:bodyPr wrap="square" anchor="t" lIns="0" rIns="0" tIns="0" bIns="0">
+            <a:spAutoFit/>
+          </a:bodyPr>
+          <a:lstStyle/>
+          <a:p>
+            <a:pPr algn="l">
+              <a:lnSpc>
+                <a:spcPct val="130000"/>
+              </a:lnSpc>
+            </a:pPr>
+            <a:r>
+              <a:rPr sz="1150" b="1" lang="ja-JP">
+                <a:solidFill>
+                  <a:srgbClr val="0D7870"/>
+                </a:solidFill>
+                <a:latin typeface="Yu Gothic"/>
+                <a:ea typeface="Yu Gothic"/>
+                <a:cs typeface="Yu Gothic"/>
+              </a:rPr>
+              <a:t>01</a:t>
+            </a:r>
+          </a:p>
+        </p:txBody>
+      </p:sp>
+      <p:sp>
+        <p:nvSpPr>
+          <p:cNvPr id="40" name="TextBox 39"/>
+          <p:cNvSpPr txBox="1"/>
+          <p:nvPr/>
+        </p:nvSpPr>
+        <p:spPr>
+          <a:xfrm>
+            <a:off x="1133856" y="2039112"/>
+            <a:ext cx="1938527" cy="256032"/>
+          </a:xfrm>
+          <a:prstGeom prst="rect">
+            <a:avLst/>
+          </a:prstGeom>
+          <a:noFill/>
+        </p:spPr>
+        <p:txBody>
+          <a:bodyPr wrap="none" anchor="t" lIns="0" rIns="0" tIns="0" bIns="0">
+            <a:spAutoFit/>
+          </a:bodyPr>
+          <a:lstStyle/>
+          <a:p>
+            <a:pPr algn="l">
+              <a:lnSpc>
+                <a:spcPct val="100000"/>
+              </a:lnSpc>
+            </a:pPr>
+            <a:r>
+              <a:rPr sz="1150" b="1" lang="ja-JP">
+                <a:solidFill>
+                  <a:srgbClr val="182C43"/>
+                </a:solidFill>
+                <a:latin typeface="Yu Gothic"/>
+                <a:ea typeface="Yu Gothic"/>
+                <a:cs typeface="Yu Gothic"/>
+              </a:rPr>
+              <a:t>型の定義</a:t>
+            </a:r>
+          </a:p>
+        </p:txBody>
+      </p:sp>
+      <p:sp>
+        <p:nvSpPr>
+          <p:cNvPr id="41" name="TextBox 40"/>
+          <p:cNvSpPr txBox="1"/>
+          <p:nvPr/>
+        </p:nvSpPr>
+        <p:spPr>
+          <a:xfrm>
+            <a:off x="1133856" y="2258568"/>
+            <a:ext cx="1938527" cy="164592"/>
+          </a:xfrm>
+          <a:prstGeom prst="rect">
+            <a:avLst/>
+          </a:prstGeom>
+          <a:noFill/>
+        </p:spPr>
+        <p:txBody>
+          <a:bodyPr wrap="none" anchor="t" lIns="0" rIns="0" tIns="0" bIns="0">
+            <a:spAutoFit/>
+          </a:bodyPr>
+          <a:lstStyle/>
+          <a:p>
+            <a:pPr algn="l">
+              <a:lnSpc>
+                <a:spcPct val="100000"/>
+              </a:lnSpc>
+            </a:pPr>
+            <a:r>
+              <a:rPr sz="900" b="0" lang="ja-JP">
+                <a:solidFill>
+                  <a:srgbClr val="666E70"/>
+                </a:solidFill>
+                <a:latin typeface="Yu Gothic"/>
+                <a:ea typeface="Yu Gothic"/>
+                <a:cs typeface="Yu Gothic"/>
+              </a:rPr>
+              <a:t>主要パターンを選定</a:t>
+            </a:r>
+          </a:p>
+        </p:txBody>
+      </p:sp>
       <p:cxnSp>
         <p:nvCxnSpPr>
-          <p:cNvPr id="39" name="Connector 38"/>
+          <p:cNvPr id="42" name="Connector 41"/>
           <p:cNvCxnSpPr/>
           <p:nvPr/>
         </p:nvCxnSpPr>
         <p:spPr>
           <a:xfrm>
-            <a:off x="5189220" y="2103120"/>
-            <a:ext cx="0" cy="3566160"/>
+            <a:off x="3232404" y="2098548"/>
+            <a:ext cx="1321308" cy="0"/>
           </a:xfrm>
           <a:prstGeom prst="line">
             <a:avLst/>
           </a:prstGeom>
-          <a:ln w="7620">
+          <a:ln w="17780">
             <a:solidFill>
-              <a:srgbClr val="D1CFC8"/>
+              <a:srgbClr val="0D7870"/>
             </a:solidFill>
           </a:ln>
           <a:effectLst/>
@@ -9554,1596 +9589,59 @@
           </a:fontRef>
         </p:style>
       </p:cxnSp>
-      <p:cxnSp>
-        <p:nvCxnSpPr>
-          <p:cNvPr id="40" name="Connector 39"/>
-          <p:cNvCxnSpPr/>
-          <p:nvPr/>
-        </p:nvCxnSpPr>
-        <p:spPr>
-          <a:xfrm>
-            <a:off x="5891784" y="2103120"/>
-            <a:ext cx="0" cy="3566160"/>
-          </a:xfrm>
-          <a:prstGeom prst="line">
-            <a:avLst/>
-          </a:prstGeom>
-          <a:ln w="7620">
-            <a:solidFill>
-              <a:srgbClr val="D1CFC8"/>
-            </a:solidFill>
-          </a:ln>
-          <a:effectLst/>
-        </p:spPr>
-        <p:style>
-          <a:lnRef idx="2">
-            <a:schemeClr val="accent1"/>
-          </a:lnRef>
-          <a:fillRef idx="0">
-            <a:schemeClr val="accent1"/>
-          </a:fillRef>
-          <a:effectRef idx="1">
-            <a:schemeClr val="accent1"/>
-          </a:effectRef>
-          <a:fontRef idx="minor">
-            <a:schemeClr val="tx1"/>
-          </a:fontRef>
-        </p:style>
-      </p:cxnSp>
-      <p:cxnSp>
-        <p:nvCxnSpPr>
-          <p:cNvPr id="41" name="Connector 40"/>
-          <p:cNvCxnSpPr/>
-          <p:nvPr/>
-        </p:nvCxnSpPr>
-        <p:spPr>
-          <a:xfrm>
-            <a:off x="6594348" y="2103120"/>
-            <a:ext cx="0" cy="3566160"/>
-          </a:xfrm>
-          <a:prstGeom prst="line">
-            <a:avLst/>
-          </a:prstGeom>
-          <a:ln w="7620">
-            <a:solidFill>
-              <a:srgbClr val="D1CFC8"/>
-            </a:solidFill>
-          </a:ln>
-          <a:effectLst/>
-        </p:spPr>
-        <p:style>
-          <a:lnRef idx="2">
-            <a:schemeClr val="accent1"/>
-          </a:lnRef>
-          <a:fillRef idx="0">
-            <a:schemeClr val="accent1"/>
-          </a:fillRef>
-          <a:effectRef idx="1">
-            <a:schemeClr val="accent1"/>
-          </a:effectRef>
-          <a:fontRef idx="minor">
-            <a:schemeClr val="tx1"/>
-          </a:fontRef>
-        </p:style>
-      </p:cxnSp>
-      <p:cxnSp>
-        <p:nvCxnSpPr>
-          <p:cNvPr id="42" name="Connector 41"/>
-          <p:cNvCxnSpPr/>
-          <p:nvPr/>
-        </p:nvCxnSpPr>
-        <p:spPr>
-          <a:xfrm>
-            <a:off x="7296912" y="2103120"/>
-            <a:ext cx="0" cy="3566160"/>
-          </a:xfrm>
-          <a:prstGeom prst="line">
-            <a:avLst/>
-          </a:prstGeom>
-          <a:ln w="7620">
-            <a:solidFill>
-              <a:srgbClr val="D1CFC8"/>
-            </a:solidFill>
-          </a:ln>
-          <a:effectLst/>
-        </p:spPr>
-        <p:style>
-          <a:lnRef idx="2">
-            <a:schemeClr val="accent1"/>
-          </a:lnRef>
-          <a:fillRef idx="0">
-            <a:schemeClr val="accent1"/>
-          </a:fillRef>
-          <a:effectRef idx="1">
-            <a:schemeClr val="accent1"/>
-          </a:effectRef>
-          <a:fontRef idx="minor">
-            <a:schemeClr val="tx1"/>
-          </a:fontRef>
-        </p:style>
-      </p:cxnSp>
-      <p:cxnSp>
-        <p:nvCxnSpPr>
-          <p:cNvPr id="43" name="Connector 42"/>
-          <p:cNvCxnSpPr/>
-          <p:nvPr/>
-        </p:nvCxnSpPr>
-        <p:spPr>
-          <a:xfrm>
-            <a:off x="7999476" y="2103120"/>
-            <a:ext cx="0" cy="3566160"/>
-          </a:xfrm>
-          <a:prstGeom prst="line">
-            <a:avLst/>
-          </a:prstGeom>
-          <a:ln w="7620">
-            <a:solidFill>
-              <a:srgbClr val="D1CFC8"/>
-            </a:solidFill>
-          </a:ln>
-          <a:effectLst/>
-        </p:spPr>
-        <p:style>
-          <a:lnRef idx="2">
-            <a:schemeClr val="accent1"/>
-          </a:lnRef>
-          <a:fillRef idx="0">
-            <a:schemeClr val="accent1"/>
-          </a:fillRef>
-          <a:effectRef idx="1">
-            <a:schemeClr val="accent1"/>
-          </a:effectRef>
-          <a:fontRef idx="minor">
-            <a:schemeClr val="tx1"/>
-          </a:fontRef>
-        </p:style>
-      </p:cxnSp>
-      <p:cxnSp>
-        <p:nvCxnSpPr>
-          <p:cNvPr id="44" name="Connector 43"/>
-          <p:cNvCxnSpPr/>
-          <p:nvPr/>
-        </p:nvCxnSpPr>
-        <p:spPr>
-          <a:xfrm>
-            <a:off x="8702040" y="2103120"/>
-            <a:ext cx="0" cy="3566160"/>
-          </a:xfrm>
-          <a:prstGeom prst="line">
-            <a:avLst/>
-          </a:prstGeom>
-          <a:ln w="7620">
-            <a:solidFill>
-              <a:srgbClr val="D1CFC8"/>
-            </a:solidFill>
-          </a:ln>
-          <a:effectLst/>
-        </p:spPr>
-        <p:style>
-          <a:lnRef idx="2">
-            <a:schemeClr val="accent1"/>
-          </a:lnRef>
-          <a:fillRef idx="0">
-            <a:schemeClr val="accent1"/>
-          </a:fillRef>
-          <a:effectRef idx="1">
-            <a:schemeClr val="accent1"/>
-          </a:effectRef>
-          <a:fontRef idx="minor">
-            <a:schemeClr val="tx1"/>
-          </a:fontRef>
-        </p:style>
-      </p:cxnSp>
-      <p:cxnSp>
-        <p:nvCxnSpPr>
-          <p:cNvPr id="45" name="Connector 44"/>
-          <p:cNvCxnSpPr/>
-          <p:nvPr/>
-        </p:nvCxnSpPr>
-        <p:spPr>
-          <a:xfrm>
-            <a:off x="9404604" y="2103120"/>
-            <a:ext cx="0" cy="3566160"/>
-          </a:xfrm>
-          <a:prstGeom prst="line">
-            <a:avLst/>
-          </a:prstGeom>
-          <a:ln w="7620">
-            <a:solidFill>
-              <a:srgbClr val="D1CFC8"/>
-            </a:solidFill>
-          </a:ln>
-          <a:effectLst/>
-        </p:spPr>
-        <p:style>
-          <a:lnRef idx="2">
-            <a:schemeClr val="accent1"/>
-          </a:lnRef>
-          <a:fillRef idx="0">
-            <a:schemeClr val="accent1"/>
-          </a:fillRef>
-          <a:effectRef idx="1">
-            <a:schemeClr val="accent1"/>
-          </a:effectRef>
-          <a:fontRef idx="minor">
-            <a:schemeClr val="tx1"/>
-          </a:fontRef>
-        </p:style>
-      </p:cxnSp>
-      <p:cxnSp>
-        <p:nvCxnSpPr>
-          <p:cNvPr id="46" name="Connector 45"/>
-          <p:cNvCxnSpPr/>
-          <p:nvPr/>
-        </p:nvCxnSpPr>
-        <p:spPr>
-          <a:xfrm>
-            <a:off x="10107168" y="2103120"/>
-            <a:ext cx="0" cy="3566160"/>
-          </a:xfrm>
-          <a:prstGeom prst="line">
-            <a:avLst/>
-          </a:prstGeom>
-          <a:ln w="7620">
-            <a:solidFill>
-              <a:srgbClr val="D1CFC8"/>
-            </a:solidFill>
-          </a:ln>
-          <a:effectLst/>
-        </p:spPr>
-        <p:style>
-          <a:lnRef idx="2">
-            <a:schemeClr val="accent1"/>
-          </a:lnRef>
-          <a:fillRef idx="0">
-            <a:schemeClr val="accent1"/>
-          </a:fillRef>
-          <a:effectRef idx="1">
-            <a:schemeClr val="accent1"/>
-          </a:effectRef>
-          <a:fontRef idx="minor">
-            <a:schemeClr val="tx1"/>
-          </a:fontRef>
-        </p:style>
-      </p:cxnSp>
-      <p:cxnSp>
-        <p:nvCxnSpPr>
-          <p:cNvPr id="47" name="Connector 46"/>
-          <p:cNvCxnSpPr/>
-          <p:nvPr/>
-        </p:nvCxnSpPr>
-        <p:spPr>
-          <a:xfrm>
-            <a:off x="10809732" y="2103120"/>
-            <a:ext cx="0" cy="3566160"/>
-          </a:xfrm>
-          <a:prstGeom prst="line">
-            <a:avLst/>
-          </a:prstGeom>
-          <a:ln w="7620">
-            <a:solidFill>
-              <a:srgbClr val="D1CFC8"/>
-            </a:solidFill>
-          </a:ln>
-          <a:effectLst/>
-        </p:spPr>
-        <p:style>
-          <a:lnRef idx="2">
-            <a:schemeClr val="accent1"/>
-          </a:lnRef>
-          <a:fillRef idx="0">
-            <a:schemeClr val="accent1"/>
-          </a:fillRef>
-          <a:effectRef idx="1">
-            <a:schemeClr val="accent1"/>
-          </a:effectRef>
-          <a:fontRef idx="minor">
-            <a:schemeClr val="tx1"/>
-          </a:fontRef>
-        </p:style>
-      </p:cxnSp>
-      <p:cxnSp>
-        <p:nvCxnSpPr>
-          <p:cNvPr id="48" name="Connector 47"/>
-          <p:cNvCxnSpPr/>
-          <p:nvPr/>
-        </p:nvCxnSpPr>
-        <p:spPr>
-          <a:xfrm>
-            <a:off x="11512296" y="2103120"/>
-            <a:ext cx="0" cy="3566160"/>
-          </a:xfrm>
-          <a:prstGeom prst="line">
-            <a:avLst/>
-          </a:prstGeom>
-          <a:ln w="7620">
-            <a:solidFill>
-              <a:srgbClr val="D1CFC8"/>
-            </a:solidFill>
-          </a:ln>
-          <a:effectLst/>
-        </p:spPr>
-        <p:style>
-          <a:lnRef idx="2">
-            <a:schemeClr val="accent1"/>
-          </a:lnRef>
-          <a:fillRef idx="0">
-            <a:schemeClr val="accent1"/>
-          </a:fillRef>
-          <a:effectRef idx="1">
-            <a:schemeClr val="accent1"/>
-          </a:effectRef>
-          <a:fontRef idx="minor">
-            <a:schemeClr val="tx1"/>
-          </a:fontRef>
-        </p:style>
-      </p:cxnSp>
-      <p:cxnSp>
-        <p:nvCxnSpPr>
-          <p:cNvPr id="49" name="Connector 48"/>
-          <p:cNvCxnSpPr/>
-          <p:nvPr/>
-        </p:nvCxnSpPr>
-        <p:spPr>
-          <a:xfrm>
-            <a:off x="658368" y="2103120"/>
-            <a:ext cx="10853928" cy="0"/>
-          </a:xfrm>
-          <a:prstGeom prst="line">
-            <a:avLst/>
-          </a:prstGeom>
-          <a:ln w="7620">
-            <a:solidFill>
-              <a:srgbClr val="D1CFC8"/>
-            </a:solidFill>
-          </a:ln>
-          <a:effectLst/>
-        </p:spPr>
-        <p:style>
-          <a:lnRef idx="2">
-            <a:schemeClr val="accent1"/>
-          </a:lnRef>
-          <a:fillRef idx="0">
-            <a:schemeClr val="accent1"/>
-          </a:fillRef>
-          <a:effectRef idx="1">
-            <a:schemeClr val="accent1"/>
-          </a:effectRef>
-          <a:fontRef idx="minor">
-            <a:schemeClr val="tx1"/>
-          </a:fontRef>
-        </p:style>
-      </p:cxnSp>
-      <p:cxnSp>
-        <p:nvCxnSpPr>
-          <p:cNvPr id="50" name="Connector 49"/>
-          <p:cNvCxnSpPr/>
-          <p:nvPr/>
-        </p:nvCxnSpPr>
-        <p:spPr>
-          <a:xfrm>
-            <a:off x="658368" y="2816352"/>
-            <a:ext cx="10853928" cy="0"/>
-          </a:xfrm>
-          <a:prstGeom prst="line">
-            <a:avLst/>
-          </a:prstGeom>
-          <a:ln w="7620">
-            <a:solidFill>
-              <a:srgbClr val="D1CFC8"/>
-            </a:solidFill>
-          </a:ln>
-          <a:effectLst/>
-        </p:spPr>
-        <p:style>
-          <a:lnRef idx="2">
-            <a:schemeClr val="accent1"/>
-          </a:lnRef>
-          <a:fillRef idx="0">
-            <a:schemeClr val="accent1"/>
-          </a:fillRef>
-          <a:effectRef idx="1">
-            <a:schemeClr val="accent1"/>
-          </a:effectRef>
-          <a:fontRef idx="minor">
-            <a:schemeClr val="tx1"/>
-          </a:fontRef>
-        </p:style>
-      </p:cxnSp>
-      <p:cxnSp>
-        <p:nvCxnSpPr>
-          <p:cNvPr id="51" name="Connector 50"/>
-          <p:cNvCxnSpPr/>
-          <p:nvPr/>
-        </p:nvCxnSpPr>
-        <p:spPr>
-          <a:xfrm>
-            <a:off x="658368" y="3529584"/>
-            <a:ext cx="10853928" cy="0"/>
-          </a:xfrm>
-          <a:prstGeom prst="line">
-            <a:avLst/>
-          </a:prstGeom>
-          <a:ln w="7620">
-            <a:solidFill>
-              <a:srgbClr val="D1CFC8"/>
-            </a:solidFill>
-          </a:ln>
-          <a:effectLst/>
-        </p:spPr>
-        <p:style>
-          <a:lnRef idx="2">
-            <a:schemeClr val="accent1"/>
-          </a:lnRef>
-          <a:fillRef idx="0">
-            <a:schemeClr val="accent1"/>
-          </a:fillRef>
-          <a:effectRef idx="1">
-            <a:schemeClr val="accent1"/>
-          </a:effectRef>
-          <a:fontRef idx="minor">
-            <a:schemeClr val="tx1"/>
-          </a:fontRef>
-        </p:style>
-      </p:cxnSp>
-      <p:cxnSp>
-        <p:nvCxnSpPr>
-          <p:cNvPr id="52" name="Connector 51"/>
-          <p:cNvCxnSpPr/>
-          <p:nvPr/>
-        </p:nvCxnSpPr>
-        <p:spPr>
-          <a:xfrm>
-            <a:off x="658368" y="4242816"/>
-            <a:ext cx="10853928" cy="0"/>
-          </a:xfrm>
-          <a:prstGeom prst="line">
-            <a:avLst/>
-          </a:prstGeom>
-          <a:ln w="7620">
-            <a:solidFill>
-              <a:srgbClr val="D1CFC8"/>
-            </a:solidFill>
-          </a:ln>
-          <a:effectLst/>
-        </p:spPr>
-        <p:style>
-          <a:lnRef idx="2">
-            <a:schemeClr val="accent1"/>
-          </a:lnRef>
-          <a:fillRef idx="0">
-            <a:schemeClr val="accent1"/>
-          </a:fillRef>
-          <a:effectRef idx="1">
-            <a:schemeClr val="accent1"/>
-          </a:effectRef>
-          <a:fontRef idx="minor">
-            <a:schemeClr val="tx1"/>
-          </a:fontRef>
-        </p:style>
-      </p:cxnSp>
-      <p:cxnSp>
-        <p:nvCxnSpPr>
-          <p:cNvPr id="53" name="Connector 52"/>
-          <p:cNvCxnSpPr/>
-          <p:nvPr/>
-        </p:nvCxnSpPr>
-        <p:spPr>
-          <a:xfrm>
-            <a:off x="658368" y="4956048"/>
-            <a:ext cx="10853928" cy="0"/>
-          </a:xfrm>
-          <a:prstGeom prst="line">
-            <a:avLst/>
-          </a:prstGeom>
-          <a:ln w="7620">
-            <a:solidFill>
-              <a:srgbClr val="D1CFC8"/>
-            </a:solidFill>
-          </a:ln>
-          <a:effectLst/>
-        </p:spPr>
-        <p:style>
-          <a:lnRef idx="2">
-            <a:schemeClr val="accent1"/>
-          </a:lnRef>
-          <a:fillRef idx="0">
-            <a:schemeClr val="accent1"/>
-          </a:fillRef>
-          <a:effectRef idx="1">
-            <a:schemeClr val="accent1"/>
-          </a:effectRef>
-          <a:fontRef idx="minor">
-            <a:schemeClr val="tx1"/>
-          </a:fontRef>
-        </p:style>
-      </p:cxnSp>
-      <p:cxnSp>
-        <p:nvCxnSpPr>
-          <p:cNvPr id="54" name="Connector 53"/>
-          <p:cNvCxnSpPr/>
-          <p:nvPr/>
-        </p:nvCxnSpPr>
-        <p:spPr>
-          <a:xfrm>
-            <a:off x="658368" y="5669280"/>
-            <a:ext cx="10853928" cy="0"/>
-          </a:xfrm>
-          <a:prstGeom prst="line">
-            <a:avLst/>
-          </a:prstGeom>
-          <a:ln w="7620">
-            <a:solidFill>
-              <a:srgbClr val="D1CFC8"/>
-            </a:solidFill>
-          </a:ln>
-          <a:effectLst/>
-        </p:spPr>
-        <p:style>
-          <a:lnRef idx="2">
-            <a:schemeClr val="accent1"/>
-          </a:lnRef>
-          <a:fillRef idx="0">
-            <a:schemeClr val="accent1"/>
-          </a:fillRef>
-          <a:effectRef idx="1">
-            <a:schemeClr val="accent1"/>
-          </a:effectRef>
-          <a:fontRef idx="minor">
-            <a:schemeClr val="tx1"/>
-          </a:fontRef>
-        </p:style>
-      </p:cxnSp>
-      <p:sp>
-        <p:nvSpPr>
-          <p:cNvPr id="55" name="TextBox 54"/>
-          <p:cNvSpPr txBox="1"/>
-          <p:nvPr/>
-        </p:nvSpPr>
-        <p:spPr>
-          <a:xfrm>
-            <a:off x="768096" y="2231501"/>
-            <a:ext cx="310896" cy="246888"/>
-          </a:xfrm>
-          <a:prstGeom prst="rect">
-            <a:avLst/>
-          </a:prstGeom>
-          <a:noFill/>
-        </p:spPr>
-        <p:txBody>
-          <a:bodyPr wrap="square" anchor="t" lIns="0" rIns="0" tIns="0" bIns="0">
-            <a:spAutoFit/>
-          </a:bodyPr>
-          <a:lstStyle/>
-          <a:p>
-            <a:pPr algn="l">
-              <a:lnSpc>
-                <a:spcPct val="130000"/>
-              </a:lnSpc>
-            </a:pPr>
-            <a:r>
-              <a:rPr sz="1250" b="1" lang="ja-JP">
-                <a:solidFill>
-                  <a:srgbClr val="0D7870"/>
-                </a:solidFill>
-                <a:latin typeface="Yu Gothic"/>
-                <a:ea typeface="Yu Gothic"/>
-                <a:cs typeface="Yu Gothic"/>
-              </a:rPr>
-              <a:t>01</a:t>
-            </a:r>
-          </a:p>
-        </p:txBody>
-      </p:sp>
-      <p:sp>
-        <p:nvSpPr>
-          <p:cNvPr id="56" name="TextBox 55"/>
-          <p:cNvSpPr txBox="1"/>
-          <p:nvPr/>
-        </p:nvSpPr>
-        <p:spPr>
-          <a:xfrm>
-            <a:off x="1133856" y="2188707"/>
-            <a:ext cx="1837943" cy="246888"/>
-          </a:xfrm>
-          <a:prstGeom prst="rect">
-            <a:avLst/>
-          </a:prstGeom>
-          <a:noFill/>
-        </p:spPr>
-        <p:txBody>
-          <a:bodyPr wrap="square" anchor="t" lIns="0" rIns="0" tIns="0" bIns="0">
-            <a:spAutoFit/>
-          </a:bodyPr>
-          <a:lstStyle/>
-          <a:p>
-            <a:pPr algn="l">
-              <a:lnSpc>
-                <a:spcPct val="130000"/>
-              </a:lnSpc>
-            </a:pPr>
-            <a:r>
-              <a:rPr sz="1250" b="1" lang="ja-JP">
-                <a:solidFill>
-                  <a:srgbClr val="182C43"/>
-                </a:solidFill>
-                <a:latin typeface="Yu Gothic"/>
-                <a:ea typeface="Yu Gothic"/>
-                <a:cs typeface="Yu Gothic"/>
-              </a:rPr>
-              <a:t>型の定義</a:t>
-            </a:r>
-          </a:p>
-        </p:txBody>
-      </p:sp>
-      <p:sp>
-        <p:nvSpPr>
-          <p:cNvPr id="57" name="TextBox 56"/>
-          <p:cNvSpPr txBox="1"/>
-          <p:nvPr/>
-        </p:nvSpPr>
-        <p:spPr>
-          <a:xfrm>
-            <a:off x="1133856" y="2502529"/>
-            <a:ext cx="1837943" cy="182880"/>
-          </a:xfrm>
-          <a:prstGeom prst="rect">
-            <a:avLst/>
-          </a:prstGeom>
-          <a:noFill/>
-        </p:spPr>
-        <p:txBody>
-          <a:bodyPr wrap="square" anchor="t" lIns="0" rIns="0" tIns="0" bIns="0">
-            <a:spAutoFit/>
-          </a:bodyPr>
-          <a:lstStyle/>
-          <a:p>
-            <a:pPr algn="l">
-              <a:lnSpc>
-                <a:spcPct val="130000"/>
-              </a:lnSpc>
-            </a:pPr>
-            <a:r>
-              <a:rPr sz="950" b="0" lang="ja-JP">
-                <a:solidFill>
-                  <a:srgbClr val="666E70"/>
-                </a:solidFill>
-                <a:latin typeface="Yu Gothic"/>
-                <a:ea typeface="Yu Gothic"/>
-                <a:cs typeface="Yu Gothic"/>
-              </a:rPr>
-              <a:t>主要パターンを選定</a:t>
-            </a:r>
-          </a:p>
-        </p:txBody>
-      </p:sp>
-      <p:sp>
-        <p:nvSpPr>
-          <p:cNvPr id="58" name="Rectangle 57"/>
+      <p:sp>
+        <p:nvSpPr>
+          <p:cNvPr id="43" name="TextBox 42"/>
+          <p:cNvSpPr txBox="1"/>
+          <p:nvPr/>
+        </p:nvSpPr>
+        <p:spPr>
+          <a:xfrm>
+            <a:off x="3248406" y="2130552"/>
+            <a:ext cx="1289304" cy="246888"/>
+          </a:xfrm>
+          <a:prstGeom prst="rect">
+            <a:avLst/>
+          </a:prstGeom>
+          <a:solidFill>
+            <a:srgbClr val="FFFFFC"/>
+          </a:solidFill>
+        </p:spPr>
+        <p:txBody>
+          <a:bodyPr wrap="none" anchor="t" lIns="0" rIns="0" tIns="0" bIns="0">
+            <a:spAutoFit/>
+          </a:bodyPr>
+          <a:lstStyle/>
+          <a:p>
+            <a:pPr algn="ctr">
+              <a:lnSpc>
+                <a:spcPct val="100000"/>
+              </a:lnSpc>
+            </a:pPr>
+            <a:r>
+              <a:rPr sz="900" b="0" lang="ja-JP">
+                <a:solidFill>
+                  <a:srgbClr val="202729"/>
+                </a:solidFill>
+                <a:latin typeface="Yu Gothic"/>
+                <a:ea typeface="Yu Gothic"/>
+                <a:cs typeface="Yu Gothic"/>
+              </a:rPr>
+              <a:t>標準レイアウトを定義</a:t>
+            </a:r>
+          </a:p>
+        </p:txBody>
+      </p:sp>
+      <p:sp>
+        <p:nvSpPr>
+          <p:cNvPr id="44" name="Diamond 43"/>
           <p:cNvSpPr/>
           <p:nvPr/>
         </p:nvSpPr>
         <p:spPr>
           <a:xfrm>
-            <a:off x="3127248" y="2274295"/>
-            <a:ext cx="1313688" cy="274320"/>
-          </a:xfrm>
-          <a:prstGeom prst="rect">
-            <a:avLst/>
-          </a:prstGeom>
-          <a:solidFill>
-            <a:srgbClr val="0D7870"/>
-          </a:solidFill>
-          <a:ln>
-            <a:noFill/>
-          </a:ln>
-          <a:effectLst/>
-        </p:spPr>
-        <p:style>
-          <a:lnRef idx="1">
-            <a:schemeClr val="accent1"/>
-          </a:lnRef>
-          <a:fillRef idx="3">
-            <a:schemeClr val="accent1"/>
-          </a:fillRef>
-          <a:effectRef idx="2">
-            <a:schemeClr val="accent1"/>
-          </a:effectRef>
-          <a:fontRef idx="minor">
-            <a:schemeClr val="lt1"/>
-          </a:fontRef>
-        </p:style>
-        <p:txBody>
-          <a:bodyPr rtlCol="0" anchor="ctr"/>
-          <a:lstStyle/>
-          <a:p>
-            <a:pPr algn="ctr"/>
-          </a:p>
-        </p:txBody>
-      </p:sp>
-      <p:sp>
-        <p:nvSpPr>
-          <p:cNvPr id="59" name="TextBox 58"/>
-          <p:cNvSpPr txBox="1"/>
-          <p:nvPr/>
-        </p:nvSpPr>
-        <p:spPr>
-          <a:xfrm>
-            <a:off x="3209544" y="2306299"/>
-            <a:ext cx="1149096" cy="237744"/>
-          </a:xfrm>
-          <a:prstGeom prst="rect">
-            <a:avLst/>
-          </a:prstGeom>
-          <a:noFill/>
-        </p:spPr>
-        <p:txBody>
-          <a:bodyPr wrap="square" anchor="t" lIns="0" rIns="0" tIns="0" bIns="0">
-            <a:spAutoFit/>
-          </a:bodyPr>
-          <a:lstStyle/>
-          <a:p>
-            <a:pPr algn="l">
-              <a:lnSpc>
-                <a:spcPct val="130000"/>
-              </a:lnSpc>
-            </a:pPr>
-            <a:r>
-              <a:rPr sz="850" b="1" lang="ja-JP">
-                <a:solidFill>
-                  <a:srgbClr val="FFFFFC"/>
-                </a:solidFill>
-                <a:latin typeface="Yu Gothic"/>
-                <a:ea typeface="Yu Gothic"/>
-                <a:cs typeface="Yu Gothic"/>
-              </a:rPr>
-              <a:t>標準レイアウトを定義</a:t>
-            </a:r>
-          </a:p>
-        </p:txBody>
-      </p:sp>
-      <p:sp>
-        <p:nvSpPr>
-          <p:cNvPr id="60" name="TextBox 59"/>
-          <p:cNvSpPr txBox="1"/>
-          <p:nvPr/>
-        </p:nvSpPr>
-        <p:spPr>
-          <a:xfrm>
-            <a:off x="768096" y="2944733"/>
-            <a:ext cx="310896" cy="246888"/>
-          </a:xfrm>
-          <a:prstGeom prst="rect">
-            <a:avLst/>
-          </a:prstGeom>
-          <a:noFill/>
-        </p:spPr>
-        <p:txBody>
-          <a:bodyPr wrap="square" anchor="t" lIns="0" rIns="0" tIns="0" bIns="0">
-            <a:spAutoFit/>
-          </a:bodyPr>
-          <a:lstStyle/>
-          <a:p>
-            <a:pPr algn="l">
-              <a:lnSpc>
-                <a:spcPct val="130000"/>
-              </a:lnSpc>
-            </a:pPr>
-            <a:r>
-              <a:rPr sz="1250" b="1" lang="ja-JP">
-                <a:solidFill>
-                  <a:srgbClr val="0D7870"/>
-                </a:solidFill>
-                <a:latin typeface="Yu Gothic"/>
-                <a:ea typeface="Yu Gothic"/>
-                <a:cs typeface="Yu Gothic"/>
-              </a:rPr>
-              <a:t>02</a:t>
-            </a:r>
-          </a:p>
-        </p:txBody>
-      </p:sp>
-      <p:sp>
-        <p:nvSpPr>
-          <p:cNvPr id="61" name="TextBox 60"/>
-          <p:cNvSpPr txBox="1"/>
-          <p:nvPr/>
-        </p:nvSpPr>
-        <p:spPr>
-          <a:xfrm>
-            <a:off x="1133856" y="2901939"/>
-            <a:ext cx="1837943" cy="246888"/>
-          </a:xfrm>
-          <a:prstGeom prst="rect">
-            <a:avLst/>
-          </a:prstGeom>
-          <a:noFill/>
-        </p:spPr>
-        <p:txBody>
-          <a:bodyPr wrap="square" anchor="t" lIns="0" rIns="0" tIns="0" bIns="0">
-            <a:spAutoFit/>
-          </a:bodyPr>
-          <a:lstStyle/>
-          <a:p>
-            <a:pPr algn="l">
-              <a:lnSpc>
-                <a:spcPct val="130000"/>
-              </a:lnSpc>
-            </a:pPr>
-            <a:r>
-              <a:rPr sz="1250" b="1" lang="ja-JP">
-                <a:solidFill>
-                  <a:srgbClr val="182C43"/>
-                </a:solidFill>
-                <a:latin typeface="Yu Gothic"/>
-                <a:ea typeface="Yu Gothic"/>
-                <a:cs typeface="Yu Gothic"/>
-              </a:rPr>
-              <a:t>実装</a:t>
-            </a:r>
-          </a:p>
-        </p:txBody>
-      </p:sp>
-      <p:sp>
-        <p:nvSpPr>
-          <p:cNvPr id="62" name="TextBox 61"/>
-          <p:cNvSpPr txBox="1"/>
-          <p:nvPr/>
-        </p:nvSpPr>
-        <p:spPr>
-          <a:xfrm>
-            <a:off x="1133856" y="3215761"/>
-            <a:ext cx="1837943" cy="182880"/>
-          </a:xfrm>
-          <a:prstGeom prst="rect">
-            <a:avLst/>
-          </a:prstGeom>
-          <a:noFill/>
-        </p:spPr>
-        <p:txBody>
-          <a:bodyPr wrap="square" anchor="t" lIns="0" rIns="0" tIns="0" bIns="0">
-            <a:spAutoFit/>
-          </a:bodyPr>
-          <a:lstStyle/>
-          <a:p>
-            <a:pPr algn="l">
-              <a:lnSpc>
-                <a:spcPct val="130000"/>
-              </a:lnSpc>
-            </a:pPr>
-            <a:r>
-              <a:rPr sz="950" b="0" lang="ja-JP">
-                <a:solidFill>
-                  <a:srgbClr val="666E70"/>
-                </a:solidFill>
-                <a:latin typeface="Yu Gothic"/>
-                <a:ea typeface="Yu Gothic"/>
-                <a:cs typeface="Yu Gothic"/>
-              </a:rPr>
-              <a:t>rendererを整備</a:t>
-            </a:r>
-          </a:p>
-        </p:txBody>
-      </p:sp>
-      <p:sp>
-        <p:nvSpPr>
-          <p:cNvPr id="63" name="Rectangle 62"/>
-          <p:cNvSpPr/>
-          <p:nvPr/>
-        </p:nvSpPr>
-        <p:spPr>
-          <a:xfrm>
-            <a:off x="3829812" y="2987527"/>
-            <a:ext cx="2016252" cy="274320"/>
-          </a:xfrm>
-          <a:prstGeom prst="rect">
-            <a:avLst/>
-          </a:prstGeom>
-          <a:solidFill>
-            <a:srgbClr val="182C43"/>
-          </a:solidFill>
-          <a:ln>
-            <a:noFill/>
-          </a:ln>
-          <a:effectLst/>
-        </p:spPr>
-        <p:style>
-          <a:lnRef idx="1">
-            <a:schemeClr val="accent1"/>
-          </a:lnRef>
-          <a:fillRef idx="3">
-            <a:schemeClr val="accent1"/>
-          </a:fillRef>
-          <a:effectRef idx="2">
-            <a:schemeClr val="accent1"/>
-          </a:effectRef>
-          <a:fontRef idx="minor">
-            <a:schemeClr val="lt1"/>
-          </a:fontRef>
-        </p:style>
-        <p:txBody>
-          <a:bodyPr rtlCol="0" anchor="ctr"/>
-          <a:lstStyle/>
-          <a:p>
-            <a:pPr algn="ctr"/>
-          </a:p>
-        </p:txBody>
-      </p:sp>
-      <p:sp>
-        <p:nvSpPr>
-          <p:cNvPr id="64" name="TextBox 63"/>
-          <p:cNvSpPr txBox="1"/>
-          <p:nvPr/>
-        </p:nvSpPr>
-        <p:spPr>
-          <a:xfrm>
-            <a:off x="3912108" y="3019531"/>
-            <a:ext cx="1851660" cy="237744"/>
-          </a:xfrm>
-          <a:prstGeom prst="rect">
-            <a:avLst/>
-          </a:prstGeom>
-          <a:noFill/>
-        </p:spPr>
-        <p:txBody>
-          <a:bodyPr wrap="square" anchor="t" lIns="0" rIns="0" tIns="0" bIns="0">
-            <a:spAutoFit/>
-          </a:bodyPr>
-          <a:lstStyle/>
-          <a:p>
-            <a:pPr algn="l">
-              <a:lnSpc>
-                <a:spcPct val="130000"/>
-              </a:lnSpc>
-            </a:pPr>
-            <a:r>
-              <a:rPr sz="1000" b="1" lang="ja-JP">
-                <a:solidFill>
-                  <a:srgbClr val="FFFFFC"/>
-                </a:solidFill>
-                <a:latin typeface="Yu Gothic"/>
-                <a:ea typeface="Yu Gothic"/>
-                <a:cs typeface="Yu Gothic"/>
-              </a:rPr>
-              <a:t>生成・検証機能を実装</a:t>
-            </a:r>
-          </a:p>
-        </p:txBody>
-      </p:sp>
-      <p:sp>
-        <p:nvSpPr>
-          <p:cNvPr id="65" name="TextBox 64"/>
-          <p:cNvSpPr txBox="1"/>
-          <p:nvPr/>
-        </p:nvSpPr>
-        <p:spPr>
-          <a:xfrm>
-            <a:off x="768096" y="3657965"/>
-            <a:ext cx="310896" cy="246888"/>
-          </a:xfrm>
-          <a:prstGeom prst="rect">
-            <a:avLst/>
-          </a:prstGeom>
-          <a:noFill/>
-        </p:spPr>
-        <p:txBody>
-          <a:bodyPr wrap="square" anchor="t" lIns="0" rIns="0" tIns="0" bIns="0">
-            <a:spAutoFit/>
-          </a:bodyPr>
-          <a:lstStyle/>
-          <a:p>
-            <a:pPr algn="l">
-              <a:lnSpc>
-                <a:spcPct val="130000"/>
-              </a:lnSpc>
-            </a:pPr>
-            <a:r>
-              <a:rPr sz="1250" b="1" lang="ja-JP">
-                <a:solidFill>
-                  <a:srgbClr val="0D7870"/>
-                </a:solidFill>
-                <a:latin typeface="Yu Gothic"/>
-                <a:ea typeface="Yu Gothic"/>
-                <a:cs typeface="Yu Gothic"/>
-              </a:rPr>
-              <a:t>03</a:t>
-            </a:r>
-          </a:p>
-        </p:txBody>
-      </p:sp>
-      <p:sp>
-        <p:nvSpPr>
-          <p:cNvPr id="66" name="TextBox 65"/>
-          <p:cNvSpPr txBox="1"/>
-          <p:nvPr/>
-        </p:nvSpPr>
-        <p:spPr>
-          <a:xfrm>
-            <a:off x="1133856" y="3615171"/>
-            <a:ext cx="1837943" cy="246888"/>
-          </a:xfrm>
-          <a:prstGeom prst="rect">
-            <a:avLst/>
-          </a:prstGeom>
-          <a:noFill/>
-        </p:spPr>
-        <p:txBody>
-          <a:bodyPr wrap="square" anchor="t" lIns="0" rIns="0" tIns="0" bIns="0">
-            <a:spAutoFit/>
-          </a:bodyPr>
-          <a:lstStyle/>
-          <a:p>
-            <a:pPr algn="l">
-              <a:lnSpc>
-                <a:spcPct val="130000"/>
-              </a:lnSpc>
-            </a:pPr>
-            <a:r>
-              <a:rPr sz="1250" b="1" lang="ja-JP">
-                <a:solidFill>
-                  <a:srgbClr val="182C43"/>
-                </a:solidFill>
-                <a:latin typeface="Yu Gothic"/>
-                <a:ea typeface="Yu Gothic"/>
-                <a:cs typeface="Yu Gothic"/>
-              </a:rPr>
-              <a:t>現場検証</a:t>
-            </a:r>
-          </a:p>
-        </p:txBody>
-      </p:sp>
-      <p:sp>
-        <p:nvSpPr>
-          <p:cNvPr id="67" name="TextBox 66"/>
-          <p:cNvSpPr txBox="1"/>
-          <p:nvPr/>
-        </p:nvSpPr>
-        <p:spPr>
-          <a:xfrm>
-            <a:off x="1133856" y="3928993"/>
-            <a:ext cx="1837943" cy="182880"/>
-          </a:xfrm>
-          <a:prstGeom prst="rect">
-            <a:avLst/>
-          </a:prstGeom>
-          <a:noFill/>
-        </p:spPr>
-        <p:txBody>
-          <a:bodyPr wrap="square" anchor="t" lIns="0" rIns="0" tIns="0" bIns="0">
-            <a:spAutoFit/>
-          </a:bodyPr>
-          <a:lstStyle/>
-          <a:p>
-            <a:pPr algn="l">
-              <a:lnSpc>
-                <a:spcPct val="130000"/>
-              </a:lnSpc>
-            </a:pPr>
-            <a:r>
-              <a:rPr sz="950" b="0" lang="ja-JP">
-                <a:solidFill>
-                  <a:srgbClr val="666E70"/>
-                </a:solidFill>
-                <a:latin typeface="Yu Gothic"/>
-                <a:ea typeface="Yu Gothic"/>
-                <a:cs typeface="Yu Gothic"/>
-              </a:rPr>
-              <a:t>複数部門で試行</a:t>
-            </a:r>
-          </a:p>
-        </p:txBody>
-      </p:sp>
-      <p:sp>
-        <p:nvSpPr>
-          <p:cNvPr id="68" name="Rectangle 67"/>
-          <p:cNvSpPr/>
-          <p:nvPr/>
-        </p:nvSpPr>
-        <p:spPr>
-          <a:xfrm>
-            <a:off x="5234940" y="3700759"/>
-            <a:ext cx="2718816" cy="274320"/>
-          </a:xfrm>
-          <a:prstGeom prst="rect">
-            <a:avLst/>
-          </a:prstGeom>
-          <a:solidFill>
-            <a:srgbClr val="0D7870"/>
-          </a:solidFill>
-          <a:ln>
-            <a:noFill/>
-          </a:ln>
-          <a:effectLst/>
-        </p:spPr>
-        <p:style>
-          <a:lnRef idx="1">
-            <a:schemeClr val="accent1"/>
-          </a:lnRef>
-          <a:fillRef idx="3">
-            <a:schemeClr val="accent1"/>
-          </a:fillRef>
-          <a:effectRef idx="2">
-            <a:schemeClr val="accent1"/>
-          </a:effectRef>
-          <a:fontRef idx="minor">
-            <a:schemeClr val="lt1"/>
-          </a:fontRef>
-        </p:style>
-        <p:txBody>
-          <a:bodyPr rtlCol="0" anchor="ctr"/>
-          <a:lstStyle/>
-          <a:p>
-            <a:pPr algn="ctr"/>
-          </a:p>
-        </p:txBody>
-      </p:sp>
-      <p:sp>
-        <p:nvSpPr>
-          <p:cNvPr id="69" name="TextBox 68"/>
-          <p:cNvSpPr txBox="1"/>
-          <p:nvPr/>
-        </p:nvSpPr>
-        <p:spPr>
-          <a:xfrm>
-            <a:off x="5317236" y="3732763"/>
-            <a:ext cx="2554224" cy="237744"/>
-          </a:xfrm>
-          <a:prstGeom prst="rect">
-            <a:avLst/>
-          </a:prstGeom>
-          <a:noFill/>
-        </p:spPr>
-        <p:txBody>
-          <a:bodyPr wrap="square" anchor="t" lIns="0" rIns="0" tIns="0" bIns="0">
-            <a:spAutoFit/>
-          </a:bodyPr>
-          <a:lstStyle/>
-          <a:p>
-            <a:pPr algn="l">
-              <a:lnSpc>
-                <a:spcPct val="130000"/>
-              </a:lnSpc>
-            </a:pPr>
-            <a:r>
-              <a:rPr sz="1000" b="1" lang="ja-JP">
-                <a:solidFill>
-                  <a:srgbClr val="FFFFFC"/>
-                </a:solidFill>
-                <a:latin typeface="Yu Gothic"/>
-                <a:ea typeface="Yu Gothic"/>
-                <a:cs typeface="Yu Gothic"/>
-              </a:rPr>
-              <a:t>パイロット運用</a:t>
-            </a:r>
-          </a:p>
-        </p:txBody>
-      </p:sp>
-      <p:sp>
-        <p:nvSpPr>
-          <p:cNvPr id="70" name="TextBox 69"/>
-          <p:cNvSpPr txBox="1"/>
-          <p:nvPr/>
-        </p:nvSpPr>
-        <p:spPr>
-          <a:xfrm>
-            <a:off x="768096" y="4371197"/>
-            <a:ext cx="310896" cy="246888"/>
-          </a:xfrm>
-          <a:prstGeom prst="rect">
-            <a:avLst/>
-          </a:prstGeom>
-          <a:noFill/>
-        </p:spPr>
-        <p:txBody>
-          <a:bodyPr wrap="square" anchor="t" lIns="0" rIns="0" tIns="0" bIns="0">
-            <a:spAutoFit/>
-          </a:bodyPr>
-          <a:lstStyle/>
-          <a:p>
-            <a:pPr algn="l">
-              <a:lnSpc>
-                <a:spcPct val="130000"/>
-              </a:lnSpc>
-            </a:pPr>
-            <a:r>
-              <a:rPr sz="1250" b="1" lang="ja-JP">
-                <a:solidFill>
-                  <a:srgbClr val="0D7870"/>
-                </a:solidFill>
-                <a:latin typeface="Yu Gothic"/>
-                <a:ea typeface="Yu Gothic"/>
-                <a:cs typeface="Yu Gothic"/>
-              </a:rPr>
-              <a:t>04</a:t>
-            </a:r>
-          </a:p>
-        </p:txBody>
-      </p:sp>
-      <p:sp>
-        <p:nvSpPr>
-          <p:cNvPr id="71" name="TextBox 70"/>
-          <p:cNvSpPr txBox="1"/>
-          <p:nvPr/>
-        </p:nvSpPr>
-        <p:spPr>
-          <a:xfrm>
-            <a:off x="1133856" y="4328403"/>
-            <a:ext cx="1837943" cy="246888"/>
-          </a:xfrm>
-          <a:prstGeom prst="rect">
-            <a:avLst/>
-          </a:prstGeom>
-          <a:noFill/>
-        </p:spPr>
-        <p:txBody>
-          <a:bodyPr wrap="square" anchor="t" lIns="0" rIns="0" tIns="0" bIns="0">
-            <a:spAutoFit/>
-          </a:bodyPr>
-          <a:lstStyle/>
-          <a:p>
-            <a:pPr algn="l">
-              <a:lnSpc>
-                <a:spcPct val="130000"/>
-              </a:lnSpc>
-            </a:pPr>
-            <a:r>
-              <a:rPr sz="1250" b="1" lang="ja-JP">
-                <a:solidFill>
-                  <a:srgbClr val="182C43"/>
-                </a:solidFill>
-                <a:latin typeface="Yu Gothic"/>
-                <a:ea typeface="Yu Gothic"/>
-                <a:cs typeface="Yu Gothic"/>
-              </a:rPr>
-              <a:t>改善</a:t>
-            </a:r>
-          </a:p>
-        </p:txBody>
-      </p:sp>
-      <p:sp>
-        <p:nvSpPr>
-          <p:cNvPr id="72" name="TextBox 71"/>
-          <p:cNvSpPr txBox="1"/>
-          <p:nvPr/>
-        </p:nvSpPr>
-        <p:spPr>
-          <a:xfrm>
-            <a:off x="1133856" y="4642225"/>
-            <a:ext cx="1837943" cy="182880"/>
-          </a:xfrm>
-          <a:prstGeom prst="rect">
-            <a:avLst/>
-          </a:prstGeom>
-          <a:noFill/>
-        </p:spPr>
-        <p:txBody>
-          <a:bodyPr wrap="square" anchor="t" lIns="0" rIns="0" tIns="0" bIns="0">
-            <a:spAutoFit/>
-          </a:bodyPr>
-          <a:lstStyle/>
-          <a:p>
-            <a:pPr algn="l">
-              <a:lnSpc>
-                <a:spcPct val="130000"/>
-              </a:lnSpc>
-            </a:pPr>
-            <a:r>
-              <a:rPr sz="950" b="0" lang="ja-JP">
-                <a:solidFill>
-                  <a:srgbClr val="666E70"/>
-                </a:solidFill>
-                <a:latin typeface="Yu Gothic"/>
-                <a:ea typeface="Yu Gothic"/>
-                <a:cs typeface="Yu Gothic"/>
-              </a:rPr>
-              <a:t>利用結果を反映</a:t>
-            </a:r>
-          </a:p>
-        </p:txBody>
-      </p:sp>
-      <p:sp>
-        <p:nvSpPr>
-          <p:cNvPr id="73" name="Rectangle 72"/>
-          <p:cNvSpPr/>
-          <p:nvPr/>
-        </p:nvSpPr>
-        <p:spPr>
-          <a:xfrm>
-            <a:off x="7342632" y="4413991"/>
-            <a:ext cx="2016251" cy="274320"/>
-          </a:xfrm>
-          <a:prstGeom prst="rect">
-            <a:avLst/>
-          </a:prstGeom>
-          <a:solidFill>
-            <a:srgbClr val="0D7870"/>
-          </a:solidFill>
-          <a:ln>
-            <a:noFill/>
-          </a:ln>
-          <a:effectLst/>
-        </p:spPr>
-        <p:style>
-          <a:lnRef idx="1">
-            <a:schemeClr val="accent1"/>
-          </a:lnRef>
-          <a:fillRef idx="3">
-            <a:schemeClr val="accent1"/>
-          </a:fillRef>
-          <a:effectRef idx="2">
-            <a:schemeClr val="accent1"/>
-          </a:effectRef>
-          <a:fontRef idx="minor">
-            <a:schemeClr val="lt1"/>
-          </a:fontRef>
-        </p:style>
-        <p:txBody>
-          <a:bodyPr rtlCol="0" anchor="ctr"/>
-          <a:lstStyle/>
-          <a:p>
-            <a:pPr algn="ctr"/>
-          </a:p>
-        </p:txBody>
-      </p:sp>
-      <p:sp>
-        <p:nvSpPr>
-          <p:cNvPr id="74" name="TextBox 73"/>
-          <p:cNvSpPr txBox="1"/>
-          <p:nvPr/>
-        </p:nvSpPr>
-        <p:spPr>
-          <a:xfrm>
-            <a:off x="7424928" y="4445995"/>
-            <a:ext cx="1851659" cy="237744"/>
-          </a:xfrm>
-          <a:prstGeom prst="rect">
-            <a:avLst/>
-          </a:prstGeom>
-          <a:noFill/>
-        </p:spPr>
-        <p:txBody>
-          <a:bodyPr wrap="square" anchor="t" lIns="0" rIns="0" tIns="0" bIns="0">
-            <a:spAutoFit/>
-          </a:bodyPr>
-          <a:lstStyle/>
-          <a:p>
-            <a:pPr algn="l">
-              <a:lnSpc>
-                <a:spcPct val="130000"/>
-              </a:lnSpc>
-            </a:pPr>
-            <a:r>
-              <a:rPr sz="1000" b="1" lang="ja-JP">
-                <a:solidFill>
-                  <a:srgbClr val="FFFFFC"/>
-                </a:solidFill>
-                <a:latin typeface="Yu Gothic"/>
-                <a:ea typeface="Yu Gothic"/>
-                <a:cs typeface="Yu Gothic"/>
-              </a:rPr>
-              <a:t>品質・操作性を改善</a:t>
-            </a:r>
-          </a:p>
-        </p:txBody>
-      </p:sp>
-      <p:sp>
-        <p:nvSpPr>
-          <p:cNvPr id="75" name="TextBox 74"/>
-          <p:cNvSpPr txBox="1"/>
-          <p:nvPr/>
-        </p:nvSpPr>
-        <p:spPr>
-          <a:xfrm>
-            <a:off x="768096" y="5084429"/>
-            <a:ext cx="310896" cy="246888"/>
-          </a:xfrm>
-          <a:prstGeom prst="rect">
-            <a:avLst/>
-          </a:prstGeom>
-          <a:noFill/>
-        </p:spPr>
-        <p:txBody>
-          <a:bodyPr wrap="square" anchor="t" lIns="0" rIns="0" tIns="0" bIns="0">
-            <a:spAutoFit/>
-          </a:bodyPr>
-          <a:lstStyle/>
-          <a:p>
-            <a:pPr algn="l">
-              <a:lnSpc>
-                <a:spcPct val="130000"/>
-              </a:lnSpc>
-            </a:pPr>
-            <a:r>
-              <a:rPr sz="1250" b="1" lang="ja-JP">
-                <a:solidFill>
-                  <a:srgbClr val="0D7870"/>
-                </a:solidFill>
-                <a:latin typeface="Yu Gothic"/>
-                <a:ea typeface="Yu Gothic"/>
-                <a:cs typeface="Yu Gothic"/>
-              </a:rPr>
-              <a:t>05</a:t>
-            </a:r>
-          </a:p>
-        </p:txBody>
-      </p:sp>
-      <p:sp>
-        <p:nvSpPr>
-          <p:cNvPr id="76" name="TextBox 75"/>
-          <p:cNvSpPr txBox="1"/>
-          <p:nvPr/>
-        </p:nvSpPr>
-        <p:spPr>
-          <a:xfrm>
-            <a:off x="1133856" y="5041635"/>
-            <a:ext cx="1837943" cy="246888"/>
-          </a:xfrm>
-          <a:prstGeom prst="rect">
-            <a:avLst/>
-          </a:prstGeom>
-          <a:noFill/>
-        </p:spPr>
-        <p:txBody>
-          <a:bodyPr wrap="square" anchor="t" lIns="0" rIns="0" tIns="0" bIns="0">
-            <a:spAutoFit/>
-          </a:bodyPr>
-          <a:lstStyle/>
-          <a:p>
-            <a:pPr algn="l">
-              <a:lnSpc>
-                <a:spcPct val="130000"/>
-              </a:lnSpc>
-            </a:pPr>
-            <a:r>
-              <a:rPr sz="1250" b="1" lang="ja-JP">
-                <a:solidFill>
-                  <a:srgbClr val="182C43"/>
-                </a:solidFill>
-                <a:latin typeface="Yu Gothic"/>
-                <a:ea typeface="Yu Gothic"/>
-                <a:cs typeface="Yu Gothic"/>
-              </a:rPr>
-              <a:t>標準化</a:t>
-            </a:r>
-          </a:p>
-        </p:txBody>
-      </p:sp>
-      <p:sp>
-        <p:nvSpPr>
-          <p:cNvPr id="77" name="TextBox 76"/>
-          <p:cNvSpPr txBox="1"/>
-          <p:nvPr/>
-        </p:nvSpPr>
-        <p:spPr>
-          <a:xfrm>
-            <a:off x="1133856" y="5355457"/>
-            <a:ext cx="1837943" cy="182880"/>
-          </a:xfrm>
-          <a:prstGeom prst="rect">
-            <a:avLst/>
-          </a:prstGeom>
-          <a:noFill/>
-        </p:spPr>
-        <p:txBody>
-          <a:bodyPr wrap="square" anchor="t" lIns="0" rIns="0" tIns="0" bIns="0">
-            <a:spAutoFit/>
-          </a:bodyPr>
-          <a:lstStyle/>
-          <a:p>
-            <a:pPr algn="l">
-              <a:lnSpc>
-                <a:spcPct val="130000"/>
-              </a:lnSpc>
-            </a:pPr>
-            <a:r>
-              <a:rPr sz="950" b="0" lang="ja-JP">
-                <a:solidFill>
-                  <a:srgbClr val="666E70"/>
-                </a:solidFill>
-                <a:latin typeface="Yu Gothic"/>
-                <a:ea typeface="Yu Gothic"/>
-                <a:cs typeface="Yu Gothic"/>
-              </a:rPr>
-              <a:t>全社手順へ組込</a:t>
-            </a:r>
-          </a:p>
-        </p:txBody>
-      </p:sp>
-      <p:sp>
-        <p:nvSpPr>
-          <p:cNvPr id="78" name="Rectangle 77"/>
-          <p:cNvSpPr/>
-          <p:nvPr/>
-        </p:nvSpPr>
-        <p:spPr>
-          <a:xfrm>
-            <a:off x="9450324" y="5127223"/>
-            <a:ext cx="2016251" cy="274320"/>
-          </a:xfrm>
-          <a:prstGeom prst="rect">
-            <a:avLst/>
-          </a:prstGeom>
-          <a:solidFill>
-            <a:srgbClr val="0D7870"/>
-          </a:solidFill>
-          <a:ln>
-            <a:noFill/>
-          </a:ln>
-          <a:effectLst/>
-        </p:spPr>
-        <p:style>
-          <a:lnRef idx="1">
-            <a:schemeClr val="accent1"/>
-          </a:lnRef>
-          <a:fillRef idx="3">
-            <a:schemeClr val="accent1"/>
-          </a:fillRef>
-          <a:effectRef idx="2">
-            <a:schemeClr val="accent1"/>
-          </a:effectRef>
-          <a:fontRef idx="minor">
-            <a:schemeClr val="lt1"/>
-          </a:fontRef>
-        </p:style>
-        <p:txBody>
-          <a:bodyPr rtlCol="0" anchor="ctr"/>
-          <a:lstStyle/>
-          <a:p>
-            <a:pPr algn="ctr"/>
-          </a:p>
-        </p:txBody>
-      </p:sp>
-      <p:sp>
-        <p:nvSpPr>
-          <p:cNvPr id="79" name="TextBox 78"/>
-          <p:cNvSpPr txBox="1"/>
-          <p:nvPr/>
-        </p:nvSpPr>
-        <p:spPr>
-          <a:xfrm>
-            <a:off x="9532620" y="5159227"/>
-            <a:ext cx="1851659" cy="237744"/>
-          </a:xfrm>
-          <a:prstGeom prst="rect">
-            <a:avLst/>
-          </a:prstGeom>
-          <a:noFill/>
-        </p:spPr>
-        <p:txBody>
-          <a:bodyPr wrap="square" anchor="t" lIns="0" rIns="0" tIns="0" bIns="0">
-            <a:spAutoFit/>
-          </a:bodyPr>
-          <a:lstStyle/>
-          <a:p>
-            <a:pPr algn="l">
-              <a:lnSpc>
-                <a:spcPct val="130000"/>
-              </a:lnSpc>
-            </a:pPr>
-            <a:r>
-              <a:rPr sz="1000" b="1" lang="ja-JP">
-                <a:solidFill>
-                  <a:srgbClr val="FFFFFC"/>
-                </a:solidFill>
-                <a:latin typeface="Yu Gothic"/>
-                <a:ea typeface="Yu Gothic"/>
-                <a:cs typeface="Yu Gothic"/>
-              </a:rPr>
-              <a:t>標準運用へ移行</a:t>
-            </a:r>
-          </a:p>
-        </p:txBody>
-      </p:sp>
-      <p:sp>
-        <p:nvSpPr>
-          <p:cNvPr id="80" name="Diamond 79"/>
-          <p:cNvSpPr/>
-          <p:nvPr/>
-        </p:nvSpPr>
-        <p:spPr>
-          <a:xfrm>
-            <a:off x="4066794" y="2116835"/>
-            <a:ext cx="137160" cy="137160"/>
+            <a:off x="4179951" y="2350008"/>
+            <a:ext cx="118872" cy="118872"/>
           </a:xfrm>
           <a:prstGeom prst="diamond">
             <a:avLst/>
@@ -11180,14 +9678,14 @@
       </p:sp>
       <p:sp>
         <p:nvSpPr>
-          <p:cNvPr id="81" name="TextBox 80"/>
-          <p:cNvSpPr txBox="1"/>
-          <p:nvPr/>
-        </p:nvSpPr>
-        <p:spPr>
-          <a:xfrm>
-            <a:off x="3573322" y="2588117"/>
-            <a:ext cx="1124102" cy="164592"/>
+          <p:cNvPr id="45" name="TextBox 44"/>
+          <p:cNvSpPr txBox="1"/>
+          <p:nvPr/>
+        </p:nvSpPr>
+        <p:spPr>
+          <a:xfrm>
+            <a:off x="3668915" y="2473452"/>
+            <a:ext cx="1140942" cy="246888"/>
           </a:xfrm>
           <a:prstGeom prst="rect">
             <a:avLst/>
@@ -11197,18 +9695,256 @@
           </a:solidFill>
         </p:spPr>
         <p:txBody>
+          <a:bodyPr wrap="none" anchor="t" lIns="0" rIns="0" tIns="0" bIns="0">
+            <a:spAutoFit/>
+          </a:bodyPr>
+          <a:lstStyle/>
+          <a:p>
+            <a:pPr algn="ctr">
+              <a:lnSpc>
+                <a:spcPct val="100000"/>
+              </a:lnSpc>
+            </a:pPr>
+            <a:r>
+              <a:rPr sz="850" b="0" lang="ja-JP">
+                <a:solidFill>
+                  <a:srgbClr val="202729"/>
+                </a:solidFill>
+                <a:latin typeface="Yu Gothic"/>
+                <a:ea typeface="Yu Gothic"/>
+                <a:cs typeface="Yu Gothic"/>
+              </a:rPr>
+              <a:t>型レビュー</a:t>
+            </a:r>
+          </a:p>
+        </p:txBody>
+      </p:sp>
+      <p:cxnSp>
+        <p:nvCxnSpPr>
+          <p:cNvPr id="46" name="Connector 45"/>
+          <p:cNvCxnSpPr/>
+          <p:nvPr/>
+        </p:nvCxnSpPr>
+        <p:spPr>
+          <a:xfrm>
+            <a:off x="658368" y="2788920"/>
+            <a:ext cx="10853928" cy="0"/>
+          </a:xfrm>
+          <a:prstGeom prst="line">
+            <a:avLst/>
+          </a:prstGeom>
+          <a:ln w="7620">
+            <a:solidFill>
+              <a:srgbClr val="D1CFC8"/>
+            </a:solidFill>
+          </a:ln>
+          <a:effectLst/>
+        </p:spPr>
+        <p:style>
+          <a:lnRef idx="2">
+            <a:schemeClr val="accent1"/>
+          </a:lnRef>
+          <a:fillRef idx="0">
+            <a:schemeClr val="accent1"/>
+          </a:fillRef>
+          <a:effectRef idx="1">
+            <a:schemeClr val="accent1"/>
+          </a:effectRef>
+          <a:fontRef idx="minor">
+            <a:schemeClr val="tx1"/>
+          </a:fontRef>
+        </p:style>
+      </p:cxnSp>
+      <p:sp>
+        <p:nvSpPr>
+          <p:cNvPr id="47" name="TextBox 46"/>
+          <p:cNvSpPr txBox="1"/>
+          <p:nvPr/>
+        </p:nvSpPr>
+        <p:spPr>
+          <a:xfrm>
+            <a:off x="768096" y="2852928"/>
+            <a:ext cx="347472" cy="228600"/>
+          </a:xfrm>
+          <a:prstGeom prst="rect">
+            <a:avLst/>
+          </a:prstGeom>
+          <a:noFill/>
+        </p:spPr>
+        <p:txBody>
           <a:bodyPr wrap="square" anchor="t" lIns="0" rIns="0" tIns="0" bIns="0">
             <a:spAutoFit/>
           </a:bodyPr>
           <a:lstStyle/>
           <a:p>
+            <a:pPr algn="l">
+              <a:lnSpc>
+                <a:spcPct val="130000"/>
+              </a:lnSpc>
+            </a:pPr>
+            <a:r>
+              <a:rPr sz="1150" b="1" lang="ja-JP">
+                <a:solidFill>
+                  <a:srgbClr val="0D7870"/>
+                </a:solidFill>
+                <a:latin typeface="Yu Gothic"/>
+                <a:ea typeface="Yu Gothic"/>
+                <a:cs typeface="Yu Gothic"/>
+              </a:rPr>
+              <a:t>02</a:t>
+            </a:r>
+          </a:p>
+        </p:txBody>
+      </p:sp>
+      <p:sp>
+        <p:nvSpPr>
+          <p:cNvPr id="48" name="TextBox 47"/>
+          <p:cNvSpPr txBox="1"/>
+          <p:nvPr/>
+        </p:nvSpPr>
+        <p:spPr>
+          <a:xfrm>
+            <a:off x="1133856" y="2834640"/>
+            <a:ext cx="1938527" cy="256032"/>
+          </a:xfrm>
+          <a:prstGeom prst="rect">
+            <a:avLst/>
+          </a:prstGeom>
+          <a:noFill/>
+        </p:spPr>
+        <p:txBody>
+          <a:bodyPr wrap="none" anchor="t" lIns="0" rIns="0" tIns="0" bIns="0">
+            <a:spAutoFit/>
+          </a:bodyPr>
+          <a:lstStyle/>
+          <a:p>
+            <a:pPr algn="l">
+              <a:lnSpc>
+                <a:spcPct val="100000"/>
+              </a:lnSpc>
+            </a:pPr>
+            <a:r>
+              <a:rPr sz="1150" b="1" lang="ja-JP">
+                <a:solidFill>
+                  <a:srgbClr val="182C43"/>
+                </a:solidFill>
+                <a:latin typeface="Yu Gothic"/>
+                <a:ea typeface="Yu Gothic"/>
+                <a:cs typeface="Yu Gothic"/>
+              </a:rPr>
+              <a:t>実装</a:t>
+            </a:r>
+          </a:p>
+        </p:txBody>
+      </p:sp>
+      <p:sp>
+        <p:nvSpPr>
+          <p:cNvPr id="49" name="TextBox 48"/>
+          <p:cNvSpPr txBox="1"/>
+          <p:nvPr/>
+        </p:nvSpPr>
+        <p:spPr>
+          <a:xfrm>
+            <a:off x="1133856" y="3054096"/>
+            <a:ext cx="1938527" cy="164592"/>
+          </a:xfrm>
+          <a:prstGeom prst="rect">
+            <a:avLst/>
+          </a:prstGeom>
+          <a:noFill/>
+        </p:spPr>
+        <p:txBody>
+          <a:bodyPr wrap="none" anchor="t" lIns="0" rIns="0" tIns="0" bIns="0">
+            <a:spAutoFit/>
+          </a:bodyPr>
+          <a:lstStyle/>
+          <a:p>
+            <a:pPr algn="l">
+              <a:lnSpc>
+                <a:spcPct val="100000"/>
+              </a:lnSpc>
+            </a:pPr>
+            <a:r>
+              <a:rPr sz="900" b="0" lang="ja-JP">
+                <a:solidFill>
+                  <a:srgbClr val="666E70"/>
+                </a:solidFill>
+                <a:latin typeface="Yu Gothic"/>
+                <a:ea typeface="Yu Gothic"/>
+                <a:cs typeface="Yu Gothic"/>
+              </a:rPr>
+              <a:t>rendererを整備</a:t>
+            </a:r>
+          </a:p>
+        </p:txBody>
+      </p:sp>
+      <p:cxnSp>
+        <p:nvCxnSpPr>
+          <p:cNvPr id="50" name="Connector 49"/>
+          <p:cNvCxnSpPr/>
+          <p:nvPr/>
+        </p:nvCxnSpPr>
+        <p:spPr>
+          <a:xfrm>
+            <a:off x="3925062" y="2894076"/>
+            <a:ext cx="2013965" cy="0"/>
+          </a:xfrm>
+          <a:prstGeom prst="line">
+            <a:avLst/>
+          </a:prstGeom>
+          <a:ln w="17780">
+            <a:solidFill>
+              <a:srgbClr val="0D7870"/>
+            </a:solidFill>
+          </a:ln>
+          <a:effectLst/>
+        </p:spPr>
+        <p:style>
+          <a:lnRef idx="2">
+            <a:schemeClr val="accent1"/>
+          </a:lnRef>
+          <a:fillRef idx="0">
+            <a:schemeClr val="accent1"/>
+          </a:fillRef>
+          <a:effectRef idx="1">
+            <a:schemeClr val="accent1"/>
+          </a:effectRef>
+          <a:fontRef idx="minor">
+            <a:schemeClr val="tx1"/>
+          </a:fontRef>
+        </p:style>
+      </p:cxnSp>
+      <p:sp>
+        <p:nvSpPr>
+          <p:cNvPr id="51" name="TextBox 50"/>
+          <p:cNvSpPr txBox="1"/>
+          <p:nvPr/>
+        </p:nvSpPr>
+        <p:spPr>
+          <a:xfrm>
+            <a:off x="4287393" y="2926080"/>
+            <a:ext cx="1289304" cy="246888"/>
+          </a:xfrm>
+          <a:prstGeom prst="rect">
+            <a:avLst/>
+          </a:prstGeom>
+          <a:solidFill>
+            <a:srgbClr val="ECEAE4"/>
+          </a:solidFill>
+        </p:spPr>
+        <p:txBody>
+          <a:bodyPr wrap="none" anchor="t" lIns="0" rIns="0" tIns="0" bIns="0">
+            <a:spAutoFit/>
+          </a:bodyPr>
+          <a:lstStyle/>
+          <a:p>
             <a:pPr algn="ctr">
               <a:lnSpc>
                 <a:spcPct val="100000"/>
               </a:lnSpc>
             </a:pPr>
             <a:r>
-              <a:rPr sz="850" b="0" lang="ja-JP">
+              <a:rPr sz="900" b="0" lang="ja-JP">
                 <a:solidFill>
                   <a:srgbClr val="202729"/>
                 </a:solidFill>
@@ -11216,21 +9952,259 @@
                 <a:ea typeface="Yu Gothic"/>
                 <a:cs typeface="Yu Gothic"/>
               </a:rPr>
-              <a:t>型レビュー</a:t>
-            </a:r>
-          </a:p>
-        </p:txBody>
-      </p:sp>
-      <p:sp>
-        <p:nvSpPr>
-          <p:cNvPr id="82" name="Diamond 81"/>
+              <a:t>生成・検証機能を実装</a:t>
+            </a:r>
+          </a:p>
+        </p:txBody>
+      </p:sp>
+      <p:cxnSp>
+        <p:nvCxnSpPr>
+          <p:cNvPr id="52" name="Connector 51"/>
+          <p:cNvCxnSpPr/>
+          <p:nvPr/>
+        </p:nvCxnSpPr>
+        <p:spPr>
+          <a:xfrm>
+            <a:off x="658368" y="3273552"/>
+            <a:ext cx="10853928" cy="0"/>
+          </a:xfrm>
+          <a:prstGeom prst="line">
+            <a:avLst/>
+          </a:prstGeom>
+          <a:ln w="7620">
+            <a:solidFill>
+              <a:srgbClr val="D1CFC8"/>
+            </a:solidFill>
+          </a:ln>
+          <a:effectLst/>
+        </p:spPr>
+        <p:style>
+          <a:lnRef idx="2">
+            <a:schemeClr val="accent1"/>
+          </a:lnRef>
+          <a:fillRef idx="0">
+            <a:schemeClr val="accent1"/>
+          </a:fillRef>
+          <a:effectRef idx="1">
+            <a:schemeClr val="accent1"/>
+          </a:effectRef>
+          <a:fontRef idx="minor">
+            <a:schemeClr val="tx1"/>
+          </a:fontRef>
+        </p:style>
+      </p:cxnSp>
+      <p:sp>
+        <p:nvSpPr>
+          <p:cNvPr id="53" name="TextBox 52"/>
+          <p:cNvSpPr txBox="1"/>
+          <p:nvPr/>
+        </p:nvSpPr>
+        <p:spPr>
+          <a:xfrm>
+            <a:off x="768096" y="3337560"/>
+            <a:ext cx="347472" cy="228600"/>
+          </a:xfrm>
+          <a:prstGeom prst="rect">
+            <a:avLst/>
+          </a:prstGeom>
+          <a:noFill/>
+        </p:spPr>
+        <p:txBody>
+          <a:bodyPr wrap="square" anchor="t" lIns="0" rIns="0" tIns="0" bIns="0">
+            <a:spAutoFit/>
+          </a:bodyPr>
+          <a:lstStyle/>
+          <a:p>
+            <a:pPr algn="l">
+              <a:lnSpc>
+                <a:spcPct val="130000"/>
+              </a:lnSpc>
+            </a:pPr>
+            <a:r>
+              <a:rPr sz="1150" b="1" lang="ja-JP">
+                <a:solidFill>
+                  <a:srgbClr val="0D7870"/>
+                </a:solidFill>
+                <a:latin typeface="Yu Gothic"/>
+                <a:ea typeface="Yu Gothic"/>
+                <a:cs typeface="Yu Gothic"/>
+              </a:rPr>
+              <a:t>03</a:t>
+            </a:r>
+          </a:p>
+        </p:txBody>
+      </p:sp>
+      <p:sp>
+        <p:nvSpPr>
+          <p:cNvPr id="54" name="TextBox 53"/>
+          <p:cNvSpPr txBox="1"/>
+          <p:nvPr/>
+        </p:nvSpPr>
+        <p:spPr>
+          <a:xfrm>
+            <a:off x="1133856" y="3319272"/>
+            <a:ext cx="1938527" cy="256032"/>
+          </a:xfrm>
+          <a:prstGeom prst="rect">
+            <a:avLst/>
+          </a:prstGeom>
+          <a:noFill/>
+        </p:spPr>
+        <p:txBody>
+          <a:bodyPr wrap="none" anchor="t" lIns="0" rIns="0" tIns="0" bIns="0">
+            <a:spAutoFit/>
+          </a:bodyPr>
+          <a:lstStyle/>
+          <a:p>
+            <a:pPr algn="l">
+              <a:lnSpc>
+                <a:spcPct val="100000"/>
+              </a:lnSpc>
+            </a:pPr>
+            <a:r>
+              <a:rPr sz="1150" b="1" lang="ja-JP">
+                <a:solidFill>
+                  <a:srgbClr val="182C43"/>
+                </a:solidFill>
+                <a:latin typeface="Yu Gothic"/>
+                <a:ea typeface="Yu Gothic"/>
+                <a:cs typeface="Yu Gothic"/>
+              </a:rPr>
+              <a:t>現場検証</a:t>
+            </a:r>
+          </a:p>
+        </p:txBody>
+      </p:sp>
+      <p:sp>
+        <p:nvSpPr>
+          <p:cNvPr id="55" name="TextBox 54"/>
+          <p:cNvSpPr txBox="1"/>
+          <p:nvPr/>
+        </p:nvSpPr>
+        <p:spPr>
+          <a:xfrm>
+            <a:off x="1133856" y="3538728"/>
+            <a:ext cx="1938527" cy="164592"/>
+          </a:xfrm>
+          <a:prstGeom prst="rect">
+            <a:avLst/>
+          </a:prstGeom>
+          <a:noFill/>
+        </p:spPr>
+        <p:txBody>
+          <a:bodyPr wrap="none" anchor="t" lIns="0" rIns="0" tIns="0" bIns="0">
+            <a:spAutoFit/>
+          </a:bodyPr>
+          <a:lstStyle/>
+          <a:p>
+            <a:pPr algn="l">
+              <a:lnSpc>
+                <a:spcPct val="100000"/>
+              </a:lnSpc>
+            </a:pPr>
+            <a:r>
+              <a:rPr sz="900" b="0" lang="ja-JP">
+                <a:solidFill>
+                  <a:srgbClr val="666E70"/>
+                </a:solidFill>
+                <a:latin typeface="Yu Gothic"/>
+                <a:ea typeface="Yu Gothic"/>
+                <a:cs typeface="Yu Gothic"/>
+              </a:rPr>
+              <a:t>複数部門で試行</a:t>
+            </a:r>
+          </a:p>
+        </p:txBody>
+      </p:sp>
+      <p:cxnSp>
+        <p:nvCxnSpPr>
+          <p:cNvPr id="56" name="Connector 55"/>
+          <p:cNvCxnSpPr/>
+          <p:nvPr/>
+        </p:nvCxnSpPr>
+        <p:spPr>
+          <a:xfrm>
+            <a:off x="5310378" y="3378708"/>
+            <a:ext cx="2706623" cy="0"/>
+          </a:xfrm>
+          <a:prstGeom prst="line">
+            <a:avLst/>
+          </a:prstGeom>
+          <a:ln w="17780">
+            <a:solidFill>
+              <a:srgbClr val="0D7870"/>
+            </a:solidFill>
+          </a:ln>
+          <a:effectLst/>
+        </p:spPr>
+        <p:style>
+          <a:lnRef idx="2">
+            <a:schemeClr val="accent1"/>
+          </a:lnRef>
+          <a:fillRef idx="0">
+            <a:schemeClr val="accent1"/>
+          </a:fillRef>
+          <a:effectRef idx="1">
+            <a:schemeClr val="accent1"/>
+          </a:effectRef>
+          <a:fontRef idx="minor">
+            <a:schemeClr val="tx1"/>
+          </a:fontRef>
+        </p:style>
+      </p:cxnSp>
+      <p:sp>
+        <p:nvSpPr>
+          <p:cNvPr id="57" name="TextBox 56"/>
+          <p:cNvSpPr txBox="1"/>
+          <p:nvPr/>
+        </p:nvSpPr>
+        <p:spPr>
+          <a:xfrm>
+            <a:off x="6019038" y="3410712"/>
+            <a:ext cx="1289304" cy="246888"/>
+          </a:xfrm>
+          <a:prstGeom prst="rect">
+            <a:avLst/>
+          </a:prstGeom>
+          <a:solidFill>
+            <a:srgbClr val="FFFFFC"/>
+          </a:solidFill>
+        </p:spPr>
+        <p:txBody>
+          <a:bodyPr wrap="none" anchor="t" lIns="0" rIns="0" tIns="0" bIns="0">
+            <a:spAutoFit/>
+          </a:bodyPr>
+          <a:lstStyle/>
+          <a:p>
+            <a:pPr algn="ctr">
+              <a:lnSpc>
+                <a:spcPct val="100000"/>
+              </a:lnSpc>
+            </a:pPr>
+            <a:r>
+              <a:rPr sz="950" b="0" lang="ja-JP">
+                <a:solidFill>
+                  <a:srgbClr val="202729"/>
+                </a:solidFill>
+                <a:latin typeface="Yu Gothic"/>
+                <a:ea typeface="Yu Gothic"/>
+                <a:cs typeface="Yu Gothic"/>
+              </a:rPr>
+              <a:t>パイロット運用</a:t>
+            </a:r>
+          </a:p>
+        </p:txBody>
+      </p:sp>
+      <p:sp>
+        <p:nvSpPr>
+          <p:cNvPr id="58" name="Diamond 57"/>
           <p:cNvSpPr/>
           <p:nvPr/>
         </p:nvSpPr>
         <p:spPr>
           <a:xfrm>
-            <a:off x="7579614" y="3543299"/>
-            <a:ext cx="137160" cy="137160"/>
+            <a:off x="7643241" y="3630168"/>
+            <a:ext cx="118872" cy="118872"/>
           </a:xfrm>
           <a:prstGeom prst="diamond">
             <a:avLst/>
@@ -11267,14 +10241,14 @@
       </p:sp>
       <p:sp>
         <p:nvSpPr>
-          <p:cNvPr id="83" name="TextBox 82"/>
-          <p:cNvSpPr txBox="1"/>
-          <p:nvPr/>
-        </p:nvSpPr>
-        <p:spPr>
-          <a:xfrm>
-            <a:off x="7086142" y="4014581"/>
-            <a:ext cx="1124102" cy="164592"/>
+          <p:cNvPr id="59" name="TextBox 58"/>
+          <p:cNvSpPr txBox="1"/>
+          <p:nvPr/>
+        </p:nvSpPr>
+        <p:spPr>
+          <a:xfrm>
+            <a:off x="7132205" y="3753612"/>
+            <a:ext cx="1140942" cy="246888"/>
           </a:xfrm>
           <a:prstGeom prst="rect">
             <a:avLst/>
@@ -11284,18 +10258,256 @@
           </a:solidFill>
         </p:spPr>
         <p:txBody>
+          <a:bodyPr wrap="none" anchor="t" lIns="0" rIns="0" tIns="0" bIns="0">
+            <a:spAutoFit/>
+          </a:bodyPr>
+          <a:lstStyle/>
+          <a:p>
+            <a:pPr algn="ctr">
+              <a:lnSpc>
+                <a:spcPct val="100000"/>
+              </a:lnSpc>
+            </a:pPr>
+            <a:r>
+              <a:rPr sz="850" b="0" lang="ja-JP">
+                <a:solidFill>
+                  <a:srgbClr val="202729"/>
+                </a:solidFill>
+                <a:latin typeface="Yu Gothic"/>
+                <a:ea typeface="Yu Gothic"/>
+                <a:cs typeface="Yu Gothic"/>
+              </a:rPr>
+              <a:t>展開判断</a:t>
+            </a:r>
+          </a:p>
+        </p:txBody>
+      </p:sp>
+      <p:cxnSp>
+        <p:nvCxnSpPr>
+          <p:cNvPr id="60" name="Connector 59"/>
+          <p:cNvCxnSpPr/>
+          <p:nvPr/>
+        </p:nvCxnSpPr>
+        <p:spPr>
+          <a:xfrm>
+            <a:off x="658368" y="4069080"/>
+            <a:ext cx="10853928" cy="0"/>
+          </a:xfrm>
+          <a:prstGeom prst="line">
+            <a:avLst/>
+          </a:prstGeom>
+          <a:ln w="7620">
+            <a:solidFill>
+              <a:srgbClr val="D1CFC8"/>
+            </a:solidFill>
+          </a:ln>
+          <a:effectLst/>
+        </p:spPr>
+        <p:style>
+          <a:lnRef idx="2">
+            <a:schemeClr val="accent1"/>
+          </a:lnRef>
+          <a:fillRef idx="0">
+            <a:schemeClr val="accent1"/>
+          </a:fillRef>
+          <a:effectRef idx="1">
+            <a:schemeClr val="accent1"/>
+          </a:effectRef>
+          <a:fontRef idx="minor">
+            <a:schemeClr val="tx1"/>
+          </a:fontRef>
+        </p:style>
+      </p:cxnSp>
+      <p:sp>
+        <p:nvSpPr>
+          <p:cNvPr id="61" name="TextBox 60"/>
+          <p:cNvSpPr txBox="1"/>
+          <p:nvPr/>
+        </p:nvSpPr>
+        <p:spPr>
+          <a:xfrm>
+            <a:off x="768096" y="4133088"/>
+            <a:ext cx="347472" cy="228600"/>
+          </a:xfrm>
+          <a:prstGeom prst="rect">
+            <a:avLst/>
+          </a:prstGeom>
+          <a:noFill/>
+        </p:spPr>
+        <p:txBody>
           <a:bodyPr wrap="square" anchor="t" lIns="0" rIns="0" tIns="0" bIns="0">
             <a:spAutoFit/>
           </a:bodyPr>
           <a:lstStyle/>
           <a:p>
+            <a:pPr algn="l">
+              <a:lnSpc>
+                <a:spcPct val="130000"/>
+              </a:lnSpc>
+            </a:pPr>
+            <a:r>
+              <a:rPr sz="1150" b="1" lang="ja-JP">
+                <a:solidFill>
+                  <a:srgbClr val="0D7870"/>
+                </a:solidFill>
+                <a:latin typeface="Yu Gothic"/>
+                <a:ea typeface="Yu Gothic"/>
+                <a:cs typeface="Yu Gothic"/>
+              </a:rPr>
+              <a:t>04</a:t>
+            </a:r>
+          </a:p>
+        </p:txBody>
+      </p:sp>
+      <p:sp>
+        <p:nvSpPr>
+          <p:cNvPr id="62" name="TextBox 61"/>
+          <p:cNvSpPr txBox="1"/>
+          <p:nvPr/>
+        </p:nvSpPr>
+        <p:spPr>
+          <a:xfrm>
+            <a:off x="1133856" y="4114800"/>
+            <a:ext cx="1938527" cy="256032"/>
+          </a:xfrm>
+          <a:prstGeom prst="rect">
+            <a:avLst/>
+          </a:prstGeom>
+          <a:noFill/>
+        </p:spPr>
+        <p:txBody>
+          <a:bodyPr wrap="none" anchor="t" lIns="0" rIns="0" tIns="0" bIns="0">
+            <a:spAutoFit/>
+          </a:bodyPr>
+          <a:lstStyle/>
+          <a:p>
+            <a:pPr algn="l">
+              <a:lnSpc>
+                <a:spcPct val="100000"/>
+              </a:lnSpc>
+            </a:pPr>
+            <a:r>
+              <a:rPr sz="1150" b="1" lang="ja-JP">
+                <a:solidFill>
+                  <a:srgbClr val="182C43"/>
+                </a:solidFill>
+                <a:latin typeface="Yu Gothic"/>
+                <a:ea typeface="Yu Gothic"/>
+                <a:cs typeface="Yu Gothic"/>
+              </a:rPr>
+              <a:t>改善</a:t>
+            </a:r>
+          </a:p>
+        </p:txBody>
+      </p:sp>
+      <p:sp>
+        <p:nvSpPr>
+          <p:cNvPr id="63" name="TextBox 62"/>
+          <p:cNvSpPr txBox="1"/>
+          <p:nvPr/>
+        </p:nvSpPr>
+        <p:spPr>
+          <a:xfrm>
+            <a:off x="1133856" y="4334256"/>
+            <a:ext cx="1938527" cy="164592"/>
+          </a:xfrm>
+          <a:prstGeom prst="rect">
+            <a:avLst/>
+          </a:prstGeom>
+          <a:noFill/>
+        </p:spPr>
+        <p:txBody>
+          <a:bodyPr wrap="none" anchor="t" lIns="0" rIns="0" tIns="0" bIns="0">
+            <a:spAutoFit/>
+          </a:bodyPr>
+          <a:lstStyle/>
+          <a:p>
+            <a:pPr algn="l">
+              <a:lnSpc>
+                <a:spcPct val="100000"/>
+              </a:lnSpc>
+            </a:pPr>
+            <a:r>
+              <a:rPr sz="900" b="0" lang="ja-JP">
+                <a:solidFill>
+                  <a:srgbClr val="666E70"/>
+                </a:solidFill>
+                <a:latin typeface="Yu Gothic"/>
+                <a:ea typeface="Yu Gothic"/>
+                <a:cs typeface="Yu Gothic"/>
+              </a:rPr>
+              <a:t>利用結果を反映</a:t>
+            </a:r>
+          </a:p>
+        </p:txBody>
+      </p:sp>
+      <p:cxnSp>
+        <p:nvCxnSpPr>
+          <p:cNvPr id="64" name="Connector 63"/>
+          <p:cNvCxnSpPr/>
+          <p:nvPr/>
+        </p:nvCxnSpPr>
+        <p:spPr>
+          <a:xfrm>
+            <a:off x="7388352" y="4174236"/>
+            <a:ext cx="2013965" cy="0"/>
+          </a:xfrm>
+          <a:prstGeom prst="line">
+            <a:avLst/>
+          </a:prstGeom>
+          <a:ln w="17780">
+            <a:solidFill>
+              <a:srgbClr val="0D7870"/>
+            </a:solidFill>
+          </a:ln>
+          <a:effectLst/>
+        </p:spPr>
+        <p:style>
+          <a:lnRef idx="2">
+            <a:schemeClr val="accent1"/>
+          </a:lnRef>
+          <a:fillRef idx="0">
+            <a:schemeClr val="accent1"/>
+          </a:fillRef>
+          <a:effectRef idx="1">
+            <a:schemeClr val="accent1"/>
+          </a:effectRef>
+          <a:fontRef idx="minor">
+            <a:schemeClr val="tx1"/>
+          </a:fontRef>
+        </p:style>
+      </p:cxnSp>
+      <p:sp>
+        <p:nvSpPr>
+          <p:cNvPr id="65" name="TextBox 64"/>
+          <p:cNvSpPr txBox="1"/>
+          <p:nvPr/>
+        </p:nvSpPr>
+        <p:spPr>
+          <a:xfrm>
+            <a:off x="7750682" y="4206240"/>
+            <a:ext cx="1289304" cy="246888"/>
+          </a:xfrm>
+          <a:prstGeom prst="rect">
+            <a:avLst/>
+          </a:prstGeom>
+          <a:solidFill>
+            <a:srgbClr val="ECEAE4"/>
+          </a:solidFill>
+        </p:spPr>
+        <p:txBody>
+          <a:bodyPr wrap="none" anchor="t" lIns="0" rIns="0" tIns="0" bIns="0">
+            <a:spAutoFit/>
+          </a:bodyPr>
+          <a:lstStyle/>
+          <a:p>
             <a:pPr algn="ctr">
               <a:lnSpc>
                 <a:spcPct val="100000"/>
               </a:lnSpc>
             </a:pPr>
             <a:r>
-              <a:rPr sz="850" b="0" lang="ja-JP">
+              <a:rPr sz="950" b="0" lang="ja-JP">
                 <a:solidFill>
                   <a:srgbClr val="202729"/>
                 </a:solidFill>
@@ -11303,21 +10515,259 @@
                 <a:ea typeface="Yu Gothic"/>
                 <a:cs typeface="Yu Gothic"/>
               </a:rPr>
-              <a:t>展開判断</a:t>
-            </a:r>
-          </a:p>
-        </p:txBody>
-      </p:sp>
-      <p:sp>
-        <p:nvSpPr>
-          <p:cNvPr id="84" name="Diamond 83"/>
+              <a:t>品質・操作性を改善</a:t>
+            </a:r>
+          </a:p>
+        </p:txBody>
+      </p:sp>
+      <p:cxnSp>
+        <p:nvCxnSpPr>
+          <p:cNvPr id="66" name="Connector 65"/>
+          <p:cNvCxnSpPr/>
+          <p:nvPr/>
+        </p:nvCxnSpPr>
+        <p:spPr>
+          <a:xfrm>
+            <a:off x="658368" y="4553712"/>
+            <a:ext cx="10853928" cy="0"/>
+          </a:xfrm>
+          <a:prstGeom prst="line">
+            <a:avLst/>
+          </a:prstGeom>
+          <a:ln w="7620">
+            <a:solidFill>
+              <a:srgbClr val="D1CFC8"/>
+            </a:solidFill>
+          </a:ln>
+          <a:effectLst/>
+        </p:spPr>
+        <p:style>
+          <a:lnRef idx="2">
+            <a:schemeClr val="accent1"/>
+          </a:lnRef>
+          <a:fillRef idx="0">
+            <a:schemeClr val="accent1"/>
+          </a:fillRef>
+          <a:effectRef idx="1">
+            <a:schemeClr val="accent1"/>
+          </a:effectRef>
+          <a:fontRef idx="minor">
+            <a:schemeClr val="tx1"/>
+          </a:fontRef>
+        </p:style>
+      </p:cxnSp>
+      <p:sp>
+        <p:nvSpPr>
+          <p:cNvPr id="67" name="TextBox 66"/>
+          <p:cNvSpPr txBox="1"/>
+          <p:nvPr/>
+        </p:nvSpPr>
+        <p:spPr>
+          <a:xfrm>
+            <a:off x="768096" y="4617720"/>
+            <a:ext cx="347472" cy="228600"/>
+          </a:xfrm>
+          <a:prstGeom prst="rect">
+            <a:avLst/>
+          </a:prstGeom>
+          <a:noFill/>
+        </p:spPr>
+        <p:txBody>
+          <a:bodyPr wrap="square" anchor="t" lIns="0" rIns="0" tIns="0" bIns="0">
+            <a:spAutoFit/>
+          </a:bodyPr>
+          <a:lstStyle/>
+          <a:p>
+            <a:pPr algn="l">
+              <a:lnSpc>
+                <a:spcPct val="130000"/>
+              </a:lnSpc>
+            </a:pPr>
+            <a:r>
+              <a:rPr sz="1150" b="1" lang="ja-JP">
+                <a:solidFill>
+                  <a:srgbClr val="0D7870"/>
+                </a:solidFill>
+                <a:latin typeface="Yu Gothic"/>
+                <a:ea typeface="Yu Gothic"/>
+                <a:cs typeface="Yu Gothic"/>
+              </a:rPr>
+              <a:t>05</a:t>
+            </a:r>
+          </a:p>
+        </p:txBody>
+      </p:sp>
+      <p:sp>
+        <p:nvSpPr>
+          <p:cNvPr id="68" name="TextBox 67"/>
+          <p:cNvSpPr txBox="1"/>
+          <p:nvPr/>
+        </p:nvSpPr>
+        <p:spPr>
+          <a:xfrm>
+            <a:off x="1133856" y="4599432"/>
+            <a:ext cx="1938527" cy="256032"/>
+          </a:xfrm>
+          <a:prstGeom prst="rect">
+            <a:avLst/>
+          </a:prstGeom>
+          <a:noFill/>
+        </p:spPr>
+        <p:txBody>
+          <a:bodyPr wrap="none" anchor="t" lIns="0" rIns="0" tIns="0" bIns="0">
+            <a:spAutoFit/>
+          </a:bodyPr>
+          <a:lstStyle/>
+          <a:p>
+            <a:pPr algn="l">
+              <a:lnSpc>
+                <a:spcPct val="100000"/>
+              </a:lnSpc>
+            </a:pPr>
+            <a:r>
+              <a:rPr sz="1150" b="1" lang="ja-JP">
+                <a:solidFill>
+                  <a:srgbClr val="182C43"/>
+                </a:solidFill>
+                <a:latin typeface="Yu Gothic"/>
+                <a:ea typeface="Yu Gothic"/>
+                <a:cs typeface="Yu Gothic"/>
+              </a:rPr>
+              <a:t>標準化</a:t>
+            </a:r>
+          </a:p>
+        </p:txBody>
+      </p:sp>
+      <p:sp>
+        <p:nvSpPr>
+          <p:cNvPr id="69" name="TextBox 68"/>
+          <p:cNvSpPr txBox="1"/>
+          <p:nvPr/>
+        </p:nvSpPr>
+        <p:spPr>
+          <a:xfrm>
+            <a:off x="1133856" y="4818888"/>
+            <a:ext cx="1938527" cy="164592"/>
+          </a:xfrm>
+          <a:prstGeom prst="rect">
+            <a:avLst/>
+          </a:prstGeom>
+          <a:noFill/>
+        </p:spPr>
+        <p:txBody>
+          <a:bodyPr wrap="none" anchor="t" lIns="0" rIns="0" tIns="0" bIns="0">
+            <a:spAutoFit/>
+          </a:bodyPr>
+          <a:lstStyle/>
+          <a:p>
+            <a:pPr algn="l">
+              <a:lnSpc>
+                <a:spcPct val="100000"/>
+              </a:lnSpc>
+            </a:pPr>
+            <a:r>
+              <a:rPr sz="900" b="0" lang="ja-JP">
+                <a:solidFill>
+                  <a:srgbClr val="666E70"/>
+                </a:solidFill>
+                <a:latin typeface="Yu Gothic"/>
+                <a:ea typeface="Yu Gothic"/>
+                <a:cs typeface="Yu Gothic"/>
+              </a:rPr>
+              <a:t>全社手順へ組込</a:t>
+            </a:r>
+          </a:p>
+        </p:txBody>
+      </p:sp>
+      <p:cxnSp>
+        <p:nvCxnSpPr>
+          <p:cNvPr id="70" name="Connector 69"/>
+          <p:cNvCxnSpPr/>
+          <p:nvPr/>
+        </p:nvCxnSpPr>
+        <p:spPr>
+          <a:xfrm>
+            <a:off x="9466326" y="4658868"/>
+            <a:ext cx="2013966" cy="0"/>
+          </a:xfrm>
+          <a:prstGeom prst="line">
+            <a:avLst/>
+          </a:prstGeom>
+          <a:ln w="17780">
+            <a:solidFill>
+              <a:srgbClr val="0D7870"/>
+            </a:solidFill>
+          </a:ln>
+          <a:effectLst/>
+        </p:spPr>
+        <p:style>
+          <a:lnRef idx="2">
+            <a:schemeClr val="accent1"/>
+          </a:lnRef>
+          <a:fillRef idx="0">
+            <a:schemeClr val="accent1"/>
+          </a:fillRef>
+          <a:effectRef idx="1">
+            <a:schemeClr val="accent1"/>
+          </a:effectRef>
+          <a:fontRef idx="minor">
+            <a:schemeClr val="tx1"/>
+          </a:fontRef>
+        </p:style>
+      </p:cxnSp>
+      <p:sp>
+        <p:nvSpPr>
+          <p:cNvPr id="71" name="TextBox 70"/>
+          <p:cNvSpPr txBox="1"/>
+          <p:nvPr/>
+        </p:nvSpPr>
+        <p:spPr>
+          <a:xfrm>
+            <a:off x="9828657" y="4690872"/>
+            <a:ext cx="1289304" cy="246888"/>
+          </a:xfrm>
+          <a:prstGeom prst="rect">
+            <a:avLst/>
+          </a:prstGeom>
+          <a:solidFill>
+            <a:srgbClr val="FFFFFC"/>
+          </a:solidFill>
+        </p:spPr>
+        <p:txBody>
+          <a:bodyPr wrap="none" anchor="t" lIns="0" rIns="0" tIns="0" bIns="0">
+            <a:spAutoFit/>
+          </a:bodyPr>
+          <a:lstStyle/>
+          <a:p>
+            <a:pPr algn="ctr">
+              <a:lnSpc>
+                <a:spcPct val="100000"/>
+              </a:lnSpc>
+            </a:pPr>
+            <a:r>
+              <a:rPr sz="950" b="0" lang="ja-JP">
+                <a:solidFill>
+                  <a:srgbClr val="202729"/>
+                </a:solidFill>
+                <a:latin typeface="Yu Gothic"/>
+                <a:ea typeface="Yu Gothic"/>
+                <a:cs typeface="Yu Gothic"/>
+              </a:rPr>
+              <a:t>標準運用へ移行</a:t>
+            </a:r>
+          </a:p>
+        </p:txBody>
+      </p:sp>
+      <p:sp>
+        <p:nvSpPr>
+          <p:cNvPr id="72" name="Diamond 71"/>
           <p:cNvSpPr/>
           <p:nvPr/>
         </p:nvSpPr>
         <p:spPr>
           <a:xfrm>
-            <a:off x="11092434" y="4969764"/>
-            <a:ext cx="137160" cy="137160"/>
+            <a:off x="11106531" y="4910328"/>
+            <a:ext cx="118872" cy="118872"/>
           </a:xfrm>
           <a:prstGeom prst="diamond">
             <a:avLst/>
@@ -11354,14 +10804,14 @@
       </p:sp>
       <p:sp>
         <p:nvSpPr>
-          <p:cNvPr id="85" name="TextBox 84"/>
-          <p:cNvSpPr txBox="1"/>
-          <p:nvPr/>
-        </p:nvSpPr>
-        <p:spPr>
-          <a:xfrm>
-            <a:off x="10388193" y="5441045"/>
-            <a:ext cx="1124102" cy="164592"/>
+          <p:cNvPr id="73" name="TextBox 72"/>
+          <p:cNvSpPr txBox="1"/>
+          <p:nvPr/>
+        </p:nvSpPr>
+        <p:spPr>
+          <a:xfrm>
+            <a:off x="10353065" y="5033772"/>
+            <a:ext cx="1140942" cy="246888"/>
           </a:xfrm>
           <a:prstGeom prst="rect">
             <a:avLst/>
@@ -11371,7 +10821,7 @@
           </a:solidFill>
         </p:spPr>
         <p:txBody>
-          <a:bodyPr wrap="square" anchor="t" lIns="0" rIns="0" tIns="0" bIns="0">
+          <a:bodyPr wrap="none" anchor="t" lIns="0" rIns="0" tIns="0" bIns="0">
             <a:spAutoFit/>
           </a:bodyPr>
           <a:lstStyle/>
@@ -11395,9 +10845,45 @@
           </a:p>
         </p:txBody>
       </p:sp>
-      <p:sp>
-        <p:nvSpPr>
-          <p:cNvPr id="86" name="Rectangle 85"/>
+      <p:cxnSp>
+        <p:nvCxnSpPr>
+          <p:cNvPr id="74" name="Connector 73"/>
+          <p:cNvCxnSpPr/>
+          <p:nvPr/>
+        </p:nvCxnSpPr>
+        <p:spPr>
+          <a:xfrm>
+            <a:off x="658368" y="5321808"/>
+            <a:ext cx="10853928" cy="0"/>
+          </a:xfrm>
+          <a:prstGeom prst="line">
+            <a:avLst/>
+          </a:prstGeom>
+          <a:ln w="7620">
+            <a:solidFill>
+              <a:srgbClr val="D1CFC8"/>
+            </a:solidFill>
+          </a:ln>
+          <a:effectLst/>
+        </p:spPr>
+        <p:style>
+          <a:lnRef idx="2">
+            <a:schemeClr val="accent1"/>
+          </a:lnRef>
+          <a:fillRef idx="0">
+            <a:schemeClr val="accent1"/>
+          </a:fillRef>
+          <a:effectRef idx="1">
+            <a:schemeClr val="accent1"/>
+          </a:effectRef>
+          <a:fontRef idx="minor">
+            <a:schemeClr val="tx1"/>
+          </a:fontRef>
+        </p:style>
+      </p:cxnSp>
+      <p:sp>
+        <p:nvSpPr>
+          <p:cNvPr id="75" name="Rectangle 74"/>
           <p:cNvSpPr/>
           <p:nvPr/>
         </p:nvSpPr>
@@ -11441,7 +10927,7 @@
       </p:sp>
       <p:sp>
         <p:nvSpPr>
-          <p:cNvPr id="87" name="TextBox 86"/>
+          <p:cNvPr id="76" name="TextBox 75"/>
           <p:cNvSpPr txBox="1"/>
           <p:nvPr/>
         </p:nvSpPr>
@@ -11482,7 +10968,7 @@
       </p:sp>
       <p:sp>
         <p:nvSpPr>
-          <p:cNvPr id="88" name="TextBox 87"/>
+          <p:cNvPr id="77" name="TextBox 76"/>
           <p:cNvSpPr txBox="1"/>
           <p:nvPr/>
         </p:nvSpPr>
@@ -11523,7 +11009,7 @@
       </p:sp>
       <p:sp>
         <p:nvSpPr>
-          <p:cNvPr id="89" name="TextBox 88"/>
+          <p:cNvPr id="78" name="TextBox 77"/>
           <p:cNvSpPr txBox="1"/>
           <p:nvPr/>
         </p:nvSpPr>

--- a/examples/gallery/pattern_gallery.pptx
+++ b/examples/gallery/pattern_gallery.pptx
@@ -20390,8 +20390,8 @@
         </p:nvSpPr>
         <p:spPr>
           <a:xfrm>
-            <a:off x="713232" y="2366924"/>
-            <a:ext cx="566928" cy="411480"/>
+            <a:off x="731520" y="1687068"/>
+            <a:ext cx="420624" cy="411480"/>
           </a:xfrm>
           <a:prstGeom prst="rect">
             <a:avLst/>
@@ -20410,9 +20410,9 @@
               </a:lnSpc>
             </a:pPr>
             <a:r>
-              <a:rPr sz="1500" b="1" lang="ja-JP">
-                <a:solidFill>
-                  <a:srgbClr val="666E70"/>
+              <a:rPr sz="1550" b="1" lang="ja-JP">
+                <a:solidFill>
+                  <a:srgbClr val="0D7870"/>
                 </a:solidFill>
                 <a:latin typeface="Yu Gothic"/>
                 <a:ea typeface="Yu Gothic"/>
@@ -20431,8 +20431,8 @@
         </p:nvSpPr>
         <p:spPr>
           <a:xfrm>
-            <a:off x="1536192" y="2430932"/>
-            <a:ext cx="9281160" cy="352044"/>
+            <a:off x="1353312" y="1737360"/>
+            <a:ext cx="8823960" cy="383032"/>
           </a:xfrm>
           <a:prstGeom prst="rect">
             <a:avLst/>
@@ -20451,7 +20451,7 @@
               </a:lnSpc>
             </a:pPr>
             <a:r>
-              <a:rPr sz="1800" b="0" lang="ja-JP">
+              <a:rPr sz="2000" b="0" lang="ja-JP">
                 <a:solidFill>
                   <a:srgbClr val="202729"/>
                 </a:solidFill>
@@ -20472,8 +20472,8 @@
         </p:nvSpPr>
         <p:spPr>
           <a:xfrm>
-            <a:off x="1536192" y="2846984"/>
-            <a:ext cx="9281160" cy="10972"/>
+            <a:off x="1353312" y="2193544"/>
+            <a:ext cx="7094601" cy="9144"/>
           </a:xfrm>
           <a:prstGeom prst="rect">
             <a:avLst/>
@@ -20516,8 +20516,8 @@
         </p:nvSpPr>
         <p:spPr>
           <a:xfrm>
-            <a:off x="713232" y="3084728"/>
-            <a:ext cx="566928" cy="411480"/>
+            <a:off x="731520" y="2472436"/>
+            <a:ext cx="420624" cy="411480"/>
           </a:xfrm>
           <a:prstGeom prst="rect">
             <a:avLst/>
@@ -20536,9 +20536,9 @@
               </a:lnSpc>
             </a:pPr>
             <a:r>
-              <a:rPr sz="1500" b="1" lang="ja-JP">
-                <a:solidFill>
-                  <a:srgbClr val="666E70"/>
+              <a:rPr sz="1550" b="1" lang="ja-JP">
+                <a:solidFill>
+                  <a:srgbClr val="0D7870"/>
                 </a:solidFill>
                 <a:latin typeface="Yu Gothic"/>
                 <a:ea typeface="Yu Gothic"/>
@@ -20557,8 +20557,8 @@
         </p:nvSpPr>
         <p:spPr>
           <a:xfrm>
-            <a:off x="1536192" y="3148736"/>
-            <a:ext cx="9281160" cy="352044"/>
+            <a:off x="1353312" y="2522728"/>
+            <a:ext cx="8823960" cy="383032"/>
           </a:xfrm>
           <a:prstGeom prst="rect">
             <a:avLst/>
@@ -20577,7 +20577,7 @@
               </a:lnSpc>
             </a:pPr>
             <a:r>
-              <a:rPr sz="1800" b="0" lang="ja-JP">
+              <a:rPr sz="2000" b="0" lang="ja-JP">
                 <a:solidFill>
                   <a:srgbClr val="202729"/>
                 </a:solidFill>
@@ -20598,8 +20598,8 @@
         </p:nvSpPr>
         <p:spPr>
           <a:xfrm>
-            <a:off x="1536192" y="3564788"/>
-            <a:ext cx="9281160" cy="10972"/>
+            <a:off x="1353312" y="2978912"/>
+            <a:ext cx="7094601" cy="9144"/>
           </a:xfrm>
           <a:prstGeom prst="rect">
             <a:avLst/>
@@ -20642,8 +20642,8 @@
         </p:nvSpPr>
         <p:spPr>
           <a:xfrm>
-            <a:off x="713232" y="3802532"/>
-            <a:ext cx="566928" cy="411480"/>
+            <a:off x="731520" y="3257803"/>
+            <a:ext cx="420624" cy="411480"/>
           </a:xfrm>
           <a:prstGeom prst="rect">
             <a:avLst/>
@@ -20662,9 +20662,9 @@
               </a:lnSpc>
             </a:pPr>
             <a:r>
-              <a:rPr sz="1500" b="1" lang="ja-JP">
-                <a:solidFill>
-                  <a:srgbClr val="666E70"/>
+              <a:rPr sz="1550" b="1" lang="ja-JP">
+                <a:solidFill>
+                  <a:srgbClr val="0D7870"/>
                 </a:solidFill>
                 <a:latin typeface="Yu Gothic"/>
                 <a:ea typeface="Yu Gothic"/>
@@ -20683,8 +20683,8 @@
         </p:nvSpPr>
         <p:spPr>
           <a:xfrm>
-            <a:off x="1536192" y="3866540"/>
-            <a:ext cx="9281160" cy="352044"/>
+            <a:off x="1353312" y="3308096"/>
+            <a:ext cx="8823960" cy="383032"/>
           </a:xfrm>
           <a:prstGeom prst="rect">
             <a:avLst/>
@@ -20703,7 +20703,7 @@
               </a:lnSpc>
             </a:pPr>
             <a:r>
-              <a:rPr sz="1800" b="0" lang="ja-JP">
+              <a:rPr sz="2000" b="0" lang="ja-JP">
                 <a:solidFill>
                   <a:srgbClr val="202729"/>
                 </a:solidFill>
@@ -28752,8 +28752,8 @@
         </p:nvSpPr>
         <p:spPr>
           <a:xfrm>
-            <a:off x="941832" y="2364455"/>
-            <a:ext cx="100584" cy="100584"/>
+            <a:off x="950976" y="1833372"/>
+            <a:ext cx="128016" cy="128016"/>
           </a:xfrm>
           <a:prstGeom prst="ellipse">
             <a:avLst/>
@@ -28796,8 +28796,8 @@
         </p:nvSpPr>
         <p:spPr>
           <a:xfrm>
-            <a:off x="1261872" y="2273015"/>
-            <a:ext cx="9555480" cy="352044"/>
+            <a:off x="1353312" y="1737360"/>
+            <a:ext cx="8823960" cy="383032"/>
           </a:xfrm>
           <a:prstGeom prst="rect">
             <a:avLst/>
@@ -28816,7 +28816,7 @@
               </a:lnSpc>
             </a:pPr>
             <a:r>
-              <a:rPr sz="1800" b="0" lang="ja-JP">
+              <a:rPr sz="2000" b="0" lang="ja-JP">
                 <a:solidFill>
                   <a:srgbClr val="202729"/>
                 </a:solidFill>
@@ -28837,8 +28837,8 @@
         </p:nvSpPr>
         <p:spPr>
           <a:xfrm>
-            <a:off x="941832" y="3082259"/>
-            <a:ext cx="100584" cy="100584"/>
+            <a:off x="950976" y="2618740"/>
+            <a:ext cx="128016" cy="128016"/>
           </a:xfrm>
           <a:prstGeom prst="ellipse">
             <a:avLst/>
@@ -28881,8 +28881,8 @@
         </p:nvSpPr>
         <p:spPr>
           <a:xfrm>
-            <a:off x="1261872" y="2990819"/>
-            <a:ext cx="9555480" cy="352044"/>
+            <a:off x="1353312" y="2522728"/>
+            <a:ext cx="8823960" cy="383032"/>
           </a:xfrm>
           <a:prstGeom prst="rect">
             <a:avLst/>
@@ -28901,7 +28901,7 @@
               </a:lnSpc>
             </a:pPr>
             <a:r>
-              <a:rPr sz="1800" b="0" lang="ja-JP">
+              <a:rPr sz="2000" b="0" lang="ja-JP">
                 <a:solidFill>
                   <a:srgbClr val="202729"/>
                 </a:solidFill>
@@ -28922,8 +28922,8 @@
         </p:nvSpPr>
         <p:spPr>
           <a:xfrm>
-            <a:off x="941832" y="3800063"/>
-            <a:ext cx="100584" cy="100584"/>
+            <a:off x="950976" y="3404107"/>
+            <a:ext cx="128016" cy="128016"/>
           </a:xfrm>
           <a:prstGeom prst="ellipse">
             <a:avLst/>
@@ -28966,8 +28966,8 @@
         </p:nvSpPr>
         <p:spPr>
           <a:xfrm>
-            <a:off x="1261872" y="3708623"/>
-            <a:ext cx="9555480" cy="352044"/>
+            <a:off x="1353312" y="3308096"/>
+            <a:ext cx="8823960" cy="383032"/>
           </a:xfrm>
           <a:prstGeom prst="rect">
             <a:avLst/>
@@ -28986,7 +28986,7 @@
               </a:lnSpc>
             </a:pPr>
             <a:r>
-              <a:rPr sz="1800" b="0" lang="ja-JP">
+              <a:rPr sz="2000" b="0" lang="ja-JP">
                 <a:solidFill>
                   <a:srgbClr val="202729"/>
                 </a:solidFill>
@@ -29007,8 +29007,8 @@
         </p:nvSpPr>
         <p:spPr>
           <a:xfrm>
-            <a:off x="941832" y="4517867"/>
-            <a:ext cx="100584" cy="100584"/>
+            <a:off x="950976" y="4189476"/>
+            <a:ext cx="128016" cy="128016"/>
           </a:xfrm>
           <a:prstGeom prst="ellipse">
             <a:avLst/>
@@ -29051,8 +29051,8 @@
         </p:nvSpPr>
         <p:spPr>
           <a:xfrm>
-            <a:off x="1261872" y="4426427"/>
-            <a:ext cx="9555480" cy="352044"/>
+            <a:off x="1353312" y="4093464"/>
+            <a:ext cx="8823960" cy="383032"/>
           </a:xfrm>
           <a:prstGeom prst="rect">
             <a:avLst/>
@@ -29071,7 +29071,7 @@
               </a:lnSpc>
             </a:pPr>
             <a:r>
-              <a:rPr sz="1800" b="0" lang="ja-JP">
+              <a:rPr sz="2000" b="0" lang="ja-JP">
                 <a:solidFill>
                   <a:srgbClr val="202729"/>
                 </a:solidFill>
@@ -29403,8 +29403,8 @@
         </p:nvSpPr>
         <p:spPr>
           <a:xfrm>
-            <a:off x="896112" y="2314163"/>
-            <a:ext cx="201168" cy="201168"/>
+            <a:off x="905256" y="1778508"/>
+            <a:ext cx="219456" cy="219456"/>
           </a:xfrm>
           <a:prstGeom prst="rect">
             <a:avLst/>
@@ -29449,8 +29449,8 @@
         </p:nvSpPr>
         <p:spPr>
           <a:xfrm>
-            <a:off x="896112" y="2286731"/>
-            <a:ext cx="201168" cy="228600"/>
+            <a:off x="905256" y="1752904"/>
+            <a:ext cx="219456" cy="228600"/>
           </a:xfrm>
           <a:prstGeom prst="rect">
             <a:avLst/>
@@ -29469,7 +29469,7 @@
               </a:lnSpc>
             </a:pPr>
             <a:r>
-              <a:rPr sz="1150" b="1" lang="ja-JP">
+              <a:rPr sz="1200" b="1" lang="ja-JP">
                 <a:solidFill>
                   <a:srgbClr val="FFFFFC"/>
                 </a:solidFill>
@@ -29490,8 +29490,8 @@
         </p:nvSpPr>
         <p:spPr>
           <a:xfrm>
-            <a:off x="1261872" y="2273015"/>
-            <a:ext cx="9555480" cy="352044"/>
+            <a:off x="1353312" y="1737360"/>
+            <a:ext cx="8823960" cy="383032"/>
           </a:xfrm>
           <a:prstGeom prst="rect">
             <a:avLst/>
@@ -29510,9 +29510,9 @@
               </a:lnSpc>
             </a:pPr>
             <a:r>
-              <a:rPr sz="1800" b="0" lang="ja-JP">
-                <a:solidFill>
-                  <a:srgbClr val="666E70"/>
+              <a:rPr sz="2000" b="0" lang="ja-JP">
+                <a:solidFill>
+                  <a:srgbClr val="566062"/>
                 </a:solidFill>
                 <a:latin typeface="Yu Gothic"/>
                 <a:ea typeface="Yu Gothic"/>
@@ -29531,8 +29531,8 @@
         </p:nvSpPr>
         <p:spPr>
           <a:xfrm>
-            <a:off x="896112" y="3031967"/>
-            <a:ext cx="201168" cy="201168"/>
+            <a:off x="905256" y="2563876"/>
+            <a:ext cx="219456" cy="219456"/>
           </a:xfrm>
           <a:prstGeom prst="rect">
             <a:avLst/>
@@ -29577,8 +29577,8 @@
         </p:nvSpPr>
         <p:spPr>
           <a:xfrm>
-            <a:off x="896112" y="3004535"/>
-            <a:ext cx="201168" cy="228600"/>
+            <a:off x="905256" y="2538272"/>
+            <a:ext cx="219456" cy="228600"/>
           </a:xfrm>
           <a:prstGeom prst="rect">
             <a:avLst/>
@@ -29597,7 +29597,7 @@
               </a:lnSpc>
             </a:pPr>
             <a:r>
-              <a:rPr sz="1150" b="1" lang="ja-JP">
+              <a:rPr sz="1200" b="1" lang="ja-JP">
                 <a:solidFill>
                   <a:srgbClr val="FFFFFC"/>
                 </a:solidFill>
@@ -29618,8 +29618,8 @@
         </p:nvSpPr>
         <p:spPr>
           <a:xfrm>
-            <a:off x="1261872" y="2990819"/>
-            <a:ext cx="9555480" cy="352044"/>
+            <a:off x="1353312" y="2522728"/>
+            <a:ext cx="8823960" cy="383032"/>
           </a:xfrm>
           <a:prstGeom prst="rect">
             <a:avLst/>
@@ -29638,9 +29638,9 @@
               </a:lnSpc>
             </a:pPr>
             <a:r>
-              <a:rPr sz="1800" b="0" lang="ja-JP">
-                <a:solidFill>
-                  <a:srgbClr val="666E70"/>
+              <a:rPr sz="2000" b="0" lang="ja-JP">
+                <a:solidFill>
+                  <a:srgbClr val="566062"/>
                 </a:solidFill>
                 <a:latin typeface="Yu Gothic"/>
                 <a:ea typeface="Yu Gothic"/>
@@ -29659,8 +29659,8 @@
         </p:nvSpPr>
         <p:spPr>
           <a:xfrm>
-            <a:off x="896112" y="3749771"/>
-            <a:ext cx="201168" cy="201168"/>
+            <a:off x="905256" y="3349243"/>
+            <a:ext cx="219456" cy="219456"/>
           </a:xfrm>
           <a:prstGeom prst="rect">
             <a:avLst/>
@@ -29705,8 +29705,8 @@
         </p:nvSpPr>
         <p:spPr>
           <a:xfrm>
-            <a:off x="1261872" y="3708623"/>
-            <a:ext cx="9555480" cy="352044"/>
+            <a:off x="1353312" y="3308096"/>
+            <a:ext cx="8823960" cy="383032"/>
           </a:xfrm>
           <a:prstGeom prst="rect">
             <a:avLst/>
@@ -29725,7 +29725,7 @@
               </a:lnSpc>
             </a:pPr>
             <a:r>
-              <a:rPr sz="1800" b="0" lang="ja-JP">
+              <a:rPr sz="2000" b="0" lang="ja-JP">
                 <a:solidFill>
                   <a:srgbClr val="202729"/>
                 </a:solidFill>
@@ -29746,8 +29746,8 @@
         </p:nvSpPr>
         <p:spPr>
           <a:xfrm>
-            <a:off x="896112" y="4467575"/>
-            <a:ext cx="201168" cy="201168"/>
+            <a:off x="905256" y="4134612"/>
+            <a:ext cx="219456" cy="219456"/>
           </a:xfrm>
           <a:prstGeom prst="rect">
             <a:avLst/>
@@ -29792,8 +29792,8 @@
         </p:nvSpPr>
         <p:spPr>
           <a:xfrm>
-            <a:off x="1261872" y="4426427"/>
-            <a:ext cx="9555480" cy="352044"/>
+            <a:off x="1353312" y="4093464"/>
+            <a:ext cx="8823960" cy="383032"/>
           </a:xfrm>
           <a:prstGeom prst="rect">
             <a:avLst/>
@@ -29812,7 +29812,7 @@
               </a:lnSpc>
             </a:pPr>
             <a:r>
-              <a:rPr sz="1800" b="0" lang="ja-JP">
+              <a:rPr sz="2000" b="0" lang="ja-JP">
                 <a:solidFill>
                   <a:srgbClr val="202729"/>
                 </a:solidFill>

--- a/examples/gallery/pattern_gallery.pptx
+++ b/examples/gallery/pattern_gallery.pptx
@@ -20390,8 +20390,8 @@
         </p:nvSpPr>
         <p:spPr>
           <a:xfrm>
-            <a:off x="731520" y="1687068"/>
-            <a:ext cx="420624" cy="411480"/>
+            <a:off x="731520" y="1769533"/>
+            <a:ext cx="420624" cy="274320"/>
           </a:xfrm>
           <a:prstGeom prst="rect">
             <a:avLst/>
@@ -20399,7 +20399,7 @@
           <a:noFill/>
         </p:spPr>
         <p:txBody>
-          <a:bodyPr wrap="square" anchor="t" lIns="0" rIns="0" tIns="0" bIns="0">
+          <a:bodyPr wrap="square" anchor="ctr" lIns="0" rIns="0" tIns="0" bIns="0">
             <a:spAutoFit/>
           </a:bodyPr>
           <a:lstStyle/>
@@ -20516,8 +20516,8 @@
         </p:nvSpPr>
         <p:spPr>
           <a:xfrm>
-            <a:off x="731520" y="2472436"/>
-            <a:ext cx="420624" cy="411480"/>
+            <a:off x="731520" y="2554901"/>
+            <a:ext cx="420624" cy="274320"/>
           </a:xfrm>
           <a:prstGeom prst="rect">
             <a:avLst/>
@@ -20525,7 +20525,7 @@
           <a:noFill/>
         </p:spPr>
         <p:txBody>
-          <a:bodyPr wrap="square" anchor="t" lIns="0" rIns="0" tIns="0" bIns="0">
+          <a:bodyPr wrap="square" anchor="ctr" lIns="0" rIns="0" tIns="0" bIns="0">
             <a:spAutoFit/>
           </a:bodyPr>
           <a:lstStyle/>
@@ -20642,8 +20642,8 @@
         </p:nvSpPr>
         <p:spPr>
           <a:xfrm>
-            <a:off x="731520" y="3257803"/>
-            <a:ext cx="420624" cy="411480"/>
+            <a:off x="731520" y="3340269"/>
+            <a:ext cx="420624" cy="274320"/>
           </a:xfrm>
           <a:prstGeom prst="rect">
             <a:avLst/>
@@ -20651,7 +20651,7 @@
           <a:noFill/>
         </p:spPr>
         <p:txBody>
-          <a:bodyPr wrap="square" anchor="t" lIns="0" rIns="0" tIns="0" bIns="0">
+          <a:bodyPr wrap="square" anchor="ctr" lIns="0" rIns="0" tIns="0" bIns="0">
             <a:spAutoFit/>
           </a:bodyPr>
           <a:lstStyle/>
@@ -28752,7 +28752,7 @@
         </p:nvSpPr>
         <p:spPr>
           <a:xfrm>
-            <a:off x="950976" y="1833372"/>
+            <a:off x="950976" y="1853658"/>
             <a:ext cx="128016" cy="128016"/>
           </a:xfrm>
           <a:prstGeom prst="ellipse">
@@ -28837,7 +28837,7 @@
         </p:nvSpPr>
         <p:spPr>
           <a:xfrm>
-            <a:off x="950976" y="2618740"/>
+            <a:off x="950976" y="2639026"/>
             <a:ext cx="128016" cy="128016"/>
           </a:xfrm>
           <a:prstGeom prst="ellipse">
@@ -28922,7 +28922,7 @@
         </p:nvSpPr>
         <p:spPr>
           <a:xfrm>
-            <a:off x="950976" y="3404107"/>
+            <a:off x="950976" y="3424394"/>
             <a:ext cx="128016" cy="128016"/>
           </a:xfrm>
           <a:prstGeom prst="ellipse">
@@ -29007,7 +29007,7 @@
         </p:nvSpPr>
         <p:spPr>
           <a:xfrm>
-            <a:off x="950976" y="4189476"/>
+            <a:off x="950976" y="4209762"/>
             <a:ext cx="128016" cy="128016"/>
           </a:xfrm>
           <a:prstGeom prst="ellipse">
@@ -29403,7 +29403,7 @@
         </p:nvSpPr>
         <p:spPr>
           <a:xfrm>
-            <a:off x="905256" y="1778508"/>
+            <a:off x="905256" y="1807938"/>
             <a:ext cx="219456" cy="219456"/>
           </a:xfrm>
           <a:prstGeom prst="rect">
@@ -29449,7 +29449,7 @@
         </p:nvSpPr>
         <p:spPr>
           <a:xfrm>
-            <a:off x="905256" y="1752904"/>
+            <a:off x="905256" y="1782334"/>
             <a:ext cx="219456" cy="228600"/>
           </a:xfrm>
           <a:prstGeom prst="rect">
@@ -29531,7 +29531,7 @@
         </p:nvSpPr>
         <p:spPr>
           <a:xfrm>
-            <a:off x="905256" y="2563876"/>
+            <a:off x="905256" y="2593306"/>
             <a:ext cx="219456" cy="219456"/>
           </a:xfrm>
           <a:prstGeom prst="rect">
@@ -29577,7 +29577,7 @@
         </p:nvSpPr>
         <p:spPr>
           <a:xfrm>
-            <a:off x="905256" y="2538272"/>
+            <a:off x="905256" y="2567702"/>
             <a:ext cx="219456" cy="228600"/>
           </a:xfrm>
           <a:prstGeom prst="rect">
@@ -29659,7 +29659,7 @@
         </p:nvSpPr>
         <p:spPr>
           <a:xfrm>
-            <a:off x="905256" y="3349243"/>
+            <a:off x="905256" y="3378674"/>
             <a:ext cx="219456" cy="219456"/>
           </a:xfrm>
           <a:prstGeom prst="rect">
@@ -29746,7 +29746,7 @@
         </p:nvSpPr>
         <p:spPr>
           <a:xfrm>
-            <a:off x="905256" y="4134612"/>
+            <a:off x="905256" y="4164042"/>
             <a:ext cx="219456" cy="219456"/>
           </a:xfrm>
           <a:prstGeom prst="rect">

--- a/examples/gallery/pattern_gallery.pptx
+++ b/examples/gallery/pattern_gallery.pptx
@@ -17395,7 +17395,7 @@
                 <a:ea typeface="Yu Gothic"/>
                 <a:cs typeface="Yu Gothic"/>
               </a:rPr>
-              <a:t>関係者調整</a:t>
+              <a:t>集約窓口</a:t>
             </a:r>
           </a:p>
         </p:txBody>
@@ -17436,7 +17436,7 @@
                 <a:ea typeface="Yu Gothic"/>
                 <a:cs typeface="Yu Gothic"/>
               </a:rPr>
-              <a:t>運用事務局を中心に、5部門の役割をつなぐ</a:t>
+              <a:t>インシデント統括窓口へ、5部門の情報と判断を集約する</a:t>
             </a:r>
           </a:p>
         </p:txBody>
@@ -17639,8 +17639,8 @@
         </p:nvSpPr>
         <p:spPr>
           <a:xfrm>
-            <a:off x="5785866" y="3160908"/>
-            <a:ext cx="626364" cy="176276"/>
+            <a:off x="5713857" y="3160908"/>
+            <a:ext cx="770382" cy="176276"/>
           </a:xfrm>
           <a:prstGeom prst="rect">
             <a:avLst/>
@@ -17669,7 +17669,7 @@
                 <a:ea typeface="Yu Gothic"/>
                 <a:cs typeface="Yu Gothic"/>
               </a:rPr>
-              <a:t>効果報告</a:t>
+              <a:t>報告 / 判断</a:t>
             </a:r>
           </a:p>
         </p:txBody>
@@ -17712,7 +17712,7 @@
                 <a:ea typeface="Yu Gothic"/>
                 <a:cs typeface="Yu Gothic"/>
               </a:rPr>
-              <a:t>権限 / 監査</a:t>
+              <a:t>状況 / 復旧</a:t>
             </a:r>
           </a:p>
         </p:txBody>
@@ -17725,8 +17725,8 @@
         </p:nvSpPr>
         <p:spPr>
           <a:xfrm>
-            <a:off x="7040928" y="4455022"/>
-            <a:ext cx="770382" cy="176276"/>
+            <a:off x="6974063" y="4455022"/>
+            <a:ext cx="904113" cy="176276"/>
           </a:xfrm>
           <a:prstGeom prst="rect">
             <a:avLst/>
@@ -17755,7 +17755,7 @@
                 <a:ea typeface="Yu Gothic"/>
                 <a:cs typeface="Yu Gothic"/>
               </a:rPr>
-              <a:t>要件 / 評価</a:t>
+              <a:t>影響 / 優先度</a:t>
             </a:r>
           </a:p>
         </p:txBody>
@@ -17768,8 +17768,8 @@
         </p:nvSpPr>
         <p:spPr>
           <a:xfrm>
-            <a:off x="4391928" y="4455022"/>
-            <a:ext cx="760095" cy="176276"/>
+            <a:off x="4386785" y="4455022"/>
+            <a:ext cx="770382" cy="176276"/>
           </a:xfrm>
           <a:prstGeom prst="rect">
             <a:avLst/>
@@ -17798,7 +17798,7 @@
                 <a:ea typeface="Yu Gothic"/>
                 <a:cs typeface="Yu Gothic"/>
               </a:rPr>
-              <a:t>利用ルール</a:t>
+              <a:t>判定 / 指示</a:t>
             </a:r>
           </a:p>
         </p:txBody>
@@ -17811,8 +17811,8 @@
         </p:nvSpPr>
         <p:spPr>
           <a:xfrm>
-            <a:off x="3625284" y="3501262"/>
-            <a:ext cx="626364" cy="176276"/>
+            <a:off x="3553275" y="3501262"/>
+            <a:ext cx="770382" cy="176276"/>
           </a:xfrm>
           <a:prstGeom prst="rect">
             <a:avLst/>
@@ -17841,7 +17841,7 @@
                 <a:ea typeface="Yu Gothic"/>
                 <a:cs typeface="Yu Gothic"/>
               </a:rPr>
-              <a:t>表現基準</a:t>
+              <a:t>公表 / 承認</a:t>
             </a:r>
           </a:p>
         </p:txBody>
@@ -17951,7 +17951,7 @@
                 <a:ea typeface="Yu Gothic"/>
                 <a:cs typeface="Yu Gothic"/>
               </a:rPr>
-              <a:t>方針承認</a:t>
+              <a:t>重要判断</a:t>
             </a:r>
           </a:p>
         </p:txBody>
@@ -17988,8 +17988,8 @@
         </p:nvSpPr>
         <p:spPr>
           <a:xfrm>
-            <a:off x="9555999" y="3706511"/>
-            <a:ext cx="1017270" cy="190246"/>
+            <a:off x="9633151" y="3706511"/>
+            <a:ext cx="862965" cy="190246"/>
           </a:xfrm>
           <a:prstGeom prst="rect">
             <a:avLst/>
@@ -18018,7 +18018,7 @@
                 <a:ea typeface="Yu Gothic"/>
                 <a:cs typeface="Yu Gothic"/>
               </a:rPr>
-              <a:t>情報システム</a:t>
+              <a:t>運用チーム</a:t>
             </a:r>
           </a:p>
         </p:txBody>
@@ -18061,7 +18061,7 @@
                 <a:ea typeface="Yu Gothic"/>
                 <a:cs typeface="Yu Gothic"/>
               </a:rPr>
-              <a:t>環境管理</a:t>
+              <a:t>復旧対応</a:t>
             </a:r>
           </a:p>
         </p:txBody>
@@ -18128,7 +18128,7 @@
                 <a:ea typeface="Yu Gothic"/>
                 <a:cs typeface="Yu Gothic"/>
               </a:rPr>
-              <a:t>現場部門</a:t>
+              <a:t>利用部門</a:t>
             </a:r>
           </a:p>
         </p:txBody>
@@ -18141,8 +18141,8 @@
         </p:nvSpPr>
         <p:spPr>
           <a:xfrm>
-            <a:off x="8319029" y="4625958"/>
-            <a:ext cx="461772" cy="162306"/>
+            <a:off x="8257307" y="4625958"/>
+            <a:ext cx="585216" cy="162306"/>
           </a:xfrm>
           <a:prstGeom prst="rect">
             <a:avLst/>
@@ -18171,7 +18171,7 @@
                 <a:ea typeface="Yu Gothic"/>
                 <a:cs typeface="Yu Gothic"/>
               </a:rPr>
-              <a:t>利用者</a:t>
+              <a:t>影響確認</a:t>
             </a:r>
           </a:p>
         </p:txBody>
@@ -18208,8 +18208,8 @@
         </p:nvSpPr>
         <p:spPr>
           <a:xfrm>
-            <a:off x="3448155" y="4360274"/>
-            <a:ext cx="400050" cy="190246"/>
+            <a:off x="3139545" y="4360274"/>
+            <a:ext cx="1017270" cy="190246"/>
           </a:xfrm>
           <a:prstGeom prst="rect">
             <a:avLst/>
@@ -18238,7 +18238,7 @@
                 <a:ea typeface="Yu Gothic"/>
                 <a:cs typeface="Yu Gothic"/>
               </a:rPr>
-              <a:t>法務</a:t>
+              <a:t>セキュリティ</a:t>
             </a:r>
           </a:p>
         </p:txBody>
@@ -18251,8 +18251,8 @@
         </p:nvSpPr>
         <p:spPr>
           <a:xfrm>
-            <a:off x="3355572" y="4625958"/>
-            <a:ext cx="585216" cy="162306"/>
+            <a:off x="3293850" y="4625958"/>
+            <a:ext cx="708660" cy="162306"/>
           </a:xfrm>
           <a:prstGeom prst="rect">
             <a:avLst/>
@@ -18281,7 +18281,7 @@
                 <a:ea typeface="Yu Gothic"/>
                 <a:cs typeface="Yu Gothic"/>
               </a:rPr>
-              <a:t>規程確認</a:t>
+              <a:t>重大度判定</a:t>
             </a:r>
           </a:p>
         </p:txBody>
@@ -18391,7 +18391,7 @@
                 <a:ea typeface="Yu Gothic"/>
                 <a:cs typeface="Yu Gothic"/>
               </a:rPr>
-              <a:t>ブランド</a:t>
+              <a:t>対外連絡</a:t>
             </a:r>
           </a:p>
         </p:txBody>
@@ -18476,7 +18476,7 @@
                 <a:ea typeface="Yu Gothic"/>
                 <a:cs typeface="Yu Gothic"/>
               </a:rPr>
-              <a:t>テンプレート</a:t>
+              <a:t>インシデント</a:t>
             </a:r>
           </a:p>
           <a:p>
@@ -18494,7 +18494,7 @@
                 <a:ea typeface="Yu Gothic"/>
                 <a:cs typeface="Yu Gothic"/>
               </a:rPr>
-              <a:t>運用事務局</a:t>
+              <a:t>統括窓口</a:t>
             </a:r>
           </a:p>
         </p:txBody>
@@ -20724,8 +20724,8 @@
         </p:nvSpPr>
         <p:spPr>
           <a:xfrm>
-            <a:off x="658368" y="6327648"/>
-            <a:ext cx="10881360" cy="9144"/>
+            <a:off x="1353312" y="3764279"/>
+            <a:ext cx="7094601" cy="9144"/>
           </a:xfrm>
           <a:prstGeom prst="rect">
             <a:avLst/>
@@ -20762,7 +20762,51 @@
       </p:sp>
       <p:sp>
         <p:nvSpPr>
-          <p:cNvPr id="14" name="TextBox 13"/>
+          <p:cNvPr id="14" name="Rectangle 13"/>
+          <p:cNvSpPr/>
+          <p:nvPr/>
+        </p:nvSpPr>
+        <p:spPr>
+          <a:xfrm>
+            <a:off x="658368" y="6327648"/>
+            <a:ext cx="10881360" cy="9144"/>
+          </a:xfrm>
+          <a:prstGeom prst="rect">
+            <a:avLst/>
+          </a:prstGeom>
+          <a:solidFill>
+            <a:srgbClr val="D1CFC8"/>
+          </a:solidFill>
+          <a:ln>
+            <a:noFill/>
+          </a:ln>
+          <a:effectLst/>
+        </p:spPr>
+        <p:style>
+          <a:lnRef idx="1">
+            <a:schemeClr val="accent1"/>
+          </a:lnRef>
+          <a:fillRef idx="3">
+            <a:schemeClr val="accent1"/>
+          </a:fillRef>
+          <a:effectRef idx="2">
+            <a:schemeClr val="accent1"/>
+          </a:effectRef>
+          <a:fontRef idx="minor">
+            <a:schemeClr val="lt1"/>
+          </a:fontRef>
+        </p:style>
+        <p:txBody>
+          <a:bodyPr rtlCol="0" anchor="ctr"/>
+          <a:lstStyle/>
+          <a:p>
+            <a:pPr algn="ctr"/>
+          </a:p>
+        </p:txBody>
+      </p:sp>
+      <p:sp>
+        <p:nvSpPr>
+          <p:cNvPr id="15" name="TextBox 14"/>
           <p:cNvSpPr txBox="1"/>
           <p:nvPr/>
         </p:nvSpPr>
@@ -20803,7 +20847,7 @@
       </p:sp>
       <p:sp>
         <p:nvSpPr>
-          <p:cNvPr id="15" name="TextBox 14"/>
+          <p:cNvPr id="16" name="TextBox 15"/>
           <p:cNvSpPr txBox="1"/>
           <p:nvPr/>
         </p:nvSpPr>
@@ -20844,7 +20888,7 @@
       </p:sp>
       <p:sp>
         <p:nvSpPr>
-          <p:cNvPr id="16" name="TextBox 15"/>
+          <p:cNvPr id="17" name="TextBox 16"/>
           <p:cNvSpPr txBox="1"/>
           <p:nvPr/>
         </p:nvSpPr>
@@ -30090,7 +30134,7 @@
                 <a:ea typeface="Yu Gothic"/>
                 <a:cs typeface="Yu Gothic"/>
               </a:rPr>
-              <a:t>要点整理</a:t>
+              <a:t>結論と根拠</a:t>
             </a:r>
           </a:p>
         </p:txBody>
@@ -30131,7 +30175,7 @@
                 <a:ea typeface="Yu Gothic"/>
                 <a:cs typeface="Yu Gothic"/>
               </a:rPr>
-              <a:t>判断に必要な4つの要点を、読み順に沿って整理する</a:t>
+              <a:t>全社展開の推奨案と、効果・実現性・導入リスクを示す</a:t>
             </a:r>
           </a:p>
         </p:txBody>
@@ -30213,7 +30257,7 @@
                 <a:ea typeface="Yu Gothic"/>
                 <a:cs typeface="Yu Gothic"/>
               </a:rPr>
-              <a:t>目的</a:t>
+              <a:t>推奨案</a:t>
             </a:r>
           </a:p>
         </p:txBody>
@@ -30254,7 +30298,7 @@
                 <a:ea typeface="Yu Gothic"/>
                 <a:cs typeface="Yu Gothic"/>
               </a:rPr>
-              <a:t>何を判断してほしいかを1文で示し、</a:t>
+              <a:t>標準テンプレートを対象部門へ</a:t>
             </a:r>
           </a:p>
           <a:p>
@@ -30272,7 +30316,7 @@
                 <a:ea typeface="Yu Gothic"/>
                 <a:cs typeface="Yu Gothic"/>
               </a:rPr>
-              <a:t>読み手の視点を揃える。</a:t>
+              <a:t>段階展開する。</a:t>
             </a:r>
           </a:p>
         </p:txBody>
@@ -30354,7 +30398,7 @@
                 <a:ea typeface="Yu Gothic"/>
                 <a:cs typeface="Yu Gothic"/>
               </a:rPr>
-              <a:t>現状</a:t>
+              <a:t>期待効果</a:t>
             </a:r>
           </a:p>
         </p:txBody>
@@ -30395,7 +30439,7 @@
                 <a:ea typeface="Yu Gothic"/>
                 <a:cs typeface="Yu Gothic"/>
               </a:rPr>
-              <a:t>事実・制約・既に分かっていることを短く置く。</a:t>
+              <a:t>作成とレビューの手戻りを減らし、提出品質を揃える。</a:t>
             </a:r>
           </a:p>
         </p:txBody>
@@ -30521,7 +30565,7 @@
                 <a:ea typeface="Yu Gothic"/>
                 <a:cs typeface="Yu Gothic"/>
               </a:rPr>
-              <a:t>示唆</a:t>
+              <a:t>実現性</a:t>
             </a:r>
           </a:p>
         </p:txBody>
@@ -30562,7 +30606,7 @@
                 <a:ea typeface="Yu Gothic"/>
                 <a:cs typeface="Yu Gothic"/>
               </a:rPr>
-              <a:t>現状から言えることを、推測と事実を分けて整理する。</a:t>
+              <a:t>既存フローを流用し、部門ごとに順次導入できる。</a:t>
             </a:r>
           </a:p>
         </p:txBody>
@@ -30688,7 +30732,7 @@
                 <a:ea typeface="Yu Gothic"/>
                 <a:cs typeface="Yu Gothic"/>
               </a:rPr>
-              <a:t>次アクション</a:t>
+              <a:t>導入リスク</a:t>
             </a:r>
           </a:p>
         </p:txBody>
@@ -30729,7 +30773,7 @@
                 <a:ea typeface="Yu Gothic"/>
                 <a:cs typeface="Yu Gothic"/>
               </a:rPr>
-              <a:t>誰が・いつまでに・何をするかを明確にする。</a:t>
+              <a:t>初期教育と運用窓口を用意し、例外資料は個別対応とする。</a:t>
             </a:r>
           </a:p>
         </p:txBody>

--- a/examples/gallery/pattern_gallery.pptx
+++ b/examples/gallery/pattern_gallery.pptx
@@ -4679,7 +4679,7 @@
         <p:spPr>
           <a:xfrm>
             <a:off x="10405872" y="6382512"/>
-            <a:ext cx="585216" cy="256032"/>
+            <a:ext cx="1133856" cy="256032"/>
           </a:xfrm>
           <a:prstGeom prst="rect">
             <a:avLst/>
@@ -4687,7 +4687,7 @@
           <a:noFill/>
         </p:spPr>
         <p:txBody>
-          <a:bodyPr wrap="square" anchor="t" lIns="0" rIns="0" tIns="0" bIns="0">
+          <a:bodyPr wrap="none" anchor="ctr" lIns="0" rIns="0" tIns="0" bIns="0">
             <a:spAutoFit/>
           </a:bodyPr>
           <a:lstStyle/>
@@ -4708,36 +4708,6 @@
               </a:rPr>
               <a:t>10</a:t>
             </a:r>
-          </a:p>
-        </p:txBody>
-      </p:sp>
-      <p:sp>
-        <p:nvSpPr>
-          <p:cNvPr id="10" name="TextBox 9"/>
-          <p:cNvSpPr txBox="1"/>
-          <p:nvPr/>
-        </p:nvSpPr>
-        <p:spPr>
-          <a:xfrm>
-            <a:off x="11009376" y="6391656"/>
-            <a:ext cx="530352" cy="237744"/>
-          </a:xfrm>
-          <a:prstGeom prst="rect">
-            <a:avLst/>
-          </a:prstGeom>
-          <a:noFill/>
-        </p:spPr>
-        <p:txBody>
-          <a:bodyPr wrap="square" anchor="t" lIns="0" rIns="0" tIns="0" bIns="0">
-            <a:spAutoFit/>
-          </a:bodyPr>
-          <a:lstStyle/>
-          <a:p>
-            <a:pPr algn="r">
-              <a:lnSpc>
-                <a:spcPct val="130000"/>
-              </a:lnSpc>
-            </a:pPr>
             <a:r>
               <a:rPr sz="819" b="0" lang="ja-JP">
                 <a:solidFill>
@@ -4747,7 +4717,7 @@
                 <a:ea typeface="Yu Gothic"/>
                 <a:cs typeface="Yu Gothic"/>
               </a:rPr>
-              <a:t>/ 22</a:t>
+              <a:t> / 22</a:t>
             </a:r>
           </a:p>
         </p:txBody>
@@ -5049,7 +5019,7 @@
         <p:spPr>
           <a:xfrm>
             <a:off x="10405872" y="6382512"/>
-            <a:ext cx="585216" cy="256032"/>
+            <a:ext cx="1133856" cy="256032"/>
           </a:xfrm>
           <a:prstGeom prst="rect">
             <a:avLst/>
@@ -5057,7 +5027,7 @@
           <a:noFill/>
         </p:spPr>
         <p:txBody>
-          <a:bodyPr wrap="square" anchor="t" lIns="0" rIns="0" tIns="0" bIns="0">
+          <a:bodyPr wrap="none" anchor="ctr" lIns="0" rIns="0" tIns="0" bIns="0">
             <a:spAutoFit/>
           </a:bodyPr>
           <a:lstStyle/>
@@ -5078,36 +5048,6 @@
               </a:rPr>
               <a:t>11</a:t>
             </a:r>
-          </a:p>
-        </p:txBody>
-      </p:sp>
-      <p:sp>
-        <p:nvSpPr>
-          <p:cNvPr id="10" name="TextBox 9"/>
-          <p:cNvSpPr txBox="1"/>
-          <p:nvPr/>
-        </p:nvSpPr>
-        <p:spPr>
-          <a:xfrm>
-            <a:off x="11009376" y="6391656"/>
-            <a:ext cx="530352" cy="237744"/>
-          </a:xfrm>
-          <a:prstGeom prst="rect">
-            <a:avLst/>
-          </a:prstGeom>
-          <a:noFill/>
-        </p:spPr>
-        <p:txBody>
-          <a:bodyPr wrap="square" anchor="t" lIns="0" rIns="0" tIns="0" bIns="0">
-            <a:spAutoFit/>
-          </a:bodyPr>
-          <a:lstStyle/>
-          <a:p>
-            <a:pPr algn="r">
-              <a:lnSpc>
-                <a:spcPct val="130000"/>
-              </a:lnSpc>
-            </a:pPr>
             <a:r>
               <a:rPr sz="819" b="0" lang="ja-JP">
                 <a:solidFill>
@@ -5117,7 +5057,7 @@
                 <a:ea typeface="Yu Gothic"/>
                 <a:cs typeface="Yu Gothic"/>
               </a:rPr>
-              <a:t>/ 22</a:t>
+              <a:t> / 22</a:t>
             </a:r>
           </a:p>
         </p:txBody>
@@ -5392,7 +5332,7 @@
         <p:spPr>
           <a:xfrm>
             <a:off x="10405872" y="6382512"/>
-            <a:ext cx="585216" cy="256032"/>
+            <a:ext cx="1133856" cy="256032"/>
           </a:xfrm>
           <a:prstGeom prst="rect">
             <a:avLst/>
@@ -5400,7 +5340,7 @@
           <a:noFill/>
         </p:spPr>
         <p:txBody>
-          <a:bodyPr wrap="square" anchor="t" lIns="0" rIns="0" tIns="0" bIns="0">
+          <a:bodyPr wrap="none" anchor="ctr" lIns="0" rIns="0" tIns="0" bIns="0">
             <a:spAutoFit/>
           </a:bodyPr>
           <a:lstStyle/>
@@ -5421,36 +5361,6 @@
               </a:rPr>
               <a:t>12</a:t>
             </a:r>
-          </a:p>
-        </p:txBody>
-      </p:sp>
-      <p:sp>
-        <p:nvSpPr>
-          <p:cNvPr id="9" name="TextBox 8"/>
-          <p:cNvSpPr txBox="1"/>
-          <p:nvPr/>
-        </p:nvSpPr>
-        <p:spPr>
-          <a:xfrm>
-            <a:off x="11009376" y="6391656"/>
-            <a:ext cx="530352" cy="237744"/>
-          </a:xfrm>
-          <a:prstGeom prst="rect">
-            <a:avLst/>
-          </a:prstGeom>
-          <a:noFill/>
-        </p:spPr>
-        <p:txBody>
-          <a:bodyPr wrap="square" anchor="t" lIns="0" rIns="0" tIns="0" bIns="0">
-            <a:spAutoFit/>
-          </a:bodyPr>
-          <a:lstStyle/>
-          <a:p>
-            <a:pPr algn="r">
-              <a:lnSpc>
-                <a:spcPct val="130000"/>
-              </a:lnSpc>
-            </a:pPr>
             <a:r>
               <a:rPr sz="819" b="0" lang="ja-JP">
                 <a:solidFill>
@@ -5460,7 +5370,7 @@
                 <a:ea typeface="Yu Gothic"/>
                 <a:cs typeface="Yu Gothic"/>
               </a:rPr>
-              <a:t>/ 22</a:t>
+              <a:t> / 22</a:t>
             </a:r>
           </a:p>
         </p:txBody>
@@ -6992,7 +6902,7 @@
         <p:spPr>
           <a:xfrm>
             <a:off x="10405872" y="6382512"/>
-            <a:ext cx="585216" cy="256032"/>
+            <a:ext cx="1133856" cy="256032"/>
           </a:xfrm>
           <a:prstGeom prst="rect">
             <a:avLst/>
@@ -7000,7 +6910,7 @@
           <a:noFill/>
         </p:spPr>
         <p:txBody>
-          <a:bodyPr wrap="square" anchor="t" lIns="0" rIns="0" tIns="0" bIns="0">
+          <a:bodyPr wrap="none" anchor="ctr" lIns="0" rIns="0" tIns="0" bIns="0">
             <a:spAutoFit/>
           </a:bodyPr>
           <a:lstStyle/>
@@ -7021,36 +6931,6 @@
               </a:rPr>
               <a:t>13</a:t>
             </a:r>
-          </a:p>
-        </p:txBody>
-      </p:sp>
-      <p:sp>
-        <p:nvSpPr>
-          <p:cNvPr id="39" name="TextBox 38"/>
-          <p:cNvSpPr txBox="1"/>
-          <p:nvPr/>
-        </p:nvSpPr>
-        <p:spPr>
-          <a:xfrm>
-            <a:off x="11009376" y="6391656"/>
-            <a:ext cx="530352" cy="237744"/>
-          </a:xfrm>
-          <a:prstGeom prst="rect">
-            <a:avLst/>
-          </a:prstGeom>
-          <a:noFill/>
-        </p:spPr>
-        <p:txBody>
-          <a:bodyPr wrap="square" anchor="t" lIns="0" rIns="0" tIns="0" bIns="0">
-            <a:spAutoFit/>
-          </a:bodyPr>
-          <a:lstStyle/>
-          <a:p>
-            <a:pPr algn="r">
-              <a:lnSpc>
-                <a:spcPct val="130000"/>
-              </a:lnSpc>
-            </a:pPr>
             <a:r>
               <a:rPr sz="819" b="0" lang="ja-JP">
                 <a:solidFill>
@@ -7060,7 +6940,7 @@
                 <a:ea typeface="Yu Gothic"/>
                 <a:cs typeface="Yu Gothic"/>
               </a:rPr>
-              <a:t>/ 22</a:t>
+              <a:t> / 22</a:t>
             </a:r>
           </a:p>
         </p:txBody>
@@ -8609,7 +8489,7 @@
         <p:spPr>
           <a:xfrm>
             <a:off x="10405872" y="6382512"/>
-            <a:ext cx="585216" cy="256032"/>
+            <a:ext cx="1133856" cy="256032"/>
           </a:xfrm>
           <a:prstGeom prst="rect">
             <a:avLst/>
@@ -8617,7 +8497,7 @@
           <a:noFill/>
         </p:spPr>
         <p:txBody>
-          <a:bodyPr wrap="square" anchor="t" lIns="0" rIns="0" tIns="0" bIns="0">
+          <a:bodyPr wrap="none" anchor="ctr" lIns="0" rIns="0" tIns="0" bIns="0">
             <a:spAutoFit/>
           </a:bodyPr>
           <a:lstStyle/>
@@ -8638,36 +8518,6 @@
               </a:rPr>
               <a:t>14</a:t>
             </a:r>
-          </a:p>
-        </p:txBody>
-      </p:sp>
-      <p:sp>
-        <p:nvSpPr>
-          <p:cNvPr id="40" name="TextBox 39"/>
-          <p:cNvSpPr txBox="1"/>
-          <p:nvPr/>
-        </p:nvSpPr>
-        <p:spPr>
-          <a:xfrm>
-            <a:off x="11009376" y="6391656"/>
-            <a:ext cx="530352" cy="237744"/>
-          </a:xfrm>
-          <a:prstGeom prst="rect">
-            <a:avLst/>
-          </a:prstGeom>
-          <a:noFill/>
-        </p:spPr>
-        <p:txBody>
-          <a:bodyPr wrap="square" anchor="t" lIns="0" rIns="0" tIns="0" bIns="0">
-            <a:spAutoFit/>
-          </a:bodyPr>
-          <a:lstStyle/>
-          <a:p>
-            <a:pPr algn="r">
-              <a:lnSpc>
-                <a:spcPct val="130000"/>
-              </a:lnSpc>
-            </a:pPr>
             <a:r>
               <a:rPr sz="819" b="0" lang="ja-JP">
                 <a:solidFill>
@@ -8677,7 +8527,7 @@
                 <a:ea typeface="Yu Gothic"/>
                 <a:cs typeface="Yu Gothic"/>
               </a:rPr>
-              <a:t>/ 22</a:t>
+              <a:t> / 22</a:t>
             </a:r>
           </a:p>
         </p:txBody>
@@ -12230,7 +12080,7 @@
         <p:spPr>
           <a:xfrm>
             <a:off x="10405872" y="6382512"/>
-            <a:ext cx="585216" cy="256032"/>
+            <a:ext cx="1133856" cy="256032"/>
           </a:xfrm>
           <a:prstGeom prst="rect">
             <a:avLst/>
@@ -12238,7 +12088,7 @@
           <a:noFill/>
         </p:spPr>
         <p:txBody>
-          <a:bodyPr wrap="square" anchor="t" lIns="0" rIns="0" tIns="0" bIns="0">
+          <a:bodyPr wrap="none" anchor="ctr" lIns="0" rIns="0" tIns="0" bIns="0">
             <a:spAutoFit/>
           </a:bodyPr>
           <a:lstStyle/>
@@ -12259,36 +12109,6 @@
               </a:rPr>
               <a:t>15</a:t>
             </a:r>
-          </a:p>
-        </p:txBody>
-      </p:sp>
-      <p:sp>
-        <p:nvSpPr>
-          <p:cNvPr id="89" name="TextBox 88"/>
-          <p:cNvSpPr txBox="1"/>
-          <p:nvPr/>
-        </p:nvSpPr>
-        <p:spPr>
-          <a:xfrm>
-            <a:off x="11009376" y="6391656"/>
-            <a:ext cx="530352" cy="237744"/>
-          </a:xfrm>
-          <a:prstGeom prst="rect">
-            <a:avLst/>
-          </a:prstGeom>
-          <a:noFill/>
-        </p:spPr>
-        <p:txBody>
-          <a:bodyPr wrap="square" anchor="t" lIns="0" rIns="0" tIns="0" bIns="0">
-            <a:spAutoFit/>
-          </a:bodyPr>
-          <a:lstStyle/>
-          <a:p>
-            <a:pPr algn="r">
-              <a:lnSpc>
-                <a:spcPct val="130000"/>
-              </a:lnSpc>
-            </a:pPr>
             <a:r>
               <a:rPr sz="819" b="0" lang="ja-JP">
                 <a:solidFill>
@@ -12298,7 +12118,7 @@
                 <a:ea typeface="Yu Gothic"/>
                 <a:cs typeface="Yu Gothic"/>
               </a:rPr>
-              <a:t>/ 22</a:t>
+              <a:t> / 22</a:t>
             </a:r>
           </a:p>
         </p:txBody>
@@ -15939,7 +15759,7 @@
         <p:spPr>
           <a:xfrm>
             <a:off x="10405872" y="6382512"/>
-            <a:ext cx="585216" cy="256032"/>
+            <a:ext cx="1133856" cy="256032"/>
           </a:xfrm>
           <a:prstGeom prst="rect">
             <a:avLst/>
@@ -15947,7 +15767,7 @@
           <a:noFill/>
         </p:spPr>
         <p:txBody>
-          <a:bodyPr wrap="square" anchor="t" lIns="0" rIns="0" tIns="0" bIns="0">
+          <a:bodyPr wrap="none" anchor="ctr" lIns="0" rIns="0" tIns="0" bIns="0">
             <a:spAutoFit/>
           </a:bodyPr>
           <a:lstStyle/>
@@ -15968,36 +15788,6 @@
               </a:rPr>
               <a:t>16</a:t>
             </a:r>
-          </a:p>
-        </p:txBody>
-      </p:sp>
-      <p:sp>
-        <p:nvSpPr>
-          <p:cNvPr id="94" name="TextBox 93"/>
-          <p:cNvSpPr txBox="1"/>
-          <p:nvPr/>
-        </p:nvSpPr>
-        <p:spPr>
-          <a:xfrm>
-            <a:off x="11009376" y="6391656"/>
-            <a:ext cx="530352" cy="237744"/>
-          </a:xfrm>
-          <a:prstGeom prst="rect">
-            <a:avLst/>
-          </a:prstGeom>
-          <a:noFill/>
-        </p:spPr>
-        <p:txBody>
-          <a:bodyPr wrap="square" anchor="t" lIns="0" rIns="0" tIns="0" bIns="0">
-            <a:spAutoFit/>
-          </a:bodyPr>
-          <a:lstStyle/>
-          <a:p>
-            <a:pPr algn="r">
-              <a:lnSpc>
-                <a:spcPct val="130000"/>
-              </a:lnSpc>
-            </a:pPr>
             <a:r>
               <a:rPr sz="819" b="0" lang="ja-JP">
                 <a:solidFill>
@@ -16007,7 +15797,7 @@
                 <a:ea typeface="Yu Gothic"/>
                 <a:cs typeface="Yu Gothic"/>
               </a:rPr>
-              <a:t>/ 22</a:t>
+              <a:t> / 22</a:t>
             </a:r>
           </a:p>
         </p:txBody>
@@ -17223,7 +17013,7 @@
         <p:spPr>
           <a:xfrm>
             <a:off x="10405872" y="6382512"/>
-            <a:ext cx="585216" cy="256032"/>
+            <a:ext cx="1133856" cy="256032"/>
           </a:xfrm>
           <a:prstGeom prst="rect">
             <a:avLst/>
@@ -17231,7 +17021,7 @@
           <a:noFill/>
         </p:spPr>
         <p:txBody>
-          <a:bodyPr wrap="square" anchor="t" lIns="0" rIns="0" tIns="0" bIns="0">
+          <a:bodyPr wrap="none" anchor="ctr" lIns="0" rIns="0" tIns="0" bIns="0">
             <a:spAutoFit/>
           </a:bodyPr>
           <a:lstStyle/>
@@ -17252,36 +17042,6 @@
               </a:rPr>
               <a:t>17</a:t>
             </a:r>
-          </a:p>
-        </p:txBody>
-      </p:sp>
-      <p:sp>
-        <p:nvSpPr>
-          <p:cNvPr id="31" name="TextBox 30"/>
-          <p:cNvSpPr txBox="1"/>
-          <p:nvPr/>
-        </p:nvSpPr>
-        <p:spPr>
-          <a:xfrm>
-            <a:off x="11009376" y="6391656"/>
-            <a:ext cx="530352" cy="237744"/>
-          </a:xfrm>
-          <a:prstGeom prst="rect">
-            <a:avLst/>
-          </a:prstGeom>
-          <a:noFill/>
-        </p:spPr>
-        <p:txBody>
-          <a:bodyPr wrap="square" anchor="t" lIns="0" rIns="0" tIns="0" bIns="0">
-            <a:spAutoFit/>
-          </a:bodyPr>
-          <a:lstStyle/>
-          <a:p>
-            <a:pPr algn="r">
-              <a:lnSpc>
-                <a:spcPct val="130000"/>
-              </a:lnSpc>
-            </a:pPr>
             <a:r>
               <a:rPr sz="819" b="0" lang="ja-JP">
                 <a:solidFill>
@@ -17291,7 +17051,7 @@
                 <a:ea typeface="Yu Gothic"/>
                 <a:cs typeface="Yu Gothic"/>
               </a:rPr>
-              <a:t>/ 22</a:t>
+              <a:t> / 22</a:t>
             </a:r>
           </a:p>
         </p:txBody>
@@ -18795,7 +18555,7 @@
         <p:spPr>
           <a:xfrm>
             <a:off x="10405872" y="6382512"/>
-            <a:ext cx="585216" cy="256032"/>
+            <a:ext cx="1133856" cy="256032"/>
           </a:xfrm>
           <a:prstGeom prst="rect">
             <a:avLst/>
@@ -18803,7 +18563,7 @@
           <a:noFill/>
         </p:spPr>
         <p:txBody>
-          <a:bodyPr wrap="square" anchor="t" lIns="0" rIns="0" tIns="0" bIns="0">
+          <a:bodyPr wrap="none" anchor="ctr" lIns="0" rIns="0" tIns="0" bIns="0">
             <a:spAutoFit/>
           </a:bodyPr>
           <a:lstStyle/>
@@ -18824,36 +18584,6 @@
               </a:rPr>
               <a:t>18</a:t>
             </a:r>
-          </a:p>
-        </p:txBody>
-      </p:sp>
-      <p:sp>
-        <p:nvSpPr>
-          <p:cNvPr id="39" name="TextBox 38"/>
-          <p:cNvSpPr txBox="1"/>
-          <p:nvPr/>
-        </p:nvSpPr>
-        <p:spPr>
-          <a:xfrm>
-            <a:off x="11009376" y="6391656"/>
-            <a:ext cx="530352" cy="237744"/>
-          </a:xfrm>
-          <a:prstGeom prst="rect">
-            <a:avLst/>
-          </a:prstGeom>
-          <a:noFill/>
-        </p:spPr>
-        <p:txBody>
-          <a:bodyPr wrap="square" anchor="t" lIns="0" rIns="0" tIns="0" bIns="0">
-            <a:spAutoFit/>
-          </a:bodyPr>
-          <a:lstStyle/>
-          <a:p>
-            <a:pPr algn="r">
-              <a:lnSpc>
-                <a:spcPct val="130000"/>
-              </a:lnSpc>
-            </a:pPr>
             <a:r>
               <a:rPr sz="819" b="0" lang="ja-JP">
                 <a:solidFill>
@@ -18863,7 +18593,7 @@
                 <a:ea typeface="Yu Gothic"/>
                 <a:cs typeface="Yu Gothic"/>
               </a:rPr>
-              <a:t>/ 22</a:t>
+              <a:t> / 22</a:t>
             </a:r>
           </a:p>
         </p:txBody>
@@ -20626,7 +20356,7 @@
         <p:spPr>
           <a:xfrm>
             <a:off x="10405872" y="6382512"/>
-            <a:ext cx="585216" cy="256032"/>
+            <a:ext cx="1133856" cy="256032"/>
           </a:xfrm>
           <a:prstGeom prst="rect">
             <a:avLst/>
@@ -20634,7 +20364,7 @@
           <a:noFill/>
         </p:spPr>
         <p:txBody>
-          <a:bodyPr wrap="square" anchor="t" lIns="0" rIns="0" tIns="0" bIns="0">
+          <a:bodyPr wrap="none" anchor="ctr" lIns="0" rIns="0" tIns="0" bIns="0">
             <a:spAutoFit/>
           </a:bodyPr>
           <a:lstStyle/>
@@ -20655,36 +20385,6 @@
               </a:rPr>
               <a:t>19</a:t>
             </a:r>
-          </a:p>
-        </p:txBody>
-      </p:sp>
-      <p:sp>
-        <p:nvSpPr>
-          <p:cNvPr id="48" name="TextBox 47"/>
-          <p:cNvSpPr txBox="1"/>
-          <p:nvPr/>
-        </p:nvSpPr>
-        <p:spPr>
-          <a:xfrm>
-            <a:off x="11009376" y="6391656"/>
-            <a:ext cx="530352" cy="237744"/>
-          </a:xfrm>
-          <a:prstGeom prst="rect">
-            <a:avLst/>
-          </a:prstGeom>
-          <a:noFill/>
-        </p:spPr>
-        <p:txBody>
-          <a:bodyPr wrap="square" anchor="t" lIns="0" rIns="0" tIns="0" bIns="0">
-            <a:spAutoFit/>
-          </a:bodyPr>
-          <a:lstStyle/>
-          <a:p>
-            <a:pPr algn="r">
-              <a:lnSpc>
-                <a:spcPct val="130000"/>
-              </a:lnSpc>
-            </a:pPr>
             <a:r>
               <a:rPr sz="819" b="0" lang="ja-JP">
                 <a:solidFill>
@@ -20694,7 +20394,7 @@
                 <a:ea typeface="Yu Gothic"/>
                 <a:cs typeface="Yu Gothic"/>
               </a:rPr>
-              <a:t>/ 22</a:t>
+              <a:t> / 22</a:t>
             </a:r>
           </a:p>
         </p:txBody>
@@ -21315,7 +21015,7 @@
         <p:spPr>
           <a:xfrm>
             <a:off x="10405872" y="6382512"/>
-            <a:ext cx="585216" cy="256032"/>
+            <a:ext cx="1133856" cy="256032"/>
           </a:xfrm>
           <a:prstGeom prst="rect">
             <a:avLst/>
@@ -21323,7 +21023,7 @@
           <a:noFill/>
         </p:spPr>
         <p:txBody>
-          <a:bodyPr wrap="square" anchor="t" lIns="0" rIns="0" tIns="0" bIns="0">
+          <a:bodyPr wrap="none" anchor="ctr" lIns="0" rIns="0" tIns="0" bIns="0">
             <a:spAutoFit/>
           </a:bodyPr>
           <a:lstStyle/>
@@ -21344,36 +21044,6 @@
               </a:rPr>
               <a:t>02</a:t>
             </a:r>
-          </a:p>
-        </p:txBody>
-      </p:sp>
-      <p:sp>
-        <p:nvSpPr>
-          <p:cNvPr id="17" name="TextBox 16"/>
-          <p:cNvSpPr txBox="1"/>
-          <p:nvPr/>
-        </p:nvSpPr>
-        <p:spPr>
-          <a:xfrm>
-            <a:off x="11009376" y="6391656"/>
-            <a:ext cx="530352" cy="237744"/>
-          </a:xfrm>
-          <a:prstGeom prst="rect">
-            <a:avLst/>
-          </a:prstGeom>
-          <a:noFill/>
-        </p:spPr>
-        <p:txBody>
-          <a:bodyPr wrap="square" anchor="t" lIns="0" rIns="0" tIns="0" bIns="0">
-            <a:spAutoFit/>
-          </a:bodyPr>
-          <a:lstStyle/>
-          <a:p>
-            <a:pPr algn="r">
-              <a:lnSpc>
-                <a:spcPct val="130000"/>
-              </a:lnSpc>
-            </a:pPr>
             <a:r>
               <a:rPr sz="819" b="0" lang="ja-JP">
                 <a:solidFill>
@@ -21383,7 +21053,7 @@
                 <a:ea typeface="Yu Gothic"/>
                 <a:cs typeface="Yu Gothic"/>
               </a:rPr>
-              <a:t>/ 22</a:t>
+              <a:t> / 22</a:t>
             </a:r>
           </a:p>
         </p:txBody>
@@ -23666,7 +23336,7 @@
         <p:spPr>
           <a:xfrm>
             <a:off x="10405872" y="6382512"/>
-            <a:ext cx="585216" cy="256032"/>
+            <a:ext cx="1133856" cy="256032"/>
           </a:xfrm>
           <a:prstGeom prst="rect">
             <a:avLst/>
@@ -23674,7 +23344,7 @@
           <a:noFill/>
         </p:spPr>
         <p:txBody>
-          <a:bodyPr wrap="square" anchor="t" lIns="0" rIns="0" tIns="0" bIns="0">
+          <a:bodyPr wrap="none" anchor="ctr" lIns="0" rIns="0" tIns="0" bIns="0">
             <a:spAutoFit/>
           </a:bodyPr>
           <a:lstStyle/>
@@ -23695,36 +23365,6 @@
               </a:rPr>
               <a:t>20</a:t>
             </a:r>
-          </a:p>
-        </p:txBody>
-      </p:sp>
-      <p:sp>
-        <p:nvSpPr>
-          <p:cNvPr id="63" name="TextBox 62"/>
-          <p:cNvSpPr txBox="1"/>
-          <p:nvPr/>
-        </p:nvSpPr>
-        <p:spPr>
-          <a:xfrm>
-            <a:off x="11009376" y="6391656"/>
-            <a:ext cx="530352" cy="237744"/>
-          </a:xfrm>
-          <a:prstGeom prst="rect">
-            <a:avLst/>
-          </a:prstGeom>
-          <a:noFill/>
-        </p:spPr>
-        <p:txBody>
-          <a:bodyPr wrap="square" anchor="t" lIns="0" rIns="0" tIns="0" bIns="0">
-            <a:spAutoFit/>
-          </a:bodyPr>
-          <a:lstStyle/>
-          <a:p>
-            <a:pPr algn="r">
-              <a:lnSpc>
-                <a:spcPct val="130000"/>
-              </a:lnSpc>
-            </a:pPr>
             <a:r>
               <a:rPr sz="819" b="0" lang="ja-JP">
                 <a:solidFill>
@@ -23734,7 +23374,7 @@
                 <a:ea typeface="Yu Gothic"/>
                 <a:cs typeface="Yu Gothic"/>
               </a:rPr>
-              <a:t>/ 22</a:t>
+              <a:t> / 22</a:t>
             </a:r>
           </a:p>
         </p:txBody>
@@ -25368,7 +25008,7 @@
         <p:spPr>
           <a:xfrm>
             <a:off x="10405872" y="6382512"/>
-            <a:ext cx="585216" cy="256032"/>
+            <a:ext cx="1133856" cy="256032"/>
           </a:xfrm>
           <a:prstGeom prst="rect">
             <a:avLst/>
@@ -25376,7 +25016,7 @@
           <a:noFill/>
         </p:spPr>
         <p:txBody>
-          <a:bodyPr wrap="square" anchor="t" lIns="0" rIns="0" tIns="0" bIns="0">
+          <a:bodyPr wrap="none" anchor="ctr" lIns="0" rIns="0" tIns="0" bIns="0">
             <a:spAutoFit/>
           </a:bodyPr>
           <a:lstStyle/>
@@ -25397,36 +25037,6 @@
               </a:rPr>
               <a:t>21</a:t>
             </a:r>
-          </a:p>
-        </p:txBody>
-      </p:sp>
-      <p:sp>
-        <p:nvSpPr>
-          <p:cNvPr id="45" name="TextBox 44"/>
-          <p:cNvSpPr txBox="1"/>
-          <p:nvPr/>
-        </p:nvSpPr>
-        <p:spPr>
-          <a:xfrm>
-            <a:off x="11009376" y="6391656"/>
-            <a:ext cx="530352" cy="237744"/>
-          </a:xfrm>
-          <a:prstGeom prst="rect">
-            <a:avLst/>
-          </a:prstGeom>
-          <a:noFill/>
-        </p:spPr>
-        <p:txBody>
-          <a:bodyPr wrap="square" anchor="t" lIns="0" rIns="0" tIns="0" bIns="0">
-            <a:spAutoFit/>
-          </a:bodyPr>
-          <a:lstStyle/>
-          <a:p>
-            <a:pPr algn="r">
-              <a:lnSpc>
-                <a:spcPct val="130000"/>
-              </a:lnSpc>
-            </a:pPr>
             <a:r>
               <a:rPr sz="819" b="0" lang="ja-JP">
                 <a:solidFill>
@@ -25436,7 +25046,7 @@
                 <a:ea typeface="Yu Gothic"/>
                 <a:cs typeface="Yu Gothic"/>
               </a:rPr>
-              <a:t>/ 22</a:t>
+              <a:t> / 22</a:t>
             </a:r>
           </a:p>
         </p:txBody>
@@ -27201,7 +26811,7 @@
         <p:spPr>
           <a:xfrm>
             <a:off x="10405872" y="6382512"/>
-            <a:ext cx="585216" cy="256032"/>
+            <a:ext cx="1133856" cy="256032"/>
           </a:xfrm>
           <a:prstGeom prst="rect">
             <a:avLst/>
@@ -27209,7 +26819,7 @@
           <a:noFill/>
         </p:spPr>
         <p:txBody>
-          <a:bodyPr wrap="square" anchor="t" lIns="0" rIns="0" tIns="0" bIns="0">
+          <a:bodyPr wrap="none" anchor="ctr" lIns="0" rIns="0" tIns="0" bIns="0">
             <a:spAutoFit/>
           </a:bodyPr>
           <a:lstStyle/>
@@ -27230,36 +26840,6 @@
               </a:rPr>
               <a:t>22</a:t>
             </a:r>
-          </a:p>
-        </p:txBody>
-      </p:sp>
-      <p:sp>
-        <p:nvSpPr>
-          <p:cNvPr id="48" name="TextBox 47"/>
-          <p:cNvSpPr txBox="1"/>
-          <p:nvPr/>
-        </p:nvSpPr>
-        <p:spPr>
-          <a:xfrm>
-            <a:off x="11009376" y="6391656"/>
-            <a:ext cx="530352" cy="237744"/>
-          </a:xfrm>
-          <a:prstGeom prst="rect">
-            <a:avLst/>
-          </a:prstGeom>
-          <a:noFill/>
-        </p:spPr>
-        <p:txBody>
-          <a:bodyPr wrap="square" anchor="t" lIns="0" rIns="0" tIns="0" bIns="0">
-            <a:spAutoFit/>
-          </a:bodyPr>
-          <a:lstStyle/>
-          <a:p>
-            <a:pPr algn="r">
-              <a:lnSpc>
-                <a:spcPct val="130000"/>
-              </a:lnSpc>
-            </a:pPr>
             <a:r>
               <a:rPr sz="819" b="0" lang="ja-JP">
                 <a:solidFill>
@@ -27269,7 +26849,7 @@
                 <a:ea typeface="Yu Gothic"/>
                 <a:cs typeface="Yu Gothic"/>
               </a:rPr>
-              <a:t>/ 22</a:t>
+              <a:t> / 22</a:t>
             </a:r>
           </a:p>
         </p:txBody>
@@ -27852,7 +27432,7 @@
         <p:spPr>
           <a:xfrm>
             <a:off x="10405872" y="6382512"/>
-            <a:ext cx="585216" cy="256032"/>
+            <a:ext cx="1133856" cy="256032"/>
           </a:xfrm>
           <a:prstGeom prst="rect">
             <a:avLst/>
@@ -27860,7 +27440,7 @@
           <a:noFill/>
         </p:spPr>
         <p:txBody>
-          <a:bodyPr wrap="square" anchor="t" lIns="0" rIns="0" tIns="0" bIns="0">
+          <a:bodyPr wrap="none" anchor="ctr" lIns="0" rIns="0" tIns="0" bIns="0">
             <a:spAutoFit/>
           </a:bodyPr>
           <a:lstStyle/>
@@ -27881,36 +27461,6 @@
               </a:rPr>
               <a:t>03</a:t>
             </a:r>
-          </a:p>
-        </p:txBody>
-      </p:sp>
-      <p:sp>
-        <p:nvSpPr>
-          <p:cNvPr id="16" name="TextBox 15"/>
-          <p:cNvSpPr txBox="1"/>
-          <p:nvPr/>
-        </p:nvSpPr>
-        <p:spPr>
-          <a:xfrm>
-            <a:off x="11009376" y="6391656"/>
-            <a:ext cx="530352" cy="237744"/>
-          </a:xfrm>
-          <a:prstGeom prst="rect">
-            <a:avLst/>
-          </a:prstGeom>
-          <a:noFill/>
-        </p:spPr>
-        <p:txBody>
-          <a:bodyPr wrap="square" anchor="t" lIns="0" rIns="0" tIns="0" bIns="0">
-            <a:spAutoFit/>
-          </a:bodyPr>
-          <a:lstStyle/>
-          <a:p>
-            <a:pPr algn="r">
-              <a:lnSpc>
-                <a:spcPct val="130000"/>
-              </a:lnSpc>
-            </a:pPr>
             <a:r>
               <a:rPr sz="819" b="0" lang="ja-JP">
                 <a:solidFill>
@@ -27920,7 +27470,7 @@
                 <a:ea typeface="Yu Gothic"/>
                 <a:cs typeface="Yu Gothic"/>
               </a:rPr>
-              <a:t>/ 22</a:t>
+              <a:t> / 22</a:t>
             </a:r>
           </a:p>
         </p:txBody>
@@ -28593,7 +28143,7 @@
         <p:spPr>
           <a:xfrm>
             <a:off x="10405872" y="6382512"/>
-            <a:ext cx="585216" cy="256032"/>
+            <a:ext cx="1133856" cy="256032"/>
           </a:xfrm>
           <a:prstGeom prst="rect">
             <a:avLst/>
@@ -28601,7 +28151,7 @@
           <a:noFill/>
         </p:spPr>
         <p:txBody>
-          <a:bodyPr wrap="square" anchor="t" lIns="0" rIns="0" tIns="0" bIns="0">
+          <a:bodyPr wrap="none" anchor="ctr" lIns="0" rIns="0" tIns="0" bIns="0">
             <a:spAutoFit/>
           </a:bodyPr>
           <a:lstStyle/>
@@ -28622,36 +28172,6 @@
               </a:rPr>
               <a:t>04</a:t>
             </a:r>
-          </a:p>
-        </p:txBody>
-      </p:sp>
-      <p:sp>
-        <p:nvSpPr>
-          <p:cNvPr id="18" name="TextBox 17"/>
-          <p:cNvSpPr txBox="1"/>
-          <p:nvPr/>
-        </p:nvSpPr>
-        <p:spPr>
-          <a:xfrm>
-            <a:off x="11009376" y="6391656"/>
-            <a:ext cx="530352" cy="237744"/>
-          </a:xfrm>
-          <a:prstGeom prst="rect">
-            <a:avLst/>
-          </a:prstGeom>
-          <a:noFill/>
-        </p:spPr>
-        <p:txBody>
-          <a:bodyPr wrap="square" anchor="t" lIns="0" rIns="0" tIns="0" bIns="0">
-            <a:spAutoFit/>
-          </a:bodyPr>
-          <a:lstStyle/>
-          <a:p>
-            <a:pPr algn="r">
-              <a:lnSpc>
-                <a:spcPct val="130000"/>
-              </a:lnSpc>
-            </a:pPr>
             <a:r>
               <a:rPr sz="819" b="0" lang="ja-JP">
                 <a:solidFill>
@@ -28661,7 +28181,7 @@
                 <a:ea typeface="Yu Gothic"/>
                 <a:cs typeface="Yu Gothic"/>
               </a:rPr>
-              <a:t>/ 22</a:t>
+              <a:t> / 22</a:t>
             </a:r>
           </a:p>
         </p:txBody>
@@ -29502,7 +29022,7 @@
         <p:spPr>
           <a:xfrm>
             <a:off x="10405872" y="6382512"/>
-            <a:ext cx="585216" cy="256032"/>
+            <a:ext cx="1133856" cy="256032"/>
           </a:xfrm>
           <a:prstGeom prst="rect">
             <a:avLst/>
@@ -29510,7 +29030,7 @@
           <a:noFill/>
         </p:spPr>
         <p:txBody>
-          <a:bodyPr wrap="square" anchor="t" lIns="0" rIns="0" tIns="0" bIns="0">
+          <a:bodyPr wrap="none" anchor="ctr" lIns="0" rIns="0" tIns="0" bIns="0">
             <a:spAutoFit/>
           </a:bodyPr>
           <a:lstStyle/>
@@ -29531,36 +29051,6 @@
               </a:rPr>
               <a:t>05</a:t>
             </a:r>
-          </a:p>
-        </p:txBody>
-      </p:sp>
-      <p:sp>
-        <p:nvSpPr>
-          <p:cNvPr id="22" name="TextBox 21"/>
-          <p:cNvSpPr txBox="1"/>
-          <p:nvPr/>
-        </p:nvSpPr>
-        <p:spPr>
-          <a:xfrm>
-            <a:off x="11009376" y="6391656"/>
-            <a:ext cx="530352" cy="237744"/>
-          </a:xfrm>
-          <a:prstGeom prst="rect">
-            <a:avLst/>
-          </a:prstGeom>
-          <a:noFill/>
-        </p:spPr>
-        <p:txBody>
-          <a:bodyPr wrap="square" anchor="t" lIns="0" rIns="0" tIns="0" bIns="0">
-            <a:spAutoFit/>
-          </a:bodyPr>
-          <a:lstStyle/>
-          <a:p>
-            <a:pPr algn="r">
-              <a:lnSpc>
-                <a:spcPct val="130000"/>
-              </a:lnSpc>
-            </a:pPr>
             <a:r>
               <a:rPr sz="819" b="0" lang="ja-JP">
                 <a:solidFill>
@@ -29570,7 +29060,7 @@
                 <a:ea typeface="Yu Gothic"/>
                 <a:cs typeface="Yu Gothic"/>
               </a:rPr>
-              <a:t>/ 22</a:t>
+              <a:t> / 22</a:t>
             </a:r>
           </a:p>
         </p:txBody>
@@ -30270,7 +29760,7 @@
         <p:spPr>
           <a:xfrm>
             <a:off x="10405872" y="6382512"/>
-            <a:ext cx="585216" cy="256032"/>
+            <a:ext cx="1133856" cy="256032"/>
           </a:xfrm>
           <a:prstGeom prst="rect">
             <a:avLst/>
@@ -30278,7 +29768,7 @@
           <a:noFill/>
         </p:spPr>
         <p:txBody>
-          <a:bodyPr wrap="square" anchor="t" lIns="0" rIns="0" tIns="0" bIns="0">
+          <a:bodyPr wrap="none" anchor="ctr" lIns="0" rIns="0" tIns="0" bIns="0">
             <a:spAutoFit/>
           </a:bodyPr>
           <a:lstStyle/>
@@ -30299,36 +29789,6 @@
               </a:rPr>
               <a:t>06</a:t>
             </a:r>
-          </a:p>
-        </p:txBody>
-      </p:sp>
-      <p:sp>
-        <p:nvSpPr>
-          <p:cNvPr id="19" name="TextBox 18"/>
-          <p:cNvSpPr txBox="1"/>
-          <p:nvPr/>
-        </p:nvSpPr>
-        <p:spPr>
-          <a:xfrm>
-            <a:off x="11009376" y="6391656"/>
-            <a:ext cx="530352" cy="237744"/>
-          </a:xfrm>
-          <a:prstGeom prst="rect">
-            <a:avLst/>
-          </a:prstGeom>
-          <a:noFill/>
-        </p:spPr>
-        <p:txBody>
-          <a:bodyPr wrap="square" anchor="t" lIns="0" rIns="0" tIns="0" bIns="0">
-            <a:spAutoFit/>
-          </a:bodyPr>
-          <a:lstStyle/>
-          <a:p>
-            <a:pPr algn="r">
-              <a:lnSpc>
-                <a:spcPct val="130000"/>
-              </a:lnSpc>
-            </a:pPr>
             <a:r>
               <a:rPr sz="819" b="0" lang="ja-JP">
                 <a:solidFill>
@@ -30338,7 +29798,7 @@
                 <a:ea typeface="Yu Gothic"/>
                 <a:cs typeface="Yu Gothic"/>
               </a:rPr>
-              <a:t>/ 22</a:t>
+              <a:t> / 22</a:t>
             </a:r>
           </a:p>
         </p:txBody>
@@ -31589,7 +31049,7 @@
         <p:spPr>
           <a:xfrm>
             <a:off x="10405872" y="6382512"/>
-            <a:ext cx="585216" cy="256032"/>
+            <a:ext cx="1133856" cy="256032"/>
           </a:xfrm>
           <a:prstGeom prst="rect">
             <a:avLst/>
@@ -31597,7 +31057,7 @@
           <a:noFill/>
         </p:spPr>
         <p:txBody>
-          <a:bodyPr wrap="square" anchor="t" lIns="0" rIns="0" tIns="0" bIns="0">
+          <a:bodyPr wrap="none" anchor="ctr" lIns="0" rIns="0" tIns="0" bIns="0">
             <a:spAutoFit/>
           </a:bodyPr>
           <a:lstStyle/>
@@ -31618,36 +31078,6 @@
               </a:rPr>
               <a:t>07</a:t>
             </a:r>
-          </a:p>
-        </p:txBody>
-      </p:sp>
-      <p:sp>
-        <p:nvSpPr>
-          <p:cNvPr id="32" name="TextBox 31"/>
-          <p:cNvSpPr txBox="1"/>
-          <p:nvPr/>
-        </p:nvSpPr>
-        <p:spPr>
-          <a:xfrm>
-            <a:off x="11009376" y="6391656"/>
-            <a:ext cx="530352" cy="237744"/>
-          </a:xfrm>
-          <a:prstGeom prst="rect">
-            <a:avLst/>
-          </a:prstGeom>
-          <a:noFill/>
-        </p:spPr>
-        <p:txBody>
-          <a:bodyPr wrap="square" anchor="t" lIns="0" rIns="0" tIns="0" bIns="0">
-            <a:spAutoFit/>
-          </a:bodyPr>
-          <a:lstStyle/>
-          <a:p>
-            <a:pPr algn="r">
-              <a:lnSpc>
-                <a:spcPct val="130000"/>
-              </a:lnSpc>
-            </a:pPr>
             <a:r>
               <a:rPr sz="819" b="0" lang="ja-JP">
                 <a:solidFill>
@@ -31657,7 +31087,7 @@
                 <a:ea typeface="Yu Gothic"/>
                 <a:cs typeface="Yu Gothic"/>
               </a:rPr>
-              <a:t>/ 22</a:t>
+              <a:t> / 22</a:t>
             </a:r>
           </a:p>
         </p:txBody>
@@ -32400,7 +31830,7 @@
         <p:spPr>
           <a:xfrm>
             <a:off x="10405872" y="6382512"/>
-            <a:ext cx="585216" cy="256032"/>
+            <a:ext cx="1133856" cy="256032"/>
           </a:xfrm>
           <a:prstGeom prst="rect">
             <a:avLst/>
@@ -32408,7 +31838,7 @@
           <a:noFill/>
         </p:spPr>
         <p:txBody>
-          <a:bodyPr wrap="square" anchor="t" lIns="0" rIns="0" tIns="0" bIns="0">
+          <a:bodyPr wrap="none" anchor="ctr" lIns="0" rIns="0" tIns="0" bIns="0">
             <a:spAutoFit/>
           </a:bodyPr>
           <a:lstStyle/>
@@ -32429,36 +31859,6 @@
               </a:rPr>
               <a:t>08</a:t>
             </a:r>
-          </a:p>
-        </p:txBody>
-      </p:sp>
-      <p:sp>
-        <p:nvSpPr>
-          <p:cNvPr id="9" name="TextBox 8"/>
-          <p:cNvSpPr txBox="1"/>
-          <p:nvPr/>
-        </p:nvSpPr>
-        <p:spPr>
-          <a:xfrm>
-            <a:off x="11009376" y="6391656"/>
-            <a:ext cx="530352" cy="237744"/>
-          </a:xfrm>
-          <a:prstGeom prst="rect">
-            <a:avLst/>
-          </a:prstGeom>
-          <a:noFill/>
-        </p:spPr>
-        <p:txBody>
-          <a:bodyPr wrap="square" anchor="t" lIns="0" rIns="0" tIns="0" bIns="0">
-            <a:spAutoFit/>
-          </a:bodyPr>
-          <a:lstStyle/>
-          <a:p>
-            <a:pPr algn="r">
-              <a:lnSpc>
-                <a:spcPct val="130000"/>
-              </a:lnSpc>
-            </a:pPr>
             <a:r>
               <a:rPr sz="819" b="0" lang="ja-JP">
                 <a:solidFill>
@@ -32468,7 +31868,7 @@
                 <a:ea typeface="Yu Gothic"/>
                 <a:cs typeface="Yu Gothic"/>
               </a:rPr>
-              <a:t>/ 22</a:t>
+              <a:t> / 22</a:t>
             </a:r>
           </a:p>
         </p:txBody>
@@ -32770,7 +32170,7 @@
         <p:spPr>
           <a:xfrm>
             <a:off x="10405872" y="6382512"/>
-            <a:ext cx="585216" cy="256032"/>
+            <a:ext cx="1133856" cy="256032"/>
           </a:xfrm>
           <a:prstGeom prst="rect">
             <a:avLst/>
@@ -32778,7 +32178,7 @@
           <a:noFill/>
         </p:spPr>
         <p:txBody>
-          <a:bodyPr wrap="square" anchor="t" lIns="0" rIns="0" tIns="0" bIns="0">
+          <a:bodyPr wrap="none" anchor="ctr" lIns="0" rIns="0" tIns="0" bIns="0">
             <a:spAutoFit/>
           </a:bodyPr>
           <a:lstStyle/>
@@ -32799,36 +32199,6 @@
               </a:rPr>
               <a:t>09</a:t>
             </a:r>
-          </a:p>
-        </p:txBody>
-      </p:sp>
-      <p:sp>
-        <p:nvSpPr>
-          <p:cNvPr id="10" name="TextBox 9"/>
-          <p:cNvSpPr txBox="1"/>
-          <p:nvPr/>
-        </p:nvSpPr>
-        <p:spPr>
-          <a:xfrm>
-            <a:off x="11009376" y="6391656"/>
-            <a:ext cx="530352" cy="237744"/>
-          </a:xfrm>
-          <a:prstGeom prst="rect">
-            <a:avLst/>
-          </a:prstGeom>
-          <a:noFill/>
-        </p:spPr>
-        <p:txBody>
-          <a:bodyPr wrap="square" anchor="t" lIns="0" rIns="0" tIns="0" bIns="0">
-            <a:spAutoFit/>
-          </a:bodyPr>
-          <a:lstStyle/>
-          <a:p>
-            <a:pPr algn="r">
-              <a:lnSpc>
-                <a:spcPct val="130000"/>
-              </a:lnSpc>
-            </a:pPr>
             <a:r>
               <a:rPr sz="819" b="0" lang="ja-JP">
                 <a:solidFill>
@@ -32838,7 +32208,7 @@
                 <a:ea typeface="Yu Gothic"/>
                 <a:cs typeface="Yu Gothic"/>
               </a:rPr>
-              <a:t>/ 22</a:t>
+              <a:t> / 22</a:t>
             </a:r>
           </a:p>
         </p:txBody>

--- a/examples/gallery/pattern_gallery.pptx
+++ b/examples/gallery/pattern_gallery.pptx
@@ -27770,7 +27770,7 @@
                 <a:ea typeface="Yu Gothic"/>
                 <a:cs typeface="Yu Gothic"/>
               </a:rPr>
-              <a:t>結論と根拠</a:t>
+              <a:t>導入方式</a:t>
             </a:r>
           </a:p>
         </p:txBody>
@@ -27811,7 +27811,7 @@
                 <a:ea typeface="Yu Gothic"/>
                 <a:cs typeface="Yu Gothic"/>
               </a:rPr>
-              <a:t>全社展開の推奨案と、効果・実現性・導入リスクを示す</a:t>
+              <a:t>3つの導入方式を、適用条件とトレードオフで比較する</a:t>
             </a:r>
           </a:p>
         </p:txBody>
@@ -27824,7 +27824,7 @@
         </p:nvSpPr>
         <p:spPr>
           <a:xfrm>
-            <a:off x="731520" y="1865376"/>
+            <a:off x="713232" y="2121408"/>
             <a:ext cx="530352" cy="329184"/>
           </a:xfrm>
           <a:prstGeom prst="rect">
@@ -27844,7 +27844,7 @@
               </a:lnSpc>
             </a:pPr>
             <a:r>
-              <a:rPr sz="1500" b="1" lang="ja-JP">
+              <a:rPr sz="1400" b="1" lang="ja-JP">
                 <a:solidFill>
                   <a:srgbClr val="666E70"/>
                 </a:solidFill>
@@ -27865,8 +27865,8 @@
         </p:nvSpPr>
         <p:spPr>
           <a:xfrm>
-            <a:off x="1389888" y="1837944"/>
-            <a:ext cx="3611880" cy="512064"/>
+            <a:off x="1371600" y="2103120"/>
+            <a:ext cx="2493264" cy="384048"/>
           </a:xfrm>
           <a:prstGeom prst="rect">
             <a:avLst/>
@@ -27885,7 +27885,7 @@
               </a:lnSpc>
             </a:pPr>
             <a:r>
-              <a:rPr sz="2300" b="1" lang="ja-JP">
+              <a:rPr sz="1650" b="1" lang="ja-JP">
                 <a:solidFill>
                   <a:srgbClr val="182C43"/>
                 </a:solidFill>
@@ -27893,7 +27893,7 @@
                 <a:ea typeface="Yu Gothic"/>
                 <a:cs typeface="Yu Gothic"/>
               </a:rPr>
-              <a:t>推奨案</a:t>
+              <a:t>段階導入</a:t>
             </a:r>
           </a:p>
         </p:txBody>
@@ -27906,8 +27906,8 @@
         </p:nvSpPr>
         <p:spPr>
           <a:xfrm>
-            <a:off x="1389888" y="2560320"/>
-            <a:ext cx="3749039" cy="1874519"/>
+            <a:off x="1371600" y="2633472"/>
+            <a:ext cx="2401824" cy="2450591"/>
           </a:xfrm>
           <a:prstGeom prst="rect">
             <a:avLst/>
@@ -27922,11 +27922,11 @@
           <a:p>
             <a:pPr algn="l">
               <a:lnSpc>
-                <a:spcPct val="128000"/>
-              </a:lnSpc>
-            </a:pPr>
-            <a:r>
-              <a:rPr sz="1600" b="0" lang="ja-JP">
+                <a:spcPct val="120000"/>
+              </a:lnSpc>
+            </a:pPr>
+            <a:r>
+              <a:rPr sz="1400" b="0" lang="ja-JP">
                 <a:solidFill>
                   <a:srgbClr val="202729"/>
                 </a:solidFill>
@@ -27934,17 +27934,122 @@
                 <a:ea typeface="Yu Gothic"/>
                 <a:cs typeface="Yu Gothic"/>
               </a:rPr>
-              <a:t>標準テンプレートを対象部門へ</a:t>
-            </a:r>
-          </a:p>
+              <a:t>先行部門で運用を検証してから対象を広げる。手戻りを抑えやすい。</a:t>
+            </a:r>
+          </a:p>
+        </p:txBody>
+      </p:sp>
+      <p:sp>
+        <p:nvSpPr>
+          <p:cNvPr id="8" name="TextBox 7"/>
+          <p:cNvSpPr txBox="1"/>
+          <p:nvPr/>
+        </p:nvSpPr>
+        <p:spPr>
+          <a:xfrm>
+            <a:off x="4523232" y="2121408"/>
+            <a:ext cx="530352" cy="329184"/>
+          </a:xfrm>
+          <a:prstGeom prst="rect">
+            <a:avLst/>
+          </a:prstGeom>
+          <a:noFill/>
+        </p:spPr>
+        <p:txBody>
+          <a:bodyPr wrap="square" anchor="t" lIns="0" rIns="0" tIns="0" bIns="0">
+            <a:spAutoFit/>
+          </a:bodyPr>
+          <a:lstStyle/>
           <a:p>
             <a:pPr algn="l">
               <a:lnSpc>
-                <a:spcPct val="128000"/>
-              </a:lnSpc>
-            </a:pPr>
-            <a:r>
-              <a:rPr sz="1600" b="0" lang="ja-JP">
+                <a:spcPct val="130000"/>
+              </a:lnSpc>
+            </a:pPr>
+            <a:r>
+              <a:rPr sz="1400" b="1" lang="ja-JP">
+                <a:solidFill>
+                  <a:srgbClr val="666E70"/>
+                </a:solidFill>
+                <a:latin typeface="Yu Gothic"/>
+                <a:ea typeface="Yu Gothic"/>
+                <a:cs typeface="Yu Gothic"/>
+              </a:rPr>
+              <a:t>02</a:t>
+            </a:r>
+          </a:p>
+        </p:txBody>
+      </p:sp>
+      <p:sp>
+        <p:nvSpPr>
+          <p:cNvPr id="9" name="TextBox 8"/>
+          <p:cNvSpPr txBox="1"/>
+          <p:nvPr/>
+        </p:nvSpPr>
+        <p:spPr>
+          <a:xfrm>
+            <a:off x="5181600" y="2103120"/>
+            <a:ext cx="2493264" cy="384048"/>
+          </a:xfrm>
+          <a:prstGeom prst="rect">
+            <a:avLst/>
+          </a:prstGeom>
+          <a:noFill/>
+        </p:spPr>
+        <p:txBody>
+          <a:bodyPr wrap="square" anchor="t" lIns="0" rIns="0" tIns="0" bIns="0">
+            <a:spAutoFit/>
+          </a:bodyPr>
+          <a:lstStyle/>
+          <a:p>
+            <a:pPr algn="l">
+              <a:lnSpc>
+                <a:spcPct val="130000"/>
+              </a:lnSpc>
+            </a:pPr>
+            <a:r>
+              <a:rPr sz="1650" b="1" lang="ja-JP">
+                <a:solidFill>
+                  <a:srgbClr val="182C43"/>
+                </a:solidFill>
+                <a:latin typeface="Yu Gothic"/>
+                <a:ea typeface="Yu Gothic"/>
+                <a:cs typeface="Yu Gothic"/>
+              </a:rPr>
+              <a:t>一括導入</a:t>
+            </a:r>
+          </a:p>
+        </p:txBody>
+      </p:sp>
+      <p:sp>
+        <p:nvSpPr>
+          <p:cNvPr id="10" name="TextBox 9"/>
+          <p:cNvSpPr txBox="1"/>
+          <p:nvPr/>
+        </p:nvSpPr>
+        <p:spPr>
+          <a:xfrm>
+            <a:off x="5181600" y="2633472"/>
+            <a:ext cx="2401824" cy="2450591"/>
+          </a:xfrm>
+          <a:prstGeom prst="rect">
+            <a:avLst/>
+          </a:prstGeom>
+          <a:noFill/>
+        </p:spPr>
+        <p:txBody>
+          <a:bodyPr wrap="square" anchor="t" lIns="0" rIns="0" tIns="0" bIns="0">
+            <a:spAutoFit/>
+          </a:bodyPr>
+          <a:lstStyle/>
+          <a:p>
+            <a:pPr algn="l">
+              <a:lnSpc>
+                <a:spcPct val="120000"/>
+              </a:lnSpc>
+            </a:pPr>
+            <a:r>
+              <a:rPr sz="1400" b="0" lang="ja-JP">
                 <a:solidFill>
                   <a:srgbClr val="202729"/>
                 </a:solidFill>
@@ -27952,21 +28057,21 @@
                 <a:ea typeface="Yu Gothic"/>
                 <a:cs typeface="Yu Gothic"/>
               </a:rPr>
-              <a:t>段階展開する。</a:t>
-            </a:r>
-          </a:p>
-        </p:txBody>
-      </p:sp>
-      <p:sp>
-        <p:nvSpPr>
-          <p:cNvPr id="8" name="TextBox 7"/>
-          <p:cNvSpPr txBox="1"/>
-          <p:nvPr/>
-        </p:nvSpPr>
-        <p:spPr>
-          <a:xfrm>
-            <a:off x="5870448" y="1883664"/>
-            <a:ext cx="457200" cy="292608"/>
+              <a:t>共通要件が固まった組織へ同時展開する。移行期間を短縮できる。</a:t>
+            </a:r>
+          </a:p>
+        </p:txBody>
+      </p:sp>
+      <p:sp>
+        <p:nvSpPr>
+          <p:cNvPr id="11" name="TextBox 10"/>
+          <p:cNvSpPr txBox="1"/>
+          <p:nvPr/>
+        </p:nvSpPr>
+        <p:spPr>
+          <a:xfrm>
+            <a:off x="8333232" y="2121408"/>
+            <a:ext cx="530352" cy="329184"/>
           </a:xfrm>
           <a:prstGeom prst="rect">
             <a:avLst/>
@@ -27985,7 +28090,7 @@
               </a:lnSpc>
             </a:pPr>
             <a:r>
-              <a:rPr sz="1250" b="1" lang="ja-JP">
+              <a:rPr sz="1400" b="1" lang="ja-JP">
                 <a:solidFill>
                   <a:srgbClr val="666E70"/>
                 </a:solidFill>
@@ -27993,21 +28098,21 @@
                 <a:ea typeface="Yu Gothic"/>
                 <a:cs typeface="Yu Gothic"/>
               </a:rPr>
-              <a:t>02</a:t>
-            </a:r>
-          </a:p>
-        </p:txBody>
-      </p:sp>
-      <p:sp>
-        <p:nvSpPr>
-          <p:cNvPr id="9" name="TextBox 8"/>
-          <p:cNvSpPr txBox="1"/>
-          <p:nvPr/>
-        </p:nvSpPr>
-        <p:spPr>
-          <a:xfrm>
-            <a:off x="6492240" y="1865376"/>
-            <a:ext cx="4791456" cy="347472"/>
+              <a:t>03</a:t>
+            </a:r>
+          </a:p>
+        </p:txBody>
+      </p:sp>
+      <p:sp>
+        <p:nvSpPr>
+          <p:cNvPr id="12" name="TextBox 11"/>
+          <p:cNvSpPr txBox="1"/>
+          <p:nvPr/>
+        </p:nvSpPr>
+        <p:spPr>
+          <a:xfrm>
+            <a:off x="8991600" y="2103120"/>
+            <a:ext cx="2493264" cy="384048"/>
           </a:xfrm>
           <a:prstGeom prst="rect">
             <a:avLst/>
@@ -28026,7 +28131,7 @@
               </a:lnSpc>
             </a:pPr>
             <a:r>
-              <a:rPr sz="1600" b="1" lang="ja-JP">
+              <a:rPr sz="1650" b="1" lang="ja-JP">
                 <a:solidFill>
                   <a:srgbClr val="182C43"/>
                 </a:solidFill>
@@ -28034,21 +28139,21 @@
                 <a:ea typeface="Yu Gothic"/>
                 <a:cs typeface="Yu Gothic"/>
               </a:rPr>
-              <a:t>期待効果</a:t>
-            </a:r>
-          </a:p>
-        </p:txBody>
-      </p:sp>
-      <p:sp>
-        <p:nvSpPr>
-          <p:cNvPr id="10" name="TextBox 9"/>
-          <p:cNvSpPr txBox="1"/>
-          <p:nvPr/>
-        </p:nvSpPr>
-        <p:spPr>
-          <a:xfrm>
-            <a:off x="6492240" y="2304288"/>
-            <a:ext cx="4754880" cy="512064"/>
+              <a:t>部門別導入</a:t>
+            </a:r>
+          </a:p>
+        </p:txBody>
+      </p:sp>
+      <p:sp>
+        <p:nvSpPr>
+          <p:cNvPr id="13" name="TextBox 12"/>
+          <p:cNvSpPr txBox="1"/>
+          <p:nvPr/>
+        </p:nvSpPr>
+        <p:spPr>
+          <a:xfrm>
+            <a:off x="8991600" y="2633472"/>
+            <a:ext cx="2401824" cy="2450591"/>
           </a:xfrm>
           <a:prstGeom prst="rect">
             <a:avLst/>
@@ -28063,11 +28168,11 @@
           <a:p>
             <a:pPr algn="l">
               <a:lnSpc>
-                <a:spcPct val="115000"/>
-              </a:lnSpc>
-            </a:pPr>
-            <a:r>
-              <a:rPr sz="1250" b="0" lang="ja-JP">
+                <a:spcPct val="120000"/>
+              </a:lnSpc>
+            </a:pPr>
+            <a:r>
+              <a:rPr sz="1400" b="0" lang="ja-JP">
                 <a:solidFill>
                   <a:srgbClr val="202729"/>
                 </a:solidFill>
@@ -28075,21 +28180,21 @@
                 <a:ea typeface="Yu Gothic"/>
                 <a:cs typeface="Yu Gothic"/>
               </a:rPr>
-              <a:t>作成とレビューの手戻りを減らし、提出品質を揃える。</a:t>
-            </a:r>
-          </a:p>
-        </p:txBody>
-      </p:sp>
-      <p:sp>
-        <p:nvSpPr>
-          <p:cNvPr id="11" name="Rectangle 10"/>
+              <a:t>業務差が大きい場合に部門単位で設計する。個別運用が増えやすい。</a:t>
+            </a:r>
+          </a:p>
+        </p:txBody>
+      </p:sp>
+      <p:sp>
+        <p:nvSpPr>
+          <p:cNvPr id="14" name="Rectangle 13"/>
           <p:cNvSpPr/>
           <p:nvPr/>
         </p:nvSpPr>
         <p:spPr>
           <a:xfrm>
-            <a:off x="6492240" y="2907791"/>
-            <a:ext cx="4791456" cy="10972"/>
+            <a:off x="658368" y="6327648"/>
+            <a:ext cx="10881360" cy="9144"/>
           </a:xfrm>
           <a:prstGeom prst="rect">
             <a:avLst/>
@@ -28126,341 +28231,7 @@
       </p:sp>
       <p:sp>
         <p:nvSpPr>
-          <p:cNvPr id="12" name="TextBox 11"/>
-          <p:cNvSpPr txBox="1"/>
-          <p:nvPr/>
-        </p:nvSpPr>
-        <p:spPr>
-          <a:xfrm>
-            <a:off x="5870448" y="3081528"/>
-            <a:ext cx="457200" cy="292608"/>
-          </a:xfrm>
-          <a:prstGeom prst="rect">
-            <a:avLst/>
-          </a:prstGeom>
-          <a:noFill/>
-        </p:spPr>
-        <p:txBody>
-          <a:bodyPr wrap="square" anchor="t" lIns="0" rIns="0" tIns="0" bIns="0">
-            <a:spAutoFit/>
-          </a:bodyPr>
-          <a:lstStyle/>
-          <a:p>
-            <a:pPr algn="l">
-              <a:lnSpc>
-                <a:spcPct val="130000"/>
-              </a:lnSpc>
-            </a:pPr>
-            <a:r>
-              <a:rPr sz="1250" b="1" lang="ja-JP">
-                <a:solidFill>
-                  <a:srgbClr val="666E70"/>
-                </a:solidFill>
-                <a:latin typeface="Yu Gothic"/>
-                <a:ea typeface="Yu Gothic"/>
-                <a:cs typeface="Yu Gothic"/>
-              </a:rPr>
-              <a:t>03</a:t>
-            </a:r>
-          </a:p>
-        </p:txBody>
-      </p:sp>
-      <p:sp>
-        <p:nvSpPr>
-          <p:cNvPr id="13" name="TextBox 12"/>
-          <p:cNvSpPr txBox="1"/>
-          <p:nvPr/>
-        </p:nvSpPr>
-        <p:spPr>
-          <a:xfrm>
-            <a:off x="6492240" y="3063240"/>
-            <a:ext cx="4791456" cy="347472"/>
-          </a:xfrm>
-          <a:prstGeom prst="rect">
-            <a:avLst/>
-          </a:prstGeom>
-          <a:noFill/>
-        </p:spPr>
-        <p:txBody>
-          <a:bodyPr wrap="square" anchor="t" lIns="0" rIns="0" tIns="0" bIns="0">
-            <a:spAutoFit/>
-          </a:bodyPr>
-          <a:lstStyle/>
-          <a:p>
-            <a:pPr algn="l">
-              <a:lnSpc>
-                <a:spcPct val="130000"/>
-              </a:lnSpc>
-            </a:pPr>
-            <a:r>
-              <a:rPr sz="1600" b="1" lang="ja-JP">
-                <a:solidFill>
-                  <a:srgbClr val="182C43"/>
-                </a:solidFill>
-                <a:latin typeface="Yu Gothic"/>
-                <a:ea typeface="Yu Gothic"/>
-                <a:cs typeface="Yu Gothic"/>
-              </a:rPr>
-              <a:t>実現性</a:t>
-            </a:r>
-          </a:p>
-        </p:txBody>
-      </p:sp>
-      <p:sp>
-        <p:nvSpPr>
-          <p:cNvPr id="14" name="TextBox 13"/>
-          <p:cNvSpPr txBox="1"/>
-          <p:nvPr/>
-        </p:nvSpPr>
-        <p:spPr>
-          <a:xfrm>
-            <a:off x="6492240" y="3502152"/>
-            <a:ext cx="4754880" cy="512064"/>
-          </a:xfrm>
-          <a:prstGeom prst="rect">
-            <a:avLst/>
-          </a:prstGeom>
-          <a:noFill/>
-        </p:spPr>
-        <p:txBody>
-          <a:bodyPr wrap="square" anchor="t" lIns="0" rIns="0" tIns="0" bIns="0">
-            <a:spAutoFit/>
-          </a:bodyPr>
-          <a:lstStyle/>
-          <a:p>
-            <a:pPr algn="l">
-              <a:lnSpc>
-                <a:spcPct val="115000"/>
-              </a:lnSpc>
-            </a:pPr>
-            <a:r>
-              <a:rPr sz="1250" b="0" lang="ja-JP">
-                <a:solidFill>
-                  <a:srgbClr val="202729"/>
-                </a:solidFill>
-                <a:latin typeface="Yu Gothic"/>
-                <a:ea typeface="Yu Gothic"/>
-                <a:cs typeface="Yu Gothic"/>
-              </a:rPr>
-              <a:t>既存フローを流用し、部門ごとに順次導入できる。</a:t>
-            </a:r>
-          </a:p>
-        </p:txBody>
-      </p:sp>
-      <p:sp>
-        <p:nvSpPr>
-          <p:cNvPr id="15" name="Rectangle 14"/>
-          <p:cNvSpPr/>
-          <p:nvPr/>
-        </p:nvSpPr>
-        <p:spPr>
-          <a:xfrm>
-            <a:off x="6492240" y="4105656"/>
-            <a:ext cx="4791456" cy="10972"/>
-          </a:xfrm>
-          <a:prstGeom prst="rect">
-            <a:avLst/>
-          </a:prstGeom>
-          <a:solidFill>
-            <a:srgbClr val="D1CFC8"/>
-          </a:solidFill>
-          <a:ln>
-            <a:noFill/>
-          </a:ln>
-          <a:effectLst/>
-        </p:spPr>
-        <p:style>
-          <a:lnRef idx="1">
-            <a:schemeClr val="accent1"/>
-          </a:lnRef>
-          <a:fillRef idx="3">
-            <a:schemeClr val="accent1"/>
-          </a:fillRef>
-          <a:effectRef idx="2">
-            <a:schemeClr val="accent1"/>
-          </a:effectRef>
-          <a:fontRef idx="minor">
-            <a:schemeClr val="lt1"/>
-          </a:fontRef>
-        </p:style>
-        <p:txBody>
-          <a:bodyPr rtlCol="0" anchor="ctr"/>
-          <a:lstStyle/>
-          <a:p>
-            <a:pPr algn="ctr"/>
-          </a:p>
-        </p:txBody>
-      </p:sp>
-      <p:sp>
-        <p:nvSpPr>
-          <p:cNvPr id="16" name="TextBox 15"/>
-          <p:cNvSpPr txBox="1"/>
-          <p:nvPr/>
-        </p:nvSpPr>
-        <p:spPr>
-          <a:xfrm>
-            <a:off x="5870448" y="4279392"/>
-            <a:ext cx="457200" cy="292608"/>
-          </a:xfrm>
-          <a:prstGeom prst="rect">
-            <a:avLst/>
-          </a:prstGeom>
-          <a:noFill/>
-        </p:spPr>
-        <p:txBody>
-          <a:bodyPr wrap="square" anchor="t" lIns="0" rIns="0" tIns="0" bIns="0">
-            <a:spAutoFit/>
-          </a:bodyPr>
-          <a:lstStyle/>
-          <a:p>
-            <a:pPr algn="l">
-              <a:lnSpc>
-                <a:spcPct val="130000"/>
-              </a:lnSpc>
-            </a:pPr>
-            <a:r>
-              <a:rPr sz="1250" b="1" lang="ja-JP">
-                <a:solidFill>
-                  <a:srgbClr val="666E70"/>
-                </a:solidFill>
-                <a:latin typeface="Yu Gothic"/>
-                <a:ea typeface="Yu Gothic"/>
-                <a:cs typeface="Yu Gothic"/>
-              </a:rPr>
-              <a:t>04</a:t>
-            </a:r>
-          </a:p>
-        </p:txBody>
-      </p:sp>
-      <p:sp>
-        <p:nvSpPr>
-          <p:cNvPr id="17" name="TextBox 16"/>
-          <p:cNvSpPr txBox="1"/>
-          <p:nvPr/>
-        </p:nvSpPr>
-        <p:spPr>
-          <a:xfrm>
-            <a:off x="6492240" y="4261104"/>
-            <a:ext cx="4791456" cy="347472"/>
-          </a:xfrm>
-          <a:prstGeom prst="rect">
-            <a:avLst/>
-          </a:prstGeom>
-          <a:noFill/>
-        </p:spPr>
-        <p:txBody>
-          <a:bodyPr wrap="square" anchor="t" lIns="0" rIns="0" tIns="0" bIns="0">
-            <a:spAutoFit/>
-          </a:bodyPr>
-          <a:lstStyle/>
-          <a:p>
-            <a:pPr algn="l">
-              <a:lnSpc>
-                <a:spcPct val="130000"/>
-              </a:lnSpc>
-            </a:pPr>
-            <a:r>
-              <a:rPr sz="1600" b="1" lang="ja-JP">
-                <a:solidFill>
-                  <a:srgbClr val="182C43"/>
-                </a:solidFill>
-                <a:latin typeface="Yu Gothic"/>
-                <a:ea typeface="Yu Gothic"/>
-                <a:cs typeface="Yu Gothic"/>
-              </a:rPr>
-              <a:t>導入リスク</a:t>
-            </a:r>
-          </a:p>
-        </p:txBody>
-      </p:sp>
-      <p:sp>
-        <p:nvSpPr>
-          <p:cNvPr id="18" name="TextBox 17"/>
-          <p:cNvSpPr txBox="1"/>
-          <p:nvPr/>
-        </p:nvSpPr>
-        <p:spPr>
-          <a:xfrm>
-            <a:off x="6492240" y="4700016"/>
-            <a:ext cx="4754880" cy="512064"/>
-          </a:xfrm>
-          <a:prstGeom prst="rect">
-            <a:avLst/>
-          </a:prstGeom>
-          <a:noFill/>
-        </p:spPr>
-        <p:txBody>
-          <a:bodyPr wrap="square" anchor="t" lIns="0" rIns="0" tIns="0" bIns="0">
-            <a:spAutoFit/>
-          </a:bodyPr>
-          <a:lstStyle/>
-          <a:p>
-            <a:pPr algn="l">
-              <a:lnSpc>
-                <a:spcPct val="115000"/>
-              </a:lnSpc>
-            </a:pPr>
-            <a:r>
-              <a:rPr sz="1250" b="0" lang="ja-JP">
-                <a:solidFill>
-                  <a:srgbClr val="202729"/>
-                </a:solidFill>
-                <a:latin typeface="Yu Gothic"/>
-                <a:ea typeface="Yu Gothic"/>
-                <a:cs typeface="Yu Gothic"/>
-              </a:rPr>
-              <a:t>初期教育と運用窓口を用意し、例外資料は個別対応とする。</a:t>
-            </a:r>
-          </a:p>
-        </p:txBody>
-      </p:sp>
-      <p:sp>
-        <p:nvSpPr>
-          <p:cNvPr id="19" name="Rectangle 18"/>
-          <p:cNvSpPr/>
-          <p:nvPr/>
-        </p:nvSpPr>
-        <p:spPr>
-          <a:xfrm>
-            <a:off x="658368" y="6327648"/>
-            <a:ext cx="10881360" cy="9144"/>
-          </a:xfrm>
-          <a:prstGeom prst="rect">
-            <a:avLst/>
-          </a:prstGeom>
-          <a:solidFill>
-            <a:srgbClr val="D1CFC8"/>
-          </a:solidFill>
-          <a:ln>
-            <a:noFill/>
-          </a:ln>
-          <a:effectLst/>
-        </p:spPr>
-        <p:style>
-          <a:lnRef idx="1">
-            <a:schemeClr val="accent1"/>
-          </a:lnRef>
-          <a:fillRef idx="3">
-            <a:schemeClr val="accent1"/>
-          </a:fillRef>
-          <a:effectRef idx="2">
-            <a:schemeClr val="accent1"/>
-          </a:effectRef>
-          <a:fontRef idx="minor">
-            <a:schemeClr val="lt1"/>
-          </a:fontRef>
-        </p:style>
-        <p:txBody>
-          <a:bodyPr rtlCol="0" anchor="ctr"/>
-          <a:lstStyle/>
-          <a:p>
-            <a:pPr algn="ctr"/>
-          </a:p>
-        </p:txBody>
-      </p:sp>
-      <p:sp>
-        <p:nvSpPr>
-          <p:cNvPr id="20" name="TextBox 19"/>
+          <p:cNvPr id="15" name="TextBox 14"/>
           <p:cNvSpPr txBox="1"/>
           <p:nvPr/>
         </p:nvSpPr>
@@ -28501,7 +28272,7 @@
       </p:sp>
       <p:sp>
         <p:nvSpPr>
-          <p:cNvPr id="21" name="TextBox 20"/>
+          <p:cNvPr id="16" name="TextBox 15"/>
           <p:cNvSpPr txBox="1"/>
           <p:nvPr/>
         </p:nvSpPr>

--- a/examples/gallery/pattern_gallery.pptx
+++ b/examples/gallery/pattern_gallery.pptx
@@ -27739,7 +27739,7 @@
         </p:nvSpPr>
         <p:spPr>
           <a:xfrm>
-            <a:off x="502920" y="1691640"/>
+            <a:off x="502920" y="2366284"/>
             <a:ext cx="365760" cy="256032"/>
           </a:xfrm>
           <a:prstGeom prst="rect">
@@ -27780,7 +27780,7 @@
         </p:nvSpPr>
         <p:spPr>
           <a:xfrm>
-            <a:off x="1005840" y="1682496"/>
+            <a:off x="1005840" y="2357140"/>
             <a:ext cx="2945282" cy="320040"/>
           </a:xfrm>
           <a:prstGeom prst="rect">
@@ -27800,7 +27800,7 @@
               </a:lnSpc>
             </a:pPr>
             <a:r>
-              <a:rPr sz="1650" b="1" lang="ja-JP">
+              <a:rPr sz="1750" b="1" lang="ja-JP">
                 <a:solidFill>
                   <a:srgbClr val="182C43"/>
                 </a:solidFill>
@@ -27821,7 +27821,7 @@
         </p:nvCxnSpPr>
         <p:spPr>
           <a:xfrm>
-            <a:off x="1005840" y="2103120"/>
+            <a:off x="1005840" y="2777764"/>
             <a:ext cx="2945282" cy="0"/>
           </a:xfrm>
           <a:prstGeom prst="line">
@@ -27857,8 +27857,8 @@
         </p:nvSpPr>
         <p:spPr>
           <a:xfrm>
-            <a:off x="1005840" y="2231136"/>
-            <a:ext cx="2917850" cy="3136392"/>
+            <a:off x="1005840" y="2905780"/>
+            <a:ext cx="2917850" cy="1298448"/>
           </a:xfrm>
           <a:prstGeom prst="rect">
             <a:avLst/>
@@ -27877,7 +27877,7 @@
               </a:lnSpc>
             </a:pPr>
             <a:r>
-              <a:rPr sz="1300" b="0" lang="ja-JP">
+              <a:rPr sz="1400" b="0" lang="ja-JP">
                 <a:solidFill>
                   <a:srgbClr val="202729"/>
                 </a:solidFill>
@@ -27885,7 +27885,7 @@
                 <a:ea typeface="Yu Gothic"/>
                 <a:cs typeface="Yu Gothic"/>
               </a:rPr>
-              <a:t>部門ごとに資料の構成と確認方法が</a:t>
+              <a:t>部門ごとに資料の構成と</a:t>
             </a:r>
           </a:p>
           <a:p>
@@ -27895,7 +27895,7 @@
               </a:lnSpc>
             </a:pPr>
             <a:r>
-              <a:rPr sz="1300" b="0" lang="ja-JP">
+              <a:rPr sz="1400" b="0" lang="ja-JP">
                 <a:solidFill>
                   <a:srgbClr val="202729"/>
                 </a:solidFill>
@@ -27903,7 +27903,7 @@
                 <a:ea typeface="Yu Gothic"/>
                 <a:cs typeface="Yu Gothic"/>
               </a:rPr>
-              <a:t>異なり、作成とレビューの双方に</a:t>
+              <a:t>確認方法が異なり、作成と</a:t>
             </a:r>
           </a:p>
           <a:p>
@@ -27913,7 +27913,7 @@
               </a:lnSpc>
             </a:pPr>
             <a:r>
-              <a:rPr sz="1300" b="0" lang="ja-JP">
+              <a:rPr sz="1400" b="0" lang="ja-JP">
                 <a:solidFill>
                   <a:srgbClr val="202729"/>
                 </a:solidFill>
@@ -27921,7 +27921,25 @@
                 <a:ea typeface="Yu Gothic"/>
                 <a:cs typeface="Yu Gothic"/>
               </a:rPr>
-              <a:t>手戻りが発生している。</a:t>
+              <a:t>レビューの双方に手戻りが</a:t>
+            </a:r>
+          </a:p>
+          <a:p>
+            <a:pPr algn="l">
+              <a:lnSpc>
+                <a:spcPct val="122000"/>
+              </a:lnSpc>
+            </a:pPr>
+            <a:r>
+              <a:rPr sz="1400" b="0" lang="ja-JP">
+                <a:solidFill>
+                  <a:srgbClr val="202729"/>
+                </a:solidFill>
+                <a:latin typeface="Yu Gothic"/>
+                <a:ea typeface="Yu Gothic"/>
+                <a:cs typeface="Yu Gothic"/>
+              </a:rPr>
+              <a:t>発生している。</a:t>
             </a:r>
           </a:p>
         </p:txBody>
@@ -27934,7 +27952,7 @@
         </p:nvSpPr>
         <p:spPr>
           <a:xfrm>
-            <a:off x="4371746" y="1691640"/>
+            <a:off x="4371746" y="2366284"/>
             <a:ext cx="365760" cy="256032"/>
           </a:xfrm>
           <a:prstGeom prst="rect">
@@ -27975,7 +27993,7 @@
         </p:nvSpPr>
         <p:spPr>
           <a:xfrm>
-            <a:off x="4874666" y="1682496"/>
+            <a:off x="4874666" y="2357140"/>
             <a:ext cx="2945282" cy="320040"/>
           </a:xfrm>
           <a:prstGeom prst="rect">
@@ -27995,7 +28013,7 @@
               </a:lnSpc>
             </a:pPr>
             <a:r>
-              <a:rPr sz="1650" b="1" lang="ja-JP">
+              <a:rPr sz="1750" b="1" lang="ja-JP">
                 <a:solidFill>
                   <a:srgbClr val="182C43"/>
                 </a:solidFill>
@@ -28016,7 +28034,7 @@
         </p:nvCxnSpPr>
         <p:spPr>
           <a:xfrm>
-            <a:off x="4874666" y="2103120"/>
+            <a:off x="4874666" y="2777764"/>
             <a:ext cx="2945282" cy="0"/>
           </a:xfrm>
           <a:prstGeom prst="line">
@@ -28052,8 +28070,8 @@
         </p:nvSpPr>
         <p:spPr>
           <a:xfrm>
-            <a:off x="4874666" y="2231136"/>
-            <a:ext cx="2917850" cy="3136392"/>
+            <a:off x="4874666" y="2905780"/>
+            <a:ext cx="2917850" cy="1298448"/>
           </a:xfrm>
           <a:prstGeom prst="rect">
             <a:avLst/>
@@ -28072,7 +28090,7 @@
               </a:lnSpc>
             </a:pPr>
             <a:r>
-              <a:rPr sz="1300" b="0" lang="ja-JP">
+              <a:rPr sz="1400" b="0" lang="ja-JP">
                 <a:solidFill>
                   <a:srgbClr val="202729"/>
                 </a:solidFill>
@@ -28080,7 +28098,7 @@
                 <a:ea typeface="Yu Gothic"/>
                 <a:cs typeface="Yu Gothic"/>
               </a:rPr>
-              <a:t>全資料を一律化するのではなく、</a:t>
+              <a:t>全資料を</a:t>
             </a:r>
           </a:p>
           <a:p>
@@ -28090,7 +28108,7 @@
               </a:lnSpc>
             </a:pPr>
             <a:r>
-              <a:rPr sz="1300" b="0" lang="ja-JP">
+              <a:rPr sz="1400" b="0" lang="ja-JP">
                 <a:solidFill>
                   <a:srgbClr val="202729"/>
                 </a:solidFill>
@@ -28098,6 +28116,24 @@
                 <a:ea typeface="Yu Gothic"/>
                 <a:cs typeface="Yu Gothic"/>
               </a:rPr>
+              <a:t>一律化するのではなく、</a:t>
+            </a:r>
+          </a:p>
+          <a:p>
+            <a:pPr algn="l">
+              <a:lnSpc>
+                <a:spcPct val="122000"/>
+              </a:lnSpc>
+            </a:pPr>
+            <a:r>
+              <a:rPr sz="1400" b="0" lang="ja-JP">
+                <a:solidFill>
+                  <a:srgbClr val="202729"/>
+                </a:solidFill>
+                <a:latin typeface="Yu Gothic"/>
+                <a:ea typeface="Yu Gothic"/>
+                <a:cs typeface="Yu Gothic"/>
+              </a:rPr>
               <a:t>頻出する業務パターンから</a:t>
             </a:r>
           </a:p>
@@ -28108,7 +28144,7 @@
               </a:lnSpc>
             </a:pPr>
             <a:r>
-              <a:rPr sz="1300" b="0" lang="ja-JP">
+              <a:rPr sz="1400" b="0" lang="ja-JP">
                 <a:solidFill>
                   <a:srgbClr val="202729"/>
                 </a:solidFill>
@@ -28126,7 +28162,7 @@
               </a:lnSpc>
             </a:pPr>
             <a:r>
-              <a:rPr sz="1300" b="0" lang="ja-JP">
+              <a:rPr sz="1400" b="0" lang="ja-JP">
                 <a:solidFill>
                   <a:srgbClr val="202729"/>
                 </a:solidFill>
@@ -28147,7 +28183,7 @@
         </p:nvSpPr>
         <p:spPr>
           <a:xfrm>
-            <a:off x="8240572" y="1691640"/>
+            <a:off x="8240572" y="2366284"/>
             <a:ext cx="365760" cy="256032"/>
           </a:xfrm>
           <a:prstGeom prst="rect">
@@ -28188,7 +28224,7 @@
         </p:nvSpPr>
         <p:spPr>
           <a:xfrm>
-            <a:off x="8743492" y="1682496"/>
+            <a:off x="8743492" y="2357140"/>
             <a:ext cx="2945282" cy="320040"/>
           </a:xfrm>
           <a:prstGeom prst="rect">
@@ -28208,7 +28244,7 @@
               </a:lnSpc>
             </a:pPr>
             <a:r>
-              <a:rPr sz="1650" b="1" lang="ja-JP">
+              <a:rPr sz="1750" b="1" lang="ja-JP">
                 <a:solidFill>
                   <a:srgbClr val="182C43"/>
                 </a:solidFill>
@@ -28229,7 +28265,7 @@
         </p:nvCxnSpPr>
         <p:spPr>
           <a:xfrm>
-            <a:off x="8743492" y="2103120"/>
+            <a:off x="8743492" y="2777764"/>
             <a:ext cx="2945283" cy="0"/>
           </a:xfrm>
           <a:prstGeom prst="line">
@@ -28265,8 +28301,8 @@
         </p:nvSpPr>
         <p:spPr>
           <a:xfrm>
-            <a:off x="8743492" y="2231136"/>
-            <a:ext cx="2917850" cy="3136392"/>
+            <a:off x="8743492" y="2905780"/>
+            <a:ext cx="2917850" cy="1298448"/>
           </a:xfrm>
           <a:prstGeom prst="rect">
             <a:avLst/>
@@ -28285,7 +28321,7 @@
               </a:lnSpc>
             </a:pPr>
             <a:r>
-              <a:rPr sz="1300" b="0" lang="ja-JP">
+              <a:rPr sz="1400" b="0" lang="ja-JP">
                 <a:solidFill>
                   <a:srgbClr val="202729"/>
                 </a:solidFill>
@@ -28303,7 +28339,7 @@
               </a:lnSpc>
             </a:pPr>
             <a:r>
-              <a:rPr sz="1300" b="0" lang="ja-JP">
+              <a:rPr sz="1400" b="0" lang="ja-JP">
                 <a:solidFill>
                   <a:srgbClr val="202729"/>
                 </a:solidFill>
@@ -28321,7 +28357,7 @@
               </a:lnSpc>
             </a:pPr>
             <a:r>
-              <a:rPr sz="1300" b="0" lang="ja-JP">
+              <a:rPr sz="1400" b="0" lang="ja-JP">
                 <a:solidFill>
                   <a:srgbClr val="202729"/>
                 </a:solidFill>
@@ -28339,7 +28375,7 @@
               </a:lnSpc>
             </a:pPr>
             <a:r>
-              <a:rPr sz="1300" b="0" lang="ja-JP">
+              <a:rPr sz="1400" b="0" lang="ja-JP">
                 <a:solidFill>
                   <a:srgbClr val="202729"/>
                 </a:solidFill>
@@ -28360,7 +28396,7 @@
         </p:nvSpPr>
         <p:spPr>
           <a:xfrm>
-            <a:off x="502920" y="5696712"/>
+            <a:off x="502920" y="4496836"/>
             <a:ext cx="11185855" cy="530352"/>
           </a:xfrm>
           <a:prstGeom prst="rect">
@@ -28404,7 +28440,7 @@
         </p:nvSpPr>
         <p:spPr>
           <a:xfrm>
-            <a:off x="704088" y="5833872"/>
+            <a:off x="704088" y="4633996"/>
             <a:ext cx="566928" cy="219456"/>
           </a:xfrm>
           <a:prstGeom prst="rect">
@@ -28445,7 +28481,7 @@
         </p:nvSpPr>
         <p:spPr>
           <a:xfrm>
-            <a:off x="1435608" y="5797296"/>
+            <a:off x="1435608" y="4597420"/>
             <a:ext cx="10015423" cy="310896"/>
           </a:xfrm>
           <a:prstGeom prst="rect">
@@ -28767,7 +28803,7 @@
         </p:nvSpPr>
         <p:spPr>
           <a:xfrm>
-            <a:off x="576072" y="1664208"/>
+            <a:off x="576072" y="1673534"/>
             <a:ext cx="4663440" cy="310896"/>
           </a:xfrm>
           <a:prstGeom prst="rect">
@@ -28808,7 +28844,7 @@
         </p:nvSpPr>
         <p:spPr>
           <a:xfrm>
-            <a:off x="6830567" y="1664208"/>
+            <a:off x="6830567" y="1673534"/>
             <a:ext cx="4785055" cy="310896"/>
           </a:xfrm>
           <a:prstGeom prst="rect">
@@ -28849,7 +28885,7 @@
         </p:nvSpPr>
         <p:spPr>
           <a:xfrm>
-            <a:off x="5404103" y="1682496"/>
+            <a:off x="5404103" y="1691822"/>
             <a:ext cx="1261872" cy="256032"/>
           </a:xfrm>
           <a:prstGeom prst="rect">
@@ -28890,7 +28926,7 @@
         </p:nvCxnSpPr>
         <p:spPr>
           <a:xfrm>
-            <a:off x="576072" y="2057400"/>
+            <a:off x="576072" y="2066726"/>
             <a:ext cx="4663440" cy="0"/>
           </a:xfrm>
           <a:prstGeom prst="line">
@@ -28926,7 +28962,7 @@
         </p:nvCxnSpPr>
         <p:spPr>
           <a:xfrm>
-            <a:off x="6830567" y="2057400"/>
+            <a:off x="6830567" y="2066726"/>
             <a:ext cx="4785056" cy="0"/>
           </a:xfrm>
           <a:prstGeom prst="line">
@@ -28962,7 +28998,7 @@
         </p:nvSpPr>
         <p:spPr>
           <a:xfrm>
-            <a:off x="5404103" y="2176272"/>
+            <a:off x="5404103" y="2185598"/>
             <a:ext cx="1261872" cy="3401568"/>
           </a:xfrm>
           <a:prstGeom prst="rect">
@@ -29006,7 +29042,7 @@
         </p:nvSpPr>
         <p:spPr>
           <a:xfrm>
-            <a:off x="576072" y="2176272"/>
+            <a:off x="576072" y="2185598"/>
             <a:ext cx="4663440" cy="621792"/>
           </a:xfrm>
           <a:prstGeom prst="rect">
@@ -29050,7 +29086,7 @@
         </p:nvSpPr>
         <p:spPr>
           <a:xfrm>
-            <a:off x="6830567" y="2176272"/>
+            <a:off x="6830567" y="2185598"/>
             <a:ext cx="4785055" cy="621792"/>
           </a:xfrm>
           <a:prstGeom prst="rect">
@@ -29094,7 +29130,7 @@
         </p:nvSpPr>
         <p:spPr>
           <a:xfrm>
-            <a:off x="758952" y="2176272"/>
+            <a:off x="758952" y="2185598"/>
             <a:ext cx="4297679" cy="621792"/>
           </a:xfrm>
           <a:prstGeom prst="rect">
@@ -29135,7 +29171,7 @@
         </p:nvSpPr>
         <p:spPr>
           <a:xfrm>
-            <a:off x="5404103" y="2176272"/>
+            <a:off x="5404103" y="2185598"/>
             <a:ext cx="1261872" cy="621792"/>
           </a:xfrm>
           <a:prstGeom prst="rect">
@@ -29176,7 +29212,7 @@
         </p:nvSpPr>
         <p:spPr>
           <a:xfrm>
-            <a:off x="7013447" y="2176272"/>
+            <a:off x="7013447" y="2185598"/>
             <a:ext cx="4419295" cy="621792"/>
           </a:xfrm>
           <a:prstGeom prst="rect">
@@ -29217,7 +29253,7 @@
         </p:nvSpPr>
         <p:spPr>
           <a:xfrm>
-            <a:off x="576072" y="2871215"/>
+            <a:off x="576072" y="2880542"/>
             <a:ext cx="4663440" cy="621792"/>
           </a:xfrm>
           <a:prstGeom prst="rect">
@@ -29261,7 +29297,7 @@
         </p:nvSpPr>
         <p:spPr>
           <a:xfrm>
-            <a:off x="6830567" y="2871215"/>
+            <a:off x="6830567" y="2880542"/>
             <a:ext cx="4785055" cy="621792"/>
           </a:xfrm>
           <a:prstGeom prst="rect">
@@ -29305,7 +29341,7 @@
         </p:nvSpPr>
         <p:spPr>
           <a:xfrm>
-            <a:off x="758952" y="2871215"/>
+            <a:off x="758952" y="2880542"/>
             <a:ext cx="4297679" cy="621792"/>
           </a:xfrm>
           <a:prstGeom prst="rect">
@@ -29346,7 +29382,7 @@
         </p:nvSpPr>
         <p:spPr>
           <a:xfrm>
-            <a:off x="5404103" y="2871215"/>
+            <a:off x="5404103" y="2880542"/>
             <a:ext cx="1261872" cy="621792"/>
           </a:xfrm>
           <a:prstGeom prst="rect">
@@ -29387,7 +29423,7 @@
         </p:nvSpPr>
         <p:spPr>
           <a:xfrm>
-            <a:off x="7013447" y="2871215"/>
+            <a:off x="7013447" y="2880542"/>
             <a:ext cx="4419295" cy="621792"/>
           </a:xfrm>
           <a:prstGeom prst="rect">
@@ -29428,7 +29464,7 @@
         </p:nvSpPr>
         <p:spPr>
           <a:xfrm>
-            <a:off x="576072" y="3566159"/>
+            <a:off x="576072" y="3575486"/>
             <a:ext cx="4663440" cy="621792"/>
           </a:xfrm>
           <a:prstGeom prst="rect">
@@ -29472,7 +29508,7 @@
         </p:nvSpPr>
         <p:spPr>
           <a:xfrm>
-            <a:off x="6830567" y="3566159"/>
+            <a:off x="6830567" y="3575486"/>
             <a:ext cx="4785055" cy="621792"/>
           </a:xfrm>
           <a:prstGeom prst="rect">
@@ -29516,7 +29552,7 @@
         </p:nvSpPr>
         <p:spPr>
           <a:xfrm>
-            <a:off x="758952" y="3566159"/>
+            <a:off x="758952" y="3575486"/>
             <a:ext cx="4297679" cy="621792"/>
           </a:xfrm>
           <a:prstGeom prst="rect">
@@ -29557,7 +29593,7 @@
         </p:nvSpPr>
         <p:spPr>
           <a:xfrm>
-            <a:off x="5404103" y="3566159"/>
+            <a:off x="5404103" y="3575486"/>
             <a:ext cx="1261872" cy="621792"/>
           </a:xfrm>
           <a:prstGeom prst="rect">
@@ -29598,7 +29634,7 @@
         </p:nvSpPr>
         <p:spPr>
           <a:xfrm>
-            <a:off x="7013447" y="3566159"/>
+            <a:off x="7013447" y="3575486"/>
             <a:ext cx="4419295" cy="621792"/>
           </a:xfrm>
           <a:prstGeom prst="rect">
@@ -29639,7 +29675,7 @@
         </p:nvSpPr>
         <p:spPr>
           <a:xfrm>
-            <a:off x="576072" y="4261103"/>
+            <a:off x="576072" y="4270430"/>
             <a:ext cx="4663440" cy="621792"/>
           </a:xfrm>
           <a:prstGeom prst="rect">
@@ -29683,7 +29719,7 @@
         </p:nvSpPr>
         <p:spPr>
           <a:xfrm>
-            <a:off x="6830567" y="4261103"/>
+            <a:off x="6830567" y="4270430"/>
             <a:ext cx="4785055" cy="621792"/>
           </a:xfrm>
           <a:prstGeom prst="rect">
@@ -29727,7 +29763,7 @@
         </p:nvSpPr>
         <p:spPr>
           <a:xfrm>
-            <a:off x="758952" y="4261103"/>
+            <a:off x="758952" y="4270430"/>
             <a:ext cx="4297679" cy="621792"/>
           </a:xfrm>
           <a:prstGeom prst="rect">
@@ -29768,7 +29804,7 @@
         </p:nvSpPr>
         <p:spPr>
           <a:xfrm>
-            <a:off x="5404103" y="4261103"/>
+            <a:off x="5404103" y="4270430"/>
             <a:ext cx="1261872" cy="621792"/>
           </a:xfrm>
           <a:prstGeom prst="rect">
@@ -29809,7 +29845,7 @@
         </p:nvSpPr>
         <p:spPr>
           <a:xfrm>
-            <a:off x="7013447" y="4261103"/>
+            <a:off x="7013447" y="4270430"/>
             <a:ext cx="4419295" cy="621792"/>
           </a:xfrm>
           <a:prstGeom prst="rect">
@@ -29850,7 +29886,7 @@
         </p:nvSpPr>
         <p:spPr>
           <a:xfrm>
-            <a:off x="576072" y="4956047"/>
+            <a:off x="576072" y="4965374"/>
             <a:ext cx="4663440" cy="621792"/>
           </a:xfrm>
           <a:prstGeom prst="rect">
@@ -29894,7 +29930,7 @@
         </p:nvSpPr>
         <p:spPr>
           <a:xfrm>
-            <a:off x="6830567" y="4956047"/>
+            <a:off x="6830567" y="4965374"/>
             <a:ext cx="4785055" cy="621792"/>
           </a:xfrm>
           <a:prstGeom prst="rect">
@@ -29938,7 +29974,7 @@
         </p:nvSpPr>
         <p:spPr>
           <a:xfrm>
-            <a:off x="758952" y="4956047"/>
+            <a:off x="758952" y="4965374"/>
             <a:ext cx="4297679" cy="621792"/>
           </a:xfrm>
           <a:prstGeom prst="rect">
@@ -29979,7 +30015,7 @@
         </p:nvSpPr>
         <p:spPr>
           <a:xfrm>
-            <a:off x="5404103" y="4956047"/>
+            <a:off x="5404103" y="4965374"/>
             <a:ext cx="1261872" cy="621792"/>
           </a:xfrm>
           <a:prstGeom prst="rect">
@@ -30020,7 +30056,7 @@
         </p:nvSpPr>
         <p:spPr>
           <a:xfrm>
-            <a:off x="7013447" y="4956047"/>
+            <a:off x="7013447" y="4965374"/>
             <a:ext cx="4419295" cy="621792"/>
           </a:xfrm>
           <a:prstGeom prst="rect">
@@ -30469,7 +30505,7 @@
         <p:spPr>
           <a:xfrm>
             <a:off x="649224" y="1645920"/>
-            <a:ext cx="4069080" cy="274320"/>
+            <a:ext cx="3749039" cy="274320"/>
           </a:xfrm>
           <a:prstGeom prst="rect">
             <a:avLst/>
@@ -30509,8 +30545,49 @@
         </p:nvSpPr>
         <p:spPr>
           <a:xfrm>
-            <a:off x="7473391" y="1645920"/>
-            <a:ext cx="4069080" cy="274320"/>
+            <a:off x="4636007" y="1645920"/>
+            <a:ext cx="2139696" cy="274320"/>
+          </a:xfrm>
+          <a:prstGeom prst="rect">
+            <a:avLst/>
+          </a:prstGeom>
+          <a:noFill/>
+        </p:spPr>
+        <p:txBody>
+          <a:bodyPr wrap="square" anchor="t" lIns="0" rIns="0" tIns="0" bIns="0">
+            <a:spAutoFit/>
+          </a:bodyPr>
+          <a:lstStyle/>
+          <a:p>
+            <a:pPr algn="ctr">
+              <a:lnSpc>
+                <a:spcPct val="130000"/>
+              </a:lnSpc>
+            </a:pPr>
+            <a:r>
+              <a:rPr sz="1100" b="1" lang="ja-JP">
+                <a:solidFill>
+                  <a:srgbClr val="666E70"/>
+                </a:solidFill>
+                <a:latin typeface="Yu Gothic"/>
+                <a:ea typeface="Yu Gothic"/>
+                <a:cs typeface="Yu Gothic"/>
+              </a:rPr>
+              <a:t>対応</a:t>
+            </a:r>
+          </a:p>
+        </p:txBody>
+      </p:sp>
+      <p:sp>
+        <p:nvSpPr>
+          <p:cNvPr id="7" name="TextBox 6"/>
+          <p:cNvSpPr txBox="1"/>
+          <p:nvPr/>
+        </p:nvSpPr>
+        <p:spPr>
+          <a:xfrm>
+            <a:off x="7068312" y="1645920"/>
+            <a:ext cx="4474159" cy="274320"/>
           </a:xfrm>
           <a:prstGeom prst="rect">
             <a:avLst/>
@@ -30544,23 +30621,2017 @@
       </p:sp>
       <p:cxnSp>
         <p:nvCxnSpPr>
-          <p:cNvPr id="7" name="Connector 6"/>
+          <p:cNvPr id="8" name="Connector 7"/>
           <p:cNvCxnSpPr/>
           <p:nvPr/>
         </p:nvCxnSpPr>
         <p:spPr>
           <a:xfrm>
-            <a:off x="4718304" y="2686050"/>
-            <a:ext cx="2755087" cy="0"/>
+            <a:off x="649224" y="2951226"/>
+            <a:ext cx="3749040" cy="0"/>
           </a:xfrm>
           <a:prstGeom prst="line">
             <a:avLst/>
           </a:prstGeom>
-          <a:ln w="17780">
+          <a:ln w="8255">
             <a:solidFill>
-              <a:srgbClr val="0D7870"/>
+              <a:srgbClr val="D1CFC8"/>
             </a:solidFill>
-            <a:tailEnd type="triangle" w="med" len="med"/>
+          </a:ln>
+          <a:effectLst/>
+        </p:spPr>
+        <p:style>
+          <a:lnRef idx="2">
+            <a:schemeClr val="accent1"/>
+          </a:lnRef>
+          <a:fillRef idx="0">
+            <a:schemeClr val="accent1"/>
+          </a:fillRef>
+          <a:effectRef idx="1">
+            <a:schemeClr val="accent1"/>
+          </a:effectRef>
+          <a:fontRef idx="minor">
+            <a:schemeClr val="tx1"/>
+          </a:fontRef>
+        </p:style>
+      </p:cxnSp>
+      <p:sp>
+        <p:nvSpPr>
+          <p:cNvPr id="9" name="Oval 8"/>
+          <p:cNvSpPr/>
+          <p:nvPr/>
+        </p:nvSpPr>
+        <p:spPr>
+          <a:xfrm>
+            <a:off x="763524" y="2571750"/>
+            <a:ext cx="228600" cy="228600"/>
+          </a:xfrm>
+          <a:prstGeom prst="ellipse">
+            <a:avLst/>
+          </a:prstGeom>
+          <a:solidFill>
+            <a:srgbClr val="0D7870"/>
+          </a:solidFill>
+          <a:ln>
+            <a:noFill/>
+          </a:ln>
+          <a:effectLst/>
+        </p:spPr>
+        <p:style>
+          <a:lnRef idx="1">
+            <a:schemeClr val="accent1"/>
+          </a:lnRef>
+          <a:fillRef idx="3">
+            <a:schemeClr val="accent1"/>
+          </a:fillRef>
+          <a:effectRef idx="2">
+            <a:schemeClr val="accent1"/>
+          </a:effectRef>
+          <a:fontRef idx="minor">
+            <a:schemeClr val="lt1"/>
+          </a:fontRef>
+        </p:style>
+        <p:txBody>
+          <a:bodyPr rtlCol="0" anchor="ctr"/>
+          <a:lstStyle/>
+          <a:p>
+            <a:pPr algn="ctr"/>
+          </a:p>
+        </p:txBody>
+      </p:sp>
+      <p:sp>
+        <p:nvSpPr>
+          <p:cNvPr id="10" name="TextBox 9"/>
+          <p:cNvSpPr txBox="1"/>
+          <p:nvPr/>
+        </p:nvSpPr>
+        <p:spPr>
+          <a:xfrm>
+            <a:off x="768096" y="2576322"/>
+            <a:ext cx="219456" cy="219456"/>
+          </a:xfrm>
+          <a:prstGeom prst="rect">
+            <a:avLst/>
+          </a:prstGeom>
+          <a:noFill/>
+        </p:spPr>
+        <p:txBody>
+          <a:bodyPr wrap="square" anchor="ctr" lIns="0" rIns="0" tIns="0" bIns="0">
+            <a:spAutoFit/>
+          </a:bodyPr>
+          <a:lstStyle/>
+          <a:p>
+            <a:pPr algn="ctr">
+              <a:lnSpc>
+                <a:spcPct val="130000"/>
+              </a:lnSpc>
+            </a:pPr>
+            <a:r>
+              <a:rPr sz="850" b="1" lang="ja-JP">
+                <a:solidFill>
+                  <a:srgbClr val="FFFFFC"/>
+                </a:solidFill>
+                <a:latin typeface="Yu Gothic"/>
+                <a:ea typeface="Yu Gothic"/>
+                <a:cs typeface="Yu Gothic"/>
+              </a:rPr>
+              <a:t>1</a:t>
+            </a:r>
+          </a:p>
+        </p:txBody>
+      </p:sp>
+      <p:sp>
+        <p:nvSpPr>
+          <p:cNvPr id="11" name="TextBox 10"/>
+          <p:cNvSpPr txBox="1"/>
+          <p:nvPr/>
+        </p:nvSpPr>
+        <p:spPr>
+          <a:xfrm>
+            <a:off x="1088136" y="2420874"/>
+            <a:ext cx="3145535" cy="530352"/>
+          </a:xfrm>
+          <a:prstGeom prst="rect">
+            <a:avLst/>
+          </a:prstGeom>
+          <a:noFill/>
+        </p:spPr>
+        <p:txBody>
+          <a:bodyPr wrap="square" anchor="ctr" lIns="0" rIns="0" tIns="0" bIns="0">
+            <a:spAutoFit/>
+          </a:bodyPr>
+          <a:lstStyle/>
+          <a:p>
+            <a:pPr algn="l">
+              <a:lnSpc>
+                <a:spcPct val="115000"/>
+              </a:lnSpc>
+            </a:pPr>
+            <a:r>
+              <a:rPr sz="1350" b="1" lang="ja-JP">
+                <a:solidFill>
+                  <a:srgbClr val="182C43"/>
+                </a:solidFill>
+                <a:latin typeface="Yu Gothic"/>
+                <a:ea typeface="Yu Gothic"/>
+                <a:cs typeface="Yu Gothic"/>
+              </a:rPr>
+              <a:t>手作業が多く処理時間が長い</a:t>
+            </a:r>
+          </a:p>
+        </p:txBody>
+      </p:sp>
+      <p:cxnSp>
+        <p:nvCxnSpPr>
+          <p:cNvPr id="12" name="Connector 11"/>
+          <p:cNvCxnSpPr/>
+          <p:nvPr/>
+        </p:nvCxnSpPr>
+        <p:spPr>
+          <a:xfrm>
+            <a:off x="649224" y="3600450"/>
+            <a:ext cx="3749040" cy="0"/>
+          </a:xfrm>
+          <a:prstGeom prst="line">
+            <a:avLst/>
+          </a:prstGeom>
+          <a:ln w="8255">
+            <a:solidFill>
+              <a:srgbClr val="D1CFC8"/>
+            </a:solidFill>
+          </a:ln>
+          <a:effectLst/>
+        </p:spPr>
+        <p:style>
+          <a:lnRef idx="2">
+            <a:schemeClr val="accent1"/>
+          </a:lnRef>
+          <a:fillRef idx="0">
+            <a:schemeClr val="accent1"/>
+          </a:fillRef>
+          <a:effectRef idx="1">
+            <a:schemeClr val="accent1"/>
+          </a:effectRef>
+          <a:fontRef idx="minor">
+            <a:schemeClr val="tx1"/>
+          </a:fontRef>
+        </p:style>
+      </p:cxnSp>
+      <p:sp>
+        <p:nvSpPr>
+          <p:cNvPr id="13" name="Oval 12"/>
+          <p:cNvSpPr/>
+          <p:nvPr/>
+        </p:nvSpPr>
+        <p:spPr>
+          <a:xfrm>
+            <a:off x="763524" y="3220974"/>
+            <a:ext cx="228600" cy="228600"/>
+          </a:xfrm>
+          <a:prstGeom prst="ellipse">
+            <a:avLst/>
+          </a:prstGeom>
+          <a:solidFill>
+            <a:srgbClr val="0D7870"/>
+          </a:solidFill>
+          <a:ln>
+            <a:noFill/>
+          </a:ln>
+          <a:effectLst/>
+        </p:spPr>
+        <p:style>
+          <a:lnRef idx="1">
+            <a:schemeClr val="accent1"/>
+          </a:lnRef>
+          <a:fillRef idx="3">
+            <a:schemeClr val="accent1"/>
+          </a:fillRef>
+          <a:effectRef idx="2">
+            <a:schemeClr val="accent1"/>
+          </a:effectRef>
+          <a:fontRef idx="minor">
+            <a:schemeClr val="lt1"/>
+          </a:fontRef>
+        </p:style>
+        <p:txBody>
+          <a:bodyPr rtlCol="0" anchor="ctr"/>
+          <a:lstStyle/>
+          <a:p>
+            <a:pPr algn="ctr"/>
+          </a:p>
+        </p:txBody>
+      </p:sp>
+      <p:sp>
+        <p:nvSpPr>
+          <p:cNvPr id="14" name="TextBox 13"/>
+          <p:cNvSpPr txBox="1"/>
+          <p:nvPr/>
+        </p:nvSpPr>
+        <p:spPr>
+          <a:xfrm>
+            <a:off x="768096" y="3225546"/>
+            <a:ext cx="219456" cy="219456"/>
+          </a:xfrm>
+          <a:prstGeom prst="rect">
+            <a:avLst/>
+          </a:prstGeom>
+          <a:noFill/>
+        </p:spPr>
+        <p:txBody>
+          <a:bodyPr wrap="square" anchor="ctr" lIns="0" rIns="0" tIns="0" bIns="0">
+            <a:spAutoFit/>
+          </a:bodyPr>
+          <a:lstStyle/>
+          <a:p>
+            <a:pPr algn="ctr">
+              <a:lnSpc>
+                <a:spcPct val="130000"/>
+              </a:lnSpc>
+            </a:pPr>
+            <a:r>
+              <a:rPr sz="850" b="1" lang="ja-JP">
+                <a:solidFill>
+                  <a:srgbClr val="FFFFFC"/>
+                </a:solidFill>
+                <a:latin typeface="Yu Gothic"/>
+                <a:ea typeface="Yu Gothic"/>
+                <a:cs typeface="Yu Gothic"/>
+              </a:rPr>
+              <a:t>2</a:t>
+            </a:r>
+          </a:p>
+        </p:txBody>
+      </p:sp>
+      <p:sp>
+        <p:nvSpPr>
+          <p:cNvPr id="15" name="TextBox 14"/>
+          <p:cNvSpPr txBox="1"/>
+          <p:nvPr/>
+        </p:nvSpPr>
+        <p:spPr>
+          <a:xfrm>
+            <a:off x="1088136" y="3070098"/>
+            <a:ext cx="3145535" cy="530352"/>
+          </a:xfrm>
+          <a:prstGeom prst="rect">
+            <a:avLst/>
+          </a:prstGeom>
+          <a:noFill/>
+        </p:spPr>
+        <p:txBody>
+          <a:bodyPr wrap="square" anchor="ctr" lIns="0" rIns="0" tIns="0" bIns="0">
+            <a:spAutoFit/>
+          </a:bodyPr>
+          <a:lstStyle/>
+          <a:p>
+            <a:pPr algn="l">
+              <a:lnSpc>
+                <a:spcPct val="115000"/>
+              </a:lnSpc>
+            </a:pPr>
+            <a:r>
+              <a:rPr sz="1350" b="1" lang="ja-JP">
+                <a:solidFill>
+                  <a:srgbClr val="182C43"/>
+                </a:solidFill>
+                <a:latin typeface="Yu Gothic"/>
+                <a:ea typeface="Yu Gothic"/>
+                <a:cs typeface="Yu Gothic"/>
+              </a:rPr>
+              <a:t>データが複数の管理先へ</a:t>
+            </a:r>
+          </a:p>
+          <a:p>
+            <a:pPr algn="l">
+              <a:lnSpc>
+                <a:spcPct val="115000"/>
+              </a:lnSpc>
+            </a:pPr>
+            <a:r>
+              <a:rPr sz="1350" b="1" lang="ja-JP">
+                <a:solidFill>
+                  <a:srgbClr val="182C43"/>
+                </a:solidFill>
+                <a:latin typeface="Yu Gothic"/>
+                <a:ea typeface="Yu Gothic"/>
+                <a:cs typeface="Yu Gothic"/>
+              </a:rPr>
+              <a:t>分散している</a:t>
+            </a:r>
+          </a:p>
+        </p:txBody>
+      </p:sp>
+      <p:cxnSp>
+        <p:nvCxnSpPr>
+          <p:cNvPr id="16" name="Connector 15"/>
+          <p:cNvCxnSpPr/>
+          <p:nvPr/>
+        </p:nvCxnSpPr>
+        <p:spPr>
+          <a:xfrm>
+            <a:off x="649224" y="4249674"/>
+            <a:ext cx="3749040" cy="0"/>
+          </a:xfrm>
+          <a:prstGeom prst="line">
+            <a:avLst/>
+          </a:prstGeom>
+          <a:ln w="8255">
+            <a:solidFill>
+              <a:srgbClr val="D1CFC8"/>
+            </a:solidFill>
+          </a:ln>
+          <a:effectLst/>
+        </p:spPr>
+        <p:style>
+          <a:lnRef idx="2">
+            <a:schemeClr val="accent1"/>
+          </a:lnRef>
+          <a:fillRef idx="0">
+            <a:schemeClr val="accent1"/>
+          </a:fillRef>
+          <a:effectRef idx="1">
+            <a:schemeClr val="accent1"/>
+          </a:effectRef>
+          <a:fontRef idx="minor">
+            <a:schemeClr val="tx1"/>
+          </a:fontRef>
+        </p:style>
+      </p:cxnSp>
+      <p:sp>
+        <p:nvSpPr>
+          <p:cNvPr id="17" name="Oval 16"/>
+          <p:cNvSpPr/>
+          <p:nvPr/>
+        </p:nvSpPr>
+        <p:spPr>
+          <a:xfrm>
+            <a:off x="763524" y="3870198"/>
+            <a:ext cx="228600" cy="228600"/>
+          </a:xfrm>
+          <a:prstGeom prst="ellipse">
+            <a:avLst/>
+          </a:prstGeom>
+          <a:solidFill>
+            <a:srgbClr val="0D7870"/>
+          </a:solidFill>
+          <a:ln>
+            <a:noFill/>
+          </a:ln>
+          <a:effectLst/>
+        </p:spPr>
+        <p:style>
+          <a:lnRef idx="1">
+            <a:schemeClr val="accent1"/>
+          </a:lnRef>
+          <a:fillRef idx="3">
+            <a:schemeClr val="accent1"/>
+          </a:fillRef>
+          <a:effectRef idx="2">
+            <a:schemeClr val="accent1"/>
+          </a:effectRef>
+          <a:fontRef idx="minor">
+            <a:schemeClr val="lt1"/>
+          </a:fontRef>
+        </p:style>
+        <p:txBody>
+          <a:bodyPr rtlCol="0" anchor="ctr"/>
+          <a:lstStyle/>
+          <a:p>
+            <a:pPr algn="ctr"/>
+          </a:p>
+        </p:txBody>
+      </p:sp>
+      <p:sp>
+        <p:nvSpPr>
+          <p:cNvPr id="18" name="TextBox 17"/>
+          <p:cNvSpPr txBox="1"/>
+          <p:nvPr/>
+        </p:nvSpPr>
+        <p:spPr>
+          <a:xfrm>
+            <a:off x="768096" y="3874770"/>
+            <a:ext cx="219456" cy="219456"/>
+          </a:xfrm>
+          <a:prstGeom prst="rect">
+            <a:avLst/>
+          </a:prstGeom>
+          <a:noFill/>
+        </p:spPr>
+        <p:txBody>
+          <a:bodyPr wrap="square" anchor="ctr" lIns="0" rIns="0" tIns="0" bIns="0">
+            <a:spAutoFit/>
+          </a:bodyPr>
+          <a:lstStyle/>
+          <a:p>
+            <a:pPr algn="ctr">
+              <a:lnSpc>
+                <a:spcPct val="130000"/>
+              </a:lnSpc>
+            </a:pPr>
+            <a:r>
+              <a:rPr sz="850" b="1" lang="ja-JP">
+                <a:solidFill>
+                  <a:srgbClr val="FFFFFC"/>
+                </a:solidFill>
+                <a:latin typeface="Yu Gothic"/>
+                <a:ea typeface="Yu Gothic"/>
+                <a:cs typeface="Yu Gothic"/>
+              </a:rPr>
+              <a:t>3</a:t>
+            </a:r>
+          </a:p>
+        </p:txBody>
+      </p:sp>
+      <p:sp>
+        <p:nvSpPr>
+          <p:cNvPr id="19" name="TextBox 18"/>
+          <p:cNvSpPr txBox="1"/>
+          <p:nvPr/>
+        </p:nvSpPr>
+        <p:spPr>
+          <a:xfrm>
+            <a:off x="1088136" y="3719322"/>
+            <a:ext cx="3145535" cy="530352"/>
+          </a:xfrm>
+          <a:prstGeom prst="rect">
+            <a:avLst/>
+          </a:prstGeom>
+          <a:noFill/>
+        </p:spPr>
+        <p:txBody>
+          <a:bodyPr wrap="square" anchor="ctr" lIns="0" rIns="0" tIns="0" bIns="0">
+            <a:spAutoFit/>
+          </a:bodyPr>
+          <a:lstStyle/>
+          <a:p>
+            <a:pPr algn="l">
+              <a:lnSpc>
+                <a:spcPct val="115000"/>
+              </a:lnSpc>
+            </a:pPr>
+            <a:r>
+              <a:rPr sz="1350" b="1" lang="ja-JP">
+                <a:solidFill>
+                  <a:srgbClr val="182C43"/>
+                </a:solidFill>
+                <a:latin typeface="Yu Gothic"/>
+                <a:ea typeface="Yu Gothic"/>
+                <a:cs typeface="Yu Gothic"/>
+              </a:rPr>
+              <a:t>承認完了までの待ち時間が長い</a:t>
+            </a:r>
+          </a:p>
+        </p:txBody>
+      </p:sp>
+      <p:cxnSp>
+        <p:nvCxnSpPr>
+          <p:cNvPr id="20" name="Connector 19"/>
+          <p:cNvCxnSpPr/>
+          <p:nvPr/>
+        </p:nvCxnSpPr>
+        <p:spPr>
+          <a:xfrm>
+            <a:off x="649224" y="4898898"/>
+            <a:ext cx="3749040" cy="0"/>
+          </a:xfrm>
+          <a:prstGeom prst="line">
+            <a:avLst/>
+          </a:prstGeom>
+          <a:ln w="8255">
+            <a:solidFill>
+              <a:srgbClr val="D1CFC8"/>
+            </a:solidFill>
+          </a:ln>
+          <a:effectLst/>
+        </p:spPr>
+        <p:style>
+          <a:lnRef idx="2">
+            <a:schemeClr val="accent1"/>
+          </a:lnRef>
+          <a:fillRef idx="0">
+            <a:schemeClr val="accent1"/>
+          </a:fillRef>
+          <a:effectRef idx="1">
+            <a:schemeClr val="accent1"/>
+          </a:effectRef>
+          <a:fontRef idx="minor">
+            <a:schemeClr val="tx1"/>
+          </a:fontRef>
+        </p:style>
+      </p:cxnSp>
+      <p:sp>
+        <p:nvSpPr>
+          <p:cNvPr id="21" name="Oval 20"/>
+          <p:cNvSpPr/>
+          <p:nvPr/>
+        </p:nvSpPr>
+        <p:spPr>
+          <a:xfrm>
+            <a:off x="763524" y="4519422"/>
+            <a:ext cx="228600" cy="228600"/>
+          </a:xfrm>
+          <a:prstGeom prst="ellipse">
+            <a:avLst/>
+          </a:prstGeom>
+          <a:solidFill>
+            <a:srgbClr val="0D7870"/>
+          </a:solidFill>
+          <a:ln>
+            <a:noFill/>
+          </a:ln>
+          <a:effectLst/>
+        </p:spPr>
+        <p:style>
+          <a:lnRef idx="1">
+            <a:schemeClr val="accent1"/>
+          </a:lnRef>
+          <a:fillRef idx="3">
+            <a:schemeClr val="accent1"/>
+          </a:fillRef>
+          <a:effectRef idx="2">
+            <a:schemeClr val="accent1"/>
+          </a:effectRef>
+          <a:fontRef idx="minor">
+            <a:schemeClr val="lt1"/>
+          </a:fontRef>
+        </p:style>
+        <p:txBody>
+          <a:bodyPr rtlCol="0" anchor="ctr"/>
+          <a:lstStyle/>
+          <a:p>
+            <a:pPr algn="ctr"/>
+          </a:p>
+        </p:txBody>
+      </p:sp>
+      <p:sp>
+        <p:nvSpPr>
+          <p:cNvPr id="22" name="TextBox 21"/>
+          <p:cNvSpPr txBox="1"/>
+          <p:nvPr/>
+        </p:nvSpPr>
+        <p:spPr>
+          <a:xfrm>
+            <a:off x="768096" y="4523994"/>
+            <a:ext cx="219456" cy="219456"/>
+          </a:xfrm>
+          <a:prstGeom prst="rect">
+            <a:avLst/>
+          </a:prstGeom>
+          <a:noFill/>
+        </p:spPr>
+        <p:txBody>
+          <a:bodyPr wrap="square" anchor="ctr" lIns="0" rIns="0" tIns="0" bIns="0">
+            <a:spAutoFit/>
+          </a:bodyPr>
+          <a:lstStyle/>
+          <a:p>
+            <a:pPr algn="ctr">
+              <a:lnSpc>
+                <a:spcPct val="130000"/>
+              </a:lnSpc>
+            </a:pPr>
+            <a:r>
+              <a:rPr sz="850" b="1" lang="ja-JP">
+                <a:solidFill>
+                  <a:srgbClr val="FFFFFC"/>
+                </a:solidFill>
+                <a:latin typeface="Yu Gothic"/>
+                <a:ea typeface="Yu Gothic"/>
+                <a:cs typeface="Yu Gothic"/>
+              </a:rPr>
+              <a:t>4</a:t>
+            </a:r>
+          </a:p>
+        </p:txBody>
+      </p:sp>
+      <p:sp>
+        <p:nvSpPr>
+          <p:cNvPr id="23" name="TextBox 22"/>
+          <p:cNvSpPr txBox="1"/>
+          <p:nvPr/>
+        </p:nvSpPr>
+        <p:spPr>
+          <a:xfrm>
+            <a:off x="1088136" y="4368546"/>
+            <a:ext cx="3145535" cy="530352"/>
+          </a:xfrm>
+          <a:prstGeom prst="rect">
+            <a:avLst/>
+          </a:prstGeom>
+          <a:noFill/>
+        </p:spPr>
+        <p:txBody>
+          <a:bodyPr wrap="square" anchor="ctr" lIns="0" rIns="0" tIns="0" bIns="0">
+            <a:spAutoFit/>
+          </a:bodyPr>
+          <a:lstStyle/>
+          <a:p>
+            <a:pPr algn="l">
+              <a:lnSpc>
+                <a:spcPct val="115000"/>
+              </a:lnSpc>
+            </a:pPr>
+            <a:r>
+              <a:rPr sz="1350" b="1" lang="ja-JP">
+                <a:solidFill>
+                  <a:srgbClr val="182C43"/>
+                </a:solidFill>
+                <a:latin typeface="Yu Gothic"/>
+                <a:ea typeface="Yu Gothic"/>
+                <a:cs typeface="Yu Gothic"/>
+              </a:rPr>
+              <a:t>成果物の品質にばらつきがある</a:t>
+            </a:r>
+          </a:p>
+        </p:txBody>
+      </p:sp>
+      <p:cxnSp>
+        <p:nvCxnSpPr>
+          <p:cNvPr id="24" name="Connector 23"/>
+          <p:cNvCxnSpPr/>
+          <p:nvPr/>
+        </p:nvCxnSpPr>
+        <p:spPr>
+          <a:xfrm>
+            <a:off x="649224" y="5548122"/>
+            <a:ext cx="3749040" cy="0"/>
+          </a:xfrm>
+          <a:prstGeom prst="line">
+            <a:avLst/>
+          </a:prstGeom>
+          <a:ln w="8255">
+            <a:solidFill>
+              <a:srgbClr val="D1CFC8"/>
+            </a:solidFill>
+          </a:ln>
+          <a:effectLst/>
+        </p:spPr>
+        <p:style>
+          <a:lnRef idx="2">
+            <a:schemeClr val="accent1"/>
+          </a:lnRef>
+          <a:fillRef idx="0">
+            <a:schemeClr val="accent1"/>
+          </a:fillRef>
+          <a:effectRef idx="1">
+            <a:schemeClr val="accent1"/>
+          </a:effectRef>
+          <a:fontRef idx="minor">
+            <a:schemeClr val="tx1"/>
+          </a:fontRef>
+        </p:style>
+      </p:cxnSp>
+      <p:sp>
+        <p:nvSpPr>
+          <p:cNvPr id="25" name="Oval 24"/>
+          <p:cNvSpPr/>
+          <p:nvPr/>
+        </p:nvSpPr>
+        <p:spPr>
+          <a:xfrm>
+            <a:off x="763524" y="5168646"/>
+            <a:ext cx="228600" cy="228600"/>
+          </a:xfrm>
+          <a:prstGeom prst="ellipse">
+            <a:avLst/>
+          </a:prstGeom>
+          <a:solidFill>
+            <a:srgbClr val="0D7870"/>
+          </a:solidFill>
+          <a:ln>
+            <a:noFill/>
+          </a:ln>
+          <a:effectLst/>
+        </p:spPr>
+        <p:style>
+          <a:lnRef idx="1">
+            <a:schemeClr val="accent1"/>
+          </a:lnRef>
+          <a:fillRef idx="3">
+            <a:schemeClr val="accent1"/>
+          </a:fillRef>
+          <a:effectRef idx="2">
+            <a:schemeClr val="accent1"/>
+          </a:effectRef>
+          <a:fontRef idx="minor">
+            <a:schemeClr val="lt1"/>
+          </a:fontRef>
+        </p:style>
+        <p:txBody>
+          <a:bodyPr rtlCol="0" anchor="ctr"/>
+          <a:lstStyle/>
+          <a:p>
+            <a:pPr algn="ctr"/>
+          </a:p>
+        </p:txBody>
+      </p:sp>
+      <p:sp>
+        <p:nvSpPr>
+          <p:cNvPr id="26" name="TextBox 25"/>
+          <p:cNvSpPr txBox="1"/>
+          <p:nvPr/>
+        </p:nvSpPr>
+        <p:spPr>
+          <a:xfrm>
+            <a:off x="768096" y="5173218"/>
+            <a:ext cx="219456" cy="219456"/>
+          </a:xfrm>
+          <a:prstGeom prst="rect">
+            <a:avLst/>
+          </a:prstGeom>
+          <a:noFill/>
+        </p:spPr>
+        <p:txBody>
+          <a:bodyPr wrap="square" anchor="ctr" lIns="0" rIns="0" tIns="0" bIns="0">
+            <a:spAutoFit/>
+          </a:bodyPr>
+          <a:lstStyle/>
+          <a:p>
+            <a:pPr algn="ctr">
+              <a:lnSpc>
+                <a:spcPct val="130000"/>
+              </a:lnSpc>
+            </a:pPr>
+            <a:r>
+              <a:rPr sz="850" b="1" lang="ja-JP">
+                <a:solidFill>
+                  <a:srgbClr val="FFFFFC"/>
+                </a:solidFill>
+                <a:latin typeface="Yu Gothic"/>
+                <a:ea typeface="Yu Gothic"/>
+                <a:cs typeface="Yu Gothic"/>
+              </a:rPr>
+              <a:t>5</a:t>
+            </a:r>
+          </a:p>
+        </p:txBody>
+      </p:sp>
+      <p:sp>
+        <p:nvSpPr>
+          <p:cNvPr id="27" name="TextBox 26"/>
+          <p:cNvSpPr txBox="1"/>
+          <p:nvPr/>
+        </p:nvSpPr>
+        <p:spPr>
+          <a:xfrm>
+            <a:off x="1088136" y="5017770"/>
+            <a:ext cx="3145535" cy="530352"/>
+          </a:xfrm>
+          <a:prstGeom prst="rect">
+            <a:avLst/>
+          </a:prstGeom>
+          <a:noFill/>
+        </p:spPr>
+        <p:txBody>
+          <a:bodyPr wrap="square" anchor="ctr" lIns="0" rIns="0" tIns="0" bIns="0">
+            <a:spAutoFit/>
+          </a:bodyPr>
+          <a:lstStyle/>
+          <a:p>
+            <a:pPr algn="l">
+              <a:lnSpc>
+                <a:spcPct val="115000"/>
+              </a:lnSpc>
+            </a:pPr>
+            <a:r>
+              <a:rPr sz="1350" b="1" lang="ja-JP">
+                <a:solidFill>
+                  <a:srgbClr val="182C43"/>
+                </a:solidFill>
+                <a:latin typeface="Yu Gothic"/>
+                <a:ea typeface="Yu Gothic"/>
+                <a:cs typeface="Yu Gothic"/>
+              </a:rPr>
+              <a:t>進捗と課題の把握に時間がかかる</a:t>
+            </a:r>
+          </a:p>
+        </p:txBody>
+      </p:sp>
+      <p:cxnSp>
+        <p:nvCxnSpPr>
+          <p:cNvPr id="28" name="Connector 27"/>
+          <p:cNvCxnSpPr/>
+          <p:nvPr/>
+        </p:nvCxnSpPr>
+        <p:spPr>
+          <a:xfrm>
+            <a:off x="7068312" y="2951226"/>
+            <a:ext cx="4474159" cy="0"/>
+          </a:xfrm>
+          <a:prstGeom prst="line">
+            <a:avLst/>
+          </a:prstGeom>
+          <a:ln w="8255">
+            <a:solidFill>
+              <a:srgbClr val="D1CFC8"/>
+            </a:solidFill>
+          </a:ln>
+          <a:effectLst/>
+        </p:spPr>
+        <p:style>
+          <a:lnRef idx="2">
+            <a:schemeClr val="accent1"/>
+          </a:lnRef>
+          <a:fillRef idx="0">
+            <a:schemeClr val="accent1"/>
+          </a:fillRef>
+          <a:effectRef idx="1">
+            <a:schemeClr val="accent1"/>
+          </a:effectRef>
+          <a:fontRef idx="minor">
+            <a:schemeClr val="tx1"/>
+          </a:fontRef>
+        </p:style>
+      </p:cxnSp>
+      <p:sp>
+        <p:nvSpPr>
+          <p:cNvPr id="29" name="Oval 28"/>
+          <p:cNvSpPr/>
+          <p:nvPr/>
+        </p:nvSpPr>
+        <p:spPr>
+          <a:xfrm>
+            <a:off x="11199571" y="2571750"/>
+            <a:ext cx="228600" cy="228600"/>
+          </a:xfrm>
+          <a:prstGeom prst="ellipse">
+            <a:avLst/>
+          </a:prstGeom>
+          <a:solidFill>
+            <a:srgbClr val="0D7870"/>
+          </a:solidFill>
+          <a:ln>
+            <a:noFill/>
+          </a:ln>
+          <a:effectLst/>
+        </p:spPr>
+        <p:style>
+          <a:lnRef idx="1">
+            <a:schemeClr val="accent1"/>
+          </a:lnRef>
+          <a:fillRef idx="3">
+            <a:schemeClr val="accent1"/>
+          </a:fillRef>
+          <a:effectRef idx="2">
+            <a:schemeClr val="accent1"/>
+          </a:effectRef>
+          <a:fontRef idx="minor">
+            <a:schemeClr val="lt1"/>
+          </a:fontRef>
+        </p:style>
+        <p:txBody>
+          <a:bodyPr rtlCol="0" anchor="ctr"/>
+          <a:lstStyle/>
+          <a:p>
+            <a:pPr algn="ctr"/>
+          </a:p>
+        </p:txBody>
+      </p:sp>
+      <p:sp>
+        <p:nvSpPr>
+          <p:cNvPr id="30" name="TextBox 29"/>
+          <p:cNvSpPr txBox="1"/>
+          <p:nvPr/>
+        </p:nvSpPr>
+        <p:spPr>
+          <a:xfrm>
+            <a:off x="11204143" y="2576322"/>
+            <a:ext cx="219456" cy="219456"/>
+          </a:xfrm>
+          <a:prstGeom prst="rect">
+            <a:avLst/>
+          </a:prstGeom>
+          <a:noFill/>
+        </p:spPr>
+        <p:txBody>
+          <a:bodyPr wrap="square" anchor="ctr" lIns="0" rIns="0" tIns="0" bIns="0">
+            <a:spAutoFit/>
+          </a:bodyPr>
+          <a:lstStyle/>
+          <a:p>
+            <a:pPr algn="ctr">
+              <a:lnSpc>
+                <a:spcPct val="130000"/>
+              </a:lnSpc>
+            </a:pPr>
+            <a:r>
+              <a:rPr sz="850" b="1" lang="ja-JP">
+                <a:solidFill>
+                  <a:srgbClr val="FFFFFC"/>
+                </a:solidFill>
+                <a:latin typeface="Yu Gothic"/>
+                <a:ea typeface="Yu Gothic"/>
+                <a:cs typeface="Yu Gothic"/>
+              </a:rPr>
+              <a:t>1</a:t>
+            </a:r>
+          </a:p>
+        </p:txBody>
+      </p:sp>
+      <p:sp>
+        <p:nvSpPr>
+          <p:cNvPr id="31" name="TextBox 30"/>
+          <p:cNvSpPr txBox="1"/>
+          <p:nvPr/>
+        </p:nvSpPr>
+        <p:spPr>
+          <a:xfrm>
+            <a:off x="7232903" y="2420874"/>
+            <a:ext cx="3870655" cy="530352"/>
+          </a:xfrm>
+          <a:prstGeom prst="rect">
+            <a:avLst/>
+          </a:prstGeom>
+          <a:noFill/>
+        </p:spPr>
+        <p:txBody>
+          <a:bodyPr wrap="square" anchor="ctr" lIns="0" rIns="0" tIns="0" bIns="0">
+            <a:spAutoFit/>
+          </a:bodyPr>
+          <a:lstStyle/>
+          <a:p>
+            <a:pPr algn="l">
+              <a:lnSpc>
+                <a:spcPct val="115000"/>
+              </a:lnSpc>
+            </a:pPr>
+            <a:r>
+              <a:rPr sz="1350" b="1" lang="ja-JP">
+                <a:solidFill>
+                  <a:srgbClr val="182C43"/>
+                </a:solidFill>
+                <a:latin typeface="Yu Gothic"/>
+                <a:ea typeface="Yu Gothic"/>
+                <a:cs typeface="Yu Gothic"/>
+              </a:rPr>
+              <a:t>定型作業の標準化と自動化</a:t>
+            </a:r>
+          </a:p>
+        </p:txBody>
+      </p:sp>
+      <p:cxnSp>
+        <p:nvCxnSpPr>
+          <p:cNvPr id="32" name="Connector 31"/>
+          <p:cNvCxnSpPr/>
+          <p:nvPr/>
+        </p:nvCxnSpPr>
+        <p:spPr>
+          <a:xfrm>
+            <a:off x="7068312" y="3600450"/>
+            <a:ext cx="4474159" cy="0"/>
+          </a:xfrm>
+          <a:prstGeom prst="line">
+            <a:avLst/>
+          </a:prstGeom>
+          <a:ln w="8255">
+            <a:solidFill>
+              <a:srgbClr val="D1CFC8"/>
+            </a:solidFill>
+          </a:ln>
+          <a:effectLst/>
+        </p:spPr>
+        <p:style>
+          <a:lnRef idx="2">
+            <a:schemeClr val="accent1"/>
+          </a:lnRef>
+          <a:fillRef idx="0">
+            <a:schemeClr val="accent1"/>
+          </a:fillRef>
+          <a:effectRef idx="1">
+            <a:schemeClr val="accent1"/>
+          </a:effectRef>
+          <a:fontRef idx="minor">
+            <a:schemeClr val="tx1"/>
+          </a:fontRef>
+        </p:style>
+      </p:cxnSp>
+      <p:sp>
+        <p:nvSpPr>
+          <p:cNvPr id="33" name="Oval 32"/>
+          <p:cNvSpPr/>
+          <p:nvPr/>
+        </p:nvSpPr>
+        <p:spPr>
+          <a:xfrm>
+            <a:off x="11199571" y="3220974"/>
+            <a:ext cx="228600" cy="228600"/>
+          </a:xfrm>
+          <a:prstGeom prst="ellipse">
+            <a:avLst/>
+          </a:prstGeom>
+          <a:solidFill>
+            <a:srgbClr val="0D7870"/>
+          </a:solidFill>
+          <a:ln>
+            <a:noFill/>
+          </a:ln>
+          <a:effectLst/>
+        </p:spPr>
+        <p:style>
+          <a:lnRef idx="1">
+            <a:schemeClr val="accent1"/>
+          </a:lnRef>
+          <a:fillRef idx="3">
+            <a:schemeClr val="accent1"/>
+          </a:fillRef>
+          <a:effectRef idx="2">
+            <a:schemeClr val="accent1"/>
+          </a:effectRef>
+          <a:fontRef idx="minor">
+            <a:schemeClr val="lt1"/>
+          </a:fontRef>
+        </p:style>
+        <p:txBody>
+          <a:bodyPr rtlCol="0" anchor="ctr"/>
+          <a:lstStyle/>
+          <a:p>
+            <a:pPr algn="ctr"/>
+          </a:p>
+        </p:txBody>
+      </p:sp>
+      <p:sp>
+        <p:nvSpPr>
+          <p:cNvPr id="34" name="TextBox 33"/>
+          <p:cNvSpPr txBox="1"/>
+          <p:nvPr/>
+        </p:nvSpPr>
+        <p:spPr>
+          <a:xfrm>
+            <a:off x="11204143" y="3225546"/>
+            <a:ext cx="219456" cy="219456"/>
+          </a:xfrm>
+          <a:prstGeom prst="rect">
+            <a:avLst/>
+          </a:prstGeom>
+          <a:noFill/>
+        </p:spPr>
+        <p:txBody>
+          <a:bodyPr wrap="square" anchor="ctr" lIns="0" rIns="0" tIns="0" bIns="0">
+            <a:spAutoFit/>
+          </a:bodyPr>
+          <a:lstStyle/>
+          <a:p>
+            <a:pPr algn="ctr">
+              <a:lnSpc>
+                <a:spcPct val="130000"/>
+              </a:lnSpc>
+            </a:pPr>
+            <a:r>
+              <a:rPr sz="850" b="1" lang="ja-JP">
+                <a:solidFill>
+                  <a:srgbClr val="FFFFFC"/>
+                </a:solidFill>
+                <a:latin typeface="Yu Gothic"/>
+                <a:ea typeface="Yu Gothic"/>
+                <a:cs typeface="Yu Gothic"/>
+              </a:rPr>
+              <a:t>2</a:t>
+            </a:r>
+          </a:p>
+        </p:txBody>
+      </p:sp>
+      <p:sp>
+        <p:nvSpPr>
+          <p:cNvPr id="35" name="TextBox 34"/>
+          <p:cNvSpPr txBox="1"/>
+          <p:nvPr/>
+        </p:nvSpPr>
+        <p:spPr>
+          <a:xfrm>
+            <a:off x="7232903" y="3070098"/>
+            <a:ext cx="3870655" cy="530352"/>
+          </a:xfrm>
+          <a:prstGeom prst="rect">
+            <a:avLst/>
+          </a:prstGeom>
+          <a:noFill/>
+        </p:spPr>
+        <p:txBody>
+          <a:bodyPr wrap="square" anchor="ctr" lIns="0" rIns="0" tIns="0" bIns="0">
+            <a:spAutoFit/>
+          </a:bodyPr>
+          <a:lstStyle/>
+          <a:p>
+            <a:pPr algn="l">
+              <a:lnSpc>
+                <a:spcPct val="115000"/>
+              </a:lnSpc>
+            </a:pPr>
+            <a:r>
+              <a:rPr sz="1350" b="1" lang="ja-JP">
+                <a:solidFill>
+                  <a:srgbClr val="182C43"/>
+                </a:solidFill>
+                <a:latin typeface="Yu Gothic"/>
+                <a:ea typeface="Yu Gothic"/>
+                <a:cs typeface="Yu Gothic"/>
+              </a:rPr>
+              <a:t>データ管理先の統合</a:t>
+            </a:r>
+          </a:p>
+        </p:txBody>
+      </p:sp>
+      <p:cxnSp>
+        <p:nvCxnSpPr>
+          <p:cNvPr id="36" name="Connector 35"/>
+          <p:cNvCxnSpPr/>
+          <p:nvPr/>
+        </p:nvCxnSpPr>
+        <p:spPr>
+          <a:xfrm>
+            <a:off x="7068312" y="4249674"/>
+            <a:ext cx="4474159" cy="0"/>
+          </a:xfrm>
+          <a:prstGeom prst="line">
+            <a:avLst/>
+          </a:prstGeom>
+          <a:ln w="8255">
+            <a:solidFill>
+              <a:srgbClr val="D1CFC8"/>
+            </a:solidFill>
+          </a:ln>
+          <a:effectLst/>
+        </p:spPr>
+        <p:style>
+          <a:lnRef idx="2">
+            <a:schemeClr val="accent1"/>
+          </a:lnRef>
+          <a:fillRef idx="0">
+            <a:schemeClr val="accent1"/>
+          </a:fillRef>
+          <a:effectRef idx="1">
+            <a:schemeClr val="accent1"/>
+          </a:effectRef>
+          <a:fontRef idx="minor">
+            <a:schemeClr val="tx1"/>
+          </a:fontRef>
+        </p:style>
+      </p:cxnSp>
+      <p:sp>
+        <p:nvSpPr>
+          <p:cNvPr id="37" name="Oval 36"/>
+          <p:cNvSpPr/>
+          <p:nvPr/>
+        </p:nvSpPr>
+        <p:spPr>
+          <a:xfrm>
+            <a:off x="11199571" y="3870198"/>
+            <a:ext cx="228600" cy="228600"/>
+          </a:xfrm>
+          <a:prstGeom prst="ellipse">
+            <a:avLst/>
+          </a:prstGeom>
+          <a:solidFill>
+            <a:srgbClr val="0D7870"/>
+          </a:solidFill>
+          <a:ln>
+            <a:noFill/>
+          </a:ln>
+          <a:effectLst/>
+        </p:spPr>
+        <p:style>
+          <a:lnRef idx="1">
+            <a:schemeClr val="accent1"/>
+          </a:lnRef>
+          <a:fillRef idx="3">
+            <a:schemeClr val="accent1"/>
+          </a:fillRef>
+          <a:effectRef idx="2">
+            <a:schemeClr val="accent1"/>
+          </a:effectRef>
+          <a:fontRef idx="minor">
+            <a:schemeClr val="lt1"/>
+          </a:fontRef>
+        </p:style>
+        <p:txBody>
+          <a:bodyPr rtlCol="0" anchor="ctr"/>
+          <a:lstStyle/>
+          <a:p>
+            <a:pPr algn="ctr"/>
+          </a:p>
+        </p:txBody>
+      </p:sp>
+      <p:sp>
+        <p:nvSpPr>
+          <p:cNvPr id="38" name="TextBox 37"/>
+          <p:cNvSpPr txBox="1"/>
+          <p:nvPr/>
+        </p:nvSpPr>
+        <p:spPr>
+          <a:xfrm>
+            <a:off x="11204143" y="3874770"/>
+            <a:ext cx="219456" cy="219456"/>
+          </a:xfrm>
+          <a:prstGeom prst="rect">
+            <a:avLst/>
+          </a:prstGeom>
+          <a:noFill/>
+        </p:spPr>
+        <p:txBody>
+          <a:bodyPr wrap="square" anchor="ctr" lIns="0" rIns="0" tIns="0" bIns="0">
+            <a:spAutoFit/>
+          </a:bodyPr>
+          <a:lstStyle/>
+          <a:p>
+            <a:pPr algn="ctr">
+              <a:lnSpc>
+                <a:spcPct val="130000"/>
+              </a:lnSpc>
+            </a:pPr>
+            <a:r>
+              <a:rPr sz="850" b="1" lang="ja-JP">
+                <a:solidFill>
+                  <a:srgbClr val="FFFFFC"/>
+                </a:solidFill>
+                <a:latin typeface="Yu Gothic"/>
+                <a:ea typeface="Yu Gothic"/>
+                <a:cs typeface="Yu Gothic"/>
+              </a:rPr>
+              <a:t>3</a:t>
+            </a:r>
+          </a:p>
+        </p:txBody>
+      </p:sp>
+      <p:sp>
+        <p:nvSpPr>
+          <p:cNvPr id="39" name="TextBox 38"/>
+          <p:cNvSpPr txBox="1"/>
+          <p:nvPr/>
+        </p:nvSpPr>
+        <p:spPr>
+          <a:xfrm>
+            <a:off x="7232903" y="3719322"/>
+            <a:ext cx="3870655" cy="530352"/>
+          </a:xfrm>
+          <a:prstGeom prst="rect">
+            <a:avLst/>
+          </a:prstGeom>
+          <a:noFill/>
+        </p:spPr>
+        <p:txBody>
+          <a:bodyPr wrap="square" anchor="ctr" lIns="0" rIns="0" tIns="0" bIns="0">
+            <a:spAutoFit/>
+          </a:bodyPr>
+          <a:lstStyle/>
+          <a:p>
+            <a:pPr algn="l">
+              <a:lnSpc>
+                <a:spcPct val="115000"/>
+              </a:lnSpc>
+            </a:pPr>
+            <a:r>
+              <a:rPr sz="1350" b="1" lang="ja-JP">
+                <a:solidFill>
+                  <a:srgbClr val="182C43"/>
+                </a:solidFill>
+                <a:latin typeface="Yu Gothic"/>
+                <a:ea typeface="Yu Gothic"/>
+                <a:cs typeface="Yu Gothic"/>
+              </a:rPr>
+              <a:t>承認条件と判断権限の見直し</a:t>
+            </a:r>
+          </a:p>
+        </p:txBody>
+      </p:sp>
+      <p:cxnSp>
+        <p:nvCxnSpPr>
+          <p:cNvPr id="40" name="Connector 39"/>
+          <p:cNvCxnSpPr/>
+          <p:nvPr/>
+        </p:nvCxnSpPr>
+        <p:spPr>
+          <a:xfrm>
+            <a:off x="7068312" y="4898898"/>
+            <a:ext cx="4474159" cy="0"/>
+          </a:xfrm>
+          <a:prstGeom prst="line">
+            <a:avLst/>
+          </a:prstGeom>
+          <a:ln w="8255">
+            <a:solidFill>
+              <a:srgbClr val="D1CFC8"/>
+            </a:solidFill>
+          </a:ln>
+          <a:effectLst/>
+        </p:spPr>
+        <p:style>
+          <a:lnRef idx="2">
+            <a:schemeClr val="accent1"/>
+          </a:lnRef>
+          <a:fillRef idx="0">
+            <a:schemeClr val="accent1"/>
+          </a:fillRef>
+          <a:effectRef idx="1">
+            <a:schemeClr val="accent1"/>
+          </a:effectRef>
+          <a:fontRef idx="minor">
+            <a:schemeClr val="tx1"/>
+          </a:fontRef>
+        </p:style>
+      </p:cxnSp>
+      <p:sp>
+        <p:nvSpPr>
+          <p:cNvPr id="41" name="Oval 40"/>
+          <p:cNvSpPr/>
+          <p:nvPr/>
+        </p:nvSpPr>
+        <p:spPr>
+          <a:xfrm>
+            <a:off x="11199571" y="4519422"/>
+            <a:ext cx="228600" cy="228600"/>
+          </a:xfrm>
+          <a:prstGeom prst="ellipse">
+            <a:avLst/>
+          </a:prstGeom>
+          <a:solidFill>
+            <a:srgbClr val="0D7870"/>
+          </a:solidFill>
+          <a:ln>
+            <a:noFill/>
+          </a:ln>
+          <a:effectLst/>
+        </p:spPr>
+        <p:style>
+          <a:lnRef idx="1">
+            <a:schemeClr val="accent1"/>
+          </a:lnRef>
+          <a:fillRef idx="3">
+            <a:schemeClr val="accent1"/>
+          </a:fillRef>
+          <a:effectRef idx="2">
+            <a:schemeClr val="accent1"/>
+          </a:effectRef>
+          <a:fontRef idx="minor">
+            <a:schemeClr val="lt1"/>
+          </a:fontRef>
+        </p:style>
+        <p:txBody>
+          <a:bodyPr rtlCol="0" anchor="ctr"/>
+          <a:lstStyle/>
+          <a:p>
+            <a:pPr algn="ctr"/>
+          </a:p>
+        </p:txBody>
+      </p:sp>
+      <p:sp>
+        <p:nvSpPr>
+          <p:cNvPr id="42" name="TextBox 41"/>
+          <p:cNvSpPr txBox="1"/>
+          <p:nvPr/>
+        </p:nvSpPr>
+        <p:spPr>
+          <a:xfrm>
+            <a:off x="11204143" y="4523994"/>
+            <a:ext cx="219456" cy="219456"/>
+          </a:xfrm>
+          <a:prstGeom prst="rect">
+            <a:avLst/>
+          </a:prstGeom>
+          <a:noFill/>
+        </p:spPr>
+        <p:txBody>
+          <a:bodyPr wrap="square" anchor="ctr" lIns="0" rIns="0" tIns="0" bIns="0">
+            <a:spAutoFit/>
+          </a:bodyPr>
+          <a:lstStyle/>
+          <a:p>
+            <a:pPr algn="ctr">
+              <a:lnSpc>
+                <a:spcPct val="130000"/>
+              </a:lnSpc>
+            </a:pPr>
+            <a:r>
+              <a:rPr sz="850" b="1" lang="ja-JP">
+                <a:solidFill>
+                  <a:srgbClr val="FFFFFC"/>
+                </a:solidFill>
+                <a:latin typeface="Yu Gothic"/>
+                <a:ea typeface="Yu Gothic"/>
+                <a:cs typeface="Yu Gothic"/>
+              </a:rPr>
+              <a:t>4</a:t>
+            </a:r>
+          </a:p>
+        </p:txBody>
+      </p:sp>
+      <p:sp>
+        <p:nvSpPr>
+          <p:cNvPr id="43" name="TextBox 42"/>
+          <p:cNvSpPr txBox="1"/>
+          <p:nvPr/>
+        </p:nvSpPr>
+        <p:spPr>
+          <a:xfrm>
+            <a:off x="7232903" y="4368546"/>
+            <a:ext cx="3870655" cy="530352"/>
+          </a:xfrm>
+          <a:prstGeom prst="rect">
+            <a:avLst/>
+          </a:prstGeom>
+          <a:noFill/>
+        </p:spPr>
+        <p:txBody>
+          <a:bodyPr wrap="square" anchor="ctr" lIns="0" rIns="0" tIns="0" bIns="0">
+            <a:spAutoFit/>
+          </a:bodyPr>
+          <a:lstStyle/>
+          <a:p>
+            <a:pPr algn="l">
+              <a:lnSpc>
+                <a:spcPct val="115000"/>
+              </a:lnSpc>
+            </a:pPr>
+            <a:r>
+              <a:rPr sz="1350" b="1" lang="ja-JP">
+                <a:solidFill>
+                  <a:srgbClr val="182C43"/>
+                </a:solidFill>
+                <a:latin typeface="Yu Gothic"/>
+                <a:ea typeface="Yu Gothic"/>
+                <a:cs typeface="Yu Gothic"/>
+              </a:rPr>
+              <a:t>レビュー基準と品質ゲートの整備</a:t>
+            </a:r>
+          </a:p>
+        </p:txBody>
+      </p:sp>
+      <p:cxnSp>
+        <p:nvCxnSpPr>
+          <p:cNvPr id="44" name="Connector 43"/>
+          <p:cNvCxnSpPr/>
+          <p:nvPr/>
+        </p:nvCxnSpPr>
+        <p:spPr>
+          <a:xfrm>
+            <a:off x="7068312" y="5548122"/>
+            <a:ext cx="4474159" cy="0"/>
+          </a:xfrm>
+          <a:prstGeom prst="line">
+            <a:avLst/>
+          </a:prstGeom>
+          <a:ln w="8255">
+            <a:solidFill>
+              <a:srgbClr val="D1CFC8"/>
+            </a:solidFill>
+          </a:ln>
+          <a:effectLst/>
+        </p:spPr>
+        <p:style>
+          <a:lnRef idx="2">
+            <a:schemeClr val="accent1"/>
+          </a:lnRef>
+          <a:fillRef idx="0">
+            <a:schemeClr val="accent1"/>
+          </a:fillRef>
+          <a:effectRef idx="1">
+            <a:schemeClr val="accent1"/>
+          </a:effectRef>
+          <a:fontRef idx="minor">
+            <a:schemeClr val="tx1"/>
+          </a:fontRef>
+        </p:style>
+      </p:cxnSp>
+      <p:sp>
+        <p:nvSpPr>
+          <p:cNvPr id="45" name="Oval 44"/>
+          <p:cNvSpPr/>
+          <p:nvPr/>
+        </p:nvSpPr>
+        <p:spPr>
+          <a:xfrm>
+            <a:off x="11199571" y="5168646"/>
+            <a:ext cx="228600" cy="228600"/>
+          </a:xfrm>
+          <a:prstGeom prst="ellipse">
+            <a:avLst/>
+          </a:prstGeom>
+          <a:solidFill>
+            <a:srgbClr val="0D7870"/>
+          </a:solidFill>
+          <a:ln>
+            <a:noFill/>
+          </a:ln>
+          <a:effectLst/>
+        </p:spPr>
+        <p:style>
+          <a:lnRef idx="1">
+            <a:schemeClr val="accent1"/>
+          </a:lnRef>
+          <a:fillRef idx="3">
+            <a:schemeClr val="accent1"/>
+          </a:fillRef>
+          <a:effectRef idx="2">
+            <a:schemeClr val="accent1"/>
+          </a:effectRef>
+          <a:fontRef idx="minor">
+            <a:schemeClr val="lt1"/>
+          </a:fontRef>
+        </p:style>
+        <p:txBody>
+          <a:bodyPr rtlCol="0" anchor="ctr"/>
+          <a:lstStyle/>
+          <a:p>
+            <a:pPr algn="ctr"/>
+          </a:p>
+        </p:txBody>
+      </p:sp>
+      <p:sp>
+        <p:nvSpPr>
+          <p:cNvPr id="46" name="TextBox 45"/>
+          <p:cNvSpPr txBox="1"/>
+          <p:nvPr/>
+        </p:nvSpPr>
+        <p:spPr>
+          <a:xfrm>
+            <a:off x="11204143" y="5173218"/>
+            <a:ext cx="219456" cy="219456"/>
+          </a:xfrm>
+          <a:prstGeom prst="rect">
+            <a:avLst/>
+          </a:prstGeom>
+          <a:noFill/>
+        </p:spPr>
+        <p:txBody>
+          <a:bodyPr wrap="square" anchor="ctr" lIns="0" rIns="0" tIns="0" bIns="0">
+            <a:spAutoFit/>
+          </a:bodyPr>
+          <a:lstStyle/>
+          <a:p>
+            <a:pPr algn="ctr">
+              <a:lnSpc>
+                <a:spcPct val="130000"/>
+              </a:lnSpc>
+            </a:pPr>
+            <a:r>
+              <a:rPr sz="850" b="1" lang="ja-JP">
+                <a:solidFill>
+                  <a:srgbClr val="FFFFFC"/>
+                </a:solidFill>
+                <a:latin typeface="Yu Gothic"/>
+                <a:ea typeface="Yu Gothic"/>
+                <a:cs typeface="Yu Gothic"/>
+              </a:rPr>
+              <a:t>5</a:t>
+            </a:r>
+          </a:p>
+        </p:txBody>
+      </p:sp>
+      <p:sp>
+        <p:nvSpPr>
+          <p:cNvPr id="47" name="TextBox 46"/>
+          <p:cNvSpPr txBox="1"/>
+          <p:nvPr/>
+        </p:nvSpPr>
+        <p:spPr>
+          <a:xfrm>
+            <a:off x="7232903" y="5017770"/>
+            <a:ext cx="3870655" cy="530352"/>
+          </a:xfrm>
+          <a:prstGeom prst="rect">
+            <a:avLst/>
+          </a:prstGeom>
+          <a:noFill/>
+        </p:spPr>
+        <p:txBody>
+          <a:bodyPr wrap="square" anchor="ctr" lIns="0" rIns="0" tIns="0" bIns="0">
+            <a:spAutoFit/>
+          </a:bodyPr>
+          <a:lstStyle/>
+          <a:p>
+            <a:pPr algn="l">
+              <a:lnSpc>
+                <a:spcPct val="115000"/>
+              </a:lnSpc>
+            </a:pPr>
+            <a:r>
+              <a:rPr sz="1350" b="1" lang="ja-JP">
+                <a:solidFill>
+                  <a:srgbClr val="182C43"/>
+                </a:solidFill>
+                <a:latin typeface="Yu Gothic"/>
+                <a:ea typeface="Yu Gothic"/>
+                <a:cs typeface="Yu Gothic"/>
+              </a:rPr>
+              <a:t>進捗・課題ダッシュボードの整備</a:t>
+            </a:r>
+          </a:p>
+        </p:txBody>
+      </p:sp>
+      <p:sp>
+        <p:nvSpPr>
+          <p:cNvPr id="48" name="Rectangle 47"/>
+          <p:cNvSpPr/>
+          <p:nvPr/>
+        </p:nvSpPr>
+        <p:spPr>
+          <a:xfrm>
+            <a:off x="4636007" y="2420874"/>
+            <a:ext cx="2139696" cy="3127248"/>
+          </a:xfrm>
+          <a:prstGeom prst="rect">
+            <a:avLst/>
+          </a:prstGeom>
+          <a:solidFill>
+            <a:srgbClr val="ECEAE4"/>
+          </a:solidFill>
+          <a:ln>
+            <a:noFill/>
+          </a:ln>
+          <a:effectLst/>
+        </p:spPr>
+        <p:style>
+          <a:lnRef idx="1">
+            <a:schemeClr val="accent1"/>
+          </a:lnRef>
+          <a:fillRef idx="3">
+            <a:schemeClr val="accent1"/>
+          </a:fillRef>
+          <a:effectRef idx="2">
+            <a:schemeClr val="accent1"/>
+          </a:effectRef>
+          <a:fontRef idx="minor">
+            <a:schemeClr val="lt1"/>
+          </a:fontRef>
+        </p:style>
+        <p:txBody>
+          <a:bodyPr rtlCol="0" anchor="ctr"/>
+          <a:lstStyle/>
+          <a:p>
+            <a:pPr algn="ctr"/>
+          </a:p>
+        </p:txBody>
+      </p:sp>
+      <p:sp>
+        <p:nvSpPr>
+          <p:cNvPr id="49" name="TextBox 48"/>
+          <p:cNvSpPr txBox="1"/>
+          <p:nvPr/>
+        </p:nvSpPr>
+        <p:spPr>
+          <a:xfrm>
+            <a:off x="4703673" y="1901952"/>
+            <a:ext cx="292608" cy="164592"/>
+          </a:xfrm>
+          <a:prstGeom prst="rect">
+            <a:avLst/>
+          </a:prstGeom>
+          <a:noFill/>
+        </p:spPr>
+        <p:txBody>
+          <a:bodyPr wrap="square" anchor="t" lIns="0" rIns="0" tIns="0" bIns="0">
+            <a:spAutoFit/>
+          </a:bodyPr>
+          <a:lstStyle/>
+          <a:p>
+            <a:pPr algn="ctr">
+              <a:lnSpc>
+                <a:spcPct val="130000"/>
+              </a:lnSpc>
+            </a:pPr>
+            <a:r>
+              <a:rPr sz="850" b="1" lang="ja-JP">
+                <a:solidFill>
+                  <a:srgbClr val="0D7870"/>
+                </a:solidFill>
+                <a:latin typeface="Yu Gothic"/>
+                <a:ea typeface="Yu Gothic"/>
+                <a:cs typeface="Yu Gothic"/>
+              </a:rPr>
+              <a:t>1</a:t>
+            </a:r>
+          </a:p>
+        </p:txBody>
+      </p:sp>
+      <p:sp>
+        <p:nvSpPr>
+          <p:cNvPr id="50" name="TextBox 49"/>
+          <p:cNvSpPr txBox="1"/>
+          <p:nvPr/>
+        </p:nvSpPr>
+        <p:spPr>
+          <a:xfrm>
+            <a:off x="5131612" y="1901952"/>
+            <a:ext cx="292608" cy="164592"/>
+          </a:xfrm>
+          <a:prstGeom prst="rect">
+            <a:avLst/>
+          </a:prstGeom>
+          <a:noFill/>
+        </p:spPr>
+        <p:txBody>
+          <a:bodyPr wrap="square" anchor="t" lIns="0" rIns="0" tIns="0" bIns="0">
+            <a:spAutoFit/>
+          </a:bodyPr>
+          <a:lstStyle/>
+          <a:p>
+            <a:pPr algn="ctr">
+              <a:lnSpc>
+                <a:spcPct val="130000"/>
+              </a:lnSpc>
+            </a:pPr>
+            <a:r>
+              <a:rPr sz="850" b="1" lang="ja-JP">
+                <a:solidFill>
+                  <a:srgbClr val="0D7870"/>
+                </a:solidFill>
+                <a:latin typeface="Yu Gothic"/>
+                <a:ea typeface="Yu Gothic"/>
+                <a:cs typeface="Yu Gothic"/>
+              </a:rPr>
+              <a:t>2</a:t>
+            </a:r>
+          </a:p>
+        </p:txBody>
+      </p:sp>
+      <p:cxnSp>
+        <p:nvCxnSpPr>
+          <p:cNvPr id="51" name="Connector 50"/>
+          <p:cNvCxnSpPr/>
+          <p:nvPr/>
+        </p:nvCxnSpPr>
+        <p:spPr>
+          <a:xfrm>
+            <a:off x="5063947" y="2420874"/>
+            <a:ext cx="0" cy="3127248"/>
+          </a:xfrm>
+          <a:prstGeom prst="line">
+            <a:avLst/>
+          </a:prstGeom>
+          <a:ln w="6985">
+            <a:solidFill>
+              <a:srgbClr val="D1CFC8"/>
+            </a:solidFill>
+          </a:ln>
+          <a:effectLst/>
+        </p:spPr>
+        <p:style>
+          <a:lnRef idx="2">
+            <a:schemeClr val="accent1"/>
+          </a:lnRef>
+          <a:fillRef idx="0">
+            <a:schemeClr val="accent1"/>
+          </a:fillRef>
+          <a:effectRef idx="1">
+            <a:schemeClr val="accent1"/>
+          </a:effectRef>
+          <a:fontRef idx="minor">
+            <a:schemeClr val="tx1"/>
+          </a:fontRef>
+        </p:style>
+      </p:cxnSp>
+      <p:sp>
+        <p:nvSpPr>
+          <p:cNvPr id="52" name="TextBox 51"/>
+          <p:cNvSpPr txBox="1"/>
+          <p:nvPr/>
+        </p:nvSpPr>
+        <p:spPr>
+          <a:xfrm>
+            <a:off x="5559551" y="1901952"/>
+            <a:ext cx="292608" cy="164592"/>
+          </a:xfrm>
+          <a:prstGeom prst="rect">
+            <a:avLst/>
+          </a:prstGeom>
+          <a:noFill/>
+        </p:spPr>
+        <p:txBody>
+          <a:bodyPr wrap="square" anchor="t" lIns="0" rIns="0" tIns="0" bIns="0">
+            <a:spAutoFit/>
+          </a:bodyPr>
+          <a:lstStyle/>
+          <a:p>
+            <a:pPr algn="ctr">
+              <a:lnSpc>
+                <a:spcPct val="130000"/>
+              </a:lnSpc>
+            </a:pPr>
+            <a:r>
+              <a:rPr sz="850" b="1" lang="ja-JP">
+                <a:solidFill>
+                  <a:srgbClr val="0D7870"/>
+                </a:solidFill>
+                <a:latin typeface="Yu Gothic"/>
+                <a:ea typeface="Yu Gothic"/>
+                <a:cs typeface="Yu Gothic"/>
+              </a:rPr>
+              <a:t>3</a:t>
+            </a:r>
+          </a:p>
+        </p:txBody>
+      </p:sp>
+      <p:cxnSp>
+        <p:nvCxnSpPr>
+          <p:cNvPr id="53" name="Connector 52"/>
+          <p:cNvCxnSpPr/>
+          <p:nvPr/>
+        </p:nvCxnSpPr>
+        <p:spPr>
+          <a:xfrm>
+            <a:off x="5491886" y="2420874"/>
+            <a:ext cx="0" cy="3127248"/>
+          </a:xfrm>
+          <a:prstGeom prst="line">
+            <a:avLst/>
+          </a:prstGeom>
+          <a:ln w="6985">
+            <a:solidFill>
+              <a:srgbClr val="D1CFC8"/>
+            </a:solidFill>
+          </a:ln>
+          <a:effectLst/>
+        </p:spPr>
+        <p:style>
+          <a:lnRef idx="2">
+            <a:schemeClr val="accent1"/>
+          </a:lnRef>
+          <a:fillRef idx="0">
+            <a:schemeClr val="accent1"/>
+          </a:fillRef>
+          <a:effectRef idx="1">
+            <a:schemeClr val="accent1"/>
+          </a:effectRef>
+          <a:fontRef idx="minor">
+            <a:schemeClr val="tx1"/>
+          </a:fontRef>
+        </p:style>
+      </p:cxnSp>
+      <p:sp>
+        <p:nvSpPr>
+          <p:cNvPr id="54" name="TextBox 53"/>
+          <p:cNvSpPr txBox="1"/>
+          <p:nvPr/>
+        </p:nvSpPr>
+        <p:spPr>
+          <a:xfrm>
+            <a:off x="5987491" y="1901952"/>
+            <a:ext cx="292608" cy="164592"/>
+          </a:xfrm>
+          <a:prstGeom prst="rect">
+            <a:avLst/>
+          </a:prstGeom>
+          <a:noFill/>
+        </p:spPr>
+        <p:txBody>
+          <a:bodyPr wrap="square" anchor="t" lIns="0" rIns="0" tIns="0" bIns="0">
+            <a:spAutoFit/>
+          </a:bodyPr>
+          <a:lstStyle/>
+          <a:p>
+            <a:pPr algn="ctr">
+              <a:lnSpc>
+                <a:spcPct val="130000"/>
+              </a:lnSpc>
+            </a:pPr>
+            <a:r>
+              <a:rPr sz="850" b="1" lang="ja-JP">
+                <a:solidFill>
+                  <a:srgbClr val="0D7870"/>
+                </a:solidFill>
+                <a:latin typeface="Yu Gothic"/>
+                <a:ea typeface="Yu Gothic"/>
+                <a:cs typeface="Yu Gothic"/>
+              </a:rPr>
+              <a:t>4</a:t>
+            </a:r>
+          </a:p>
+        </p:txBody>
+      </p:sp>
+      <p:cxnSp>
+        <p:nvCxnSpPr>
+          <p:cNvPr id="55" name="Connector 54"/>
+          <p:cNvCxnSpPr/>
+          <p:nvPr/>
+        </p:nvCxnSpPr>
+        <p:spPr>
+          <a:xfrm>
+            <a:off x="5919825" y="2420874"/>
+            <a:ext cx="0" cy="3127248"/>
+          </a:xfrm>
+          <a:prstGeom prst="line">
+            <a:avLst/>
+          </a:prstGeom>
+          <a:ln w="6985">
+            <a:solidFill>
+              <a:srgbClr val="D1CFC8"/>
+            </a:solidFill>
+          </a:ln>
+          <a:effectLst/>
+        </p:spPr>
+        <p:style>
+          <a:lnRef idx="2">
+            <a:schemeClr val="accent1"/>
+          </a:lnRef>
+          <a:fillRef idx="0">
+            <a:schemeClr val="accent1"/>
+          </a:fillRef>
+          <a:effectRef idx="1">
+            <a:schemeClr val="accent1"/>
+          </a:effectRef>
+          <a:fontRef idx="minor">
+            <a:schemeClr val="tx1"/>
+          </a:fontRef>
+        </p:style>
+      </p:cxnSp>
+      <p:sp>
+        <p:nvSpPr>
+          <p:cNvPr id="56" name="TextBox 55"/>
+          <p:cNvSpPr txBox="1"/>
+          <p:nvPr/>
+        </p:nvSpPr>
+        <p:spPr>
+          <a:xfrm>
+            <a:off x="6415430" y="1901952"/>
+            <a:ext cx="292608" cy="164592"/>
+          </a:xfrm>
+          <a:prstGeom prst="rect">
+            <a:avLst/>
+          </a:prstGeom>
+          <a:noFill/>
+        </p:spPr>
+        <p:txBody>
+          <a:bodyPr wrap="square" anchor="t" lIns="0" rIns="0" tIns="0" bIns="0">
+            <a:spAutoFit/>
+          </a:bodyPr>
+          <a:lstStyle/>
+          <a:p>
+            <a:pPr algn="ctr">
+              <a:lnSpc>
+                <a:spcPct val="130000"/>
+              </a:lnSpc>
+            </a:pPr>
+            <a:r>
+              <a:rPr sz="850" b="1" lang="ja-JP">
+                <a:solidFill>
+                  <a:srgbClr val="0D7870"/>
+                </a:solidFill>
+                <a:latin typeface="Yu Gothic"/>
+                <a:ea typeface="Yu Gothic"/>
+                <a:cs typeface="Yu Gothic"/>
+              </a:rPr>
+              <a:t>5</a:t>
+            </a:r>
+          </a:p>
+        </p:txBody>
+      </p:sp>
+      <p:cxnSp>
+        <p:nvCxnSpPr>
+          <p:cNvPr id="57" name="Connector 56"/>
+          <p:cNvCxnSpPr/>
+          <p:nvPr/>
+        </p:nvCxnSpPr>
+        <p:spPr>
+          <a:xfrm>
+            <a:off x="6347764" y="2420874"/>
+            <a:ext cx="0" cy="3127248"/>
+          </a:xfrm>
+          <a:prstGeom prst="line">
+            <a:avLst/>
+          </a:prstGeom>
+          <a:ln w="6985">
+            <a:solidFill>
+              <a:srgbClr val="D1CFC8"/>
+            </a:solidFill>
           </a:ln>
           <a:effectLst/>
         </p:spPr>
@@ -30581,23 +32652,22 @@
       </p:cxnSp>
       <p:cxnSp>
         <p:nvCxnSpPr>
-          <p:cNvPr id="8" name="Connector 7"/>
+          <p:cNvPr id="58" name="Connector 57"/>
           <p:cNvCxnSpPr/>
           <p:nvPr/>
         </p:nvCxnSpPr>
         <p:spPr>
           <a:xfrm>
-            <a:off x="4718304" y="3335274"/>
-            <a:ext cx="2755087" cy="0"/>
+            <a:off x="4636007" y="3010662"/>
+            <a:ext cx="2139696" cy="0"/>
           </a:xfrm>
           <a:prstGeom prst="line">
             <a:avLst/>
           </a:prstGeom>
-          <a:ln w="12700">
+          <a:ln w="6985">
             <a:solidFill>
-              <a:srgbClr val="666E70"/>
+              <a:srgbClr val="D1CFC8"/>
             </a:solidFill>
-            <a:tailEnd type="triangle" w="med" len="med"/>
           </a:ln>
           <a:effectLst/>
         </p:spPr>
@@ -30618,23 +32688,22 @@
       </p:cxnSp>
       <p:cxnSp>
         <p:nvCxnSpPr>
-          <p:cNvPr id="9" name="Connector 8"/>
+          <p:cNvPr id="59" name="Connector 58"/>
           <p:cNvCxnSpPr/>
           <p:nvPr/>
         </p:nvCxnSpPr>
         <p:spPr>
           <a:xfrm>
-            <a:off x="4718304" y="3335274"/>
-            <a:ext cx="2755087" cy="1947672"/>
+            <a:off x="4636007" y="3659885"/>
+            <a:ext cx="2139696" cy="0"/>
           </a:xfrm>
           <a:prstGeom prst="line">
             <a:avLst/>
           </a:prstGeom>
-          <a:ln w="12700">
+          <a:ln w="6985">
             <a:solidFill>
-              <a:srgbClr val="666E70"/>
+              <a:srgbClr val="D1CFC8"/>
             </a:solidFill>
-            <a:tailEnd type="triangle" w="med" len="med"/>
           </a:ln>
           <a:effectLst/>
         </p:spPr>
@@ -30655,23 +32724,22 @@
       </p:cxnSp>
       <p:cxnSp>
         <p:nvCxnSpPr>
-          <p:cNvPr id="10" name="Connector 9"/>
+          <p:cNvPr id="60" name="Connector 59"/>
           <p:cNvCxnSpPr/>
           <p:nvPr/>
         </p:nvCxnSpPr>
         <p:spPr>
           <a:xfrm>
-            <a:off x="4718304" y="3984498"/>
-            <a:ext cx="2755087" cy="0"/>
+            <a:off x="4636007" y="4309109"/>
+            <a:ext cx="2139696" cy="0"/>
           </a:xfrm>
           <a:prstGeom prst="line">
             <a:avLst/>
           </a:prstGeom>
-          <a:ln w="12700">
+          <a:ln w="6985">
             <a:solidFill>
-              <a:srgbClr val="666E70"/>
+              <a:srgbClr val="D1CFC8"/>
             </a:solidFill>
-            <a:tailEnd type="triangle" w="med" len="med"/>
           </a:ln>
           <a:effectLst/>
         </p:spPr>
@@ -30692,23 +32760,22 @@
       </p:cxnSp>
       <p:cxnSp>
         <p:nvCxnSpPr>
-          <p:cNvPr id="11" name="Connector 10"/>
+          <p:cNvPr id="61" name="Connector 60"/>
           <p:cNvCxnSpPr/>
           <p:nvPr/>
         </p:nvCxnSpPr>
         <p:spPr>
           <a:xfrm>
-            <a:off x="4718304" y="4633722"/>
-            <a:ext cx="2755087" cy="0"/>
+            <a:off x="4636007" y="4958333"/>
+            <a:ext cx="2139696" cy="0"/>
           </a:xfrm>
           <a:prstGeom prst="line">
             <a:avLst/>
           </a:prstGeom>
-          <a:ln w="12700">
+          <a:ln w="6985">
             <a:solidFill>
-              <a:srgbClr val="666E70"/>
+              <a:srgbClr val="D1CFC8"/>
             </a:solidFill>
-            <a:tailEnd type="triangle" w="med" len="med"/>
           </a:ln>
           <a:effectLst/>
         </p:spPr>
@@ -30727,99 +32794,16 @@
           </a:fontRef>
         </p:style>
       </p:cxnSp>
-      <p:cxnSp>
-        <p:nvCxnSpPr>
-          <p:cNvPr id="12" name="Connector 11"/>
-          <p:cNvCxnSpPr/>
-          <p:nvPr/>
-        </p:nvCxnSpPr>
-        <p:spPr>
-          <a:xfrm>
-            <a:off x="4718304" y="5282946"/>
-            <a:ext cx="2755087" cy="0"/>
-          </a:xfrm>
-          <a:prstGeom prst="line">
-            <a:avLst/>
-          </a:prstGeom>
-          <a:ln w="12700">
-            <a:solidFill>
-              <a:srgbClr val="666E70"/>
-            </a:solidFill>
-            <a:tailEnd type="triangle" w="med" len="med"/>
-          </a:ln>
-          <a:effectLst/>
-        </p:spPr>
-        <p:style>
-          <a:lnRef idx="2">
-            <a:schemeClr val="accent1"/>
-          </a:lnRef>
-          <a:fillRef idx="0">
-            <a:schemeClr val="accent1"/>
-          </a:fillRef>
-          <a:effectRef idx="1">
-            <a:schemeClr val="accent1"/>
-          </a:effectRef>
-          <a:fontRef idx="minor">
-            <a:schemeClr val="tx1"/>
-          </a:fontRef>
-        </p:style>
-      </p:cxnSp>
-      <p:sp>
-        <p:nvSpPr>
-          <p:cNvPr id="13" name="Rectangle 12"/>
+      <p:sp>
+        <p:nvSpPr>
+          <p:cNvPr id="62" name="Oval 61"/>
           <p:cNvSpPr/>
           <p:nvPr/>
         </p:nvSpPr>
         <p:spPr>
           <a:xfrm>
-            <a:off x="649224" y="2420874"/>
-            <a:ext cx="4069080" cy="530352"/>
-          </a:xfrm>
-          <a:prstGeom prst="rect">
-            <a:avLst/>
-          </a:prstGeom>
-          <a:solidFill>
-            <a:srgbClr val="FFFFFC"/>
-          </a:solidFill>
-          <a:ln w="9525">
-            <a:solidFill>
-              <a:srgbClr val="D1CFC8"/>
-            </a:solidFill>
-          </a:ln>
-          <a:effectLst/>
-        </p:spPr>
-        <p:style>
-          <a:lnRef idx="1">
-            <a:schemeClr val="accent1"/>
-          </a:lnRef>
-          <a:fillRef idx="3">
-            <a:schemeClr val="accent1"/>
-          </a:fillRef>
-          <a:effectRef idx="2">
-            <a:schemeClr val="accent1"/>
-          </a:effectRef>
-          <a:fontRef idx="minor">
-            <a:schemeClr val="lt1"/>
-          </a:fontRef>
-        </p:style>
-        <p:txBody>
-          <a:bodyPr rtlCol="0" anchor="ctr"/>
-          <a:lstStyle/>
-          <a:p>
-            <a:pPr algn="ctr"/>
-          </a:p>
-        </p:txBody>
-      </p:sp>
-      <p:sp>
-        <p:nvSpPr>
-          <p:cNvPr id="14" name="Oval 13"/>
-          <p:cNvSpPr/>
-          <p:nvPr/>
-        </p:nvSpPr>
-        <p:spPr>
-          <a:xfrm>
-            <a:off x="763524" y="2571750"/>
-            <a:ext cx="228600" cy="228600"/>
+            <a:off x="4781397" y="2617470"/>
+            <a:ext cx="137160" cy="137160"/>
           </a:xfrm>
           <a:prstGeom prst="ellipse">
             <a:avLst/>
@@ -30856,107 +32840,23 @@
       </p:sp>
       <p:sp>
         <p:nvSpPr>
-          <p:cNvPr id="15" name="TextBox 14"/>
-          <p:cNvSpPr txBox="1"/>
-          <p:nvPr/>
-        </p:nvSpPr>
-        <p:spPr>
-          <a:xfrm>
-            <a:off x="768096" y="2576322"/>
-            <a:ext cx="219456" cy="219456"/>
-          </a:xfrm>
-          <a:prstGeom prst="rect">
-            <a:avLst/>
-          </a:prstGeom>
-          <a:noFill/>
-        </p:spPr>
-        <p:txBody>
-          <a:bodyPr wrap="square" anchor="ctr" lIns="0" rIns="0" tIns="0" bIns="0">
-            <a:spAutoFit/>
-          </a:bodyPr>
-          <a:lstStyle/>
-          <a:p>
-            <a:pPr algn="ctr">
-              <a:lnSpc>
-                <a:spcPct val="130000"/>
-              </a:lnSpc>
-            </a:pPr>
-            <a:r>
-              <a:rPr sz="850" b="1" lang="ja-JP">
-                <a:solidFill>
-                  <a:srgbClr val="FFFFFC"/>
-                </a:solidFill>
-                <a:latin typeface="Yu Gothic"/>
-                <a:ea typeface="Yu Gothic"/>
-                <a:cs typeface="Yu Gothic"/>
-              </a:rPr>
-              <a:t>1</a:t>
-            </a:r>
-          </a:p>
-        </p:txBody>
-      </p:sp>
-      <p:sp>
-        <p:nvSpPr>
-          <p:cNvPr id="16" name="TextBox 15"/>
-          <p:cNvSpPr txBox="1"/>
-          <p:nvPr/>
-        </p:nvSpPr>
-        <p:spPr>
-          <a:xfrm>
-            <a:off x="1088136" y="2420874"/>
-            <a:ext cx="3465576" cy="530352"/>
-          </a:xfrm>
-          <a:prstGeom prst="rect">
-            <a:avLst/>
-          </a:prstGeom>
-          <a:noFill/>
-        </p:spPr>
-        <p:txBody>
-          <a:bodyPr wrap="square" anchor="ctr" lIns="0" rIns="0" tIns="0" bIns="0">
-            <a:spAutoFit/>
-          </a:bodyPr>
-          <a:lstStyle/>
-          <a:p>
-            <a:pPr algn="l">
-              <a:lnSpc>
-                <a:spcPct val="115000"/>
-              </a:lnSpc>
-            </a:pPr>
-            <a:r>
-              <a:rPr sz="1350" b="1" lang="ja-JP">
-                <a:solidFill>
-                  <a:srgbClr val="182C43"/>
-                </a:solidFill>
-                <a:latin typeface="Yu Gothic"/>
-                <a:ea typeface="Yu Gothic"/>
-                <a:cs typeface="Yu Gothic"/>
-              </a:rPr>
-              <a:t>手作業が多く処理時間が長い</a:t>
-            </a:r>
-          </a:p>
-        </p:txBody>
-      </p:sp>
-      <p:sp>
-        <p:nvSpPr>
-          <p:cNvPr id="17" name="Rectangle 16"/>
+          <p:cNvPr id="63" name="Oval 62"/>
           <p:cNvSpPr/>
           <p:nvPr/>
         </p:nvSpPr>
         <p:spPr>
           <a:xfrm>
-            <a:off x="649224" y="3070098"/>
-            <a:ext cx="4069080" cy="530352"/>
-          </a:xfrm>
-          <a:prstGeom prst="rect">
+            <a:off x="5227624" y="3284982"/>
+            <a:ext cx="100584" cy="100584"/>
+          </a:xfrm>
+          <a:prstGeom prst="ellipse">
             <a:avLst/>
           </a:prstGeom>
           <a:solidFill>
-            <a:srgbClr val="FFFFFC"/>
+            <a:srgbClr val="182C43"/>
           </a:solidFill>
-          <a:ln w="9525">
-            <a:solidFill>
-              <a:srgbClr val="D1CFC8"/>
-            </a:solidFill>
+          <a:ln>
+            <a:noFill/>
           </a:ln>
           <a:effectLst/>
         </p:spPr>
@@ -30984,20 +32884,20 @@
       </p:sp>
       <p:sp>
         <p:nvSpPr>
-          <p:cNvPr id="18" name="Oval 17"/>
+          <p:cNvPr id="64" name="Oval 63"/>
           <p:cNvSpPr/>
           <p:nvPr/>
         </p:nvSpPr>
         <p:spPr>
           <a:xfrm>
-            <a:off x="763524" y="3220974"/>
-            <a:ext cx="228600" cy="228600"/>
+            <a:off x="6511442" y="3284982"/>
+            <a:ext cx="100584" cy="100584"/>
           </a:xfrm>
           <a:prstGeom prst="ellipse">
             <a:avLst/>
           </a:prstGeom>
           <a:solidFill>
-            <a:srgbClr val="0D7870"/>
+            <a:srgbClr val="182C43"/>
           </a:solidFill>
           <a:ln>
             <a:noFill/>
@@ -31028,107 +32928,23 @@
       </p:sp>
       <p:sp>
         <p:nvSpPr>
-          <p:cNvPr id="19" name="TextBox 18"/>
-          <p:cNvSpPr txBox="1"/>
-          <p:nvPr/>
-        </p:nvSpPr>
-        <p:spPr>
-          <a:xfrm>
-            <a:off x="768096" y="3225546"/>
-            <a:ext cx="219456" cy="219456"/>
-          </a:xfrm>
-          <a:prstGeom prst="rect">
-            <a:avLst/>
-          </a:prstGeom>
-          <a:noFill/>
-        </p:spPr>
-        <p:txBody>
-          <a:bodyPr wrap="square" anchor="ctr" lIns="0" rIns="0" tIns="0" bIns="0">
-            <a:spAutoFit/>
-          </a:bodyPr>
-          <a:lstStyle/>
-          <a:p>
-            <a:pPr algn="ctr">
-              <a:lnSpc>
-                <a:spcPct val="130000"/>
-              </a:lnSpc>
-            </a:pPr>
-            <a:r>
-              <a:rPr sz="850" b="1" lang="ja-JP">
-                <a:solidFill>
-                  <a:srgbClr val="FFFFFC"/>
-                </a:solidFill>
-                <a:latin typeface="Yu Gothic"/>
-                <a:ea typeface="Yu Gothic"/>
-                <a:cs typeface="Yu Gothic"/>
-              </a:rPr>
-              <a:t>2</a:t>
-            </a:r>
-          </a:p>
-        </p:txBody>
-      </p:sp>
-      <p:sp>
-        <p:nvSpPr>
-          <p:cNvPr id="20" name="TextBox 19"/>
-          <p:cNvSpPr txBox="1"/>
-          <p:nvPr/>
-        </p:nvSpPr>
-        <p:spPr>
-          <a:xfrm>
-            <a:off x="1088136" y="3070098"/>
-            <a:ext cx="3465576" cy="530352"/>
-          </a:xfrm>
-          <a:prstGeom prst="rect">
-            <a:avLst/>
-          </a:prstGeom>
-          <a:noFill/>
-        </p:spPr>
-        <p:txBody>
-          <a:bodyPr wrap="square" anchor="ctr" lIns="0" rIns="0" tIns="0" bIns="0">
-            <a:spAutoFit/>
-          </a:bodyPr>
-          <a:lstStyle/>
-          <a:p>
-            <a:pPr algn="l">
-              <a:lnSpc>
-                <a:spcPct val="115000"/>
-              </a:lnSpc>
-            </a:pPr>
-            <a:r>
-              <a:rPr sz="1350" b="1" lang="ja-JP">
-                <a:solidFill>
-                  <a:srgbClr val="182C43"/>
-                </a:solidFill>
-                <a:latin typeface="Yu Gothic"/>
-                <a:ea typeface="Yu Gothic"/>
-                <a:cs typeface="Yu Gothic"/>
-              </a:rPr>
-              <a:t>データが複数の管理先へ分散している</a:t>
-            </a:r>
-          </a:p>
-        </p:txBody>
-      </p:sp>
-      <p:sp>
-        <p:nvSpPr>
-          <p:cNvPr id="21" name="Rectangle 20"/>
+          <p:cNvPr id="65" name="Oval 64"/>
           <p:cNvSpPr/>
           <p:nvPr/>
         </p:nvSpPr>
         <p:spPr>
           <a:xfrm>
-            <a:off x="649224" y="3719322"/>
-            <a:ext cx="4069080" cy="530352"/>
-          </a:xfrm>
-          <a:prstGeom prst="rect">
+            <a:off x="5655564" y="3934206"/>
+            <a:ext cx="100584" cy="100584"/>
+          </a:xfrm>
+          <a:prstGeom prst="ellipse">
             <a:avLst/>
           </a:prstGeom>
           <a:solidFill>
-            <a:srgbClr val="FFFFFC"/>
+            <a:srgbClr val="182C43"/>
           </a:solidFill>
-          <a:ln w="9525">
-            <a:solidFill>
-              <a:srgbClr val="D1CFC8"/>
-            </a:solidFill>
+          <a:ln>
+            <a:noFill/>
           </a:ln>
           <a:effectLst/>
         </p:spPr>
@@ -31156,20 +32972,20 @@
       </p:sp>
       <p:sp>
         <p:nvSpPr>
-          <p:cNvPr id="22" name="Oval 21"/>
+          <p:cNvPr id="66" name="Oval 65"/>
           <p:cNvSpPr/>
           <p:nvPr/>
         </p:nvSpPr>
         <p:spPr>
           <a:xfrm>
-            <a:off x="763524" y="3870198"/>
-            <a:ext cx="228600" cy="228600"/>
+            <a:off x="6083503" y="4583430"/>
+            <a:ext cx="100584" cy="100584"/>
           </a:xfrm>
           <a:prstGeom prst="ellipse">
             <a:avLst/>
           </a:prstGeom>
           <a:solidFill>
-            <a:srgbClr val="0D7870"/>
+            <a:srgbClr val="182C43"/>
           </a:solidFill>
           <a:ln>
             <a:noFill/>
@@ -31200,107 +33016,23 @@
       </p:sp>
       <p:sp>
         <p:nvSpPr>
-          <p:cNvPr id="23" name="TextBox 22"/>
-          <p:cNvSpPr txBox="1"/>
-          <p:nvPr/>
-        </p:nvSpPr>
-        <p:spPr>
-          <a:xfrm>
-            <a:off x="768096" y="3874770"/>
-            <a:ext cx="219456" cy="219456"/>
-          </a:xfrm>
-          <a:prstGeom prst="rect">
-            <a:avLst/>
-          </a:prstGeom>
-          <a:noFill/>
-        </p:spPr>
-        <p:txBody>
-          <a:bodyPr wrap="square" anchor="ctr" lIns="0" rIns="0" tIns="0" bIns="0">
-            <a:spAutoFit/>
-          </a:bodyPr>
-          <a:lstStyle/>
-          <a:p>
-            <a:pPr algn="ctr">
-              <a:lnSpc>
-                <a:spcPct val="130000"/>
-              </a:lnSpc>
-            </a:pPr>
-            <a:r>
-              <a:rPr sz="850" b="1" lang="ja-JP">
-                <a:solidFill>
-                  <a:srgbClr val="FFFFFC"/>
-                </a:solidFill>
-                <a:latin typeface="Yu Gothic"/>
-                <a:ea typeface="Yu Gothic"/>
-                <a:cs typeface="Yu Gothic"/>
-              </a:rPr>
-              <a:t>3</a:t>
-            </a:r>
-          </a:p>
-        </p:txBody>
-      </p:sp>
-      <p:sp>
-        <p:nvSpPr>
-          <p:cNvPr id="24" name="TextBox 23"/>
-          <p:cNvSpPr txBox="1"/>
-          <p:nvPr/>
-        </p:nvSpPr>
-        <p:spPr>
-          <a:xfrm>
-            <a:off x="1088136" y="3719322"/>
-            <a:ext cx="3465576" cy="530352"/>
-          </a:xfrm>
-          <a:prstGeom prst="rect">
-            <a:avLst/>
-          </a:prstGeom>
-          <a:noFill/>
-        </p:spPr>
-        <p:txBody>
-          <a:bodyPr wrap="square" anchor="ctr" lIns="0" rIns="0" tIns="0" bIns="0">
-            <a:spAutoFit/>
-          </a:bodyPr>
-          <a:lstStyle/>
-          <a:p>
-            <a:pPr algn="l">
-              <a:lnSpc>
-                <a:spcPct val="115000"/>
-              </a:lnSpc>
-            </a:pPr>
-            <a:r>
-              <a:rPr sz="1350" b="1" lang="ja-JP">
-                <a:solidFill>
-                  <a:srgbClr val="182C43"/>
-                </a:solidFill>
-                <a:latin typeface="Yu Gothic"/>
-                <a:ea typeface="Yu Gothic"/>
-                <a:cs typeface="Yu Gothic"/>
-              </a:rPr>
-              <a:t>承認完了までの待ち時間が長い</a:t>
-            </a:r>
-          </a:p>
-        </p:txBody>
-      </p:sp>
-      <p:sp>
-        <p:nvSpPr>
-          <p:cNvPr id="25" name="Rectangle 24"/>
+          <p:cNvPr id="67" name="Oval 66"/>
           <p:cNvSpPr/>
           <p:nvPr/>
         </p:nvSpPr>
         <p:spPr>
           <a:xfrm>
-            <a:off x="649224" y="4368546"/>
-            <a:ext cx="4069080" cy="530352"/>
-          </a:xfrm>
-          <a:prstGeom prst="rect">
+            <a:off x="6511442" y="5232654"/>
+            <a:ext cx="100584" cy="100584"/>
+          </a:xfrm>
+          <a:prstGeom prst="ellipse">
             <a:avLst/>
           </a:prstGeom>
           <a:solidFill>
-            <a:srgbClr val="FFFFFC"/>
+            <a:srgbClr val="182C43"/>
           </a:solidFill>
-          <a:ln w="9525">
-            <a:solidFill>
-              <a:srgbClr val="D1CFC8"/>
-            </a:solidFill>
+          <a:ln>
+            <a:noFill/>
           </a:ln>
           <a:effectLst/>
         </p:spPr>
@@ -31328,1605 +33060,7 @@
       </p:sp>
       <p:sp>
         <p:nvSpPr>
-          <p:cNvPr id="26" name="Oval 25"/>
-          <p:cNvSpPr/>
-          <p:nvPr/>
-        </p:nvSpPr>
-        <p:spPr>
-          <a:xfrm>
-            <a:off x="763524" y="4519422"/>
-            <a:ext cx="228600" cy="228600"/>
-          </a:xfrm>
-          <a:prstGeom prst="ellipse">
-            <a:avLst/>
-          </a:prstGeom>
-          <a:solidFill>
-            <a:srgbClr val="0D7870"/>
-          </a:solidFill>
-          <a:ln>
-            <a:noFill/>
-          </a:ln>
-          <a:effectLst/>
-        </p:spPr>
-        <p:style>
-          <a:lnRef idx="1">
-            <a:schemeClr val="accent1"/>
-          </a:lnRef>
-          <a:fillRef idx="3">
-            <a:schemeClr val="accent1"/>
-          </a:fillRef>
-          <a:effectRef idx="2">
-            <a:schemeClr val="accent1"/>
-          </a:effectRef>
-          <a:fontRef idx="minor">
-            <a:schemeClr val="lt1"/>
-          </a:fontRef>
-        </p:style>
-        <p:txBody>
-          <a:bodyPr rtlCol="0" anchor="ctr"/>
-          <a:lstStyle/>
-          <a:p>
-            <a:pPr algn="ctr"/>
-          </a:p>
-        </p:txBody>
-      </p:sp>
-      <p:sp>
-        <p:nvSpPr>
-          <p:cNvPr id="27" name="TextBox 26"/>
-          <p:cNvSpPr txBox="1"/>
-          <p:nvPr/>
-        </p:nvSpPr>
-        <p:spPr>
-          <a:xfrm>
-            <a:off x="768096" y="4523994"/>
-            <a:ext cx="219456" cy="219456"/>
-          </a:xfrm>
-          <a:prstGeom prst="rect">
-            <a:avLst/>
-          </a:prstGeom>
-          <a:noFill/>
-        </p:spPr>
-        <p:txBody>
-          <a:bodyPr wrap="square" anchor="ctr" lIns="0" rIns="0" tIns="0" bIns="0">
-            <a:spAutoFit/>
-          </a:bodyPr>
-          <a:lstStyle/>
-          <a:p>
-            <a:pPr algn="ctr">
-              <a:lnSpc>
-                <a:spcPct val="130000"/>
-              </a:lnSpc>
-            </a:pPr>
-            <a:r>
-              <a:rPr sz="850" b="1" lang="ja-JP">
-                <a:solidFill>
-                  <a:srgbClr val="FFFFFC"/>
-                </a:solidFill>
-                <a:latin typeface="Yu Gothic"/>
-                <a:ea typeface="Yu Gothic"/>
-                <a:cs typeface="Yu Gothic"/>
-              </a:rPr>
-              <a:t>4</a:t>
-            </a:r>
-          </a:p>
-        </p:txBody>
-      </p:sp>
-      <p:sp>
-        <p:nvSpPr>
-          <p:cNvPr id="28" name="TextBox 27"/>
-          <p:cNvSpPr txBox="1"/>
-          <p:nvPr/>
-        </p:nvSpPr>
-        <p:spPr>
-          <a:xfrm>
-            <a:off x="1088136" y="4368546"/>
-            <a:ext cx="3465576" cy="530352"/>
-          </a:xfrm>
-          <a:prstGeom prst="rect">
-            <a:avLst/>
-          </a:prstGeom>
-          <a:noFill/>
-        </p:spPr>
-        <p:txBody>
-          <a:bodyPr wrap="square" anchor="ctr" lIns="0" rIns="0" tIns="0" bIns="0">
-            <a:spAutoFit/>
-          </a:bodyPr>
-          <a:lstStyle/>
-          <a:p>
-            <a:pPr algn="l">
-              <a:lnSpc>
-                <a:spcPct val="115000"/>
-              </a:lnSpc>
-            </a:pPr>
-            <a:r>
-              <a:rPr sz="1350" b="1" lang="ja-JP">
-                <a:solidFill>
-                  <a:srgbClr val="182C43"/>
-                </a:solidFill>
-                <a:latin typeface="Yu Gothic"/>
-                <a:ea typeface="Yu Gothic"/>
-                <a:cs typeface="Yu Gothic"/>
-              </a:rPr>
-              <a:t>成果物の品質にばらつきがある</a:t>
-            </a:r>
-          </a:p>
-        </p:txBody>
-      </p:sp>
-      <p:sp>
-        <p:nvSpPr>
-          <p:cNvPr id="29" name="Rectangle 28"/>
-          <p:cNvSpPr/>
-          <p:nvPr/>
-        </p:nvSpPr>
-        <p:spPr>
-          <a:xfrm>
-            <a:off x="649224" y="5017770"/>
-            <a:ext cx="4069080" cy="530352"/>
-          </a:xfrm>
-          <a:prstGeom prst="rect">
-            <a:avLst/>
-          </a:prstGeom>
-          <a:solidFill>
-            <a:srgbClr val="FFFFFC"/>
-          </a:solidFill>
-          <a:ln w="9525">
-            <a:solidFill>
-              <a:srgbClr val="D1CFC8"/>
-            </a:solidFill>
-          </a:ln>
-          <a:effectLst/>
-        </p:spPr>
-        <p:style>
-          <a:lnRef idx="1">
-            <a:schemeClr val="accent1"/>
-          </a:lnRef>
-          <a:fillRef idx="3">
-            <a:schemeClr val="accent1"/>
-          </a:fillRef>
-          <a:effectRef idx="2">
-            <a:schemeClr val="accent1"/>
-          </a:effectRef>
-          <a:fontRef idx="minor">
-            <a:schemeClr val="lt1"/>
-          </a:fontRef>
-        </p:style>
-        <p:txBody>
-          <a:bodyPr rtlCol="0" anchor="ctr"/>
-          <a:lstStyle/>
-          <a:p>
-            <a:pPr algn="ctr"/>
-          </a:p>
-        </p:txBody>
-      </p:sp>
-      <p:sp>
-        <p:nvSpPr>
-          <p:cNvPr id="30" name="Oval 29"/>
-          <p:cNvSpPr/>
-          <p:nvPr/>
-        </p:nvSpPr>
-        <p:spPr>
-          <a:xfrm>
-            <a:off x="763524" y="5168646"/>
-            <a:ext cx="228600" cy="228600"/>
-          </a:xfrm>
-          <a:prstGeom prst="ellipse">
-            <a:avLst/>
-          </a:prstGeom>
-          <a:solidFill>
-            <a:srgbClr val="0D7870"/>
-          </a:solidFill>
-          <a:ln>
-            <a:noFill/>
-          </a:ln>
-          <a:effectLst/>
-        </p:spPr>
-        <p:style>
-          <a:lnRef idx="1">
-            <a:schemeClr val="accent1"/>
-          </a:lnRef>
-          <a:fillRef idx="3">
-            <a:schemeClr val="accent1"/>
-          </a:fillRef>
-          <a:effectRef idx="2">
-            <a:schemeClr val="accent1"/>
-          </a:effectRef>
-          <a:fontRef idx="minor">
-            <a:schemeClr val="lt1"/>
-          </a:fontRef>
-        </p:style>
-        <p:txBody>
-          <a:bodyPr rtlCol="0" anchor="ctr"/>
-          <a:lstStyle/>
-          <a:p>
-            <a:pPr algn="ctr"/>
-          </a:p>
-        </p:txBody>
-      </p:sp>
-      <p:sp>
-        <p:nvSpPr>
-          <p:cNvPr id="31" name="TextBox 30"/>
-          <p:cNvSpPr txBox="1"/>
-          <p:nvPr/>
-        </p:nvSpPr>
-        <p:spPr>
-          <a:xfrm>
-            <a:off x="768096" y="5173218"/>
-            <a:ext cx="219456" cy="219456"/>
-          </a:xfrm>
-          <a:prstGeom prst="rect">
-            <a:avLst/>
-          </a:prstGeom>
-          <a:noFill/>
-        </p:spPr>
-        <p:txBody>
-          <a:bodyPr wrap="square" anchor="ctr" lIns="0" rIns="0" tIns="0" bIns="0">
-            <a:spAutoFit/>
-          </a:bodyPr>
-          <a:lstStyle/>
-          <a:p>
-            <a:pPr algn="ctr">
-              <a:lnSpc>
-                <a:spcPct val="130000"/>
-              </a:lnSpc>
-            </a:pPr>
-            <a:r>
-              <a:rPr sz="850" b="1" lang="ja-JP">
-                <a:solidFill>
-                  <a:srgbClr val="FFFFFC"/>
-                </a:solidFill>
-                <a:latin typeface="Yu Gothic"/>
-                <a:ea typeface="Yu Gothic"/>
-                <a:cs typeface="Yu Gothic"/>
-              </a:rPr>
-              <a:t>5</a:t>
-            </a:r>
-          </a:p>
-        </p:txBody>
-      </p:sp>
-      <p:sp>
-        <p:nvSpPr>
-          <p:cNvPr id="32" name="TextBox 31"/>
-          <p:cNvSpPr txBox="1"/>
-          <p:nvPr/>
-        </p:nvSpPr>
-        <p:spPr>
-          <a:xfrm>
-            <a:off x="1088136" y="5017770"/>
-            <a:ext cx="3465576" cy="530352"/>
-          </a:xfrm>
-          <a:prstGeom prst="rect">
-            <a:avLst/>
-          </a:prstGeom>
-          <a:noFill/>
-        </p:spPr>
-        <p:txBody>
-          <a:bodyPr wrap="square" anchor="ctr" lIns="0" rIns="0" tIns="0" bIns="0">
-            <a:spAutoFit/>
-          </a:bodyPr>
-          <a:lstStyle/>
-          <a:p>
-            <a:pPr algn="l">
-              <a:lnSpc>
-                <a:spcPct val="115000"/>
-              </a:lnSpc>
-            </a:pPr>
-            <a:r>
-              <a:rPr sz="1350" b="1" lang="ja-JP">
-                <a:solidFill>
-                  <a:srgbClr val="182C43"/>
-                </a:solidFill>
-                <a:latin typeface="Yu Gothic"/>
-                <a:ea typeface="Yu Gothic"/>
-                <a:cs typeface="Yu Gothic"/>
-              </a:rPr>
-              <a:t>進捗と課題の把握に時間がかかる</a:t>
-            </a:r>
-          </a:p>
-        </p:txBody>
-      </p:sp>
-      <p:sp>
-        <p:nvSpPr>
-          <p:cNvPr id="33" name="Rectangle 32"/>
-          <p:cNvSpPr/>
-          <p:nvPr/>
-        </p:nvSpPr>
-        <p:spPr>
-          <a:xfrm>
-            <a:off x="7473391" y="2420874"/>
-            <a:ext cx="4069080" cy="530352"/>
-          </a:xfrm>
-          <a:prstGeom prst="rect">
-            <a:avLst/>
-          </a:prstGeom>
-          <a:solidFill>
-            <a:srgbClr val="FFFFFC"/>
-          </a:solidFill>
-          <a:ln w="9525">
-            <a:solidFill>
-              <a:srgbClr val="D1CFC8"/>
-            </a:solidFill>
-          </a:ln>
-          <a:effectLst/>
-        </p:spPr>
-        <p:style>
-          <a:lnRef idx="1">
-            <a:schemeClr val="accent1"/>
-          </a:lnRef>
-          <a:fillRef idx="3">
-            <a:schemeClr val="accent1"/>
-          </a:fillRef>
-          <a:effectRef idx="2">
-            <a:schemeClr val="accent1"/>
-          </a:effectRef>
-          <a:fontRef idx="minor">
-            <a:schemeClr val="lt1"/>
-          </a:fontRef>
-        </p:style>
-        <p:txBody>
-          <a:bodyPr rtlCol="0" anchor="ctr"/>
-          <a:lstStyle/>
-          <a:p>
-            <a:pPr algn="ctr"/>
-          </a:p>
-        </p:txBody>
-      </p:sp>
-      <p:sp>
-        <p:nvSpPr>
-          <p:cNvPr id="34" name="Oval 33"/>
-          <p:cNvSpPr/>
-          <p:nvPr/>
-        </p:nvSpPr>
-        <p:spPr>
-          <a:xfrm>
-            <a:off x="11199571" y="2571750"/>
-            <a:ext cx="228600" cy="228600"/>
-          </a:xfrm>
-          <a:prstGeom prst="ellipse">
-            <a:avLst/>
-          </a:prstGeom>
-          <a:solidFill>
-            <a:srgbClr val="0D7870"/>
-          </a:solidFill>
-          <a:ln>
-            <a:noFill/>
-          </a:ln>
-          <a:effectLst/>
-        </p:spPr>
-        <p:style>
-          <a:lnRef idx="1">
-            <a:schemeClr val="accent1"/>
-          </a:lnRef>
-          <a:fillRef idx="3">
-            <a:schemeClr val="accent1"/>
-          </a:fillRef>
-          <a:effectRef idx="2">
-            <a:schemeClr val="accent1"/>
-          </a:effectRef>
-          <a:fontRef idx="minor">
-            <a:schemeClr val="lt1"/>
-          </a:fontRef>
-        </p:style>
-        <p:txBody>
-          <a:bodyPr rtlCol="0" anchor="ctr"/>
-          <a:lstStyle/>
-          <a:p>
-            <a:pPr algn="ctr"/>
-          </a:p>
-        </p:txBody>
-      </p:sp>
-      <p:sp>
-        <p:nvSpPr>
-          <p:cNvPr id="35" name="TextBox 34"/>
-          <p:cNvSpPr txBox="1"/>
-          <p:nvPr/>
-        </p:nvSpPr>
-        <p:spPr>
-          <a:xfrm>
-            <a:off x="11204143" y="2576322"/>
-            <a:ext cx="219456" cy="219456"/>
-          </a:xfrm>
-          <a:prstGeom prst="rect">
-            <a:avLst/>
-          </a:prstGeom>
-          <a:noFill/>
-        </p:spPr>
-        <p:txBody>
-          <a:bodyPr wrap="square" anchor="ctr" lIns="0" rIns="0" tIns="0" bIns="0">
-            <a:spAutoFit/>
-          </a:bodyPr>
-          <a:lstStyle/>
-          <a:p>
-            <a:pPr algn="ctr">
-              <a:lnSpc>
-                <a:spcPct val="130000"/>
-              </a:lnSpc>
-            </a:pPr>
-            <a:r>
-              <a:rPr sz="850" b="1" lang="ja-JP">
-                <a:solidFill>
-                  <a:srgbClr val="FFFFFC"/>
-                </a:solidFill>
-                <a:latin typeface="Yu Gothic"/>
-                <a:ea typeface="Yu Gothic"/>
-                <a:cs typeface="Yu Gothic"/>
-              </a:rPr>
-              <a:t>1</a:t>
-            </a:r>
-          </a:p>
-        </p:txBody>
-      </p:sp>
-      <p:sp>
-        <p:nvSpPr>
-          <p:cNvPr id="36" name="TextBox 35"/>
-          <p:cNvSpPr txBox="1"/>
-          <p:nvPr/>
-        </p:nvSpPr>
-        <p:spPr>
-          <a:xfrm>
-            <a:off x="7637983" y="2420874"/>
-            <a:ext cx="3465576" cy="530352"/>
-          </a:xfrm>
-          <a:prstGeom prst="rect">
-            <a:avLst/>
-          </a:prstGeom>
-          <a:noFill/>
-        </p:spPr>
-        <p:txBody>
-          <a:bodyPr wrap="square" anchor="ctr" lIns="0" rIns="0" tIns="0" bIns="0">
-            <a:spAutoFit/>
-          </a:bodyPr>
-          <a:lstStyle/>
-          <a:p>
-            <a:pPr algn="l">
-              <a:lnSpc>
-                <a:spcPct val="115000"/>
-              </a:lnSpc>
-            </a:pPr>
-            <a:r>
-              <a:rPr sz="1350" b="1" lang="ja-JP">
-                <a:solidFill>
-                  <a:srgbClr val="182C43"/>
-                </a:solidFill>
-                <a:latin typeface="Yu Gothic"/>
-                <a:ea typeface="Yu Gothic"/>
-                <a:cs typeface="Yu Gothic"/>
-              </a:rPr>
-              <a:t>定型作業の標準化と自動化</a:t>
-            </a:r>
-          </a:p>
-        </p:txBody>
-      </p:sp>
-      <p:sp>
-        <p:nvSpPr>
-          <p:cNvPr id="37" name="Rectangle 36"/>
-          <p:cNvSpPr/>
-          <p:nvPr/>
-        </p:nvSpPr>
-        <p:spPr>
-          <a:xfrm>
-            <a:off x="7473391" y="3070098"/>
-            <a:ext cx="4069080" cy="530352"/>
-          </a:xfrm>
-          <a:prstGeom prst="rect">
-            <a:avLst/>
-          </a:prstGeom>
-          <a:solidFill>
-            <a:srgbClr val="FFFFFC"/>
-          </a:solidFill>
-          <a:ln w="9525">
-            <a:solidFill>
-              <a:srgbClr val="D1CFC8"/>
-            </a:solidFill>
-          </a:ln>
-          <a:effectLst/>
-        </p:spPr>
-        <p:style>
-          <a:lnRef idx="1">
-            <a:schemeClr val="accent1"/>
-          </a:lnRef>
-          <a:fillRef idx="3">
-            <a:schemeClr val="accent1"/>
-          </a:fillRef>
-          <a:effectRef idx="2">
-            <a:schemeClr val="accent1"/>
-          </a:effectRef>
-          <a:fontRef idx="minor">
-            <a:schemeClr val="lt1"/>
-          </a:fontRef>
-        </p:style>
-        <p:txBody>
-          <a:bodyPr rtlCol="0" anchor="ctr"/>
-          <a:lstStyle/>
-          <a:p>
-            <a:pPr algn="ctr"/>
-          </a:p>
-        </p:txBody>
-      </p:sp>
-      <p:sp>
-        <p:nvSpPr>
-          <p:cNvPr id="38" name="Oval 37"/>
-          <p:cNvSpPr/>
-          <p:nvPr/>
-        </p:nvSpPr>
-        <p:spPr>
-          <a:xfrm>
-            <a:off x="11199571" y="3220974"/>
-            <a:ext cx="228600" cy="228600"/>
-          </a:xfrm>
-          <a:prstGeom prst="ellipse">
-            <a:avLst/>
-          </a:prstGeom>
-          <a:solidFill>
-            <a:srgbClr val="0D7870"/>
-          </a:solidFill>
-          <a:ln>
-            <a:noFill/>
-          </a:ln>
-          <a:effectLst/>
-        </p:spPr>
-        <p:style>
-          <a:lnRef idx="1">
-            <a:schemeClr val="accent1"/>
-          </a:lnRef>
-          <a:fillRef idx="3">
-            <a:schemeClr val="accent1"/>
-          </a:fillRef>
-          <a:effectRef idx="2">
-            <a:schemeClr val="accent1"/>
-          </a:effectRef>
-          <a:fontRef idx="minor">
-            <a:schemeClr val="lt1"/>
-          </a:fontRef>
-        </p:style>
-        <p:txBody>
-          <a:bodyPr rtlCol="0" anchor="ctr"/>
-          <a:lstStyle/>
-          <a:p>
-            <a:pPr algn="ctr"/>
-          </a:p>
-        </p:txBody>
-      </p:sp>
-      <p:sp>
-        <p:nvSpPr>
-          <p:cNvPr id="39" name="TextBox 38"/>
-          <p:cNvSpPr txBox="1"/>
-          <p:nvPr/>
-        </p:nvSpPr>
-        <p:spPr>
-          <a:xfrm>
-            <a:off x="11204143" y="3225546"/>
-            <a:ext cx="219456" cy="219456"/>
-          </a:xfrm>
-          <a:prstGeom prst="rect">
-            <a:avLst/>
-          </a:prstGeom>
-          <a:noFill/>
-        </p:spPr>
-        <p:txBody>
-          <a:bodyPr wrap="square" anchor="ctr" lIns="0" rIns="0" tIns="0" bIns="0">
-            <a:spAutoFit/>
-          </a:bodyPr>
-          <a:lstStyle/>
-          <a:p>
-            <a:pPr algn="ctr">
-              <a:lnSpc>
-                <a:spcPct val="130000"/>
-              </a:lnSpc>
-            </a:pPr>
-            <a:r>
-              <a:rPr sz="850" b="1" lang="ja-JP">
-                <a:solidFill>
-                  <a:srgbClr val="FFFFFC"/>
-                </a:solidFill>
-                <a:latin typeface="Yu Gothic"/>
-                <a:ea typeface="Yu Gothic"/>
-                <a:cs typeface="Yu Gothic"/>
-              </a:rPr>
-              <a:t>2</a:t>
-            </a:r>
-          </a:p>
-        </p:txBody>
-      </p:sp>
-      <p:sp>
-        <p:nvSpPr>
-          <p:cNvPr id="40" name="TextBox 39"/>
-          <p:cNvSpPr txBox="1"/>
-          <p:nvPr/>
-        </p:nvSpPr>
-        <p:spPr>
-          <a:xfrm>
-            <a:off x="7637983" y="3070098"/>
-            <a:ext cx="3465576" cy="530352"/>
-          </a:xfrm>
-          <a:prstGeom prst="rect">
-            <a:avLst/>
-          </a:prstGeom>
-          <a:noFill/>
-        </p:spPr>
-        <p:txBody>
-          <a:bodyPr wrap="square" anchor="ctr" lIns="0" rIns="0" tIns="0" bIns="0">
-            <a:spAutoFit/>
-          </a:bodyPr>
-          <a:lstStyle/>
-          <a:p>
-            <a:pPr algn="l">
-              <a:lnSpc>
-                <a:spcPct val="115000"/>
-              </a:lnSpc>
-            </a:pPr>
-            <a:r>
-              <a:rPr sz="1350" b="1" lang="ja-JP">
-                <a:solidFill>
-                  <a:srgbClr val="182C43"/>
-                </a:solidFill>
-                <a:latin typeface="Yu Gothic"/>
-                <a:ea typeface="Yu Gothic"/>
-                <a:cs typeface="Yu Gothic"/>
-              </a:rPr>
-              <a:t>データ管理先の統合</a:t>
-            </a:r>
-          </a:p>
-        </p:txBody>
-      </p:sp>
-      <p:sp>
-        <p:nvSpPr>
-          <p:cNvPr id="41" name="Rectangle 40"/>
-          <p:cNvSpPr/>
-          <p:nvPr/>
-        </p:nvSpPr>
-        <p:spPr>
-          <a:xfrm>
-            <a:off x="7473391" y="3719322"/>
-            <a:ext cx="4069080" cy="530352"/>
-          </a:xfrm>
-          <a:prstGeom prst="rect">
-            <a:avLst/>
-          </a:prstGeom>
-          <a:solidFill>
-            <a:srgbClr val="FFFFFC"/>
-          </a:solidFill>
-          <a:ln w="9525">
-            <a:solidFill>
-              <a:srgbClr val="D1CFC8"/>
-            </a:solidFill>
-          </a:ln>
-          <a:effectLst/>
-        </p:spPr>
-        <p:style>
-          <a:lnRef idx="1">
-            <a:schemeClr val="accent1"/>
-          </a:lnRef>
-          <a:fillRef idx="3">
-            <a:schemeClr val="accent1"/>
-          </a:fillRef>
-          <a:effectRef idx="2">
-            <a:schemeClr val="accent1"/>
-          </a:effectRef>
-          <a:fontRef idx="minor">
-            <a:schemeClr val="lt1"/>
-          </a:fontRef>
-        </p:style>
-        <p:txBody>
-          <a:bodyPr rtlCol="0" anchor="ctr"/>
-          <a:lstStyle/>
-          <a:p>
-            <a:pPr algn="ctr"/>
-          </a:p>
-        </p:txBody>
-      </p:sp>
-      <p:sp>
-        <p:nvSpPr>
-          <p:cNvPr id="42" name="Oval 41"/>
-          <p:cNvSpPr/>
-          <p:nvPr/>
-        </p:nvSpPr>
-        <p:spPr>
-          <a:xfrm>
-            <a:off x="11199571" y="3870198"/>
-            <a:ext cx="228600" cy="228600"/>
-          </a:xfrm>
-          <a:prstGeom prst="ellipse">
-            <a:avLst/>
-          </a:prstGeom>
-          <a:solidFill>
-            <a:srgbClr val="0D7870"/>
-          </a:solidFill>
-          <a:ln>
-            <a:noFill/>
-          </a:ln>
-          <a:effectLst/>
-        </p:spPr>
-        <p:style>
-          <a:lnRef idx="1">
-            <a:schemeClr val="accent1"/>
-          </a:lnRef>
-          <a:fillRef idx="3">
-            <a:schemeClr val="accent1"/>
-          </a:fillRef>
-          <a:effectRef idx="2">
-            <a:schemeClr val="accent1"/>
-          </a:effectRef>
-          <a:fontRef idx="minor">
-            <a:schemeClr val="lt1"/>
-          </a:fontRef>
-        </p:style>
-        <p:txBody>
-          <a:bodyPr rtlCol="0" anchor="ctr"/>
-          <a:lstStyle/>
-          <a:p>
-            <a:pPr algn="ctr"/>
-          </a:p>
-        </p:txBody>
-      </p:sp>
-      <p:sp>
-        <p:nvSpPr>
-          <p:cNvPr id="43" name="TextBox 42"/>
-          <p:cNvSpPr txBox="1"/>
-          <p:nvPr/>
-        </p:nvSpPr>
-        <p:spPr>
-          <a:xfrm>
-            <a:off x="11204143" y="3874770"/>
-            <a:ext cx="219456" cy="219456"/>
-          </a:xfrm>
-          <a:prstGeom prst="rect">
-            <a:avLst/>
-          </a:prstGeom>
-          <a:noFill/>
-        </p:spPr>
-        <p:txBody>
-          <a:bodyPr wrap="square" anchor="ctr" lIns="0" rIns="0" tIns="0" bIns="0">
-            <a:spAutoFit/>
-          </a:bodyPr>
-          <a:lstStyle/>
-          <a:p>
-            <a:pPr algn="ctr">
-              <a:lnSpc>
-                <a:spcPct val="130000"/>
-              </a:lnSpc>
-            </a:pPr>
-            <a:r>
-              <a:rPr sz="850" b="1" lang="ja-JP">
-                <a:solidFill>
-                  <a:srgbClr val="FFFFFC"/>
-                </a:solidFill>
-                <a:latin typeface="Yu Gothic"/>
-                <a:ea typeface="Yu Gothic"/>
-                <a:cs typeface="Yu Gothic"/>
-              </a:rPr>
-              <a:t>3</a:t>
-            </a:r>
-          </a:p>
-        </p:txBody>
-      </p:sp>
-      <p:sp>
-        <p:nvSpPr>
-          <p:cNvPr id="44" name="TextBox 43"/>
-          <p:cNvSpPr txBox="1"/>
-          <p:nvPr/>
-        </p:nvSpPr>
-        <p:spPr>
-          <a:xfrm>
-            <a:off x="7637983" y="3719322"/>
-            <a:ext cx="3465576" cy="530352"/>
-          </a:xfrm>
-          <a:prstGeom prst="rect">
-            <a:avLst/>
-          </a:prstGeom>
-          <a:noFill/>
-        </p:spPr>
-        <p:txBody>
-          <a:bodyPr wrap="square" anchor="ctr" lIns="0" rIns="0" tIns="0" bIns="0">
-            <a:spAutoFit/>
-          </a:bodyPr>
-          <a:lstStyle/>
-          <a:p>
-            <a:pPr algn="l">
-              <a:lnSpc>
-                <a:spcPct val="115000"/>
-              </a:lnSpc>
-            </a:pPr>
-            <a:r>
-              <a:rPr sz="1350" b="1" lang="ja-JP">
-                <a:solidFill>
-                  <a:srgbClr val="182C43"/>
-                </a:solidFill>
-                <a:latin typeface="Yu Gothic"/>
-                <a:ea typeface="Yu Gothic"/>
-                <a:cs typeface="Yu Gothic"/>
-              </a:rPr>
-              <a:t>承認条件と判断権限の見直し</a:t>
-            </a:r>
-          </a:p>
-        </p:txBody>
-      </p:sp>
-      <p:sp>
-        <p:nvSpPr>
-          <p:cNvPr id="45" name="Rectangle 44"/>
-          <p:cNvSpPr/>
-          <p:nvPr/>
-        </p:nvSpPr>
-        <p:spPr>
-          <a:xfrm>
-            <a:off x="7473391" y="4368546"/>
-            <a:ext cx="4069080" cy="530352"/>
-          </a:xfrm>
-          <a:prstGeom prst="rect">
-            <a:avLst/>
-          </a:prstGeom>
-          <a:solidFill>
-            <a:srgbClr val="FFFFFC"/>
-          </a:solidFill>
-          <a:ln w="9525">
-            <a:solidFill>
-              <a:srgbClr val="D1CFC8"/>
-            </a:solidFill>
-          </a:ln>
-          <a:effectLst/>
-        </p:spPr>
-        <p:style>
-          <a:lnRef idx="1">
-            <a:schemeClr val="accent1"/>
-          </a:lnRef>
-          <a:fillRef idx="3">
-            <a:schemeClr val="accent1"/>
-          </a:fillRef>
-          <a:effectRef idx="2">
-            <a:schemeClr val="accent1"/>
-          </a:effectRef>
-          <a:fontRef idx="minor">
-            <a:schemeClr val="lt1"/>
-          </a:fontRef>
-        </p:style>
-        <p:txBody>
-          <a:bodyPr rtlCol="0" anchor="ctr"/>
-          <a:lstStyle/>
-          <a:p>
-            <a:pPr algn="ctr"/>
-          </a:p>
-        </p:txBody>
-      </p:sp>
-      <p:sp>
-        <p:nvSpPr>
-          <p:cNvPr id="46" name="Oval 45"/>
-          <p:cNvSpPr/>
-          <p:nvPr/>
-        </p:nvSpPr>
-        <p:spPr>
-          <a:xfrm>
-            <a:off x="11199571" y="4519422"/>
-            <a:ext cx="228600" cy="228600"/>
-          </a:xfrm>
-          <a:prstGeom prst="ellipse">
-            <a:avLst/>
-          </a:prstGeom>
-          <a:solidFill>
-            <a:srgbClr val="0D7870"/>
-          </a:solidFill>
-          <a:ln>
-            <a:noFill/>
-          </a:ln>
-          <a:effectLst/>
-        </p:spPr>
-        <p:style>
-          <a:lnRef idx="1">
-            <a:schemeClr val="accent1"/>
-          </a:lnRef>
-          <a:fillRef idx="3">
-            <a:schemeClr val="accent1"/>
-          </a:fillRef>
-          <a:effectRef idx="2">
-            <a:schemeClr val="accent1"/>
-          </a:effectRef>
-          <a:fontRef idx="minor">
-            <a:schemeClr val="lt1"/>
-          </a:fontRef>
-        </p:style>
-        <p:txBody>
-          <a:bodyPr rtlCol="0" anchor="ctr"/>
-          <a:lstStyle/>
-          <a:p>
-            <a:pPr algn="ctr"/>
-          </a:p>
-        </p:txBody>
-      </p:sp>
-      <p:sp>
-        <p:nvSpPr>
-          <p:cNvPr id="47" name="TextBox 46"/>
-          <p:cNvSpPr txBox="1"/>
-          <p:nvPr/>
-        </p:nvSpPr>
-        <p:spPr>
-          <a:xfrm>
-            <a:off x="11204143" y="4523994"/>
-            <a:ext cx="219456" cy="219456"/>
-          </a:xfrm>
-          <a:prstGeom prst="rect">
-            <a:avLst/>
-          </a:prstGeom>
-          <a:noFill/>
-        </p:spPr>
-        <p:txBody>
-          <a:bodyPr wrap="square" anchor="ctr" lIns="0" rIns="0" tIns="0" bIns="0">
-            <a:spAutoFit/>
-          </a:bodyPr>
-          <a:lstStyle/>
-          <a:p>
-            <a:pPr algn="ctr">
-              <a:lnSpc>
-                <a:spcPct val="130000"/>
-              </a:lnSpc>
-            </a:pPr>
-            <a:r>
-              <a:rPr sz="850" b="1" lang="ja-JP">
-                <a:solidFill>
-                  <a:srgbClr val="FFFFFC"/>
-                </a:solidFill>
-                <a:latin typeface="Yu Gothic"/>
-                <a:ea typeface="Yu Gothic"/>
-                <a:cs typeface="Yu Gothic"/>
-              </a:rPr>
-              <a:t>4</a:t>
-            </a:r>
-          </a:p>
-        </p:txBody>
-      </p:sp>
-      <p:sp>
-        <p:nvSpPr>
-          <p:cNvPr id="48" name="TextBox 47"/>
-          <p:cNvSpPr txBox="1"/>
-          <p:nvPr/>
-        </p:nvSpPr>
-        <p:spPr>
-          <a:xfrm>
-            <a:off x="7637983" y="4368546"/>
-            <a:ext cx="3465576" cy="530352"/>
-          </a:xfrm>
-          <a:prstGeom prst="rect">
-            <a:avLst/>
-          </a:prstGeom>
-          <a:noFill/>
-        </p:spPr>
-        <p:txBody>
-          <a:bodyPr wrap="square" anchor="ctr" lIns="0" rIns="0" tIns="0" bIns="0">
-            <a:spAutoFit/>
-          </a:bodyPr>
-          <a:lstStyle/>
-          <a:p>
-            <a:pPr algn="l">
-              <a:lnSpc>
-                <a:spcPct val="115000"/>
-              </a:lnSpc>
-            </a:pPr>
-            <a:r>
-              <a:rPr sz="1350" b="1" lang="ja-JP">
-                <a:solidFill>
-                  <a:srgbClr val="182C43"/>
-                </a:solidFill>
-                <a:latin typeface="Yu Gothic"/>
-                <a:ea typeface="Yu Gothic"/>
-                <a:cs typeface="Yu Gothic"/>
-              </a:rPr>
-              <a:t>レビュー基準と品質ゲートの整備</a:t>
-            </a:r>
-          </a:p>
-        </p:txBody>
-      </p:sp>
-      <p:sp>
-        <p:nvSpPr>
-          <p:cNvPr id="49" name="Rectangle 48"/>
-          <p:cNvSpPr/>
-          <p:nvPr/>
-        </p:nvSpPr>
-        <p:spPr>
-          <a:xfrm>
-            <a:off x="7473391" y="5017770"/>
-            <a:ext cx="4069080" cy="530352"/>
-          </a:xfrm>
-          <a:prstGeom prst="rect">
-            <a:avLst/>
-          </a:prstGeom>
-          <a:solidFill>
-            <a:srgbClr val="FFFFFC"/>
-          </a:solidFill>
-          <a:ln w="9525">
-            <a:solidFill>
-              <a:srgbClr val="D1CFC8"/>
-            </a:solidFill>
-          </a:ln>
-          <a:effectLst/>
-        </p:spPr>
-        <p:style>
-          <a:lnRef idx="1">
-            <a:schemeClr val="accent1"/>
-          </a:lnRef>
-          <a:fillRef idx="3">
-            <a:schemeClr val="accent1"/>
-          </a:fillRef>
-          <a:effectRef idx="2">
-            <a:schemeClr val="accent1"/>
-          </a:effectRef>
-          <a:fontRef idx="minor">
-            <a:schemeClr val="lt1"/>
-          </a:fontRef>
-        </p:style>
-        <p:txBody>
-          <a:bodyPr rtlCol="0" anchor="ctr"/>
-          <a:lstStyle/>
-          <a:p>
-            <a:pPr algn="ctr"/>
-          </a:p>
-        </p:txBody>
-      </p:sp>
-      <p:sp>
-        <p:nvSpPr>
-          <p:cNvPr id="50" name="Oval 49"/>
-          <p:cNvSpPr/>
-          <p:nvPr/>
-        </p:nvSpPr>
-        <p:spPr>
-          <a:xfrm>
-            <a:off x="11199571" y="5168646"/>
-            <a:ext cx="228600" cy="228600"/>
-          </a:xfrm>
-          <a:prstGeom prst="ellipse">
-            <a:avLst/>
-          </a:prstGeom>
-          <a:solidFill>
-            <a:srgbClr val="0D7870"/>
-          </a:solidFill>
-          <a:ln>
-            <a:noFill/>
-          </a:ln>
-          <a:effectLst/>
-        </p:spPr>
-        <p:style>
-          <a:lnRef idx="1">
-            <a:schemeClr val="accent1"/>
-          </a:lnRef>
-          <a:fillRef idx="3">
-            <a:schemeClr val="accent1"/>
-          </a:fillRef>
-          <a:effectRef idx="2">
-            <a:schemeClr val="accent1"/>
-          </a:effectRef>
-          <a:fontRef idx="minor">
-            <a:schemeClr val="lt1"/>
-          </a:fontRef>
-        </p:style>
-        <p:txBody>
-          <a:bodyPr rtlCol="0" anchor="ctr"/>
-          <a:lstStyle/>
-          <a:p>
-            <a:pPr algn="ctr"/>
-          </a:p>
-        </p:txBody>
-      </p:sp>
-      <p:sp>
-        <p:nvSpPr>
-          <p:cNvPr id="51" name="TextBox 50"/>
-          <p:cNvSpPr txBox="1"/>
-          <p:nvPr/>
-        </p:nvSpPr>
-        <p:spPr>
-          <a:xfrm>
-            <a:off x="11204143" y="5173218"/>
-            <a:ext cx="219456" cy="219456"/>
-          </a:xfrm>
-          <a:prstGeom prst="rect">
-            <a:avLst/>
-          </a:prstGeom>
-          <a:noFill/>
-        </p:spPr>
-        <p:txBody>
-          <a:bodyPr wrap="square" anchor="ctr" lIns="0" rIns="0" tIns="0" bIns="0">
-            <a:spAutoFit/>
-          </a:bodyPr>
-          <a:lstStyle/>
-          <a:p>
-            <a:pPr algn="ctr">
-              <a:lnSpc>
-                <a:spcPct val="130000"/>
-              </a:lnSpc>
-            </a:pPr>
-            <a:r>
-              <a:rPr sz="850" b="1" lang="ja-JP">
-                <a:solidFill>
-                  <a:srgbClr val="FFFFFC"/>
-                </a:solidFill>
-                <a:latin typeface="Yu Gothic"/>
-                <a:ea typeface="Yu Gothic"/>
-                <a:cs typeface="Yu Gothic"/>
-              </a:rPr>
-              <a:t>5</a:t>
-            </a:r>
-          </a:p>
-        </p:txBody>
-      </p:sp>
-      <p:sp>
-        <p:nvSpPr>
-          <p:cNvPr id="52" name="TextBox 51"/>
-          <p:cNvSpPr txBox="1"/>
-          <p:nvPr/>
-        </p:nvSpPr>
-        <p:spPr>
-          <a:xfrm>
-            <a:off x="7637983" y="5017770"/>
-            <a:ext cx="3465576" cy="530352"/>
-          </a:xfrm>
-          <a:prstGeom prst="rect">
-            <a:avLst/>
-          </a:prstGeom>
-          <a:noFill/>
-        </p:spPr>
-        <p:txBody>
-          <a:bodyPr wrap="square" anchor="ctr" lIns="0" rIns="0" tIns="0" bIns="0">
-            <a:spAutoFit/>
-          </a:bodyPr>
-          <a:lstStyle/>
-          <a:p>
-            <a:pPr algn="l">
-              <a:lnSpc>
-                <a:spcPct val="115000"/>
-              </a:lnSpc>
-            </a:pPr>
-            <a:r>
-              <a:rPr sz="1350" b="1" lang="ja-JP">
-                <a:solidFill>
-                  <a:srgbClr val="182C43"/>
-                </a:solidFill>
-                <a:latin typeface="Yu Gothic"/>
-                <a:ea typeface="Yu Gothic"/>
-                <a:cs typeface="Yu Gothic"/>
-              </a:rPr>
-              <a:t>進捗・課題ダッシュボードの整備</a:t>
-            </a:r>
-          </a:p>
-        </p:txBody>
-      </p:sp>
-      <p:sp>
-        <p:nvSpPr>
-          <p:cNvPr id="53" name="Oval 52"/>
-          <p:cNvSpPr/>
-          <p:nvPr/>
-        </p:nvSpPr>
-        <p:spPr>
-          <a:xfrm>
-            <a:off x="4681728" y="2649474"/>
-            <a:ext cx="73152" cy="73152"/>
-          </a:xfrm>
-          <a:prstGeom prst="ellipse">
-            <a:avLst/>
-          </a:prstGeom>
-          <a:solidFill>
-            <a:srgbClr val="0D7870"/>
-          </a:solidFill>
-          <a:ln>
-            <a:noFill/>
-          </a:ln>
-          <a:effectLst/>
-        </p:spPr>
-        <p:style>
-          <a:lnRef idx="1">
-            <a:schemeClr val="accent1"/>
-          </a:lnRef>
-          <a:fillRef idx="3">
-            <a:schemeClr val="accent1"/>
-          </a:fillRef>
-          <a:effectRef idx="2">
-            <a:schemeClr val="accent1"/>
-          </a:effectRef>
-          <a:fontRef idx="minor">
-            <a:schemeClr val="lt1"/>
-          </a:fontRef>
-        </p:style>
-        <p:txBody>
-          <a:bodyPr rtlCol="0" anchor="ctr"/>
-          <a:lstStyle/>
-          <a:p>
-            <a:pPr algn="ctr"/>
-          </a:p>
-        </p:txBody>
-      </p:sp>
-      <p:sp>
-        <p:nvSpPr>
-          <p:cNvPr id="54" name="Oval 53"/>
-          <p:cNvSpPr/>
-          <p:nvPr/>
-        </p:nvSpPr>
-        <p:spPr>
-          <a:xfrm>
-            <a:off x="4681728" y="3298698"/>
-            <a:ext cx="73152" cy="73152"/>
-          </a:xfrm>
-          <a:prstGeom prst="ellipse">
-            <a:avLst/>
-          </a:prstGeom>
-          <a:solidFill>
-            <a:srgbClr val="666E70"/>
-          </a:solidFill>
-          <a:ln>
-            <a:noFill/>
-          </a:ln>
-          <a:effectLst/>
-        </p:spPr>
-        <p:style>
-          <a:lnRef idx="1">
-            <a:schemeClr val="accent1"/>
-          </a:lnRef>
-          <a:fillRef idx="3">
-            <a:schemeClr val="accent1"/>
-          </a:fillRef>
-          <a:effectRef idx="2">
-            <a:schemeClr val="accent1"/>
-          </a:effectRef>
-          <a:fontRef idx="minor">
-            <a:schemeClr val="lt1"/>
-          </a:fontRef>
-        </p:style>
-        <p:txBody>
-          <a:bodyPr rtlCol="0" anchor="ctr"/>
-          <a:lstStyle/>
-          <a:p>
-            <a:pPr algn="ctr"/>
-          </a:p>
-        </p:txBody>
-      </p:sp>
-      <p:sp>
-        <p:nvSpPr>
-          <p:cNvPr id="55" name="Oval 54"/>
-          <p:cNvSpPr/>
-          <p:nvPr/>
-        </p:nvSpPr>
-        <p:spPr>
-          <a:xfrm>
-            <a:off x="4681728" y="3947922"/>
-            <a:ext cx="73152" cy="73152"/>
-          </a:xfrm>
-          <a:prstGeom prst="ellipse">
-            <a:avLst/>
-          </a:prstGeom>
-          <a:solidFill>
-            <a:srgbClr val="666E70"/>
-          </a:solidFill>
-          <a:ln>
-            <a:noFill/>
-          </a:ln>
-          <a:effectLst/>
-        </p:spPr>
-        <p:style>
-          <a:lnRef idx="1">
-            <a:schemeClr val="accent1"/>
-          </a:lnRef>
-          <a:fillRef idx="3">
-            <a:schemeClr val="accent1"/>
-          </a:fillRef>
-          <a:effectRef idx="2">
-            <a:schemeClr val="accent1"/>
-          </a:effectRef>
-          <a:fontRef idx="minor">
-            <a:schemeClr val="lt1"/>
-          </a:fontRef>
-        </p:style>
-        <p:txBody>
-          <a:bodyPr rtlCol="0" anchor="ctr"/>
-          <a:lstStyle/>
-          <a:p>
-            <a:pPr algn="ctr"/>
-          </a:p>
-        </p:txBody>
-      </p:sp>
-      <p:sp>
-        <p:nvSpPr>
-          <p:cNvPr id="56" name="Oval 55"/>
-          <p:cNvSpPr/>
-          <p:nvPr/>
-        </p:nvSpPr>
-        <p:spPr>
-          <a:xfrm>
-            <a:off x="4681728" y="4597146"/>
-            <a:ext cx="73152" cy="73152"/>
-          </a:xfrm>
-          <a:prstGeom prst="ellipse">
-            <a:avLst/>
-          </a:prstGeom>
-          <a:solidFill>
-            <a:srgbClr val="666E70"/>
-          </a:solidFill>
-          <a:ln>
-            <a:noFill/>
-          </a:ln>
-          <a:effectLst/>
-        </p:spPr>
-        <p:style>
-          <a:lnRef idx="1">
-            <a:schemeClr val="accent1"/>
-          </a:lnRef>
-          <a:fillRef idx="3">
-            <a:schemeClr val="accent1"/>
-          </a:fillRef>
-          <a:effectRef idx="2">
-            <a:schemeClr val="accent1"/>
-          </a:effectRef>
-          <a:fontRef idx="minor">
-            <a:schemeClr val="lt1"/>
-          </a:fontRef>
-        </p:style>
-        <p:txBody>
-          <a:bodyPr rtlCol="0" anchor="ctr"/>
-          <a:lstStyle/>
-          <a:p>
-            <a:pPr algn="ctr"/>
-          </a:p>
-        </p:txBody>
-      </p:sp>
-      <p:sp>
-        <p:nvSpPr>
-          <p:cNvPr id="57" name="Oval 56"/>
-          <p:cNvSpPr/>
-          <p:nvPr/>
-        </p:nvSpPr>
-        <p:spPr>
-          <a:xfrm>
-            <a:off x="4681728" y="5246370"/>
-            <a:ext cx="73152" cy="73152"/>
-          </a:xfrm>
-          <a:prstGeom prst="ellipse">
-            <a:avLst/>
-          </a:prstGeom>
-          <a:solidFill>
-            <a:srgbClr val="666E70"/>
-          </a:solidFill>
-          <a:ln>
-            <a:noFill/>
-          </a:ln>
-          <a:effectLst/>
-        </p:spPr>
-        <p:style>
-          <a:lnRef idx="1">
-            <a:schemeClr val="accent1"/>
-          </a:lnRef>
-          <a:fillRef idx="3">
-            <a:schemeClr val="accent1"/>
-          </a:fillRef>
-          <a:effectRef idx="2">
-            <a:schemeClr val="accent1"/>
-          </a:effectRef>
-          <a:fontRef idx="minor">
-            <a:schemeClr val="lt1"/>
-          </a:fontRef>
-        </p:style>
-        <p:txBody>
-          <a:bodyPr rtlCol="0" anchor="ctr"/>
-          <a:lstStyle/>
-          <a:p>
-            <a:pPr algn="ctr"/>
-          </a:p>
-        </p:txBody>
-      </p:sp>
-      <p:sp>
-        <p:nvSpPr>
-          <p:cNvPr id="58" name="Oval 57"/>
-          <p:cNvSpPr/>
-          <p:nvPr/>
-        </p:nvSpPr>
-        <p:spPr>
-          <a:xfrm>
-            <a:off x="7436815" y="2649474"/>
-            <a:ext cx="73152" cy="73152"/>
-          </a:xfrm>
-          <a:prstGeom prst="ellipse">
-            <a:avLst/>
-          </a:prstGeom>
-          <a:solidFill>
-            <a:srgbClr val="0D7870"/>
-          </a:solidFill>
-          <a:ln>
-            <a:noFill/>
-          </a:ln>
-          <a:effectLst/>
-        </p:spPr>
-        <p:style>
-          <a:lnRef idx="1">
-            <a:schemeClr val="accent1"/>
-          </a:lnRef>
-          <a:fillRef idx="3">
-            <a:schemeClr val="accent1"/>
-          </a:fillRef>
-          <a:effectRef idx="2">
-            <a:schemeClr val="accent1"/>
-          </a:effectRef>
-          <a:fontRef idx="minor">
-            <a:schemeClr val="lt1"/>
-          </a:fontRef>
-        </p:style>
-        <p:txBody>
-          <a:bodyPr rtlCol="0" anchor="ctr"/>
-          <a:lstStyle/>
-          <a:p>
-            <a:pPr algn="ctr"/>
-          </a:p>
-        </p:txBody>
-      </p:sp>
-      <p:sp>
-        <p:nvSpPr>
-          <p:cNvPr id="59" name="Oval 58"/>
-          <p:cNvSpPr/>
-          <p:nvPr/>
-        </p:nvSpPr>
-        <p:spPr>
-          <a:xfrm>
-            <a:off x="7436815" y="3298698"/>
-            <a:ext cx="73152" cy="73152"/>
-          </a:xfrm>
-          <a:prstGeom prst="ellipse">
-            <a:avLst/>
-          </a:prstGeom>
-          <a:solidFill>
-            <a:srgbClr val="666E70"/>
-          </a:solidFill>
-          <a:ln>
-            <a:noFill/>
-          </a:ln>
-          <a:effectLst/>
-        </p:spPr>
-        <p:style>
-          <a:lnRef idx="1">
-            <a:schemeClr val="accent1"/>
-          </a:lnRef>
-          <a:fillRef idx="3">
-            <a:schemeClr val="accent1"/>
-          </a:fillRef>
-          <a:effectRef idx="2">
-            <a:schemeClr val="accent1"/>
-          </a:effectRef>
-          <a:fontRef idx="minor">
-            <a:schemeClr val="lt1"/>
-          </a:fontRef>
-        </p:style>
-        <p:txBody>
-          <a:bodyPr rtlCol="0" anchor="ctr"/>
-          <a:lstStyle/>
-          <a:p>
-            <a:pPr algn="ctr"/>
-          </a:p>
-        </p:txBody>
-      </p:sp>
-      <p:sp>
-        <p:nvSpPr>
-          <p:cNvPr id="60" name="Oval 59"/>
-          <p:cNvSpPr/>
-          <p:nvPr/>
-        </p:nvSpPr>
-        <p:spPr>
-          <a:xfrm>
-            <a:off x="7436815" y="3947922"/>
-            <a:ext cx="73152" cy="73152"/>
-          </a:xfrm>
-          <a:prstGeom prst="ellipse">
-            <a:avLst/>
-          </a:prstGeom>
-          <a:solidFill>
-            <a:srgbClr val="666E70"/>
-          </a:solidFill>
-          <a:ln>
-            <a:noFill/>
-          </a:ln>
-          <a:effectLst/>
-        </p:spPr>
-        <p:style>
-          <a:lnRef idx="1">
-            <a:schemeClr val="accent1"/>
-          </a:lnRef>
-          <a:fillRef idx="3">
-            <a:schemeClr val="accent1"/>
-          </a:fillRef>
-          <a:effectRef idx="2">
-            <a:schemeClr val="accent1"/>
-          </a:effectRef>
-          <a:fontRef idx="minor">
-            <a:schemeClr val="lt1"/>
-          </a:fontRef>
-        </p:style>
-        <p:txBody>
-          <a:bodyPr rtlCol="0" anchor="ctr"/>
-          <a:lstStyle/>
-          <a:p>
-            <a:pPr algn="ctr"/>
-          </a:p>
-        </p:txBody>
-      </p:sp>
-      <p:sp>
-        <p:nvSpPr>
-          <p:cNvPr id="61" name="Oval 60"/>
-          <p:cNvSpPr/>
-          <p:nvPr/>
-        </p:nvSpPr>
-        <p:spPr>
-          <a:xfrm>
-            <a:off x="7436815" y="4597146"/>
-            <a:ext cx="73152" cy="73152"/>
-          </a:xfrm>
-          <a:prstGeom prst="ellipse">
-            <a:avLst/>
-          </a:prstGeom>
-          <a:solidFill>
-            <a:srgbClr val="666E70"/>
-          </a:solidFill>
-          <a:ln>
-            <a:noFill/>
-          </a:ln>
-          <a:effectLst/>
-        </p:spPr>
-        <p:style>
-          <a:lnRef idx="1">
-            <a:schemeClr val="accent1"/>
-          </a:lnRef>
-          <a:fillRef idx="3">
-            <a:schemeClr val="accent1"/>
-          </a:fillRef>
-          <a:effectRef idx="2">
-            <a:schemeClr val="accent1"/>
-          </a:effectRef>
-          <a:fontRef idx="minor">
-            <a:schemeClr val="lt1"/>
-          </a:fontRef>
-        </p:style>
-        <p:txBody>
-          <a:bodyPr rtlCol="0" anchor="ctr"/>
-          <a:lstStyle/>
-          <a:p>
-            <a:pPr algn="ctr"/>
-          </a:p>
-        </p:txBody>
-      </p:sp>
-      <p:sp>
-        <p:nvSpPr>
-          <p:cNvPr id="62" name="Oval 61"/>
-          <p:cNvSpPr/>
-          <p:nvPr/>
-        </p:nvSpPr>
-        <p:spPr>
-          <a:xfrm>
-            <a:off x="7436815" y="5246370"/>
-            <a:ext cx="73152" cy="73152"/>
-          </a:xfrm>
-          <a:prstGeom prst="ellipse">
-            <a:avLst/>
-          </a:prstGeom>
-          <a:solidFill>
-            <a:srgbClr val="666E70"/>
-          </a:solidFill>
-          <a:ln>
-            <a:noFill/>
-          </a:ln>
-          <a:effectLst/>
-        </p:spPr>
-        <p:style>
-          <a:lnRef idx="1">
-            <a:schemeClr val="accent1"/>
-          </a:lnRef>
-          <a:fillRef idx="3">
-            <a:schemeClr val="accent1"/>
-          </a:fillRef>
-          <a:effectRef idx="2">
-            <a:schemeClr val="accent1"/>
-          </a:effectRef>
-          <a:fontRef idx="minor">
-            <a:schemeClr val="lt1"/>
-          </a:fontRef>
-        </p:style>
-        <p:txBody>
-          <a:bodyPr rtlCol="0" anchor="ctr"/>
-          <a:lstStyle/>
-          <a:p>
-            <a:pPr algn="ctr"/>
-          </a:p>
-        </p:txBody>
-      </p:sp>
-      <p:sp>
-        <p:nvSpPr>
-          <p:cNvPr id="63" name="Rectangle 62"/>
+          <p:cNvPr id="68" name="Rectangle 67"/>
           <p:cNvSpPr/>
           <p:nvPr/>
         </p:nvSpPr>
@@ -32970,7 +33104,7 @@
       </p:sp>
       <p:sp>
         <p:nvSpPr>
-          <p:cNvPr id="64" name="TextBox 63"/>
+          <p:cNvPr id="69" name="TextBox 68"/>
           <p:cNvSpPr txBox="1"/>
           <p:nvPr/>
         </p:nvSpPr>
@@ -33011,7 +33145,7 @@
       </p:sp>
       <p:sp>
         <p:nvSpPr>
-          <p:cNvPr id="65" name="TextBox 64"/>
+          <p:cNvPr id="70" name="TextBox 69"/>
           <p:cNvSpPr txBox="1"/>
           <p:nvPr/>
         </p:nvSpPr>
@@ -33213,8 +33347,8 @@
         </p:nvSpPr>
         <p:spPr>
           <a:xfrm>
-            <a:off x="1929384" y="1645920"/>
-            <a:ext cx="2311831" cy="237744"/>
+            <a:off x="2148840" y="1752904"/>
+            <a:ext cx="2256967" cy="237744"/>
           </a:xfrm>
           <a:prstGeom prst="rect">
             <a:avLst/>
@@ -33254,8 +33388,8 @@
         </p:nvSpPr>
         <p:spPr>
           <a:xfrm>
-            <a:off x="4387519" y="1645920"/>
-            <a:ext cx="2311831" cy="237744"/>
+            <a:off x="4552111" y="1752904"/>
+            <a:ext cx="2256967" cy="237744"/>
           </a:xfrm>
           <a:prstGeom prst="rect">
             <a:avLst/>
@@ -33295,7 +33429,7 @@
         </p:nvCxnSpPr>
         <p:spPr>
           <a:xfrm>
-            <a:off x="4314367" y="1554480"/>
+            <a:off x="4478959" y="1661464"/>
             <a:ext cx="0" cy="3584448"/>
           </a:xfrm>
           <a:prstGeom prst="line">
@@ -33331,8 +33465,8 @@
         </p:nvSpPr>
         <p:spPr>
           <a:xfrm>
-            <a:off x="6845655" y="1645920"/>
-            <a:ext cx="2311831" cy="237744"/>
+            <a:off x="6955383" y="1752904"/>
+            <a:ext cx="2256967" cy="237744"/>
           </a:xfrm>
           <a:prstGeom prst="rect">
             <a:avLst/>
@@ -33372,7 +33506,7 @@
         </p:nvCxnSpPr>
         <p:spPr>
           <a:xfrm>
-            <a:off x="6772503" y="1554480"/>
+            <a:off x="6882231" y="1661464"/>
             <a:ext cx="0" cy="3584448"/>
           </a:xfrm>
           <a:prstGeom prst="line">
@@ -33408,8 +33542,8 @@
         </p:nvSpPr>
         <p:spPr>
           <a:xfrm>
-            <a:off x="9303791" y="1645920"/>
-            <a:ext cx="2311831" cy="237744"/>
+            <a:off x="9358655" y="1752904"/>
+            <a:ext cx="2256967" cy="237744"/>
           </a:xfrm>
           <a:prstGeom prst="rect">
             <a:avLst/>
@@ -33449,7 +33583,7 @@
         </p:nvCxnSpPr>
         <p:spPr>
           <a:xfrm>
-            <a:off x="9230639" y="1554480"/>
+            <a:off x="9285503" y="1661464"/>
             <a:ext cx="0" cy="3584448"/>
           </a:xfrm>
           <a:prstGeom prst="line">
@@ -33485,7 +33619,7 @@
         </p:nvSpPr>
         <p:spPr>
           <a:xfrm>
-            <a:off x="502920" y="1993392"/>
+            <a:off x="502920" y="2100376"/>
             <a:ext cx="11185855" cy="786384"/>
           </a:xfrm>
           <a:prstGeom prst="rect">
@@ -33529,8 +33663,8 @@
         </p:nvSpPr>
         <p:spPr>
           <a:xfrm>
-            <a:off x="612648" y="1993392"/>
-            <a:ext cx="1152144" cy="786384"/>
+            <a:off x="612648" y="2100376"/>
+            <a:ext cx="1371600" cy="786384"/>
           </a:xfrm>
           <a:prstGeom prst="rect">
             <a:avLst/>
@@ -33545,7 +33679,7 @@
           <a:p>
             <a:pPr algn="l">
               <a:lnSpc>
-                <a:spcPct val="115000"/>
+                <a:spcPct val="130000"/>
               </a:lnSpc>
             </a:pPr>
             <a:r>
@@ -33570,7 +33704,7 @@
         </p:nvCxnSpPr>
         <p:spPr>
           <a:xfrm>
-            <a:off x="502920" y="2779776"/>
+            <a:off x="502920" y="2886760"/>
             <a:ext cx="11185855" cy="0"/>
           </a:xfrm>
           <a:prstGeom prst="line">
@@ -33606,7 +33740,7 @@
         </p:nvSpPr>
         <p:spPr>
           <a:xfrm>
-            <a:off x="502920" y="2779776"/>
+            <a:off x="502920" y="2886760"/>
             <a:ext cx="11185855" cy="786384"/>
           </a:xfrm>
           <a:prstGeom prst="rect">
@@ -33650,8 +33784,8 @@
         </p:nvSpPr>
         <p:spPr>
           <a:xfrm>
-            <a:off x="612648" y="2779776"/>
-            <a:ext cx="1152144" cy="786384"/>
+            <a:off x="612648" y="2886760"/>
+            <a:ext cx="1371600" cy="786384"/>
           </a:xfrm>
           <a:prstGeom prst="rect">
             <a:avLst/>
@@ -33666,7 +33800,7 @@
           <a:p>
             <a:pPr algn="l">
               <a:lnSpc>
-                <a:spcPct val="115000"/>
+                <a:spcPct val="130000"/>
               </a:lnSpc>
             </a:pPr>
             <a:r>
@@ -33691,7 +33825,7 @@
         </p:nvCxnSpPr>
         <p:spPr>
           <a:xfrm>
-            <a:off x="502920" y="3566160"/>
+            <a:off x="502920" y="3673144"/>
             <a:ext cx="11185855" cy="0"/>
           </a:xfrm>
           <a:prstGeom prst="line">
@@ -33727,7 +33861,7 @@
         </p:nvSpPr>
         <p:spPr>
           <a:xfrm>
-            <a:off x="502920" y="3566160"/>
+            <a:off x="502920" y="3673144"/>
             <a:ext cx="11185855" cy="786384"/>
           </a:xfrm>
           <a:prstGeom prst="rect">
@@ -33771,8 +33905,8 @@
         </p:nvSpPr>
         <p:spPr>
           <a:xfrm>
-            <a:off x="612648" y="3566160"/>
-            <a:ext cx="1152144" cy="786384"/>
+            <a:off x="612648" y="3673144"/>
+            <a:ext cx="1371600" cy="786384"/>
           </a:xfrm>
           <a:prstGeom prst="rect">
             <a:avLst/>
@@ -33787,11 +33921,11 @@
           <a:p>
             <a:pPr algn="l">
               <a:lnSpc>
-                <a:spcPct val="115000"/>
-              </a:lnSpc>
-            </a:pPr>
-            <a:r>
-              <a:rPr sz="1300" b="1" lang="ja-JP">
+                <a:spcPct val="130000"/>
+              </a:lnSpc>
+            </a:pPr>
+            <a:r>
+              <a:rPr sz="1200" b="1" lang="ja-JP">
                 <a:solidFill>
                   <a:srgbClr val="182C43"/>
                 </a:solidFill>
@@ -33799,25 +33933,7 @@
                 <a:ea typeface="Yu Gothic"/>
                 <a:cs typeface="Yu Gothic"/>
               </a:rPr>
-              <a:t>ネットワーク</a:t>
-            </a:r>
-          </a:p>
-          <a:p>
-            <a:pPr algn="l">
-              <a:lnSpc>
-                <a:spcPct val="115000"/>
-              </a:lnSpc>
-            </a:pPr>
-            <a:r>
-              <a:rPr sz="1300" b="1" lang="ja-JP">
-                <a:solidFill>
-                  <a:srgbClr val="182C43"/>
-                </a:solidFill>
-                <a:latin typeface="Yu Gothic"/>
-                <a:ea typeface="Yu Gothic"/>
-                <a:cs typeface="Yu Gothic"/>
-              </a:rPr>
-              <a:t>担当</a:t>
+              <a:t>ネットワーク担当</a:t>
             </a:r>
           </a:p>
         </p:txBody>
@@ -33830,7 +33946,7 @@
         </p:nvCxnSpPr>
         <p:spPr>
           <a:xfrm>
-            <a:off x="502920" y="4352544"/>
+            <a:off x="502920" y="4459528"/>
             <a:ext cx="11185855" cy="0"/>
           </a:xfrm>
           <a:prstGeom prst="line">
@@ -33866,7 +33982,7 @@
         </p:nvSpPr>
         <p:spPr>
           <a:xfrm>
-            <a:off x="502920" y="4352544"/>
+            <a:off x="502920" y="4459528"/>
             <a:ext cx="11185855" cy="786384"/>
           </a:xfrm>
           <a:prstGeom prst="rect">
@@ -33910,8 +34026,8 @@
         </p:nvSpPr>
         <p:spPr>
           <a:xfrm>
-            <a:off x="612648" y="4352544"/>
-            <a:ext cx="1152144" cy="786384"/>
+            <a:off x="612648" y="4459528"/>
+            <a:ext cx="1371600" cy="786384"/>
           </a:xfrm>
           <a:prstGeom prst="rect">
             <a:avLst/>
@@ -33926,7 +34042,7 @@
           <a:p>
             <a:pPr algn="l">
               <a:lnSpc>
-                <a:spcPct val="115000"/>
+                <a:spcPct val="130000"/>
               </a:lnSpc>
             </a:pPr>
             <a:r>
@@ -33951,7 +34067,7 @@
         </p:nvCxnSpPr>
         <p:spPr>
           <a:xfrm>
-            <a:off x="502920" y="5138928"/>
+            <a:off x="502920" y="5245912"/>
             <a:ext cx="11185855" cy="0"/>
           </a:xfrm>
           <a:prstGeom prst="line">
@@ -33987,8 +34103,8 @@
         </p:nvCxnSpPr>
         <p:spPr>
           <a:xfrm>
-            <a:off x="3871683" y="2386584"/>
-            <a:ext cx="442684" cy="0"/>
+            <a:off x="4063707" y="2493568"/>
+            <a:ext cx="415252" cy="0"/>
           </a:xfrm>
           <a:prstGeom prst="line">
             <a:avLst/>
@@ -34023,7 +34139,7 @@
         </p:nvCxnSpPr>
         <p:spPr>
           <a:xfrm>
-            <a:off x="4314367" y="2386584"/>
+            <a:off x="4478959" y="2493568"/>
             <a:ext cx="0" cy="786384"/>
           </a:xfrm>
           <a:prstGeom prst="line">
@@ -34059,7 +34175,7 @@
         </p:nvCxnSpPr>
         <p:spPr>
           <a:xfrm>
-            <a:off x="4314367" y="3172968"/>
+            <a:off x="4478959" y="3279952"/>
             <a:ext cx="100584" cy="0"/>
           </a:xfrm>
           <a:prstGeom prst="line">
@@ -34096,7 +34212,7 @@
         </p:nvCxnSpPr>
         <p:spPr>
           <a:xfrm>
-            <a:off x="5506859" y="3172968"/>
+            <a:off x="5644019" y="3279952"/>
             <a:ext cx="73152" cy="0"/>
           </a:xfrm>
           <a:prstGeom prst="line">
@@ -34133,8 +34249,8 @@
         </p:nvCxnSpPr>
         <p:spPr>
           <a:xfrm>
-            <a:off x="4960905" y="3429000"/>
-            <a:ext cx="582530" cy="274320"/>
+            <a:off x="5111781" y="3535984"/>
+            <a:ext cx="568814" cy="274320"/>
           </a:xfrm>
           <a:prstGeom prst="line">
             <a:avLst/>
@@ -34170,7 +34286,7 @@
         </p:nvCxnSpPr>
         <p:spPr>
           <a:xfrm>
-            <a:off x="6671919" y="3172968"/>
+            <a:off x="6781647" y="3279952"/>
             <a:ext cx="201168" cy="0"/>
           </a:xfrm>
           <a:prstGeom prst="line">
@@ -34207,8 +34323,8 @@
         </p:nvCxnSpPr>
         <p:spPr>
           <a:xfrm>
-            <a:off x="6329819" y="3959352"/>
-            <a:ext cx="885368" cy="0"/>
+            <a:off x="6466979" y="4066336"/>
+            <a:ext cx="830504" cy="0"/>
           </a:xfrm>
           <a:prstGeom prst="line">
             <a:avLst/>
@@ -34244,8 +34360,8 @@
         </p:nvCxnSpPr>
         <p:spPr>
           <a:xfrm>
-            <a:off x="7419041" y="3429000"/>
-            <a:ext cx="582530" cy="274320"/>
+            <a:off x="7515053" y="3535984"/>
+            <a:ext cx="568814" cy="274320"/>
           </a:xfrm>
           <a:prstGeom prst="line">
             <a:avLst/>
@@ -34281,7 +34397,7 @@
         </p:nvCxnSpPr>
         <p:spPr>
           <a:xfrm>
-            <a:off x="8001571" y="4215384"/>
+            <a:off x="8083867" y="4322368"/>
             <a:ext cx="0" cy="274320"/>
           </a:xfrm>
           <a:prstGeom prst="line">
@@ -34318,8 +34434,8 @@
         </p:nvCxnSpPr>
         <p:spPr>
           <a:xfrm>
-            <a:off x="8787955" y="4745736"/>
-            <a:ext cx="241516" cy="0"/>
+            <a:off x="8870251" y="4852720"/>
+            <a:ext cx="214084" cy="0"/>
           </a:xfrm>
           <a:prstGeom prst="line">
             <a:avLst/>
@@ -34354,7 +34470,7 @@
         </p:nvCxnSpPr>
         <p:spPr>
           <a:xfrm flipV="1">
-            <a:off x="9029471" y="3520440"/>
+            <a:off x="9084335" y="3627424"/>
             <a:ext cx="0" cy="1225296"/>
           </a:xfrm>
           <a:prstGeom prst="line">
@@ -34390,8 +34506,8 @@
         </p:nvCxnSpPr>
         <p:spPr>
           <a:xfrm flipH="1">
-            <a:off x="8584101" y="3520440"/>
-            <a:ext cx="445370" cy="0"/>
+            <a:off x="8652681" y="3627424"/>
+            <a:ext cx="431654" cy="0"/>
           </a:xfrm>
           <a:prstGeom prst="line">
             <a:avLst/>
@@ -34426,7 +34542,7 @@
         </p:nvCxnSpPr>
         <p:spPr>
           <a:xfrm flipV="1">
-            <a:off x="8584101" y="3429000"/>
+            <a:off x="8652681" y="3535984"/>
             <a:ext cx="0" cy="91440"/>
           </a:xfrm>
           <a:prstGeom prst="line">
@@ -34463,7 +34579,7 @@
         </p:nvCxnSpPr>
         <p:spPr>
           <a:xfrm>
-            <a:off x="9130055" y="3172968"/>
+            <a:off x="9184919" y="3279952"/>
             <a:ext cx="100584" cy="0"/>
           </a:xfrm>
           <a:prstGeom prst="line">
@@ -34499,7 +34615,7 @@
         </p:nvCxnSpPr>
         <p:spPr>
           <a:xfrm flipV="1">
-            <a:off x="9230639" y="2386584"/>
+            <a:off x="9285503" y="2493568"/>
             <a:ext cx="0" cy="786384"/>
           </a:xfrm>
           <a:prstGeom prst="line">
@@ -34535,7 +34651,7 @@
         </p:nvCxnSpPr>
         <p:spPr>
           <a:xfrm>
-            <a:off x="9230639" y="2386584"/>
+            <a:off x="9285503" y="2493568"/>
             <a:ext cx="100584" cy="0"/>
           </a:xfrm>
           <a:prstGeom prst="line">
@@ -34572,7 +34688,7 @@
         </p:nvCxnSpPr>
         <p:spPr>
           <a:xfrm>
-            <a:off x="10423131" y="2386584"/>
+            <a:off x="10450563" y="2493568"/>
             <a:ext cx="73152" cy="0"/>
           </a:xfrm>
           <a:prstGeom prst="line">
@@ -34609,7 +34725,7 @@
         </p:nvSpPr>
         <p:spPr>
           <a:xfrm>
-            <a:off x="2298915" y="2130552"/>
+            <a:off x="2490939" y="2237536"/>
             <a:ext cx="1572768" cy="512064"/>
           </a:xfrm>
           <a:prstGeom prst="rect">
@@ -34655,7 +34771,7 @@
         </p:nvSpPr>
         <p:spPr>
           <a:xfrm>
-            <a:off x="2390355" y="2130552"/>
+            <a:off x="2582379" y="2237536"/>
             <a:ext cx="1389888" cy="512064"/>
           </a:xfrm>
           <a:prstGeom prst="rect">
@@ -34671,7 +34787,7 @@
           <a:p>
             <a:pPr algn="ctr">
               <a:lnSpc>
-                <a:spcPct val="115000"/>
+                <a:spcPct val="130000"/>
               </a:lnSpc>
             </a:pPr>
             <a:r>
@@ -34696,8 +34812,8 @@
         </p:nvSpPr>
         <p:spPr>
           <a:xfrm>
-            <a:off x="4414951" y="2916936"/>
-            <a:ext cx="1091907" cy="512064"/>
+            <a:off x="4579543" y="3023920"/>
+            <a:ext cx="1064475" cy="512064"/>
           </a:xfrm>
           <a:prstGeom prst="rect">
             <a:avLst/>
@@ -34742,8 +34858,8 @@
         </p:nvSpPr>
         <p:spPr>
           <a:xfrm>
-            <a:off x="4506391" y="2916936"/>
-            <a:ext cx="909027" cy="512064"/>
+            <a:off x="4670983" y="3023920"/>
+            <a:ext cx="881595" cy="512064"/>
           </a:xfrm>
           <a:prstGeom prst="rect">
             <a:avLst/>
@@ -34758,7 +34874,7 @@
           <a:p>
             <a:pPr algn="ctr">
               <a:lnSpc>
-                <a:spcPct val="115000"/>
+                <a:spcPct val="130000"/>
               </a:lnSpc>
             </a:pPr>
             <a:r>
@@ -34783,8 +34899,8 @@
         </p:nvSpPr>
         <p:spPr>
           <a:xfrm>
-            <a:off x="5580011" y="2916936"/>
-            <a:ext cx="1091907" cy="512064"/>
+            <a:off x="5717171" y="3023920"/>
+            <a:ext cx="1064475" cy="512064"/>
           </a:xfrm>
           <a:prstGeom prst="rect">
             <a:avLst/>
@@ -34829,8 +34945,8 @@
         </p:nvSpPr>
         <p:spPr>
           <a:xfrm>
-            <a:off x="5671451" y="2916936"/>
-            <a:ext cx="909027" cy="512064"/>
+            <a:off x="5808611" y="3023920"/>
+            <a:ext cx="881595" cy="512064"/>
           </a:xfrm>
           <a:prstGeom prst="rect">
             <a:avLst/>
@@ -34845,7 +34961,7 @@
           <a:p>
             <a:pPr algn="ctr">
               <a:lnSpc>
-                <a:spcPct val="115000"/>
+                <a:spcPct val="130000"/>
               </a:lnSpc>
             </a:pPr>
             <a:r>
@@ -34870,7 +34986,7 @@
         </p:nvSpPr>
         <p:spPr>
           <a:xfrm>
-            <a:off x="4757051" y="3703320"/>
+            <a:off x="4894211" y="3810304"/>
             <a:ext cx="1572768" cy="512064"/>
           </a:xfrm>
           <a:prstGeom prst="rect">
@@ -34916,7 +35032,7 @@
         </p:nvSpPr>
         <p:spPr>
           <a:xfrm>
-            <a:off x="4848491" y="3703320"/>
+            <a:off x="4985651" y="3810304"/>
             <a:ext cx="1389888" cy="512064"/>
           </a:xfrm>
           <a:prstGeom prst="rect">
@@ -34932,7 +35048,7 @@
           <a:p>
             <a:pPr algn="ctr">
               <a:lnSpc>
-                <a:spcPct val="115000"/>
+                <a:spcPct val="130000"/>
               </a:lnSpc>
             </a:pPr>
             <a:r>
@@ -34957,8 +35073,8 @@
         </p:nvSpPr>
         <p:spPr>
           <a:xfrm>
-            <a:off x="6873087" y="2916936"/>
-            <a:ext cx="1091907" cy="512064"/>
+            <a:off x="6982815" y="3023920"/>
+            <a:ext cx="1064475" cy="512064"/>
           </a:xfrm>
           <a:prstGeom prst="rect">
             <a:avLst/>
@@ -35003,8 +35119,8 @@
         </p:nvSpPr>
         <p:spPr>
           <a:xfrm>
-            <a:off x="6964527" y="2916936"/>
-            <a:ext cx="909027" cy="512064"/>
+            <a:off x="7074255" y="3023920"/>
+            <a:ext cx="881595" cy="512064"/>
           </a:xfrm>
           <a:prstGeom prst="rect">
             <a:avLst/>
@@ -35019,11 +35135,11 @@
           <a:p>
             <a:pPr algn="ctr">
               <a:lnSpc>
-                <a:spcPct val="115000"/>
-              </a:lnSpc>
-            </a:pPr>
-            <a:r>
-              <a:rPr sz="850" b="1" lang="ja-JP">
+                <a:spcPct val="130000"/>
+              </a:lnSpc>
+            </a:pPr>
+            <a:r>
+              <a:rPr sz="750" b="1" lang="ja-JP">
                 <a:solidFill>
                   <a:srgbClr val="182C43"/>
                 </a:solidFill>
@@ -35044,7 +35160,7 @@
         </p:nvSpPr>
         <p:spPr>
           <a:xfrm>
-            <a:off x="7215187" y="3703320"/>
+            <a:off x="7297483" y="3810304"/>
             <a:ext cx="1572768" cy="512064"/>
           </a:xfrm>
           <a:prstGeom prst="rect">
@@ -35090,7 +35206,7 @@
         </p:nvSpPr>
         <p:spPr>
           <a:xfrm>
-            <a:off x="7306627" y="3703320"/>
+            <a:off x="7388923" y="3810304"/>
             <a:ext cx="1389888" cy="512064"/>
           </a:xfrm>
           <a:prstGeom prst="rect">
@@ -35106,7 +35222,7 @@
           <a:p>
             <a:pPr algn="ctr">
               <a:lnSpc>
-                <a:spcPct val="115000"/>
+                <a:spcPct val="130000"/>
               </a:lnSpc>
             </a:pPr>
             <a:r>
@@ -35131,7 +35247,7 @@
         </p:nvSpPr>
         <p:spPr>
           <a:xfrm>
-            <a:off x="7215187" y="4489704"/>
+            <a:off x="7297483" y="4596688"/>
             <a:ext cx="1572768" cy="512064"/>
           </a:xfrm>
           <a:prstGeom prst="rect">
@@ -35177,7 +35293,7 @@
         </p:nvSpPr>
         <p:spPr>
           <a:xfrm>
-            <a:off x="7306627" y="4489704"/>
+            <a:off x="7388923" y="4596688"/>
             <a:ext cx="1389888" cy="512064"/>
           </a:xfrm>
           <a:prstGeom prst="rect">
@@ -35193,7 +35309,7 @@
           <a:p>
             <a:pPr algn="ctr">
               <a:lnSpc>
-                <a:spcPct val="115000"/>
+                <a:spcPct val="130000"/>
               </a:lnSpc>
             </a:pPr>
             <a:r>
@@ -35218,8 +35334,8 @@
         </p:nvSpPr>
         <p:spPr>
           <a:xfrm>
-            <a:off x="8038147" y="2916936"/>
-            <a:ext cx="1091907" cy="512064"/>
+            <a:off x="8120443" y="3023920"/>
+            <a:ext cx="1064475" cy="512064"/>
           </a:xfrm>
           <a:prstGeom prst="rect">
             <a:avLst/>
@@ -35264,8 +35380,8 @@
         </p:nvSpPr>
         <p:spPr>
           <a:xfrm>
-            <a:off x="8129587" y="2916936"/>
-            <a:ext cx="909027" cy="512064"/>
+            <a:off x="8211883" y="3023920"/>
+            <a:ext cx="881595" cy="512064"/>
           </a:xfrm>
           <a:prstGeom prst="rect">
             <a:avLst/>
@@ -35280,7 +35396,7 @@
           <a:p>
             <a:pPr algn="ctr">
               <a:lnSpc>
-                <a:spcPct val="115000"/>
+                <a:spcPct val="130000"/>
               </a:lnSpc>
             </a:pPr>
             <a:r>
@@ -35305,8 +35421,8 @@
         </p:nvSpPr>
         <p:spPr>
           <a:xfrm>
-            <a:off x="9331223" y="2130552"/>
-            <a:ext cx="1091907" cy="512064"/>
+            <a:off x="9386087" y="2237536"/>
+            <a:ext cx="1064475" cy="512064"/>
           </a:xfrm>
           <a:prstGeom prst="rect">
             <a:avLst/>
@@ -35351,8 +35467,8 @@
         </p:nvSpPr>
         <p:spPr>
           <a:xfrm>
-            <a:off x="9422663" y="2130552"/>
-            <a:ext cx="909027" cy="512064"/>
+            <a:off x="9477527" y="2237536"/>
+            <a:ext cx="881595" cy="512064"/>
           </a:xfrm>
           <a:prstGeom prst="rect">
             <a:avLst/>
@@ -35367,7 +35483,7 @@
           <a:p>
             <a:pPr algn="ctr">
               <a:lnSpc>
-                <a:spcPct val="115000"/>
+                <a:spcPct val="130000"/>
               </a:lnSpc>
             </a:pPr>
             <a:r>
@@ -35392,8 +35508,8 @@
         </p:nvSpPr>
         <p:spPr>
           <a:xfrm>
-            <a:off x="10496283" y="2130552"/>
-            <a:ext cx="1091907" cy="512064"/>
+            <a:off x="10523715" y="2237536"/>
+            <a:ext cx="1064475" cy="512064"/>
           </a:xfrm>
           <a:prstGeom prst="rect">
             <a:avLst/>
@@ -35438,8 +35554,8 @@
         </p:nvSpPr>
         <p:spPr>
           <a:xfrm>
-            <a:off x="10587723" y="2130552"/>
-            <a:ext cx="909027" cy="512064"/>
+            <a:off x="10615155" y="2237536"/>
+            <a:ext cx="881595" cy="512064"/>
           </a:xfrm>
           <a:prstGeom prst="rect">
             <a:avLst/>
@@ -35454,7 +35570,7 @@
           <a:p>
             <a:pPr algn="ctr">
               <a:lnSpc>
-                <a:spcPct val="115000"/>
+                <a:spcPct val="130000"/>
               </a:lnSpc>
             </a:pPr>
             <a:r>
@@ -36663,7 +36779,7 @@
           </a:prstGeom>
           <a:ln w="13335">
             <a:solidFill>
-              <a:srgbClr val="6C7372"/>
+              <a:srgbClr val="666E70"/>
             </a:solidFill>
             <a:tailEnd type="triangle" w="med" len="med"/>
           </a:ln>
@@ -36784,7 +36900,7 @@
           </a:prstGeom>
           <a:ln w="13335">
             <a:solidFill>
-              <a:srgbClr val="6C7372"/>
+              <a:srgbClr val="666E70"/>
             </a:solidFill>
             <a:tailEnd type="triangle" w="med" len="med"/>
           </a:ln>
@@ -36906,7 +37022,7 @@
           <a:ln w="13335">
             <a:prstDash val="dash"/>
             <a:solidFill>
-              <a:srgbClr val="6C7372"/>
+              <a:srgbClr val="666E70"/>
             </a:solidFill>
             <a:tailEnd type="triangle" w="med" len="med"/>
           </a:ln>
@@ -37027,7 +37143,7 @@
           </a:prstGeom>
           <a:ln w="13335">
             <a:solidFill>
-              <a:srgbClr val="6C7372"/>
+              <a:srgbClr val="666E70"/>
             </a:solidFill>
             <a:tailEnd type="triangle" w="med" len="med"/>
           </a:ln>
@@ -37148,7 +37264,7 @@
           </a:prstGeom>
           <a:ln w="13335">
             <a:solidFill>
-              <a:srgbClr val="6C7372"/>
+              <a:srgbClr val="666E70"/>
             </a:solidFill>
             <a:tailEnd type="triangle" w="med" len="med"/>
           </a:ln>
@@ -37269,7 +37385,7 @@
           </a:prstGeom>
           <a:ln w="13335">
             <a:solidFill>
-              <a:srgbClr val="6C7372"/>
+              <a:srgbClr val="666E70"/>
             </a:solidFill>
             <a:tailEnd type="triangle" w="med" len="med"/>
           </a:ln>
@@ -37391,7 +37507,7 @@
           <a:ln w="13335">
             <a:prstDash val="dash"/>
             <a:solidFill>
-              <a:srgbClr val="6C7372"/>
+              <a:srgbClr val="666E70"/>
             </a:solidFill>
             <a:tailEnd type="triangle" w="med" len="med"/>
           </a:ln>
@@ -37512,7 +37628,7 @@
           </a:prstGeom>
           <a:ln w="13335">
             <a:solidFill>
-              <a:srgbClr val="6C7372"/>
+              <a:srgbClr val="666E70"/>
             </a:solidFill>
             <a:tailEnd type="triangle" w="med" len="med"/>
           </a:ln>

--- a/examples/gallery/pattern_gallery.pptx
+++ b/examples/gallery/pattern_gallery.pptx
@@ -30505,7 +30505,7 @@
         <p:spPr>
           <a:xfrm>
             <a:off x="649224" y="1645920"/>
-            <a:ext cx="3749039" cy="274320"/>
+            <a:ext cx="4069080" cy="274320"/>
           </a:xfrm>
           <a:prstGeom prst="rect">
             <a:avLst/>
@@ -30545,49 +30545,8 @@
         </p:nvSpPr>
         <p:spPr>
           <a:xfrm>
-            <a:off x="4636007" y="1645920"/>
-            <a:ext cx="2139696" cy="274320"/>
-          </a:xfrm>
-          <a:prstGeom prst="rect">
-            <a:avLst/>
-          </a:prstGeom>
-          <a:noFill/>
-        </p:spPr>
-        <p:txBody>
-          <a:bodyPr wrap="square" anchor="t" lIns="0" rIns="0" tIns="0" bIns="0">
-            <a:spAutoFit/>
-          </a:bodyPr>
-          <a:lstStyle/>
-          <a:p>
-            <a:pPr algn="ctr">
-              <a:lnSpc>
-                <a:spcPct val="130000"/>
-              </a:lnSpc>
-            </a:pPr>
-            <a:r>
-              <a:rPr sz="1100" b="1" lang="ja-JP">
-                <a:solidFill>
-                  <a:srgbClr val="666E70"/>
-                </a:solidFill>
-                <a:latin typeface="Yu Gothic"/>
-                <a:ea typeface="Yu Gothic"/>
-                <a:cs typeface="Yu Gothic"/>
-              </a:rPr>
-              <a:t>対応</a:t>
-            </a:r>
-          </a:p>
-        </p:txBody>
-      </p:sp>
-      <p:sp>
-        <p:nvSpPr>
-          <p:cNvPr id="7" name="TextBox 6"/>
-          <p:cNvSpPr txBox="1"/>
-          <p:nvPr/>
-        </p:nvSpPr>
-        <p:spPr>
-          <a:xfrm>
-            <a:off x="7068312" y="1645920"/>
-            <a:ext cx="4474159" cy="274320"/>
+            <a:off x="7473391" y="1645920"/>
+            <a:ext cx="4069080" cy="274320"/>
           </a:xfrm>
           <a:prstGeom prst="rect">
             <a:avLst/>
@@ -30621,2016 +30580,21 @@
       </p:sp>
       <p:cxnSp>
         <p:nvCxnSpPr>
-          <p:cNvPr id="8" name="Connector 7"/>
+          <p:cNvPr id="7" name="Connector 6"/>
           <p:cNvCxnSpPr/>
           <p:nvPr/>
         </p:nvCxnSpPr>
         <p:spPr>
           <a:xfrm>
-            <a:off x="649224" y="2951226"/>
-            <a:ext cx="3749040" cy="0"/>
+            <a:off x="4718304" y="2686050"/>
+            <a:ext cx="2755087" cy="0"/>
           </a:xfrm>
           <a:prstGeom prst="line">
             <a:avLst/>
           </a:prstGeom>
-          <a:ln w="8255">
+          <a:ln w="45720">
             <a:solidFill>
-              <a:srgbClr val="D1CFC8"/>
-            </a:solidFill>
-          </a:ln>
-          <a:effectLst/>
-        </p:spPr>
-        <p:style>
-          <a:lnRef idx="2">
-            <a:schemeClr val="accent1"/>
-          </a:lnRef>
-          <a:fillRef idx="0">
-            <a:schemeClr val="accent1"/>
-          </a:fillRef>
-          <a:effectRef idx="1">
-            <a:schemeClr val="accent1"/>
-          </a:effectRef>
-          <a:fontRef idx="minor">
-            <a:schemeClr val="tx1"/>
-          </a:fontRef>
-        </p:style>
-      </p:cxnSp>
-      <p:sp>
-        <p:nvSpPr>
-          <p:cNvPr id="9" name="Oval 8"/>
-          <p:cNvSpPr/>
-          <p:nvPr/>
-        </p:nvSpPr>
-        <p:spPr>
-          <a:xfrm>
-            <a:off x="763524" y="2571750"/>
-            <a:ext cx="228600" cy="228600"/>
-          </a:xfrm>
-          <a:prstGeom prst="ellipse">
-            <a:avLst/>
-          </a:prstGeom>
-          <a:solidFill>
-            <a:srgbClr val="0D7870"/>
-          </a:solidFill>
-          <a:ln>
-            <a:noFill/>
-          </a:ln>
-          <a:effectLst/>
-        </p:spPr>
-        <p:style>
-          <a:lnRef idx="1">
-            <a:schemeClr val="accent1"/>
-          </a:lnRef>
-          <a:fillRef idx="3">
-            <a:schemeClr val="accent1"/>
-          </a:fillRef>
-          <a:effectRef idx="2">
-            <a:schemeClr val="accent1"/>
-          </a:effectRef>
-          <a:fontRef idx="minor">
-            <a:schemeClr val="lt1"/>
-          </a:fontRef>
-        </p:style>
-        <p:txBody>
-          <a:bodyPr rtlCol="0" anchor="ctr"/>
-          <a:lstStyle/>
-          <a:p>
-            <a:pPr algn="ctr"/>
-          </a:p>
-        </p:txBody>
-      </p:sp>
-      <p:sp>
-        <p:nvSpPr>
-          <p:cNvPr id="10" name="TextBox 9"/>
-          <p:cNvSpPr txBox="1"/>
-          <p:nvPr/>
-        </p:nvSpPr>
-        <p:spPr>
-          <a:xfrm>
-            <a:off x="768096" y="2576322"/>
-            <a:ext cx="219456" cy="219456"/>
-          </a:xfrm>
-          <a:prstGeom prst="rect">
-            <a:avLst/>
-          </a:prstGeom>
-          <a:noFill/>
-        </p:spPr>
-        <p:txBody>
-          <a:bodyPr wrap="square" anchor="ctr" lIns="0" rIns="0" tIns="0" bIns="0">
-            <a:spAutoFit/>
-          </a:bodyPr>
-          <a:lstStyle/>
-          <a:p>
-            <a:pPr algn="ctr">
-              <a:lnSpc>
-                <a:spcPct val="130000"/>
-              </a:lnSpc>
-            </a:pPr>
-            <a:r>
-              <a:rPr sz="850" b="1" lang="ja-JP">
-                <a:solidFill>
-                  <a:srgbClr val="FFFFFC"/>
-                </a:solidFill>
-                <a:latin typeface="Yu Gothic"/>
-                <a:ea typeface="Yu Gothic"/>
-                <a:cs typeface="Yu Gothic"/>
-              </a:rPr>
-              <a:t>1</a:t>
-            </a:r>
-          </a:p>
-        </p:txBody>
-      </p:sp>
-      <p:sp>
-        <p:nvSpPr>
-          <p:cNvPr id="11" name="TextBox 10"/>
-          <p:cNvSpPr txBox="1"/>
-          <p:nvPr/>
-        </p:nvSpPr>
-        <p:spPr>
-          <a:xfrm>
-            <a:off x="1088136" y="2420874"/>
-            <a:ext cx="3145535" cy="530352"/>
-          </a:xfrm>
-          <a:prstGeom prst="rect">
-            <a:avLst/>
-          </a:prstGeom>
-          <a:noFill/>
-        </p:spPr>
-        <p:txBody>
-          <a:bodyPr wrap="square" anchor="ctr" lIns="0" rIns="0" tIns="0" bIns="0">
-            <a:spAutoFit/>
-          </a:bodyPr>
-          <a:lstStyle/>
-          <a:p>
-            <a:pPr algn="l">
-              <a:lnSpc>
-                <a:spcPct val="115000"/>
-              </a:lnSpc>
-            </a:pPr>
-            <a:r>
-              <a:rPr sz="1350" b="1" lang="ja-JP">
-                <a:solidFill>
-                  <a:srgbClr val="182C43"/>
-                </a:solidFill>
-                <a:latin typeface="Yu Gothic"/>
-                <a:ea typeface="Yu Gothic"/>
-                <a:cs typeface="Yu Gothic"/>
-              </a:rPr>
-              <a:t>手作業が多く処理時間が長い</a:t>
-            </a:r>
-          </a:p>
-        </p:txBody>
-      </p:sp>
-      <p:cxnSp>
-        <p:nvCxnSpPr>
-          <p:cNvPr id="12" name="Connector 11"/>
-          <p:cNvCxnSpPr/>
-          <p:nvPr/>
-        </p:nvCxnSpPr>
-        <p:spPr>
-          <a:xfrm>
-            <a:off x="649224" y="3600450"/>
-            <a:ext cx="3749040" cy="0"/>
-          </a:xfrm>
-          <a:prstGeom prst="line">
-            <a:avLst/>
-          </a:prstGeom>
-          <a:ln w="8255">
-            <a:solidFill>
-              <a:srgbClr val="D1CFC8"/>
-            </a:solidFill>
-          </a:ln>
-          <a:effectLst/>
-        </p:spPr>
-        <p:style>
-          <a:lnRef idx="2">
-            <a:schemeClr val="accent1"/>
-          </a:lnRef>
-          <a:fillRef idx="0">
-            <a:schemeClr val="accent1"/>
-          </a:fillRef>
-          <a:effectRef idx="1">
-            <a:schemeClr val="accent1"/>
-          </a:effectRef>
-          <a:fontRef idx="minor">
-            <a:schemeClr val="tx1"/>
-          </a:fontRef>
-        </p:style>
-      </p:cxnSp>
-      <p:sp>
-        <p:nvSpPr>
-          <p:cNvPr id="13" name="Oval 12"/>
-          <p:cNvSpPr/>
-          <p:nvPr/>
-        </p:nvSpPr>
-        <p:spPr>
-          <a:xfrm>
-            <a:off x="763524" y="3220974"/>
-            <a:ext cx="228600" cy="228600"/>
-          </a:xfrm>
-          <a:prstGeom prst="ellipse">
-            <a:avLst/>
-          </a:prstGeom>
-          <a:solidFill>
-            <a:srgbClr val="0D7870"/>
-          </a:solidFill>
-          <a:ln>
-            <a:noFill/>
-          </a:ln>
-          <a:effectLst/>
-        </p:spPr>
-        <p:style>
-          <a:lnRef idx="1">
-            <a:schemeClr val="accent1"/>
-          </a:lnRef>
-          <a:fillRef idx="3">
-            <a:schemeClr val="accent1"/>
-          </a:fillRef>
-          <a:effectRef idx="2">
-            <a:schemeClr val="accent1"/>
-          </a:effectRef>
-          <a:fontRef idx="minor">
-            <a:schemeClr val="lt1"/>
-          </a:fontRef>
-        </p:style>
-        <p:txBody>
-          <a:bodyPr rtlCol="0" anchor="ctr"/>
-          <a:lstStyle/>
-          <a:p>
-            <a:pPr algn="ctr"/>
-          </a:p>
-        </p:txBody>
-      </p:sp>
-      <p:sp>
-        <p:nvSpPr>
-          <p:cNvPr id="14" name="TextBox 13"/>
-          <p:cNvSpPr txBox="1"/>
-          <p:nvPr/>
-        </p:nvSpPr>
-        <p:spPr>
-          <a:xfrm>
-            <a:off x="768096" y="3225546"/>
-            <a:ext cx="219456" cy="219456"/>
-          </a:xfrm>
-          <a:prstGeom prst="rect">
-            <a:avLst/>
-          </a:prstGeom>
-          <a:noFill/>
-        </p:spPr>
-        <p:txBody>
-          <a:bodyPr wrap="square" anchor="ctr" lIns="0" rIns="0" tIns="0" bIns="0">
-            <a:spAutoFit/>
-          </a:bodyPr>
-          <a:lstStyle/>
-          <a:p>
-            <a:pPr algn="ctr">
-              <a:lnSpc>
-                <a:spcPct val="130000"/>
-              </a:lnSpc>
-            </a:pPr>
-            <a:r>
-              <a:rPr sz="850" b="1" lang="ja-JP">
-                <a:solidFill>
-                  <a:srgbClr val="FFFFFC"/>
-                </a:solidFill>
-                <a:latin typeface="Yu Gothic"/>
-                <a:ea typeface="Yu Gothic"/>
-                <a:cs typeface="Yu Gothic"/>
-              </a:rPr>
-              <a:t>2</a:t>
-            </a:r>
-          </a:p>
-        </p:txBody>
-      </p:sp>
-      <p:sp>
-        <p:nvSpPr>
-          <p:cNvPr id="15" name="TextBox 14"/>
-          <p:cNvSpPr txBox="1"/>
-          <p:nvPr/>
-        </p:nvSpPr>
-        <p:spPr>
-          <a:xfrm>
-            <a:off x="1088136" y="3070098"/>
-            <a:ext cx="3145535" cy="530352"/>
-          </a:xfrm>
-          <a:prstGeom prst="rect">
-            <a:avLst/>
-          </a:prstGeom>
-          <a:noFill/>
-        </p:spPr>
-        <p:txBody>
-          <a:bodyPr wrap="square" anchor="ctr" lIns="0" rIns="0" tIns="0" bIns="0">
-            <a:spAutoFit/>
-          </a:bodyPr>
-          <a:lstStyle/>
-          <a:p>
-            <a:pPr algn="l">
-              <a:lnSpc>
-                <a:spcPct val="115000"/>
-              </a:lnSpc>
-            </a:pPr>
-            <a:r>
-              <a:rPr sz="1350" b="1" lang="ja-JP">
-                <a:solidFill>
-                  <a:srgbClr val="182C43"/>
-                </a:solidFill>
-                <a:latin typeface="Yu Gothic"/>
-                <a:ea typeface="Yu Gothic"/>
-                <a:cs typeface="Yu Gothic"/>
-              </a:rPr>
-              <a:t>データが複数の管理先へ</a:t>
-            </a:r>
-          </a:p>
-          <a:p>
-            <a:pPr algn="l">
-              <a:lnSpc>
-                <a:spcPct val="115000"/>
-              </a:lnSpc>
-            </a:pPr>
-            <a:r>
-              <a:rPr sz="1350" b="1" lang="ja-JP">
-                <a:solidFill>
-                  <a:srgbClr val="182C43"/>
-                </a:solidFill>
-                <a:latin typeface="Yu Gothic"/>
-                <a:ea typeface="Yu Gothic"/>
-                <a:cs typeface="Yu Gothic"/>
-              </a:rPr>
-              <a:t>分散している</a:t>
-            </a:r>
-          </a:p>
-        </p:txBody>
-      </p:sp>
-      <p:cxnSp>
-        <p:nvCxnSpPr>
-          <p:cNvPr id="16" name="Connector 15"/>
-          <p:cNvCxnSpPr/>
-          <p:nvPr/>
-        </p:nvCxnSpPr>
-        <p:spPr>
-          <a:xfrm>
-            <a:off x="649224" y="4249674"/>
-            <a:ext cx="3749040" cy="0"/>
-          </a:xfrm>
-          <a:prstGeom prst="line">
-            <a:avLst/>
-          </a:prstGeom>
-          <a:ln w="8255">
-            <a:solidFill>
-              <a:srgbClr val="D1CFC8"/>
-            </a:solidFill>
-          </a:ln>
-          <a:effectLst/>
-        </p:spPr>
-        <p:style>
-          <a:lnRef idx="2">
-            <a:schemeClr val="accent1"/>
-          </a:lnRef>
-          <a:fillRef idx="0">
-            <a:schemeClr val="accent1"/>
-          </a:fillRef>
-          <a:effectRef idx="1">
-            <a:schemeClr val="accent1"/>
-          </a:effectRef>
-          <a:fontRef idx="minor">
-            <a:schemeClr val="tx1"/>
-          </a:fontRef>
-        </p:style>
-      </p:cxnSp>
-      <p:sp>
-        <p:nvSpPr>
-          <p:cNvPr id="17" name="Oval 16"/>
-          <p:cNvSpPr/>
-          <p:nvPr/>
-        </p:nvSpPr>
-        <p:spPr>
-          <a:xfrm>
-            <a:off x="763524" y="3870198"/>
-            <a:ext cx="228600" cy="228600"/>
-          </a:xfrm>
-          <a:prstGeom prst="ellipse">
-            <a:avLst/>
-          </a:prstGeom>
-          <a:solidFill>
-            <a:srgbClr val="0D7870"/>
-          </a:solidFill>
-          <a:ln>
-            <a:noFill/>
-          </a:ln>
-          <a:effectLst/>
-        </p:spPr>
-        <p:style>
-          <a:lnRef idx="1">
-            <a:schemeClr val="accent1"/>
-          </a:lnRef>
-          <a:fillRef idx="3">
-            <a:schemeClr val="accent1"/>
-          </a:fillRef>
-          <a:effectRef idx="2">
-            <a:schemeClr val="accent1"/>
-          </a:effectRef>
-          <a:fontRef idx="minor">
-            <a:schemeClr val="lt1"/>
-          </a:fontRef>
-        </p:style>
-        <p:txBody>
-          <a:bodyPr rtlCol="0" anchor="ctr"/>
-          <a:lstStyle/>
-          <a:p>
-            <a:pPr algn="ctr"/>
-          </a:p>
-        </p:txBody>
-      </p:sp>
-      <p:sp>
-        <p:nvSpPr>
-          <p:cNvPr id="18" name="TextBox 17"/>
-          <p:cNvSpPr txBox="1"/>
-          <p:nvPr/>
-        </p:nvSpPr>
-        <p:spPr>
-          <a:xfrm>
-            <a:off x="768096" y="3874770"/>
-            <a:ext cx="219456" cy="219456"/>
-          </a:xfrm>
-          <a:prstGeom prst="rect">
-            <a:avLst/>
-          </a:prstGeom>
-          <a:noFill/>
-        </p:spPr>
-        <p:txBody>
-          <a:bodyPr wrap="square" anchor="ctr" lIns="0" rIns="0" tIns="0" bIns="0">
-            <a:spAutoFit/>
-          </a:bodyPr>
-          <a:lstStyle/>
-          <a:p>
-            <a:pPr algn="ctr">
-              <a:lnSpc>
-                <a:spcPct val="130000"/>
-              </a:lnSpc>
-            </a:pPr>
-            <a:r>
-              <a:rPr sz="850" b="1" lang="ja-JP">
-                <a:solidFill>
-                  <a:srgbClr val="FFFFFC"/>
-                </a:solidFill>
-                <a:latin typeface="Yu Gothic"/>
-                <a:ea typeface="Yu Gothic"/>
-                <a:cs typeface="Yu Gothic"/>
-              </a:rPr>
-              <a:t>3</a:t>
-            </a:r>
-          </a:p>
-        </p:txBody>
-      </p:sp>
-      <p:sp>
-        <p:nvSpPr>
-          <p:cNvPr id="19" name="TextBox 18"/>
-          <p:cNvSpPr txBox="1"/>
-          <p:nvPr/>
-        </p:nvSpPr>
-        <p:spPr>
-          <a:xfrm>
-            <a:off x="1088136" y="3719322"/>
-            <a:ext cx="3145535" cy="530352"/>
-          </a:xfrm>
-          <a:prstGeom prst="rect">
-            <a:avLst/>
-          </a:prstGeom>
-          <a:noFill/>
-        </p:spPr>
-        <p:txBody>
-          <a:bodyPr wrap="square" anchor="ctr" lIns="0" rIns="0" tIns="0" bIns="0">
-            <a:spAutoFit/>
-          </a:bodyPr>
-          <a:lstStyle/>
-          <a:p>
-            <a:pPr algn="l">
-              <a:lnSpc>
-                <a:spcPct val="115000"/>
-              </a:lnSpc>
-            </a:pPr>
-            <a:r>
-              <a:rPr sz="1350" b="1" lang="ja-JP">
-                <a:solidFill>
-                  <a:srgbClr val="182C43"/>
-                </a:solidFill>
-                <a:latin typeface="Yu Gothic"/>
-                <a:ea typeface="Yu Gothic"/>
-                <a:cs typeface="Yu Gothic"/>
-              </a:rPr>
-              <a:t>承認完了までの待ち時間が長い</a:t>
-            </a:r>
-          </a:p>
-        </p:txBody>
-      </p:sp>
-      <p:cxnSp>
-        <p:nvCxnSpPr>
-          <p:cNvPr id="20" name="Connector 19"/>
-          <p:cNvCxnSpPr/>
-          <p:nvPr/>
-        </p:nvCxnSpPr>
-        <p:spPr>
-          <a:xfrm>
-            <a:off x="649224" y="4898898"/>
-            <a:ext cx="3749040" cy="0"/>
-          </a:xfrm>
-          <a:prstGeom prst="line">
-            <a:avLst/>
-          </a:prstGeom>
-          <a:ln w="8255">
-            <a:solidFill>
-              <a:srgbClr val="D1CFC8"/>
-            </a:solidFill>
-          </a:ln>
-          <a:effectLst/>
-        </p:spPr>
-        <p:style>
-          <a:lnRef idx="2">
-            <a:schemeClr val="accent1"/>
-          </a:lnRef>
-          <a:fillRef idx="0">
-            <a:schemeClr val="accent1"/>
-          </a:fillRef>
-          <a:effectRef idx="1">
-            <a:schemeClr val="accent1"/>
-          </a:effectRef>
-          <a:fontRef idx="minor">
-            <a:schemeClr val="tx1"/>
-          </a:fontRef>
-        </p:style>
-      </p:cxnSp>
-      <p:sp>
-        <p:nvSpPr>
-          <p:cNvPr id="21" name="Oval 20"/>
-          <p:cNvSpPr/>
-          <p:nvPr/>
-        </p:nvSpPr>
-        <p:spPr>
-          <a:xfrm>
-            <a:off x="763524" y="4519422"/>
-            <a:ext cx="228600" cy="228600"/>
-          </a:xfrm>
-          <a:prstGeom prst="ellipse">
-            <a:avLst/>
-          </a:prstGeom>
-          <a:solidFill>
-            <a:srgbClr val="0D7870"/>
-          </a:solidFill>
-          <a:ln>
-            <a:noFill/>
-          </a:ln>
-          <a:effectLst/>
-        </p:spPr>
-        <p:style>
-          <a:lnRef idx="1">
-            <a:schemeClr val="accent1"/>
-          </a:lnRef>
-          <a:fillRef idx="3">
-            <a:schemeClr val="accent1"/>
-          </a:fillRef>
-          <a:effectRef idx="2">
-            <a:schemeClr val="accent1"/>
-          </a:effectRef>
-          <a:fontRef idx="minor">
-            <a:schemeClr val="lt1"/>
-          </a:fontRef>
-        </p:style>
-        <p:txBody>
-          <a:bodyPr rtlCol="0" anchor="ctr"/>
-          <a:lstStyle/>
-          <a:p>
-            <a:pPr algn="ctr"/>
-          </a:p>
-        </p:txBody>
-      </p:sp>
-      <p:sp>
-        <p:nvSpPr>
-          <p:cNvPr id="22" name="TextBox 21"/>
-          <p:cNvSpPr txBox="1"/>
-          <p:nvPr/>
-        </p:nvSpPr>
-        <p:spPr>
-          <a:xfrm>
-            <a:off x="768096" y="4523994"/>
-            <a:ext cx="219456" cy="219456"/>
-          </a:xfrm>
-          <a:prstGeom prst="rect">
-            <a:avLst/>
-          </a:prstGeom>
-          <a:noFill/>
-        </p:spPr>
-        <p:txBody>
-          <a:bodyPr wrap="square" anchor="ctr" lIns="0" rIns="0" tIns="0" bIns="0">
-            <a:spAutoFit/>
-          </a:bodyPr>
-          <a:lstStyle/>
-          <a:p>
-            <a:pPr algn="ctr">
-              <a:lnSpc>
-                <a:spcPct val="130000"/>
-              </a:lnSpc>
-            </a:pPr>
-            <a:r>
-              <a:rPr sz="850" b="1" lang="ja-JP">
-                <a:solidFill>
-                  <a:srgbClr val="FFFFFC"/>
-                </a:solidFill>
-                <a:latin typeface="Yu Gothic"/>
-                <a:ea typeface="Yu Gothic"/>
-                <a:cs typeface="Yu Gothic"/>
-              </a:rPr>
-              <a:t>4</a:t>
-            </a:r>
-          </a:p>
-        </p:txBody>
-      </p:sp>
-      <p:sp>
-        <p:nvSpPr>
-          <p:cNvPr id="23" name="TextBox 22"/>
-          <p:cNvSpPr txBox="1"/>
-          <p:nvPr/>
-        </p:nvSpPr>
-        <p:spPr>
-          <a:xfrm>
-            <a:off x="1088136" y="4368546"/>
-            <a:ext cx="3145535" cy="530352"/>
-          </a:xfrm>
-          <a:prstGeom prst="rect">
-            <a:avLst/>
-          </a:prstGeom>
-          <a:noFill/>
-        </p:spPr>
-        <p:txBody>
-          <a:bodyPr wrap="square" anchor="ctr" lIns="0" rIns="0" tIns="0" bIns="0">
-            <a:spAutoFit/>
-          </a:bodyPr>
-          <a:lstStyle/>
-          <a:p>
-            <a:pPr algn="l">
-              <a:lnSpc>
-                <a:spcPct val="115000"/>
-              </a:lnSpc>
-            </a:pPr>
-            <a:r>
-              <a:rPr sz="1350" b="1" lang="ja-JP">
-                <a:solidFill>
-                  <a:srgbClr val="182C43"/>
-                </a:solidFill>
-                <a:latin typeface="Yu Gothic"/>
-                <a:ea typeface="Yu Gothic"/>
-                <a:cs typeface="Yu Gothic"/>
-              </a:rPr>
-              <a:t>成果物の品質にばらつきがある</a:t>
-            </a:r>
-          </a:p>
-        </p:txBody>
-      </p:sp>
-      <p:cxnSp>
-        <p:nvCxnSpPr>
-          <p:cNvPr id="24" name="Connector 23"/>
-          <p:cNvCxnSpPr/>
-          <p:nvPr/>
-        </p:nvCxnSpPr>
-        <p:spPr>
-          <a:xfrm>
-            <a:off x="649224" y="5548122"/>
-            <a:ext cx="3749040" cy="0"/>
-          </a:xfrm>
-          <a:prstGeom prst="line">
-            <a:avLst/>
-          </a:prstGeom>
-          <a:ln w="8255">
-            <a:solidFill>
-              <a:srgbClr val="D1CFC8"/>
-            </a:solidFill>
-          </a:ln>
-          <a:effectLst/>
-        </p:spPr>
-        <p:style>
-          <a:lnRef idx="2">
-            <a:schemeClr val="accent1"/>
-          </a:lnRef>
-          <a:fillRef idx="0">
-            <a:schemeClr val="accent1"/>
-          </a:fillRef>
-          <a:effectRef idx="1">
-            <a:schemeClr val="accent1"/>
-          </a:effectRef>
-          <a:fontRef idx="minor">
-            <a:schemeClr val="tx1"/>
-          </a:fontRef>
-        </p:style>
-      </p:cxnSp>
-      <p:sp>
-        <p:nvSpPr>
-          <p:cNvPr id="25" name="Oval 24"/>
-          <p:cNvSpPr/>
-          <p:nvPr/>
-        </p:nvSpPr>
-        <p:spPr>
-          <a:xfrm>
-            <a:off x="763524" y="5168646"/>
-            <a:ext cx="228600" cy="228600"/>
-          </a:xfrm>
-          <a:prstGeom prst="ellipse">
-            <a:avLst/>
-          </a:prstGeom>
-          <a:solidFill>
-            <a:srgbClr val="0D7870"/>
-          </a:solidFill>
-          <a:ln>
-            <a:noFill/>
-          </a:ln>
-          <a:effectLst/>
-        </p:spPr>
-        <p:style>
-          <a:lnRef idx="1">
-            <a:schemeClr val="accent1"/>
-          </a:lnRef>
-          <a:fillRef idx="3">
-            <a:schemeClr val="accent1"/>
-          </a:fillRef>
-          <a:effectRef idx="2">
-            <a:schemeClr val="accent1"/>
-          </a:effectRef>
-          <a:fontRef idx="minor">
-            <a:schemeClr val="lt1"/>
-          </a:fontRef>
-        </p:style>
-        <p:txBody>
-          <a:bodyPr rtlCol="0" anchor="ctr"/>
-          <a:lstStyle/>
-          <a:p>
-            <a:pPr algn="ctr"/>
-          </a:p>
-        </p:txBody>
-      </p:sp>
-      <p:sp>
-        <p:nvSpPr>
-          <p:cNvPr id="26" name="TextBox 25"/>
-          <p:cNvSpPr txBox="1"/>
-          <p:nvPr/>
-        </p:nvSpPr>
-        <p:spPr>
-          <a:xfrm>
-            <a:off x="768096" y="5173218"/>
-            <a:ext cx="219456" cy="219456"/>
-          </a:xfrm>
-          <a:prstGeom prst="rect">
-            <a:avLst/>
-          </a:prstGeom>
-          <a:noFill/>
-        </p:spPr>
-        <p:txBody>
-          <a:bodyPr wrap="square" anchor="ctr" lIns="0" rIns="0" tIns="0" bIns="0">
-            <a:spAutoFit/>
-          </a:bodyPr>
-          <a:lstStyle/>
-          <a:p>
-            <a:pPr algn="ctr">
-              <a:lnSpc>
-                <a:spcPct val="130000"/>
-              </a:lnSpc>
-            </a:pPr>
-            <a:r>
-              <a:rPr sz="850" b="1" lang="ja-JP">
-                <a:solidFill>
-                  <a:srgbClr val="FFFFFC"/>
-                </a:solidFill>
-                <a:latin typeface="Yu Gothic"/>
-                <a:ea typeface="Yu Gothic"/>
-                <a:cs typeface="Yu Gothic"/>
-              </a:rPr>
-              <a:t>5</a:t>
-            </a:r>
-          </a:p>
-        </p:txBody>
-      </p:sp>
-      <p:sp>
-        <p:nvSpPr>
-          <p:cNvPr id="27" name="TextBox 26"/>
-          <p:cNvSpPr txBox="1"/>
-          <p:nvPr/>
-        </p:nvSpPr>
-        <p:spPr>
-          <a:xfrm>
-            <a:off x="1088136" y="5017770"/>
-            <a:ext cx="3145535" cy="530352"/>
-          </a:xfrm>
-          <a:prstGeom prst="rect">
-            <a:avLst/>
-          </a:prstGeom>
-          <a:noFill/>
-        </p:spPr>
-        <p:txBody>
-          <a:bodyPr wrap="square" anchor="ctr" lIns="0" rIns="0" tIns="0" bIns="0">
-            <a:spAutoFit/>
-          </a:bodyPr>
-          <a:lstStyle/>
-          <a:p>
-            <a:pPr algn="l">
-              <a:lnSpc>
-                <a:spcPct val="115000"/>
-              </a:lnSpc>
-            </a:pPr>
-            <a:r>
-              <a:rPr sz="1350" b="1" lang="ja-JP">
-                <a:solidFill>
-                  <a:srgbClr val="182C43"/>
-                </a:solidFill>
-                <a:latin typeface="Yu Gothic"/>
-                <a:ea typeface="Yu Gothic"/>
-                <a:cs typeface="Yu Gothic"/>
-              </a:rPr>
-              <a:t>進捗と課題の把握に時間がかかる</a:t>
-            </a:r>
-          </a:p>
-        </p:txBody>
-      </p:sp>
-      <p:cxnSp>
-        <p:nvCxnSpPr>
-          <p:cNvPr id="28" name="Connector 27"/>
-          <p:cNvCxnSpPr/>
-          <p:nvPr/>
-        </p:nvCxnSpPr>
-        <p:spPr>
-          <a:xfrm>
-            <a:off x="7068312" y="2951226"/>
-            <a:ext cx="4474159" cy="0"/>
-          </a:xfrm>
-          <a:prstGeom prst="line">
-            <a:avLst/>
-          </a:prstGeom>
-          <a:ln w="8255">
-            <a:solidFill>
-              <a:srgbClr val="D1CFC8"/>
-            </a:solidFill>
-          </a:ln>
-          <a:effectLst/>
-        </p:spPr>
-        <p:style>
-          <a:lnRef idx="2">
-            <a:schemeClr val="accent1"/>
-          </a:lnRef>
-          <a:fillRef idx="0">
-            <a:schemeClr val="accent1"/>
-          </a:fillRef>
-          <a:effectRef idx="1">
-            <a:schemeClr val="accent1"/>
-          </a:effectRef>
-          <a:fontRef idx="minor">
-            <a:schemeClr val="tx1"/>
-          </a:fontRef>
-        </p:style>
-      </p:cxnSp>
-      <p:sp>
-        <p:nvSpPr>
-          <p:cNvPr id="29" name="Oval 28"/>
-          <p:cNvSpPr/>
-          <p:nvPr/>
-        </p:nvSpPr>
-        <p:spPr>
-          <a:xfrm>
-            <a:off x="11199571" y="2571750"/>
-            <a:ext cx="228600" cy="228600"/>
-          </a:xfrm>
-          <a:prstGeom prst="ellipse">
-            <a:avLst/>
-          </a:prstGeom>
-          <a:solidFill>
-            <a:srgbClr val="0D7870"/>
-          </a:solidFill>
-          <a:ln>
-            <a:noFill/>
-          </a:ln>
-          <a:effectLst/>
-        </p:spPr>
-        <p:style>
-          <a:lnRef idx="1">
-            <a:schemeClr val="accent1"/>
-          </a:lnRef>
-          <a:fillRef idx="3">
-            <a:schemeClr val="accent1"/>
-          </a:fillRef>
-          <a:effectRef idx="2">
-            <a:schemeClr val="accent1"/>
-          </a:effectRef>
-          <a:fontRef idx="minor">
-            <a:schemeClr val="lt1"/>
-          </a:fontRef>
-        </p:style>
-        <p:txBody>
-          <a:bodyPr rtlCol="0" anchor="ctr"/>
-          <a:lstStyle/>
-          <a:p>
-            <a:pPr algn="ctr"/>
-          </a:p>
-        </p:txBody>
-      </p:sp>
-      <p:sp>
-        <p:nvSpPr>
-          <p:cNvPr id="30" name="TextBox 29"/>
-          <p:cNvSpPr txBox="1"/>
-          <p:nvPr/>
-        </p:nvSpPr>
-        <p:spPr>
-          <a:xfrm>
-            <a:off x="11204143" y="2576322"/>
-            <a:ext cx="219456" cy="219456"/>
-          </a:xfrm>
-          <a:prstGeom prst="rect">
-            <a:avLst/>
-          </a:prstGeom>
-          <a:noFill/>
-        </p:spPr>
-        <p:txBody>
-          <a:bodyPr wrap="square" anchor="ctr" lIns="0" rIns="0" tIns="0" bIns="0">
-            <a:spAutoFit/>
-          </a:bodyPr>
-          <a:lstStyle/>
-          <a:p>
-            <a:pPr algn="ctr">
-              <a:lnSpc>
-                <a:spcPct val="130000"/>
-              </a:lnSpc>
-            </a:pPr>
-            <a:r>
-              <a:rPr sz="850" b="1" lang="ja-JP">
-                <a:solidFill>
-                  <a:srgbClr val="FFFFFC"/>
-                </a:solidFill>
-                <a:latin typeface="Yu Gothic"/>
-                <a:ea typeface="Yu Gothic"/>
-                <a:cs typeface="Yu Gothic"/>
-              </a:rPr>
-              <a:t>1</a:t>
-            </a:r>
-          </a:p>
-        </p:txBody>
-      </p:sp>
-      <p:sp>
-        <p:nvSpPr>
-          <p:cNvPr id="31" name="TextBox 30"/>
-          <p:cNvSpPr txBox="1"/>
-          <p:nvPr/>
-        </p:nvSpPr>
-        <p:spPr>
-          <a:xfrm>
-            <a:off x="7232903" y="2420874"/>
-            <a:ext cx="3870655" cy="530352"/>
-          </a:xfrm>
-          <a:prstGeom prst="rect">
-            <a:avLst/>
-          </a:prstGeom>
-          <a:noFill/>
-        </p:spPr>
-        <p:txBody>
-          <a:bodyPr wrap="square" anchor="ctr" lIns="0" rIns="0" tIns="0" bIns="0">
-            <a:spAutoFit/>
-          </a:bodyPr>
-          <a:lstStyle/>
-          <a:p>
-            <a:pPr algn="l">
-              <a:lnSpc>
-                <a:spcPct val="115000"/>
-              </a:lnSpc>
-            </a:pPr>
-            <a:r>
-              <a:rPr sz="1350" b="1" lang="ja-JP">
-                <a:solidFill>
-                  <a:srgbClr val="182C43"/>
-                </a:solidFill>
-                <a:latin typeface="Yu Gothic"/>
-                <a:ea typeface="Yu Gothic"/>
-                <a:cs typeface="Yu Gothic"/>
-              </a:rPr>
-              <a:t>定型作業の標準化と自動化</a:t>
-            </a:r>
-          </a:p>
-        </p:txBody>
-      </p:sp>
-      <p:cxnSp>
-        <p:nvCxnSpPr>
-          <p:cNvPr id="32" name="Connector 31"/>
-          <p:cNvCxnSpPr/>
-          <p:nvPr/>
-        </p:nvCxnSpPr>
-        <p:spPr>
-          <a:xfrm>
-            <a:off x="7068312" y="3600450"/>
-            <a:ext cx="4474159" cy="0"/>
-          </a:xfrm>
-          <a:prstGeom prst="line">
-            <a:avLst/>
-          </a:prstGeom>
-          <a:ln w="8255">
-            <a:solidFill>
-              <a:srgbClr val="D1CFC8"/>
-            </a:solidFill>
-          </a:ln>
-          <a:effectLst/>
-        </p:spPr>
-        <p:style>
-          <a:lnRef idx="2">
-            <a:schemeClr val="accent1"/>
-          </a:lnRef>
-          <a:fillRef idx="0">
-            <a:schemeClr val="accent1"/>
-          </a:fillRef>
-          <a:effectRef idx="1">
-            <a:schemeClr val="accent1"/>
-          </a:effectRef>
-          <a:fontRef idx="minor">
-            <a:schemeClr val="tx1"/>
-          </a:fontRef>
-        </p:style>
-      </p:cxnSp>
-      <p:sp>
-        <p:nvSpPr>
-          <p:cNvPr id="33" name="Oval 32"/>
-          <p:cNvSpPr/>
-          <p:nvPr/>
-        </p:nvSpPr>
-        <p:spPr>
-          <a:xfrm>
-            <a:off x="11199571" y="3220974"/>
-            <a:ext cx="228600" cy="228600"/>
-          </a:xfrm>
-          <a:prstGeom prst="ellipse">
-            <a:avLst/>
-          </a:prstGeom>
-          <a:solidFill>
-            <a:srgbClr val="0D7870"/>
-          </a:solidFill>
-          <a:ln>
-            <a:noFill/>
-          </a:ln>
-          <a:effectLst/>
-        </p:spPr>
-        <p:style>
-          <a:lnRef idx="1">
-            <a:schemeClr val="accent1"/>
-          </a:lnRef>
-          <a:fillRef idx="3">
-            <a:schemeClr val="accent1"/>
-          </a:fillRef>
-          <a:effectRef idx="2">
-            <a:schemeClr val="accent1"/>
-          </a:effectRef>
-          <a:fontRef idx="minor">
-            <a:schemeClr val="lt1"/>
-          </a:fontRef>
-        </p:style>
-        <p:txBody>
-          <a:bodyPr rtlCol="0" anchor="ctr"/>
-          <a:lstStyle/>
-          <a:p>
-            <a:pPr algn="ctr"/>
-          </a:p>
-        </p:txBody>
-      </p:sp>
-      <p:sp>
-        <p:nvSpPr>
-          <p:cNvPr id="34" name="TextBox 33"/>
-          <p:cNvSpPr txBox="1"/>
-          <p:nvPr/>
-        </p:nvSpPr>
-        <p:spPr>
-          <a:xfrm>
-            <a:off x="11204143" y="3225546"/>
-            <a:ext cx="219456" cy="219456"/>
-          </a:xfrm>
-          <a:prstGeom prst="rect">
-            <a:avLst/>
-          </a:prstGeom>
-          <a:noFill/>
-        </p:spPr>
-        <p:txBody>
-          <a:bodyPr wrap="square" anchor="ctr" lIns="0" rIns="0" tIns="0" bIns="0">
-            <a:spAutoFit/>
-          </a:bodyPr>
-          <a:lstStyle/>
-          <a:p>
-            <a:pPr algn="ctr">
-              <a:lnSpc>
-                <a:spcPct val="130000"/>
-              </a:lnSpc>
-            </a:pPr>
-            <a:r>
-              <a:rPr sz="850" b="1" lang="ja-JP">
-                <a:solidFill>
-                  <a:srgbClr val="FFFFFC"/>
-                </a:solidFill>
-                <a:latin typeface="Yu Gothic"/>
-                <a:ea typeface="Yu Gothic"/>
-                <a:cs typeface="Yu Gothic"/>
-              </a:rPr>
-              <a:t>2</a:t>
-            </a:r>
-          </a:p>
-        </p:txBody>
-      </p:sp>
-      <p:sp>
-        <p:nvSpPr>
-          <p:cNvPr id="35" name="TextBox 34"/>
-          <p:cNvSpPr txBox="1"/>
-          <p:nvPr/>
-        </p:nvSpPr>
-        <p:spPr>
-          <a:xfrm>
-            <a:off x="7232903" y="3070098"/>
-            <a:ext cx="3870655" cy="530352"/>
-          </a:xfrm>
-          <a:prstGeom prst="rect">
-            <a:avLst/>
-          </a:prstGeom>
-          <a:noFill/>
-        </p:spPr>
-        <p:txBody>
-          <a:bodyPr wrap="square" anchor="ctr" lIns="0" rIns="0" tIns="0" bIns="0">
-            <a:spAutoFit/>
-          </a:bodyPr>
-          <a:lstStyle/>
-          <a:p>
-            <a:pPr algn="l">
-              <a:lnSpc>
-                <a:spcPct val="115000"/>
-              </a:lnSpc>
-            </a:pPr>
-            <a:r>
-              <a:rPr sz="1350" b="1" lang="ja-JP">
-                <a:solidFill>
-                  <a:srgbClr val="182C43"/>
-                </a:solidFill>
-                <a:latin typeface="Yu Gothic"/>
-                <a:ea typeface="Yu Gothic"/>
-                <a:cs typeface="Yu Gothic"/>
-              </a:rPr>
-              <a:t>データ管理先の統合</a:t>
-            </a:r>
-          </a:p>
-        </p:txBody>
-      </p:sp>
-      <p:cxnSp>
-        <p:nvCxnSpPr>
-          <p:cNvPr id="36" name="Connector 35"/>
-          <p:cNvCxnSpPr/>
-          <p:nvPr/>
-        </p:nvCxnSpPr>
-        <p:spPr>
-          <a:xfrm>
-            <a:off x="7068312" y="4249674"/>
-            <a:ext cx="4474159" cy="0"/>
-          </a:xfrm>
-          <a:prstGeom prst="line">
-            <a:avLst/>
-          </a:prstGeom>
-          <a:ln w="8255">
-            <a:solidFill>
-              <a:srgbClr val="D1CFC8"/>
-            </a:solidFill>
-          </a:ln>
-          <a:effectLst/>
-        </p:spPr>
-        <p:style>
-          <a:lnRef idx="2">
-            <a:schemeClr val="accent1"/>
-          </a:lnRef>
-          <a:fillRef idx="0">
-            <a:schemeClr val="accent1"/>
-          </a:fillRef>
-          <a:effectRef idx="1">
-            <a:schemeClr val="accent1"/>
-          </a:effectRef>
-          <a:fontRef idx="minor">
-            <a:schemeClr val="tx1"/>
-          </a:fontRef>
-        </p:style>
-      </p:cxnSp>
-      <p:sp>
-        <p:nvSpPr>
-          <p:cNvPr id="37" name="Oval 36"/>
-          <p:cNvSpPr/>
-          <p:nvPr/>
-        </p:nvSpPr>
-        <p:spPr>
-          <a:xfrm>
-            <a:off x="11199571" y="3870198"/>
-            <a:ext cx="228600" cy="228600"/>
-          </a:xfrm>
-          <a:prstGeom prst="ellipse">
-            <a:avLst/>
-          </a:prstGeom>
-          <a:solidFill>
-            <a:srgbClr val="0D7870"/>
-          </a:solidFill>
-          <a:ln>
-            <a:noFill/>
-          </a:ln>
-          <a:effectLst/>
-        </p:spPr>
-        <p:style>
-          <a:lnRef idx="1">
-            <a:schemeClr val="accent1"/>
-          </a:lnRef>
-          <a:fillRef idx="3">
-            <a:schemeClr val="accent1"/>
-          </a:fillRef>
-          <a:effectRef idx="2">
-            <a:schemeClr val="accent1"/>
-          </a:effectRef>
-          <a:fontRef idx="minor">
-            <a:schemeClr val="lt1"/>
-          </a:fontRef>
-        </p:style>
-        <p:txBody>
-          <a:bodyPr rtlCol="0" anchor="ctr"/>
-          <a:lstStyle/>
-          <a:p>
-            <a:pPr algn="ctr"/>
-          </a:p>
-        </p:txBody>
-      </p:sp>
-      <p:sp>
-        <p:nvSpPr>
-          <p:cNvPr id="38" name="TextBox 37"/>
-          <p:cNvSpPr txBox="1"/>
-          <p:nvPr/>
-        </p:nvSpPr>
-        <p:spPr>
-          <a:xfrm>
-            <a:off x="11204143" y="3874770"/>
-            <a:ext cx="219456" cy="219456"/>
-          </a:xfrm>
-          <a:prstGeom prst="rect">
-            <a:avLst/>
-          </a:prstGeom>
-          <a:noFill/>
-        </p:spPr>
-        <p:txBody>
-          <a:bodyPr wrap="square" anchor="ctr" lIns="0" rIns="0" tIns="0" bIns="0">
-            <a:spAutoFit/>
-          </a:bodyPr>
-          <a:lstStyle/>
-          <a:p>
-            <a:pPr algn="ctr">
-              <a:lnSpc>
-                <a:spcPct val="130000"/>
-              </a:lnSpc>
-            </a:pPr>
-            <a:r>
-              <a:rPr sz="850" b="1" lang="ja-JP">
-                <a:solidFill>
-                  <a:srgbClr val="FFFFFC"/>
-                </a:solidFill>
-                <a:latin typeface="Yu Gothic"/>
-                <a:ea typeface="Yu Gothic"/>
-                <a:cs typeface="Yu Gothic"/>
-              </a:rPr>
-              <a:t>3</a:t>
-            </a:r>
-          </a:p>
-        </p:txBody>
-      </p:sp>
-      <p:sp>
-        <p:nvSpPr>
-          <p:cNvPr id="39" name="TextBox 38"/>
-          <p:cNvSpPr txBox="1"/>
-          <p:nvPr/>
-        </p:nvSpPr>
-        <p:spPr>
-          <a:xfrm>
-            <a:off x="7232903" y="3719322"/>
-            <a:ext cx="3870655" cy="530352"/>
-          </a:xfrm>
-          <a:prstGeom prst="rect">
-            <a:avLst/>
-          </a:prstGeom>
-          <a:noFill/>
-        </p:spPr>
-        <p:txBody>
-          <a:bodyPr wrap="square" anchor="ctr" lIns="0" rIns="0" tIns="0" bIns="0">
-            <a:spAutoFit/>
-          </a:bodyPr>
-          <a:lstStyle/>
-          <a:p>
-            <a:pPr algn="l">
-              <a:lnSpc>
-                <a:spcPct val="115000"/>
-              </a:lnSpc>
-            </a:pPr>
-            <a:r>
-              <a:rPr sz="1350" b="1" lang="ja-JP">
-                <a:solidFill>
-                  <a:srgbClr val="182C43"/>
-                </a:solidFill>
-                <a:latin typeface="Yu Gothic"/>
-                <a:ea typeface="Yu Gothic"/>
-                <a:cs typeface="Yu Gothic"/>
-              </a:rPr>
-              <a:t>承認条件と判断権限の見直し</a:t>
-            </a:r>
-          </a:p>
-        </p:txBody>
-      </p:sp>
-      <p:cxnSp>
-        <p:nvCxnSpPr>
-          <p:cNvPr id="40" name="Connector 39"/>
-          <p:cNvCxnSpPr/>
-          <p:nvPr/>
-        </p:nvCxnSpPr>
-        <p:spPr>
-          <a:xfrm>
-            <a:off x="7068312" y="4898898"/>
-            <a:ext cx="4474159" cy="0"/>
-          </a:xfrm>
-          <a:prstGeom prst="line">
-            <a:avLst/>
-          </a:prstGeom>
-          <a:ln w="8255">
-            <a:solidFill>
-              <a:srgbClr val="D1CFC8"/>
-            </a:solidFill>
-          </a:ln>
-          <a:effectLst/>
-        </p:spPr>
-        <p:style>
-          <a:lnRef idx="2">
-            <a:schemeClr val="accent1"/>
-          </a:lnRef>
-          <a:fillRef idx="0">
-            <a:schemeClr val="accent1"/>
-          </a:fillRef>
-          <a:effectRef idx="1">
-            <a:schemeClr val="accent1"/>
-          </a:effectRef>
-          <a:fontRef idx="minor">
-            <a:schemeClr val="tx1"/>
-          </a:fontRef>
-        </p:style>
-      </p:cxnSp>
-      <p:sp>
-        <p:nvSpPr>
-          <p:cNvPr id="41" name="Oval 40"/>
-          <p:cNvSpPr/>
-          <p:nvPr/>
-        </p:nvSpPr>
-        <p:spPr>
-          <a:xfrm>
-            <a:off x="11199571" y="4519422"/>
-            <a:ext cx="228600" cy="228600"/>
-          </a:xfrm>
-          <a:prstGeom prst="ellipse">
-            <a:avLst/>
-          </a:prstGeom>
-          <a:solidFill>
-            <a:srgbClr val="0D7870"/>
-          </a:solidFill>
-          <a:ln>
-            <a:noFill/>
-          </a:ln>
-          <a:effectLst/>
-        </p:spPr>
-        <p:style>
-          <a:lnRef idx="1">
-            <a:schemeClr val="accent1"/>
-          </a:lnRef>
-          <a:fillRef idx="3">
-            <a:schemeClr val="accent1"/>
-          </a:fillRef>
-          <a:effectRef idx="2">
-            <a:schemeClr val="accent1"/>
-          </a:effectRef>
-          <a:fontRef idx="minor">
-            <a:schemeClr val="lt1"/>
-          </a:fontRef>
-        </p:style>
-        <p:txBody>
-          <a:bodyPr rtlCol="0" anchor="ctr"/>
-          <a:lstStyle/>
-          <a:p>
-            <a:pPr algn="ctr"/>
-          </a:p>
-        </p:txBody>
-      </p:sp>
-      <p:sp>
-        <p:nvSpPr>
-          <p:cNvPr id="42" name="TextBox 41"/>
-          <p:cNvSpPr txBox="1"/>
-          <p:nvPr/>
-        </p:nvSpPr>
-        <p:spPr>
-          <a:xfrm>
-            <a:off x="11204143" y="4523994"/>
-            <a:ext cx="219456" cy="219456"/>
-          </a:xfrm>
-          <a:prstGeom prst="rect">
-            <a:avLst/>
-          </a:prstGeom>
-          <a:noFill/>
-        </p:spPr>
-        <p:txBody>
-          <a:bodyPr wrap="square" anchor="ctr" lIns="0" rIns="0" tIns="0" bIns="0">
-            <a:spAutoFit/>
-          </a:bodyPr>
-          <a:lstStyle/>
-          <a:p>
-            <a:pPr algn="ctr">
-              <a:lnSpc>
-                <a:spcPct val="130000"/>
-              </a:lnSpc>
-            </a:pPr>
-            <a:r>
-              <a:rPr sz="850" b="1" lang="ja-JP">
-                <a:solidFill>
-                  <a:srgbClr val="FFFFFC"/>
-                </a:solidFill>
-                <a:latin typeface="Yu Gothic"/>
-                <a:ea typeface="Yu Gothic"/>
-                <a:cs typeface="Yu Gothic"/>
-              </a:rPr>
-              <a:t>4</a:t>
-            </a:r>
-          </a:p>
-        </p:txBody>
-      </p:sp>
-      <p:sp>
-        <p:nvSpPr>
-          <p:cNvPr id="43" name="TextBox 42"/>
-          <p:cNvSpPr txBox="1"/>
-          <p:nvPr/>
-        </p:nvSpPr>
-        <p:spPr>
-          <a:xfrm>
-            <a:off x="7232903" y="4368546"/>
-            <a:ext cx="3870655" cy="530352"/>
-          </a:xfrm>
-          <a:prstGeom prst="rect">
-            <a:avLst/>
-          </a:prstGeom>
-          <a:noFill/>
-        </p:spPr>
-        <p:txBody>
-          <a:bodyPr wrap="square" anchor="ctr" lIns="0" rIns="0" tIns="0" bIns="0">
-            <a:spAutoFit/>
-          </a:bodyPr>
-          <a:lstStyle/>
-          <a:p>
-            <a:pPr algn="l">
-              <a:lnSpc>
-                <a:spcPct val="115000"/>
-              </a:lnSpc>
-            </a:pPr>
-            <a:r>
-              <a:rPr sz="1350" b="1" lang="ja-JP">
-                <a:solidFill>
-                  <a:srgbClr val="182C43"/>
-                </a:solidFill>
-                <a:latin typeface="Yu Gothic"/>
-                <a:ea typeface="Yu Gothic"/>
-                <a:cs typeface="Yu Gothic"/>
-              </a:rPr>
-              <a:t>レビュー基準と品質ゲートの整備</a:t>
-            </a:r>
-          </a:p>
-        </p:txBody>
-      </p:sp>
-      <p:cxnSp>
-        <p:nvCxnSpPr>
-          <p:cNvPr id="44" name="Connector 43"/>
-          <p:cNvCxnSpPr/>
-          <p:nvPr/>
-        </p:nvCxnSpPr>
-        <p:spPr>
-          <a:xfrm>
-            <a:off x="7068312" y="5548122"/>
-            <a:ext cx="4474159" cy="0"/>
-          </a:xfrm>
-          <a:prstGeom prst="line">
-            <a:avLst/>
-          </a:prstGeom>
-          <a:ln w="8255">
-            <a:solidFill>
-              <a:srgbClr val="D1CFC8"/>
-            </a:solidFill>
-          </a:ln>
-          <a:effectLst/>
-        </p:spPr>
-        <p:style>
-          <a:lnRef idx="2">
-            <a:schemeClr val="accent1"/>
-          </a:lnRef>
-          <a:fillRef idx="0">
-            <a:schemeClr val="accent1"/>
-          </a:fillRef>
-          <a:effectRef idx="1">
-            <a:schemeClr val="accent1"/>
-          </a:effectRef>
-          <a:fontRef idx="minor">
-            <a:schemeClr val="tx1"/>
-          </a:fontRef>
-        </p:style>
-      </p:cxnSp>
-      <p:sp>
-        <p:nvSpPr>
-          <p:cNvPr id="45" name="Oval 44"/>
-          <p:cNvSpPr/>
-          <p:nvPr/>
-        </p:nvSpPr>
-        <p:spPr>
-          <a:xfrm>
-            <a:off x="11199571" y="5168646"/>
-            <a:ext cx="228600" cy="228600"/>
-          </a:xfrm>
-          <a:prstGeom prst="ellipse">
-            <a:avLst/>
-          </a:prstGeom>
-          <a:solidFill>
-            <a:srgbClr val="0D7870"/>
-          </a:solidFill>
-          <a:ln>
-            <a:noFill/>
-          </a:ln>
-          <a:effectLst/>
-        </p:spPr>
-        <p:style>
-          <a:lnRef idx="1">
-            <a:schemeClr val="accent1"/>
-          </a:lnRef>
-          <a:fillRef idx="3">
-            <a:schemeClr val="accent1"/>
-          </a:fillRef>
-          <a:effectRef idx="2">
-            <a:schemeClr val="accent1"/>
-          </a:effectRef>
-          <a:fontRef idx="minor">
-            <a:schemeClr val="lt1"/>
-          </a:fontRef>
-        </p:style>
-        <p:txBody>
-          <a:bodyPr rtlCol="0" anchor="ctr"/>
-          <a:lstStyle/>
-          <a:p>
-            <a:pPr algn="ctr"/>
-          </a:p>
-        </p:txBody>
-      </p:sp>
-      <p:sp>
-        <p:nvSpPr>
-          <p:cNvPr id="46" name="TextBox 45"/>
-          <p:cNvSpPr txBox="1"/>
-          <p:nvPr/>
-        </p:nvSpPr>
-        <p:spPr>
-          <a:xfrm>
-            <a:off x="11204143" y="5173218"/>
-            <a:ext cx="219456" cy="219456"/>
-          </a:xfrm>
-          <a:prstGeom prst="rect">
-            <a:avLst/>
-          </a:prstGeom>
-          <a:noFill/>
-        </p:spPr>
-        <p:txBody>
-          <a:bodyPr wrap="square" anchor="ctr" lIns="0" rIns="0" tIns="0" bIns="0">
-            <a:spAutoFit/>
-          </a:bodyPr>
-          <a:lstStyle/>
-          <a:p>
-            <a:pPr algn="ctr">
-              <a:lnSpc>
-                <a:spcPct val="130000"/>
-              </a:lnSpc>
-            </a:pPr>
-            <a:r>
-              <a:rPr sz="850" b="1" lang="ja-JP">
-                <a:solidFill>
-                  <a:srgbClr val="FFFFFC"/>
-                </a:solidFill>
-                <a:latin typeface="Yu Gothic"/>
-                <a:ea typeface="Yu Gothic"/>
-                <a:cs typeface="Yu Gothic"/>
-              </a:rPr>
-              <a:t>5</a:t>
-            </a:r>
-          </a:p>
-        </p:txBody>
-      </p:sp>
-      <p:sp>
-        <p:nvSpPr>
-          <p:cNvPr id="47" name="TextBox 46"/>
-          <p:cNvSpPr txBox="1"/>
-          <p:nvPr/>
-        </p:nvSpPr>
-        <p:spPr>
-          <a:xfrm>
-            <a:off x="7232903" y="5017770"/>
-            <a:ext cx="3870655" cy="530352"/>
-          </a:xfrm>
-          <a:prstGeom prst="rect">
-            <a:avLst/>
-          </a:prstGeom>
-          <a:noFill/>
-        </p:spPr>
-        <p:txBody>
-          <a:bodyPr wrap="square" anchor="ctr" lIns="0" rIns="0" tIns="0" bIns="0">
-            <a:spAutoFit/>
-          </a:bodyPr>
-          <a:lstStyle/>
-          <a:p>
-            <a:pPr algn="l">
-              <a:lnSpc>
-                <a:spcPct val="115000"/>
-              </a:lnSpc>
-            </a:pPr>
-            <a:r>
-              <a:rPr sz="1350" b="1" lang="ja-JP">
-                <a:solidFill>
-                  <a:srgbClr val="182C43"/>
-                </a:solidFill>
-                <a:latin typeface="Yu Gothic"/>
-                <a:ea typeface="Yu Gothic"/>
-                <a:cs typeface="Yu Gothic"/>
-              </a:rPr>
-              <a:t>進捗・課題ダッシュボードの整備</a:t>
-            </a:r>
-          </a:p>
-        </p:txBody>
-      </p:sp>
-      <p:sp>
-        <p:nvSpPr>
-          <p:cNvPr id="48" name="Rectangle 47"/>
-          <p:cNvSpPr/>
-          <p:nvPr/>
-        </p:nvSpPr>
-        <p:spPr>
-          <a:xfrm>
-            <a:off x="4636007" y="2420874"/>
-            <a:ext cx="2139696" cy="3127248"/>
-          </a:xfrm>
-          <a:prstGeom prst="rect">
-            <a:avLst/>
-          </a:prstGeom>
-          <a:solidFill>
-            <a:srgbClr val="ECEAE4"/>
-          </a:solidFill>
-          <a:ln>
-            <a:noFill/>
-          </a:ln>
-          <a:effectLst/>
-        </p:spPr>
-        <p:style>
-          <a:lnRef idx="1">
-            <a:schemeClr val="accent1"/>
-          </a:lnRef>
-          <a:fillRef idx="3">
-            <a:schemeClr val="accent1"/>
-          </a:fillRef>
-          <a:effectRef idx="2">
-            <a:schemeClr val="accent1"/>
-          </a:effectRef>
-          <a:fontRef idx="minor">
-            <a:schemeClr val="lt1"/>
-          </a:fontRef>
-        </p:style>
-        <p:txBody>
-          <a:bodyPr rtlCol="0" anchor="ctr"/>
-          <a:lstStyle/>
-          <a:p>
-            <a:pPr algn="ctr"/>
-          </a:p>
-        </p:txBody>
-      </p:sp>
-      <p:sp>
-        <p:nvSpPr>
-          <p:cNvPr id="49" name="TextBox 48"/>
-          <p:cNvSpPr txBox="1"/>
-          <p:nvPr/>
-        </p:nvSpPr>
-        <p:spPr>
-          <a:xfrm>
-            <a:off x="4703673" y="1901952"/>
-            <a:ext cx="292608" cy="164592"/>
-          </a:xfrm>
-          <a:prstGeom prst="rect">
-            <a:avLst/>
-          </a:prstGeom>
-          <a:noFill/>
-        </p:spPr>
-        <p:txBody>
-          <a:bodyPr wrap="square" anchor="t" lIns="0" rIns="0" tIns="0" bIns="0">
-            <a:spAutoFit/>
-          </a:bodyPr>
-          <a:lstStyle/>
-          <a:p>
-            <a:pPr algn="ctr">
-              <a:lnSpc>
-                <a:spcPct val="130000"/>
-              </a:lnSpc>
-            </a:pPr>
-            <a:r>
-              <a:rPr sz="850" b="1" lang="ja-JP">
-                <a:solidFill>
-                  <a:srgbClr val="0D7870"/>
-                </a:solidFill>
-                <a:latin typeface="Yu Gothic"/>
-                <a:ea typeface="Yu Gothic"/>
-                <a:cs typeface="Yu Gothic"/>
-              </a:rPr>
-              <a:t>1</a:t>
-            </a:r>
-          </a:p>
-        </p:txBody>
-      </p:sp>
-      <p:sp>
-        <p:nvSpPr>
-          <p:cNvPr id="50" name="TextBox 49"/>
-          <p:cNvSpPr txBox="1"/>
-          <p:nvPr/>
-        </p:nvSpPr>
-        <p:spPr>
-          <a:xfrm>
-            <a:off x="5131612" y="1901952"/>
-            <a:ext cx="292608" cy="164592"/>
-          </a:xfrm>
-          <a:prstGeom prst="rect">
-            <a:avLst/>
-          </a:prstGeom>
-          <a:noFill/>
-        </p:spPr>
-        <p:txBody>
-          <a:bodyPr wrap="square" anchor="t" lIns="0" rIns="0" tIns="0" bIns="0">
-            <a:spAutoFit/>
-          </a:bodyPr>
-          <a:lstStyle/>
-          <a:p>
-            <a:pPr algn="ctr">
-              <a:lnSpc>
-                <a:spcPct val="130000"/>
-              </a:lnSpc>
-            </a:pPr>
-            <a:r>
-              <a:rPr sz="850" b="1" lang="ja-JP">
-                <a:solidFill>
-                  <a:srgbClr val="0D7870"/>
-                </a:solidFill>
-                <a:latin typeface="Yu Gothic"/>
-                <a:ea typeface="Yu Gothic"/>
-                <a:cs typeface="Yu Gothic"/>
-              </a:rPr>
-              <a:t>2</a:t>
-            </a:r>
-          </a:p>
-        </p:txBody>
-      </p:sp>
-      <p:cxnSp>
-        <p:nvCxnSpPr>
-          <p:cNvPr id="51" name="Connector 50"/>
-          <p:cNvCxnSpPr/>
-          <p:nvPr/>
-        </p:nvCxnSpPr>
-        <p:spPr>
-          <a:xfrm>
-            <a:off x="5063947" y="2420874"/>
-            <a:ext cx="0" cy="3127248"/>
-          </a:xfrm>
-          <a:prstGeom prst="line">
-            <a:avLst/>
-          </a:prstGeom>
-          <a:ln w="6985">
-            <a:solidFill>
-              <a:srgbClr val="D1CFC8"/>
-            </a:solidFill>
-          </a:ln>
-          <a:effectLst/>
-        </p:spPr>
-        <p:style>
-          <a:lnRef idx="2">
-            <a:schemeClr val="accent1"/>
-          </a:lnRef>
-          <a:fillRef idx="0">
-            <a:schemeClr val="accent1"/>
-          </a:fillRef>
-          <a:effectRef idx="1">
-            <a:schemeClr val="accent1"/>
-          </a:effectRef>
-          <a:fontRef idx="minor">
-            <a:schemeClr val="tx1"/>
-          </a:fontRef>
-        </p:style>
-      </p:cxnSp>
-      <p:sp>
-        <p:nvSpPr>
-          <p:cNvPr id="52" name="TextBox 51"/>
-          <p:cNvSpPr txBox="1"/>
-          <p:nvPr/>
-        </p:nvSpPr>
-        <p:spPr>
-          <a:xfrm>
-            <a:off x="5559551" y="1901952"/>
-            <a:ext cx="292608" cy="164592"/>
-          </a:xfrm>
-          <a:prstGeom prst="rect">
-            <a:avLst/>
-          </a:prstGeom>
-          <a:noFill/>
-        </p:spPr>
-        <p:txBody>
-          <a:bodyPr wrap="square" anchor="t" lIns="0" rIns="0" tIns="0" bIns="0">
-            <a:spAutoFit/>
-          </a:bodyPr>
-          <a:lstStyle/>
-          <a:p>
-            <a:pPr algn="ctr">
-              <a:lnSpc>
-                <a:spcPct val="130000"/>
-              </a:lnSpc>
-            </a:pPr>
-            <a:r>
-              <a:rPr sz="850" b="1" lang="ja-JP">
-                <a:solidFill>
-                  <a:srgbClr val="0D7870"/>
-                </a:solidFill>
-                <a:latin typeface="Yu Gothic"/>
-                <a:ea typeface="Yu Gothic"/>
-                <a:cs typeface="Yu Gothic"/>
-              </a:rPr>
-              <a:t>3</a:t>
-            </a:r>
-          </a:p>
-        </p:txBody>
-      </p:sp>
-      <p:cxnSp>
-        <p:nvCxnSpPr>
-          <p:cNvPr id="53" name="Connector 52"/>
-          <p:cNvCxnSpPr/>
-          <p:nvPr/>
-        </p:nvCxnSpPr>
-        <p:spPr>
-          <a:xfrm>
-            <a:off x="5491886" y="2420874"/>
-            <a:ext cx="0" cy="3127248"/>
-          </a:xfrm>
-          <a:prstGeom prst="line">
-            <a:avLst/>
-          </a:prstGeom>
-          <a:ln w="6985">
-            <a:solidFill>
-              <a:srgbClr val="D1CFC8"/>
-            </a:solidFill>
-          </a:ln>
-          <a:effectLst/>
-        </p:spPr>
-        <p:style>
-          <a:lnRef idx="2">
-            <a:schemeClr val="accent1"/>
-          </a:lnRef>
-          <a:fillRef idx="0">
-            <a:schemeClr val="accent1"/>
-          </a:fillRef>
-          <a:effectRef idx="1">
-            <a:schemeClr val="accent1"/>
-          </a:effectRef>
-          <a:fontRef idx="minor">
-            <a:schemeClr val="tx1"/>
-          </a:fontRef>
-        </p:style>
-      </p:cxnSp>
-      <p:sp>
-        <p:nvSpPr>
-          <p:cNvPr id="54" name="TextBox 53"/>
-          <p:cNvSpPr txBox="1"/>
-          <p:nvPr/>
-        </p:nvSpPr>
-        <p:spPr>
-          <a:xfrm>
-            <a:off x="5987491" y="1901952"/>
-            <a:ext cx="292608" cy="164592"/>
-          </a:xfrm>
-          <a:prstGeom prst="rect">
-            <a:avLst/>
-          </a:prstGeom>
-          <a:noFill/>
-        </p:spPr>
-        <p:txBody>
-          <a:bodyPr wrap="square" anchor="t" lIns="0" rIns="0" tIns="0" bIns="0">
-            <a:spAutoFit/>
-          </a:bodyPr>
-          <a:lstStyle/>
-          <a:p>
-            <a:pPr algn="ctr">
-              <a:lnSpc>
-                <a:spcPct val="130000"/>
-              </a:lnSpc>
-            </a:pPr>
-            <a:r>
-              <a:rPr sz="850" b="1" lang="ja-JP">
-                <a:solidFill>
-                  <a:srgbClr val="0D7870"/>
-                </a:solidFill>
-                <a:latin typeface="Yu Gothic"/>
-                <a:ea typeface="Yu Gothic"/>
-                <a:cs typeface="Yu Gothic"/>
-              </a:rPr>
-              <a:t>4</a:t>
-            </a:r>
-          </a:p>
-        </p:txBody>
-      </p:sp>
-      <p:cxnSp>
-        <p:nvCxnSpPr>
-          <p:cNvPr id="55" name="Connector 54"/>
-          <p:cNvCxnSpPr/>
-          <p:nvPr/>
-        </p:nvCxnSpPr>
-        <p:spPr>
-          <a:xfrm>
-            <a:off x="5919825" y="2420874"/>
-            <a:ext cx="0" cy="3127248"/>
-          </a:xfrm>
-          <a:prstGeom prst="line">
-            <a:avLst/>
-          </a:prstGeom>
-          <a:ln w="6985">
-            <a:solidFill>
-              <a:srgbClr val="D1CFC8"/>
-            </a:solidFill>
-          </a:ln>
-          <a:effectLst/>
-        </p:spPr>
-        <p:style>
-          <a:lnRef idx="2">
-            <a:schemeClr val="accent1"/>
-          </a:lnRef>
-          <a:fillRef idx="0">
-            <a:schemeClr val="accent1"/>
-          </a:fillRef>
-          <a:effectRef idx="1">
-            <a:schemeClr val="accent1"/>
-          </a:effectRef>
-          <a:fontRef idx="minor">
-            <a:schemeClr val="tx1"/>
-          </a:fontRef>
-        </p:style>
-      </p:cxnSp>
-      <p:sp>
-        <p:nvSpPr>
-          <p:cNvPr id="56" name="TextBox 55"/>
-          <p:cNvSpPr txBox="1"/>
-          <p:nvPr/>
-        </p:nvSpPr>
-        <p:spPr>
-          <a:xfrm>
-            <a:off x="6415430" y="1901952"/>
-            <a:ext cx="292608" cy="164592"/>
-          </a:xfrm>
-          <a:prstGeom prst="rect">
-            <a:avLst/>
-          </a:prstGeom>
-          <a:noFill/>
-        </p:spPr>
-        <p:txBody>
-          <a:bodyPr wrap="square" anchor="t" lIns="0" rIns="0" tIns="0" bIns="0">
-            <a:spAutoFit/>
-          </a:bodyPr>
-          <a:lstStyle/>
-          <a:p>
-            <a:pPr algn="ctr">
-              <a:lnSpc>
-                <a:spcPct val="130000"/>
-              </a:lnSpc>
-            </a:pPr>
-            <a:r>
-              <a:rPr sz="850" b="1" lang="ja-JP">
-                <a:solidFill>
-                  <a:srgbClr val="0D7870"/>
-                </a:solidFill>
-                <a:latin typeface="Yu Gothic"/>
-                <a:ea typeface="Yu Gothic"/>
-                <a:cs typeface="Yu Gothic"/>
-              </a:rPr>
-              <a:t>5</a:t>
-            </a:r>
-          </a:p>
-        </p:txBody>
-      </p:sp>
-      <p:cxnSp>
-        <p:nvCxnSpPr>
-          <p:cNvPr id="57" name="Connector 56"/>
-          <p:cNvCxnSpPr/>
-          <p:nvPr/>
-        </p:nvCxnSpPr>
-        <p:spPr>
-          <a:xfrm>
-            <a:off x="6347764" y="2420874"/>
-            <a:ext cx="0" cy="3127248"/>
-          </a:xfrm>
-          <a:prstGeom prst="line">
-            <a:avLst/>
-          </a:prstGeom>
-          <a:ln w="6985">
-            <a:solidFill>
-              <a:srgbClr val="D1CFC8"/>
+              <a:srgbClr val="F7F5EF"/>
             </a:solidFill>
           </a:ln>
           <a:effectLst/>
@@ -32652,22 +30616,23 @@
       </p:cxnSp>
       <p:cxnSp>
         <p:nvCxnSpPr>
-          <p:cNvPr id="58" name="Connector 57"/>
+          <p:cNvPr id="8" name="Connector 7"/>
           <p:cNvCxnSpPr/>
           <p:nvPr/>
         </p:nvCxnSpPr>
         <p:spPr>
           <a:xfrm>
-            <a:off x="4636007" y="3010662"/>
-            <a:ext cx="2139696" cy="0"/>
+            <a:off x="4718304" y="2686050"/>
+            <a:ext cx="2755087" cy="0"/>
           </a:xfrm>
           <a:prstGeom prst="line">
             <a:avLst/>
           </a:prstGeom>
-          <a:ln w="6985">
+          <a:ln w="17780">
             <a:solidFill>
-              <a:srgbClr val="D1CFC8"/>
+              <a:srgbClr val="0D7870"/>
             </a:solidFill>
+            <a:tailEnd type="triangle" w="med" len="med"/>
           </a:ln>
           <a:effectLst/>
         </p:spPr>
@@ -32688,21 +30653,21 @@
       </p:cxnSp>
       <p:cxnSp>
         <p:nvCxnSpPr>
-          <p:cNvPr id="59" name="Connector 58"/>
+          <p:cNvPr id="9" name="Connector 8"/>
           <p:cNvCxnSpPr/>
           <p:nvPr/>
         </p:nvCxnSpPr>
         <p:spPr>
           <a:xfrm>
-            <a:off x="4636007" y="3659885"/>
-            <a:ext cx="2139696" cy="0"/>
+            <a:off x="4718304" y="3984498"/>
+            <a:ext cx="2755087" cy="0"/>
           </a:xfrm>
           <a:prstGeom prst="line">
             <a:avLst/>
           </a:prstGeom>
-          <a:ln w="6985">
+          <a:ln w="45720">
             <a:solidFill>
-              <a:srgbClr val="D1CFC8"/>
+              <a:srgbClr val="F7F5EF"/>
             </a:solidFill>
           </a:ln>
           <a:effectLst/>
@@ -32724,22 +30689,23 @@
       </p:cxnSp>
       <p:cxnSp>
         <p:nvCxnSpPr>
-          <p:cNvPr id="60" name="Connector 59"/>
+          <p:cNvPr id="10" name="Connector 9"/>
           <p:cNvCxnSpPr/>
           <p:nvPr/>
         </p:nvCxnSpPr>
         <p:spPr>
           <a:xfrm>
-            <a:off x="4636007" y="4309109"/>
-            <a:ext cx="2139696" cy="0"/>
+            <a:off x="4718304" y="3984498"/>
+            <a:ext cx="2755087" cy="0"/>
           </a:xfrm>
           <a:prstGeom prst="line">
             <a:avLst/>
           </a:prstGeom>
-          <a:ln w="6985">
+          <a:ln w="12700">
             <a:solidFill>
-              <a:srgbClr val="D1CFC8"/>
+              <a:srgbClr val="666E70"/>
             </a:solidFill>
+            <a:tailEnd type="triangle" w="med" len="med"/>
           </a:ln>
           <a:effectLst/>
         </p:spPr>
@@ -32760,21 +30726,21 @@
       </p:cxnSp>
       <p:cxnSp>
         <p:nvCxnSpPr>
-          <p:cNvPr id="61" name="Connector 60"/>
+          <p:cNvPr id="11" name="Connector 10"/>
           <p:cNvCxnSpPr/>
           <p:nvPr/>
         </p:nvCxnSpPr>
         <p:spPr>
           <a:xfrm>
-            <a:off x="4636007" y="4958333"/>
-            <a:ext cx="2139696" cy="0"/>
+            <a:off x="4718304" y="3984498"/>
+            <a:ext cx="2755087" cy="649224"/>
           </a:xfrm>
           <a:prstGeom prst="line">
             <a:avLst/>
           </a:prstGeom>
-          <a:ln w="6985">
+          <a:ln w="45720">
             <a:solidFill>
-              <a:srgbClr val="D1CFC8"/>
+              <a:srgbClr val="F7F5EF"/>
             </a:solidFill>
           </a:ln>
           <a:effectLst/>
@@ -32794,16 +30760,318 @@
           </a:fontRef>
         </p:style>
       </p:cxnSp>
-      <p:sp>
-        <p:nvSpPr>
-          <p:cNvPr id="62" name="Oval 61"/>
+      <p:cxnSp>
+        <p:nvCxnSpPr>
+          <p:cNvPr id="12" name="Connector 11"/>
+          <p:cNvCxnSpPr/>
+          <p:nvPr/>
+        </p:nvCxnSpPr>
+        <p:spPr>
+          <a:xfrm>
+            <a:off x="4718304" y="3984498"/>
+            <a:ext cx="2755087" cy="649224"/>
+          </a:xfrm>
+          <a:prstGeom prst="line">
+            <a:avLst/>
+          </a:prstGeom>
+          <a:ln w="12700">
+            <a:solidFill>
+              <a:srgbClr val="666E70"/>
+            </a:solidFill>
+            <a:tailEnd type="triangle" w="med" len="med"/>
+          </a:ln>
+          <a:effectLst/>
+        </p:spPr>
+        <p:style>
+          <a:lnRef idx="2">
+            <a:schemeClr val="accent1"/>
+          </a:lnRef>
+          <a:fillRef idx="0">
+            <a:schemeClr val="accent1"/>
+          </a:fillRef>
+          <a:effectRef idx="1">
+            <a:schemeClr val="accent1"/>
+          </a:effectRef>
+          <a:fontRef idx="minor">
+            <a:schemeClr val="tx1"/>
+          </a:fontRef>
+        </p:style>
+      </p:cxnSp>
+      <p:cxnSp>
+        <p:nvCxnSpPr>
+          <p:cNvPr id="13" name="Connector 12"/>
+          <p:cNvCxnSpPr/>
+          <p:nvPr/>
+        </p:nvCxnSpPr>
+        <p:spPr>
+          <a:xfrm>
+            <a:off x="4718304" y="3335274"/>
+            <a:ext cx="2755087" cy="0"/>
+          </a:xfrm>
+          <a:prstGeom prst="line">
+            <a:avLst/>
+          </a:prstGeom>
+          <a:ln w="45720">
+            <a:solidFill>
+              <a:srgbClr val="F7F5EF"/>
+            </a:solidFill>
+          </a:ln>
+          <a:effectLst/>
+        </p:spPr>
+        <p:style>
+          <a:lnRef idx="2">
+            <a:schemeClr val="accent1"/>
+          </a:lnRef>
+          <a:fillRef idx="0">
+            <a:schemeClr val="accent1"/>
+          </a:fillRef>
+          <a:effectRef idx="1">
+            <a:schemeClr val="accent1"/>
+          </a:effectRef>
+          <a:fontRef idx="minor">
+            <a:schemeClr val="tx1"/>
+          </a:fontRef>
+        </p:style>
+      </p:cxnSp>
+      <p:cxnSp>
+        <p:nvCxnSpPr>
+          <p:cNvPr id="14" name="Connector 13"/>
+          <p:cNvCxnSpPr/>
+          <p:nvPr/>
+        </p:nvCxnSpPr>
+        <p:spPr>
+          <a:xfrm>
+            <a:off x="4718304" y="3335274"/>
+            <a:ext cx="2755087" cy="0"/>
+          </a:xfrm>
+          <a:prstGeom prst="line">
+            <a:avLst/>
+          </a:prstGeom>
+          <a:ln w="12700">
+            <a:solidFill>
+              <a:srgbClr val="666E70"/>
+            </a:solidFill>
+            <a:tailEnd type="triangle" w="med" len="med"/>
+          </a:ln>
+          <a:effectLst/>
+        </p:spPr>
+        <p:style>
+          <a:lnRef idx="2">
+            <a:schemeClr val="accent1"/>
+          </a:lnRef>
+          <a:fillRef idx="0">
+            <a:schemeClr val="accent1"/>
+          </a:fillRef>
+          <a:effectRef idx="1">
+            <a:schemeClr val="accent1"/>
+          </a:effectRef>
+          <a:fontRef idx="minor">
+            <a:schemeClr val="tx1"/>
+          </a:fontRef>
+        </p:style>
+      </p:cxnSp>
+      <p:cxnSp>
+        <p:nvCxnSpPr>
+          <p:cNvPr id="15" name="Connector 14"/>
+          <p:cNvCxnSpPr/>
+          <p:nvPr/>
+        </p:nvCxnSpPr>
+        <p:spPr>
+          <a:xfrm>
+            <a:off x="4718304" y="5282946"/>
+            <a:ext cx="2755087" cy="0"/>
+          </a:xfrm>
+          <a:prstGeom prst="line">
+            <a:avLst/>
+          </a:prstGeom>
+          <a:ln w="45720">
+            <a:solidFill>
+              <a:srgbClr val="F7F5EF"/>
+            </a:solidFill>
+          </a:ln>
+          <a:effectLst/>
+        </p:spPr>
+        <p:style>
+          <a:lnRef idx="2">
+            <a:schemeClr val="accent1"/>
+          </a:lnRef>
+          <a:fillRef idx="0">
+            <a:schemeClr val="accent1"/>
+          </a:fillRef>
+          <a:effectRef idx="1">
+            <a:schemeClr val="accent1"/>
+          </a:effectRef>
+          <a:fontRef idx="minor">
+            <a:schemeClr val="tx1"/>
+          </a:fontRef>
+        </p:style>
+      </p:cxnSp>
+      <p:cxnSp>
+        <p:nvCxnSpPr>
+          <p:cNvPr id="16" name="Connector 15"/>
+          <p:cNvCxnSpPr/>
+          <p:nvPr/>
+        </p:nvCxnSpPr>
+        <p:spPr>
+          <a:xfrm>
+            <a:off x="4718304" y="5282946"/>
+            <a:ext cx="2755087" cy="0"/>
+          </a:xfrm>
+          <a:prstGeom prst="line">
+            <a:avLst/>
+          </a:prstGeom>
+          <a:ln w="12700">
+            <a:solidFill>
+              <a:srgbClr val="666E70"/>
+            </a:solidFill>
+            <a:tailEnd type="triangle" w="med" len="med"/>
+          </a:ln>
+          <a:effectLst/>
+        </p:spPr>
+        <p:style>
+          <a:lnRef idx="2">
+            <a:schemeClr val="accent1"/>
+          </a:lnRef>
+          <a:fillRef idx="0">
+            <a:schemeClr val="accent1"/>
+          </a:fillRef>
+          <a:effectRef idx="1">
+            <a:schemeClr val="accent1"/>
+          </a:effectRef>
+          <a:fontRef idx="minor">
+            <a:schemeClr val="tx1"/>
+          </a:fontRef>
+        </p:style>
+      </p:cxnSp>
+      <p:cxnSp>
+        <p:nvCxnSpPr>
+          <p:cNvPr id="17" name="Connector 16"/>
+          <p:cNvCxnSpPr/>
+          <p:nvPr/>
+        </p:nvCxnSpPr>
+        <p:spPr>
+          <a:xfrm>
+            <a:off x="4718304" y="4633722"/>
+            <a:ext cx="2755087" cy="0"/>
+          </a:xfrm>
+          <a:prstGeom prst="line">
+            <a:avLst/>
+          </a:prstGeom>
+          <a:ln w="45720">
+            <a:solidFill>
+              <a:srgbClr val="F7F5EF"/>
+            </a:solidFill>
+          </a:ln>
+          <a:effectLst/>
+        </p:spPr>
+        <p:style>
+          <a:lnRef idx="2">
+            <a:schemeClr val="accent1"/>
+          </a:lnRef>
+          <a:fillRef idx="0">
+            <a:schemeClr val="accent1"/>
+          </a:fillRef>
+          <a:effectRef idx="1">
+            <a:schemeClr val="accent1"/>
+          </a:effectRef>
+          <a:fontRef idx="minor">
+            <a:schemeClr val="tx1"/>
+          </a:fontRef>
+        </p:style>
+      </p:cxnSp>
+      <p:cxnSp>
+        <p:nvCxnSpPr>
+          <p:cNvPr id="18" name="Connector 17"/>
+          <p:cNvCxnSpPr/>
+          <p:nvPr/>
+        </p:nvCxnSpPr>
+        <p:spPr>
+          <a:xfrm>
+            <a:off x="4718304" y="4633722"/>
+            <a:ext cx="2755087" cy="0"/>
+          </a:xfrm>
+          <a:prstGeom prst="line">
+            <a:avLst/>
+          </a:prstGeom>
+          <a:ln w="12700">
+            <a:solidFill>
+              <a:srgbClr val="666E70"/>
+            </a:solidFill>
+            <a:tailEnd type="triangle" w="med" len="med"/>
+          </a:ln>
+          <a:effectLst/>
+        </p:spPr>
+        <p:style>
+          <a:lnRef idx="2">
+            <a:schemeClr val="accent1"/>
+          </a:lnRef>
+          <a:fillRef idx="0">
+            <a:schemeClr val="accent1"/>
+          </a:fillRef>
+          <a:effectRef idx="1">
+            <a:schemeClr val="accent1"/>
+          </a:effectRef>
+          <a:fontRef idx="minor">
+            <a:schemeClr val="tx1"/>
+          </a:fontRef>
+        </p:style>
+      </p:cxnSp>
+      <p:sp>
+        <p:nvSpPr>
+          <p:cNvPr id="19" name="Rectangle 18"/>
           <p:cNvSpPr/>
           <p:nvPr/>
         </p:nvSpPr>
         <p:spPr>
           <a:xfrm>
-            <a:off x="4781397" y="2617470"/>
-            <a:ext cx="137160" cy="137160"/>
+            <a:off x="649224" y="2420874"/>
+            <a:ext cx="4069080" cy="530352"/>
+          </a:xfrm>
+          <a:prstGeom prst="rect">
+            <a:avLst/>
+          </a:prstGeom>
+          <a:solidFill>
+            <a:srgbClr val="FFFFFC"/>
+          </a:solidFill>
+          <a:ln w="9525">
+            <a:solidFill>
+              <a:srgbClr val="D1CFC8"/>
+            </a:solidFill>
+          </a:ln>
+          <a:effectLst/>
+        </p:spPr>
+        <p:style>
+          <a:lnRef idx="1">
+            <a:schemeClr val="accent1"/>
+          </a:lnRef>
+          <a:fillRef idx="3">
+            <a:schemeClr val="accent1"/>
+          </a:fillRef>
+          <a:effectRef idx="2">
+            <a:schemeClr val="accent1"/>
+          </a:effectRef>
+          <a:fontRef idx="minor">
+            <a:schemeClr val="lt1"/>
+          </a:fontRef>
+        </p:style>
+        <p:txBody>
+          <a:bodyPr rtlCol="0" anchor="ctr"/>
+          <a:lstStyle/>
+          <a:p>
+            <a:pPr algn="ctr"/>
+          </a:p>
+        </p:txBody>
+      </p:sp>
+      <p:sp>
+        <p:nvSpPr>
+          <p:cNvPr id="20" name="Oval 19"/>
+          <p:cNvSpPr/>
+          <p:nvPr/>
+        </p:nvSpPr>
+        <p:spPr>
+          <a:xfrm>
+            <a:off x="763524" y="2571750"/>
+            <a:ext cx="228600" cy="228600"/>
           </a:xfrm>
           <a:prstGeom prst="ellipse">
             <a:avLst/>
@@ -32840,20 +31108,148 @@
       </p:sp>
       <p:sp>
         <p:nvSpPr>
-          <p:cNvPr id="63" name="Oval 62"/>
+          <p:cNvPr id="21" name="TextBox 20"/>
+          <p:cNvSpPr txBox="1"/>
+          <p:nvPr/>
+        </p:nvSpPr>
+        <p:spPr>
+          <a:xfrm>
+            <a:off x="768096" y="2576322"/>
+            <a:ext cx="219456" cy="219456"/>
+          </a:xfrm>
+          <a:prstGeom prst="rect">
+            <a:avLst/>
+          </a:prstGeom>
+          <a:noFill/>
+        </p:spPr>
+        <p:txBody>
+          <a:bodyPr wrap="square" anchor="ctr" lIns="0" rIns="0" tIns="0" bIns="0">
+            <a:spAutoFit/>
+          </a:bodyPr>
+          <a:lstStyle/>
+          <a:p>
+            <a:pPr algn="ctr">
+              <a:lnSpc>
+                <a:spcPct val="130000"/>
+              </a:lnSpc>
+            </a:pPr>
+            <a:r>
+              <a:rPr sz="850" b="1" lang="ja-JP">
+                <a:solidFill>
+                  <a:srgbClr val="FFFFFC"/>
+                </a:solidFill>
+                <a:latin typeface="Yu Gothic"/>
+                <a:ea typeface="Yu Gothic"/>
+                <a:cs typeface="Yu Gothic"/>
+              </a:rPr>
+              <a:t>1</a:t>
+            </a:r>
+          </a:p>
+        </p:txBody>
+      </p:sp>
+      <p:sp>
+        <p:nvSpPr>
+          <p:cNvPr id="22" name="TextBox 21"/>
+          <p:cNvSpPr txBox="1"/>
+          <p:nvPr/>
+        </p:nvSpPr>
+        <p:spPr>
+          <a:xfrm>
+            <a:off x="1088136" y="2420874"/>
+            <a:ext cx="3465576" cy="530352"/>
+          </a:xfrm>
+          <a:prstGeom prst="rect">
+            <a:avLst/>
+          </a:prstGeom>
+          <a:noFill/>
+        </p:spPr>
+        <p:txBody>
+          <a:bodyPr wrap="square" anchor="ctr" lIns="0" rIns="0" tIns="0" bIns="0">
+            <a:spAutoFit/>
+          </a:bodyPr>
+          <a:lstStyle/>
+          <a:p>
+            <a:pPr algn="l">
+              <a:lnSpc>
+                <a:spcPct val="115000"/>
+              </a:lnSpc>
+            </a:pPr>
+            <a:r>
+              <a:rPr sz="1350" b="1" lang="ja-JP">
+                <a:solidFill>
+                  <a:srgbClr val="182C43"/>
+                </a:solidFill>
+                <a:latin typeface="Yu Gothic"/>
+                <a:ea typeface="Yu Gothic"/>
+                <a:cs typeface="Yu Gothic"/>
+              </a:rPr>
+              <a:t>手作業が多く処理時間が長い</a:t>
+            </a:r>
+          </a:p>
+        </p:txBody>
+      </p:sp>
+      <p:sp>
+        <p:nvSpPr>
+          <p:cNvPr id="23" name="Rectangle 22"/>
           <p:cNvSpPr/>
           <p:nvPr/>
         </p:nvSpPr>
         <p:spPr>
           <a:xfrm>
-            <a:off x="5227624" y="3284982"/>
-            <a:ext cx="100584" cy="100584"/>
+            <a:off x="649224" y="3070098"/>
+            <a:ext cx="4069080" cy="530352"/>
+          </a:xfrm>
+          <a:prstGeom prst="rect">
+            <a:avLst/>
+          </a:prstGeom>
+          <a:solidFill>
+            <a:srgbClr val="FFFFFC"/>
+          </a:solidFill>
+          <a:ln w="9525">
+            <a:solidFill>
+              <a:srgbClr val="D1CFC8"/>
+            </a:solidFill>
+          </a:ln>
+          <a:effectLst/>
+        </p:spPr>
+        <p:style>
+          <a:lnRef idx="1">
+            <a:schemeClr val="accent1"/>
+          </a:lnRef>
+          <a:fillRef idx="3">
+            <a:schemeClr val="accent1"/>
+          </a:fillRef>
+          <a:effectRef idx="2">
+            <a:schemeClr val="accent1"/>
+          </a:effectRef>
+          <a:fontRef idx="minor">
+            <a:schemeClr val="lt1"/>
+          </a:fontRef>
+        </p:style>
+        <p:txBody>
+          <a:bodyPr rtlCol="0" anchor="ctr"/>
+          <a:lstStyle/>
+          <a:p>
+            <a:pPr algn="ctr"/>
+          </a:p>
+        </p:txBody>
+      </p:sp>
+      <p:sp>
+        <p:nvSpPr>
+          <p:cNvPr id="24" name="Oval 23"/>
+          <p:cNvSpPr/>
+          <p:nvPr/>
+        </p:nvSpPr>
+        <p:spPr>
+          <a:xfrm>
+            <a:off x="763524" y="3220974"/>
+            <a:ext cx="228600" cy="228600"/>
           </a:xfrm>
           <a:prstGeom prst="ellipse">
             <a:avLst/>
           </a:prstGeom>
           <a:solidFill>
-            <a:srgbClr val="182C43"/>
+            <a:srgbClr val="0D7870"/>
           </a:solidFill>
           <a:ln>
             <a:noFill/>
@@ -32884,20 +31280,148 @@
       </p:sp>
       <p:sp>
         <p:nvSpPr>
-          <p:cNvPr id="64" name="Oval 63"/>
+          <p:cNvPr id="25" name="TextBox 24"/>
+          <p:cNvSpPr txBox="1"/>
+          <p:nvPr/>
+        </p:nvSpPr>
+        <p:spPr>
+          <a:xfrm>
+            <a:off x="768096" y="3225546"/>
+            <a:ext cx="219456" cy="219456"/>
+          </a:xfrm>
+          <a:prstGeom prst="rect">
+            <a:avLst/>
+          </a:prstGeom>
+          <a:noFill/>
+        </p:spPr>
+        <p:txBody>
+          <a:bodyPr wrap="square" anchor="ctr" lIns="0" rIns="0" tIns="0" bIns="0">
+            <a:spAutoFit/>
+          </a:bodyPr>
+          <a:lstStyle/>
+          <a:p>
+            <a:pPr algn="ctr">
+              <a:lnSpc>
+                <a:spcPct val="130000"/>
+              </a:lnSpc>
+            </a:pPr>
+            <a:r>
+              <a:rPr sz="850" b="1" lang="ja-JP">
+                <a:solidFill>
+                  <a:srgbClr val="FFFFFC"/>
+                </a:solidFill>
+                <a:latin typeface="Yu Gothic"/>
+                <a:ea typeface="Yu Gothic"/>
+                <a:cs typeface="Yu Gothic"/>
+              </a:rPr>
+              <a:t>2</a:t>
+            </a:r>
+          </a:p>
+        </p:txBody>
+      </p:sp>
+      <p:sp>
+        <p:nvSpPr>
+          <p:cNvPr id="26" name="TextBox 25"/>
+          <p:cNvSpPr txBox="1"/>
+          <p:nvPr/>
+        </p:nvSpPr>
+        <p:spPr>
+          <a:xfrm>
+            <a:off x="1088136" y="3070098"/>
+            <a:ext cx="3465576" cy="530352"/>
+          </a:xfrm>
+          <a:prstGeom prst="rect">
+            <a:avLst/>
+          </a:prstGeom>
+          <a:noFill/>
+        </p:spPr>
+        <p:txBody>
+          <a:bodyPr wrap="square" anchor="ctr" lIns="0" rIns="0" tIns="0" bIns="0">
+            <a:spAutoFit/>
+          </a:bodyPr>
+          <a:lstStyle/>
+          <a:p>
+            <a:pPr algn="l">
+              <a:lnSpc>
+                <a:spcPct val="115000"/>
+              </a:lnSpc>
+            </a:pPr>
+            <a:r>
+              <a:rPr sz="1350" b="1" lang="ja-JP">
+                <a:solidFill>
+                  <a:srgbClr val="182C43"/>
+                </a:solidFill>
+                <a:latin typeface="Yu Gothic"/>
+                <a:ea typeface="Yu Gothic"/>
+                <a:cs typeface="Yu Gothic"/>
+              </a:rPr>
+              <a:t>承認完了までの待ち時間が長い</a:t>
+            </a:r>
+          </a:p>
+        </p:txBody>
+      </p:sp>
+      <p:sp>
+        <p:nvSpPr>
+          <p:cNvPr id="27" name="Rectangle 26"/>
           <p:cNvSpPr/>
           <p:nvPr/>
         </p:nvSpPr>
         <p:spPr>
           <a:xfrm>
-            <a:off x="6511442" y="3284982"/>
-            <a:ext cx="100584" cy="100584"/>
+            <a:off x="649224" y="3719322"/>
+            <a:ext cx="4069080" cy="530352"/>
+          </a:xfrm>
+          <a:prstGeom prst="rect">
+            <a:avLst/>
+          </a:prstGeom>
+          <a:solidFill>
+            <a:srgbClr val="FFFFFC"/>
+          </a:solidFill>
+          <a:ln w="9525">
+            <a:solidFill>
+              <a:srgbClr val="D1CFC8"/>
+            </a:solidFill>
+          </a:ln>
+          <a:effectLst/>
+        </p:spPr>
+        <p:style>
+          <a:lnRef idx="1">
+            <a:schemeClr val="accent1"/>
+          </a:lnRef>
+          <a:fillRef idx="3">
+            <a:schemeClr val="accent1"/>
+          </a:fillRef>
+          <a:effectRef idx="2">
+            <a:schemeClr val="accent1"/>
+          </a:effectRef>
+          <a:fontRef idx="minor">
+            <a:schemeClr val="lt1"/>
+          </a:fontRef>
+        </p:style>
+        <p:txBody>
+          <a:bodyPr rtlCol="0" anchor="ctr"/>
+          <a:lstStyle/>
+          <a:p>
+            <a:pPr algn="ctr"/>
+          </a:p>
+        </p:txBody>
+      </p:sp>
+      <p:sp>
+        <p:nvSpPr>
+          <p:cNvPr id="28" name="Oval 27"/>
+          <p:cNvSpPr/>
+          <p:nvPr/>
+        </p:nvSpPr>
+        <p:spPr>
+          <a:xfrm>
+            <a:off x="763524" y="3870198"/>
+            <a:ext cx="228600" cy="228600"/>
           </a:xfrm>
           <a:prstGeom prst="ellipse">
             <a:avLst/>
           </a:prstGeom>
           <a:solidFill>
-            <a:srgbClr val="182C43"/>
+            <a:srgbClr val="0D7870"/>
           </a:solidFill>
           <a:ln>
             <a:noFill/>
@@ -32928,20 +31452,148 @@
       </p:sp>
       <p:sp>
         <p:nvSpPr>
-          <p:cNvPr id="65" name="Oval 64"/>
+          <p:cNvPr id="29" name="TextBox 28"/>
+          <p:cNvSpPr txBox="1"/>
+          <p:nvPr/>
+        </p:nvSpPr>
+        <p:spPr>
+          <a:xfrm>
+            <a:off x="768096" y="3874770"/>
+            <a:ext cx="219456" cy="219456"/>
+          </a:xfrm>
+          <a:prstGeom prst="rect">
+            <a:avLst/>
+          </a:prstGeom>
+          <a:noFill/>
+        </p:spPr>
+        <p:txBody>
+          <a:bodyPr wrap="square" anchor="ctr" lIns="0" rIns="0" tIns="0" bIns="0">
+            <a:spAutoFit/>
+          </a:bodyPr>
+          <a:lstStyle/>
+          <a:p>
+            <a:pPr algn="ctr">
+              <a:lnSpc>
+                <a:spcPct val="130000"/>
+              </a:lnSpc>
+            </a:pPr>
+            <a:r>
+              <a:rPr sz="850" b="1" lang="ja-JP">
+                <a:solidFill>
+                  <a:srgbClr val="FFFFFC"/>
+                </a:solidFill>
+                <a:latin typeface="Yu Gothic"/>
+                <a:ea typeface="Yu Gothic"/>
+                <a:cs typeface="Yu Gothic"/>
+              </a:rPr>
+              <a:t>3</a:t>
+            </a:r>
+          </a:p>
+        </p:txBody>
+      </p:sp>
+      <p:sp>
+        <p:nvSpPr>
+          <p:cNvPr id="30" name="TextBox 29"/>
+          <p:cNvSpPr txBox="1"/>
+          <p:nvPr/>
+        </p:nvSpPr>
+        <p:spPr>
+          <a:xfrm>
+            <a:off x="1088136" y="3719322"/>
+            <a:ext cx="3465576" cy="530352"/>
+          </a:xfrm>
+          <a:prstGeom prst="rect">
+            <a:avLst/>
+          </a:prstGeom>
+          <a:noFill/>
+        </p:spPr>
+        <p:txBody>
+          <a:bodyPr wrap="square" anchor="ctr" lIns="0" rIns="0" tIns="0" bIns="0">
+            <a:spAutoFit/>
+          </a:bodyPr>
+          <a:lstStyle/>
+          <a:p>
+            <a:pPr algn="l">
+              <a:lnSpc>
+                <a:spcPct val="115000"/>
+              </a:lnSpc>
+            </a:pPr>
+            <a:r>
+              <a:rPr sz="1350" b="1" lang="ja-JP">
+                <a:solidFill>
+                  <a:srgbClr val="182C43"/>
+                </a:solidFill>
+                <a:latin typeface="Yu Gothic"/>
+                <a:ea typeface="Yu Gothic"/>
+                <a:cs typeface="Yu Gothic"/>
+              </a:rPr>
+              <a:t>データが複数の管理先へ分散している</a:t>
+            </a:r>
+          </a:p>
+        </p:txBody>
+      </p:sp>
+      <p:sp>
+        <p:nvSpPr>
+          <p:cNvPr id="31" name="Rectangle 30"/>
           <p:cNvSpPr/>
           <p:nvPr/>
         </p:nvSpPr>
         <p:spPr>
           <a:xfrm>
-            <a:off x="5655564" y="3934206"/>
-            <a:ext cx="100584" cy="100584"/>
+            <a:off x="649224" y="4368546"/>
+            <a:ext cx="4069080" cy="530352"/>
+          </a:xfrm>
+          <a:prstGeom prst="rect">
+            <a:avLst/>
+          </a:prstGeom>
+          <a:solidFill>
+            <a:srgbClr val="FFFFFC"/>
+          </a:solidFill>
+          <a:ln w="9525">
+            <a:solidFill>
+              <a:srgbClr val="D1CFC8"/>
+            </a:solidFill>
+          </a:ln>
+          <a:effectLst/>
+        </p:spPr>
+        <p:style>
+          <a:lnRef idx="1">
+            <a:schemeClr val="accent1"/>
+          </a:lnRef>
+          <a:fillRef idx="3">
+            <a:schemeClr val="accent1"/>
+          </a:fillRef>
+          <a:effectRef idx="2">
+            <a:schemeClr val="accent1"/>
+          </a:effectRef>
+          <a:fontRef idx="minor">
+            <a:schemeClr val="lt1"/>
+          </a:fontRef>
+        </p:style>
+        <p:txBody>
+          <a:bodyPr rtlCol="0" anchor="ctr"/>
+          <a:lstStyle/>
+          <a:p>
+            <a:pPr algn="ctr"/>
+          </a:p>
+        </p:txBody>
+      </p:sp>
+      <p:sp>
+        <p:nvSpPr>
+          <p:cNvPr id="32" name="Oval 31"/>
+          <p:cNvSpPr/>
+          <p:nvPr/>
+        </p:nvSpPr>
+        <p:spPr>
+          <a:xfrm>
+            <a:off x="763524" y="4519422"/>
+            <a:ext cx="228600" cy="228600"/>
           </a:xfrm>
           <a:prstGeom prst="ellipse">
             <a:avLst/>
           </a:prstGeom>
           <a:solidFill>
-            <a:srgbClr val="182C43"/>
+            <a:srgbClr val="0D7870"/>
           </a:solidFill>
           <a:ln>
             <a:noFill/>
@@ -32972,20 +31624,148 @@
       </p:sp>
       <p:sp>
         <p:nvSpPr>
-          <p:cNvPr id="66" name="Oval 65"/>
+          <p:cNvPr id="33" name="TextBox 32"/>
+          <p:cNvSpPr txBox="1"/>
+          <p:nvPr/>
+        </p:nvSpPr>
+        <p:spPr>
+          <a:xfrm>
+            <a:off x="768096" y="4523994"/>
+            <a:ext cx="219456" cy="219456"/>
+          </a:xfrm>
+          <a:prstGeom prst="rect">
+            <a:avLst/>
+          </a:prstGeom>
+          <a:noFill/>
+        </p:spPr>
+        <p:txBody>
+          <a:bodyPr wrap="square" anchor="ctr" lIns="0" rIns="0" tIns="0" bIns="0">
+            <a:spAutoFit/>
+          </a:bodyPr>
+          <a:lstStyle/>
+          <a:p>
+            <a:pPr algn="ctr">
+              <a:lnSpc>
+                <a:spcPct val="130000"/>
+              </a:lnSpc>
+            </a:pPr>
+            <a:r>
+              <a:rPr sz="850" b="1" lang="ja-JP">
+                <a:solidFill>
+                  <a:srgbClr val="FFFFFC"/>
+                </a:solidFill>
+                <a:latin typeface="Yu Gothic"/>
+                <a:ea typeface="Yu Gothic"/>
+                <a:cs typeface="Yu Gothic"/>
+              </a:rPr>
+              <a:t>4</a:t>
+            </a:r>
+          </a:p>
+        </p:txBody>
+      </p:sp>
+      <p:sp>
+        <p:nvSpPr>
+          <p:cNvPr id="34" name="TextBox 33"/>
+          <p:cNvSpPr txBox="1"/>
+          <p:nvPr/>
+        </p:nvSpPr>
+        <p:spPr>
+          <a:xfrm>
+            <a:off x="1088136" y="4368546"/>
+            <a:ext cx="3465576" cy="530352"/>
+          </a:xfrm>
+          <a:prstGeom prst="rect">
+            <a:avLst/>
+          </a:prstGeom>
+          <a:noFill/>
+        </p:spPr>
+        <p:txBody>
+          <a:bodyPr wrap="square" anchor="ctr" lIns="0" rIns="0" tIns="0" bIns="0">
+            <a:spAutoFit/>
+          </a:bodyPr>
+          <a:lstStyle/>
+          <a:p>
+            <a:pPr algn="l">
+              <a:lnSpc>
+                <a:spcPct val="115000"/>
+              </a:lnSpc>
+            </a:pPr>
+            <a:r>
+              <a:rPr sz="1350" b="1" lang="ja-JP">
+                <a:solidFill>
+                  <a:srgbClr val="182C43"/>
+                </a:solidFill>
+                <a:latin typeface="Yu Gothic"/>
+                <a:ea typeface="Yu Gothic"/>
+                <a:cs typeface="Yu Gothic"/>
+              </a:rPr>
+              <a:t>進捗と課題の把握に時間がかかる</a:t>
+            </a:r>
+          </a:p>
+        </p:txBody>
+      </p:sp>
+      <p:sp>
+        <p:nvSpPr>
+          <p:cNvPr id="35" name="Rectangle 34"/>
           <p:cNvSpPr/>
           <p:nvPr/>
         </p:nvSpPr>
         <p:spPr>
           <a:xfrm>
-            <a:off x="6083503" y="4583430"/>
-            <a:ext cx="100584" cy="100584"/>
+            <a:off x="649224" y="5017770"/>
+            <a:ext cx="4069080" cy="530352"/>
+          </a:xfrm>
+          <a:prstGeom prst="rect">
+            <a:avLst/>
+          </a:prstGeom>
+          <a:solidFill>
+            <a:srgbClr val="FFFFFC"/>
+          </a:solidFill>
+          <a:ln w="9525">
+            <a:solidFill>
+              <a:srgbClr val="D1CFC8"/>
+            </a:solidFill>
+          </a:ln>
+          <a:effectLst/>
+        </p:spPr>
+        <p:style>
+          <a:lnRef idx="1">
+            <a:schemeClr val="accent1"/>
+          </a:lnRef>
+          <a:fillRef idx="3">
+            <a:schemeClr val="accent1"/>
+          </a:fillRef>
+          <a:effectRef idx="2">
+            <a:schemeClr val="accent1"/>
+          </a:effectRef>
+          <a:fontRef idx="minor">
+            <a:schemeClr val="lt1"/>
+          </a:fontRef>
+        </p:style>
+        <p:txBody>
+          <a:bodyPr rtlCol="0" anchor="ctr"/>
+          <a:lstStyle/>
+          <a:p>
+            <a:pPr algn="ctr"/>
+          </a:p>
+        </p:txBody>
+      </p:sp>
+      <p:sp>
+        <p:nvSpPr>
+          <p:cNvPr id="36" name="Oval 35"/>
+          <p:cNvSpPr/>
+          <p:nvPr/>
+        </p:nvSpPr>
+        <p:spPr>
+          <a:xfrm>
+            <a:off x="763524" y="5168646"/>
+            <a:ext cx="228600" cy="228600"/>
           </a:xfrm>
           <a:prstGeom prst="ellipse">
             <a:avLst/>
           </a:prstGeom>
           <a:solidFill>
-            <a:srgbClr val="182C43"/>
+            <a:srgbClr val="0D7870"/>
           </a:solidFill>
           <a:ln>
             <a:noFill/>
@@ -33016,20 +31796,148 @@
       </p:sp>
       <p:sp>
         <p:nvSpPr>
-          <p:cNvPr id="67" name="Oval 66"/>
+          <p:cNvPr id="37" name="TextBox 36"/>
+          <p:cNvSpPr txBox="1"/>
+          <p:nvPr/>
+        </p:nvSpPr>
+        <p:spPr>
+          <a:xfrm>
+            <a:off x="768096" y="5173218"/>
+            <a:ext cx="219456" cy="219456"/>
+          </a:xfrm>
+          <a:prstGeom prst="rect">
+            <a:avLst/>
+          </a:prstGeom>
+          <a:noFill/>
+        </p:spPr>
+        <p:txBody>
+          <a:bodyPr wrap="square" anchor="ctr" lIns="0" rIns="0" tIns="0" bIns="0">
+            <a:spAutoFit/>
+          </a:bodyPr>
+          <a:lstStyle/>
+          <a:p>
+            <a:pPr algn="ctr">
+              <a:lnSpc>
+                <a:spcPct val="130000"/>
+              </a:lnSpc>
+            </a:pPr>
+            <a:r>
+              <a:rPr sz="850" b="1" lang="ja-JP">
+                <a:solidFill>
+                  <a:srgbClr val="FFFFFC"/>
+                </a:solidFill>
+                <a:latin typeface="Yu Gothic"/>
+                <a:ea typeface="Yu Gothic"/>
+                <a:cs typeface="Yu Gothic"/>
+              </a:rPr>
+              <a:t>5</a:t>
+            </a:r>
+          </a:p>
+        </p:txBody>
+      </p:sp>
+      <p:sp>
+        <p:nvSpPr>
+          <p:cNvPr id="38" name="TextBox 37"/>
+          <p:cNvSpPr txBox="1"/>
+          <p:nvPr/>
+        </p:nvSpPr>
+        <p:spPr>
+          <a:xfrm>
+            <a:off x="1088136" y="5017770"/>
+            <a:ext cx="3465576" cy="530352"/>
+          </a:xfrm>
+          <a:prstGeom prst="rect">
+            <a:avLst/>
+          </a:prstGeom>
+          <a:noFill/>
+        </p:spPr>
+        <p:txBody>
+          <a:bodyPr wrap="square" anchor="ctr" lIns="0" rIns="0" tIns="0" bIns="0">
+            <a:spAutoFit/>
+          </a:bodyPr>
+          <a:lstStyle/>
+          <a:p>
+            <a:pPr algn="l">
+              <a:lnSpc>
+                <a:spcPct val="115000"/>
+              </a:lnSpc>
+            </a:pPr>
+            <a:r>
+              <a:rPr sz="1350" b="1" lang="ja-JP">
+                <a:solidFill>
+                  <a:srgbClr val="182C43"/>
+                </a:solidFill>
+                <a:latin typeface="Yu Gothic"/>
+                <a:ea typeface="Yu Gothic"/>
+                <a:cs typeface="Yu Gothic"/>
+              </a:rPr>
+              <a:t>成果物の品質にばらつきがある</a:t>
+            </a:r>
+          </a:p>
+        </p:txBody>
+      </p:sp>
+      <p:sp>
+        <p:nvSpPr>
+          <p:cNvPr id="39" name="Rectangle 38"/>
           <p:cNvSpPr/>
           <p:nvPr/>
         </p:nvSpPr>
         <p:spPr>
           <a:xfrm>
-            <a:off x="6511442" y="5232654"/>
-            <a:ext cx="100584" cy="100584"/>
+            <a:off x="7473391" y="2420874"/>
+            <a:ext cx="4069080" cy="530352"/>
+          </a:xfrm>
+          <a:prstGeom prst="rect">
+            <a:avLst/>
+          </a:prstGeom>
+          <a:solidFill>
+            <a:srgbClr val="FFFFFC"/>
+          </a:solidFill>
+          <a:ln w="9525">
+            <a:solidFill>
+              <a:srgbClr val="D1CFC8"/>
+            </a:solidFill>
+          </a:ln>
+          <a:effectLst/>
+        </p:spPr>
+        <p:style>
+          <a:lnRef idx="1">
+            <a:schemeClr val="accent1"/>
+          </a:lnRef>
+          <a:fillRef idx="3">
+            <a:schemeClr val="accent1"/>
+          </a:fillRef>
+          <a:effectRef idx="2">
+            <a:schemeClr val="accent1"/>
+          </a:effectRef>
+          <a:fontRef idx="minor">
+            <a:schemeClr val="lt1"/>
+          </a:fontRef>
+        </p:style>
+        <p:txBody>
+          <a:bodyPr rtlCol="0" anchor="ctr"/>
+          <a:lstStyle/>
+          <a:p>
+            <a:pPr algn="ctr"/>
+          </a:p>
+        </p:txBody>
+      </p:sp>
+      <p:sp>
+        <p:nvSpPr>
+          <p:cNvPr id="40" name="Oval 39"/>
+          <p:cNvSpPr/>
+          <p:nvPr/>
+        </p:nvSpPr>
+        <p:spPr>
+          <a:xfrm>
+            <a:off x="11199571" y="2571750"/>
+            <a:ext cx="228600" cy="228600"/>
           </a:xfrm>
           <a:prstGeom prst="ellipse">
             <a:avLst/>
           </a:prstGeom>
           <a:solidFill>
-            <a:srgbClr val="182C43"/>
+            <a:srgbClr val="0D7870"/>
           </a:solidFill>
           <a:ln>
             <a:noFill/>
@@ -33060,7 +31968,1217 @@
       </p:sp>
       <p:sp>
         <p:nvSpPr>
-          <p:cNvPr id="68" name="Rectangle 67"/>
+          <p:cNvPr id="41" name="TextBox 40"/>
+          <p:cNvSpPr txBox="1"/>
+          <p:nvPr/>
+        </p:nvSpPr>
+        <p:spPr>
+          <a:xfrm>
+            <a:off x="11204143" y="2576322"/>
+            <a:ext cx="219456" cy="219456"/>
+          </a:xfrm>
+          <a:prstGeom prst="rect">
+            <a:avLst/>
+          </a:prstGeom>
+          <a:noFill/>
+        </p:spPr>
+        <p:txBody>
+          <a:bodyPr wrap="square" anchor="ctr" lIns="0" rIns="0" tIns="0" bIns="0">
+            <a:spAutoFit/>
+          </a:bodyPr>
+          <a:lstStyle/>
+          <a:p>
+            <a:pPr algn="ctr">
+              <a:lnSpc>
+                <a:spcPct val="130000"/>
+              </a:lnSpc>
+            </a:pPr>
+            <a:r>
+              <a:rPr sz="850" b="1" lang="ja-JP">
+                <a:solidFill>
+                  <a:srgbClr val="FFFFFC"/>
+                </a:solidFill>
+                <a:latin typeface="Yu Gothic"/>
+                <a:ea typeface="Yu Gothic"/>
+                <a:cs typeface="Yu Gothic"/>
+              </a:rPr>
+              <a:t>1</a:t>
+            </a:r>
+          </a:p>
+        </p:txBody>
+      </p:sp>
+      <p:sp>
+        <p:nvSpPr>
+          <p:cNvPr id="42" name="TextBox 41"/>
+          <p:cNvSpPr txBox="1"/>
+          <p:nvPr/>
+        </p:nvSpPr>
+        <p:spPr>
+          <a:xfrm>
+            <a:off x="7637983" y="2420874"/>
+            <a:ext cx="3465576" cy="530352"/>
+          </a:xfrm>
+          <a:prstGeom prst="rect">
+            <a:avLst/>
+          </a:prstGeom>
+          <a:noFill/>
+        </p:spPr>
+        <p:txBody>
+          <a:bodyPr wrap="square" anchor="ctr" lIns="0" rIns="0" tIns="0" bIns="0">
+            <a:spAutoFit/>
+          </a:bodyPr>
+          <a:lstStyle/>
+          <a:p>
+            <a:pPr algn="l">
+              <a:lnSpc>
+                <a:spcPct val="115000"/>
+              </a:lnSpc>
+            </a:pPr>
+            <a:r>
+              <a:rPr sz="1350" b="1" lang="ja-JP">
+                <a:solidFill>
+                  <a:srgbClr val="182C43"/>
+                </a:solidFill>
+                <a:latin typeface="Yu Gothic"/>
+                <a:ea typeface="Yu Gothic"/>
+                <a:cs typeface="Yu Gothic"/>
+              </a:rPr>
+              <a:t>定型作業の標準化と自動化</a:t>
+            </a:r>
+          </a:p>
+        </p:txBody>
+      </p:sp>
+      <p:sp>
+        <p:nvSpPr>
+          <p:cNvPr id="43" name="Rectangle 42"/>
+          <p:cNvSpPr/>
+          <p:nvPr/>
+        </p:nvSpPr>
+        <p:spPr>
+          <a:xfrm>
+            <a:off x="7473391" y="3070098"/>
+            <a:ext cx="4069080" cy="530352"/>
+          </a:xfrm>
+          <a:prstGeom prst="rect">
+            <a:avLst/>
+          </a:prstGeom>
+          <a:solidFill>
+            <a:srgbClr val="FFFFFC"/>
+          </a:solidFill>
+          <a:ln w="9525">
+            <a:solidFill>
+              <a:srgbClr val="D1CFC8"/>
+            </a:solidFill>
+          </a:ln>
+          <a:effectLst/>
+        </p:spPr>
+        <p:style>
+          <a:lnRef idx="1">
+            <a:schemeClr val="accent1"/>
+          </a:lnRef>
+          <a:fillRef idx="3">
+            <a:schemeClr val="accent1"/>
+          </a:fillRef>
+          <a:effectRef idx="2">
+            <a:schemeClr val="accent1"/>
+          </a:effectRef>
+          <a:fontRef idx="minor">
+            <a:schemeClr val="lt1"/>
+          </a:fontRef>
+        </p:style>
+        <p:txBody>
+          <a:bodyPr rtlCol="0" anchor="ctr"/>
+          <a:lstStyle/>
+          <a:p>
+            <a:pPr algn="ctr"/>
+          </a:p>
+        </p:txBody>
+      </p:sp>
+      <p:sp>
+        <p:nvSpPr>
+          <p:cNvPr id="44" name="Oval 43"/>
+          <p:cNvSpPr/>
+          <p:nvPr/>
+        </p:nvSpPr>
+        <p:spPr>
+          <a:xfrm>
+            <a:off x="11199571" y="3220974"/>
+            <a:ext cx="228600" cy="228600"/>
+          </a:xfrm>
+          <a:prstGeom prst="ellipse">
+            <a:avLst/>
+          </a:prstGeom>
+          <a:solidFill>
+            <a:srgbClr val="0D7870"/>
+          </a:solidFill>
+          <a:ln>
+            <a:noFill/>
+          </a:ln>
+          <a:effectLst/>
+        </p:spPr>
+        <p:style>
+          <a:lnRef idx="1">
+            <a:schemeClr val="accent1"/>
+          </a:lnRef>
+          <a:fillRef idx="3">
+            <a:schemeClr val="accent1"/>
+          </a:fillRef>
+          <a:effectRef idx="2">
+            <a:schemeClr val="accent1"/>
+          </a:effectRef>
+          <a:fontRef idx="minor">
+            <a:schemeClr val="lt1"/>
+          </a:fontRef>
+        </p:style>
+        <p:txBody>
+          <a:bodyPr rtlCol="0" anchor="ctr"/>
+          <a:lstStyle/>
+          <a:p>
+            <a:pPr algn="ctr"/>
+          </a:p>
+        </p:txBody>
+      </p:sp>
+      <p:sp>
+        <p:nvSpPr>
+          <p:cNvPr id="45" name="TextBox 44"/>
+          <p:cNvSpPr txBox="1"/>
+          <p:nvPr/>
+        </p:nvSpPr>
+        <p:spPr>
+          <a:xfrm>
+            <a:off x="11204143" y="3225546"/>
+            <a:ext cx="219456" cy="219456"/>
+          </a:xfrm>
+          <a:prstGeom prst="rect">
+            <a:avLst/>
+          </a:prstGeom>
+          <a:noFill/>
+        </p:spPr>
+        <p:txBody>
+          <a:bodyPr wrap="square" anchor="ctr" lIns="0" rIns="0" tIns="0" bIns="0">
+            <a:spAutoFit/>
+          </a:bodyPr>
+          <a:lstStyle/>
+          <a:p>
+            <a:pPr algn="ctr">
+              <a:lnSpc>
+                <a:spcPct val="130000"/>
+              </a:lnSpc>
+            </a:pPr>
+            <a:r>
+              <a:rPr sz="850" b="1" lang="ja-JP">
+                <a:solidFill>
+                  <a:srgbClr val="FFFFFC"/>
+                </a:solidFill>
+                <a:latin typeface="Yu Gothic"/>
+                <a:ea typeface="Yu Gothic"/>
+                <a:cs typeface="Yu Gothic"/>
+              </a:rPr>
+              <a:t>2</a:t>
+            </a:r>
+          </a:p>
+        </p:txBody>
+      </p:sp>
+      <p:sp>
+        <p:nvSpPr>
+          <p:cNvPr id="46" name="TextBox 45"/>
+          <p:cNvSpPr txBox="1"/>
+          <p:nvPr/>
+        </p:nvSpPr>
+        <p:spPr>
+          <a:xfrm>
+            <a:off x="7637983" y="3070098"/>
+            <a:ext cx="3465576" cy="530352"/>
+          </a:xfrm>
+          <a:prstGeom prst="rect">
+            <a:avLst/>
+          </a:prstGeom>
+          <a:noFill/>
+        </p:spPr>
+        <p:txBody>
+          <a:bodyPr wrap="square" anchor="ctr" lIns="0" rIns="0" tIns="0" bIns="0">
+            <a:spAutoFit/>
+          </a:bodyPr>
+          <a:lstStyle/>
+          <a:p>
+            <a:pPr algn="l">
+              <a:lnSpc>
+                <a:spcPct val="115000"/>
+              </a:lnSpc>
+            </a:pPr>
+            <a:r>
+              <a:rPr sz="1350" b="1" lang="ja-JP">
+                <a:solidFill>
+                  <a:srgbClr val="182C43"/>
+                </a:solidFill>
+                <a:latin typeface="Yu Gothic"/>
+                <a:ea typeface="Yu Gothic"/>
+                <a:cs typeface="Yu Gothic"/>
+              </a:rPr>
+              <a:t>承認条件と判断権限の見直し</a:t>
+            </a:r>
+          </a:p>
+        </p:txBody>
+      </p:sp>
+      <p:sp>
+        <p:nvSpPr>
+          <p:cNvPr id="47" name="Rectangle 46"/>
+          <p:cNvSpPr/>
+          <p:nvPr/>
+        </p:nvSpPr>
+        <p:spPr>
+          <a:xfrm>
+            <a:off x="7473391" y="3719322"/>
+            <a:ext cx="4069080" cy="530352"/>
+          </a:xfrm>
+          <a:prstGeom prst="rect">
+            <a:avLst/>
+          </a:prstGeom>
+          <a:solidFill>
+            <a:srgbClr val="FFFFFC"/>
+          </a:solidFill>
+          <a:ln w="9525">
+            <a:solidFill>
+              <a:srgbClr val="D1CFC8"/>
+            </a:solidFill>
+          </a:ln>
+          <a:effectLst/>
+        </p:spPr>
+        <p:style>
+          <a:lnRef idx="1">
+            <a:schemeClr val="accent1"/>
+          </a:lnRef>
+          <a:fillRef idx="3">
+            <a:schemeClr val="accent1"/>
+          </a:fillRef>
+          <a:effectRef idx="2">
+            <a:schemeClr val="accent1"/>
+          </a:effectRef>
+          <a:fontRef idx="minor">
+            <a:schemeClr val="lt1"/>
+          </a:fontRef>
+        </p:style>
+        <p:txBody>
+          <a:bodyPr rtlCol="0" anchor="ctr"/>
+          <a:lstStyle/>
+          <a:p>
+            <a:pPr algn="ctr"/>
+          </a:p>
+        </p:txBody>
+      </p:sp>
+      <p:sp>
+        <p:nvSpPr>
+          <p:cNvPr id="48" name="Oval 47"/>
+          <p:cNvSpPr/>
+          <p:nvPr/>
+        </p:nvSpPr>
+        <p:spPr>
+          <a:xfrm>
+            <a:off x="11199571" y="3870198"/>
+            <a:ext cx="228600" cy="228600"/>
+          </a:xfrm>
+          <a:prstGeom prst="ellipse">
+            <a:avLst/>
+          </a:prstGeom>
+          <a:solidFill>
+            <a:srgbClr val="0D7870"/>
+          </a:solidFill>
+          <a:ln>
+            <a:noFill/>
+          </a:ln>
+          <a:effectLst/>
+        </p:spPr>
+        <p:style>
+          <a:lnRef idx="1">
+            <a:schemeClr val="accent1"/>
+          </a:lnRef>
+          <a:fillRef idx="3">
+            <a:schemeClr val="accent1"/>
+          </a:fillRef>
+          <a:effectRef idx="2">
+            <a:schemeClr val="accent1"/>
+          </a:effectRef>
+          <a:fontRef idx="minor">
+            <a:schemeClr val="lt1"/>
+          </a:fontRef>
+        </p:style>
+        <p:txBody>
+          <a:bodyPr rtlCol="0" anchor="ctr"/>
+          <a:lstStyle/>
+          <a:p>
+            <a:pPr algn="ctr"/>
+          </a:p>
+        </p:txBody>
+      </p:sp>
+      <p:sp>
+        <p:nvSpPr>
+          <p:cNvPr id="49" name="TextBox 48"/>
+          <p:cNvSpPr txBox="1"/>
+          <p:nvPr/>
+        </p:nvSpPr>
+        <p:spPr>
+          <a:xfrm>
+            <a:off x="11204143" y="3874770"/>
+            <a:ext cx="219456" cy="219456"/>
+          </a:xfrm>
+          <a:prstGeom prst="rect">
+            <a:avLst/>
+          </a:prstGeom>
+          <a:noFill/>
+        </p:spPr>
+        <p:txBody>
+          <a:bodyPr wrap="square" anchor="ctr" lIns="0" rIns="0" tIns="0" bIns="0">
+            <a:spAutoFit/>
+          </a:bodyPr>
+          <a:lstStyle/>
+          <a:p>
+            <a:pPr algn="ctr">
+              <a:lnSpc>
+                <a:spcPct val="130000"/>
+              </a:lnSpc>
+            </a:pPr>
+            <a:r>
+              <a:rPr sz="850" b="1" lang="ja-JP">
+                <a:solidFill>
+                  <a:srgbClr val="FFFFFC"/>
+                </a:solidFill>
+                <a:latin typeface="Yu Gothic"/>
+                <a:ea typeface="Yu Gothic"/>
+                <a:cs typeface="Yu Gothic"/>
+              </a:rPr>
+              <a:t>3</a:t>
+            </a:r>
+          </a:p>
+        </p:txBody>
+      </p:sp>
+      <p:sp>
+        <p:nvSpPr>
+          <p:cNvPr id="50" name="TextBox 49"/>
+          <p:cNvSpPr txBox="1"/>
+          <p:nvPr/>
+        </p:nvSpPr>
+        <p:spPr>
+          <a:xfrm>
+            <a:off x="7637983" y="3719322"/>
+            <a:ext cx="3465576" cy="530352"/>
+          </a:xfrm>
+          <a:prstGeom prst="rect">
+            <a:avLst/>
+          </a:prstGeom>
+          <a:noFill/>
+        </p:spPr>
+        <p:txBody>
+          <a:bodyPr wrap="square" anchor="ctr" lIns="0" rIns="0" tIns="0" bIns="0">
+            <a:spAutoFit/>
+          </a:bodyPr>
+          <a:lstStyle/>
+          <a:p>
+            <a:pPr algn="l">
+              <a:lnSpc>
+                <a:spcPct val="115000"/>
+              </a:lnSpc>
+            </a:pPr>
+            <a:r>
+              <a:rPr sz="1350" b="1" lang="ja-JP">
+                <a:solidFill>
+                  <a:srgbClr val="182C43"/>
+                </a:solidFill>
+                <a:latin typeface="Yu Gothic"/>
+                <a:ea typeface="Yu Gothic"/>
+                <a:cs typeface="Yu Gothic"/>
+              </a:rPr>
+              <a:t>データ管理先の統合</a:t>
+            </a:r>
+          </a:p>
+        </p:txBody>
+      </p:sp>
+      <p:sp>
+        <p:nvSpPr>
+          <p:cNvPr id="51" name="Rectangle 50"/>
+          <p:cNvSpPr/>
+          <p:nvPr/>
+        </p:nvSpPr>
+        <p:spPr>
+          <a:xfrm>
+            <a:off x="7473391" y="4368546"/>
+            <a:ext cx="4069080" cy="530352"/>
+          </a:xfrm>
+          <a:prstGeom prst="rect">
+            <a:avLst/>
+          </a:prstGeom>
+          <a:solidFill>
+            <a:srgbClr val="FFFFFC"/>
+          </a:solidFill>
+          <a:ln w="9525">
+            <a:solidFill>
+              <a:srgbClr val="D1CFC8"/>
+            </a:solidFill>
+          </a:ln>
+          <a:effectLst/>
+        </p:spPr>
+        <p:style>
+          <a:lnRef idx="1">
+            <a:schemeClr val="accent1"/>
+          </a:lnRef>
+          <a:fillRef idx="3">
+            <a:schemeClr val="accent1"/>
+          </a:fillRef>
+          <a:effectRef idx="2">
+            <a:schemeClr val="accent1"/>
+          </a:effectRef>
+          <a:fontRef idx="minor">
+            <a:schemeClr val="lt1"/>
+          </a:fontRef>
+        </p:style>
+        <p:txBody>
+          <a:bodyPr rtlCol="0" anchor="ctr"/>
+          <a:lstStyle/>
+          <a:p>
+            <a:pPr algn="ctr"/>
+          </a:p>
+        </p:txBody>
+      </p:sp>
+      <p:sp>
+        <p:nvSpPr>
+          <p:cNvPr id="52" name="Oval 51"/>
+          <p:cNvSpPr/>
+          <p:nvPr/>
+        </p:nvSpPr>
+        <p:spPr>
+          <a:xfrm>
+            <a:off x="11199571" y="4519422"/>
+            <a:ext cx="228600" cy="228600"/>
+          </a:xfrm>
+          <a:prstGeom prst="ellipse">
+            <a:avLst/>
+          </a:prstGeom>
+          <a:solidFill>
+            <a:srgbClr val="0D7870"/>
+          </a:solidFill>
+          <a:ln>
+            <a:noFill/>
+          </a:ln>
+          <a:effectLst/>
+        </p:spPr>
+        <p:style>
+          <a:lnRef idx="1">
+            <a:schemeClr val="accent1"/>
+          </a:lnRef>
+          <a:fillRef idx="3">
+            <a:schemeClr val="accent1"/>
+          </a:fillRef>
+          <a:effectRef idx="2">
+            <a:schemeClr val="accent1"/>
+          </a:effectRef>
+          <a:fontRef idx="minor">
+            <a:schemeClr val="lt1"/>
+          </a:fontRef>
+        </p:style>
+        <p:txBody>
+          <a:bodyPr rtlCol="0" anchor="ctr"/>
+          <a:lstStyle/>
+          <a:p>
+            <a:pPr algn="ctr"/>
+          </a:p>
+        </p:txBody>
+      </p:sp>
+      <p:sp>
+        <p:nvSpPr>
+          <p:cNvPr id="53" name="TextBox 52"/>
+          <p:cNvSpPr txBox="1"/>
+          <p:nvPr/>
+        </p:nvSpPr>
+        <p:spPr>
+          <a:xfrm>
+            <a:off x="11204143" y="4523994"/>
+            <a:ext cx="219456" cy="219456"/>
+          </a:xfrm>
+          <a:prstGeom prst="rect">
+            <a:avLst/>
+          </a:prstGeom>
+          <a:noFill/>
+        </p:spPr>
+        <p:txBody>
+          <a:bodyPr wrap="square" anchor="ctr" lIns="0" rIns="0" tIns="0" bIns="0">
+            <a:spAutoFit/>
+          </a:bodyPr>
+          <a:lstStyle/>
+          <a:p>
+            <a:pPr algn="ctr">
+              <a:lnSpc>
+                <a:spcPct val="130000"/>
+              </a:lnSpc>
+            </a:pPr>
+            <a:r>
+              <a:rPr sz="850" b="1" lang="ja-JP">
+                <a:solidFill>
+                  <a:srgbClr val="FFFFFC"/>
+                </a:solidFill>
+                <a:latin typeface="Yu Gothic"/>
+                <a:ea typeface="Yu Gothic"/>
+                <a:cs typeface="Yu Gothic"/>
+              </a:rPr>
+              <a:t>4</a:t>
+            </a:r>
+          </a:p>
+        </p:txBody>
+      </p:sp>
+      <p:sp>
+        <p:nvSpPr>
+          <p:cNvPr id="54" name="TextBox 53"/>
+          <p:cNvSpPr txBox="1"/>
+          <p:nvPr/>
+        </p:nvSpPr>
+        <p:spPr>
+          <a:xfrm>
+            <a:off x="7637983" y="4368546"/>
+            <a:ext cx="3465576" cy="530352"/>
+          </a:xfrm>
+          <a:prstGeom prst="rect">
+            <a:avLst/>
+          </a:prstGeom>
+          <a:noFill/>
+        </p:spPr>
+        <p:txBody>
+          <a:bodyPr wrap="square" anchor="ctr" lIns="0" rIns="0" tIns="0" bIns="0">
+            <a:spAutoFit/>
+          </a:bodyPr>
+          <a:lstStyle/>
+          <a:p>
+            <a:pPr algn="l">
+              <a:lnSpc>
+                <a:spcPct val="115000"/>
+              </a:lnSpc>
+            </a:pPr>
+            <a:r>
+              <a:rPr sz="1350" b="1" lang="ja-JP">
+                <a:solidFill>
+                  <a:srgbClr val="182C43"/>
+                </a:solidFill>
+                <a:latin typeface="Yu Gothic"/>
+                <a:ea typeface="Yu Gothic"/>
+                <a:cs typeface="Yu Gothic"/>
+              </a:rPr>
+              <a:t>進捗・課題ダッシュボードの整備</a:t>
+            </a:r>
+          </a:p>
+        </p:txBody>
+      </p:sp>
+      <p:sp>
+        <p:nvSpPr>
+          <p:cNvPr id="55" name="Rectangle 54"/>
+          <p:cNvSpPr/>
+          <p:nvPr/>
+        </p:nvSpPr>
+        <p:spPr>
+          <a:xfrm>
+            <a:off x="7473391" y="5017770"/>
+            <a:ext cx="4069080" cy="530352"/>
+          </a:xfrm>
+          <a:prstGeom prst="rect">
+            <a:avLst/>
+          </a:prstGeom>
+          <a:solidFill>
+            <a:srgbClr val="FFFFFC"/>
+          </a:solidFill>
+          <a:ln w="9525">
+            <a:solidFill>
+              <a:srgbClr val="D1CFC8"/>
+            </a:solidFill>
+          </a:ln>
+          <a:effectLst/>
+        </p:spPr>
+        <p:style>
+          <a:lnRef idx="1">
+            <a:schemeClr val="accent1"/>
+          </a:lnRef>
+          <a:fillRef idx="3">
+            <a:schemeClr val="accent1"/>
+          </a:fillRef>
+          <a:effectRef idx="2">
+            <a:schemeClr val="accent1"/>
+          </a:effectRef>
+          <a:fontRef idx="minor">
+            <a:schemeClr val="lt1"/>
+          </a:fontRef>
+        </p:style>
+        <p:txBody>
+          <a:bodyPr rtlCol="0" anchor="ctr"/>
+          <a:lstStyle/>
+          <a:p>
+            <a:pPr algn="ctr"/>
+          </a:p>
+        </p:txBody>
+      </p:sp>
+      <p:sp>
+        <p:nvSpPr>
+          <p:cNvPr id="56" name="Oval 55"/>
+          <p:cNvSpPr/>
+          <p:nvPr/>
+        </p:nvSpPr>
+        <p:spPr>
+          <a:xfrm>
+            <a:off x="11199571" y="5168646"/>
+            <a:ext cx="228600" cy="228600"/>
+          </a:xfrm>
+          <a:prstGeom prst="ellipse">
+            <a:avLst/>
+          </a:prstGeom>
+          <a:solidFill>
+            <a:srgbClr val="0D7870"/>
+          </a:solidFill>
+          <a:ln>
+            <a:noFill/>
+          </a:ln>
+          <a:effectLst/>
+        </p:spPr>
+        <p:style>
+          <a:lnRef idx="1">
+            <a:schemeClr val="accent1"/>
+          </a:lnRef>
+          <a:fillRef idx="3">
+            <a:schemeClr val="accent1"/>
+          </a:fillRef>
+          <a:effectRef idx="2">
+            <a:schemeClr val="accent1"/>
+          </a:effectRef>
+          <a:fontRef idx="minor">
+            <a:schemeClr val="lt1"/>
+          </a:fontRef>
+        </p:style>
+        <p:txBody>
+          <a:bodyPr rtlCol="0" anchor="ctr"/>
+          <a:lstStyle/>
+          <a:p>
+            <a:pPr algn="ctr"/>
+          </a:p>
+        </p:txBody>
+      </p:sp>
+      <p:sp>
+        <p:nvSpPr>
+          <p:cNvPr id="57" name="TextBox 56"/>
+          <p:cNvSpPr txBox="1"/>
+          <p:nvPr/>
+        </p:nvSpPr>
+        <p:spPr>
+          <a:xfrm>
+            <a:off x="11204143" y="5173218"/>
+            <a:ext cx="219456" cy="219456"/>
+          </a:xfrm>
+          <a:prstGeom prst="rect">
+            <a:avLst/>
+          </a:prstGeom>
+          <a:noFill/>
+        </p:spPr>
+        <p:txBody>
+          <a:bodyPr wrap="square" anchor="ctr" lIns="0" rIns="0" tIns="0" bIns="0">
+            <a:spAutoFit/>
+          </a:bodyPr>
+          <a:lstStyle/>
+          <a:p>
+            <a:pPr algn="ctr">
+              <a:lnSpc>
+                <a:spcPct val="130000"/>
+              </a:lnSpc>
+            </a:pPr>
+            <a:r>
+              <a:rPr sz="850" b="1" lang="ja-JP">
+                <a:solidFill>
+                  <a:srgbClr val="FFFFFC"/>
+                </a:solidFill>
+                <a:latin typeface="Yu Gothic"/>
+                <a:ea typeface="Yu Gothic"/>
+                <a:cs typeface="Yu Gothic"/>
+              </a:rPr>
+              <a:t>5</a:t>
+            </a:r>
+          </a:p>
+        </p:txBody>
+      </p:sp>
+      <p:sp>
+        <p:nvSpPr>
+          <p:cNvPr id="58" name="TextBox 57"/>
+          <p:cNvSpPr txBox="1"/>
+          <p:nvPr/>
+        </p:nvSpPr>
+        <p:spPr>
+          <a:xfrm>
+            <a:off x="7637983" y="5017770"/>
+            <a:ext cx="3465576" cy="530352"/>
+          </a:xfrm>
+          <a:prstGeom prst="rect">
+            <a:avLst/>
+          </a:prstGeom>
+          <a:noFill/>
+        </p:spPr>
+        <p:txBody>
+          <a:bodyPr wrap="square" anchor="ctr" lIns="0" rIns="0" tIns="0" bIns="0">
+            <a:spAutoFit/>
+          </a:bodyPr>
+          <a:lstStyle/>
+          <a:p>
+            <a:pPr algn="l">
+              <a:lnSpc>
+                <a:spcPct val="115000"/>
+              </a:lnSpc>
+            </a:pPr>
+            <a:r>
+              <a:rPr sz="1350" b="1" lang="ja-JP">
+                <a:solidFill>
+                  <a:srgbClr val="182C43"/>
+                </a:solidFill>
+                <a:latin typeface="Yu Gothic"/>
+                <a:ea typeface="Yu Gothic"/>
+                <a:cs typeface="Yu Gothic"/>
+              </a:rPr>
+              <a:t>レビュー基準と品質ゲートの整備</a:t>
+            </a:r>
+          </a:p>
+        </p:txBody>
+      </p:sp>
+      <p:sp>
+        <p:nvSpPr>
+          <p:cNvPr id="59" name="Oval 58"/>
+          <p:cNvSpPr/>
+          <p:nvPr/>
+        </p:nvSpPr>
+        <p:spPr>
+          <a:xfrm>
+            <a:off x="4681728" y="2649474"/>
+            <a:ext cx="73152" cy="73152"/>
+          </a:xfrm>
+          <a:prstGeom prst="ellipse">
+            <a:avLst/>
+          </a:prstGeom>
+          <a:solidFill>
+            <a:srgbClr val="0D7870"/>
+          </a:solidFill>
+          <a:ln>
+            <a:noFill/>
+          </a:ln>
+          <a:effectLst/>
+        </p:spPr>
+        <p:style>
+          <a:lnRef idx="1">
+            <a:schemeClr val="accent1"/>
+          </a:lnRef>
+          <a:fillRef idx="3">
+            <a:schemeClr val="accent1"/>
+          </a:fillRef>
+          <a:effectRef idx="2">
+            <a:schemeClr val="accent1"/>
+          </a:effectRef>
+          <a:fontRef idx="minor">
+            <a:schemeClr val="lt1"/>
+          </a:fontRef>
+        </p:style>
+        <p:txBody>
+          <a:bodyPr rtlCol="0" anchor="ctr"/>
+          <a:lstStyle/>
+          <a:p>
+            <a:pPr algn="ctr"/>
+          </a:p>
+        </p:txBody>
+      </p:sp>
+      <p:sp>
+        <p:nvSpPr>
+          <p:cNvPr id="60" name="Oval 59"/>
+          <p:cNvSpPr/>
+          <p:nvPr/>
+        </p:nvSpPr>
+        <p:spPr>
+          <a:xfrm>
+            <a:off x="4681728" y="3298698"/>
+            <a:ext cx="73152" cy="73152"/>
+          </a:xfrm>
+          <a:prstGeom prst="ellipse">
+            <a:avLst/>
+          </a:prstGeom>
+          <a:solidFill>
+            <a:srgbClr val="666E70"/>
+          </a:solidFill>
+          <a:ln>
+            <a:noFill/>
+          </a:ln>
+          <a:effectLst/>
+        </p:spPr>
+        <p:style>
+          <a:lnRef idx="1">
+            <a:schemeClr val="accent1"/>
+          </a:lnRef>
+          <a:fillRef idx="3">
+            <a:schemeClr val="accent1"/>
+          </a:fillRef>
+          <a:effectRef idx="2">
+            <a:schemeClr val="accent1"/>
+          </a:effectRef>
+          <a:fontRef idx="minor">
+            <a:schemeClr val="lt1"/>
+          </a:fontRef>
+        </p:style>
+        <p:txBody>
+          <a:bodyPr rtlCol="0" anchor="ctr"/>
+          <a:lstStyle/>
+          <a:p>
+            <a:pPr algn="ctr"/>
+          </a:p>
+        </p:txBody>
+      </p:sp>
+      <p:sp>
+        <p:nvSpPr>
+          <p:cNvPr id="61" name="Oval 60"/>
+          <p:cNvSpPr/>
+          <p:nvPr/>
+        </p:nvSpPr>
+        <p:spPr>
+          <a:xfrm>
+            <a:off x="4681728" y="3947922"/>
+            <a:ext cx="73152" cy="73152"/>
+          </a:xfrm>
+          <a:prstGeom prst="ellipse">
+            <a:avLst/>
+          </a:prstGeom>
+          <a:solidFill>
+            <a:srgbClr val="666E70"/>
+          </a:solidFill>
+          <a:ln>
+            <a:noFill/>
+          </a:ln>
+          <a:effectLst/>
+        </p:spPr>
+        <p:style>
+          <a:lnRef idx="1">
+            <a:schemeClr val="accent1"/>
+          </a:lnRef>
+          <a:fillRef idx="3">
+            <a:schemeClr val="accent1"/>
+          </a:fillRef>
+          <a:effectRef idx="2">
+            <a:schemeClr val="accent1"/>
+          </a:effectRef>
+          <a:fontRef idx="minor">
+            <a:schemeClr val="lt1"/>
+          </a:fontRef>
+        </p:style>
+        <p:txBody>
+          <a:bodyPr rtlCol="0" anchor="ctr"/>
+          <a:lstStyle/>
+          <a:p>
+            <a:pPr algn="ctr"/>
+          </a:p>
+        </p:txBody>
+      </p:sp>
+      <p:sp>
+        <p:nvSpPr>
+          <p:cNvPr id="62" name="Oval 61"/>
+          <p:cNvSpPr/>
+          <p:nvPr/>
+        </p:nvSpPr>
+        <p:spPr>
+          <a:xfrm>
+            <a:off x="4681728" y="4597146"/>
+            <a:ext cx="73152" cy="73152"/>
+          </a:xfrm>
+          <a:prstGeom prst="ellipse">
+            <a:avLst/>
+          </a:prstGeom>
+          <a:solidFill>
+            <a:srgbClr val="666E70"/>
+          </a:solidFill>
+          <a:ln>
+            <a:noFill/>
+          </a:ln>
+          <a:effectLst/>
+        </p:spPr>
+        <p:style>
+          <a:lnRef idx="1">
+            <a:schemeClr val="accent1"/>
+          </a:lnRef>
+          <a:fillRef idx="3">
+            <a:schemeClr val="accent1"/>
+          </a:fillRef>
+          <a:effectRef idx="2">
+            <a:schemeClr val="accent1"/>
+          </a:effectRef>
+          <a:fontRef idx="minor">
+            <a:schemeClr val="lt1"/>
+          </a:fontRef>
+        </p:style>
+        <p:txBody>
+          <a:bodyPr rtlCol="0" anchor="ctr"/>
+          <a:lstStyle/>
+          <a:p>
+            <a:pPr algn="ctr"/>
+          </a:p>
+        </p:txBody>
+      </p:sp>
+      <p:sp>
+        <p:nvSpPr>
+          <p:cNvPr id="63" name="Oval 62"/>
+          <p:cNvSpPr/>
+          <p:nvPr/>
+        </p:nvSpPr>
+        <p:spPr>
+          <a:xfrm>
+            <a:off x="4681728" y="5246370"/>
+            <a:ext cx="73152" cy="73152"/>
+          </a:xfrm>
+          <a:prstGeom prst="ellipse">
+            <a:avLst/>
+          </a:prstGeom>
+          <a:solidFill>
+            <a:srgbClr val="666E70"/>
+          </a:solidFill>
+          <a:ln>
+            <a:noFill/>
+          </a:ln>
+          <a:effectLst/>
+        </p:spPr>
+        <p:style>
+          <a:lnRef idx="1">
+            <a:schemeClr val="accent1"/>
+          </a:lnRef>
+          <a:fillRef idx="3">
+            <a:schemeClr val="accent1"/>
+          </a:fillRef>
+          <a:effectRef idx="2">
+            <a:schemeClr val="accent1"/>
+          </a:effectRef>
+          <a:fontRef idx="minor">
+            <a:schemeClr val="lt1"/>
+          </a:fontRef>
+        </p:style>
+        <p:txBody>
+          <a:bodyPr rtlCol="0" anchor="ctr"/>
+          <a:lstStyle/>
+          <a:p>
+            <a:pPr algn="ctr"/>
+          </a:p>
+        </p:txBody>
+      </p:sp>
+      <p:sp>
+        <p:nvSpPr>
+          <p:cNvPr id="64" name="Oval 63"/>
+          <p:cNvSpPr/>
+          <p:nvPr/>
+        </p:nvSpPr>
+        <p:spPr>
+          <a:xfrm>
+            <a:off x="7436815" y="2649474"/>
+            <a:ext cx="73152" cy="73152"/>
+          </a:xfrm>
+          <a:prstGeom prst="ellipse">
+            <a:avLst/>
+          </a:prstGeom>
+          <a:solidFill>
+            <a:srgbClr val="0D7870"/>
+          </a:solidFill>
+          <a:ln>
+            <a:noFill/>
+          </a:ln>
+          <a:effectLst/>
+        </p:spPr>
+        <p:style>
+          <a:lnRef idx="1">
+            <a:schemeClr val="accent1"/>
+          </a:lnRef>
+          <a:fillRef idx="3">
+            <a:schemeClr val="accent1"/>
+          </a:fillRef>
+          <a:effectRef idx="2">
+            <a:schemeClr val="accent1"/>
+          </a:effectRef>
+          <a:fontRef idx="minor">
+            <a:schemeClr val="lt1"/>
+          </a:fontRef>
+        </p:style>
+        <p:txBody>
+          <a:bodyPr rtlCol="0" anchor="ctr"/>
+          <a:lstStyle/>
+          <a:p>
+            <a:pPr algn="ctr"/>
+          </a:p>
+        </p:txBody>
+      </p:sp>
+      <p:sp>
+        <p:nvSpPr>
+          <p:cNvPr id="65" name="Oval 64"/>
+          <p:cNvSpPr/>
+          <p:nvPr/>
+        </p:nvSpPr>
+        <p:spPr>
+          <a:xfrm>
+            <a:off x="7436815" y="3298698"/>
+            <a:ext cx="73152" cy="73152"/>
+          </a:xfrm>
+          <a:prstGeom prst="ellipse">
+            <a:avLst/>
+          </a:prstGeom>
+          <a:solidFill>
+            <a:srgbClr val="666E70"/>
+          </a:solidFill>
+          <a:ln>
+            <a:noFill/>
+          </a:ln>
+          <a:effectLst/>
+        </p:spPr>
+        <p:style>
+          <a:lnRef idx="1">
+            <a:schemeClr val="accent1"/>
+          </a:lnRef>
+          <a:fillRef idx="3">
+            <a:schemeClr val="accent1"/>
+          </a:fillRef>
+          <a:effectRef idx="2">
+            <a:schemeClr val="accent1"/>
+          </a:effectRef>
+          <a:fontRef idx="minor">
+            <a:schemeClr val="lt1"/>
+          </a:fontRef>
+        </p:style>
+        <p:txBody>
+          <a:bodyPr rtlCol="0" anchor="ctr"/>
+          <a:lstStyle/>
+          <a:p>
+            <a:pPr algn="ctr"/>
+          </a:p>
+        </p:txBody>
+      </p:sp>
+      <p:sp>
+        <p:nvSpPr>
+          <p:cNvPr id="66" name="Oval 65"/>
+          <p:cNvSpPr/>
+          <p:nvPr/>
+        </p:nvSpPr>
+        <p:spPr>
+          <a:xfrm>
+            <a:off x="7436815" y="3947922"/>
+            <a:ext cx="73152" cy="73152"/>
+          </a:xfrm>
+          <a:prstGeom prst="ellipse">
+            <a:avLst/>
+          </a:prstGeom>
+          <a:solidFill>
+            <a:srgbClr val="666E70"/>
+          </a:solidFill>
+          <a:ln>
+            <a:noFill/>
+          </a:ln>
+          <a:effectLst/>
+        </p:spPr>
+        <p:style>
+          <a:lnRef idx="1">
+            <a:schemeClr val="accent1"/>
+          </a:lnRef>
+          <a:fillRef idx="3">
+            <a:schemeClr val="accent1"/>
+          </a:fillRef>
+          <a:effectRef idx="2">
+            <a:schemeClr val="accent1"/>
+          </a:effectRef>
+          <a:fontRef idx="minor">
+            <a:schemeClr val="lt1"/>
+          </a:fontRef>
+        </p:style>
+        <p:txBody>
+          <a:bodyPr rtlCol="0" anchor="ctr"/>
+          <a:lstStyle/>
+          <a:p>
+            <a:pPr algn="ctr"/>
+          </a:p>
+        </p:txBody>
+      </p:sp>
+      <p:sp>
+        <p:nvSpPr>
+          <p:cNvPr id="67" name="Oval 66"/>
+          <p:cNvSpPr/>
+          <p:nvPr/>
+        </p:nvSpPr>
+        <p:spPr>
+          <a:xfrm>
+            <a:off x="7436815" y="4597146"/>
+            <a:ext cx="73152" cy="73152"/>
+          </a:xfrm>
+          <a:prstGeom prst="ellipse">
+            <a:avLst/>
+          </a:prstGeom>
+          <a:solidFill>
+            <a:srgbClr val="666E70"/>
+          </a:solidFill>
+          <a:ln>
+            <a:noFill/>
+          </a:ln>
+          <a:effectLst/>
+        </p:spPr>
+        <p:style>
+          <a:lnRef idx="1">
+            <a:schemeClr val="accent1"/>
+          </a:lnRef>
+          <a:fillRef idx="3">
+            <a:schemeClr val="accent1"/>
+          </a:fillRef>
+          <a:effectRef idx="2">
+            <a:schemeClr val="accent1"/>
+          </a:effectRef>
+          <a:fontRef idx="minor">
+            <a:schemeClr val="lt1"/>
+          </a:fontRef>
+        </p:style>
+        <p:txBody>
+          <a:bodyPr rtlCol="0" anchor="ctr"/>
+          <a:lstStyle/>
+          <a:p>
+            <a:pPr algn="ctr"/>
+          </a:p>
+        </p:txBody>
+      </p:sp>
+      <p:sp>
+        <p:nvSpPr>
+          <p:cNvPr id="68" name="Oval 67"/>
+          <p:cNvSpPr/>
+          <p:nvPr/>
+        </p:nvSpPr>
+        <p:spPr>
+          <a:xfrm>
+            <a:off x="7436815" y="5246370"/>
+            <a:ext cx="73152" cy="73152"/>
+          </a:xfrm>
+          <a:prstGeom prst="ellipse">
+            <a:avLst/>
+          </a:prstGeom>
+          <a:solidFill>
+            <a:srgbClr val="666E70"/>
+          </a:solidFill>
+          <a:ln>
+            <a:noFill/>
+          </a:ln>
+          <a:effectLst/>
+        </p:spPr>
+        <p:style>
+          <a:lnRef idx="1">
+            <a:schemeClr val="accent1"/>
+          </a:lnRef>
+          <a:fillRef idx="3">
+            <a:schemeClr val="accent1"/>
+          </a:fillRef>
+          <a:effectRef idx="2">
+            <a:schemeClr val="accent1"/>
+          </a:effectRef>
+          <a:fontRef idx="minor">
+            <a:schemeClr val="lt1"/>
+          </a:fontRef>
+        </p:style>
+        <p:txBody>
+          <a:bodyPr rtlCol="0" anchor="ctr"/>
+          <a:lstStyle/>
+          <a:p>
+            <a:pPr algn="ctr"/>
+          </a:p>
+        </p:txBody>
+      </p:sp>
+      <p:sp>
+        <p:nvSpPr>
+          <p:cNvPr id="69" name="Rectangle 68"/>
           <p:cNvSpPr/>
           <p:nvPr/>
         </p:nvSpPr>
@@ -33104,7 +33222,7 @@
       </p:sp>
       <p:sp>
         <p:nvSpPr>
-          <p:cNvPr id="69" name="TextBox 68"/>
+          <p:cNvPr id="70" name="TextBox 69"/>
           <p:cNvSpPr txBox="1"/>
           <p:nvPr/>
         </p:nvSpPr>
@@ -33145,7 +33263,7 @@
       </p:sp>
       <p:sp>
         <p:nvSpPr>
-          <p:cNvPr id="70" name="TextBox 69"/>
+          <p:cNvPr id="71" name="TextBox 70"/>
           <p:cNvSpPr txBox="1"/>
           <p:nvPr/>
         </p:nvSpPr>

--- a/examples/gallery/pattern_gallery.pptx
+++ b/examples/gallery/pattern_gallery.pptx
@@ -36156,8 +36156,8 @@
         </p:nvSpPr>
         <p:spPr>
           <a:xfrm>
-            <a:off x="1051560" y="2519172"/>
-            <a:ext cx="749808" cy="219456"/>
+            <a:off x="667512" y="2519172"/>
+            <a:ext cx="1133856" cy="219456"/>
           </a:xfrm>
           <a:prstGeom prst="rect">
             <a:avLst/>
@@ -36235,8 +36235,8 @@
         </p:nvSpPr>
         <p:spPr>
           <a:xfrm>
-            <a:off x="1051560" y="4576572"/>
-            <a:ext cx="749808" cy="219456"/>
+            <a:off x="667512" y="4576572"/>
+            <a:ext cx="1133856" cy="219456"/>
           </a:xfrm>
           <a:prstGeom prst="rect">
             <a:avLst/>
@@ -36840,50 +36840,9 @@
           </a:fontRef>
         </p:style>
       </p:cxnSp>
-      <p:sp>
-        <p:nvSpPr>
-          <p:cNvPr id="24" name="TextBox 23"/>
-          <p:cNvSpPr txBox="1"/>
-          <p:nvPr/>
-        </p:nvSpPr>
-        <p:spPr>
-          <a:xfrm>
-            <a:off x="667512" y="2313432"/>
-            <a:ext cx="347472" cy="219456"/>
-          </a:xfrm>
-          <a:prstGeom prst="rect">
-            <a:avLst/>
-          </a:prstGeom>
-          <a:noFill/>
-        </p:spPr>
-        <p:txBody>
-          <a:bodyPr wrap="square" anchor="t" lIns="0" rIns="0" tIns="0" bIns="0">
-            <a:spAutoFit/>
-          </a:bodyPr>
-          <a:lstStyle/>
-          <a:p>
-            <a:pPr algn="r">
-              <a:lnSpc>
-                <a:spcPct val="130000"/>
-              </a:lnSpc>
-            </a:pPr>
-            <a:r>
-              <a:rPr sz="950" b="1" lang="ja-JP">
-                <a:solidFill>
-                  <a:srgbClr val="0D7870"/>
-                </a:solidFill>
-                <a:latin typeface="Yu Gothic"/>
-                <a:ea typeface="Yu Gothic"/>
-                <a:cs typeface="Yu Gothic"/>
-              </a:rPr>
-              <a:t>01</a:t>
-            </a:r>
-          </a:p>
-        </p:txBody>
-      </p:sp>
       <p:cxnSp>
         <p:nvCxnSpPr>
-          <p:cNvPr id="25" name="Connector 24"/>
+          <p:cNvPr id="24" name="Connector 23"/>
           <p:cNvCxnSpPr/>
           <p:nvPr/>
         </p:nvCxnSpPr>
@@ -36920,7 +36879,7 @@
       </p:cxnSp>
       <p:sp>
         <p:nvSpPr>
-          <p:cNvPr id="26" name="TextBox 25"/>
+          <p:cNvPr id="25" name="TextBox 24"/>
           <p:cNvSpPr txBox="1"/>
           <p:nvPr/>
         </p:nvSpPr>
@@ -36961,50 +36920,9 @@
           </a:p>
         </p:txBody>
       </p:sp>
-      <p:sp>
-        <p:nvSpPr>
-          <p:cNvPr id="27" name="TextBox 26"/>
-          <p:cNvSpPr txBox="1"/>
-          <p:nvPr/>
-        </p:nvSpPr>
-        <p:spPr>
-          <a:xfrm>
-            <a:off x="667512" y="2724912"/>
-            <a:ext cx="347472" cy="219456"/>
-          </a:xfrm>
-          <a:prstGeom prst="rect">
-            <a:avLst/>
-          </a:prstGeom>
-          <a:noFill/>
-        </p:spPr>
-        <p:txBody>
-          <a:bodyPr wrap="square" anchor="t" lIns="0" rIns="0" tIns="0" bIns="0">
-            <a:spAutoFit/>
-          </a:bodyPr>
-          <a:lstStyle/>
-          <a:p>
-            <a:pPr algn="r">
-              <a:lnSpc>
-                <a:spcPct val="130000"/>
-              </a:lnSpc>
-            </a:pPr>
-            <a:r>
-              <a:rPr sz="950" b="1" lang="ja-JP">
-                <a:solidFill>
-                  <a:srgbClr val="0D7870"/>
-                </a:solidFill>
-                <a:latin typeface="Yu Gothic"/>
-                <a:ea typeface="Yu Gothic"/>
-                <a:cs typeface="Yu Gothic"/>
-              </a:rPr>
-              <a:t>02</a:t>
-            </a:r>
-          </a:p>
-        </p:txBody>
-      </p:sp>
       <p:cxnSp>
         <p:nvCxnSpPr>
-          <p:cNvPr id="28" name="Connector 27"/>
+          <p:cNvPr id="26" name="Connector 25"/>
           <p:cNvCxnSpPr/>
           <p:nvPr/>
         </p:nvCxnSpPr>
@@ -37041,7 +36959,7 @@
       </p:cxnSp>
       <p:sp>
         <p:nvSpPr>
-          <p:cNvPr id="29" name="TextBox 28"/>
+          <p:cNvPr id="27" name="TextBox 26"/>
           <p:cNvSpPr txBox="1"/>
           <p:nvPr/>
         </p:nvSpPr>
@@ -37082,50 +37000,9 @@
           </a:p>
         </p:txBody>
       </p:sp>
-      <p:sp>
-        <p:nvSpPr>
-          <p:cNvPr id="30" name="TextBox 29"/>
-          <p:cNvSpPr txBox="1"/>
-          <p:nvPr/>
-        </p:nvSpPr>
-        <p:spPr>
-          <a:xfrm>
-            <a:off x="667512" y="3136392"/>
-            <a:ext cx="347472" cy="219456"/>
-          </a:xfrm>
-          <a:prstGeom prst="rect">
-            <a:avLst/>
-          </a:prstGeom>
-          <a:noFill/>
-        </p:spPr>
-        <p:txBody>
-          <a:bodyPr wrap="square" anchor="t" lIns="0" rIns="0" tIns="0" bIns="0">
-            <a:spAutoFit/>
-          </a:bodyPr>
-          <a:lstStyle/>
-          <a:p>
-            <a:pPr algn="r">
-              <a:lnSpc>
-                <a:spcPct val="130000"/>
-              </a:lnSpc>
-            </a:pPr>
-            <a:r>
-              <a:rPr sz="950" b="1" lang="ja-JP">
-                <a:solidFill>
-                  <a:srgbClr val="0D7870"/>
-                </a:solidFill>
-                <a:latin typeface="Yu Gothic"/>
-                <a:ea typeface="Yu Gothic"/>
-                <a:cs typeface="Yu Gothic"/>
-              </a:rPr>
-              <a:t>03</a:t>
-            </a:r>
-          </a:p>
-        </p:txBody>
-      </p:sp>
       <p:cxnSp>
         <p:nvCxnSpPr>
-          <p:cNvPr id="31" name="Connector 30"/>
+          <p:cNvPr id="28" name="Connector 27"/>
           <p:cNvCxnSpPr/>
           <p:nvPr/>
         </p:nvCxnSpPr>
@@ -37163,7 +37040,7 @@
       </p:cxnSp>
       <p:sp>
         <p:nvSpPr>
-          <p:cNvPr id="32" name="TextBox 31"/>
+          <p:cNvPr id="29" name="TextBox 28"/>
           <p:cNvSpPr txBox="1"/>
           <p:nvPr/>
         </p:nvSpPr>
@@ -37204,50 +37081,9 @@
           </a:p>
         </p:txBody>
       </p:sp>
-      <p:sp>
-        <p:nvSpPr>
-          <p:cNvPr id="33" name="TextBox 32"/>
-          <p:cNvSpPr txBox="1"/>
-          <p:nvPr/>
-        </p:nvSpPr>
-        <p:spPr>
-          <a:xfrm>
-            <a:off x="667512" y="3547872"/>
-            <a:ext cx="347472" cy="219456"/>
-          </a:xfrm>
-          <a:prstGeom prst="rect">
-            <a:avLst/>
-          </a:prstGeom>
-          <a:noFill/>
-        </p:spPr>
-        <p:txBody>
-          <a:bodyPr wrap="square" anchor="t" lIns="0" rIns="0" tIns="0" bIns="0">
-            <a:spAutoFit/>
-          </a:bodyPr>
-          <a:lstStyle/>
-          <a:p>
-            <a:pPr algn="r">
-              <a:lnSpc>
-                <a:spcPct val="130000"/>
-              </a:lnSpc>
-            </a:pPr>
-            <a:r>
-              <a:rPr sz="950" b="1" lang="ja-JP">
-                <a:solidFill>
-                  <a:srgbClr val="0D7870"/>
-                </a:solidFill>
-                <a:latin typeface="Yu Gothic"/>
-                <a:ea typeface="Yu Gothic"/>
-                <a:cs typeface="Yu Gothic"/>
-              </a:rPr>
-              <a:t>04</a:t>
-            </a:r>
-          </a:p>
-        </p:txBody>
-      </p:sp>
       <p:cxnSp>
         <p:nvCxnSpPr>
-          <p:cNvPr id="34" name="Connector 33"/>
+          <p:cNvPr id="30" name="Connector 29"/>
           <p:cNvCxnSpPr/>
           <p:nvPr/>
         </p:nvCxnSpPr>
@@ -37284,7 +37120,7 @@
       </p:cxnSp>
       <p:sp>
         <p:nvSpPr>
-          <p:cNvPr id="35" name="TextBox 34"/>
+          <p:cNvPr id="31" name="TextBox 30"/>
           <p:cNvSpPr txBox="1"/>
           <p:nvPr/>
         </p:nvSpPr>
@@ -37325,50 +37161,9 @@
           </a:p>
         </p:txBody>
       </p:sp>
-      <p:sp>
-        <p:nvSpPr>
-          <p:cNvPr id="36" name="TextBox 35"/>
-          <p:cNvSpPr txBox="1"/>
-          <p:nvPr/>
-        </p:nvSpPr>
-        <p:spPr>
-          <a:xfrm>
-            <a:off x="667512" y="3959352"/>
-            <a:ext cx="347472" cy="219456"/>
-          </a:xfrm>
-          <a:prstGeom prst="rect">
-            <a:avLst/>
-          </a:prstGeom>
-          <a:noFill/>
-        </p:spPr>
-        <p:txBody>
-          <a:bodyPr wrap="square" anchor="t" lIns="0" rIns="0" tIns="0" bIns="0">
-            <a:spAutoFit/>
-          </a:bodyPr>
-          <a:lstStyle/>
-          <a:p>
-            <a:pPr algn="r">
-              <a:lnSpc>
-                <a:spcPct val="130000"/>
-              </a:lnSpc>
-            </a:pPr>
-            <a:r>
-              <a:rPr sz="950" b="1" lang="ja-JP">
-                <a:solidFill>
-                  <a:srgbClr val="0D7870"/>
-                </a:solidFill>
-                <a:latin typeface="Yu Gothic"/>
-                <a:ea typeface="Yu Gothic"/>
-                <a:cs typeface="Yu Gothic"/>
-              </a:rPr>
-              <a:t>05</a:t>
-            </a:r>
-          </a:p>
-        </p:txBody>
-      </p:sp>
       <p:cxnSp>
         <p:nvCxnSpPr>
-          <p:cNvPr id="37" name="Connector 36"/>
+          <p:cNvPr id="32" name="Connector 31"/>
           <p:cNvCxnSpPr/>
           <p:nvPr/>
         </p:nvCxnSpPr>
@@ -37405,7 +37200,7 @@
       </p:cxnSp>
       <p:sp>
         <p:nvSpPr>
-          <p:cNvPr id="38" name="TextBox 37"/>
+          <p:cNvPr id="33" name="TextBox 32"/>
           <p:cNvSpPr txBox="1"/>
           <p:nvPr/>
         </p:nvSpPr>
@@ -37446,50 +37241,9 @@
           </a:p>
         </p:txBody>
       </p:sp>
-      <p:sp>
-        <p:nvSpPr>
-          <p:cNvPr id="39" name="TextBox 38"/>
-          <p:cNvSpPr txBox="1"/>
-          <p:nvPr/>
-        </p:nvSpPr>
-        <p:spPr>
-          <a:xfrm>
-            <a:off x="667512" y="4370832"/>
-            <a:ext cx="347472" cy="219456"/>
-          </a:xfrm>
-          <a:prstGeom prst="rect">
-            <a:avLst/>
-          </a:prstGeom>
-          <a:noFill/>
-        </p:spPr>
-        <p:txBody>
-          <a:bodyPr wrap="square" anchor="t" lIns="0" rIns="0" tIns="0" bIns="0">
-            <a:spAutoFit/>
-          </a:bodyPr>
-          <a:lstStyle/>
-          <a:p>
-            <a:pPr algn="r">
-              <a:lnSpc>
-                <a:spcPct val="130000"/>
-              </a:lnSpc>
-            </a:pPr>
-            <a:r>
-              <a:rPr sz="950" b="1" lang="ja-JP">
-                <a:solidFill>
-                  <a:srgbClr val="0D7870"/>
-                </a:solidFill>
-                <a:latin typeface="Yu Gothic"/>
-                <a:ea typeface="Yu Gothic"/>
-                <a:cs typeface="Yu Gothic"/>
-              </a:rPr>
-              <a:t>06</a:t>
-            </a:r>
-          </a:p>
-        </p:txBody>
-      </p:sp>
       <p:cxnSp>
         <p:nvCxnSpPr>
-          <p:cNvPr id="40" name="Connector 39"/>
+          <p:cNvPr id="34" name="Connector 33"/>
           <p:cNvCxnSpPr/>
           <p:nvPr/>
         </p:nvCxnSpPr>
@@ -37526,7 +37280,7 @@
       </p:cxnSp>
       <p:sp>
         <p:nvSpPr>
-          <p:cNvPr id="41" name="TextBox 40"/>
+          <p:cNvPr id="35" name="TextBox 34"/>
           <p:cNvSpPr txBox="1"/>
           <p:nvPr/>
         </p:nvSpPr>
@@ -37567,50 +37321,9 @@
           </a:p>
         </p:txBody>
       </p:sp>
-      <p:sp>
-        <p:nvSpPr>
-          <p:cNvPr id="42" name="TextBox 41"/>
-          <p:cNvSpPr txBox="1"/>
-          <p:nvPr/>
-        </p:nvSpPr>
-        <p:spPr>
-          <a:xfrm>
-            <a:off x="667512" y="4782312"/>
-            <a:ext cx="347472" cy="219456"/>
-          </a:xfrm>
-          <a:prstGeom prst="rect">
-            <a:avLst/>
-          </a:prstGeom>
-          <a:noFill/>
-        </p:spPr>
-        <p:txBody>
-          <a:bodyPr wrap="square" anchor="t" lIns="0" rIns="0" tIns="0" bIns="0">
-            <a:spAutoFit/>
-          </a:bodyPr>
-          <a:lstStyle/>
-          <a:p>
-            <a:pPr algn="r">
-              <a:lnSpc>
-                <a:spcPct val="130000"/>
-              </a:lnSpc>
-            </a:pPr>
-            <a:r>
-              <a:rPr sz="950" b="1" lang="ja-JP">
-                <a:solidFill>
-                  <a:srgbClr val="0D7870"/>
-                </a:solidFill>
-                <a:latin typeface="Yu Gothic"/>
-                <a:ea typeface="Yu Gothic"/>
-                <a:cs typeface="Yu Gothic"/>
-              </a:rPr>
-              <a:t>07</a:t>
-            </a:r>
-          </a:p>
-        </p:txBody>
-      </p:sp>
       <p:cxnSp>
         <p:nvCxnSpPr>
-          <p:cNvPr id="43" name="Connector 42"/>
+          <p:cNvPr id="36" name="Connector 35"/>
           <p:cNvCxnSpPr/>
           <p:nvPr/>
         </p:nvCxnSpPr>
@@ -37648,7 +37361,7 @@
       </p:cxnSp>
       <p:sp>
         <p:nvSpPr>
-          <p:cNvPr id="44" name="TextBox 43"/>
+          <p:cNvPr id="37" name="TextBox 36"/>
           <p:cNvSpPr txBox="1"/>
           <p:nvPr/>
         </p:nvSpPr>
@@ -37689,50 +37402,9 @@
           </a:p>
         </p:txBody>
       </p:sp>
-      <p:sp>
-        <p:nvSpPr>
-          <p:cNvPr id="45" name="TextBox 44"/>
-          <p:cNvSpPr txBox="1"/>
-          <p:nvPr/>
-        </p:nvSpPr>
-        <p:spPr>
-          <a:xfrm>
-            <a:off x="667512" y="5193792"/>
-            <a:ext cx="347472" cy="219456"/>
-          </a:xfrm>
-          <a:prstGeom prst="rect">
-            <a:avLst/>
-          </a:prstGeom>
-          <a:noFill/>
-        </p:spPr>
-        <p:txBody>
-          <a:bodyPr wrap="square" anchor="t" lIns="0" rIns="0" tIns="0" bIns="0">
-            <a:spAutoFit/>
-          </a:bodyPr>
-          <a:lstStyle/>
-          <a:p>
-            <a:pPr algn="r">
-              <a:lnSpc>
-                <a:spcPct val="130000"/>
-              </a:lnSpc>
-            </a:pPr>
-            <a:r>
-              <a:rPr sz="950" b="1" lang="ja-JP">
-                <a:solidFill>
-                  <a:srgbClr val="0D7870"/>
-                </a:solidFill>
-                <a:latin typeface="Yu Gothic"/>
-                <a:ea typeface="Yu Gothic"/>
-                <a:cs typeface="Yu Gothic"/>
-              </a:rPr>
-              <a:t>08</a:t>
-            </a:r>
-          </a:p>
-        </p:txBody>
-      </p:sp>
       <p:cxnSp>
         <p:nvCxnSpPr>
-          <p:cNvPr id="46" name="Connector 45"/>
+          <p:cNvPr id="38" name="Connector 37"/>
           <p:cNvCxnSpPr/>
           <p:nvPr/>
         </p:nvCxnSpPr>
@@ -37769,7 +37441,7 @@
       </p:cxnSp>
       <p:sp>
         <p:nvSpPr>
-          <p:cNvPr id="47" name="TextBox 46"/>
+          <p:cNvPr id="39" name="TextBox 38"/>
           <p:cNvSpPr txBox="1"/>
           <p:nvPr/>
         </p:nvSpPr>
@@ -37812,7 +37484,7 @@
       </p:sp>
       <p:sp>
         <p:nvSpPr>
-          <p:cNvPr id="48" name="Rectangle 47"/>
+          <p:cNvPr id="40" name="Rectangle 39"/>
           <p:cNvSpPr/>
           <p:nvPr/>
         </p:nvSpPr>
@@ -37856,7 +37528,7 @@
       </p:sp>
       <p:sp>
         <p:nvSpPr>
-          <p:cNvPr id="49" name="TextBox 48"/>
+          <p:cNvPr id="41" name="TextBox 40"/>
           <p:cNvSpPr txBox="1"/>
           <p:nvPr/>
         </p:nvSpPr>
@@ -37897,7 +37569,7 @@
       </p:sp>
       <p:sp>
         <p:nvSpPr>
-          <p:cNvPr id="50" name="TextBox 49"/>
+          <p:cNvPr id="42" name="TextBox 41"/>
           <p:cNvSpPr txBox="1"/>
           <p:nvPr/>
         </p:nvSpPr>
@@ -37938,7 +37610,7 @@
       </p:sp>
       <p:sp>
         <p:nvSpPr>
-          <p:cNvPr id="51" name="Rectangle 50"/>
+          <p:cNvPr id="43" name="Rectangle 42"/>
           <p:cNvSpPr/>
           <p:nvPr/>
         </p:nvSpPr>
@@ -37982,7 +37654,7 @@
       </p:sp>
       <p:sp>
         <p:nvSpPr>
-          <p:cNvPr id="52" name="TextBox 51"/>
+          <p:cNvPr id="44" name="TextBox 43"/>
           <p:cNvSpPr txBox="1"/>
           <p:nvPr/>
         </p:nvSpPr>
@@ -38023,7 +37695,7 @@
       </p:sp>
       <p:sp>
         <p:nvSpPr>
-          <p:cNvPr id="53" name="TextBox 52"/>
+          <p:cNvPr id="45" name="TextBox 44"/>
           <p:cNvSpPr txBox="1"/>
           <p:nvPr/>
         </p:nvSpPr>

--- a/examples/gallery/pattern_gallery.pptx
+++ b/examples/gallery/pattern_gallery.pptx
@@ -33465,7 +33465,7 @@
         </p:nvSpPr>
         <p:spPr>
           <a:xfrm>
-            <a:off x="2148840" y="1752904"/>
+            <a:off x="2148840" y="1670608"/>
             <a:ext cx="2256967" cy="237744"/>
           </a:xfrm>
           <a:prstGeom prst="rect">
@@ -33506,7 +33506,7 @@
         </p:nvSpPr>
         <p:spPr>
           <a:xfrm>
-            <a:off x="4552111" y="1752904"/>
+            <a:off x="4552111" y="1670608"/>
             <a:ext cx="2256967" cy="237744"/>
           </a:xfrm>
           <a:prstGeom prst="rect">
@@ -33547,7 +33547,7 @@
         </p:nvCxnSpPr>
         <p:spPr>
           <a:xfrm>
-            <a:off x="4478959" y="1661464"/>
+            <a:off x="4478959" y="1579168"/>
             <a:ext cx="0" cy="3584448"/>
           </a:xfrm>
           <a:prstGeom prst="line">
@@ -33583,7 +33583,7 @@
         </p:nvSpPr>
         <p:spPr>
           <a:xfrm>
-            <a:off x="6955383" y="1752904"/>
+            <a:off x="6955383" y="1670608"/>
             <a:ext cx="2256967" cy="237744"/>
           </a:xfrm>
           <a:prstGeom prst="rect">
@@ -33624,7 +33624,7 @@
         </p:nvCxnSpPr>
         <p:spPr>
           <a:xfrm>
-            <a:off x="6882231" y="1661464"/>
+            <a:off x="6882231" y="1579168"/>
             <a:ext cx="0" cy="3584448"/>
           </a:xfrm>
           <a:prstGeom prst="line">
@@ -33660,7 +33660,7 @@
         </p:nvSpPr>
         <p:spPr>
           <a:xfrm>
-            <a:off x="9358655" y="1752904"/>
+            <a:off x="9358655" y="1670608"/>
             <a:ext cx="2256967" cy="237744"/>
           </a:xfrm>
           <a:prstGeom prst="rect">
@@ -33701,7 +33701,7 @@
         </p:nvCxnSpPr>
         <p:spPr>
           <a:xfrm>
-            <a:off x="9285503" y="1661464"/>
+            <a:off x="9285503" y="1579168"/>
             <a:ext cx="0" cy="3584448"/>
           </a:xfrm>
           <a:prstGeom prst="line">
@@ -33731,13 +33731,211 @@
       </p:cxnSp>
       <p:sp>
         <p:nvSpPr>
-          <p:cNvPr id="12" name="Rectangle 11"/>
+          <p:cNvPr id="12" name="TextBox 11"/>
+          <p:cNvSpPr txBox="1"/>
+          <p:nvPr/>
+        </p:nvSpPr>
+        <p:spPr>
+          <a:xfrm>
+            <a:off x="594360" y="1588312"/>
+            <a:ext cx="347472" cy="164592"/>
+          </a:xfrm>
+          <a:prstGeom prst="rect">
+            <a:avLst/>
+          </a:prstGeom>
+          <a:noFill/>
+        </p:spPr>
+        <p:txBody>
+          <a:bodyPr wrap="square" anchor="ctr" lIns="0" rIns="0" tIns="0" bIns="0">
+            <a:spAutoFit/>
+          </a:bodyPr>
+          <a:lstStyle/>
+          <a:p>
+            <a:pPr algn="l">
+              <a:lnSpc>
+                <a:spcPct val="130000"/>
+              </a:lnSpc>
+            </a:pPr>
+            <a:r>
+              <a:rPr sz="750" b="1" lang="ja-JP">
+                <a:solidFill>
+                  <a:srgbClr val="666E70"/>
+                </a:solidFill>
+                <a:latin typeface="Yu Gothic"/>
+                <a:ea typeface="Yu Gothic"/>
+                <a:cs typeface="Yu Gothic"/>
+              </a:rPr>
+              <a:t>凡例</a:t>
+            </a:r>
+          </a:p>
+        </p:txBody>
+      </p:sp>
+      <p:cxnSp>
+        <p:nvCxnSpPr>
+          <p:cNvPr id="13" name="Connector 12"/>
+          <p:cNvCxnSpPr/>
+          <p:nvPr/>
+        </p:nvCxnSpPr>
+        <p:spPr>
+          <a:xfrm>
+            <a:off x="1033271" y="1698040"/>
+            <a:ext cx="292609" cy="0"/>
+          </a:xfrm>
+          <a:prstGeom prst="line">
+            <a:avLst/>
+          </a:prstGeom>
+          <a:ln w="14604">
+            <a:solidFill>
+              <a:srgbClr val="666E70"/>
+            </a:solidFill>
+            <a:tailEnd type="triangle" w="med" len="med"/>
+          </a:ln>
+          <a:effectLst/>
+        </p:spPr>
+        <p:style>
+          <a:lnRef idx="2">
+            <a:schemeClr val="accent1"/>
+          </a:lnRef>
+          <a:fillRef idx="0">
+            <a:schemeClr val="accent1"/>
+          </a:fillRef>
+          <a:effectRef idx="1">
+            <a:schemeClr val="accent1"/>
+          </a:effectRef>
+          <a:fontRef idx="minor">
+            <a:schemeClr val="tx1"/>
+          </a:fontRef>
+        </p:style>
+      </p:cxnSp>
+      <p:sp>
+        <p:nvSpPr>
+          <p:cNvPr id="14" name="TextBox 13"/>
+          <p:cNvSpPr txBox="1"/>
+          <p:nvPr/>
+        </p:nvSpPr>
+        <p:spPr>
+          <a:xfrm>
+            <a:off x="1399032" y="1615744"/>
+            <a:ext cx="566928" cy="164592"/>
+          </a:xfrm>
+          <a:prstGeom prst="rect">
+            <a:avLst/>
+          </a:prstGeom>
+          <a:noFill/>
+        </p:spPr>
+        <p:txBody>
+          <a:bodyPr wrap="square" anchor="ctr" lIns="0" rIns="0" tIns="0" bIns="0">
+            <a:spAutoFit/>
+          </a:bodyPr>
+          <a:lstStyle/>
+          <a:p>
+            <a:pPr algn="l">
+              <a:lnSpc>
+                <a:spcPct val="130000"/>
+              </a:lnSpc>
+            </a:pPr>
+            <a:r>
+              <a:rPr sz="800" b="0" lang="ja-JP">
+                <a:solidFill>
+                  <a:srgbClr val="202729"/>
+                </a:solidFill>
+                <a:latin typeface="Yu Gothic"/>
+                <a:ea typeface="Yu Gothic"/>
+                <a:cs typeface="Yu Gothic"/>
+              </a:rPr>
+              <a:t>順方向</a:t>
+            </a:r>
+          </a:p>
+        </p:txBody>
+      </p:sp>
+      <p:cxnSp>
+        <p:nvCxnSpPr>
+          <p:cNvPr id="15" name="Connector 14"/>
+          <p:cNvCxnSpPr/>
+          <p:nvPr/>
+        </p:nvCxnSpPr>
+        <p:spPr>
+          <a:xfrm>
+            <a:off x="1033271" y="1890064"/>
+            <a:ext cx="292609" cy="0"/>
+          </a:xfrm>
+          <a:prstGeom prst="line">
+            <a:avLst/>
+          </a:prstGeom>
+          <a:ln w="14604">
+            <a:prstDash val="dash"/>
+            <a:solidFill>
+              <a:srgbClr val="666E70"/>
+            </a:solidFill>
+            <a:tailEnd type="triangle" w="med" len="med"/>
+          </a:ln>
+          <a:effectLst/>
+        </p:spPr>
+        <p:style>
+          <a:lnRef idx="2">
+            <a:schemeClr val="accent1"/>
+          </a:lnRef>
+          <a:fillRef idx="0">
+            <a:schemeClr val="accent1"/>
+          </a:fillRef>
+          <a:effectRef idx="1">
+            <a:schemeClr val="accent1"/>
+          </a:effectRef>
+          <a:fontRef idx="minor">
+            <a:schemeClr val="tx1"/>
+          </a:fontRef>
+        </p:style>
+      </p:cxnSp>
+      <p:sp>
+        <p:nvSpPr>
+          <p:cNvPr id="16" name="TextBox 15"/>
+          <p:cNvSpPr txBox="1"/>
+          <p:nvPr/>
+        </p:nvSpPr>
+        <p:spPr>
+          <a:xfrm>
+            <a:off x="1399032" y="1807768"/>
+            <a:ext cx="566928" cy="164592"/>
+          </a:xfrm>
+          <a:prstGeom prst="rect">
+            <a:avLst/>
+          </a:prstGeom>
+          <a:noFill/>
+        </p:spPr>
+        <p:txBody>
+          <a:bodyPr wrap="square" anchor="ctr" lIns="0" rIns="0" tIns="0" bIns="0">
+            <a:spAutoFit/>
+          </a:bodyPr>
+          <a:lstStyle/>
+          <a:p>
+            <a:pPr algn="l">
+              <a:lnSpc>
+                <a:spcPct val="130000"/>
+              </a:lnSpc>
+            </a:pPr>
+            <a:r>
+              <a:rPr sz="800" b="0" lang="ja-JP">
+                <a:solidFill>
+                  <a:srgbClr val="202729"/>
+                </a:solidFill>
+                <a:latin typeface="Yu Gothic"/>
+                <a:ea typeface="Yu Gothic"/>
+                <a:cs typeface="Yu Gothic"/>
+              </a:rPr>
+              <a:t>差戻し</a:t>
+            </a:r>
+          </a:p>
+        </p:txBody>
+      </p:sp>
+      <p:sp>
+        <p:nvSpPr>
+          <p:cNvPr id="17" name="Rectangle 16"/>
           <p:cNvSpPr/>
           <p:nvPr/>
         </p:nvSpPr>
         <p:spPr>
           <a:xfrm>
-            <a:off x="502920" y="2100376"/>
+            <a:off x="502920" y="2018080"/>
             <a:ext cx="11185855" cy="786384"/>
           </a:xfrm>
           <a:prstGeom prst="rect">
@@ -33775,13 +33973,13 @@
       </p:sp>
       <p:sp>
         <p:nvSpPr>
-          <p:cNvPr id="13" name="TextBox 12"/>
-          <p:cNvSpPr txBox="1"/>
-          <p:nvPr/>
-        </p:nvSpPr>
-        <p:spPr>
-          <a:xfrm>
-            <a:off x="612648" y="2100376"/>
+          <p:cNvPr id="18" name="TextBox 17"/>
+          <p:cNvSpPr txBox="1"/>
+          <p:nvPr/>
+        </p:nvSpPr>
+        <p:spPr>
+          <a:xfrm>
+            <a:off x="612648" y="2018080"/>
             <a:ext cx="1371600" cy="786384"/>
           </a:xfrm>
           <a:prstGeom prst="rect">
@@ -33816,13 +34014,13 @@
       </p:sp>
       <p:cxnSp>
         <p:nvCxnSpPr>
-          <p:cNvPr id="14" name="Connector 13"/>
+          <p:cNvPr id="19" name="Connector 18"/>
           <p:cNvCxnSpPr/>
           <p:nvPr/>
         </p:nvCxnSpPr>
         <p:spPr>
           <a:xfrm>
-            <a:off x="502920" y="2886760"/>
+            <a:off x="502920" y="2804464"/>
             <a:ext cx="11185855" cy="0"/>
           </a:xfrm>
           <a:prstGeom prst="line">
@@ -33852,13 +34050,13 @@
       </p:cxnSp>
       <p:sp>
         <p:nvSpPr>
-          <p:cNvPr id="15" name="Rectangle 14"/>
+          <p:cNvPr id="20" name="Rectangle 19"/>
           <p:cNvSpPr/>
           <p:nvPr/>
         </p:nvSpPr>
         <p:spPr>
           <a:xfrm>
-            <a:off x="502920" y="2886760"/>
+            <a:off x="502920" y="2804464"/>
             <a:ext cx="11185855" cy="786384"/>
           </a:xfrm>
           <a:prstGeom prst="rect">
@@ -33896,13 +34094,13 @@
       </p:sp>
       <p:sp>
         <p:nvSpPr>
-          <p:cNvPr id="16" name="TextBox 15"/>
-          <p:cNvSpPr txBox="1"/>
-          <p:nvPr/>
-        </p:nvSpPr>
-        <p:spPr>
-          <a:xfrm>
-            <a:off x="612648" y="2886760"/>
+          <p:cNvPr id="21" name="TextBox 20"/>
+          <p:cNvSpPr txBox="1"/>
+          <p:nvPr/>
+        </p:nvSpPr>
+        <p:spPr>
+          <a:xfrm>
+            <a:off x="612648" y="2804464"/>
             <a:ext cx="1371600" cy="786384"/>
           </a:xfrm>
           <a:prstGeom prst="rect">
@@ -33937,13 +34135,13 @@
       </p:sp>
       <p:cxnSp>
         <p:nvCxnSpPr>
-          <p:cNvPr id="17" name="Connector 16"/>
+          <p:cNvPr id="22" name="Connector 21"/>
           <p:cNvCxnSpPr/>
           <p:nvPr/>
         </p:nvCxnSpPr>
         <p:spPr>
           <a:xfrm>
-            <a:off x="502920" y="3673144"/>
+            <a:off x="502920" y="3590848"/>
             <a:ext cx="11185855" cy="0"/>
           </a:xfrm>
           <a:prstGeom prst="line">
@@ -33973,13 +34171,13 @@
       </p:cxnSp>
       <p:sp>
         <p:nvSpPr>
-          <p:cNvPr id="18" name="Rectangle 17"/>
+          <p:cNvPr id="23" name="Rectangle 22"/>
           <p:cNvSpPr/>
           <p:nvPr/>
         </p:nvSpPr>
         <p:spPr>
           <a:xfrm>
-            <a:off x="502920" y="3673144"/>
+            <a:off x="502920" y="3590848"/>
             <a:ext cx="11185855" cy="786384"/>
           </a:xfrm>
           <a:prstGeom prst="rect">
@@ -34017,13 +34215,13 @@
       </p:sp>
       <p:sp>
         <p:nvSpPr>
-          <p:cNvPr id="19" name="TextBox 18"/>
-          <p:cNvSpPr txBox="1"/>
-          <p:nvPr/>
-        </p:nvSpPr>
-        <p:spPr>
-          <a:xfrm>
-            <a:off x="612648" y="3673144"/>
+          <p:cNvPr id="24" name="TextBox 23"/>
+          <p:cNvSpPr txBox="1"/>
+          <p:nvPr/>
+        </p:nvSpPr>
+        <p:spPr>
+          <a:xfrm>
+            <a:off x="612648" y="3590848"/>
             <a:ext cx="1371600" cy="786384"/>
           </a:xfrm>
           <a:prstGeom prst="rect">
@@ -34058,13 +34256,13 @@
       </p:sp>
       <p:cxnSp>
         <p:nvCxnSpPr>
-          <p:cNvPr id="20" name="Connector 19"/>
+          <p:cNvPr id="25" name="Connector 24"/>
           <p:cNvCxnSpPr/>
           <p:nvPr/>
         </p:nvCxnSpPr>
         <p:spPr>
           <a:xfrm>
-            <a:off x="502920" y="4459528"/>
+            <a:off x="502920" y="4377232"/>
             <a:ext cx="11185855" cy="0"/>
           </a:xfrm>
           <a:prstGeom prst="line">
@@ -34094,13 +34292,13 @@
       </p:cxnSp>
       <p:sp>
         <p:nvSpPr>
-          <p:cNvPr id="21" name="Rectangle 20"/>
+          <p:cNvPr id="26" name="Rectangle 25"/>
           <p:cNvSpPr/>
           <p:nvPr/>
         </p:nvSpPr>
         <p:spPr>
           <a:xfrm>
-            <a:off x="502920" y="4459528"/>
+            <a:off x="502920" y="4377232"/>
             <a:ext cx="11185855" cy="786384"/>
           </a:xfrm>
           <a:prstGeom prst="rect">
@@ -34138,13 +34336,13 @@
       </p:sp>
       <p:sp>
         <p:nvSpPr>
-          <p:cNvPr id="22" name="TextBox 21"/>
-          <p:cNvSpPr txBox="1"/>
-          <p:nvPr/>
-        </p:nvSpPr>
-        <p:spPr>
-          <a:xfrm>
-            <a:off x="612648" y="4459528"/>
+          <p:cNvPr id="27" name="TextBox 26"/>
+          <p:cNvSpPr txBox="1"/>
+          <p:nvPr/>
+        </p:nvSpPr>
+        <p:spPr>
+          <a:xfrm>
+            <a:off x="612648" y="4377232"/>
             <a:ext cx="1371600" cy="786384"/>
           </a:xfrm>
           <a:prstGeom prst="rect">
@@ -34179,13 +34377,13 @@
       </p:sp>
       <p:cxnSp>
         <p:nvCxnSpPr>
-          <p:cNvPr id="23" name="Connector 22"/>
+          <p:cNvPr id="28" name="Connector 27"/>
           <p:cNvCxnSpPr/>
           <p:nvPr/>
         </p:nvCxnSpPr>
         <p:spPr>
           <a:xfrm>
-            <a:off x="502920" y="5245912"/>
+            <a:off x="502920" y="5163616"/>
             <a:ext cx="11185855" cy="0"/>
           </a:xfrm>
           <a:prstGeom prst="line">
@@ -34195,189 +34393,6 @@
             <a:solidFill>
               <a:srgbClr val="D1CFC8"/>
             </a:solidFill>
-          </a:ln>
-          <a:effectLst/>
-        </p:spPr>
-        <p:style>
-          <a:lnRef idx="2">
-            <a:schemeClr val="accent1"/>
-          </a:lnRef>
-          <a:fillRef idx="0">
-            <a:schemeClr val="accent1"/>
-          </a:fillRef>
-          <a:effectRef idx="1">
-            <a:schemeClr val="accent1"/>
-          </a:effectRef>
-          <a:fontRef idx="minor">
-            <a:schemeClr val="tx1"/>
-          </a:fontRef>
-        </p:style>
-      </p:cxnSp>
-      <p:cxnSp>
-        <p:nvCxnSpPr>
-          <p:cNvPr id="24" name="Connector 23"/>
-          <p:cNvCxnSpPr/>
-          <p:nvPr/>
-        </p:nvCxnSpPr>
-        <p:spPr>
-          <a:xfrm>
-            <a:off x="4063707" y="2493568"/>
-            <a:ext cx="415252" cy="0"/>
-          </a:xfrm>
-          <a:prstGeom prst="line">
-            <a:avLst/>
-          </a:prstGeom>
-          <a:ln w="14604">
-            <a:solidFill>
-              <a:srgbClr val="6C7372"/>
-            </a:solidFill>
-          </a:ln>
-          <a:effectLst/>
-        </p:spPr>
-        <p:style>
-          <a:lnRef idx="2">
-            <a:schemeClr val="accent1"/>
-          </a:lnRef>
-          <a:fillRef idx="0">
-            <a:schemeClr val="accent1"/>
-          </a:fillRef>
-          <a:effectRef idx="1">
-            <a:schemeClr val="accent1"/>
-          </a:effectRef>
-          <a:fontRef idx="minor">
-            <a:schemeClr val="tx1"/>
-          </a:fontRef>
-        </p:style>
-      </p:cxnSp>
-      <p:cxnSp>
-        <p:nvCxnSpPr>
-          <p:cNvPr id="25" name="Connector 24"/>
-          <p:cNvCxnSpPr/>
-          <p:nvPr/>
-        </p:nvCxnSpPr>
-        <p:spPr>
-          <a:xfrm>
-            <a:off x="4478959" y="2493568"/>
-            <a:ext cx="0" cy="786384"/>
-          </a:xfrm>
-          <a:prstGeom prst="line">
-            <a:avLst/>
-          </a:prstGeom>
-          <a:ln w="14604">
-            <a:solidFill>
-              <a:srgbClr val="6C7372"/>
-            </a:solidFill>
-          </a:ln>
-          <a:effectLst/>
-        </p:spPr>
-        <p:style>
-          <a:lnRef idx="2">
-            <a:schemeClr val="accent1"/>
-          </a:lnRef>
-          <a:fillRef idx="0">
-            <a:schemeClr val="accent1"/>
-          </a:fillRef>
-          <a:effectRef idx="1">
-            <a:schemeClr val="accent1"/>
-          </a:effectRef>
-          <a:fontRef idx="minor">
-            <a:schemeClr val="tx1"/>
-          </a:fontRef>
-        </p:style>
-      </p:cxnSp>
-      <p:cxnSp>
-        <p:nvCxnSpPr>
-          <p:cNvPr id="26" name="Connector 25"/>
-          <p:cNvCxnSpPr/>
-          <p:nvPr/>
-        </p:nvCxnSpPr>
-        <p:spPr>
-          <a:xfrm>
-            <a:off x="4478959" y="3279952"/>
-            <a:ext cx="100584" cy="0"/>
-          </a:xfrm>
-          <a:prstGeom prst="line">
-            <a:avLst/>
-          </a:prstGeom>
-          <a:ln w="14604">
-            <a:solidFill>
-              <a:srgbClr val="6C7372"/>
-            </a:solidFill>
-            <a:tailEnd type="triangle" w="med" len="med"/>
-          </a:ln>
-          <a:effectLst/>
-        </p:spPr>
-        <p:style>
-          <a:lnRef idx="2">
-            <a:schemeClr val="accent1"/>
-          </a:lnRef>
-          <a:fillRef idx="0">
-            <a:schemeClr val="accent1"/>
-          </a:fillRef>
-          <a:effectRef idx="1">
-            <a:schemeClr val="accent1"/>
-          </a:effectRef>
-          <a:fontRef idx="minor">
-            <a:schemeClr val="tx1"/>
-          </a:fontRef>
-        </p:style>
-      </p:cxnSp>
-      <p:cxnSp>
-        <p:nvCxnSpPr>
-          <p:cNvPr id="27" name="Connector 26"/>
-          <p:cNvCxnSpPr/>
-          <p:nvPr/>
-        </p:nvCxnSpPr>
-        <p:spPr>
-          <a:xfrm>
-            <a:off x="5644019" y="3279952"/>
-            <a:ext cx="73152" cy="0"/>
-          </a:xfrm>
-          <a:prstGeom prst="line">
-            <a:avLst/>
-          </a:prstGeom>
-          <a:ln w="14604">
-            <a:solidFill>
-              <a:srgbClr val="6C7372"/>
-            </a:solidFill>
-            <a:tailEnd type="triangle" w="med" len="med"/>
-          </a:ln>
-          <a:effectLst/>
-        </p:spPr>
-        <p:style>
-          <a:lnRef idx="2">
-            <a:schemeClr val="accent1"/>
-          </a:lnRef>
-          <a:fillRef idx="0">
-            <a:schemeClr val="accent1"/>
-          </a:fillRef>
-          <a:effectRef idx="1">
-            <a:schemeClr val="accent1"/>
-          </a:effectRef>
-          <a:fontRef idx="minor">
-            <a:schemeClr val="tx1"/>
-          </a:fontRef>
-        </p:style>
-      </p:cxnSp>
-      <p:cxnSp>
-        <p:nvCxnSpPr>
-          <p:cNvPr id="28" name="Connector 27"/>
-          <p:cNvCxnSpPr/>
-          <p:nvPr/>
-        </p:nvCxnSpPr>
-        <p:spPr>
-          <a:xfrm>
-            <a:off x="5111781" y="3535984"/>
-            <a:ext cx="568814" cy="274320"/>
-          </a:xfrm>
-          <a:prstGeom prst="line">
-            <a:avLst/>
-          </a:prstGeom>
-          <a:ln w="14604">
-            <a:solidFill>
-              <a:srgbClr val="6C7372"/>
-            </a:solidFill>
-            <a:tailEnd type="triangle" w="med" len="med"/>
           </a:ln>
           <a:effectLst/>
         </p:spPr>
@@ -34404,8 +34419,8 @@
         </p:nvCxnSpPr>
         <p:spPr>
           <a:xfrm>
-            <a:off x="6781647" y="3279952"/>
-            <a:ext cx="201168" cy="0"/>
+            <a:off x="4063707" y="2411272"/>
+            <a:ext cx="415252" cy="0"/>
           </a:xfrm>
           <a:prstGeom prst="line">
             <a:avLst/>
@@ -34414,7 +34429,6 @@
             <a:solidFill>
               <a:srgbClr val="6C7372"/>
             </a:solidFill>
-            <a:tailEnd type="triangle" w="med" len="med"/>
           </a:ln>
           <a:effectLst/>
         </p:spPr>
@@ -34441,8 +34455,8 @@
         </p:nvCxnSpPr>
         <p:spPr>
           <a:xfrm>
-            <a:off x="6466979" y="4066336"/>
-            <a:ext cx="830504" cy="0"/>
+            <a:off x="4478959" y="2411272"/>
+            <a:ext cx="0" cy="786384"/>
           </a:xfrm>
           <a:prstGeom prst="line">
             <a:avLst/>
@@ -34451,7 +34465,6 @@
             <a:solidFill>
               <a:srgbClr val="6C7372"/>
             </a:solidFill>
-            <a:tailEnd type="triangle" w="med" len="med"/>
           </a:ln>
           <a:effectLst/>
         </p:spPr>
@@ -34478,8 +34491,8 @@
         </p:nvCxnSpPr>
         <p:spPr>
           <a:xfrm>
-            <a:off x="7515053" y="3535984"/>
-            <a:ext cx="568814" cy="274320"/>
+            <a:off x="4478959" y="3197656"/>
+            <a:ext cx="100584" cy="0"/>
           </a:xfrm>
           <a:prstGeom prst="line">
             <a:avLst/>
@@ -34515,8 +34528,8 @@
         </p:nvCxnSpPr>
         <p:spPr>
           <a:xfrm>
-            <a:off x="8083867" y="4322368"/>
-            <a:ext cx="0" cy="274320"/>
+            <a:off x="5644019" y="3197656"/>
+            <a:ext cx="73152" cy="0"/>
           </a:xfrm>
           <a:prstGeom prst="line">
             <a:avLst/>
@@ -34552,8 +34565,8 @@
         </p:nvCxnSpPr>
         <p:spPr>
           <a:xfrm>
-            <a:off x="8870251" y="4852720"/>
-            <a:ext cx="214084" cy="0"/>
+            <a:off x="5111781" y="3453688"/>
+            <a:ext cx="568814" cy="274320"/>
           </a:xfrm>
           <a:prstGeom prst="line">
             <a:avLst/>
@@ -34562,6 +34575,7 @@
             <a:solidFill>
               <a:srgbClr val="6C7372"/>
             </a:solidFill>
+            <a:tailEnd type="triangle" w="med" len="med"/>
           </a:ln>
           <a:effectLst/>
         </p:spPr>
@@ -34587,9 +34601,9 @@
           <p:nvPr/>
         </p:nvCxnSpPr>
         <p:spPr>
-          <a:xfrm flipV="1">
-            <a:off x="9084335" y="3627424"/>
-            <a:ext cx="0" cy="1225296"/>
+          <a:xfrm>
+            <a:off x="6781647" y="3197656"/>
+            <a:ext cx="201168" cy="0"/>
           </a:xfrm>
           <a:prstGeom prst="line">
             <a:avLst/>
@@ -34598,6 +34612,7 @@
             <a:solidFill>
               <a:srgbClr val="6C7372"/>
             </a:solidFill>
+            <a:tailEnd type="triangle" w="med" len="med"/>
           </a:ln>
           <a:effectLst/>
         </p:spPr>
@@ -34623,9 +34638,9 @@
           <p:nvPr/>
         </p:nvCxnSpPr>
         <p:spPr>
-          <a:xfrm flipH="1">
-            <a:off x="8652681" y="3627424"/>
-            <a:ext cx="431654" cy="0"/>
+          <a:xfrm>
+            <a:off x="6466979" y="3984040"/>
+            <a:ext cx="830504" cy="0"/>
           </a:xfrm>
           <a:prstGeom prst="line">
             <a:avLst/>
@@ -34634,6 +34649,7 @@
             <a:solidFill>
               <a:srgbClr val="6C7372"/>
             </a:solidFill>
+            <a:tailEnd type="triangle" w="med" len="med"/>
           </a:ln>
           <a:effectLst/>
         </p:spPr>
@@ -34659,9 +34675,9 @@
           <p:nvPr/>
         </p:nvCxnSpPr>
         <p:spPr>
-          <a:xfrm flipV="1">
-            <a:off x="8652681" y="3535984"/>
-            <a:ext cx="0" cy="91440"/>
+          <a:xfrm>
+            <a:off x="7515053" y="3453688"/>
+            <a:ext cx="568814" cy="274320"/>
           </a:xfrm>
           <a:prstGeom prst="line">
             <a:avLst/>
@@ -34697,8 +34713,8 @@
         </p:nvCxnSpPr>
         <p:spPr>
           <a:xfrm>
-            <a:off x="9184919" y="3279952"/>
-            <a:ext cx="100584" cy="0"/>
+            <a:off x="8083867" y="4240072"/>
+            <a:ext cx="0" cy="274320"/>
           </a:xfrm>
           <a:prstGeom prst="line">
             <a:avLst/>
@@ -34707,6 +34723,7 @@
             <a:solidFill>
               <a:srgbClr val="6C7372"/>
             </a:solidFill>
+            <a:tailEnd type="triangle" w="med" len="med"/>
           </a:ln>
           <a:effectLst/>
         </p:spPr>
@@ -34732,9 +34749,9 @@
           <p:nvPr/>
         </p:nvCxnSpPr>
         <p:spPr>
-          <a:xfrm flipV="1">
-            <a:off x="9285503" y="2493568"/>
-            <a:ext cx="0" cy="786384"/>
+          <a:xfrm>
+            <a:off x="8870251" y="4770424"/>
+            <a:ext cx="214084" cy="0"/>
           </a:xfrm>
           <a:prstGeom prst="line">
             <a:avLst/>
@@ -34768,9 +34785,9 @@
           <p:nvPr/>
         </p:nvCxnSpPr>
         <p:spPr>
-          <a:xfrm>
-            <a:off x="9285503" y="2493568"/>
-            <a:ext cx="100584" cy="0"/>
+          <a:xfrm flipV="1">
+            <a:off x="9084335" y="3545128"/>
+            <a:ext cx="0" cy="1225296"/>
           </a:xfrm>
           <a:prstGeom prst="line">
             <a:avLst/>
@@ -34779,7 +34796,6 @@
             <a:solidFill>
               <a:srgbClr val="6C7372"/>
             </a:solidFill>
-            <a:tailEnd type="triangle" w="med" len="med"/>
           </a:ln>
           <a:effectLst/>
         </p:spPr>
@@ -34805,9 +34821,45 @@
           <p:nvPr/>
         </p:nvCxnSpPr>
         <p:spPr>
-          <a:xfrm>
-            <a:off x="10450563" y="2493568"/>
-            <a:ext cx="73152" cy="0"/>
+          <a:xfrm flipH="1">
+            <a:off x="8652681" y="3545128"/>
+            <a:ext cx="431654" cy="0"/>
+          </a:xfrm>
+          <a:prstGeom prst="line">
+            <a:avLst/>
+          </a:prstGeom>
+          <a:ln w="14604">
+            <a:solidFill>
+              <a:srgbClr val="6C7372"/>
+            </a:solidFill>
+          </a:ln>
+          <a:effectLst/>
+        </p:spPr>
+        <p:style>
+          <a:lnRef idx="2">
+            <a:schemeClr val="accent1"/>
+          </a:lnRef>
+          <a:fillRef idx="0">
+            <a:schemeClr val="accent1"/>
+          </a:fillRef>
+          <a:effectRef idx="1">
+            <a:schemeClr val="accent1"/>
+          </a:effectRef>
+          <a:fontRef idx="minor">
+            <a:schemeClr val="tx1"/>
+          </a:fontRef>
+        </p:style>
+      </p:cxnSp>
+      <p:cxnSp>
+        <p:nvCxnSpPr>
+          <p:cNvPr id="41" name="Connector 40"/>
+          <p:cNvCxnSpPr/>
+          <p:nvPr/>
+        </p:nvCxnSpPr>
+        <p:spPr>
+          <a:xfrm flipV="1">
+            <a:off x="8652681" y="3453688"/>
+            <a:ext cx="0" cy="91440"/>
           </a:xfrm>
           <a:prstGeom prst="line">
             <a:avLst/>
@@ -34835,15 +34887,273 @@
           </a:fontRef>
         </p:style>
       </p:cxnSp>
-      <p:sp>
-        <p:nvSpPr>
-          <p:cNvPr id="41" name="Rectangle 40"/>
+      <p:cxnSp>
+        <p:nvCxnSpPr>
+          <p:cNvPr id="42" name="Connector 41"/>
+          <p:cNvCxnSpPr/>
+          <p:nvPr/>
+        </p:nvCxnSpPr>
+        <p:spPr>
+          <a:xfrm>
+            <a:off x="9184919" y="3197656"/>
+            <a:ext cx="100584" cy="0"/>
+          </a:xfrm>
+          <a:prstGeom prst="line">
+            <a:avLst/>
+          </a:prstGeom>
+          <a:ln w="14604">
+            <a:solidFill>
+              <a:srgbClr val="6C7372"/>
+            </a:solidFill>
+          </a:ln>
+          <a:effectLst/>
+        </p:spPr>
+        <p:style>
+          <a:lnRef idx="2">
+            <a:schemeClr val="accent1"/>
+          </a:lnRef>
+          <a:fillRef idx="0">
+            <a:schemeClr val="accent1"/>
+          </a:fillRef>
+          <a:effectRef idx="1">
+            <a:schemeClr val="accent1"/>
+          </a:effectRef>
+          <a:fontRef idx="minor">
+            <a:schemeClr val="tx1"/>
+          </a:fontRef>
+        </p:style>
+      </p:cxnSp>
+      <p:cxnSp>
+        <p:nvCxnSpPr>
+          <p:cNvPr id="43" name="Connector 42"/>
+          <p:cNvCxnSpPr/>
+          <p:nvPr/>
+        </p:nvCxnSpPr>
+        <p:spPr>
+          <a:xfrm flipV="1">
+            <a:off x="9285503" y="2411272"/>
+            <a:ext cx="0" cy="786384"/>
+          </a:xfrm>
+          <a:prstGeom prst="line">
+            <a:avLst/>
+          </a:prstGeom>
+          <a:ln w="14604">
+            <a:solidFill>
+              <a:srgbClr val="6C7372"/>
+            </a:solidFill>
+          </a:ln>
+          <a:effectLst/>
+        </p:spPr>
+        <p:style>
+          <a:lnRef idx="2">
+            <a:schemeClr val="accent1"/>
+          </a:lnRef>
+          <a:fillRef idx="0">
+            <a:schemeClr val="accent1"/>
+          </a:fillRef>
+          <a:effectRef idx="1">
+            <a:schemeClr val="accent1"/>
+          </a:effectRef>
+          <a:fontRef idx="minor">
+            <a:schemeClr val="tx1"/>
+          </a:fontRef>
+        </p:style>
+      </p:cxnSp>
+      <p:cxnSp>
+        <p:nvCxnSpPr>
+          <p:cNvPr id="44" name="Connector 43"/>
+          <p:cNvCxnSpPr/>
+          <p:nvPr/>
+        </p:nvCxnSpPr>
+        <p:spPr>
+          <a:xfrm>
+            <a:off x="9285503" y="2411272"/>
+            <a:ext cx="100584" cy="0"/>
+          </a:xfrm>
+          <a:prstGeom prst="line">
+            <a:avLst/>
+          </a:prstGeom>
+          <a:ln w="14604">
+            <a:solidFill>
+              <a:srgbClr val="6C7372"/>
+            </a:solidFill>
+            <a:tailEnd type="triangle" w="med" len="med"/>
+          </a:ln>
+          <a:effectLst/>
+        </p:spPr>
+        <p:style>
+          <a:lnRef idx="2">
+            <a:schemeClr val="accent1"/>
+          </a:lnRef>
+          <a:fillRef idx="0">
+            <a:schemeClr val="accent1"/>
+          </a:fillRef>
+          <a:effectRef idx="1">
+            <a:schemeClr val="accent1"/>
+          </a:effectRef>
+          <a:fontRef idx="minor">
+            <a:schemeClr val="tx1"/>
+          </a:fontRef>
+        </p:style>
+      </p:cxnSp>
+      <p:cxnSp>
+        <p:nvCxnSpPr>
+          <p:cNvPr id="45" name="Connector 44"/>
+          <p:cNvCxnSpPr/>
+          <p:nvPr/>
+        </p:nvCxnSpPr>
+        <p:spPr>
+          <a:xfrm>
+            <a:off x="8652681" y="3453688"/>
+            <a:ext cx="0" cy="1801368"/>
+          </a:xfrm>
+          <a:prstGeom prst="line">
+            <a:avLst/>
+          </a:prstGeom>
+          <a:ln w="14604">
+            <a:prstDash val="dash"/>
+            <a:solidFill>
+              <a:srgbClr val="6C7372"/>
+            </a:solidFill>
+          </a:ln>
+          <a:effectLst/>
+        </p:spPr>
+        <p:style>
+          <a:lnRef idx="2">
+            <a:schemeClr val="accent1"/>
+          </a:lnRef>
+          <a:fillRef idx="0">
+            <a:schemeClr val="accent1"/>
+          </a:fillRef>
+          <a:effectRef idx="1">
+            <a:schemeClr val="accent1"/>
+          </a:effectRef>
+          <a:fontRef idx="minor">
+            <a:schemeClr val="tx1"/>
+          </a:fontRef>
+        </p:style>
+      </p:cxnSp>
+      <p:cxnSp>
+        <p:nvCxnSpPr>
+          <p:cNvPr id="46" name="Connector 45"/>
+          <p:cNvCxnSpPr/>
+          <p:nvPr/>
+        </p:nvCxnSpPr>
+        <p:spPr>
+          <a:xfrm flipH="1">
+            <a:off x="5111781" y="5255056"/>
+            <a:ext cx="3540900" cy="0"/>
+          </a:xfrm>
+          <a:prstGeom prst="line">
+            <a:avLst/>
+          </a:prstGeom>
+          <a:ln w="14604">
+            <a:prstDash val="dash"/>
+            <a:solidFill>
+              <a:srgbClr val="6C7372"/>
+            </a:solidFill>
+          </a:ln>
+          <a:effectLst/>
+        </p:spPr>
+        <p:style>
+          <a:lnRef idx="2">
+            <a:schemeClr val="accent1"/>
+          </a:lnRef>
+          <a:fillRef idx="0">
+            <a:schemeClr val="accent1"/>
+          </a:fillRef>
+          <a:effectRef idx="1">
+            <a:schemeClr val="accent1"/>
+          </a:effectRef>
+          <a:fontRef idx="minor">
+            <a:schemeClr val="tx1"/>
+          </a:fontRef>
+        </p:style>
+      </p:cxnSp>
+      <p:cxnSp>
+        <p:nvCxnSpPr>
+          <p:cNvPr id="47" name="Connector 46"/>
+          <p:cNvCxnSpPr/>
+          <p:nvPr/>
+        </p:nvCxnSpPr>
+        <p:spPr>
+          <a:xfrm flipV="1">
+            <a:off x="5111781" y="3453688"/>
+            <a:ext cx="0" cy="1801368"/>
+          </a:xfrm>
+          <a:prstGeom prst="line">
+            <a:avLst/>
+          </a:prstGeom>
+          <a:ln w="14604">
+            <a:prstDash val="dash"/>
+            <a:solidFill>
+              <a:srgbClr val="6C7372"/>
+            </a:solidFill>
+            <a:tailEnd type="triangle" w="med" len="med"/>
+          </a:ln>
+          <a:effectLst/>
+        </p:spPr>
+        <p:style>
+          <a:lnRef idx="2">
+            <a:schemeClr val="accent1"/>
+          </a:lnRef>
+          <a:fillRef idx="0">
+            <a:schemeClr val="accent1"/>
+          </a:fillRef>
+          <a:effectRef idx="1">
+            <a:schemeClr val="accent1"/>
+          </a:effectRef>
+          <a:fontRef idx="minor">
+            <a:schemeClr val="tx1"/>
+          </a:fontRef>
+        </p:style>
+      </p:cxnSp>
+      <p:cxnSp>
+        <p:nvCxnSpPr>
+          <p:cNvPr id="48" name="Connector 47"/>
+          <p:cNvCxnSpPr/>
+          <p:nvPr/>
+        </p:nvCxnSpPr>
+        <p:spPr>
+          <a:xfrm>
+            <a:off x="10450563" y="2411272"/>
+            <a:ext cx="73152" cy="0"/>
+          </a:xfrm>
+          <a:prstGeom prst="line">
+            <a:avLst/>
+          </a:prstGeom>
+          <a:ln w="14604">
+            <a:solidFill>
+              <a:srgbClr val="6C7372"/>
+            </a:solidFill>
+            <a:tailEnd type="triangle" w="med" len="med"/>
+          </a:ln>
+          <a:effectLst/>
+        </p:spPr>
+        <p:style>
+          <a:lnRef idx="2">
+            <a:schemeClr val="accent1"/>
+          </a:lnRef>
+          <a:fillRef idx="0">
+            <a:schemeClr val="accent1"/>
+          </a:fillRef>
+          <a:effectRef idx="1">
+            <a:schemeClr val="accent1"/>
+          </a:effectRef>
+          <a:fontRef idx="minor">
+            <a:schemeClr val="tx1"/>
+          </a:fontRef>
+        </p:style>
+      </p:cxnSp>
+      <p:sp>
+        <p:nvSpPr>
+          <p:cNvPr id="49" name="Rectangle 48"/>
           <p:cNvSpPr/>
           <p:nvPr/>
         </p:nvSpPr>
         <p:spPr>
           <a:xfrm>
-            <a:off x="2490939" y="2237536"/>
+            <a:off x="2490939" y="2155240"/>
             <a:ext cx="1572768" cy="512064"/>
           </a:xfrm>
           <a:prstGeom prst="rect">
@@ -34883,13 +35193,13 @@
       </p:sp>
       <p:sp>
         <p:nvSpPr>
-          <p:cNvPr id="42" name="TextBox 41"/>
-          <p:cNvSpPr txBox="1"/>
-          <p:nvPr/>
-        </p:nvSpPr>
-        <p:spPr>
-          <a:xfrm>
-            <a:off x="2582379" y="2237536"/>
+          <p:cNvPr id="50" name="TextBox 49"/>
+          <p:cNvSpPr txBox="1"/>
+          <p:nvPr/>
+        </p:nvSpPr>
+        <p:spPr>
+          <a:xfrm>
+            <a:off x="2582379" y="2155240"/>
             <a:ext cx="1389888" cy="512064"/>
           </a:xfrm>
           <a:prstGeom prst="rect">
@@ -34924,13 +35234,13 @@
       </p:sp>
       <p:sp>
         <p:nvSpPr>
-          <p:cNvPr id="43" name="Rectangle 42"/>
+          <p:cNvPr id="51" name="Rectangle 50"/>
           <p:cNvSpPr/>
           <p:nvPr/>
         </p:nvSpPr>
         <p:spPr>
           <a:xfrm>
-            <a:off x="4579543" y="3023920"/>
+            <a:off x="4579543" y="2941624"/>
             <a:ext cx="1064475" cy="512064"/>
           </a:xfrm>
           <a:prstGeom prst="rect">
@@ -34970,13 +35280,13 @@
       </p:sp>
       <p:sp>
         <p:nvSpPr>
-          <p:cNvPr id="44" name="TextBox 43"/>
-          <p:cNvSpPr txBox="1"/>
-          <p:nvPr/>
-        </p:nvSpPr>
-        <p:spPr>
-          <a:xfrm>
-            <a:off x="4670983" y="3023920"/>
+          <p:cNvPr id="52" name="TextBox 51"/>
+          <p:cNvSpPr txBox="1"/>
+          <p:nvPr/>
+        </p:nvSpPr>
+        <p:spPr>
+          <a:xfrm>
+            <a:off x="4670983" y="2941624"/>
             <a:ext cx="881595" cy="512064"/>
           </a:xfrm>
           <a:prstGeom prst="rect">
@@ -35011,13 +35321,13 @@
       </p:sp>
       <p:sp>
         <p:nvSpPr>
-          <p:cNvPr id="45" name="Rectangle 44"/>
+          <p:cNvPr id="53" name="Rectangle 52"/>
           <p:cNvSpPr/>
           <p:nvPr/>
         </p:nvSpPr>
         <p:spPr>
           <a:xfrm>
-            <a:off x="5717171" y="3023920"/>
+            <a:off x="5717171" y="2941624"/>
             <a:ext cx="1064475" cy="512064"/>
           </a:xfrm>
           <a:prstGeom prst="rect">
@@ -35057,13 +35367,13 @@
       </p:sp>
       <p:sp>
         <p:nvSpPr>
-          <p:cNvPr id="46" name="TextBox 45"/>
-          <p:cNvSpPr txBox="1"/>
-          <p:nvPr/>
-        </p:nvSpPr>
-        <p:spPr>
-          <a:xfrm>
-            <a:off x="5808611" y="3023920"/>
+          <p:cNvPr id="54" name="TextBox 53"/>
+          <p:cNvSpPr txBox="1"/>
+          <p:nvPr/>
+        </p:nvSpPr>
+        <p:spPr>
+          <a:xfrm>
+            <a:off x="5808611" y="2941624"/>
             <a:ext cx="881595" cy="512064"/>
           </a:xfrm>
           <a:prstGeom prst="rect">
@@ -35098,13 +35408,13 @@
       </p:sp>
       <p:sp>
         <p:nvSpPr>
-          <p:cNvPr id="47" name="Rectangle 46"/>
+          <p:cNvPr id="55" name="Rectangle 54"/>
           <p:cNvSpPr/>
           <p:nvPr/>
         </p:nvSpPr>
         <p:spPr>
           <a:xfrm>
-            <a:off x="4894211" y="3810304"/>
+            <a:off x="4894211" y="3728008"/>
             <a:ext cx="1572768" cy="512064"/>
           </a:xfrm>
           <a:prstGeom prst="rect">
@@ -35144,13 +35454,13 @@
       </p:sp>
       <p:sp>
         <p:nvSpPr>
-          <p:cNvPr id="48" name="TextBox 47"/>
-          <p:cNvSpPr txBox="1"/>
-          <p:nvPr/>
-        </p:nvSpPr>
-        <p:spPr>
-          <a:xfrm>
-            <a:off x="4985651" y="3810304"/>
+          <p:cNvPr id="56" name="TextBox 55"/>
+          <p:cNvSpPr txBox="1"/>
+          <p:nvPr/>
+        </p:nvSpPr>
+        <p:spPr>
+          <a:xfrm>
+            <a:off x="4985651" y="3728008"/>
             <a:ext cx="1389888" cy="512064"/>
           </a:xfrm>
           <a:prstGeom prst="rect">
@@ -35185,13 +35495,13 @@
       </p:sp>
       <p:sp>
         <p:nvSpPr>
-          <p:cNvPr id="49" name="Rectangle 48"/>
+          <p:cNvPr id="57" name="Rectangle 56"/>
           <p:cNvSpPr/>
           <p:nvPr/>
         </p:nvSpPr>
         <p:spPr>
           <a:xfrm>
-            <a:off x="6982815" y="3023920"/>
+            <a:off x="6982815" y="2941624"/>
             <a:ext cx="1064475" cy="512064"/>
           </a:xfrm>
           <a:prstGeom prst="rect">
@@ -35231,13 +35541,13 @@
       </p:sp>
       <p:sp>
         <p:nvSpPr>
-          <p:cNvPr id="50" name="TextBox 49"/>
-          <p:cNvSpPr txBox="1"/>
-          <p:nvPr/>
-        </p:nvSpPr>
-        <p:spPr>
-          <a:xfrm>
-            <a:off x="7074255" y="3023920"/>
+          <p:cNvPr id="58" name="TextBox 57"/>
+          <p:cNvSpPr txBox="1"/>
+          <p:nvPr/>
+        </p:nvSpPr>
+        <p:spPr>
+          <a:xfrm>
+            <a:off x="7074255" y="2941624"/>
             <a:ext cx="881595" cy="512064"/>
           </a:xfrm>
           <a:prstGeom prst="rect">
@@ -35272,13 +35582,13 @@
       </p:sp>
       <p:sp>
         <p:nvSpPr>
-          <p:cNvPr id="51" name="Rectangle 50"/>
+          <p:cNvPr id="59" name="Rectangle 58"/>
           <p:cNvSpPr/>
           <p:nvPr/>
         </p:nvSpPr>
         <p:spPr>
           <a:xfrm>
-            <a:off x="7297483" y="3810304"/>
+            <a:off x="7297483" y="3728008"/>
             <a:ext cx="1572768" cy="512064"/>
           </a:xfrm>
           <a:prstGeom prst="rect">
@@ -35318,13 +35628,13 @@
       </p:sp>
       <p:sp>
         <p:nvSpPr>
-          <p:cNvPr id="52" name="TextBox 51"/>
-          <p:cNvSpPr txBox="1"/>
-          <p:nvPr/>
-        </p:nvSpPr>
-        <p:spPr>
-          <a:xfrm>
-            <a:off x="7388923" y="3810304"/>
+          <p:cNvPr id="60" name="TextBox 59"/>
+          <p:cNvSpPr txBox="1"/>
+          <p:nvPr/>
+        </p:nvSpPr>
+        <p:spPr>
+          <a:xfrm>
+            <a:off x="7388923" y="3728008"/>
             <a:ext cx="1389888" cy="512064"/>
           </a:xfrm>
           <a:prstGeom prst="rect">
@@ -35359,13 +35669,13 @@
       </p:sp>
       <p:sp>
         <p:nvSpPr>
-          <p:cNvPr id="53" name="Rectangle 52"/>
+          <p:cNvPr id="61" name="Rectangle 60"/>
           <p:cNvSpPr/>
           <p:nvPr/>
         </p:nvSpPr>
         <p:spPr>
           <a:xfrm>
-            <a:off x="7297483" y="4596688"/>
+            <a:off x="7297483" y="4514392"/>
             <a:ext cx="1572768" cy="512064"/>
           </a:xfrm>
           <a:prstGeom prst="rect">
@@ -35405,13 +35715,13 @@
       </p:sp>
       <p:sp>
         <p:nvSpPr>
-          <p:cNvPr id="54" name="TextBox 53"/>
-          <p:cNvSpPr txBox="1"/>
-          <p:nvPr/>
-        </p:nvSpPr>
-        <p:spPr>
-          <a:xfrm>
-            <a:off x="7388923" y="4596688"/>
+          <p:cNvPr id="62" name="TextBox 61"/>
+          <p:cNvSpPr txBox="1"/>
+          <p:nvPr/>
+        </p:nvSpPr>
+        <p:spPr>
+          <a:xfrm>
+            <a:off x="7388923" y="4514392"/>
             <a:ext cx="1389888" cy="512064"/>
           </a:xfrm>
           <a:prstGeom prst="rect">
@@ -35446,13 +35756,13 @@
       </p:sp>
       <p:sp>
         <p:nvSpPr>
-          <p:cNvPr id="55" name="Rectangle 54"/>
+          <p:cNvPr id="63" name="Rectangle 62"/>
           <p:cNvSpPr/>
           <p:nvPr/>
         </p:nvSpPr>
         <p:spPr>
           <a:xfrm>
-            <a:off x="8120443" y="3023920"/>
+            <a:off x="8120443" y="2941624"/>
             <a:ext cx="1064475" cy="512064"/>
           </a:xfrm>
           <a:prstGeom prst="rect">
@@ -35492,13 +35802,13 @@
       </p:sp>
       <p:sp>
         <p:nvSpPr>
-          <p:cNvPr id="56" name="TextBox 55"/>
-          <p:cNvSpPr txBox="1"/>
-          <p:nvPr/>
-        </p:nvSpPr>
-        <p:spPr>
-          <a:xfrm>
-            <a:off x="8211883" y="3023920"/>
+          <p:cNvPr id="64" name="TextBox 63"/>
+          <p:cNvSpPr txBox="1"/>
+          <p:nvPr/>
+        </p:nvSpPr>
+        <p:spPr>
+          <a:xfrm>
+            <a:off x="8211883" y="2941624"/>
             <a:ext cx="881595" cy="512064"/>
           </a:xfrm>
           <a:prstGeom prst="rect">
@@ -35533,13 +35843,13 @@
       </p:sp>
       <p:sp>
         <p:nvSpPr>
-          <p:cNvPr id="57" name="Rectangle 56"/>
+          <p:cNvPr id="65" name="Rectangle 64"/>
           <p:cNvSpPr/>
           <p:nvPr/>
         </p:nvSpPr>
         <p:spPr>
           <a:xfrm>
-            <a:off x="9386087" y="2237536"/>
+            <a:off x="9386087" y="2155240"/>
             <a:ext cx="1064475" cy="512064"/>
           </a:xfrm>
           <a:prstGeom prst="rect">
@@ -35579,13 +35889,13 @@
       </p:sp>
       <p:sp>
         <p:nvSpPr>
-          <p:cNvPr id="58" name="TextBox 57"/>
-          <p:cNvSpPr txBox="1"/>
-          <p:nvPr/>
-        </p:nvSpPr>
-        <p:spPr>
-          <a:xfrm>
-            <a:off x="9477527" y="2237536"/>
+          <p:cNvPr id="66" name="TextBox 65"/>
+          <p:cNvSpPr txBox="1"/>
+          <p:nvPr/>
+        </p:nvSpPr>
+        <p:spPr>
+          <a:xfrm>
+            <a:off x="9477527" y="2155240"/>
             <a:ext cx="881595" cy="512064"/>
           </a:xfrm>
           <a:prstGeom prst="rect">
@@ -35620,13 +35930,13 @@
       </p:sp>
       <p:sp>
         <p:nvSpPr>
-          <p:cNvPr id="59" name="Rectangle 58"/>
+          <p:cNvPr id="67" name="Rectangle 66"/>
           <p:cNvSpPr/>
           <p:nvPr/>
         </p:nvSpPr>
         <p:spPr>
           <a:xfrm>
-            <a:off x="10523715" y="2237536"/>
+            <a:off x="10523715" y="2155240"/>
             <a:ext cx="1064475" cy="512064"/>
           </a:xfrm>
           <a:prstGeom prst="rect">
@@ -35666,13 +35976,13 @@
       </p:sp>
       <p:sp>
         <p:nvSpPr>
-          <p:cNvPr id="60" name="TextBox 59"/>
-          <p:cNvSpPr txBox="1"/>
-          <p:nvPr/>
-        </p:nvSpPr>
-        <p:spPr>
-          <a:xfrm>
-            <a:off x="10615155" y="2237536"/>
+          <p:cNvPr id="68" name="TextBox 67"/>
+          <p:cNvSpPr txBox="1"/>
+          <p:nvPr/>
+        </p:nvSpPr>
+        <p:spPr>
+          <a:xfrm>
+            <a:off x="10615155" y="2155240"/>
             <a:ext cx="881595" cy="512064"/>
           </a:xfrm>
           <a:prstGeom prst="rect">
@@ -35707,7 +36017,7 @@
       </p:sp>
       <p:sp>
         <p:nvSpPr>
-          <p:cNvPr id="61" name="Rectangle 60"/>
+          <p:cNvPr id="69" name="Rectangle 68"/>
           <p:cNvSpPr/>
           <p:nvPr/>
         </p:nvSpPr>
@@ -35751,7 +36061,7 @@
       </p:sp>
       <p:sp>
         <p:nvSpPr>
-          <p:cNvPr id="62" name="TextBox 61"/>
+          <p:cNvPr id="70" name="TextBox 69"/>
           <p:cNvSpPr txBox="1"/>
           <p:nvPr/>
         </p:nvSpPr>
@@ -35792,7 +36102,7 @@
       </p:sp>
       <p:sp>
         <p:nvSpPr>
-          <p:cNvPr id="63" name="TextBox 62"/>
+          <p:cNvPr id="71" name="TextBox 70"/>
           <p:cNvSpPr txBox="1"/>
           <p:nvPr/>
         </p:nvSpPr>
@@ -35833,7 +36143,7 @@
       </p:sp>
       <p:sp>
         <p:nvSpPr>
-          <p:cNvPr id="64" name="Rectangle 63"/>
+          <p:cNvPr id="72" name="Rectangle 71"/>
           <p:cNvSpPr/>
           <p:nvPr/>
         </p:nvSpPr>
@@ -35877,7 +36187,7 @@
       </p:sp>
       <p:sp>
         <p:nvSpPr>
-          <p:cNvPr id="65" name="TextBox 64"/>
+          <p:cNvPr id="73" name="TextBox 72"/>
           <p:cNvSpPr txBox="1"/>
           <p:nvPr/>
         </p:nvSpPr>
@@ -35918,7 +36228,7 @@
       </p:sp>
       <p:sp>
         <p:nvSpPr>
-          <p:cNvPr id="66" name="TextBox 65"/>
+          <p:cNvPr id="74" name="TextBox 73"/>
           <p:cNvSpPr txBox="1"/>
           <p:nvPr/>
         </p:nvSpPr>

--- a/examples/gallery/pattern_gallery.pptx
+++ b/examples/gallery/pattern_gallery.pptx
@@ -36430,8 +36430,8 @@
         </p:nvCxnSpPr>
         <p:spPr>
           <a:xfrm>
-            <a:off x="1892808" y="2628900"/>
-            <a:ext cx="9686239" cy="0"/>
+            <a:off x="1728216" y="2628900"/>
+            <a:ext cx="8735263" cy="0"/>
           </a:xfrm>
           <a:prstGeom prst="line">
             <a:avLst/>
@@ -36466,8 +36466,8 @@
         </p:nvSpPr>
         <p:spPr>
           <a:xfrm>
-            <a:off x="667512" y="2519172"/>
-            <a:ext cx="1133856" cy="219456"/>
+            <a:off x="594360" y="2519172"/>
+            <a:ext cx="1005840" cy="219456"/>
           </a:xfrm>
           <a:prstGeom prst="rect">
             <a:avLst/>
@@ -36509,8 +36509,8 @@
         </p:nvCxnSpPr>
         <p:spPr>
           <a:xfrm>
-            <a:off x="1892808" y="4686300"/>
-            <a:ext cx="9686239" cy="0"/>
+            <a:off x="1728216" y="4686300"/>
+            <a:ext cx="8735263" cy="0"/>
           </a:xfrm>
           <a:prstGeom prst="line">
             <a:avLst/>
@@ -36545,8 +36545,8 @@
         </p:nvSpPr>
         <p:spPr>
           <a:xfrm>
-            <a:off x="667512" y="4576572"/>
-            <a:ext cx="1133856" cy="219456"/>
+            <a:off x="594360" y="4576572"/>
+            <a:ext cx="1005840" cy="219456"/>
           </a:xfrm>
           <a:prstGeom prst="rect">
             <a:avLst/>
@@ -36588,8 +36588,8 @@
         </p:nvSpPr>
         <p:spPr>
           <a:xfrm>
-            <a:off x="2121773" y="1591056"/>
-            <a:ext cx="1334292" cy="420624"/>
+            <a:off x="1383761" y="1591056"/>
+            <a:ext cx="1286012" cy="420624"/>
           </a:xfrm>
           <a:prstGeom prst="rect">
             <a:avLst/>
@@ -36629,8 +36629,8 @@
         </p:nvCxnSpPr>
         <p:spPr>
           <a:xfrm>
-            <a:off x="2048621" y="2011680"/>
-            <a:ext cx="1480597" cy="0"/>
+            <a:off x="1310609" y="2011680"/>
+            <a:ext cx="1432316" cy="0"/>
           </a:xfrm>
           <a:prstGeom prst="line">
             <a:avLst/>
@@ -36665,7 +36665,7 @@
         </p:nvCxnSpPr>
         <p:spPr>
           <a:xfrm>
-            <a:off x="2788920" y="2011680"/>
+            <a:off x="2026767" y="2011680"/>
             <a:ext cx="0" cy="3557016"/>
           </a:xfrm>
           <a:prstGeom prst="line">
@@ -36702,8 +36702,8 @@
         </p:nvSpPr>
         <p:spPr>
           <a:xfrm>
-            <a:off x="4224893" y="1591056"/>
-            <a:ext cx="1334292" cy="420624"/>
+            <a:off x="3418301" y="1591056"/>
+            <a:ext cx="1286012" cy="420624"/>
           </a:xfrm>
           <a:prstGeom prst="rect">
             <a:avLst/>
@@ -36743,8 +36743,8 @@
         </p:nvCxnSpPr>
         <p:spPr>
           <a:xfrm>
-            <a:off x="4151741" y="2011680"/>
-            <a:ext cx="1480597" cy="0"/>
+            <a:off x="3345149" y="2011680"/>
+            <a:ext cx="1432316" cy="0"/>
           </a:xfrm>
           <a:prstGeom prst="line">
             <a:avLst/>
@@ -36779,7 +36779,7 @@
         </p:nvCxnSpPr>
         <p:spPr>
           <a:xfrm>
-            <a:off x="4892040" y="2011680"/>
+            <a:off x="4061307" y="2011680"/>
             <a:ext cx="0" cy="3557016"/>
           </a:xfrm>
           <a:prstGeom prst="line">
@@ -36816,8 +36816,8 @@
         </p:nvSpPr>
         <p:spPr>
           <a:xfrm>
-            <a:off x="6328013" y="1591056"/>
-            <a:ext cx="1334292" cy="420624"/>
+            <a:off x="5452841" y="1591056"/>
+            <a:ext cx="1286012" cy="420624"/>
           </a:xfrm>
           <a:prstGeom prst="rect">
             <a:avLst/>
@@ -36857,8 +36857,8 @@
         </p:nvCxnSpPr>
         <p:spPr>
           <a:xfrm>
-            <a:off x="6254861" y="2011680"/>
-            <a:ext cx="1480597" cy="0"/>
+            <a:off x="5379689" y="2011680"/>
+            <a:ext cx="1432316" cy="0"/>
           </a:xfrm>
           <a:prstGeom prst="line">
             <a:avLst/>
@@ -36893,7 +36893,7 @@
         </p:nvCxnSpPr>
         <p:spPr>
           <a:xfrm>
-            <a:off x="6995159" y="2011680"/>
+            <a:off x="6095847" y="2011680"/>
             <a:ext cx="0" cy="3557016"/>
           </a:xfrm>
           <a:prstGeom prst="line">
@@ -36930,8 +36930,8 @@
         </p:nvSpPr>
         <p:spPr>
           <a:xfrm>
-            <a:off x="8431133" y="1591056"/>
-            <a:ext cx="1334292" cy="420624"/>
+            <a:off x="7487381" y="1591056"/>
+            <a:ext cx="1286012" cy="420624"/>
           </a:xfrm>
           <a:prstGeom prst="rect">
             <a:avLst/>
@@ -36971,8 +36971,8 @@
         </p:nvCxnSpPr>
         <p:spPr>
           <a:xfrm>
-            <a:off x="8357981" y="2011680"/>
-            <a:ext cx="1480597" cy="0"/>
+            <a:off x="7414229" y="2011680"/>
+            <a:ext cx="1432316" cy="0"/>
           </a:xfrm>
           <a:prstGeom prst="line">
             <a:avLst/>
@@ -37007,7 +37007,7 @@
         </p:nvCxnSpPr>
         <p:spPr>
           <a:xfrm>
-            <a:off x="9098280" y="2011680"/>
+            <a:off x="8130387" y="2011680"/>
             <a:ext cx="0" cy="3557016"/>
           </a:xfrm>
           <a:prstGeom prst="line">
@@ -37044,8 +37044,8 @@
         </p:nvSpPr>
         <p:spPr>
           <a:xfrm>
-            <a:off x="10534253" y="1591056"/>
-            <a:ext cx="1334292" cy="420624"/>
+            <a:off x="9521921" y="1591056"/>
+            <a:ext cx="1286012" cy="420624"/>
           </a:xfrm>
           <a:prstGeom prst="rect">
             <a:avLst/>
@@ -37085,8 +37085,8 @@
         </p:nvCxnSpPr>
         <p:spPr>
           <a:xfrm>
-            <a:off x="10461101" y="2011680"/>
-            <a:ext cx="1480597" cy="0"/>
+            <a:off x="9448769" y="2011680"/>
+            <a:ext cx="1432316" cy="0"/>
           </a:xfrm>
           <a:prstGeom prst="line">
             <a:avLst/>
@@ -37121,7 +37121,7 @@
         </p:nvCxnSpPr>
         <p:spPr>
           <a:xfrm>
-            <a:off x="11201400" y="2011680"/>
+            <a:off x="10164927" y="2011680"/>
             <a:ext cx="0" cy="3557016"/>
           </a:xfrm>
           <a:prstGeom prst="line">
@@ -37158,8 +37158,8 @@
         </p:nvCxnSpPr>
         <p:spPr>
           <a:xfrm flipH="1">
-            <a:off x="2788920" y="2423160"/>
-            <a:ext cx="2103120" cy="0"/>
+            <a:off x="2026767" y="2423160"/>
+            <a:ext cx="2034540" cy="0"/>
           </a:xfrm>
           <a:prstGeom prst="line">
             <a:avLst/>
@@ -37195,7 +37195,7 @@
         </p:nvSpPr>
         <p:spPr>
           <a:xfrm>
-            <a:off x="3054095" y="2176272"/>
+            <a:off x="2257653" y="2176272"/>
             <a:ext cx="1572768" cy="219456"/>
           </a:xfrm>
           <a:prstGeom prst="rect">
@@ -37238,8 +37238,8 @@
         </p:nvCxnSpPr>
         <p:spPr>
           <a:xfrm>
-            <a:off x="2788920" y="2834640"/>
-            <a:ext cx="4206239" cy="0"/>
+            <a:off x="2026767" y="2834640"/>
+            <a:ext cx="4069080" cy="0"/>
           </a:xfrm>
           <a:prstGeom prst="line">
             <a:avLst/>
@@ -37275,7 +37275,7 @@
         </p:nvSpPr>
         <p:spPr>
           <a:xfrm>
-            <a:off x="4105655" y="2587752"/>
+            <a:off x="3274923" y="2587752"/>
             <a:ext cx="1572768" cy="219456"/>
           </a:xfrm>
           <a:prstGeom prst="rect">
@@ -37318,8 +37318,8 @@
         </p:nvCxnSpPr>
         <p:spPr>
           <a:xfrm flipH="1">
-            <a:off x="2788920" y="3246120"/>
-            <a:ext cx="4206239" cy="0"/>
+            <a:off x="2026767" y="3246120"/>
+            <a:ext cx="4069080" cy="0"/>
           </a:xfrm>
           <a:prstGeom prst="line">
             <a:avLst/>
@@ -37356,7 +37356,7 @@
         </p:nvSpPr>
         <p:spPr>
           <a:xfrm>
-            <a:off x="4105655" y="2999232"/>
+            <a:off x="3274923" y="2999232"/>
             <a:ext cx="1572768" cy="219456"/>
           </a:xfrm>
           <a:prstGeom prst="rect">
@@ -37399,8 +37399,8 @@
         </p:nvCxnSpPr>
         <p:spPr>
           <a:xfrm>
-            <a:off x="4892040" y="3657600"/>
-            <a:ext cx="2103119" cy="0"/>
+            <a:off x="4061307" y="3657600"/>
+            <a:ext cx="2034540" cy="0"/>
           </a:xfrm>
           <a:prstGeom prst="line">
             <a:avLst/>
@@ -37436,7 +37436,7 @@
         </p:nvSpPr>
         <p:spPr>
           <a:xfrm>
-            <a:off x="5157216" y="3410712"/>
+            <a:off x="4292193" y="3410712"/>
             <a:ext cx="1572768" cy="219456"/>
           </a:xfrm>
           <a:prstGeom prst="rect">
@@ -37479,8 +37479,8 @@
         </p:nvCxnSpPr>
         <p:spPr>
           <a:xfrm>
-            <a:off x="6995159" y="4069080"/>
-            <a:ext cx="2103121" cy="0"/>
+            <a:off x="6095847" y="4069080"/>
+            <a:ext cx="2034540" cy="0"/>
           </a:xfrm>
           <a:prstGeom prst="line">
             <a:avLst/>
@@ -37516,7 +37516,7 @@
         </p:nvSpPr>
         <p:spPr>
           <a:xfrm>
-            <a:off x="7260335" y="3822191"/>
+            <a:off x="6326733" y="3822191"/>
             <a:ext cx="1572768" cy="219456"/>
           </a:xfrm>
           <a:prstGeom prst="rect">
@@ -37559,8 +37559,8 @@
         </p:nvCxnSpPr>
         <p:spPr>
           <a:xfrm>
-            <a:off x="9098280" y="4480560"/>
-            <a:ext cx="2103120" cy="0"/>
+            <a:off x="8130387" y="4480560"/>
+            <a:ext cx="2034540" cy="0"/>
           </a:xfrm>
           <a:prstGeom prst="line">
             <a:avLst/>
@@ -37596,7 +37596,7 @@
         </p:nvSpPr>
         <p:spPr>
           <a:xfrm>
-            <a:off x="9363456" y="4233672"/>
+            <a:off x="8361273" y="4233672"/>
             <a:ext cx="1572768" cy="219456"/>
           </a:xfrm>
           <a:prstGeom prst="rect">
@@ -37639,8 +37639,8 @@
         </p:nvCxnSpPr>
         <p:spPr>
           <a:xfrm flipH="1">
-            <a:off x="9098280" y="4892040"/>
-            <a:ext cx="2103120" cy="0"/>
+            <a:off x="8130387" y="4892040"/>
+            <a:ext cx="2034540" cy="0"/>
           </a:xfrm>
           <a:prstGeom prst="line">
             <a:avLst/>
@@ -37677,7 +37677,7 @@
         </p:nvSpPr>
         <p:spPr>
           <a:xfrm>
-            <a:off x="9363456" y="4645152"/>
+            <a:off x="8361273" y="4645152"/>
             <a:ext cx="1572768" cy="219456"/>
           </a:xfrm>
           <a:prstGeom prst="rect">
@@ -37720,8 +37720,8 @@
         </p:nvCxnSpPr>
         <p:spPr>
           <a:xfrm flipH="1">
-            <a:off x="2788920" y="5303520"/>
-            <a:ext cx="2103120" cy="0"/>
+            <a:off x="2026767" y="5303520"/>
+            <a:ext cx="2034540" cy="0"/>
           </a:xfrm>
           <a:prstGeom prst="line">
             <a:avLst/>
@@ -37757,7 +37757,7 @@
         </p:nvSpPr>
         <p:spPr>
           <a:xfrm>
-            <a:off x="3054095" y="5056631"/>
+            <a:off x="2257653" y="5056631"/>
             <a:ext cx="1572768" cy="219456"/>
           </a:xfrm>
           <a:prstGeom prst="rect">

--- a/examples/gallery/pattern_gallery.pptx
+++ b/examples/gallery/pattern_gallery.pptx
@@ -30498,159 +30498,178 @@
       </p:sp>
       <p:sp>
         <p:nvSpPr>
-          <p:cNvPr id="5" name="TextBox 4"/>
-          <p:cNvSpPr txBox="1"/>
-          <p:nvPr/>
-        </p:nvSpPr>
-        <p:spPr>
-          <a:xfrm>
-            <a:off x="649224" y="1645920"/>
-            <a:ext cx="4069080" cy="274320"/>
-          </a:xfrm>
-          <a:prstGeom prst="rect">
-            <a:avLst/>
-          </a:prstGeom>
-          <a:noFill/>
-        </p:spPr>
-        <p:txBody>
-          <a:bodyPr wrap="square" anchor="t" lIns="0" rIns="0" tIns="0" bIns="0">
-            <a:spAutoFit/>
-          </a:bodyPr>
-          <a:lstStyle/>
-          <a:p>
-            <a:pPr algn="l">
-              <a:lnSpc>
-                <a:spcPct val="130000"/>
-              </a:lnSpc>
-            </a:pPr>
-            <a:r>
-              <a:rPr sz="1450" b="1" lang="ja-JP">
-                <a:solidFill>
-                  <a:srgbClr val="182C43"/>
-                </a:solidFill>
-                <a:latin typeface="Yu Gothic"/>
-                <a:ea typeface="Yu Gothic"/>
-                <a:cs typeface="Yu Gothic"/>
-              </a:rPr>
-              <a:t>主要課題</a:t>
-            </a:r>
-          </a:p>
-        </p:txBody>
-      </p:sp>
-      <p:sp>
-        <p:nvSpPr>
-          <p:cNvPr id="6" name="TextBox 5"/>
-          <p:cNvSpPr txBox="1"/>
-          <p:nvPr/>
-        </p:nvSpPr>
-        <p:spPr>
-          <a:xfrm>
-            <a:off x="7473391" y="1645920"/>
-            <a:ext cx="4069080" cy="274320"/>
-          </a:xfrm>
-          <a:prstGeom prst="rect">
-            <a:avLst/>
-          </a:prstGeom>
-          <a:noFill/>
-        </p:spPr>
-        <p:txBody>
-          <a:bodyPr wrap="square" anchor="t" lIns="0" rIns="0" tIns="0" bIns="0">
-            <a:spAutoFit/>
-          </a:bodyPr>
-          <a:lstStyle/>
-          <a:p>
-            <a:pPr algn="l">
-              <a:lnSpc>
-                <a:spcPct val="130000"/>
-              </a:lnSpc>
-            </a:pPr>
-            <a:r>
-              <a:rPr sz="1450" b="1" lang="ja-JP">
-                <a:solidFill>
-                  <a:srgbClr val="182C43"/>
-                </a:solidFill>
-                <a:latin typeface="Yu Gothic"/>
-                <a:ea typeface="Yu Gothic"/>
-                <a:cs typeface="Yu Gothic"/>
-              </a:rPr>
-              <a:t>対応施策</a:t>
-            </a:r>
-          </a:p>
-        </p:txBody>
-      </p:sp>
-      <p:cxnSp>
-        <p:nvCxnSpPr>
-          <p:cNvPr id="7" name="Connector 6"/>
-          <p:cNvCxnSpPr/>
-          <p:nvPr/>
-        </p:nvCxnSpPr>
-        <p:spPr>
-          <a:xfrm>
-            <a:off x="4718304" y="2686050"/>
-            <a:ext cx="2755087" cy="0"/>
-          </a:xfrm>
-          <a:prstGeom prst="line">
-            <a:avLst/>
-          </a:prstGeom>
-          <a:ln w="45720">
-            <a:solidFill>
-              <a:srgbClr val="F7F5EF"/>
-            </a:solidFill>
+          <p:cNvPr id="5" name="Rounded Rectangle 4"/>
+          <p:cNvSpPr/>
+          <p:nvPr/>
+        </p:nvSpPr>
+        <p:spPr>
+          <a:xfrm>
+            <a:off x="1097280" y="1645920"/>
+            <a:ext cx="4069080" cy="384048"/>
+          </a:xfrm>
+          <a:prstGeom prst="roundRect">
+            <a:avLst>
+              <a:gd name="adj" fmla="val 6000"/>
+            </a:avLst>
+          </a:prstGeom>
+          <a:solidFill>
+            <a:srgbClr val="ECEAE4"/>
+          </a:solidFill>
+          <a:ln>
+            <a:noFill/>
           </a:ln>
           <a:effectLst/>
         </p:spPr>
         <p:style>
-          <a:lnRef idx="2">
+          <a:lnRef idx="1">
             <a:schemeClr val="accent1"/>
           </a:lnRef>
-          <a:fillRef idx="0">
+          <a:fillRef idx="3">
             <a:schemeClr val="accent1"/>
           </a:fillRef>
-          <a:effectRef idx="1">
+          <a:effectRef idx="2">
             <a:schemeClr val="accent1"/>
           </a:effectRef>
           <a:fontRef idx="minor">
-            <a:schemeClr val="tx1"/>
+            <a:schemeClr val="lt1"/>
           </a:fontRef>
         </p:style>
-      </p:cxnSp>
-      <p:cxnSp>
-        <p:nvCxnSpPr>
-          <p:cNvPr id="8" name="Connector 7"/>
-          <p:cNvCxnSpPr/>
-          <p:nvPr/>
-        </p:nvCxnSpPr>
-        <p:spPr>
-          <a:xfrm>
-            <a:off x="4718304" y="2686050"/>
-            <a:ext cx="2755087" cy="0"/>
-          </a:xfrm>
-          <a:prstGeom prst="line">
-            <a:avLst/>
-          </a:prstGeom>
-          <a:ln w="17780">
-            <a:solidFill>
-              <a:srgbClr val="0D7870"/>
-            </a:solidFill>
-            <a:tailEnd type="triangle" w="med" len="med"/>
+        <p:txBody>
+          <a:bodyPr rtlCol="0" anchor="ctr"/>
+          <a:lstStyle/>
+          <a:p>
+            <a:pPr algn="ctr"/>
+          </a:p>
+        </p:txBody>
+      </p:sp>
+      <p:sp>
+        <p:nvSpPr>
+          <p:cNvPr id="6" name="TextBox 5"/>
+          <p:cNvSpPr txBox="1"/>
+          <p:nvPr/>
+        </p:nvSpPr>
+        <p:spPr>
+          <a:xfrm>
+            <a:off x="1536192" y="1645920"/>
+            <a:ext cx="3465576" cy="384048"/>
+          </a:xfrm>
+          <a:prstGeom prst="rect">
+            <a:avLst/>
+          </a:prstGeom>
+          <a:noFill/>
+        </p:spPr>
+        <p:txBody>
+          <a:bodyPr wrap="square" anchor="ctr" lIns="0" rIns="0" tIns="0" bIns="0">
+            <a:spAutoFit/>
+          </a:bodyPr>
+          <a:lstStyle/>
+          <a:p>
+            <a:pPr algn="l">
+              <a:lnSpc>
+                <a:spcPct val="130000"/>
+              </a:lnSpc>
+            </a:pPr>
+            <a:r>
+              <a:rPr sz="1300" b="1" lang="ja-JP">
+                <a:solidFill>
+                  <a:srgbClr val="182C43"/>
+                </a:solidFill>
+                <a:latin typeface="Yu Gothic"/>
+                <a:ea typeface="Yu Gothic"/>
+                <a:cs typeface="Yu Gothic"/>
+              </a:rPr>
+              <a:t>主要課題</a:t>
+            </a:r>
+          </a:p>
+        </p:txBody>
+      </p:sp>
+      <p:sp>
+        <p:nvSpPr>
+          <p:cNvPr id="7" name="Rounded Rectangle 6"/>
+          <p:cNvSpPr/>
+          <p:nvPr/>
+        </p:nvSpPr>
+        <p:spPr>
+          <a:xfrm>
+            <a:off x="7025335" y="1645920"/>
+            <a:ext cx="4069080" cy="384048"/>
+          </a:xfrm>
+          <a:prstGeom prst="roundRect">
+            <a:avLst>
+              <a:gd name="adj" fmla="val 6000"/>
+            </a:avLst>
+          </a:prstGeom>
+          <a:solidFill>
+            <a:srgbClr val="ECEAE4"/>
+          </a:solidFill>
+          <a:ln>
+            <a:noFill/>
           </a:ln>
           <a:effectLst/>
         </p:spPr>
         <p:style>
-          <a:lnRef idx="2">
+          <a:lnRef idx="1">
             <a:schemeClr val="accent1"/>
           </a:lnRef>
-          <a:fillRef idx="0">
+          <a:fillRef idx="3">
             <a:schemeClr val="accent1"/>
           </a:fillRef>
-          <a:effectRef idx="1">
+          <a:effectRef idx="2">
             <a:schemeClr val="accent1"/>
           </a:effectRef>
           <a:fontRef idx="minor">
-            <a:schemeClr val="tx1"/>
+            <a:schemeClr val="lt1"/>
           </a:fontRef>
         </p:style>
-      </p:cxnSp>
+        <p:txBody>
+          <a:bodyPr rtlCol="0" anchor="ctr"/>
+          <a:lstStyle/>
+          <a:p>
+            <a:pPr algn="ctr"/>
+          </a:p>
+        </p:txBody>
+      </p:sp>
+      <p:sp>
+        <p:nvSpPr>
+          <p:cNvPr id="8" name="TextBox 7"/>
+          <p:cNvSpPr txBox="1"/>
+          <p:nvPr/>
+        </p:nvSpPr>
+        <p:spPr>
+          <a:xfrm>
+            <a:off x="7464247" y="1645920"/>
+            <a:ext cx="3465576" cy="384048"/>
+          </a:xfrm>
+          <a:prstGeom prst="rect">
+            <a:avLst/>
+          </a:prstGeom>
+          <a:noFill/>
+        </p:spPr>
+        <p:txBody>
+          <a:bodyPr wrap="square" anchor="ctr" lIns="0" rIns="0" tIns="0" bIns="0">
+            <a:spAutoFit/>
+          </a:bodyPr>
+          <a:lstStyle/>
+          <a:p>
+            <a:pPr algn="l">
+              <a:lnSpc>
+                <a:spcPct val="130000"/>
+              </a:lnSpc>
+            </a:pPr>
+            <a:r>
+              <a:rPr sz="1300" b="1" lang="ja-JP">
+                <a:solidFill>
+                  <a:srgbClr val="182C43"/>
+                </a:solidFill>
+                <a:latin typeface="Yu Gothic"/>
+                <a:ea typeface="Yu Gothic"/>
+                <a:cs typeface="Yu Gothic"/>
+              </a:rPr>
+              <a:t>対応施策</a:t>
+            </a:r>
+          </a:p>
+        </p:txBody>
+      </p:sp>
       <p:cxnSp>
         <p:nvCxnSpPr>
           <p:cNvPr id="9" name="Connector 8"/>
@@ -30659,8 +30678,8 @@
         </p:nvCxnSpPr>
         <p:spPr>
           <a:xfrm>
-            <a:off x="4718304" y="3984498"/>
-            <a:ext cx="2755087" cy="0"/>
+            <a:off x="5166360" y="2386584"/>
+            <a:ext cx="1858975" cy="0"/>
           </a:xfrm>
           <a:prstGeom prst="line">
             <a:avLst/>
@@ -30695,15 +30714,15 @@
         </p:nvCxnSpPr>
         <p:spPr>
           <a:xfrm>
-            <a:off x="4718304" y="3984498"/>
-            <a:ext cx="2755087" cy="0"/>
+            <a:off x="5166360" y="2386584"/>
+            <a:ext cx="1858975" cy="0"/>
           </a:xfrm>
           <a:prstGeom prst="line">
             <a:avLst/>
           </a:prstGeom>
-          <a:ln w="12700">
+          <a:ln w="17780">
             <a:solidFill>
-              <a:srgbClr val="666E70"/>
+              <a:srgbClr val="0D7870"/>
             </a:solidFill>
             <a:tailEnd type="triangle" w="med" len="med"/>
           </a:ln>
@@ -30732,8 +30751,8 @@
         </p:nvCxnSpPr>
         <p:spPr>
           <a:xfrm>
-            <a:off x="4718304" y="3984498"/>
-            <a:ext cx="2755087" cy="649224"/>
+            <a:off x="5166360" y="3685032"/>
+            <a:ext cx="1858975" cy="0"/>
           </a:xfrm>
           <a:prstGeom prst="line">
             <a:avLst/>
@@ -30768,8 +30787,8 @@
         </p:nvCxnSpPr>
         <p:spPr>
           <a:xfrm>
-            <a:off x="4718304" y="3984498"/>
-            <a:ext cx="2755087" cy="649224"/>
+            <a:off x="5166360" y="3685032"/>
+            <a:ext cx="1858975" cy="0"/>
           </a:xfrm>
           <a:prstGeom prst="line">
             <a:avLst/>
@@ -30805,8 +30824,8 @@
         </p:nvCxnSpPr>
         <p:spPr>
           <a:xfrm>
-            <a:off x="4718304" y="3335274"/>
-            <a:ext cx="2755087" cy="0"/>
+            <a:off x="5166360" y="3685032"/>
+            <a:ext cx="1858975" cy="649224"/>
           </a:xfrm>
           <a:prstGeom prst="line">
             <a:avLst/>
@@ -30841,8 +30860,8 @@
         </p:nvCxnSpPr>
         <p:spPr>
           <a:xfrm>
-            <a:off x="4718304" y="3335274"/>
-            <a:ext cx="2755087" cy="0"/>
+            <a:off x="5166360" y="3685032"/>
+            <a:ext cx="1858975" cy="649224"/>
           </a:xfrm>
           <a:prstGeom prst="line">
             <a:avLst/>
@@ -30878,8 +30897,8 @@
         </p:nvCxnSpPr>
         <p:spPr>
           <a:xfrm>
-            <a:off x="4718304" y="5282946"/>
-            <a:ext cx="2755087" cy="0"/>
+            <a:off x="5166360" y="3035808"/>
+            <a:ext cx="1858975" cy="0"/>
           </a:xfrm>
           <a:prstGeom prst="line">
             <a:avLst/>
@@ -30914,8 +30933,8 @@
         </p:nvCxnSpPr>
         <p:spPr>
           <a:xfrm>
-            <a:off x="4718304" y="5282946"/>
-            <a:ext cx="2755087" cy="0"/>
+            <a:off x="5166360" y="3035808"/>
+            <a:ext cx="1858975" cy="0"/>
           </a:xfrm>
           <a:prstGeom prst="line">
             <a:avLst/>
@@ -30951,8 +30970,8 @@
         </p:nvCxnSpPr>
         <p:spPr>
           <a:xfrm>
-            <a:off x="4718304" y="4633722"/>
-            <a:ext cx="2755087" cy="0"/>
+            <a:off x="5166360" y="4983480"/>
+            <a:ext cx="1858975" cy="0"/>
           </a:xfrm>
           <a:prstGeom prst="line">
             <a:avLst/>
@@ -30987,8 +31006,8 @@
         </p:nvCxnSpPr>
         <p:spPr>
           <a:xfrm>
-            <a:off x="4718304" y="4633722"/>
-            <a:ext cx="2755087" cy="0"/>
+            <a:off x="5166360" y="4983480"/>
+            <a:ext cx="1858975" cy="0"/>
           </a:xfrm>
           <a:prstGeom prst="line">
             <a:avLst/>
@@ -31016,19 +31035,94 @@
           </a:fontRef>
         </p:style>
       </p:cxnSp>
-      <p:sp>
-        <p:nvSpPr>
-          <p:cNvPr id="19" name="Rectangle 18"/>
+      <p:cxnSp>
+        <p:nvCxnSpPr>
+          <p:cNvPr id="19" name="Connector 18"/>
+          <p:cNvCxnSpPr/>
+          <p:nvPr/>
+        </p:nvCxnSpPr>
+        <p:spPr>
+          <a:xfrm>
+            <a:off x="5166360" y="4334256"/>
+            <a:ext cx="1858975" cy="0"/>
+          </a:xfrm>
+          <a:prstGeom prst="line">
+            <a:avLst/>
+          </a:prstGeom>
+          <a:ln w="45720">
+            <a:solidFill>
+              <a:srgbClr val="F7F5EF"/>
+            </a:solidFill>
+          </a:ln>
+          <a:effectLst/>
+        </p:spPr>
+        <p:style>
+          <a:lnRef idx="2">
+            <a:schemeClr val="accent1"/>
+          </a:lnRef>
+          <a:fillRef idx="0">
+            <a:schemeClr val="accent1"/>
+          </a:fillRef>
+          <a:effectRef idx="1">
+            <a:schemeClr val="accent1"/>
+          </a:effectRef>
+          <a:fontRef idx="minor">
+            <a:schemeClr val="tx1"/>
+          </a:fontRef>
+        </p:style>
+      </p:cxnSp>
+      <p:cxnSp>
+        <p:nvCxnSpPr>
+          <p:cNvPr id="20" name="Connector 19"/>
+          <p:cNvCxnSpPr/>
+          <p:nvPr/>
+        </p:nvCxnSpPr>
+        <p:spPr>
+          <a:xfrm>
+            <a:off x="5166360" y="4334256"/>
+            <a:ext cx="1858975" cy="0"/>
+          </a:xfrm>
+          <a:prstGeom prst="line">
+            <a:avLst/>
+          </a:prstGeom>
+          <a:ln w="12700">
+            <a:solidFill>
+              <a:srgbClr val="666E70"/>
+            </a:solidFill>
+            <a:tailEnd type="triangle" w="med" len="med"/>
+          </a:ln>
+          <a:effectLst/>
+        </p:spPr>
+        <p:style>
+          <a:lnRef idx="2">
+            <a:schemeClr val="accent1"/>
+          </a:lnRef>
+          <a:fillRef idx="0">
+            <a:schemeClr val="accent1"/>
+          </a:fillRef>
+          <a:effectRef idx="1">
+            <a:schemeClr val="accent1"/>
+          </a:effectRef>
+          <a:fontRef idx="minor">
+            <a:schemeClr val="tx1"/>
+          </a:fontRef>
+        </p:style>
+      </p:cxnSp>
+      <p:sp>
+        <p:nvSpPr>
+          <p:cNvPr id="21" name="Rounded Rectangle 20"/>
           <p:cNvSpPr/>
           <p:nvPr/>
         </p:nvSpPr>
         <p:spPr>
           <a:xfrm>
-            <a:off x="649224" y="2420874"/>
+            <a:off x="1097280" y="2121408"/>
             <a:ext cx="4069080" cy="530352"/>
           </a:xfrm>
-          <a:prstGeom prst="rect">
-            <a:avLst/>
+          <a:prstGeom prst="roundRect">
+            <a:avLst>
+              <a:gd name="adj" fmla="val 6000"/>
+            </a:avLst>
           </a:prstGeom>
           <a:solidFill>
             <a:srgbClr val="FFFFFC"/>
@@ -31064,13 +31158,13 @@
       </p:sp>
       <p:sp>
         <p:nvSpPr>
-          <p:cNvPr id="20" name="Oval 19"/>
+          <p:cNvPr id="22" name="Oval 21"/>
           <p:cNvSpPr/>
           <p:nvPr/>
         </p:nvSpPr>
         <p:spPr>
           <a:xfrm>
-            <a:off x="763524" y="2571750"/>
+            <a:off x="1211580" y="2272284"/>
             <a:ext cx="228600" cy="228600"/>
           </a:xfrm>
           <a:prstGeom prst="ellipse">
@@ -31108,13 +31202,13 @@
       </p:sp>
       <p:sp>
         <p:nvSpPr>
-          <p:cNvPr id="21" name="TextBox 20"/>
-          <p:cNvSpPr txBox="1"/>
-          <p:nvPr/>
-        </p:nvSpPr>
-        <p:spPr>
-          <a:xfrm>
-            <a:off x="768096" y="2576322"/>
+          <p:cNvPr id="23" name="TextBox 22"/>
+          <p:cNvSpPr txBox="1"/>
+          <p:nvPr/>
+        </p:nvSpPr>
+        <p:spPr>
+          <a:xfrm>
+            <a:off x="1216152" y="2276856"/>
             <a:ext cx="219456" cy="219456"/>
           </a:xfrm>
           <a:prstGeom prst="rect">
@@ -31149,13 +31243,13 @@
       </p:sp>
       <p:sp>
         <p:nvSpPr>
-          <p:cNvPr id="22" name="TextBox 21"/>
-          <p:cNvSpPr txBox="1"/>
-          <p:nvPr/>
-        </p:nvSpPr>
-        <p:spPr>
-          <a:xfrm>
-            <a:off x="1088136" y="2420874"/>
+          <p:cNvPr id="24" name="TextBox 23"/>
+          <p:cNvSpPr txBox="1"/>
+          <p:nvPr/>
+        </p:nvSpPr>
+        <p:spPr>
+          <a:xfrm>
+            <a:off x="1536192" y="2121408"/>
             <a:ext cx="3465576" cy="530352"/>
           </a:xfrm>
           <a:prstGeom prst="rect">
@@ -31190,17 +31284,19 @@
       </p:sp>
       <p:sp>
         <p:nvSpPr>
-          <p:cNvPr id="23" name="Rectangle 22"/>
+          <p:cNvPr id="25" name="Rounded Rectangle 24"/>
           <p:cNvSpPr/>
           <p:nvPr/>
         </p:nvSpPr>
         <p:spPr>
           <a:xfrm>
-            <a:off x="649224" y="3070098"/>
+            <a:off x="1097280" y="2770632"/>
             <a:ext cx="4069080" cy="530352"/>
           </a:xfrm>
-          <a:prstGeom prst="rect">
-            <a:avLst/>
+          <a:prstGeom prst="roundRect">
+            <a:avLst>
+              <a:gd name="adj" fmla="val 6000"/>
+            </a:avLst>
           </a:prstGeom>
           <a:solidFill>
             <a:srgbClr val="FFFFFC"/>
@@ -31236,13 +31332,13 @@
       </p:sp>
       <p:sp>
         <p:nvSpPr>
-          <p:cNvPr id="24" name="Oval 23"/>
+          <p:cNvPr id="26" name="Oval 25"/>
           <p:cNvSpPr/>
           <p:nvPr/>
         </p:nvSpPr>
         <p:spPr>
           <a:xfrm>
-            <a:off x="763524" y="3220974"/>
+            <a:off x="1211580" y="2921508"/>
             <a:ext cx="228600" cy="228600"/>
           </a:xfrm>
           <a:prstGeom prst="ellipse">
@@ -31280,13 +31376,13 @@
       </p:sp>
       <p:sp>
         <p:nvSpPr>
-          <p:cNvPr id="25" name="TextBox 24"/>
-          <p:cNvSpPr txBox="1"/>
-          <p:nvPr/>
-        </p:nvSpPr>
-        <p:spPr>
-          <a:xfrm>
-            <a:off x="768096" y="3225546"/>
+          <p:cNvPr id="27" name="TextBox 26"/>
+          <p:cNvSpPr txBox="1"/>
+          <p:nvPr/>
+        </p:nvSpPr>
+        <p:spPr>
+          <a:xfrm>
+            <a:off x="1216152" y="2926080"/>
             <a:ext cx="219456" cy="219456"/>
           </a:xfrm>
           <a:prstGeom prst="rect">
@@ -31321,13 +31417,13 @@
       </p:sp>
       <p:sp>
         <p:nvSpPr>
-          <p:cNvPr id="26" name="TextBox 25"/>
-          <p:cNvSpPr txBox="1"/>
-          <p:nvPr/>
-        </p:nvSpPr>
-        <p:spPr>
-          <a:xfrm>
-            <a:off x="1088136" y="3070098"/>
+          <p:cNvPr id="28" name="TextBox 27"/>
+          <p:cNvSpPr txBox="1"/>
+          <p:nvPr/>
+        </p:nvSpPr>
+        <p:spPr>
+          <a:xfrm>
+            <a:off x="1536192" y="2770632"/>
             <a:ext cx="3465576" cy="530352"/>
           </a:xfrm>
           <a:prstGeom prst="rect">
@@ -31362,17 +31458,19 @@
       </p:sp>
       <p:sp>
         <p:nvSpPr>
-          <p:cNvPr id="27" name="Rectangle 26"/>
+          <p:cNvPr id="29" name="Rounded Rectangle 28"/>
           <p:cNvSpPr/>
           <p:nvPr/>
         </p:nvSpPr>
         <p:spPr>
           <a:xfrm>
-            <a:off x="649224" y="3719322"/>
+            <a:off x="1097280" y="3419856"/>
             <a:ext cx="4069080" cy="530352"/>
           </a:xfrm>
-          <a:prstGeom prst="rect">
-            <a:avLst/>
+          <a:prstGeom prst="roundRect">
+            <a:avLst>
+              <a:gd name="adj" fmla="val 6000"/>
+            </a:avLst>
           </a:prstGeom>
           <a:solidFill>
             <a:srgbClr val="FFFFFC"/>
@@ -31408,13 +31506,13 @@
       </p:sp>
       <p:sp>
         <p:nvSpPr>
-          <p:cNvPr id="28" name="Oval 27"/>
+          <p:cNvPr id="30" name="Oval 29"/>
           <p:cNvSpPr/>
           <p:nvPr/>
         </p:nvSpPr>
         <p:spPr>
           <a:xfrm>
-            <a:off x="763524" y="3870198"/>
+            <a:off x="1211580" y="3570732"/>
             <a:ext cx="228600" cy="228600"/>
           </a:xfrm>
           <a:prstGeom prst="ellipse">
@@ -31452,13 +31550,13 @@
       </p:sp>
       <p:sp>
         <p:nvSpPr>
-          <p:cNvPr id="29" name="TextBox 28"/>
-          <p:cNvSpPr txBox="1"/>
-          <p:nvPr/>
-        </p:nvSpPr>
-        <p:spPr>
-          <a:xfrm>
-            <a:off x="768096" y="3874770"/>
+          <p:cNvPr id="31" name="TextBox 30"/>
+          <p:cNvSpPr txBox="1"/>
+          <p:nvPr/>
+        </p:nvSpPr>
+        <p:spPr>
+          <a:xfrm>
+            <a:off x="1216152" y="3575304"/>
             <a:ext cx="219456" cy="219456"/>
           </a:xfrm>
           <a:prstGeom prst="rect">
@@ -31493,13 +31591,13 @@
       </p:sp>
       <p:sp>
         <p:nvSpPr>
-          <p:cNvPr id="30" name="TextBox 29"/>
-          <p:cNvSpPr txBox="1"/>
-          <p:nvPr/>
-        </p:nvSpPr>
-        <p:spPr>
-          <a:xfrm>
-            <a:off x="1088136" y="3719322"/>
+          <p:cNvPr id="32" name="TextBox 31"/>
+          <p:cNvSpPr txBox="1"/>
+          <p:nvPr/>
+        </p:nvSpPr>
+        <p:spPr>
+          <a:xfrm>
+            <a:off x="1536192" y="3419856"/>
             <a:ext cx="3465576" cy="530352"/>
           </a:xfrm>
           <a:prstGeom prst="rect">
@@ -31534,17 +31632,19 @@
       </p:sp>
       <p:sp>
         <p:nvSpPr>
-          <p:cNvPr id="31" name="Rectangle 30"/>
+          <p:cNvPr id="33" name="Rounded Rectangle 32"/>
           <p:cNvSpPr/>
           <p:nvPr/>
         </p:nvSpPr>
         <p:spPr>
           <a:xfrm>
-            <a:off x="649224" y="4368546"/>
+            <a:off x="1097280" y="4069080"/>
             <a:ext cx="4069080" cy="530352"/>
           </a:xfrm>
-          <a:prstGeom prst="rect">
-            <a:avLst/>
+          <a:prstGeom prst="roundRect">
+            <a:avLst>
+              <a:gd name="adj" fmla="val 6000"/>
+            </a:avLst>
           </a:prstGeom>
           <a:solidFill>
             <a:srgbClr val="FFFFFC"/>
@@ -31580,13 +31680,13 @@
       </p:sp>
       <p:sp>
         <p:nvSpPr>
-          <p:cNvPr id="32" name="Oval 31"/>
+          <p:cNvPr id="34" name="Oval 33"/>
           <p:cNvSpPr/>
           <p:nvPr/>
         </p:nvSpPr>
         <p:spPr>
           <a:xfrm>
-            <a:off x="763524" y="4519422"/>
+            <a:off x="1211580" y="4219956"/>
             <a:ext cx="228600" cy="228600"/>
           </a:xfrm>
           <a:prstGeom prst="ellipse">
@@ -31624,13 +31724,13 @@
       </p:sp>
       <p:sp>
         <p:nvSpPr>
-          <p:cNvPr id="33" name="TextBox 32"/>
-          <p:cNvSpPr txBox="1"/>
-          <p:nvPr/>
-        </p:nvSpPr>
-        <p:spPr>
-          <a:xfrm>
-            <a:off x="768096" y="4523994"/>
+          <p:cNvPr id="35" name="TextBox 34"/>
+          <p:cNvSpPr txBox="1"/>
+          <p:nvPr/>
+        </p:nvSpPr>
+        <p:spPr>
+          <a:xfrm>
+            <a:off x="1216152" y="4224528"/>
             <a:ext cx="219456" cy="219456"/>
           </a:xfrm>
           <a:prstGeom prst="rect">
@@ -31665,13 +31765,13 @@
       </p:sp>
       <p:sp>
         <p:nvSpPr>
-          <p:cNvPr id="34" name="TextBox 33"/>
-          <p:cNvSpPr txBox="1"/>
-          <p:nvPr/>
-        </p:nvSpPr>
-        <p:spPr>
-          <a:xfrm>
-            <a:off x="1088136" y="4368546"/>
+          <p:cNvPr id="36" name="TextBox 35"/>
+          <p:cNvSpPr txBox="1"/>
+          <p:nvPr/>
+        </p:nvSpPr>
+        <p:spPr>
+          <a:xfrm>
+            <a:off x="1536192" y="4069080"/>
             <a:ext cx="3465576" cy="530352"/>
           </a:xfrm>
           <a:prstGeom prst="rect">
@@ -31706,17 +31806,19 @@
       </p:sp>
       <p:sp>
         <p:nvSpPr>
-          <p:cNvPr id="35" name="Rectangle 34"/>
+          <p:cNvPr id="37" name="Rounded Rectangle 36"/>
           <p:cNvSpPr/>
           <p:nvPr/>
         </p:nvSpPr>
         <p:spPr>
           <a:xfrm>
-            <a:off x="649224" y="5017770"/>
+            <a:off x="1097280" y="4718304"/>
             <a:ext cx="4069080" cy="530352"/>
           </a:xfrm>
-          <a:prstGeom prst="rect">
-            <a:avLst/>
+          <a:prstGeom prst="roundRect">
+            <a:avLst>
+              <a:gd name="adj" fmla="val 6000"/>
+            </a:avLst>
           </a:prstGeom>
           <a:solidFill>
             <a:srgbClr val="FFFFFC"/>
@@ -31752,13 +31854,13 @@
       </p:sp>
       <p:sp>
         <p:nvSpPr>
-          <p:cNvPr id="36" name="Oval 35"/>
+          <p:cNvPr id="38" name="Oval 37"/>
           <p:cNvSpPr/>
           <p:nvPr/>
         </p:nvSpPr>
         <p:spPr>
           <a:xfrm>
-            <a:off x="763524" y="5168646"/>
+            <a:off x="1211580" y="4869180"/>
             <a:ext cx="228600" cy="228600"/>
           </a:xfrm>
           <a:prstGeom prst="ellipse">
@@ -31796,13 +31898,13 @@
       </p:sp>
       <p:sp>
         <p:nvSpPr>
-          <p:cNvPr id="37" name="TextBox 36"/>
-          <p:cNvSpPr txBox="1"/>
-          <p:nvPr/>
-        </p:nvSpPr>
-        <p:spPr>
-          <a:xfrm>
-            <a:off x="768096" y="5173218"/>
+          <p:cNvPr id="39" name="TextBox 38"/>
+          <p:cNvSpPr txBox="1"/>
+          <p:nvPr/>
+        </p:nvSpPr>
+        <p:spPr>
+          <a:xfrm>
+            <a:off x="1216152" y="4873752"/>
             <a:ext cx="219456" cy="219456"/>
           </a:xfrm>
           <a:prstGeom prst="rect">
@@ -31837,13 +31939,13 @@
       </p:sp>
       <p:sp>
         <p:nvSpPr>
-          <p:cNvPr id="38" name="TextBox 37"/>
-          <p:cNvSpPr txBox="1"/>
-          <p:nvPr/>
-        </p:nvSpPr>
-        <p:spPr>
-          <a:xfrm>
-            <a:off x="1088136" y="5017770"/>
+          <p:cNvPr id="40" name="TextBox 39"/>
+          <p:cNvSpPr txBox="1"/>
+          <p:nvPr/>
+        </p:nvSpPr>
+        <p:spPr>
+          <a:xfrm>
+            <a:off x="1536192" y="4718304"/>
             <a:ext cx="3465576" cy="530352"/>
           </a:xfrm>
           <a:prstGeom prst="rect">
@@ -31878,17 +31980,19 @@
       </p:sp>
       <p:sp>
         <p:nvSpPr>
-          <p:cNvPr id="39" name="Rectangle 38"/>
+          <p:cNvPr id="41" name="Rounded Rectangle 40"/>
           <p:cNvSpPr/>
           <p:nvPr/>
         </p:nvSpPr>
         <p:spPr>
           <a:xfrm>
-            <a:off x="7473391" y="2420874"/>
+            <a:off x="7025335" y="2121408"/>
             <a:ext cx="4069080" cy="530352"/>
           </a:xfrm>
-          <a:prstGeom prst="rect">
-            <a:avLst/>
+          <a:prstGeom prst="roundRect">
+            <a:avLst>
+              <a:gd name="adj" fmla="val 6000"/>
+            </a:avLst>
           </a:prstGeom>
           <a:solidFill>
             <a:srgbClr val="FFFFFC"/>
@@ -31924,13 +32028,13 @@
       </p:sp>
       <p:sp>
         <p:nvSpPr>
-          <p:cNvPr id="40" name="Oval 39"/>
+          <p:cNvPr id="42" name="Oval 41"/>
           <p:cNvSpPr/>
           <p:nvPr/>
         </p:nvSpPr>
         <p:spPr>
           <a:xfrm>
-            <a:off x="11199571" y="2571750"/>
+            <a:off x="7139635" y="2272284"/>
             <a:ext cx="228600" cy="228600"/>
           </a:xfrm>
           <a:prstGeom prst="ellipse">
@@ -31968,13 +32072,13 @@
       </p:sp>
       <p:sp>
         <p:nvSpPr>
-          <p:cNvPr id="41" name="TextBox 40"/>
-          <p:cNvSpPr txBox="1"/>
-          <p:nvPr/>
-        </p:nvSpPr>
-        <p:spPr>
-          <a:xfrm>
-            <a:off x="11204143" y="2576322"/>
+          <p:cNvPr id="43" name="TextBox 42"/>
+          <p:cNvSpPr txBox="1"/>
+          <p:nvPr/>
+        </p:nvSpPr>
+        <p:spPr>
+          <a:xfrm>
+            <a:off x="7144207" y="2276856"/>
             <a:ext cx="219456" cy="219456"/>
           </a:xfrm>
           <a:prstGeom prst="rect">
@@ -32009,13 +32113,13 @@
       </p:sp>
       <p:sp>
         <p:nvSpPr>
-          <p:cNvPr id="42" name="TextBox 41"/>
-          <p:cNvSpPr txBox="1"/>
-          <p:nvPr/>
-        </p:nvSpPr>
-        <p:spPr>
-          <a:xfrm>
-            <a:off x="7637983" y="2420874"/>
+          <p:cNvPr id="44" name="TextBox 43"/>
+          <p:cNvSpPr txBox="1"/>
+          <p:nvPr/>
+        </p:nvSpPr>
+        <p:spPr>
+          <a:xfrm>
+            <a:off x="7464247" y="2121408"/>
             <a:ext cx="3465576" cy="530352"/>
           </a:xfrm>
           <a:prstGeom prst="rect">
@@ -32050,17 +32154,19 @@
       </p:sp>
       <p:sp>
         <p:nvSpPr>
-          <p:cNvPr id="43" name="Rectangle 42"/>
+          <p:cNvPr id="45" name="Rounded Rectangle 44"/>
           <p:cNvSpPr/>
           <p:nvPr/>
         </p:nvSpPr>
         <p:spPr>
           <a:xfrm>
-            <a:off x="7473391" y="3070098"/>
+            <a:off x="7025335" y="2770632"/>
             <a:ext cx="4069080" cy="530352"/>
           </a:xfrm>
-          <a:prstGeom prst="rect">
-            <a:avLst/>
+          <a:prstGeom prst="roundRect">
+            <a:avLst>
+              <a:gd name="adj" fmla="val 6000"/>
+            </a:avLst>
           </a:prstGeom>
           <a:solidFill>
             <a:srgbClr val="FFFFFC"/>
@@ -32096,13 +32202,13 @@
       </p:sp>
       <p:sp>
         <p:nvSpPr>
-          <p:cNvPr id="44" name="Oval 43"/>
+          <p:cNvPr id="46" name="Oval 45"/>
           <p:cNvSpPr/>
           <p:nvPr/>
         </p:nvSpPr>
         <p:spPr>
           <a:xfrm>
-            <a:off x="11199571" y="3220974"/>
+            <a:off x="7139635" y="2921508"/>
             <a:ext cx="228600" cy="228600"/>
           </a:xfrm>
           <a:prstGeom prst="ellipse">
@@ -32140,13 +32246,13 @@
       </p:sp>
       <p:sp>
         <p:nvSpPr>
-          <p:cNvPr id="45" name="TextBox 44"/>
-          <p:cNvSpPr txBox="1"/>
-          <p:nvPr/>
-        </p:nvSpPr>
-        <p:spPr>
-          <a:xfrm>
-            <a:off x="11204143" y="3225546"/>
+          <p:cNvPr id="47" name="TextBox 46"/>
+          <p:cNvSpPr txBox="1"/>
+          <p:nvPr/>
+        </p:nvSpPr>
+        <p:spPr>
+          <a:xfrm>
+            <a:off x="7144207" y="2926080"/>
             <a:ext cx="219456" cy="219456"/>
           </a:xfrm>
           <a:prstGeom prst="rect">
@@ -32181,13 +32287,13 @@
       </p:sp>
       <p:sp>
         <p:nvSpPr>
-          <p:cNvPr id="46" name="TextBox 45"/>
-          <p:cNvSpPr txBox="1"/>
-          <p:nvPr/>
-        </p:nvSpPr>
-        <p:spPr>
-          <a:xfrm>
-            <a:off x="7637983" y="3070098"/>
+          <p:cNvPr id="48" name="TextBox 47"/>
+          <p:cNvSpPr txBox="1"/>
+          <p:nvPr/>
+        </p:nvSpPr>
+        <p:spPr>
+          <a:xfrm>
+            <a:off x="7464247" y="2770632"/>
             <a:ext cx="3465576" cy="530352"/>
           </a:xfrm>
           <a:prstGeom prst="rect">
@@ -32222,17 +32328,19 @@
       </p:sp>
       <p:sp>
         <p:nvSpPr>
-          <p:cNvPr id="47" name="Rectangle 46"/>
+          <p:cNvPr id="49" name="Rounded Rectangle 48"/>
           <p:cNvSpPr/>
           <p:nvPr/>
         </p:nvSpPr>
         <p:spPr>
           <a:xfrm>
-            <a:off x="7473391" y="3719322"/>
+            <a:off x="7025335" y="3419856"/>
             <a:ext cx="4069080" cy="530352"/>
           </a:xfrm>
-          <a:prstGeom prst="rect">
-            <a:avLst/>
+          <a:prstGeom prst="roundRect">
+            <a:avLst>
+              <a:gd name="adj" fmla="val 6000"/>
+            </a:avLst>
           </a:prstGeom>
           <a:solidFill>
             <a:srgbClr val="FFFFFC"/>
@@ -32268,13 +32376,13 @@
       </p:sp>
       <p:sp>
         <p:nvSpPr>
-          <p:cNvPr id="48" name="Oval 47"/>
+          <p:cNvPr id="50" name="Oval 49"/>
           <p:cNvSpPr/>
           <p:nvPr/>
         </p:nvSpPr>
         <p:spPr>
           <a:xfrm>
-            <a:off x="11199571" y="3870198"/>
+            <a:off x="7139635" y="3570732"/>
             <a:ext cx="228600" cy="228600"/>
           </a:xfrm>
           <a:prstGeom prst="ellipse">
@@ -32312,13 +32420,13 @@
       </p:sp>
       <p:sp>
         <p:nvSpPr>
-          <p:cNvPr id="49" name="TextBox 48"/>
-          <p:cNvSpPr txBox="1"/>
-          <p:nvPr/>
-        </p:nvSpPr>
-        <p:spPr>
-          <a:xfrm>
-            <a:off x="11204143" y="3874770"/>
+          <p:cNvPr id="51" name="TextBox 50"/>
+          <p:cNvSpPr txBox="1"/>
+          <p:nvPr/>
+        </p:nvSpPr>
+        <p:spPr>
+          <a:xfrm>
+            <a:off x="7144207" y="3575304"/>
             <a:ext cx="219456" cy="219456"/>
           </a:xfrm>
           <a:prstGeom prst="rect">
@@ -32353,13 +32461,13 @@
       </p:sp>
       <p:sp>
         <p:nvSpPr>
-          <p:cNvPr id="50" name="TextBox 49"/>
-          <p:cNvSpPr txBox="1"/>
-          <p:nvPr/>
-        </p:nvSpPr>
-        <p:spPr>
-          <a:xfrm>
-            <a:off x="7637983" y="3719322"/>
+          <p:cNvPr id="52" name="TextBox 51"/>
+          <p:cNvSpPr txBox="1"/>
+          <p:nvPr/>
+        </p:nvSpPr>
+        <p:spPr>
+          <a:xfrm>
+            <a:off x="7464247" y="3419856"/>
             <a:ext cx="3465576" cy="530352"/>
           </a:xfrm>
           <a:prstGeom prst="rect">
@@ -32394,17 +32502,19 @@
       </p:sp>
       <p:sp>
         <p:nvSpPr>
-          <p:cNvPr id="51" name="Rectangle 50"/>
+          <p:cNvPr id="53" name="Rounded Rectangle 52"/>
           <p:cNvSpPr/>
           <p:nvPr/>
         </p:nvSpPr>
         <p:spPr>
           <a:xfrm>
-            <a:off x="7473391" y="4368546"/>
+            <a:off x="7025335" y="4069080"/>
             <a:ext cx="4069080" cy="530352"/>
           </a:xfrm>
-          <a:prstGeom prst="rect">
-            <a:avLst/>
+          <a:prstGeom prst="roundRect">
+            <a:avLst>
+              <a:gd name="adj" fmla="val 6000"/>
+            </a:avLst>
           </a:prstGeom>
           <a:solidFill>
             <a:srgbClr val="FFFFFC"/>
@@ -32440,13 +32550,13 @@
       </p:sp>
       <p:sp>
         <p:nvSpPr>
-          <p:cNvPr id="52" name="Oval 51"/>
+          <p:cNvPr id="54" name="Oval 53"/>
           <p:cNvSpPr/>
           <p:nvPr/>
         </p:nvSpPr>
         <p:spPr>
           <a:xfrm>
-            <a:off x="11199571" y="4519422"/>
+            <a:off x="7139635" y="4219956"/>
             <a:ext cx="228600" cy="228600"/>
           </a:xfrm>
           <a:prstGeom prst="ellipse">
@@ -32484,13 +32594,13 @@
       </p:sp>
       <p:sp>
         <p:nvSpPr>
-          <p:cNvPr id="53" name="TextBox 52"/>
-          <p:cNvSpPr txBox="1"/>
-          <p:nvPr/>
-        </p:nvSpPr>
-        <p:spPr>
-          <a:xfrm>
-            <a:off x="11204143" y="4523994"/>
+          <p:cNvPr id="55" name="TextBox 54"/>
+          <p:cNvSpPr txBox="1"/>
+          <p:nvPr/>
+        </p:nvSpPr>
+        <p:spPr>
+          <a:xfrm>
+            <a:off x="7144207" y="4224528"/>
             <a:ext cx="219456" cy="219456"/>
           </a:xfrm>
           <a:prstGeom prst="rect">
@@ -32525,13 +32635,13 @@
       </p:sp>
       <p:sp>
         <p:nvSpPr>
-          <p:cNvPr id="54" name="TextBox 53"/>
-          <p:cNvSpPr txBox="1"/>
-          <p:nvPr/>
-        </p:nvSpPr>
-        <p:spPr>
-          <a:xfrm>
-            <a:off x="7637983" y="4368546"/>
+          <p:cNvPr id="56" name="TextBox 55"/>
+          <p:cNvSpPr txBox="1"/>
+          <p:nvPr/>
+        </p:nvSpPr>
+        <p:spPr>
+          <a:xfrm>
+            <a:off x="7464247" y="4069080"/>
             <a:ext cx="3465576" cy="530352"/>
           </a:xfrm>
           <a:prstGeom prst="rect">
@@ -32566,17 +32676,19 @@
       </p:sp>
       <p:sp>
         <p:nvSpPr>
-          <p:cNvPr id="55" name="Rectangle 54"/>
+          <p:cNvPr id="57" name="Rounded Rectangle 56"/>
           <p:cNvSpPr/>
           <p:nvPr/>
         </p:nvSpPr>
         <p:spPr>
           <a:xfrm>
-            <a:off x="7473391" y="5017770"/>
+            <a:off x="7025335" y="4718304"/>
             <a:ext cx="4069080" cy="530352"/>
           </a:xfrm>
-          <a:prstGeom prst="rect">
-            <a:avLst/>
+          <a:prstGeom prst="roundRect">
+            <a:avLst>
+              <a:gd name="adj" fmla="val 6000"/>
+            </a:avLst>
           </a:prstGeom>
           <a:solidFill>
             <a:srgbClr val="FFFFFC"/>
@@ -32612,13 +32724,13 @@
       </p:sp>
       <p:sp>
         <p:nvSpPr>
-          <p:cNvPr id="56" name="Oval 55"/>
+          <p:cNvPr id="58" name="Oval 57"/>
           <p:cNvSpPr/>
           <p:nvPr/>
         </p:nvSpPr>
         <p:spPr>
           <a:xfrm>
-            <a:off x="11199571" y="5168646"/>
+            <a:off x="7139635" y="4869180"/>
             <a:ext cx="228600" cy="228600"/>
           </a:xfrm>
           <a:prstGeom prst="ellipse">
@@ -32656,13 +32768,13 @@
       </p:sp>
       <p:sp>
         <p:nvSpPr>
-          <p:cNvPr id="57" name="TextBox 56"/>
-          <p:cNvSpPr txBox="1"/>
-          <p:nvPr/>
-        </p:nvSpPr>
-        <p:spPr>
-          <a:xfrm>
-            <a:off x="11204143" y="5173218"/>
+          <p:cNvPr id="59" name="TextBox 58"/>
+          <p:cNvSpPr txBox="1"/>
+          <p:nvPr/>
+        </p:nvSpPr>
+        <p:spPr>
+          <a:xfrm>
+            <a:off x="7144207" y="4873752"/>
             <a:ext cx="219456" cy="219456"/>
           </a:xfrm>
           <a:prstGeom prst="rect">
@@ -32697,13 +32809,13 @@
       </p:sp>
       <p:sp>
         <p:nvSpPr>
-          <p:cNvPr id="58" name="TextBox 57"/>
-          <p:cNvSpPr txBox="1"/>
-          <p:nvPr/>
-        </p:nvSpPr>
-        <p:spPr>
-          <a:xfrm>
-            <a:off x="7637983" y="5017770"/>
+          <p:cNvPr id="60" name="TextBox 59"/>
+          <p:cNvSpPr txBox="1"/>
+          <p:nvPr/>
+        </p:nvSpPr>
+        <p:spPr>
+          <a:xfrm>
+            <a:off x="7464247" y="4718304"/>
             <a:ext cx="3465576" cy="530352"/>
           </a:xfrm>
           <a:prstGeom prst="rect">
@@ -32738,13 +32850,13 @@
       </p:sp>
       <p:sp>
         <p:nvSpPr>
-          <p:cNvPr id="59" name="Oval 58"/>
+          <p:cNvPr id="61" name="Oval 60"/>
           <p:cNvSpPr/>
           <p:nvPr/>
         </p:nvSpPr>
         <p:spPr>
           <a:xfrm>
-            <a:off x="4681728" y="2649474"/>
+            <a:off x="5129784" y="2350008"/>
             <a:ext cx="73152" cy="73152"/>
           </a:xfrm>
           <a:prstGeom prst="ellipse">
@@ -32782,13 +32894,13 @@
       </p:sp>
       <p:sp>
         <p:nvSpPr>
-          <p:cNvPr id="60" name="Oval 59"/>
+          <p:cNvPr id="62" name="Oval 61"/>
           <p:cNvSpPr/>
           <p:nvPr/>
         </p:nvSpPr>
         <p:spPr>
           <a:xfrm>
-            <a:off x="4681728" y="3298698"/>
+            <a:off x="5129784" y="2999232"/>
             <a:ext cx="73152" cy="73152"/>
           </a:xfrm>
           <a:prstGeom prst="ellipse">
@@ -32826,13 +32938,13 @@
       </p:sp>
       <p:sp>
         <p:nvSpPr>
-          <p:cNvPr id="61" name="Oval 60"/>
+          <p:cNvPr id="63" name="Oval 62"/>
           <p:cNvSpPr/>
           <p:nvPr/>
         </p:nvSpPr>
         <p:spPr>
           <a:xfrm>
-            <a:off x="4681728" y="3947922"/>
+            <a:off x="5129784" y="3648456"/>
             <a:ext cx="73152" cy="73152"/>
           </a:xfrm>
           <a:prstGeom prst="ellipse">
@@ -32870,13 +32982,13 @@
       </p:sp>
       <p:sp>
         <p:nvSpPr>
-          <p:cNvPr id="62" name="Oval 61"/>
+          <p:cNvPr id="64" name="Oval 63"/>
           <p:cNvSpPr/>
           <p:nvPr/>
         </p:nvSpPr>
         <p:spPr>
           <a:xfrm>
-            <a:off x="4681728" y="4597146"/>
+            <a:off x="5129784" y="4297680"/>
             <a:ext cx="73152" cy="73152"/>
           </a:xfrm>
           <a:prstGeom prst="ellipse">
@@ -32914,13 +33026,13 @@
       </p:sp>
       <p:sp>
         <p:nvSpPr>
-          <p:cNvPr id="63" name="Oval 62"/>
+          <p:cNvPr id="65" name="Oval 64"/>
           <p:cNvSpPr/>
           <p:nvPr/>
         </p:nvSpPr>
         <p:spPr>
           <a:xfrm>
-            <a:off x="4681728" y="5246370"/>
+            <a:off x="5129784" y="4946904"/>
             <a:ext cx="73152" cy="73152"/>
           </a:xfrm>
           <a:prstGeom prst="ellipse">
@@ -32958,13 +33070,13 @@
       </p:sp>
       <p:sp>
         <p:nvSpPr>
-          <p:cNvPr id="64" name="Oval 63"/>
+          <p:cNvPr id="66" name="Oval 65"/>
           <p:cNvSpPr/>
           <p:nvPr/>
         </p:nvSpPr>
         <p:spPr>
           <a:xfrm>
-            <a:off x="7436815" y="2649474"/>
+            <a:off x="6988759" y="2350008"/>
             <a:ext cx="73152" cy="73152"/>
           </a:xfrm>
           <a:prstGeom prst="ellipse">
@@ -33002,13 +33114,13 @@
       </p:sp>
       <p:sp>
         <p:nvSpPr>
-          <p:cNvPr id="65" name="Oval 64"/>
+          <p:cNvPr id="67" name="Oval 66"/>
           <p:cNvSpPr/>
           <p:nvPr/>
         </p:nvSpPr>
         <p:spPr>
           <a:xfrm>
-            <a:off x="7436815" y="3298698"/>
+            <a:off x="6988759" y="2999232"/>
             <a:ext cx="73152" cy="73152"/>
           </a:xfrm>
           <a:prstGeom prst="ellipse">
@@ -33046,13 +33158,13 @@
       </p:sp>
       <p:sp>
         <p:nvSpPr>
-          <p:cNvPr id="66" name="Oval 65"/>
+          <p:cNvPr id="68" name="Oval 67"/>
           <p:cNvSpPr/>
           <p:nvPr/>
         </p:nvSpPr>
         <p:spPr>
           <a:xfrm>
-            <a:off x="7436815" y="3947922"/>
+            <a:off x="6988759" y="3648456"/>
             <a:ext cx="73152" cy="73152"/>
           </a:xfrm>
           <a:prstGeom prst="ellipse">
@@ -33090,13 +33202,13 @@
       </p:sp>
       <p:sp>
         <p:nvSpPr>
-          <p:cNvPr id="67" name="Oval 66"/>
+          <p:cNvPr id="69" name="Oval 68"/>
           <p:cNvSpPr/>
           <p:nvPr/>
         </p:nvSpPr>
         <p:spPr>
           <a:xfrm>
-            <a:off x="7436815" y="4597146"/>
+            <a:off x="6988759" y="4297680"/>
             <a:ext cx="73152" cy="73152"/>
           </a:xfrm>
           <a:prstGeom prst="ellipse">
@@ -33134,13 +33246,13 @@
       </p:sp>
       <p:sp>
         <p:nvSpPr>
-          <p:cNvPr id="68" name="Oval 67"/>
+          <p:cNvPr id="70" name="Oval 69"/>
           <p:cNvSpPr/>
           <p:nvPr/>
         </p:nvSpPr>
         <p:spPr>
           <a:xfrm>
-            <a:off x="7436815" y="5246370"/>
+            <a:off x="6988759" y="4946904"/>
             <a:ext cx="73152" cy="73152"/>
           </a:xfrm>
           <a:prstGeom prst="ellipse">
@@ -33178,7 +33290,7 @@
       </p:sp>
       <p:sp>
         <p:nvSpPr>
-          <p:cNvPr id="69" name="Rectangle 68"/>
+          <p:cNvPr id="71" name="Rectangle 70"/>
           <p:cNvSpPr/>
           <p:nvPr/>
         </p:nvSpPr>
@@ -33222,7 +33334,7 @@
       </p:sp>
       <p:sp>
         <p:nvSpPr>
-          <p:cNvPr id="70" name="TextBox 69"/>
+          <p:cNvPr id="72" name="TextBox 71"/>
           <p:cNvSpPr txBox="1"/>
           <p:nvPr/>
         </p:nvSpPr>
@@ -33263,7 +33375,7 @@
       </p:sp>
       <p:sp>
         <p:nvSpPr>
-          <p:cNvPr id="71" name="TextBox 70"/>
+          <p:cNvPr id="73" name="TextBox 72"/>
           <p:cNvSpPr txBox="1"/>
           <p:nvPr/>
         </p:nvSpPr>

--- a/examples/gallery/pattern_gallery.pptx
+++ b/examples/gallery/pattern_gallery.pptx
@@ -36252,10 +36252,12 @@
             <a:avLst/>
           </a:prstGeom>
           <a:solidFill>
-            <a:srgbClr val="DFEBE8"/>
+            <a:srgbClr val="FFFFFC"/>
           </a:solidFill>
-          <a:ln>
-            <a:noFill/>
+          <a:ln w="9525">
+            <a:solidFill>
+              <a:srgbClr val="D1CFC8"/>
+            </a:solidFill>
           </a:ln>
           <a:effectLst/>
         </p:spPr>
@@ -36282,7 +36284,7 @@
             <a:avLst/>
           </a:prstGeom>
           <a:solidFill>
-            <a:srgbClr val="FFFFFC"/>
+            <a:srgbClr val="DFEBE8"/>
           </a:solidFill>
           <a:ln>
             <a:noFill/>
@@ -36852,10 +36854,12 @@
             <a:avLst/>
           </a:prstGeom>
           <a:solidFill>
-            <a:srgbClr val="ECEAE4"/>
+            <a:srgbClr val="FFFFFC"/>
           </a:solidFill>
-          <a:ln>
-            <a:noFill/>
+          <a:ln w="9525">
+            <a:solidFill>
+              <a:srgbClr val="D1CFC8"/>
+            </a:solidFill>
           </a:ln>
           <a:effectLst/>
         </p:spPr>
@@ -36882,7 +36886,7 @@
             <a:avLst/>
           </a:prstGeom>
           <a:solidFill>
-            <a:srgbClr val="FFFFFC"/>
+            <a:srgbClr val="ECEAE4"/>
           </a:solidFill>
           <a:ln>
             <a:noFill/>
@@ -45016,17 +45020,19 @@
         </p:nvSpPr>
         <p:spPr>
           <a:xfrm>
-            <a:off x="2075688" y="1562709"/>
-            <a:ext cx="2458135" cy="493776"/>
+            <a:off x="1892808" y="1517904"/>
+            <a:ext cx="2485567" cy="384048"/>
           </a:xfrm>
           <a:prstGeom prst="chevron">
             <a:avLst/>
           </a:prstGeom>
           <a:solidFill>
-            <a:srgbClr val="ECEAE4"/>
+            <a:srgbClr val="FFFFFC"/>
           </a:solidFill>
-          <a:ln>
-            <a:noFill/>
+          <a:ln w="7620">
+            <a:solidFill>
+              <a:srgbClr val="D1CFC8"/>
+            </a:solidFill>
           </a:ln>
           <a:effectLst/>
         </p:spPr>
@@ -45046,8 +45052,8 @@
         </p:nvSpPr>
         <p:spPr>
           <a:xfrm>
-            <a:off x="2203704" y="1654149"/>
-            <a:ext cx="2147239" cy="256032"/>
+            <a:off x="2020824" y="1572768"/>
+            <a:ext cx="2192959" cy="237744"/>
           </a:xfrm>
           <a:prstGeom prst="rect">
             <a:avLst/>
@@ -45066,7 +45072,7 @@
               </a:lnSpc>
             </a:pPr>
             <a:r>
-              <a:rPr sz="1150" b="1" lang="ja-JP">
+              <a:rPr sz="1050" b="1" lang="ja-JP">
                 <a:solidFill>
                   <a:srgbClr val="182C43"/>
                 </a:solidFill>
@@ -45087,17 +45093,19 @@
         </p:nvSpPr>
         <p:spPr>
           <a:xfrm>
-            <a:off x="4478959" y="1562709"/>
-            <a:ext cx="2458135" cy="493776"/>
+            <a:off x="4341799" y="1517904"/>
+            <a:ext cx="2485567" cy="384048"/>
           </a:xfrm>
           <a:prstGeom prst="chevron">
             <a:avLst/>
           </a:prstGeom>
           <a:solidFill>
-            <a:srgbClr val="DFEBE8"/>
+            <a:srgbClr val="FFFFFC"/>
           </a:solidFill>
-          <a:ln>
-            <a:noFill/>
+          <a:ln w="7620">
+            <a:solidFill>
+              <a:srgbClr val="D1CFC8"/>
+            </a:solidFill>
           </a:ln>
           <a:effectLst/>
         </p:spPr>
@@ -45117,8 +45125,8 @@
         </p:nvSpPr>
         <p:spPr>
           <a:xfrm>
-            <a:off x="4606975" y="1654149"/>
-            <a:ext cx="2147239" cy="256032"/>
+            <a:off x="4469815" y="1572768"/>
+            <a:ext cx="2192959" cy="237744"/>
           </a:xfrm>
           <a:prstGeom prst="rect">
             <a:avLst/>
@@ -45137,7 +45145,7 @@
               </a:lnSpc>
             </a:pPr>
             <a:r>
-              <a:rPr sz="1150" b="1" lang="ja-JP">
+              <a:rPr sz="1050" b="1" lang="ja-JP">
                 <a:solidFill>
                   <a:srgbClr val="182C43"/>
                 </a:solidFill>
@@ -45158,17 +45166,19 @@
         </p:nvSpPr>
         <p:spPr>
           <a:xfrm>
-            <a:off x="6882231" y="1562709"/>
-            <a:ext cx="2458135" cy="493776"/>
+            <a:off x="6790791" y="1517904"/>
+            <a:ext cx="2485567" cy="384048"/>
           </a:xfrm>
           <a:prstGeom prst="chevron">
             <a:avLst/>
           </a:prstGeom>
           <a:solidFill>
-            <a:srgbClr val="ECEAE4"/>
+            <a:srgbClr val="FFFFFC"/>
           </a:solidFill>
-          <a:ln>
-            <a:noFill/>
+          <a:ln w="7620">
+            <a:solidFill>
+              <a:srgbClr val="D1CFC8"/>
+            </a:solidFill>
           </a:ln>
           <a:effectLst/>
         </p:spPr>
@@ -45188,8 +45198,8 @@
         </p:nvSpPr>
         <p:spPr>
           <a:xfrm>
-            <a:off x="7010247" y="1654149"/>
-            <a:ext cx="2147239" cy="256032"/>
+            <a:off x="6918807" y="1572768"/>
+            <a:ext cx="2192959" cy="237744"/>
           </a:xfrm>
           <a:prstGeom prst="rect">
             <a:avLst/>
@@ -45208,7 +45218,7 @@
               </a:lnSpc>
             </a:pPr>
             <a:r>
-              <a:rPr sz="1150" b="1" lang="ja-JP">
+              <a:rPr sz="1050" b="1" lang="ja-JP">
                 <a:solidFill>
                   <a:srgbClr val="182C43"/>
                 </a:solidFill>
@@ -45229,17 +45239,19 @@
         </p:nvSpPr>
         <p:spPr>
           <a:xfrm>
-            <a:off x="9285503" y="1562709"/>
-            <a:ext cx="2403271" cy="493776"/>
+            <a:off x="9239783" y="1517904"/>
+            <a:ext cx="2448991" cy="384048"/>
           </a:xfrm>
           <a:prstGeom prst="chevron">
             <a:avLst/>
           </a:prstGeom>
           <a:solidFill>
-            <a:srgbClr val="DFEBE8"/>
+            <a:srgbClr val="FFFFFC"/>
           </a:solidFill>
-          <a:ln>
-            <a:noFill/>
+          <a:ln w="7620">
+            <a:solidFill>
+              <a:srgbClr val="D1CFC8"/>
+            </a:solidFill>
           </a:ln>
           <a:effectLst/>
         </p:spPr>
@@ -45259,8 +45271,8 @@
         </p:nvSpPr>
         <p:spPr>
           <a:xfrm>
-            <a:off x="9413519" y="1654149"/>
-            <a:ext cx="2147239" cy="256032"/>
+            <a:off x="9367799" y="1572768"/>
+            <a:ext cx="2192959" cy="237744"/>
           </a:xfrm>
           <a:prstGeom prst="rect">
             <a:avLst/>
@@ -45279,7 +45291,7 @@
               </a:lnSpc>
             </a:pPr>
             <a:r>
-              <a:rPr sz="1150" b="1" lang="ja-JP">
+              <a:rPr sz="1050" b="1" lang="ja-JP">
                 <a:solidFill>
                   <a:srgbClr val="182C43"/>
                 </a:solidFill>
@@ -45300,7 +45312,7 @@
         </p:nvSpPr>
         <p:spPr>
           <a:xfrm>
-            <a:off x="594360" y="1571853"/>
+            <a:off x="594360" y="1527048"/>
             <a:ext cx="347472" cy="164592"/>
           </a:xfrm>
           <a:prstGeom prst="rect">
@@ -45341,7 +45353,7 @@
         </p:nvCxnSpPr>
         <p:spPr>
           <a:xfrm>
-            <a:off x="1033271" y="1681581"/>
+            <a:off x="1033271" y="1636776"/>
             <a:ext cx="292609" cy="0"/>
           </a:xfrm>
           <a:prstGeom prst="line">
@@ -45378,7 +45390,7 @@
         </p:nvSpPr>
         <p:spPr>
           <a:xfrm>
-            <a:off x="1399032" y="1599285"/>
+            <a:off x="1399032" y="1554480"/>
             <a:ext cx="566928" cy="164592"/>
           </a:xfrm>
           <a:prstGeom prst="rect">
@@ -45419,7 +45431,7 @@
         </p:nvCxnSpPr>
         <p:spPr>
           <a:xfrm>
-            <a:off x="1033271" y="1873605"/>
+            <a:off x="1033271" y="1828800"/>
             <a:ext cx="292609" cy="0"/>
           </a:xfrm>
           <a:prstGeom prst="line">
@@ -45457,7 +45469,7 @@
         </p:nvSpPr>
         <p:spPr>
           <a:xfrm>
-            <a:off x="1399032" y="1791309"/>
+            <a:off x="1399032" y="1746504"/>
             <a:ext cx="566928" cy="164592"/>
           </a:xfrm>
           <a:prstGeom prst="rect">
@@ -45498,8 +45510,8 @@
         </p:nvSpPr>
         <p:spPr>
           <a:xfrm>
-            <a:off x="502920" y="2056485"/>
-            <a:ext cx="1572768" cy="786384"/>
+            <a:off x="502920" y="1901952"/>
+            <a:ext cx="1389888" cy="786384"/>
           </a:xfrm>
           <a:prstGeom prst="rect">
             <a:avLst/>
@@ -45528,8 +45540,8 @@
         </p:nvSpPr>
         <p:spPr>
           <a:xfrm>
-            <a:off x="2075688" y="2056485"/>
-            <a:ext cx="9613087" cy="786384"/>
+            <a:off x="1892808" y="1901952"/>
+            <a:ext cx="9795967" cy="786384"/>
           </a:xfrm>
           <a:prstGeom prst="rect">
             <a:avLst/>
@@ -45558,8 +45570,8 @@
         </p:nvSpPr>
         <p:spPr>
           <a:xfrm>
-            <a:off x="612648" y="2056485"/>
-            <a:ext cx="1371600" cy="786384"/>
+            <a:off x="612648" y="1901952"/>
+            <a:ext cx="1188720" cy="786384"/>
           </a:xfrm>
           <a:prstGeom prst="rect">
             <a:avLst/>
@@ -45599,7 +45611,7 @@
         </p:nvCxnSpPr>
         <p:spPr>
           <a:xfrm>
-            <a:off x="502920" y="2842869"/>
+            <a:off x="502920" y="2688336"/>
             <a:ext cx="11185855" cy="0"/>
           </a:xfrm>
           <a:prstGeom prst="line">
@@ -45635,8 +45647,8 @@
         </p:nvSpPr>
         <p:spPr>
           <a:xfrm>
-            <a:off x="502920" y="2842869"/>
-            <a:ext cx="1572768" cy="786384"/>
+            <a:off x="502920" y="2688336"/>
+            <a:ext cx="1389888" cy="786384"/>
           </a:xfrm>
           <a:prstGeom prst="rect">
             <a:avLst/>
@@ -45665,14 +45677,14 @@
         </p:nvSpPr>
         <p:spPr>
           <a:xfrm>
-            <a:off x="2075688" y="2842869"/>
-            <a:ext cx="9613087" cy="786384"/>
+            <a:off x="1892808" y="2688336"/>
+            <a:ext cx="9795967" cy="786384"/>
           </a:xfrm>
           <a:prstGeom prst="rect">
             <a:avLst/>
           </a:prstGeom>
           <a:solidFill>
-            <a:srgbClr val="F7F5EF"/>
+            <a:srgbClr val="FFFFFC"/>
           </a:solidFill>
           <a:ln>
             <a:noFill/>
@@ -45695,8 +45707,8 @@
         </p:nvSpPr>
         <p:spPr>
           <a:xfrm>
-            <a:off x="612648" y="2842869"/>
-            <a:ext cx="1371600" cy="786384"/>
+            <a:off x="612648" y="2688336"/>
+            <a:ext cx="1188720" cy="786384"/>
           </a:xfrm>
           <a:prstGeom prst="rect">
             <a:avLst/>
@@ -45736,7 +45748,7 @@
         </p:nvCxnSpPr>
         <p:spPr>
           <a:xfrm>
-            <a:off x="502920" y="3629253"/>
+            <a:off x="502920" y="3474720"/>
             <a:ext cx="11185855" cy="0"/>
           </a:xfrm>
           <a:prstGeom prst="line">
@@ -45772,8 +45784,8 @@
         </p:nvSpPr>
         <p:spPr>
           <a:xfrm>
-            <a:off x="502920" y="3629253"/>
-            <a:ext cx="1572768" cy="786384"/>
+            <a:off x="502920" y="3474720"/>
+            <a:ext cx="1389888" cy="786384"/>
           </a:xfrm>
           <a:prstGeom prst="rect">
             <a:avLst/>
@@ -45802,8 +45814,8 @@
         </p:nvSpPr>
         <p:spPr>
           <a:xfrm>
-            <a:off x="2075688" y="3629253"/>
-            <a:ext cx="9613087" cy="786384"/>
+            <a:off x="1892808" y="3474720"/>
+            <a:ext cx="9795967" cy="786384"/>
           </a:xfrm>
           <a:prstGeom prst="rect">
             <a:avLst/>
@@ -45832,8 +45844,8 @@
         </p:nvSpPr>
         <p:spPr>
           <a:xfrm>
-            <a:off x="612648" y="3629253"/>
-            <a:ext cx="1371600" cy="786384"/>
+            <a:off x="612648" y="3474720"/>
+            <a:ext cx="1188720" cy="786384"/>
           </a:xfrm>
           <a:prstGeom prst="rect">
             <a:avLst/>
@@ -45852,7 +45864,7 @@
               </a:lnSpc>
             </a:pPr>
             <a:r>
-              <a:rPr sz="1200" b="1" lang="ja-JP">
+              <a:rPr sz="1050" b="1" lang="ja-JP">
                 <a:solidFill>
                   <a:srgbClr val="182C43"/>
                 </a:solidFill>
@@ -45873,7 +45885,7 @@
         </p:nvCxnSpPr>
         <p:spPr>
           <a:xfrm>
-            <a:off x="502920" y="4415637"/>
+            <a:off x="502920" y="4261104"/>
             <a:ext cx="11185855" cy="0"/>
           </a:xfrm>
           <a:prstGeom prst="line">
@@ -45909,8 +45921,8 @@
         </p:nvSpPr>
         <p:spPr>
           <a:xfrm>
-            <a:off x="502920" y="4415637"/>
-            <a:ext cx="1572768" cy="786384"/>
+            <a:off x="502920" y="4261104"/>
+            <a:ext cx="1389888" cy="786384"/>
           </a:xfrm>
           <a:prstGeom prst="rect">
             <a:avLst/>
@@ -45939,14 +45951,14 @@
         </p:nvSpPr>
         <p:spPr>
           <a:xfrm>
-            <a:off x="2075688" y="4415637"/>
-            <a:ext cx="9613087" cy="786384"/>
+            <a:off x="1892808" y="4261104"/>
+            <a:ext cx="9795967" cy="786384"/>
           </a:xfrm>
           <a:prstGeom prst="rect">
             <a:avLst/>
           </a:prstGeom>
           <a:solidFill>
-            <a:srgbClr val="F7F5EF"/>
+            <a:srgbClr val="FFFFFC"/>
           </a:solidFill>
           <a:ln>
             <a:noFill/>
@@ -45969,8 +45981,8 @@
         </p:nvSpPr>
         <p:spPr>
           <a:xfrm>
-            <a:off x="612648" y="4415637"/>
-            <a:ext cx="1371600" cy="786384"/>
+            <a:off x="612648" y="4261104"/>
+            <a:ext cx="1188720" cy="786384"/>
           </a:xfrm>
           <a:prstGeom prst="rect">
             <a:avLst/>
@@ -46010,7 +46022,7 @@
         </p:nvCxnSpPr>
         <p:spPr>
           <a:xfrm>
-            <a:off x="502920" y="5202021"/>
+            <a:off x="502920" y="5047488"/>
             <a:ext cx="11185855" cy="0"/>
           </a:xfrm>
           <a:prstGeom prst="line">
@@ -46046,7 +46058,7 @@
         </p:nvCxnSpPr>
         <p:spPr>
           <a:xfrm>
-            <a:off x="2075688" y="2056485"/>
+            <a:off x="1892808" y="1901952"/>
             <a:ext cx="0" cy="3145536"/>
           </a:xfrm>
           <a:prstGeom prst="line">
@@ -46082,7 +46094,7 @@
         </p:nvCxnSpPr>
         <p:spPr>
           <a:xfrm>
-            <a:off x="4478959" y="2056485"/>
+            <a:off x="4341799" y="1901952"/>
             <a:ext cx="0" cy="3145536"/>
           </a:xfrm>
           <a:prstGeom prst="line">
@@ -46118,7 +46130,7 @@
         </p:nvCxnSpPr>
         <p:spPr>
           <a:xfrm>
-            <a:off x="6882231" y="2056485"/>
+            <a:off x="6790791" y="1901952"/>
             <a:ext cx="0" cy="3145536"/>
           </a:xfrm>
           <a:prstGeom prst="line">
@@ -46154,7 +46166,7 @@
         </p:nvCxnSpPr>
         <p:spPr>
           <a:xfrm>
-            <a:off x="9285503" y="2056485"/>
+            <a:off x="9239783" y="1901952"/>
             <a:ext cx="0" cy="3145536"/>
           </a:xfrm>
           <a:prstGeom prst="line">
@@ -46190,13 +46202,13 @@
         </p:nvCxnSpPr>
         <p:spPr>
           <a:xfrm>
-            <a:off x="4063707" y="2449677"/>
-            <a:ext cx="415252" cy="0"/>
+            <a:off x="3775671" y="2295144"/>
+            <a:ext cx="529552" cy="0"/>
           </a:xfrm>
           <a:prstGeom prst="line">
             <a:avLst/>
           </a:prstGeom>
-          <a:ln w="14604">
+          <a:ln w="13335">
             <a:solidFill>
               <a:srgbClr val="6C7372"/>
             </a:solidFill>
@@ -46226,13 +46238,13 @@
         </p:nvCxnSpPr>
         <p:spPr>
           <a:xfrm>
-            <a:off x="4478959" y="2449677"/>
+            <a:off x="4305223" y="2295144"/>
             <a:ext cx="0" cy="786384"/>
           </a:xfrm>
           <a:prstGeom prst="line">
             <a:avLst/>
           </a:prstGeom>
-          <a:ln w="14604">
+          <a:ln w="13335">
             <a:solidFill>
               <a:srgbClr val="6C7372"/>
             </a:solidFill>
@@ -46262,13 +46274,13 @@
         </p:nvCxnSpPr>
         <p:spPr>
           <a:xfrm>
-            <a:off x="4478959" y="3236061"/>
-            <a:ext cx="100584" cy="0"/>
+            <a:off x="4305223" y="3081528"/>
+            <a:ext cx="164592" cy="0"/>
           </a:xfrm>
           <a:prstGeom prst="line">
             <a:avLst/>
           </a:prstGeom>
-          <a:ln w="14604">
+          <a:ln w="13335">
             <a:solidFill>
               <a:srgbClr val="6C7372"/>
             </a:solidFill>
@@ -46299,13 +46311,13 @@
         </p:nvCxnSpPr>
         <p:spPr>
           <a:xfrm>
-            <a:off x="5644019" y="3236061"/>
-            <a:ext cx="73152" cy="0"/>
+            <a:off x="5520575" y="3081528"/>
+            <a:ext cx="91440" cy="0"/>
           </a:xfrm>
           <a:prstGeom prst="line">
             <a:avLst/>
           </a:prstGeom>
-          <a:ln w="14604">
+          <a:ln w="13335">
             <a:solidFill>
               <a:srgbClr val="6C7372"/>
             </a:solidFill>
@@ -46336,17 +46348,16 @@
         </p:nvCxnSpPr>
         <p:spPr>
           <a:xfrm>
-            <a:off x="5111781" y="3492093"/>
-            <a:ext cx="568814" cy="274320"/>
+            <a:off x="4995195" y="3310128"/>
+            <a:ext cx="0" cy="164592"/>
           </a:xfrm>
           <a:prstGeom prst="line">
             <a:avLst/>
           </a:prstGeom>
-          <a:ln w="14604">
+          <a:ln w="13335">
             <a:solidFill>
               <a:srgbClr val="6C7372"/>
             </a:solidFill>
-            <a:tailEnd type="triangle" w="med" len="med"/>
           </a:ln>
           <a:effectLst/>
         </p:spPr>
@@ -46373,17 +46384,16 @@
         </p:nvCxnSpPr>
         <p:spPr>
           <a:xfrm>
-            <a:off x="6781647" y="3236061"/>
-            <a:ext cx="201168" cy="0"/>
+            <a:off x="4995195" y="3474720"/>
+            <a:ext cx="571100" cy="0"/>
           </a:xfrm>
           <a:prstGeom prst="line">
             <a:avLst/>
           </a:prstGeom>
-          <a:ln w="14604">
+          <a:ln w="13335">
             <a:solidFill>
               <a:srgbClr val="6C7372"/>
             </a:solidFill>
-            <a:tailEnd type="triangle" w="med" len="med"/>
           </a:ln>
           <a:effectLst/>
         </p:spPr>
@@ -46410,13 +46420,13 @@
         </p:nvCxnSpPr>
         <p:spPr>
           <a:xfrm>
-            <a:off x="6466979" y="4022445"/>
-            <a:ext cx="830504" cy="0"/>
+            <a:off x="5566295" y="3474720"/>
+            <a:ext cx="0" cy="164592"/>
           </a:xfrm>
           <a:prstGeom prst="line">
             <a:avLst/>
           </a:prstGeom>
-          <a:ln w="14604">
+          <a:ln w="13335">
             <a:solidFill>
               <a:srgbClr val="6C7372"/>
             </a:solidFill>
@@ -46447,13 +46457,13 @@
         </p:nvCxnSpPr>
         <p:spPr>
           <a:xfrm>
-            <a:off x="7515053" y="3492093"/>
-            <a:ext cx="568814" cy="274320"/>
+            <a:off x="6662775" y="3081528"/>
+            <a:ext cx="256032" cy="0"/>
           </a:xfrm>
           <a:prstGeom prst="line">
             <a:avLst/>
           </a:prstGeom>
-          <a:ln w="14604">
+          <a:ln w="13335">
             <a:solidFill>
               <a:srgbClr val="6C7372"/>
             </a:solidFill>
@@ -46484,13 +46494,13 @@
         </p:nvCxnSpPr>
         <p:spPr>
           <a:xfrm>
-            <a:off x="8083867" y="4278477"/>
-            <a:ext cx="0" cy="274320"/>
+            <a:off x="6224663" y="3867912"/>
+            <a:ext cx="1132256" cy="0"/>
           </a:xfrm>
           <a:prstGeom prst="line">
             <a:avLst/>
           </a:prstGeom>
-          <a:ln w="14604">
+          <a:ln w="13335">
             <a:solidFill>
               <a:srgbClr val="6C7372"/>
             </a:solidFill>
@@ -46521,13 +46531,13 @@
         </p:nvCxnSpPr>
         <p:spPr>
           <a:xfrm>
-            <a:off x="8870251" y="4808829"/>
-            <a:ext cx="214084" cy="0"/>
+            <a:off x="7444187" y="3310128"/>
+            <a:ext cx="0" cy="164592"/>
           </a:xfrm>
           <a:prstGeom prst="line">
             <a:avLst/>
           </a:prstGeom>
-          <a:ln w="14604">
+          <a:ln w="13335">
             <a:solidFill>
               <a:srgbClr val="6C7372"/>
             </a:solidFill>
@@ -46556,14 +46566,14 @@
           <p:nvPr/>
         </p:nvCxnSpPr>
         <p:spPr>
-          <a:xfrm flipV="1">
-            <a:off x="9084335" y="3583533"/>
-            <a:ext cx="0" cy="1225296"/>
+          <a:xfrm>
+            <a:off x="7444187" y="3474720"/>
+            <a:ext cx="571100" cy="0"/>
           </a:xfrm>
           <a:prstGeom prst="line">
             <a:avLst/>
           </a:prstGeom>
-          <a:ln w="14604">
+          <a:ln w="13335">
             <a:solidFill>
               <a:srgbClr val="6C7372"/>
             </a:solidFill>
@@ -46592,17 +46602,18 @@
           <p:nvPr/>
         </p:nvCxnSpPr>
         <p:spPr>
-          <a:xfrm flipH="1">
-            <a:off x="8652681" y="3583533"/>
-            <a:ext cx="431654" cy="0"/>
+          <a:xfrm>
+            <a:off x="8015287" y="3474720"/>
+            <a:ext cx="0" cy="164592"/>
           </a:xfrm>
           <a:prstGeom prst="line">
             <a:avLst/>
           </a:prstGeom>
-          <a:ln w="14604">
+          <a:ln w="13335">
             <a:solidFill>
               <a:srgbClr val="6C7372"/>
             </a:solidFill>
+            <a:tailEnd type="triangle" w="med" len="med"/>
           </a:ln>
           <a:effectLst/>
         </p:spPr>
@@ -46628,18 +46639,17 @@
           <p:nvPr/>
         </p:nvCxnSpPr>
         <p:spPr>
-          <a:xfrm flipV="1">
-            <a:off x="8652681" y="3492093"/>
-            <a:ext cx="0" cy="91440"/>
+          <a:xfrm>
+            <a:off x="8015287" y="4096512"/>
+            <a:ext cx="0" cy="164592"/>
           </a:xfrm>
           <a:prstGeom prst="line">
             <a:avLst/>
           </a:prstGeom>
-          <a:ln w="14604">
+          <a:ln w="13335">
             <a:solidFill>
               <a:srgbClr val="6C7372"/>
             </a:solidFill>
-            <a:tailEnd type="triangle" w="med" len="med"/>
           </a:ln>
           <a:effectLst/>
         </p:spPr>
@@ -46666,13 +46676,13 @@
         </p:nvCxnSpPr>
         <p:spPr>
           <a:xfrm>
-            <a:off x="9184919" y="3236061"/>
-            <a:ext cx="100584" cy="0"/>
+            <a:off x="8015287" y="4261104"/>
+            <a:ext cx="0" cy="0"/>
           </a:xfrm>
           <a:prstGeom prst="line">
             <a:avLst/>
           </a:prstGeom>
-          <a:ln w="14604">
+          <a:ln w="13335">
             <a:solidFill>
               <a:srgbClr val="6C7372"/>
             </a:solidFill>
@@ -46701,17 +46711,18 @@
           <p:nvPr/>
         </p:nvCxnSpPr>
         <p:spPr>
-          <a:xfrm flipV="1">
-            <a:off x="9285503" y="2449677"/>
-            <a:ext cx="0" cy="786384"/>
+          <a:xfrm>
+            <a:off x="8015287" y="4261104"/>
+            <a:ext cx="0" cy="164592"/>
           </a:xfrm>
           <a:prstGeom prst="line">
             <a:avLst/>
           </a:prstGeom>
-          <a:ln w="14604">
+          <a:ln w="13335">
             <a:solidFill>
               <a:srgbClr val="6C7372"/>
             </a:solidFill>
+            <a:tailEnd type="triangle" w="med" len="med"/>
           </a:ln>
           <a:effectLst/>
         </p:spPr>
@@ -46738,17 +46749,16 @@
         </p:nvCxnSpPr>
         <p:spPr>
           <a:xfrm>
-            <a:off x="9285503" y="2449677"/>
-            <a:ext cx="100584" cy="0"/>
+            <a:off x="8673655" y="4654296"/>
+            <a:ext cx="364960" cy="0"/>
           </a:xfrm>
           <a:prstGeom prst="line">
             <a:avLst/>
           </a:prstGeom>
-          <a:ln w="14604">
+          <a:ln w="13335">
             <a:solidFill>
               <a:srgbClr val="6C7372"/>
             </a:solidFill>
-            <a:tailEnd type="triangle" w="med" len="med"/>
           </a:ln>
           <a:effectLst/>
         </p:spPr>
@@ -46774,15 +46784,14 @@
           <p:nvPr/>
         </p:nvCxnSpPr>
         <p:spPr>
-          <a:xfrm>
-            <a:off x="8652681" y="3492093"/>
-            <a:ext cx="0" cy="1801368"/>
+          <a:xfrm flipV="1">
+            <a:off x="9038615" y="3401568"/>
+            <a:ext cx="0" cy="1252728"/>
           </a:xfrm>
           <a:prstGeom prst="line">
             <a:avLst/>
           </a:prstGeom>
-          <a:ln w="14604">
-            <a:prstDash val="dash"/>
+          <a:ln w="13335">
             <a:solidFill>
               <a:srgbClr val="6C7372"/>
             </a:solidFill>
@@ -46812,14 +46821,13 @@
         </p:nvCxnSpPr>
         <p:spPr>
           <a:xfrm flipH="1">
-            <a:off x="5111781" y="5293461"/>
-            <a:ext cx="3540900" cy="0"/>
+            <a:off x="8586387" y="3401568"/>
+            <a:ext cx="452228" cy="0"/>
           </a:xfrm>
           <a:prstGeom prst="line">
             <a:avLst/>
           </a:prstGeom>
-          <a:ln w="14604">
-            <a:prstDash val="dash"/>
+          <a:ln w="13335">
             <a:solidFill>
               <a:srgbClr val="6C7372"/>
             </a:solidFill>
@@ -46849,14 +46857,13 @@
         </p:nvCxnSpPr>
         <p:spPr>
           <a:xfrm flipV="1">
-            <a:off x="5111781" y="3492093"/>
-            <a:ext cx="0" cy="1801368"/>
+            <a:off x="8586387" y="3310128"/>
+            <a:ext cx="0" cy="91440"/>
           </a:xfrm>
           <a:prstGeom prst="line">
             <a:avLst/>
           </a:prstGeom>
-          <a:ln w="14604">
-            <a:prstDash val="dash"/>
+          <a:ln w="13335">
             <a:solidFill>
               <a:srgbClr val="6C7372"/>
             </a:solidFill>
@@ -46887,17 +46894,16 @@
         </p:nvCxnSpPr>
         <p:spPr>
           <a:xfrm>
-            <a:off x="10450563" y="2449677"/>
-            <a:ext cx="73152" cy="0"/>
+            <a:off x="9111767" y="3081528"/>
+            <a:ext cx="91440" cy="0"/>
           </a:xfrm>
           <a:prstGeom prst="line">
             <a:avLst/>
           </a:prstGeom>
-          <a:ln w="14604">
+          <a:ln w="13335">
             <a:solidFill>
               <a:srgbClr val="6C7372"/>
             </a:solidFill>
-            <a:tailEnd type="triangle" w="med" len="med"/>
           </a:ln>
           <a:effectLst/>
         </p:spPr>
@@ -46916,16 +46922,238 @@
           </a:fontRef>
         </p:style>
       </p:cxnSp>
-      <p:sp>
-        <p:nvSpPr>
-          <p:cNvPr id="58" name="Rectangle 57"/>
+      <p:cxnSp>
+        <p:nvCxnSpPr>
+          <p:cNvPr id="58" name="Connector 57"/>
+          <p:cNvCxnSpPr/>
+          <p:nvPr/>
+        </p:nvCxnSpPr>
+        <p:spPr>
+          <a:xfrm flipV="1">
+            <a:off x="9203207" y="2295144"/>
+            <a:ext cx="0" cy="786384"/>
+          </a:xfrm>
+          <a:prstGeom prst="line">
+            <a:avLst/>
+          </a:prstGeom>
+          <a:ln w="13335">
+            <a:solidFill>
+              <a:srgbClr val="6C7372"/>
+            </a:solidFill>
+          </a:ln>
+          <a:effectLst/>
+        </p:spPr>
+        <p:style>
+          <a:lnRef idx="2">
+            <a:schemeClr val="accent1"/>
+          </a:lnRef>
+          <a:fillRef idx="0">
+            <a:schemeClr val="accent1"/>
+          </a:fillRef>
+          <a:effectRef idx="1">
+            <a:schemeClr val="accent1"/>
+          </a:effectRef>
+          <a:fontRef idx="minor">
+            <a:schemeClr val="tx1"/>
+          </a:fontRef>
+        </p:style>
+      </p:cxnSp>
+      <p:cxnSp>
+        <p:nvCxnSpPr>
+          <p:cNvPr id="59" name="Connector 58"/>
+          <p:cNvCxnSpPr/>
+          <p:nvPr/>
+        </p:nvCxnSpPr>
+        <p:spPr>
+          <a:xfrm>
+            <a:off x="9203207" y="2295144"/>
+            <a:ext cx="164592" cy="0"/>
+          </a:xfrm>
+          <a:prstGeom prst="line">
+            <a:avLst/>
+          </a:prstGeom>
+          <a:ln w="13335">
+            <a:solidFill>
+              <a:srgbClr val="6C7372"/>
+            </a:solidFill>
+            <a:tailEnd type="triangle" w="med" len="med"/>
+          </a:ln>
+          <a:effectLst/>
+        </p:spPr>
+        <p:style>
+          <a:lnRef idx="2">
+            <a:schemeClr val="accent1"/>
+          </a:lnRef>
+          <a:fillRef idx="0">
+            <a:schemeClr val="accent1"/>
+          </a:fillRef>
+          <a:effectRef idx="1">
+            <a:schemeClr val="accent1"/>
+          </a:effectRef>
+          <a:fontRef idx="minor">
+            <a:schemeClr val="tx1"/>
+          </a:fontRef>
+        </p:style>
+      </p:cxnSp>
+      <p:cxnSp>
+        <p:nvCxnSpPr>
+          <p:cNvPr id="60" name="Connector 59"/>
+          <p:cNvCxnSpPr/>
+          <p:nvPr/>
+        </p:nvCxnSpPr>
+        <p:spPr>
+          <a:xfrm>
+            <a:off x="8586387" y="3310128"/>
+            <a:ext cx="0" cy="1828799"/>
+          </a:xfrm>
+          <a:prstGeom prst="line">
+            <a:avLst/>
+          </a:prstGeom>
+          <a:ln w="13335">
+            <a:prstDash val="dash"/>
+            <a:solidFill>
+              <a:srgbClr val="6C7372"/>
+            </a:solidFill>
+          </a:ln>
+          <a:effectLst/>
+        </p:spPr>
+        <p:style>
+          <a:lnRef idx="2">
+            <a:schemeClr val="accent1"/>
+          </a:lnRef>
+          <a:fillRef idx="0">
+            <a:schemeClr val="accent1"/>
+          </a:fillRef>
+          <a:effectRef idx="1">
+            <a:schemeClr val="accent1"/>
+          </a:effectRef>
+          <a:fontRef idx="minor">
+            <a:schemeClr val="tx1"/>
+          </a:fontRef>
+        </p:style>
+      </p:cxnSp>
+      <p:cxnSp>
+        <p:nvCxnSpPr>
+          <p:cNvPr id="61" name="Connector 60"/>
+          <p:cNvCxnSpPr/>
+          <p:nvPr/>
+        </p:nvCxnSpPr>
+        <p:spPr>
+          <a:xfrm flipH="1">
+            <a:off x="4995195" y="5138927"/>
+            <a:ext cx="3591192" cy="0"/>
+          </a:xfrm>
+          <a:prstGeom prst="line">
+            <a:avLst/>
+          </a:prstGeom>
+          <a:ln w="13335">
+            <a:prstDash val="dash"/>
+            <a:solidFill>
+              <a:srgbClr val="6C7372"/>
+            </a:solidFill>
+          </a:ln>
+          <a:effectLst/>
+        </p:spPr>
+        <p:style>
+          <a:lnRef idx="2">
+            <a:schemeClr val="accent1"/>
+          </a:lnRef>
+          <a:fillRef idx="0">
+            <a:schemeClr val="accent1"/>
+          </a:fillRef>
+          <a:effectRef idx="1">
+            <a:schemeClr val="accent1"/>
+          </a:effectRef>
+          <a:fontRef idx="minor">
+            <a:schemeClr val="tx1"/>
+          </a:fontRef>
+        </p:style>
+      </p:cxnSp>
+      <p:cxnSp>
+        <p:nvCxnSpPr>
+          <p:cNvPr id="62" name="Connector 61"/>
+          <p:cNvCxnSpPr/>
+          <p:nvPr/>
+        </p:nvCxnSpPr>
+        <p:spPr>
+          <a:xfrm flipV="1">
+            <a:off x="4995195" y="3310128"/>
+            <a:ext cx="0" cy="1828799"/>
+          </a:xfrm>
+          <a:prstGeom prst="line">
+            <a:avLst/>
+          </a:prstGeom>
+          <a:ln w="13335">
+            <a:prstDash val="dash"/>
+            <a:solidFill>
+              <a:srgbClr val="6C7372"/>
+            </a:solidFill>
+            <a:tailEnd type="triangle" w="med" len="med"/>
+          </a:ln>
+          <a:effectLst/>
+        </p:spPr>
+        <p:style>
+          <a:lnRef idx="2">
+            <a:schemeClr val="accent1"/>
+          </a:lnRef>
+          <a:fillRef idx="0">
+            <a:schemeClr val="accent1"/>
+          </a:fillRef>
+          <a:effectRef idx="1">
+            <a:schemeClr val="accent1"/>
+          </a:effectRef>
+          <a:fontRef idx="minor">
+            <a:schemeClr val="tx1"/>
+          </a:fontRef>
+        </p:style>
+      </p:cxnSp>
+      <p:cxnSp>
+        <p:nvCxnSpPr>
+          <p:cNvPr id="63" name="Connector 62"/>
+          <p:cNvCxnSpPr/>
+          <p:nvPr/>
+        </p:nvCxnSpPr>
+        <p:spPr>
+          <a:xfrm>
+            <a:off x="10418559" y="2295144"/>
+            <a:ext cx="91440" cy="0"/>
+          </a:xfrm>
+          <a:prstGeom prst="line">
+            <a:avLst/>
+          </a:prstGeom>
+          <a:ln w="13335">
+            <a:solidFill>
+              <a:srgbClr val="6C7372"/>
+            </a:solidFill>
+            <a:tailEnd type="triangle" w="med" len="med"/>
+          </a:ln>
+          <a:effectLst/>
+        </p:spPr>
+        <p:style>
+          <a:lnRef idx="2">
+            <a:schemeClr val="accent1"/>
+          </a:lnRef>
+          <a:fillRef idx="0">
+            <a:schemeClr val="accent1"/>
+          </a:fillRef>
+          <a:effectRef idx="1">
+            <a:schemeClr val="accent1"/>
+          </a:effectRef>
+          <a:fontRef idx="minor">
+            <a:schemeClr val="tx1"/>
+          </a:fontRef>
+        </p:style>
+      </p:cxnSp>
+      <p:sp>
+        <p:nvSpPr>
+          <p:cNvPr id="64" name="Rectangle 63"/>
           <p:cNvSpPr/>
           <p:nvPr/>
         </p:nvSpPr>
         <p:spPr>
           <a:xfrm>
-            <a:off x="2490939" y="2193645"/>
-            <a:ext cx="1572768" cy="512064"/>
+            <a:off x="2458935" y="2066544"/>
+            <a:ext cx="1316736" cy="457200"/>
           </a:xfrm>
           <a:prstGeom prst="rect">
             <a:avLst/>
@@ -46933,8 +47161,10 @@
           <a:solidFill>
             <a:srgbClr val="FFFFFC"/>
           </a:solidFill>
-          <a:ln>
-            <a:noFill/>
+          <a:ln w="9525">
+            <a:solidFill>
+              <a:srgbClr val="0D7870"/>
+            </a:solidFill>
           </a:ln>
           <a:effectLst/>
         </p:spPr>
@@ -46948,14 +47178,14 @@
       </p:sp>
       <p:sp>
         <p:nvSpPr>
-          <p:cNvPr id="59" name="TextBox 58"/>
-          <p:cNvSpPr txBox="1"/>
-          <p:nvPr/>
-        </p:nvSpPr>
-        <p:spPr>
-          <a:xfrm>
-            <a:off x="2582379" y="2193645"/>
-            <a:ext cx="1389888" cy="512064"/>
+          <p:cNvPr id="65" name="TextBox 64"/>
+          <p:cNvSpPr txBox="1"/>
+          <p:nvPr/>
+        </p:nvSpPr>
+        <p:spPr>
+          <a:xfrm>
+            <a:off x="2550375" y="2066544"/>
+            <a:ext cx="1133856" cy="457200"/>
           </a:xfrm>
           <a:prstGeom prst="rect">
             <a:avLst/>
@@ -46989,14 +47219,14 @@
       </p:sp>
       <p:sp>
         <p:nvSpPr>
-          <p:cNvPr id="60" name="Rectangle 59"/>
+          <p:cNvPr id="66" name="Rectangle 65"/>
           <p:cNvSpPr/>
           <p:nvPr/>
         </p:nvSpPr>
         <p:spPr>
           <a:xfrm>
-            <a:off x="4579543" y="2980029"/>
-            <a:ext cx="1064475" cy="512064"/>
+            <a:off x="4469815" y="2852928"/>
+            <a:ext cx="1050759" cy="457200"/>
           </a:xfrm>
           <a:prstGeom prst="rect">
             <a:avLst/>
@@ -47004,8 +47234,10 @@
           <a:solidFill>
             <a:srgbClr val="FFFFFC"/>
           </a:solidFill>
-          <a:ln>
-            <a:noFill/>
+          <a:ln w="9525">
+            <a:solidFill>
+              <a:srgbClr val="0D7870"/>
+            </a:solidFill>
           </a:ln>
           <a:effectLst/>
         </p:spPr>
@@ -47019,14 +47251,14 @@
       </p:sp>
       <p:sp>
         <p:nvSpPr>
-          <p:cNvPr id="61" name="TextBox 60"/>
-          <p:cNvSpPr txBox="1"/>
-          <p:nvPr/>
-        </p:nvSpPr>
-        <p:spPr>
-          <a:xfrm>
-            <a:off x="4670983" y="2980029"/>
-            <a:ext cx="881595" cy="512064"/>
+          <p:cNvPr id="67" name="TextBox 66"/>
+          <p:cNvSpPr txBox="1"/>
+          <p:nvPr/>
+        </p:nvSpPr>
+        <p:spPr>
+          <a:xfrm>
+            <a:off x="4561255" y="2852928"/>
+            <a:ext cx="867879" cy="457200"/>
           </a:xfrm>
           <a:prstGeom prst="rect">
             <a:avLst/>
@@ -47060,14 +47292,14 @@
       </p:sp>
       <p:sp>
         <p:nvSpPr>
-          <p:cNvPr id="62" name="Rectangle 61"/>
+          <p:cNvPr id="68" name="Rectangle 67"/>
           <p:cNvSpPr/>
           <p:nvPr/>
         </p:nvSpPr>
         <p:spPr>
           <a:xfrm>
-            <a:off x="5717171" y="2980029"/>
-            <a:ext cx="1064475" cy="512064"/>
+            <a:off x="5612015" y="2852928"/>
+            <a:ext cx="1050759" cy="457200"/>
           </a:xfrm>
           <a:prstGeom prst="rect">
             <a:avLst/>
@@ -47075,8 +47307,10 @@
           <a:solidFill>
             <a:srgbClr val="FFFFFC"/>
           </a:solidFill>
-          <a:ln>
-            <a:noFill/>
+          <a:ln w="9525">
+            <a:solidFill>
+              <a:srgbClr val="0D7870"/>
+            </a:solidFill>
           </a:ln>
           <a:effectLst/>
         </p:spPr>
@@ -47090,14 +47324,14 @@
       </p:sp>
       <p:sp>
         <p:nvSpPr>
-          <p:cNvPr id="63" name="TextBox 62"/>
-          <p:cNvSpPr txBox="1"/>
-          <p:nvPr/>
-        </p:nvSpPr>
-        <p:spPr>
-          <a:xfrm>
-            <a:off x="5808611" y="2980029"/>
-            <a:ext cx="881595" cy="512064"/>
+          <p:cNvPr id="69" name="TextBox 68"/>
+          <p:cNvSpPr txBox="1"/>
+          <p:nvPr/>
+        </p:nvSpPr>
+        <p:spPr>
+          <a:xfrm>
+            <a:off x="5703455" y="2852928"/>
+            <a:ext cx="867879" cy="457200"/>
           </a:xfrm>
           <a:prstGeom prst="rect">
             <a:avLst/>
@@ -47131,14 +47365,14 @@
       </p:sp>
       <p:sp>
         <p:nvSpPr>
-          <p:cNvPr id="64" name="Rectangle 63"/>
+          <p:cNvPr id="70" name="Rectangle 69"/>
           <p:cNvSpPr/>
           <p:nvPr/>
         </p:nvSpPr>
         <p:spPr>
           <a:xfrm>
-            <a:off x="4894211" y="3766413"/>
-            <a:ext cx="1572768" cy="512064"/>
+            <a:off x="4907927" y="3639312"/>
+            <a:ext cx="1316736" cy="457200"/>
           </a:xfrm>
           <a:prstGeom prst="rect">
             <a:avLst/>
@@ -47146,8 +47380,10 @@
           <a:solidFill>
             <a:srgbClr val="FFFFFC"/>
           </a:solidFill>
-          <a:ln>
-            <a:noFill/>
+          <a:ln w="9525">
+            <a:solidFill>
+              <a:srgbClr val="0D7870"/>
+            </a:solidFill>
           </a:ln>
           <a:effectLst/>
         </p:spPr>
@@ -47161,14 +47397,14 @@
       </p:sp>
       <p:sp>
         <p:nvSpPr>
-          <p:cNvPr id="65" name="TextBox 64"/>
-          <p:cNvSpPr txBox="1"/>
-          <p:nvPr/>
-        </p:nvSpPr>
-        <p:spPr>
-          <a:xfrm>
-            <a:off x="4985651" y="3766413"/>
-            <a:ext cx="1389888" cy="512064"/>
+          <p:cNvPr id="71" name="TextBox 70"/>
+          <p:cNvSpPr txBox="1"/>
+          <p:nvPr/>
+        </p:nvSpPr>
+        <p:spPr>
+          <a:xfrm>
+            <a:off x="4999367" y="3639312"/>
+            <a:ext cx="1133856" cy="457200"/>
           </a:xfrm>
           <a:prstGeom prst="rect">
             <a:avLst/>
@@ -47202,14 +47438,14 @@
       </p:sp>
       <p:sp>
         <p:nvSpPr>
-          <p:cNvPr id="66" name="Rectangle 65"/>
+          <p:cNvPr id="72" name="Rectangle 71"/>
           <p:cNvSpPr/>
           <p:nvPr/>
         </p:nvSpPr>
         <p:spPr>
           <a:xfrm>
-            <a:off x="6982815" y="2980029"/>
-            <a:ext cx="1064475" cy="512064"/>
+            <a:off x="6918807" y="2852928"/>
+            <a:ext cx="1050759" cy="457200"/>
           </a:xfrm>
           <a:prstGeom prst="rect">
             <a:avLst/>
@@ -47217,8 +47453,10 @@
           <a:solidFill>
             <a:srgbClr val="FFFFFC"/>
           </a:solidFill>
-          <a:ln>
-            <a:noFill/>
+          <a:ln w="9525">
+            <a:solidFill>
+              <a:srgbClr val="0D7870"/>
+            </a:solidFill>
           </a:ln>
           <a:effectLst/>
         </p:spPr>
@@ -47232,14 +47470,14 @@
       </p:sp>
       <p:sp>
         <p:nvSpPr>
-          <p:cNvPr id="67" name="TextBox 66"/>
-          <p:cNvSpPr txBox="1"/>
-          <p:nvPr/>
-        </p:nvSpPr>
-        <p:spPr>
-          <a:xfrm>
-            <a:off x="7074255" y="2980029"/>
-            <a:ext cx="881595" cy="512064"/>
+          <p:cNvPr id="73" name="TextBox 72"/>
+          <p:cNvSpPr txBox="1"/>
+          <p:nvPr/>
+        </p:nvSpPr>
+        <p:spPr>
+          <a:xfrm>
+            <a:off x="7010247" y="2852928"/>
+            <a:ext cx="867879" cy="457200"/>
           </a:xfrm>
           <a:prstGeom prst="rect">
             <a:avLst/>
@@ -47273,14 +47511,14 @@
       </p:sp>
       <p:sp>
         <p:nvSpPr>
-          <p:cNvPr id="68" name="Rectangle 67"/>
+          <p:cNvPr id="74" name="Rectangle 73"/>
           <p:cNvSpPr/>
           <p:nvPr/>
         </p:nvSpPr>
         <p:spPr>
           <a:xfrm>
-            <a:off x="7297483" y="3766413"/>
-            <a:ext cx="1572768" cy="512064"/>
+            <a:off x="7356919" y="3639312"/>
+            <a:ext cx="1316736" cy="457200"/>
           </a:xfrm>
           <a:prstGeom prst="rect">
             <a:avLst/>
@@ -47288,8 +47526,10 @@
           <a:solidFill>
             <a:srgbClr val="FFFFFC"/>
           </a:solidFill>
-          <a:ln>
-            <a:noFill/>
+          <a:ln w="9525">
+            <a:solidFill>
+              <a:srgbClr val="0D7870"/>
+            </a:solidFill>
           </a:ln>
           <a:effectLst/>
         </p:spPr>
@@ -47303,14 +47543,14 @@
       </p:sp>
       <p:sp>
         <p:nvSpPr>
-          <p:cNvPr id="69" name="TextBox 68"/>
-          <p:cNvSpPr txBox="1"/>
-          <p:nvPr/>
-        </p:nvSpPr>
-        <p:spPr>
-          <a:xfrm>
-            <a:off x="7388923" y="3766413"/>
-            <a:ext cx="1389888" cy="512064"/>
+          <p:cNvPr id="75" name="TextBox 74"/>
+          <p:cNvSpPr txBox="1"/>
+          <p:nvPr/>
+        </p:nvSpPr>
+        <p:spPr>
+          <a:xfrm>
+            <a:off x="7448359" y="3639312"/>
+            <a:ext cx="1133856" cy="457200"/>
           </a:xfrm>
           <a:prstGeom prst="rect">
             <a:avLst/>
@@ -47344,14 +47584,14 @@
       </p:sp>
       <p:sp>
         <p:nvSpPr>
-          <p:cNvPr id="70" name="Rectangle 69"/>
+          <p:cNvPr id="76" name="Rectangle 75"/>
           <p:cNvSpPr/>
           <p:nvPr/>
         </p:nvSpPr>
         <p:spPr>
           <a:xfrm>
-            <a:off x="7297483" y="4552797"/>
-            <a:ext cx="1572768" cy="512064"/>
+            <a:off x="7356919" y="4425696"/>
+            <a:ext cx="1316736" cy="457200"/>
           </a:xfrm>
           <a:prstGeom prst="rect">
             <a:avLst/>
@@ -47376,14 +47616,14 @@
       </p:sp>
       <p:sp>
         <p:nvSpPr>
-          <p:cNvPr id="71" name="TextBox 70"/>
-          <p:cNvSpPr txBox="1"/>
-          <p:nvPr/>
-        </p:nvSpPr>
-        <p:spPr>
-          <a:xfrm>
-            <a:off x="7388923" y="4552797"/>
-            <a:ext cx="1389888" cy="512064"/>
+          <p:cNvPr id="77" name="TextBox 76"/>
+          <p:cNvSpPr txBox="1"/>
+          <p:nvPr/>
+        </p:nvSpPr>
+        <p:spPr>
+          <a:xfrm>
+            <a:off x="7448359" y="4425696"/>
+            <a:ext cx="1133856" cy="457200"/>
           </a:xfrm>
           <a:prstGeom prst="rect">
             <a:avLst/>
@@ -47417,14 +47657,14 @@
       </p:sp>
       <p:sp>
         <p:nvSpPr>
-          <p:cNvPr id="72" name="Rectangle 71"/>
+          <p:cNvPr id="78" name="Rectangle 77"/>
           <p:cNvSpPr/>
           <p:nvPr/>
         </p:nvSpPr>
         <p:spPr>
           <a:xfrm>
-            <a:off x="8120443" y="2980029"/>
-            <a:ext cx="1064475" cy="512064"/>
+            <a:off x="8061007" y="2852928"/>
+            <a:ext cx="1050759" cy="457200"/>
           </a:xfrm>
           <a:prstGeom prst="rect">
             <a:avLst/>
@@ -47432,8 +47672,10 @@
           <a:solidFill>
             <a:srgbClr val="FFFFFC"/>
           </a:solidFill>
-          <a:ln>
-            <a:noFill/>
+          <a:ln w="9525">
+            <a:solidFill>
+              <a:srgbClr val="0D7870"/>
+            </a:solidFill>
           </a:ln>
           <a:effectLst/>
         </p:spPr>
@@ -47447,14 +47689,14 @@
       </p:sp>
       <p:sp>
         <p:nvSpPr>
-          <p:cNvPr id="73" name="TextBox 72"/>
-          <p:cNvSpPr txBox="1"/>
-          <p:nvPr/>
-        </p:nvSpPr>
-        <p:spPr>
-          <a:xfrm>
-            <a:off x="8211883" y="2980029"/>
-            <a:ext cx="881595" cy="512064"/>
+          <p:cNvPr id="79" name="TextBox 78"/>
+          <p:cNvSpPr txBox="1"/>
+          <p:nvPr/>
+        </p:nvSpPr>
+        <p:spPr>
+          <a:xfrm>
+            <a:off x="8152447" y="2852928"/>
+            <a:ext cx="867879" cy="457200"/>
           </a:xfrm>
           <a:prstGeom prst="rect">
             <a:avLst/>
@@ -47488,14 +47730,14 @@
       </p:sp>
       <p:sp>
         <p:nvSpPr>
-          <p:cNvPr id="74" name="Rectangle 73"/>
+          <p:cNvPr id="80" name="Rectangle 79"/>
           <p:cNvSpPr/>
           <p:nvPr/>
         </p:nvSpPr>
         <p:spPr>
           <a:xfrm>
-            <a:off x="9386087" y="2193645"/>
-            <a:ext cx="1064475" cy="512064"/>
+            <a:off x="9367799" y="2066544"/>
+            <a:ext cx="1050759" cy="457200"/>
           </a:xfrm>
           <a:prstGeom prst="rect">
             <a:avLst/>
@@ -47503,8 +47745,10 @@
           <a:solidFill>
             <a:srgbClr val="FFFFFC"/>
           </a:solidFill>
-          <a:ln>
-            <a:noFill/>
+          <a:ln w="9525">
+            <a:solidFill>
+              <a:srgbClr val="0D7870"/>
+            </a:solidFill>
           </a:ln>
           <a:effectLst/>
         </p:spPr>
@@ -47518,14 +47762,14 @@
       </p:sp>
       <p:sp>
         <p:nvSpPr>
-          <p:cNvPr id="75" name="TextBox 74"/>
-          <p:cNvSpPr txBox="1"/>
-          <p:nvPr/>
-        </p:nvSpPr>
-        <p:spPr>
-          <a:xfrm>
-            <a:off x="9477527" y="2193645"/>
-            <a:ext cx="881595" cy="512064"/>
+          <p:cNvPr id="81" name="TextBox 80"/>
+          <p:cNvSpPr txBox="1"/>
+          <p:nvPr/>
+        </p:nvSpPr>
+        <p:spPr>
+          <a:xfrm>
+            <a:off x="9459239" y="2066544"/>
+            <a:ext cx="867879" cy="457200"/>
           </a:xfrm>
           <a:prstGeom prst="rect">
             <a:avLst/>
@@ -47559,14 +47803,14 @@
       </p:sp>
       <p:sp>
         <p:nvSpPr>
-          <p:cNvPr id="76" name="Rectangle 75"/>
+          <p:cNvPr id="82" name="Rectangle 81"/>
           <p:cNvSpPr/>
           <p:nvPr/>
         </p:nvSpPr>
         <p:spPr>
           <a:xfrm>
-            <a:off x="10523715" y="2193645"/>
-            <a:ext cx="1064475" cy="512064"/>
+            <a:off x="10509999" y="2066544"/>
+            <a:ext cx="1050759" cy="457200"/>
           </a:xfrm>
           <a:prstGeom prst="rect">
             <a:avLst/>
@@ -47574,8 +47818,10 @@
           <a:solidFill>
             <a:srgbClr val="FFFFFC"/>
           </a:solidFill>
-          <a:ln>
-            <a:noFill/>
+          <a:ln w="9525">
+            <a:solidFill>
+              <a:srgbClr val="0D7870"/>
+            </a:solidFill>
           </a:ln>
           <a:effectLst/>
         </p:spPr>
@@ -47589,14 +47835,14 @@
       </p:sp>
       <p:sp>
         <p:nvSpPr>
-          <p:cNvPr id="77" name="TextBox 76"/>
-          <p:cNvSpPr txBox="1"/>
-          <p:nvPr/>
-        </p:nvSpPr>
-        <p:spPr>
-          <a:xfrm>
-            <a:off x="10615155" y="2193645"/>
-            <a:ext cx="881595" cy="512064"/>
+          <p:cNvPr id="83" name="TextBox 82"/>
+          <p:cNvSpPr txBox="1"/>
+          <p:nvPr/>
+        </p:nvSpPr>
+        <p:spPr>
+          <a:xfrm>
+            <a:off x="10601439" y="2066544"/>
+            <a:ext cx="867879" cy="457200"/>
           </a:xfrm>
           <a:prstGeom prst="rect">
             <a:avLst/>
@@ -47630,7 +47876,7 @@
       </p:sp>
       <p:sp>
         <p:nvSpPr>
-          <p:cNvPr id="78" name="Rectangle 77"/>
+          <p:cNvPr id="84" name="Rectangle 83"/>
           <p:cNvSpPr/>
           <p:nvPr/>
         </p:nvSpPr>
@@ -47660,7 +47906,7 @@
       </p:sp>
       <p:sp>
         <p:nvSpPr>
-          <p:cNvPr id="79" name="Oval 78"/>
+          <p:cNvPr id="85" name="Oval 84"/>
           <p:cNvSpPr/>
           <p:nvPr/>
         </p:nvSpPr>
@@ -47690,7 +47936,7 @@
       </p:sp>
       <p:pic>
         <p:nvPicPr>
-          <p:cNvPr id="80" name="Picture 79" descr="check.png"/>
+          <p:cNvPr id="86" name="Picture 85" descr="check.png"/>
           <p:cNvPicPr>
             <a:picLocks noChangeAspect="1"/>
           </p:cNvPicPr>
@@ -47714,7 +47960,7 @@
       </p:pic>
       <p:sp>
         <p:nvSpPr>
-          <p:cNvPr id="81" name="TextBox 80"/>
+          <p:cNvPr id="87" name="TextBox 86"/>
           <p:cNvSpPr txBox="1"/>
           <p:nvPr/>
         </p:nvSpPr>
@@ -47755,7 +48001,7 @@
       </p:sp>
       <p:cxnSp>
         <p:nvCxnSpPr>
-          <p:cNvPr id="82" name="Connector 81"/>
+          <p:cNvPr id="88" name="Connector 87"/>
           <p:cNvCxnSpPr/>
           <p:nvPr/>
         </p:nvCxnSpPr>
@@ -47791,7 +48037,7 @@
       </p:cxnSp>
       <p:sp>
         <p:nvSpPr>
-          <p:cNvPr id="83" name="TextBox 82"/>
+          <p:cNvPr id="89" name="TextBox 88"/>
           <p:cNvSpPr txBox="1"/>
           <p:nvPr/>
         </p:nvSpPr>
@@ -47832,7 +48078,7 @@
       </p:sp>
       <p:sp>
         <p:nvSpPr>
-          <p:cNvPr id="84" name="Rectangle 83"/>
+          <p:cNvPr id="90" name="Rectangle 89"/>
           <p:cNvSpPr/>
           <p:nvPr/>
         </p:nvSpPr>
@@ -47876,7 +48122,7 @@
       </p:sp>
       <p:sp>
         <p:nvSpPr>
-          <p:cNvPr id="85" name="TextBox 84"/>
+          <p:cNvPr id="91" name="TextBox 90"/>
           <p:cNvSpPr txBox="1"/>
           <p:nvPr/>
         </p:nvSpPr>
@@ -47917,7 +48163,7 @@
       </p:sp>
       <p:sp>
         <p:nvSpPr>
-          <p:cNvPr id="86" name="TextBox 85"/>
+          <p:cNvPr id="92" name="TextBox 91"/>
           <p:cNvSpPr txBox="1"/>
           <p:nvPr/>
         </p:nvSpPr>

--- a/examples/gallery/pattern_gallery.pptx
+++ b/examples/gallery/pattern_gallery.pptx
@@ -45014,7 +45014,7 @@
       </p:sp>
       <p:sp>
         <p:nvSpPr>
-          <p:cNvPr id="5" name="Chevron 4"/>
+          <p:cNvPr id="5" name="qa-surface-on-canvas:swimlane-stage:detect"/>
           <p:cNvSpPr/>
           <p:nvPr/>
         </p:nvSpPr>
@@ -45027,7 +45027,7 @@
             <a:avLst/>
           </a:prstGeom>
           <a:solidFill>
-            <a:srgbClr val="FFFFFC"/>
+            <a:srgbClr val="DFEBE8"/>
           </a:solidFill>
           <a:ln w="7620">
             <a:solidFill>
@@ -45087,7 +45087,7 @@
       </p:sp>
       <p:sp>
         <p:nvSpPr>
-          <p:cNvPr id="7" name="Chevron 6"/>
+          <p:cNvPr id="7" name="qa-surface-on-canvas:swimlane-stage:verify"/>
           <p:cNvSpPr/>
           <p:nvPr/>
         </p:nvSpPr>
@@ -45100,7 +45100,7 @@
             <a:avLst/>
           </a:prstGeom>
           <a:solidFill>
-            <a:srgbClr val="FFFFFC"/>
+            <a:srgbClr val="DFEBE8"/>
           </a:solidFill>
           <a:ln w="7620">
             <a:solidFill>
@@ -45160,7 +45160,7 @@
       </p:sp>
       <p:sp>
         <p:nvSpPr>
-          <p:cNvPr id="9" name="Chevron 8"/>
+          <p:cNvPr id="9" name="qa-surface-on-canvas:swimlane-stage:recover"/>
           <p:cNvSpPr/>
           <p:nvPr/>
         </p:nvSpPr>
@@ -45173,7 +45173,7 @@
             <a:avLst/>
           </a:prstGeom>
           <a:solidFill>
-            <a:srgbClr val="FFFFFC"/>
+            <a:srgbClr val="DFEBE8"/>
           </a:solidFill>
           <a:ln w="7620">
             <a:solidFill>
@@ -45233,7 +45233,7 @@
       </p:sp>
       <p:sp>
         <p:nvSpPr>
-          <p:cNvPr id="11" name="Chevron 10"/>
+          <p:cNvPr id="11" name="qa-surface-on-canvas:swimlane-stage:close"/>
           <p:cNvSpPr/>
           <p:nvPr/>
         </p:nvSpPr>
@@ -45246,7 +45246,7 @@
             <a:avLst/>
           </a:prstGeom>
           <a:solidFill>
-            <a:srgbClr val="FFFFFC"/>
+            <a:srgbClr val="DFEBE8"/>
           </a:solidFill>
           <a:ln w="7620">
             <a:solidFill>

--- a/examples/gallery/pattern_gallery.pptx
+++ b/examples/gallery/pattern_gallery.pptx
@@ -44908,462 +44908,32 @@
           </a:ln>
           <a:effectLst/>
         </p:spPr>
-        <p:style>
-          <a:lnRef idx="1">
-            <a:schemeClr val="accent1"/>
-          </a:lnRef>
-          <a:fillRef idx="3">
-            <a:schemeClr val="accent1"/>
-          </a:fillRef>
-          <a:effectRef idx="2">
-            <a:schemeClr val="accent1"/>
-          </a:effectRef>
-          <a:fontRef idx="minor">
-            <a:schemeClr val="lt1"/>
-          </a:fontRef>
-        </p:style>
         <p:txBody>
           <a:bodyPr rtlCol="0" anchor="ctr"/>
           <a:lstStyle/>
           <a:p>
             <a:pPr algn="ctr"/>
-          </a:p>
-        </p:txBody>
-      </p:sp>
-      <p:sp>
-        <p:nvSpPr>
-          <p:cNvPr id="3" name="TextBox 2"/>
-          <p:cNvSpPr txBox="1"/>
-          <p:nvPr/>
-        </p:nvSpPr>
-        <p:spPr>
-          <a:xfrm>
-            <a:off x="658368" y="246888"/>
-            <a:ext cx="4389120" cy="292608"/>
-          </a:xfrm>
-          <a:prstGeom prst="rect">
-            <a:avLst/>
-          </a:prstGeom>
-          <a:noFill/>
-        </p:spPr>
-        <p:txBody>
-          <a:bodyPr wrap="square" anchor="t" lIns="0" rIns="0" tIns="0" bIns="0">
-            <a:spAutoFit/>
-          </a:bodyPr>
-          <a:lstStyle/>
-          <a:p>
-            <a:pPr algn="l">
-              <a:lnSpc>
-                <a:spcPct val="130000"/>
-              </a:lnSpc>
-            </a:pPr>
-            <a:r>
-              <a:rPr sz="1150" b="1" lang="ja-JP">
-                <a:solidFill>
-                  <a:srgbClr val="0D7870"/>
-                </a:solidFill>
-                <a:latin typeface="Yu Gothic"/>
-                <a:ea typeface="Yu Gothic"/>
-                <a:cs typeface="Yu Gothic"/>
-              </a:rPr>
-              <a:t>障害対応フロー</a:t>
-            </a:r>
-          </a:p>
-        </p:txBody>
-      </p:sp>
-      <p:sp>
-        <p:nvSpPr>
-          <p:cNvPr id="4" name="TextBox 3"/>
-          <p:cNvSpPr txBox="1"/>
-          <p:nvPr/>
-        </p:nvSpPr>
-        <p:spPr>
-          <a:xfrm>
-            <a:off x="658368" y="612648"/>
-            <a:ext cx="10881360" cy="786384"/>
-          </a:xfrm>
-          <a:prstGeom prst="rect">
-            <a:avLst/>
-          </a:prstGeom>
-          <a:noFill/>
-        </p:spPr>
-        <p:txBody>
-          <a:bodyPr wrap="square" anchor="t" lIns="0" rIns="0" tIns="0" bIns="0">
-            <a:spAutoFit/>
-          </a:bodyPr>
-          <a:lstStyle/>
-          <a:p>
-            <a:pPr algn="l">
-              <a:lnSpc>
-                <a:spcPct val="112000"/>
-              </a:lnSpc>
-            </a:pPr>
-            <a:r>
-              <a:rPr sz="2700" b="1" lang="ja-JP">
-                <a:solidFill>
-                  <a:srgbClr val="182C43"/>
-                </a:solidFill>
-                <a:latin typeface="Yu Gothic"/>
-                <a:ea typeface="Yu Gothic"/>
-                <a:cs typeface="Yu Gothic"/>
-              </a:rPr>
-              <a:t>担当境界と引き継ぎ点を明確にし、対応漏れを防ぐ</a:t>
-            </a:r>
-          </a:p>
-        </p:txBody>
-      </p:sp>
-      <p:sp>
-        <p:nvSpPr>
-          <p:cNvPr id="5" name="qa-surface-on-canvas:swimlane-stage:detect"/>
-          <p:cNvSpPr/>
-          <p:nvPr/>
-        </p:nvSpPr>
-        <p:spPr>
-          <a:xfrm>
-            <a:off x="1892808" y="1517904"/>
-            <a:ext cx="2485567" cy="384048"/>
-          </a:xfrm>
-          <a:prstGeom prst="chevron">
-            <a:avLst/>
-          </a:prstGeom>
-          <a:solidFill>
-            <a:srgbClr val="DFEBE8"/>
-          </a:solidFill>
-          <a:ln w="7620">
-            <a:solidFill>
-              <a:srgbClr val="D1CFC8"/>
-            </a:solidFill>
-          </a:ln>
-          <a:effectLst/>
-        </p:spPr>
-        <p:txBody>
-          <a:bodyPr rtlCol="0" anchor="ctr"/>
-          <a:lstStyle/>
-          <a:p>
-            <a:pPr algn="ctr"/>
-          </a:p>
-        </p:txBody>
-      </p:sp>
-      <p:sp>
-        <p:nvSpPr>
-          <p:cNvPr id="6" name="TextBox 5"/>
-          <p:cNvSpPr txBox="1"/>
-          <p:nvPr/>
-        </p:nvSpPr>
-        <p:spPr>
-          <a:xfrm>
-            <a:off x="2020824" y="1572768"/>
-            <a:ext cx="2192959" cy="237744"/>
-          </a:xfrm>
-          <a:prstGeom prst="rect">
-            <a:avLst/>
-          </a:prstGeom>
-          <a:noFill/>
-        </p:spPr>
-        <p:txBody>
-          <a:bodyPr wrap="square" anchor="ctr" lIns="0" rIns="0" tIns="0" bIns="0">
-            <a:spAutoFit/>
-          </a:bodyPr>
-          <a:lstStyle/>
-          <a:p>
-            <a:pPr algn="ctr">
-              <a:lnSpc>
-                <a:spcPct val="130000"/>
-              </a:lnSpc>
-            </a:pPr>
-            <a:r>
-              <a:rPr sz="1050" b="1" lang="ja-JP">
-                <a:solidFill>
-                  <a:srgbClr val="182C43"/>
-                </a:solidFill>
-                <a:latin typeface="Yu Gothic"/>
-                <a:ea typeface="Yu Gothic"/>
-                <a:cs typeface="Yu Gothic"/>
-              </a:rPr>
-              <a:t>検知・申告</a:t>
-            </a:r>
-          </a:p>
-        </p:txBody>
-      </p:sp>
-      <p:sp>
-        <p:nvSpPr>
-          <p:cNvPr id="7" name="qa-surface-on-canvas:swimlane-stage:verify"/>
-          <p:cNvSpPr/>
-          <p:nvPr/>
-        </p:nvSpPr>
-        <p:spPr>
-          <a:xfrm>
-            <a:off x="4341799" y="1517904"/>
-            <a:ext cx="2485567" cy="384048"/>
-          </a:xfrm>
-          <a:prstGeom prst="chevron">
-            <a:avLst/>
-          </a:prstGeom>
-          <a:solidFill>
-            <a:srgbClr val="DFEBE8"/>
-          </a:solidFill>
-          <a:ln w="7620">
-            <a:solidFill>
-              <a:srgbClr val="D1CFC8"/>
-            </a:solidFill>
-          </a:ln>
-          <a:effectLst/>
-        </p:spPr>
-        <p:txBody>
-          <a:bodyPr rtlCol="0" anchor="ctr"/>
-          <a:lstStyle/>
-          <a:p>
-            <a:pPr algn="ctr"/>
-          </a:p>
-        </p:txBody>
-      </p:sp>
-      <p:sp>
-        <p:nvSpPr>
-          <p:cNvPr id="8" name="TextBox 7"/>
-          <p:cNvSpPr txBox="1"/>
-          <p:nvPr/>
-        </p:nvSpPr>
-        <p:spPr>
-          <a:xfrm>
-            <a:off x="4469815" y="1572768"/>
-            <a:ext cx="2192959" cy="237744"/>
-          </a:xfrm>
-          <a:prstGeom prst="rect">
-            <a:avLst/>
-          </a:prstGeom>
-          <a:noFill/>
-        </p:spPr>
-        <p:txBody>
-          <a:bodyPr wrap="square" anchor="ctr" lIns="0" rIns="0" tIns="0" bIns="0">
-            <a:spAutoFit/>
-          </a:bodyPr>
-          <a:lstStyle/>
-          <a:p>
-            <a:pPr algn="ctr">
-              <a:lnSpc>
-                <a:spcPct val="130000"/>
-              </a:lnSpc>
-            </a:pPr>
-            <a:r>
-              <a:rPr sz="1050" b="1" lang="ja-JP">
-                <a:solidFill>
-                  <a:srgbClr val="182C43"/>
-                </a:solidFill>
-                <a:latin typeface="Yu Gothic"/>
-                <a:ea typeface="Yu Gothic"/>
-                <a:cs typeface="Yu Gothic"/>
-              </a:rPr>
-              <a:t>確認・切り分け</a:t>
-            </a:r>
-          </a:p>
-        </p:txBody>
-      </p:sp>
-      <p:sp>
-        <p:nvSpPr>
-          <p:cNvPr id="9" name="qa-surface-on-canvas:swimlane-stage:recover"/>
-          <p:cNvSpPr/>
-          <p:nvPr/>
-        </p:nvSpPr>
-        <p:spPr>
-          <a:xfrm>
-            <a:off x="6790791" y="1517904"/>
-            <a:ext cx="2485567" cy="384048"/>
-          </a:xfrm>
-          <a:prstGeom prst="chevron">
-            <a:avLst/>
-          </a:prstGeom>
-          <a:solidFill>
-            <a:srgbClr val="DFEBE8"/>
-          </a:solidFill>
-          <a:ln w="7620">
-            <a:solidFill>
-              <a:srgbClr val="D1CFC8"/>
-            </a:solidFill>
-          </a:ln>
-          <a:effectLst/>
-        </p:spPr>
-        <p:txBody>
-          <a:bodyPr rtlCol="0" anchor="ctr"/>
-          <a:lstStyle/>
-          <a:p>
-            <a:pPr algn="ctr"/>
-          </a:p>
-        </p:txBody>
-      </p:sp>
-      <p:sp>
-        <p:nvSpPr>
-          <p:cNvPr id="10" name="TextBox 9"/>
-          <p:cNvSpPr txBox="1"/>
-          <p:nvPr/>
-        </p:nvSpPr>
-        <p:spPr>
-          <a:xfrm>
-            <a:off x="6918807" y="1572768"/>
-            <a:ext cx="2192959" cy="237744"/>
-          </a:xfrm>
-          <a:prstGeom prst="rect">
-            <a:avLst/>
-          </a:prstGeom>
-          <a:noFill/>
-        </p:spPr>
-        <p:txBody>
-          <a:bodyPr wrap="square" anchor="ctr" lIns="0" rIns="0" tIns="0" bIns="0">
-            <a:spAutoFit/>
-          </a:bodyPr>
-          <a:lstStyle/>
-          <a:p>
-            <a:pPr algn="ctr">
-              <a:lnSpc>
-                <a:spcPct val="130000"/>
-              </a:lnSpc>
-            </a:pPr>
-            <a:r>
-              <a:rPr sz="1050" b="1" lang="ja-JP">
-                <a:solidFill>
-                  <a:srgbClr val="182C43"/>
-                </a:solidFill>
-                <a:latin typeface="Yu Gothic"/>
-                <a:ea typeface="Yu Gothic"/>
-                <a:cs typeface="Yu Gothic"/>
-              </a:rPr>
-              <a:t>対応・復旧</a:t>
-            </a:r>
-          </a:p>
-        </p:txBody>
-      </p:sp>
-      <p:sp>
-        <p:nvSpPr>
-          <p:cNvPr id="11" name="qa-surface-on-canvas:swimlane-stage:close"/>
-          <p:cNvSpPr/>
-          <p:nvPr/>
-        </p:nvSpPr>
-        <p:spPr>
-          <a:xfrm>
-            <a:off x="9239783" y="1517904"/>
-            <a:ext cx="2448991" cy="384048"/>
-          </a:xfrm>
-          <a:prstGeom prst="chevron">
-            <a:avLst/>
-          </a:prstGeom>
-          <a:solidFill>
-            <a:srgbClr val="DFEBE8"/>
-          </a:solidFill>
-          <a:ln w="7620">
-            <a:solidFill>
-              <a:srgbClr val="D1CFC8"/>
-            </a:solidFill>
-          </a:ln>
-          <a:effectLst/>
-        </p:spPr>
-        <p:txBody>
-          <a:bodyPr rtlCol="0" anchor="ctr"/>
-          <a:lstStyle/>
-          <a:p>
-            <a:pPr algn="ctr"/>
-          </a:p>
-        </p:txBody>
-      </p:sp>
-      <p:sp>
-        <p:nvSpPr>
-          <p:cNvPr id="12" name="TextBox 11"/>
-          <p:cNvSpPr txBox="1"/>
-          <p:nvPr/>
-        </p:nvSpPr>
-        <p:spPr>
-          <a:xfrm>
-            <a:off x="9367799" y="1572768"/>
-            <a:ext cx="2192959" cy="237744"/>
-          </a:xfrm>
-          <a:prstGeom prst="rect">
-            <a:avLst/>
-          </a:prstGeom>
-          <a:noFill/>
-        </p:spPr>
-        <p:txBody>
-          <a:bodyPr wrap="square" anchor="ctr" lIns="0" rIns="0" tIns="0" bIns="0">
-            <a:spAutoFit/>
-          </a:bodyPr>
-          <a:lstStyle/>
-          <a:p>
-            <a:pPr algn="ctr">
-              <a:lnSpc>
-                <a:spcPct val="130000"/>
-              </a:lnSpc>
-            </a:pPr>
-            <a:r>
-              <a:rPr sz="1050" b="1" lang="ja-JP">
-                <a:solidFill>
-                  <a:srgbClr val="182C43"/>
-                </a:solidFill>
-                <a:latin typeface="Yu Gothic"/>
-                <a:ea typeface="Yu Gothic"/>
-                <a:cs typeface="Yu Gothic"/>
-              </a:rPr>
-              <a:t>確認・完了</a:t>
-            </a:r>
-          </a:p>
-        </p:txBody>
-      </p:sp>
-      <p:sp>
-        <p:nvSpPr>
-          <p:cNvPr id="13" name="TextBox 12"/>
-          <p:cNvSpPr txBox="1"/>
-          <p:nvPr/>
-        </p:nvSpPr>
-        <p:spPr>
-          <a:xfrm>
-            <a:off x="594360" y="1527048"/>
-            <a:ext cx="347472" cy="164592"/>
-          </a:xfrm>
-          <a:prstGeom prst="rect">
-            <a:avLst/>
-          </a:prstGeom>
-          <a:noFill/>
-        </p:spPr>
-        <p:txBody>
-          <a:bodyPr wrap="square" anchor="ctr" lIns="0" rIns="0" tIns="0" bIns="0">
-            <a:spAutoFit/>
-          </a:bodyPr>
-          <a:lstStyle/>
-          <a:p>
-            <a:pPr algn="l">
-              <a:lnSpc>
-                <a:spcPct val="130000"/>
-              </a:lnSpc>
-            </a:pPr>
-            <a:r>
-              <a:rPr sz="750" b="1" lang="ja-JP">
-                <a:solidFill>
-                  <a:srgbClr val="666E70"/>
-                </a:solidFill>
-                <a:latin typeface="Yu Gothic"/>
-                <a:ea typeface="Yu Gothic"/>
-                <a:cs typeface="Yu Gothic"/>
-              </a:rPr>
-              <a:t>凡例</a:t>
-            </a:r>
           </a:p>
         </p:txBody>
       </p:sp>
       <p:cxnSp>
         <p:nvCxnSpPr>
-          <p:cNvPr id="14" name="Connector 13"/>
+          <p:cNvPr id="3" name="Connector 2"/>
           <p:cNvCxnSpPr/>
           <p:nvPr/>
         </p:nvCxnSpPr>
         <p:spPr>
           <a:xfrm>
-            <a:off x="1033271" y="1636776"/>
-            <a:ext cx="292609" cy="0"/>
+            <a:off x="173736" y="182880"/>
+            <a:ext cx="11786616" cy="0"/>
           </a:xfrm>
           <a:prstGeom prst="line">
             <a:avLst/>
           </a:prstGeom>
-          <a:ln w="14604">
+          <a:ln w="38100">
             <a:solidFill>
-              <a:srgbClr val="666E70"/>
+              <a:srgbClr val="0D7870"/>
             </a:solidFill>
-            <a:tailEnd type="triangle" w="med" len="med"/>
           </a:ln>
           <a:effectLst/>
         </p:spPr>
@@ -45384,14 +44954,14 @@
       </p:cxnSp>
       <p:sp>
         <p:nvSpPr>
-          <p:cNvPr id="15" name="TextBox 14"/>
-          <p:cNvSpPr txBox="1"/>
-          <p:nvPr/>
-        </p:nvSpPr>
-        <p:spPr>
-          <a:xfrm>
-            <a:off x="1399032" y="1554480"/>
-            <a:ext cx="566928" cy="164592"/>
+          <p:cNvPr id="4" name="TextBox 3"/>
+          <p:cNvSpPr txBox="1"/>
+          <p:nvPr/>
+        </p:nvSpPr>
+        <p:spPr>
+          <a:xfrm>
+            <a:off x="484632" y="493776"/>
+            <a:ext cx="11201400" cy="438912"/>
           </a:xfrm>
           <a:prstGeom prst="rect">
             <a:avLst/>
@@ -45399,50 +44969,482 @@
           <a:noFill/>
         </p:spPr>
         <p:txBody>
+          <a:bodyPr wrap="square" anchor="t" lIns="0" rIns="0" tIns="0" bIns="0">
+            <a:spAutoFit/>
+          </a:bodyPr>
+          <a:lstStyle/>
+          <a:p>
+            <a:pPr algn="l">
+              <a:lnSpc>
+                <a:spcPct val="108000"/>
+              </a:lnSpc>
+            </a:pPr>
+            <a:r>
+              <a:rPr sz="2550" b="1" lang="ja-JP">
+                <a:solidFill>
+                  <a:srgbClr val="182C43"/>
+                </a:solidFill>
+                <a:latin typeface="Yu Gothic"/>
+                <a:ea typeface="Yu Gothic"/>
+                <a:cs typeface="Yu Gothic"/>
+              </a:rPr>
+              <a:t>障害対応スイムレーン</a:t>
+            </a:r>
+          </a:p>
+        </p:txBody>
+      </p:sp>
+      <p:sp>
+        <p:nvSpPr>
+          <p:cNvPr id="5" name="TextBox 4"/>
+          <p:cNvSpPr txBox="1"/>
+          <p:nvPr/>
+        </p:nvSpPr>
+        <p:spPr>
+          <a:xfrm>
+            <a:off x="484632" y="960120"/>
+            <a:ext cx="11201400" cy="310896"/>
+          </a:xfrm>
+          <a:prstGeom prst="rect">
+            <a:avLst/>
+          </a:prstGeom>
+          <a:noFill/>
+        </p:spPr>
+        <p:txBody>
+          <a:bodyPr wrap="square" anchor="t" lIns="0" rIns="0" tIns="0" bIns="0">
+            <a:spAutoFit/>
+          </a:bodyPr>
+          <a:lstStyle/>
+          <a:p>
+            <a:pPr algn="l">
+              <a:lnSpc>
+                <a:spcPct val="112000"/>
+              </a:lnSpc>
+            </a:pPr>
+            <a:r>
+              <a:rPr sz="1400" b="0" lang="ja-JP">
+                <a:solidFill>
+                  <a:srgbClr val="666E70"/>
+                </a:solidFill>
+                <a:latin typeface="Yu Gothic"/>
+                <a:ea typeface="Yu Gothic"/>
+                <a:cs typeface="Yu Gothic"/>
+              </a:rPr>
+              <a:t>役割ごとの対応手順と引き継ぎを整理する</a:t>
+            </a:r>
+          </a:p>
+        </p:txBody>
+      </p:sp>
+      <p:sp>
+        <p:nvSpPr>
+          <p:cNvPr id="6" name="qa-surface-on-canvas:swimlane-stage:detect"/>
+          <p:cNvSpPr/>
+          <p:nvPr/>
+        </p:nvSpPr>
+        <p:spPr>
+          <a:xfrm>
+            <a:off x="1499616" y="1499616"/>
+            <a:ext cx="2624328" cy="338328"/>
+          </a:xfrm>
+          <a:prstGeom prst="chevron">
+            <a:avLst/>
+          </a:prstGeom>
+          <a:solidFill>
+            <a:srgbClr val="FFFFFC"/>
+          </a:solidFill>
+          <a:ln w="10795">
+            <a:solidFill>
+              <a:srgbClr val="D1CFC8"/>
+            </a:solidFill>
+          </a:ln>
+          <a:effectLst/>
+        </p:spPr>
+        <p:txBody>
+          <a:bodyPr rtlCol="0" anchor="ctr"/>
+          <a:lstStyle/>
+          <a:p>
+            <a:pPr algn="ctr"/>
+          </a:p>
+        </p:txBody>
+      </p:sp>
+      <p:sp>
+        <p:nvSpPr>
+          <p:cNvPr id="7" name="TextBox 6"/>
+          <p:cNvSpPr txBox="1"/>
+          <p:nvPr/>
+        </p:nvSpPr>
+        <p:spPr>
+          <a:xfrm>
+            <a:off x="1627632" y="1554480"/>
+            <a:ext cx="2331720" cy="237744"/>
+          </a:xfrm>
+          <a:prstGeom prst="rect">
+            <a:avLst/>
+          </a:prstGeom>
+          <a:noFill/>
+        </p:spPr>
+        <p:txBody>
           <a:bodyPr wrap="square" anchor="ctr" lIns="0" rIns="0" tIns="0" bIns="0">
             <a:spAutoFit/>
           </a:bodyPr>
           <a:lstStyle/>
           <a:p>
+            <a:pPr algn="ctr">
+              <a:lnSpc>
+                <a:spcPct val="130000"/>
+              </a:lnSpc>
+            </a:pPr>
+            <a:r>
+              <a:rPr sz="1050" b="1" lang="ja-JP">
+                <a:solidFill>
+                  <a:srgbClr val="182C43"/>
+                </a:solidFill>
+                <a:latin typeface="Yu Gothic"/>
+                <a:ea typeface="Yu Gothic"/>
+                <a:cs typeface="Yu Gothic"/>
+              </a:rPr>
+              <a:t>検知・申告</a:t>
+            </a:r>
+          </a:p>
+        </p:txBody>
+      </p:sp>
+      <p:sp>
+        <p:nvSpPr>
+          <p:cNvPr id="8" name="qa-surface-on-canvas:swimlane-stage:verify"/>
+          <p:cNvSpPr/>
+          <p:nvPr/>
+        </p:nvSpPr>
+        <p:spPr>
+          <a:xfrm>
+            <a:off x="4087368" y="1499616"/>
+            <a:ext cx="2624328" cy="338328"/>
+          </a:xfrm>
+          <a:prstGeom prst="chevron">
+            <a:avLst/>
+          </a:prstGeom>
+          <a:solidFill>
+            <a:srgbClr val="FFFFFC"/>
+          </a:solidFill>
+          <a:ln w="10795">
+            <a:solidFill>
+              <a:srgbClr val="D1CFC8"/>
+            </a:solidFill>
+          </a:ln>
+          <a:effectLst/>
+        </p:spPr>
+        <p:txBody>
+          <a:bodyPr rtlCol="0" anchor="ctr"/>
+          <a:lstStyle/>
+          <a:p>
+            <a:pPr algn="ctr"/>
+          </a:p>
+        </p:txBody>
+      </p:sp>
+      <p:sp>
+        <p:nvSpPr>
+          <p:cNvPr id="9" name="TextBox 8"/>
+          <p:cNvSpPr txBox="1"/>
+          <p:nvPr/>
+        </p:nvSpPr>
+        <p:spPr>
+          <a:xfrm>
+            <a:off x="4215384" y="1554480"/>
+            <a:ext cx="2331720" cy="237744"/>
+          </a:xfrm>
+          <a:prstGeom prst="rect">
+            <a:avLst/>
+          </a:prstGeom>
+          <a:noFill/>
+        </p:spPr>
+        <p:txBody>
+          <a:bodyPr wrap="square" anchor="ctr" lIns="0" rIns="0" tIns="0" bIns="0">
+            <a:spAutoFit/>
+          </a:bodyPr>
+          <a:lstStyle/>
+          <a:p>
+            <a:pPr algn="ctr">
+              <a:lnSpc>
+                <a:spcPct val="130000"/>
+              </a:lnSpc>
+            </a:pPr>
+            <a:r>
+              <a:rPr sz="1050" b="1" lang="ja-JP">
+                <a:solidFill>
+                  <a:srgbClr val="182C43"/>
+                </a:solidFill>
+                <a:latin typeface="Yu Gothic"/>
+                <a:ea typeface="Yu Gothic"/>
+                <a:cs typeface="Yu Gothic"/>
+              </a:rPr>
+              <a:t>確認・切り分け</a:t>
+            </a:r>
+          </a:p>
+        </p:txBody>
+      </p:sp>
+      <p:sp>
+        <p:nvSpPr>
+          <p:cNvPr id="10" name="qa-surface-on-canvas:swimlane-stage:recover"/>
+          <p:cNvSpPr/>
+          <p:nvPr/>
+        </p:nvSpPr>
+        <p:spPr>
+          <a:xfrm>
+            <a:off x="6675120" y="1499616"/>
+            <a:ext cx="2624328" cy="338328"/>
+          </a:xfrm>
+          <a:prstGeom prst="chevron">
+            <a:avLst/>
+          </a:prstGeom>
+          <a:solidFill>
+            <a:srgbClr val="FFFFFC"/>
+          </a:solidFill>
+          <a:ln w="10795">
+            <a:solidFill>
+              <a:srgbClr val="D1CFC8"/>
+            </a:solidFill>
+          </a:ln>
+          <a:effectLst/>
+        </p:spPr>
+        <p:txBody>
+          <a:bodyPr rtlCol="0" anchor="ctr"/>
+          <a:lstStyle/>
+          <a:p>
+            <a:pPr algn="ctr"/>
+          </a:p>
+        </p:txBody>
+      </p:sp>
+      <p:sp>
+        <p:nvSpPr>
+          <p:cNvPr id="11" name="TextBox 10"/>
+          <p:cNvSpPr txBox="1"/>
+          <p:nvPr/>
+        </p:nvSpPr>
+        <p:spPr>
+          <a:xfrm>
+            <a:off x="6803136" y="1554480"/>
+            <a:ext cx="2331720" cy="237744"/>
+          </a:xfrm>
+          <a:prstGeom prst="rect">
+            <a:avLst/>
+          </a:prstGeom>
+          <a:noFill/>
+        </p:spPr>
+        <p:txBody>
+          <a:bodyPr wrap="square" anchor="ctr" lIns="0" rIns="0" tIns="0" bIns="0">
+            <a:spAutoFit/>
+          </a:bodyPr>
+          <a:lstStyle/>
+          <a:p>
+            <a:pPr algn="ctr">
+              <a:lnSpc>
+                <a:spcPct val="130000"/>
+              </a:lnSpc>
+            </a:pPr>
+            <a:r>
+              <a:rPr sz="1050" b="1" lang="ja-JP">
+                <a:solidFill>
+                  <a:srgbClr val="182C43"/>
+                </a:solidFill>
+                <a:latin typeface="Yu Gothic"/>
+                <a:ea typeface="Yu Gothic"/>
+                <a:cs typeface="Yu Gothic"/>
+              </a:rPr>
+              <a:t>対応・復旧</a:t>
+            </a:r>
+          </a:p>
+        </p:txBody>
+      </p:sp>
+      <p:sp>
+        <p:nvSpPr>
+          <p:cNvPr id="12" name="qa-surface-on-canvas:swimlane-stage:close"/>
+          <p:cNvSpPr/>
+          <p:nvPr/>
+        </p:nvSpPr>
+        <p:spPr>
+          <a:xfrm>
+            <a:off x="9262872" y="1499616"/>
+            <a:ext cx="2587752" cy="338328"/>
+          </a:xfrm>
+          <a:prstGeom prst="chevron">
+            <a:avLst/>
+          </a:prstGeom>
+          <a:solidFill>
+            <a:srgbClr val="FFFFFC"/>
+          </a:solidFill>
+          <a:ln w="10795">
+            <a:solidFill>
+              <a:srgbClr val="D1CFC8"/>
+            </a:solidFill>
+          </a:ln>
+          <a:effectLst/>
+        </p:spPr>
+        <p:txBody>
+          <a:bodyPr rtlCol="0" anchor="ctr"/>
+          <a:lstStyle/>
+          <a:p>
+            <a:pPr algn="ctr"/>
+          </a:p>
+        </p:txBody>
+      </p:sp>
+      <p:sp>
+        <p:nvSpPr>
+          <p:cNvPr id="13" name="TextBox 12"/>
+          <p:cNvSpPr txBox="1"/>
+          <p:nvPr/>
+        </p:nvSpPr>
+        <p:spPr>
+          <a:xfrm>
+            <a:off x="9390888" y="1554480"/>
+            <a:ext cx="2331720" cy="237744"/>
+          </a:xfrm>
+          <a:prstGeom prst="rect">
+            <a:avLst/>
+          </a:prstGeom>
+          <a:noFill/>
+        </p:spPr>
+        <p:txBody>
+          <a:bodyPr wrap="square" anchor="ctr" lIns="0" rIns="0" tIns="0" bIns="0">
+            <a:spAutoFit/>
+          </a:bodyPr>
+          <a:lstStyle/>
+          <a:p>
+            <a:pPr algn="ctr">
+              <a:lnSpc>
+                <a:spcPct val="130000"/>
+              </a:lnSpc>
+            </a:pPr>
+            <a:r>
+              <a:rPr sz="1050" b="1" lang="ja-JP">
+                <a:solidFill>
+                  <a:srgbClr val="182C43"/>
+                </a:solidFill>
+                <a:latin typeface="Yu Gothic"/>
+                <a:ea typeface="Yu Gothic"/>
+                <a:cs typeface="Yu Gothic"/>
+              </a:rPr>
+              <a:t>確認・完了</a:t>
+            </a:r>
+          </a:p>
+        </p:txBody>
+      </p:sp>
+      <p:sp>
+        <p:nvSpPr>
+          <p:cNvPr id="14" name="Rectangle 13"/>
+          <p:cNvSpPr/>
+          <p:nvPr/>
+        </p:nvSpPr>
+        <p:spPr>
+          <a:xfrm>
+            <a:off x="338328" y="1837943"/>
+            <a:ext cx="1161288" cy="868680"/>
+          </a:xfrm>
+          <a:prstGeom prst="rect">
+            <a:avLst/>
+          </a:prstGeom>
+          <a:solidFill>
+            <a:srgbClr val="DFEBE8"/>
+          </a:solidFill>
+          <a:ln>
+            <a:noFill/>
+          </a:ln>
+          <a:effectLst/>
+        </p:spPr>
+        <p:txBody>
+          <a:bodyPr rtlCol="0" anchor="ctr"/>
+          <a:lstStyle/>
+          <a:p>
+            <a:pPr algn="ctr"/>
+          </a:p>
+        </p:txBody>
+      </p:sp>
+      <p:sp>
+        <p:nvSpPr>
+          <p:cNvPr id="15" name="Rectangle 14"/>
+          <p:cNvSpPr/>
+          <p:nvPr/>
+        </p:nvSpPr>
+        <p:spPr>
+          <a:xfrm>
+            <a:off x="1499616" y="1837943"/>
+            <a:ext cx="10351008" cy="868680"/>
+          </a:xfrm>
+          <a:prstGeom prst="rect">
+            <a:avLst/>
+          </a:prstGeom>
+          <a:solidFill>
+            <a:srgbClr val="FFFFFC"/>
+          </a:solidFill>
+          <a:ln>
+            <a:noFill/>
+          </a:ln>
+          <a:effectLst/>
+        </p:spPr>
+        <p:txBody>
+          <a:bodyPr rtlCol="0" anchor="ctr"/>
+          <a:lstStyle/>
+          <a:p>
+            <a:pPr algn="ctr"/>
+          </a:p>
+        </p:txBody>
+      </p:sp>
+      <p:sp>
+        <p:nvSpPr>
+          <p:cNvPr id="16" name="TextBox 15"/>
+          <p:cNvSpPr txBox="1"/>
+          <p:nvPr/>
+        </p:nvSpPr>
+        <p:spPr>
+          <a:xfrm>
+            <a:off x="448056" y="1837943"/>
+            <a:ext cx="960120" cy="868680"/>
+          </a:xfrm>
+          <a:prstGeom prst="rect">
+            <a:avLst/>
+          </a:prstGeom>
+          <a:noFill/>
+        </p:spPr>
+        <p:txBody>
+          <a:bodyPr wrap="square" anchor="ctr" lIns="0" rIns="0" tIns="0" bIns="0">
+            <a:spAutoFit/>
+          </a:bodyPr>
+          <a:lstStyle/>
+          <a:p>
             <a:pPr algn="l">
               <a:lnSpc>
                 <a:spcPct val="130000"/>
               </a:lnSpc>
             </a:pPr>
             <a:r>
-              <a:rPr sz="800" b="0" lang="ja-JP">
-                <a:solidFill>
-                  <a:srgbClr val="202729"/>
-                </a:solidFill>
-                <a:latin typeface="Yu Gothic"/>
-                <a:ea typeface="Yu Gothic"/>
-                <a:cs typeface="Yu Gothic"/>
-              </a:rPr>
-              <a:t>順方向</a:t>
+              <a:rPr sz="1300" b="1" lang="ja-JP">
+                <a:solidFill>
+                  <a:srgbClr val="182C43"/>
+                </a:solidFill>
+                <a:latin typeface="Yu Gothic"/>
+                <a:ea typeface="Yu Gothic"/>
+                <a:cs typeface="Yu Gothic"/>
+              </a:rPr>
+              <a:t>利用部門</a:t>
             </a:r>
           </a:p>
         </p:txBody>
       </p:sp>
       <p:cxnSp>
         <p:nvCxnSpPr>
-          <p:cNvPr id="16" name="Connector 15"/>
+          <p:cNvPr id="17" name="Connector 16"/>
           <p:cNvCxnSpPr/>
           <p:nvPr/>
         </p:nvCxnSpPr>
         <p:spPr>
           <a:xfrm>
-            <a:off x="1033271" y="1828800"/>
-            <a:ext cx="292609" cy="0"/>
+            <a:off x="338328" y="2706624"/>
+            <a:ext cx="11512296" cy="0"/>
           </a:xfrm>
           <a:prstGeom prst="line">
             <a:avLst/>
           </a:prstGeom>
-          <a:ln w="14604">
-            <a:prstDash val="dash"/>
+          <a:ln w="8255">
             <a:solidFill>
-              <a:srgbClr val="666E70"/>
+              <a:srgbClr val="D1CFC8"/>
             </a:solidFill>
-            <a:tailEnd type="triangle" w="med" len="med"/>
           </a:ln>
           <a:effectLst/>
         </p:spPr>
@@ -45463,55 +45465,14 @@
       </p:cxnSp>
       <p:sp>
         <p:nvSpPr>
-          <p:cNvPr id="17" name="TextBox 16"/>
-          <p:cNvSpPr txBox="1"/>
-          <p:nvPr/>
-        </p:nvSpPr>
-        <p:spPr>
-          <a:xfrm>
-            <a:off x="1399032" y="1746504"/>
-            <a:ext cx="566928" cy="164592"/>
-          </a:xfrm>
-          <a:prstGeom prst="rect">
-            <a:avLst/>
-          </a:prstGeom>
-          <a:noFill/>
-        </p:spPr>
-        <p:txBody>
-          <a:bodyPr wrap="square" anchor="ctr" lIns="0" rIns="0" tIns="0" bIns="0">
-            <a:spAutoFit/>
-          </a:bodyPr>
-          <a:lstStyle/>
-          <a:p>
-            <a:pPr algn="l">
-              <a:lnSpc>
-                <a:spcPct val="130000"/>
-              </a:lnSpc>
-            </a:pPr>
-            <a:r>
-              <a:rPr sz="800" b="0" lang="ja-JP">
-                <a:solidFill>
-                  <a:srgbClr val="202729"/>
-                </a:solidFill>
-                <a:latin typeface="Yu Gothic"/>
-                <a:ea typeface="Yu Gothic"/>
-                <a:cs typeface="Yu Gothic"/>
-              </a:rPr>
-              <a:t>差戻し</a:t>
-            </a:r>
-          </a:p>
-        </p:txBody>
-      </p:sp>
-      <p:sp>
-        <p:nvSpPr>
           <p:cNvPr id="18" name="Rectangle 17"/>
           <p:cNvSpPr/>
           <p:nvPr/>
         </p:nvSpPr>
         <p:spPr>
           <a:xfrm>
-            <a:off x="502920" y="1901952"/>
-            <a:ext cx="1389888" cy="786384"/>
+            <a:off x="338328" y="2706624"/>
+            <a:ext cx="1161288" cy="868680"/>
           </a:xfrm>
           <a:prstGeom prst="rect">
             <a:avLst/>
@@ -45540,8 +45501,8 @@
         </p:nvSpPr>
         <p:spPr>
           <a:xfrm>
-            <a:off x="1892808" y="1901952"/>
-            <a:ext cx="9795967" cy="786384"/>
+            <a:off x="1499616" y="2706624"/>
+            <a:ext cx="10351008" cy="868680"/>
           </a:xfrm>
           <a:prstGeom prst="rect">
             <a:avLst/>
@@ -45570,8 +45531,8 @@
         </p:nvSpPr>
         <p:spPr>
           <a:xfrm>
-            <a:off x="612648" y="1901952"/>
-            <a:ext cx="1188720" cy="786384"/>
+            <a:off x="448056" y="2706624"/>
+            <a:ext cx="960120" cy="868680"/>
           </a:xfrm>
           <a:prstGeom prst="rect">
             <a:avLst/>
@@ -45598,7 +45559,7 @@
                 <a:ea typeface="Yu Gothic"/>
                 <a:cs typeface="Yu Gothic"/>
               </a:rPr>
-              <a:t>利用部門</a:t>
+              <a:t>運用担当</a:t>
             </a:r>
           </a:p>
         </p:txBody>
@@ -45611,8 +45572,8 @@
         </p:nvCxnSpPr>
         <p:spPr>
           <a:xfrm>
-            <a:off x="502920" y="2688336"/>
-            <a:ext cx="11185855" cy="0"/>
+            <a:off x="338328" y="3575304"/>
+            <a:ext cx="11512296" cy="0"/>
           </a:xfrm>
           <a:prstGeom prst="line">
             <a:avLst/>
@@ -45647,14 +45608,14 @@
         </p:nvSpPr>
         <p:spPr>
           <a:xfrm>
-            <a:off x="502920" y="2688336"/>
-            <a:ext cx="1389888" cy="786384"/>
+            <a:off x="338328" y="3575303"/>
+            <a:ext cx="1161288" cy="868680"/>
           </a:xfrm>
           <a:prstGeom prst="rect">
             <a:avLst/>
           </a:prstGeom>
           <a:solidFill>
-            <a:srgbClr val="ECEAE4"/>
+            <a:srgbClr val="DFEBE8"/>
           </a:solidFill>
           <a:ln>
             <a:noFill/>
@@ -45677,8 +45638,8 @@
         </p:nvSpPr>
         <p:spPr>
           <a:xfrm>
-            <a:off x="1892808" y="2688336"/>
-            <a:ext cx="9795967" cy="786384"/>
+            <a:off x="1499616" y="3575303"/>
+            <a:ext cx="10351008" cy="868680"/>
           </a:xfrm>
           <a:prstGeom prst="rect">
             <a:avLst/>
@@ -45707,8 +45668,8 @@
         </p:nvSpPr>
         <p:spPr>
           <a:xfrm>
-            <a:off x="612648" y="2688336"/>
-            <a:ext cx="1188720" cy="786384"/>
+            <a:off x="448056" y="3575303"/>
+            <a:ext cx="960120" cy="868680"/>
           </a:xfrm>
           <a:prstGeom prst="rect">
             <a:avLst/>
@@ -45735,7 +45696,7 @@
                 <a:ea typeface="Yu Gothic"/>
                 <a:cs typeface="Yu Gothic"/>
               </a:rPr>
-              <a:t>運用担当</a:t>
+              <a:t>NW担当</a:t>
             </a:r>
           </a:p>
         </p:txBody>
@@ -45748,8 +45709,8 @@
         </p:nvCxnSpPr>
         <p:spPr>
           <a:xfrm>
-            <a:off x="502920" y="3474720"/>
-            <a:ext cx="11185855" cy="0"/>
+            <a:off x="338328" y="4443983"/>
+            <a:ext cx="11512296" cy="0"/>
           </a:xfrm>
           <a:prstGeom prst="line">
             <a:avLst/>
@@ -45784,8 +45745,8 @@
         </p:nvSpPr>
         <p:spPr>
           <a:xfrm>
-            <a:off x="502920" y="3474720"/>
-            <a:ext cx="1389888" cy="786384"/>
+            <a:off x="338328" y="4443983"/>
+            <a:ext cx="1161288" cy="868680"/>
           </a:xfrm>
           <a:prstGeom prst="rect">
             <a:avLst/>
@@ -45814,8 +45775,8 @@
         </p:nvSpPr>
         <p:spPr>
           <a:xfrm>
-            <a:off x="1892808" y="3474720"/>
-            <a:ext cx="9795967" cy="786384"/>
+            <a:off x="1499616" y="4443983"/>
+            <a:ext cx="10351008" cy="868680"/>
           </a:xfrm>
           <a:prstGeom prst="rect">
             <a:avLst/>
@@ -45844,8 +45805,8 @@
         </p:nvSpPr>
         <p:spPr>
           <a:xfrm>
-            <a:off x="612648" y="3474720"/>
-            <a:ext cx="1188720" cy="786384"/>
+            <a:off x="448056" y="4443983"/>
+            <a:ext cx="960120" cy="868680"/>
           </a:xfrm>
           <a:prstGeom prst="rect">
             <a:avLst/>
@@ -45864,7 +45825,7 @@
               </a:lnSpc>
             </a:pPr>
             <a:r>
-              <a:rPr sz="1050" b="1" lang="ja-JP">
+              <a:rPr sz="1300" b="1" lang="ja-JP">
                 <a:solidFill>
                   <a:srgbClr val="182C43"/>
                 </a:solidFill>
@@ -45872,7 +45833,7 @@
                 <a:ea typeface="Yu Gothic"/>
                 <a:cs typeface="Yu Gothic"/>
               </a:rPr>
-              <a:t>ネットワーク担当</a:t>
+              <a:t>回線事業者</a:t>
             </a:r>
           </a:p>
         </p:txBody>
@@ -45885,8 +45846,8 @@
         </p:nvCxnSpPr>
         <p:spPr>
           <a:xfrm>
-            <a:off x="502920" y="4261104"/>
-            <a:ext cx="11185855" cy="0"/>
+            <a:off x="338328" y="5312664"/>
+            <a:ext cx="11512296" cy="0"/>
           </a:xfrm>
           <a:prstGeom prst="line">
             <a:avLst/>
@@ -45913,107 +45874,114 @@
           </a:fontRef>
         </p:style>
       </p:cxnSp>
-      <p:sp>
-        <p:nvSpPr>
-          <p:cNvPr id="30" name="Rectangle 29"/>
-          <p:cNvSpPr/>
-          <p:nvPr/>
-        </p:nvSpPr>
-        <p:spPr>
-          <a:xfrm>
-            <a:off x="502920" y="4261104"/>
-            <a:ext cx="1389888" cy="786384"/>
-          </a:xfrm>
-          <a:prstGeom prst="rect">
-            <a:avLst/>
-          </a:prstGeom>
-          <a:solidFill>
-            <a:srgbClr val="ECEAE4"/>
-          </a:solidFill>
-          <a:ln>
-            <a:noFill/>
-          </a:ln>
-          <a:effectLst/>
-        </p:spPr>
-        <p:txBody>
-          <a:bodyPr rtlCol="0" anchor="ctr"/>
-          <a:lstStyle/>
-          <a:p>
-            <a:pPr algn="ctr"/>
-          </a:p>
-        </p:txBody>
-      </p:sp>
-      <p:sp>
-        <p:nvSpPr>
-          <p:cNvPr id="31" name="Rectangle 30"/>
-          <p:cNvSpPr/>
-          <p:nvPr/>
-        </p:nvSpPr>
-        <p:spPr>
-          <a:xfrm>
-            <a:off x="1892808" y="4261104"/>
-            <a:ext cx="9795967" cy="786384"/>
-          </a:xfrm>
-          <a:prstGeom prst="rect">
-            <a:avLst/>
-          </a:prstGeom>
-          <a:solidFill>
-            <a:srgbClr val="FFFFFC"/>
-          </a:solidFill>
-          <a:ln>
-            <a:noFill/>
-          </a:ln>
-          <a:effectLst/>
-        </p:spPr>
-        <p:txBody>
-          <a:bodyPr rtlCol="0" anchor="ctr"/>
-          <a:lstStyle/>
-          <a:p>
-            <a:pPr algn="ctr"/>
-          </a:p>
-        </p:txBody>
-      </p:sp>
-      <p:sp>
-        <p:nvSpPr>
-          <p:cNvPr id="32" name="TextBox 31"/>
-          <p:cNvSpPr txBox="1"/>
-          <p:nvPr/>
-        </p:nvSpPr>
-        <p:spPr>
-          <a:xfrm>
-            <a:off x="612648" y="4261104"/>
-            <a:ext cx="1188720" cy="786384"/>
-          </a:xfrm>
-          <a:prstGeom prst="rect">
-            <a:avLst/>
-          </a:prstGeom>
-          <a:noFill/>
-        </p:spPr>
-        <p:txBody>
-          <a:bodyPr wrap="square" anchor="ctr" lIns="0" rIns="0" tIns="0" bIns="0">
-            <a:spAutoFit/>
-          </a:bodyPr>
-          <a:lstStyle/>
-          <a:p>
-            <a:pPr algn="l">
-              <a:lnSpc>
-                <a:spcPct val="130000"/>
-              </a:lnSpc>
-            </a:pPr>
-            <a:r>
-              <a:rPr sz="1300" b="1" lang="ja-JP">
-                <a:solidFill>
-                  <a:srgbClr val="182C43"/>
-                </a:solidFill>
-                <a:latin typeface="Yu Gothic"/>
-                <a:ea typeface="Yu Gothic"/>
-                <a:cs typeface="Yu Gothic"/>
-              </a:rPr>
-              <a:t>回線事業者</a:t>
-            </a:r>
-          </a:p>
-        </p:txBody>
-      </p:sp>
+      <p:cxnSp>
+        <p:nvCxnSpPr>
+          <p:cNvPr id="30" name="Connector 29"/>
+          <p:cNvCxnSpPr/>
+          <p:nvPr/>
+        </p:nvCxnSpPr>
+        <p:spPr>
+          <a:xfrm>
+            <a:off x="1499616" y="1837943"/>
+            <a:ext cx="0" cy="3474721"/>
+          </a:xfrm>
+          <a:prstGeom prst="line">
+            <a:avLst/>
+          </a:prstGeom>
+          <a:ln w="10160">
+            <a:solidFill>
+              <a:srgbClr val="D1CFC8"/>
+            </a:solidFill>
+          </a:ln>
+          <a:effectLst/>
+        </p:spPr>
+        <p:style>
+          <a:lnRef idx="2">
+            <a:schemeClr val="accent1"/>
+          </a:lnRef>
+          <a:fillRef idx="0">
+            <a:schemeClr val="accent1"/>
+          </a:fillRef>
+          <a:effectRef idx="1">
+            <a:schemeClr val="accent1"/>
+          </a:effectRef>
+          <a:fontRef idx="minor">
+            <a:schemeClr val="tx1"/>
+          </a:fontRef>
+        </p:style>
+      </p:cxnSp>
+      <p:cxnSp>
+        <p:nvCxnSpPr>
+          <p:cNvPr id="31" name="Connector 30"/>
+          <p:cNvCxnSpPr/>
+          <p:nvPr/>
+        </p:nvCxnSpPr>
+        <p:spPr>
+          <a:xfrm>
+            <a:off x="4087368" y="1837943"/>
+            <a:ext cx="0" cy="3474721"/>
+          </a:xfrm>
+          <a:prstGeom prst="line">
+            <a:avLst/>
+          </a:prstGeom>
+          <a:ln w="6985">
+            <a:solidFill>
+              <a:srgbClr val="D1CFC8"/>
+            </a:solidFill>
+          </a:ln>
+          <a:effectLst/>
+        </p:spPr>
+        <p:style>
+          <a:lnRef idx="2">
+            <a:schemeClr val="accent1"/>
+          </a:lnRef>
+          <a:fillRef idx="0">
+            <a:schemeClr val="accent1"/>
+          </a:fillRef>
+          <a:effectRef idx="1">
+            <a:schemeClr val="accent1"/>
+          </a:effectRef>
+          <a:fontRef idx="minor">
+            <a:schemeClr val="tx1"/>
+          </a:fontRef>
+        </p:style>
+      </p:cxnSp>
+      <p:cxnSp>
+        <p:nvCxnSpPr>
+          <p:cNvPr id="32" name="Connector 31"/>
+          <p:cNvCxnSpPr/>
+          <p:nvPr/>
+        </p:nvCxnSpPr>
+        <p:spPr>
+          <a:xfrm>
+            <a:off x="6675120" y="1837943"/>
+            <a:ext cx="0" cy="3474721"/>
+          </a:xfrm>
+          <a:prstGeom prst="line">
+            <a:avLst/>
+          </a:prstGeom>
+          <a:ln w="6985">
+            <a:solidFill>
+              <a:srgbClr val="D1CFC8"/>
+            </a:solidFill>
+          </a:ln>
+          <a:effectLst/>
+        </p:spPr>
+        <p:style>
+          <a:lnRef idx="2">
+            <a:schemeClr val="accent1"/>
+          </a:lnRef>
+          <a:fillRef idx="0">
+            <a:schemeClr val="accent1"/>
+          </a:fillRef>
+          <a:effectRef idx="1">
+            <a:schemeClr val="accent1"/>
+          </a:effectRef>
+          <a:fontRef idx="minor">
+            <a:schemeClr val="tx1"/>
+          </a:fontRef>
+        </p:style>
+      </p:cxnSp>
       <p:cxnSp>
         <p:nvCxnSpPr>
           <p:cNvPr id="33" name="Connector 32"/>
@@ -46022,13 +45990,13 @@
         </p:nvCxnSpPr>
         <p:spPr>
           <a:xfrm>
-            <a:off x="502920" y="5047488"/>
-            <a:ext cx="11185855" cy="0"/>
+            <a:off x="9262872" y="1837943"/>
+            <a:ext cx="0" cy="3474721"/>
           </a:xfrm>
           <a:prstGeom prst="line">
             <a:avLst/>
           </a:prstGeom>
-          <a:ln w="8255">
+          <a:ln w="6985">
             <a:solidFill>
               <a:srgbClr val="D1CFC8"/>
             </a:solidFill>
@@ -46058,15 +46026,15 @@
         </p:nvCxnSpPr>
         <p:spPr>
           <a:xfrm>
-            <a:off x="1892808" y="1901952"/>
-            <a:ext cx="0" cy="3145536"/>
+            <a:off x="2793492" y="2500884"/>
+            <a:ext cx="0" cy="205740"/>
           </a:xfrm>
           <a:prstGeom prst="line">
             <a:avLst/>
           </a:prstGeom>
-          <a:ln w="10160">
+          <a:ln w="13970">
             <a:solidFill>
-              <a:srgbClr val="D1CFC8"/>
+              <a:srgbClr val="0D7870"/>
             </a:solidFill>
           </a:ln>
           <a:effectLst/>
@@ -46094,15 +46062,15 @@
         </p:nvCxnSpPr>
         <p:spPr>
           <a:xfrm>
-            <a:off x="4341799" y="1901952"/>
-            <a:ext cx="0" cy="3145536"/>
+            <a:off x="2793492" y="2706624"/>
+            <a:ext cx="0" cy="0"/>
           </a:xfrm>
           <a:prstGeom prst="line">
             <a:avLst/>
           </a:prstGeom>
-          <a:ln w="6985">
+          <a:ln w="13970">
             <a:solidFill>
-              <a:srgbClr val="D1CFC8"/>
+              <a:srgbClr val="0D7870"/>
             </a:solidFill>
           </a:ln>
           <a:effectLst/>
@@ -46130,16 +46098,17 @@
         </p:nvCxnSpPr>
         <p:spPr>
           <a:xfrm>
-            <a:off x="6790791" y="1901952"/>
-            <a:ext cx="0" cy="3145536"/>
+            <a:off x="2793492" y="2706624"/>
+            <a:ext cx="0" cy="205740"/>
           </a:xfrm>
           <a:prstGeom prst="line">
             <a:avLst/>
           </a:prstGeom>
-          <a:ln w="6985">
+          <a:ln w="13970">
             <a:solidFill>
-              <a:srgbClr val="D1CFC8"/>
+              <a:srgbClr val="0D7870"/>
             </a:solidFill>
+            <a:tailEnd type="triangle" w="med" len="med"/>
           </a:ln>
           <a:effectLst/>
         </p:spPr>
@@ -46166,16 +46135,17 @@
         </p:nvCxnSpPr>
         <p:spPr>
           <a:xfrm>
-            <a:off x="9239783" y="1901952"/>
-            <a:ext cx="0" cy="3145536"/>
+            <a:off x="3246120" y="3140964"/>
+            <a:ext cx="969264" cy="0"/>
           </a:xfrm>
           <a:prstGeom prst="line">
             <a:avLst/>
           </a:prstGeom>
-          <a:ln w="6985">
+          <a:ln w="13970">
             <a:solidFill>
-              <a:srgbClr val="D1CFC8"/>
+              <a:srgbClr val="0D7870"/>
             </a:solidFill>
+            <a:tailEnd type="triangle" w="med" len="med"/>
           </a:ln>
           <a:effectLst/>
         </p:spPr>
@@ -46202,15 +46172,15 @@
         </p:nvCxnSpPr>
         <p:spPr>
           <a:xfrm>
-            <a:off x="3775671" y="2295144"/>
-            <a:ext cx="529552" cy="0"/>
+            <a:off x="3246120" y="3140964"/>
+            <a:ext cx="804672" cy="0"/>
           </a:xfrm>
           <a:prstGeom prst="line">
             <a:avLst/>
           </a:prstGeom>
-          <a:ln w="13335">
+          <a:ln w="13970">
             <a:solidFill>
-              <a:srgbClr val="6C7372"/>
+              <a:srgbClr val="0D7870"/>
             </a:solidFill>
           </a:ln>
           <a:effectLst/>
@@ -46238,15 +46208,15 @@
         </p:nvCxnSpPr>
         <p:spPr>
           <a:xfrm>
-            <a:off x="4305223" y="2295144"/>
-            <a:ext cx="0" cy="786384"/>
+            <a:off x="4050792" y="3140964"/>
+            <a:ext cx="0" cy="868680"/>
           </a:xfrm>
           <a:prstGeom prst="line">
             <a:avLst/>
           </a:prstGeom>
-          <a:ln w="13335">
+          <a:ln w="13970">
             <a:solidFill>
-              <a:srgbClr val="6C7372"/>
+              <a:srgbClr val="0D7870"/>
             </a:solidFill>
           </a:ln>
           <a:effectLst/>
@@ -46274,15 +46244,15 @@
         </p:nvCxnSpPr>
         <p:spPr>
           <a:xfrm>
-            <a:off x="4305223" y="3081528"/>
-            <a:ext cx="164592" cy="0"/>
+            <a:off x="4050792" y="4009644"/>
+            <a:ext cx="235458" cy="0"/>
           </a:xfrm>
           <a:prstGeom prst="line">
             <a:avLst/>
           </a:prstGeom>
-          <a:ln w="13335">
+          <a:ln w="13970">
             <a:solidFill>
-              <a:srgbClr val="6C7372"/>
+              <a:srgbClr val="0D7870"/>
             </a:solidFill>
             <a:tailEnd type="triangle" w="med" len="med"/>
           </a:ln>
@@ -46311,15 +46281,15 @@
         </p:nvCxnSpPr>
         <p:spPr>
           <a:xfrm>
-            <a:off x="5520575" y="3081528"/>
+            <a:off x="5088564" y="3140964"/>
             <a:ext cx="91440" cy="0"/>
           </a:xfrm>
           <a:prstGeom prst="line">
             <a:avLst/>
           </a:prstGeom>
-          <a:ln w="13335">
+          <a:ln w="13970">
             <a:solidFill>
-              <a:srgbClr val="6C7372"/>
+              <a:srgbClr val="0D7870"/>
             </a:solidFill>
             <a:tailEnd type="triangle" w="med" len="med"/>
           </a:ln>
@@ -46348,16 +46318,17 @@
         </p:nvCxnSpPr>
         <p:spPr>
           <a:xfrm>
-            <a:off x="4995195" y="3310128"/>
-            <a:ext cx="0" cy="164592"/>
+            <a:off x="5191506" y="4009644"/>
+            <a:ext cx="91440" cy="0"/>
           </a:xfrm>
           <a:prstGeom prst="line">
             <a:avLst/>
           </a:prstGeom>
-          <a:ln w="13335">
+          <a:ln w="13970">
             <a:solidFill>
-              <a:srgbClr val="6C7372"/>
+              <a:srgbClr val="0D7870"/>
             </a:solidFill>
+            <a:tailEnd type="triangle" w="med" len="med"/>
           </a:ln>
           <a:effectLst/>
         </p:spPr>
@@ -46384,15 +46355,15 @@
         </p:nvCxnSpPr>
         <p:spPr>
           <a:xfrm>
-            <a:off x="4995195" y="3474720"/>
-            <a:ext cx="571100" cy="0"/>
+            <a:off x="5863554" y="3369564"/>
+            <a:ext cx="0" cy="205740"/>
           </a:xfrm>
           <a:prstGeom prst="line">
             <a:avLst/>
           </a:prstGeom>
-          <a:ln w="13335">
+          <a:ln w="13970">
             <a:solidFill>
-              <a:srgbClr val="6C7372"/>
+              <a:srgbClr val="0D7870"/>
             </a:solidFill>
           </a:ln>
           <a:effectLst/>
@@ -46420,17 +46391,16 @@
         </p:nvCxnSpPr>
         <p:spPr>
           <a:xfrm>
-            <a:off x="5566295" y="3474720"/>
-            <a:ext cx="0" cy="164592"/>
+            <a:off x="5863554" y="3575304"/>
+            <a:ext cx="16038" cy="0"/>
           </a:xfrm>
           <a:prstGeom prst="line">
             <a:avLst/>
           </a:prstGeom>
-          <a:ln w="13335">
+          <a:ln w="13970">
             <a:solidFill>
-              <a:srgbClr val="6C7372"/>
+              <a:srgbClr val="0D7870"/>
             </a:solidFill>
-            <a:tailEnd type="triangle" w="med" len="med"/>
           </a:ln>
           <a:effectLst/>
         </p:spPr>
@@ -46457,15 +46427,15 @@
         </p:nvCxnSpPr>
         <p:spPr>
           <a:xfrm>
-            <a:off x="6662775" y="3081528"/>
-            <a:ext cx="256032" cy="0"/>
+            <a:off x="5879592" y="3575304"/>
+            <a:ext cx="0" cy="205740"/>
           </a:xfrm>
           <a:prstGeom prst="line">
             <a:avLst/>
           </a:prstGeom>
-          <a:ln w="13335">
+          <a:ln w="13970">
             <a:solidFill>
-              <a:srgbClr val="6C7372"/>
+              <a:srgbClr val="0D7870"/>
             </a:solidFill>
             <a:tailEnd type="triangle" w="med" len="med"/>
           </a:ln>
@@ -46494,17 +46464,16 @@
         </p:nvCxnSpPr>
         <p:spPr>
           <a:xfrm>
-            <a:off x="6224663" y="3867912"/>
-            <a:ext cx="1132256" cy="0"/>
+            <a:off x="6476238" y="4009644"/>
+            <a:ext cx="162306" cy="0"/>
           </a:xfrm>
           <a:prstGeom prst="line">
             <a:avLst/>
           </a:prstGeom>
-          <a:ln w="13335">
+          <a:ln w="13970">
             <a:solidFill>
-              <a:srgbClr val="6C7372"/>
+              <a:srgbClr val="0D7870"/>
             </a:solidFill>
-            <a:tailEnd type="triangle" w="med" len="med"/>
           </a:ln>
           <a:effectLst/>
         </p:spPr>
@@ -46531,15 +46500,15 @@
         </p:nvCxnSpPr>
         <p:spPr>
           <a:xfrm>
-            <a:off x="7444187" y="3310128"/>
-            <a:ext cx="0" cy="164592"/>
+            <a:off x="6638544" y="4009644"/>
+            <a:ext cx="0" cy="868679"/>
           </a:xfrm>
           <a:prstGeom prst="line">
             <a:avLst/>
           </a:prstGeom>
-          <a:ln w="13335">
+          <a:ln w="13970">
             <a:solidFill>
-              <a:srgbClr val="6C7372"/>
+              <a:srgbClr val="0D7870"/>
             </a:solidFill>
           </a:ln>
           <a:effectLst/>
@@ -46567,16 +46536,17 @@
         </p:nvCxnSpPr>
         <p:spPr>
           <a:xfrm>
-            <a:off x="7444187" y="3474720"/>
-            <a:ext cx="571100" cy="0"/>
+            <a:off x="6638544" y="4878323"/>
+            <a:ext cx="621792" cy="0"/>
           </a:xfrm>
           <a:prstGeom prst="line">
             <a:avLst/>
           </a:prstGeom>
-          <a:ln w="13335">
+          <a:ln w="13970">
             <a:solidFill>
-              <a:srgbClr val="6C7372"/>
+              <a:srgbClr val="0D7870"/>
             </a:solidFill>
+            <a:tailEnd type="triangle" w="med" len="med"/>
           </a:ln>
           <a:effectLst/>
         </p:spPr>
@@ -46603,17 +46573,16 @@
         </p:nvCxnSpPr>
         <p:spPr>
           <a:xfrm>
-            <a:off x="8015287" y="3474720"/>
-            <a:ext cx="0" cy="164592"/>
+            <a:off x="8677656" y="4878323"/>
+            <a:ext cx="384048" cy="0"/>
           </a:xfrm>
           <a:prstGeom prst="line">
             <a:avLst/>
           </a:prstGeom>
-          <a:ln w="13335">
+          <a:ln w="13970">
             <a:solidFill>
-              <a:srgbClr val="6C7372"/>
+              <a:srgbClr val="0D7870"/>
             </a:solidFill>
-            <a:tailEnd type="triangle" w="med" len="med"/>
           </a:ln>
           <a:effectLst/>
         </p:spPr>
@@ -46639,16 +46608,16 @@
           <p:nvPr/>
         </p:nvCxnSpPr>
         <p:spPr>
-          <a:xfrm>
-            <a:off x="8015287" y="4096512"/>
-            <a:ext cx="0" cy="164592"/>
+          <a:xfrm flipV="1">
+            <a:off x="9061704" y="3461004"/>
+            <a:ext cx="0" cy="1417319"/>
           </a:xfrm>
           <a:prstGeom prst="line">
             <a:avLst/>
           </a:prstGeom>
-          <a:ln w="13335">
+          <a:ln w="13970">
             <a:solidFill>
-              <a:srgbClr val="6C7372"/>
+              <a:srgbClr val="0D7870"/>
             </a:solidFill>
           </a:ln>
           <a:effectLst/>
@@ -46675,16 +46644,16 @@
           <p:nvPr/>
         </p:nvCxnSpPr>
         <p:spPr>
-          <a:xfrm>
-            <a:off x="8015287" y="4261104"/>
-            <a:ext cx="0" cy="0"/>
+          <a:xfrm flipH="1">
+            <a:off x="7470648" y="3461004"/>
+            <a:ext cx="1591056" cy="0"/>
           </a:xfrm>
           <a:prstGeom prst="line">
             <a:avLst/>
           </a:prstGeom>
-          <a:ln w="13335">
+          <a:ln w="13970">
             <a:solidFill>
-              <a:srgbClr val="6C7372"/>
+              <a:srgbClr val="0D7870"/>
             </a:solidFill>
           </a:ln>
           <a:effectLst/>
@@ -46711,16 +46680,16 @@
           <p:nvPr/>
         </p:nvCxnSpPr>
         <p:spPr>
-          <a:xfrm>
-            <a:off x="8015287" y="4261104"/>
-            <a:ext cx="0" cy="164592"/>
+          <a:xfrm flipV="1">
+            <a:off x="7470648" y="3369564"/>
+            <a:ext cx="0" cy="91440"/>
           </a:xfrm>
           <a:prstGeom prst="line">
             <a:avLst/>
           </a:prstGeom>
-          <a:ln w="13335">
+          <a:ln w="13970">
             <a:solidFill>
-              <a:srgbClr val="6C7372"/>
+              <a:srgbClr val="0D7870"/>
             </a:solidFill>
             <a:tailEnd type="triangle" w="med" len="med"/>
           </a:ln>
@@ -46749,16 +46718,17 @@
         </p:nvCxnSpPr>
         <p:spPr>
           <a:xfrm>
-            <a:off x="8673655" y="4654296"/>
-            <a:ext cx="364960" cy="0"/>
+            <a:off x="7923276" y="3140964"/>
+            <a:ext cx="91440" cy="0"/>
           </a:xfrm>
           <a:prstGeom prst="line">
             <a:avLst/>
           </a:prstGeom>
-          <a:ln w="13335">
+          <a:ln w="13970">
             <a:solidFill>
-              <a:srgbClr val="6C7372"/>
+              <a:srgbClr val="0D7870"/>
             </a:solidFill>
+            <a:tailEnd type="triangle" w="med" len="med"/>
           </a:ln>
           <a:effectLst/>
         </p:spPr>
@@ -46784,16 +46754,16 @@
           <p:nvPr/>
         </p:nvCxnSpPr>
         <p:spPr>
-          <a:xfrm flipV="1">
-            <a:off x="9038615" y="3401568"/>
-            <a:ext cx="0" cy="1252728"/>
+          <a:xfrm>
+            <a:off x="8919972" y="3140964"/>
+            <a:ext cx="306324" cy="0"/>
           </a:xfrm>
           <a:prstGeom prst="line">
             <a:avLst/>
           </a:prstGeom>
-          <a:ln w="13335">
+          <a:ln w="13970">
             <a:solidFill>
-              <a:srgbClr val="6C7372"/>
+              <a:srgbClr val="0D7870"/>
             </a:solidFill>
           </a:ln>
           <a:effectLst/>
@@ -46820,16 +46790,16 @@
           <p:nvPr/>
         </p:nvCxnSpPr>
         <p:spPr>
-          <a:xfrm flipH="1">
-            <a:off x="8586387" y="3401568"/>
-            <a:ext cx="452228" cy="0"/>
+          <a:xfrm flipV="1">
+            <a:off x="9226296" y="2272284"/>
+            <a:ext cx="0" cy="868680"/>
           </a:xfrm>
           <a:prstGeom prst="line">
             <a:avLst/>
           </a:prstGeom>
-          <a:ln w="13335">
+          <a:ln w="13970">
             <a:solidFill>
-              <a:srgbClr val="6C7372"/>
+              <a:srgbClr val="0D7870"/>
             </a:solidFill>
           </a:ln>
           <a:effectLst/>
@@ -46856,16 +46826,16 @@
           <p:nvPr/>
         </p:nvCxnSpPr>
         <p:spPr>
-          <a:xfrm flipV="1">
-            <a:off x="8586387" y="3310128"/>
-            <a:ext cx="0" cy="91440"/>
+          <a:xfrm>
+            <a:off x="9226296" y="2272284"/>
+            <a:ext cx="307467" cy="0"/>
           </a:xfrm>
           <a:prstGeom prst="line">
             <a:avLst/>
           </a:prstGeom>
-          <a:ln w="13335">
+          <a:ln w="13970">
             <a:solidFill>
-              <a:srgbClr val="6C7372"/>
+              <a:srgbClr val="0D7870"/>
             </a:solidFill>
             <a:tailEnd type="triangle" w="med" len="med"/>
           </a:ln>
@@ -46894,16 +46864,17 @@
         </p:nvCxnSpPr>
         <p:spPr>
           <a:xfrm>
-            <a:off x="9111767" y="3081528"/>
+            <a:off x="10583037" y="2272284"/>
             <a:ext cx="91440" cy="0"/>
           </a:xfrm>
           <a:prstGeom prst="line">
             <a:avLst/>
           </a:prstGeom>
-          <a:ln w="13335">
+          <a:ln w="13970">
             <a:solidFill>
-              <a:srgbClr val="6C7372"/>
+              <a:srgbClr val="0D7870"/>
             </a:solidFill>
+            <a:tailEnd type="triangle" w="med" len="med"/>
           </a:ln>
           <a:effectLst/>
         </p:spPr>
@@ -46922,238 +46893,16 @@
           </a:fontRef>
         </p:style>
       </p:cxnSp>
-      <p:cxnSp>
-        <p:nvCxnSpPr>
-          <p:cNvPr id="58" name="Connector 57"/>
-          <p:cNvCxnSpPr/>
-          <p:nvPr/>
-        </p:nvCxnSpPr>
-        <p:spPr>
-          <a:xfrm flipV="1">
-            <a:off x="9203207" y="2295144"/>
-            <a:ext cx="0" cy="786384"/>
-          </a:xfrm>
-          <a:prstGeom prst="line">
-            <a:avLst/>
-          </a:prstGeom>
-          <a:ln w="13335">
-            <a:solidFill>
-              <a:srgbClr val="6C7372"/>
-            </a:solidFill>
-          </a:ln>
-          <a:effectLst/>
-        </p:spPr>
-        <p:style>
-          <a:lnRef idx="2">
-            <a:schemeClr val="accent1"/>
-          </a:lnRef>
-          <a:fillRef idx="0">
-            <a:schemeClr val="accent1"/>
-          </a:fillRef>
-          <a:effectRef idx="1">
-            <a:schemeClr val="accent1"/>
-          </a:effectRef>
-          <a:fontRef idx="minor">
-            <a:schemeClr val="tx1"/>
-          </a:fontRef>
-        </p:style>
-      </p:cxnSp>
-      <p:cxnSp>
-        <p:nvCxnSpPr>
-          <p:cNvPr id="59" name="Connector 58"/>
-          <p:cNvCxnSpPr/>
-          <p:nvPr/>
-        </p:nvCxnSpPr>
-        <p:spPr>
-          <a:xfrm>
-            <a:off x="9203207" y="2295144"/>
-            <a:ext cx="164592" cy="0"/>
-          </a:xfrm>
-          <a:prstGeom prst="line">
-            <a:avLst/>
-          </a:prstGeom>
-          <a:ln w="13335">
-            <a:solidFill>
-              <a:srgbClr val="6C7372"/>
-            </a:solidFill>
-            <a:tailEnd type="triangle" w="med" len="med"/>
-          </a:ln>
-          <a:effectLst/>
-        </p:spPr>
-        <p:style>
-          <a:lnRef idx="2">
-            <a:schemeClr val="accent1"/>
-          </a:lnRef>
-          <a:fillRef idx="0">
-            <a:schemeClr val="accent1"/>
-          </a:fillRef>
-          <a:effectRef idx="1">
-            <a:schemeClr val="accent1"/>
-          </a:effectRef>
-          <a:fontRef idx="minor">
-            <a:schemeClr val="tx1"/>
-          </a:fontRef>
-        </p:style>
-      </p:cxnSp>
-      <p:cxnSp>
-        <p:nvCxnSpPr>
-          <p:cNvPr id="60" name="Connector 59"/>
-          <p:cNvCxnSpPr/>
-          <p:nvPr/>
-        </p:nvCxnSpPr>
-        <p:spPr>
-          <a:xfrm>
-            <a:off x="8586387" y="3310128"/>
-            <a:ext cx="0" cy="1828799"/>
-          </a:xfrm>
-          <a:prstGeom prst="line">
-            <a:avLst/>
-          </a:prstGeom>
-          <a:ln w="13335">
-            <a:prstDash val="dash"/>
-            <a:solidFill>
-              <a:srgbClr val="6C7372"/>
-            </a:solidFill>
-          </a:ln>
-          <a:effectLst/>
-        </p:spPr>
-        <p:style>
-          <a:lnRef idx="2">
-            <a:schemeClr val="accent1"/>
-          </a:lnRef>
-          <a:fillRef idx="0">
-            <a:schemeClr val="accent1"/>
-          </a:fillRef>
-          <a:effectRef idx="1">
-            <a:schemeClr val="accent1"/>
-          </a:effectRef>
-          <a:fontRef idx="minor">
-            <a:schemeClr val="tx1"/>
-          </a:fontRef>
-        </p:style>
-      </p:cxnSp>
-      <p:cxnSp>
-        <p:nvCxnSpPr>
-          <p:cNvPr id="61" name="Connector 60"/>
-          <p:cNvCxnSpPr/>
-          <p:nvPr/>
-        </p:nvCxnSpPr>
-        <p:spPr>
-          <a:xfrm flipH="1">
-            <a:off x="4995195" y="5138927"/>
-            <a:ext cx="3591192" cy="0"/>
-          </a:xfrm>
-          <a:prstGeom prst="line">
-            <a:avLst/>
-          </a:prstGeom>
-          <a:ln w="13335">
-            <a:prstDash val="dash"/>
-            <a:solidFill>
-              <a:srgbClr val="6C7372"/>
-            </a:solidFill>
-          </a:ln>
-          <a:effectLst/>
-        </p:spPr>
-        <p:style>
-          <a:lnRef idx="2">
-            <a:schemeClr val="accent1"/>
-          </a:lnRef>
-          <a:fillRef idx="0">
-            <a:schemeClr val="accent1"/>
-          </a:fillRef>
-          <a:effectRef idx="1">
-            <a:schemeClr val="accent1"/>
-          </a:effectRef>
-          <a:fontRef idx="minor">
-            <a:schemeClr val="tx1"/>
-          </a:fontRef>
-        </p:style>
-      </p:cxnSp>
-      <p:cxnSp>
-        <p:nvCxnSpPr>
-          <p:cNvPr id="62" name="Connector 61"/>
-          <p:cNvCxnSpPr/>
-          <p:nvPr/>
-        </p:nvCxnSpPr>
-        <p:spPr>
-          <a:xfrm flipV="1">
-            <a:off x="4995195" y="3310128"/>
-            <a:ext cx="0" cy="1828799"/>
-          </a:xfrm>
-          <a:prstGeom prst="line">
-            <a:avLst/>
-          </a:prstGeom>
-          <a:ln w="13335">
-            <a:prstDash val="dash"/>
-            <a:solidFill>
-              <a:srgbClr val="6C7372"/>
-            </a:solidFill>
-            <a:tailEnd type="triangle" w="med" len="med"/>
-          </a:ln>
-          <a:effectLst/>
-        </p:spPr>
-        <p:style>
-          <a:lnRef idx="2">
-            <a:schemeClr val="accent1"/>
-          </a:lnRef>
-          <a:fillRef idx="0">
-            <a:schemeClr val="accent1"/>
-          </a:fillRef>
-          <a:effectRef idx="1">
-            <a:schemeClr val="accent1"/>
-          </a:effectRef>
-          <a:fontRef idx="minor">
-            <a:schemeClr val="tx1"/>
-          </a:fontRef>
-        </p:style>
-      </p:cxnSp>
-      <p:cxnSp>
-        <p:nvCxnSpPr>
-          <p:cNvPr id="63" name="Connector 62"/>
-          <p:cNvCxnSpPr/>
-          <p:nvPr/>
-        </p:nvCxnSpPr>
-        <p:spPr>
-          <a:xfrm>
-            <a:off x="10418559" y="2295144"/>
-            <a:ext cx="91440" cy="0"/>
-          </a:xfrm>
-          <a:prstGeom prst="line">
-            <a:avLst/>
-          </a:prstGeom>
-          <a:ln w="13335">
-            <a:solidFill>
-              <a:srgbClr val="6C7372"/>
-            </a:solidFill>
-            <a:tailEnd type="triangle" w="med" len="med"/>
-          </a:ln>
-          <a:effectLst/>
-        </p:spPr>
-        <p:style>
-          <a:lnRef idx="2">
-            <a:schemeClr val="accent1"/>
-          </a:lnRef>
-          <a:fillRef idx="0">
-            <a:schemeClr val="accent1"/>
-          </a:fillRef>
-          <a:effectRef idx="1">
-            <a:schemeClr val="accent1"/>
-          </a:effectRef>
-          <a:fontRef idx="minor">
-            <a:schemeClr val="tx1"/>
-          </a:fontRef>
-        </p:style>
-      </p:cxnSp>
-      <p:sp>
-        <p:nvSpPr>
-          <p:cNvPr id="64" name="Rectangle 63"/>
+      <p:sp>
+        <p:nvSpPr>
+          <p:cNvPr id="58" name="Rectangle 57"/>
           <p:cNvSpPr/>
           <p:nvPr/>
         </p:nvSpPr>
         <p:spPr>
           <a:xfrm>
-            <a:off x="2458935" y="2066544"/>
-            <a:ext cx="1316736" cy="457200"/>
+            <a:off x="2340864" y="2043684"/>
+            <a:ext cx="905256" cy="457200"/>
           </a:xfrm>
           <a:prstGeom prst="rect">
             <a:avLst/>
@@ -47178,14 +46927,14 @@
       </p:sp>
       <p:sp>
         <p:nvSpPr>
-          <p:cNvPr id="65" name="TextBox 64"/>
-          <p:cNvSpPr txBox="1"/>
-          <p:nvPr/>
-        </p:nvSpPr>
-        <p:spPr>
-          <a:xfrm>
-            <a:off x="2550375" y="2066544"/>
-            <a:ext cx="1133856" cy="457200"/>
+          <p:cNvPr id="59" name="TextBox 58"/>
+          <p:cNvSpPr txBox="1"/>
+          <p:nvPr/>
+        </p:nvSpPr>
+        <p:spPr>
+          <a:xfrm>
+            <a:off x="2395728" y="2043684"/>
+            <a:ext cx="795528" cy="457200"/>
           </a:xfrm>
           <a:prstGeom prst="rect">
             <a:avLst/>
@@ -47204,7 +46953,7 @@
               </a:lnSpc>
             </a:pPr>
             <a:r>
-              <a:rPr sz="1150" b="1" lang="ja-JP">
+              <a:rPr sz="1050" b="1" lang="ja-JP">
                 <a:solidFill>
                   <a:srgbClr val="182C43"/>
                 </a:solidFill>
@@ -47212,21 +46961,21 @@
                 <a:ea typeface="Yu Gothic"/>
                 <a:cs typeface="Yu Gothic"/>
               </a:rPr>
-              <a:t>障害申告</a:t>
-            </a:r>
-          </a:p>
-        </p:txBody>
-      </p:sp>
-      <p:sp>
-        <p:nvSpPr>
-          <p:cNvPr id="66" name="Rectangle 65"/>
+              <a:t>① 障害申告</a:t>
+            </a:r>
+          </a:p>
+        </p:txBody>
+      </p:sp>
+      <p:sp>
+        <p:nvSpPr>
+          <p:cNvPr id="60" name="Rectangle 59"/>
           <p:cNvSpPr/>
           <p:nvPr/>
         </p:nvSpPr>
         <p:spPr>
           <a:xfrm>
-            <a:off x="4469815" y="2852928"/>
-            <a:ext cx="1050759" cy="457200"/>
+            <a:off x="2340864" y="2912364"/>
+            <a:ext cx="905256" cy="457200"/>
           </a:xfrm>
           <a:prstGeom prst="rect">
             <a:avLst/>
@@ -47251,14 +47000,14 @@
       </p:sp>
       <p:sp>
         <p:nvSpPr>
-          <p:cNvPr id="67" name="TextBox 66"/>
-          <p:cNvSpPr txBox="1"/>
-          <p:nvPr/>
-        </p:nvSpPr>
-        <p:spPr>
-          <a:xfrm>
-            <a:off x="4561255" y="2852928"/>
-            <a:ext cx="867879" cy="457200"/>
+          <p:cNvPr id="61" name="TextBox 60"/>
+          <p:cNvSpPr txBox="1"/>
+          <p:nvPr/>
+        </p:nvSpPr>
+        <p:spPr>
+          <a:xfrm>
+            <a:off x="2395728" y="2912364"/>
+            <a:ext cx="795528" cy="457200"/>
           </a:xfrm>
           <a:prstGeom prst="rect">
             <a:avLst/>
@@ -47277,7 +47026,7 @@
               </a:lnSpc>
             </a:pPr>
             <a:r>
-              <a:rPr sz="1150" b="1" lang="ja-JP">
+              <a:rPr sz="1050" b="1" lang="ja-JP">
                 <a:solidFill>
                   <a:srgbClr val="182C43"/>
                 </a:solidFill>
@@ -47285,21 +47034,21 @@
                 <a:ea typeface="Yu Gothic"/>
                 <a:cs typeface="Yu Gothic"/>
               </a:rPr>
-              <a:t>一次確認</a:t>
-            </a:r>
-          </a:p>
-        </p:txBody>
-      </p:sp>
-      <p:sp>
-        <p:nvSpPr>
-          <p:cNvPr id="68" name="Rectangle 67"/>
+              <a:t>② 一次確認</a:t>
+            </a:r>
+          </a:p>
+        </p:txBody>
+      </p:sp>
+      <p:sp>
+        <p:nvSpPr>
+          <p:cNvPr id="62" name="Rectangle 61"/>
           <p:cNvSpPr/>
           <p:nvPr/>
         </p:nvSpPr>
         <p:spPr>
           <a:xfrm>
-            <a:off x="5612015" y="2852928"/>
-            <a:ext cx="1050759" cy="457200"/>
+            <a:off x="4215384" y="2912364"/>
+            <a:ext cx="873179" cy="457200"/>
           </a:xfrm>
           <a:prstGeom prst="rect">
             <a:avLst/>
@@ -47324,14 +47073,14 @@
       </p:sp>
       <p:sp>
         <p:nvSpPr>
-          <p:cNvPr id="69" name="TextBox 68"/>
-          <p:cNvSpPr txBox="1"/>
-          <p:nvPr/>
-        </p:nvSpPr>
-        <p:spPr>
-          <a:xfrm>
-            <a:off x="5703455" y="2852928"/>
-            <a:ext cx="867879" cy="457200"/>
+          <p:cNvPr id="63" name="TextBox 62"/>
+          <p:cNvSpPr txBox="1"/>
+          <p:nvPr/>
+        </p:nvSpPr>
+        <p:spPr>
+          <a:xfrm>
+            <a:off x="4270248" y="2912364"/>
+            <a:ext cx="763451" cy="457200"/>
           </a:xfrm>
           <a:prstGeom prst="rect">
             <a:avLst/>
@@ -47350,7 +47099,7 @@
               </a:lnSpc>
             </a:pPr>
             <a:r>
-              <a:rPr sz="1150" b="1" lang="ja-JP">
+              <a:rPr sz="1050" b="1" lang="ja-JP">
                 <a:solidFill>
                   <a:srgbClr val="182C43"/>
                 </a:solidFill>
@@ -47358,21 +47107,21 @@
                 <a:ea typeface="Yu Gothic"/>
                 <a:cs typeface="Yu Gothic"/>
               </a:rPr>
-              <a:t>監視確認</a:t>
-            </a:r>
-          </a:p>
-        </p:txBody>
-      </p:sp>
-      <p:sp>
-        <p:nvSpPr>
-          <p:cNvPr id="70" name="Rectangle 69"/>
+              <a:t>③ 監視確認</a:t>
+            </a:r>
+          </a:p>
+        </p:txBody>
+      </p:sp>
+      <p:sp>
+        <p:nvSpPr>
+          <p:cNvPr id="64" name="Rectangle 63"/>
           <p:cNvSpPr/>
           <p:nvPr/>
         </p:nvSpPr>
         <p:spPr>
           <a:xfrm>
-            <a:off x="4907927" y="3639312"/>
-            <a:ext cx="1316736" cy="457200"/>
+            <a:off x="4286250" y="3781044"/>
+            <a:ext cx="905256" cy="457200"/>
           </a:xfrm>
           <a:prstGeom prst="rect">
             <a:avLst/>
@@ -47397,14 +47146,14 @@
       </p:sp>
       <p:sp>
         <p:nvSpPr>
-          <p:cNvPr id="71" name="TextBox 70"/>
-          <p:cNvSpPr txBox="1"/>
-          <p:nvPr/>
-        </p:nvSpPr>
-        <p:spPr>
-          <a:xfrm>
-            <a:off x="4999367" y="3639312"/>
-            <a:ext cx="1133856" cy="457200"/>
+          <p:cNvPr id="65" name="TextBox 64"/>
+          <p:cNvSpPr txBox="1"/>
+          <p:nvPr/>
+        </p:nvSpPr>
+        <p:spPr>
+          <a:xfrm>
+            <a:off x="4341114" y="3781044"/>
+            <a:ext cx="795528" cy="457200"/>
           </a:xfrm>
           <a:prstGeom prst="rect">
             <a:avLst/>
@@ -47423,7 +47172,7 @@
               </a:lnSpc>
             </a:pPr>
             <a:r>
-              <a:rPr sz="1150" b="1" lang="ja-JP">
+              <a:rPr sz="1050" b="1" lang="ja-JP">
                 <a:solidFill>
                   <a:srgbClr val="182C43"/>
                 </a:solidFill>
@@ -47431,21 +47180,21 @@
                 <a:ea typeface="Yu Gothic"/>
                 <a:cs typeface="Yu Gothic"/>
               </a:rPr>
-              <a:t>機器確認</a:t>
-            </a:r>
-          </a:p>
-        </p:txBody>
-      </p:sp>
-      <p:sp>
-        <p:nvSpPr>
-          <p:cNvPr id="72" name="Rectangle 71"/>
+              <a:t>④ 機器確認</a:t>
+            </a:r>
+          </a:p>
+        </p:txBody>
+      </p:sp>
+      <p:sp>
+        <p:nvSpPr>
+          <p:cNvPr id="66" name="Rectangle 65"/>
           <p:cNvSpPr/>
           <p:nvPr/>
         </p:nvSpPr>
         <p:spPr>
           <a:xfrm>
-            <a:off x="6918807" y="2852928"/>
-            <a:ext cx="1050759" cy="457200"/>
+            <a:off x="5282946" y="3781044"/>
+            <a:ext cx="1193292" cy="457200"/>
           </a:xfrm>
           <a:prstGeom prst="rect">
             <a:avLst/>
@@ -47470,14 +47219,14 @@
       </p:sp>
       <p:sp>
         <p:nvSpPr>
-          <p:cNvPr id="73" name="TextBox 72"/>
-          <p:cNvSpPr txBox="1"/>
-          <p:nvPr/>
-        </p:nvSpPr>
-        <p:spPr>
-          <a:xfrm>
-            <a:off x="7010247" y="2852928"/>
-            <a:ext cx="867879" cy="457200"/>
+          <p:cNvPr id="67" name="TextBox 66"/>
+          <p:cNvSpPr txBox="1"/>
+          <p:nvPr/>
+        </p:nvSpPr>
+        <p:spPr>
+          <a:xfrm>
+            <a:off x="5337810" y="3781044"/>
+            <a:ext cx="1083564" cy="457200"/>
           </a:xfrm>
           <a:prstGeom prst="rect">
             <a:avLst/>
@@ -47496,7 +47245,7 @@
               </a:lnSpc>
             </a:pPr>
             <a:r>
-              <a:rPr sz="750" b="1" lang="ja-JP">
+              <a:rPr sz="1050" b="1" lang="ja-JP">
                 <a:solidFill>
                   <a:srgbClr val="182C43"/>
                 </a:solidFill>
@@ -47504,21 +47253,21 @@
                 <a:ea typeface="Yu Gothic"/>
                 <a:cs typeface="Yu Gothic"/>
               </a:rPr>
-              <a:t>エスカレーション</a:t>
-            </a:r>
-          </a:p>
-        </p:txBody>
-      </p:sp>
-      <p:sp>
-        <p:nvSpPr>
-          <p:cNvPr id="74" name="Rectangle 73"/>
+              <a:t>⑤ 回線切り分け</a:t>
+            </a:r>
+          </a:p>
+        </p:txBody>
+      </p:sp>
+      <p:sp>
+        <p:nvSpPr>
+          <p:cNvPr id="68" name="Rectangle 67"/>
           <p:cNvSpPr/>
           <p:nvPr/>
         </p:nvSpPr>
         <p:spPr>
           <a:xfrm>
-            <a:off x="7356919" y="3639312"/>
-            <a:ext cx="1316736" cy="457200"/>
+            <a:off x="5180004" y="2912364"/>
+            <a:ext cx="1367099" cy="457200"/>
           </a:xfrm>
           <a:prstGeom prst="rect">
             <a:avLst/>
@@ -47543,14 +47292,14 @@
       </p:sp>
       <p:sp>
         <p:nvSpPr>
-          <p:cNvPr id="75" name="TextBox 74"/>
-          <p:cNvSpPr txBox="1"/>
-          <p:nvPr/>
-        </p:nvSpPr>
-        <p:spPr>
-          <a:xfrm>
-            <a:off x="7448359" y="3639312"/>
-            <a:ext cx="1133856" cy="457200"/>
+          <p:cNvPr id="69" name="TextBox 68"/>
+          <p:cNvSpPr txBox="1"/>
+          <p:nvPr/>
+        </p:nvSpPr>
+        <p:spPr>
+          <a:xfrm>
+            <a:off x="5234868" y="2912364"/>
+            <a:ext cx="1257371" cy="457200"/>
           </a:xfrm>
           <a:prstGeom prst="rect">
             <a:avLst/>
@@ -47569,7 +47318,7 @@
               </a:lnSpc>
             </a:pPr>
             <a:r>
-              <a:rPr sz="1150" b="1" lang="ja-JP">
+              <a:rPr sz="1000" b="1" lang="ja-JP">
                 <a:solidFill>
                   <a:srgbClr val="182C43"/>
                 </a:solidFill>
@@ -47577,21 +47326,21 @@
                 <a:ea typeface="Yu Gothic"/>
                 <a:cs typeface="Yu Gothic"/>
               </a:rPr>
-              <a:t>回線切り分け</a:t>
-            </a:r>
-          </a:p>
-        </p:txBody>
-      </p:sp>
-      <p:sp>
-        <p:nvSpPr>
-          <p:cNvPr id="76" name="Rectangle 75"/>
+              <a:t>⑥ エスカレーション</a:t>
+            </a:r>
+          </a:p>
+        </p:txBody>
+      </p:sp>
+      <p:sp>
+        <p:nvSpPr>
+          <p:cNvPr id="70" name="Rectangle 69"/>
           <p:cNvSpPr/>
           <p:nvPr/>
         </p:nvSpPr>
         <p:spPr>
           <a:xfrm>
-            <a:off x="7356919" y="4425696"/>
-            <a:ext cx="1316736" cy="457200"/>
+            <a:off x="7260336" y="4649723"/>
+            <a:ext cx="1417320" cy="457200"/>
           </a:xfrm>
           <a:prstGeom prst="rect">
             <a:avLst/>
@@ -47616,14 +47365,14 @@
       </p:sp>
       <p:sp>
         <p:nvSpPr>
-          <p:cNvPr id="77" name="TextBox 76"/>
-          <p:cNvSpPr txBox="1"/>
-          <p:nvPr/>
-        </p:nvSpPr>
-        <p:spPr>
-          <a:xfrm>
-            <a:off x="7448359" y="4425696"/>
-            <a:ext cx="1133856" cy="457200"/>
+          <p:cNvPr id="71" name="TextBox 70"/>
+          <p:cNvSpPr txBox="1"/>
+          <p:nvPr/>
+        </p:nvSpPr>
+        <p:spPr>
+          <a:xfrm>
+            <a:off x="7315200" y="4649723"/>
+            <a:ext cx="1307592" cy="457200"/>
           </a:xfrm>
           <a:prstGeom prst="rect">
             <a:avLst/>
@@ -47642,7 +47391,7 @@
               </a:lnSpc>
             </a:pPr>
             <a:r>
-              <a:rPr sz="1150" b="1" lang="ja-JP">
+              <a:rPr sz="750" b="1" lang="ja-JP">
                 <a:solidFill>
                   <a:srgbClr val="182C43"/>
                 </a:solidFill>
@@ -47650,21 +47399,21 @@
                 <a:ea typeface="Yu Gothic"/>
                 <a:cs typeface="Yu Gothic"/>
               </a:rPr>
-              <a:t>回線調査・復旧</a:t>
-            </a:r>
-          </a:p>
-        </p:txBody>
-      </p:sp>
-      <p:sp>
-        <p:nvSpPr>
-          <p:cNvPr id="78" name="Rectangle 77"/>
+              <a:t>機器・回線調査／復旧対応</a:t>
+            </a:r>
+          </a:p>
+        </p:txBody>
+      </p:sp>
+      <p:sp>
+        <p:nvSpPr>
+          <p:cNvPr id="72" name="Rectangle 71"/>
           <p:cNvSpPr/>
           <p:nvPr/>
         </p:nvSpPr>
         <p:spPr>
           <a:xfrm>
-            <a:off x="8061007" y="2852928"/>
-            <a:ext cx="1050759" cy="457200"/>
+            <a:off x="7018020" y="2912364"/>
+            <a:ext cx="905256" cy="457200"/>
           </a:xfrm>
           <a:prstGeom prst="rect">
             <a:avLst/>
@@ -47689,14 +47438,14 @@
       </p:sp>
       <p:sp>
         <p:nvSpPr>
-          <p:cNvPr id="79" name="TextBox 78"/>
-          <p:cNvSpPr txBox="1"/>
-          <p:nvPr/>
-        </p:nvSpPr>
-        <p:spPr>
-          <a:xfrm>
-            <a:off x="8152447" y="2852928"/>
-            <a:ext cx="867879" cy="457200"/>
+          <p:cNvPr id="73" name="TextBox 72"/>
+          <p:cNvSpPr txBox="1"/>
+          <p:nvPr/>
+        </p:nvSpPr>
+        <p:spPr>
+          <a:xfrm>
+            <a:off x="7072884" y="2912364"/>
+            <a:ext cx="795528" cy="457200"/>
           </a:xfrm>
           <a:prstGeom prst="rect">
             <a:avLst/>
@@ -47715,7 +47464,7 @@
               </a:lnSpc>
             </a:pPr>
             <a:r>
-              <a:rPr sz="1150" b="1" lang="ja-JP">
+              <a:rPr sz="1050" b="1" lang="ja-JP">
                 <a:solidFill>
                   <a:srgbClr val="182C43"/>
                 </a:solidFill>
@@ -47723,21 +47472,21 @@
                 <a:ea typeface="Yu Gothic"/>
                 <a:cs typeface="Yu Gothic"/>
               </a:rPr>
-              <a:t>結果確認</a:t>
-            </a:r>
-          </a:p>
-        </p:txBody>
-      </p:sp>
-      <p:sp>
-        <p:nvSpPr>
-          <p:cNvPr id="80" name="Rectangle 79"/>
+              <a:t>⑦ 復旧作業</a:t>
+            </a:r>
+          </a:p>
+        </p:txBody>
+      </p:sp>
+      <p:sp>
+        <p:nvSpPr>
+          <p:cNvPr id="74" name="Rectangle 73"/>
           <p:cNvSpPr/>
           <p:nvPr/>
         </p:nvSpPr>
         <p:spPr>
           <a:xfrm>
-            <a:off x="9367799" y="2066544"/>
-            <a:ext cx="1050759" cy="457200"/>
+            <a:off x="9533763" y="2043684"/>
+            <a:ext cx="1049274" cy="457200"/>
           </a:xfrm>
           <a:prstGeom prst="rect">
             <a:avLst/>
@@ -47762,14 +47511,14 @@
       </p:sp>
       <p:sp>
         <p:nvSpPr>
-          <p:cNvPr id="81" name="TextBox 80"/>
-          <p:cNvSpPr txBox="1"/>
-          <p:nvPr/>
-        </p:nvSpPr>
-        <p:spPr>
-          <a:xfrm>
-            <a:off x="9459239" y="2066544"/>
-            <a:ext cx="867879" cy="457200"/>
+          <p:cNvPr id="75" name="TextBox 74"/>
+          <p:cNvSpPr txBox="1"/>
+          <p:nvPr/>
+        </p:nvSpPr>
+        <p:spPr>
+          <a:xfrm>
+            <a:off x="9588627" y="2043684"/>
+            <a:ext cx="939545" cy="457200"/>
           </a:xfrm>
           <a:prstGeom prst="rect">
             <a:avLst/>
@@ -47788,7 +47537,7 @@
               </a:lnSpc>
             </a:pPr>
             <a:r>
-              <a:rPr sz="1150" b="1" lang="ja-JP">
+              <a:rPr sz="1050" b="1" lang="ja-JP">
                 <a:solidFill>
                   <a:srgbClr val="182C43"/>
                 </a:solidFill>
@@ -47796,21 +47545,21 @@
                 <a:ea typeface="Yu Gothic"/>
                 <a:cs typeface="Yu Gothic"/>
               </a:rPr>
-              <a:t>利用者連絡</a:t>
-            </a:r>
-          </a:p>
-        </p:txBody>
-      </p:sp>
-      <p:sp>
-        <p:nvSpPr>
-          <p:cNvPr id="82" name="Rectangle 81"/>
+              <a:t>⑧ 利用者連絡</a:t>
+            </a:r>
+          </a:p>
+        </p:txBody>
+      </p:sp>
+      <p:sp>
+        <p:nvSpPr>
+          <p:cNvPr id="76" name="Rectangle 75"/>
           <p:cNvSpPr/>
           <p:nvPr/>
         </p:nvSpPr>
         <p:spPr>
           <a:xfrm>
-            <a:off x="10509999" y="2066544"/>
-            <a:ext cx="1050759" cy="457200"/>
+            <a:off x="8014716" y="2912364"/>
+            <a:ext cx="905256" cy="457200"/>
           </a:xfrm>
           <a:prstGeom prst="rect">
             <a:avLst/>
@@ -47835,14 +47584,14 @@
       </p:sp>
       <p:sp>
         <p:nvSpPr>
-          <p:cNvPr id="83" name="TextBox 82"/>
-          <p:cNvSpPr txBox="1"/>
-          <p:nvPr/>
-        </p:nvSpPr>
-        <p:spPr>
-          <a:xfrm>
-            <a:off x="10601439" y="2066544"/>
-            <a:ext cx="867879" cy="457200"/>
+          <p:cNvPr id="77" name="TextBox 76"/>
+          <p:cNvSpPr txBox="1"/>
+          <p:nvPr/>
+        </p:nvSpPr>
+        <p:spPr>
+          <a:xfrm>
+            <a:off x="8069580" y="2912364"/>
+            <a:ext cx="795528" cy="457200"/>
           </a:xfrm>
           <a:prstGeom prst="rect">
             <a:avLst/>
@@ -47861,7 +47610,7 @@
               </a:lnSpc>
             </a:pPr>
             <a:r>
-              <a:rPr sz="1150" b="1" lang="ja-JP">
+              <a:rPr sz="1050" b="1" lang="ja-JP">
                 <a:solidFill>
                   <a:srgbClr val="182C43"/>
                 </a:solidFill>
@@ -47869,21 +47618,94 @@
                 <a:ea typeface="Yu Gothic"/>
                 <a:cs typeface="Yu Gothic"/>
               </a:rPr>
-              <a:t>クローズ</a:t>
-            </a:r>
-          </a:p>
-        </p:txBody>
-      </p:sp>
-      <p:sp>
-        <p:nvSpPr>
-          <p:cNvPr id="84" name="Rectangle 83"/>
+              <a:t>⑨ 結果確認</a:t>
+            </a:r>
+          </a:p>
+        </p:txBody>
+      </p:sp>
+      <p:sp>
+        <p:nvSpPr>
+          <p:cNvPr id="78" name="Rectangle 77"/>
           <p:cNvSpPr/>
           <p:nvPr/>
         </p:nvSpPr>
         <p:spPr>
           <a:xfrm>
-            <a:off x="502920" y="5696712"/>
-            <a:ext cx="11185855" cy="530352"/>
+            <a:off x="10674477" y="2043684"/>
+            <a:ext cx="905256" cy="457200"/>
+          </a:xfrm>
+          <a:prstGeom prst="rect">
+            <a:avLst/>
+          </a:prstGeom>
+          <a:solidFill>
+            <a:srgbClr val="FFFFFC"/>
+          </a:solidFill>
+          <a:ln w="9525">
+            <a:solidFill>
+              <a:srgbClr val="0D7870"/>
+            </a:solidFill>
+          </a:ln>
+          <a:effectLst/>
+        </p:spPr>
+        <p:txBody>
+          <a:bodyPr rtlCol="0" anchor="ctr"/>
+          <a:lstStyle/>
+          <a:p>
+            <a:pPr algn="ctr"/>
+          </a:p>
+        </p:txBody>
+      </p:sp>
+      <p:sp>
+        <p:nvSpPr>
+          <p:cNvPr id="79" name="TextBox 78"/>
+          <p:cNvSpPr txBox="1"/>
+          <p:nvPr/>
+        </p:nvSpPr>
+        <p:spPr>
+          <a:xfrm>
+            <a:off x="10729341" y="2043684"/>
+            <a:ext cx="795528" cy="457200"/>
+          </a:xfrm>
+          <a:prstGeom prst="rect">
+            <a:avLst/>
+          </a:prstGeom>
+          <a:noFill/>
+        </p:spPr>
+        <p:txBody>
+          <a:bodyPr wrap="square" anchor="ctr" lIns="0" rIns="0" tIns="0" bIns="0">
+            <a:spAutoFit/>
+          </a:bodyPr>
+          <a:lstStyle/>
+          <a:p>
+            <a:pPr algn="ctr">
+              <a:lnSpc>
+                <a:spcPct val="130000"/>
+              </a:lnSpc>
+            </a:pPr>
+            <a:r>
+              <a:rPr sz="1050" b="1" lang="ja-JP">
+                <a:solidFill>
+                  <a:srgbClr val="182C43"/>
+                </a:solidFill>
+                <a:latin typeface="Yu Gothic"/>
+                <a:ea typeface="Yu Gothic"/>
+                <a:cs typeface="Yu Gothic"/>
+              </a:rPr>
+              <a:t>⑩ クローズ</a:t>
+            </a:r>
+          </a:p>
+        </p:txBody>
+      </p:sp>
+      <p:sp>
+        <p:nvSpPr>
+          <p:cNvPr id="80" name="Rectangle 79"/>
+          <p:cNvSpPr/>
+          <p:nvPr/>
+        </p:nvSpPr>
+        <p:spPr>
+          <a:xfrm>
+            <a:off x="338328" y="5504688"/>
+            <a:ext cx="11512296" cy="603504"/>
           </a:xfrm>
           <a:prstGeom prst="rect">
             <a:avLst/>
@@ -47906,20 +47728,20 @@
       </p:sp>
       <p:sp>
         <p:nvSpPr>
-          <p:cNvPr id="85" name="Oval 84"/>
+          <p:cNvPr id="81" name="Oval 80"/>
           <p:cNvSpPr/>
           <p:nvPr/>
         </p:nvSpPr>
         <p:spPr>
           <a:xfrm>
-            <a:off x="649224" y="5769864"/>
-            <a:ext cx="384048" cy="384048"/>
+            <a:off x="493776" y="5632703"/>
+            <a:ext cx="347472" cy="347472"/>
           </a:xfrm>
           <a:prstGeom prst="ellipse">
             <a:avLst/>
           </a:prstGeom>
           <a:solidFill>
-            <a:srgbClr val="DFEBE8"/>
+            <a:srgbClr val="0D7870"/>
           </a:solidFill>
           <a:ln>
             <a:noFill/>
@@ -47934,40 +47756,16 @@
           </a:p>
         </p:txBody>
       </p:sp>
-      <p:pic>
-        <p:nvPicPr>
-          <p:cNvPr id="86" name="Picture 85" descr="check.png"/>
-          <p:cNvPicPr>
-            <a:picLocks noChangeAspect="1"/>
-          </p:cNvPicPr>
-          <p:nvPr/>
-        </p:nvPicPr>
-        <p:blipFill>
-          <a:blip r:embed="rId2"/>
-          <a:stretch>
-            <a:fillRect/>
-          </a:stretch>
-        </p:blipFill>
-        <p:spPr>
-          <a:xfrm>
-            <a:off x="741395" y="5862035"/>
-            <a:ext cx="199704" cy="199704"/>
-          </a:xfrm>
-          <a:prstGeom prst="rect">
-            <a:avLst/>
-          </a:prstGeom>
-        </p:spPr>
-      </p:pic>
-      <p:sp>
-        <p:nvSpPr>
-          <p:cNvPr id="87" name="TextBox 86"/>
-          <p:cNvSpPr txBox="1"/>
-          <p:nvPr/>
-        </p:nvSpPr>
-        <p:spPr>
-          <a:xfrm>
-            <a:off x="1124712" y="5833872"/>
-            <a:ext cx="566928" cy="219456"/>
+      <p:sp>
+        <p:nvSpPr>
+          <p:cNvPr id="82" name="TextBox 81"/>
+          <p:cNvSpPr txBox="1"/>
+          <p:nvPr/>
+        </p:nvSpPr>
+        <p:spPr>
+          <a:xfrm>
+            <a:off x="493776" y="5623559"/>
+            <a:ext cx="347472" cy="347472"/>
           </a:xfrm>
           <a:prstGeom prst="rect">
             <a:avLst/>
@@ -47975,7 +47773,7 @@
           <a:noFill/>
         </p:spPr>
         <p:txBody>
-          <a:bodyPr wrap="square" anchor="t" lIns="0" rIns="0" tIns="0" bIns="0">
+          <a:bodyPr wrap="square" anchor="ctr" lIns="0" rIns="0" tIns="0" bIns="0">
             <a:spAutoFit/>
           </a:bodyPr>
           <a:lstStyle/>
@@ -47986,65 +47784,29 @@
               </a:lnSpc>
             </a:pPr>
             <a:r>
-              <a:rPr sz="1050" b="1" lang="ja-JP">
-                <a:solidFill>
-                  <a:srgbClr val="0D7870"/>
-                </a:solidFill>
-                <a:latin typeface="Yu Gothic"/>
-                <a:ea typeface="Yu Gothic"/>
-                <a:cs typeface="Yu Gothic"/>
-              </a:rPr>
-              <a:t>示唆</a:t>
-            </a:r>
-          </a:p>
-        </p:txBody>
-      </p:sp>
-      <p:cxnSp>
-        <p:nvCxnSpPr>
-          <p:cNvPr id="88" name="Connector 87"/>
-          <p:cNvCxnSpPr/>
-          <p:nvPr/>
-        </p:nvCxnSpPr>
-        <p:spPr>
-          <a:xfrm>
-            <a:off x="1764792" y="5797296"/>
-            <a:ext cx="0" cy="329183"/>
-          </a:xfrm>
-          <a:prstGeom prst="line">
-            <a:avLst/>
-          </a:prstGeom>
-          <a:ln w="10160">
-            <a:solidFill>
-              <a:srgbClr val="D1CFC8"/>
-            </a:solidFill>
-          </a:ln>
-          <a:effectLst/>
-        </p:spPr>
-        <p:style>
-          <a:lnRef idx="2">
-            <a:schemeClr val="accent1"/>
-          </a:lnRef>
-          <a:fillRef idx="0">
-            <a:schemeClr val="accent1"/>
-          </a:fillRef>
-          <a:effectRef idx="1">
-            <a:schemeClr val="accent1"/>
-          </a:effectRef>
-          <a:fontRef idx="minor">
-            <a:schemeClr val="tx1"/>
-          </a:fontRef>
-        </p:style>
-      </p:cxnSp>
-      <p:sp>
-        <p:nvSpPr>
-          <p:cNvPr id="89" name="TextBox 88"/>
-          <p:cNvSpPr txBox="1"/>
-          <p:nvPr/>
-        </p:nvSpPr>
-        <p:spPr>
-          <a:xfrm>
-            <a:off x="1837943" y="5797296"/>
-            <a:ext cx="9613087" cy="310896"/>
+              <a:rPr sz="1600" b="1" lang="ja-JP">
+                <a:solidFill>
+                  <a:srgbClr val="FFFFFC"/>
+                </a:solidFill>
+                <a:latin typeface="Yu Gothic"/>
+                <a:ea typeface="Yu Gothic"/>
+                <a:cs typeface="Yu Gothic"/>
+              </a:rPr>
+              <a:t>i</a:t>
+            </a:r>
+          </a:p>
+        </p:txBody>
+      </p:sp>
+      <p:sp>
+        <p:nvSpPr>
+          <p:cNvPr id="83" name="TextBox 82"/>
+          <p:cNvSpPr txBox="1"/>
+          <p:nvPr/>
+        </p:nvSpPr>
+        <p:spPr>
+          <a:xfrm>
+            <a:off x="960120" y="5605272"/>
+            <a:ext cx="10671048" cy="384048"/>
           </a:xfrm>
           <a:prstGeom prst="rect">
             <a:avLst/>
@@ -48063,7 +47825,7 @@
               </a:lnSpc>
             </a:pPr>
             <a:r>
-              <a:rPr sz="1500" b="1" lang="ja-JP">
+              <a:rPr sz="1250" b="1" lang="ja-JP">
                 <a:solidFill>
                   <a:srgbClr val="182C43"/>
                 </a:solidFill>
@@ -48071,14 +47833,14 @@
                 <a:ea typeface="Yu Gothic"/>
                 <a:cs typeface="Yu Gothic"/>
               </a:rPr>
-              <a:t>工程だけでなく、誰が受け取り、どこへ引き継ぐかを同時に確認する。</a:t>
-            </a:r>
-          </a:p>
-        </p:txBody>
-      </p:sp>
-      <p:sp>
-        <p:nvSpPr>
-          <p:cNvPr id="90" name="Rectangle 89"/>
+              <a:t>担当境界と引き継ぎ点を明示し、対応漏れを防止する。</a:t>
+            </a:r>
+          </a:p>
+        </p:txBody>
+      </p:sp>
+      <p:sp>
+        <p:nvSpPr>
+          <p:cNvPr id="84" name="Rectangle 83"/>
           <p:cNvSpPr/>
           <p:nvPr/>
         </p:nvSpPr>
@@ -48122,7 +47884,7 @@
       </p:sp>
       <p:sp>
         <p:nvSpPr>
-          <p:cNvPr id="91" name="TextBox 90"/>
+          <p:cNvPr id="85" name="TextBox 84"/>
           <p:cNvSpPr txBox="1"/>
           <p:nvPr/>
         </p:nvSpPr>
@@ -48163,7 +47925,7 @@
       </p:sp>
       <p:sp>
         <p:nvSpPr>
-          <p:cNvPr id="92" name="TextBox 91"/>
+          <p:cNvPr id="86" name="TextBox 85"/>
           <p:cNvSpPr txBox="1"/>
           <p:nvPr/>
         </p:nvSpPr>

--- a/examples/gallery/pattern_gallery.pptx
+++ b/examples/gallery/pattern_gallery.pptx
@@ -29614,7 +29614,7 @@
                 <a:ea typeface="Yu Gothic"/>
                 <a:cs typeface="Yu Gothic"/>
               </a:rPr>
-              <a:t>端末から送ったIPパケットがルーターで変換され、外部サーバーへ届くまでの送信元情報を比較します。</a:t>
+              <a:t>NATでは送信元IPを書き換え、宛先IPは維持したまま外部へ転送する。</a:t>
             </a:r>
           </a:p>
         </p:txBody>
@@ -31820,14 +31820,14 @@
         </p:nvSpPr>
         <p:spPr>
           <a:xfrm>
-            <a:off x="502920" y="5806440"/>
-            <a:ext cx="11185855" cy="384048"/>
+            <a:off x="658368" y="6327648"/>
+            <a:ext cx="10881360" cy="9144"/>
           </a:xfrm>
           <a:prstGeom prst="rect">
             <a:avLst/>
           </a:prstGeom>
           <a:solidFill>
-            <a:srgbClr val="DFEBE8"/>
+            <a:srgbClr val="D1CFC8"/>
           </a:solidFill>
           <a:ln>
             <a:noFill/>
@@ -31864,132 +31864,6 @@
         </p:nvSpPr>
         <p:spPr>
           <a:xfrm>
-            <a:off x="667512" y="5879592"/>
-            <a:ext cx="566928" cy="219456"/>
-          </a:xfrm>
-          <a:prstGeom prst="rect">
-            <a:avLst/>
-          </a:prstGeom>
-          <a:noFill/>
-        </p:spPr>
-        <p:txBody>
-          <a:bodyPr wrap="square" anchor="t" lIns="0" rIns="0" tIns="0" bIns="0">
-            <a:spAutoFit/>
-          </a:bodyPr>
-          <a:lstStyle/>
-          <a:p>
-            <a:pPr algn="ctr">
-              <a:lnSpc>
-                <a:spcPct val="100000"/>
-              </a:lnSpc>
-            </a:pPr>
-            <a:r>
-              <a:rPr sz="950" b="1" lang="ja-JP">
-                <a:solidFill>
-                  <a:srgbClr val="0D7870"/>
-                </a:solidFill>
-                <a:latin typeface="Yu Gothic"/>
-                <a:ea typeface="Yu Gothic"/>
-                <a:cs typeface="Yu Gothic"/>
-              </a:rPr>
-              <a:t>要点</a:t>
-            </a:r>
-          </a:p>
-        </p:txBody>
-      </p:sp>
-      <p:sp>
-        <p:nvSpPr>
-          <p:cNvPr id="63" name="TextBox 62"/>
-          <p:cNvSpPr txBox="1"/>
-          <p:nvPr/>
-        </p:nvSpPr>
-        <p:spPr>
-          <a:xfrm>
-            <a:off x="1344168" y="5870448"/>
-            <a:ext cx="10198303" cy="265176"/>
-          </a:xfrm>
-          <a:prstGeom prst="rect">
-            <a:avLst/>
-          </a:prstGeom>
-          <a:noFill/>
-        </p:spPr>
-        <p:txBody>
-          <a:bodyPr wrap="square" anchor="ctr" lIns="0" rIns="0" tIns="0" bIns="0">
-            <a:spAutoFit/>
-          </a:bodyPr>
-          <a:lstStyle/>
-          <a:p>
-            <a:pPr algn="l">
-              <a:lnSpc>
-                <a:spcPct val="100000"/>
-              </a:lnSpc>
-            </a:pPr>
-            <a:r>
-              <a:rPr sz="1050" b="1" lang="ja-JP">
-                <a:solidFill>
-                  <a:srgbClr val="182C43"/>
-                </a:solidFill>
-                <a:latin typeface="Yu Gothic"/>
-                <a:ea typeface="Yu Gothic"/>
-                <a:cs typeface="Yu Gothic"/>
-              </a:rPr>
-              <a:t>NATでは送信元IPを書き換え、宛先IPは維持したまま外部へ転送します。</a:t>
-            </a:r>
-          </a:p>
-        </p:txBody>
-      </p:sp>
-      <p:sp>
-        <p:nvSpPr>
-          <p:cNvPr id="64" name="Rectangle 63"/>
-          <p:cNvSpPr/>
-          <p:nvPr/>
-        </p:nvSpPr>
-        <p:spPr>
-          <a:xfrm>
-            <a:off x="658368" y="6327648"/>
-            <a:ext cx="10881360" cy="9144"/>
-          </a:xfrm>
-          <a:prstGeom prst="rect">
-            <a:avLst/>
-          </a:prstGeom>
-          <a:solidFill>
-            <a:srgbClr val="D1CFC8"/>
-          </a:solidFill>
-          <a:ln>
-            <a:noFill/>
-          </a:ln>
-          <a:effectLst/>
-        </p:spPr>
-        <p:style>
-          <a:lnRef idx="1">
-            <a:schemeClr val="accent1"/>
-          </a:lnRef>
-          <a:fillRef idx="3">
-            <a:schemeClr val="accent1"/>
-          </a:fillRef>
-          <a:effectRef idx="2">
-            <a:schemeClr val="accent1"/>
-          </a:effectRef>
-          <a:fontRef idx="minor">
-            <a:schemeClr val="lt1"/>
-          </a:fontRef>
-        </p:style>
-        <p:txBody>
-          <a:bodyPr rtlCol="0" anchor="ctr"/>
-          <a:lstStyle/>
-          <a:p>
-            <a:pPr algn="ctr"/>
-          </a:p>
-        </p:txBody>
-      </p:sp>
-      <p:sp>
-        <p:nvSpPr>
-          <p:cNvPr id="65" name="TextBox 64"/>
-          <p:cNvSpPr txBox="1"/>
-          <p:nvPr/>
-        </p:nvSpPr>
-        <p:spPr>
-          <a:xfrm>
             <a:off x="658368" y="6409944"/>
             <a:ext cx="7132320" cy="228600"/>
           </a:xfrm>
@@ -32025,7 +31899,7 @@
       </p:sp>
       <p:sp>
         <p:nvSpPr>
-          <p:cNvPr id="66" name="TextBox 65"/>
+          <p:cNvPr id="63" name="TextBox 62"/>
           <p:cNvSpPr txBox="1"/>
           <p:nvPr/>
         </p:nvSpPr>
@@ -32227,7 +32101,48 @@
         </p:nvSpPr>
         <p:spPr>
           <a:xfrm>
-            <a:off x="521208" y="1901952"/>
+            <a:off x="658368" y="1444752"/>
+            <a:ext cx="10881360" cy="237236"/>
+          </a:xfrm>
+          <a:prstGeom prst="rect">
+            <a:avLst/>
+          </a:prstGeom>
+          <a:noFill/>
+        </p:spPr>
+        <p:txBody>
+          <a:bodyPr wrap="square" anchor="t" lIns="0" rIns="0" tIns="0" bIns="0">
+            <a:spAutoFit/>
+          </a:bodyPr>
+          <a:lstStyle/>
+          <a:p>
+            <a:pPr algn="l">
+              <a:lnSpc>
+                <a:spcPct val="118000"/>
+              </a:lnSpc>
+            </a:pPr>
+            <a:r>
+              <a:rPr sz="1400" b="0" lang="ja-JP">
+                <a:solidFill>
+                  <a:srgbClr val="666E70"/>
+                </a:solidFill>
+                <a:latin typeface="Yu Gothic"/>
+                <a:ea typeface="Yu Gothic"/>
+                <a:cs typeface="Yu Gothic"/>
+              </a:rPr>
+              <a:t>フィールドを位置で捉え、パケットキャプチャの値を役割へ結び付ける。</a:t>
+            </a:r>
+          </a:p>
+        </p:txBody>
+      </p:sp>
+      <p:sp>
+        <p:nvSpPr>
+          <p:cNvPr id="6" name="TextBox 5"/>
+          <p:cNvSpPr txBox="1"/>
+          <p:nvPr/>
+        </p:nvSpPr>
+        <p:spPr>
+          <a:xfrm>
+            <a:off x="521208" y="2294636"/>
             <a:ext cx="978408" cy="274320"/>
           </a:xfrm>
           <a:prstGeom prst="rect">
@@ -32262,13 +32177,13 @@
       </p:sp>
       <p:sp>
         <p:nvSpPr>
-          <p:cNvPr id="6" name="Rectangle 5"/>
+          <p:cNvPr id="7" name="Rectangle 6"/>
           <p:cNvSpPr/>
           <p:nvPr/>
         </p:nvSpPr>
         <p:spPr>
           <a:xfrm>
-            <a:off x="1645920" y="1719072"/>
+            <a:off x="1645920" y="2111756"/>
             <a:ext cx="939546" cy="841248"/>
           </a:xfrm>
           <a:prstGeom prst="rect">
@@ -32308,13 +32223,13 @@
       </p:sp>
       <p:sp>
         <p:nvSpPr>
-          <p:cNvPr id="7" name="TextBox 6"/>
-          <p:cNvSpPr txBox="1"/>
-          <p:nvPr/>
-        </p:nvSpPr>
-        <p:spPr>
-          <a:xfrm>
-            <a:off x="1691640" y="1828800"/>
+          <p:cNvPr id="8" name="TextBox 7"/>
+          <p:cNvSpPr txBox="1"/>
+          <p:nvPr/>
+        </p:nvSpPr>
+        <p:spPr>
+          <a:xfrm>
+            <a:off x="1691640" y="2221484"/>
             <a:ext cx="848106" cy="403799"/>
           </a:xfrm>
           <a:prstGeom prst="rect">
@@ -32349,13 +32264,13 @@
       </p:sp>
       <p:sp>
         <p:nvSpPr>
-          <p:cNvPr id="8" name="TextBox 7"/>
-          <p:cNvSpPr txBox="1"/>
-          <p:nvPr/>
-        </p:nvSpPr>
-        <p:spPr>
-          <a:xfrm>
-            <a:off x="1682496" y="2331720"/>
+          <p:cNvPr id="9" name="TextBox 8"/>
+          <p:cNvSpPr txBox="1"/>
+          <p:nvPr/>
+        </p:nvSpPr>
+        <p:spPr>
+          <a:xfrm>
+            <a:off x="1682496" y="2724404"/>
             <a:ext cx="866394" cy="146304"/>
           </a:xfrm>
           <a:prstGeom prst="rect">
@@ -32390,13 +32305,13 @@
       </p:sp>
       <p:sp>
         <p:nvSpPr>
-          <p:cNvPr id="9" name="Rectangle 8"/>
+          <p:cNvPr id="10" name="Rectangle 9"/>
           <p:cNvSpPr/>
           <p:nvPr/>
         </p:nvSpPr>
         <p:spPr>
           <a:xfrm>
-            <a:off x="2585466" y="1719072"/>
+            <a:off x="2585466" y="2111756"/>
             <a:ext cx="939546" cy="841248"/>
           </a:xfrm>
           <a:prstGeom prst="rect">
@@ -32436,13 +32351,13 @@
       </p:sp>
       <p:sp>
         <p:nvSpPr>
-          <p:cNvPr id="10" name="TextBox 9"/>
-          <p:cNvSpPr txBox="1"/>
-          <p:nvPr/>
-        </p:nvSpPr>
-        <p:spPr>
-          <a:xfrm>
-            <a:off x="2631186" y="1828800"/>
+          <p:cNvPr id="11" name="TextBox 10"/>
+          <p:cNvSpPr txBox="1"/>
+          <p:nvPr/>
+        </p:nvSpPr>
+        <p:spPr>
+          <a:xfrm>
+            <a:off x="2631186" y="2221484"/>
             <a:ext cx="848106" cy="403799"/>
           </a:xfrm>
           <a:prstGeom prst="rect">
@@ -32477,13 +32392,13 @@
       </p:sp>
       <p:sp>
         <p:nvSpPr>
-          <p:cNvPr id="11" name="TextBox 10"/>
-          <p:cNvSpPr txBox="1"/>
-          <p:nvPr/>
-        </p:nvSpPr>
-        <p:spPr>
-          <a:xfrm>
-            <a:off x="2622042" y="2331720"/>
+          <p:cNvPr id="12" name="TextBox 11"/>
+          <p:cNvSpPr txBox="1"/>
+          <p:nvPr/>
+        </p:nvSpPr>
+        <p:spPr>
+          <a:xfrm>
+            <a:off x="2622042" y="2724404"/>
             <a:ext cx="866394" cy="146304"/>
           </a:xfrm>
           <a:prstGeom prst="rect">
@@ -32518,13 +32433,13 @@
       </p:sp>
       <p:sp>
         <p:nvSpPr>
-          <p:cNvPr id="12" name="Rectangle 11"/>
+          <p:cNvPr id="13" name="Rectangle 12"/>
           <p:cNvSpPr/>
           <p:nvPr/>
         </p:nvSpPr>
         <p:spPr>
           <a:xfrm>
-            <a:off x="3525012" y="1719072"/>
+            <a:off x="3525012" y="2111756"/>
             <a:ext cx="1105738" cy="841248"/>
           </a:xfrm>
           <a:prstGeom prst="rect">
@@ -32564,13 +32479,13 @@
       </p:sp>
       <p:sp>
         <p:nvSpPr>
-          <p:cNvPr id="13" name="TextBox 12"/>
-          <p:cNvSpPr txBox="1"/>
-          <p:nvPr/>
-        </p:nvSpPr>
-        <p:spPr>
-          <a:xfrm>
-            <a:off x="3570732" y="1828800"/>
+          <p:cNvPr id="14" name="TextBox 13"/>
+          <p:cNvSpPr txBox="1"/>
+          <p:nvPr/>
+        </p:nvSpPr>
+        <p:spPr>
+          <a:xfrm>
+            <a:off x="3570732" y="2221484"/>
             <a:ext cx="1014298" cy="403799"/>
           </a:xfrm>
           <a:prstGeom prst="rect">
@@ -32605,13 +32520,13 @@
       </p:sp>
       <p:sp>
         <p:nvSpPr>
-          <p:cNvPr id="14" name="TextBox 13"/>
-          <p:cNvSpPr txBox="1"/>
-          <p:nvPr/>
-        </p:nvSpPr>
-        <p:spPr>
-          <a:xfrm>
-            <a:off x="3561588" y="2331720"/>
+          <p:cNvPr id="15" name="TextBox 14"/>
+          <p:cNvSpPr txBox="1"/>
+          <p:nvPr/>
+        </p:nvSpPr>
+        <p:spPr>
+          <a:xfrm>
+            <a:off x="3561588" y="2724404"/>
             <a:ext cx="1032586" cy="146304"/>
           </a:xfrm>
           <a:prstGeom prst="rect">
@@ -32646,13 +32561,13 @@
       </p:sp>
       <p:sp>
         <p:nvSpPr>
-          <p:cNvPr id="15" name="Rectangle 14"/>
+          <p:cNvPr id="16" name="Rectangle 15"/>
           <p:cNvSpPr/>
           <p:nvPr/>
         </p:nvSpPr>
         <p:spPr>
           <a:xfrm>
-            <a:off x="4630750" y="1719072"/>
+            <a:off x="4630750" y="2111756"/>
             <a:ext cx="1105738" cy="841248"/>
           </a:xfrm>
           <a:prstGeom prst="rect">
@@ -32692,13 +32607,13 @@
       </p:sp>
       <p:sp>
         <p:nvSpPr>
-          <p:cNvPr id="16" name="TextBox 15"/>
-          <p:cNvSpPr txBox="1"/>
-          <p:nvPr/>
-        </p:nvSpPr>
-        <p:spPr>
-          <a:xfrm>
-            <a:off x="4676470" y="1828800"/>
+          <p:cNvPr id="17" name="TextBox 16"/>
+          <p:cNvSpPr txBox="1"/>
+          <p:nvPr/>
+        </p:nvSpPr>
+        <p:spPr>
+          <a:xfrm>
+            <a:off x="4676470" y="2221484"/>
             <a:ext cx="1014298" cy="403799"/>
           </a:xfrm>
           <a:prstGeom prst="rect">
@@ -32733,13 +32648,13 @@
       </p:sp>
       <p:sp>
         <p:nvSpPr>
-          <p:cNvPr id="17" name="TextBox 16"/>
-          <p:cNvSpPr txBox="1"/>
-          <p:nvPr/>
-        </p:nvSpPr>
-        <p:spPr>
-          <a:xfrm>
-            <a:off x="4667326" y="2331720"/>
+          <p:cNvPr id="18" name="TextBox 17"/>
+          <p:cNvSpPr txBox="1"/>
+          <p:nvPr/>
+        </p:nvSpPr>
+        <p:spPr>
+          <a:xfrm>
+            <a:off x="4667326" y="2724404"/>
             <a:ext cx="1032586" cy="146304"/>
           </a:xfrm>
           <a:prstGeom prst="rect">
@@ -32774,13 +32689,13 @@
       </p:sp>
       <p:sp>
         <p:nvSpPr>
-          <p:cNvPr id="18" name="Rectangle 17"/>
+          <p:cNvPr id="19" name="Rectangle 18"/>
           <p:cNvSpPr/>
           <p:nvPr/>
         </p:nvSpPr>
         <p:spPr>
           <a:xfrm>
-            <a:off x="5736488" y="1719072"/>
+            <a:off x="5736488" y="2111756"/>
             <a:ext cx="589788" cy="841248"/>
           </a:xfrm>
           <a:prstGeom prst="rect">
@@ -32820,13 +32735,13 @@
       </p:sp>
       <p:sp>
         <p:nvSpPr>
-          <p:cNvPr id="19" name="TextBox 18"/>
-          <p:cNvSpPr txBox="1"/>
-          <p:nvPr/>
-        </p:nvSpPr>
-        <p:spPr>
-          <a:xfrm>
-            <a:off x="5782208" y="1828800"/>
+          <p:cNvPr id="20" name="TextBox 19"/>
+          <p:cNvSpPr txBox="1"/>
+          <p:nvPr/>
+        </p:nvSpPr>
+        <p:spPr>
+          <a:xfrm>
+            <a:off x="5782208" y="2221484"/>
             <a:ext cx="498348" cy="403799"/>
           </a:xfrm>
           <a:prstGeom prst="rect">
@@ -32861,13 +32776,13 @@
       </p:sp>
       <p:sp>
         <p:nvSpPr>
-          <p:cNvPr id="20" name="TextBox 19"/>
-          <p:cNvSpPr txBox="1"/>
-          <p:nvPr/>
-        </p:nvSpPr>
-        <p:spPr>
-          <a:xfrm>
-            <a:off x="5773064" y="2331720"/>
+          <p:cNvPr id="21" name="TextBox 20"/>
+          <p:cNvSpPr txBox="1"/>
+          <p:nvPr/>
+        </p:nvSpPr>
+        <p:spPr>
+          <a:xfrm>
+            <a:off x="5773064" y="2724404"/>
             <a:ext cx="516636" cy="146304"/>
           </a:xfrm>
           <a:prstGeom prst="rect">
@@ -32902,13 +32817,13 @@
       </p:sp>
       <p:sp>
         <p:nvSpPr>
-          <p:cNvPr id="21" name="Rectangle 20"/>
+          <p:cNvPr id="22" name="Rectangle 21"/>
           <p:cNvSpPr/>
           <p:nvPr/>
         </p:nvSpPr>
         <p:spPr>
           <a:xfrm>
-            <a:off x="6326276" y="1719072"/>
+            <a:off x="6326276" y="2111756"/>
             <a:ext cx="939546" cy="841248"/>
           </a:xfrm>
           <a:prstGeom prst="rect">
@@ -32948,13 +32863,13 @@
       </p:sp>
       <p:sp>
         <p:nvSpPr>
-          <p:cNvPr id="22" name="TextBox 21"/>
-          <p:cNvSpPr txBox="1"/>
-          <p:nvPr/>
-        </p:nvSpPr>
-        <p:spPr>
-          <a:xfrm>
-            <a:off x="6371996" y="1828800"/>
+          <p:cNvPr id="23" name="TextBox 22"/>
+          <p:cNvSpPr txBox="1"/>
+          <p:nvPr/>
+        </p:nvSpPr>
+        <p:spPr>
+          <a:xfrm>
+            <a:off x="6371996" y="2221484"/>
             <a:ext cx="848106" cy="403799"/>
           </a:xfrm>
           <a:prstGeom prst="rect">
@@ -32989,13 +32904,13 @@
       </p:sp>
       <p:sp>
         <p:nvSpPr>
-          <p:cNvPr id="23" name="TextBox 22"/>
-          <p:cNvSpPr txBox="1"/>
-          <p:nvPr/>
-        </p:nvSpPr>
-        <p:spPr>
-          <a:xfrm>
-            <a:off x="6362852" y="2331720"/>
+          <p:cNvPr id="24" name="TextBox 23"/>
+          <p:cNvSpPr txBox="1"/>
+          <p:nvPr/>
+        </p:nvSpPr>
+        <p:spPr>
+          <a:xfrm>
+            <a:off x="6362852" y="2724404"/>
             <a:ext cx="866394" cy="146304"/>
           </a:xfrm>
           <a:prstGeom prst="rect">
@@ -33030,13 +32945,13 @@
       </p:sp>
       <p:sp>
         <p:nvSpPr>
-          <p:cNvPr id="24" name="Rectangle 23"/>
+          <p:cNvPr id="25" name="Rectangle 24"/>
           <p:cNvSpPr/>
           <p:nvPr/>
         </p:nvSpPr>
         <p:spPr>
           <a:xfrm>
-            <a:off x="7265822" y="1719072"/>
+            <a:off x="7265822" y="2111756"/>
             <a:ext cx="4422952" cy="841248"/>
           </a:xfrm>
           <a:prstGeom prst="rect">
@@ -33076,13 +32991,13 @@
       </p:sp>
       <p:sp>
         <p:nvSpPr>
-          <p:cNvPr id="25" name="TextBox 24"/>
-          <p:cNvSpPr txBox="1"/>
-          <p:nvPr/>
-        </p:nvSpPr>
-        <p:spPr>
-          <a:xfrm>
-            <a:off x="7311542" y="1828800"/>
+          <p:cNvPr id="26" name="TextBox 25"/>
+          <p:cNvSpPr txBox="1"/>
+          <p:nvPr/>
+        </p:nvSpPr>
+        <p:spPr>
+          <a:xfrm>
+            <a:off x="7311542" y="2221484"/>
             <a:ext cx="4331512" cy="403799"/>
           </a:xfrm>
           <a:prstGeom prst="rect">
@@ -33117,13 +33032,13 @@
       </p:sp>
       <p:sp>
         <p:nvSpPr>
-          <p:cNvPr id="26" name="TextBox 25"/>
-          <p:cNvSpPr txBox="1"/>
-          <p:nvPr/>
-        </p:nvSpPr>
-        <p:spPr>
-          <a:xfrm>
-            <a:off x="7302398" y="2331720"/>
+          <p:cNvPr id="27" name="TextBox 26"/>
+          <p:cNvSpPr txBox="1"/>
+          <p:nvPr/>
+        </p:nvSpPr>
+        <p:spPr>
+          <a:xfrm>
+            <a:off x="7302398" y="2724404"/>
             <a:ext cx="4349800" cy="146304"/>
           </a:xfrm>
           <a:prstGeom prst="rect">
@@ -33158,14 +33073,14 @@
       </p:sp>
       <p:cxnSp>
         <p:nvCxnSpPr>
-          <p:cNvPr id="27" name="Connector 26"/>
+          <p:cNvPr id="28" name="Connector 27"/>
           <p:cNvCxnSpPr/>
           <p:nvPr/>
         </p:nvCxnSpPr>
         <p:spPr>
           <a:xfrm flipH="1">
-            <a:off x="685800" y="2578608"/>
-            <a:ext cx="3392081" cy="182880"/>
+            <a:off x="685800" y="2971292"/>
+            <a:ext cx="3392081" cy="182879"/>
           </a:xfrm>
           <a:prstGeom prst="line">
             <a:avLst/>
@@ -33194,13 +33109,13 @@
       </p:cxnSp>
       <p:sp>
         <p:nvSpPr>
-          <p:cNvPr id="28" name="TextBox 27"/>
-          <p:cNvSpPr txBox="1"/>
-          <p:nvPr/>
-        </p:nvSpPr>
-        <p:spPr>
-          <a:xfrm>
-            <a:off x="502920" y="2816352"/>
+          <p:cNvPr id="29" name="TextBox 28"/>
+          <p:cNvSpPr txBox="1"/>
+          <p:nvPr/>
+        </p:nvSpPr>
+        <p:spPr>
+          <a:xfrm>
+            <a:off x="502920" y="3209035"/>
             <a:ext cx="566928" cy="201168"/>
           </a:xfrm>
           <a:prstGeom prst="rect">
@@ -33235,13 +33150,13 @@
       </p:sp>
       <p:sp>
         <p:nvSpPr>
-          <p:cNvPr id="29" name="TextBox 28"/>
-          <p:cNvSpPr txBox="1"/>
-          <p:nvPr/>
-        </p:nvSpPr>
-        <p:spPr>
-          <a:xfrm>
-            <a:off x="1124712" y="2816352"/>
+          <p:cNvPr id="30" name="TextBox 29"/>
+          <p:cNvSpPr txBox="1"/>
+          <p:nvPr/>
+        </p:nvSpPr>
+        <p:spPr>
+          <a:xfrm>
+            <a:off x="1124712" y="3209035"/>
             <a:ext cx="2972714" cy="438912"/>
           </a:xfrm>
           <a:prstGeom prst="rect">
@@ -33276,14 +33191,14 @@
       </p:sp>
       <p:cxnSp>
         <p:nvCxnSpPr>
-          <p:cNvPr id="30" name="Connector 29"/>
+          <p:cNvPr id="31" name="Connector 30"/>
           <p:cNvCxnSpPr/>
           <p:nvPr/>
         </p:nvCxnSpPr>
         <p:spPr>
           <a:xfrm flipH="1">
-            <a:off x="4481474" y="2578608"/>
-            <a:ext cx="702145" cy="182880"/>
+            <a:off x="4481474" y="2971292"/>
+            <a:ext cx="702145" cy="182879"/>
           </a:xfrm>
           <a:prstGeom prst="line">
             <a:avLst/>
@@ -33312,13 +33227,13 @@
       </p:cxnSp>
       <p:sp>
         <p:nvSpPr>
-          <p:cNvPr id="31" name="TextBox 30"/>
-          <p:cNvSpPr txBox="1"/>
-          <p:nvPr/>
-        </p:nvSpPr>
-        <p:spPr>
-          <a:xfrm>
-            <a:off x="4298594" y="2816352"/>
+          <p:cNvPr id="32" name="TextBox 31"/>
+          <p:cNvSpPr txBox="1"/>
+          <p:nvPr/>
+        </p:nvSpPr>
+        <p:spPr>
+          <a:xfrm>
+            <a:off x="4298594" y="3209035"/>
             <a:ext cx="384048" cy="201168"/>
           </a:xfrm>
           <a:prstGeom prst="rect">
@@ -33353,13 +33268,13 @@
       </p:sp>
       <p:sp>
         <p:nvSpPr>
-          <p:cNvPr id="32" name="TextBox 31"/>
-          <p:cNvSpPr txBox="1"/>
-          <p:nvPr/>
-        </p:nvSpPr>
-        <p:spPr>
-          <a:xfrm>
-            <a:off x="4737506" y="2816352"/>
+          <p:cNvPr id="33" name="TextBox 32"/>
+          <p:cNvSpPr txBox="1"/>
+          <p:nvPr/>
+        </p:nvSpPr>
+        <p:spPr>
+          <a:xfrm>
+            <a:off x="4737506" y="3209035"/>
             <a:ext cx="3155594" cy="438912"/>
           </a:xfrm>
           <a:prstGeom prst="rect">
@@ -33394,14 +33309,14 @@
       </p:sp>
       <p:cxnSp>
         <p:nvCxnSpPr>
-          <p:cNvPr id="33" name="Connector 32"/>
+          <p:cNvPr id="34" name="Connector 33"/>
           <p:cNvCxnSpPr/>
           <p:nvPr/>
         </p:nvCxnSpPr>
         <p:spPr>
           <a:xfrm>
-            <a:off x="6031382" y="2578608"/>
-            <a:ext cx="2245766" cy="182880"/>
+            <a:off x="6031382" y="2971292"/>
+            <a:ext cx="2245766" cy="182879"/>
           </a:xfrm>
           <a:prstGeom prst="line">
             <a:avLst/>
@@ -33430,13 +33345,13 @@
       </p:cxnSp>
       <p:sp>
         <p:nvSpPr>
-          <p:cNvPr id="34" name="TextBox 33"/>
-          <p:cNvSpPr txBox="1"/>
-          <p:nvPr/>
-        </p:nvSpPr>
-        <p:spPr>
-          <a:xfrm>
-            <a:off x="8094268" y="2816352"/>
+          <p:cNvPr id="35" name="TextBox 34"/>
+          <p:cNvSpPr txBox="1"/>
+          <p:nvPr/>
+        </p:nvSpPr>
+        <p:spPr>
+          <a:xfrm>
+            <a:off x="8094268" y="3209035"/>
             <a:ext cx="384048" cy="201168"/>
           </a:xfrm>
           <a:prstGeom prst="rect">
@@ -33471,13 +33386,13 @@
       </p:sp>
       <p:sp>
         <p:nvSpPr>
-          <p:cNvPr id="35" name="TextBox 34"/>
-          <p:cNvSpPr txBox="1"/>
-          <p:nvPr/>
-        </p:nvSpPr>
-        <p:spPr>
-          <a:xfrm>
-            <a:off x="8533180" y="2816352"/>
+          <p:cNvPr id="36" name="TextBox 35"/>
+          <p:cNvSpPr txBox="1"/>
+          <p:nvPr/>
+        </p:nvSpPr>
+        <p:spPr>
+          <a:xfrm>
+            <a:off x="8533180" y="3209035"/>
             <a:ext cx="3155594" cy="438912"/>
           </a:xfrm>
           <a:prstGeom prst="rect">
@@ -33512,20 +33427,20 @@
       </p:sp>
       <p:sp>
         <p:nvSpPr>
-          <p:cNvPr id="36" name="Rectangle 35"/>
+          <p:cNvPr id="37" name="Rectangle 36"/>
           <p:cNvSpPr/>
           <p:nvPr/>
         </p:nvSpPr>
         <p:spPr>
           <a:xfrm>
-            <a:off x="502920" y="5760720"/>
-            <a:ext cx="11185855" cy="420624"/>
+            <a:off x="658368" y="6327648"/>
+            <a:ext cx="10881360" cy="9144"/>
           </a:xfrm>
           <a:prstGeom prst="rect">
             <a:avLst/>
           </a:prstGeom>
           <a:solidFill>
-            <a:srgbClr val="DFEBE8"/>
+            <a:srgbClr val="D1CFC8"/>
           </a:solidFill>
           <a:ln>
             <a:noFill/>
@@ -33556,92 +33471,7 @@
       </p:sp>
       <p:sp>
         <p:nvSpPr>
-          <p:cNvPr id="37" name="TextBox 36"/>
-          <p:cNvSpPr txBox="1"/>
-          <p:nvPr/>
-        </p:nvSpPr>
-        <p:spPr>
-          <a:xfrm>
-            <a:off x="667512" y="5861304"/>
-            <a:ext cx="10856671" cy="219456"/>
-          </a:xfrm>
-          <a:prstGeom prst="rect">
-            <a:avLst/>
-          </a:prstGeom>
-          <a:noFill/>
-        </p:spPr>
-        <p:txBody>
-          <a:bodyPr wrap="square" anchor="ctr" lIns="0" rIns="0" tIns="0" bIns="0">
-            <a:spAutoFit/>
-          </a:bodyPr>
-          <a:lstStyle/>
-          <a:p>
-            <a:pPr algn="l">
-              <a:lnSpc>
-                <a:spcPct val="130000"/>
-              </a:lnSpc>
-            </a:pPr>
-            <a:r>
-              <a:rPr sz="1150" b="1" lang="ja-JP">
-                <a:solidFill>
-                  <a:srgbClr val="182C43"/>
-                </a:solidFill>
-                <a:latin typeface="Yu Gothic"/>
-                <a:ea typeface="Yu Gothic"/>
-                <a:cs typeface="Yu Gothic"/>
-              </a:rPr>
-              <a:t>フィールドを位置で捉えると、パケットキャプチャの値を役割へ結び付けやすくなります。</a:t>
-            </a:r>
-          </a:p>
-        </p:txBody>
-      </p:sp>
-      <p:sp>
-        <p:nvSpPr>
-          <p:cNvPr id="38" name="Rectangle 37"/>
-          <p:cNvSpPr/>
-          <p:nvPr/>
-        </p:nvSpPr>
-        <p:spPr>
-          <a:xfrm>
-            <a:off x="658368" y="6327648"/>
-            <a:ext cx="10881360" cy="9144"/>
-          </a:xfrm>
-          <a:prstGeom prst="rect">
-            <a:avLst/>
-          </a:prstGeom>
-          <a:solidFill>
-            <a:srgbClr val="D1CFC8"/>
-          </a:solidFill>
-          <a:ln>
-            <a:noFill/>
-          </a:ln>
-          <a:effectLst/>
-        </p:spPr>
-        <p:style>
-          <a:lnRef idx="1">
-            <a:schemeClr val="accent1"/>
-          </a:lnRef>
-          <a:fillRef idx="3">
-            <a:schemeClr val="accent1"/>
-          </a:fillRef>
-          <a:effectRef idx="2">
-            <a:schemeClr val="accent1"/>
-          </a:effectRef>
-          <a:fontRef idx="minor">
-            <a:schemeClr val="lt1"/>
-          </a:fontRef>
-        </p:style>
-        <p:txBody>
-          <a:bodyPr rtlCol="0" anchor="ctr"/>
-          <a:lstStyle/>
-          <a:p>
-            <a:pPr algn="ctr"/>
-          </a:p>
-        </p:txBody>
-      </p:sp>
-      <p:sp>
-        <p:nvSpPr>
-          <p:cNvPr id="39" name="TextBox 38"/>
+          <p:cNvPr id="38" name="TextBox 37"/>
           <p:cNvSpPr txBox="1"/>
           <p:nvPr/>
         </p:nvSpPr>
@@ -33682,7 +33512,7 @@
       </p:sp>
       <p:sp>
         <p:nvSpPr>
-          <p:cNvPr id="40" name="TextBox 39"/>
+          <p:cNvPr id="39" name="TextBox 38"/>
           <p:cNvSpPr txBox="1"/>
           <p:nvPr/>
         </p:nvSpPr>
@@ -33878,14 +33708,55 @@
       </p:sp>
       <p:sp>
         <p:nvSpPr>
-          <p:cNvPr id="5" name="Rectangle 4"/>
+          <p:cNvPr id="5" name="TextBox 4"/>
+          <p:cNvSpPr txBox="1"/>
+          <p:nvPr/>
+        </p:nvSpPr>
+        <p:spPr>
+          <a:xfrm>
+            <a:off x="658368" y="1444752"/>
+            <a:ext cx="10881360" cy="237236"/>
+          </a:xfrm>
+          <a:prstGeom prst="rect">
+            <a:avLst/>
+          </a:prstGeom>
+          <a:noFill/>
+        </p:spPr>
+        <p:txBody>
+          <a:bodyPr wrap="square" anchor="t" lIns="0" rIns="0" tIns="0" bIns="0">
+            <a:spAutoFit/>
+          </a:bodyPr>
+          <a:lstStyle/>
+          <a:p>
+            <a:pPr algn="l">
+              <a:lnSpc>
+                <a:spcPct val="118000"/>
+              </a:lnSpc>
+            </a:pPr>
+            <a:r>
+              <a:rPr sz="1400" b="0" lang="ja-JP">
+                <a:solidFill>
+                  <a:srgbClr val="666E70"/>
+                </a:solidFill>
+                <a:latin typeface="Yu Gothic"/>
+                <a:ea typeface="Yu Gothic"/>
+                <a:cs typeface="Yu Gothic"/>
+              </a:rPr>
+              <a:t>コマンドの実行ではなく、期待状態の確認までを作業単位とする。</a:t>
+            </a:r>
+          </a:p>
+        </p:txBody>
+      </p:sp>
+      <p:sp>
+        <p:nvSpPr>
+          <p:cNvPr id="6" name="Rectangle 5"/>
           <p:cNvSpPr/>
           <p:nvPr/>
         </p:nvSpPr>
         <p:spPr>
           <a:xfrm>
-            <a:off x="502920" y="1719072"/>
-            <a:ext cx="6903720" cy="3977639"/>
+            <a:off x="502920" y="2111756"/>
+            <a:ext cx="6903720" cy="4014723"/>
           </a:xfrm>
           <a:prstGeom prst="rect">
             <a:avLst/>
@@ -33922,13 +33793,13 @@
       </p:sp>
       <p:sp>
         <p:nvSpPr>
-          <p:cNvPr id="6" name="TextBox 5"/>
-          <p:cNvSpPr txBox="1"/>
-          <p:nvPr/>
-        </p:nvSpPr>
-        <p:spPr>
-          <a:xfrm>
-            <a:off x="758952" y="1901952"/>
+          <p:cNvPr id="7" name="TextBox 6"/>
+          <p:cNvSpPr txBox="1"/>
+          <p:nvPr/>
+        </p:nvSpPr>
+        <p:spPr>
+          <a:xfrm>
+            <a:off x="758952" y="2294636"/>
             <a:ext cx="6391656" cy="201168"/>
           </a:xfrm>
           <a:prstGeom prst="rect">
@@ -33963,14 +33834,14 @@
       </p:sp>
       <p:sp>
         <p:nvSpPr>
-          <p:cNvPr id="7" name="TextBox 6"/>
-          <p:cNvSpPr txBox="1"/>
-          <p:nvPr/>
-        </p:nvSpPr>
-        <p:spPr>
-          <a:xfrm>
-            <a:off x="758952" y="2221992"/>
-            <a:ext cx="6391656" cy="1239011"/>
+          <p:cNvPr id="8" name="TextBox 7"/>
+          <p:cNvSpPr txBox="1"/>
+          <p:nvPr/>
+        </p:nvSpPr>
+        <p:spPr>
+          <a:xfrm>
+            <a:off x="758952" y="2614676"/>
+            <a:ext cx="6391656" cy="1257553"/>
           </a:xfrm>
           <a:prstGeom prst="rect">
             <a:avLst/>
@@ -34076,13 +33947,13 @@
       </p:sp>
       <p:sp>
         <p:nvSpPr>
-          <p:cNvPr id="8" name="TextBox 7"/>
-          <p:cNvSpPr txBox="1"/>
-          <p:nvPr/>
-        </p:nvSpPr>
-        <p:spPr>
-          <a:xfrm>
-            <a:off x="758952" y="3982212"/>
+          <p:cNvPr id="9" name="TextBox 8"/>
+          <p:cNvSpPr txBox="1"/>
+          <p:nvPr/>
+        </p:nvSpPr>
+        <p:spPr>
+          <a:xfrm>
+            <a:off x="758952" y="4393438"/>
             <a:ext cx="6391656" cy="201168"/>
           </a:xfrm>
           <a:prstGeom prst="rect">
@@ -34117,14 +33988,14 @@
       </p:sp>
       <p:sp>
         <p:nvSpPr>
-          <p:cNvPr id="9" name="TextBox 8"/>
-          <p:cNvSpPr txBox="1"/>
-          <p:nvPr/>
-        </p:nvSpPr>
-        <p:spPr>
-          <a:xfrm>
-            <a:off x="758952" y="4302252"/>
-            <a:ext cx="6391656" cy="1239011"/>
+          <p:cNvPr id="10" name="TextBox 9"/>
+          <p:cNvSpPr txBox="1"/>
+          <p:nvPr/>
+        </p:nvSpPr>
+        <p:spPr>
+          <a:xfrm>
+            <a:off x="758952" y="4713477"/>
+            <a:ext cx="6391656" cy="1257553"/>
           </a:xfrm>
           <a:prstGeom prst="rect">
             <a:avLst/>
@@ -34194,13 +34065,13 @@
       </p:sp>
       <p:sp>
         <p:nvSpPr>
-          <p:cNvPr id="10" name="TextBox 9"/>
-          <p:cNvSpPr txBox="1"/>
-          <p:nvPr/>
-        </p:nvSpPr>
-        <p:spPr>
-          <a:xfrm>
-            <a:off x="7790688" y="1737360"/>
+          <p:cNvPr id="11" name="TextBox 10"/>
+          <p:cNvSpPr txBox="1"/>
+          <p:nvPr/>
+        </p:nvSpPr>
+        <p:spPr>
+          <a:xfrm>
+            <a:off x="7790688" y="2130044"/>
             <a:ext cx="3898087" cy="292608"/>
           </a:xfrm>
           <a:prstGeom prst="rect">
@@ -34235,13 +34106,13 @@
       </p:sp>
       <p:sp>
         <p:nvSpPr>
-          <p:cNvPr id="11" name="Rectangle 10"/>
+          <p:cNvPr id="12" name="Rectangle 11"/>
           <p:cNvSpPr/>
           <p:nvPr/>
         </p:nvSpPr>
         <p:spPr>
           <a:xfrm>
-            <a:off x="7790688" y="2148840"/>
+            <a:off x="7790688" y="2541524"/>
             <a:ext cx="3898087" cy="9144"/>
           </a:xfrm>
           <a:prstGeom prst="rect">
@@ -34279,13 +34150,13 @@
       </p:sp>
       <p:sp>
         <p:nvSpPr>
-          <p:cNvPr id="12" name="TextBox 11"/>
-          <p:cNvSpPr txBox="1"/>
-          <p:nvPr/>
-        </p:nvSpPr>
-        <p:spPr>
-          <a:xfrm>
-            <a:off x="7790688" y="2304288"/>
+          <p:cNvPr id="13" name="TextBox 12"/>
+          <p:cNvSpPr txBox="1"/>
+          <p:nvPr/>
+        </p:nvSpPr>
+        <p:spPr>
+          <a:xfrm>
+            <a:off x="7790688" y="2696972"/>
             <a:ext cx="310896" cy="219456"/>
           </a:xfrm>
           <a:prstGeom prst="rect">
@@ -34320,14 +34191,14 @@
       </p:sp>
       <p:sp>
         <p:nvSpPr>
-          <p:cNvPr id="13" name="TextBox 12"/>
-          <p:cNvSpPr txBox="1"/>
-          <p:nvPr/>
-        </p:nvSpPr>
-        <p:spPr>
-          <a:xfrm>
-            <a:off x="8193023" y="2286000"/>
-            <a:ext cx="3495751" cy="770381"/>
+          <p:cNvPr id="14" name="TextBox 13"/>
+          <p:cNvSpPr txBox="1"/>
+          <p:nvPr/>
+        </p:nvSpPr>
+        <p:spPr>
+          <a:xfrm>
+            <a:off x="8193023" y="2678684"/>
+            <a:ext cx="3495751" cy="779652"/>
           </a:xfrm>
           <a:prstGeom prst="rect">
             <a:avLst/>
@@ -34361,13 +34232,13 @@
       </p:sp>
       <p:sp>
         <p:nvSpPr>
-          <p:cNvPr id="14" name="Rectangle 13"/>
+          <p:cNvPr id="15" name="Rectangle 14"/>
           <p:cNvSpPr/>
           <p:nvPr/>
         </p:nvSpPr>
         <p:spPr>
           <a:xfrm>
-            <a:off x="8193023" y="3092958"/>
+            <a:off x="8193023" y="3494912"/>
             <a:ext cx="3495751" cy="7315"/>
           </a:xfrm>
           <a:prstGeom prst="rect">
@@ -34405,13 +34276,13 @@
       </p:sp>
       <p:sp>
         <p:nvSpPr>
-          <p:cNvPr id="15" name="TextBox 14"/>
-          <p:cNvSpPr txBox="1"/>
-          <p:nvPr/>
-        </p:nvSpPr>
-        <p:spPr>
-          <a:xfrm>
-            <a:off x="7790688" y="3147822"/>
+          <p:cNvPr id="16" name="TextBox 15"/>
+          <p:cNvSpPr txBox="1"/>
+          <p:nvPr/>
+        </p:nvSpPr>
+        <p:spPr>
+          <a:xfrm>
+            <a:off x="7790688" y="3549777"/>
             <a:ext cx="310896" cy="219456"/>
           </a:xfrm>
           <a:prstGeom prst="rect">
@@ -34446,14 +34317,14 @@
       </p:sp>
       <p:sp>
         <p:nvSpPr>
-          <p:cNvPr id="16" name="TextBox 15"/>
-          <p:cNvSpPr txBox="1"/>
-          <p:nvPr/>
-        </p:nvSpPr>
-        <p:spPr>
-          <a:xfrm>
-            <a:off x="8193023" y="3129534"/>
-            <a:ext cx="3495751" cy="770381"/>
+          <p:cNvPr id="17" name="TextBox 16"/>
+          <p:cNvSpPr txBox="1"/>
+          <p:nvPr/>
+        </p:nvSpPr>
+        <p:spPr>
+          <a:xfrm>
+            <a:off x="8193023" y="3531489"/>
+            <a:ext cx="3495751" cy="779652"/>
           </a:xfrm>
           <a:prstGeom prst="rect">
             <a:avLst/>
@@ -34505,13 +34376,13 @@
       </p:sp>
       <p:sp>
         <p:nvSpPr>
-          <p:cNvPr id="17" name="Rectangle 16"/>
+          <p:cNvPr id="18" name="Rectangle 17"/>
           <p:cNvSpPr/>
           <p:nvPr/>
         </p:nvSpPr>
         <p:spPr>
           <a:xfrm>
-            <a:off x="8193023" y="3936491"/>
+            <a:off x="8193023" y="4347717"/>
             <a:ext cx="3495751" cy="7315"/>
           </a:xfrm>
           <a:prstGeom prst="rect">
@@ -34549,13 +34420,13 @@
       </p:sp>
       <p:sp>
         <p:nvSpPr>
-          <p:cNvPr id="18" name="TextBox 17"/>
-          <p:cNvSpPr txBox="1"/>
-          <p:nvPr/>
-        </p:nvSpPr>
-        <p:spPr>
-          <a:xfrm>
-            <a:off x="7790688" y="3991355"/>
+          <p:cNvPr id="19" name="TextBox 18"/>
+          <p:cNvSpPr txBox="1"/>
+          <p:nvPr/>
+        </p:nvSpPr>
+        <p:spPr>
+          <a:xfrm>
+            <a:off x="7790688" y="4402581"/>
             <a:ext cx="310896" cy="219456"/>
           </a:xfrm>
           <a:prstGeom prst="rect">
@@ -34590,14 +34461,14 @@
       </p:sp>
       <p:sp>
         <p:nvSpPr>
-          <p:cNvPr id="19" name="TextBox 18"/>
-          <p:cNvSpPr txBox="1"/>
-          <p:nvPr/>
-        </p:nvSpPr>
-        <p:spPr>
-          <a:xfrm>
-            <a:off x="8193023" y="3973068"/>
-            <a:ext cx="3495751" cy="770381"/>
+          <p:cNvPr id="20" name="TextBox 19"/>
+          <p:cNvSpPr txBox="1"/>
+          <p:nvPr/>
+        </p:nvSpPr>
+        <p:spPr>
+          <a:xfrm>
+            <a:off x="8193023" y="4384293"/>
+            <a:ext cx="3495751" cy="779652"/>
           </a:xfrm>
           <a:prstGeom prst="rect">
             <a:avLst/>
@@ -34631,13 +34502,13 @@
       </p:sp>
       <p:sp>
         <p:nvSpPr>
-          <p:cNvPr id="20" name="Rectangle 19"/>
+          <p:cNvPr id="21" name="Rectangle 20"/>
           <p:cNvSpPr/>
           <p:nvPr/>
         </p:nvSpPr>
         <p:spPr>
           <a:xfrm>
-            <a:off x="8193023" y="4780026"/>
+            <a:off x="8193023" y="5200522"/>
             <a:ext cx="3495751" cy="7315"/>
           </a:xfrm>
           <a:prstGeom prst="rect">
@@ -34675,13 +34546,13 @@
       </p:sp>
       <p:sp>
         <p:nvSpPr>
-          <p:cNvPr id="21" name="TextBox 20"/>
-          <p:cNvSpPr txBox="1"/>
-          <p:nvPr/>
-        </p:nvSpPr>
-        <p:spPr>
-          <a:xfrm>
-            <a:off x="7790688" y="4834890"/>
+          <p:cNvPr id="22" name="TextBox 21"/>
+          <p:cNvSpPr txBox="1"/>
+          <p:nvPr/>
+        </p:nvSpPr>
+        <p:spPr>
+          <a:xfrm>
+            <a:off x="7790688" y="5255386"/>
             <a:ext cx="310896" cy="219456"/>
           </a:xfrm>
           <a:prstGeom prst="rect">
@@ -34716,14 +34587,14 @@
       </p:sp>
       <p:sp>
         <p:nvSpPr>
-          <p:cNvPr id="22" name="TextBox 21"/>
-          <p:cNvSpPr txBox="1"/>
-          <p:nvPr/>
-        </p:nvSpPr>
-        <p:spPr>
-          <a:xfrm>
-            <a:off x="8193023" y="4816602"/>
-            <a:ext cx="3495751" cy="770381"/>
+          <p:cNvPr id="23" name="TextBox 22"/>
+          <p:cNvSpPr txBox="1"/>
+          <p:nvPr/>
+        </p:nvSpPr>
+        <p:spPr>
+          <a:xfrm>
+            <a:off x="8193023" y="5237098"/>
+            <a:ext cx="3495751" cy="779652"/>
           </a:xfrm>
           <a:prstGeom prst="rect">
             <a:avLst/>
@@ -34757,20 +34628,20 @@
       </p:sp>
       <p:sp>
         <p:nvSpPr>
-          <p:cNvPr id="23" name="Rectangle 22"/>
+          <p:cNvPr id="24" name="Rectangle 23"/>
           <p:cNvSpPr/>
           <p:nvPr/>
         </p:nvSpPr>
         <p:spPr>
           <a:xfrm>
-            <a:off x="502920" y="5806440"/>
-            <a:ext cx="11185855" cy="384048"/>
+            <a:off x="658368" y="6327648"/>
+            <a:ext cx="10881360" cy="9144"/>
           </a:xfrm>
           <a:prstGeom prst="rect">
             <a:avLst/>
           </a:prstGeom>
           <a:solidFill>
-            <a:srgbClr val="DFEBE8"/>
+            <a:srgbClr val="D1CFC8"/>
           </a:solidFill>
           <a:ln>
             <a:noFill/>
@@ -34801,92 +34672,7 @@
       </p:sp>
       <p:sp>
         <p:nvSpPr>
-          <p:cNvPr id="24" name="TextBox 23"/>
-          <p:cNvSpPr txBox="1"/>
-          <p:nvPr/>
-        </p:nvSpPr>
-        <p:spPr>
-          <a:xfrm>
-            <a:off x="667512" y="5888736"/>
-            <a:ext cx="10856671" cy="219456"/>
-          </a:xfrm>
-          <a:prstGeom prst="rect">
-            <a:avLst/>
-          </a:prstGeom>
-          <a:noFill/>
-        </p:spPr>
-        <p:txBody>
-          <a:bodyPr wrap="square" anchor="ctr" lIns="0" rIns="0" tIns="0" bIns="0">
-            <a:spAutoFit/>
-          </a:bodyPr>
-          <a:lstStyle/>
-          <a:p>
-            <a:pPr algn="l">
-              <a:lnSpc>
-                <a:spcPct val="130000"/>
-              </a:lnSpc>
-            </a:pPr>
-            <a:r>
-              <a:rPr sz="1150" b="1" lang="ja-JP">
-                <a:solidFill>
-                  <a:srgbClr val="182C43"/>
-                </a:solidFill>
-                <a:latin typeface="Yu Gothic"/>
-                <a:ea typeface="Yu Gothic"/>
-                <a:cs typeface="Yu Gothic"/>
-              </a:rPr>
-              <a:t>コマンドの実行ではなく、期待状態の確認までを作業単位にします。</a:t>
-            </a:r>
-          </a:p>
-        </p:txBody>
-      </p:sp>
-      <p:sp>
-        <p:nvSpPr>
-          <p:cNvPr id="25" name="Rectangle 24"/>
-          <p:cNvSpPr/>
-          <p:nvPr/>
-        </p:nvSpPr>
-        <p:spPr>
-          <a:xfrm>
-            <a:off x="658368" y="6327648"/>
-            <a:ext cx="10881360" cy="9144"/>
-          </a:xfrm>
-          <a:prstGeom prst="rect">
-            <a:avLst/>
-          </a:prstGeom>
-          <a:solidFill>
-            <a:srgbClr val="D1CFC8"/>
-          </a:solidFill>
-          <a:ln>
-            <a:noFill/>
-          </a:ln>
-          <a:effectLst/>
-        </p:spPr>
-        <p:style>
-          <a:lnRef idx="1">
-            <a:schemeClr val="accent1"/>
-          </a:lnRef>
-          <a:fillRef idx="3">
-            <a:schemeClr val="accent1"/>
-          </a:fillRef>
-          <a:effectRef idx="2">
-            <a:schemeClr val="accent1"/>
-          </a:effectRef>
-          <a:fontRef idx="minor">
-            <a:schemeClr val="lt1"/>
-          </a:fontRef>
-        </p:style>
-        <p:txBody>
-          <a:bodyPr rtlCol="0" anchor="ctr"/>
-          <a:lstStyle/>
-          <a:p>
-            <a:pPr algn="ctr"/>
-          </a:p>
-        </p:txBody>
-      </p:sp>
-      <p:sp>
-        <p:nvSpPr>
-          <p:cNvPr id="26" name="TextBox 25"/>
+          <p:cNvPr id="25" name="TextBox 24"/>
           <p:cNvSpPr txBox="1"/>
           <p:nvPr/>
         </p:nvSpPr>
@@ -34927,7 +34713,7 @@
       </p:sp>
       <p:sp>
         <p:nvSpPr>
-          <p:cNvPr id="27" name="TextBox 26"/>
+          <p:cNvPr id="26" name="TextBox 25"/>
           <p:cNvSpPr txBox="1"/>
           <p:nvPr/>
         </p:nvSpPr>
@@ -36239,13 +36025,54 @@
       </p:sp>
       <p:sp>
         <p:nvSpPr>
-          <p:cNvPr id="5" name="Rectangle 4"/>
+          <p:cNvPr id="5" name="TextBox 4"/>
+          <p:cNvSpPr txBox="1"/>
+          <p:nvPr/>
+        </p:nvSpPr>
+        <p:spPr>
+          <a:xfrm>
+            <a:off x="658368" y="1444752"/>
+            <a:ext cx="10881360" cy="237236"/>
+          </a:xfrm>
+          <a:prstGeom prst="rect">
+            <a:avLst/>
+          </a:prstGeom>
+          <a:noFill/>
+        </p:spPr>
+        <p:txBody>
+          <a:bodyPr wrap="square" anchor="t" lIns="0" rIns="0" tIns="0" bIns="0">
+            <a:spAutoFit/>
+          </a:bodyPr>
+          <a:lstStyle/>
+          <a:p>
+            <a:pPr algn="l">
+              <a:lnSpc>
+                <a:spcPct val="118000"/>
+              </a:lnSpc>
+            </a:pPr>
+            <a:r>
+              <a:rPr sz="1400" b="0" lang="ja-JP">
+                <a:solidFill>
+                  <a:srgbClr val="666E70"/>
+                </a:solidFill>
+                <a:latin typeface="Yu Gothic"/>
+                <a:ea typeface="Yu Gothic"/>
+                <a:cs typeface="Yu Gothic"/>
+              </a:rPr>
+              <a:t>必要なデータ、関係部門のレビュー体制、既存基盤の安定稼働を着手条件とする。</a:t>
+            </a:r>
+          </a:p>
+        </p:txBody>
+      </p:sp>
+      <p:sp>
+        <p:nvSpPr>
+          <p:cNvPr id="6" name="Rectangle 5"/>
           <p:cNvSpPr/>
           <p:nvPr/>
         </p:nvSpPr>
         <p:spPr>
           <a:xfrm>
-            <a:off x="502920" y="1627632"/>
+            <a:off x="502920" y="2020316"/>
             <a:ext cx="5437479" cy="2953511"/>
           </a:xfrm>
           <a:prstGeom prst="rect">
@@ -36271,13 +36098,13 @@
       </p:sp>
       <p:sp>
         <p:nvSpPr>
-          <p:cNvPr id="6" name="Rectangle 5"/>
+          <p:cNvPr id="7" name="Rectangle 6"/>
           <p:cNvSpPr/>
           <p:nvPr/>
         </p:nvSpPr>
         <p:spPr>
           <a:xfrm>
-            <a:off x="502920" y="1627632"/>
+            <a:off x="502920" y="2020316"/>
             <a:ext cx="5437479" cy="566928"/>
           </a:xfrm>
           <a:prstGeom prst="rect">
@@ -36301,13 +36128,13 @@
       </p:sp>
       <p:sp>
         <p:nvSpPr>
-          <p:cNvPr id="7" name="Oval 6"/>
+          <p:cNvPr id="8" name="Oval 7"/>
           <p:cNvSpPr/>
           <p:nvPr/>
         </p:nvSpPr>
         <p:spPr>
           <a:xfrm>
-            <a:off x="685800" y="1719072"/>
+            <a:off x="685800" y="2111756"/>
             <a:ext cx="384048" cy="384048"/>
           </a:xfrm>
           <a:prstGeom prst="ellipse">
@@ -36331,13 +36158,13 @@
       </p:sp>
       <p:sp>
         <p:nvSpPr>
-          <p:cNvPr id="8" name="TextBox 7"/>
-          <p:cNvSpPr txBox="1"/>
-          <p:nvPr/>
-        </p:nvSpPr>
-        <p:spPr>
-          <a:xfrm>
-            <a:off x="685800" y="1709928"/>
+          <p:cNvPr id="9" name="TextBox 8"/>
+          <p:cNvSpPr txBox="1"/>
+          <p:nvPr/>
+        </p:nvSpPr>
+        <p:spPr>
+          <a:xfrm>
+            <a:off x="685800" y="2102612"/>
             <a:ext cx="384048" cy="384048"/>
           </a:xfrm>
           <a:prstGeom prst="rect">
@@ -36372,13 +36199,13 @@
       </p:sp>
       <p:sp>
         <p:nvSpPr>
-          <p:cNvPr id="9" name="TextBox 8"/>
-          <p:cNvSpPr txBox="1"/>
-          <p:nvPr/>
-        </p:nvSpPr>
-        <p:spPr>
-          <a:xfrm>
-            <a:off x="1197864" y="1773936"/>
+          <p:cNvPr id="10" name="TextBox 9"/>
+          <p:cNvSpPr txBox="1"/>
+          <p:nvPr/>
+        </p:nvSpPr>
+        <p:spPr>
+          <a:xfrm>
+            <a:off x="1197864" y="2166620"/>
             <a:ext cx="4541367" cy="256032"/>
           </a:xfrm>
           <a:prstGeom prst="rect">
@@ -36413,13 +36240,13 @@
       </p:sp>
       <p:cxnSp>
         <p:nvCxnSpPr>
-          <p:cNvPr id="10" name="Connector 9"/>
+          <p:cNvPr id="11" name="Connector 10"/>
           <p:cNvCxnSpPr/>
           <p:nvPr/>
         </p:nvCxnSpPr>
         <p:spPr>
           <a:xfrm>
-            <a:off x="502920" y="2194560"/>
+            <a:off x="502920" y="2587244"/>
             <a:ext cx="5437479" cy="0"/>
           </a:xfrm>
           <a:prstGeom prst="line">
@@ -36449,13 +36276,13 @@
       </p:cxnSp>
       <p:sp>
         <p:nvSpPr>
-          <p:cNvPr id="11" name="Rectangle 10"/>
+          <p:cNvPr id="12" name="Rectangle 11"/>
           <p:cNvSpPr/>
           <p:nvPr/>
         </p:nvSpPr>
         <p:spPr>
           <a:xfrm>
-            <a:off x="731520" y="2500884"/>
+            <a:off x="731520" y="2893568"/>
             <a:ext cx="64008" cy="64008"/>
           </a:xfrm>
           <a:prstGeom prst="rect">
@@ -36479,13 +36306,13 @@
       </p:sp>
       <p:sp>
         <p:nvSpPr>
-          <p:cNvPr id="12" name="TextBox 11"/>
-          <p:cNvSpPr txBox="1"/>
-          <p:nvPr/>
-        </p:nvSpPr>
-        <p:spPr>
-          <a:xfrm>
-            <a:off x="941832" y="2267712"/>
+          <p:cNvPr id="13" name="TextBox 12"/>
+          <p:cNvSpPr txBox="1"/>
+          <p:nvPr/>
+        </p:nvSpPr>
+        <p:spPr>
+          <a:xfrm>
+            <a:off x="941832" y="2660396"/>
             <a:ext cx="4815687" cy="530352"/>
           </a:xfrm>
           <a:prstGeom prst="rect">
@@ -36520,13 +36347,13 @@
       </p:sp>
       <p:cxnSp>
         <p:nvCxnSpPr>
-          <p:cNvPr id="13" name="Connector 12"/>
+          <p:cNvPr id="14" name="Connector 13"/>
           <p:cNvCxnSpPr/>
           <p:nvPr/>
         </p:nvCxnSpPr>
         <p:spPr>
           <a:xfrm>
-            <a:off x="941832" y="2798064"/>
+            <a:off x="941832" y="3190748"/>
             <a:ext cx="4779111" cy="0"/>
           </a:xfrm>
           <a:prstGeom prst="line">
@@ -36556,13 +36383,13 @@
       </p:cxnSp>
       <p:sp>
         <p:nvSpPr>
-          <p:cNvPr id="14" name="Rectangle 13"/>
+          <p:cNvPr id="15" name="Rectangle 14"/>
           <p:cNvSpPr/>
           <p:nvPr/>
         </p:nvSpPr>
         <p:spPr>
           <a:xfrm>
-            <a:off x="731520" y="3095244"/>
+            <a:off x="731520" y="3487928"/>
             <a:ext cx="64008" cy="64008"/>
           </a:xfrm>
           <a:prstGeom prst="rect">
@@ -36586,13 +36413,13 @@
       </p:sp>
       <p:sp>
         <p:nvSpPr>
-          <p:cNvPr id="15" name="TextBox 14"/>
-          <p:cNvSpPr txBox="1"/>
-          <p:nvPr/>
-        </p:nvSpPr>
-        <p:spPr>
-          <a:xfrm>
-            <a:off x="941832" y="2862072"/>
+          <p:cNvPr id="16" name="TextBox 15"/>
+          <p:cNvSpPr txBox="1"/>
+          <p:nvPr/>
+        </p:nvSpPr>
+        <p:spPr>
+          <a:xfrm>
+            <a:off x="941832" y="3254756"/>
             <a:ext cx="4815687" cy="530352"/>
           </a:xfrm>
           <a:prstGeom prst="rect">
@@ -36627,13 +36454,13 @@
       </p:sp>
       <p:cxnSp>
         <p:nvCxnSpPr>
-          <p:cNvPr id="16" name="Connector 15"/>
+          <p:cNvPr id="17" name="Connector 16"/>
           <p:cNvCxnSpPr/>
           <p:nvPr/>
         </p:nvCxnSpPr>
         <p:spPr>
           <a:xfrm>
-            <a:off x="941832" y="3392424"/>
+            <a:off x="941832" y="3785107"/>
             <a:ext cx="4779111" cy="0"/>
           </a:xfrm>
           <a:prstGeom prst="line">
@@ -36663,13 +36490,13 @@
       </p:cxnSp>
       <p:sp>
         <p:nvSpPr>
-          <p:cNvPr id="17" name="Rectangle 16"/>
+          <p:cNvPr id="18" name="Rectangle 17"/>
           <p:cNvSpPr/>
           <p:nvPr/>
         </p:nvSpPr>
         <p:spPr>
           <a:xfrm>
-            <a:off x="731520" y="3689603"/>
+            <a:off x="731520" y="4082288"/>
             <a:ext cx="64008" cy="64008"/>
           </a:xfrm>
           <a:prstGeom prst="rect">
@@ -36693,13 +36520,13 @@
       </p:sp>
       <p:sp>
         <p:nvSpPr>
-          <p:cNvPr id="18" name="TextBox 17"/>
-          <p:cNvSpPr txBox="1"/>
-          <p:nvPr/>
-        </p:nvSpPr>
-        <p:spPr>
-          <a:xfrm>
-            <a:off x="941832" y="3456432"/>
+          <p:cNvPr id="19" name="TextBox 18"/>
+          <p:cNvSpPr txBox="1"/>
+          <p:nvPr/>
+        </p:nvSpPr>
+        <p:spPr>
+          <a:xfrm>
+            <a:off x="941832" y="3849116"/>
             <a:ext cx="4815687" cy="530352"/>
           </a:xfrm>
           <a:prstGeom prst="rect">
@@ -36734,13 +36561,13 @@
       </p:sp>
       <p:cxnSp>
         <p:nvCxnSpPr>
-          <p:cNvPr id="19" name="Connector 18"/>
+          <p:cNvPr id="20" name="Connector 19"/>
           <p:cNvCxnSpPr/>
           <p:nvPr/>
         </p:nvCxnSpPr>
         <p:spPr>
           <a:xfrm>
-            <a:off x="941832" y="3986783"/>
+            <a:off x="941832" y="4379468"/>
             <a:ext cx="4779111" cy="0"/>
           </a:xfrm>
           <a:prstGeom prst="line">
@@ -36770,13 +36597,13 @@
       </p:cxnSp>
       <p:sp>
         <p:nvSpPr>
-          <p:cNvPr id="20" name="Rectangle 19"/>
+          <p:cNvPr id="21" name="Rectangle 20"/>
           <p:cNvSpPr/>
           <p:nvPr/>
         </p:nvSpPr>
         <p:spPr>
           <a:xfrm>
-            <a:off x="731520" y="4283964"/>
+            <a:off x="731520" y="4676647"/>
             <a:ext cx="64008" cy="64008"/>
           </a:xfrm>
           <a:prstGeom prst="rect">
@@ -36800,13 +36627,13 @@
       </p:sp>
       <p:sp>
         <p:nvSpPr>
-          <p:cNvPr id="21" name="TextBox 20"/>
-          <p:cNvSpPr txBox="1"/>
-          <p:nvPr/>
-        </p:nvSpPr>
-        <p:spPr>
-          <a:xfrm>
-            <a:off x="941832" y="4050791"/>
+          <p:cNvPr id="22" name="TextBox 21"/>
+          <p:cNvSpPr txBox="1"/>
+          <p:nvPr/>
+        </p:nvSpPr>
+        <p:spPr>
+          <a:xfrm>
+            <a:off x="941832" y="4443475"/>
             <a:ext cx="4815687" cy="530352"/>
           </a:xfrm>
           <a:prstGeom prst="rect">
@@ -36841,13 +36668,13 @@
       </p:sp>
       <p:sp>
         <p:nvSpPr>
-          <p:cNvPr id="22" name="Rectangle 21"/>
+          <p:cNvPr id="23" name="Rectangle 22"/>
           <p:cNvSpPr/>
           <p:nvPr/>
         </p:nvSpPr>
         <p:spPr>
           <a:xfrm>
-            <a:off x="6251295" y="1627632"/>
+            <a:off x="6251295" y="2020316"/>
             <a:ext cx="5437479" cy="2953511"/>
           </a:xfrm>
           <a:prstGeom prst="rect">
@@ -36873,13 +36700,13 @@
       </p:sp>
       <p:sp>
         <p:nvSpPr>
-          <p:cNvPr id="23" name="Rectangle 22"/>
+          <p:cNvPr id="24" name="Rectangle 23"/>
           <p:cNvSpPr/>
           <p:nvPr/>
         </p:nvSpPr>
         <p:spPr>
           <a:xfrm>
-            <a:off x="6251295" y="1627632"/>
+            <a:off x="6251295" y="2020316"/>
             <a:ext cx="5437479" cy="566928"/>
           </a:xfrm>
           <a:prstGeom prst="rect">
@@ -36903,13 +36730,13 @@
       </p:sp>
       <p:sp>
         <p:nvSpPr>
-          <p:cNvPr id="24" name="Oval 23"/>
+          <p:cNvPr id="25" name="Oval 24"/>
           <p:cNvSpPr/>
           <p:nvPr/>
         </p:nvSpPr>
         <p:spPr>
           <a:xfrm>
-            <a:off x="6434175" y="1719072"/>
+            <a:off x="6434175" y="2111756"/>
             <a:ext cx="384048" cy="384048"/>
           </a:xfrm>
           <a:prstGeom prst="ellipse">
@@ -36933,13 +36760,13 @@
       </p:sp>
       <p:sp>
         <p:nvSpPr>
-          <p:cNvPr id="25" name="TextBox 24"/>
-          <p:cNvSpPr txBox="1"/>
-          <p:nvPr/>
-        </p:nvSpPr>
-        <p:spPr>
-          <a:xfrm>
-            <a:off x="6434175" y="1709928"/>
+          <p:cNvPr id="26" name="TextBox 25"/>
+          <p:cNvSpPr txBox="1"/>
+          <p:nvPr/>
+        </p:nvSpPr>
+        <p:spPr>
+          <a:xfrm>
+            <a:off x="6434175" y="2102612"/>
             <a:ext cx="384048" cy="384048"/>
           </a:xfrm>
           <a:prstGeom prst="rect">
@@ -36974,13 +36801,13 @@
       </p:sp>
       <p:sp>
         <p:nvSpPr>
-          <p:cNvPr id="26" name="TextBox 25"/>
-          <p:cNvSpPr txBox="1"/>
-          <p:nvPr/>
-        </p:nvSpPr>
-        <p:spPr>
-          <a:xfrm>
-            <a:off x="6946239" y="1773936"/>
+          <p:cNvPr id="27" name="TextBox 26"/>
+          <p:cNvSpPr txBox="1"/>
+          <p:nvPr/>
+        </p:nvSpPr>
+        <p:spPr>
+          <a:xfrm>
+            <a:off x="6946239" y="2166620"/>
             <a:ext cx="4541367" cy="256032"/>
           </a:xfrm>
           <a:prstGeom prst="rect">
@@ -37015,13 +36842,13 @@
       </p:sp>
       <p:cxnSp>
         <p:nvCxnSpPr>
-          <p:cNvPr id="27" name="Connector 26"/>
+          <p:cNvPr id="28" name="Connector 27"/>
           <p:cNvCxnSpPr/>
           <p:nvPr/>
         </p:nvCxnSpPr>
         <p:spPr>
           <a:xfrm>
-            <a:off x="6251295" y="2194560"/>
+            <a:off x="6251295" y="2587244"/>
             <a:ext cx="5437480" cy="0"/>
           </a:xfrm>
           <a:prstGeom prst="line">
@@ -37051,13 +36878,13 @@
       </p:cxnSp>
       <p:sp>
         <p:nvSpPr>
-          <p:cNvPr id="28" name="Rectangle 27"/>
+          <p:cNvPr id="29" name="Rectangle 28"/>
           <p:cNvSpPr/>
           <p:nvPr/>
         </p:nvSpPr>
         <p:spPr>
           <a:xfrm>
-            <a:off x="6479895" y="2500884"/>
+            <a:off x="6479895" y="2893568"/>
             <a:ext cx="64008" cy="64008"/>
           </a:xfrm>
           <a:prstGeom prst="rect">
@@ -37081,13 +36908,13 @@
       </p:sp>
       <p:sp>
         <p:nvSpPr>
-          <p:cNvPr id="29" name="TextBox 28"/>
-          <p:cNvSpPr txBox="1"/>
-          <p:nvPr/>
-        </p:nvSpPr>
-        <p:spPr>
-          <a:xfrm>
-            <a:off x="6690207" y="2267712"/>
+          <p:cNvPr id="30" name="TextBox 29"/>
+          <p:cNvSpPr txBox="1"/>
+          <p:nvPr/>
+        </p:nvSpPr>
+        <p:spPr>
+          <a:xfrm>
+            <a:off x="6690207" y="2660396"/>
             <a:ext cx="4815687" cy="530352"/>
           </a:xfrm>
           <a:prstGeom prst="rect">
@@ -37122,13 +36949,13 @@
       </p:sp>
       <p:cxnSp>
         <p:nvCxnSpPr>
-          <p:cNvPr id="30" name="Connector 29"/>
+          <p:cNvPr id="31" name="Connector 30"/>
           <p:cNvCxnSpPr/>
           <p:nvPr/>
         </p:nvCxnSpPr>
         <p:spPr>
           <a:xfrm>
-            <a:off x="6690207" y="2798064"/>
+            <a:off x="6690207" y="3190748"/>
             <a:ext cx="4779112" cy="0"/>
           </a:xfrm>
           <a:prstGeom prst="line">
@@ -37158,13 +36985,13 @@
       </p:cxnSp>
       <p:sp>
         <p:nvSpPr>
-          <p:cNvPr id="31" name="Rectangle 30"/>
+          <p:cNvPr id="32" name="Rectangle 31"/>
           <p:cNvSpPr/>
           <p:nvPr/>
         </p:nvSpPr>
         <p:spPr>
           <a:xfrm>
-            <a:off x="6479895" y="3095244"/>
+            <a:off x="6479895" y="3487928"/>
             <a:ext cx="64008" cy="64008"/>
           </a:xfrm>
           <a:prstGeom prst="rect">
@@ -37188,13 +37015,13 @@
       </p:sp>
       <p:sp>
         <p:nvSpPr>
-          <p:cNvPr id="32" name="TextBox 31"/>
-          <p:cNvSpPr txBox="1"/>
-          <p:nvPr/>
-        </p:nvSpPr>
-        <p:spPr>
-          <a:xfrm>
-            <a:off x="6690207" y="2862072"/>
+          <p:cNvPr id="33" name="TextBox 32"/>
+          <p:cNvSpPr txBox="1"/>
+          <p:nvPr/>
+        </p:nvSpPr>
+        <p:spPr>
+          <a:xfrm>
+            <a:off x="6690207" y="3254756"/>
             <a:ext cx="4815687" cy="530352"/>
           </a:xfrm>
           <a:prstGeom prst="rect">
@@ -37229,13 +37056,13 @@
       </p:sp>
       <p:cxnSp>
         <p:nvCxnSpPr>
-          <p:cNvPr id="33" name="Connector 32"/>
+          <p:cNvPr id="34" name="Connector 33"/>
           <p:cNvCxnSpPr/>
           <p:nvPr/>
         </p:nvCxnSpPr>
         <p:spPr>
           <a:xfrm>
-            <a:off x="6690207" y="3392424"/>
+            <a:off x="6690207" y="3785107"/>
             <a:ext cx="4779112" cy="0"/>
           </a:xfrm>
           <a:prstGeom prst="line">
@@ -37265,13 +37092,13 @@
       </p:cxnSp>
       <p:sp>
         <p:nvSpPr>
-          <p:cNvPr id="34" name="Rectangle 33"/>
+          <p:cNvPr id="35" name="Rectangle 34"/>
           <p:cNvSpPr/>
           <p:nvPr/>
         </p:nvSpPr>
         <p:spPr>
           <a:xfrm>
-            <a:off x="6479895" y="3689603"/>
+            <a:off x="6479895" y="4082288"/>
             <a:ext cx="64008" cy="64008"/>
           </a:xfrm>
           <a:prstGeom prst="rect">
@@ -37295,13 +37122,13 @@
       </p:sp>
       <p:sp>
         <p:nvSpPr>
-          <p:cNvPr id="35" name="TextBox 34"/>
-          <p:cNvSpPr txBox="1"/>
-          <p:nvPr/>
-        </p:nvSpPr>
-        <p:spPr>
-          <a:xfrm>
-            <a:off x="6690207" y="3456432"/>
+          <p:cNvPr id="36" name="TextBox 35"/>
+          <p:cNvSpPr txBox="1"/>
+          <p:nvPr/>
+        </p:nvSpPr>
+        <p:spPr>
+          <a:xfrm>
+            <a:off x="6690207" y="3849116"/>
             <a:ext cx="4815687" cy="530352"/>
           </a:xfrm>
           <a:prstGeom prst="rect">
@@ -37336,13 +37163,13 @@
       </p:sp>
       <p:cxnSp>
         <p:nvCxnSpPr>
-          <p:cNvPr id="36" name="Connector 35"/>
+          <p:cNvPr id="37" name="Connector 36"/>
           <p:cNvCxnSpPr/>
           <p:nvPr/>
         </p:nvCxnSpPr>
         <p:spPr>
           <a:xfrm>
-            <a:off x="6690207" y="3986783"/>
+            <a:off x="6690207" y="4379468"/>
             <a:ext cx="4779112" cy="0"/>
           </a:xfrm>
           <a:prstGeom prst="line">
@@ -37372,13 +37199,13 @@
       </p:cxnSp>
       <p:sp>
         <p:nvSpPr>
-          <p:cNvPr id="37" name="Rectangle 36"/>
+          <p:cNvPr id="38" name="Rectangle 37"/>
           <p:cNvSpPr/>
           <p:nvPr/>
         </p:nvSpPr>
         <p:spPr>
           <a:xfrm>
-            <a:off x="6479895" y="4283964"/>
+            <a:off x="6479895" y="4676647"/>
             <a:ext cx="64008" cy="64008"/>
           </a:xfrm>
           <a:prstGeom prst="rect">
@@ -37402,13 +37229,13 @@
       </p:sp>
       <p:sp>
         <p:nvSpPr>
-          <p:cNvPr id="38" name="TextBox 37"/>
-          <p:cNvSpPr txBox="1"/>
-          <p:nvPr/>
-        </p:nvSpPr>
-        <p:spPr>
-          <a:xfrm>
-            <a:off x="6690207" y="4050791"/>
+          <p:cNvPr id="39" name="TextBox 38"/>
+          <p:cNvSpPr txBox="1"/>
+          <p:nvPr/>
+        </p:nvSpPr>
+        <p:spPr>
+          <a:xfrm>
+            <a:off x="6690207" y="4443475"/>
             <a:ext cx="4815687" cy="530352"/>
           </a:xfrm>
           <a:prstGeom prst="rect">
@@ -37443,173 +37270,7 @@
       </p:sp>
       <p:sp>
         <p:nvSpPr>
-          <p:cNvPr id="39" name="Rectangle 38"/>
-          <p:cNvSpPr/>
-          <p:nvPr/>
-        </p:nvSpPr>
-        <p:spPr>
-          <a:xfrm>
-            <a:off x="502920" y="5678424"/>
-            <a:ext cx="11185855" cy="493776"/>
-          </a:xfrm>
-          <a:prstGeom prst="rect">
-            <a:avLst/>
-          </a:prstGeom>
-          <a:solidFill>
-            <a:srgbClr val="DFEBE8"/>
-          </a:solidFill>
-          <a:ln>
-            <a:noFill/>
-          </a:ln>
-          <a:effectLst/>
-        </p:spPr>
-        <p:txBody>
-          <a:bodyPr rtlCol="0" anchor="ctr"/>
-          <a:lstStyle/>
-          <a:p>
-            <a:pPr algn="ctr"/>
-          </a:p>
-        </p:txBody>
-      </p:sp>
-      <p:sp>
-        <p:nvSpPr>
-          <p:cNvPr id="40" name="Oval 39"/>
-          <p:cNvSpPr/>
-          <p:nvPr/>
-        </p:nvSpPr>
-        <p:spPr>
-          <a:xfrm>
-            <a:off x="649224" y="5742432"/>
-            <a:ext cx="365760" cy="365760"/>
-          </a:xfrm>
-          <a:prstGeom prst="ellipse">
-            <a:avLst/>
-          </a:prstGeom>
-          <a:solidFill>
-            <a:srgbClr val="DFEBE8"/>
-          </a:solidFill>
-          <a:ln>
-            <a:noFill/>
-          </a:ln>
-          <a:effectLst/>
-        </p:spPr>
-        <p:txBody>
-          <a:bodyPr rtlCol="0" anchor="ctr"/>
-          <a:lstStyle/>
-          <a:p>
-            <a:pPr algn="ctr"/>
-          </a:p>
-        </p:txBody>
-      </p:sp>
-      <p:pic>
-        <p:nvPicPr>
-          <p:cNvPr id="41" name="Picture 40" descr="info.png"/>
-          <p:cNvPicPr>
-            <a:picLocks noChangeAspect="1"/>
-          </p:cNvPicPr>
-          <p:nvPr/>
-        </p:nvPicPr>
-        <p:blipFill>
-          <a:blip r:embed="rId2"/>
-          <a:stretch>
-            <a:fillRect/>
-          </a:stretch>
-        </p:blipFill>
-        <p:spPr>
-          <a:xfrm>
-            <a:off x="737006" y="5830214"/>
-            <a:ext cx="190195" cy="190195"/>
-          </a:xfrm>
-          <a:prstGeom prst="rect">
-            <a:avLst/>
-          </a:prstGeom>
-        </p:spPr>
-      </p:pic>
-      <p:sp>
-        <p:nvSpPr>
-          <p:cNvPr id="42" name="TextBox 41"/>
-          <p:cNvSpPr txBox="1"/>
-          <p:nvPr/>
-        </p:nvSpPr>
-        <p:spPr>
-          <a:xfrm>
-            <a:off x="1124712" y="5806440"/>
-            <a:ext cx="749808" cy="219456"/>
-          </a:xfrm>
-          <a:prstGeom prst="rect">
-            <a:avLst/>
-          </a:prstGeom>
-          <a:noFill/>
-        </p:spPr>
-        <p:txBody>
-          <a:bodyPr wrap="square" anchor="t" lIns="0" rIns="0" tIns="0" bIns="0">
-            <a:spAutoFit/>
-          </a:bodyPr>
-          <a:lstStyle/>
-          <a:p>
-            <a:pPr algn="l">
-              <a:lnSpc>
-                <a:spcPct val="130000"/>
-              </a:lnSpc>
-            </a:pPr>
-            <a:r>
-              <a:rPr sz="1050" b="1" lang="ja-JP">
-                <a:solidFill>
-                  <a:srgbClr val="0D7870"/>
-                </a:solidFill>
-                <a:latin typeface="Yu Gothic"/>
-                <a:ea typeface="Yu Gothic"/>
-                <a:cs typeface="Yu Gothic"/>
-              </a:rPr>
-              <a:t>前提条件</a:t>
-            </a:r>
-          </a:p>
-        </p:txBody>
-      </p:sp>
-      <p:sp>
-        <p:nvSpPr>
-          <p:cNvPr id="43" name="TextBox 42"/>
-          <p:cNvSpPr txBox="1"/>
-          <p:nvPr/>
-        </p:nvSpPr>
-        <p:spPr>
-          <a:xfrm>
-            <a:off x="1892808" y="5751576"/>
-            <a:ext cx="9576511" cy="347472"/>
-          </a:xfrm>
-          <a:prstGeom prst="rect">
-            <a:avLst/>
-          </a:prstGeom>
-          <a:noFill/>
-        </p:spPr>
-        <p:txBody>
-          <a:bodyPr wrap="square" anchor="ctr" lIns="0" rIns="0" tIns="0" bIns="0">
-            <a:spAutoFit/>
-          </a:bodyPr>
-          <a:lstStyle/>
-          <a:p>
-            <a:pPr algn="l">
-              <a:lnSpc>
-                <a:spcPct val="115000"/>
-              </a:lnSpc>
-            </a:pPr>
-            <a:r>
-              <a:rPr sz="1100" b="0" lang="ja-JP">
-                <a:solidFill>
-                  <a:srgbClr val="202729"/>
-                </a:solidFill>
-                <a:latin typeface="Yu Gothic"/>
-                <a:ea typeface="Yu Gothic"/>
-                <a:cs typeface="Yu Gothic"/>
-              </a:rPr>
-              <a:t>必要なデータを所定形式で受領できる / 関係部門のレビュー担当を確保できる / 既存基盤が計画期間中も安定稼働する</a:t>
-            </a:r>
-          </a:p>
-        </p:txBody>
-      </p:sp>
-      <p:sp>
-        <p:nvSpPr>
-          <p:cNvPr id="44" name="Rectangle 43"/>
+          <p:cNvPr id="40" name="Rectangle 39"/>
           <p:cNvSpPr/>
           <p:nvPr/>
         </p:nvSpPr>
@@ -37653,7 +37314,7 @@
       </p:sp>
       <p:sp>
         <p:nvSpPr>
-          <p:cNvPr id="45" name="TextBox 44"/>
+          <p:cNvPr id="41" name="TextBox 40"/>
           <p:cNvSpPr txBox="1"/>
           <p:nvPr/>
         </p:nvSpPr>
@@ -37694,7 +37355,7 @@
       </p:sp>
       <p:sp>
         <p:nvSpPr>
-          <p:cNvPr id="46" name="TextBox 45"/>
+          <p:cNvPr id="42" name="TextBox 41"/>
           <p:cNvSpPr txBox="1"/>
           <p:nvPr/>
         </p:nvSpPr>
@@ -38511,13 +38172,54 @@
       </p:sp>
       <p:sp>
         <p:nvSpPr>
-          <p:cNvPr id="5" name="Oval 4"/>
+          <p:cNvPr id="5" name="TextBox 4"/>
+          <p:cNvSpPr txBox="1"/>
+          <p:nvPr/>
+        </p:nvSpPr>
+        <p:spPr>
+          <a:xfrm>
+            <a:off x="658368" y="1444752"/>
+            <a:ext cx="10881360" cy="237236"/>
+          </a:xfrm>
+          <a:prstGeom prst="rect">
+            <a:avLst/>
+          </a:prstGeom>
+          <a:noFill/>
+        </p:spPr>
+        <p:txBody>
+          <a:bodyPr wrap="square" anchor="t" lIns="0" rIns="0" tIns="0" bIns="0">
+            <a:spAutoFit/>
+          </a:bodyPr>
+          <a:lstStyle/>
+          <a:p>
+            <a:pPr algn="l">
+              <a:lnSpc>
+                <a:spcPct val="118000"/>
+              </a:lnSpc>
+            </a:pPr>
+            <a:r>
+              <a:rPr sz="1400" b="0" lang="ja-JP">
+                <a:solidFill>
+                  <a:srgbClr val="666E70"/>
+                </a:solidFill>
+                <a:latin typeface="Yu Gothic"/>
+                <a:ea typeface="Yu Gothic"/>
+                <a:cs typeface="Yu Gothic"/>
+              </a:rPr>
+              <a:t>限定導入で効果と運用条件を確認した後、対象業務を段階的に拡大する。</a:t>
+            </a:r>
+          </a:p>
+        </p:txBody>
+      </p:sp>
+      <p:sp>
+        <p:nvSpPr>
+          <p:cNvPr id="6" name="Oval 5"/>
           <p:cNvSpPr/>
           <p:nvPr/>
         </p:nvSpPr>
         <p:spPr>
           <a:xfrm>
-            <a:off x="722376" y="2428097"/>
+            <a:off x="722376" y="2917332"/>
             <a:ext cx="457200" cy="457200"/>
           </a:xfrm>
           <a:prstGeom prst="ellipse">
@@ -38541,7 +38243,7 @@
       </p:sp>
       <p:pic>
         <p:nvPicPr>
-          <p:cNvPr id="6" name="Picture 5" descr="info.png"/>
+          <p:cNvPr id="7" name="Picture 6" descr="info.png"/>
           <p:cNvPicPr>
             <a:picLocks noChangeAspect="1"/>
           </p:cNvPicPr>
@@ -38555,7 +38257,7 @@
         </p:blipFill>
         <p:spPr>
           <a:xfrm>
-            <a:off x="832104" y="2537825"/>
+            <a:off x="832104" y="3027060"/>
             <a:ext cx="237744" cy="237744"/>
           </a:xfrm>
           <a:prstGeom prst="rect">
@@ -38565,13 +38267,13 @@
       </p:pic>
       <p:sp>
         <p:nvSpPr>
-          <p:cNvPr id="7" name="TextBox 6"/>
-          <p:cNvSpPr txBox="1"/>
-          <p:nvPr/>
-        </p:nvSpPr>
-        <p:spPr>
-          <a:xfrm>
-            <a:off x="1344168" y="2464673"/>
+          <p:cNvPr id="8" name="TextBox 7"/>
+          <p:cNvSpPr txBox="1"/>
+          <p:nvPr/>
+        </p:nvSpPr>
+        <p:spPr>
+          <a:xfrm>
+            <a:off x="1344168" y="2953908"/>
             <a:ext cx="2667914" cy="292608"/>
           </a:xfrm>
           <a:prstGeom prst="rect">
@@ -38606,13 +38308,13 @@
       </p:sp>
       <p:cxnSp>
         <p:nvCxnSpPr>
-          <p:cNvPr id="8" name="Connector 7"/>
+          <p:cNvPr id="9" name="Connector 8"/>
           <p:cNvCxnSpPr/>
           <p:nvPr/>
         </p:nvCxnSpPr>
         <p:spPr>
           <a:xfrm>
-            <a:off x="722376" y="3013313"/>
+            <a:off x="722376" y="3502548"/>
             <a:ext cx="3289706" cy="0"/>
           </a:xfrm>
           <a:prstGeom prst="line">
@@ -38642,13 +38344,13 @@
       </p:cxnSp>
       <p:sp>
         <p:nvSpPr>
-          <p:cNvPr id="9" name="TextBox 8"/>
-          <p:cNvSpPr txBox="1"/>
-          <p:nvPr/>
-        </p:nvSpPr>
-        <p:spPr>
-          <a:xfrm>
-            <a:off x="740664" y="3159617"/>
+          <p:cNvPr id="10" name="TextBox 9"/>
+          <p:cNvSpPr txBox="1"/>
+          <p:nvPr/>
+        </p:nvSpPr>
+        <p:spPr>
+          <a:xfrm>
+            <a:off x="740664" y="3648852"/>
             <a:ext cx="3253130" cy="1170432"/>
           </a:xfrm>
           <a:prstGeom prst="rect">
@@ -38719,13 +38421,13 @@
       </p:sp>
       <p:cxnSp>
         <p:nvCxnSpPr>
-          <p:cNvPr id="10" name="Connector 9"/>
+          <p:cNvPr id="11" name="Connector 10"/>
           <p:cNvCxnSpPr/>
           <p:nvPr/>
         </p:nvCxnSpPr>
         <p:spPr>
           <a:xfrm>
-            <a:off x="4231538" y="2409809"/>
+            <a:off x="4231538" y="2899044"/>
             <a:ext cx="0" cy="1920240"/>
           </a:xfrm>
           <a:prstGeom prst="line">
@@ -38755,13 +38457,13 @@
       </p:cxnSp>
       <p:sp>
         <p:nvSpPr>
-          <p:cNvPr id="11" name="Oval 10"/>
+          <p:cNvPr id="12" name="Oval 11"/>
           <p:cNvSpPr/>
           <p:nvPr/>
         </p:nvSpPr>
         <p:spPr>
           <a:xfrm>
-            <a:off x="4450994" y="2428097"/>
+            <a:off x="4450994" y="2917332"/>
             <a:ext cx="457200" cy="457200"/>
           </a:xfrm>
           <a:prstGeom prst="ellipse">
@@ -38785,7 +38487,7 @@
       </p:sp>
       <p:pic>
         <p:nvPicPr>
-          <p:cNvPr id="12" name="Picture 11" descr="check.png"/>
+          <p:cNvPr id="13" name="Picture 12" descr="check.png"/>
           <p:cNvPicPr>
             <a:picLocks noChangeAspect="1"/>
           </p:cNvPicPr>
@@ -38799,7 +38501,7 @@
         </p:blipFill>
         <p:spPr>
           <a:xfrm>
-            <a:off x="4560722" y="2537825"/>
+            <a:off x="4560722" y="3027060"/>
             <a:ext cx="237744" cy="237744"/>
           </a:xfrm>
           <a:prstGeom prst="rect">
@@ -38809,13 +38511,13 @@
       </p:pic>
       <p:sp>
         <p:nvSpPr>
-          <p:cNvPr id="13" name="TextBox 12"/>
-          <p:cNvSpPr txBox="1"/>
-          <p:nvPr/>
-        </p:nvSpPr>
-        <p:spPr>
-          <a:xfrm>
-            <a:off x="5072786" y="2464673"/>
+          <p:cNvPr id="14" name="TextBox 13"/>
+          <p:cNvSpPr txBox="1"/>
+          <p:nvPr/>
+        </p:nvSpPr>
+        <p:spPr>
+          <a:xfrm>
+            <a:off x="5072786" y="2953908"/>
             <a:ext cx="2667914" cy="292608"/>
           </a:xfrm>
           <a:prstGeom prst="rect">
@@ -38850,13 +38552,13 @@
       </p:sp>
       <p:cxnSp>
         <p:nvCxnSpPr>
-          <p:cNvPr id="14" name="Connector 13"/>
+          <p:cNvPr id="15" name="Connector 14"/>
           <p:cNvCxnSpPr/>
           <p:nvPr/>
         </p:nvCxnSpPr>
         <p:spPr>
           <a:xfrm>
-            <a:off x="4450994" y="3013313"/>
+            <a:off x="4450994" y="3502548"/>
             <a:ext cx="3289706" cy="0"/>
           </a:xfrm>
           <a:prstGeom prst="line">
@@ -38886,13 +38588,13 @@
       </p:cxnSp>
       <p:sp>
         <p:nvSpPr>
-          <p:cNvPr id="15" name="TextBox 14"/>
-          <p:cNvSpPr txBox="1"/>
-          <p:nvPr/>
-        </p:nvSpPr>
-        <p:spPr>
-          <a:xfrm>
-            <a:off x="4469282" y="3159617"/>
+          <p:cNvPr id="16" name="TextBox 15"/>
+          <p:cNvSpPr txBox="1"/>
+          <p:nvPr/>
+        </p:nvSpPr>
+        <p:spPr>
+          <a:xfrm>
+            <a:off x="4469282" y="3648852"/>
             <a:ext cx="3253130" cy="1170432"/>
           </a:xfrm>
           <a:prstGeom prst="rect">
@@ -38963,13 +38665,13 @@
       </p:sp>
       <p:cxnSp>
         <p:nvCxnSpPr>
-          <p:cNvPr id="16" name="Connector 15"/>
+          <p:cNvPr id="17" name="Connector 16"/>
           <p:cNvCxnSpPr/>
           <p:nvPr/>
         </p:nvCxnSpPr>
         <p:spPr>
           <a:xfrm>
-            <a:off x="7960156" y="2409809"/>
+            <a:off x="7960156" y="2899044"/>
             <a:ext cx="0" cy="1920240"/>
           </a:xfrm>
           <a:prstGeom prst="line">
@@ -38999,13 +38701,13 @@
       </p:cxnSp>
       <p:sp>
         <p:nvSpPr>
-          <p:cNvPr id="17" name="Oval 16"/>
+          <p:cNvPr id="18" name="Oval 17"/>
           <p:cNvSpPr/>
           <p:nvPr/>
         </p:nvSpPr>
         <p:spPr>
           <a:xfrm>
-            <a:off x="8179612" y="2428097"/>
+            <a:off x="8179612" y="2917332"/>
             <a:ext cx="457200" cy="457200"/>
           </a:xfrm>
           <a:prstGeom prst="ellipse">
@@ -39029,7 +38731,7 @@
       </p:sp>
       <p:pic>
         <p:nvPicPr>
-          <p:cNvPr id="18" name="Picture 17" descr="send.png"/>
+          <p:cNvPr id="19" name="Picture 18" descr="send.png"/>
           <p:cNvPicPr>
             <a:picLocks noChangeAspect="1"/>
           </p:cNvPicPr>
@@ -39043,7 +38745,7 @@
         </p:blipFill>
         <p:spPr>
           <a:xfrm>
-            <a:off x="8289340" y="2537825"/>
+            <a:off x="8289340" y="3027060"/>
             <a:ext cx="237744" cy="237744"/>
           </a:xfrm>
           <a:prstGeom prst="rect">
@@ -39053,13 +38755,13 @@
       </p:pic>
       <p:sp>
         <p:nvSpPr>
-          <p:cNvPr id="19" name="TextBox 18"/>
-          <p:cNvSpPr txBox="1"/>
-          <p:nvPr/>
-        </p:nvSpPr>
-        <p:spPr>
-          <a:xfrm>
-            <a:off x="8801404" y="2464673"/>
+          <p:cNvPr id="20" name="TextBox 19"/>
+          <p:cNvSpPr txBox="1"/>
+          <p:nvPr/>
+        </p:nvSpPr>
+        <p:spPr>
+          <a:xfrm>
+            <a:off x="8801404" y="2953908"/>
             <a:ext cx="2667914" cy="292608"/>
           </a:xfrm>
           <a:prstGeom prst="rect">
@@ -39094,13 +38796,13 @@
       </p:sp>
       <p:cxnSp>
         <p:nvCxnSpPr>
-          <p:cNvPr id="20" name="Connector 19"/>
+          <p:cNvPr id="21" name="Connector 20"/>
           <p:cNvCxnSpPr/>
           <p:nvPr/>
         </p:nvCxnSpPr>
         <p:spPr>
           <a:xfrm>
-            <a:off x="8179612" y="3013313"/>
+            <a:off x="8179612" y="3502548"/>
             <a:ext cx="3289707" cy="0"/>
           </a:xfrm>
           <a:prstGeom prst="line">
@@ -39130,13 +38832,13 @@
       </p:cxnSp>
       <p:sp>
         <p:nvSpPr>
-          <p:cNvPr id="21" name="TextBox 20"/>
-          <p:cNvSpPr txBox="1"/>
-          <p:nvPr/>
-        </p:nvSpPr>
-        <p:spPr>
-          <a:xfrm>
-            <a:off x="8197900" y="3159617"/>
+          <p:cNvPr id="22" name="TextBox 21"/>
+          <p:cNvSpPr txBox="1"/>
+          <p:nvPr/>
+        </p:nvSpPr>
+        <p:spPr>
+          <a:xfrm>
+            <a:off x="8197900" y="3648852"/>
             <a:ext cx="3253130" cy="1170432"/>
           </a:xfrm>
           <a:prstGeom prst="rect">
@@ -39207,209 +38909,7 @@
       </p:sp>
       <p:sp>
         <p:nvSpPr>
-          <p:cNvPr id="22" name="Rectangle 21"/>
-          <p:cNvSpPr/>
-          <p:nvPr/>
-        </p:nvSpPr>
-        <p:spPr>
-          <a:xfrm>
-            <a:off x="502920" y="4714097"/>
-            <a:ext cx="11185855" cy="530352"/>
-          </a:xfrm>
-          <a:prstGeom prst="rect">
-            <a:avLst/>
-          </a:prstGeom>
-          <a:solidFill>
-            <a:srgbClr val="DFEBE8"/>
-          </a:solidFill>
-          <a:ln>
-            <a:noFill/>
-          </a:ln>
-          <a:effectLst/>
-        </p:spPr>
-        <p:txBody>
-          <a:bodyPr rtlCol="0" anchor="ctr"/>
-          <a:lstStyle/>
-          <a:p>
-            <a:pPr algn="ctr"/>
-          </a:p>
-        </p:txBody>
-      </p:sp>
-      <p:sp>
-        <p:nvSpPr>
-          <p:cNvPr id="23" name="Oval 22"/>
-          <p:cNvSpPr/>
-          <p:nvPr/>
-        </p:nvSpPr>
-        <p:spPr>
-          <a:xfrm>
-            <a:off x="649224" y="4787249"/>
-            <a:ext cx="384048" cy="384048"/>
-          </a:xfrm>
-          <a:prstGeom prst="ellipse">
-            <a:avLst/>
-          </a:prstGeom>
-          <a:solidFill>
-            <a:srgbClr val="DFEBE8"/>
-          </a:solidFill>
-          <a:ln>
-            <a:noFill/>
-          </a:ln>
-          <a:effectLst/>
-        </p:spPr>
-        <p:txBody>
-          <a:bodyPr rtlCol="0" anchor="ctr"/>
-          <a:lstStyle/>
-          <a:p>
-            <a:pPr algn="ctr"/>
-          </a:p>
-        </p:txBody>
-      </p:sp>
-      <p:pic>
-        <p:nvPicPr>
-          <p:cNvPr id="24" name="Picture 23" descr="check.png"/>
-          <p:cNvPicPr>
-            <a:picLocks noChangeAspect="1"/>
-          </p:cNvPicPr>
-          <p:nvPr/>
-        </p:nvPicPr>
-        <p:blipFill>
-          <a:blip r:embed="rId3"/>
-          <a:stretch>
-            <a:fillRect/>
-          </a:stretch>
-        </p:blipFill>
-        <p:spPr>
-          <a:xfrm>
-            <a:off x="741395" y="4879421"/>
-            <a:ext cx="199704" cy="199704"/>
-          </a:xfrm>
-          <a:prstGeom prst="rect">
-            <a:avLst/>
-          </a:prstGeom>
-        </p:spPr>
-      </p:pic>
-      <p:sp>
-        <p:nvSpPr>
-          <p:cNvPr id="25" name="TextBox 24"/>
-          <p:cNvSpPr txBox="1"/>
-          <p:nvPr/>
-        </p:nvSpPr>
-        <p:spPr>
-          <a:xfrm>
-            <a:off x="1124712" y="4851257"/>
-            <a:ext cx="566928" cy="219456"/>
-          </a:xfrm>
-          <a:prstGeom prst="rect">
-            <a:avLst/>
-          </a:prstGeom>
-          <a:noFill/>
-        </p:spPr>
-        <p:txBody>
-          <a:bodyPr wrap="square" anchor="t" lIns="0" rIns="0" tIns="0" bIns="0">
-            <a:spAutoFit/>
-          </a:bodyPr>
-          <a:lstStyle/>
-          <a:p>
-            <a:pPr algn="ctr">
-              <a:lnSpc>
-                <a:spcPct val="130000"/>
-              </a:lnSpc>
-            </a:pPr>
-            <a:r>
-              <a:rPr sz="1050" b="1" lang="ja-JP">
-                <a:solidFill>
-                  <a:srgbClr val="0D7870"/>
-                </a:solidFill>
-                <a:latin typeface="Yu Gothic"/>
-                <a:ea typeface="Yu Gothic"/>
-                <a:cs typeface="Yu Gothic"/>
-              </a:rPr>
-              <a:t>結論</a:t>
-            </a:r>
-          </a:p>
-        </p:txBody>
-      </p:sp>
-      <p:cxnSp>
-        <p:nvCxnSpPr>
-          <p:cNvPr id="26" name="Connector 25"/>
-          <p:cNvCxnSpPr/>
-          <p:nvPr/>
-        </p:nvCxnSpPr>
-        <p:spPr>
-          <a:xfrm>
-            <a:off x="1764792" y="4814681"/>
-            <a:ext cx="0" cy="329184"/>
-          </a:xfrm>
-          <a:prstGeom prst="line">
-            <a:avLst/>
-          </a:prstGeom>
-          <a:ln w="10160">
-            <a:solidFill>
-              <a:srgbClr val="D1CFC8"/>
-            </a:solidFill>
-          </a:ln>
-          <a:effectLst/>
-        </p:spPr>
-        <p:style>
-          <a:lnRef idx="2">
-            <a:schemeClr val="accent1"/>
-          </a:lnRef>
-          <a:fillRef idx="0">
-            <a:schemeClr val="accent1"/>
-          </a:fillRef>
-          <a:effectRef idx="1">
-            <a:schemeClr val="accent1"/>
-          </a:effectRef>
-          <a:fontRef idx="minor">
-            <a:schemeClr val="tx1"/>
-          </a:fontRef>
-        </p:style>
-      </p:cxnSp>
-      <p:sp>
-        <p:nvSpPr>
-          <p:cNvPr id="27" name="TextBox 26"/>
-          <p:cNvSpPr txBox="1"/>
-          <p:nvPr/>
-        </p:nvSpPr>
-        <p:spPr>
-          <a:xfrm>
-            <a:off x="1837943" y="4814681"/>
-            <a:ext cx="9613087" cy="310896"/>
-          </a:xfrm>
-          <a:prstGeom prst="rect">
-            <a:avLst/>
-          </a:prstGeom>
-          <a:noFill/>
-        </p:spPr>
-        <p:txBody>
-          <a:bodyPr wrap="square" anchor="ctr" lIns="0" rIns="0" tIns="0" bIns="0">
-            <a:spAutoFit/>
-          </a:bodyPr>
-          <a:lstStyle/>
-          <a:p>
-            <a:pPr algn="l">
-              <a:lnSpc>
-                <a:spcPct val="115000"/>
-              </a:lnSpc>
-            </a:pPr>
-            <a:r>
-              <a:rPr sz="1500" b="1" lang="ja-JP">
-                <a:solidFill>
-                  <a:srgbClr val="182C43"/>
-                </a:solidFill>
-                <a:latin typeface="Yu Gothic"/>
-                <a:ea typeface="Yu Gothic"/>
-                <a:cs typeface="Yu Gothic"/>
-              </a:rPr>
-              <a:t>限定導入で効果と運用条件を確認した後、対象業務を段階的に拡大する。</a:t>
-            </a:r>
-          </a:p>
-        </p:txBody>
-      </p:sp>
-      <p:sp>
-        <p:nvSpPr>
-          <p:cNvPr id="28" name="Rectangle 27"/>
+          <p:cNvPr id="23" name="Rectangle 22"/>
           <p:cNvSpPr/>
           <p:nvPr/>
         </p:nvSpPr>
@@ -39453,7 +38953,7 @@
       </p:sp>
       <p:sp>
         <p:nvSpPr>
-          <p:cNvPr id="29" name="TextBox 28"/>
+          <p:cNvPr id="24" name="TextBox 23"/>
           <p:cNvSpPr txBox="1"/>
           <p:nvPr/>
         </p:nvSpPr>
@@ -39494,7 +38994,7 @@
       </p:sp>
       <p:sp>
         <p:nvSpPr>
-          <p:cNvPr id="30" name="TextBox 29"/>
+          <p:cNvPr id="25" name="TextBox 24"/>
           <p:cNvSpPr txBox="1"/>
           <p:nvPr/>
         </p:nvSpPr>
@@ -39690,13 +39190,54 @@
       </p:sp>
       <p:sp>
         <p:nvSpPr>
-          <p:cNvPr id="5" name="Rounded Rectangle 4"/>
+          <p:cNvPr id="5" name="TextBox 4"/>
+          <p:cNvSpPr txBox="1"/>
+          <p:nvPr/>
+        </p:nvSpPr>
+        <p:spPr>
+          <a:xfrm>
+            <a:off x="658368" y="1444752"/>
+            <a:ext cx="10881360" cy="237236"/>
+          </a:xfrm>
+          <a:prstGeom prst="rect">
+            <a:avLst/>
+          </a:prstGeom>
+          <a:noFill/>
+        </p:spPr>
+        <p:txBody>
+          <a:bodyPr wrap="square" anchor="t" lIns="0" rIns="0" tIns="0" bIns="0">
+            <a:spAutoFit/>
+          </a:bodyPr>
+          <a:lstStyle/>
+          <a:p>
+            <a:pPr algn="l">
+              <a:lnSpc>
+                <a:spcPct val="118000"/>
+              </a:lnSpc>
+            </a:pPr>
+            <a:r>
+              <a:rPr sz="1400" b="0" lang="ja-JP">
+                <a:solidFill>
+                  <a:srgbClr val="666E70"/>
+                </a:solidFill>
+                <a:latin typeface="Yu Gothic"/>
+                <a:ea typeface="Yu Gothic"/>
+                <a:cs typeface="Yu Gothic"/>
+              </a:rPr>
+              <a:t>短期の立ち上げは現行方式、中長期の横展開は標準方式が優位となる。</a:t>
+            </a:r>
+          </a:p>
+        </p:txBody>
+      </p:sp>
+      <p:sp>
+        <p:nvSpPr>
+          <p:cNvPr id="6" name="Rounded Rectangle 5"/>
           <p:cNvSpPr/>
           <p:nvPr/>
         </p:nvSpPr>
         <p:spPr>
           <a:xfrm>
-            <a:off x="502920" y="1705355"/>
+            <a:off x="502920" y="2188372"/>
             <a:ext cx="4526280" cy="512064"/>
           </a:xfrm>
           <a:prstGeom prst="roundRect">
@@ -39722,13 +39263,13 @@
       </p:sp>
       <p:sp>
         <p:nvSpPr>
-          <p:cNvPr id="6" name="Rounded Rectangle 5"/>
+          <p:cNvPr id="7" name="Rounded Rectangle 6"/>
           <p:cNvSpPr/>
           <p:nvPr/>
         </p:nvSpPr>
         <p:spPr>
           <a:xfrm>
-            <a:off x="6931152" y="1705355"/>
+            <a:off x="6931152" y="2188372"/>
             <a:ext cx="4757623" cy="512064"/>
           </a:xfrm>
           <a:prstGeom prst="roundRect">
@@ -39754,13 +39295,13 @@
       </p:sp>
       <p:sp>
         <p:nvSpPr>
-          <p:cNvPr id="7" name="TextBox 6"/>
-          <p:cNvSpPr txBox="1"/>
-          <p:nvPr/>
-        </p:nvSpPr>
-        <p:spPr>
-          <a:xfrm>
-            <a:off x="667512" y="1705355"/>
+          <p:cNvPr id="8" name="TextBox 7"/>
+          <p:cNvSpPr txBox="1"/>
+          <p:nvPr/>
+        </p:nvSpPr>
+        <p:spPr>
+          <a:xfrm>
+            <a:off x="667512" y="2188372"/>
             <a:ext cx="4197096" cy="512064"/>
           </a:xfrm>
           <a:prstGeom prst="rect">
@@ -39795,13 +39336,13 @@
       </p:sp>
       <p:sp>
         <p:nvSpPr>
-          <p:cNvPr id="8" name="TextBox 7"/>
-          <p:cNvSpPr txBox="1"/>
-          <p:nvPr/>
-        </p:nvSpPr>
-        <p:spPr>
-          <a:xfrm>
-            <a:off x="7095744" y="1705355"/>
+          <p:cNvPr id="9" name="TextBox 8"/>
+          <p:cNvSpPr txBox="1"/>
+          <p:nvPr/>
+        </p:nvSpPr>
+        <p:spPr>
+          <a:xfrm>
+            <a:off x="7095744" y="2188372"/>
             <a:ext cx="4428439" cy="512064"/>
           </a:xfrm>
           <a:prstGeom prst="rect">
@@ -39836,13 +39377,13 @@
       </p:sp>
       <p:sp>
         <p:nvSpPr>
-          <p:cNvPr id="9" name="TextBox 8"/>
-          <p:cNvSpPr txBox="1"/>
-          <p:nvPr/>
-        </p:nvSpPr>
-        <p:spPr>
-          <a:xfrm>
-            <a:off x="5212080" y="1824227"/>
+          <p:cNvPr id="10" name="TextBox 9"/>
+          <p:cNvSpPr txBox="1"/>
+          <p:nvPr/>
+        </p:nvSpPr>
+        <p:spPr>
+          <a:xfrm>
+            <a:off x="5212080" y="2307244"/>
             <a:ext cx="1536192" cy="256032"/>
           </a:xfrm>
           <a:prstGeom prst="rect">
@@ -39877,13 +39418,13 @@
       </p:sp>
       <p:sp>
         <p:nvSpPr>
-          <p:cNvPr id="10" name="Rectangle 9"/>
+          <p:cNvPr id="11" name="Rectangle 10"/>
           <p:cNvSpPr/>
           <p:nvPr/>
         </p:nvSpPr>
         <p:spPr>
           <a:xfrm>
-            <a:off x="502920" y="2290572"/>
+            <a:off x="502920" y="2773588"/>
             <a:ext cx="4526280" cy="3108960"/>
           </a:xfrm>
           <a:prstGeom prst="rect">
@@ -39907,13 +39448,13 @@
       </p:sp>
       <p:sp>
         <p:nvSpPr>
-          <p:cNvPr id="11" name="Rectangle 10"/>
+          <p:cNvPr id="12" name="Rectangle 11"/>
           <p:cNvSpPr/>
           <p:nvPr/>
         </p:nvSpPr>
         <p:spPr>
           <a:xfrm>
-            <a:off x="6931152" y="2290572"/>
+            <a:off x="6931152" y="2773588"/>
             <a:ext cx="4757623" cy="3108960"/>
           </a:xfrm>
           <a:prstGeom prst="rect">
@@ -39937,13 +39478,13 @@
       </p:sp>
       <p:sp>
         <p:nvSpPr>
-          <p:cNvPr id="12" name="Oval 11"/>
+          <p:cNvPr id="13" name="Oval 12"/>
           <p:cNvSpPr/>
           <p:nvPr/>
         </p:nvSpPr>
         <p:spPr>
           <a:xfrm>
-            <a:off x="4992624" y="2564891"/>
+            <a:off x="4992624" y="3047908"/>
             <a:ext cx="73152" cy="73152"/>
           </a:xfrm>
           <a:prstGeom prst="ellipse">
@@ -39967,13 +39508,13 @@
       </p:sp>
       <p:sp>
         <p:nvSpPr>
-          <p:cNvPr id="13" name="Oval 12"/>
+          <p:cNvPr id="14" name="Oval 13"/>
           <p:cNvSpPr/>
           <p:nvPr/>
         </p:nvSpPr>
         <p:spPr>
           <a:xfrm>
-            <a:off x="6894576" y="2564891"/>
+            <a:off x="6894576" y="3047908"/>
             <a:ext cx="73152" cy="73152"/>
           </a:xfrm>
           <a:prstGeom prst="ellipse">
@@ -39997,13 +39538,13 @@
       </p:sp>
       <p:cxnSp>
         <p:nvCxnSpPr>
-          <p:cNvPr id="14" name="Connector 13"/>
+          <p:cNvPr id="15" name="Connector 14"/>
           <p:cNvCxnSpPr/>
           <p:nvPr/>
         </p:nvCxnSpPr>
         <p:spPr>
           <a:xfrm>
-            <a:off x="5029200" y="2601468"/>
+            <a:off x="5029200" y="3084484"/>
             <a:ext cx="182880" cy="0"/>
           </a:xfrm>
           <a:prstGeom prst="line">
@@ -40033,13 +39574,13 @@
       </p:cxnSp>
       <p:cxnSp>
         <p:nvCxnSpPr>
-          <p:cNvPr id="15" name="Connector 14"/>
+          <p:cNvPr id="16" name="Connector 15"/>
           <p:cNvCxnSpPr/>
           <p:nvPr/>
         </p:nvCxnSpPr>
         <p:spPr>
           <a:xfrm>
-            <a:off x="6748272" y="2601468"/>
+            <a:off x="6748272" y="3084484"/>
             <a:ext cx="182880" cy="0"/>
           </a:xfrm>
           <a:prstGeom prst="line">
@@ -40069,13 +39610,13 @@
       </p:cxnSp>
       <p:sp>
         <p:nvSpPr>
-          <p:cNvPr id="16" name="TextBox 15"/>
-          <p:cNvSpPr txBox="1"/>
-          <p:nvPr/>
-        </p:nvSpPr>
-        <p:spPr>
-          <a:xfrm>
-            <a:off x="685800" y="2290572"/>
+          <p:cNvPr id="17" name="TextBox 16"/>
+          <p:cNvSpPr txBox="1"/>
+          <p:nvPr/>
+        </p:nvSpPr>
+        <p:spPr>
+          <a:xfrm>
+            <a:off x="685800" y="2773588"/>
             <a:ext cx="4160520" cy="621792"/>
           </a:xfrm>
           <a:prstGeom prst="rect">
@@ -40110,13 +39651,13 @@
       </p:sp>
       <p:sp>
         <p:nvSpPr>
-          <p:cNvPr id="17" name="Rectangle 16"/>
+          <p:cNvPr id="18" name="Rectangle 17"/>
           <p:cNvSpPr/>
           <p:nvPr/>
         </p:nvSpPr>
         <p:spPr>
           <a:xfrm>
-            <a:off x="5266944" y="2400300"/>
+            <a:off x="5266944" y="2883316"/>
             <a:ext cx="1426464" cy="402336"/>
           </a:xfrm>
           <a:prstGeom prst="rect">
@@ -40140,13 +39681,13 @@
       </p:sp>
       <p:sp>
         <p:nvSpPr>
-          <p:cNvPr id="18" name="TextBox 17"/>
-          <p:cNvSpPr txBox="1"/>
-          <p:nvPr/>
-        </p:nvSpPr>
-        <p:spPr>
-          <a:xfrm>
-            <a:off x="5266944" y="2400300"/>
+          <p:cNvPr id="19" name="TextBox 18"/>
+          <p:cNvSpPr txBox="1"/>
+          <p:nvPr/>
+        </p:nvSpPr>
+        <p:spPr>
+          <a:xfrm>
+            <a:off x="5266944" y="2883316"/>
             <a:ext cx="1426464" cy="402336"/>
           </a:xfrm>
           <a:prstGeom prst="rect">
@@ -40181,13 +39722,13 @@
       </p:sp>
       <p:sp>
         <p:nvSpPr>
-          <p:cNvPr id="19" name="TextBox 18"/>
-          <p:cNvSpPr txBox="1"/>
-          <p:nvPr/>
-        </p:nvSpPr>
-        <p:spPr>
-          <a:xfrm>
-            <a:off x="7114032" y="2290572"/>
+          <p:cNvPr id="20" name="TextBox 19"/>
+          <p:cNvSpPr txBox="1"/>
+          <p:nvPr/>
+        </p:nvSpPr>
+        <p:spPr>
+          <a:xfrm>
+            <a:off x="7114032" y="2773588"/>
             <a:ext cx="4391863" cy="621792"/>
           </a:xfrm>
           <a:prstGeom prst="rect">
@@ -40222,13 +39763,13 @@
       </p:sp>
       <p:cxnSp>
         <p:nvCxnSpPr>
-          <p:cNvPr id="20" name="Connector 19"/>
+          <p:cNvPr id="21" name="Connector 20"/>
           <p:cNvCxnSpPr/>
           <p:nvPr/>
         </p:nvCxnSpPr>
         <p:spPr>
           <a:xfrm>
-            <a:off x="667512" y="2912364"/>
+            <a:off x="667512" y="3395380"/>
             <a:ext cx="4197096" cy="0"/>
           </a:xfrm>
           <a:prstGeom prst="line">
@@ -40258,13 +39799,13 @@
       </p:cxnSp>
       <p:cxnSp>
         <p:nvCxnSpPr>
-          <p:cNvPr id="21" name="Connector 20"/>
+          <p:cNvPr id="22" name="Connector 21"/>
           <p:cNvCxnSpPr/>
           <p:nvPr/>
         </p:nvCxnSpPr>
         <p:spPr>
           <a:xfrm>
-            <a:off x="7095744" y="2912364"/>
+            <a:off x="7095744" y="3395380"/>
             <a:ext cx="4428439" cy="0"/>
           </a:xfrm>
           <a:prstGeom prst="line">
@@ -40294,13 +39835,13 @@
       </p:cxnSp>
       <p:sp>
         <p:nvSpPr>
-          <p:cNvPr id="22" name="Oval 21"/>
+          <p:cNvPr id="23" name="Oval 22"/>
           <p:cNvSpPr/>
           <p:nvPr/>
         </p:nvSpPr>
         <p:spPr>
           <a:xfrm>
-            <a:off x="4992624" y="3186684"/>
+            <a:off x="4992624" y="3669700"/>
             <a:ext cx="73152" cy="73152"/>
           </a:xfrm>
           <a:prstGeom prst="ellipse">
@@ -40324,13 +39865,13 @@
       </p:sp>
       <p:sp>
         <p:nvSpPr>
-          <p:cNvPr id="23" name="Oval 22"/>
+          <p:cNvPr id="24" name="Oval 23"/>
           <p:cNvSpPr/>
           <p:nvPr/>
         </p:nvSpPr>
         <p:spPr>
           <a:xfrm>
-            <a:off x="6894576" y="3186684"/>
+            <a:off x="6894576" y="3669700"/>
             <a:ext cx="73152" cy="73152"/>
           </a:xfrm>
           <a:prstGeom prst="ellipse">
@@ -40354,13 +39895,13 @@
       </p:sp>
       <p:cxnSp>
         <p:nvCxnSpPr>
-          <p:cNvPr id="24" name="Connector 23"/>
+          <p:cNvPr id="25" name="Connector 24"/>
           <p:cNvCxnSpPr/>
           <p:nvPr/>
         </p:nvCxnSpPr>
         <p:spPr>
           <a:xfrm>
-            <a:off x="5029200" y="3223260"/>
+            <a:off x="5029200" y="3706276"/>
             <a:ext cx="182880" cy="0"/>
           </a:xfrm>
           <a:prstGeom prst="line">
@@ -40390,13 +39931,13 @@
       </p:cxnSp>
       <p:cxnSp>
         <p:nvCxnSpPr>
-          <p:cNvPr id="25" name="Connector 24"/>
+          <p:cNvPr id="26" name="Connector 25"/>
           <p:cNvCxnSpPr/>
           <p:nvPr/>
         </p:nvCxnSpPr>
         <p:spPr>
           <a:xfrm>
-            <a:off x="6748272" y="3223260"/>
+            <a:off x="6748272" y="3706276"/>
             <a:ext cx="182880" cy="0"/>
           </a:xfrm>
           <a:prstGeom prst="line">
@@ -40426,13 +39967,13 @@
       </p:cxnSp>
       <p:sp>
         <p:nvSpPr>
-          <p:cNvPr id="26" name="TextBox 25"/>
-          <p:cNvSpPr txBox="1"/>
-          <p:nvPr/>
-        </p:nvSpPr>
-        <p:spPr>
-          <a:xfrm>
-            <a:off x="685800" y="2912364"/>
+          <p:cNvPr id="27" name="TextBox 26"/>
+          <p:cNvSpPr txBox="1"/>
+          <p:nvPr/>
+        </p:nvSpPr>
+        <p:spPr>
+          <a:xfrm>
+            <a:off x="685800" y="3395380"/>
             <a:ext cx="4160520" cy="621792"/>
           </a:xfrm>
           <a:prstGeom prst="rect">
@@ -40467,13 +40008,13 @@
       </p:sp>
       <p:sp>
         <p:nvSpPr>
-          <p:cNvPr id="27" name="Rectangle 26"/>
+          <p:cNvPr id="28" name="Rectangle 27"/>
           <p:cNvSpPr/>
           <p:nvPr/>
         </p:nvSpPr>
         <p:spPr>
           <a:xfrm>
-            <a:off x="5266944" y="3022092"/>
+            <a:off x="5266944" y="3505108"/>
             <a:ext cx="1426464" cy="402336"/>
           </a:xfrm>
           <a:prstGeom prst="rect">
@@ -40497,13 +40038,13 @@
       </p:sp>
       <p:sp>
         <p:nvSpPr>
-          <p:cNvPr id="28" name="TextBox 27"/>
-          <p:cNvSpPr txBox="1"/>
-          <p:nvPr/>
-        </p:nvSpPr>
-        <p:spPr>
-          <a:xfrm>
-            <a:off x="5266944" y="3022092"/>
+          <p:cNvPr id="29" name="TextBox 28"/>
+          <p:cNvSpPr txBox="1"/>
+          <p:nvPr/>
+        </p:nvSpPr>
+        <p:spPr>
+          <a:xfrm>
+            <a:off x="5266944" y="3505108"/>
             <a:ext cx="1426464" cy="402336"/>
           </a:xfrm>
           <a:prstGeom prst="rect">
@@ -40538,13 +40079,13 @@
       </p:sp>
       <p:sp>
         <p:nvSpPr>
-          <p:cNvPr id="29" name="TextBox 28"/>
-          <p:cNvSpPr txBox="1"/>
-          <p:nvPr/>
-        </p:nvSpPr>
-        <p:spPr>
-          <a:xfrm>
-            <a:off x="7114032" y="2912364"/>
+          <p:cNvPr id="30" name="TextBox 29"/>
+          <p:cNvSpPr txBox="1"/>
+          <p:nvPr/>
+        </p:nvSpPr>
+        <p:spPr>
+          <a:xfrm>
+            <a:off x="7114032" y="3395380"/>
             <a:ext cx="4391863" cy="621792"/>
           </a:xfrm>
           <a:prstGeom prst="rect">
@@ -40579,13 +40120,13 @@
       </p:sp>
       <p:cxnSp>
         <p:nvCxnSpPr>
-          <p:cNvPr id="30" name="Connector 29"/>
+          <p:cNvPr id="31" name="Connector 30"/>
           <p:cNvCxnSpPr/>
           <p:nvPr/>
         </p:nvCxnSpPr>
         <p:spPr>
           <a:xfrm>
-            <a:off x="667512" y="3534156"/>
+            <a:off x="667512" y="4017172"/>
             <a:ext cx="4197096" cy="0"/>
           </a:xfrm>
           <a:prstGeom prst="line">
@@ -40615,13 +40156,13 @@
       </p:cxnSp>
       <p:cxnSp>
         <p:nvCxnSpPr>
-          <p:cNvPr id="31" name="Connector 30"/>
+          <p:cNvPr id="32" name="Connector 31"/>
           <p:cNvCxnSpPr/>
           <p:nvPr/>
         </p:nvCxnSpPr>
         <p:spPr>
           <a:xfrm>
-            <a:off x="7095744" y="3534156"/>
+            <a:off x="7095744" y="4017172"/>
             <a:ext cx="4428439" cy="0"/>
           </a:xfrm>
           <a:prstGeom prst="line">
@@ -40651,13 +40192,13 @@
       </p:cxnSp>
       <p:sp>
         <p:nvSpPr>
-          <p:cNvPr id="32" name="Oval 31"/>
+          <p:cNvPr id="33" name="Oval 32"/>
           <p:cNvSpPr/>
           <p:nvPr/>
         </p:nvSpPr>
         <p:spPr>
           <a:xfrm>
-            <a:off x="4992624" y="3808476"/>
+            <a:off x="4992624" y="4291492"/>
             <a:ext cx="73152" cy="73152"/>
           </a:xfrm>
           <a:prstGeom prst="ellipse">
@@ -40681,13 +40222,13 @@
       </p:sp>
       <p:sp>
         <p:nvSpPr>
-          <p:cNvPr id="33" name="Oval 32"/>
+          <p:cNvPr id="34" name="Oval 33"/>
           <p:cNvSpPr/>
           <p:nvPr/>
         </p:nvSpPr>
         <p:spPr>
           <a:xfrm>
-            <a:off x="6894576" y="3808476"/>
+            <a:off x="6894576" y="4291492"/>
             <a:ext cx="73152" cy="73152"/>
           </a:xfrm>
           <a:prstGeom prst="ellipse">
@@ -40711,13 +40252,13 @@
       </p:sp>
       <p:cxnSp>
         <p:nvCxnSpPr>
-          <p:cNvPr id="34" name="Connector 33"/>
+          <p:cNvPr id="35" name="Connector 34"/>
           <p:cNvCxnSpPr/>
           <p:nvPr/>
         </p:nvCxnSpPr>
         <p:spPr>
           <a:xfrm>
-            <a:off x="5029200" y="3845052"/>
+            <a:off x="5029200" y="4328068"/>
             <a:ext cx="182880" cy="0"/>
           </a:xfrm>
           <a:prstGeom prst="line">
@@ -40747,13 +40288,13 @@
       </p:cxnSp>
       <p:cxnSp>
         <p:nvCxnSpPr>
-          <p:cNvPr id="35" name="Connector 34"/>
+          <p:cNvPr id="36" name="Connector 35"/>
           <p:cNvCxnSpPr/>
           <p:nvPr/>
         </p:nvCxnSpPr>
         <p:spPr>
           <a:xfrm>
-            <a:off x="6748272" y="3845052"/>
+            <a:off x="6748272" y="4328068"/>
             <a:ext cx="182880" cy="0"/>
           </a:xfrm>
           <a:prstGeom prst="line">
@@ -40783,13 +40324,13 @@
       </p:cxnSp>
       <p:sp>
         <p:nvSpPr>
-          <p:cNvPr id="36" name="TextBox 35"/>
-          <p:cNvSpPr txBox="1"/>
-          <p:nvPr/>
-        </p:nvSpPr>
-        <p:spPr>
-          <a:xfrm>
-            <a:off x="685800" y="3534156"/>
+          <p:cNvPr id="37" name="TextBox 36"/>
+          <p:cNvSpPr txBox="1"/>
+          <p:nvPr/>
+        </p:nvSpPr>
+        <p:spPr>
+          <a:xfrm>
+            <a:off x="685800" y="4017172"/>
             <a:ext cx="4160520" cy="621792"/>
           </a:xfrm>
           <a:prstGeom prst="rect">
@@ -40824,13 +40365,13 @@
       </p:sp>
       <p:sp>
         <p:nvSpPr>
-          <p:cNvPr id="37" name="Rectangle 36"/>
+          <p:cNvPr id="38" name="Rectangle 37"/>
           <p:cNvSpPr/>
           <p:nvPr/>
         </p:nvSpPr>
         <p:spPr>
           <a:xfrm>
-            <a:off x="5266944" y="3643884"/>
+            <a:off x="5266944" y="4126900"/>
             <a:ext cx="1426464" cy="402336"/>
           </a:xfrm>
           <a:prstGeom prst="rect">
@@ -40854,13 +40395,13 @@
       </p:sp>
       <p:sp>
         <p:nvSpPr>
-          <p:cNvPr id="38" name="TextBox 37"/>
-          <p:cNvSpPr txBox="1"/>
-          <p:nvPr/>
-        </p:nvSpPr>
-        <p:spPr>
-          <a:xfrm>
-            <a:off x="5266944" y="3643884"/>
+          <p:cNvPr id="39" name="TextBox 38"/>
+          <p:cNvSpPr txBox="1"/>
+          <p:nvPr/>
+        </p:nvSpPr>
+        <p:spPr>
+          <a:xfrm>
+            <a:off x="5266944" y="4126900"/>
             <a:ext cx="1426464" cy="402336"/>
           </a:xfrm>
           <a:prstGeom prst="rect">
@@ -40895,13 +40436,13 @@
       </p:sp>
       <p:sp>
         <p:nvSpPr>
-          <p:cNvPr id="39" name="TextBox 38"/>
-          <p:cNvSpPr txBox="1"/>
-          <p:nvPr/>
-        </p:nvSpPr>
-        <p:spPr>
-          <a:xfrm>
-            <a:off x="7114032" y="3534156"/>
+          <p:cNvPr id="40" name="TextBox 39"/>
+          <p:cNvSpPr txBox="1"/>
+          <p:nvPr/>
+        </p:nvSpPr>
+        <p:spPr>
+          <a:xfrm>
+            <a:off x="7114032" y="4017172"/>
             <a:ext cx="4391863" cy="621792"/>
           </a:xfrm>
           <a:prstGeom prst="rect">
@@ -40936,13 +40477,13 @@
       </p:sp>
       <p:cxnSp>
         <p:nvCxnSpPr>
-          <p:cNvPr id="40" name="Connector 39"/>
+          <p:cNvPr id="41" name="Connector 40"/>
           <p:cNvCxnSpPr/>
           <p:nvPr/>
         </p:nvCxnSpPr>
         <p:spPr>
           <a:xfrm>
-            <a:off x="667512" y="4155948"/>
+            <a:off x="667512" y="4638964"/>
             <a:ext cx="4197096" cy="0"/>
           </a:xfrm>
           <a:prstGeom prst="line">
@@ -40972,13 +40513,13 @@
       </p:cxnSp>
       <p:cxnSp>
         <p:nvCxnSpPr>
-          <p:cNvPr id="41" name="Connector 40"/>
+          <p:cNvPr id="42" name="Connector 41"/>
           <p:cNvCxnSpPr/>
           <p:nvPr/>
         </p:nvCxnSpPr>
         <p:spPr>
           <a:xfrm>
-            <a:off x="7095744" y="4155948"/>
+            <a:off x="7095744" y="4638964"/>
             <a:ext cx="4428439" cy="0"/>
           </a:xfrm>
           <a:prstGeom prst="line">
@@ -41008,13 +40549,13 @@
       </p:cxnSp>
       <p:sp>
         <p:nvSpPr>
-          <p:cNvPr id="42" name="Oval 41"/>
+          <p:cNvPr id="43" name="Oval 42"/>
           <p:cNvSpPr/>
           <p:nvPr/>
         </p:nvSpPr>
         <p:spPr>
           <a:xfrm>
-            <a:off x="4992624" y="4430268"/>
+            <a:off x="4992624" y="4913284"/>
             <a:ext cx="73152" cy="73152"/>
           </a:xfrm>
           <a:prstGeom prst="ellipse">
@@ -41038,13 +40579,13 @@
       </p:sp>
       <p:sp>
         <p:nvSpPr>
-          <p:cNvPr id="43" name="Oval 42"/>
+          <p:cNvPr id="44" name="Oval 43"/>
           <p:cNvSpPr/>
           <p:nvPr/>
         </p:nvSpPr>
         <p:spPr>
           <a:xfrm>
-            <a:off x="6894576" y="4430268"/>
+            <a:off x="6894576" y="4913284"/>
             <a:ext cx="73152" cy="73152"/>
           </a:xfrm>
           <a:prstGeom prst="ellipse">
@@ -41068,13 +40609,13 @@
       </p:sp>
       <p:cxnSp>
         <p:nvCxnSpPr>
-          <p:cNvPr id="44" name="Connector 43"/>
+          <p:cNvPr id="45" name="Connector 44"/>
           <p:cNvCxnSpPr/>
           <p:nvPr/>
         </p:nvCxnSpPr>
         <p:spPr>
           <a:xfrm>
-            <a:off x="5029200" y="4466844"/>
+            <a:off x="5029200" y="4949860"/>
             <a:ext cx="182880" cy="0"/>
           </a:xfrm>
           <a:prstGeom prst="line">
@@ -41104,13 +40645,13 @@
       </p:cxnSp>
       <p:cxnSp>
         <p:nvCxnSpPr>
-          <p:cNvPr id="45" name="Connector 44"/>
+          <p:cNvPr id="46" name="Connector 45"/>
           <p:cNvCxnSpPr/>
           <p:nvPr/>
         </p:nvCxnSpPr>
         <p:spPr>
           <a:xfrm>
-            <a:off x="6748272" y="4466844"/>
+            <a:off x="6748272" y="4949860"/>
             <a:ext cx="182880" cy="0"/>
           </a:xfrm>
           <a:prstGeom prst="line">
@@ -41140,13 +40681,13 @@
       </p:cxnSp>
       <p:sp>
         <p:nvSpPr>
-          <p:cNvPr id="46" name="TextBox 45"/>
-          <p:cNvSpPr txBox="1"/>
-          <p:nvPr/>
-        </p:nvSpPr>
-        <p:spPr>
-          <a:xfrm>
-            <a:off x="685800" y="4155948"/>
+          <p:cNvPr id="47" name="TextBox 46"/>
+          <p:cNvSpPr txBox="1"/>
+          <p:nvPr/>
+        </p:nvSpPr>
+        <p:spPr>
+          <a:xfrm>
+            <a:off x="685800" y="4638964"/>
             <a:ext cx="4160520" cy="621792"/>
           </a:xfrm>
           <a:prstGeom prst="rect">
@@ -41181,13 +40722,13 @@
       </p:sp>
       <p:sp>
         <p:nvSpPr>
-          <p:cNvPr id="47" name="Rectangle 46"/>
+          <p:cNvPr id="48" name="Rectangle 47"/>
           <p:cNvSpPr/>
           <p:nvPr/>
         </p:nvSpPr>
         <p:spPr>
           <a:xfrm>
-            <a:off x="5266944" y="4265676"/>
+            <a:off x="5266944" y="4748692"/>
             <a:ext cx="1426464" cy="402336"/>
           </a:xfrm>
           <a:prstGeom prst="rect">
@@ -41211,13 +40752,13 @@
       </p:sp>
       <p:sp>
         <p:nvSpPr>
-          <p:cNvPr id="48" name="TextBox 47"/>
-          <p:cNvSpPr txBox="1"/>
-          <p:nvPr/>
-        </p:nvSpPr>
-        <p:spPr>
-          <a:xfrm>
-            <a:off x="5266944" y="4265676"/>
+          <p:cNvPr id="49" name="TextBox 48"/>
+          <p:cNvSpPr txBox="1"/>
+          <p:nvPr/>
+        </p:nvSpPr>
+        <p:spPr>
+          <a:xfrm>
+            <a:off x="5266944" y="4748692"/>
             <a:ext cx="1426464" cy="402336"/>
           </a:xfrm>
           <a:prstGeom prst="rect">
@@ -41252,13 +40793,13 @@
       </p:sp>
       <p:sp>
         <p:nvSpPr>
-          <p:cNvPr id="49" name="TextBox 48"/>
-          <p:cNvSpPr txBox="1"/>
-          <p:nvPr/>
-        </p:nvSpPr>
-        <p:spPr>
-          <a:xfrm>
-            <a:off x="7114032" y="4155948"/>
+          <p:cNvPr id="50" name="TextBox 49"/>
+          <p:cNvSpPr txBox="1"/>
+          <p:nvPr/>
+        </p:nvSpPr>
+        <p:spPr>
+          <a:xfrm>
+            <a:off x="7114032" y="4638964"/>
             <a:ext cx="4391863" cy="621792"/>
           </a:xfrm>
           <a:prstGeom prst="rect">
@@ -41293,13 +40834,13 @@
       </p:sp>
       <p:cxnSp>
         <p:nvCxnSpPr>
-          <p:cNvPr id="50" name="Connector 49"/>
+          <p:cNvPr id="51" name="Connector 50"/>
           <p:cNvCxnSpPr/>
           <p:nvPr/>
         </p:nvCxnSpPr>
         <p:spPr>
           <a:xfrm>
-            <a:off x="667512" y="4777740"/>
+            <a:off x="667512" y="5260756"/>
             <a:ext cx="4197096" cy="0"/>
           </a:xfrm>
           <a:prstGeom prst="line">
@@ -41329,13 +40870,13 @@
       </p:cxnSp>
       <p:cxnSp>
         <p:nvCxnSpPr>
-          <p:cNvPr id="51" name="Connector 50"/>
+          <p:cNvPr id="52" name="Connector 51"/>
           <p:cNvCxnSpPr/>
           <p:nvPr/>
         </p:nvCxnSpPr>
         <p:spPr>
           <a:xfrm>
-            <a:off x="7095744" y="4777740"/>
+            <a:off x="7095744" y="5260756"/>
             <a:ext cx="4428439" cy="0"/>
           </a:xfrm>
           <a:prstGeom prst="line">
@@ -41365,13 +40906,13 @@
       </p:cxnSp>
       <p:sp>
         <p:nvSpPr>
-          <p:cNvPr id="52" name="Oval 51"/>
+          <p:cNvPr id="53" name="Oval 52"/>
           <p:cNvSpPr/>
           <p:nvPr/>
         </p:nvSpPr>
         <p:spPr>
           <a:xfrm>
-            <a:off x="4992624" y="5052059"/>
+            <a:off x="4992624" y="5535076"/>
             <a:ext cx="73152" cy="73152"/>
           </a:xfrm>
           <a:prstGeom prst="ellipse">
@@ -41395,13 +40936,13 @@
       </p:sp>
       <p:sp>
         <p:nvSpPr>
-          <p:cNvPr id="53" name="Oval 52"/>
+          <p:cNvPr id="54" name="Oval 53"/>
           <p:cNvSpPr/>
           <p:nvPr/>
         </p:nvSpPr>
         <p:spPr>
           <a:xfrm>
-            <a:off x="6894576" y="5052059"/>
+            <a:off x="6894576" y="5535076"/>
             <a:ext cx="73152" cy="73152"/>
           </a:xfrm>
           <a:prstGeom prst="ellipse">
@@ -41425,13 +40966,13 @@
       </p:sp>
       <p:cxnSp>
         <p:nvCxnSpPr>
-          <p:cNvPr id="54" name="Connector 53"/>
+          <p:cNvPr id="55" name="Connector 54"/>
           <p:cNvCxnSpPr/>
           <p:nvPr/>
         </p:nvCxnSpPr>
         <p:spPr>
           <a:xfrm>
-            <a:off x="5029200" y="5088636"/>
+            <a:off x="5029200" y="5571652"/>
             <a:ext cx="182880" cy="0"/>
           </a:xfrm>
           <a:prstGeom prst="line">
@@ -41461,13 +41002,13 @@
       </p:cxnSp>
       <p:cxnSp>
         <p:nvCxnSpPr>
-          <p:cNvPr id="55" name="Connector 54"/>
+          <p:cNvPr id="56" name="Connector 55"/>
           <p:cNvCxnSpPr/>
           <p:nvPr/>
         </p:nvCxnSpPr>
         <p:spPr>
           <a:xfrm>
-            <a:off x="6748272" y="5088636"/>
+            <a:off x="6748272" y="5571652"/>
             <a:ext cx="182880" cy="0"/>
           </a:xfrm>
           <a:prstGeom prst="line">
@@ -41497,13 +41038,13 @@
       </p:cxnSp>
       <p:sp>
         <p:nvSpPr>
-          <p:cNvPr id="56" name="TextBox 55"/>
-          <p:cNvSpPr txBox="1"/>
-          <p:nvPr/>
-        </p:nvSpPr>
-        <p:spPr>
-          <a:xfrm>
-            <a:off x="685800" y="4777740"/>
+          <p:cNvPr id="57" name="TextBox 56"/>
+          <p:cNvSpPr txBox="1"/>
+          <p:nvPr/>
+        </p:nvSpPr>
+        <p:spPr>
+          <a:xfrm>
+            <a:off x="685800" y="5260756"/>
             <a:ext cx="4160520" cy="621792"/>
           </a:xfrm>
           <a:prstGeom prst="rect">
@@ -41538,13 +41079,13 @@
       </p:sp>
       <p:sp>
         <p:nvSpPr>
-          <p:cNvPr id="57" name="Rectangle 56"/>
+          <p:cNvPr id="58" name="Rectangle 57"/>
           <p:cNvSpPr/>
           <p:nvPr/>
         </p:nvSpPr>
         <p:spPr>
           <a:xfrm>
-            <a:off x="5266944" y="4887468"/>
+            <a:off x="5266944" y="5370484"/>
             <a:ext cx="1426464" cy="402336"/>
           </a:xfrm>
           <a:prstGeom prst="rect">
@@ -41568,13 +41109,13 @@
       </p:sp>
       <p:sp>
         <p:nvSpPr>
-          <p:cNvPr id="58" name="TextBox 57"/>
-          <p:cNvSpPr txBox="1"/>
-          <p:nvPr/>
-        </p:nvSpPr>
-        <p:spPr>
-          <a:xfrm>
-            <a:off x="5266944" y="4887468"/>
+          <p:cNvPr id="59" name="TextBox 58"/>
+          <p:cNvSpPr txBox="1"/>
+          <p:nvPr/>
+        </p:nvSpPr>
+        <p:spPr>
+          <a:xfrm>
+            <a:off x="5266944" y="5370484"/>
             <a:ext cx="1426464" cy="402336"/>
           </a:xfrm>
           <a:prstGeom prst="rect">
@@ -41609,13 +41150,13 @@
       </p:sp>
       <p:sp>
         <p:nvSpPr>
-          <p:cNvPr id="59" name="TextBox 58"/>
-          <p:cNvSpPr txBox="1"/>
-          <p:nvPr/>
-        </p:nvSpPr>
-        <p:spPr>
-          <a:xfrm>
-            <a:off x="7114032" y="4777740"/>
+          <p:cNvPr id="60" name="TextBox 59"/>
+          <p:cNvSpPr txBox="1"/>
+          <p:nvPr/>
+        </p:nvSpPr>
+        <p:spPr>
+          <a:xfrm>
+            <a:off x="7114032" y="5260756"/>
             <a:ext cx="4391863" cy="621792"/>
           </a:xfrm>
           <a:prstGeom prst="rect">
@@ -41650,209 +41191,7 @@
       </p:sp>
       <p:sp>
         <p:nvSpPr>
-          <p:cNvPr id="60" name="Rectangle 59"/>
-          <p:cNvSpPr/>
-          <p:nvPr/>
-        </p:nvSpPr>
-        <p:spPr>
-          <a:xfrm>
-            <a:off x="502920" y="5696712"/>
-            <a:ext cx="11185855" cy="530352"/>
-          </a:xfrm>
-          <a:prstGeom prst="rect">
-            <a:avLst/>
-          </a:prstGeom>
-          <a:solidFill>
-            <a:srgbClr val="DFEBE8"/>
-          </a:solidFill>
-          <a:ln>
-            <a:noFill/>
-          </a:ln>
-          <a:effectLst/>
-        </p:spPr>
-        <p:txBody>
-          <a:bodyPr rtlCol="0" anchor="ctr"/>
-          <a:lstStyle/>
-          <a:p>
-            <a:pPr algn="ctr"/>
-          </a:p>
-        </p:txBody>
-      </p:sp>
-      <p:sp>
-        <p:nvSpPr>
-          <p:cNvPr id="61" name="Oval 60"/>
-          <p:cNvSpPr/>
-          <p:nvPr/>
-        </p:nvSpPr>
-        <p:spPr>
-          <a:xfrm>
-            <a:off x="649224" y="5769864"/>
-            <a:ext cx="384048" cy="384048"/>
-          </a:xfrm>
-          <a:prstGeom prst="ellipse">
-            <a:avLst/>
-          </a:prstGeom>
-          <a:solidFill>
-            <a:srgbClr val="DFEBE8"/>
-          </a:solidFill>
-          <a:ln>
-            <a:noFill/>
-          </a:ln>
-          <a:effectLst/>
-        </p:spPr>
-        <p:txBody>
-          <a:bodyPr rtlCol="0" anchor="ctr"/>
-          <a:lstStyle/>
-          <a:p>
-            <a:pPr algn="ctr"/>
-          </a:p>
-        </p:txBody>
-      </p:sp>
-      <p:pic>
-        <p:nvPicPr>
-          <p:cNvPr id="62" name="Picture 61" descr="check.png"/>
-          <p:cNvPicPr>
-            <a:picLocks noChangeAspect="1"/>
-          </p:cNvPicPr>
-          <p:nvPr/>
-        </p:nvPicPr>
-        <p:blipFill>
-          <a:blip r:embed="rId2"/>
-          <a:stretch>
-            <a:fillRect/>
-          </a:stretch>
-        </p:blipFill>
-        <p:spPr>
-          <a:xfrm>
-            <a:off x="741395" y="5862035"/>
-            <a:ext cx="199704" cy="199704"/>
-          </a:xfrm>
-          <a:prstGeom prst="rect">
-            <a:avLst/>
-          </a:prstGeom>
-        </p:spPr>
-      </p:pic>
-      <p:sp>
-        <p:nvSpPr>
-          <p:cNvPr id="63" name="TextBox 62"/>
-          <p:cNvSpPr txBox="1"/>
-          <p:nvPr/>
-        </p:nvSpPr>
-        <p:spPr>
-          <a:xfrm>
-            <a:off x="1124712" y="5833872"/>
-            <a:ext cx="566928" cy="219456"/>
-          </a:xfrm>
-          <a:prstGeom prst="rect">
-            <a:avLst/>
-          </a:prstGeom>
-          <a:noFill/>
-        </p:spPr>
-        <p:txBody>
-          <a:bodyPr wrap="square" anchor="t" lIns="0" rIns="0" tIns="0" bIns="0">
-            <a:spAutoFit/>
-          </a:bodyPr>
-          <a:lstStyle/>
-          <a:p>
-            <a:pPr algn="ctr">
-              <a:lnSpc>
-                <a:spcPct val="130000"/>
-              </a:lnSpc>
-            </a:pPr>
-            <a:r>
-              <a:rPr sz="1050" b="1" lang="ja-JP">
-                <a:solidFill>
-                  <a:srgbClr val="0D7870"/>
-                </a:solidFill>
-                <a:latin typeface="Yu Gothic"/>
-                <a:ea typeface="Yu Gothic"/>
-                <a:cs typeface="Yu Gothic"/>
-              </a:rPr>
-              <a:t>示唆</a:t>
-            </a:r>
-          </a:p>
-        </p:txBody>
-      </p:sp>
-      <p:cxnSp>
-        <p:nvCxnSpPr>
-          <p:cNvPr id="64" name="Connector 63"/>
-          <p:cNvCxnSpPr/>
-          <p:nvPr/>
-        </p:nvCxnSpPr>
-        <p:spPr>
-          <a:xfrm>
-            <a:off x="1764792" y="5797296"/>
-            <a:ext cx="0" cy="329183"/>
-          </a:xfrm>
-          <a:prstGeom prst="line">
-            <a:avLst/>
-          </a:prstGeom>
-          <a:ln w="10160">
-            <a:solidFill>
-              <a:srgbClr val="D1CFC8"/>
-            </a:solidFill>
-          </a:ln>
-          <a:effectLst/>
-        </p:spPr>
-        <p:style>
-          <a:lnRef idx="2">
-            <a:schemeClr val="accent1"/>
-          </a:lnRef>
-          <a:fillRef idx="0">
-            <a:schemeClr val="accent1"/>
-          </a:fillRef>
-          <a:effectRef idx="1">
-            <a:schemeClr val="accent1"/>
-          </a:effectRef>
-          <a:fontRef idx="minor">
-            <a:schemeClr val="tx1"/>
-          </a:fontRef>
-        </p:style>
-      </p:cxnSp>
-      <p:sp>
-        <p:nvSpPr>
-          <p:cNvPr id="65" name="TextBox 64"/>
-          <p:cNvSpPr txBox="1"/>
-          <p:nvPr/>
-        </p:nvSpPr>
-        <p:spPr>
-          <a:xfrm>
-            <a:off x="1837943" y="5797296"/>
-            <a:ext cx="9613087" cy="310896"/>
-          </a:xfrm>
-          <a:prstGeom prst="rect">
-            <a:avLst/>
-          </a:prstGeom>
-          <a:noFill/>
-        </p:spPr>
-        <p:txBody>
-          <a:bodyPr wrap="square" anchor="ctr" lIns="0" rIns="0" tIns="0" bIns="0">
-            <a:spAutoFit/>
-          </a:bodyPr>
-          <a:lstStyle/>
-          <a:p>
-            <a:pPr algn="l">
-              <a:lnSpc>
-                <a:spcPct val="115000"/>
-              </a:lnSpc>
-            </a:pPr>
-            <a:r>
-              <a:rPr sz="1500" b="1" lang="ja-JP">
-                <a:solidFill>
-                  <a:srgbClr val="182C43"/>
-                </a:solidFill>
-                <a:latin typeface="Yu Gothic"/>
-                <a:ea typeface="Yu Gothic"/>
-                <a:cs typeface="Yu Gothic"/>
-              </a:rPr>
-              <a:t>短期の立ち上げは現行方式、中長期の横展開は標準方式が優位となる。</a:t>
-            </a:r>
-          </a:p>
-        </p:txBody>
-      </p:sp>
-      <p:sp>
-        <p:nvSpPr>
-          <p:cNvPr id="66" name="Rectangle 65"/>
+          <p:cNvPr id="61" name="Rectangle 60"/>
           <p:cNvSpPr/>
           <p:nvPr/>
         </p:nvSpPr>
@@ -41896,7 +41235,7 @@
       </p:sp>
       <p:sp>
         <p:nvSpPr>
-          <p:cNvPr id="67" name="TextBox 66"/>
+          <p:cNvPr id="62" name="TextBox 61"/>
           <p:cNvSpPr txBox="1"/>
           <p:nvPr/>
         </p:nvSpPr>
@@ -41937,7 +41276,7 @@
       </p:sp>
       <p:sp>
         <p:nvSpPr>
-          <p:cNvPr id="68" name="TextBox 67"/>
+          <p:cNvPr id="63" name="TextBox 62"/>
           <p:cNvSpPr txBox="1"/>
           <p:nvPr/>
         </p:nvSpPr>
@@ -45029,7 +44368,7 @@
                 <a:ea typeface="Yu Gothic"/>
                 <a:cs typeface="Yu Gothic"/>
               </a:rPr>
-              <a:t>役割ごとの対応手順と引き継ぎを整理する</a:t>
+              <a:t>担当境界と引き継ぎ点を明示し、対応漏れを防止する。</a:t>
             </a:r>
           </a:p>
         </p:txBody>
@@ -47704,148 +47043,6 @@
         </p:nvSpPr>
         <p:spPr>
           <a:xfrm>
-            <a:off x="338328" y="5504688"/>
-            <a:ext cx="11512296" cy="603504"/>
-          </a:xfrm>
-          <a:prstGeom prst="rect">
-            <a:avLst/>
-          </a:prstGeom>
-          <a:solidFill>
-            <a:srgbClr val="DFEBE8"/>
-          </a:solidFill>
-          <a:ln>
-            <a:noFill/>
-          </a:ln>
-          <a:effectLst/>
-        </p:spPr>
-        <p:txBody>
-          <a:bodyPr rtlCol="0" anchor="ctr"/>
-          <a:lstStyle/>
-          <a:p>
-            <a:pPr algn="ctr"/>
-          </a:p>
-        </p:txBody>
-      </p:sp>
-      <p:sp>
-        <p:nvSpPr>
-          <p:cNvPr id="81" name="Oval 80"/>
-          <p:cNvSpPr/>
-          <p:nvPr/>
-        </p:nvSpPr>
-        <p:spPr>
-          <a:xfrm>
-            <a:off x="493776" y="5632703"/>
-            <a:ext cx="347472" cy="347472"/>
-          </a:xfrm>
-          <a:prstGeom prst="ellipse">
-            <a:avLst/>
-          </a:prstGeom>
-          <a:solidFill>
-            <a:srgbClr val="0D7870"/>
-          </a:solidFill>
-          <a:ln>
-            <a:noFill/>
-          </a:ln>
-          <a:effectLst/>
-        </p:spPr>
-        <p:txBody>
-          <a:bodyPr rtlCol="0" anchor="ctr"/>
-          <a:lstStyle/>
-          <a:p>
-            <a:pPr algn="ctr"/>
-          </a:p>
-        </p:txBody>
-      </p:sp>
-      <p:sp>
-        <p:nvSpPr>
-          <p:cNvPr id="82" name="TextBox 81"/>
-          <p:cNvSpPr txBox="1"/>
-          <p:nvPr/>
-        </p:nvSpPr>
-        <p:spPr>
-          <a:xfrm>
-            <a:off x="493776" y="5623559"/>
-            <a:ext cx="347472" cy="347472"/>
-          </a:xfrm>
-          <a:prstGeom prst="rect">
-            <a:avLst/>
-          </a:prstGeom>
-          <a:noFill/>
-        </p:spPr>
-        <p:txBody>
-          <a:bodyPr wrap="square" anchor="ctr" lIns="0" rIns="0" tIns="0" bIns="0">
-            <a:spAutoFit/>
-          </a:bodyPr>
-          <a:lstStyle/>
-          <a:p>
-            <a:pPr algn="ctr">
-              <a:lnSpc>
-                <a:spcPct val="130000"/>
-              </a:lnSpc>
-            </a:pPr>
-            <a:r>
-              <a:rPr sz="1600" b="1" lang="ja-JP">
-                <a:solidFill>
-                  <a:srgbClr val="FFFFFC"/>
-                </a:solidFill>
-                <a:latin typeface="Yu Gothic"/>
-                <a:ea typeface="Yu Gothic"/>
-                <a:cs typeface="Yu Gothic"/>
-              </a:rPr>
-              <a:t>i</a:t>
-            </a:r>
-          </a:p>
-        </p:txBody>
-      </p:sp>
-      <p:sp>
-        <p:nvSpPr>
-          <p:cNvPr id="83" name="TextBox 82"/>
-          <p:cNvSpPr txBox="1"/>
-          <p:nvPr/>
-        </p:nvSpPr>
-        <p:spPr>
-          <a:xfrm>
-            <a:off x="960120" y="5605272"/>
-            <a:ext cx="10671048" cy="384048"/>
-          </a:xfrm>
-          <a:prstGeom prst="rect">
-            <a:avLst/>
-          </a:prstGeom>
-          <a:noFill/>
-        </p:spPr>
-        <p:txBody>
-          <a:bodyPr wrap="square" anchor="ctr" lIns="0" rIns="0" tIns="0" bIns="0">
-            <a:spAutoFit/>
-          </a:bodyPr>
-          <a:lstStyle/>
-          <a:p>
-            <a:pPr algn="l">
-              <a:lnSpc>
-                <a:spcPct val="115000"/>
-              </a:lnSpc>
-            </a:pPr>
-            <a:r>
-              <a:rPr sz="1250" b="1" lang="ja-JP">
-                <a:solidFill>
-                  <a:srgbClr val="182C43"/>
-                </a:solidFill>
-                <a:latin typeface="Yu Gothic"/>
-                <a:ea typeface="Yu Gothic"/>
-                <a:cs typeface="Yu Gothic"/>
-              </a:rPr>
-              <a:t>担当境界と引き継ぎ点を明示し、対応漏れを防止する。</a:t>
-            </a:r>
-          </a:p>
-        </p:txBody>
-      </p:sp>
-      <p:sp>
-        <p:nvSpPr>
-          <p:cNvPr id="84" name="Rectangle 83"/>
-          <p:cNvSpPr/>
-          <p:nvPr/>
-        </p:nvSpPr>
-        <p:spPr>
-          <a:xfrm>
             <a:off x="658368" y="6327648"/>
             <a:ext cx="10881360" cy="9144"/>
           </a:xfrm>
@@ -47884,7 +47081,7 @@
       </p:sp>
       <p:sp>
         <p:nvSpPr>
-          <p:cNvPr id="85" name="TextBox 84"/>
+          <p:cNvPr id="81" name="TextBox 80"/>
           <p:cNvSpPr txBox="1"/>
           <p:nvPr/>
         </p:nvSpPr>
@@ -47925,7 +47122,7 @@
       </p:sp>
       <p:sp>
         <p:nvSpPr>
-          <p:cNvPr id="86" name="TextBox 85"/>
+          <p:cNvPr id="82" name="TextBox 81"/>
           <p:cNvSpPr txBox="1"/>
           <p:nvPr/>
         </p:nvSpPr>
@@ -48121,14 +47318,55 @@
       </p:sp>
       <p:sp>
         <p:nvSpPr>
-          <p:cNvPr id="5" name="Rectangle 4"/>
+          <p:cNvPr id="5" name="TextBox 4"/>
+          <p:cNvSpPr txBox="1"/>
+          <p:nvPr/>
+        </p:nvSpPr>
+        <p:spPr>
+          <a:xfrm>
+            <a:off x="658368" y="1444752"/>
+            <a:ext cx="10881360" cy="237236"/>
+          </a:xfrm>
+          <a:prstGeom prst="rect">
+            <a:avLst/>
+          </a:prstGeom>
+          <a:noFill/>
+        </p:spPr>
+        <p:txBody>
+          <a:bodyPr wrap="square" anchor="t" lIns="0" rIns="0" tIns="0" bIns="0">
+            <a:spAutoFit/>
+          </a:bodyPr>
+          <a:lstStyle/>
+          <a:p>
+            <a:pPr algn="l">
+              <a:lnSpc>
+                <a:spcPct val="118000"/>
+              </a:lnSpc>
+            </a:pPr>
+            <a:r>
+              <a:rPr sz="1400" b="0" lang="ja-JP">
+                <a:solidFill>
+                  <a:srgbClr val="666E70"/>
+                </a:solidFill>
+                <a:latin typeface="Yu Gothic"/>
+                <a:ea typeface="Yu Gothic"/>
+                <a:cs typeface="Yu Gothic"/>
+              </a:rPr>
+              <a:t>メッセージの順序と送受信者を分けて確認し、作業前の認識差を減らす。</a:t>
+            </a:r>
+          </a:p>
+        </p:txBody>
+      </p:sp>
+      <p:sp>
+        <p:nvSpPr>
+          <p:cNvPr id="6" name="Rectangle 5"/>
           <p:cNvSpPr/>
           <p:nvPr/>
         </p:nvSpPr>
         <p:spPr>
           <a:xfrm>
-            <a:off x="1587855" y="2507650"/>
-            <a:ext cx="9015984" cy="1819656"/>
+            <a:off x="1587855" y="2912546"/>
+            <a:ext cx="9015984" cy="2185416"/>
           </a:xfrm>
           <a:prstGeom prst="rect">
             <a:avLst/>
@@ -48151,13 +47389,13 @@
       </p:sp>
       <p:sp>
         <p:nvSpPr>
-          <p:cNvPr id="6" name="TextBox 5"/>
-          <p:cNvSpPr txBox="1"/>
-          <p:nvPr/>
-        </p:nvSpPr>
-        <p:spPr>
-          <a:xfrm>
-            <a:off x="1715871" y="2525938"/>
+          <p:cNvPr id="7" name="TextBox 6"/>
+          <p:cNvSpPr txBox="1"/>
+          <p:nvPr/>
+        </p:nvSpPr>
+        <p:spPr>
+          <a:xfrm>
+            <a:off x="1715871" y="2930834"/>
             <a:ext cx="1024128" cy="201168"/>
           </a:xfrm>
           <a:prstGeom prst="rect">
@@ -48194,14 +47432,14 @@
       </p:sp>
       <p:sp>
         <p:nvSpPr>
-          <p:cNvPr id="7" name="Rectangle 6"/>
+          <p:cNvPr id="8" name="Rectangle 7"/>
           <p:cNvSpPr/>
           <p:nvPr/>
         </p:nvSpPr>
         <p:spPr>
           <a:xfrm>
-            <a:off x="1587855" y="4336450"/>
-            <a:ext cx="9015984" cy="868679"/>
+            <a:off x="1587855" y="5107106"/>
+            <a:ext cx="9015984" cy="960119"/>
           </a:xfrm>
           <a:prstGeom prst="rect">
             <a:avLst/>
@@ -48224,13 +47462,13 @@
       </p:sp>
       <p:sp>
         <p:nvSpPr>
-          <p:cNvPr id="8" name="TextBox 7"/>
-          <p:cNvSpPr txBox="1"/>
-          <p:nvPr/>
-        </p:nvSpPr>
-        <p:spPr>
-          <a:xfrm>
-            <a:off x="1715871" y="4354738"/>
+          <p:cNvPr id="9" name="TextBox 8"/>
+          <p:cNvSpPr txBox="1"/>
+          <p:nvPr/>
+        </p:nvSpPr>
+        <p:spPr>
+          <a:xfrm>
+            <a:off x="1715871" y="5125394"/>
             <a:ext cx="1024128" cy="201168"/>
           </a:xfrm>
           <a:prstGeom prst="rect">
@@ -48267,13 +47505,13 @@
       </p:sp>
       <p:sp>
         <p:nvSpPr>
-          <p:cNvPr id="9" name="TextBox 8"/>
-          <p:cNvSpPr txBox="1"/>
-          <p:nvPr/>
-        </p:nvSpPr>
-        <p:spPr>
-          <a:xfrm>
-            <a:off x="1383761" y="1591056"/>
+          <p:cNvPr id="10" name="TextBox 9"/>
+          <p:cNvSpPr txBox="1"/>
+          <p:nvPr/>
+        </p:nvSpPr>
+        <p:spPr>
+          <a:xfrm>
+            <a:off x="1383761" y="1983740"/>
             <a:ext cx="1286012" cy="420624"/>
           </a:xfrm>
           <a:prstGeom prst="rect">
@@ -48308,13 +47546,13 @@
       </p:sp>
       <p:cxnSp>
         <p:nvCxnSpPr>
-          <p:cNvPr id="10" name="Connector 9"/>
+          <p:cNvPr id="11" name="Connector 10"/>
           <p:cNvCxnSpPr/>
           <p:nvPr/>
         </p:nvCxnSpPr>
         <p:spPr>
           <a:xfrm>
-            <a:off x="1383761" y="2011680"/>
+            <a:off x="1383761" y="2404364"/>
             <a:ext cx="1286012" cy="0"/>
           </a:xfrm>
           <a:prstGeom prst="line">
@@ -48344,14 +47582,14 @@
       </p:cxnSp>
       <p:cxnSp>
         <p:nvCxnSpPr>
-          <p:cNvPr id="11" name="Connector 10"/>
+          <p:cNvPr id="12" name="Connector 11"/>
           <p:cNvCxnSpPr/>
           <p:nvPr/>
         </p:nvCxnSpPr>
         <p:spPr>
           <a:xfrm>
-            <a:off x="2026767" y="2011680"/>
-            <a:ext cx="0" cy="3193450"/>
+            <a:off x="2026767" y="2404364"/>
+            <a:ext cx="0" cy="3662862"/>
           </a:xfrm>
           <a:prstGeom prst="line">
             <a:avLst/>
@@ -48381,13 +47619,13 @@
       </p:cxnSp>
       <p:sp>
         <p:nvSpPr>
-          <p:cNvPr id="12" name="TextBox 11"/>
-          <p:cNvSpPr txBox="1"/>
-          <p:nvPr/>
-        </p:nvSpPr>
-        <p:spPr>
-          <a:xfrm>
-            <a:off x="3418301" y="1591056"/>
+          <p:cNvPr id="13" name="TextBox 12"/>
+          <p:cNvSpPr txBox="1"/>
+          <p:nvPr/>
+        </p:nvSpPr>
+        <p:spPr>
+          <a:xfrm>
+            <a:off x="3418301" y="1983740"/>
             <a:ext cx="1286012" cy="420624"/>
           </a:xfrm>
           <a:prstGeom prst="rect">
@@ -48422,13 +47660,13 @@
       </p:sp>
       <p:cxnSp>
         <p:nvCxnSpPr>
-          <p:cNvPr id="13" name="Connector 12"/>
+          <p:cNvPr id="14" name="Connector 13"/>
           <p:cNvCxnSpPr/>
           <p:nvPr/>
         </p:nvCxnSpPr>
         <p:spPr>
           <a:xfrm>
-            <a:off x="3418301" y="2011680"/>
+            <a:off x="3418301" y="2404364"/>
             <a:ext cx="1286012" cy="0"/>
           </a:xfrm>
           <a:prstGeom prst="line">
@@ -48458,14 +47696,14 @@
       </p:cxnSp>
       <p:cxnSp>
         <p:nvCxnSpPr>
-          <p:cNvPr id="14" name="Connector 13"/>
+          <p:cNvPr id="15" name="Connector 14"/>
           <p:cNvCxnSpPr/>
           <p:nvPr/>
         </p:nvCxnSpPr>
         <p:spPr>
           <a:xfrm>
-            <a:off x="4061307" y="2011680"/>
-            <a:ext cx="0" cy="3193450"/>
+            <a:off x="4061307" y="2404364"/>
+            <a:ext cx="0" cy="3662862"/>
           </a:xfrm>
           <a:prstGeom prst="line">
             <a:avLst/>
@@ -48495,13 +47733,13 @@
       </p:cxnSp>
       <p:sp>
         <p:nvSpPr>
-          <p:cNvPr id="15" name="TextBox 14"/>
-          <p:cNvSpPr txBox="1"/>
-          <p:nvPr/>
-        </p:nvSpPr>
-        <p:spPr>
-          <a:xfrm>
-            <a:off x="5452841" y="1591056"/>
+          <p:cNvPr id="16" name="TextBox 15"/>
+          <p:cNvSpPr txBox="1"/>
+          <p:nvPr/>
+        </p:nvSpPr>
+        <p:spPr>
+          <a:xfrm>
+            <a:off x="5452841" y="1983740"/>
             <a:ext cx="1286012" cy="420624"/>
           </a:xfrm>
           <a:prstGeom prst="rect">
@@ -48536,13 +47774,13 @@
       </p:sp>
       <p:cxnSp>
         <p:nvCxnSpPr>
-          <p:cNvPr id="16" name="Connector 15"/>
+          <p:cNvPr id="17" name="Connector 16"/>
           <p:cNvCxnSpPr/>
           <p:nvPr/>
         </p:nvCxnSpPr>
         <p:spPr>
           <a:xfrm>
-            <a:off x="5452841" y="2011680"/>
+            <a:off x="5452841" y="2404364"/>
             <a:ext cx="1286012" cy="0"/>
           </a:xfrm>
           <a:prstGeom prst="line">
@@ -48572,14 +47810,14 @@
       </p:cxnSp>
       <p:cxnSp>
         <p:nvCxnSpPr>
-          <p:cNvPr id="17" name="Connector 16"/>
+          <p:cNvPr id="18" name="Connector 17"/>
           <p:cNvCxnSpPr/>
           <p:nvPr/>
         </p:nvCxnSpPr>
         <p:spPr>
           <a:xfrm>
-            <a:off x="6095847" y="2011680"/>
-            <a:ext cx="0" cy="3193450"/>
+            <a:off x="6095847" y="2404364"/>
+            <a:ext cx="0" cy="3662862"/>
           </a:xfrm>
           <a:prstGeom prst="line">
             <a:avLst/>
@@ -48609,13 +47847,13 @@
       </p:cxnSp>
       <p:sp>
         <p:nvSpPr>
-          <p:cNvPr id="18" name="TextBox 17"/>
-          <p:cNvSpPr txBox="1"/>
-          <p:nvPr/>
-        </p:nvSpPr>
-        <p:spPr>
-          <a:xfrm>
-            <a:off x="7487381" y="1591056"/>
+          <p:cNvPr id="19" name="TextBox 18"/>
+          <p:cNvSpPr txBox="1"/>
+          <p:nvPr/>
+        </p:nvSpPr>
+        <p:spPr>
+          <a:xfrm>
+            <a:off x="7487381" y="1983740"/>
             <a:ext cx="1286012" cy="420624"/>
           </a:xfrm>
           <a:prstGeom prst="rect">
@@ -48650,13 +47888,13 @@
       </p:sp>
       <p:cxnSp>
         <p:nvCxnSpPr>
-          <p:cNvPr id="19" name="Connector 18"/>
+          <p:cNvPr id="20" name="Connector 19"/>
           <p:cNvCxnSpPr/>
           <p:nvPr/>
         </p:nvCxnSpPr>
         <p:spPr>
           <a:xfrm>
-            <a:off x="7487381" y="2011680"/>
+            <a:off x="7487381" y="2404364"/>
             <a:ext cx="1286012" cy="0"/>
           </a:xfrm>
           <a:prstGeom prst="line">
@@ -48686,14 +47924,14 @@
       </p:cxnSp>
       <p:cxnSp>
         <p:nvCxnSpPr>
-          <p:cNvPr id="20" name="Connector 19"/>
+          <p:cNvPr id="21" name="Connector 20"/>
           <p:cNvCxnSpPr/>
           <p:nvPr/>
         </p:nvCxnSpPr>
         <p:spPr>
           <a:xfrm>
-            <a:off x="8130387" y="2011680"/>
-            <a:ext cx="0" cy="3193450"/>
+            <a:off x="8130387" y="2404364"/>
+            <a:ext cx="0" cy="3662862"/>
           </a:xfrm>
           <a:prstGeom prst="line">
             <a:avLst/>
@@ -48723,13 +47961,13 @@
       </p:cxnSp>
       <p:sp>
         <p:nvSpPr>
-          <p:cNvPr id="21" name="TextBox 20"/>
-          <p:cNvSpPr txBox="1"/>
-          <p:nvPr/>
-        </p:nvSpPr>
-        <p:spPr>
-          <a:xfrm>
-            <a:off x="9521921" y="1591056"/>
+          <p:cNvPr id="22" name="TextBox 21"/>
+          <p:cNvSpPr txBox="1"/>
+          <p:nvPr/>
+        </p:nvSpPr>
+        <p:spPr>
+          <a:xfrm>
+            <a:off x="9521921" y="1983740"/>
             <a:ext cx="1286012" cy="420624"/>
           </a:xfrm>
           <a:prstGeom prst="rect">
@@ -48762,42 +48000,6 @@
           </a:p>
         </p:txBody>
       </p:sp>
-      <p:cxnSp>
-        <p:nvCxnSpPr>
-          <p:cNvPr id="22" name="Connector 21"/>
-          <p:cNvCxnSpPr/>
-          <p:nvPr/>
-        </p:nvCxnSpPr>
-        <p:spPr>
-          <a:xfrm>
-            <a:off x="9521921" y="2011680"/>
-            <a:ext cx="1286012" cy="0"/>
-          </a:xfrm>
-          <a:prstGeom prst="line">
-            <a:avLst/>
-          </a:prstGeom>
-          <a:ln w="10160">
-            <a:solidFill>
-              <a:srgbClr val="D1CFC8"/>
-            </a:solidFill>
-          </a:ln>
-          <a:effectLst/>
-        </p:spPr>
-        <p:style>
-          <a:lnRef idx="2">
-            <a:schemeClr val="accent1"/>
-          </a:lnRef>
-          <a:fillRef idx="0">
-            <a:schemeClr val="accent1"/>
-          </a:fillRef>
-          <a:effectRef idx="1">
-            <a:schemeClr val="accent1"/>
-          </a:effectRef>
-          <a:fontRef idx="minor">
-            <a:schemeClr val="tx1"/>
-          </a:fontRef>
-        </p:style>
-      </p:cxnSp>
       <p:cxnSp>
         <p:nvCxnSpPr>
           <p:cNvPr id="23" name="Connector 22"/>
@@ -48806,16 +48008,15 @@
         </p:nvCxnSpPr>
         <p:spPr>
           <a:xfrm>
-            <a:off x="10164927" y="2011680"/>
-            <a:ext cx="0" cy="3193450"/>
+            <a:off x="9521921" y="2404364"/>
+            <a:ext cx="1286012" cy="0"/>
           </a:xfrm>
           <a:prstGeom prst="line">
             <a:avLst/>
           </a:prstGeom>
-          <a:ln w="9525">
-            <a:prstDash val="dash"/>
+          <a:ln w="10160">
             <a:solidFill>
-              <a:srgbClr val="666E70"/>
+              <a:srgbClr val="D1CFC8"/>
             </a:solidFill>
           </a:ln>
           <a:effectLst/>
@@ -48842,18 +48043,18 @@
           <p:nvPr/>
         </p:nvCxnSpPr>
         <p:spPr>
-          <a:xfrm flipH="1">
-            <a:off x="2026767" y="2397922"/>
-            <a:ext cx="2034540" cy="0"/>
+          <a:xfrm>
+            <a:off x="10164927" y="2404364"/>
+            <a:ext cx="0" cy="3662862"/>
           </a:xfrm>
           <a:prstGeom prst="line">
             <a:avLst/>
           </a:prstGeom>
-          <a:ln w="13335">
+          <a:ln w="9525">
+            <a:prstDash val="dash"/>
             <a:solidFill>
               <a:srgbClr val="666E70"/>
             </a:solidFill>
-            <a:tailEnd type="triangle" w="med" len="med"/>
           </a:ln>
           <a:effectLst/>
         </p:spPr>
@@ -48872,59 +48073,16 @@
           </a:fontRef>
         </p:style>
       </p:cxnSp>
-      <p:sp>
-        <p:nvSpPr>
-          <p:cNvPr id="25" name="TextBox 24"/>
-          <p:cNvSpPr txBox="1"/>
-          <p:nvPr/>
-        </p:nvSpPr>
-        <p:spPr>
-          <a:xfrm>
-            <a:off x="2257653" y="2151034"/>
-            <a:ext cx="1572768" cy="219456"/>
-          </a:xfrm>
-          <a:prstGeom prst="rect">
-            <a:avLst/>
-          </a:prstGeom>
-          <a:solidFill>
-            <a:srgbClr val="F7F5EF"/>
-          </a:solidFill>
-        </p:spPr>
-        <p:txBody>
-          <a:bodyPr wrap="square" anchor="ctr" lIns="0" rIns="0" tIns="0" bIns="0">
-            <a:spAutoFit/>
-          </a:bodyPr>
-          <a:lstStyle/>
-          <a:p>
-            <a:pPr algn="ctr">
-              <a:lnSpc>
-                <a:spcPct val="100000"/>
-              </a:lnSpc>
-            </a:pPr>
-            <a:r>
-              <a:rPr sz="1050" b="1" lang="ja-JP">
-                <a:solidFill>
-                  <a:srgbClr val="182C43"/>
-                </a:solidFill>
-                <a:latin typeface="Yu Gothic"/>
-                <a:ea typeface="Yu Gothic"/>
-                <a:cs typeface="Yu Gothic"/>
-              </a:rPr>
-              <a:t>障害検知</a:t>
-            </a:r>
-          </a:p>
-        </p:txBody>
-      </p:sp>
       <p:cxnSp>
         <p:nvCxnSpPr>
-          <p:cNvPr id="26" name="Connector 25"/>
+          <p:cNvPr id="25" name="Connector 24"/>
           <p:cNvCxnSpPr/>
           <p:nvPr/>
         </p:nvCxnSpPr>
         <p:spPr>
-          <a:xfrm>
-            <a:off x="2026767" y="2763682"/>
-            <a:ext cx="4069080" cy="0"/>
+          <a:xfrm flipH="1">
+            <a:off x="2026767" y="2729666"/>
+            <a:ext cx="2034540" cy="0"/>
           </a:xfrm>
           <a:prstGeom prst="line">
             <a:avLst/>
@@ -48954,13 +48112,93 @@
       </p:cxnSp>
       <p:sp>
         <p:nvSpPr>
-          <p:cNvPr id="27" name="TextBox 26"/>
-          <p:cNvSpPr txBox="1"/>
-          <p:nvPr/>
-        </p:nvSpPr>
-        <p:spPr>
-          <a:xfrm>
-            <a:off x="3274923" y="2516794"/>
+          <p:cNvPr id="26" name="TextBox 25"/>
+          <p:cNvSpPr txBox="1"/>
+          <p:nvPr/>
+        </p:nvSpPr>
+        <p:spPr>
+          <a:xfrm>
+            <a:off x="2257653" y="2482778"/>
+            <a:ext cx="1572768" cy="219456"/>
+          </a:xfrm>
+          <a:prstGeom prst="rect">
+            <a:avLst/>
+          </a:prstGeom>
+          <a:solidFill>
+            <a:srgbClr val="F7F5EF"/>
+          </a:solidFill>
+        </p:spPr>
+        <p:txBody>
+          <a:bodyPr wrap="square" anchor="ctr" lIns="0" rIns="0" tIns="0" bIns="0">
+            <a:spAutoFit/>
+          </a:bodyPr>
+          <a:lstStyle/>
+          <a:p>
+            <a:pPr algn="ctr">
+              <a:lnSpc>
+                <a:spcPct val="100000"/>
+              </a:lnSpc>
+            </a:pPr>
+            <a:r>
+              <a:rPr sz="1050" b="1" lang="ja-JP">
+                <a:solidFill>
+                  <a:srgbClr val="182C43"/>
+                </a:solidFill>
+                <a:latin typeface="Yu Gothic"/>
+                <a:ea typeface="Yu Gothic"/>
+                <a:cs typeface="Yu Gothic"/>
+              </a:rPr>
+              <a:t>障害検知</a:t>
+            </a:r>
+          </a:p>
+        </p:txBody>
+      </p:sp>
+      <p:cxnSp>
+        <p:nvCxnSpPr>
+          <p:cNvPr id="27" name="Connector 26"/>
+          <p:cNvCxnSpPr/>
+          <p:nvPr/>
+        </p:nvCxnSpPr>
+        <p:spPr>
+          <a:xfrm>
+            <a:off x="2026767" y="3168578"/>
+            <a:ext cx="4069080" cy="0"/>
+          </a:xfrm>
+          <a:prstGeom prst="line">
+            <a:avLst/>
+          </a:prstGeom>
+          <a:ln w="13335">
+            <a:solidFill>
+              <a:srgbClr val="666E70"/>
+            </a:solidFill>
+            <a:tailEnd type="triangle" w="med" len="med"/>
+          </a:ln>
+          <a:effectLst/>
+        </p:spPr>
+        <p:style>
+          <a:lnRef idx="2">
+            <a:schemeClr val="accent1"/>
+          </a:lnRef>
+          <a:fillRef idx="0">
+            <a:schemeClr val="accent1"/>
+          </a:fillRef>
+          <a:effectRef idx="1">
+            <a:schemeClr val="accent1"/>
+          </a:effectRef>
+          <a:fontRef idx="minor">
+            <a:schemeClr val="tx1"/>
+          </a:fontRef>
+        </p:style>
+      </p:cxnSp>
+      <p:sp>
+        <p:nvSpPr>
+          <p:cNvPr id="28" name="TextBox 27"/>
+          <p:cNvSpPr txBox="1"/>
+          <p:nvPr/>
+        </p:nvSpPr>
+        <p:spPr>
+          <a:xfrm>
+            <a:off x="3274923" y="2921690"/>
             <a:ext cx="1572768" cy="219456"/>
           </a:xfrm>
           <a:prstGeom prst="rect">
@@ -48997,13 +48235,13 @@
       </p:sp>
       <p:cxnSp>
         <p:nvCxnSpPr>
-          <p:cNvPr id="28" name="Connector 27"/>
+          <p:cNvPr id="29" name="Connector 28"/>
           <p:cNvCxnSpPr/>
           <p:nvPr/>
         </p:nvCxnSpPr>
         <p:spPr>
           <a:xfrm flipH="1">
-            <a:off x="2026767" y="3129442"/>
+            <a:off x="2026767" y="3607490"/>
             <a:ext cx="4069080" cy="0"/>
           </a:xfrm>
           <a:prstGeom prst="line">
@@ -49035,13 +48273,13 @@
       </p:cxnSp>
       <p:sp>
         <p:nvSpPr>
-          <p:cNvPr id="29" name="TextBox 28"/>
-          <p:cNvSpPr txBox="1"/>
-          <p:nvPr/>
-        </p:nvSpPr>
-        <p:spPr>
-          <a:xfrm>
-            <a:off x="3274923" y="2882554"/>
+          <p:cNvPr id="30" name="TextBox 29"/>
+          <p:cNvSpPr txBox="1"/>
+          <p:nvPr/>
+        </p:nvSpPr>
+        <p:spPr>
+          <a:xfrm>
+            <a:off x="3274923" y="3360602"/>
             <a:ext cx="1572768" cy="219456"/>
           </a:xfrm>
           <a:prstGeom prst="rect">
@@ -49078,13 +48316,13 @@
       </p:sp>
       <p:cxnSp>
         <p:nvCxnSpPr>
-          <p:cNvPr id="30" name="Connector 29"/>
+          <p:cNvPr id="31" name="Connector 30"/>
           <p:cNvCxnSpPr/>
           <p:nvPr/>
         </p:nvCxnSpPr>
         <p:spPr>
           <a:xfrm>
-            <a:off x="4061307" y="3495202"/>
+            <a:off x="4061307" y="4046402"/>
             <a:ext cx="2034540" cy="0"/>
           </a:xfrm>
           <a:prstGeom prst="line">
@@ -49115,13 +48353,13 @@
       </p:cxnSp>
       <p:sp>
         <p:nvSpPr>
-          <p:cNvPr id="31" name="TextBox 30"/>
-          <p:cNvSpPr txBox="1"/>
-          <p:nvPr/>
-        </p:nvSpPr>
-        <p:spPr>
-          <a:xfrm>
-            <a:off x="4292193" y="3248314"/>
+          <p:cNvPr id="32" name="TextBox 31"/>
+          <p:cNvSpPr txBox="1"/>
+          <p:nvPr/>
+        </p:nvSpPr>
+        <p:spPr>
+          <a:xfrm>
+            <a:off x="4292193" y="3799514"/>
             <a:ext cx="1572768" cy="219456"/>
           </a:xfrm>
           <a:prstGeom prst="rect">
@@ -49158,13 +48396,13 @@
       </p:sp>
       <p:cxnSp>
         <p:nvCxnSpPr>
-          <p:cNvPr id="32" name="Connector 31"/>
+          <p:cNvPr id="33" name="Connector 32"/>
           <p:cNvCxnSpPr/>
           <p:nvPr/>
         </p:nvCxnSpPr>
         <p:spPr>
           <a:xfrm>
-            <a:off x="6095847" y="3860962"/>
+            <a:off x="6095847" y="4485314"/>
             <a:ext cx="2034540" cy="0"/>
           </a:xfrm>
           <a:prstGeom prst="line">
@@ -49195,13 +48433,13 @@
       </p:cxnSp>
       <p:sp>
         <p:nvSpPr>
-          <p:cNvPr id="33" name="TextBox 32"/>
-          <p:cNvSpPr txBox="1"/>
-          <p:nvPr/>
-        </p:nvSpPr>
-        <p:spPr>
-          <a:xfrm>
-            <a:off x="6326733" y="3614074"/>
+          <p:cNvPr id="34" name="TextBox 33"/>
+          <p:cNvSpPr txBox="1"/>
+          <p:nvPr/>
+        </p:nvSpPr>
+        <p:spPr>
+          <a:xfrm>
+            <a:off x="6326733" y="4238426"/>
             <a:ext cx="1572768" cy="219456"/>
           </a:xfrm>
           <a:prstGeom prst="rect">
@@ -49238,13 +48476,13 @@
       </p:sp>
       <p:cxnSp>
         <p:nvCxnSpPr>
-          <p:cNvPr id="34" name="Connector 33"/>
+          <p:cNvPr id="35" name="Connector 34"/>
           <p:cNvCxnSpPr/>
           <p:nvPr/>
         </p:nvCxnSpPr>
         <p:spPr>
           <a:xfrm>
-            <a:off x="8130387" y="4226722"/>
+            <a:off x="8130387" y="4924226"/>
             <a:ext cx="2034540" cy="0"/>
           </a:xfrm>
           <a:prstGeom prst="line">
@@ -49275,13 +48513,13 @@
       </p:cxnSp>
       <p:sp>
         <p:nvSpPr>
-          <p:cNvPr id="35" name="TextBox 34"/>
-          <p:cNvSpPr txBox="1"/>
-          <p:nvPr/>
-        </p:nvSpPr>
-        <p:spPr>
-          <a:xfrm>
-            <a:off x="8361273" y="3979834"/>
+          <p:cNvPr id="36" name="TextBox 35"/>
+          <p:cNvSpPr txBox="1"/>
+          <p:nvPr/>
+        </p:nvSpPr>
+        <p:spPr>
+          <a:xfrm>
+            <a:off x="8361273" y="4677338"/>
             <a:ext cx="1572768" cy="219456"/>
           </a:xfrm>
           <a:prstGeom prst="rect">
@@ -49318,13 +48556,13 @@
       </p:sp>
       <p:cxnSp>
         <p:nvCxnSpPr>
-          <p:cNvPr id="36" name="Connector 35"/>
+          <p:cNvPr id="37" name="Connector 36"/>
           <p:cNvCxnSpPr/>
           <p:nvPr/>
         </p:nvCxnSpPr>
         <p:spPr>
           <a:xfrm flipH="1">
-            <a:off x="8130387" y="4592482"/>
+            <a:off x="8130387" y="5363138"/>
             <a:ext cx="2034540" cy="0"/>
           </a:xfrm>
           <a:prstGeom prst="line">
@@ -49356,13 +48594,13 @@
       </p:cxnSp>
       <p:sp>
         <p:nvSpPr>
-          <p:cNvPr id="37" name="TextBox 36"/>
-          <p:cNvSpPr txBox="1"/>
-          <p:nvPr/>
-        </p:nvSpPr>
-        <p:spPr>
-          <a:xfrm>
-            <a:off x="8361273" y="4345594"/>
+          <p:cNvPr id="38" name="TextBox 37"/>
+          <p:cNvSpPr txBox="1"/>
+          <p:nvPr/>
+        </p:nvSpPr>
+        <p:spPr>
+          <a:xfrm>
+            <a:off x="8361273" y="5116250"/>
             <a:ext cx="1572768" cy="219456"/>
           </a:xfrm>
           <a:prstGeom prst="rect">
@@ -49399,13 +48637,13 @@
       </p:sp>
       <p:cxnSp>
         <p:nvCxnSpPr>
-          <p:cNvPr id="38" name="Connector 37"/>
+          <p:cNvPr id="39" name="Connector 38"/>
           <p:cNvCxnSpPr/>
           <p:nvPr/>
         </p:nvCxnSpPr>
         <p:spPr>
           <a:xfrm flipH="1">
-            <a:off x="2026767" y="4958242"/>
+            <a:off x="2026767" y="5802050"/>
             <a:ext cx="2034540" cy="0"/>
           </a:xfrm>
           <a:prstGeom prst="line">
@@ -49436,13 +48674,13 @@
       </p:cxnSp>
       <p:sp>
         <p:nvSpPr>
-          <p:cNvPr id="39" name="TextBox 38"/>
-          <p:cNvSpPr txBox="1"/>
-          <p:nvPr/>
-        </p:nvSpPr>
-        <p:spPr>
-          <a:xfrm>
-            <a:off x="2257653" y="4711354"/>
+          <p:cNvPr id="40" name="TextBox 39"/>
+          <p:cNvSpPr txBox="1"/>
+          <p:nvPr/>
+        </p:nvSpPr>
+        <p:spPr>
+          <a:xfrm>
+            <a:off x="2257653" y="5555162"/>
             <a:ext cx="1572768" cy="219456"/>
           </a:xfrm>
           <a:prstGeom prst="rect">
@@ -49479,13 +48717,13 @@
       </p:sp>
       <p:sp>
         <p:nvSpPr>
-          <p:cNvPr id="40" name="TextBox 39"/>
-          <p:cNvSpPr txBox="1"/>
-          <p:nvPr/>
-        </p:nvSpPr>
-        <p:spPr>
-          <a:xfrm>
-            <a:off x="594360" y="5449824"/>
+          <p:cNvPr id="41" name="TextBox 40"/>
+          <p:cNvSpPr txBox="1"/>
+          <p:nvPr/>
+        </p:nvSpPr>
+        <p:spPr>
+          <a:xfrm>
+            <a:off x="594360" y="6108192"/>
             <a:ext cx="347472" cy="164592"/>
           </a:xfrm>
           <a:prstGeom prst="rect">
@@ -49520,13 +48758,13 @@
       </p:sp>
       <p:cxnSp>
         <p:nvCxnSpPr>
-          <p:cNvPr id="41" name="Connector 40"/>
+          <p:cNvPr id="42" name="Connector 41"/>
           <p:cNvCxnSpPr/>
           <p:nvPr/>
         </p:nvCxnSpPr>
         <p:spPr>
           <a:xfrm>
-            <a:off x="1033271" y="5532120"/>
+            <a:off x="1033271" y="6190488"/>
             <a:ext cx="256033" cy="0"/>
           </a:xfrm>
           <a:prstGeom prst="line">
@@ -49557,13 +48795,13 @@
       </p:cxnSp>
       <p:sp>
         <p:nvSpPr>
-          <p:cNvPr id="42" name="TextBox 41"/>
-          <p:cNvSpPr txBox="1"/>
-          <p:nvPr/>
-        </p:nvSpPr>
-        <p:spPr>
-          <a:xfrm>
-            <a:off x="1344168" y="5449824"/>
+          <p:cNvPr id="43" name="TextBox 42"/>
+          <p:cNvSpPr txBox="1"/>
+          <p:nvPr/>
+        </p:nvSpPr>
+        <p:spPr>
+          <a:xfrm>
+            <a:off x="1344168" y="6108192"/>
             <a:ext cx="512064" cy="164592"/>
           </a:xfrm>
           <a:prstGeom prst="rect">
@@ -49598,13 +48836,13 @@
       </p:sp>
       <p:cxnSp>
         <p:nvCxnSpPr>
-          <p:cNvPr id="43" name="Connector 42"/>
+          <p:cNvPr id="44" name="Connector 43"/>
           <p:cNvCxnSpPr/>
           <p:nvPr/>
         </p:nvCxnSpPr>
         <p:spPr>
           <a:xfrm>
-            <a:off x="1993391" y="5532120"/>
+            <a:off x="1993391" y="6190488"/>
             <a:ext cx="256033" cy="0"/>
           </a:xfrm>
           <a:prstGeom prst="line">
@@ -49636,13 +48874,13 @@
       </p:cxnSp>
       <p:sp>
         <p:nvSpPr>
-          <p:cNvPr id="44" name="TextBox 43"/>
-          <p:cNvSpPr txBox="1"/>
-          <p:nvPr/>
-        </p:nvSpPr>
-        <p:spPr>
-          <a:xfrm>
-            <a:off x="2304287" y="5449824"/>
+          <p:cNvPr id="45" name="TextBox 44"/>
+          <p:cNvSpPr txBox="1"/>
+          <p:nvPr/>
+        </p:nvSpPr>
+        <p:spPr>
+          <a:xfrm>
+            <a:off x="2304287" y="6108192"/>
             <a:ext cx="512064" cy="164592"/>
           </a:xfrm>
           <a:prstGeom prst="rect">
@@ -49677,209 +48915,7 @@
       </p:sp>
       <p:sp>
         <p:nvSpPr>
-          <p:cNvPr id="45" name="Rectangle 44"/>
-          <p:cNvSpPr/>
-          <p:nvPr/>
-        </p:nvSpPr>
-        <p:spPr>
-          <a:xfrm>
-            <a:off x="502920" y="5696712"/>
-            <a:ext cx="11185855" cy="530352"/>
-          </a:xfrm>
-          <a:prstGeom prst="rect">
-            <a:avLst/>
-          </a:prstGeom>
-          <a:solidFill>
-            <a:srgbClr val="DFEBE8"/>
-          </a:solidFill>
-          <a:ln>
-            <a:noFill/>
-          </a:ln>
-          <a:effectLst/>
-        </p:spPr>
-        <p:txBody>
-          <a:bodyPr rtlCol="0" anchor="ctr"/>
-          <a:lstStyle/>
-          <a:p>
-            <a:pPr algn="ctr"/>
-          </a:p>
-        </p:txBody>
-      </p:sp>
-      <p:sp>
-        <p:nvSpPr>
-          <p:cNvPr id="46" name="Oval 45"/>
-          <p:cNvSpPr/>
-          <p:nvPr/>
-        </p:nvSpPr>
-        <p:spPr>
-          <a:xfrm>
-            <a:off x="649224" y="5769864"/>
-            <a:ext cx="384048" cy="384048"/>
-          </a:xfrm>
-          <a:prstGeom prst="ellipse">
-            <a:avLst/>
-          </a:prstGeom>
-          <a:solidFill>
-            <a:srgbClr val="DFEBE8"/>
-          </a:solidFill>
-          <a:ln>
-            <a:noFill/>
-          </a:ln>
-          <a:effectLst/>
-        </p:spPr>
-        <p:txBody>
-          <a:bodyPr rtlCol="0" anchor="ctr"/>
-          <a:lstStyle/>
-          <a:p>
-            <a:pPr algn="ctr"/>
-          </a:p>
-        </p:txBody>
-      </p:sp>
-      <p:pic>
-        <p:nvPicPr>
-          <p:cNvPr id="47" name="Picture 46" descr="check.png"/>
-          <p:cNvPicPr>
-            <a:picLocks noChangeAspect="1"/>
-          </p:cNvPicPr>
-          <p:nvPr/>
-        </p:nvPicPr>
-        <p:blipFill>
-          <a:blip r:embed="rId2"/>
-          <a:stretch>
-            <a:fillRect/>
-          </a:stretch>
-        </p:blipFill>
-        <p:spPr>
-          <a:xfrm>
-            <a:off x="741395" y="5862035"/>
-            <a:ext cx="199704" cy="199704"/>
-          </a:xfrm>
-          <a:prstGeom prst="rect">
-            <a:avLst/>
-          </a:prstGeom>
-        </p:spPr>
-      </p:pic>
-      <p:sp>
-        <p:nvSpPr>
-          <p:cNvPr id="48" name="TextBox 47"/>
-          <p:cNvSpPr txBox="1"/>
-          <p:nvPr/>
-        </p:nvSpPr>
-        <p:spPr>
-          <a:xfrm>
-            <a:off x="1124712" y="5833872"/>
-            <a:ext cx="566928" cy="219456"/>
-          </a:xfrm>
-          <a:prstGeom prst="rect">
-            <a:avLst/>
-          </a:prstGeom>
-          <a:noFill/>
-        </p:spPr>
-        <p:txBody>
-          <a:bodyPr wrap="square" anchor="t" lIns="0" rIns="0" tIns="0" bIns="0">
-            <a:spAutoFit/>
-          </a:bodyPr>
-          <a:lstStyle/>
-          <a:p>
-            <a:pPr algn="ctr">
-              <a:lnSpc>
-                <a:spcPct val="130000"/>
-              </a:lnSpc>
-            </a:pPr>
-            <a:r>
-              <a:rPr sz="1050" b="1" lang="ja-JP">
-                <a:solidFill>
-                  <a:srgbClr val="0D7870"/>
-                </a:solidFill>
-                <a:latin typeface="Yu Gothic"/>
-                <a:ea typeface="Yu Gothic"/>
-                <a:cs typeface="Yu Gothic"/>
-              </a:rPr>
-              <a:t>示唆</a:t>
-            </a:r>
-          </a:p>
-        </p:txBody>
-      </p:sp>
-      <p:cxnSp>
-        <p:nvCxnSpPr>
-          <p:cNvPr id="49" name="Connector 48"/>
-          <p:cNvCxnSpPr/>
-          <p:nvPr/>
-        </p:nvCxnSpPr>
-        <p:spPr>
-          <a:xfrm>
-            <a:off x="1764792" y="5797296"/>
-            <a:ext cx="0" cy="329183"/>
-          </a:xfrm>
-          <a:prstGeom prst="line">
-            <a:avLst/>
-          </a:prstGeom>
-          <a:ln w="10160">
-            <a:solidFill>
-              <a:srgbClr val="D1CFC8"/>
-            </a:solidFill>
-          </a:ln>
-          <a:effectLst/>
-        </p:spPr>
-        <p:style>
-          <a:lnRef idx="2">
-            <a:schemeClr val="accent1"/>
-          </a:lnRef>
-          <a:fillRef idx="0">
-            <a:schemeClr val="accent1"/>
-          </a:fillRef>
-          <a:effectRef idx="1">
-            <a:schemeClr val="accent1"/>
-          </a:effectRef>
-          <a:fontRef idx="minor">
-            <a:schemeClr val="tx1"/>
-          </a:fontRef>
-        </p:style>
-      </p:cxnSp>
-      <p:sp>
-        <p:nvSpPr>
-          <p:cNvPr id="50" name="TextBox 49"/>
-          <p:cNvSpPr txBox="1"/>
-          <p:nvPr/>
-        </p:nvSpPr>
-        <p:spPr>
-          <a:xfrm>
-            <a:off x="1837943" y="5797296"/>
-            <a:ext cx="9613087" cy="310896"/>
-          </a:xfrm>
-          <a:prstGeom prst="rect">
-            <a:avLst/>
-          </a:prstGeom>
-          <a:noFill/>
-        </p:spPr>
-        <p:txBody>
-          <a:bodyPr wrap="square" anchor="ctr" lIns="0" rIns="0" tIns="0" bIns="0">
-            <a:spAutoFit/>
-          </a:bodyPr>
-          <a:lstStyle/>
-          <a:p>
-            <a:pPr algn="l">
-              <a:lnSpc>
-                <a:spcPct val="115000"/>
-              </a:lnSpc>
-            </a:pPr>
-            <a:r>
-              <a:rPr sz="1500" b="1" lang="ja-JP">
-                <a:solidFill>
-                  <a:srgbClr val="182C43"/>
-                </a:solidFill>
-                <a:latin typeface="Yu Gothic"/>
-                <a:ea typeface="Yu Gothic"/>
-                <a:cs typeface="Yu Gothic"/>
-              </a:rPr>
-              <a:t>メッセージの順序と送受信者を分けて確認し、作業前の認識差を減らす。</a:t>
-            </a:r>
-          </a:p>
-        </p:txBody>
-      </p:sp>
-      <p:sp>
-        <p:nvSpPr>
-          <p:cNvPr id="51" name="Rectangle 50"/>
+          <p:cNvPr id="46" name="Rectangle 45"/>
           <p:cNvSpPr/>
           <p:nvPr/>
         </p:nvSpPr>
@@ -49923,7 +48959,7 @@
       </p:sp>
       <p:sp>
         <p:nvSpPr>
-          <p:cNvPr id="52" name="TextBox 51"/>
+          <p:cNvPr id="47" name="TextBox 46"/>
           <p:cNvSpPr txBox="1"/>
           <p:nvPr/>
         </p:nvSpPr>
@@ -49964,7 +49000,7 @@
       </p:sp>
       <p:sp>
         <p:nvSpPr>
-          <p:cNvPr id="53" name="TextBox 52"/>
+          <p:cNvPr id="48" name="TextBox 47"/>
           <p:cNvSpPr txBox="1"/>
           <p:nvPr/>
         </p:nvSpPr>

--- a/examples/gallery/pattern_gallery.pptx
+++ b/examples/gallery/pattern_gallery.pptx
@@ -44710,7 +44710,7 @@
             <a:avLst/>
           </a:prstGeom>
           <a:solidFill>
-            <a:srgbClr val="FFFFFC"/>
+            <a:srgbClr val="F7F5EF"/>
           </a:solidFill>
           <a:ln>
             <a:noFill/>
@@ -44847,7 +44847,7 @@
             <a:avLst/>
           </a:prstGeom>
           <a:solidFill>
-            <a:srgbClr val="FFFFFC"/>
+            <a:srgbClr val="F7F5EF"/>
           </a:solidFill>
           <a:ln>
             <a:noFill/>
@@ -44984,7 +44984,7 @@
             <a:avLst/>
           </a:prstGeom>
           <a:solidFill>
-            <a:srgbClr val="FFFFFC"/>
+            <a:srgbClr val="F7F5EF"/>
           </a:solidFill>
           <a:ln>
             <a:noFill/>
@@ -45121,7 +45121,7 @@
             <a:avLst/>
           </a:prstGeom>
           <a:solidFill>
-            <a:srgbClr val="FFFFFC"/>
+            <a:srgbClr val="F7F5EF"/>
           </a:solidFill>
           <a:ln>
             <a:noFill/>

--- a/examples/gallery/pattern_gallery.pptx
+++ b/examples/gallery/pattern_gallery.pptx
@@ -44240,7 +44240,7 @@
             <a:avLst/>
           </a:prstGeom>
           <a:solidFill>
-            <a:srgbClr val="F7F5EF"/>
+            <a:srgbClr val="FAF9F6"/>
           </a:solidFill>
           <a:ln>
             <a:noFill/>
@@ -44271,7 +44271,7 @@
           </a:prstGeom>
           <a:ln w="38100">
             <a:solidFill>
-              <a:srgbClr val="0D7870"/>
+              <a:srgbClr val="108490"/>
             </a:solidFill>
           </a:ln>
           <a:effectLst/>
@@ -44321,7 +44321,7 @@
             <a:r>
               <a:rPr sz="2550" b="1" lang="ja-JP">
                 <a:solidFill>
-                  <a:srgbClr val="182C43"/>
+                  <a:srgbClr val="0F2A46"/>
                 </a:solidFill>
                 <a:latin typeface="Yu Gothic"/>
                 <a:ea typeface="Yu Gothic"/>
@@ -44362,7 +44362,7 @@
             <a:r>
               <a:rPr sz="1400" b="0" lang="ja-JP">
                 <a:solidFill>
-                  <a:srgbClr val="666E70"/>
+                  <a:srgbClr val="66778D"/>
                 </a:solidFill>
                 <a:latin typeface="Yu Gothic"/>
                 <a:ea typeface="Yu Gothic"/>
@@ -44388,11 +44388,11 @@
             <a:avLst/>
           </a:prstGeom>
           <a:solidFill>
-            <a:srgbClr val="FFFFFC"/>
+            <a:srgbClr val="FAF9F6"/>
           </a:solidFill>
           <a:ln w="10795">
             <a:solidFill>
-              <a:srgbClr val="D1CFC8"/>
+              <a:srgbClr val="BBBABA"/>
             </a:solidFill>
           </a:ln>
           <a:effectLst/>
@@ -44435,7 +44435,7 @@
             <a:r>
               <a:rPr sz="1050" b="1" lang="ja-JP">
                 <a:solidFill>
-                  <a:srgbClr val="182C43"/>
+                  <a:srgbClr val="0F2A46"/>
                 </a:solidFill>
                 <a:latin typeface="Yu Gothic"/>
                 <a:ea typeface="Yu Gothic"/>
@@ -44461,11 +44461,11 @@
             <a:avLst/>
           </a:prstGeom>
           <a:solidFill>
-            <a:srgbClr val="FFFFFC"/>
+            <a:srgbClr val="FAF9F6"/>
           </a:solidFill>
           <a:ln w="10795">
             <a:solidFill>
-              <a:srgbClr val="D1CFC8"/>
+              <a:srgbClr val="BBBABA"/>
             </a:solidFill>
           </a:ln>
           <a:effectLst/>
@@ -44508,7 +44508,7 @@
             <a:r>
               <a:rPr sz="1050" b="1" lang="ja-JP">
                 <a:solidFill>
-                  <a:srgbClr val="182C43"/>
+                  <a:srgbClr val="0F2A46"/>
                 </a:solidFill>
                 <a:latin typeface="Yu Gothic"/>
                 <a:ea typeface="Yu Gothic"/>
@@ -44534,11 +44534,11 @@
             <a:avLst/>
           </a:prstGeom>
           <a:solidFill>
-            <a:srgbClr val="FFFFFC"/>
+            <a:srgbClr val="FAF9F6"/>
           </a:solidFill>
           <a:ln w="10795">
             <a:solidFill>
-              <a:srgbClr val="D1CFC8"/>
+              <a:srgbClr val="BBBABA"/>
             </a:solidFill>
           </a:ln>
           <a:effectLst/>
@@ -44581,7 +44581,7 @@
             <a:r>
               <a:rPr sz="1050" b="1" lang="ja-JP">
                 <a:solidFill>
-                  <a:srgbClr val="182C43"/>
+                  <a:srgbClr val="0F2A46"/>
                 </a:solidFill>
                 <a:latin typeface="Yu Gothic"/>
                 <a:ea typeface="Yu Gothic"/>
@@ -44607,11 +44607,11 @@
             <a:avLst/>
           </a:prstGeom>
           <a:solidFill>
-            <a:srgbClr val="FFFFFC"/>
+            <a:srgbClr val="FAF9F6"/>
           </a:solidFill>
           <a:ln w="10795">
             <a:solidFill>
-              <a:srgbClr val="D1CFC8"/>
+              <a:srgbClr val="BBBABA"/>
             </a:solidFill>
           </a:ln>
           <a:effectLst/>
@@ -44654,7 +44654,7 @@
             <a:r>
               <a:rPr sz="1050" b="1" lang="ja-JP">
                 <a:solidFill>
-                  <a:srgbClr val="182C43"/>
+                  <a:srgbClr val="0F2A46"/>
                 </a:solidFill>
                 <a:latin typeface="Yu Gothic"/>
                 <a:ea typeface="Yu Gothic"/>
@@ -44680,7 +44680,7 @@
             <a:avLst/>
           </a:prstGeom>
           <a:solidFill>
-            <a:srgbClr val="DFEBE8"/>
+            <a:srgbClr val="EAF0EF"/>
           </a:solidFill>
           <a:ln>
             <a:noFill/>
@@ -44710,7 +44710,7 @@
             <a:avLst/>
           </a:prstGeom>
           <a:solidFill>
-            <a:srgbClr val="F7F5EF"/>
+            <a:srgbClr val="FAF9F6"/>
           </a:solidFill>
           <a:ln>
             <a:noFill/>
@@ -44755,7 +44755,7 @@
             <a:r>
               <a:rPr sz="1300" b="1" lang="ja-JP">
                 <a:solidFill>
-                  <a:srgbClr val="182C43"/>
+                  <a:srgbClr val="0F2A46"/>
                 </a:solidFill>
                 <a:latin typeface="Yu Gothic"/>
                 <a:ea typeface="Yu Gothic"/>
@@ -44782,7 +44782,7 @@
           </a:prstGeom>
           <a:ln w="8255">
             <a:solidFill>
-              <a:srgbClr val="D1CFC8"/>
+              <a:srgbClr val="BBBABA"/>
             </a:solidFill>
           </a:ln>
           <a:effectLst/>
@@ -44817,7 +44817,7 @@
             <a:avLst/>
           </a:prstGeom>
           <a:solidFill>
-            <a:srgbClr val="DFEBE8"/>
+            <a:srgbClr val="EAF0EF"/>
           </a:solidFill>
           <a:ln>
             <a:noFill/>
@@ -44847,7 +44847,7 @@
             <a:avLst/>
           </a:prstGeom>
           <a:solidFill>
-            <a:srgbClr val="F7F5EF"/>
+            <a:srgbClr val="FAF9F6"/>
           </a:solidFill>
           <a:ln>
             <a:noFill/>
@@ -44892,7 +44892,7 @@
             <a:r>
               <a:rPr sz="1300" b="1" lang="ja-JP">
                 <a:solidFill>
-                  <a:srgbClr val="182C43"/>
+                  <a:srgbClr val="0F2A46"/>
                 </a:solidFill>
                 <a:latin typeface="Yu Gothic"/>
                 <a:ea typeface="Yu Gothic"/>
@@ -44919,7 +44919,7 @@
           </a:prstGeom>
           <a:ln w="8255">
             <a:solidFill>
-              <a:srgbClr val="D1CFC8"/>
+              <a:srgbClr val="BBBABA"/>
             </a:solidFill>
           </a:ln>
           <a:effectLst/>
@@ -44954,7 +44954,7 @@
             <a:avLst/>
           </a:prstGeom>
           <a:solidFill>
-            <a:srgbClr val="DFEBE8"/>
+            <a:srgbClr val="EAF0EF"/>
           </a:solidFill>
           <a:ln>
             <a:noFill/>
@@ -44984,7 +44984,7 @@
             <a:avLst/>
           </a:prstGeom>
           <a:solidFill>
-            <a:srgbClr val="F7F5EF"/>
+            <a:srgbClr val="FAF9F6"/>
           </a:solidFill>
           <a:ln>
             <a:noFill/>
@@ -45029,7 +45029,7 @@
             <a:r>
               <a:rPr sz="1300" b="1" lang="ja-JP">
                 <a:solidFill>
-                  <a:srgbClr val="182C43"/>
+                  <a:srgbClr val="0F2A46"/>
                 </a:solidFill>
                 <a:latin typeface="Yu Gothic"/>
                 <a:ea typeface="Yu Gothic"/>
@@ -45056,7 +45056,7 @@
           </a:prstGeom>
           <a:ln w="8255">
             <a:solidFill>
-              <a:srgbClr val="D1CFC8"/>
+              <a:srgbClr val="BBBABA"/>
             </a:solidFill>
           </a:ln>
           <a:effectLst/>
@@ -45091,7 +45091,7 @@
             <a:avLst/>
           </a:prstGeom>
           <a:solidFill>
-            <a:srgbClr val="DFEBE8"/>
+            <a:srgbClr val="EAF0EF"/>
           </a:solidFill>
           <a:ln>
             <a:noFill/>
@@ -45121,7 +45121,7 @@
             <a:avLst/>
           </a:prstGeom>
           <a:solidFill>
-            <a:srgbClr val="F7F5EF"/>
+            <a:srgbClr val="FAF9F6"/>
           </a:solidFill>
           <a:ln>
             <a:noFill/>
@@ -45166,7 +45166,7 @@
             <a:r>
               <a:rPr sz="1300" b="1" lang="ja-JP">
                 <a:solidFill>
-                  <a:srgbClr val="182C43"/>
+                  <a:srgbClr val="0F2A46"/>
                 </a:solidFill>
                 <a:latin typeface="Yu Gothic"/>
                 <a:ea typeface="Yu Gothic"/>
@@ -45193,7 +45193,7 @@
           </a:prstGeom>
           <a:ln w="8255">
             <a:solidFill>
-              <a:srgbClr val="D1CFC8"/>
+              <a:srgbClr val="BBBABA"/>
             </a:solidFill>
           </a:ln>
           <a:effectLst/>
@@ -45229,7 +45229,7 @@
           </a:prstGeom>
           <a:ln w="10160">
             <a:solidFill>
-              <a:srgbClr val="D1CFC8"/>
+              <a:srgbClr val="BBBABA"/>
             </a:solidFill>
           </a:ln>
           <a:effectLst/>
@@ -45265,7 +45265,7 @@
           </a:prstGeom>
           <a:ln w="6985">
             <a:solidFill>
-              <a:srgbClr val="D1CFC8"/>
+              <a:srgbClr val="BBBABA"/>
             </a:solidFill>
           </a:ln>
           <a:effectLst/>
@@ -45301,7 +45301,7 @@
           </a:prstGeom>
           <a:ln w="6985">
             <a:solidFill>
-              <a:srgbClr val="D1CFC8"/>
+              <a:srgbClr val="BBBABA"/>
             </a:solidFill>
           </a:ln>
           <a:effectLst/>
@@ -45337,7 +45337,7 @@
           </a:prstGeom>
           <a:ln w="6985">
             <a:solidFill>
-              <a:srgbClr val="D1CFC8"/>
+              <a:srgbClr val="BBBABA"/>
             </a:solidFill>
           </a:ln>
           <a:effectLst/>
@@ -45373,7 +45373,7 @@
           </a:prstGeom>
           <a:ln w="13970">
             <a:solidFill>
-              <a:srgbClr val="0D7870"/>
+              <a:srgbClr val="108490"/>
             </a:solidFill>
           </a:ln>
           <a:effectLst/>
@@ -45409,7 +45409,7 @@
           </a:prstGeom>
           <a:ln w="13970">
             <a:solidFill>
-              <a:srgbClr val="0D7870"/>
+              <a:srgbClr val="108490"/>
             </a:solidFill>
           </a:ln>
           <a:effectLst/>
@@ -45445,7 +45445,7 @@
           </a:prstGeom>
           <a:ln w="13970">
             <a:solidFill>
-              <a:srgbClr val="0D7870"/>
+              <a:srgbClr val="108490"/>
             </a:solidFill>
             <a:tailEnd type="triangle" w="med" len="med"/>
           </a:ln>
@@ -45482,7 +45482,7 @@
           </a:prstGeom>
           <a:ln w="13970">
             <a:solidFill>
-              <a:srgbClr val="0D7870"/>
+              <a:srgbClr val="108490"/>
             </a:solidFill>
             <a:tailEnd type="triangle" w="med" len="med"/>
           </a:ln>
@@ -45519,7 +45519,7 @@
           </a:prstGeom>
           <a:ln w="13970">
             <a:solidFill>
-              <a:srgbClr val="0D7870"/>
+              <a:srgbClr val="108490"/>
             </a:solidFill>
           </a:ln>
           <a:effectLst/>
@@ -45555,7 +45555,7 @@
           </a:prstGeom>
           <a:ln w="13970">
             <a:solidFill>
-              <a:srgbClr val="0D7870"/>
+              <a:srgbClr val="108490"/>
             </a:solidFill>
           </a:ln>
           <a:effectLst/>
@@ -45591,7 +45591,7 @@
           </a:prstGeom>
           <a:ln w="13970">
             <a:solidFill>
-              <a:srgbClr val="0D7870"/>
+              <a:srgbClr val="108490"/>
             </a:solidFill>
             <a:tailEnd type="triangle" w="med" len="med"/>
           </a:ln>
@@ -45628,7 +45628,7 @@
           </a:prstGeom>
           <a:ln w="13970">
             <a:solidFill>
-              <a:srgbClr val="0D7870"/>
+              <a:srgbClr val="108490"/>
             </a:solidFill>
             <a:tailEnd type="triangle" w="med" len="med"/>
           </a:ln>
@@ -45665,7 +45665,7 @@
           </a:prstGeom>
           <a:ln w="13970">
             <a:solidFill>
-              <a:srgbClr val="0D7870"/>
+              <a:srgbClr val="108490"/>
             </a:solidFill>
             <a:tailEnd type="triangle" w="med" len="med"/>
           </a:ln>
@@ -45702,7 +45702,7 @@
           </a:prstGeom>
           <a:ln w="13970">
             <a:solidFill>
-              <a:srgbClr val="0D7870"/>
+              <a:srgbClr val="108490"/>
             </a:solidFill>
           </a:ln>
           <a:effectLst/>
@@ -45738,7 +45738,7 @@
           </a:prstGeom>
           <a:ln w="13970">
             <a:solidFill>
-              <a:srgbClr val="0D7870"/>
+              <a:srgbClr val="108490"/>
             </a:solidFill>
           </a:ln>
           <a:effectLst/>
@@ -45774,7 +45774,7 @@
           </a:prstGeom>
           <a:ln w="13970">
             <a:solidFill>
-              <a:srgbClr val="0D7870"/>
+              <a:srgbClr val="108490"/>
             </a:solidFill>
             <a:tailEnd type="triangle" w="med" len="med"/>
           </a:ln>
@@ -45811,7 +45811,7 @@
           </a:prstGeom>
           <a:ln w="13970">
             <a:solidFill>
-              <a:srgbClr val="0D7870"/>
+              <a:srgbClr val="108490"/>
             </a:solidFill>
           </a:ln>
           <a:effectLst/>
@@ -45847,7 +45847,7 @@
           </a:prstGeom>
           <a:ln w="13970">
             <a:solidFill>
-              <a:srgbClr val="0D7870"/>
+              <a:srgbClr val="108490"/>
             </a:solidFill>
           </a:ln>
           <a:effectLst/>
@@ -45883,7 +45883,7 @@
           </a:prstGeom>
           <a:ln w="13970">
             <a:solidFill>
-              <a:srgbClr val="0D7870"/>
+              <a:srgbClr val="108490"/>
             </a:solidFill>
             <a:tailEnd type="triangle" w="med" len="med"/>
           </a:ln>
@@ -45920,7 +45920,7 @@
           </a:prstGeom>
           <a:ln w="13970">
             <a:solidFill>
-              <a:srgbClr val="0D7870"/>
+              <a:srgbClr val="108490"/>
             </a:solidFill>
           </a:ln>
           <a:effectLst/>
@@ -45956,7 +45956,7 @@
           </a:prstGeom>
           <a:ln w="13970">
             <a:solidFill>
-              <a:srgbClr val="0D7870"/>
+              <a:srgbClr val="108490"/>
             </a:solidFill>
           </a:ln>
           <a:effectLst/>
@@ -45992,7 +45992,7 @@
           </a:prstGeom>
           <a:ln w="13970">
             <a:solidFill>
-              <a:srgbClr val="0D7870"/>
+              <a:srgbClr val="108490"/>
             </a:solidFill>
           </a:ln>
           <a:effectLst/>
@@ -46028,7 +46028,7 @@
           </a:prstGeom>
           <a:ln w="13970">
             <a:solidFill>
-              <a:srgbClr val="0D7870"/>
+              <a:srgbClr val="108490"/>
             </a:solidFill>
             <a:tailEnd type="triangle" w="med" len="med"/>
           </a:ln>
@@ -46065,7 +46065,7 @@
           </a:prstGeom>
           <a:ln w="13970">
             <a:solidFill>
-              <a:srgbClr val="0D7870"/>
+              <a:srgbClr val="108490"/>
             </a:solidFill>
             <a:tailEnd type="triangle" w="med" len="med"/>
           </a:ln>
@@ -46102,7 +46102,7 @@
           </a:prstGeom>
           <a:ln w="13970">
             <a:solidFill>
-              <a:srgbClr val="0D7870"/>
+              <a:srgbClr val="108490"/>
             </a:solidFill>
           </a:ln>
           <a:effectLst/>
@@ -46138,7 +46138,7 @@
           </a:prstGeom>
           <a:ln w="13970">
             <a:solidFill>
-              <a:srgbClr val="0D7870"/>
+              <a:srgbClr val="108490"/>
             </a:solidFill>
           </a:ln>
           <a:effectLst/>
@@ -46174,7 +46174,7 @@
           </a:prstGeom>
           <a:ln w="13970">
             <a:solidFill>
-              <a:srgbClr val="0D7870"/>
+              <a:srgbClr val="108490"/>
             </a:solidFill>
             <a:tailEnd type="triangle" w="med" len="med"/>
           </a:ln>
@@ -46211,7 +46211,7 @@
           </a:prstGeom>
           <a:ln w="13970">
             <a:solidFill>
-              <a:srgbClr val="0D7870"/>
+              <a:srgbClr val="108490"/>
             </a:solidFill>
             <a:tailEnd type="triangle" w="med" len="med"/>
           </a:ln>
@@ -46247,11 +46247,11 @@
             <a:avLst/>
           </a:prstGeom>
           <a:solidFill>
-            <a:srgbClr val="FFFFFC"/>
+            <a:srgbClr val="FEFEFE"/>
           </a:solidFill>
           <a:ln w="9525">
             <a:solidFill>
-              <a:srgbClr val="0D7870"/>
+              <a:srgbClr val="108490"/>
             </a:solidFill>
           </a:ln>
           <a:effectLst/>
@@ -46294,7 +46294,7 @@
             <a:r>
               <a:rPr sz="1050" b="1" lang="ja-JP">
                 <a:solidFill>
-                  <a:srgbClr val="182C43"/>
+                  <a:srgbClr val="0F2A46"/>
                 </a:solidFill>
                 <a:latin typeface="Yu Gothic"/>
                 <a:ea typeface="Yu Gothic"/>
@@ -46320,11 +46320,11 @@
             <a:avLst/>
           </a:prstGeom>
           <a:solidFill>
-            <a:srgbClr val="FFFFFC"/>
+            <a:srgbClr val="FEFEFE"/>
           </a:solidFill>
           <a:ln w="9525">
             <a:solidFill>
-              <a:srgbClr val="0D7870"/>
+              <a:srgbClr val="108490"/>
             </a:solidFill>
           </a:ln>
           <a:effectLst/>
@@ -46367,7 +46367,7 @@
             <a:r>
               <a:rPr sz="1050" b="1" lang="ja-JP">
                 <a:solidFill>
-                  <a:srgbClr val="182C43"/>
+                  <a:srgbClr val="0F2A46"/>
                 </a:solidFill>
                 <a:latin typeface="Yu Gothic"/>
                 <a:ea typeface="Yu Gothic"/>
@@ -46393,11 +46393,11 @@
             <a:avLst/>
           </a:prstGeom>
           <a:solidFill>
-            <a:srgbClr val="FFFFFC"/>
+            <a:srgbClr val="FEFEFE"/>
           </a:solidFill>
           <a:ln w="9525">
             <a:solidFill>
-              <a:srgbClr val="0D7870"/>
+              <a:srgbClr val="108490"/>
             </a:solidFill>
           </a:ln>
           <a:effectLst/>
@@ -46440,7 +46440,7 @@
             <a:r>
               <a:rPr sz="1050" b="1" lang="ja-JP">
                 <a:solidFill>
-                  <a:srgbClr val="182C43"/>
+                  <a:srgbClr val="0F2A46"/>
                 </a:solidFill>
                 <a:latin typeface="Yu Gothic"/>
                 <a:ea typeface="Yu Gothic"/>
@@ -46466,11 +46466,11 @@
             <a:avLst/>
           </a:prstGeom>
           <a:solidFill>
-            <a:srgbClr val="FFFFFC"/>
+            <a:srgbClr val="FEFEFE"/>
           </a:solidFill>
           <a:ln w="9525">
             <a:solidFill>
-              <a:srgbClr val="0D7870"/>
+              <a:srgbClr val="108490"/>
             </a:solidFill>
           </a:ln>
           <a:effectLst/>
@@ -46513,7 +46513,7 @@
             <a:r>
               <a:rPr sz="1050" b="1" lang="ja-JP">
                 <a:solidFill>
-                  <a:srgbClr val="182C43"/>
+                  <a:srgbClr val="0F2A46"/>
                 </a:solidFill>
                 <a:latin typeface="Yu Gothic"/>
                 <a:ea typeface="Yu Gothic"/>
@@ -46539,11 +46539,11 @@
             <a:avLst/>
           </a:prstGeom>
           <a:solidFill>
-            <a:srgbClr val="FFFFFC"/>
+            <a:srgbClr val="FEFEFE"/>
           </a:solidFill>
           <a:ln w="9525">
             <a:solidFill>
-              <a:srgbClr val="0D7870"/>
+              <a:srgbClr val="108490"/>
             </a:solidFill>
           </a:ln>
           <a:effectLst/>
@@ -46586,7 +46586,7 @@
             <a:r>
               <a:rPr sz="1050" b="1" lang="ja-JP">
                 <a:solidFill>
-                  <a:srgbClr val="182C43"/>
+                  <a:srgbClr val="0F2A46"/>
                 </a:solidFill>
                 <a:latin typeface="Yu Gothic"/>
                 <a:ea typeface="Yu Gothic"/>
@@ -46612,11 +46612,11 @@
             <a:avLst/>
           </a:prstGeom>
           <a:solidFill>
-            <a:srgbClr val="FFFFFC"/>
+            <a:srgbClr val="FEFEFE"/>
           </a:solidFill>
           <a:ln w="9525">
             <a:solidFill>
-              <a:srgbClr val="0D7870"/>
+              <a:srgbClr val="108490"/>
             </a:solidFill>
           </a:ln>
           <a:effectLst/>
@@ -46659,7 +46659,7 @@
             <a:r>
               <a:rPr sz="1000" b="1" lang="ja-JP">
                 <a:solidFill>
-                  <a:srgbClr val="182C43"/>
+                  <a:srgbClr val="0F2A46"/>
                 </a:solidFill>
                 <a:latin typeface="Yu Gothic"/>
                 <a:ea typeface="Yu Gothic"/>
@@ -46685,11 +46685,11 @@
             <a:avLst/>
           </a:prstGeom>
           <a:solidFill>
-            <a:srgbClr val="DFEBE8"/>
+            <a:srgbClr val="EAF0EF"/>
           </a:solidFill>
           <a:ln w="9525">
             <a:solidFill>
-              <a:srgbClr val="0D7870"/>
+              <a:srgbClr val="108490"/>
             </a:solidFill>
           </a:ln>
           <a:effectLst/>
@@ -46732,7 +46732,7 @@
             <a:r>
               <a:rPr sz="750" b="1" lang="ja-JP">
                 <a:solidFill>
-                  <a:srgbClr val="182C43"/>
+                  <a:srgbClr val="0F2A46"/>
                 </a:solidFill>
                 <a:latin typeface="Yu Gothic"/>
                 <a:ea typeface="Yu Gothic"/>
@@ -46758,11 +46758,11 @@
             <a:avLst/>
           </a:prstGeom>
           <a:solidFill>
-            <a:srgbClr val="FFFFFC"/>
+            <a:srgbClr val="FEFEFE"/>
           </a:solidFill>
           <a:ln w="9525">
             <a:solidFill>
-              <a:srgbClr val="0D7870"/>
+              <a:srgbClr val="108490"/>
             </a:solidFill>
           </a:ln>
           <a:effectLst/>
@@ -46805,7 +46805,7 @@
             <a:r>
               <a:rPr sz="1050" b="1" lang="ja-JP">
                 <a:solidFill>
-                  <a:srgbClr val="182C43"/>
+                  <a:srgbClr val="0F2A46"/>
                 </a:solidFill>
                 <a:latin typeface="Yu Gothic"/>
                 <a:ea typeface="Yu Gothic"/>
@@ -46831,11 +46831,11 @@
             <a:avLst/>
           </a:prstGeom>
           <a:solidFill>
-            <a:srgbClr val="FFFFFC"/>
+            <a:srgbClr val="FEFEFE"/>
           </a:solidFill>
           <a:ln w="9525">
             <a:solidFill>
-              <a:srgbClr val="0D7870"/>
+              <a:srgbClr val="108490"/>
             </a:solidFill>
           </a:ln>
           <a:effectLst/>
@@ -46878,7 +46878,7 @@
             <a:r>
               <a:rPr sz="1050" b="1" lang="ja-JP">
                 <a:solidFill>
-                  <a:srgbClr val="182C43"/>
+                  <a:srgbClr val="0F2A46"/>
                 </a:solidFill>
                 <a:latin typeface="Yu Gothic"/>
                 <a:ea typeface="Yu Gothic"/>
@@ -46904,11 +46904,11 @@
             <a:avLst/>
           </a:prstGeom>
           <a:solidFill>
-            <a:srgbClr val="FFFFFC"/>
+            <a:srgbClr val="FEFEFE"/>
           </a:solidFill>
           <a:ln w="9525">
             <a:solidFill>
-              <a:srgbClr val="0D7870"/>
+              <a:srgbClr val="108490"/>
             </a:solidFill>
           </a:ln>
           <a:effectLst/>
@@ -46951,7 +46951,7 @@
             <a:r>
               <a:rPr sz="1050" b="1" lang="ja-JP">
                 <a:solidFill>
-                  <a:srgbClr val="182C43"/>
+                  <a:srgbClr val="0F2A46"/>
                 </a:solidFill>
                 <a:latin typeface="Yu Gothic"/>
                 <a:ea typeface="Yu Gothic"/>
@@ -46977,11 +46977,11 @@
             <a:avLst/>
           </a:prstGeom>
           <a:solidFill>
-            <a:srgbClr val="FFFFFC"/>
+            <a:srgbClr val="FEFEFE"/>
           </a:solidFill>
           <a:ln w="9525">
             <a:solidFill>
-              <a:srgbClr val="0D7870"/>
+              <a:srgbClr val="108490"/>
             </a:solidFill>
           </a:ln>
           <a:effectLst/>
@@ -47024,7 +47024,7 @@
             <a:r>
               <a:rPr sz="1050" b="1" lang="ja-JP">
                 <a:solidFill>
-                  <a:srgbClr val="182C43"/>
+                  <a:srgbClr val="0F2A46"/>
                 </a:solidFill>
                 <a:latin typeface="Yu Gothic"/>
                 <a:ea typeface="Yu Gothic"/>

--- a/examples/gallery/pattern_gallery.pptx
+++ b/examples/gallery/pattern_gallery.pptx
@@ -44240,7 +44240,7 @@
             <a:avLst/>
           </a:prstGeom>
           <a:solidFill>
-            <a:srgbClr val="FAF9F6"/>
+            <a:srgbClr val="F7F5EF"/>
           </a:solidFill>
           <a:ln>
             <a:noFill/>
@@ -44271,7 +44271,7 @@
           </a:prstGeom>
           <a:ln w="38100">
             <a:solidFill>
-              <a:srgbClr val="108490"/>
+              <a:srgbClr val="0D7870"/>
             </a:solidFill>
           </a:ln>
           <a:effectLst/>
@@ -44321,7 +44321,7 @@
             <a:r>
               <a:rPr sz="2550" b="1" lang="ja-JP">
                 <a:solidFill>
-                  <a:srgbClr val="0F2A46"/>
+                  <a:srgbClr val="182C43"/>
                 </a:solidFill>
                 <a:latin typeface="Yu Gothic"/>
                 <a:ea typeface="Yu Gothic"/>
@@ -44362,7 +44362,7 @@
             <a:r>
               <a:rPr sz="1400" b="0" lang="ja-JP">
                 <a:solidFill>
-                  <a:srgbClr val="66778D"/>
+                  <a:srgbClr val="666E70"/>
                 </a:solidFill>
                 <a:latin typeface="Yu Gothic"/>
                 <a:ea typeface="Yu Gothic"/>
@@ -44388,7 +44388,7 @@
             <a:avLst/>
           </a:prstGeom>
           <a:solidFill>
-            <a:srgbClr val="FAF9F6"/>
+            <a:srgbClr val="F7F5EF"/>
           </a:solidFill>
           <a:ln w="10795">
             <a:solidFill>
@@ -44461,7 +44461,7 @@
             <a:avLst/>
           </a:prstGeom>
           <a:solidFill>
-            <a:srgbClr val="FAF9F6"/>
+            <a:srgbClr val="F7F5EF"/>
           </a:solidFill>
           <a:ln w="10795">
             <a:solidFill>
@@ -44534,7 +44534,7 @@
             <a:avLst/>
           </a:prstGeom>
           <a:solidFill>
-            <a:srgbClr val="FAF9F6"/>
+            <a:srgbClr val="F7F5EF"/>
           </a:solidFill>
           <a:ln w="10795">
             <a:solidFill>
@@ -44607,7 +44607,7 @@
             <a:avLst/>
           </a:prstGeom>
           <a:solidFill>
-            <a:srgbClr val="FAF9F6"/>
+            <a:srgbClr val="F7F5EF"/>
           </a:solidFill>
           <a:ln w="10795">
             <a:solidFill>
@@ -44710,7 +44710,7 @@
             <a:avLst/>
           </a:prstGeom>
           <a:solidFill>
-            <a:srgbClr val="FAF9F6"/>
+            <a:srgbClr val="F7F5EF"/>
           </a:solidFill>
           <a:ln>
             <a:noFill/>
@@ -44847,7 +44847,7 @@
             <a:avLst/>
           </a:prstGeom>
           <a:solidFill>
-            <a:srgbClr val="FAF9F6"/>
+            <a:srgbClr val="F7F5EF"/>
           </a:solidFill>
           <a:ln>
             <a:noFill/>
@@ -44984,7 +44984,7 @@
             <a:avLst/>
           </a:prstGeom>
           <a:solidFill>
-            <a:srgbClr val="FAF9F6"/>
+            <a:srgbClr val="F7F5EF"/>
           </a:solidFill>
           <a:ln>
             <a:noFill/>
@@ -45121,7 +45121,7 @@
             <a:avLst/>
           </a:prstGeom>
           <a:solidFill>
-            <a:srgbClr val="FAF9F6"/>
+            <a:srgbClr val="F7F5EF"/>
           </a:solidFill>
           <a:ln>
             <a:noFill/>

--- a/examples/gallery/pattern_gallery.pptx
+++ b/examples/gallery/pattern_gallery.pptx
@@ -7448,7 +7448,7 @@
             <a:avLst/>
           </a:prstGeom>
           <a:solidFill>
-            <a:srgbClr val="FFFFFC"/>
+            <a:srgbClr val="FAF9F5"/>
           </a:solidFill>
           <a:ln w="9525">
             <a:solidFill>
@@ -7617,7 +7617,7 @@
             <a:avLst/>
           </a:prstGeom>
           <a:solidFill>
-            <a:srgbClr val="FFFFFC"/>
+            <a:srgbClr val="FAF9F5"/>
           </a:solidFill>
           <a:ln w="9525">
             <a:solidFill>
@@ -7955,7 +7955,7 @@
             <a:avLst/>
           </a:prstGeom>
           <a:solidFill>
-            <a:srgbClr val="FFFFFC"/>
+            <a:srgbClr val="FAF9F5"/>
           </a:solidFill>
           <a:ln w="9525">
             <a:solidFill>
@@ -8124,7 +8124,7 @@
             <a:avLst/>
           </a:prstGeom>
           <a:solidFill>
-            <a:srgbClr val="FFFFFC"/>
+            <a:srgbClr val="FAF9F5"/>
           </a:solidFill>
           <a:ln w="9525">
             <a:solidFill>
@@ -9324,7 +9324,7 @@
             <a:avLst/>
           </a:prstGeom>
           <a:solidFill>
-            <a:srgbClr val="FFFFFC"/>
+            <a:srgbClr val="FAF9F5"/>
           </a:solidFill>
           <a:ln>
             <a:noFill/>
@@ -9412,7 +9412,7 @@
             <a:avLst/>
           </a:prstGeom>
           <a:solidFill>
-            <a:srgbClr val="FFFFFC"/>
+            <a:srgbClr val="FAF9F5"/>
           </a:solidFill>
           <a:ln>
             <a:noFill/>
@@ -9500,7 +9500,7 @@
             <a:avLst/>
           </a:prstGeom>
           <a:solidFill>
-            <a:srgbClr val="FFFFFC"/>
+            <a:srgbClr val="FAF9F5"/>
           </a:solidFill>
           <a:ln>
             <a:noFill/>
@@ -10207,7 +10207,7 @@
             <a:avLst/>
           </a:prstGeom>
           <a:solidFill>
-            <a:srgbClr val="FFFFFC"/>
+            <a:srgbClr val="FAF9F5"/>
           </a:solidFill>
         </p:spPr>
         <p:txBody>
@@ -10294,7 +10294,7 @@
             <a:avLst/>
           </a:prstGeom>
           <a:solidFill>
-            <a:srgbClr val="FFFFFC"/>
+            <a:srgbClr val="FAF9F5"/>
           </a:solidFill>
         </p:spPr>
         <p:txBody>
@@ -10770,7 +10770,7 @@
             <a:avLst/>
           </a:prstGeom>
           <a:solidFill>
-            <a:srgbClr val="FFFFFC"/>
+            <a:srgbClr val="FAF9F5"/>
           </a:solidFill>
         </p:spPr>
         <p:txBody>
@@ -10857,7 +10857,7 @@
             <a:avLst/>
           </a:prstGeom>
           <a:solidFill>
-            <a:srgbClr val="FFFFFC"/>
+            <a:srgbClr val="FAF9F5"/>
           </a:solidFill>
         </p:spPr>
         <p:txBody>
@@ -11333,7 +11333,7 @@
             <a:avLst/>
           </a:prstGeom>
           <a:solidFill>
-            <a:srgbClr val="FFFFFC"/>
+            <a:srgbClr val="FAF9F5"/>
           </a:solidFill>
         </p:spPr>
         <p:txBody>
@@ -11420,7 +11420,7 @@
             <a:avLst/>
           </a:prstGeom>
           <a:solidFill>
-            <a:srgbClr val="FFFFFC"/>
+            <a:srgbClr val="FAF9F5"/>
           </a:solidFill>
         </p:spPr>
         <p:txBody>
@@ -12401,7 +12401,7 @@
             <a:avLst/>
           </a:prstGeom>
           <a:solidFill>
-            <a:srgbClr val="FFFFFC"/>
+            <a:srgbClr val="FAF9F5"/>
           </a:solidFill>
           <a:ln>
             <a:noFill/>
@@ -12489,7 +12489,7 @@
             <a:avLst/>
           </a:prstGeom>
           <a:solidFill>
-            <a:srgbClr val="FFFFFC"/>
+            <a:srgbClr val="FAF9F5"/>
           </a:solidFill>
           <a:ln>
             <a:noFill/>
@@ -12577,7 +12577,7 @@
             <a:avLst/>
           </a:prstGeom>
           <a:solidFill>
-            <a:srgbClr val="FFFFFC"/>
+            <a:srgbClr val="FAF9F5"/>
           </a:solidFill>
           <a:ln>
             <a:noFill/>
@@ -13243,7 +13243,7 @@
             <a:avLst/>
           </a:prstGeom>
           <a:solidFill>
-            <a:srgbClr val="FFFFFC"/>
+            <a:srgbClr val="FAF9F5"/>
           </a:solidFill>
         </p:spPr>
         <p:txBody>
@@ -13322,7 +13322,7 @@
             <a:avLst/>
           </a:prstGeom>
           <a:solidFill>
-            <a:srgbClr val="FFFFFC"/>
+            <a:srgbClr val="FAF9F5"/>
           </a:solidFill>
         </p:spPr>
         <p:txBody>
@@ -13874,7 +13874,7 @@
             <a:avLst/>
           </a:prstGeom>
           <a:solidFill>
-            <a:srgbClr val="FFFFFC"/>
+            <a:srgbClr val="FAF9F5"/>
           </a:solidFill>
         </p:spPr>
         <p:txBody>
@@ -13953,7 +13953,7 @@
             <a:avLst/>
           </a:prstGeom>
           <a:solidFill>
-            <a:srgbClr val="FFFFFC"/>
+            <a:srgbClr val="FAF9F5"/>
           </a:solidFill>
         </p:spPr>
         <p:txBody>
@@ -14032,7 +14032,7 @@
             <a:avLst/>
           </a:prstGeom>
           <a:solidFill>
-            <a:srgbClr val="FFFFFC"/>
+            <a:srgbClr val="FAF9F5"/>
           </a:solidFill>
         </p:spPr>
         <p:txBody>
@@ -14111,7 +14111,7 @@
             <a:avLst/>
           </a:prstGeom>
           <a:solidFill>
-            <a:srgbClr val="FFFFFC"/>
+            <a:srgbClr val="FAF9F5"/>
           </a:solidFill>
         </p:spPr>
         <p:txBody>
@@ -14190,7 +14190,7 @@
             <a:avLst/>
           </a:prstGeom>
           <a:solidFill>
-            <a:srgbClr val="FFFFFC"/>
+            <a:srgbClr val="FAF9F5"/>
           </a:solidFill>
         </p:spPr>
         <p:txBody>
@@ -14269,7 +14269,7 @@
             <a:avLst/>
           </a:prstGeom>
           <a:solidFill>
-            <a:srgbClr val="FFFFFC"/>
+            <a:srgbClr val="FAF9F5"/>
           </a:solidFill>
         </p:spPr>
         <p:txBody>
@@ -14821,7 +14821,7 @@
             <a:avLst/>
           </a:prstGeom>
           <a:solidFill>
-            <a:srgbClr val="FFFFFC"/>
+            <a:srgbClr val="FAF9F5"/>
           </a:solidFill>
         </p:spPr>
         <p:txBody>
@@ -14900,7 +14900,7 @@
             <a:avLst/>
           </a:prstGeom>
           <a:solidFill>
-            <a:srgbClr val="FFFFFC"/>
+            <a:srgbClr val="FAF9F5"/>
           </a:solidFill>
         </p:spPr>
         <p:txBody>
@@ -14979,7 +14979,7 @@
             <a:avLst/>
           </a:prstGeom>
           <a:solidFill>
-            <a:srgbClr val="FFFFFC"/>
+            <a:srgbClr val="FAF9F5"/>
           </a:solidFill>
         </p:spPr>
         <p:txBody>
@@ -15058,7 +15058,7 @@
             <a:avLst/>
           </a:prstGeom>
           <a:solidFill>
-            <a:srgbClr val="FFFFFC"/>
+            <a:srgbClr val="FAF9F5"/>
           </a:solidFill>
         </p:spPr>
         <p:txBody>
@@ -15459,7 +15459,7 @@
             <a:avLst/>
           </a:prstGeom>
           <a:solidFill>
-            <a:srgbClr val="FFFFFC"/>
+            <a:srgbClr val="FAF9F5"/>
           </a:solidFill>
           <a:ln w="9525">
             <a:solidFill>
@@ -17334,7 +17334,7 @@
             <a:avLst/>
           </a:prstGeom>
           <a:solidFill>
-            <a:srgbClr val="FFFFFC"/>
+            <a:srgbClr val="FAF9F5"/>
           </a:solidFill>
           <a:ln w="9525">
             <a:solidFill>
@@ -17462,7 +17462,7 @@
             <a:avLst/>
           </a:prstGeom>
           <a:solidFill>
-            <a:srgbClr val="FFFFFC"/>
+            <a:srgbClr val="FAF9F5"/>
           </a:solidFill>
           <a:ln w="9525">
             <a:solidFill>
@@ -17590,7 +17590,7 @@
             <a:avLst/>
           </a:prstGeom>
           <a:solidFill>
-            <a:srgbClr val="FFFFFC"/>
+            <a:srgbClr val="FAF9F5"/>
           </a:solidFill>
           <a:ln w="9525">
             <a:solidFill>
@@ -17718,7 +17718,7 @@
             <a:avLst/>
           </a:prstGeom>
           <a:solidFill>
-            <a:srgbClr val="FFFFFC"/>
+            <a:srgbClr val="FAF9F5"/>
           </a:solidFill>
           <a:ln w="9525">
             <a:solidFill>
@@ -17846,7 +17846,7 @@
             <a:avLst/>
           </a:prstGeom>
           <a:solidFill>
-            <a:srgbClr val="FFFFFC"/>
+            <a:srgbClr val="FAF9F5"/>
           </a:solidFill>
           <a:ln w="9525">
             <a:solidFill>
@@ -32190,7 +32190,7 @@
             <a:avLst/>
           </a:prstGeom>
           <a:solidFill>
-            <a:srgbClr val="FFFFFC"/>
+            <a:srgbClr val="FAF9F5"/>
           </a:solidFill>
           <a:ln w="9525">
             <a:solidFill>
@@ -32318,7 +32318,7 @@
             <a:avLst/>
           </a:prstGeom>
           <a:solidFill>
-            <a:srgbClr val="FFFFFC"/>
+            <a:srgbClr val="FAF9F5"/>
           </a:solidFill>
           <a:ln w="9525">
             <a:solidFill>
@@ -32830,7 +32830,7 @@
             <a:avLst/>
           </a:prstGeom>
           <a:solidFill>
-            <a:srgbClr val="FFFFFC"/>
+            <a:srgbClr val="FAF9F5"/>
           </a:solidFill>
           <a:ln w="9525">
             <a:solidFill>
@@ -36079,7 +36079,7 @@
             <a:avLst/>
           </a:prstGeom>
           <a:solidFill>
-            <a:srgbClr val="FFFFFC"/>
+            <a:srgbClr val="FAF9F5"/>
           </a:solidFill>
           <a:ln w="9525">
             <a:solidFill>
@@ -36681,7 +36681,7 @@
             <a:avLst/>
           </a:prstGeom>
           <a:solidFill>
-            <a:srgbClr val="FFFFFC"/>
+            <a:srgbClr val="FAF9F5"/>
           </a:solidFill>
           <a:ln w="9525">
             <a:solidFill>
@@ -39664,7 +39664,7 @@
             <a:avLst/>
           </a:prstGeom>
           <a:solidFill>
-            <a:srgbClr val="FFFFFC"/>
+            <a:srgbClr val="FAF9F5"/>
           </a:solidFill>
           <a:ln>
             <a:noFill/>
@@ -40021,7 +40021,7 @@
             <a:avLst/>
           </a:prstGeom>
           <a:solidFill>
-            <a:srgbClr val="FFFFFC"/>
+            <a:srgbClr val="FAF9F5"/>
           </a:solidFill>
           <a:ln>
             <a:noFill/>
@@ -40378,7 +40378,7 @@
             <a:avLst/>
           </a:prstGeom>
           <a:solidFill>
-            <a:srgbClr val="FFFFFC"/>
+            <a:srgbClr val="FAF9F5"/>
           </a:solidFill>
           <a:ln>
             <a:noFill/>
@@ -40735,7 +40735,7 @@
             <a:avLst/>
           </a:prstGeom>
           <a:solidFill>
-            <a:srgbClr val="FFFFFC"/>
+            <a:srgbClr val="FAF9F5"/>
           </a:solidFill>
           <a:ln>
             <a:noFill/>
@@ -41092,7 +41092,7 @@
             <a:avLst/>
           </a:prstGeom>
           <a:solidFill>
-            <a:srgbClr val="FFFFFC"/>
+            <a:srgbClr val="FAF9F5"/>
           </a:solidFill>
           <a:ln>
             <a:noFill/>
@@ -46247,7 +46247,7 @@
             <a:avLst/>
           </a:prstGeom>
           <a:solidFill>
-            <a:srgbClr val="FEFEFE"/>
+            <a:srgbClr val="FAF9F5"/>
           </a:solidFill>
           <a:ln w="9525">
             <a:solidFill>
@@ -46320,7 +46320,7 @@
             <a:avLst/>
           </a:prstGeom>
           <a:solidFill>
-            <a:srgbClr val="FEFEFE"/>
+            <a:srgbClr val="FAF9F5"/>
           </a:solidFill>
           <a:ln w="9525">
             <a:solidFill>
@@ -46393,7 +46393,7 @@
             <a:avLst/>
           </a:prstGeom>
           <a:solidFill>
-            <a:srgbClr val="FEFEFE"/>
+            <a:srgbClr val="FAF9F5"/>
           </a:solidFill>
           <a:ln w="9525">
             <a:solidFill>
@@ -46466,7 +46466,7 @@
             <a:avLst/>
           </a:prstGeom>
           <a:solidFill>
-            <a:srgbClr val="FEFEFE"/>
+            <a:srgbClr val="FAF9F5"/>
           </a:solidFill>
           <a:ln w="9525">
             <a:solidFill>
@@ -46539,7 +46539,7 @@
             <a:avLst/>
           </a:prstGeom>
           <a:solidFill>
-            <a:srgbClr val="FEFEFE"/>
+            <a:srgbClr val="FAF9F5"/>
           </a:solidFill>
           <a:ln w="9525">
             <a:solidFill>
@@ -46612,7 +46612,7 @@
             <a:avLst/>
           </a:prstGeom>
           <a:solidFill>
-            <a:srgbClr val="FEFEFE"/>
+            <a:srgbClr val="FAF9F5"/>
           </a:solidFill>
           <a:ln w="9525">
             <a:solidFill>
@@ -46758,7 +46758,7 @@
             <a:avLst/>
           </a:prstGeom>
           <a:solidFill>
-            <a:srgbClr val="FEFEFE"/>
+            <a:srgbClr val="FAF9F5"/>
           </a:solidFill>
           <a:ln w="9525">
             <a:solidFill>
@@ -46831,7 +46831,7 @@
             <a:avLst/>
           </a:prstGeom>
           <a:solidFill>
-            <a:srgbClr val="FEFEFE"/>
+            <a:srgbClr val="FAF9F5"/>
           </a:solidFill>
           <a:ln w="9525">
             <a:solidFill>
@@ -46904,7 +46904,7 @@
             <a:avLst/>
           </a:prstGeom>
           <a:solidFill>
-            <a:srgbClr val="FEFEFE"/>
+            <a:srgbClr val="FAF9F5"/>
           </a:solidFill>
           <a:ln w="9525">
             <a:solidFill>
@@ -46977,7 +46977,7 @@
             <a:avLst/>
           </a:prstGeom>
           <a:solidFill>
-            <a:srgbClr val="FEFEFE"/>
+            <a:srgbClr val="FAF9F5"/>
           </a:solidFill>
           <a:ln w="9525">
             <a:solidFill>
@@ -53097,7 +53097,7 @@
                   </a:txBody>
                   <a:tcPr anchor="ctr" marL="82296" marR="82296" marT="36576" marB="36576">
                     <a:solidFill>
-                      <a:srgbClr val="FFFFFC"/>
+                      <a:srgbClr val="FAF9F5"/>
                     </a:solidFill>
                   </a:tcPr>
                 </a:tc>
@@ -53126,7 +53126,7 @@
                   </a:txBody>
                   <a:tcPr anchor="ctr" marL="82296" marR="82296" marT="36576" marB="36576">
                     <a:solidFill>
-                      <a:srgbClr val="FFFFFC"/>
+                      <a:srgbClr val="FAF9F5"/>
                     </a:solidFill>
                   </a:tcPr>
                 </a:tc>
@@ -53155,7 +53155,7 @@
                   </a:txBody>
                   <a:tcPr anchor="ctr" marL="82296" marR="82296" marT="36576" marB="36576">
                     <a:solidFill>
-                      <a:srgbClr val="FFFFFC"/>
+                      <a:srgbClr val="FAF9F5"/>
                     </a:solidFill>
                   </a:tcPr>
                 </a:tc>
@@ -53184,7 +53184,7 @@
                   </a:txBody>
                   <a:tcPr anchor="ctr" marL="82296" marR="82296" marT="36576" marB="36576">
                     <a:solidFill>
-                      <a:srgbClr val="FFFFFC"/>
+                      <a:srgbClr val="FAF9F5"/>
                     </a:solidFill>
                   </a:tcPr>
                 </a:tc>

--- a/examples/gallery/pattern_gallery.pptx
+++ b/examples/gallery/pattern_gallery.pptx
@@ -39476,66 +39476,78 @@
           </a:p>
         </p:txBody>
       </p:sp>
-      <p:sp>
-        <p:nvSpPr>
-          <p:cNvPr id="13" name="Oval 12"/>
-          <p:cNvSpPr/>
-          <p:nvPr/>
-        </p:nvSpPr>
-        <p:spPr>
-          <a:xfrm>
-            <a:off x="4992624" y="3047908"/>
-            <a:ext cx="73152" cy="73152"/>
-          </a:xfrm>
-          <a:prstGeom prst="ellipse">
-            <a:avLst/>
-          </a:prstGeom>
-          <a:solidFill>
-            <a:srgbClr val="666E70"/>
-          </a:solidFill>
-          <a:ln>
-            <a:noFill/>
-          </a:ln>
-          <a:effectLst/>
-        </p:spPr>
-        <p:txBody>
-          <a:bodyPr rtlCol="0" anchor="ctr"/>
-          <a:lstStyle/>
-          <a:p>
-            <a:pPr algn="ctr"/>
-          </a:p>
-        </p:txBody>
-      </p:sp>
-      <p:sp>
-        <p:nvSpPr>
-          <p:cNvPr id="14" name="Oval 13"/>
-          <p:cNvSpPr/>
-          <p:nvPr/>
-        </p:nvSpPr>
-        <p:spPr>
-          <a:xfrm>
-            <a:off x="6894576" y="3047908"/>
-            <a:ext cx="73152" cy="73152"/>
-          </a:xfrm>
-          <a:prstGeom prst="ellipse">
-            <a:avLst/>
-          </a:prstGeom>
-          <a:solidFill>
-            <a:srgbClr val="0D7870"/>
-          </a:solidFill>
-          <a:ln>
-            <a:noFill/>
-          </a:ln>
-          <a:effectLst/>
-        </p:spPr>
-        <p:txBody>
-          <a:bodyPr rtlCol="0" anchor="ctr"/>
-          <a:lstStyle/>
-          <a:p>
-            <a:pPr algn="ctr"/>
-          </a:p>
-        </p:txBody>
-      </p:sp>
+      <p:cxnSp>
+        <p:nvCxnSpPr>
+          <p:cNvPr id="13" name="Connector 12"/>
+          <p:cNvCxnSpPr/>
+          <p:nvPr/>
+        </p:nvCxnSpPr>
+        <p:spPr>
+          <a:xfrm>
+            <a:off x="5029200" y="3084484"/>
+            <a:ext cx="182880" cy="0"/>
+          </a:xfrm>
+          <a:prstGeom prst="line">
+            <a:avLst/>
+          </a:prstGeom>
+          <a:ln w="15875">
+            <a:solidFill>
+              <a:srgbClr val="666E70"/>
+            </a:solidFill>
+          </a:ln>
+          <a:effectLst/>
+        </p:spPr>
+        <p:style>
+          <a:lnRef idx="2">
+            <a:schemeClr val="accent1"/>
+          </a:lnRef>
+          <a:fillRef idx="0">
+            <a:schemeClr val="accent1"/>
+          </a:fillRef>
+          <a:effectRef idx="1">
+            <a:schemeClr val="accent1"/>
+          </a:effectRef>
+          <a:fontRef idx="minor">
+            <a:schemeClr val="tx1"/>
+          </a:fontRef>
+        </p:style>
+      </p:cxnSp>
+      <p:cxnSp>
+        <p:nvCxnSpPr>
+          <p:cNvPr id="14" name="Connector 13"/>
+          <p:cNvCxnSpPr/>
+          <p:nvPr/>
+        </p:nvCxnSpPr>
+        <p:spPr>
+          <a:xfrm>
+            <a:off x="6748272" y="3084484"/>
+            <a:ext cx="182880" cy="0"/>
+          </a:xfrm>
+          <a:prstGeom prst="line">
+            <a:avLst/>
+          </a:prstGeom>
+          <a:ln w="15875">
+            <a:solidFill>
+              <a:srgbClr val="0D7870"/>
+            </a:solidFill>
+          </a:ln>
+          <a:effectLst/>
+        </p:spPr>
+        <p:style>
+          <a:lnRef idx="2">
+            <a:schemeClr val="accent1"/>
+          </a:lnRef>
+          <a:fillRef idx="0">
+            <a:schemeClr val="accent1"/>
+          </a:fillRef>
+          <a:effectRef idx="1">
+            <a:schemeClr val="accent1"/>
+          </a:effectRef>
+          <a:fontRef idx="minor">
+            <a:schemeClr val="tx1"/>
+          </a:fontRef>
+        </p:style>
+      </p:cxnSp>
       <p:cxnSp>
         <p:nvCxnSpPr>
           <p:cNvPr id="15" name="Connector 14"/>
@@ -39544,13 +39556,13 @@
         </p:nvCxnSpPr>
         <p:spPr>
           <a:xfrm>
-            <a:off x="5029200" y="3084484"/>
-            <a:ext cx="182880" cy="0"/>
+            <a:off x="667512" y="3395380"/>
+            <a:ext cx="4197096" cy="0"/>
           </a:xfrm>
           <a:prstGeom prst="line">
             <a:avLst/>
           </a:prstGeom>
-          <a:ln w="10160">
+          <a:ln w="6985">
             <a:solidFill>
               <a:srgbClr val="D1CFC8"/>
             </a:solidFill>
@@ -39580,13 +39592,13 @@
         </p:nvCxnSpPr>
         <p:spPr>
           <a:xfrm>
-            <a:off x="6748272" y="3084484"/>
-            <a:ext cx="182880" cy="0"/>
+            <a:off x="7095744" y="3395380"/>
+            <a:ext cx="4428439" cy="0"/>
           </a:xfrm>
           <a:prstGeom prst="line">
             <a:avLst/>
           </a:prstGeom>
-          <a:ln w="10160">
+          <a:ln w="6985">
             <a:solidFill>
               <a:srgbClr val="D1CFC8"/>
             </a:solidFill>
@@ -39608,159 +39620,150 @@
           </a:fontRef>
         </p:style>
       </p:cxnSp>
-      <p:sp>
-        <p:nvSpPr>
-          <p:cNvPr id="17" name="TextBox 16"/>
-          <p:cNvSpPr txBox="1"/>
-          <p:nvPr/>
-        </p:nvSpPr>
-        <p:spPr>
-          <a:xfrm>
-            <a:off x="685800" y="2773588"/>
-            <a:ext cx="4160520" cy="621792"/>
-          </a:xfrm>
-          <a:prstGeom prst="rect">
-            <a:avLst/>
-          </a:prstGeom>
-          <a:noFill/>
-        </p:spPr>
-        <p:txBody>
-          <a:bodyPr wrap="square" anchor="ctr" lIns="0" rIns="0" tIns="0" bIns="0">
-            <a:spAutoFit/>
-          </a:bodyPr>
-          <a:lstStyle/>
-          <a:p>
-            <a:pPr algn="l">
-              <a:lnSpc>
-                <a:spcPct val="115000"/>
-              </a:lnSpc>
-            </a:pPr>
-            <a:r>
-              <a:rPr sz="1350" b="0" lang="ja-JP">
-                <a:solidFill>
-                  <a:srgbClr val="202729"/>
-                </a:solidFill>
-                <a:latin typeface="Yu Gothic"/>
-                <a:ea typeface="Yu Gothic"/>
-                <a:cs typeface="Yu Gothic"/>
-              </a:rPr>
-              <a:t>担当者ごとの個別対応が多い</a:t>
-            </a:r>
-          </a:p>
-        </p:txBody>
-      </p:sp>
-      <p:sp>
-        <p:nvSpPr>
-          <p:cNvPr id="18" name="Rectangle 17"/>
-          <p:cNvSpPr/>
-          <p:nvPr/>
-        </p:nvSpPr>
-        <p:spPr>
-          <a:xfrm>
-            <a:off x="5266944" y="2883316"/>
-            <a:ext cx="1426464" cy="402336"/>
-          </a:xfrm>
-          <a:prstGeom prst="rect">
-            <a:avLst/>
-          </a:prstGeom>
-          <a:solidFill>
-            <a:srgbClr val="FAF9F5"/>
-          </a:solidFill>
-          <a:ln>
-            <a:noFill/>
-          </a:ln>
-          <a:effectLst/>
-        </p:spPr>
-        <p:txBody>
-          <a:bodyPr rtlCol="0" anchor="ctr"/>
-          <a:lstStyle/>
-          <a:p>
-            <a:pPr algn="ctr"/>
-          </a:p>
-        </p:txBody>
-      </p:sp>
-      <p:sp>
-        <p:nvSpPr>
-          <p:cNvPr id="19" name="TextBox 18"/>
-          <p:cNvSpPr txBox="1"/>
-          <p:nvPr/>
-        </p:nvSpPr>
-        <p:spPr>
-          <a:xfrm>
-            <a:off x="5266944" y="2883316"/>
-            <a:ext cx="1426464" cy="402336"/>
-          </a:xfrm>
-          <a:prstGeom prst="rect">
-            <a:avLst/>
-          </a:prstGeom>
-          <a:noFill/>
-        </p:spPr>
-        <p:txBody>
-          <a:bodyPr wrap="square" anchor="ctr" lIns="0" rIns="0" tIns="0" bIns="0">
-            <a:spAutoFit/>
-          </a:bodyPr>
-          <a:lstStyle/>
-          <a:p>
-            <a:pPr algn="ctr">
-              <a:lnSpc>
-                <a:spcPct val="115000"/>
-              </a:lnSpc>
-            </a:pPr>
-            <a:r>
-              <a:rPr sz="1100" b="1" lang="ja-JP">
-                <a:solidFill>
-                  <a:srgbClr val="182C43"/>
-                </a:solidFill>
-                <a:latin typeface="Yu Gothic"/>
-                <a:ea typeface="Yu Gothic"/>
-                <a:cs typeface="Yu Gothic"/>
-              </a:rPr>
-              <a:t>運用負荷</a:t>
-            </a:r>
-          </a:p>
-        </p:txBody>
-      </p:sp>
-      <p:sp>
-        <p:nvSpPr>
-          <p:cNvPr id="20" name="TextBox 19"/>
-          <p:cNvSpPr txBox="1"/>
-          <p:nvPr/>
-        </p:nvSpPr>
-        <p:spPr>
-          <a:xfrm>
-            <a:off x="7114032" y="2773588"/>
-            <a:ext cx="4391863" cy="621792"/>
-          </a:xfrm>
-          <a:prstGeom prst="rect">
-            <a:avLst/>
-          </a:prstGeom>
-          <a:noFill/>
-        </p:spPr>
-        <p:txBody>
-          <a:bodyPr wrap="square" anchor="ctr" lIns="0" rIns="0" tIns="0" bIns="0">
-            <a:spAutoFit/>
-          </a:bodyPr>
-          <a:lstStyle/>
-          <a:p>
-            <a:pPr algn="l">
-              <a:lnSpc>
-                <a:spcPct val="115000"/>
-              </a:lnSpc>
-            </a:pPr>
-            <a:r>
-              <a:rPr sz="1350" b="0" lang="ja-JP">
-                <a:solidFill>
-                  <a:srgbClr val="202729"/>
-                </a:solidFill>
-                <a:latin typeface="Yu Gothic"/>
-                <a:ea typeface="Yu Gothic"/>
-                <a:cs typeface="Yu Gothic"/>
-              </a:rPr>
-              <a:t>共通手順により確認作業を削減</a:t>
-            </a:r>
-          </a:p>
-        </p:txBody>
-      </p:sp>
+      <p:cxnSp>
+        <p:nvCxnSpPr>
+          <p:cNvPr id="17" name="Connector 16"/>
+          <p:cNvCxnSpPr/>
+          <p:nvPr/>
+        </p:nvCxnSpPr>
+        <p:spPr>
+          <a:xfrm>
+            <a:off x="5029200" y="3706276"/>
+            <a:ext cx="182880" cy="0"/>
+          </a:xfrm>
+          <a:prstGeom prst="line">
+            <a:avLst/>
+          </a:prstGeom>
+          <a:ln w="15875">
+            <a:solidFill>
+              <a:srgbClr val="666E70"/>
+            </a:solidFill>
+          </a:ln>
+          <a:effectLst/>
+        </p:spPr>
+        <p:style>
+          <a:lnRef idx="2">
+            <a:schemeClr val="accent1"/>
+          </a:lnRef>
+          <a:fillRef idx="0">
+            <a:schemeClr val="accent1"/>
+          </a:fillRef>
+          <a:effectRef idx="1">
+            <a:schemeClr val="accent1"/>
+          </a:effectRef>
+          <a:fontRef idx="minor">
+            <a:schemeClr val="tx1"/>
+          </a:fontRef>
+        </p:style>
+      </p:cxnSp>
+      <p:cxnSp>
+        <p:nvCxnSpPr>
+          <p:cNvPr id="18" name="Connector 17"/>
+          <p:cNvCxnSpPr/>
+          <p:nvPr/>
+        </p:nvCxnSpPr>
+        <p:spPr>
+          <a:xfrm>
+            <a:off x="6748272" y="3706276"/>
+            <a:ext cx="182880" cy="0"/>
+          </a:xfrm>
+          <a:prstGeom prst="line">
+            <a:avLst/>
+          </a:prstGeom>
+          <a:ln w="15875">
+            <a:solidFill>
+              <a:srgbClr val="0D7870"/>
+            </a:solidFill>
+          </a:ln>
+          <a:effectLst/>
+        </p:spPr>
+        <p:style>
+          <a:lnRef idx="2">
+            <a:schemeClr val="accent1"/>
+          </a:lnRef>
+          <a:fillRef idx="0">
+            <a:schemeClr val="accent1"/>
+          </a:fillRef>
+          <a:effectRef idx="1">
+            <a:schemeClr val="accent1"/>
+          </a:effectRef>
+          <a:fontRef idx="minor">
+            <a:schemeClr val="tx1"/>
+          </a:fontRef>
+        </p:style>
+      </p:cxnSp>
+      <p:cxnSp>
+        <p:nvCxnSpPr>
+          <p:cNvPr id="19" name="Connector 18"/>
+          <p:cNvCxnSpPr/>
+          <p:nvPr/>
+        </p:nvCxnSpPr>
+        <p:spPr>
+          <a:xfrm>
+            <a:off x="667512" y="4017172"/>
+            <a:ext cx="4197096" cy="0"/>
+          </a:xfrm>
+          <a:prstGeom prst="line">
+            <a:avLst/>
+          </a:prstGeom>
+          <a:ln w="6985">
+            <a:solidFill>
+              <a:srgbClr val="D1CFC8"/>
+            </a:solidFill>
+          </a:ln>
+          <a:effectLst/>
+        </p:spPr>
+        <p:style>
+          <a:lnRef idx="2">
+            <a:schemeClr val="accent1"/>
+          </a:lnRef>
+          <a:fillRef idx="0">
+            <a:schemeClr val="accent1"/>
+          </a:fillRef>
+          <a:effectRef idx="1">
+            <a:schemeClr val="accent1"/>
+          </a:effectRef>
+          <a:fontRef idx="minor">
+            <a:schemeClr val="tx1"/>
+          </a:fontRef>
+        </p:style>
+      </p:cxnSp>
+      <p:cxnSp>
+        <p:nvCxnSpPr>
+          <p:cNvPr id="20" name="Connector 19"/>
+          <p:cNvCxnSpPr/>
+          <p:nvPr/>
+        </p:nvCxnSpPr>
+        <p:spPr>
+          <a:xfrm>
+            <a:off x="7095744" y="4017172"/>
+            <a:ext cx="4428439" cy="0"/>
+          </a:xfrm>
+          <a:prstGeom prst="line">
+            <a:avLst/>
+          </a:prstGeom>
+          <a:ln w="6985">
+            <a:solidFill>
+              <a:srgbClr val="D1CFC8"/>
+            </a:solidFill>
+          </a:ln>
+          <a:effectLst/>
+        </p:spPr>
+        <p:style>
+          <a:lnRef idx="2">
+            <a:schemeClr val="accent1"/>
+          </a:lnRef>
+          <a:fillRef idx="0">
+            <a:schemeClr val="accent1"/>
+          </a:fillRef>
+          <a:effectRef idx="1">
+            <a:schemeClr val="accent1"/>
+          </a:effectRef>
+          <a:fontRef idx="minor">
+            <a:schemeClr val="tx1"/>
+          </a:fontRef>
+        </p:style>
+      </p:cxnSp>
       <p:cxnSp>
         <p:nvCxnSpPr>
           <p:cNvPr id="21" name="Connector 20"/>
@@ -39769,15 +39772,15 @@
         </p:nvCxnSpPr>
         <p:spPr>
           <a:xfrm>
-            <a:off x="667512" y="3395380"/>
-            <a:ext cx="4197096" cy="0"/>
+            <a:off x="5029200" y="4328068"/>
+            <a:ext cx="182880" cy="0"/>
           </a:xfrm>
           <a:prstGeom prst="line">
             <a:avLst/>
           </a:prstGeom>
-          <a:ln w="6985">
+          <a:ln w="15875">
             <a:solidFill>
-              <a:srgbClr val="D1CFC8"/>
+              <a:srgbClr val="666E70"/>
             </a:solidFill>
           </a:ln>
           <a:effectLst/>
@@ -39805,15 +39808,15 @@
         </p:nvCxnSpPr>
         <p:spPr>
           <a:xfrm>
-            <a:off x="7095744" y="3395380"/>
-            <a:ext cx="4428439" cy="0"/>
+            <a:off x="6748272" y="4328068"/>
+            <a:ext cx="182880" cy="0"/>
           </a:xfrm>
           <a:prstGeom prst="line">
             <a:avLst/>
           </a:prstGeom>
-          <a:ln w="6985">
+          <a:ln w="15875">
             <a:solidFill>
-              <a:srgbClr val="D1CFC8"/>
+              <a:srgbClr val="0D7870"/>
             </a:solidFill>
           </a:ln>
           <a:effectLst/>
@@ -39833,66 +39836,78 @@
           </a:fontRef>
         </p:style>
       </p:cxnSp>
-      <p:sp>
-        <p:nvSpPr>
-          <p:cNvPr id="23" name="Oval 22"/>
-          <p:cNvSpPr/>
-          <p:nvPr/>
-        </p:nvSpPr>
-        <p:spPr>
-          <a:xfrm>
-            <a:off x="4992624" y="3669700"/>
-            <a:ext cx="73152" cy="73152"/>
-          </a:xfrm>
-          <a:prstGeom prst="ellipse">
-            <a:avLst/>
-          </a:prstGeom>
-          <a:solidFill>
-            <a:srgbClr val="666E70"/>
-          </a:solidFill>
-          <a:ln>
-            <a:noFill/>
-          </a:ln>
-          <a:effectLst/>
-        </p:spPr>
-        <p:txBody>
-          <a:bodyPr rtlCol="0" anchor="ctr"/>
-          <a:lstStyle/>
-          <a:p>
-            <a:pPr algn="ctr"/>
-          </a:p>
-        </p:txBody>
-      </p:sp>
-      <p:sp>
-        <p:nvSpPr>
-          <p:cNvPr id="24" name="Oval 23"/>
-          <p:cNvSpPr/>
-          <p:nvPr/>
-        </p:nvSpPr>
-        <p:spPr>
-          <a:xfrm>
-            <a:off x="6894576" y="3669700"/>
-            <a:ext cx="73152" cy="73152"/>
-          </a:xfrm>
-          <a:prstGeom prst="ellipse">
-            <a:avLst/>
-          </a:prstGeom>
-          <a:solidFill>
-            <a:srgbClr val="0D7870"/>
-          </a:solidFill>
-          <a:ln>
-            <a:noFill/>
-          </a:ln>
-          <a:effectLst/>
-        </p:spPr>
-        <p:txBody>
-          <a:bodyPr rtlCol="0" anchor="ctr"/>
-          <a:lstStyle/>
-          <a:p>
-            <a:pPr algn="ctr"/>
-          </a:p>
-        </p:txBody>
-      </p:sp>
+      <p:cxnSp>
+        <p:nvCxnSpPr>
+          <p:cNvPr id="23" name="Connector 22"/>
+          <p:cNvCxnSpPr/>
+          <p:nvPr/>
+        </p:nvCxnSpPr>
+        <p:spPr>
+          <a:xfrm>
+            <a:off x="667512" y="4638964"/>
+            <a:ext cx="4197096" cy="0"/>
+          </a:xfrm>
+          <a:prstGeom prst="line">
+            <a:avLst/>
+          </a:prstGeom>
+          <a:ln w="6985">
+            <a:solidFill>
+              <a:srgbClr val="D1CFC8"/>
+            </a:solidFill>
+          </a:ln>
+          <a:effectLst/>
+        </p:spPr>
+        <p:style>
+          <a:lnRef idx="2">
+            <a:schemeClr val="accent1"/>
+          </a:lnRef>
+          <a:fillRef idx="0">
+            <a:schemeClr val="accent1"/>
+          </a:fillRef>
+          <a:effectRef idx="1">
+            <a:schemeClr val="accent1"/>
+          </a:effectRef>
+          <a:fontRef idx="minor">
+            <a:schemeClr val="tx1"/>
+          </a:fontRef>
+        </p:style>
+      </p:cxnSp>
+      <p:cxnSp>
+        <p:nvCxnSpPr>
+          <p:cNvPr id="24" name="Connector 23"/>
+          <p:cNvCxnSpPr/>
+          <p:nvPr/>
+        </p:nvCxnSpPr>
+        <p:spPr>
+          <a:xfrm>
+            <a:off x="7095744" y="4638964"/>
+            <a:ext cx="4428439" cy="0"/>
+          </a:xfrm>
+          <a:prstGeom prst="line">
+            <a:avLst/>
+          </a:prstGeom>
+          <a:ln w="6985">
+            <a:solidFill>
+              <a:srgbClr val="D1CFC8"/>
+            </a:solidFill>
+          </a:ln>
+          <a:effectLst/>
+        </p:spPr>
+        <p:style>
+          <a:lnRef idx="2">
+            <a:schemeClr val="accent1"/>
+          </a:lnRef>
+          <a:fillRef idx="0">
+            <a:schemeClr val="accent1"/>
+          </a:fillRef>
+          <a:effectRef idx="1">
+            <a:schemeClr val="accent1"/>
+          </a:effectRef>
+          <a:fontRef idx="minor">
+            <a:schemeClr val="tx1"/>
+          </a:fontRef>
+        </p:style>
+      </p:cxnSp>
       <p:cxnSp>
         <p:nvCxnSpPr>
           <p:cNvPr id="25" name="Connector 24"/>
@@ -39901,15 +39916,15 @@
         </p:nvCxnSpPr>
         <p:spPr>
           <a:xfrm>
-            <a:off x="5029200" y="3706276"/>
+            <a:off x="5029200" y="4949860"/>
             <a:ext cx="182880" cy="0"/>
           </a:xfrm>
           <a:prstGeom prst="line">
             <a:avLst/>
           </a:prstGeom>
-          <a:ln w="10160">
+          <a:ln w="15875">
             <a:solidFill>
-              <a:srgbClr val="D1CFC8"/>
+              <a:srgbClr val="666E70"/>
             </a:solidFill>
           </a:ln>
           <a:effectLst/>
@@ -39937,204 +39952,15 @@
         </p:nvCxnSpPr>
         <p:spPr>
           <a:xfrm>
-            <a:off x="6748272" y="3706276"/>
+            <a:off x="6748272" y="4949860"/>
             <a:ext cx="182880" cy="0"/>
           </a:xfrm>
           <a:prstGeom prst="line">
             <a:avLst/>
           </a:prstGeom>
-          <a:ln w="10160">
+          <a:ln w="15875">
             <a:solidFill>
-              <a:srgbClr val="D1CFC8"/>
-            </a:solidFill>
-          </a:ln>
-          <a:effectLst/>
-        </p:spPr>
-        <p:style>
-          <a:lnRef idx="2">
-            <a:schemeClr val="accent1"/>
-          </a:lnRef>
-          <a:fillRef idx="0">
-            <a:schemeClr val="accent1"/>
-          </a:fillRef>
-          <a:effectRef idx="1">
-            <a:schemeClr val="accent1"/>
-          </a:effectRef>
-          <a:fontRef idx="minor">
-            <a:schemeClr val="tx1"/>
-          </a:fontRef>
-        </p:style>
-      </p:cxnSp>
-      <p:sp>
-        <p:nvSpPr>
-          <p:cNvPr id="27" name="TextBox 26"/>
-          <p:cNvSpPr txBox="1"/>
-          <p:nvPr/>
-        </p:nvSpPr>
-        <p:spPr>
-          <a:xfrm>
-            <a:off x="685800" y="3395380"/>
-            <a:ext cx="4160520" cy="621792"/>
-          </a:xfrm>
-          <a:prstGeom prst="rect">
-            <a:avLst/>
-          </a:prstGeom>
-          <a:noFill/>
-        </p:spPr>
-        <p:txBody>
-          <a:bodyPr wrap="square" anchor="ctr" lIns="0" rIns="0" tIns="0" bIns="0">
-            <a:spAutoFit/>
-          </a:bodyPr>
-          <a:lstStyle/>
-          <a:p>
-            <a:pPr algn="l">
-              <a:lnSpc>
-                <a:spcPct val="115000"/>
-              </a:lnSpc>
-            </a:pPr>
-            <a:r>
-              <a:rPr sz="1350" b="0" lang="ja-JP">
-                <a:solidFill>
-                  <a:srgbClr val="202729"/>
-                </a:solidFill>
-                <a:latin typeface="Yu Gothic"/>
-                <a:ea typeface="Yu Gothic"/>
-                <a:cs typeface="Yu Gothic"/>
-              </a:rPr>
-              <a:t>初期設定は少なく短期導入しやすい</a:t>
-            </a:r>
-          </a:p>
-        </p:txBody>
-      </p:sp>
-      <p:sp>
-        <p:nvSpPr>
-          <p:cNvPr id="28" name="Rectangle 27"/>
-          <p:cNvSpPr/>
-          <p:nvPr/>
-        </p:nvSpPr>
-        <p:spPr>
-          <a:xfrm>
-            <a:off x="5266944" y="3505108"/>
-            <a:ext cx="1426464" cy="402336"/>
-          </a:xfrm>
-          <a:prstGeom prst="rect">
-            <a:avLst/>
-          </a:prstGeom>
-          <a:solidFill>
-            <a:srgbClr val="FAF9F5"/>
-          </a:solidFill>
-          <a:ln>
-            <a:noFill/>
-          </a:ln>
-          <a:effectLst/>
-        </p:spPr>
-        <p:txBody>
-          <a:bodyPr rtlCol="0" anchor="ctr"/>
-          <a:lstStyle/>
-          <a:p>
-            <a:pPr algn="ctr"/>
-          </a:p>
-        </p:txBody>
-      </p:sp>
-      <p:sp>
-        <p:nvSpPr>
-          <p:cNvPr id="29" name="TextBox 28"/>
-          <p:cNvSpPr txBox="1"/>
-          <p:nvPr/>
-        </p:nvSpPr>
-        <p:spPr>
-          <a:xfrm>
-            <a:off x="5266944" y="3505108"/>
-            <a:ext cx="1426464" cy="402336"/>
-          </a:xfrm>
-          <a:prstGeom prst="rect">
-            <a:avLst/>
-          </a:prstGeom>
-          <a:noFill/>
-        </p:spPr>
-        <p:txBody>
-          <a:bodyPr wrap="square" anchor="ctr" lIns="0" rIns="0" tIns="0" bIns="0">
-            <a:spAutoFit/>
-          </a:bodyPr>
-          <a:lstStyle/>
-          <a:p>
-            <a:pPr algn="ctr">
-              <a:lnSpc>
-                <a:spcPct val="115000"/>
-              </a:lnSpc>
-            </a:pPr>
-            <a:r>
-              <a:rPr sz="1100" b="1" lang="ja-JP">
-                <a:solidFill>
-                  <a:srgbClr val="182C43"/>
-                </a:solidFill>
-                <a:latin typeface="Yu Gothic"/>
-                <a:ea typeface="Yu Gothic"/>
-                <a:cs typeface="Yu Gothic"/>
-              </a:rPr>
-              <a:t>導入速度</a:t>
-            </a:r>
-          </a:p>
-        </p:txBody>
-      </p:sp>
-      <p:sp>
-        <p:nvSpPr>
-          <p:cNvPr id="30" name="TextBox 29"/>
-          <p:cNvSpPr txBox="1"/>
-          <p:nvPr/>
-        </p:nvSpPr>
-        <p:spPr>
-          <a:xfrm>
-            <a:off x="7114032" y="3395380"/>
-            <a:ext cx="4391863" cy="621792"/>
-          </a:xfrm>
-          <a:prstGeom prst="rect">
-            <a:avLst/>
-          </a:prstGeom>
-          <a:noFill/>
-        </p:spPr>
-        <p:txBody>
-          <a:bodyPr wrap="square" anchor="ctr" lIns="0" rIns="0" tIns="0" bIns="0">
-            <a:spAutoFit/>
-          </a:bodyPr>
-          <a:lstStyle/>
-          <a:p>
-            <a:pPr algn="l">
-              <a:lnSpc>
-                <a:spcPct val="115000"/>
-              </a:lnSpc>
-            </a:pPr>
-            <a:r>
-              <a:rPr sz="1350" b="0" lang="ja-JP">
-                <a:solidFill>
-                  <a:srgbClr val="202729"/>
-                </a:solidFill>
-                <a:latin typeface="Yu Gothic"/>
-                <a:ea typeface="Yu Gothic"/>
-                <a:cs typeface="Yu Gothic"/>
-              </a:rPr>
-              <a:t>初期整備後は再利用によって展開を加速</a:t>
-            </a:r>
-          </a:p>
-        </p:txBody>
-      </p:sp>
-      <p:cxnSp>
-        <p:nvCxnSpPr>
-          <p:cNvPr id="31" name="Connector 30"/>
-          <p:cNvCxnSpPr/>
-          <p:nvPr/>
-        </p:nvCxnSpPr>
-        <p:spPr>
-          <a:xfrm>
-            <a:off x="667512" y="4017172"/>
-            <a:ext cx="4197096" cy="0"/>
-          </a:xfrm>
-          <a:prstGeom prst="line">
-            <a:avLst/>
-          </a:prstGeom>
-          <a:ln w="6985">
-            <a:solidFill>
-              <a:srgbClr val="D1CFC8"/>
+              <a:srgbClr val="0D7870"/>
             </a:solidFill>
           </a:ln>
           <a:effectLst/>
@@ -40156,115 +39982,19 @@
       </p:cxnSp>
       <p:cxnSp>
         <p:nvCxnSpPr>
-          <p:cNvPr id="32" name="Connector 31"/>
+          <p:cNvPr id="27" name="Connector 26"/>
           <p:cNvCxnSpPr/>
           <p:nvPr/>
         </p:nvCxnSpPr>
         <p:spPr>
           <a:xfrm>
-            <a:off x="7095744" y="4017172"/>
-            <a:ext cx="4428439" cy="0"/>
+            <a:off x="667512" y="5260756"/>
+            <a:ext cx="4197096" cy="0"/>
           </a:xfrm>
           <a:prstGeom prst="line">
             <a:avLst/>
           </a:prstGeom>
           <a:ln w="6985">
-            <a:solidFill>
-              <a:srgbClr val="D1CFC8"/>
-            </a:solidFill>
-          </a:ln>
-          <a:effectLst/>
-        </p:spPr>
-        <p:style>
-          <a:lnRef idx="2">
-            <a:schemeClr val="accent1"/>
-          </a:lnRef>
-          <a:fillRef idx="0">
-            <a:schemeClr val="accent1"/>
-          </a:fillRef>
-          <a:effectRef idx="1">
-            <a:schemeClr val="accent1"/>
-          </a:effectRef>
-          <a:fontRef idx="minor">
-            <a:schemeClr val="tx1"/>
-          </a:fontRef>
-        </p:style>
-      </p:cxnSp>
-      <p:sp>
-        <p:nvSpPr>
-          <p:cNvPr id="33" name="Oval 32"/>
-          <p:cNvSpPr/>
-          <p:nvPr/>
-        </p:nvSpPr>
-        <p:spPr>
-          <a:xfrm>
-            <a:off x="4992624" y="4291492"/>
-            <a:ext cx="73152" cy="73152"/>
-          </a:xfrm>
-          <a:prstGeom prst="ellipse">
-            <a:avLst/>
-          </a:prstGeom>
-          <a:solidFill>
-            <a:srgbClr val="666E70"/>
-          </a:solidFill>
-          <a:ln>
-            <a:noFill/>
-          </a:ln>
-          <a:effectLst/>
-        </p:spPr>
-        <p:txBody>
-          <a:bodyPr rtlCol="0" anchor="ctr"/>
-          <a:lstStyle/>
-          <a:p>
-            <a:pPr algn="ctr"/>
-          </a:p>
-        </p:txBody>
-      </p:sp>
-      <p:sp>
-        <p:nvSpPr>
-          <p:cNvPr id="34" name="Oval 33"/>
-          <p:cNvSpPr/>
-          <p:nvPr/>
-        </p:nvSpPr>
-        <p:spPr>
-          <a:xfrm>
-            <a:off x="6894576" y="4291492"/>
-            <a:ext cx="73152" cy="73152"/>
-          </a:xfrm>
-          <a:prstGeom prst="ellipse">
-            <a:avLst/>
-          </a:prstGeom>
-          <a:solidFill>
-            <a:srgbClr val="0D7870"/>
-          </a:solidFill>
-          <a:ln>
-            <a:noFill/>
-          </a:ln>
-          <a:effectLst/>
-        </p:spPr>
-        <p:txBody>
-          <a:bodyPr rtlCol="0" anchor="ctr"/>
-          <a:lstStyle/>
-          <a:p>
-            <a:pPr algn="ctr"/>
-          </a:p>
-        </p:txBody>
-      </p:sp>
-      <p:cxnSp>
-        <p:nvCxnSpPr>
-          <p:cNvPr id="35" name="Connector 34"/>
-          <p:cNvCxnSpPr/>
-          <p:nvPr/>
-        </p:nvCxnSpPr>
-        <p:spPr>
-          <a:xfrm>
-            <a:off x="5029200" y="4328068"/>
-            <a:ext cx="182880" cy="0"/>
-          </a:xfrm>
-          <a:prstGeom prst="line">
-            <a:avLst/>
-          </a:prstGeom>
-          <a:ln w="10160">
             <a:solidFill>
               <a:srgbClr val="D1CFC8"/>
             </a:solidFill>
@@ -40288,203 +40018,14 @@
       </p:cxnSp>
       <p:cxnSp>
         <p:nvCxnSpPr>
-          <p:cNvPr id="36" name="Connector 35"/>
+          <p:cNvPr id="28" name="Connector 27"/>
           <p:cNvCxnSpPr/>
           <p:nvPr/>
         </p:nvCxnSpPr>
         <p:spPr>
           <a:xfrm>
-            <a:off x="6748272" y="4328068"/>
-            <a:ext cx="182880" cy="0"/>
-          </a:xfrm>
-          <a:prstGeom prst="line">
-            <a:avLst/>
-          </a:prstGeom>
-          <a:ln w="10160">
-            <a:solidFill>
-              <a:srgbClr val="D1CFC8"/>
-            </a:solidFill>
-          </a:ln>
-          <a:effectLst/>
-        </p:spPr>
-        <p:style>
-          <a:lnRef idx="2">
-            <a:schemeClr val="accent1"/>
-          </a:lnRef>
-          <a:fillRef idx="0">
-            <a:schemeClr val="accent1"/>
-          </a:fillRef>
-          <a:effectRef idx="1">
-            <a:schemeClr val="accent1"/>
-          </a:effectRef>
-          <a:fontRef idx="minor">
-            <a:schemeClr val="tx1"/>
-          </a:fontRef>
-        </p:style>
-      </p:cxnSp>
-      <p:sp>
-        <p:nvSpPr>
-          <p:cNvPr id="37" name="TextBox 36"/>
-          <p:cNvSpPr txBox="1"/>
-          <p:nvPr/>
-        </p:nvSpPr>
-        <p:spPr>
-          <a:xfrm>
-            <a:off x="685800" y="4017172"/>
-            <a:ext cx="4160520" cy="621792"/>
-          </a:xfrm>
-          <a:prstGeom prst="rect">
-            <a:avLst/>
-          </a:prstGeom>
-          <a:noFill/>
-        </p:spPr>
-        <p:txBody>
-          <a:bodyPr wrap="square" anchor="ctr" lIns="0" rIns="0" tIns="0" bIns="0">
-            <a:spAutoFit/>
-          </a:bodyPr>
-          <a:lstStyle/>
-          <a:p>
-            <a:pPr algn="l">
-              <a:lnSpc>
-                <a:spcPct val="115000"/>
-              </a:lnSpc>
-            </a:pPr>
-            <a:r>
-              <a:rPr sz="1350" b="0" lang="ja-JP">
-                <a:solidFill>
-                  <a:srgbClr val="202729"/>
-                </a:solidFill>
-                <a:latin typeface="Yu Gothic"/>
-                <a:ea typeface="Yu Gothic"/>
-                <a:cs typeface="Yu Gothic"/>
-              </a:rPr>
-              <a:t>個別要望へ即時に対応できる</a:t>
-            </a:r>
-          </a:p>
-        </p:txBody>
-      </p:sp>
-      <p:sp>
-        <p:nvSpPr>
-          <p:cNvPr id="38" name="Rectangle 37"/>
-          <p:cNvSpPr/>
-          <p:nvPr/>
-        </p:nvSpPr>
-        <p:spPr>
-          <a:xfrm>
-            <a:off x="5266944" y="4126900"/>
-            <a:ext cx="1426464" cy="402336"/>
-          </a:xfrm>
-          <a:prstGeom prst="rect">
-            <a:avLst/>
-          </a:prstGeom>
-          <a:solidFill>
-            <a:srgbClr val="FAF9F5"/>
-          </a:solidFill>
-          <a:ln>
-            <a:noFill/>
-          </a:ln>
-          <a:effectLst/>
-        </p:spPr>
-        <p:txBody>
-          <a:bodyPr rtlCol="0" anchor="ctr"/>
-          <a:lstStyle/>
-          <a:p>
-            <a:pPr algn="ctr"/>
-          </a:p>
-        </p:txBody>
-      </p:sp>
-      <p:sp>
-        <p:nvSpPr>
-          <p:cNvPr id="39" name="TextBox 38"/>
-          <p:cNvSpPr txBox="1"/>
-          <p:nvPr/>
-        </p:nvSpPr>
-        <p:spPr>
-          <a:xfrm>
-            <a:off x="5266944" y="4126900"/>
-            <a:ext cx="1426464" cy="402336"/>
-          </a:xfrm>
-          <a:prstGeom prst="rect">
-            <a:avLst/>
-          </a:prstGeom>
-          <a:noFill/>
-        </p:spPr>
-        <p:txBody>
-          <a:bodyPr wrap="square" anchor="ctr" lIns="0" rIns="0" tIns="0" bIns="0">
-            <a:spAutoFit/>
-          </a:bodyPr>
-          <a:lstStyle/>
-          <a:p>
-            <a:pPr algn="ctr">
-              <a:lnSpc>
-                <a:spcPct val="115000"/>
-              </a:lnSpc>
-            </a:pPr>
-            <a:r>
-              <a:rPr sz="1100" b="1" lang="ja-JP">
-                <a:solidFill>
-                  <a:srgbClr val="182C43"/>
-                </a:solidFill>
-                <a:latin typeface="Yu Gothic"/>
-                <a:ea typeface="Yu Gothic"/>
-                <a:cs typeface="Yu Gothic"/>
-              </a:rPr>
-              <a:t>柔軟性</a:t>
-            </a:r>
-          </a:p>
-        </p:txBody>
-      </p:sp>
-      <p:sp>
-        <p:nvSpPr>
-          <p:cNvPr id="40" name="TextBox 39"/>
-          <p:cNvSpPr txBox="1"/>
-          <p:nvPr/>
-        </p:nvSpPr>
-        <p:spPr>
-          <a:xfrm>
-            <a:off x="7114032" y="4017172"/>
-            <a:ext cx="4391863" cy="621792"/>
-          </a:xfrm>
-          <a:prstGeom prst="rect">
-            <a:avLst/>
-          </a:prstGeom>
-          <a:noFill/>
-        </p:spPr>
-        <p:txBody>
-          <a:bodyPr wrap="square" anchor="ctr" lIns="0" rIns="0" tIns="0" bIns="0">
-            <a:spAutoFit/>
-          </a:bodyPr>
-          <a:lstStyle/>
-          <a:p>
-            <a:pPr algn="l">
-              <a:lnSpc>
-                <a:spcPct val="115000"/>
-              </a:lnSpc>
-            </a:pPr>
-            <a:r>
-              <a:rPr sz="1350" b="0" lang="ja-JP">
-                <a:solidFill>
-                  <a:srgbClr val="202729"/>
-                </a:solidFill>
-                <a:latin typeface="Yu Gothic"/>
-                <a:ea typeface="Yu Gothic"/>
-                <a:cs typeface="Yu Gothic"/>
-              </a:rPr>
-              <a:t>共通部品と例外ルールを組み合わせる</a:t>
-            </a:r>
-          </a:p>
-        </p:txBody>
-      </p:sp>
-      <p:cxnSp>
-        <p:nvCxnSpPr>
-          <p:cNvPr id="41" name="Connector 40"/>
-          <p:cNvCxnSpPr/>
-          <p:nvPr/>
-        </p:nvCxnSpPr>
-        <p:spPr>
-          <a:xfrm>
-            <a:off x="667512" y="4638964"/>
-            <a:ext cx="4197096" cy="0"/>
+            <a:off x="7095744" y="5260756"/>
+            <a:ext cx="4428439" cy="0"/>
           </a:xfrm>
           <a:prstGeom prst="line">
             <a:avLst/>
@@ -40513,117 +40054,21 @@
       </p:cxnSp>
       <p:cxnSp>
         <p:nvCxnSpPr>
-          <p:cNvPr id="42" name="Connector 41"/>
+          <p:cNvPr id="29" name="Connector 28"/>
           <p:cNvCxnSpPr/>
           <p:nvPr/>
         </p:nvCxnSpPr>
         <p:spPr>
           <a:xfrm>
-            <a:off x="7095744" y="4638964"/>
-            <a:ext cx="4428439" cy="0"/>
+            <a:off x="5029200" y="5571652"/>
+            <a:ext cx="182880" cy="0"/>
           </a:xfrm>
           <a:prstGeom prst="line">
             <a:avLst/>
           </a:prstGeom>
-          <a:ln w="6985">
+          <a:ln w="15875">
             <a:solidFill>
-              <a:srgbClr val="D1CFC8"/>
-            </a:solidFill>
-          </a:ln>
-          <a:effectLst/>
-        </p:spPr>
-        <p:style>
-          <a:lnRef idx="2">
-            <a:schemeClr val="accent1"/>
-          </a:lnRef>
-          <a:fillRef idx="0">
-            <a:schemeClr val="accent1"/>
-          </a:fillRef>
-          <a:effectRef idx="1">
-            <a:schemeClr val="accent1"/>
-          </a:effectRef>
-          <a:fontRef idx="minor">
-            <a:schemeClr val="tx1"/>
-          </a:fontRef>
-        </p:style>
-      </p:cxnSp>
-      <p:sp>
-        <p:nvSpPr>
-          <p:cNvPr id="43" name="Oval 42"/>
-          <p:cNvSpPr/>
-          <p:nvPr/>
-        </p:nvSpPr>
-        <p:spPr>
-          <a:xfrm>
-            <a:off x="4992624" y="4913284"/>
-            <a:ext cx="73152" cy="73152"/>
-          </a:xfrm>
-          <a:prstGeom prst="ellipse">
-            <a:avLst/>
-          </a:prstGeom>
-          <a:solidFill>
-            <a:srgbClr val="666E70"/>
-          </a:solidFill>
-          <a:ln>
-            <a:noFill/>
-          </a:ln>
-          <a:effectLst/>
-        </p:spPr>
-        <p:txBody>
-          <a:bodyPr rtlCol="0" anchor="ctr"/>
-          <a:lstStyle/>
-          <a:p>
-            <a:pPr algn="ctr"/>
-          </a:p>
-        </p:txBody>
-      </p:sp>
-      <p:sp>
-        <p:nvSpPr>
-          <p:cNvPr id="44" name="Oval 43"/>
-          <p:cNvSpPr/>
-          <p:nvPr/>
-        </p:nvSpPr>
-        <p:spPr>
-          <a:xfrm>
-            <a:off x="6894576" y="4913284"/>
-            <a:ext cx="73152" cy="73152"/>
-          </a:xfrm>
-          <a:prstGeom prst="ellipse">
-            <a:avLst/>
-          </a:prstGeom>
-          <a:solidFill>
-            <a:srgbClr val="0D7870"/>
-          </a:solidFill>
-          <a:ln>
-            <a:noFill/>
-          </a:ln>
-          <a:effectLst/>
-        </p:spPr>
-        <p:txBody>
-          <a:bodyPr rtlCol="0" anchor="ctr"/>
-          <a:lstStyle/>
-          <a:p>
-            <a:pPr algn="ctr"/>
-          </a:p>
-        </p:txBody>
-      </p:sp>
-      <p:cxnSp>
-        <p:nvCxnSpPr>
-          <p:cNvPr id="45" name="Connector 44"/>
-          <p:cNvCxnSpPr/>
-          <p:nvPr/>
-        </p:nvCxnSpPr>
-        <p:spPr>
-          <a:xfrm>
-            <a:off x="5029200" y="4949860"/>
-            <a:ext cx="182880" cy="0"/>
-          </a:xfrm>
-          <a:prstGeom prst="line">
-            <a:avLst/>
-          </a:prstGeom>
-          <a:ln w="10160">
-            <a:solidFill>
-              <a:srgbClr val="D1CFC8"/>
+              <a:srgbClr val="666E70"/>
             </a:solidFill>
           </a:ln>
           <a:effectLst/>
@@ -40645,21 +40090,21 @@
       </p:cxnSp>
       <p:cxnSp>
         <p:nvCxnSpPr>
-          <p:cNvPr id="46" name="Connector 45"/>
+          <p:cNvPr id="30" name="Connector 29"/>
           <p:cNvCxnSpPr/>
           <p:nvPr/>
         </p:nvCxnSpPr>
         <p:spPr>
           <a:xfrm>
-            <a:off x="6748272" y="4949860"/>
+            <a:off x="6748272" y="5571652"/>
             <a:ext cx="182880" cy="0"/>
           </a:xfrm>
           <a:prstGeom prst="line">
             <a:avLst/>
           </a:prstGeom>
-          <a:ln w="10160">
+          <a:ln w="15875">
             <a:solidFill>
-              <a:srgbClr val="D1CFC8"/>
+              <a:srgbClr val="0D7870"/>
             </a:solidFill>
           </a:ln>
           <a:effectLst/>
@@ -40681,13 +40126,13 @@
       </p:cxnSp>
       <p:sp>
         <p:nvSpPr>
-          <p:cNvPr id="47" name="TextBox 46"/>
-          <p:cNvSpPr txBox="1"/>
-          <p:nvPr/>
-        </p:nvSpPr>
-        <p:spPr>
-          <a:xfrm>
-            <a:off x="685800" y="4638964"/>
+          <p:cNvPr id="31" name="TextBox 30"/>
+          <p:cNvSpPr txBox="1"/>
+          <p:nvPr/>
+        </p:nvSpPr>
+        <p:spPr>
+          <a:xfrm>
+            <a:off x="685800" y="2773588"/>
             <a:ext cx="4160520" cy="621792"/>
           </a:xfrm>
           <a:prstGeom prst="rect">
@@ -40715,20 +40160,20 @@
                 <a:ea typeface="Yu Gothic"/>
                 <a:cs typeface="Yu Gothic"/>
               </a:rPr>
-              <a:t>担当者の経験により差が生じる</a:t>
-            </a:r>
-          </a:p>
-        </p:txBody>
-      </p:sp>
-      <p:sp>
-        <p:nvSpPr>
-          <p:cNvPr id="48" name="Rectangle 47"/>
+              <a:t>担当者ごとの個別対応が多い</a:t>
+            </a:r>
+          </a:p>
+        </p:txBody>
+      </p:sp>
+      <p:sp>
+        <p:nvSpPr>
+          <p:cNvPr id="32" name="Rectangle 31"/>
           <p:cNvSpPr/>
           <p:nvPr/>
         </p:nvSpPr>
         <p:spPr>
           <a:xfrm>
-            <a:off x="5266944" y="4748692"/>
+            <a:off x="5266944" y="2883316"/>
             <a:ext cx="1426464" cy="402336"/>
           </a:xfrm>
           <a:prstGeom prst="rect">
@@ -40752,8 +40197,437 @@
       </p:sp>
       <p:sp>
         <p:nvSpPr>
-          <p:cNvPr id="49" name="TextBox 48"/>
-          <p:cNvSpPr txBox="1"/>
+          <p:cNvPr id="33" name="TextBox 32"/>
+          <p:cNvSpPr txBox="1"/>
+          <p:nvPr/>
+        </p:nvSpPr>
+        <p:spPr>
+          <a:xfrm>
+            <a:off x="5266944" y="2883316"/>
+            <a:ext cx="1426464" cy="402336"/>
+          </a:xfrm>
+          <a:prstGeom prst="rect">
+            <a:avLst/>
+          </a:prstGeom>
+          <a:noFill/>
+        </p:spPr>
+        <p:txBody>
+          <a:bodyPr wrap="square" anchor="ctr" lIns="0" rIns="0" tIns="0" bIns="0">
+            <a:spAutoFit/>
+          </a:bodyPr>
+          <a:lstStyle/>
+          <a:p>
+            <a:pPr algn="ctr">
+              <a:lnSpc>
+                <a:spcPct val="115000"/>
+              </a:lnSpc>
+            </a:pPr>
+            <a:r>
+              <a:rPr sz="1100" b="1" lang="ja-JP">
+                <a:solidFill>
+                  <a:srgbClr val="182C43"/>
+                </a:solidFill>
+                <a:latin typeface="Yu Gothic"/>
+                <a:ea typeface="Yu Gothic"/>
+                <a:cs typeface="Yu Gothic"/>
+              </a:rPr>
+              <a:t>運用負荷</a:t>
+            </a:r>
+          </a:p>
+        </p:txBody>
+      </p:sp>
+      <p:sp>
+        <p:nvSpPr>
+          <p:cNvPr id="34" name="TextBox 33"/>
+          <p:cNvSpPr txBox="1"/>
+          <p:nvPr/>
+        </p:nvSpPr>
+        <p:spPr>
+          <a:xfrm>
+            <a:off x="7114032" y="2773588"/>
+            <a:ext cx="4391863" cy="621792"/>
+          </a:xfrm>
+          <a:prstGeom prst="rect">
+            <a:avLst/>
+          </a:prstGeom>
+          <a:noFill/>
+        </p:spPr>
+        <p:txBody>
+          <a:bodyPr wrap="square" anchor="ctr" lIns="0" rIns="0" tIns="0" bIns="0">
+            <a:spAutoFit/>
+          </a:bodyPr>
+          <a:lstStyle/>
+          <a:p>
+            <a:pPr algn="l">
+              <a:lnSpc>
+                <a:spcPct val="115000"/>
+              </a:lnSpc>
+            </a:pPr>
+            <a:r>
+              <a:rPr sz="1350" b="0" lang="ja-JP">
+                <a:solidFill>
+                  <a:srgbClr val="202729"/>
+                </a:solidFill>
+                <a:latin typeface="Yu Gothic"/>
+                <a:ea typeface="Yu Gothic"/>
+                <a:cs typeface="Yu Gothic"/>
+              </a:rPr>
+              <a:t>共通手順により確認作業を削減</a:t>
+            </a:r>
+          </a:p>
+        </p:txBody>
+      </p:sp>
+      <p:sp>
+        <p:nvSpPr>
+          <p:cNvPr id="35" name="TextBox 34"/>
+          <p:cNvSpPr txBox="1"/>
+          <p:nvPr/>
+        </p:nvSpPr>
+        <p:spPr>
+          <a:xfrm>
+            <a:off x="685800" y="3395380"/>
+            <a:ext cx="4160520" cy="621792"/>
+          </a:xfrm>
+          <a:prstGeom prst="rect">
+            <a:avLst/>
+          </a:prstGeom>
+          <a:noFill/>
+        </p:spPr>
+        <p:txBody>
+          <a:bodyPr wrap="square" anchor="ctr" lIns="0" rIns="0" tIns="0" bIns="0">
+            <a:spAutoFit/>
+          </a:bodyPr>
+          <a:lstStyle/>
+          <a:p>
+            <a:pPr algn="l">
+              <a:lnSpc>
+                <a:spcPct val="115000"/>
+              </a:lnSpc>
+            </a:pPr>
+            <a:r>
+              <a:rPr sz="1350" b="0" lang="ja-JP">
+                <a:solidFill>
+                  <a:srgbClr val="202729"/>
+                </a:solidFill>
+                <a:latin typeface="Yu Gothic"/>
+                <a:ea typeface="Yu Gothic"/>
+                <a:cs typeface="Yu Gothic"/>
+              </a:rPr>
+              <a:t>初期設定は少なく短期導入しやすい</a:t>
+            </a:r>
+          </a:p>
+        </p:txBody>
+      </p:sp>
+      <p:sp>
+        <p:nvSpPr>
+          <p:cNvPr id="36" name="Rectangle 35"/>
+          <p:cNvSpPr/>
+          <p:nvPr/>
+        </p:nvSpPr>
+        <p:spPr>
+          <a:xfrm>
+            <a:off x="5266944" y="3505108"/>
+            <a:ext cx="1426464" cy="402336"/>
+          </a:xfrm>
+          <a:prstGeom prst="rect">
+            <a:avLst/>
+          </a:prstGeom>
+          <a:solidFill>
+            <a:srgbClr val="FAF9F5"/>
+          </a:solidFill>
+          <a:ln>
+            <a:noFill/>
+          </a:ln>
+          <a:effectLst/>
+        </p:spPr>
+        <p:txBody>
+          <a:bodyPr rtlCol="0" anchor="ctr"/>
+          <a:lstStyle/>
+          <a:p>
+            <a:pPr algn="ctr"/>
+          </a:p>
+        </p:txBody>
+      </p:sp>
+      <p:sp>
+        <p:nvSpPr>
+          <p:cNvPr id="37" name="TextBox 36"/>
+          <p:cNvSpPr txBox="1"/>
+          <p:nvPr/>
+        </p:nvSpPr>
+        <p:spPr>
+          <a:xfrm>
+            <a:off x="5266944" y="3505108"/>
+            <a:ext cx="1426464" cy="402336"/>
+          </a:xfrm>
+          <a:prstGeom prst="rect">
+            <a:avLst/>
+          </a:prstGeom>
+          <a:noFill/>
+        </p:spPr>
+        <p:txBody>
+          <a:bodyPr wrap="square" anchor="ctr" lIns="0" rIns="0" tIns="0" bIns="0">
+            <a:spAutoFit/>
+          </a:bodyPr>
+          <a:lstStyle/>
+          <a:p>
+            <a:pPr algn="ctr">
+              <a:lnSpc>
+                <a:spcPct val="115000"/>
+              </a:lnSpc>
+            </a:pPr>
+            <a:r>
+              <a:rPr sz="1100" b="1" lang="ja-JP">
+                <a:solidFill>
+                  <a:srgbClr val="182C43"/>
+                </a:solidFill>
+                <a:latin typeface="Yu Gothic"/>
+                <a:ea typeface="Yu Gothic"/>
+                <a:cs typeface="Yu Gothic"/>
+              </a:rPr>
+              <a:t>導入速度</a:t>
+            </a:r>
+          </a:p>
+        </p:txBody>
+      </p:sp>
+      <p:sp>
+        <p:nvSpPr>
+          <p:cNvPr id="38" name="TextBox 37"/>
+          <p:cNvSpPr txBox="1"/>
+          <p:nvPr/>
+        </p:nvSpPr>
+        <p:spPr>
+          <a:xfrm>
+            <a:off x="7114032" y="3395380"/>
+            <a:ext cx="4391863" cy="621792"/>
+          </a:xfrm>
+          <a:prstGeom prst="rect">
+            <a:avLst/>
+          </a:prstGeom>
+          <a:noFill/>
+        </p:spPr>
+        <p:txBody>
+          <a:bodyPr wrap="square" anchor="ctr" lIns="0" rIns="0" tIns="0" bIns="0">
+            <a:spAutoFit/>
+          </a:bodyPr>
+          <a:lstStyle/>
+          <a:p>
+            <a:pPr algn="l">
+              <a:lnSpc>
+                <a:spcPct val="115000"/>
+              </a:lnSpc>
+            </a:pPr>
+            <a:r>
+              <a:rPr sz="1350" b="0" lang="ja-JP">
+                <a:solidFill>
+                  <a:srgbClr val="202729"/>
+                </a:solidFill>
+                <a:latin typeface="Yu Gothic"/>
+                <a:ea typeface="Yu Gothic"/>
+                <a:cs typeface="Yu Gothic"/>
+              </a:rPr>
+              <a:t>初期整備後は再利用によって展開を加速</a:t>
+            </a:r>
+          </a:p>
+        </p:txBody>
+      </p:sp>
+      <p:sp>
+        <p:nvSpPr>
+          <p:cNvPr id="39" name="TextBox 38"/>
+          <p:cNvSpPr txBox="1"/>
+          <p:nvPr/>
+        </p:nvSpPr>
+        <p:spPr>
+          <a:xfrm>
+            <a:off x="685800" y="4017172"/>
+            <a:ext cx="4160520" cy="621792"/>
+          </a:xfrm>
+          <a:prstGeom prst="rect">
+            <a:avLst/>
+          </a:prstGeom>
+          <a:noFill/>
+        </p:spPr>
+        <p:txBody>
+          <a:bodyPr wrap="square" anchor="ctr" lIns="0" rIns="0" tIns="0" bIns="0">
+            <a:spAutoFit/>
+          </a:bodyPr>
+          <a:lstStyle/>
+          <a:p>
+            <a:pPr algn="l">
+              <a:lnSpc>
+                <a:spcPct val="115000"/>
+              </a:lnSpc>
+            </a:pPr>
+            <a:r>
+              <a:rPr sz="1350" b="0" lang="ja-JP">
+                <a:solidFill>
+                  <a:srgbClr val="202729"/>
+                </a:solidFill>
+                <a:latin typeface="Yu Gothic"/>
+                <a:ea typeface="Yu Gothic"/>
+                <a:cs typeface="Yu Gothic"/>
+              </a:rPr>
+              <a:t>個別要望へ即時に対応できる</a:t>
+            </a:r>
+          </a:p>
+        </p:txBody>
+      </p:sp>
+      <p:sp>
+        <p:nvSpPr>
+          <p:cNvPr id="40" name="Rectangle 39"/>
+          <p:cNvSpPr/>
+          <p:nvPr/>
+        </p:nvSpPr>
+        <p:spPr>
+          <a:xfrm>
+            <a:off x="5266944" y="4126900"/>
+            <a:ext cx="1426464" cy="402336"/>
+          </a:xfrm>
+          <a:prstGeom prst="rect">
+            <a:avLst/>
+          </a:prstGeom>
+          <a:solidFill>
+            <a:srgbClr val="FAF9F5"/>
+          </a:solidFill>
+          <a:ln>
+            <a:noFill/>
+          </a:ln>
+          <a:effectLst/>
+        </p:spPr>
+        <p:txBody>
+          <a:bodyPr rtlCol="0" anchor="ctr"/>
+          <a:lstStyle/>
+          <a:p>
+            <a:pPr algn="ctr"/>
+          </a:p>
+        </p:txBody>
+      </p:sp>
+      <p:sp>
+        <p:nvSpPr>
+          <p:cNvPr id="41" name="TextBox 40"/>
+          <p:cNvSpPr txBox="1"/>
+          <p:nvPr/>
+        </p:nvSpPr>
+        <p:spPr>
+          <a:xfrm>
+            <a:off x="5266944" y="4126900"/>
+            <a:ext cx="1426464" cy="402336"/>
+          </a:xfrm>
+          <a:prstGeom prst="rect">
+            <a:avLst/>
+          </a:prstGeom>
+          <a:noFill/>
+        </p:spPr>
+        <p:txBody>
+          <a:bodyPr wrap="square" anchor="ctr" lIns="0" rIns="0" tIns="0" bIns="0">
+            <a:spAutoFit/>
+          </a:bodyPr>
+          <a:lstStyle/>
+          <a:p>
+            <a:pPr algn="ctr">
+              <a:lnSpc>
+                <a:spcPct val="115000"/>
+              </a:lnSpc>
+            </a:pPr>
+            <a:r>
+              <a:rPr sz="1100" b="1" lang="ja-JP">
+                <a:solidFill>
+                  <a:srgbClr val="182C43"/>
+                </a:solidFill>
+                <a:latin typeface="Yu Gothic"/>
+                <a:ea typeface="Yu Gothic"/>
+                <a:cs typeface="Yu Gothic"/>
+              </a:rPr>
+              <a:t>柔軟性</a:t>
+            </a:r>
+          </a:p>
+        </p:txBody>
+      </p:sp>
+      <p:sp>
+        <p:nvSpPr>
+          <p:cNvPr id="42" name="TextBox 41"/>
+          <p:cNvSpPr txBox="1"/>
+          <p:nvPr/>
+        </p:nvSpPr>
+        <p:spPr>
+          <a:xfrm>
+            <a:off x="7114032" y="4017172"/>
+            <a:ext cx="4391863" cy="621792"/>
+          </a:xfrm>
+          <a:prstGeom prst="rect">
+            <a:avLst/>
+          </a:prstGeom>
+          <a:noFill/>
+        </p:spPr>
+        <p:txBody>
+          <a:bodyPr wrap="square" anchor="ctr" lIns="0" rIns="0" tIns="0" bIns="0">
+            <a:spAutoFit/>
+          </a:bodyPr>
+          <a:lstStyle/>
+          <a:p>
+            <a:pPr algn="l">
+              <a:lnSpc>
+                <a:spcPct val="115000"/>
+              </a:lnSpc>
+            </a:pPr>
+            <a:r>
+              <a:rPr sz="1350" b="0" lang="ja-JP">
+                <a:solidFill>
+                  <a:srgbClr val="202729"/>
+                </a:solidFill>
+                <a:latin typeface="Yu Gothic"/>
+                <a:ea typeface="Yu Gothic"/>
+                <a:cs typeface="Yu Gothic"/>
+              </a:rPr>
+              <a:t>共通部品と例外ルールを組み合わせる</a:t>
+            </a:r>
+          </a:p>
+        </p:txBody>
+      </p:sp>
+      <p:sp>
+        <p:nvSpPr>
+          <p:cNvPr id="43" name="TextBox 42"/>
+          <p:cNvSpPr txBox="1"/>
+          <p:nvPr/>
+        </p:nvSpPr>
+        <p:spPr>
+          <a:xfrm>
+            <a:off x="685800" y="4638964"/>
+            <a:ext cx="4160520" cy="621792"/>
+          </a:xfrm>
+          <a:prstGeom prst="rect">
+            <a:avLst/>
+          </a:prstGeom>
+          <a:noFill/>
+        </p:spPr>
+        <p:txBody>
+          <a:bodyPr wrap="square" anchor="ctr" lIns="0" rIns="0" tIns="0" bIns="0">
+            <a:spAutoFit/>
+          </a:bodyPr>
+          <a:lstStyle/>
+          <a:p>
+            <a:pPr algn="l">
+              <a:lnSpc>
+                <a:spcPct val="115000"/>
+              </a:lnSpc>
+            </a:pPr>
+            <a:r>
+              <a:rPr sz="1350" b="0" lang="ja-JP">
+                <a:solidFill>
+                  <a:srgbClr val="202729"/>
+                </a:solidFill>
+                <a:latin typeface="Yu Gothic"/>
+                <a:ea typeface="Yu Gothic"/>
+                <a:cs typeface="Yu Gothic"/>
+              </a:rPr>
+              <a:t>担当者の経験により差が生じる</a:t>
+            </a:r>
+          </a:p>
+        </p:txBody>
+      </p:sp>
+      <p:sp>
+        <p:nvSpPr>
+          <p:cNvPr id="44" name="Rectangle 43"/>
+          <p:cNvSpPr/>
           <p:nvPr/>
         </p:nvSpPr>
         <p:spPr>
@@ -40764,6 +40638,36 @@
           <a:prstGeom prst="rect">
             <a:avLst/>
           </a:prstGeom>
+          <a:solidFill>
+            <a:srgbClr val="FAF9F5"/>
+          </a:solidFill>
+          <a:ln>
+            <a:noFill/>
+          </a:ln>
+          <a:effectLst/>
+        </p:spPr>
+        <p:txBody>
+          <a:bodyPr rtlCol="0" anchor="ctr"/>
+          <a:lstStyle/>
+          <a:p>
+            <a:pPr algn="ctr"/>
+          </a:p>
+        </p:txBody>
+      </p:sp>
+      <p:sp>
+        <p:nvSpPr>
+          <p:cNvPr id="45" name="TextBox 44"/>
+          <p:cNvSpPr txBox="1"/>
+          <p:nvPr/>
+        </p:nvSpPr>
+        <p:spPr>
+          <a:xfrm>
+            <a:off x="5266944" y="4748692"/>
+            <a:ext cx="1426464" cy="402336"/>
+          </a:xfrm>
+          <a:prstGeom prst="rect">
+            <a:avLst/>
+          </a:prstGeom>
           <a:noFill/>
         </p:spPr>
         <p:txBody>
@@ -40793,7 +40697,7 @@
       </p:sp>
       <p:sp>
         <p:nvSpPr>
-          <p:cNvPr id="50" name="TextBox 49"/>
+          <p:cNvPr id="46" name="TextBox 45"/>
           <p:cNvSpPr txBox="1"/>
           <p:nvPr/>
         </p:nvSpPr>
@@ -40832,88 +40736,169 @@
           </a:p>
         </p:txBody>
       </p:sp>
-      <p:cxnSp>
-        <p:nvCxnSpPr>
-          <p:cNvPr id="51" name="Connector 50"/>
-          <p:cNvCxnSpPr/>
-          <p:nvPr/>
-        </p:nvCxnSpPr>
-        <p:spPr>
-          <a:xfrm>
-            <a:off x="667512" y="5260756"/>
-            <a:ext cx="4197096" cy="0"/>
-          </a:xfrm>
-          <a:prstGeom prst="line">
-            <a:avLst/>
-          </a:prstGeom>
-          <a:ln w="6985">
-            <a:solidFill>
-              <a:srgbClr val="D1CFC8"/>
-            </a:solidFill>
-          </a:ln>
-          <a:effectLst/>
-        </p:spPr>
-        <p:style>
-          <a:lnRef idx="2">
-            <a:schemeClr val="accent1"/>
-          </a:lnRef>
-          <a:fillRef idx="0">
-            <a:schemeClr val="accent1"/>
-          </a:fillRef>
-          <a:effectRef idx="1">
-            <a:schemeClr val="accent1"/>
-          </a:effectRef>
-          <a:fontRef idx="minor">
-            <a:schemeClr val="tx1"/>
-          </a:fontRef>
-        </p:style>
-      </p:cxnSp>
-      <p:cxnSp>
-        <p:nvCxnSpPr>
-          <p:cNvPr id="52" name="Connector 51"/>
-          <p:cNvCxnSpPr/>
-          <p:nvPr/>
-        </p:nvCxnSpPr>
-        <p:spPr>
-          <a:xfrm>
-            <a:off x="7095744" y="5260756"/>
-            <a:ext cx="4428439" cy="0"/>
-          </a:xfrm>
-          <a:prstGeom prst="line">
-            <a:avLst/>
-          </a:prstGeom>
-          <a:ln w="6985">
-            <a:solidFill>
-              <a:srgbClr val="D1CFC8"/>
-            </a:solidFill>
-          </a:ln>
-          <a:effectLst/>
-        </p:spPr>
-        <p:style>
-          <a:lnRef idx="2">
-            <a:schemeClr val="accent1"/>
-          </a:lnRef>
-          <a:fillRef idx="0">
-            <a:schemeClr val="accent1"/>
-          </a:fillRef>
-          <a:effectRef idx="1">
-            <a:schemeClr val="accent1"/>
-          </a:effectRef>
-          <a:fontRef idx="minor">
-            <a:schemeClr val="tx1"/>
-          </a:fontRef>
-        </p:style>
-      </p:cxnSp>
-      <p:sp>
-        <p:nvSpPr>
-          <p:cNvPr id="53" name="Oval 52"/>
+      <p:sp>
+        <p:nvSpPr>
+          <p:cNvPr id="47" name="TextBox 46"/>
+          <p:cNvSpPr txBox="1"/>
+          <p:nvPr/>
+        </p:nvSpPr>
+        <p:spPr>
+          <a:xfrm>
+            <a:off x="685800" y="5260756"/>
+            <a:ext cx="4160520" cy="621792"/>
+          </a:xfrm>
+          <a:prstGeom prst="rect">
+            <a:avLst/>
+          </a:prstGeom>
+          <a:noFill/>
+        </p:spPr>
+        <p:txBody>
+          <a:bodyPr wrap="square" anchor="ctr" lIns="0" rIns="0" tIns="0" bIns="0">
+            <a:spAutoFit/>
+          </a:bodyPr>
+          <a:lstStyle/>
+          <a:p>
+            <a:pPr algn="l">
+              <a:lnSpc>
+                <a:spcPct val="115000"/>
+              </a:lnSpc>
+            </a:pPr>
+            <a:r>
+              <a:rPr sz="1350" b="0" lang="ja-JP">
+                <a:solidFill>
+                  <a:srgbClr val="202729"/>
+                </a:solidFill>
+                <a:latin typeface="Yu Gothic"/>
+                <a:ea typeface="Yu Gothic"/>
+                <a:cs typeface="Yu Gothic"/>
+              </a:rPr>
+              <a:t>対象拡大に比例して運用負荷が増える</a:t>
+            </a:r>
+          </a:p>
+        </p:txBody>
+      </p:sp>
+      <p:sp>
+        <p:nvSpPr>
+          <p:cNvPr id="48" name="Rectangle 47"/>
           <p:cNvSpPr/>
           <p:nvPr/>
         </p:nvSpPr>
         <p:spPr>
           <a:xfrm>
-            <a:off x="4992624" y="5535076"/>
-            <a:ext cx="73152" cy="73152"/>
+            <a:off x="5266944" y="5370484"/>
+            <a:ext cx="1426464" cy="402336"/>
+          </a:xfrm>
+          <a:prstGeom prst="rect">
+            <a:avLst/>
+          </a:prstGeom>
+          <a:solidFill>
+            <a:srgbClr val="FAF9F5"/>
+          </a:solidFill>
+          <a:ln>
+            <a:noFill/>
+          </a:ln>
+          <a:effectLst/>
+        </p:spPr>
+        <p:txBody>
+          <a:bodyPr rtlCol="0" anchor="ctr"/>
+          <a:lstStyle/>
+          <a:p>
+            <a:pPr algn="ctr"/>
+          </a:p>
+        </p:txBody>
+      </p:sp>
+      <p:sp>
+        <p:nvSpPr>
+          <p:cNvPr id="49" name="TextBox 48"/>
+          <p:cNvSpPr txBox="1"/>
+          <p:nvPr/>
+        </p:nvSpPr>
+        <p:spPr>
+          <a:xfrm>
+            <a:off x="5266944" y="5370484"/>
+            <a:ext cx="1426464" cy="402336"/>
+          </a:xfrm>
+          <a:prstGeom prst="rect">
+            <a:avLst/>
+          </a:prstGeom>
+          <a:noFill/>
+        </p:spPr>
+        <p:txBody>
+          <a:bodyPr wrap="square" anchor="ctr" lIns="0" rIns="0" tIns="0" bIns="0">
+            <a:spAutoFit/>
+          </a:bodyPr>
+          <a:lstStyle/>
+          <a:p>
+            <a:pPr algn="ctr">
+              <a:lnSpc>
+                <a:spcPct val="115000"/>
+              </a:lnSpc>
+            </a:pPr>
+            <a:r>
+              <a:rPr sz="1100" b="1" lang="ja-JP">
+                <a:solidFill>
+                  <a:srgbClr val="182C43"/>
+                </a:solidFill>
+                <a:latin typeface="Yu Gothic"/>
+                <a:ea typeface="Yu Gothic"/>
+                <a:cs typeface="Yu Gothic"/>
+              </a:rPr>
+              <a:t>拡張性</a:t>
+            </a:r>
+          </a:p>
+        </p:txBody>
+      </p:sp>
+      <p:sp>
+        <p:nvSpPr>
+          <p:cNvPr id="50" name="TextBox 49"/>
+          <p:cNvSpPr txBox="1"/>
+          <p:nvPr/>
+        </p:nvSpPr>
+        <p:spPr>
+          <a:xfrm>
+            <a:off x="7114032" y="5260756"/>
+            <a:ext cx="4391863" cy="621792"/>
+          </a:xfrm>
+          <a:prstGeom prst="rect">
+            <a:avLst/>
+          </a:prstGeom>
+          <a:noFill/>
+        </p:spPr>
+        <p:txBody>
+          <a:bodyPr wrap="square" anchor="ctr" lIns="0" rIns="0" tIns="0" bIns="0">
+            <a:spAutoFit/>
+          </a:bodyPr>
+          <a:lstStyle/>
+          <a:p>
+            <a:pPr algn="l">
+              <a:lnSpc>
+                <a:spcPct val="115000"/>
+              </a:lnSpc>
+            </a:pPr>
+            <a:r>
+              <a:rPr sz="1350" b="0" lang="ja-JP">
+                <a:solidFill>
+                  <a:srgbClr val="202729"/>
+                </a:solidFill>
+                <a:latin typeface="Yu Gothic"/>
+                <a:ea typeface="Yu Gothic"/>
+                <a:cs typeface="Yu Gothic"/>
+              </a:rPr>
+              <a:t>共通基盤を再利用して対象を追加できる</a:t>
+            </a:r>
+          </a:p>
+        </p:txBody>
+      </p:sp>
+      <p:sp>
+        <p:nvSpPr>
+          <p:cNvPr id="51" name="Oval 50"/>
+          <p:cNvSpPr/>
+          <p:nvPr/>
+        </p:nvSpPr>
+        <p:spPr>
+          <a:xfrm>
+            <a:off x="4983480" y="3038764"/>
+            <a:ext cx="91440" cy="91440"/>
           </a:xfrm>
           <a:prstGeom prst="ellipse">
             <a:avLst/>
@@ -40936,14 +40921,14 @@
       </p:sp>
       <p:sp>
         <p:nvSpPr>
-          <p:cNvPr id="54" name="Oval 53"/>
+          <p:cNvPr id="52" name="Oval 51"/>
           <p:cNvSpPr/>
           <p:nvPr/>
         </p:nvSpPr>
         <p:spPr>
           <a:xfrm>
-            <a:off x="6894576" y="5535076"/>
-            <a:ext cx="73152" cy="73152"/>
+            <a:off x="6885432" y="3038764"/>
+            <a:ext cx="91440" cy="91440"/>
           </a:xfrm>
           <a:prstGeom prst="ellipse">
             <a:avLst/>
@@ -40964,135 +40949,22 @@
           </a:p>
         </p:txBody>
       </p:sp>
-      <p:cxnSp>
-        <p:nvCxnSpPr>
-          <p:cNvPr id="55" name="Connector 54"/>
-          <p:cNvCxnSpPr/>
-          <p:nvPr/>
-        </p:nvCxnSpPr>
-        <p:spPr>
-          <a:xfrm>
-            <a:off x="5029200" y="5571652"/>
-            <a:ext cx="182880" cy="0"/>
-          </a:xfrm>
-          <a:prstGeom prst="line">
-            <a:avLst/>
-          </a:prstGeom>
-          <a:ln w="10160">
-            <a:solidFill>
-              <a:srgbClr val="D1CFC8"/>
-            </a:solidFill>
-          </a:ln>
-          <a:effectLst/>
-        </p:spPr>
-        <p:style>
-          <a:lnRef idx="2">
-            <a:schemeClr val="accent1"/>
-          </a:lnRef>
-          <a:fillRef idx="0">
-            <a:schemeClr val="accent1"/>
-          </a:fillRef>
-          <a:effectRef idx="1">
-            <a:schemeClr val="accent1"/>
-          </a:effectRef>
-          <a:fontRef idx="minor">
-            <a:schemeClr val="tx1"/>
-          </a:fontRef>
-        </p:style>
-      </p:cxnSp>
-      <p:cxnSp>
-        <p:nvCxnSpPr>
-          <p:cNvPr id="56" name="Connector 55"/>
-          <p:cNvCxnSpPr/>
-          <p:nvPr/>
-        </p:nvCxnSpPr>
-        <p:spPr>
-          <a:xfrm>
-            <a:off x="6748272" y="5571652"/>
-            <a:ext cx="182880" cy="0"/>
-          </a:xfrm>
-          <a:prstGeom prst="line">
-            <a:avLst/>
-          </a:prstGeom>
-          <a:ln w="10160">
-            <a:solidFill>
-              <a:srgbClr val="D1CFC8"/>
-            </a:solidFill>
-          </a:ln>
-          <a:effectLst/>
-        </p:spPr>
-        <p:style>
-          <a:lnRef idx="2">
-            <a:schemeClr val="accent1"/>
-          </a:lnRef>
-          <a:fillRef idx="0">
-            <a:schemeClr val="accent1"/>
-          </a:fillRef>
-          <a:effectRef idx="1">
-            <a:schemeClr val="accent1"/>
-          </a:effectRef>
-          <a:fontRef idx="minor">
-            <a:schemeClr val="tx1"/>
-          </a:fontRef>
-        </p:style>
-      </p:cxnSp>
-      <p:sp>
-        <p:nvSpPr>
-          <p:cNvPr id="57" name="TextBox 56"/>
-          <p:cNvSpPr txBox="1"/>
-          <p:nvPr/>
-        </p:nvSpPr>
-        <p:spPr>
-          <a:xfrm>
-            <a:off x="685800" y="5260756"/>
-            <a:ext cx="4160520" cy="621792"/>
-          </a:xfrm>
-          <a:prstGeom prst="rect">
-            <a:avLst/>
-          </a:prstGeom>
-          <a:noFill/>
-        </p:spPr>
-        <p:txBody>
-          <a:bodyPr wrap="square" anchor="ctr" lIns="0" rIns="0" tIns="0" bIns="0">
-            <a:spAutoFit/>
-          </a:bodyPr>
-          <a:lstStyle/>
-          <a:p>
-            <a:pPr algn="l">
-              <a:lnSpc>
-                <a:spcPct val="115000"/>
-              </a:lnSpc>
-            </a:pPr>
-            <a:r>
-              <a:rPr sz="1350" b="0" lang="ja-JP">
-                <a:solidFill>
-                  <a:srgbClr val="202729"/>
-                </a:solidFill>
-                <a:latin typeface="Yu Gothic"/>
-                <a:ea typeface="Yu Gothic"/>
-                <a:cs typeface="Yu Gothic"/>
-              </a:rPr>
-              <a:t>対象拡大に比例して運用負荷が増える</a:t>
-            </a:r>
-          </a:p>
-        </p:txBody>
-      </p:sp>
-      <p:sp>
-        <p:nvSpPr>
-          <p:cNvPr id="58" name="Rectangle 57"/>
+      <p:sp>
+        <p:nvSpPr>
+          <p:cNvPr id="53" name="Oval 52"/>
           <p:cNvSpPr/>
           <p:nvPr/>
         </p:nvSpPr>
         <p:spPr>
           <a:xfrm>
-            <a:off x="5266944" y="5370484"/>
-            <a:ext cx="1426464" cy="402336"/>
-          </a:xfrm>
-          <a:prstGeom prst="rect">
+            <a:off x="4983480" y="3660556"/>
+            <a:ext cx="91440" cy="91440"/>
+          </a:xfrm>
+          <a:prstGeom prst="ellipse">
             <a:avLst/>
           </a:prstGeom>
           <a:solidFill>
-            <a:srgbClr val="FAF9F5"/>
+            <a:srgbClr val="666E70"/>
           </a:solidFill>
           <a:ln>
             <a:noFill/>
@@ -41109,83 +40981,211 @@
       </p:sp>
       <p:sp>
         <p:nvSpPr>
-          <p:cNvPr id="59" name="TextBox 58"/>
-          <p:cNvSpPr txBox="1"/>
-          <p:nvPr/>
-        </p:nvSpPr>
-        <p:spPr>
-          <a:xfrm>
-            <a:off x="5266944" y="5370484"/>
-            <a:ext cx="1426464" cy="402336"/>
-          </a:xfrm>
-          <a:prstGeom prst="rect">
-            <a:avLst/>
-          </a:prstGeom>
-          <a:noFill/>
-        </p:spPr>
-        <p:txBody>
-          <a:bodyPr wrap="square" anchor="ctr" lIns="0" rIns="0" tIns="0" bIns="0">
-            <a:spAutoFit/>
-          </a:bodyPr>
-          <a:lstStyle/>
-          <a:p>
-            <a:pPr algn="ctr">
-              <a:lnSpc>
-                <a:spcPct val="115000"/>
-              </a:lnSpc>
-            </a:pPr>
-            <a:r>
-              <a:rPr sz="1100" b="1" lang="ja-JP">
-                <a:solidFill>
-                  <a:srgbClr val="182C43"/>
-                </a:solidFill>
-                <a:latin typeface="Yu Gothic"/>
-                <a:ea typeface="Yu Gothic"/>
-                <a:cs typeface="Yu Gothic"/>
-              </a:rPr>
-              <a:t>拡張性</a:t>
-            </a:r>
-          </a:p>
-        </p:txBody>
-      </p:sp>
-      <p:sp>
-        <p:nvSpPr>
-          <p:cNvPr id="60" name="TextBox 59"/>
-          <p:cNvSpPr txBox="1"/>
-          <p:nvPr/>
-        </p:nvSpPr>
-        <p:spPr>
-          <a:xfrm>
-            <a:off x="7114032" y="5260756"/>
-            <a:ext cx="4391863" cy="621792"/>
-          </a:xfrm>
-          <a:prstGeom prst="rect">
-            <a:avLst/>
-          </a:prstGeom>
-          <a:noFill/>
-        </p:spPr>
-        <p:txBody>
-          <a:bodyPr wrap="square" anchor="ctr" lIns="0" rIns="0" tIns="0" bIns="0">
-            <a:spAutoFit/>
-          </a:bodyPr>
-          <a:lstStyle/>
-          <a:p>
-            <a:pPr algn="l">
-              <a:lnSpc>
-                <a:spcPct val="115000"/>
-              </a:lnSpc>
-            </a:pPr>
-            <a:r>
-              <a:rPr sz="1350" b="0" lang="ja-JP">
-                <a:solidFill>
-                  <a:srgbClr val="202729"/>
-                </a:solidFill>
-                <a:latin typeface="Yu Gothic"/>
-                <a:ea typeface="Yu Gothic"/>
-                <a:cs typeface="Yu Gothic"/>
-              </a:rPr>
-              <a:t>共通基盤を再利用して対象を追加できる</a:t>
-            </a:r>
+          <p:cNvPr id="54" name="Oval 53"/>
+          <p:cNvSpPr/>
+          <p:nvPr/>
+        </p:nvSpPr>
+        <p:spPr>
+          <a:xfrm>
+            <a:off x="6885432" y="3660556"/>
+            <a:ext cx="91440" cy="91440"/>
+          </a:xfrm>
+          <a:prstGeom prst="ellipse">
+            <a:avLst/>
+          </a:prstGeom>
+          <a:solidFill>
+            <a:srgbClr val="0D7870"/>
+          </a:solidFill>
+          <a:ln>
+            <a:noFill/>
+          </a:ln>
+          <a:effectLst/>
+        </p:spPr>
+        <p:txBody>
+          <a:bodyPr rtlCol="0" anchor="ctr"/>
+          <a:lstStyle/>
+          <a:p>
+            <a:pPr algn="ctr"/>
+          </a:p>
+        </p:txBody>
+      </p:sp>
+      <p:sp>
+        <p:nvSpPr>
+          <p:cNvPr id="55" name="Oval 54"/>
+          <p:cNvSpPr/>
+          <p:nvPr/>
+        </p:nvSpPr>
+        <p:spPr>
+          <a:xfrm>
+            <a:off x="4983480" y="4282348"/>
+            <a:ext cx="91440" cy="91440"/>
+          </a:xfrm>
+          <a:prstGeom prst="ellipse">
+            <a:avLst/>
+          </a:prstGeom>
+          <a:solidFill>
+            <a:srgbClr val="666E70"/>
+          </a:solidFill>
+          <a:ln>
+            <a:noFill/>
+          </a:ln>
+          <a:effectLst/>
+        </p:spPr>
+        <p:txBody>
+          <a:bodyPr rtlCol="0" anchor="ctr"/>
+          <a:lstStyle/>
+          <a:p>
+            <a:pPr algn="ctr"/>
+          </a:p>
+        </p:txBody>
+      </p:sp>
+      <p:sp>
+        <p:nvSpPr>
+          <p:cNvPr id="56" name="Oval 55"/>
+          <p:cNvSpPr/>
+          <p:nvPr/>
+        </p:nvSpPr>
+        <p:spPr>
+          <a:xfrm>
+            <a:off x="6885432" y="4282348"/>
+            <a:ext cx="91440" cy="91440"/>
+          </a:xfrm>
+          <a:prstGeom prst="ellipse">
+            <a:avLst/>
+          </a:prstGeom>
+          <a:solidFill>
+            <a:srgbClr val="0D7870"/>
+          </a:solidFill>
+          <a:ln>
+            <a:noFill/>
+          </a:ln>
+          <a:effectLst/>
+        </p:spPr>
+        <p:txBody>
+          <a:bodyPr rtlCol="0" anchor="ctr"/>
+          <a:lstStyle/>
+          <a:p>
+            <a:pPr algn="ctr"/>
+          </a:p>
+        </p:txBody>
+      </p:sp>
+      <p:sp>
+        <p:nvSpPr>
+          <p:cNvPr id="57" name="Oval 56"/>
+          <p:cNvSpPr/>
+          <p:nvPr/>
+        </p:nvSpPr>
+        <p:spPr>
+          <a:xfrm>
+            <a:off x="4983480" y="4904140"/>
+            <a:ext cx="91440" cy="91440"/>
+          </a:xfrm>
+          <a:prstGeom prst="ellipse">
+            <a:avLst/>
+          </a:prstGeom>
+          <a:solidFill>
+            <a:srgbClr val="666E70"/>
+          </a:solidFill>
+          <a:ln>
+            <a:noFill/>
+          </a:ln>
+          <a:effectLst/>
+        </p:spPr>
+        <p:txBody>
+          <a:bodyPr rtlCol="0" anchor="ctr"/>
+          <a:lstStyle/>
+          <a:p>
+            <a:pPr algn="ctr"/>
+          </a:p>
+        </p:txBody>
+      </p:sp>
+      <p:sp>
+        <p:nvSpPr>
+          <p:cNvPr id="58" name="Oval 57"/>
+          <p:cNvSpPr/>
+          <p:nvPr/>
+        </p:nvSpPr>
+        <p:spPr>
+          <a:xfrm>
+            <a:off x="6885432" y="4904140"/>
+            <a:ext cx="91440" cy="91440"/>
+          </a:xfrm>
+          <a:prstGeom prst="ellipse">
+            <a:avLst/>
+          </a:prstGeom>
+          <a:solidFill>
+            <a:srgbClr val="0D7870"/>
+          </a:solidFill>
+          <a:ln>
+            <a:noFill/>
+          </a:ln>
+          <a:effectLst/>
+        </p:spPr>
+        <p:txBody>
+          <a:bodyPr rtlCol="0" anchor="ctr"/>
+          <a:lstStyle/>
+          <a:p>
+            <a:pPr algn="ctr"/>
+          </a:p>
+        </p:txBody>
+      </p:sp>
+      <p:sp>
+        <p:nvSpPr>
+          <p:cNvPr id="59" name="Oval 58"/>
+          <p:cNvSpPr/>
+          <p:nvPr/>
+        </p:nvSpPr>
+        <p:spPr>
+          <a:xfrm>
+            <a:off x="4983480" y="5525932"/>
+            <a:ext cx="91440" cy="91440"/>
+          </a:xfrm>
+          <a:prstGeom prst="ellipse">
+            <a:avLst/>
+          </a:prstGeom>
+          <a:solidFill>
+            <a:srgbClr val="666E70"/>
+          </a:solidFill>
+          <a:ln>
+            <a:noFill/>
+          </a:ln>
+          <a:effectLst/>
+        </p:spPr>
+        <p:txBody>
+          <a:bodyPr rtlCol="0" anchor="ctr"/>
+          <a:lstStyle/>
+          <a:p>
+            <a:pPr algn="ctr"/>
+          </a:p>
+        </p:txBody>
+      </p:sp>
+      <p:sp>
+        <p:nvSpPr>
+          <p:cNvPr id="60" name="Oval 59"/>
+          <p:cNvSpPr/>
+          <p:nvPr/>
+        </p:nvSpPr>
+        <p:spPr>
+          <a:xfrm>
+            <a:off x="6885432" y="5525932"/>
+            <a:ext cx="91440" cy="91440"/>
+          </a:xfrm>
+          <a:prstGeom prst="ellipse">
+            <a:avLst/>
+          </a:prstGeom>
+          <a:solidFill>
+            <a:srgbClr val="0D7870"/>
+          </a:solidFill>
+          <a:ln>
+            <a:noFill/>
+          </a:ln>
+          <a:effectLst/>
+        </p:spPr>
+        <p:txBody>
+          <a:bodyPr rtlCol="0" anchor="ctr"/>
+          <a:lstStyle/>
+          <a:p>
+            <a:pPr algn="ctr"/>
           </a:p>
         </p:txBody>
       </p:sp>

--- a/examples/gallery/pattern_gallery.pptx
+++ b/examples/gallery/pattern_gallery.pptx
@@ -44247,50 +44247,69 @@
           </a:ln>
           <a:effectLst/>
         </p:spPr>
-        <p:txBody>
-          <a:bodyPr rtlCol="0" anchor="ctr"/>
-          <a:lstStyle/>
-          <a:p>
-            <a:pPr algn="ctr"/>
-          </a:p>
-        </p:txBody>
-      </p:sp>
-      <p:cxnSp>
-        <p:nvCxnSpPr>
-          <p:cNvPr id="3" name="Connector 2"/>
-          <p:cNvCxnSpPr/>
-          <p:nvPr/>
-        </p:nvCxnSpPr>
-        <p:spPr>
-          <a:xfrm>
-            <a:off x="173736" y="182880"/>
-            <a:ext cx="11786616" cy="0"/>
-          </a:xfrm>
-          <a:prstGeom prst="line">
-            <a:avLst/>
-          </a:prstGeom>
-          <a:ln w="38100">
-            <a:solidFill>
-              <a:srgbClr val="0D7870"/>
-            </a:solidFill>
-          </a:ln>
-          <a:effectLst/>
-        </p:spPr>
         <p:style>
-          <a:lnRef idx="2">
+          <a:lnRef idx="1">
             <a:schemeClr val="accent1"/>
           </a:lnRef>
-          <a:fillRef idx="0">
+          <a:fillRef idx="3">
             <a:schemeClr val="accent1"/>
           </a:fillRef>
-          <a:effectRef idx="1">
+          <a:effectRef idx="2">
             <a:schemeClr val="accent1"/>
           </a:effectRef>
           <a:fontRef idx="minor">
-            <a:schemeClr val="tx1"/>
+            <a:schemeClr val="lt1"/>
           </a:fontRef>
         </p:style>
-      </p:cxnSp>
+        <p:txBody>
+          <a:bodyPr rtlCol="0" anchor="ctr"/>
+          <a:lstStyle/>
+          <a:p>
+            <a:pPr algn="ctr"/>
+          </a:p>
+        </p:txBody>
+      </p:sp>
+      <p:sp>
+        <p:nvSpPr>
+          <p:cNvPr id="3" name="TextBox 2"/>
+          <p:cNvSpPr txBox="1"/>
+          <p:nvPr/>
+        </p:nvSpPr>
+        <p:spPr>
+          <a:xfrm>
+            <a:off x="658368" y="246888"/>
+            <a:ext cx="4389120" cy="292608"/>
+          </a:xfrm>
+          <a:prstGeom prst="rect">
+            <a:avLst/>
+          </a:prstGeom>
+          <a:noFill/>
+        </p:spPr>
+        <p:txBody>
+          <a:bodyPr wrap="square" anchor="t" lIns="0" rIns="0" tIns="0" bIns="0">
+            <a:spAutoFit/>
+          </a:bodyPr>
+          <a:lstStyle/>
+          <a:p>
+            <a:pPr algn="l">
+              <a:lnSpc>
+                <a:spcPct val="130000"/>
+              </a:lnSpc>
+            </a:pPr>
+            <a:r>
+              <a:rPr sz="1150" b="1" lang="ja-JP">
+                <a:solidFill>
+                  <a:srgbClr val="0D7870"/>
+                </a:solidFill>
+                <a:latin typeface="Yu Gothic"/>
+                <a:ea typeface="Yu Gothic"/>
+                <a:cs typeface="Yu Gothic"/>
+              </a:rPr>
+              <a:t>障害対応フロー</a:t>
+            </a:r>
+          </a:p>
+        </p:txBody>
+      </p:sp>
       <p:sp>
         <p:nvSpPr>
           <p:cNvPr id="4" name="TextBox 3"/>
@@ -44299,8 +44318,8 @@
         </p:nvSpPr>
         <p:spPr>
           <a:xfrm>
-            <a:off x="484632" y="493776"/>
-            <a:ext cx="11201400" cy="438912"/>
+            <a:off x="658368" y="612648"/>
+            <a:ext cx="10881360" cy="786384"/>
           </a:xfrm>
           <a:prstGeom prst="rect">
             <a:avLst/>
@@ -44315,11 +44334,11 @@
           <a:p>
             <a:pPr algn="l">
               <a:lnSpc>
-                <a:spcPct val="108000"/>
-              </a:lnSpc>
-            </a:pPr>
-            <a:r>
-              <a:rPr sz="2550" b="1" lang="ja-JP">
+                <a:spcPct val="112000"/>
+              </a:lnSpc>
+            </a:pPr>
+            <a:r>
+              <a:rPr sz="2700" b="1" lang="ja-JP">
                 <a:solidFill>
                   <a:srgbClr val="182C43"/>
                 </a:solidFill>
@@ -44340,8 +44359,8 @@
         </p:nvSpPr>
         <p:spPr>
           <a:xfrm>
-            <a:off x="484632" y="960120"/>
-            <a:ext cx="11201400" cy="310896"/>
+            <a:off x="658368" y="1444752"/>
+            <a:ext cx="10881360" cy="237236"/>
           </a:xfrm>
           <a:prstGeom prst="rect">
             <a:avLst/>
@@ -44356,7 +44375,7 @@
           <a:p>
             <a:pPr algn="l">
               <a:lnSpc>
-                <a:spcPct val="112000"/>
+                <a:spcPct val="118000"/>
               </a:lnSpc>
             </a:pPr>
             <a:r>
@@ -44381,7 +44400,7 @@
         </p:nvSpPr>
         <p:spPr>
           <a:xfrm>
-            <a:off x="1499616" y="1499616"/>
+            <a:off x="1499616" y="1892300"/>
             <a:ext cx="2624328" cy="338328"/>
           </a:xfrm>
           <a:prstGeom prst="chevron">
@@ -44413,7 +44432,7 @@
         </p:nvSpPr>
         <p:spPr>
           <a:xfrm>
-            <a:off x="1627632" y="1554480"/>
+            <a:off x="1627632" y="1947164"/>
             <a:ext cx="2331720" cy="237744"/>
           </a:xfrm>
           <a:prstGeom prst="rect">
@@ -44454,7 +44473,7 @@
         </p:nvSpPr>
         <p:spPr>
           <a:xfrm>
-            <a:off x="4087368" y="1499616"/>
+            <a:off x="4087368" y="1892300"/>
             <a:ext cx="2624328" cy="338328"/>
           </a:xfrm>
           <a:prstGeom prst="chevron">
@@ -44486,7 +44505,7 @@
         </p:nvSpPr>
         <p:spPr>
           <a:xfrm>
-            <a:off x="4215384" y="1554480"/>
+            <a:off x="4215384" y="1947164"/>
             <a:ext cx="2331720" cy="237744"/>
           </a:xfrm>
           <a:prstGeom prst="rect">
@@ -44527,7 +44546,7 @@
         </p:nvSpPr>
         <p:spPr>
           <a:xfrm>
-            <a:off x="6675120" y="1499616"/>
+            <a:off x="6675120" y="1892300"/>
             <a:ext cx="2624328" cy="338328"/>
           </a:xfrm>
           <a:prstGeom prst="chevron">
@@ -44559,7 +44578,7 @@
         </p:nvSpPr>
         <p:spPr>
           <a:xfrm>
-            <a:off x="6803136" y="1554480"/>
+            <a:off x="6803136" y="1947164"/>
             <a:ext cx="2331720" cy="237744"/>
           </a:xfrm>
           <a:prstGeom prst="rect">
@@ -44600,7 +44619,7 @@
         </p:nvSpPr>
         <p:spPr>
           <a:xfrm>
-            <a:off x="9262872" y="1499616"/>
+            <a:off x="9262872" y="1892300"/>
             <a:ext cx="2587752" cy="338328"/>
           </a:xfrm>
           <a:prstGeom prst="chevron">
@@ -44632,7 +44651,7 @@
         </p:nvSpPr>
         <p:spPr>
           <a:xfrm>
-            <a:off x="9390888" y="1554480"/>
+            <a:off x="9390888" y="1947164"/>
             <a:ext cx="2331720" cy="237744"/>
           </a:xfrm>
           <a:prstGeom prst="rect">
@@ -44673,7 +44692,7 @@
         </p:nvSpPr>
         <p:spPr>
           <a:xfrm>
-            <a:off x="338328" y="1837943"/>
+            <a:off x="338328" y="2230628"/>
             <a:ext cx="1161288" cy="868680"/>
           </a:xfrm>
           <a:prstGeom prst="rect">
@@ -44703,7 +44722,7 @@
         </p:nvSpPr>
         <p:spPr>
           <a:xfrm>
-            <a:off x="1499616" y="1837943"/>
+            <a:off x="1499616" y="2230628"/>
             <a:ext cx="10351008" cy="868680"/>
           </a:xfrm>
           <a:prstGeom prst="rect">
@@ -44733,7 +44752,7 @@
         </p:nvSpPr>
         <p:spPr>
           <a:xfrm>
-            <a:off x="448056" y="1837943"/>
+            <a:off x="448056" y="2230628"/>
             <a:ext cx="960120" cy="868680"/>
           </a:xfrm>
           <a:prstGeom prst="rect">
@@ -44774,7 +44793,7 @@
         </p:nvCxnSpPr>
         <p:spPr>
           <a:xfrm>
-            <a:off x="338328" y="2706624"/>
+            <a:off x="338328" y="3099308"/>
             <a:ext cx="11512296" cy="0"/>
           </a:xfrm>
           <a:prstGeom prst="line">
@@ -44810,7 +44829,7 @@
         </p:nvSpPr>
         <p:spPr>
           <a:xfrm>
-            <a:off x="338328" y="2706624"/>
+            <a:off x="338328" y="3099308"/>
             <a:ext cx="1161288" cy="868680"/>
           </a:xfrm>
           <a:prstGeom prst="rect">
@@ -44840,7 +44859,7 @@
         </p:nvSpPr>
         <p:spPr>
           <a:xfrm>
-            <a:off x="1499616" y="2706624"/>
+            <a:off x="1499616" y="3099308"/>
             <a:ext cx="10351008" cy="868680"/>
           </a:xfrm>
           <a:prstGeom prst="rect">
@@ -44870,7 +44889,7 @@
         </p:nvSpPr>
         <p:spPr>
           <a:xfrm>
-            <a:off x="448056" y="2706624"/>
+            <a:off x="448056" y="3099308"/>
             <a:ext cx="960120" cy="868680"/>
           </a:xfrm>
           <a:prstGeom prst="rect">
@@ -44911,7 +44930,7 @@
         </p:nvCxnSpPr>
         <p:spPr>
           <a:xfrm>
-            <a:off x="338328" y="3575304"/>
+            <a:off x="338328" y="3967988"/>
             <a:ext cx="11512296" cy="0"/>
           </a:xfrm>
           <a:prstGeom prst="line">
@@ -44947,7 +44966,7 @@
         </p:nvSpPr>
         <p:spPr>
           <a:xfrm>
-            <a:off x="338328" y="3575303"/>
+            <a:off x="338328" y="3967988"/>
             <a:ext cx="1161288" cy="868680"/>
           </a:xfrm>
           <a:prstGeom prst="rect">
@@ -44977,7 +44996,7 @@
         </p:nvSpPr>
         <p:spPr>
           <a:xfrm>
-            <a:off x="1499616" y="3575303"/>
+            <a:off x="1499616" y="3967988"/>
             <a:ext cx="10351008" cy="868680"/>
           </a:xfrm>
           <a:prstGeom prst="rect">
@@ -45007,7 +45026,7 @@
         </p:nvSpPr>
         <p:spPr>
           <a:xfrm>
-            <a:off x="448056" y="3575303"/>
+            <a:off x="448056" y="3967988"/>
             <a:ext cx="960120" cy="868680"/>
           </a:xfrm>
           <a:prstGeom prst="rect">
@@ -45048,7 +45067,7 @@
         </p:nvCxnSpPr>
         <p:spPr>
           <a:xfrm>
-            <a:off x="338328" y="4443983"/>
+            <a:off x="338328" y="4836668"/>
             <a:ext cx="11512296" cy="0"/>
           </a:xfrm>
           <a:prstGeom prst="line">
@@ -45084,7 +45103,7 @@
         </p:nvSpPr>
         <p:spPr>
           <a:xfrm>
-            <a:off x="338328" y="4443983"/>
+            <a:off x="338328" y="4836668"/>
             <a:ext cx="1161288" cy="868680"/>
           </a:xfrm>
           <a:prstGeom prst="rect">
@@ -45114,7 +45133,7 @@
         </p:nvSpPr>
         <p:spPr>
           <a:xfrm>
-            <a:off x="1499616" y="4443983"/>
+            <a:off x="1499616" y="4836668"/>
             <a:ext cx="10351008" cy="868680"/>
           </a:xfrm>
           <a:prstGeom prst="rect">
@@ -45144,7 +45163,7 @@
         </p:nvSpPr>
         <p:spPr>
           <a:xfrm>
-            <a:off x="448056" y="4443983"/>
+            <a:off x="448056" y="4836668"/>
             <a:ext cx="960120" cy="868680"/>
           </a:xfrm>
           <a:prstGeom prst="rect">
@@ -45185,7 +45204,7 @@
         </p:nvCxnSpPr>
         <p:spPr>
           <a:xfrm>
-            <a:off x="338328" y="5312664"/>
+            <a:off x="338328" y="5705348"/>
             <a:ext cx="11512296" cy="0"/>
           </a:xfrm>
           <a:prstGeom prst="line">
@@ -45221,13 +45240,13 @@
         </p:nvCxnSpPr>
         <p:spPr>
           <a:xfrm>
-            <a:off x="1499616" y="1837943"/>
-            <a:ext cx="0" cy="3474721"/>
+            <a:off x="1499616" y="2230628"/>
+            <a:ext cx="10351008" cy="0"/>
           </a:xfrm>
           <a:prstGeom prst="line">
             <a:avLst/>
           </a:prstGeom>
-          <a:ln w="10160">
+          <a:ln w="10795">
             <a:solidFill>
               <a:srgbClr val="BBBABA"/>
             </a:solidFill>
@@ -45257,13 +45276,13 @@
         </p:nvCxnSpPr>
         <p:spPr>
           <a:xfrm>
-            <a:off x="4087368" y="1837943"/>
-            <a:ext cx="0" cy="3474721"/>
+            <a:off x="1499616" y="2230628"/>
+            <a:ext cx="0" cy="3474720"/>
           </a:xfrm>
           <a:prstGeom prst="line">
             <a:avLst/>
           </a:prstGeom>
-          <a:ln w="6985">
+          <a:ln w="10160">
             <a:solidFill>
               <a:srgbClr val="BBBABA"/>
             </a:solidFill>
@@ -45293,8 +45312,8 @@
         </p:nvCxnSpPr>
         <p:spPr>
           <a:xfrm>
-            <a:off x="6675120" y="1837943"/>
-            <a:ext cx="0" cy="3474721"/>
+            <a:off x="4087368" y="2230628"/>
+            <a:ext cx="0" cy="3474720"/>
           </a:xfrm>
           <a:prstGeom prst="line">
             <a:avLst/>
@@ -45329,8 +45348,8 @@
         </p:nvCxnSpPr>
         <p:spPr>
           <a:xfrm>
-            <a:off x="9262872" y="1837943"/>
-            <a:ext cx="0" cy="3474721"/>
+            <a:off x="6675120" y="2230628"/>
+            <a:ext cx="0" cy="3474720"/>
           </a:xfrm>
           <a:prstGeom prst="line">
             <a:avLst/>
@@ -45365,15 +45384,15 @@
         </p:nvCxnSpPr>
         <p:spPr>
           <a:xfrm>
-            <a:off x="2793492" y="2500884"/>
-            <a:ext cx="0" cy="205740"/>
+            <a:off x="9262872" y="2230628"/>
+            <a:ext cx="0" cy="3474720"/>
           </a:xfrm>
           <a:prstGeom prst="line">
             <a:avLst/>
           </a:prstGeom>
-          <a:ln w="13970">
+          <a:ln w="6985">
             <a:solidFill>
-              <a:srgbClr val="108490"/>
+              <a:srgbClr val="BBBABA"/>
             </a:solidFill>
           </a:ln>
           <a:effectLst/>
@@ -45401,8 +45420,8 @@
         </p:nvCxnSpPr>
         <p:spPr>
           <a:xfrm>
-            <a:off x="2793492" y="2706624"/>
-            <a:ext cx="0" cy="0"/>
+            <a:off x="2793492" y="2893568"/>
+            <a:ext cx="0" cy="205740"/>
           </a:xfrm>
           <a:prstGeom prst="line">
             <a:avLst/>
@@ -45437,8 +45456,8 @@
         </p:nvCxnSpPr>
         <p:spPr>
           <a:xfrm>
-            <a:off x="2793492" y="2706624"/>
-            <a:ext cx="0" cy="205740"/>
+            <a:off x="2793492" y="3099308"/>
+            <a:ext cx="0" cy="0"/>
           </a:xfrm>
           <a:prstGeom prst="line">
             <a:avLst/>
@@ -45447,7 +45466,6 @@
             <a:solidFill>
               <a:srgbClr val="108490"/>
             </a:solidFill>
-            <a:tailEnd type="triangle" w="med" len="med"/>
           </a:ln>
           <a:effectLst/>
         </p:spPr>
@@ -45474,8 +45492,8 @@
         </p:nvCxnSpPr>
         <p:spPr>
           <a:xfrm>
-            <a:off x="3246120" y="3140964"/>
-            <a:ext cx="969264" cy="0"/>
+            <a:off x="2793492" y="3099308"/>
+            <a:ext cx="0" cy="205740"/>
           </a:xfrm>
           <a:prstGeom prst="line">
             <a:avLst/>
@@ -45511,8 +45529,8 @@
         </p:nvCxnSpPr>
         <p:spPr>
           <a:xfrm>
-            <a:off x="3246120" y="3140964"/>
-            <a:ext cx="804672" cy="0"/>
+            <a:off x="3246120" y="3533648"/>
+            <a:ext cx="969264" cy="0"/>
           </a:xfrm>
           <a:prstGeom prst="line">
             <a:avLst/>
@@ -45521,6 +45539,7 @@
             <a:solidFill>
               <a:srgbClr val="108490"/>
             </a:solidFill>
+            <a:tailEnd type="triangle" w="med" len="med"/>
           </a:ln>
           <a:effectLst/>
         </p:spPr>
@@ -45547,8 +45566,8 @@
         </p:nvCxnSpPr>
         <p:spPr>
           <a:xfrm>
-            <a:off x="4050792" y="3140964"/>
-            <a:ext cx="0" cy="868680"/>
+            <a:off x="3246120" y="3533648"/>
+            <a:ext cx="804672" cy="0"/>
           </a:xfrm>
           <a:prstGeom prst="line">
             <a:avLst/>
@@ -45583,8 +45602,8 @@
         </p:nvCxnSpPr>
         <p:spPr>
           <a:xfrm>
-            <a:off x="4050792" y="4009644"/>
-            <a:ext cx="235458" cy="0"/>
+            <a:off x="4050792" y="3533648"/>
+            <a:ext cx="0" cy="868679"/>
           </a:xfrm>
           <a:prstGeom prst="line">
             <a:avLst/>
@@ -45593,7 +45612,6 @@
             <a:solidFill>
               <a:srgbClr val="108490"/>
             </a:solidFill>
-            <a:tailEnd type="triangle" w="med" len="med"/>
           </a:ln>
           <a:effectLst/>
         </p:spPr>
@@ -45620,8 +45638,8 @@
         </p:nvCxnSpPr>
         <p:spPr>
           <a:xfrm>
-            <a:off x="5088564" y="3140964"/>
-            <a:ext cx="91440" cy="0"/>
+            <a:off x="4050792" y="4402327"/>
+            <a:ext cx="235458" cy="0"/>
           </a:xfrm>
           <a:prstGeom prst="line">
             <a:avLst/>
@@ -45657,7 +45675,7 @@
         </p:nvCxnSpPr>
         <p:spPr>
           <a:xfrm>
-            <a:off x="5191506" y="4009644"/>
+            <a:off x="5088564" y="3533648"/>
             <a:ext cx="91440" cy="0"/>
           </a:xfrm>
           <a:prstGeom prst="line">
@@ -45694,8 +45712,8 @@
         </p:nvCxnSpPr>
         <p:spPr>
           <a:xfrm>
-            <a:off x="5863554" y="3369564"/>
-            <a:ext cx="0" cy="205740"/>
+            <a:off x="5191506" y="4402327"/>
+            <a:ext cx="91440" cy="0"/>
           </a:xfrm>
           <a:prstGeom prst="line">
             <a:avLst/>
@@ -45704,6 +45722,7 @@
             <a:solidFill>
               <a:srgbClr val="108490"/>
             </a:solidFill>
+            <a:tailEnd type="triangle" w="med" len="med"/>
           </a:ln>
           <a:effectLst/>
         </p:spPr>
@@ -45730,8 +45749,8 @@
         </p:nvCxnSpPr>
         <p:spPr>
           <a:xfrm>
-            <a:off x="5863554" y="3575304"/>
-            <a:ext cx="16038" cy="0"/>
+            <a:off x="5863554" y="3762248"/>
+            <a:ext cx="0" cy="205740"/>
           </a:xfrm>
           <a:prstGeom prst="line">
             <a:avLst/>
@@ -45766,8 +45785,8 @@
         </p:nvCxnSpPr>
         <p:spPr>
           <a:xfrm>
-            <a:off x="5879592" y="3575304"/>
-            <a:ext cx="0" cy="205740"/>
+            <a:off x="5863554" y="3967988"/>
+            <a:ext cx="16038" cy="0"/>
           </a:xfrm>
           <a:prstGeom prst="line">
             <a:avLst/>
@@ -45776,7 +45795,6 @@
             <a:solidFill>
               <a:srgbClr val="108490"/>
             </a:solidFill>
-            <a:tailEnd type="triangle" w="med" len="med"/>
           </a:ln>
           <a:effectLst/>
         </p:spPr>
@@ -45803,8 +45821,8 @@
         </p:nvCxnSpPr>
         <p:spPr>
           <a:xfrm>
-            <a:off x="6476238" y="4009644"/>
-            <a:ext cx="162306" cy="0"/>
+            <a:off x="5879592" y="3967988"/>
+            <a:ext cx="0" cy="205739"/>
           </a:xfrm>
           <a:prstGeom prst="line">
             <a:avLst/>
@@ -45813,6 +45831,7 @@
             <a:solidFill>
               <a:srgbClr val="108490"/>
             </a:solidFill>
+            <a:tailEnd type="triangle" w="med" len="med"/>
           </a:ln>
           <a:effectLst/>
         </p:spPr>
@@ -45839,8 +45858,8 @@
         </p:nvCxnSpPr>
         <p:spPr>
           <a:xfrm>
-            <a:off x="6638544" y="4009644"/>
-            <a:ext cx="0" cy="868679"/>
+            <a:off x="6476238" y="4402327"/>
+            <a:ext cx="162306" cy="0"/>
           </a:xfrm>
           <a:prstGeom prst="line">
             <a:avLst/>
@@ -45875,8 +45894,8 @@
         </p:nvCxnSpPr>
         <p:spPr>
           <a:xfrm>
-            <a:off x="6638544" y="4878323"/>
-            <a:ext cx="621792" cy="0"/>
+            <a:off x="6638544" y="4402327"/>
+            <a:ext cx="0" cy="868681"/>
           </a:xfrm>
           <a:prstGeom prst="line">
             <a:avLst/>
@@ -45885,7 +45904,6 @@
             <a:solidFill>
               <a:srgbClr val="108490"/>
             </a:solidFill>
-            <a:tailEnd type="triangle" w="med" len="med"/>
           </a:ln>
           <a:effectLst/>
         </p:spPr>
@@ -45912,8 +45930,8 @@
         </p:nvCxnSpPr>
         <p:spPr>
           <a:xfrm>
-            <a:off x="8677656" y="4878323"/>
-            <a:ext cx="384048" cy="0"/>
+            <a:off x="6638544" y="5271008"/>
+            <a:ext cx="621792" cy="0"/>
           </a:xfrm>
           <a:prstGeom prst="line">
             <a:avLst/>
@@ -45922,6 +45940,7 @@
             <a:solidFill>
               <a:srgbClr val="108490"/>
             </a:solidFill>
+            <a:tailEnd type="triangle" w="med" len="med"/>
           </a:ln>
           <a:effectLst/>
         </p:spPr>
@@ -45947,9 +45966,9 @@
           <p:nvPr/>
         </p:nvCxnSpPr>
         <p:spPr>
-          <a:xfrm flipV="1">
-            <a:off x="9061704" y="3461004"/>
-            <a:ext cx="0" cy="1417319"/>
+          <a:xfrm>
+            <a:off x="8677656" y="5271008"/>
+            <a:ext cx="384048" cy="0"/>
           </a:xfrm>
           <a:prstGeom prst="line">
             <a:avLst/>
@@ -45983,9 +46002,9 @@
           <p:nvPr/>
         </p:nvCxnSpPr>
         <p:spPr>
-          <a:xfrm flipH="1">
-            <a:off x="7470648" y="3461004"/>
-            <a:ext cx="1591056" cy="0"/>
+          <a:xfrm flipV="1">
+            <a:off x="9061704" y="3853688"/>
+            <a:ext cx="0" cy="1417320"/>
           </a:xfrm>
           <a:prstGeom prst="line">
             <a:avLst/>
@@ -46019,9 +46038,9 @@
           <p:nvPr/>
         </p:nvCxnSpPr>
         <p:spPr>
-          <a:xfrm flipV="1">
-            <a:off x="7470648" y="3369564"/>
-            <a:ext cx="0" cy="91440"/>
+          <a:xfrm flipH="1">
+            <a:off x="7470648" y="3853688"/>
+            <a:ext cx="1591056" cy="0"/>
           </a:xfrm>
           <a:prstGeom prst="line">
             <a:avLst/>
@@ -46030,7 +46049,6 @@
             <a:solidFill>
               <a:srgbClr val="108490"/>
             </a:solidFill>
-            <a:tailEnd type="triangle" w="med" len="med"/>
           </a:ln>
           <a:effectLst/>
         </p:spPr>
@@ -46056,9 +46074,9 @@
           <p:nvPr/>
         </p:nvCxnSpPr>
         <p:spPr>
-          <a:xfrm>
-            <a:off x="7923276" y="3140964"/>
-            <a:ext cx="91440" cy="0"/>
+          <a:xfrm flipV="1">
+            <a:off x="7470648" y="3762248"/>
+            <a:ext cx="0" cy="91440"/>
           </a:xfrm>
           <a:prstGeom prst="line">
             <a:avLst/>
@@ -46094,8 +46112,8 @@
         </p:nvCxnSpPr>
         <p:spPr>
           <a:xfrm>
-            <a:off x="8919972" y="3140964"/>
-            <a:ext cx="306324" cy="0"/>
+            <a:off x="7923276" y="3533648"/>
+            <a:ext cx="91440" cy="0"/>
           </a:xfrm>
           <a:prstGeom prst="line">
             <a:avLst/>
@@ -46104,6 +46122,7 @@
             <a:solidFill>
               <a:srgbClr val="108490"/>
             </a:solidFill>
+            <a:tailEnd type="triangle" w="med" len="med"/>
           </a:ln>
           <a:effectLst/>
         </p:spPr>
@@ -46129,9 +46148,9 @@
           <p:nvPr/>
         </p:nvCxnSpPr>
         <p:spPr>
-          <a:xfrm flipV="1">
-            <a:off x="9226296" y="2272284"/>
-            <a:ext cx="0" cy="868680"/>
+          <a:xfrm>
+            <a:off x="8919972" y="3533648"/>
+            <a:ext cx="306324" cy="0"/>
           </a:xfrm>
           <a:prstGeom prst="line">
             <a:avLst/>
@@ -46165,9 +46184,9 @@
           <p:nvPr/>
         </p:nvCxnSpPr>
         <p:spPr>
-          <a:xfrm>
-            <a:off x="9226296" y="2272284"/>
-            <a:ext cx="307467" cy="0"/>
+          <a:xfrm flipV="1">
+            <a:off x="9226296" y="2664968"/>
+            <a:ext cx="0" cy="868680"/>
           </a:xfrm>
           <a:prstGeom prst="line">
             <a:avLst/>
@@ -46176,7 +46195,6 @@
             <a:solidFill>
               <a:srgbClr val="108490"/>
             </a:solidFill>
-            <a:tailEnd type="triangle" w="med" len="med"/>
           </a:ln>
           <a:effectLst/>
         </p:spPr>
@@ -46203,8 +46221,8 @@
         </p:nvCxnSpPr>
         <p:spPr>
           <a:xfrm>
-            <a:off x="10583037" y="2272284"/>
-            <a:ext cx="91440" cy="0"/>
+            <a:off x="9226296" y="2664968"/>
+            <a:ext cx="307467" cy="0"/>
           </a:xfrm>
           <a:prstGeom prst="line">
             <a:avLst/>
@@ -46232,15 +46250,52 @@
           </a:fontRef>
         </p:style>
       </p:cxnSp>
-      <p:sp>
-        <p:nvSpPr>
-          <p:cNvPr id="58" name="Rectangle 57"/>
+      <p:cxnSp>
+        <p:nvCxnSpPr>
+          <p:cNvPr id="58" name="Connector 57"/>
+          <p:cNvCxnSpPr/>
+          <p:nvPr/>
+        </p:nvCxnSpPr>
+        <p:spPr>
+          <a:xfrm>
+            <a:off x="10583037" y="2664968"/>
+            <a:ext cx="91440" cy="0"/>
+          </a:xfrm>
+          <a:prstGeom prst="line">
+            <a:avLst/>
+          </a:prstGeom>
+          <a:ln w="13970">
+            <a:solidFill>
+              <a:srgbClr val="108490"/>
+            </a:solidFill>
+            <a:tailEnd type="triangle" w="med" len="med"/>
+          </a:ln>
+          <a:effectLst/>
+        </p:spPr>
+        <p:style>
+          <a:lnRef idx="2">
+            <a:schemeClr val="accent1"/>
+          </a:lnRef>
+          <a:fillRef idx="0">
+            <a:schemeClr val="accent1"/>
+          </a:fillRef>
+          <a:effectRef idx="1">
+            <a:schemeClr val="accent1"/>
+          </a:effectRef>
+          <a:fontRef idx="minor">
+            <a:schemeClr val="tx1"/>
+          </a:fontRef>
+        </p:style>
+      </p:cxnSp>
+      <p:sp>
+        <p:nvSpPr>
+          <p:cNvPr id="59" name="Rectangle 58"/>
           <p:cNvSpPr/>
           <p:nvPr/>
         </p:nvSpPr>
         <p:spPr>
           <a:xfrm>
-            <a:off x="2340864" y="2043684"/>
+            <a:off x="2340864" y="2436368"/>
             <a:ext cx="905256" cy="457200"/>
           </a:xfrm>
           <a:prstGeom prst="rect">
@@ -46266,13 +46321,13 @@
       </p:sp>
       <p:sp>
         <p:nvSpPr>
-          <p:cNvPr id="59" name="TextBox 58"/>
-          <p:cNvSpPr txBox="1"/>
-          <p:nvPr/>
-        </p:nvSpPr>
-        <p:spPr>
-          <a:xfrm>
-            <a:off x="2395728" y="2043684"/>
+          <p:cNvPr id="60" name="TextBox 59"/>
+          <p:cNvSpPr txBox="1"/>
+          <p:nvPr/>
+        </p:nvSpPr>
+        <p:spPr>
+          <a:xfrm>
+            <a:off x="2395728" y="2436368"/>
             <a:ext cx="795528" cy="457200"/>
           </a:xfrm>
           <a:prstGeom prst="rect">
@@ -46307,13 +46362,13 @@
       </p:sp>
       <p:sp>
         <p:nvSpPr>
-          <p:cNvPr id="60" name="Rectangle 59"/>
+          <p:cNvPr id="61" name="Rectangle 60"/>
           <p:cNvSpPr/>
           <p:nvPr/>
         </p:nvSpPr>
         <p:spPr>
           <a:xfrm>
-            <a:off x="2340864" y="2912364"/>
+            <a:off x="2340864" y="3305048"/>
             <a:ext cx="905256" cy="457200"/>
           </a:xfrm>
           <a:prstGeom prst="rect">
@@ -46339,13 +46394,13 @@
       </p:sp>
       <p:sp>
         <p:nvSpPr>
-          <p:cNvPr id="61" name="TextBox 60"/>
-          <p:cNvSpPr txBox="1"/>
-          <p:nvPr/>
-        </p:nvSpPr>
-        <p:spPr>
-          <a:xfrm>
-            <a:off x="2395728" y="2912364"/>
+          <p:cNvPr id="62" name="TextBox 61"/>
+          <p:cNvSpPr txBox="1"/>
+          <p:nvPr/>
+        </p:nvSpPr>
+        <p:spPr>
+          <a:xfrm>
+            <a:off x="2395728" y="3305048"/>
             <a:ext cx="795528" cy="457200"/>
           </a:xfrm>
           <a:prstGeom prst="rect">
@@ -46380,13 +46435,13 @@
       </p:sp>
       <p:sp>
         <p:nvSpPr>
-          <p:cNvPr id="62" name="Rectangle 61"/>
+          <p:cNvPr id="63" name="Rectangle 62"/>
           <p:cNvSpPr/>
           <p:nvPr/>
         </p:nvSpPr>
         <p:spPr>
           <a:xfrm>
-            <a:off x="4215384" y="2912364"/>
+            <a:off x="4215384" y="3305048"/>
             <a:ext cx="873179" cy="457200"/>
           </a:xfrm>
           <a:prstGeom prst="rect">
@@ -46412,13 +46467,13 @@
       </p:sp>
       <p:sp>
         <p:nvSpPr>
-          <p:cNvPr id="63" name="TextBox 62"/>
-          <p:cNvSpPr txBox="1"/>
-          <p:nvPr/>
-        </p:nvSpPr>
-        <p:spPr>
-          <a:xfrm>
-            <a:off x="4270248" y="2912364"/>
+          <p:cNvPr id="64" name="TextBox 63"/>
+          <p:cNvSpPr txBox="1"/>
+          <p:nvPr/>
+        </p:nvSpPr>
+        <p:spPr>
+          <a:xfrm>
+            <a:off x="4270248" y="3305048"/>
             <a:ext cx="763451" cy="457200"/>
           </a:xfrm>
           <a:prstGeom prst="rect">
@@ -46453,13 +46508,13 @@
       </p:sp>
       <p:sp>
         <p:nvSpPr>
-          <p:cNvPr id="64" name="Rectangle 63"/>
+          <p:cNvPr id="65" name="Rectangle 64"/>
           <p:cNvSpPr/>
           <p:nvPr/>
         </p:nvSpPr>
         <p:spPr>
           <a:xfrm>
-            <a:off x="4286250" y="3781044"/>
+            <a:off x="4286250" y="4173727"/>
             <a:ext cx="905256" cy="457200"/>
           </a:xfrm>
           <a:prstGeom prst="rect">
@@ -46485,13 +46540,13 @@
       </p:sp>
       <p:sp>
         <p:nvSpPr>
-          <p:cNvPr id="65" name="TextBox 64"/>
-          <p:cNvSpPr txBox="1"/>
-          <p:nvPr/>
-        </p:nvSpPr>
-        <p:spPr>
-          <a:xfrm>
-            <a:off x="4341114" y="3781044"/>
+          <p:cNvPr id="66" name="TextBox 65"/>
+          <p:cNvSpPr txBox="1"/>
+          <p:nvPr/>
+        </p:nvSpPr>
+        <p:spPr>
+          <a:xfrm>
+            <a:off x="4341114" y="4173727"/>
             <a:ext cx="795528" cy="457200"/>
           </a:xfrm>
           <a:prstGeom prst="rect">
@@ -46526,13 +46581,13 @@
       </p:sp>
       <p:sp>
         <p:nvSpPr>
-          <p:cNvPr id="66" name="Rectangle 65"/>
+          <p:cNvPr id="67" name="Rectangle 66"/>
           <p:cNvSpPr/>
           <p:nvPr/>
         </p:nvSpPr>
         <p:spPr>
           <a:xfrm>
-            <a:off x="5282946" y="3781044"/>
+            <a:off x="5282946" y="4173727"/>
             <a:ext cx="1193292" cy="457200"/>
           </a:xfrm>
           <a:prstGeom prst="rect">
@@ -46558,13 +46613,13 @@
       </p:sp>
       <p:sp>
         <p:nvSpPr>
-          <p:cNvPr id="67" name="TextBox 66"/>
-          <p:cNvSpPr txBox="1"/>
-          <p:nvPr/>
-        </p:nvSpPr>
-        <p:spPr>
-          <a:xfrm>
-            <a:off x="5337810" y="3781044"/>
+          <p:cNvPr id="68" name="TextBox 67"/>
+          <p:cNvSpPr txBox="1"/>
+          <p:nvPr/>
+        </p:nvSpPr>
+        <p:spPr>
+          <a:xfrm>
+            <a:off x="5337810" y="4173727"/>
             <a:ext cx="1083564" cy="457200"/>
           </a:xfrm>
           <a:prstGeom prst="rect">
@@ -46599,13 +46654,13 @@
       </p:sp>
       <p:sp>
         <p:nvSpPr>
-          <p:cNvPr id="68" name="Rectangle 67"/>
+          <p:cNvPr id="69" name="Rectangle 68"/>
           <p:cNvSpPr/>
           <p:nvPr/>
         </p:nvSpPr>
         <p:spPr>
           <a:xfrm>
-            <a:off x="5180004" y="2912364"/>
+            <a:off x="5180004" y="3305048"/>
             <a:ext cx="1367099" cy="457200"/>
           </a:xfrm>
           <a:prstGeom prst="rect">
@@ -46631,13 +46686,13 @@
       </p:sp>
       <p:sp>
         <p:nvSpPr>
-          <p:cNvPr id="69" name="TextBox 68"/>
-          <p:cNvSpPr txBox="1"/>
-          <p:nvPr/>
-        </p:nvSpPr>
-        <p:spPr>
-          <a:xfrm>
-            <a:off x="5234868" y="2912364"/>
+          <p:cNvPr id="70" name="TextBox 69"/>
+          <p:cNvSpPr txBox="1"/>
+          <p:nvPr/>
+        </p:nvSpPr>
+        <p:spPr>
+          <a:xfrm>
+            <a:off x="5234868" y="3305048"/>
             <a:ext cx="1257371" cy="457200"/>
           </a:xfrm>
           <a:prstGeom prst="rect">
@@ -46672,13 +46727,13 @@
       </p:sp>
       <p:sp>
         <p:nvSpPr>
-          <p:cNvPr id="70" name="Rectangle 69"/>
+          <p:cNvPr id="71" name="Rectangle 70"/>
           <p:cNvSpPr/>
           <p:nvPr/>
         </p:nvSpPr>
         <p:spPr>
           <a:xfrm>
-            <a:off x="7260336" y="4649723"/>
+            <a:off x="7260336" y="5042408"/>
             <a:ext cx="1417320" cy="457200"/>
           </a:xfrm>
           <a:prstGeom prst="rect">
@@ -46704,13 +46759,13 @@
       </p:sp>
       <p:sp>
         <p:nvSpPr>
-          <p:cNvPr id="71" name="TextBox 70"/>
-          <p:cNvSpPr txBox="1"/>
-          <p:nvPr/>
-        </p:nvSpPr>
-        <p:spPr>
-          <a:xfrm>
-            <a:off x="7315200" y="4649723"/>
+          <p:cNvPr id="72" name="TextBox 71"/>
+          <p:cNvSpPr txBox="1"/>
+          <p:nvPr/>
+        </p:nvSpPr>
+        <p:spPr>
+          <a:xfrm>
+            <a:off x="7315200" y="5042408"/>
             <a:ext cx="1307592" cy="457200"/>
           </a:xfrm>
           <a:prstGeom prst="rect">
@@ -46745,13 +46800,13 @@
       </p:sp>
       <p:sp>
         <p:nvSpPr>
-          <p:cNvPr id="72" name="Rectangle 71"/>
+          <p:cNvPr id="73" name="Rectangle 72"/>
           <p:cNvSpPr/>
           <p:nvPr/>
         </p:nvSpPr>
         <p:spPr>
           <a:xfrm>
-            <a:off x="7018020" y="2912364"/>
+            <a:off x="7018020" y="3305048"/>
             <a:ext cx="905256" cy="457200"/>
           </a:xfrm>
           <a:prstGeom prst="rect">
@@ -46777,13 +46832,13 @@
       </p:sp>
       <p:sp>
         <p:nvSpPr>
-          <p:cNvPr id="73" name="TextBox 72"/>
-          <p:cNvSpPr txBox="1"/>
-          <p:nvPr/>
-        </p:nvSpPr>
-        <p:spPr>
-          <a:xfrm>
-            <a:off x="7072884" y="2912364"/>
+          <p:cNvPr id="74" name="TextBox 73"/>
+          <p:cNvSpPr txBox="1"/>
+          <p:nvPr/>
+        </p:nvSpPr>
+        <p:spPr>
+          <a:xfrm>
+            <a:off x="7072884" y="3305048"/>
             <a:ext cx="795528" cy="457200"/>
           </a:xfrm>
           <a:prstGeom prst="rect">
@@ -46818,13 +46873,13 @@
       </p:sp>
       <p:sp>
         <p:nvSpPr>
-          <p:cNvPr id="74" name="Rectangle 73"/>
+          <p:cNvPr id="75" name="Rectangle 74"/>
           <p:cNvSpPr/>
           <p:nvPr/>
         </p:nvSpPr>
         <p:spPr>
           <a:xfrm>
-            <a:off x="9533763" y="2043684"/>
+            <a:off x="9533763" y="2436368"/>
             <a:ext cx="1049274" cy="457200"/>
           </a:xfrm>
           <a:prstGeom prst="rect">
@@ -46850,13 +46905,13 @@
       </p:sp>
       <p:sp>
         <p:nvSpPr>
-          <p:cNvPr id="75" name="TextBox 74"/>
-          <p:cNvSpPr txBox="1"/>
-          <p:nvPr/>
-        </p:nvSpPr>
-        <p:spPr>
-          <a:xfrm>
-            <a:off x="9588627" y="2043684"/>
+          <p:cNvPr id="76" name="TextBox 75"/>
+          <p:cNvSpPr txBox="1"/>
+          <p:nvPr/>
+        </p:nvSpPr>
+        <p:spPr>
+          <a:xfrm>
+            <a:off x="9588627" y="2436368"/>
             <a:ext cx="939545" cy="457200"/>
           </a:xfrm>
           <a:prstGeom prst="rect">
@@ -46891,13 +46946,13 @@
       </p:sp>
       <p:sp>
         <p:nvSpPr>
-          <p:cNvPr id="76" name="Rectangle 75"/>
+          <p:cNvPr id="77" name="Rectangle 76"/>
           <p:cNvSpPr/>
           <p:nvPr/>
         </p:nvSpPr>
         <p:spPr>
           <a:xfrm>
-            <a:off x="8014716" y="2912364"/>
+            <a:off x="8014716" y="3305048"/>
             <a:ext cx="905256" cy="457200"/>
           </a:xfrm>
           <a:prstGeom prst="rect">
@@ -46923,13 +46978,13 @@
       </p:sp>
       <p:sp>
         <p:nvSpPr>
-          <p:cNvPr id="77" name="TextBox 76"/>
-          <p:cNvSpPr txBox="1"/>
-          <p:nvPr/>
-        </p:nvSpPr>
-        <p:spPr>
-          <a:xfrm>
-            <a:off x="8069580" y="2912364"/>
+          <p:cNvPr id="78" name="TextBox 77"/>
+          <p:cNvSpPr txBox="1"/>
+          <p:nvPr/>
+        </p:nvSpPr>
+        <p:spPr>
+          <a:xfrm>
+            <a:off x="8069580" y="3305048"/>
             <a:ext cx="795528" cy="457200"/>
           </a:xfrm>
           <a:prstGeom prst="rect">
@@ -46964,13 +47019,13 @@
       </p:sp>
       <p:sp>
         <p:nvSpPr>
-          <p:cNvPr id="78" name="Rectangle 77"/>
+          <p:cNvPr id="79" name="Rectangle 78"/>
           <p:cNvSpPr/>
           <p:nvPr/>
         </p:nvSpPr>
         <p:spPr>
           <a:xfrm>
-            <a:off x="10674477" y="2043684"/>
+            <a:off x="10674477" y="2436368"/>
             <a:ext cx="905256" cy="457200"/>
           </a:xfrm>
           <a:prstGeom prst="rect">
@@ -46996,13 +47051,13 @@
       </p:sp>
       <p:sp>
         <p:nvSpPr>
-          <p:cNvPr id="79" name="TextBox 78"/>
-          <p:cNvSpPr txBox="1"/>
-          <p:nvPr/>
-        </p:nvSpPr>
-        <p:spPr>
-          <a:xfrm>
-            <a:off x="10729341" y="2043684"/>
+          <p:cNvPr id="80" name="TextBox 79"/>
+          <p:cNvSpPr txBox="1"/>
+          <p:nvPr/>
+        </p:nvSpPr>
+        <p:spPr>
+          <a:xfrm>
+            <a:off x="10729341" y="2436368"/>
             <a:ext cx="795528" cy="457200"/>
           </a:xfrm>
           <a:prstGeom prst="rect">
@@ -47037,7 +47092,7 @@
       </p:sp>
       <p:sp>
         <p:nvSpPr>
-          <p:cNvPr id="80" name="Rectangle 79"/>
+          <p:cNvPr id="81" name="Rectangle 80"/>
           <p:cNvSpPr/>
           <p:nvPr/>
         </p:nvSpPr>
@@ -47081,7 +47136,7 @@
       </p:sp>
       <p:sp>
         <p:nvSpPr>
-          <p:cNvPr id="81" name="TextBox 80"/>
+          <p:cNvPr id="82" name="TextBox 81"/>
           <p:cNvSpPr txBox="1"/>
           <p:nvPr/>
         </p:nvSpPr>
@@ -47122,7 +47177,7 @@
       </p:sp>
       <p:sp>
         <p:nvSpPr>
-          <p:cNvPr id="82" name="TextBox 81"/>
+          <p:cNvPr id="83" name="TextBox 82"/>
           <p:cNvSpPr txBox="1"/>
           <p:nvPr/>
         </p:nvSpPr>

--- a/examples/gallery/pattern_gallery.pptx
+++ b/examples/gallery/pattern_gallery.pptx
@@ -48167,7 +48167,7 @@
       </p:cxnSp>
       <p:sp>
         <p:nvSpPr>
-          <p:cNvPr id="26" name="TextBox 25"/>
+          <p:cNvPr id="26" name="sequence-message-label:detect"/>
           <p:cNvSpPr txBox="1"/>
           <p:nvPr/>
         </p:nvSpPr>
@@ -48247,7 +48247,7 @@
       </p:cxnSp>
       <p:sp>
         <p:nvSpPr>
-          <p:cNvPr id="28" name="TextBox 27"/>
+          <p:cNvPr id="28" name="sequence-message-label:request"/>
           <p:cNvSpPr txBox="1"/>
           <p:nvPr/>
         </p:nvSpPr>
@@ -48328,7 +48328,7 @@
       </p:cxnSp>
       <p:sp>
         <p:nvSpPr>
-          <p:cNvPr id="30" name="TextBox 29"/>
+          <p:cNvPr id="30" name="sequence-message-label:reply"/>
           <p:cNvSpPr txBox="1"/>
           <p:nvPr/>
         </p:nvSpPr>
@@ -48408,7 +48408,7 @@
       </p:cxnSp>
       <p:sp>
         <p:nvSpPr>
-          <p:cNvPr id="32" name="TextBox 31"/>
+          <p:cNvPr id="32" name="sequence-message-label:logs"/>
           <p:cNvSpPr txBox="1"/>
           <p:nvPr/>
         </p:nvSpPr>
@@ -48488,7 +48488,7 @@
       </p:cxnSp>
       <p:sp>
         <p:nvSpPr>
-          <p:cNvPr id="34" name="TextBox 33"/>
+          <p:cNvPr id="34" name="sequence-message-label:isolate"/>
           <p:cNvSpPr txBox="1"/>
           <p:nvPr/>
         </p:nvSpPr>
@@ -48568,7 +48568,7 @@
       </p:cxnSp>
       <p:sp>
         <p:nvSpPr>
-          <p:cNvPr id="36" name="TextBox 35"/>
+          <p:cNvPr id="36" name="sequence-message-label:carrier"/>
           <p:cNvSpPr txBox="1"/>
           <p:nvPr/>
         </p:nvSpPr>
@@ -48649,7 +48649,7 @@
       </p:cxnSp>
       <p:sp>
         <p:nvSpPr>
-          <p:cNvPr id="38" name="TextBox 37"/>
+          <p:cNvPr id="38" name="sequence-message-label:recover"/>
           <p:cNvSpPr txBox="1"/>
           <p:nvPr/>
         </p:nvSpPr>
@@ -48729,7 +48729,7 @@
       </p:cxnSp>
       <p:sp>
         <p:nvSpPr>
-          <p:cNvPr id="40" name="TextBox 39"/>
+          <p:cNvPr id="40" name="sequence-message-label:report"/>
           <p:cNvSpPr txBox="1"/>
           <p:nvPr/>
         </p:nvSpPr>

--- a/examples/gallery/pattern_gallery.pptx
+++ b/examples/gallery/pattern_gallery.pptx
@@ -138,802 +138,6 @@
     </a:lvl9pPr>
   </p:defaultTextStyle>
 </p:presentation>
-</file>
-
-<file path=ppt/charts/chart1.xml><?xml version="1.0" encoding="utf-8"?>
-<c:chartSpace xmlns:c="http://schemas.openxmlformats.org/drawingml/2006/chart" xmlns:a="http://schemas.openxmlformats.org/drawingml/2006/main" xmlns:r="http://schemas.openxmlformats.org/officeDocument/2006/relationships">
-  <c:date1904 val="0"/>
-  <c:chart>
-    <c:autoTitleDeleted val="1"/>
-    <c:plotArea>
-      <c:barChart>
-        <c:barDir val="bar"/>
-        <c:grouping val="clustered"/>
-        <c:ser>
-          <c:idx val="0"/>
-          <c:order val="0"/>
-          <c:tx>
-            <c:strRef>
-              <c:f>Sheet1!$B$1</c:f>
-              <c:strCache>
-                <c:ptCount val="1"/>
-                <c:pt idx="0">
-                  <c:v>従来 (分)</c:v>
-                </c:pt>
-              </c:strCache>
-            </c:strRef>
-          </c:tx>
-          <c:spPr>
-            <a:solidFill>
-              <a:srgbClr val="666E70"/>
-            </a:solidFill>
-          </c:spPr>
-          <c:cat>
-            <c:strRef>
-              <c:f>Sheet1!$A$2:$A$5</c:f>
-              <c:strCache>
-                <c:ptCount val="4"/>
-                <c:pt idx="0">
-                  <c:v>週次報告</c:v>
-                </c:pt>
-                <c:pt idx="1">
-                  <c:v>月次レビュー</c:v>
-                </c:pt>
-                <c:pt idx="2">
-                  <c:v>調査サマリ</c:v>
-                </c:pt>
-                <c:pt idx="3">
-                  <c:v>役員向け抜粋</c:v>
-                </c:pt>
-              </c:strCache>
-            </c:strRef>
-          </c:cat>
-          <c:val>
-            <c:numRef>
-              <c:f>Sheet1!$B$2:$B$5</c:f>
-              <c:numCache>
-                <c:formatCode>General</c:formatCode>
-                <c:ptCount val="4"/>
-                <c:pt idx="0">
-                  <c:v>45</c:v>
-                </c:pt>
-                <c:pt idx="1">
-                  <c:v>120</c:v>
-                </c:pt>
-                <c:pt idx="2">
-                  <c:v>240</c:v>
-                </c:pt>
-                <c:pt idx="3">
-                  <c:v>90</c:v>
-                </c:pt>
-              </c:numCache>
-            </c:numRef>
-          </c:val>
-        </c:ser>
-        <c:ser>
-          <c:idx val="1"/>
-          <c:order val="1"/>
-          <c:tx>
-            <c:strRef>
-              <c:f>Sheet1!$C$1</c:f>
-              <c:strCache>
-                <c:ptCount val="1"/>
-                <c:pt idx="0">
-                  <c:v>生成後 (分)</c:v>
-                </c:pt>
-              </c:strCache>
-            </c:strRef>
-          </c:tx>
-          <c:spPr>
-            <a:solidFill>
-              <a:srgbClr val="0D7870"/>
-            </a:solidFill>
-          </c:spPr>
-          <c:cat>
-            <c:strRef>
-              <c:f>Sheet1!$A$2:$A$5</c:f>
-              <c:strCache>
-                <c:ptCount val="4"/>
-                <c:pt idx="0">
-                  <c:v>週次報告</c:v>
-                </c:pt>
-                <c:pt idx="1">
-                  <c:v>月次レビュー</c:v>
-                </c:pt>
-                <c:pt idx="2">
-                  <c:v>調査サマリ</c:v>
-                </c:pt>
-                <c:pt idx="3">
-                  <c:v>役員向け抜粋</c:v>
-                </c:pt>
-              </c:strCache>
-            </c:strRef>
-          </c:cat>
-          <c:val>
-            <c:numRef>
-              <c:f>Sheet1!$C$2:$C$5</c:f>
-              <c:numCache>
-                <c:formatCode>General</c:formatCode>
-                <c:ptCount val="4"/>
-                <c:pt idx="0">
-                  <c:v>13</c:v>
-                </c:pt>
-                <c:pt idx="1">
-                  <c:v>42</c:v>
-                </c:pt>
-                <c:pt idx="2">
-                  <c:v>85</c:v>
-                </c:pt>
-                <c:pt idx="3">
-                  <c:v>28</c:v>
-                </c:pt>
-              </c:numCache>
-            </c:numRef>
-          </c:val>
-        </c:ser>
-        <c:dLbls>
-          <c:txPr>
-            <a:bodyPr/>
-            <a:lstStyle/>
-            <a:p>
-              <a:pPr>
-                <a:defRPr sz="1150"/>
-              </a:pPr>
-            </a:p>
-          </c:txPr>
-          <c:showLegendKey val="0"/>
-          <c:showVal val="1"/>
-          <c:showCatName val="0"/>
-          <c:showSerName val="0"/>
-          <c:showPercent val="0"/>
-          <c:showBubbleSize val="0"/>
-          <c:showLeaderLines val="1"/>
-        </c:dLbls>
-        <c:gapWidth val="76"/>
-        <c:axId val="-2068027336"/>
-        <c:axId val="-2113994440"/>
-      </c:barChart>
-      <c:catAx>
-        <c:axId val="-2068027336"/>
-        <c:scaling>
-          <c:orientation val="minMax"/>
-        </c:scaling>
-        <c:delete val="0"/>
-        <c:axPos val="l"/>
-        <c:majorTickMark val="out"/>
-        <c:minorTickMark val="none"/>
-        <c:tickLblPos val="nextTo"/>
-        <c:spPr>
-          <a:ln>
-            <a:noFill/>
-          </a:ln>
-        </c:spPr>
-        <c:crossAx val="-2113994440"/>
-        <c:crosses val="autoZero"/>
-        <c:auto val="1"/>
-        <c:lblAlgn val="ctr"/>
-        <c:lblOffset val="100"/>
-        <c:noMultiLvlLbl val="0"/>
-      </c:catAx>
-      <c:valAx>
-        <c:axId val="-2113994440"/>
-        <c:scaling/>
-        <c:delete val="0"/>
-        <c:axPos val="b"/>
-        <c:majorGridlines>
-          <c:spPr>
-            <a:ln w="7620">
-              <a:solidFill>
-                <a:srgbClr val="D1CFC8"/>
-              </a:solidFill>
-            </a:ln>
-          </c:spPr>
-        </c:majorGridlines>
-        <c:majorTickMark val="out"/>
-        <c:minorTickMark val="none"/>
-        <c:tickLblPos val="nextTo"/>
-        <c:spPr>
-          <a:ln>
-            <a:noFill/>
-          </a:ln>
-        </c:spPr>
-        <c:crossAx val="-2068027336"/>
-        <c:crosses val="autoZero"/>
-      </c:valAx>
-    </c:plotArea>
-    <c:legend>
-      <c:legendPos val="b"/>
-      <c:overlay val="0"/>
-    </c:legend>
-    <c:dispBlanksAs val="gap"/>
-  </c:chart>
-  <c:txPr>
-    <a:bodyPr/>
-    <a:lstStyle/>
-    <a:p>
-      <a:pPr>
-        <a:defRPr sz="1200">
-          <a:latin typeface="Yu Gothic"/>
-        </a:defRPr>
-      </a:pPr>
-      <a:endParaRPr lang="en-US"/>
-    </a:p>
-  </c:txPr>
-  <c:externalData r:id="rId1">
-    <c:autoUpdate val="0"/>
-  </c:externalData>
-</c:chartSpace>
-</file>
-
-<file path=ppt/charts/chart2.xml><?xml version="1.0" encoding="utf-8"?>
-<c:chartSpace xmlns:c="http://schemas.openxmlformats.org/drawingml/2006/chart" xmlns:a="http://schemas.openxmlformats.org/drawingml/2006/main" xmlns:r="http://schemas.openxmlformats.org/officeDocument/2006/relationships">
-  <c:date1904 val="0"/>
-  <c:chart>
-    <c:autoTitleDeleted val="1"/>
-    <c:plotArea>
-      <c:lineChart>
-        <c:grouping val="standard"/>
-        <c:varyColors val="0"/>
-        <c:ser>
-          <c:idx val="0"/>
-          <c:order val="0"/>
-          <c:tx>
-            <c:strRef>
-              <c:f>Sheet1!$B$1</c:f>
-              <c:strCache>
-                <c:ptCount val="1"/>
-                <c:pt idx="0">
-                  <c:v>利用率</c:v>
-                </c:pt>
-              </c:strCache>
-            </c:strRef>
-          </c:tx>
-          <c:spPr>
-            <a:ln w="25400">
-              <a:solidFill>
-                <a:srgbClr val="666E70"/>
-              </a:solidFill>
-            </a:ln>
-          </c:spPr>
-          <c:marker>
-            <c:spPr>
-              <a:solidFill>
-                <a:srgbClr val="666E70"/>
-              </a:solidFill>
-              <a:ln>
-                <a:solidFill>
-                  <a:srgbClr val="666E70"/>
-                </a:solidFill>
-              </a:ln>
-            </c:spPr>
-          </c:marker>
-          <c:cat>
-            <c:strRef>
-              <c:f>Sheet1!$A$2:$A$10</c:f>
-              <c:strCache>
-                <c:ptCount val="9"/>
-                <c:pt idx="0">
-                  <c:v>4月</c:v>
-                </c:pt>
-                <c:pt idx="1">
-                  <c:v>5月</c:v>
-                </c:pt>
-                <c:pt idx="2">
-                  <c:v>6月</c:v>
-                </c:pt>
-                <c:pt idx="3">
-                  <c:v>7月</c:v>
-                </c:pt>
-                <c:pt idx="4">
-                  <c:v>8月</c:v>
-                </c:pt>
-                <c:pt idx="5">
-                  <c:v>9月</c:v>
-                </c:pt>
-                <c:pt idx="6">
-                  <c:v>10月</c:v>
-                </c:pt>
-                <c:pt idx="7">
-                  <c:v>11月</c:v>
-                </c:pt>
-                <c:pt idx="8">
-                  <c:v>12月</c:v>
-                </c:pt>
-              </c:strCache>
-            </c:strRef>
-          </c:cat>
-          <c:val>
-            <c:numRef>
-              <c:f>Sheet1!$B$2:$B$10</c:f>
-              <c:numCache>
-                <c:formatCode>General</c:formatCode>
-                <c:ptCount val="9"/>
-                <c:pt idx="0">
-                  <c:v>12</c:v>
-                </c:pt>
-                <c:pt idx="1">
-                  <c:v>18</c:v>
-                </c:pt>
-                <c:pt idx="2">
-                  <c:v>25</c:v>
-                </c:pt>
-                <c:pt idx="3">
-                  <c:v>31</c:v>
-                </c:pt>
-                <c:pt idx="4">
-                  <c:v>44</c:v>
-                </c:pt>
-                <c:pt idx="5">
-                  <c:v>52</c:v>
-                </c:pt>
-                <c:pt idx="6">
-                  <c:v>61</c:v>
-                </c:pt>
-                <c:pt idx="7">
-                  <c:v>67</c:v>
-                </c:pt>
-                <c:pt idx="8">
-                  <c:v>74</c:v>
-                </c:pt>
-              </c:numCache>
-            </c:numRef>
-          </c:val>
-          <c:smooth val="0"/>
-        </c:ser>
-        <c:ser>
-          <c:idx val="1"/>
-          <c:order val="1"/>
-          <c:tx>
-            <c:strRef>
-              <c:f>Sheet1!$C$1</c:f>
-              <c:strCache>
-                <c:ptCount val="1"/>
-                <c:pt idx="0">
-                  <c:v>目標</c:v>
-                </c:pt>
-              </c:strCache>
-            </c:strRef>
-          </c:tx>
-          <c:spPr>
-            <a:ln w="25400">
-              <a:solidFill>
-                <a:srgbClr val="0D7870"/>
-              </a:solidFill>
-            </a:ln>
-          </c:spPr>
-          <c:marker>
-            <c:spPr>
-              <a:solidFill>
-                <a:srgbClr val="0D7870"/>
-              </a:solidFill>
-              <a:ln>
-                <a:solidFill>
-                  <a:srgbClr val="0D7870"/>
-                </a:solidFill>
-              </a:ln>
-            </c:spPr>
-          </c:marker>
-          <c:cat>
-            <c:strRef>
-              <c:f>Sheet1!$A$2:$A$10</c:f>
-              <c:strCache>
-                <c:ptCount val="9"/>
-                <c:pt idx="0">
-                  <c:v>4月</c:v>
-                </c:pt>
-                <c:pt idx="1">
-                  <c:v>5月</c:v>
-                </c:pt>
-                <c:pt idx="2">
-                  <c:v>6月</c:v>
-                </c:pt>
-                <c:pt idx="3">
-                  <c:v>7月</c:v>
-                </c:pt>
-                <c:pt idx="4">
-                  <c:v>8月</c:v>
-                </c:pt>
-                <c:pt idx="5">
-                  <c:v>9月</c:v>
-                </c:pt>
-                <c:pt idx="6">
-                  <c:v>10月</c:v>
-                </c:pt>
-                <c:pt idx="7">
-                  <c:v>11月</c:v>
-                </c:pt>
-                <c:pt idx="8">
-                  <c:v>12月</c:v>
-                </c:pt>
-              </c:strCache>
-            </c:strRef>
-          </c:cat>
-          <c:val>
-            <c:numRef>
-              <c:f>Sheet1!$C$2:$C$10</c:f>
-              <c:numCache>
-                <c:formatCode>General</c:formatCode>
-                <c:ptCount val="9"/>
-                <c:pt idx="0">
-                  <c:v>20</c:v>
-                </c:pt>
-                <c:pt idx="1">
-                  <c:v>25</c:v>
-                </c:pt>
-                <c:pt idx="2">
-                  <c:v>30</c:v>
-                </c:pt>
-                <c:pt idx="3">
-                  <c:v>35</c:v>
-                </c:pt>
-                <c:pt idx="4">
-                  <c:v>40</c:v>
-                </c:pt>
-                <c:pt idx="5">
-                  <c:v>50</c:v>
-                </c:pt>
-                <c:pt idx="6">
-                  <c:v>60</c:v>
-                </c:pt>
-                <c:pt idx="7">
-                  <c:v>70</c:v>
-                </c:pt>
-                <c:pt idx="8">
-                  <c:v>80</c:v>
-                </c:pt>
-              </c:numCache>
-            </c:numRef>
-          </c:val>
-          <c:smooth val="0"/>
-        </c:ser>
-        <c:marker val="1"/>
-        <c:smooth val="0"/>
-        <c:axId val="2118791784"/>
-        <c:axId val="2140495176"/>
-      </c:lineChart>
-      <c:catAx>
-        <c:axId val="2118791784"/>
-        <c:scaling>
-          <c:orientation val="minMax"/>
-        </c:scaling>
-        <c:delete val="0"/>
-        <c:axPos val="b"/>
-        <c:majorTickMark val="out"/>
-        <c:minorTickMark val="none"/>
-        <c:tickLblPos val="nextTo"/>
-        <c:spPr>
-          <a:ln>
-            <a:noFill/>
-          </a:ln>
-        </c:spPr>
-        <c:crossAx val="2140495176"/>
-        <c:crosses val="autoZero"/>
-        <c:auto val="1"/>
-        <c:lblAlgn val="ctr"/>
-        <c:lblOffset val="100"/>
-        <c:noMultiLvlLbl val="0"/>
-      </c:catAx>
-      <c:valAx>
-        <c:axId val="2140495176"/>
-        <c:scaling/>
-        <c:delete val="0"/>
-        <c:axPos val="l"/>
-        <c:majorGridlines>
-          <c:spPr>
-            <a:ln w="7620">
-              <a:solidFill>
-                <a:srgbClr val="D1CFC8"/>
-              </a:solidFill>
-            </a:ln>
-          </c:spPr>
-        </c:majorGridlines>
-        <c:majorTickMark val="out"/>
-        <c:minorTickMark val="none"/>
-        <c:tickLblPos val="nextTo"/>
-        <c:spPr>
-          <a:ln>
-            <a:noFill/>
-          </a:ln>
-        </c:spPr>
-        <c:crossAx val="2118791784"/>
-        <c:crosses val="autoZero"/>
-      </c:valAx>
-    </c:plotArea>
-    <c:legend>
-      <c:legendPos val="b"/>
-      <c:layout/>
-      <c:overlay val="0"/>
-    </c:legend>
-    <c:plotVisOnly val="1"/>
-    <c:dispBlanksAs val="gap"/>
-    <c:showDLblsOverMax val="0"/>
-  </c:chart>
-  <c:txPr>
-    <a:bodyPr/>
-    <a:lstStyle/>
-    <a:p>
-      <a:pPr>
-        <a:defRPr sz="1200">
-          <a:latin typeface="Yu Gothic"/>
-        </a:defRPr>
-      </a:pPr>
-      <a:endParaRPr lang="en-US"/>
-    </a:p>
-  </c:txPr>
-  <c:externalData r:id="rId1">
-    <c:autoUpdate val="0"/>
-  </c:externalData>
-</c:chartSpace>
-</file>
-
-<file path=ppt/charts/chart3.xml><?xml version="1.0" encoding="utf-8"?>
-<c:chartSpace xmlns:c="http://schemas.openxmlformats.org/drawingml/2006/chart" xmlns:a="http://schemas.openxmlformats.org/drawingml/2006/main" xmlns:r="http://schemas.openxmlformats.org/officeDocument/2006/relationships">
-  <c:date1904 val="0"/>
-  <c:chart>
-    <c:autoTitleDeleted val="1"/>
-    <c:plotArea>
-      <c:barChart>
-        <c:barDir val="col"/>
-        <c:grouping val="stacked"/>
-        <c:ser>
-          <c:idx val="0"/>
-          <c:order val="0"/>
-          <c:tx>
-            <c:strRef>
-              <c:f>Sheet1!$B$1</c:f>
-              <c:strCache>
-                <c:ptCount val="1"/>
-                <c:pt idx="0">
-                  <c:v>作成</c:v>
-                </c:pt>
-              </c:strCache>
-            </c:strRef>
-          </c:tx>
-          <c:spPr>
-            <a:solidFill>
-              <a:srgbClr val="666E70"/>
-            </a:solidFill>
-          </c:spPr>
-          <c:cat>
-            <c:strRef>
-              <c:f>Sheet1!$A$2:$A$4</c:f>
-              <c:strCache>
-                <c:ptCount val="3"/>
-                <c:pt idx="0">
-                  <c:v>導入前</c:v>
-                </c:pt>
-                <c:pt idx="1">
-                  <c:v>試行中</c:v>
-                </c:pt>
-                <c:pt idx="2">
-                  <c:v>標準化後</c:v>
-                </c:pt>
-              </c:strCache>
-            </c:strRef>
-          </c:cat>
-          <c:val>
-            <c:numRef>
-              <c:f>Sheet1!$B$2:$B$4</c:f>
-              <c:numCache>
-                <c:formatCode>General</c:formatCode>
-                <c:ptCount val="3"/>
-                <c:pt idx="0">
-                  <c:v>70</c:v>
-                </c:pt>
-                <c:pt idx="1">
-                  <c:v>38</c:v>
-                </c:pt>
-                <c:pt idx="2">
-                  <c:v>18</c:v>
-                </c:pt>
-              </c:numCache>
-            </c:numRef>
-          </c:val>
-        </c:ser>
-        <c:ser>
-          <c:idx val="1"/>
-          <c:order val="1"/>
-          <c:tx>
-            <c:strRef>
-              <c:f>Sheet1!$C$1</c:f>
-              <c:strCache>
-                <c:ptCount val="1"/>
-                <c:pt idx="0">
-                  <c:v>レビュー</c:v>
-                </c:pt>
-              </c:strCache>
-            </c:strRef>
-          </c:tx>
-          <c:spPr>
-            <a:solidFill>
-              <a:srgbClr val="0D7870"/>
-            </a:solidFill>
-          </c:spPr>
-          <c:cat>
-            <c:strRef>
-              <c:f>Sheet1!$A$2:$A$4</c:f>
-              <c:strCache>
-                <c:ptCount val="3"/>
-                <c:pt idx="0">
-                  <c:v>導入前</c:v>
-                </c:pt>
-                <c:pt idx="1">
-                  <c:v>試行中</c:v>
-                </c:pt>
-                <c:pt idx="2">
-                  <c:v>標準化後</c:v>
-                </c:pt>
-              </c:strCache>
-            </c:strRef>
-          </c:cat>
-          <c:val>
-            <c:numRef>
-              <c:f>Sheet1!$C$2:$C$4</c:f>
-              <c:numCache>
-                <c:formatCode>General</c:formatCode>
-                <c:ptCount val="3"/>
-                <c:pt idx="0">
-                  <c:v>20</c:v>
-                </c:pt>
-                <c:pt idx="1">
-                  <c:v>32</c:v>
-                </c:pt>
-                <c:pt idx="2">
-                  <c:v>42</c:v>
-                </c:pt>
-              </c:numCache>
-            </c:numRef>
-          </c:val>
-        </c:ser>
-        <c:ser>
-          <c:idx val="2"/>
-          <c:order val="2"/>
-          <c:tx>
-            <c:strRef>
-              <c:f>Sheet1!$D$1</c:f>
-              <c:strCache>
-                <c:ptCount val="1"/>
-                <c:pt idx="0">
-                  <c:v>意思決定</c:v>
-                </c:pt>
-              </c:strCache>
-            </c:strRef>
-          </c:tx>
-          <c:spPr>
-            <a:solidFill>
-              <a:srgbClr val="C7583E"/>
-            </a:solidFill>
-          </c:spPr>
-          <c:cat>
-            <c:strRef>
-              <c:f>Sheet1!$A$2:$A$4</c:f>
-              <c:strCache>
-                <c:ptCount val="3"/>
-                <c:pt idx="0">
-                  <c:v>導入前</c:v>
-                </c:pt>
-                <c:pt idx="1">
-                  <c:v>試行中</c:v>
-                </c:pt>
-                <c:pt idx="2">
-                  <c:v>標準化後</c:v>
-                </c:pt>
-              </c:strCache>
-            </c:strRef>
-          </c:cat>
-          <c:val>
-            <c:numRef>
-              <c:f>Sheet1!$D$2:$D$4</c:f>
-              <c:numCache>
-                <c:formatCode>General</c:formatCode>
-                <c:ptCount val="3"/>
-                <c:pt idx="0">
-                  <c:v>10</c:v>
-                </c:pt>
-                <c:pt idx="1">
-                  <c:v>30</c:v>
-                </c:pt>
-                <c:pt idx="2">
-                  <c:v>40</c:v>
-                </c:pt>
-              </c:numCache>
-            </c:numRef>
-          </c:val>
-        </c:ser>
-        <c:dLbls>
-          <c:numFmt formatCode="0&quot;%&quot;" sourceLinked="0"/>
-          <c:txPr>
-            <a:bodyPr/>
-            <a:lstStyle/>
-            <a:p>
-              <a:pPr>
-                <a:defRPr sz="1150"/>
-              </a:pPr>
-            </a:p>
-          </c:txPr>
-          <c:showLegendKey val="0"/>
-          <c:showVal val="1"/>
-          <c:showCatName val="0"/>
-          <c:showSerName val="0"/>
-          <c:showPercent val="0"/>
-          <c:showBubbleSize val="0"/>
-          <c:showLeaderLines val="1"/>
-        </c:dLbls>
-        <c:gapWidth val="76"/>
-        <c:overlap val="100"/>
-        <c:axId val="-2068027336"/>
-        <c:axId val="-2113994440"/>
-      </c:barChart>
-      <c:catAx>
-        <c:axId val="-2068027336"/>
-        <c:scaling>
-          <c:orientation val="minMax"/>
-        </c:scaling>
-        <c:delete val="0"/>
-        <c:axPos val="b"/>
-        <c:majorTickMark val="out"/>
-        <c:minorTickMark val="none"/>
-        <c:tickLblPos val="nextTo"/>
-        <c:spPr>
-          <a:ln>
-            <a:noFill/>
-          </a:ln>
-        </c:spPr>
-        <c:crossAx val="-2113994440"/>
-        <c:crosses val="autoZero"/>
-        <c:auto val="1"/>
-        <c:lblAlgn val="ctr"/>
-        <c:lblOffset val="100"/>
-        <c:noMultiLvlLbl val="0"/>
-      </c:catAx>
-      <c:valAx>
-        <c:axId val="-2113994440"/>
-        <c:scaling/>
-        <c:delete val="0"/>
-        <c:axPos val="l"/>
-        <c:majorGridlines>
-          <c:spPr>
-            <a:ln w="7620">
-              <a:solidFill>
-                <a:srgbClr val="D1CFC8"/>
-              </a:solidFill>
-            </a:ln>
-          </c:spPr>
-        </c:majorGridlines>
-        <c:majorTickMark val="out"/>
-        <c:minorTickMark val="none"/>
-        <c:tickLblPos val="nextTo"/>
-        <c:spPr>
-          <a:ln>
-            <a:noFill/>
-          </a:ln>
-        </c:spPr>
-        <c:crossAx val="-2068027336"/>
-        <c:crosses val="autoZero"/>
-      </c:valAx>
-    </c:plotArea>
-    <c:legend>
-      <c:legendPos val="b"/>
-      <c:overlay val="0"/>
-    </c:legend>
-    <c:dispBlanksAs val="gap"/>
-  </c:chart>
-  <c:txPr>
-    <a:bodyPr/>
-    <a:lstStyle/>
-    <a:p>
-      <a:pPr>
-        <a:defRPr sz="1200">
-          <a:latin typeface="Yu Gothic"/>
-        </a:defRPr>
-      </a:pPr>
-      <a:endParaRPr lang="en-US"/>
-    </a:p>
-  </c:txPr>
-  <c:externalData r:id="rId1">
-    <c:autoUpdate val="0"/>
-  </c:externalData>
-</c:chartSpace>
 </file>
 
 <file path=ppt/slideLayouts/slideLayout1.xml><?xml version="1.0" encoding="utf-8"?>
@@ -4538,27 +3742,2368 @@
           </a:p>
         </p:txBody>
       </p:sp>
-      <p:graphicFrame>
-        <p:nvGraphicFramePr>
-          <p:cNvPr id="5" name="Chart 4"/>
-          <p:cNvGraphicFramePr>
-            <a:graphicFrameLocks noGrp="1"/>
-          </p:cNvGraphicFramePr>
-          <p:nvPr/>
-        </p:nvGraphicFramePr>
-        <p:xfrm>
-          <a:off x="822960" y="1645920"/>
-          <a:ext cx="10789920" cy="4379975"/>
-        </p:xfrm>
-        <a:graphic>
-          <a:graphicData uri="http://schemas.openxmlformats.org/drawingml/2006/chart">
-            <c:chart xmlns:c="http://schemas.openxmlformats.org/drawingml/2006/chart" r:id="rId2"/>
-          </a:graphicData>
-        </a:graphic>
-      </p:graphicFrame>
+      <p:cxnSp>
+        <p:nvCxnSpPr>
+          <p:cNvPr id="5" name="Connector 4"/>
+          <p:cNvCxnSpPr/>
+          <p:nvPr/>
+        </p:nvCxnSpPr>
+        <p:spPr>
+          <a:xfrm>
+            <a:off x="1417319" y="5138927"/>
+            <a:ext cx="9848089" cy="0"/>
+          </a:xfrm>
+          <a:prstGeom prst="line">
+            <a:avLst/>
+          </a:prstGeom>
+          <a:ln w="6985">
+            <a:solidFill>
+              <a:srgbClr val="D1CFC8"/>
+            </a:solidFill>
+          </a:ln>
+        </p:spPr>
+        <p:style>
+          <a:lnRef idx="2">
+            <a:schemeClr val="accent1"/>
+          </a:lnRef>
+          <a:fillRef idx="0">
+            <a:schemeClr val="accent1"/>
+          </a:fillRef>
+          <a:effectRef idx="1">
+            <a:schemeClr val="accent1"/>
+          </a:effectRef>
+          <a:fontRef idx="minor">
+            <a:schemeClr val="tx1"/>
+          </a:fontRef>
+        </p:style>
+      </p:cxnSp>
       <p:sp>
         <p:nvSpPr>
           <p:cNvPr id="6" name="TextBox 5"/>
+          <p:cNvSpPr txBox="1"/>
+          <p:nvPr/>
+        </p:nvSpPr>
+        <p:spPr>
+          <a:xfrm>
+            <a:off x="996695" y="5056631"/>
+            <a:ext cx="329184" cy="164592"/>
+          </a:xfrm>
+          <a:prstGeom prst="rect">
+            <a:avLst/>
+          </a:prstGeom>
+          <a:noFill/>
+        </p:spPr>
+        <p:txBody>
+          <a:bodyPr wrap="square" anchor="t" lIns="0" rIns="0" tIns="0" bIns="0">
+            <a:spAutoFit/>
+          </a:bodyPr>
+          <a:lstStyle/>
+          <a:p>
+            <a:pPr algn="r">
+              <a:lnSpc>
+                <a:spcPct val="130000"/>
+              </a:lnSpc>
+            </a:pPr>
+            <a:r>
+              <a:rPr sz="780" b="0" lang="ja-JP">
+                <a:solidFill>
+                  <a:srgbClr val="666E70"/>
+                </a:solidFill>
+                <a:latin typeface="Yu Gothic"/>
+                <a:ea typeface="Yu Gothic"/>
+                <a:cs typeface="Yu Gothic"/>
+              </a:rPr>
+              <a:t>0</a:t>
+            </a:r>
+          </a:p>
+        </p:txBody>
+      </p:sp>
+      <p:cxnSp>
+        <p:nvCxnSpPr>
+          <p:cNvPr id="7" name="Connector 6"/>
+          <p:cNvCxnSpPr/>
+          <p:nvPr/>
+        </p:nvCxnSpPr>
+        <p:spPr>
+          <a:xfrm>
+            <a:off x="1417319" y="4299966"/>
+            <a:ext cx="9848089" cy="0"/>
+          </a:xfrm>
+          <a:prstGeom prst="line">
+            <a:avLst/>
+          </a:prstGeom>
+          <a:ln w="6985">
+            <a:solidFill>
+              <a:srgbClr val="D1CFC8"/>
+            </a:solidFill>
+          </a:ln>
+        </p:spPr>
+        <p:style>
+          <a:lnRef idx="2">
+            <a:schemeClr val="accent1"/>
+          </a:lnRef>
+          <a:fillRef idx="0">
+            <a:schemeClr val="accent1"/>
+          </a:fillRef>
+          <a:effectRef idx="1">
+            <a:schemeClr val="accent1"/>
+          </a:effectRef>
+          <a:fontRef idx="minor">
+            <a:schemeClr val="tx1"/>
+          </a:fontRef>
+        </p:style>
+      </p:cxnSp>
+      <p:sp>
+        <p:nvSpPr>
+          <p:cNvPr id="8" name="TextBox 7"/>
+          <p:cNvSpPr txBox="1"/>
+          <p:nvPr/>
+        </p:nvSpPr>
+        <p:spPr>
+          <a:xfrm>
+            <a:off x="996695" y="4217670"/>
+            <a:ext cx="329184" cy="164592"/>
+          </a:xfrm>
+          <a:prstGeom prst="rect">
+            <a:avLst/>
+          </a:prstGeom>
+          <a:noFill/>
+        </p:spPr>
+        <p:txBody>
+          <a:bodyPr wrap="square" anchor="t" lIns="0" rIns="0" tIns="0" bIns="0">
+            <a:spAutoFit/>
+          </a:bodyPr>
+          <a:lstStyle/>
+          <a:p>
+            <a:pPr algn="r">
+              <a:lnSpc>
+                <a:spcPct val="130000"/>
+              </a:lnSpc>
+            </a:pPr>
+            <a:r>
+              <a:rPr sz="780" b="0" lang="ja-JP">
+                <a:solidFill>
+                  <a:srgbClr val="666E70"/>
+                </a:solidFill>
+                <a:latin typeface="Yu Gothic"/>
+                <a:ea typeface="Yu Gothic"/>
+                <a:cs typeface="Yu Gothic"/>
+              </a:rPr>
+              <a:t>20</a:t>
+            </a:r>
+          </a:p>
+        </p:txBody>
+      </p:sp>
+      <p:cxnSp>
+        <p:nvCxnSpPr>
+          <p:cNvPr id="9" name="Connector 8"/>
+          <p:cNvCxnSpPr/>
+          <p:nvPr/>
+        </p:nvCxnSpPr>
+        <p:spPr>
+          <a:xfrm>
+            <a:off x="1417319" y="3461003"/>
+            <a:ext cx="9848089" cy="0"/>
+          </a:xfrm>
+          <a:prstGeom prst="line">
+            <a:avLst/>
+          </a:prstGeom>
+          <a:ln w="6985">
+            <a:solidFill>
+              <a:srgbClr val="D1CFC8"/>
+            </a:solidFill>
+          </a:ln>
+        </p:spPr>
+        <p:style>
+          <a:lnRef idx="2">
+            <a:schemeClr val="accent1"/>
+          </a:lnRef>
+          <a:fillRef idx="0">
+            <a:schemeClr val="accent1"/>
+          </a:fillRef>
+          <a:effectRef idx="1">
+            <a:schemeClr val="accent1"/>
+          </a:effectRef>
+          <a:fontRef idx="minor">
+            <a:schemeClr val="tx1"/>
+          </a:fontRef>
+        </p:style>
+      </p:cxnSp>
+      <p:sp>
+        <p:nvSpPr>
+          <p:cNvPr id="10" name="TextBox 9"/>
+          <p:cNvSpPr txBox="1"/>
+          <p:nvPr/>
+        </p:nvSpPr>
+        <p:spPr>
+          <a:xfrm>
+            <a:off x="996695" y="3378707"/>
+            <a:ext cx="329184" cy="164592"/>
+          </a:xfrm>
+          <a:prstGeom prst="rect">
+            <a:avLst/>
+          </a:prstGeom>
+          <a:noFill/>
+        </p:spPr>
+        <p:txBody>
+          <a:bodyPr wrap="square" anchor="t" lIns="0" rIns="0" tIns="0" bIns="0">
+            <a:spAutoFit/>
+          </a:bodyPr>
+          <a:lstStyle/>
+          <a:p>
+            <a:pPr algn="r">
+              <a:lnSpc>
+                <a:spcPct val="130000"/>
+              </a:lnSpc>
+            </a:pPr>
+            <a:r>
+              <a:rPr sz="780" b="0" lang="ja-JP">
+                <a:solidFill>
+                  <a:srgbClr val="666E70"/>
+                </a:solidFill>
+                <a:latin typeface="Yu Gothic"/>
+                <a:ea typeface="Yu Gothic"/>
+                <a:cs typeface="Yu Gothic"/>
+              </a:rPr>
+              <a:t>40</a:t>
+            </a:r>
+          </a:p>
+        </p:txBody>
+      </p:sp>
+      <p:cxnSp>
+        <p:nvCxnSpPr>
+          <p:cNvPr id="11" name="Connector 10"/>
+          <p:cNvCxnSpPr/>
+          <p:nvPr/>
+        </p:nvCxnSpPr>
+        <p:spPr>
+          <a:xfrm>
+            <a:off x="1417319" y="2622041"/>
+            <a:ext cx="9848089" cy="0"/>
+          </a:xfrm>
+          <a:prstGeom prst="line">
+            <a:avLst/>
+          </a:prstGeom>
+          <a:ln w="6985">
+            <a:solidFill>
+              <a:srgbClr val="D1CFC8"/>
+            </a:solidFill>
+          </a:ln>
+        </p:spPr>
+        <p:style>
+          <a:lnRef idx="2">
+            <a:schemeClr val="accent1"/>
+          </a:lnRef>
+          <a:fillRef idx="0">
+            <a:schemeClr val="accent1"/>
+          </a:fillRef>
+          <a:effectRef idx="1">
+            <a:schemeClr val="accent1"/>
+          </a:effectRef>
+          <a:fontRef idx="minor">
+            <a:schemeClr val="tx1"/>
+          </a:fontRef>
+        </p:style>
+      </p:cxnSp>
+      <p:sp>
+        <p:nvSpPr>
+          <p:cNvPr id="12" name="TextBox 11"/>
+          <p:cNvSpPr txBox="1"/>
+          <p:nvPr/>
+        </p:nvSpPr>
+        <p:spPr>
+          <a:xfrm>
+            <a:off x="996695" y="2539746"/>
+            <a:ext cx="329184" cy="164592"/>
+          </a:xfrm>
+          <a:prstGeom prst="rect">
+            <a:avLst/>
+          </a:prstGeom>
+          <a:noFill/>
+        </p:spPr>
+        <p:txBody>
+          <a:bodyPr wrap="square" anchor="t" lIns="0" rIns="0" tIns="0" bIns="0">
+            <a:spAutoFit/>
+          </a:bodyPr>
+          <a:lstStyle/>
+          <a:p>
+            <a:pPr algn="r">
+              <a:lnSpc>
+                <a:spcPct val="130000"/>
+              </a:lnSpc>
+            </a:pPr>
+            <a:r>
+              <a:rPr sz="780" b="0" lang="ja-JP">
+                <a:solidFill>
+                  <a:srgbClr val="666E70"/>
+                </a:solidFill>
+                <a:latin typeface="Yu Gothic"/>
+                <a:ea typeface="Yu Gothic"/>
+                <a:cs typeface="Yu Gothic"/>
+              </a:rPr>
+              <a:t>60</a:t>
+            </a:r>
+          </a:p>
+        </p:txBody>
+      </p:sp>
+      <p:cxnSp>
+        <p:nvCxnSpPr>
+          <p:cNvPr id="13" name="Connector 12"/>
+          <p:cNvCxnSpPr/>
+          <p:nvPr/>
+        </p:nvCxnSpPr>
+        <p:spPr>
+          <a:xfrm>
+            <a:off x="1417319" y="1783079"/>
+            <a:ext cx="9848089" cy="0"/>
+          </a:xfrm>
+          <a:prstGeom prst="line">
+            <a:avLst/>
+          </a:prstGeom>
+          <a:ln w="6985">
+            <a:solidFill>
+              <a:srgbClr val="D1CFC8"/>
+            </a:solidFill>
+          </a:ln>
+        </p:spPr>
+        <p:style>
+          <a:lnRef idx="2">
+            <a:schemeClr val="accent1"/>
+          </a:lnRef>
+          <a:fillRef idx="0">
+            <a:schemeClr val="accent1"/>
+          </a:fillRef>
+          <a:effectRef idx="1">
+            <a:schemeClr val="accent1"/>
+          </a:effectRef>
+          <a:fontRef idx="minor">
+            <a:schemeClr val="tx1"/>
+          </a:fontRef>
+        </p:style>
+      </p:cxnSp>
+      <p:sp>
+        <p:nvSpPr>
+          <p:cNvPr id="14" name="TextBox 13"/>
+          <p:cNvSpPr txBox="1"/>
+          <p:nvPr/>
+        </p:nvSpPr>
+        <p:spPr>
+          <a:xfrm>
+            <a:off x="996695" y="1700783"/>
+            <a:ext cx="329184" cy="164592"/>
+          </a:xfrm>
+          <a:prstGeom prst="rect">
+            <a:avLst/>
+          </a:prstGeom>
+          <a:noFill/>
+        </p:spPr>
+        <p:txBody>
+          <a:bodyPr wrap="square" anchor="t" lIns="0" rIns="0" tIns="0" bIns="0">
+            <a:spAutoFit/>
+          </a:bodyPr>
+          <a:lstStyle/>
+          <a:p>
+            <a:pPr algn="r">
+              <a:lnSpc>
+                <a:spcPct val="130000"/>
+              </a:lnSpc>
+            </a:pPr>
+            <a:r>
+              <a:rPr sz="780" b="0" lang="ja-JP">
+                <a:solidFill>
+                  <a:srgbClr val="666E70"/>
+                </a:solidFill>
+                <a:latin typeface="Yu Gothic"/>
+                <a:ea typeface="Yu Gothic"/>
+                <a:cs typeface="Yu Gothic"/>
+              </a:rPr>
+              <a:t>80</a:t>
+            </a:r>
+          </a:p>
+        </p:txBody>
+      </p:sp>
+      <p:cxnSp>
+        <p:nvCxnSpPr>
+          <p:cNvPr id="15" name="Connector 14"/>
+          <p:cNvCxnSpPr/>
+          <p:nvPr/>
+        </p:nvCxnSpPr>
+        <p:spPr>
+          <a:xfrm>
+            <a:off x="1417319" y="1783080"/>
+            <a:ext cx="0" cy="3355847"/>
+          </a:xfrm>
+          <a:prstGeom prst="line">
+            <a:avLst/>
+          </a:prstGeom>
+          <a:ln w="10160">
+            <a:solidFill>
+              <a:srgbClr val="666E70"/>
+            </a:solidFill>
+          </a:ln>
+        </p:spPr>
+        <p:style>
+          <a:lnRef idx="2">
+            <a:schemeClr val="accent1"/>
+          </a:lnRef>
+          <a:fillRef idx="0">
+            <a:schemeClr val="accent1"/>
+          </a:fillRef>
+          <a:effectRef idx="1">
+            <a:schemeClr val="accent1"/>
+          </a:effectRef>
+          <a:fontRef idx="minor">
+            <a:schemeClr val="tx1"/>
+          </a:fontRef>
+        </p:style>
+      </p:cxnSp>
+      <p:cxnSp>
+        <p:nvCxnSpPr>
+          <p:cNvPr id="16" name="Connector 15"/>
+          <p:cNvCxnSpPr/>
+          <p:nvPr/>
+        </p:nvCxnSpPr>
+        <p:spPr>
+          <a:xfrm>
+            <a:off x="1417319" y="5138927"/>
+            <a:ext cx="9848089" cy="0"/>
+          </a:xfrm>
+          <a:prstGeom prst="line">
+            <a:avLst/>
+          </a:prstGeom>
+          <a:ln w="10160">
+            <a:solidFill>
+              <a:srgbClr val="666E70"/>
+            </a:solidFill>
+          </a:ln>
+        </p:spPr>
+        <p:style>
+          <a:lnRef idx="2">
+            <a:schemeClr val="accent1"/>
+          </a:lnRef>
+          <a:fillRef idx="0">
+            <a:schemeClr val="accent1"/>
+          </a:fillRef>
+          <a:effectRef idx="1">
+            <a:schemeClr val="accent1"/>
+          </a:effectRef>
+          <a:fontRef idx="minor">
+            <a:schemeClr val="tx1"/>
+          </a:fontRef>
+        </p:style>
+      </p:cxnSp>
+      <p:sp>
+        <p:nvSpPr>
+          <p:cNvPr id="17" name="TextBox 16"/>
+          <p:cNvSpPr txBox="1"/>
+          <p:nvPr/>
+        </p:nvSpPr>
+        <p:spPr>
+          <a:xfrm>
+            <a:off x="1106423" y="5230367"/>
+            <a:ext cx="621792" cy="219456"/>
+          </a:xfrm>
+          <a:prstGeom prst="rect">
+            <a:avLst/>
+          </a:prstGeom>
+          <a:noFill/>
+        </p:spPr>
+        <p:txBody>
+          <a:bodyPr wrap="square" anchor="t" lIns="0" rIns="0" tIns="0" bIns="0">
+            <a:spAutoFit/>
+          </a:bodyPr>
+          <a:lstStyle/>
+          <a:p>
+            <a:pPr algn="ctr">
+              <a:lnSpc>
+                <a:spcPct val="130000"/>
+              </a:lnSpc>
+            </a:pPr>
+            <a:r>
+              <a:rPr sz="800" b="0" lang="ja-JP">
+                <a:solidFill>
+                  <a:srgbClr val="666E70"/>
+                </a:solidFill>
+                <a:latin typeface="Yu Gothic"/>
+                <a:ea typeface="Yu Gothic"/>
+                <a:cs typeface="Yu Gothic"/>
+              </a:rPr>
+              <a:t>4月</a:t>
+            </a:r>
+          </a:p>
+        </p:txBody>
+      </p:sp>
+      <p:sp>
+        <p:nvSpPr>
+          <p:cNvPr id="18" name="TextBox 17"/>
+          <p:cNvSpPr txBox="1"/>
+          <p:nvPr/>
+        </p:nvSpPr>
+        <p:spPr>
+          <a:xfrm>
+            <a:off x="2337435" y="5230367"/>
+            <a:ext cx="621792" cy="219456"/>
+          </a:xfrm>
+          <a:prstGeom prst="rect">
+            <a:avLst/>
+          </a:prstGeom>
+          <a:noFill/>
+        </p:spPr>
+        <p:txBody>
+          <a:bodyPr wrap="square" anchor="t" lIns="0" rIns="0" tIns="0" bIns="0">
+            <a:spAutoFit/>
+          </a:bodyPr>
+          <a:lstStyle/>
+          <a:p>
+            <a:pPr algn="ctr">
+              <a:lnSpc>
+                <a:spcPct val="130000"/>
+              </a:lnSpc>
+            </a:pPr>
+            <a:r>
+              <a:rPr sz="800" b="0" lang="ja-JP">
+                <a:solidFill>
+                  <a:srgbClr val="666E70"/>
+                </a:solidFill>
+                <a:latin typeface="Yu Gothic"/>
+                <a:ea typeface="Yu Gothic"/>
+                <a:cs typeface="Yu Gothic"/>
+              </a:rPr>
+              <a:t>5月</a:t>
+            </a:r>
+          </a:p>
+        </p:txBody>
+      </p:sp>
+      <p:sp>
+        <p:nvSpPr>
+          <p:cNvPr id="19" name="TextBox 18"/>
+          <p:cNvSpPr txBox="1"/>
+          <p:nvPr/>
+        </p:nvSpPr>
+        <p:spPr>
+          <a:xfrm>
+            <a:off x="3568446" y="5230367"/>
+            <a:ext cx="621792" cy="219456"/>
+          </a:xfrm>
+          <a:prstGeom prst="rect">
+            <a:avLst/>
+          </a:prstGeom>
+          <a:noFill/>
+        </p:spPr>
+        <p:txBody>
+          <a:bodyPr wrap="square" anchor="t" lIns="0" rIns="0" tIns="0" bIns="0">
+            <a:spAutoFit/>
+          </a:bodyPr>
+          <a:lstStyle/>
+          <a:p>
+            <a:pPr algn="ctr">
+              <a:lnSpc>
+                <a:spcPct val="130000"/>
+              </a:lnSpc>
+            </a:pPr>
+            <a:r>
+              <a:rPr sz="800" b="0" lang="ja-JP">
+                <a:solidFill>
+                  <a:srgbClr val="666E70"/>
+                </a:solidFill>
+                <a:latin typeface="Yu Gothic"/>
+                <a:ea typeface="Yu Gothic"/>
+                <a:cs typeface="Yu Gothic"/>
+              </a:rPr>
+              <a:t>6月</a:t>
+            </a:r>
+          </a:p>
+        </p:txBody>
+      </p:sp>
+      <p:sp>
+        <p:nvSpPr>
+          <p:cNvPr id="20" name="TextBox 19"/>
+          <p:cNvSpPr txBox="1"/>
+          <p:nvPr/>
+        </p:nvSpPr>
+        <p:spPr>
+          <a:xfrm>
+            <a:off x="4799457" y="5230367"/>
+            <a:ext cx="621792" cy="219456"/>
+          </a:xfrm>
+          <a:prstGeom prst="rect">
+            <a:avLst/>
+          </a:prstGeom>
+          <a:noFill/>
+        </p:spPr>
+        <p:txBody>
+          <a:bodyPr wrap="square" anchor="t" lIns="0" rIns="0" tIns="0" bIns="0">
+            <a:spAutoFit/>
+          </a:bodyPr>
+          <a:lstStyle/>
+          <a:p>
+            <a:pPr algn="ctr">
+              <a:lnSpc>
+                <a:spcPct val="130000"/>
+              </a:lnSpc>
+            </a:pPr>
+            <a:r>
+              <a:rPr sz="800" b="0" lang="ja-JP">
+                <a:solidFill>
+                  <a:srgbClr val="666E70"/>
+                </a:solidFill>
+                <a:latin typeface="Yu Gothic"/>
+                <a:ea typeface="Yu Gothic"/>
+                <a:cs typeface="Yu Gothic"/>
+              </a:rPr>
+              <a:t>7月</a:t>
+            </a:r>
+          </a:p>
+        </p:txBody>
+      </p:sp>
+      <p:sp>
+        <p:nvSpPr>
+          <p:cNvPr id="21" name="TextBox 20"/>
+          <p:cNvSpPr txBox="1"/>
+          <p:nvPr/>
+        </p:nvSpPr>
+        <p:spPr>
+          <a:xfrm>
+            <a:off x="6030468" y="5230367"/>
+            <a:ext cx="621792" cy="219456"/>
+          </a:xfrm>
+          <a:prstGeom prst="rect">
+            <a:avLst/>
+          </a:prstGeom>
+          <a:noFill/>
+        </p:spPr>
+        <p:txBody>
+          <a:bodyPr wrap="square" anchor="t" lIns="0" rIns="0" tIns="0" bIns="0">
+            <a:spAutoFit/>
+          </a:bodyPr>
+          <a:lstStyle/>
+          <a:p>
+            <a:pPr algn="ctr">
+              <a:lnSpc>
+                <a:spcPct val="130000"/>
+              </a:lnSpc>
+            </a:pPr>
+            <a:r>
+              <a:rPr sz="800" b="0" lang="ja-JP">
+                <a:solidFill>
+                  <a:srgbClr val="666E70"/>
+                </a:solidFill>
+                <a:latin typeface="Yu Gothic"/>
+                <a:ea typeface="Yu Gothic"/>
+                <a:cs typeface="Yu Gothic"/>
+              </a:rPr>
+              <a:t>8月</a:t>
+            </a:r>
+          </a:p>
+        </p:txBody>
+      </p:sp>
+      <p:sp>
+        <p:nvSpPr>
+          <p:cNvPr id="22" name="TextBox 21"/>
+          <p:cNvSpPr txBox="1"/>
+          <p:nvPr/>
+        </p:nvSpPr>
+        <p:spPr>
+          <a:xfrm>
+            <a:off x="7261479" y="5230367"/>
+            <a:ext cx="621792" cy="219456"/>
+          </a:xfrm>
+          <a:prstGeom prst="rect">
+            <a:avLst/>
+          </a:prstGeom>
+          <a:noFill/>
+        </p:spPr>
+        <p:txBody>
+          <a:bodyPr wrap="square" anchor="t" lIns="0" rIns="0" tIns="0" bIns="0">
+            <a:spAutoFit/>
+          </a:bodyPr>
+          <a:lstStyle/>
+          <a:p>
+            <a:pPr algn="ctr">
+              <a:lnSpc>
+                <a:spcPct val="130000"/>
+              </a:lnSpc>
+            </a:pPr>
+            <a:r>
+              <a:rPr sz="800" b="0" lang="ja-JP">
+                <a:solidFill>
+                  <a:srgbClr val="666E70"/>
+                </a:solidFill>
+                <a:latin typeface="Yu Gothic"/>
+                <a:ea typeface="Yu Gothic"/>
+                <a:cs typeface="Yu Gothic"/>
+              </a:rPr>
+              <a:t>9月</a:t>
+            </a:r>
+          </a:p>
+        </p:txBody>
+      </p:sp>
+      <p:sp>
+        <p:nvSpPr>
+          <p:cNvPr id="23" name="TextBox 22"/>
+          <p:cNvSpPr txBox="1"/>
+          <p:nvPr/>
+        </p:nvSpPr>
+        <p:spPr>
+          <a:xfrm>
+            <a:off x="8492490" y="5230367"/>
+            <a:ext cx="621792" cy="219456"/>
+          </a:xfrm>
+          <a:prstGeom prst="rect">
+            <a:avLst/>
+          </a:prstGeom>
+          <a:noFill/>
+        </p:spPr>
+        <p:txBody>
+          <a:bodyPr wrap="square" anchor="t" lIns="0" rIns="0" tIns="0" bIns="0">
+            <a:spAutoFit/>
+          </a:bodyPr>
+          <a:lstStyle/>
+          <a:p>
+            <a:pPr algn="ctr">
+              <a:lnSpc>
+                <a:spcPct val="130000"/>
+              </a:lnSpc>
+            </a:pPr>
+            <a:r>
+              <a:rPr sz="800" b="0" lang="ja-JP">
+                <a:solidFill>
+                  <a:srgbClr val="666E70"/>
+                </a:solidFill>
+                <a:latin typeface="Yu Gothic"/>
+                <a:ea typeface="Yu Gothic"/>
+                <a:cs typeface="Yu Gothic"/>
+              </a:rPr>
+              <a:t>10月</a:t>
+            </a:r>
+          </a:p>
+        </p:txBody>
+      </p:sp>
+      <p:sp>
+        <p:nvSpPr>
+          <p:cNvPr id="24" name="TextBox 23"/>
+          <p:cNvSpPr txBox="1"/>
+          <p:nvPr/>
+        </p:nvSpPr>
+        <p:spPr>
+          <a:xfrm>
+            <a:off x="9723501" y="5230367"/>
+            <a:ext cx="621792" cy="219456"/>
+          </a:xfrm>
+          <a:prstGeom prst="rect">
+            <a:avLst/>
+          </a:prstGeom>
+          <a:noFill/>
+        </p:spPr>
+        <p:txBody>
+          <a:bodyPr wrap="square" anchor="t" lIns="0" rIns="0" tIns="0" bIns="0">
+            <a:spAutoFit/>
+          </a:bodyPr>
+          <a:lstStyle/>
+          <a:p>
+            <a:pPr algn="ctr">
+              <a:lnSpc>
+                <a:spcPct val="130000"/>
+              </a:lnSpc>
+            </a:pPr>
+            <a:r>
+              <a:rPr sz="800" b="0" lang="ja-JP">
+                <a:solidFill>
+                  <a:srgbClr val="666E70"/>
+                </a:solidFill>
+                <a:latin typeface="Yu Gothic"/>
+                <a:ea typeface="Yu Gothic"/>
+                <a:cs typeface="Yu Gothic"/>
+              </a:rPr>
+              <a:t>11月</a:t>
+            </a:r>
+          </a:p>
+        </p:txBody>
+      </p:sp>
+      <p:sp>
+        <p:nvSpPr>
+          <p:cNvPr id="25" name="TextBox 24"/>
+          <p:cNvSpPr txBox="1"/>
+          <p:nvPr/>
+        </p:nvSpPr>
+        <p:spPr>
+          <a:xfrm>
+            <a:off x="10954512" y="5230367"/>
+            <a:ext cx="621792" cy="219456"/>
+          </a:xfrm>
+          <a:prstGeom prst="rect">
+            <a:avLst/>
+          </a:prstGeom>
+          <a:noFill/>
+        </p:spPr>
+        <p:txBody>
+          <a:bodyPr wrap="square" anchor="t" lIns="0" rIns="0" tIns="0" bIns="0">
+            <a:spAutoFit/>
+          </a:bodyPr>
+          <a:lstStyle/>
+          <a:p>
+            <a:pPr algn="ctr">
+              <a:lnSpc>
+                <a:spcPct val="130000"/>
+              </a:lnSpc>
+            </a:pPr>
+            <a:r>
+              <a:rPr sz="800" b="0" lang="ja-JP">
+                <a:solidFill>
+                  <a:srgbClr val="666E70"/>
+                </a:solidFill>
+                <a:latin typeface="Yu Gothic"/>
+                <a:ea typeface="Yu Gothic"/>
+                <a:cs typeface="Yu Gothic"/>
+              </a:rPr>
+              <a:t>12月</a:t>
+            </a:r>
+          </a:p>
+        </p:txBody>
+      </p:sp>
+      <p:cxnSp>
+        <p:nvCxnSpPr>
+          <p:cNvPr id="26" name="Connector 25"/>
+          <p:cNvCxnSpPr/>
+          <p:nvPr/>
+        </p:nvCxnSpPr>
+        <p:spPr>
+          <a:xfrm flipV="1">
+            <a:off x="1417319" y="4383862"/>
+            <a:ext cx="1231012" cy="251688"/>
+          </a:xfrm>
+          <a:prstGeom prst="line">
+            <a:avLst/>
+          </a:prstGeom>
+          <a:ln w="22860">
+            <a:solidFill>
+              <a:srgbClr val="0D7870"/>
+            </a:solidFill>
+          </a:ln>
+        </p:spPr>
+        <p:style>
+          <a:lnRef idx="2">
+            <a:schemeClr val="accent1"/>
+          </a:lnRef>
+          <a:fillRef idx="0">
+            <a:schemeClr val="accent1"/>
+          </a:fillRef>
+          <a:effectRef idx="1">
+            <a:schemeClr val="accent1"/>
+          </a:effectRef>
+          <a:fontRef idx="minor">
+            <a:schemeClr val="tx1"/>
+          </a:fontRef>
+        </p:style>
+      </p:cxnSp>
+      <p:cxnSp>
+        <p:nvCxnSpPr>
+          <p:cNvPr id="27" name="Connector 26"/>
+          <p:cNvCxnSpPr/>
+          <p:nvPr/>
+        </p:nvCxnSpPr>
+        <p:spPr>
+          <a:xfrm flipV="1">
+            <a:off x="2648331" y="4090225"/>
+            <a:ext cx="1231010" cy="293637"/>
+          </a:xfrm>
+          <a:prstGeom prst="line">
+            <a:avLst/>
+          </a:prstGeom>
+          <a:ln w="22860">
+            <a:solidFill>
+              <a:srgbClr val="0D7870"/>
+            </a:solidFill>
+          </a:ln>
+        </p:spPr>
+        <p:style>
+          <a:lnRef idx="2">
+            <a:schemeClr val="accent1"/>
+          </a:lnRef>
+          <a:fillRef idx="0">
+            <a:schemeClr val="accent1"/>
+          </a:fillRef>
+          <a:effectRef idx="1">
+            <a:schemeClr val="accent1"/>
+          </a:effectRef>
+          <a:fontRef idx="minor">
+            <a:schemeClr val="tx1"/>
+          </a:fontRef>
+        </p:style>
+      </p:cxnSp>
+      <p:cxnSp>
+        <p:nvCxnSpPr>
+          <p:cNvPr id="28" name="Connector 27"/>
+          <p:cNvCxnSpPr/>
+          <p:nvPr/>
+        </p:nvCxnSpPr>
+        <p:spPr>
+          <a:xfrm flipV="1">
+            <a:off x="3879341" y="3838536"/>
+            <a:ext cx="1231012" cy="251689"/>
+          </a:xfrm>
+          <a:prstGeom prst="line">
+            <a:avLst/>
+          </a:prstGeom>
+          <a:ln w="22860">
+            <a:solidFill>
+              <a:srgbClr val="0D7870"/>
+            </a:solidFill>
+          </a:ln>
+        </p:spPr>
+        <p:style>
+          <a:lnRef idx="2">
+            <a:schemeClr val="accent1"/>
+          </a:lnRef>
+          <a:fillRef idx="0">
+            <a:schemeClr val="accent1"/>
+          </a:fillRef>
+          <a:effectRef idx="1">
+            <a:schemeClr val="accent1"/>
+          </a:effectRef>
+          <a:fontRef idx="minor">
+            <a:schemeClr val="tx1"/>
+          </a:fontRef>
+        </p:style>
+      </p:cxnSp>
+      <p:cxnSp>
+        <p:nvCxnSpPr>
+          <p:cNvPr id="29" name="Connector 28"/>
+          <p:cNvCxnSpPr/>
+          <p:nvPr/>
+        </p:nvCxnSpPr>
+        <p:spPr>
+          <a:xfrm flipV="1">
+            <a:off x="5110353" y="3293211"/>
+            <a:ext cx="1231011" cy="545325"/>
+          </a:xfrm>
+          <a:prstGeom prst="line">
+            <a:avLst/>
+          </a:prstGeom>
+          <a:ln w="22860">
+            <a:solidFill>
+              <a:srgbClr val="0D7870"/>
+            </a:solidFill>
+          </a:ln>
+        </p:spPr>
+        <p:style>
+          <a:lnRef idx="2">
+            <a:schemeClr val="accent1"/>
+          </a:lnRef>
+          <a:fillRef idx="0">
+            <a:schemeClr val="accent1"/>
+          </a:fillRef>
+          <a:effectRef idx="1">
+            <a:schemeClr val="accent1"/>
+          </a:effectRef>
+          <a:fontRef idx="minor">
+            <a:schemeClr val="tx1"/>
+          </a:fontRef>
+        </p:style>
+      </p:cxnSp>
+      <p:cxnSp>
+        <p:nvCxnSpPr>
+          <p:cNvPr id="30" name="Connector 29"/>
+          <p:cNvCxnSpPr/>
+          <p:nvPr/>
+        </p:nvCxnSpPr>
+        <p:spPr>
+          <a:xfrm flipV="1">
+            <a:off x="6341364" y="2957626"/>
+            <a:ext cx="1231011" cy="335585"/>
+          </a:xfrm>
+          <a:prstGeom prst="line">
+            <a:avLst/>
+          </a:prstGeom>
+          <a:ln w="22860">
+            <a:solidFill>
+              <a:srgbClr val="0D7870"/>
+            </a:solidFill>
+          </a:ln>
+        </p:spPr>
+        <p:style>
+          <a:lnRef idx="2">
+            <a:schemeClr val="accent1"/>
+          </a:lnRef>
+          <a:fillRef idx="0">
+            <a:schemeClr val="accent1"/>
+          </a:fillRef>
+          <a:effectRef idx="1">
+            <a:schemeClr val="accent1"/>
+          </a:effectRef>
+          <a:fontRef idx="minor">
+            <a:schemeClr val="tx1"/>
+          </a:fontRef>
+        </p:style>
+      </p:cxnSp>
+      <p:cxnSp>
+        <p:nvCxnSpPr>
+          <p:cNvPr id="31" name="Connector 30"/>
+          <p:cNvCxnSpPr/>
+          <p:nvPr/>
+        </p:nvCxnSpPr>
+        <p:spPr>
+          <a:xfrm flipV="1">
+            <a:off x="7572375" y="2580093"/>
+            <a:ext cx="1231011" cy="377533"/>
+          </a:xfrm>
+          <a:prstGeom prst="line">
+            <a:avLst/>
+          </a:prstGeom>
+          <a:ln w="22860">
+            <a:solidFill>
+              <a:srgbClr val="0D7870"/>
+            </a:solidFill>
+          </a:ln>
+        </p:spPr>
+        <p:style>
+          <a:lnRef idx="2">
+            <a:schemeClr val="accent1"/>
+          </a:lnRef>
+          <a:fillRef idx="0">
+            <a:schemeClr val="accent1"/>
+          </a:fillRef>
+          <a:effectRef idx="1">
+            <a:schemeClr val="accent1"/>
+          </a:effectRef>
+          <a:fontRef idx="minor">
+            <a:schemeClr val="tx1"/>
+          </a:fontRef>
+        </p:style>
+      </p:cxnSp>
+      <p:cxnSp>
+        <p:nvCxnSpPr>
+          <p:cNvPr id="32" name="Connector 31"/>
+          <p:cNvCxnSpPr/>
+          <p:nvPr/>
+        </p:nvCxnSpPr>
+        <p:spPr>
+          <a:xfrm flipV="1">
+            <a:off x="8803386" y="2328405"/>
+            <a:ext cx="1231011" cy="251688"/>
+          </a:xfrm>
+          <a:prstGeom prst="line">
+            <a:avLst/>
+          </a:prstGeom>
+          <a:ln w="22860">
+            <a:solidFill>
+              <a:srgbClr val="0D7870"/>
+            </a:solidFill>
+          </a:ln>
+        </p:spPr>
+        <p:style>
+          <a:lnRef idx="2">
+            <a:schemeClr val="accent1"/>
+          </a:lnRef>
+          <a:fillRef idx="0">
+            <a:schemeClr val="accent1"/>
+          </a:fillRef>
+          <a:effectRef idx="1">
+            <a:schemeClr val="accent1"/>
+          </a:effectRef>
+          <a:fontRef idx="minor">
+            <a:schemeClr val="tx1"/>
+          </a:fontRef>
+        </p:style>
+      </p:cxnSp>
+      <p:cxnSp>
+        <p:nvCxnSpPr>
+          <p:cNvPr id="33" name="Connector 32"/>
+          <p:cNvCxnSpPr/>
+          <p:nvPr/>
+        </p:nvCxnSpPr>
+        <p:spPr>
+          <a:xfrm flipV="1">
+            <a:off x="10034397" y="2034768"/>
+            <a:ext cx="1231011" cy="293637"/>
+          </a:xfrm>
+          <a:prstGeom prst="line">
+            <a:avLst/>
+          </a:prstGeom>
+          <a:ln w="22860">
+            <a:solidFill>
+              <a:srgbClr val="0D7870"/>
+            </a:solidFill>
+          </a:ln>
+        </p:spPr>
+        <p:style>
+          <a:lnRef idx="2">
+            <a:schemeClr val="accent1"/>
+          </a:lnRef>
+          <a:fillRef idx="0">
+            <a:schemeClr val="accent1"/>
+          </a:fillRef>
+          <a:effectRef idx="1">
+            <a:schemeClr val="accent1"/>
+          </a:effectRef>
+          <a:fontRef idx="minor">
+            <a:schemeClr val="tx1"/>
+          </a:fontRef>
+        </p:style>
+      </p:cxnSp>
+      <p:sp>
+        <p:nvSpPr>
+          <p:cNvPr id="34" name="Oval 33"/>
+          <p:cNvSpPr/>
+          <p:nvPr/>
+        </p:nvSpPr>
+        <p:spPr>
+          <a:xfrm>
+            <a:off x="1371599" y="4589830"/>
+            <a:ext cx="91440" cy="91440"/>
+          </a:xfrm>
+          <a:prstGeom prst="ellipse">
+            <a:avLst/>
+          </a:prstGeom>
+          <a:solidFill>
+            <a:srgbClr val="0D7870"/>
+          </a:solidFill>
+          <a:ln w="7620">
+            <a:solidFill>
+              <a:srgbClr val="FFFFFC"/>
+            </a:solidFill>
+          </a:ln>
+        </p:spPr>
+        <p:style>
+          <a:lnRef idx="1">
+            <a:schemeClr val="accent1"/>
+          </a:lnRef>
+          <a:fillRef idx="3">
+            <a:schemeClr val="accent1"/>
+          </a:fillRef>
+          <a:effectRef idx="2">
+            <a:schemeClr val="accent1"/>
+          </a:effectRef>
+          <a:fontRef idx="minor">
+            <a:schemeClr val="lt1"/>
+          </a:fontRef>
+        </p:style>
+        <p:txBody>
+          <a:bodyPr rtlCol="0" anchor="ctr"/>
+          <a:lstStyle/>
+          <a:p>
+            <a:pPr algn="ctr"/>
+          </a:p>
+        </p:txBody>
+      </p:sp>
+      <p:sp>
+        <p:nvSpPr>
+          <p:cNvPr id="35" name="Oval 34"/>
+          <p:cNvSpPr/>
+          <p:nvPr/>
+        </p:nvSpPr>
+        <p:spPr>
+          <a:xfrm>
+            <a:off x="2602611" y="4338142"/>
+            <a:ext cx="91440" cy="91440"/>
+          </a:xfrm>
+          <a:prstGeom prst="ellipse">
+            <a:avLst/>
+          </a:prstGeom>
+          <a:solidFill>
+            <a:srgbClr val="0D7870"/>
+          </a:solidFill>
+          <a:ln w="7620">
+            <a:solidFill>
+              <a:srgbClr val="FFFFFC"/>
+            </a:solidFill>
+          </a:ln>
+        </p:spPr>
+        <p:style>
+          <a:lnRef idx="1">
+            <a:schemeClr val="accent1"/>
+          </a:lnRef>
+          <a:fillRef idx="3">
+            <a:schemeClr val="accent1"/>
+          </a:fillRef>
+          <a:effectRef idx="2">
+            <a:schemeClr val="accent1"/>
+          </a:effectRef>
+          <a:fontRef idx="minor">
+            <a:schemeClr val="lt1"/>
+          </a:fontRef>
+        </p:style>
+        <p:txBody>
+          <a:bodyPr rtlCol="0" anchor="ctr"/>
+          <a:lstStyle/>
+          <a:p>
+            <a:pPr algn="ctr"/>
+          </a:p>
+        </p:txBody>
+      </p:sp>
+      <p:sp>
+        <p:nvSpPr>
+          <p:cNvPr id="36" name="Oval 35"/>
+          <p:cNvSpPr/>
+          <p:nvPr/>
+        </p:nvSpPr>
+        <p:spPr>
+          <a:xfrm>
+            <a:off x="3833622" y="4044505"/>
+            <a:ext cx="91440" cy="91440"/>
+          </a:xfrm>
+          <a:prstGeom prst="ellipse">
+            <a:avLst/>
+          </a:prstGeom>
+          <a:solidFill>
+            <a:srgbClr val="0D7870"/>
+          </a:solidFill>
+          <a:ln w="7620">
+            <a:solidFill>
+              <a:srgbClr val="FFFFFC"/>
+            </a:solidFill>
+          </a:ln>
+        </p:spPr>
+        <p:style>
+          <a:lnRef idx="1">
+            <a:schemeClr val="accent1"/>
+          </a:lnRef>
+          <a:fillRef idx="3">
+            <a:schemeClr val="accent1"/>
+          </a:fillRef>
+          <a:effectRef idx="2">
+            <a:schemeClr val="accent1"/>
+          </a:effectRef>
+          <a:fontRef idx="minor">
+            <a:schemeClr val="lt1"/>
+          </a:fontRef>
+        </p:style>
+        <p:txBody>
+          <a:bodyPr rtlCol="0" anchor="ctr"/>
+          <a:lstStyle/>
+          <a:p>
+            <a:pPr algn="ctr"/>
+          </a:p>
+        </p:txBody>
+      </p:sp>
+      <p:sp>
+        <p:nvSpPr>
+          <p:cNvPr id="37" name="Oval 36"/>
+          <p:cNvSpPr/>
+          <p:nvPr/>
+        </p:nvSpPr>
+        <p:spPr>
+          <a:xfrm>
+            <a:off x="5064633" y="3792816"/>
+            <a:ext cx="91440" cy="91440"/>
+          </a:xfrm>
+          <a:prstGeom prst="ellipse">
+            <a:avLst/>
+          </a:prstGeom>
+          <a:solidFill>
+            <a:srgbClr val="0D7870"/>
+          </a:solidFill>
+          <a:ln w="7620">
+            <a:solidFill>
+              <a:srgbClr val="FFFFFC"/>
+            </a:solidFill>
+          </a:ln>
+        </p:spPr>
+        <p:style>
+          <a:lnRef idx="1">
+            <a:schemeClr val="accent1"/>
+          </a:lnRef>
+          <a:fillRef idx="3">
+            <a:schemeClr val="accent1"/>
+          </a:fillRef>
+          <a:effectRef idx="2">
+            <a:schemeClr val="accent1"/>
+          </a:effectRef>
+          <a:fontRef idx="minor">
+            <a:schemeClr val="lt1"/>
+          </a:fontRef>
+        </p:style>
+        <p:txBody>
+          <a:bodyPr rtlCol="0" anchor="ctr"/>
+          <a:lstStyle/>
+          <a:p>
+            <a:pPr algn="ctr"/>
+          </a:p>
+        </p:txBody>
+      </p:sp>
+      <p:sp>
+        <p:nvSpPr>
+          <p:cNvPr id="38" name="Oval 37"/>
+          <p:cNvSpPr/>
+          <p:nvPr/>
+        </p:nvSpPr>
+        <p:spPr>
+          <a:xfrm>
+            <a:off x="6295644" y="3247491"/>
+            <a:ext cx="91440" cy="91440"/>
+          </a:xfrm>
+          <a:prstGeom prst="ellipse">
+            <a:avLst/>
+          </a:prstGeom>
+          <a:solidFill>
+            <a:srgbClr val="0D7870"/>
+          </a:solidFill>
+          <a:ln w="7620">
+            <a:solidFill>
+              <a:srgbClr val="FFFFFC"/>
+            </a:solidFill>
+          </a:ln>
+        </p:spPr>
+        <p:style>
+          <a:lnRef idx="1">
+            <a:schemeClr val="accent1"/>
+          </a:lnRef>
+          <a:fillRef idx="3">
+            <a:schemeClr val="accent1"/>
+          </a:fillRef>
+          <a:effectRef idx="2">
+            <a:schemeClr val="accent1"/>
+          </a:effectRef>
+          <a:fontRef idx="minor">
+            <a:schemeClr val="lt1"/>
+          </a:fontRef>
+        </p:style>
+        <p:txBody>
+          <a:bodyPr rtlCol="0" anchor="ctr"/>
+          <a:lstStyle/>
+          <a:p>
+            <a:pPr algn="ctr"/>
+          </a:p>
+        </p:txBody>
+      </p:sp>
+      <p:sp>
+        <p:nvSpPr>
+          <p:cNvPr id="39" name="Oval 38"/>
+          <p:cNvSpPr/>
+          <p:nvPr/>
+        </p:nvSpPr>
+        <p:spPr>
+          <a:xfrm>
+            <a:off x="7526654" y="2911906"/>
+            <a:ext cx="91440" cy="91440"/>
+          </a:xfrm>
+          <a:prstGeom prst="ellipse">
+            <a:avLst/>
+          </a:prstGeom>
+          <a:solidFill>
+            <a:srgbClr val="0D7870"/>
+          </a:solidFill>
+          <a:ln w="7620">
+            <a:solidFill>
+              <a:srgbClr val="FFFFFC"/>
+            </a:solidFill>
+          </a:ln>
+        </p:spPr>
+        <p:style>
+          <a:lnRef idx="1">
+            <a:schemeClr val="accent1"/>
+          </a:lnRef>
+          <a:fillRef idx="3">
+            <a:schemeClr val="accent1"/>
+          </a:fillRef>
+          <a:effectRef idx="2">
+            <a:schemeClr val="accent1"/>
+          </a:effectRef>
+          <a:fontRef idx="minor">
+            <a:schemeClr val="lt1"/>
+          </a:fontRef>
+        </p:style>
+        <p:txBody>
+          <a:bodyPr rtlCol="0" anchor="ctr"/>
+          <a:lstStyle/>
+          <a:p>
+            <a:pPr algn="ctr"/>
+          </a:p>
+        </p:txBody>
+      </p:sp>
+      <p:sp>
+        <p:nvSpPr>
+          <p:cNvPr id="40" name="Oval 39"/>
+          <p:cNvSpPr/>
+          <p:nvPr/>
+        </p:nvSpPr>
+        <p:spPr>
+          <a:xfrm>
+            <a:off x="8757666" y="2534373"/>
+            <a:ext cx="91440" cy="91440"/>
+          </a:xfrm>
+          <a:prstGeom prst="ellipse">
+            <a:avLst/>
+          </a:prstGeom>
+          <a:solidFill>
+            <a:srgbClr val="0D7870"/>
+          </a:solidFill>
+          <a:ln w="7620">
+            <a:solidFill>
+              <a:srgbClr val="FFFFFC"/>
+            </a:solidFill>
+          </a:ln>
+        </p:spPr>
+        <p:style>
+          <a:lnRef idx="1">
+            <a:schemeClr val="accent1"/>
+          </a:lnRef>
+          <a:fillRef idx="3">
+            <a:schemeClr val="accent1"/>
+          </a:fillRef>
+          <a:effectRef idx="2">
+            <a:schemeClr val="accent1"/>
+          </a:effectRef>
+          <a:fontRef idx="minor">
+            <a:schemeClr val="lt1"/>
+          </a:fontRef>
+        </p:style>
+        <p:txBody>
+          <a:bodyPr rtlCol="0" anchor="ctr"/>
+          <a:lstStyle/>
+          <a:p>
+            <a:pPr algn="ctr"/>
+          </a:p>
+        </p:txBody>
+      </p:sp>
+      <p:sp>
+        <p:nvSpPr>
+          <p:cNvPr id="41" name="Oval 40"/>
+          <p:cNvSpPr/>
+          <p:nvPr/>
+        </p:nvSpPr>
+        <p:spPr>
+          <a:xfrm>
+            <a:off x="9988677" y="2282685"/>
+            <a:ext cx="91440" cy="91440"/>
+          </a:xfrm>
+          <a:prstGeom prst="ellipse">
+            <a:avLst/>
+          </a:prstGeom>
+          <a:solidFill>
+            <a:srgbClr val="0D7870"/>
+          </a:solidFill>
+          <a:ln w="7620">
+            <a:solidFill>
+              <a:srgbClr val="FFFFFC"/>
+            </a:solidFill>
+          </a:ln>
+        </p:spPr>
+        <p:style>
+          <a:lnRef idx="1">
+            <a:schemeClr val="accent1"/>
+          </a:lnRef>
+          <a:fillRef idx="3">
+            <a:schemeClr val="accent1"/>
+          </a:fillRef>
+          <a:effectRef idx="2">
+            <a:schemeClr val="accent1"/>
+          </a:effectRef>
+          <a:fontRef idx="minor">
+            <a:schemeClr val="lt1"/>
+          </a:fontRef>
+        </p:style>
+        <p:txBody>
+          <a:bodyPr rtlCol="0" anchor="ctr"/>
+          <a:lstStyle/>
+          <a:p>
+            <a:pPr algn="ctr"/>
+          </a:p>
+        </p:txBody>
+      </p:sp>
+      <p:sp>
+        <p:nvSpPr>
+          <p:cNvPr id="42" name="Oval 41"/>
+          <p:cNvSpPr/>
+          <p:nvPr/>
+        </p:nvSpPr>
+        <p:spPr>
+          <a:xfrm>
+            <a:off x="11219688" y="1989048"/>
+            <a:ext cx="91440" cy="91440"/>
+          </a:xfrm>
+          <a:prstGeom prst="ellipse">
+            <a:avLst/>
+          </a:prstGeom>
+          <a:solidFill>
+            <a:srgbClr val="0D7870"/>
+          </a:solidFill>
+          <a:ln w="7620">
+            <a:solidFill>
+              <a:srgbClr val="FFFFFC"/>
+            </a:solidFill>
+          </a:ln>
+        </p:spPr>
+        <p:style>
+          <a:lnRef idx="1">
+            <a:schemeClr val="accent1"/>
+          </a:lnRef>
+          <a:fillRef idx="3">
+            <a:schemeClr val="accent1"/>
+          </a:fillRef>
+          <a:effectRef idx="2">
+            <a:schemeClr val="accent1"/>
+          </a:effectRef>
+          <a:fontRef idx="minor">
+            <a:schemeClr val="lt1"/>
+          </a:fontRef>
+        </p:style>
+        <p:txBody>
+          <a:bodyPr rtlCol="0" anchor="ctr"/>
+          <a:lstStyle/>
+          <a:p>
+            <a:pPr algn="ctr"/>
+          </a:p>
+        </p:txBody>
+      </p:sp>
+      <p:cxnSp>
+        <p:nvCxnSpPr>
+          <p:cNvPr id="43" name="Connector 42"/>
+          <p:cNvCxnSpPr/>
+          <p:nvPr/>
+        </p:nvCxnSpPr>
+        <p:spPr>
+          <a:xfrm flipV="1">
+            <a:off x="1417319" y="4090225"/>
+            <a:ext cx="1231012" cy="209741"/>
+          </a:xfrm>
+          <a:prstGeom prst="line">
+            <a:avLst/>
+          </a:prstGeom>
+          <a:ln w="22860">
+            <a:solidFill>
+              <a:srgbClr val="182C43"/>
+            </a:solidFill>
+          </a:ln>
+        </p:spPr>
+        <p:style>
+          <a:lnRef idx="2">
+            <a:schemeClr val="accent1"/>
+          </a:lnRef>
+          <a:fillRef idx="0">
+            <a:schemeClr val="accent1"/>
+          </a:fillRef>
+          <a:effectRef idx="1">
+            <a:schemeClr val="accent1"/>
+          </a:effectRef>
+          <a:fontRef idx="minor">
+            <a:schemeClr val="tx1"/>
+          </a:fontRef>
+        </p:style>
+      </p:cxnSp>
+      <p:cxnSp>
+        <p:nvCxnSpPr>
+          <p:cNvPr id="44" name="Connector 43"/>
+          <p:cNvCxnSpPr/>
+          <p:nvPr/>
+        </p:nvCxnSpPr>
+        <p:spPr>
+          <a:xfrm flipV="1">
+            <a:off x="2648331" y="3880484"/>
+            <a:ext cx="1231010" cy="209741"/>
+          </a:xfrm>
+          <a:prstGeom prst="line">
+            <a:avLst/>
+          </a:prstGeom>
+          <a:ln w="22860">
+            <a:solidFill>
+              <a:srgbClr val="182C43"/>
+            </a:solidFill>
+          </a:ln>
+        </p:spPr>
+        <p:style>
+          <a:lnRef idx="2">
+            <a:schemeClr val="accent1"/>
+          </a:lnRef>
+          <a:fillRef idx="0">
+            <a:schemeClr val="accent1"/>
+          </a:fillRef>
+          <a:effectRef idx="1">
+            <a:schemeClr val="accent1"/>
+          </a:effectRef>
+          <a:fontRef idx="minor">
+            <a:schemeClr val="tx1"/>
+          </a:fontRef>
+        </p:style>
+      </p:cxnSp>
+      <p:cxnSp>
+        <p:nvCxnSpPr>
+          <p:cNvPr id="45" name="Connector 44"/>
+          <p:cNvCxnSpPr/>
+          <p:nvPr/>
+        </p:nvCxnSpPr>
+        <p:spPr>
+          <a:xfrm flipV="1">
+            <a:off x="3879341" y="3670744"/>
+            <a:ext cx="1231012" cy="209740"/>
+          </a:xfrm>
+          <a:prstGeom prst="line">
+            <a:avLst/>
+          </a:prstGeom>
+          <a:ln w="22860">
+            <a:solidFill>
+              <a:srgbClr val="182C43"/>
+            </a:solidFill>
+          </a:ln>
+        </p:spPr>
+        <p:style>
+          <a:lnRef idx="2">
+            <a:schemeClr val="accent1"/>
+          </a:lnRef>
+          <a:fillRef idx="0">
+            <a:schemeClr val="accent1"/>
+          </a:fillRef>
+          <a:effectRef idx="1">
+            <a:schemeClr val="accent1"/>
+          </a:effectRef>
+          <a:fontRef idx="minor">
+            <a:schemeClr val="tx1"/>
+          </a:fontRef>
+        </p:style>
+      </p:cxnSp>
+      <p:cxnSp>
+        <p:nvCxnSpPr>
+          <p:cNvPr id="46" name="Connector 45"/>
+          <p:cNvCxnSpPr/>
+          <p:nvPr/>
+        </p:nvCxnSpPr>
+        <p:spPr>
+          <a:xfrm flipV="1">
+            <a:off x="5110353" y="3461003"/>
+            <a:ext cx="1231011" cy="209741"/>
+          </a:xfrm>
+          <a:prstGeom prst="line">
+            <a:avLst/>
+          </a:prstGeom>
+          <a:ln w="22860">
+            <a:solidFill>
+              <a:srgbClr val="182C43"/>
+            </a:solidFill>
+          </a:ln>
+        </p:spPr>
+        <p:style>
+          <a:lnRef idx="2">
+            <a:schemeClr val="accent1"/>
+          </a:lnRef>
+          <a:fillRef idx="0">
+            <a:schemeClr val="accent1"/>
+          </a:fillRef>
+          <a:effectRef idx="1">
+            <a:schemeClr val="accent1"/>
+          </a:effectRef>
+          <a:fontRef idx="minor">
+            <a:schemeClr val="tx1"/>
+          </a:fontRef>
+        </p:style>
+      </p:cxnSp>
+      <p:cxnSp>
+        <p:nvCxnSpPr>
+          <p:cNvPr id="47" name="Connector 46"/>
+          <p:cNvCxnSpPr/>
+          <p:nvPr/>
+        </p:nvCxnSpPr>
+        <p:spPr>
+          <a:xfrm flipV="1">
+            <a:off x="6341364" y="3041522"/>
+            <a:ext cx="1231011" cy="419481"/>
+          </a:xfrm>
+          <a:prstGeom prst="line">
+            <a:avLst/>
+          </a:prstGeom>
+          <a:ln w="22860">
+            <a:solidFill>
+              <a:srgbClr val="182C43"/>
+            </a:solidFill>
+          </a:ln>
+        </p:spPr>
+        <p:style>
+          <a:lnRef idx="2">
+            <a:schemeClr val="accent1"/>
+          </a:lnRef>
+          <a:fillRef idx="0">
+            <a:schemeClr val="accent1"/>
+          </a:fillRef>
+          <a:effectRef idx="1">
+            <a:schemeClr val="accent1"/>
+          </a:effectRef>
+          <a:fontRef idx="minor">
+            <a:schemeClr val="tx1"/>
+          </a:fontRef>
+        </p:style>
+      </p:cxnSp>
+      <p:cxnSp>
+        <p:nvCxnSpPr>
+          <p:cNvPr id="48" name="Connector 47"/>
+          <p:cNvCxnSpPr/>
+          <p:nvPr/>
+        </p:nvCxnSpPr>
+        <p:spPr>
+          <a:xfrm flipV="1">
+            <a:off x="7572375" y="2622041"/>
+            <a:ext cx="1231011" cy="419481"/>
+          </a:xfrm>
+          <a:prstGeom prst="line">
+            <a:avLst/>
+          </a:prstGeom>
+          <a:ln w="22860">
+            <a:solidFill>
+              <a:srgbClr val="182C43"/>
+            </a:solidFill>
+          </a:ln>
+        </p:spPr>
+        <p:style>
+          <a:lnRef idx="2">
+            <a:schemeClr val="accent1"/>
+          </a:lnRef>
+          <a:fillRef idx="0">
+            <a:schemeClr val="accent1"/>
+          </a:fillRef>
+          <a:effectRef idx="1">
+            <a:schemeClr val="accent1"/>
+          </a:effectRef>
+          <a:fontRef idx="minor">
+            <a:schemeClr val="tx1"/>
+          </a:fontRef>
+        </p:style>
+      </p:cxnSp>
+      <p:cxnSp>
+        <p:nvCxnSpPr>
+          <p:cNvPr id="49" name="Connector 48"/>
+          <p:cNvCxnSpPr/>
+          <p:nvPr/>
+        </p:nvCxnSpPr>
+        <p:spPr>
+          <a:xfrm flipV="1">
+            <a:off x="8803386" y="2202560"/>
+            <a:ext cx="1231011" cy="419481"/>
+          </a:xfrm>
+          <a:prstGeom prst="line">
+            <a:avLst/>
+          </a:prstGeom>
+          <a:ln w="22860">
+            <a:solidFill>
+              <a:srgbClr val="182C43"/>
+            </a:solidFill>
+          </a:ln>
+        </p:spPr>
+        <p:style>
+          <a:lnRef idx="2">
+            <a:schemeClr val="accent1"/>
+          </a:lnRef>
+          <a:fillRef idx="0">
+            <a:schemeClr val="accent1"/>
+          </a:fillRef>
+          <a:effectRef idx="1">
+            <a:schemeClr val="accent1"/>
+          </a:effectRef>
+          <a:fontRef idx="minor">
+            <a:schemeClr val="tx1"/>
+          </a:fontRef>
+        </p:style>
+      </p:cxnSp>
+      <p:cxnSp>
+        <p:nvCxnSpPr>
+          <p:cNvPr id="50" name="Connector 49"/>
+          <p:cNvCxnSpPr/>
+          <p:nvPr/>
+        </p:nvCxnSpPr>
+        <p:spPr>
+          <a:xfrm flipV="1">
+            <a:off x="10034397" y="1783079"/>
+            <a:ext cx="1231011" cy="419481"/>
+          </a:xfrm>
+          <a:prstGeom prst="line">
+            <a:avLst/>
+          </a:prstGeom>
+          <a:ln w="22860">
+            <a:solidFill>
+              <a:srgbClr val="182C43"/>
+            </a:solidFill>
+          </a:ln>
+        </p:spPr>
+        <p:style>
+          <a:lnRef idx="2">
+            <a:schemeClr val="accent1"/>
+          </a:lnRef>
+          <a:fillRef idx="0">
+            <a:schemeClr val="accent1"/>
+          </a:fillRef>
+          <a:effectRef idx="1">
+            <a:schemeClr val="accent1"/>
+          </a:effectRef>
+          <a:fontRef idx="minor">
+            <a:schemeClr val="tx1"/>
+          </a:fontRef>
+        </p:style>
+      </p:cxnSp>
+      <p:sp>
+        <p:nvSpPr>
+          <p:cNvPr id="51" name="Oval 50"/>
+          <p:cNvSpPr/>
+          <p:nvPr/>
+        </p:nvSpPr>
+        <p:spPr>
+          <a:xfrm>
+            <a:off x="1371599" y="4254246"/>
+            <a:ext cx="91440" cy="91440"/>
+          </a:xfrm>
+          <a:prstGeom prst="ellipse">
+            <a:avLst/>
+          </a:prstGeom>
+          <a:solidFill>
+            <a:srgbClr val="182C43"/>
+          </a:solidFill>
+          <a:ln w="7620">
+            <a:solidFill>
+              <a:srgbClr val="FFFFFC"/>
+            </a:solidFill>
+          </a:ln>
+        </p:spPr>
+        <p:style>
+          <a:lnRef idx="1">
+            <a:schemeClr val="accent1"/>
+          </a:lnRef>
+          <a:fillRef idx="3">
+            <a:schemeClr val="accent1"/>
+          </a:fillRef>
+          <a:effectRef idx="2">
+            <a:schemeClr val="accent1"/>
+          </a:effectRef>
+          <a:fontRef idx="minor">
+            <a:schemeClr val="lt1"/>
+          </a:fontRef>
+        </p:style>
+        <p:txBody>
+          <a:bodyPr rtlCol="0" anchor="ctr"/>
+          <a:lstStyle/>
+          <a:p>
+            <a:pPr algn="ctr"/>
+          </a:p>
+        </p:txBody>
+      </p:sp>
+      <p:sp>
+        <p:nvSpPr>
+          <p:cNvPr id="52" name="Oval 51"/>
+          <p:cNvSpPr/>
+          <p:nvPr/>
+        </p:nvSpPr>
+        <p:spPr>
+          <a:xfrm>
+            <a:off x="2602611" y="4044505"/>
+            <a:ext cx="91440" cy="91440"/>
+          </a:xfrm>
+          <a:prstGeom prst="ellipse">
+            <a:avLst/>
+          </a:prstGeom>
+          <a:solidFill>
+            <a:srgbClr val="182C43"/>
+          </a:solidFill>
+          <a:ln w="7620">
+            <a:solidFill>
+              <a:srgbClr val="FFFFFC"/>
+            </a:solidFill>
+          </a:ln>
+        </p:spPr>
+        <p:style>
+          <a:lnRef idx="1">
+            <a:schemeClr val="accent1"/>
+          </a:lnRef>
+          <a:fillRef idx="3">
+            <a:schemeClr val="accent1"/>
+          </a:fillRef>
+          <a:effectRef idx="2">
+            <a:schemeClr val="accent1"/>
+          </a:effectRef>
+          <a:fontRef idx="minor">
+            <a:schemeClr val="lt1"/>
+          </a:fontRef>
+        </p:style>
+        <p:txBody>
+          <a:bodyPr rtlCol="0" anchor="ctr"/>
+          <a:lstStyle/>
+          <a:p>
+            <a:pPr algn="ctr"/>
+          </a:p>
+        </p:txBody>
+      </p:sp>
+      <p:sp>
+        <p:nvSpPr>
+          <p:cNvPr id="53" name="Oval 52"/>
+          <p:cNvSpPr/>
+          <p:nvPr/>
+        </p:nvSpPr>
+        <p:spPr>
+          <a:xfrm>
+            <a:off x="3833622" y="3834764"/>
+            <a:ext cx="91440" cy="91440"/>
+          </a:xfrm>
+          <a:prstGeom prst="ellipse">
+            <a:avLst/>
+          </a:prstGeom>
+          <a:solidFill>
+            <a:srgbClr val="182C43"/>
+          </a:solidFill>
+          <a:ln w="7620">
+            <a:solidFill>
+              <a:srgbClr val="FFFFFC"/>
+            </a:solidFill>
+          </a:ln>
+        </p:spPr>
+        <p:style>
+          <a:lnRef idx="1">
+            <a:schemeClr val="accent1"/>
+          </a:lnRef>
+          <a:fillRef idx="3">
+            <a:schemeClr val="accent1"/>
+          </a:fillRef>
+          <a:effectRef idx="2">
+            <a:schemeClr val="accent1"/>
+          </a:effectRef>
+          <a:fontRef idx="minor">
+            <a:schemeClr val="lt1"/>
+          </a:fontRef>
+        </p:style>
+        <p:txBody>
+          <a:bodyPr rtlCol="0" anchor="ctr"/>
+          <a:lstStyle/>
+          <a:p>
+            <a:pPr algn="ctr"/>
+          </a:p>
+        </p:txBody>
+      </p:sp>
+      <p:sp>
+        <p:nvSpPr>
+          <p:cNvPr id="54" name="Oval 53"/>
+          <p:cNvSpPr/>
+          <p:nvPr/>
+        </p:nvSpPr>
+        <p:spPr>
+          <a:xfrm>
+            <a:off x="5064633" y="3625024"/>
+            <a:ext cx="91440" cy="91440"/>
+          </a:xfrm>
+          <a:prstGeom prst="ellipse">
+            <a:avLst/>
+          </a:prstGeom>
+          <a:solidFill>
+            <a:srgbClr val="182C43"/>
+          </a:solidFill>
+          <a:ln w="7620">
+            <a:solidFill>
+              <a:srgbClr val="FFFFFC"/>
+            </a:solidFill>
+          </a:ln>
+        </p:spPr>
+        <p:style>
+          <a:lnRef idx="1">
+            <a:schemeClr val="accent1"/>
+          </a:lnRef>
+          <a:fillRef idx="3">
+            <a:schemeClr val="accent1"/>
+          </a:fillRef>
+          <a:effectRef idx="2">
+            <a:schemeClr val="accent1"/>
+          </a:effectRef>
+          <a:fontRef idx="minor">
+            <a:schemeClr val="lt1"/>
+          </a:fontRef>
+        </p:style>
+        <p:txBody>
+          <a:bodyPr rtlCol="0" anchor="ctr"/>
+          <a:lstStyle/>
+          <a:p>
+            <a:pPr algn="ctr"/>
+          </a:p>
+        </p:txBody>
+      </p:sp>
+      <p:sp>
+        <p:nvSpPr>
+          <p:cNvPr id="55" name="Oval 54"/>
+          <p:cNvSpPr/>
+          <p:nvPr/>
+        </p:nvSpPr>
+        <p:spPr>
+          <a:xfrm>
+            <a:off x="6295644" y="3415283"/>
+            <a:ext cx="91440" cy="91440"/>
+          </a:xfrm>
+          <a:prstGeom prst="ellipse">
+            <a:avLst/>
+          </a:prstGeom>
+          <a:solidFill>
+            <a:srgbClr val="182C43"/>
+          </a:solidFill>
+          <a:ln w="7620">
+            <a:solidFill>
+              <a:srgbClr val="FFFFFC"/>
+            </a:solidFill>
+          </a:ln>
+        </p:spPr>
+        <p:style>
+          <a:lnRef idx="1">
+            <a:schemeClr val="accent1"/>
+          </a:lnRef>
+          <a:fillRef idx="3">
+            <a:schemeClr val="accent1"/>
+          </a:fillRef>
+          <a:effectRef idx="2">
+            <a:schemeClr val="accent1"/>
+          </a:effectRef>
+          <a:fontRef idx="minor">
+            <a:schemeClr val="lt1"/>
+          </a:fontRef>
+        </p:style>
+        <p:txBody>
+          <a:bodyPr rtlCol="0" anchor="ctr"/>
+          <a:lstStyle/>
+          <a:p>
+            <a:pPr algn="ctr"/>
+          </a:p>
+        </p:txBody>
+      </p:sp>
+      <p:sp>
+        <p:nvSpPr>
+          <p:cNvPr id="56" name="Oval 55"/>
+          <p:cNvSpPr/>
+          <p:nvPr/>
+        </p:nvSpPr>
+        <p:spPr>
+          <a:xfrm>
+            <a:off x="7526654" y="2995802"/>
+            <a:ext cx="91440" cy="91440"/>
+          </a:xfrm>
+          <a:prstGeom prst="ellipse">
+            <a:avLst/>
+          </a:prstGeom>
+          <a:solidFill>
+            <a:srgbClr val="182C43"/>
+          </a:solidFill>
+          <a:ln w="7620">
+            <a:solidFill>
+              <a:srgbClr val="FFFFFC"/>
+            </a:solidFill>
+          </a:ln>
+        </p:spPr>
+        <p:style>
+          <a:lnRef idx="1">
+            <a:schemeClr val="accent1"/>
+          </a:lnRef>
+          <a:fillRef idx="3">
+            <a:schemeClr val="accent1"/>
+          </a:fillRef>
+          <a:effectRef idx="2">
+            <a:schemeClr val="accent1"/>
+          </a:effectRef>
+          <a:fontRef idx="minor">
+            <a:schemeClr val="lt1"/>
+          </a:fontRef>
+        </p:style>
+        <p:txBody>
+          <a:bodyPr rtlCol="0" anchor="ctr"/>
+          <a:lstStyle/>
+          <a:p>
+            <a:pPr algn="ctr"/>
+          </a:p>
+        </p:txBody>
+      </p:sp>
+      <p:sp>
+        <p:nvSpPr>
+          <p:cNvPr id="57" name="Oval 56"/>
+          <p:cNvSpPr/>
+          <p:nvPr/>
+        </p:nvSpPr>
+        <p:spPr>
+          <a:xfrm>
+            <a:off x="8757666" y="2576322"/>
+            <a:ext cx="91440" cy="91440"/>
+          </a:xfrm>
+          <a:prstGeom prst="ellipse">
+            <a:avLst/>
+          </a:prstGeom>
+          <a:solidFill>
+            <a:srgbClr val="182C43"/>
+          </a:solidFill>
+          <a:ln w="7620">
+            <a:solidFill>
+              <a:srgbClr val="FFFFFC"/>
+            </a:solidFill>
+          </a:ln>
+        </p:spPr>
+        <p:style>
+          <a:lnRef idx="1">
+            <a:schemeClr val="accent1"/>
+          </a:lnRef>
+          <a:fillRef idx="3">
+            <a:schemeClr val="accent1"/>
+          </a:fillRef>
+          <a:effectRef idx="2">
+            <a:schemeClr val="accent1"/>
+          </a:effectRef>
+          <a:fontRef idx="minor">
+            <a:schemeClr val="lt1"/>
+          </a:fontRef>
+        </p:style>
+        <p:txBody>
+          <a:bodyPr rtlCol="0" anchor="ctr"/>
+          <a:lstStyle/>
+          <a:p>
+            <a:pPr algn="ctr"/>
+          </a:p>
+        </p:txBody>
+      </p:sp>
+      <p:sp>
+        <p:nvSpPr>
+          <p:cNvPr id="58" name="Oval 57"/>
+          <p:cNvSpPr/>
+          <p:nvPr/>
+        </p:nvSpPr>
+        <p:spPr>
+          <a:xfrm>
+            <a:off x="9988677" y="2156840"/>
+            <a:ext cx="91440" cy="91440"/>
+          </a:xfrm>
+          <a:prstGeom prst="ellipse">
+            <a:avLst/>
+          </a:prstGeom>
+          <a:solidFill>
+            <a:srgbClr val="182C43"/>
+          </a:solidFill>
+          <a:ln w="7620">
+            <a:solidFill>
+              <a:srgbClr val="FFFFFC"/>
+            </a:solidFill>
+          </a:ln>
+        </p:spPr>
+        <p:style>
+          <a:lnRef idx="1">
+            <a:schemeClr val="accent1"/>
+          </a:lnRef>
+          <a:fillRef idx="3">
+            <a:schemeClr val="accent1"/>
+          </a:fillRef>
+          <a:effectRef idx="2">
+            <a:schemeClr val="accent1"/>
+          </a:effectRef>
+          <a:fontRef idx="minor">
+            <a:schemeClr val="lt1"/>
+          </a:fontRef>
+        </p:style>
+        <p:txBody>
+          <a:bodyPr rtlCol="0" anchor="ctr"/>
+          <a:lstStyle/>
+          <a:p>
+            <a:pPr algn="ctr"/>
+          </a:p>
+        </p:txBody>
+      </p:sp>
+      <p:sp>
+        <p:nvSpPr>
+          <p:cNvPr id="59" name="Oval 58"/>
+          <p:cNvSpPr/>
+          <p:nvPr/>
+        </p:nvSpPr>
+        <p:spPr>
+          <a:xfrm>
+            <a:off x="11219688" y="1737359"/>
+            <a:ext cx="91440" cy="91440"/>
+          </a:xfrm>
+          <a:prstGeom prst="ellipse">
+            <a:avLst/>
+          </a:prstGeom>
+          <a:solidFill>
+            <a:srgbClr val="182C43"/>
+          </a:solidFill>
+          <a:ln w="7620">
+            <a:solidFill>
+              <a:srgbClr val="FFFFFC"/>
+            </a:solidFill>
+          </a:ln>
+        </p:spPr>
+        <p:style>
+          <a:lnRef idx="1">
+            <a:schemeClr val="accent1"/>
+          </a:lnRef>
+          <a:fillRef idx="3">
+            <a:schemeClr val="accent1"/>
+          </a:fillRef>
+          <a:effectRef idx="2">
+            <a:schemeClr val="accent1"/>
+          </a:effectRef>
+          <a:fontRef idx="minor">
+            <a:schemeClr val="lt1"/>
+          </a:fontRef>
+        </p:style>
+        <p:txBody>
+          <a:bodyPr rtlCol="0" anchor="ctr"/>
+          <a:lstStyle/>
+          <a:p>
+            <a:pPr algn="ctr"/>
+          </a:p>
+        </p:txBody>
+      </p:sp>
+      <p:sp>
+        <p:nvSpPr>
+          <p:cNvPr id="60" name="Rectangle 59"/>
+          <p:cNvSpPr/>
+          <p:nvPr/>
+        </p:nvSpPr>
+        <p:spPr>
+          <a:xfrm>
+            <a:off x="1435607" y="5788152"/>
+            <a:ext cx="109728" cy="109728"/>
+          </a:xfrm>
+          <a:prstGeom prst="rect">
+            <a:avLst/>
+          </a:prstGeom>
+          <a:solidFill>
+            <a:srgbClr val="0D7870"/>
+          </a:solidFill>
+          <a:ln>
+            <a:noFill/>
+          </a:ln>
+          <a:effectLst/>
+        </p:spPr>
+        <p:style>
+          <a:lnRef idx="1">
+            <a:schemeClr val="accent1"/>
+          </a:lnRef>
+          <a:fillRef idx="3">
+            <a:schemeClr val="accent1"/>
+          </a:fillRef>
+          <a:effectRef idx="2">
+            <a:schemeClr val="accent1"/>
+          </a:effectRef>
+          <a:fontRef idx="minor">
+            <a:schemeClr val="lt1"/>
+          </a:fontRef>
+        </p:style>
+        <p:txBody>
+          <a:bodyPr rtlCol="0" anchor="ctr"/>
+          <a:lstStyle/>
+          <a:p>
+            <a:pPr algn="ctr"/>
+          </a:p>
+        </p:txBody>
+      </p:sp>
+      <p:sp>
+        <p:nvSpPr>
+          <p:cNvPr id="61" name="TextBox 60"/>
+          <p:cNvSpPr txBox="1"/>
+          <p:nvPr/>
+        </p:nvSpPr>
+        <p:spPr>
+          <a:xfrm>
+            <a:off x="1600199" y="5724144"/>
+            <a:ext cx="1572768" cy="237744"/>
+          </a:xfrm>
+          <a:prstGeom prst="rect">
+            <a:avLst/>
+          </a:prstGeom>
+          <a:noFill/>
+        </p:spPr>
+        <p:txBody>
+          <a:bodyPr wrap="square" anchor="t" lIns="0" rIns="0" tIns="0" bIns="0">
+            <a:spAutoFit/>
+          </a:bodyPr>
+          <a:lstStyle/>
+          <a:p>
+            <a:pPr algn="l">
+              <a:lnSpc>
+                <a:spcPct val="130000"/>
+              </a:lnSpc>
+            </a:pPr>
+            <a:r>
+              <a:rPr sz="819" b="0" lang="ja-JP">
+                <a:solidFill>
+                  <a:srgbClr val="666E70"/>
+                </a:solidFill>
+                <a:latin typeface="Yu Gothic"/>
+                <a:ea typeface="Yu Gothic"/>
+                <a:cs typeface="Yu Gothic"/>
+              </a:rPr>
+              <a:t>利用率</a:t>
+            </a:r>
+          </a:p>
+        </p:txBody>
+      </p:sp>
+      <p:sp>
+        <p:nvSpPr>
+          <p:cNvPr id="62" name="Rectangle 61"/>
+          <p:cNvSpPr/>
+          <p:nvPr/>
+        </p:nvSpPr>
+        <p:spPr>
+          <a:xfrm>
+            <a:off x="3310127" y="5788152"/>
+            <a:ext cx="109728" cy="109728"/>
+          </a:xfrm>
+          <a:prstGeom prst="rect">
+            <a:avLst/>
+          </a:prstGeom>
+          <a:solidFill>
+            <a:srgbClr val="182C43"/>
+          </a:solidFill>
+          <a:ln>
+            <a:noFill/>
+          </a:ln>
+          <a:effectLst/>
+        </p:spPr>
+        <p:style>
+          <a:lnRef idx="1">
+            <a:schemeClr val="accent1"/>
+          </a:lnRef>
+          <a:fillRef idx="3">
+            <a:schemeClr val="accent1"/>
+          </a:fillRef>
+          <a:effectRef idx="2">
+            <a:schemeClr val="accent1"/>
+          </a:effectRef>
+          <a:fontRef idx="minor">
+            <a:schemeClr val="lt1"/>
+          </a:fontRef>
+        </p:style>
+        <p:txBody>
+          <a:bodyPr rtlCol="0" anchor="ctr"/>
+          <a:lstStyle/>
+          <a:p>
+            <a:pPr algn="ctr"/>
+          </a:p>
+        </p:txBody>
+      </p:sp>
+      <p:sp>
+        <p:nvSpPr>
+          <p:cNvPr id="63" name="TextBox 62"/>
+          <p:cNvSpPr txBox="1"/>
+          <p:nvPr/>
+        </p:nvSpPr>
+        <p:spPr>
+          <a:xfrm>
+            <a:off x="3474720" y="5724144"/>
+            <a:ext cx="1572768" cy="237744"/>
+          </a:xfrm>
+          <a:prstGeom prst="rect">
+            <a:avLst/>
+          </a:prstGeom>
+          <a:noFill/>
+        </p:spPr>
+        <p:txBody>
+          <a:bodyPr wrap="square" anchor="t" lIns="0" rIns="0" tIns="0" bIns="0">
+            <a:spAutoFit/>
+          </a:bodyPr>
+          <a:lstStyle/>
+          <a:p>
+            <a:pPr algn="l">
+              <a:lnSpc>
+                <a:spcPct val="130000"/>
+              </a:lnSpc>
+            </a:pPr>
+            <a:r>
+              <a:rPr sz="819" b="0" lang="ja-JP">
+                <a:solidFill>
+                  <a:srgbClr val="666E70"/>
+                </a:solidFill>
+                <a:latin typeface="Yu Gothic"/>
+                <a:ea typeface="Yu Gothic"/>
+                <a:cs typeface="Yu Gothic"/>
+              </a:rPr>
+              <a:t>目標</a:t>
+            </a:r>
+          </a:p>
+        </p:txBody>
+      </p:sp>
+      <p:sp>
+        <p:nvSpPr>
+          <p:cNvPr id="64" name="TextBox 63"/>
           <p:cNvSpPr txBox="1"/>
           <p:nvPr/>
         </p:nvSpPr>
@@ -4599,7 +6144,7 @@
       </p:sp>
       <p:sp>
         <p:nvSpPr>
-          <p:cNvPr id="7" name="Rectangle 6"/>
+          <p:cNvPr id="65" name="Rectangle 64"/>
           <p:cNvSpPr/>
           <p:nvPr/>
         </p:nvSpPr>
@@ -4643,7 +6188,7 @@
       </p:sp>
       <p:sp>
         <p:nvSpPr>
-          <p:cNvPr id="8" name="TextBox 7"/>
+          <p:cNvPr id="66" name="TextBox 65"/>
           <p:cNvSpPr txBox="1"/>
           <p:nvPr/>
         </p:nvSpPr>
@@ -4684,7 +6229,7 @@
       </p:sp>
       <p:sp>
         <p:nvSpPr>
-          <p:cNvPr id="9" name="TextBox 8"/>
+          <p:cNvPr id="67" name="TextBox 66"/>
           <p:cNvSpPr txBox="1"/>
           <p:nvPr/>
         </p:nvSpPr>
@@ -4878,27 +6423,1233 @@
           </a:p>
         </p:txBody>
       </p:sp>
-      <p:graphicFrame>
-        <p:nvGraphicFramePr>
-          <p:cNvPr id="5" name="Chart 4"/>
-          <p:cNvGraphicFramePr>
-            <a:graphicFrameLocks noGrp="1"/>
-          </p:cNvGraphicFramePr>
-          <p:nvPr/>
-        </p:nvGraphicFramePr>
-        <p:xfrm>
-          <a:off x="822960" y="1645920"/>
-          <a:ext cx="10789920" cy="4379975"/>
-        </p:xfrm>
-        <a:graphic>
-          <a:graphicData uri="http://schemas.openxmlformats.org/drawingml/2006/chart">
-            <c:chart xmlns:c="http://schemas.openxmlformats.org/drawingml/2006/chart" r:id="rId2"/>
-          </a:graphicData>
-        </a:graphic>
-      </p:graphicFrame>
+      <p:cxnSp>
+        <p:nvCxnSpPr>
+          <p:cNvPr id="5" name="Connector 4"/>
+          <p:cNvCxnSpPr/>
+          <p:nvPr/>
+        </p:nvCxnSpPr>
+        <p:spPr>
+          <a:xfrm>
+            <a:off x="1417319" y="5138927"/>
+            <a:ext cx="9848089" cy="0"/>
+          </a:xfrm>
+          <a:prstGeom prst="line">
+            <a:avLst/>
+          </a:prstGeom>
+          <a:ln w="6985">
+            <a:solidFill>
+              <a:srgbClr val="D1CFC8"/>
+            </a:solidFill>
+          </a:ln>
+        </p:spPr>
+        <p:style>
+          <a:lnRef idx="2">
+            <a:schemeClr val="accent1"/>
+          </a:lnRef>
+          <a:fillRef idx="0">
+            <a:schemeClr val="accent1"/>
+          </a:fillRef>
+          <a:effectRef idx="1">
+            <a:schemeClr val="accent1"/>
+          </a:effectRef>
+          <a:fontRef idx="minor">
+            <a:schemeClr val="tx1"/>
+          </a:fontRef>
+        </p:style>
+      </p:cxnSp>
       <p:sp>
         <p:nvSpPr>
           <p:cNvPr id="6" name="TextBox 5"/>
+          <p:cNvSpPr txBox="1"/>
+          <p:nvPr/>
+        </p:nvSpPr>
+        <p:spPr>
+          <a:xfrm>
+            <a:off x="996695" y="5056631"/>
+            <a:ext cx="329184" cy="164592"/>
+          </a:xfrm>
+          <a:prstGeom prst="rect">
+            <a:avLst/>
+          </a:prstGeom>
+          <a:noFill/>
+        </p:spPr>
+        <p:txBody>
+          <a:bodyPr wrap="square" anchor="t" lIns="0" rIns="0" tIns="0" bIns="0">
+            <a:spAutoFit/>
+          </a:bodyPr>
+          <a:lstStyle/>
+          <a:p>
+            <a:pPr algn="r">
+              <a:lnSpc>
+                <a:spcPct val="130000"/>
+              </a:lnSpc>
+            </a:pPr>
+            <a:r>
+              <a:rPr sz="780" b="0" lang="ja-JP">
+                <a:solidFill>
+                  <a:srgbClr val="666E70"/>
+                </a:solidFill>
+                <a:latin typeface="Yu Gothic"/>
+                <a:ea typeface="Yu Gothic"/>
+                <a:cs typeface="Yu Gothic"/>
+              </a:rPr>
+              <a:t>0</a:t>
+            </a:r>
+          </a:p>
+        </p:txBody>
+      </p:sp>
+      <p:cxnSp>
+        <p:nvCxnSpPr>
+          <p:cNvPr id="7" name="Connector 6"/>
+          <p:cNvCxnSpPr/>
+          <p:nvPr/>
+        </p:nvCxnSpPr>
+        <p:spPr>
+          <a:xfrm>
+            <a:off x="1417319" y="4299966"/>
+            <a:ext cx="9848089" cy="0"/>
+          </a:xfrm>
+          <a:prstGeom prst="line">
+            <a:avLst/>
+          </a:prstGeom>
+          <a:ln w="6985">
+            <a:solidFill>
+              <a:srgbClr val="D1CFC8"/>
+            </a:solidFill>
+          </a:ln>
+        </p:spPr>
+        <p:style>
+          <a:lnRef idx="2">
+            <a:schemeClr val="accent1"/>
+          </a:lnRef>
+          <a:fillRef idx="0">
+            <a:schemeClr val="accent1"/>
+          </a:fillRef>
+          <a:effectRef idx="1">
+            <a:schemeClr val="accent1"/>
+          </a:effectRef>
+          <a:fontRef idx="minor">
+            <a:schemeClr val="tx1"/>
+          </a:fontRef>
+        </p:style>
+      </p:cxnSp>
+      <p:sp>
+        <p:nvSpPr>
+          <p:cNvPr id="8" name="TextBox 7"/>
+          <p:cNvSpPr txBox="1"/>
+          <p:nvPr/>
+        </p:nvSpPr>
+        <p:spPr>
+          <a:xfrm>
+            <a:off x="996695" y="4217670"/>
+            <a:ext cx="329184" cy="164592"/>
+          </a:xfrm>
+          <a:prstGeom prst="rect">
+            <a:avLst/>
+          </a:prstGeom>
+          <a:noFill/>
+        </p:spPr>
+        <p:txBody>
+          <a:bodyPr wrap="square" anchor="t" lIns="0" rIns="0" tIns="0" bIns="0">
+            <a:spAutoFit/>
+          </a:bodyPr>
+          <a:lstStyle/>
+          <a:p>
+            <a:pPr algn="r">
+              <a:lnSpc>
+                <a:spcPct val="130000"/>
+              </a:lnSpc>
+            </a:pPr>
+            <a:r>
+              <a:rPr sz="780" b="0" lang="ja-JP">
+                <a:solidFill>
+                  <a:srgbClr val="666E70"/>
+                </a:solidFill>
+                <a:latin typeface="Yu Gothic"/>
+                <a:ea typeface="Yu Gothic"/>
+                <a:cs typeface="Yu Gothic"/>
+              </a:rPr>
+              <a:t>50</a:t>
+            </a:r>
+          </a:p>
+        </p:txBody>
+      </p:sp>
+      <p:cxnSp>
+        <p:nvCxnSpPr>
+          <p:cNvPr id="9" name="Connector 8"/>
+          <p:cNvCxnSpPr/>
+          <p:nvPr/>
+        </p:nvCxnSpPr>
+        <p:spPr>
+          <a:xfrm>
+            <a:off x="1417319" y="3461003"/>
+            <a:ext cx="9848089" cy="0"/>
+          </a:xfrm>
+          <a:prstGeom prst="line">
+            <a:avLst/>
+          </a:prstGeom>
+          <a:ln w="6985">
+            <a:solidFill>
+              <a:srgbClr val="D1CFC8"/>
+            </a:solidFill>
+          </a:ln>
+        </p:spPr>
+        <p:style>
+          <a:lnRef idx="2">
+            <a:schemeClr val="accent1"/>
+          </a:lnRef>
+          <a:fillRef idx="0">
+            <a:schemeClr val="accent1"/>
+          </a:fillRef>
+          <a:effectRef idx="1">
+            <a:schemeClr val="accent1"/>
+          </a:effectRef>
+          <a:fontRef idx="minor">
+            <a:schemeClr val="tx1"/>
+          </a:fontRef>
+        </p:style>
+      </p:cxnSp>
+      <p:sp>
+        <p:nvSpPr>
+          <p:cNvPr id="10" name="TextBox 9"/>
+          <p:cNvSpPr txBox="1"/>
+          <p:nvPr/>
+        </p:nvSpPr>
+        <p:spPr>
+          <a:xfrm>
+            <a:off x="996695" y="3378707"/>
+            <a:ext cx="329184" cy="164592"/>
+          </a:xfrm>
+          <a:prstGeom prst="rect">
+            <a:avLst/>
+          </a:prstGeom>
+          <a:noFill/>
+        </p:spPr>
+        <p:txBody>
+          <a:bodyPr wrap="square" anchor="t" lIns="0" rIns="0" tIns="0" bIns="0">
+            <a:spAutoFit/>
+          </a:bodyPr>
+          <a:lstStyle/>
+          <a:p>
+            <a:pPr algn="r">
+              <a:lnSpc>
+                <a:spcPct val="130000"/>
+              </a:lnSpc>
+            </a:pPr>
+            <a:r>
+              <a:rPr sz="780" b="0" lang="ja-JP">
+                <a:solidFill>
+                  <a:srgbClr val="666E70"/>
+                </a:solidFill>
+                <a:latin typeface="Yu Gothic"/>
+                <a:ea typeface="Yu Gothic"/>
+                <a:cs typeface="Yu Gothic"/>
+              </a:rPr>
+              <a:t>100</a:t>
+            </a:r>
+          </a:p>
+        </p:txBody>
+      </p:sp>
+      <p:cxnSp>
+        <p:nvCxnSpPr>
+          <p:cNvPr id="11" name="Connector 10"/>
+          <p:cNvCxnSpPr/>
+          <p:nvPr/>
+        </p:nvCxnSpPr>
+        <p:spPr>
+          <a:xfrm>
+            <a:off x="1417319" y="2622041"/>
+            <a:ext cx="9848089" cy="0"/>
+          </a:xfrm>
+          <a:prstGeom prst="line">
+            <a:avLst/>
+          </a:prstGeom>
+          <a:ln w="6985">
+            <a:solidFill>
+              <a:srgbClr val="D1CFC8"/>
+            </a:solidFill>
+          </a:ln>
+        </p:spPr>
+        <p:style>
+          <a:lnRef idx="2">
+            <a:schemeClr val="accent1"/>
+          </a:lnRef>
+          <a:fillRef idx="0">
+            <a:schemeClr val="accent1"/>
+          </a:fillRef>
+          <a:effectRef idx="1">
+            <a:schemeClr val="accent1"/>
+          </a:effectRef>
+          <a:fontRef idx="minor">
+            <a:schemeClr val="tx1"/>
+          </a:fontRef>
+        </p:style>
+      </p:cxnSp>
+      <p:sp>
+        <p:nvSpPr>
+          <p:cNvPr id="12" name="TextBox 11"/>
+          <p:cNvSpPr txBox="1"/>
+          <p:nvPr/>
+        </p:nvSpPr>
+        <p:spPr>
+          <a:xfrm>
+            <a:off x="996695" y="2539746"/>
+            <a:ext cx="329184" cy="164592"/>
+          </a:xfrm>
+          <a:prstGeom prst="rect">
+            <a:avLst/>
+          </a:prstGeom>
+          <a:noFill/>
+        </p:spPr>
+        <p:txBody>
+          <a:bodyPr wrap="square" anchor="t" lIns="0" rIns="0" tIns="0" bIns="0">
+            <a:spAutoFit/>
+          </a:bodyPr>
+          <a:lstStyle/>
+          <a:p>
+            <a:pPr algn="r">
+              <a:lnSpc>
+                <a:spcPct val="130000"/>
+              </a:lnSpc>
+            </a:pPr>
+            <a:r>
+              <a:rPr sz="780" b="0" lang="ja-JP">
+                <a:solidFill>
+                  <a:srgbClr val="666E70"/>
+                </a:solidFill>
+                <a:latin typeface="Yu Gothic"/>
+                <a:ea typeface="Yu Gothic"/>
+                <a:cs typeface="Yu Gothic"/>
+              </a:rPr>
+              <a:t>150</a:t>
+            </a:r>
+          </a:p>
+        </p:txBody>
+      </p:sp>
+      <p:cxnSp>
+        <p:nvCxnSpPr>
+          <p:cNvPr id="13" name="Connector 12"/>
+          <p:cNvCxnSpPr/>
+          <p:nvPr/>
+        </p:nvCxnSpPr>
+        <p:spPr>
+          <a:xfrm>
+            <a:off x="1417319" y="1783079"/>
+            <a:ext cx="9848089" cy="0"/>
+          </a:xfrm>
+          <a:prstGeom prst="line">
+            <a:avLst/>
+          </a:prstGeom>
+          <a:ln w="6985">
+            <a:solidFill>
+              <a:srgbClr val="D1CFC8"/>
+            </a:solidFill>
+          </a:ln>
+        </p:spPr>
+        <p:style>
+          <a:lnRef idx="2">
+            <a:schemeClr val="accent1"/>
+          </a:lnRef>
+          <a:fillRef idx="0">
+            <a:schemeClr val="accent1"/>
+          </a:fillRef>
+          <a:effectRef idx="1">
+            <a:schemeClr val="accent1"/>
+          </a:effectRef>
+          <a:fontRef idx="minor">
+            <a:schemeClr val="tx1"/>
+          </a:fontRef>
+        </p:style>
+      </p:cxnSp>
+      <p:sp>
+        <p:nvSpPr>
+          <p:cNvPr id="14" name="TextBox 13"/>
+          <p:cNvSpPr txBox="1"/>
+          <p:nvPr/>
+        </p:nvSpPr>
+        <p:spPr>
+          <a:xfrm>
+            <a:off x="996695" y="1700783"/>
+            <a:ext cx="329184" cy="164592"/>
+          </a:xfrm>
+          <a:prstGeom prst="rect">
+            <a:avLst/>
+          </a:prstGeom>
+          <a:noFill/>
+        </p:spPr>
+        <p:txBody>
+          <a:bodyPr wrap="square" anchor="t" lIns="0" rIns="0" tIns="0" bIns="0">
+            <a:spAutoFit/>
+          </a:bodyPr>
+          <a:lstStyle/>
+          <a:p>
+            <a:pPr algn="r">
+              <a:lnSpc>
+                <a:spcPct val="130000"/>
+              </a:lnSpc>
+            </a:pPr>
+            <a:r>
+              <a:rPr sz="780" b="0" lang="ja-JP">
+                <a:solidFill>
+                  <a:srgbClr val="666E70"/>
+                </a:solidFill>
+                <a:latin typeface="Yu Gothic"/>
+                <a:ea typeface="Yu Gothic"/>
+                <a:cs typeface="Yu Gothic"/>
+              </a:rPr>
+              <a:t>200</a:t>
+            </a:r>
+          </a:p>
+        </p:txBody>
+      </p:sp>
+      <p:cxnSp>
+        <p:nvCxnSpPr>
+          <p:cNvPr id="15" name="Connector 14"/>
+          <p:cNvCxnSpPr/>
+          <p:nvPr/>
+        </p:nvCxnSpPr>
+        <p:spPr>
+          <a:xfrm>
+            <a:off x="1417319" y="1783080"/>
+            <a:ext cx="0" cy="3355847"/>
+          </a:xfrm>
+          <a:prstGeom prst="line">
+            <a:avLst/>
+          </a:prstGeom>
+          <a:ln w="10160">
+            <a:solidFill>
+              <a:srgbClr val="666E70"/>
+            </a:solidFill>
+          </a:ln>
+        </p:spPr>
+        <p:style>
+          <a:lnRef idx="2">
+            <a:schemeClr val="accent1"/>
+          </a:lnRef>
+          <a:fillRef idx="0">
+            <a:schemeClr val="accent1"/>
+          </a:fillRef>
+          <a:effectRef idx="1">
+            <a:schemeClr val="accent1"/>
+          </a:effectRef>
+          <a:fontRef idx="minor">
+            <a:schemeClr val="tx1"/>
+          </a:fontRef>
+        </p:style>
+      </p:cxnSp>
+      <p:cxnSp>
+        <p:nvCxnSpPr>
+          <p:cNvPr id="16" name="Connector 15"/>
+          <p:cNvCxnSpPr/>
+          <p:nvPr/>
+        </p:nvCxnSpPr>
+        <p:spPr>
+          <a:xfrm>
+            <a:off x="1417319" y="5138927"/>
+            <a:ext cx="9848089" cy="0"/>
+          </a:xfrm>
+          <a:prstGeom prst="line">
+            <a:avLst/>
+          </a:prstGeom>
+          <a:ln w="10160">
+            <a:solidFill>
+              <a:srgbClr val="666E70"/>
+            </a:solidFill>
+          </a:ln>
+        </p:spPr>
+        <p:style>
+          <a:lnRef idx="2">
+            <a:schemeClr val="accent1"/>
+          </a:lnRef>
+          <a:fillRef idx="0">
+            <a:schemeClr val="accent1"/>
+          </a:fillRef>
+          <a:effectRef idx="1">
+            <a:schemeClr val="accent1"/>
+          </a:effectRef>
+          <a:fontRef idx="minor">
+            <a:schemeClr val="tx1"/>
+          </a:fontRef>
+        </p:style>
+      </p:cxnSp>
+      <p:sp>
+        <p:nvSpPr>
+          <p:cNvPr id="17" name="TextBox 16"/>
+          <p:cNvSpPr txBox="1"/>
+          <p:nvPr/>
+        </p:nvSpPr>
+        <p:spPr>
+          <a:xfrm>
+            <a:off x="1444751" y="5230367"/>
+            <a:ext cx="3227832" cy="237744"/>
+          </a:xfrm>
+          <a:prstGeom prst="rect">
+            <a:avLst/>
+          </a:prstGeom>
+          <a:noFill/>
+        </p:spPr>
+        <p:txBody>
+          <a:bodyPr wrap="square" anchor="t" lIns="0" rIns="0" tIns="0" bIns="0">
+            <a:spAutoFit/>
+          </a:bodyPr>
+          <a:lstStyle/>
+          <a:p>
+            <a:pPr algn="ctr">
+              <a:lnSpc>
+                <a:spcPct val="130000"/>
+              </a:lnSpc>
+            </a:pPr>
+            <a:r>
+              <a:rPr sz="819" b="0" lang="ja-JP">
+                <a:solidFill>
+                  <a:srgbClr val="666E70"/>
+                </a:solidFill>
+                <a:latin typeface="Yu Gothic"/>
+                <a:ea typeface="Yu Gothic"/>
+                <a:cs typeface="Yu Gothic"/>
+              </a:rPr>
+              <a:t>導入前</a:t>
+            </a:r>
+          </a:p>
+        </p:txBody>
+      </p:sp>
+      <p:sp>
+        <p:nvSpPr>
+          <p:cNvPr id="18" name="Rectangle 17"/>
+          <p:cNvSpPr/>
+          <p:nvPr/>
+        </p:nvSpPr>
+        <p:spPr>
+          <a:xfrm>
+            <a:off x="2793491" y="3964381"/>
+            <a:ext cx="530352" cy="1174546"/>
+          </a:xfrm>
+          <a:prstGeom prst="rect">
+            <a:avLst/>
+          </a:prstGeom>
+          <a:solidFill>
+            <a:srgbClr val="0D7870"/>
+          </a:solidFill>
+          <a:ln>
+            <a:noFill/>
+          </a:ln>
+          <a:effectLst/>
+        </p:spPr>
+        <p:style>
+          <a:lnRef idx="1">
+            <a:schemeClr val="accent1"/>
+          </a:lnRef>
+          <a:fillRef idx="3">
+            <a:schemeClr val="accent1"/>
+          </a:fillRef>
+          <a:effectRef idx="2">
+            <a:schemeClr val="accent1"/>
+          </a:effectRef>
+          <a:fontRef idx="minor">
+            <a:schemeClr val="lt1"/>
+          </a:fontRef>
+        </p:style>
+        <p:txBody>
+          <a:bodyPr rtlCol="0" anchor="ctr"/>
+          <a:lstStyle/>
+          <a:p>
+            <a:pPr algn="ctr"/>
+          </a:p>
+        </p:txBody>
+      </p:sp>
+      <p:sp>
+        <p:nvSpPr>
+          <p:cNvPr id="19" name="Rectangle 18"/>
+          <p:cNvSpPr/>
+          <p:nvPr/>
+        </p:nvSpPr>
+        <p:spPr>
+          <a:xfrm>
+            <a:off x="2793491" y="3628796"/>
+            <a:ext cx="530352" cy="335584"/>
+          </a:xfrm>
+          <a:prstGeom prst="rect">
+            <a:avLst/>
+          </a:prstGeom>
+          <a:solidFill>
+            <a:srgbClr val="182C43"/>
+          </a:solidFill>
+          <a:ln>
+            <a:noFill/>
+          </a:ln>
+          <a:effectLst/>
+        </p:spPr>
+        <p:style>
+          <a:lnRef idx="1">
+            <a:schemeClr val="accent1"/>
+          </a:lnRef>
+          <a:fillRef idx="3">
+            <a:schemeClr val="accent1"/>
+          </a:fillRef>
+          <a:effectRef idx="2">
+            <a:schemeClr val="accent1"/>
+          </a:effectRef>
+          <a:fontRef idx="minor">
+            <a:schemeClr val="lt1"/>
+          </a:fontRef>
+        </p:style>
+        <p:txBody>
+          <a:bodyPr rtlCol="0" anchor="ctr"/>
+          <a:lstStyle/>
+          <a:p>
+            <a:pPr algn="ctr"/>
+          </a:p>
+        </p:txBody>
+      </p:sp>
+      <p:sp>
+        <p:nvSpPr>
+          <p:cNvPr id="20" name="Rectangle 19"/>
+          <p:cNvSpPr/>
+          <p:nvPr/>
+        </p:nvSpPr>
+        <p:spPr>
+          <a:xfrm>
+            <a:off x="2793491" y="3461003"/>
+            <a:ext cx="530352" cy="167792"/>
+          </a:xfrm>
+          <a:prstGeom prst="rect">
+            <a:avLst/>
+          </a:prstGeom>
+          <a:solidFill>
+            <a:srgbClr val="C7583E"/>
+          </a:solidFill>
+          <a:ln>
+            <a:noFill/>
+          </a:ln>
+          <a:effectLst/>
+        </p:spPr>
+        <p:style>
+          <a:lnRef idx="1">
+            <a:schemeClr val="accent1"/>
+          </a:lnRef>
+          <a:fillRef idx="3">
+            <a:schemeClr val="accent1"/>
+          </a:fillRef>
+          <a:effectRef idx="2">
+            <a:schemeClr val="accent1"/>
+          </a:effectRef>
+          <a:fontRef idx="minor">
+            <a:schemeClr val="lt1"/>
+          </a:fontRef>
+        </p:style>
+        <p:txBody>
+          <a:bodyPr rtlCol="0" anchor="ctr"/>
+          <a:lstStyle/>
+          <a:p>
+            <a:pPr algn="ctr"/>
+          </a:p>
+        </p:txBody>
+      </p:sp>
+      <p:sp>
+        <p:nvSpPr>
+          <p:cNvPr id="21" name="TextBox 20"/>
+          <p:cNvSpPr txBox="1"/>
+          <p:nvPr/>
+        </p:nvSpPr>
+        <p:spPr>
+          <a:xfrm>
+            <a:off x="4727448" y="5230367"/>
+            <a:ext cx="3227832" cy="237744"/>
+          </a:xfrm>
+          <a:prstGeom prst="rect">
+            <a:avLst/>
+          </a:prstGeom>
+          <a:noFill/>
+        </p:spPr>
+        <p:txBody>
+          <a:bodyPr wrap="square" anchor="t" lIns="0" rIns="0" tIns="0" bIns="0">
+            <a:spAutoFit/>
+          </a:bodyPr>
+          <a:lstStyle/>
+          <a:p>
+            <a:pPr algn="ctr">
+              <a:lnSpc>
+                <a:spcPct val="130000"/>
+              </a:lnSpc>
+            </a:pPr>
+            <a:r>
+              <a:rPr sz="819" b="0" lang="ja-JP">
+                <a:solidFill>
+                  <a:srgbClr val="666E70"/>
+                </a:solidFill>
+                <a:latin typeface="Yu Gothic"/>
+                <a:ea typeface="Yu Gothic"/>
+                <a:cs typeface="Yu Gothic"/>
+              </a:rPr>
+              <a:t>試行中</a:t>
+            </a:r>
+          </a:p>
+        </p:txBody>
+      </p:sp>
+      <p:sp>
+        <p:nvSpPr>
+          <p:cNvPr id="22" name="Rectangle 21"/>
+          <p:cNvSpPr/>
+          <p:nvPr/>
+        </p:nvSpPr>
+        <p:spPr>
+          <a:xfrm>
+            <a:off x="6076188" y="4501316"/>
+            <a:ext cx="530352" cy="637611"/>
+          </a:xfrm>
+          <a:prstGeom prst="rect">
+            <a:avLst/>
+          </a:prstGeom>
+          <a:solidFill>
+            <a:srgbClr val="0D7870"/>
+          </a:solidFill>
+          <a:ln>
+            <a:noFill/>
+          </a:ln>
+          <a:effectLst/>
+        </p:spPr>
+        <p:style>
+          <a:lnRef idx="1">
+            <a:schemeClr val="accent1"/>
+          </a:lnRef>
+          <a:fillRef idx="3">
+            <a:schemeClr val="accent1"/>
+          </a:fillRef>
+          <a:effectRef idx="2">
+            <a:schemeClr val="accent1"/>
+          </a:effectRef>
+          <a:fontRef idx="minor">
+            <a:schemeClr val="lt1"/>
+          </a:fontRef>
+        </p:style>
+        <p:txBody>
+          <a:bodyPr rtlCol="0" anchor="ctr"/>
+          <a:lstStyle/>
+          <a:p>
+            <a:pPr algn="ctr"/>
+          </a:p>
+        </p:txBody>
+      </p:sp>
+      <p:sp>
+        <p:nvSpPr>
+          <p:cNvPr id="23" name="Rectangle 22"/>
+          <p:cNvSpPr/>
+          <p:nvPr/>
+        </p:nvSpPr>
+        <p:spPr>
+          <a:xfrm>
+            <a:off x="6076188" y="3964381"/>
+            <a:ext cx="530352" cy="536935"/>
+          </a:xfrm>
+          <a:prstGeom prst="rect">
+            <a:avLst/>
+          </a:prstGeom>
+          <a:solidFill>
+            <a:srgbClr val="182C43"/>
+          </a:solidFill>
+          <a:ln>
+            <a:noFill/>
+          </a:ln>
+          <a:effectLst/>
+        </p:spPr>
+        <p:style>
+          <a:lnRef idx="1">
+            <a:schemeClr val="accent1"/>
+          </a:lnRef>
+          <a:fillRef idx="3">
+            <a:schemeClr val="accent1"/>
+          </a:fillRef>
+          <a:effectRef idx="2">
+            <a:schemeClr val="accent1"/>
+          </a:effectRef>
+          <a:fontRef idx="minor">
+            <a:schemeClr val="lt1"/>
+          </a:fontRef>
+        </p:style>
+        <p:txBody>
+          <a:bodyPr rtlCol="0" anchor="ctr"/>
+          <a:lstStyle/>
+          <a:p>
+            <a:pPr algn="ctr"/>
+          </a:p>
+        </p:txBody>
+      </p:sp>
+      <p:sp>
+        <p:nvSpPr>
+          <p:cNvPr id="24" name="Rectangle 23"/>
+          <p:cNvSpPr/>
+          <p:nvPr/>
+        </p:nvSpPr>
+        <p:spPr>
+          <a:xfrm>
+            <a:off x="6076188" y="3461003"/>
+            <a:ext cx="530352" cy="503377"/>
+          </a:xfrm>
+          <a:prstGeom prst="rect">
+            <a:avLst/>
+          </a:prstGeom>
+          <a:solidFill>
+            <a:srgbClr val="C7583E"/>
+          </a:solidFill>
+          <a:ln>
+            <a:noFill/>
+          </a:ln>
+          <a:effectLst/>
+        </p:spPr>
+        <p:style>
+          <a:lnRef idx="1">
+            <a:schemeClr val="accent1"/>
+          </a:lnRef>
+          <a:fillRef idx="3">
+            <a:schemeClr val="accent1"/>
+          </a:fillRef>
+          <a:effectRef idx="2">
+            <a:schemeClr val="accent1"/>
+          </a:effectRef>
+          <a:fontRef idx="minor">
+            <a:schemeClr val="lt1"/>
+          </a:fontRef>
+        </p:style>
+        <p:txBody>
+          <a:bodyPr rtlCol="0" anchor="ctr"/>
+          <a:lstStyle/>
+          <a:p>
+            <a:pPr algn="ctr"/>
+          </a:p>
+        </p:txBody>
+      </p:sp>
+      <p:sp>
+        <p:nvSpPr>
+          <p:cNvPr id="25" name="TextBox 24"/>
+          <p:cNvSpPr txBox="1"/>
+          <p:nvPr/>
+        </p:nvSpPr>
+        <p:spPr>
+          <a:xfrm>
+            <a:off x="8010144" y="5230367"/>
+            <a:ext cx="3227832" cy="237744"/>
+          </a:xfrm>
+          <a:prstGeom prst="rect">
+            <a:avLst/>
+          </a:prstGeom>
+          <a:noFill/>
+        </p:spPr>
+        <p:txBody>
+          <a:bodyPr wrap="square" anchor="t" lIns="0" rIns="0" tIns="0" bIns="0">
+            <a:spAutoFit/>
+          </a:bodyPr>
+          <a:lstStyle/>
+          <a:p>
+            <a:pPr algn="ctr">
+              <a:lnSpc>
+                <a:spcPct val="130000"/>
+              </a:lnSpc>
+            </a:pPr>
+            <a:r>
+              <a:rPr sz="819" b="0" lang="ja-JP">
+                <a:solidFill>
+                  <a:srgbClr val="666E70"/>
+                </a:solidFill>
+                <a:latin typeface="Yu Gothic"/>
+                <a:ea typeface="Yu Gothic"/>
+                <a:cs typeface="Yu Gothic"/>
+              </a:rPr>
+              <a:t>標準化後</a:t>
+            </a:r>
+          </a:p>
+        </p:txBody>
+      </p:sp>
+      <p:sp>
+        <p:nvSpPr>
+          <p:cNvPr id="26" name="Rectangle 25"/>
+          <p:cNvSpPr/>
+          <p:nvPr/>
+        </p:nvSpPr>
+        <p:spPr>
+          <a:xfrm>
+            <a:off x="9358884" y="4836901"/>
+            <a:ext cx="530352" cy="302026"/>
+          </a:xfrm>
+          <a:prstGeom prst="rect">
+            <a:avLst/>
+          </a:prstGeom>
+          <a:solidFill>
+            <a:srgbClr val="0D7870"/>
+          </a:solidFill>
+          <a:ln>
+            <a:noFill/>
+          </a:ln>
+          <a:effectLst/>
+        </p:spPr>
+        <p:style>
+          <a:lnRef idx="1">
+            <a:schemeClr val="accent1"/>
+          </a:lnRef>
+          <a:fillRef idx="3">
+            <a:schemeClr val="accent1"/>
+          </a:fillRef>
+          <a:effectRef idx="2">
+            <a:schemeClr val="accent1"/>
+          </a:effectRef>
+          <a:fontRef idx="minor">
+            <a:schemeClr val="lt1"/>
+          </a:fontRef>
+        </p:style>
+        <p:txBody>
+          <a:bodyPr rtlCol="0" anchor="ctr"/>
+          <a:lstStyle/>
+          <a:p>
+            <a:pPr algn="ctr"/>
+          </a:p>
+        </p:txBody>
+      </p:sp>
+      <p:sp>
+        <p:nvSpPr>
+          <p:cNvPr id="27" name="Rectangle 26"/>
+          <p:cNvSpPr/>
+          <p:nvPr/>
+        </p:nvSpPr>
+        <p:spPr>
+          <a:xfrm>
+            <a:off x="9358884" y="4132173"/>
+            <a:ext cx="530352" cy="704728"/>
+          </a:xfrm>
+          <a:prstGeom prst="rect">
+            <a:avLst/>
+          </a:prstGeom>
+          <a:solidFill>
+            <a:srgbClr val="182C43"/>
+          </a:solidFill>
+          <a:ln>
+            <a:noFill/>
+          </a:ln>
+          <a:effectLst/>
+        </p:spPr>
+        <p:style>
+          <a:lnRef idx="1">
+            <a:schemeClr val="accent1"/>
+          </a:lnRef>
+          <a:fillRef idx="3">
+            <a:schemeClr val="accent1"/>
+          </a:fillRef>
+          <a:effectRef idx="2">
+            <a:schemeClr val="accent1"/>
+          </a:effectRef>
+          <a:fontRef idx="minor">
+            <a:schemeClr val="lt1"/>
+          </a:fontRef>
+        </p:style>
+        <p:txBody>
+          <a:bodyPr rtlCol="0" anchor="ctr"/>
+          <a:lstStyle/>
+          <a:p>
+            <a:pPr algn="ctr"/>
+          </a:p>
+        </p:txBody>
+      </p:sp>
+      <p:sp>
+        <p:nvSpPr>
+          <p:cNvPr id="28" name="Rectangle 27"/>
+          <p:cNvSpPr/>
+          <p:nvPr/>
+        </p:nvSpPr>
+        <p:spPr>
+          <a:xfrm>
+            <a:off x="9358884" y="3461003"/>
+            <a:ext cx="530352" cy="671169"/>
+          </a:xfrm>
+          <a:prstGeom prst="rect">
+            <a:avLst/>
+          </a:prstGeom>
+          <a:solidFill>
+            <a:srgbClr val="C7583E"/>
+          </a:solidFill>
+          <a:ln>
+            <a:noFill/>
+          </a:ln>
+          <a:effectLst/>
+        </p:spPr>
+        <p:style>
+          <a:lnRef idx="1">
+            <a:schemeClr val="accent1"/>
+          </a:lnRef>
+          <a:fillRef idx="3">
+            <a:schemeClr val="accent1"/>
+          </a:fillRef>
+          <a:effectRef idx="2">
+            <a:schemeClr val="accent1"/>
+          </a:effectRef>
+          <a:fontRef idx="minor">
+            <a:schemeClr val="lt1"/>
+          </a:fontRef>
+        </p:style>
+        <p:txBody>
+          <a:bodyPr rtlCol="0" anchor="ctr"/>
+          <a:lstStyle/>
+          <a:p>
+            <a:pPr algn="ctr"/>
+          </a:p>
+        </p:txBody>
+      </p:sp>
+      <p:sp>
+        <p:nvSpPr>
+          <p:cNvPr id="29" name="Rectangle 28"/>
+          <p:cNvSpPr/>
+          <p:nvPr/>
+        </p:nvSpPr>
+        <p:spPr>
+          <a:xfrm>
+            <a:off x="1435607" y="5788152"/>
+            <a:ext cx="109728" cy="109728"/>
+          </a:xfrm>
+          <a:prstGeom prst="rect">
+            <a:avLst/>
+          </a:prstGeom>
+          <a:solidFill>
+            <a:srgbClr val="0D7870"/>
+          </a:solidFill>
+          <a:ln>
+            <a:noFill/>
+          </a:ln>
+          <a:effectLst/>
+        </p:spPr>
+        <p:style>
+          <a:lnRef idx="1">
+            <a:schemeClr val="accent1"/>
+          </a:lnRef>
+          <a:fillRef idx="3">
+            <a:schemeClr val="accent1"/>
+          </a:fillRef>
+          <a:effectRef idx="2">
+            <a:schemeClr val="accent1"/>
+          </a:effectRef>
+          <a:fontRef idx="minor">
+            <a:schemeClr val="lt1"/>
+          </a:fontRef>
+        </p:style>
+        <p:txBody>
+          <a:bodyPr rtlCol="0" anchor="ctr"/>
+          <a:lstStyle/>
+          <a:p>
+            <a:pPr algn="ctr"/>
+          </a:p>
+        </p:txBody>
+      </p:sp>
+      <p:sp>
+        <p:nvSpPr>
+          <p:cNvPr id="30" name="TextBox 29"/>
+          <p:cNvSpPr txBox="1"/>
+          <p:nvPr/>
+        </p:nvSpPr>
+        <p:spPr>
+          <a:xfrm>
+            <a:off x="1600199" y="5724144"/>
+            <a:ext cx="1572768" cy="237744"/>
+          </a:xfrm>
+          <a:prstGeom prst="rect">
+            <a:avLst/>
+          </a:prstGeom>
+          <a:noFill/>
+        </p:spPr>
+        <p:txBody>
+          <a:bodyPr wrap="square" anchor="t" lIns="0" rIns="0" tIns="0" bIns="0">
+            <a:spAutoFit/>
+          </a:bodyPr>
+          <a:lstStyle/>
+          <a:p>
+            <a:pPr algn="l">
+              <a:lnSpc>
+                <a:spcPct val="130000"/>
+              </a:lnSpc>
+            </a:pPr>
+            <a:r>
+              <a:rPr sz="819" b="0" lang="ja-JP">
+                <a:solidFill>
+                  <a:srgbClr val="666E70"/>
+                </a:solidFill>
+                <a:latin typeface="Yu Gothic"/>
+                <a:ea typeface="Yu Gothic"/>
+                <a:cs typeface="Yu Gothic"/>
+              </a:rPr>
+              <a:t>作成</a:t>
+            </a:r>
+          </a:p>
+        </p:txBody>
+      </p:sp>
+      <p:sp>
+        <p:nvSpPr>
+          <p:cNvPr id="31" name="Rectangle 30"/>
+          <p:cNvSpPr/>
+          <p:nvPr/>
+        </p:nvSpPr>
+        <p:spPr>
+          <a:xfrm>
+            <a:off x="3310127" y="5788152"/>
+            <a:ext cx="109728" cy="109728"/>
+          </a:xfrm>
+          <a:prstGeom prst="rect">
+            <a:avLst/>
+          </a:prstGeom>
+          <a:solidFill>
+            <a:srgbClr val="182C43"/>
+          </a:solidFill>
+          <a:ln>
+            <a:noFill/>
+          </a:ln>
+          <a:effectLst/>
+        </p:spPr>
+        <p:style>
+          <a:lnRef idx="1">
+            <a:schemeClr val="accent1"/>
+          </a:lnRef>
+          <a:fillRef idx="3">
+            <a:schemeClr val="accent1"/>
+          </a:fillRef>
+          <a:effectRef idx="2">
+            <a:schemeClr val="accent1"/>
+          </a:effectRef>
+          <a:fontRef idx="minor">
+            <a:schemeClr val="lt1"/>
+          </a:fontRef>
+        </p:style>
+        <p:txBody>
+          <a:bodyPr rtlCol="0" anchor="ctr"/>
+          <a:lstStyle/>
+          <a:p>
+            <a:pPr algn="ctr"/>
+          </a:p>
+        </p:txBody>
+      </p:sp>
+      <p:sp>
+        <p:nvSpPr>
+          <p:cNvPr id="32" name="TextBox 31"/>
+          <p:cNvSpPr txBox="1"/>
+          <p:nvPr/>
+        </p:nvSpPr>
+        <p:spPr>
+          <a:xfrm>
+            <a:off x="3474720" y="5724144"/>
+            <a:ext cx="1572768" cy="237744"/>
+          </a:xfrm>
+          <a:prstGeom prst="rect">
+            <a:avLst/>
+          </a:prstGeom>
+          <a:noFill/>
+        </p:spPr>
+        <p:txBody>
+          <a:bodyPr wrap="square" anchor="t" lIns="0" rIns="0" tIns="0" bIns="0">
+            <a:spAutoFit/>
+          </a:bodyPr>
+          <a:lstStyle/>
+          <a:p>
+            <a:pPr algn="l">
+              <a:lnSpc>
+                <a:spcPct val="130000"/>
+              </a:lnSpc>
+            </a:pPr>
+            <a:r>
+              <a:rPr sz="819" b="0" lang="ja-JP">
+                <a:solidFill>
+                  <a:srgbClr val="666E70"/>
+                </a:solidFill>
+                <a:latin typeface="Yu Gothic"/>
+                <a:ea typeface="Yu Gothic"/>
+                <a:cs typeface="Yu Gothic"/>
+              </a:rPr>
+              <a:t>レビュー</a:t>
+            </a:r>
+          </a:p>
+        </p:txBody>
+      </p:sp>
+      <p:sp>
+        <p:nvSpPr>
+          <p:cNvPr id="33" name="Rectangle 32"/>
+          <p:cNvSpPr/>
+          <p:nvPr/>
+        </p:nvSpPr>
+        <p:spPr>
+          <a:xfrm>
+            <a:off x="5184648" y="5788152"/>
+            <a:ext cx="109728" cy="109728"/>
+          </a:xfrm>
+          <a:prstGeom prst="rect">
+            <a:avLst/>
+          </a:prstGeom>
+          <a:solidFill>
+            <a:srgbClr val="C7583E"/>
+          </a:solidFill>
+          <a:ln>
+            <a:noFill/>
+          </a:ln>
+          <a:effectLst/>
+        </p:spPr>
+        <p:style>
+          <a:lnRef idx="1">
+            <a:schemeClr val="accent1"/>
+          </a:lnRef>
+          <a:fillRef idx="3">
+            <a:schemeClr val="accent1"/>
+          </a:fillRef>
+          <a:effectRef idx="2">
+            <a:schemeClr val="accent1"/>
+          </a:effectRef>
+          <a:fontRef idx="minor">
+            <a:schemeClr val="lt1"/>
+          </a:fontRef>
+        </p:style>
+        <p:txBody>
+          <a:bodyPr rtlCol="0" anchor="ctr"/>
+          <a:lstStyle/>
+          <a:p>
+            <a:pPr algn="ctr"/>
+          </a:p>
+        </p:txBody>
+      </p:sp>
+      <p:sp>
+        <p:nvSpPr>
+          <p:cNvPr id="34" name="TextBox 33"/>
+          <p:cNvSpPr txBox="1"/>
+          <p:nvPr/>
+        </p:nvSpPr>
+        <p:spPr>
+          <a:xfrm>
+            <a:off x="5349240" y="5724144"/>
+            <a:ext cx="1572768" cy="237744"/>
+          </a:xfrm>
+          <a:prstGeom prst="rect">
+            <a:avLst/>
+          </a:prstGeom>
+          <a:noFill/>
+        </p:spPr>
+        <p:txBody>
+          <a:bodyPr wrap="square" anchor="t" lIns="0" rIns="0" tIns="0" bIns="0">
+            <a:spAutoFit/>
+          </a:bodyPr>
+          <a:lstStyle/>
+          <a:p>
+            <a:pPr algn="l">
+              <a:lnSpc>
+                <a:spcPct val="130000"/>
+              </a:lnSpc>
+            </a:pPr>
+            <a:r>
+              <a:rPr sz="819" b="0" lang="ja-JP">
+                <a:solidFill>
+                  <a:srgbClr val="666E70"/>
+                </a:solidFill>
+                <a:latin typeface="Yu Gothic"/>
+                <a:ea typeface="Yu Gothic"/>
+                <a:cs typeface="Yu Gothic"/>
+              </a:rPr>
+              <a:t>意思決定</a:t>
+            </a:r>
+          </a:p>
+        </p:txBody>
+      </p:sp>
+      <p:sp>
+        <p:nvSpPr>
+          <p:cNvPr id="35" name="TextBox 34"/>
           <p:cNvSpPr txBox="1"/>
           <p:nvPr/>
         </p:nvSpPr>
@@ -4939,7 +7690,7 @@
       </p:sp>
       <p:sp>
         <p:nvSpPr>
-          <p:cNvPr id="7" name="Rectangle 6"/>
+          <p:cNvPr id="36" name="Rectangle 35"/>
           <p:cNvSpPr/>
           <p:nvPr/>
         </p:nvSpPr>
@@ -4983,7 +7734,7 @@
       </p:sp>
       <p:sp>
         <p:nvSpPr>
-          <p:cNvPr id="8" name="TextBox 7"/>
+          <p:cNvPr id="37" name="TextBox 36"/>
           <p:cNvSpPr txBox="1"/>
           <p:nvPr/>
         </p:nvSpPr>
@@ -5024,7 +7775,7 @@
       </p:sp>
       <p:sp>
         <p:nvSpPr>
-          <p:cNvPr id="9" name="TextBox 8"/>
+          <p:cNvPr id="38" name="TextBox 37"/>
           <p:cNvSpPr txBox="1"/>
           <p:nvPr/>
         </p:nvSpPr>
@@ -53647,27 +56398,1438 @@
           </a:p>
         </p:txBody>
       </p:sp>
-      <p:graphicFrame>
-        <p:nvGraphicFramePr>
-          <p:cNvPr id="5" name="Chart 4"/>
-          <p:cNvGraphicFramePr>
-            <a:graphicFrameLocks noGrp="1"/>
-          </p:cNvGraphicFramePr>
-          <p:nvPr/>
-        </p:nvGraphicFramePr>
-        <p:xfrm>
-          <a:off x="822960" y="1645920"/>
-          <a:ext cx="10789920" cy="4379975"/>
-        </p:xfrm>
-        <a:graphic>
-          <a:graphicData uri="http://schemas.openxmlformats.org/drawingml/2006/chart">
-            <c:chart xmlns:c="http://schemas.openxmlformats.org/drawingml/2006/chart" r:id="rId2"/>
-          </a:graphicData>
-        </a:graphic>
-      </p:graphicFrame>
+      <p:cxnSp>
+        <p:nvCxnSpPr>
+          <p:cNvPr id="5" name="Connector 4"/>
+          <p:cNvCxnSpPr/>
+          <p:nvPr/>
+        </p:nvCxnSpPr>
+        <p:spPr>
+          <a:xfrm>
+            <a:off x="2441448" y="1783080"/>
+            <a:ext cx="0" cy="3703320"/>
+          </a:xfrm>
+          <a:prstGeom prst="line">
+            <a:avLst/>
+          </a:prstGeom>
+          <a:ln w="6985">
+            <a:solidFill>
+              <a:srgbClr val="D1CFC8"/>
+            </a:solidFill>
+          </a:ln>
+        </p:spPr>
+        <p:style>
+          <a:lnRef idx="2">
+            <a:schemeClr val="accent1"/>
+          </a:lnRef>
+          <a:fillRef idx="0">
+            <a:schemeClr val="accent1"/>
+          </a:fillRef>
+          <a:effectRef idx="1">
+            <a:schemeClr val="accent1"/>
+          </a:effectRef>
+          <a:fontRef idx="minor">
+            <a:schemeClr val="tx1"/>
+          </a:fontRef>
+        </p:style>
+      </p:cxnSp>
       <p:sp>
         <p:nvSpPr>
           <p:cNvPr id="6" name="TextBox 5"/>
+          <p:cNvSpPr txBox="1"/>
+          <p:nvPr/>
+        </p:nvSpPr>
+        <p:spPr>
+          <a:xfrm>
+            <a:off x="2276856" y="5559552"/>
+            <a:ext cx="329184" cy="164592"/>
+          </a:xfrm>
+          <a:prstGeom prst="rect">
+            <a:avLst/>
+          </a:prstGeom>
+          <a:noFill/>
+        </p:spPr>
+        <p:txBody>
+          <a:bodyPr wrap="square" anchor="t" lIns="0" rIns="0" tIns="0" bIns="0">
+            <a:spAutoFit/>
+          </a:bodyPr>
+          <a:lstStyle/>
+          <a:p>
+            <a:pPr algn="ctr">
+              <a:lnSpc>
+                <a:spcPct val="130000"/>
+              </a:lnSpc>
+            </a:pPr>
+            <a:r>
+              <a:rPr sz="780" b="0" lang="ja-JP">
+                <a:solidFill>
+                  <a:srgbClr val="666E70"/>
+                </a:solidFill>
+                <a:latin typeface="Yu Gothic"/>
+                <a:ea typeface="Yu Gothic"/>
+                <a:cs typeface="Yu Gothic"/>
+              </a:rPr>
+              <a:t>0</a:t>
+            </a:r>
+          </a:p>
+        </p:txBody>
+      </p:sp>
+      <p:cxnSp>
+        <p:nvCxnSpPr>
+          <p:cNvPr id="7" name="Connector 6"/>
+          <p:cNvCxnSpPr/>
+          <p:nvPr/>
+        </p:nvCxnSpPr>
+        <p:spPr>
+          <a:xfrm>
+            <a:off x="4654296" y="1783080"/>
+            <a:ext cx="0" cy="3703320"/>
+          </a:xfrm>
+          <a:prstGeom prst="line">
+            <a:avLst/>
+          </a:prstGeom>
+          <a:ln w="6985">
+            <a:solidFill>
+              <a:srgbClr val="D1CFC8"/>
+            </a:solidFill>
+          </a:ln>
+        </p:spPr>
+        <p:style>
+          <a:lnRef idx="2">
+            <a:schemeClr val="accent1"/>
+          </a:lnRef>
+          <a:fillRef idx="0">
+            <a:schemeClr val="accent1"/>
+          </a:fillRef>
+          <a:effectRef idx="1">
+            <a:schemeClr val="accent1"/>
+          </a:effectRef>
+          <a:fontRef idx="minor">
+            <a:schemeClr val="tx1"/>
+          </a:fontRef>
+        </p:style>
+      </p:cxnSp>
+      <p:sp>
+        <p:nvSpPr>
+          <p:cNvPr id="8" name="TextBox 7"/>
+          <p:cNvSpPr txBox="1"/>
+          <p:nvPr/>
+        </p:nvSpPr>
+        <p:spPr>
+          <a:xfrm>
+            <a:off x="4489704" y="5559552"/>
+            <a:ext cx="329184" cy="164592"/>
+          </a:xfrm>
+          <a:prstGeom prst="rect">
+            <a:avLst/>
+          </a:prstGeom>
+          <a:noFill/>
+        </p:spPr>
+        <p:txBody>
+          <a:bodyPr wrap="square" anchor="t" lIns="0" rIns="0" tIns="0" bIns="0">
+            <a:spAutoFit/>
+          </a:bodyPr>
+          <a:lstStyle/>
+          <a:p>
+            <a:pPr algn="ctr">
+              <a:lnSpc>
+                <a:spcPct val="130000"/>
+              </a:lnSpc>
+            </a:pPr>
+            <a:r>
+              <a:rPr sz="780" b="0" lang="ja-JP">
+                <a:solidFill>
+                  <a:srgbClr val="666E70"/>
+                </a:solidFill>
+                <a:latin typeface="Yu Gothic"/>
+                <a:ea typeface="Yu Gothic"/>
+                <a:cs typeface="Yu Gothic"/>
+              </a:rPr>
+              <a:t>100</a:t>
+            </a:r>
+          </a:p>
+        </p:txBody>
+      </p:sp>
+      <p:cxnSp>
+        <p:nvCxnSpPr>
+          <p:cNvPr id="9" name="Connector 8"/>
+          <p:cNvCxnSpPr/>
+          <p:nvPr/>
+        </p:nvCxnSpPr>
+        <p:spPr>
+          <a:xfrm>
+            <a:off x="6867144" y="1783080"/>
+            <a:ext cx="0" cy="3703320"/>
+          </a:xfrm>
+          <a:prstGeom prst="line">
+            <a:avLst/>
+          </a:prstGeom>
+          <a:ln w="6985">
+            <a:solidFill>
+              <a:srgbClr val="D1CFC8"/>
+            </a:solidFill>
+          </a:ln>
+        </p:spPr>
+        <p:style>
+          <a:lnRef idx="2">
+            <a:schemeClr val="accent1"/>
+          </a:lnRef>
+          <a:fillRef idx="0">
+            <a:schemeClr val="accent1"/>
+          </a:fillRef>
+          <a:effectRef idx="1">
+            <a:schemeClr val="accent1"/>
+          </a:effectRef>
+          <a:fontRef idx="minor">
+            <a:schemeClr val="tx1"/>
+          </a:fontRef>
+        </p:style>
+      </p:cxnSp>
+      <p:sp>
+        <p:nvSpPr>
+          <p:cNvPr id="10" name="TextBox 9"/>
+          <p:cNvSpPr txBox="1"/>
+          <p:nvPr/>
+        </p:nvSpPr>
+        <p:spPr>
+          <a:xfrm>
+            <a:off x="6702552" y="5559552"/>
+            <a:ext cx="329184" cy="164592"/>
+          </a:xfrm>
+          <a:prstGeom prst="rect">
+            <a:avLst/>
+          </a:prstGeom>
+          <a:noFill/>
+        </p:spPr>
+        <p:txBody>
+          <a:bodyPr wrap="square" anchor="t" lIns="0" rIns="0" tIns="0" bIns="0">
+            <a:spAutoFit/>
+          </a:bodyPr>
+          <a:lstStyle/>
+          <a:p>
+            <a:pPr algn="ctr">
+              <a:lnSpc>
+                <a:spcPct val="130000"/>
+              </a:lnSpc>
+            </a:pPr>
+            <a:r>
+              <a:rPr sz="780" b="0" lang="ja-JP">
+                <a:solidFill>
+                  <a:srgbClr val="666E70"/>
+                </a:solidFill>
+                <a:latin typeface="Yu Gothic"/>
+                <a:ea typeface="Yu Gothic"/>
+                <a:cs typeface="Yu Gothic"/>
+              </a:rPr>
+              <a:t>200</a:t>
+            </a:r>
+          </a:p>
+        </p:txBody>
+      </p:sp>
+      <p:cxnSp>
+        <p:nvCxnSpPr>
+          <p:cNvPr id="11" name="Connector 10"/>
+          <p:cNvCxnSpPr/>
+          <p:nvPr/>
+        </p:nvCxnSpPr>
+        <p:spPr>
+          <a:xfrm>
+            <a:off x="9079992" y="1783080"/>
+            <a:ext cx="0" cy="3703320"/>
+          </a:xfrm>
+          <a:prstGeom prst="line">
+            <a:avLst/>
+          </a:prstGeom>
+          <a:ln w="6985">
+            <a:solidFill>
+              <a:srgbClr val="D1CFC8"/>
+            </a:solidFill>
+          </a:ln>
+        </p:spPr>
+        <p:style>
+          <a:lnRef idx="2">
+            <a:schemeClr val="accent1"/>
+          </a:lnRef>
+          <a:fillRef idx="0">
+            <a:schemeClr val="accent1"/>
+          </a:fillRef>
+          <a:effectRef idx="1">
+            <a:schemeClr val="accent1"/>
+          </a:effectRef>
+          <a:fontRef idx="minor">
+            <a:schemeClr val="tx1"/>
+          </a:fontRef>
+        </p:style>
+      </p:cxnSp>
+      <p:sp>
+        <p:nvSpPr>
+          <p:cNvPr id="12" name="TextBox 11"/>
+          <p:cNvSpPr txBox="1"/>
+          <p:nvPr/>
+        </p:nvSpPr>
+        <p:spPr>
+          <a:xfrm>
+            <a:off x="8915400" y="5559552"/>
+            <a:ext cx="329184" cy="164592"/>
+          </a:xfrm>
+          <a:prstGeom prst="rect">
+            <a:avLst/>
+          </a:prstGeom>
+          <a:noFill/>
+        </p:spPr>
+        <p:txBody>
+          <a:bodyPr wrap="square" anchor="t" lIns="0" rIns="0" tIns="0" bIns="0">
+            <a:spAutoFit/>
+          </a:bodyPr>
+          <a:lstStyle/>
+          <a:p>
+            <a:pPr algn="ctr">
+              <a:lnSpc>
+                <a:spcPct val="130000"/>
+              </a:lnSpc>
+            </a:pPr>
+            <a:r>
+              <a:rPr sz="780" b="0" lang="ja-JP">
+                <a:solidFill>
+                  <a:srgbClr val="666E70"/>
+                </a:solidFill>
+                <a:latin typeface="Yu Gothic"/>
+                <a:ea typeface="Yu Gothic"/>
+                <a:cs typeface="Yu Gothic"/>
+              </a:rPr>
+              <a:t>300</a:t>
+            </a:r>
+          </a:p>
+        </p:txBody>
+      </p:sp>
+      <p:cxnSp>
+        <p:nvCxnSpPr>
+          <p:cNvPr id="13" name="Connector 12"/>
+          <p:cNvCxnSpPr/>
+          <p:nvPr/>
+        </p:nvCxnSpPr>
+        <p:spPr>
+          <a:xfrm>
+            <a:off x="11292840" y="1783080"/>
+            <a:ext cx="0" cy="3703320"/>
+          </a:xfrm>
+          <a:prstGeom prst="line">
+            <a:avLst/>
+          </a:prstGeom>
+          <a:ln w="6985">
+            <a:solidFill>
+              <a:srgbClr val="D1CFC8"/>
+            </a:solidFill>
+          </a:ln>
+        </p:spPr>
+        <p:style>
+          <a:lnRef idx="2">
+            <a:schemeClr val="accent1"/>
+          </a:lnRef>
+          <a:fillRef idx="0">
+            <a:schemeClr val="accent1"/>
+          </a:fillRef>
+          <a:effectRef idx="1">
+            <a:schemeClr val="accent1"/>
+          </a:effectRef>
+          <a:fontRef idx="minor">
+            <a:schemeClr val="tx1"/>
+          </a:fontRef>
+        </p:style>
+      </p:cxnSp>
+      <p:sp>
+        <p:nvSpPr>
+          <p:cNvPr id="14" name="TextBox 13"/>
+          <p:cNvSpPr txBox="1"/>
+          <p:nvPr/>
+        </p:nvSpPr>
+        <p:spPr>
+          <a:xfrm>
+            <a:off x="11128248" y="5559552"/>
+            <a:ext cx="329184" cy="164592"/>
+          </a:xfrm>
+          <a:prstGeom prst="rect">
+            <a:avLst/>
+          </a:prstGeom>
+          <a:noFill/>
+        </p:spPr>
+        <p:txBody>
+          <a:bodyPr wrap="square" anchor="t" lIns="0" rIns="0" tIns="0" bIns="0">
+            <a:spAutoFit/>
+          </a:bodyPr>
+          <a:lstStyle/>
+          <a:p>
+            <a:pPr algn="ctr">
+              <a:lnSpc>
+                <a:spcPct val="130000"/>
+              </a:lnSpc>
+            </a:pPr>
+            <a:r>
+              <a:rPr sz="780" b="0" lang="ja-JP">
+                <a:solidFill>
+                  <a:srgbClr val="666E70"/>
+                </a:solidFill>
+                <a:latin typeface="Yu Gothic"/>
+                <a:ea typeface="Yu Gothic"/>
+                <a:cs typeface="Yu Gothic"/>
+              </a:rPr>
+              <a:t>400</a:t>
+            </a:r>
+          </a:p>
+        </p:txBody>
+      </p:sp>
+      <p:cxnSp>
+        <p:nvCxnSpPr>
+          <p:cNvPr id="15" name="Connector 14"/>
+          <p:cNvCxnSpPr/>
+          <p:nvPr/>
+        </p:nvCxnSpPr>
+        <p:spPr>
+          <a:xfrm>
+            <a:off x="2441448" y="5486400"/>
+            <a:ext cx="8851392" cy="0"/>
+          </a:xfrm>
+          <a:prstGeom prst="line">
+            <a:avLst/>
+          </a:prstGeom>
+          <a:ln w="10160">
+            <a:solidFill>
+              <a:srgbClr val="666E70"/>
+            </a:solidFill>
+          </a:ln>
+        </p:spPr>
+        <p:style>
+          <a:lnRef idx="2">
+            <a:schemeClr val="accent1"/>
+          </a:lnRef>
+          <a:fillRef idx="0">
+            <a:schemeClr val="accent1"/>
+          </a:fillRef>
+          <a:effectRef idx="1">
+            <a:schemeClr val="accent1"/>
+          </a:effectRef>
+          <a:fontRef idx="minor">
+            <a:schemeClr val="tx1"/>
+          </a:fontRef>
+        </p:style>
+      </p:cxnSp>
+      <p:sp>
+        <p:nvSpPr>
+          <p:cNvPr id="16" name="TextBox 15"/>
+          <p:cNvSpPr txBox="1"/>
+          <p:nvPr/>
+        </p:nvSpPr>
+        <p:spPr>
+          <a:xfrm>
+            <a:off x="868680" y="2108835"/>
+            <a:ext cx="1389888" cy="274320"/>
+          </a:xfrm>
+          <a:prstGeom prst="rect">
+            <a:avLst/>
+          </a:prstGeom>
+          <a:noFill/>
+        </p:spPr>
+        <p:txBody>
+          <a:bodyPr wrap="square" anchor="t" lIns="0" rIns="0" tIns="0" bIns="0">
+            <a:spAutoFit/>
+          </a:bodyPr>
+          <a:lstStyle/>
+          <a:p>
+            <a:pPr algn="r">
+              <a:lnSpc>
+                <a:spcPct val="130000"/>
+              </a:lnSpc>
+            </a:pPr>
+            <a:r>
+              <a:rPr sz="940" b="1" lang="ja-JP">
+                <a:solidFill>
+                  <a:srgbClr val="182C43"/>
+                </a:solidFill>
+                <a:latin typeface="Yu Gothic"/>
+                <a:ea typeface="Yu Gothic"/>
+                <a:cs typeface="Yu Gothic"/>
+              </a:rPr>
+              <a:t>週次報告</a:t>
+            </a:r>
+          </a:p>
+        </p:txBody>
+      </p:sp>
+      <p:sp>
+        <p:nvSpPr>
+          <p:cNvPr id="17" name="Rectangle 16"/>
+          <p:cNvSpPr/>
+          <p:nvPr/>
+        </p:nvSpPr>
+        <p:spPr>
+          <a:xfrm>
+            <a:off x="2441448" y="2026539"/>
+            <a:ext cx="995781" cy="201168"/>
+          </a:xfrm>
+          <a:prstGeom prst="rect">
+            <a:avLst/>
+          </a:prstGeom>
+          <a:solidFill>
+            <a:srgbClr val="0D7870"/>
+          </a:solidFill>
+          <a:ln>
+            <a:noFill/>
+          </a:ln>
+          <a:effectLst/>
+        </p:spPr>
+        <p:style>
+          <a:lnRef idx="1">
+            <a:schemeClr val="accent1"/>
+          </a:lnRef>
+          <a:fillRef idx="3">
+            <a:schemeClr val="accent1"/>
+          </a:fillRef>
+          <a:effectRef idx="2">
+            <a:schemeClr val="accent1"/>
+          </a:effectRef>
+          <a:fontRef idx="minor">
+            <a:schemeClr val="lt1"/>
+          </a:fontRef>
+        </p:style>
+        <p:txBody>
+          <a:bodyPr rtlCol="0" anchor="ctr"/>
+          <a:lstStyle/>
+          <a:p>
+            <a:pPr algn="ctr"/>
+          </a:p>
+        </p:txBody>
+      </p:sp>
+      <p:sp>
+        <p:nvSpPr>
+          <p:cNvPr id="18" name="TextBox 17"/>
+          <p:cNvSpPr txBox="1"/>
+          <p:nvPr/>
+        </p:nvSpPr>
+        <p:spPr>
+          <a:xfrm>
+            <a:off x="3492093" y="2008251"/>
+            <a:ext cx="512064" cy="237744"/>
+          </a:xfrm>
+          <a:prstGeom prst="rect">
+            <a:avLst/>
+          </a:prstGeom>
+          <a:noFill/>
+        </p:spPr>
+        <p:txBody>
+          <a:bodyPr wrap="square" anchor="t" lIns="0" rIns="0" tIns="0" bIns="0">
+            <a:spAutoFit/>
+          </a:bodyPr>
+          <a:lstStyle/>
+          <a:p>
+            <a:pPr algn="l">
+              <a:lnSpc>
+                <a:spcPct val="130000"/>
+              </a:lnSpc>
+            </a:pPr>
+            <a:r>
+              <a:rPr sz="760" b="0" lang="ja-JP">
+                <a:solidFill>
+                  <a:srgbClr val="666E70"/>
+                </a:solidFill>
+                <a:latin typeface="Yu Gothic"/>
+                <a:ea typeface="Yu Gothic"/>
+                <a:cs typeface="Yu Gothic"/>
+              </a:rPr>
+              <a:t>45</a:t>
+            </a:r>
+          </a:p>
+        </p:txBody>
+      </p:sp>
+      <p:sp>
+        <p:nvSpPr>
+          <p:cNvPr id="19" name="Rectangle 18"/>
+          <p:cNvSpPr/>
+          <p:nvPr/>
+        </p:nvSpPr>
+        <p:spPr>
+          <a:xfrm>
+            <a:off x="2441448" y="2264283"/>
+            <a:ext cx="287670" cy="201168"/>
+          </a:xfrm>
+          <a:prstGeom prst="rect">
+            <a:avLst/>
+          </a:prstGeom>
+          <a:solidFill>
+            <a:srgbClr val="182C43"/>
+          </a:solidFill>
+          <a:ln>
+            <a:noFill/>
+          </a:ln>
+          <a:effectLst/>
+        </p:spPr>
+        <p:style>
+          <a:lnRef idx="1">
+            <a:schemeClr val="accent1"/>
+          </a:lnRef>
+          <a:fillRef idx="3">
+            <a:schemeClr val="accent1"/>
+          </a:fillRef>
+          <a:effectRef idx="2">
+            <a:schemeClr val="accent1"/>
+          </a:effectRef>
+          <a:fontRef idx="minor">
+            <a:schemeClr val="lt1"/>
+          </a:fontRef>
+        </p:style>
+        <p:txBody>
+          <a:bodyPr rtlCol="0" anchor="ctr"/>
+          <a:lstStyle/>
+          <a:p>
+            <a:pPr algn="ctr"/>
+          </a:p>
+        </p:txBody>
+      </p:sp>
+      <p:sp>
+        <p:nvSpPr>
+          <p:cNvPr id="20" name="TextBox 19"/>
+          <p:cNvSpPr txBox="1"/>
+          <p:nvPr/>
+        </p:nvSpPr>
+        <p:spPr>
+          <a:xfrm>
+            <a:off x="2783982" y="2245995"/>
+            <a:ext cx="512064" cy="237744"/>
+          </a:xfrm>
+          <a:prstGeom prst="rect">
+            <a:avLst/>
+          </a:prstGeom>
+          <a:noFill/>
+        </p:spPr>
+        <p:txBody>
+          <a:bodyPr wrap="square" anchor="t" lIns="0" rIns="0" tIns="0" bIns="0">
+            <a:spAutoFit/>
+          </a:bodyPr>
+          <a:lstStyle/>
+          <a:p>
+            <a:pPr algn="l">
+              <a:lnSpc>
+                <a:spcPct val="130000"/>
+              </a:lnSpc>
+            </a:pPr>
+            <a:r>
+              <a:rPr sz="760" b="0" lang="ja-JP">
+                <a:solidFill>
+                  <a:srgbClr val="666E70"/>
+                </a:solidFill>
+                <a:latin typeface="Yu Gothic"/>
+                <a:ea typeface="Yu Gothic"/>
+                <a:cs typeface="Yu Gothic"/>
+              </a:rPr>
+              <a:t>13</a:t>
+            </a:r>
+          </a:p>
+        </p:txBody>
+      </p:sp>
+      <p:sp>
+        <p:nvSpPr>
+          <p:cNvPr id="21" name="TextBox 20"/>
+          <p:cNvSpPr txBox="1"/>
+          <p:nvPr/>
+        </p:nvSpPr>
+        <p:spPr>
+          <a:xfrm>
+            <a:off x="868680" y="3034665"/>
+            <a:ext cx="1389888" cy="274320"/>
+          </a:xfrm>
+          <a:prstGeom prst="rect">
+            <a:avLst/>
+          </a:prstGeom>
+          <a:noFill/>
+        </p:spPr>
+        <p:txBody>
+          <a:bodyPr wrap="square" anchor="t" lIns="0" rIns="0" tIns="0" bIns="0">
+            <a:spAutoFit/>
+          </a:bodyPr>
+          <a:lstStyle/>
+          <a:p>
+            <a:pPr algn="r">
+              <a:lnSpc>
+                <a:spcPct val="130000"/>
+              </a:lnSpc>
+            </a:pPr>
+            <a:r>
+              <a:rPr sz="940" b="1" lang="ja-JP">
+                <a:solidFill>
+                  <a:srgbClr val="182C43"/>
+                </a:solidFill>
+                <a:latin typeface="Yu Gothic"/>
+                <a:ea typeface="Yu Gothic"/>
+                <a:cs typeface="Yu Gothic"/>
+              </a:rPr>
+              <a:t>月次レビュー</a:t>
+            </a:r>
+          </a:p>
+        </p:txBody>
+      </p:sp>
+      <p:sp>
+        <p:nvSpPr>
+          <p:cNvPr id="22" name="Rectangle 21"/>
+          <p:cNvSpPr/>
+          <p:nvPr/>
+        </p:nvSpPr>
+        <p:spPr>
+          <a:xfrm>
+            <a:off x="2441448" y="2952369"/>
+            <a:ext cx="2655417" cy="201168"/>
+          </a:xfrm>
+          <a:prstGeom prst="rect">
+            <a:avLst/>
+          </a:prstGeom>
+          <a:solidFill>
+            <a:srgbClr val="0D7870"/>
+          </a:solidFill>
+          <a:ln>
+            <a:noFill/>
+          </a:ln>
+          <a:effectLst/>
+        </p:spPr>
+        <p:style>
+          <a:lnRef idx="1">
+            <a:schemeClr val="accent1"/>
+          </a:lnRef>
+          <a:fillRef idx="3">
+            <a:schemeClr val="accent1"/>
+          </a:fillRef>
+          <a:effectRef idx="2">
+            <a:schemeClr val="accent1"/>
+          </a:effectRef>
+          <a:fontRef idx="minor">
+            <a:schemeClr val="lt1"/>
+          </a:fontRef>
+        </p:style>
+        <p:txBody>
+          <a:bodyPr rtlCol="0" anchor="ctr"/>
+          <a:lstStyle/>
+          <a:p>
+            <a:pPr algn="ctr"/>
+          </a:p>
+        </p:txBody>
+      </p:sp>
+      <p:sp>
+        <p:nvSpPr>
+          <p:cNvPr id="23" name="TextBox 22"/>
+          <p:cNvSpPr txBox="1"/>
+          <p:nvPr/>
+        </p:nvSpPr>
+        <p:spPr>
+          <a:xfrm>
+            <a:off x="5151729" y="2934081"/>
+            <a:ext cx="512064" cy="237744"/>
+          </a:xfrm>
+          <a:prstGeom prst="rect">
+            <a:avLst/>
+          </a:prstGeom>
+          <a:noFill/>
+        </p:spPr>
+        <p:txBody>
+          <a:bodyPr wrap="square" anchor="t" lIns="0" rIns="0" tIns="0" bIns="0">
+            <a:spAutoFit/>
+          </a:bodyPr>
+          <a:lstStyle/>
+          <a:p>
+            <a:pPr algn="l">
+              <a:lnSpc>
+                <a:spcPct val="130000"/>
+              </a:lnSpc>
+            </a:pPr>
+            <a:r>
+              <a:rPr sz="760" b="0" lang="ja-JP">
+                <a:solidFill>
+                  <a:srgbClr val="666E70"/>
+                </a:solidFill>
+                <a:latin typeface="Yu Gothic"/>
+                <a:ea typeface="Yu Gothic"/>
+                <a:cs typeface="Yu Gothic"/>
+              </a:rPr>
+              <a:t>120</a:t>
+            </a:r>
+          </a:p>
+        </p:txBody>
+      </p:sp>
+      <p:sp>
+        <p:nvSpPr>
+          <p:cNvPr id="24" name="Rectangle 23"/>
+          <p:cNvSpPr/>
+          <p:nvPr/>
+        </p:nvSpPr>
+        <p:spPr>
+          <a:xfrm>
+            <a:off x="2441448" y="3190113"/>
+            <a:ext cx="929396" cy="201168"/>
+          </a:xfrm>
+          <a:prstGeom prst="rect">
+            <a:avLst/>
+          </a:prstGeom>
+          <a:solidFill>
+            <a:srgbClr val="182C43"/>
+          </a:solidFill>
+          <a:ln>
+            <a:noFill/>
+          </a:ln>
+          <a:effectLst/>
+        </p:spPr>
+        <p:style>
+          <a:lnRef idx="1">
+            <a:schemeClr val="accent1"/>
+          </a:lnRef>
+          <a:fillRef idx="3">
+            <a:schemeClr val="accent1"/>
+          </a:fillRef>
+          <a:effectRef idx="2">
+            <a:schemeClr val="accent1"/>
+          </a:effectRef>
+          <a:fontRef idx="minor">
+            <a:schemeClr val="lt1"/>
+          </a:fontRef>
+        </p:style>
+        <p:txBody>
+          <a:bodyPr rtlCol="0" anchor="ctr"/>
+          <a:lstStyle/>
+          <a:p>
+            <a:pPr algn="ctr"/>
+          </a:p>
+        </p:txBody>
+      </p:sp>
+      <p:sp>
+        <p:nvSpPr>
+          <p:cNvPr id="25" name="TextBox 24"/>
+          <p:cNvSpPr txBox="1"/>
+          <p:nvPr/>
+        </p:nvSpPr>
+        <p:spPr>
+          <a:xfrm>
+            <a:off x="3425708" y="3171825"/>
+            <a:ext cx="512064" cy="237744"/>
+          </a:xfrm>
+          <a:prstGeom prst="rect">
+            <a:avLst/>
+          </a:prstGeom>
+          <a:noFill/>
+        </p:spPr>
+        <p:txBody>
+          <a:bodyPr wrap="square" anchor="t" lIns="0" rIns="0" tIns="0" bIns="0">
+            <a:spAutoFit/>
+          </a:bodyPr>
+          <a:lstStyle/>
+          <a:p>
+            <a:pPr algn="l">
+              <a:lnSpc>
+                <a:spcPct val="130000"/>
+              </a:lnSpc>
+            </a:pPr>
+            <a:r>
+              <a:rPr sz="760" b="0" lang="ja-JP">
+                <a:solidFill>
+                  <a:srgbClr val="666E70"/>
+                </a:solidFill>
+                <a:latin typeface="Yu Gothic"/>
+                <a:ea typeface="Yu Gothic"/>
+                <a:cs typeface="Yu Gothic"/>
+              </a:rPr>
+              <a:t>42</a:t>
+            </a:r>
+          </a:p>
+        </p:txBody>
+      </p:sp>
+      <p:sp>
+        <p:nvSpPr>
+          <p:cNvPr id="26" name="TextBox 25"/>
+          <p:cNvSpPr txBox="1"/>
+          <p:nvPr/>
+        </p:nvSpPr>
+        <p:spPr>
+          <a:xfrm>
+            <a:off x="868680" y="3960495"/>
+            <a:ext cx="1389888" cy="274320"/>
+          </a:xfrm>
+          <a:prstGeom prst="rect">
+            <a:avLst/>
+          </a:prstGeom>
+          <a:noFill/>
+        </p:spPr>
+        <p:txBody>
+          <a:bodyPr wrap="square" anchor="t" lIns="0" rIns="0" tIns="0" bIns="0">
+            <a:spAutoFit/>
+          </a:bodyPr>
+          <a:lstStyle/>
+          <a:p>
+            <a:pPr algn="r">
+              <a:lnSpc>
+                <a:spcPct val="130000"/>
+              </a:lnSpc>
+            </a:pPr>
+            <a:r>
+              <a:rPr sz="940" b="1" lang="ja-JP">
+                <a:solidFill>
+                  <a:srgbClr val="182C43"/>
+                </a:solidFill>
+                <a:latin typeface="Yu Gothic"/>
+                <a:ea typeface="Yu Gothic"/>
+                <a:cs typeface="Yu Gothic"/>
+              </a:rPr>
+              <a:t>調査サマリ</a:t>
+            </a:r>
+          </a:p>
+        </p:txBody>
+      </p:sp>
+      <p:sp>
+        <p:nvSpPr>
+          <p:cNvPr id="27" name="Rectangle 26"/>
+          <p:cNvSpPr/>
+          <p:nvPr/>
+        </p:nvSpPr>
+        <p:spPr>
+          <a:xfrm>
+            <a:off x="2441448" y="3878199"/>
+            <a:ext cx="5310835" cy="201168"/>
+          </a:xfrm>
+          <a:prstGeom prst="rect">
+            <a:avLst/>
+          </a:prstGeom>
+          <a:solidFill>
+            <a:srgbClr val="0D7870"/>
+          </a:solidFill>
+          <a:ln>
+            <a:noFill/>
+          </a:ln>
+          <a:effectLst/>
+        </p:spPr>
+        <p:style>
+          <a:lnRef idx="1">
+            <a:schemeClr val="accent1"/>
+          </a:lnRef>
+          <a:fillRef idx="3">
+            <a:schemeClr val="accent1"/>
+          </a:fillRef>
+          <a:effectRef idx="2">
+            <a:schemeClr val="accent1"/>
+          </a:effectRef>
+          <a:fontRef idx="minor">
+            <a:schemeClr val="lt1"/>
+          </a:fontRef>
+        </p:style>
+        <p:txBody>
+          <a:bodyPr rtlCol="0" anchor="ctr"/>
+          <a:lstStyle/>
+          <a:p>
+            <a:pPr algn="ctr"/>
+          </a:p>
+        </p:txBody>
+      </p:sp>
+      <p:sp>
+        <p:nvSpPr>
+          <p:cNvPr id="28" name="TextBox 27"/>
+          <p:cNvSpPr txBox="1"/>
+          <p:nvPr/>
+        </p:nvSpPr>
+        <p:spPr>
+          <a:xfrm>
+            <a:off x="7807147" y="3859911"/>
+            <a:ext cx="512064" cy="237744"/>
+          </a:xfrm>
+          <a:prstGeom prst="rect">
+            <a:avLst/>
+          </a:prstGeom>
+          <a:noFill/>
+        </p:spPr>
+        <p:txBody>
+          <a:bodyPr wrap="square" anchor="t" lIns="0" rIns="0" tIns="0" bIns="0">
+            <a:spAutoFit/>
+          </a:bodyPr>
+          <a:lstStyle/>
+          <a:p>
+            <a:pPr algn="l">
+              <a:lnSpc>
+                <a:spcPct val="130000"/>
+              </a:lnSpc>
+            </a:pPr>
+            <a:r>
+              <a:rPr sz="760" b="0" lang="ja-JP">
+                <a:solidFill>
+                  <a:srgbClr val="666E70"/>
+                </a:solidFill>
+                <a:latin typeface="Yu Gothic"/>
+                <a:ea typeface="Yu Gothic"/>
+                <a:cs typeface="Yu Gothic"/>
+              </a:rPr>
+              <a:t>240</a:t>
+            </a:r>
+          </a:p>
+        </p:txBody>
+      </p:sp>
+      <p:sp>
+        <p:nvSpPr>
+          <p:cNvPr id="29" name="Rectangle 28"/>
+          <p:cNvSpPr/>
+          <p:nvPr/>
+        </p:nvSpPr>
+        <p:spPr>
+          <a:xfrm>
+            <a:off x="2441448" y="4115943"/>
+            <a:ext cx="1880920" cy="201168"/>
+          </a:xfrm>
+          <a:prstGeom prst="rect">
+            <a:avLst/>
+          </a:prstGeom>
+          <a:solidFill>
+            <a:srgbClr val="182C43"/>
+          </a:solidFill>
+          <a:ln>
+            <a:noFill/>
+          </a:ln>
+          <a:effectLst/>
+        </p:spPr>
+        <p:style>
+          <a:lnRef idx="1">
+            <a:schemeClr val="accent1"/>
+          </a:lnRef>
+          <a:fillRef idx="3">
+            <a:schemeClr val="accent1"/>
+          </a:fillRef>
+          <a:effectRef idx="2">
+            <a:schemeClr val="accent1"/>
+          </a:effectRef>
+          <a:fontRef idx="minor">
+            <a:schemeClr val="lt1"/>
+          </a:fontRef>
+        </p:style>
+        <p:txBody>
+          <a:bodyPr rtlCol="0" anchor="ctr"/>
+          <a:lstStyle/>
+          <a:p>
+            <a:pPr algn="ctr"/>
+          </a:p>
+        </p:txBody>
+      </p:sp>
+      <p:sp>
+        <p:nvSpPr>
+          <p:cNvPr id="30" name="TextBox 29"/>
+          <p:cNvSpPr txBox="1"/>
+          <p:nvPr/>
+        </p:nvSpPr>
+        <p:spPr>
+          <a:xfrm>
+            <a:off x="4377232" y="4097655"/>
+            <a:ext cx="512064" cy="237744"/>
+          </a:xfrm>
+          <a:prstGeom prst="rect">
+            <a:avLst/>
+          </a:prstGeom>
+          <a:noFill/>
+        </p:spPr>
+        <p:txBody>
+          <a:bodyPr wrap="square" anchor="t" lIns="0" rIns="0" tIns="0" bIns="0">
+            <a:spAutoFit/>
+          </a:bodyPr>
+          <a:lstStyle/>
+          <a:p>
+            <a:pPr algn="l">
+              <a:lnSpc>
+                <a:spcPct val="130000"/>
+              </a:lnSpc>
+            </a:pPr>
+            <a:r>
+              <a:rPr sz="760" b="0" lang="ja-JP">
+                <a:solidFill>
+                  <a:srgbClr val="666E70"/>
+                </a:solidFill>
+                <a:latin typeface="Yu Gothic"/>
+                <a:ea typeface="Yu Gothic"/>
+                <a:cs typeface="Yu Gothic"/>
+              </a:rPr>
+              <a:t>85</a:t>
+            </a:r>
+          </a:p>
+        </p:txBody>
+      </p:sp>
+      <p:sp>
+        <p:nvSpPr>
+          <p:cNvPr id="31" name="TextBox 30"/>
+          <p:cNvSpPr txBox="1"/>
+          <p:nvPr/>
+        </p:nvSpPr>
+        <p:spPr>
+          <a:xfrm>
+            <a:off x="868680" y="4886324"/>
+            <a:ext cx="1389888" cy="274320"/>
+          </a:xfrm>
+          <a:prstGeom prst="rect">
+            <a:avLst/>
+          </a:prstGeom>
+          <a:noFill/>
+        </p:spPr>
+        <p:txBody>
+          <a:bodyPr wrap="square" anchor="t" lIns="0" rIns="0" tIns="0" bIns="0">
+            <a:spAutoFit/>
+          </a:bodyPr>
+          <a:lstStyle/>
+          <a:p>
+            <a:pPr algn="r">
+              <a:lnSpc>
+                <a:spcPct val="130000"/>
+              </a:lnSpc>
+            </a:pPr>
+            <a:r>
+              <a:rPr sz="940" b="1" lang="ja-JP">
+                <a:solidFill>
+                  <a:srgbClr val="182C43"/>
+                </a:solidFill>
+                <a:latin typeface="Yu Gothic"/>
+                <a:ea typeface="Yu Gothic"/>
+                <a:cs typeface="Yu Gothic"/>
+              </a:rPr>
+              <a:t>役員向け抜粋</a:t>
+            </a:r>
+          </a:p>
+        </p:txBody>
+      </p:sp>
+      <p:sp>
+        <p:nvSpPr>
+          <p:cNvPr id="32" name="Rectangle 31"/>
+          <p:cNvSpPr/>
+          <p:nvPr/>
+        </p:nvSpPr>
+        <p:spPr>
+          <a:xfrm>
+            <a:off x="2441448" y="4804028"/>
+            <a:ext cx="1991563" cy="201168"/>
+          </a:xfrm>
+          <a:prstGeom prst="rect">
+            <a:avLst/>
+          </a:prstGeom>
+          <a:solidFill>
+            <a:srgbClr val="0D7870"/>
+          </a:solidFill>
+          <a:ln>
+            <a:noFill/>
+          </a:ln>
+          <a:effectLst/>
+        </p:spPr>
+        <p:style>
+          <a:lnRef idx="1">
+            <a:schemeClr val="accent1"/>
+          </a:lnRef>
+          <a:fillRef idx="3">
+            <a:schemeClr val="accent1"/>
+          </a:fillRef>
+          <a:effectRef idx="2">
+            <a:schemeClr val="accent1"/>
+          </a:effectRef>
+          <a:fontRef idx="minor">
+            <a:schemeClr val="lt1"/>
+          </a:fontRef>
+        </p:style>
+        <p:txBody>
+          <a:bodyPr rtlCol="0" anchor="ctr"/>
+          <a:lstStyle/>
+          <a:p>
+            <a:pPr algn="ctr"/>
+          </a:p>
+        </p:txBody>
+      </p:sp>
+      <p:sp>
+        <p:nvSpPr>
+          <p:cNvPr id="33" name="TextBox 32"/>
+          <p:cNvSpPr txBox="1"/>
+          <p:nvPr/>
+        </p:nvSpPr>
+        <p:spPr>
+          <a:xfrm>
+            <a:off x="4487875" y="4785741"/>
+            <a:ext cx="512064" cy="237744"/>
+          </a:xfrm>
+          <a:prstGeom prst="rect">
+            <a:avLst/>
+          </a:prstGeom>
+          <a:noFill/>
+        </p:spPr>
+        <p:txBody>
+          <a:bodyPr wrap="square" anchor="t" lIns="0" rIns="0" tIns="0" bIns="0">
+            <a:spAutoFit/>
+          </a:bodyPr>
+          <a:lstStyle/>
+          <a:p>
+            <a:pPr algn="l">
+              <a:lnSpc>
+                <a:spcPct val="130000"/>
+              </a:lnSpc>
+            </a:pPr>
+            <a:r>
+              <a:rPr sz="760" b="0" lang="ja-JP">
+                <a:solidFill>
+                  <a:srgbClr val="666E70"/>
+                </a:solidFill>
+                <a:latin typeface="Yu Gothic"/>
+                <a:ea typeface="Yu Gothic"/>
+                <a:cs typeface="Yu Gothic"/>
+              </a:rPr>
+              <a:t>90</a:t>
+            </a:r>
+          </a:p>
+        </p:txBody>
+      </p:sp>
+      <p:sp>
+        <p:nvSpPr>
+          <p:cNvPr id="34" name="Rectangle 33"/>
+          <p:cNvSpPr/>
+          <p:nvPr/>
+        </p:nvSpPr>
+        <p:spPr>
+          <a:xfrm>
+            <a:off x="2441448" y="5041772"/>
+            <a:ext cx="619597" cy="201168"/>
+          </a:xfrm>
+          <a:prstGeom prst="rect">
+            <a:avLst/>
+          </a:prstGeom>
+          <a:solidFill>
+            <a:srgbClr val="182C43"/>
+          </a:solidFill>
+          <a:ln>
+            <a:noFill/>
+          </a:ln>
+          <a:effectLst/>
+        </p:spPr>
+        <p:style>
+          <a:lnRef idx="1">
+            <a:schemeClr val="accent1"/>
+          </a:lnRef>
+          <a:fillRef idx="3">
+            <a:schemeClr val="accent1"/>
+          </a:fillRef>
+          <a:effectRef idx="2">
+            <a:schemeClr val="accent1"/>
+          </a:effectRef>
+          <a:fontRef idx="minor">
+            <a:schemeClr val="lt1"/>
+          </a:fontRef>
+        </p:style>
+        <p:txBody>
+          <a:bodyPr rtlCol="0" anchor="ctr"/>
+          <a:lstStyle/>
+          <a:p>
+            <a:pPr algn="ctr"/>
+          </a:p>
+        </p:txBody>
+      </p:sp>
+      <p:sp>
+        <p:nvSpPr>
+          <p:cNvPr id="35" name="TextBox 34"/>
+          <p:cNvSpPr txBox="1"/>
+          <p:nvPr/>
+        </p:nvSpPr>
+        <p:spPr>
+          <a:xfrm>
+            <a:off x="3115909" y="5023484"/>
+            <a:ext cx="512064" cy="237744"/>
+          </a:xfrm>
+          <a:prstGeom prst="rect">
+            <a:avLst/>
+          </a:prstGeom>
+          <a:noFill/>
+        </p:spPr>
+        <p:txBody>
+          <a:bodyPr wrap="square" anchor="t" lIns="0" rIns="0" tIns="0" bIns="0">
+            <a:spAutoFit/>
+          </a:bodyPr>
+          <a:lstStyle/>
+          <a:p>
+            <a:pPr algn="l">
+              <a:lnSpc>
+                <a:spcPct val="130000"/>
+              </a:lnSpc>
+            </a:pPr>
+            <a:r>
+              <a:rPr sz="760" b="0" lang="ja-JP">
+                <a:solidFill>
+                  <a:srgbClr val="666E70"/>
+                </a:solidFill>
+                <a:latin typeface="Yu Gothic"/>
+                <a:ea typeface="Yu Gothic"/>
+                <a:cs typeface="Yu Gothic"/>
+              </a:rPr>
+              <a:t>28</a:t>
+            </a:r>
+          </a:p>
+        </p:txBody>
+      </p:sp>
+      <p:sp>
+        <p:nvSpPr>
+          <p:cNvPr id="36" name="Rectangle 35"/>
+          <p:cNvSpPr/>
+          <p:nvPr/>
+        </p:nvSpPr>
+        <p:spPr>
+          <a:xfrm>
+            <a:off x="1435607" y="5788152"/>
+            <a:ext cx="109728" cy="109728"/>
+          </a:xfrm>
+          <a:prstGeom prst="rect">
+            <a:avLst/>
+          </a:prstGeom>
+          <a:solidFill>
+            <a:srgbClr val="0D7870"/>
+          </a:solidFill>
+          <a:ln>
+            <a:noFill/>
+          </a:ln>
+          <a:effectLst/>
+        </p:spPr>
+        <p:style>
+          <a:lnRef idx="1">
+            <a:schemeClr val="accent1"/>
+          </a:lnRef>
+          <a:fillRef idx="3">
+            <a:schemeClr val="accent1"/>
+          </a:fillRef>
+          <a:effectRef idx="2">
+            <a:schemeClr val="accent1"/>
+          </a:effectRef>
+          <a:fontRef idx="minor">
+            <a:schemeClr val="lt1"/>
+          </a:fontRef>
+        </p:style>
+        <p:txBody>
+          <a:bodyPr rtlCol="0" anchor="ctr"/>
+          <a:lstStyle/>
+          <a:p>
+            <a:pPr algn="ctr"/>
+          </a:p>
+        </p:txBody>
+      </p:sp>
+      <p:sp>
+        <p:nvSpPr>
+          <p:cNvPr id="37" name="TextBox 36"/>
+          <p:cNvSpPr txBox="1"/>
+          <p:nvPr/>
+        </p:nvSpPr>
+        <p:spPr>
+          <a:xfrm>
+            <a:off x="1600199" y="5724144"/>
+            <a:ext cx="1572768" cy="237744"/>
+          </a:xfrm>
+          <a:prstGeom prst="rect">
+            <a:avLst/>
+          </a:prstGeom>
+          <a:noFill/>
+        </p:spPr>
+        <p:txBody>
+          <a:bodyPr wrap="square" anchor="t" lIns="0" rIns="0" tIns="0" bIns="0">
+            <a:spAutoFit/>
+          </a:bodyPr>
+          <a:lstStyle/>
+          <a:p>
+            <a:pPr algn="l">
+              <a:lnSpc>
+                <a:spcPct val="130000"/>
+              </a:lnSpc>
+            </a:pPr>
+            <a:r>
+              <a:rPr sz="819" b="0" lang="ja-JP">
+                <a:solidFill>
+                  <a:srgbClr val="666E70"/>
+                </a:solidFill>
+                <a:latin typeface="Yu Gothic"/>
+                <a:ea typeface="Yu Gothic"/>
+                <a:cs typeface="Yu Gothic"/>
+              </a:rPr>
+              <a:t>従来 (分)</a:t>
+            </a:r>
+          </a:p>
+        </p:txBody>
+      </p:sp>
+      <p:sp>
+        <p:nvSpPr>
+          <p:cNvPr id="38" name="Rectangle 37"/>
+          <p:cNvSpPr/>
+          <p:nvPr/>
+        </p:nvSpPr>
+        <p:spPr>
+          <a:xfrm>
+            <a:off x="3310127" y="5788152"/>
+            <a:ext cx="109728" cy="109728"/>
+          </a:xfrm>
+          <a:prstGeom prst="rect">
+            <a:avLst/>
+          </a:prstGeom>
+          <a:solidFill>
+            <a:srgbClr val="182C43"/>
+          </a:solidFill>
+          <a:ln>
+            <a:noFill/>
+          </a:ln>
+          <a:effectLst/>
+        </p:spPr>
+        <p:style>
+          <a:lnRef idx="1">
+            <a:schemeClr val="accent1"/>
+          </a:lnRef>
+          <a:fillRef idx="3">
+            <a:schemeClr val="accent1"/>
+          </a:fillRef>
+          <a:effectRef idx="2">
+            <a:schemeClr val="accent1"/>
+          </a:effectRef>
+          <a:fontRef idx="minor">
+            <a:schemeClr val="lt1"/>
+          </a:fontRef>
+        </p:style>
+        <p:txBody>
+          <a:bodyPr rtlCol="0" anchor="ctr"/>
+          <a:lstStyle/>
+          <a:p>
+            <a:pPr algn="ctr"/>
+          </a:p>
+        </p:txBody>
+      </p:sp>
+      <p:sp>
+        <p:nvSpPr>
+          <p:cNvPr id="39" name="TextBox 38"/>
+          <p:cNvSpPr txBox="1"/>
+          <p:nvPr/>
+        </p:nvSpPr>
+        <p:spPr>
+          <a:xfrm>
+            <a:off x="3474720" y="5724144"/>
+            <a:ext cx="1572768" cy="237744"/>
+          </a:xfrm>
+          <a:prstGeom prst="rect">
+            <a:avLst/>
+          </a:prstGeom>
+          <a:noFill/>
+        </p:spPr>
+        <p:txBody>
+          <a:bodyPr wrap="square" anchor="t" lIns="0" rIns="0" tIns="0" bIns="0">
+            <a:spAutoFit/>
+          </a:bodyPr>
+          <a:lstStyle/>
+          <a:p>
+            <a:pPr algn="l">
+              <a:lnSpc>
+                <a:spcPct val="130000"/>
+              </a:lnSpc>
+            </a:pPr>
+            <a:r>
+              <a:rPr sz="819" b="0" lang="ja-JP">
+                <a:solidFill>
+                  <a:srgbClr val="666E70"/>
+                </a:solidFill>
+                <a:latin typeface="Yu Gothic"/>
+                <a:ea typeface="Yu Gothic"/>
+                <a:cs typeface="Yu Gothic"/>
+              </a:rPr>
+              <a:t>生成後 (分)</a:t>
+            </a:r>
+          </a:p>
+        </p:txBody>
+      </p:sp>
+      <p:sp>
+        <p:nvSpPr>
+          <p:cNvPr id="40" name="TextBox 39"/>
           <p:cNvSpPr txBox="1"/>
           <p:nvPr/>
         </p:nvSpPr>
@@ -53708,7 +57870,7 @@
       </p:sp>
       <p:sp>
         <p:nvSpPr>
-          <p:cNvPr id="7" name="Rectangle 6"/>
+          <p:cNvPr id="41" name="Rectangle 40"/>
           <p:cNvSpPr/>
           <p:nvPr/>
         </p:nvSpPr>
@@ -53752,7 +57914,7 @@
       </p:sp>
       <p:sp>
         <p:nvSpPr>
-          <p:cNvPr id="8" name="TextBox 7"/>
+          <p:cNvPr id="42" name="TextBox 41"/>
           <p:cNvSpPr txBox="1"/>
           <p:nvPr/>
         </p:nvSpPr>
@@ -53793,7 +57955,7 @@
       </p:sp>
       <p:sp>
         <p:nvSpPr>
-          <p:cNvPr id="9" name="TextBox 8"/>
+          <p:cNvPr id="43" name="TextBox 42"/>
           <p:cNvSpPr txBox="1"/>
           <p:nvPr/>
         </p:nvSpPr>
